--- a/slides/1_Introduction.pptx
+++ b/slides/1_Introduction.pptx
@@ -267,7 +267,7 @@
           <a:p>
             <a:fld id="{2F3ABF1A-8818-4472-8518-E71DC7B5D2F7}" type="datetimeFigureOut">
               <a:rPr lang="en-US" smtClean="0"/>
-              <a:t>9/3/2025</a:t>
+              <a:t>5/3/2026</a:t>
             </a:fld>
             <a:endParaRPr lang="en-US"/>
           </a:p>
@@ -1287,7 +1287,7 @@
           <a:p>
             <a:fld id="{6E4A31BF-7266-4BEB-918B-ADC21C630A6F}" type="datetimeFigureOut">
               <a:rPr lang="en-US" smtClean="0"/>
-              <a:t>9/3/2025</a:t>
+              <a:t>5/3/2026</a:t>
             </a:fld>
             <a:endParaRPr lang="en-US"/>
           </a:p>
@@ -1485,7 +1485,7 @@
           <a:p>
             <a:fld id="{6E4A31BF-7266-4BEB-918B-ADC21C630A6F}" type="datetimeFigureOut">
               <a:rPr lang="en-US" smtClean="0"/>
-              <a:t>9/3/2025</a:t>
+              <a:t>5/3/2026</a:t>
             </a:fld>
             <a:endParaRPr lang="en-US"/>
           </a:p>
@@ -1693,7 +1693,7 @@
           <a:p>
             <a:fld id="{6E4A31BF-7266-4BEB-918B-ADC21C630A6F}" type="datetimeFigureOut">
               <a:rPr lang="en-US" smtClean="0"/>
-              <a:t>9/3/2025</a:t>
+              <a:t>5/3/2026</a:t>
             </a:fld>
             <a:endParaRPr lang="en-US"/>
           </a:p>
@@ -1891,7 +1891,7 @@
           <a:p>
             <a:fld id="{6E4A31BF-7266-4BEB-918B-ADC21C630A6F}" type="datetimeFigureOut">
               <a:rPr lang="en-US" smtClean="0"/>
-              <a:t>9/3/2025</a:t>
+              <a:t>5/3/2026</a:t>
             </a:fld>
             <a:endParaRPr lang="en-US"/>
           </a:p>
@@ -2166,7 +2166,7 @@
           <a:p>
             <a:fld id="{6E4A31BF-7266-4BEB-918B-ADC21C630A6F}" type="datetimeFigureOut">
               <a:rPr lang="en-US" smtClean="0"/>
-              <a:t>9/3/2025</a:t>
+              <a:t>5/3/2026</a:t>
             </a:fld>
             <a:endParaRPr lang="en-US"/>
           </a:p>
@@ -2431,7 +2431,7 @@
           <a:p>
             <a:fld id="{6E4A31BF-7266-4BEB-918B-ADC21C630A6F}" type="datetimeFigureOut">
               <a:rPr lang="en-US" smtClean="0"/>
-              <a:t>9/3/2025</a:t>
+              <a:t>5/3/2026</a:t>
             </a:fld>
             <a:endParaRPr lang="en-US"/>
           </a:p>
@@ -2843,7 +2843,7 @@
           <a:p>
             <a:fld id="{6E4A31BF-7266-4BEB-918B-ADC21C630A6F}" type="datetimeFigureOut">
               <a:rPr lang="en-US" smtClean="0"/>
-              <a:t>9/3/2025</a:t>
+              <a:t>5/3/2026</a:t>
             </a:fld>
             <a:endParaRPr lang="en-US"/>
           </a:p>
@@ -2984,7 +2984,7 @@
           <a:p>
             <a:fld id="{6E4A31BF-7266-4BEB-918B-ADC21C630A6F}" type="datetimeFigureOut">
               <a:rPr lang="en-US" smtClean="0"/>
-              <a:t>9/3/2025</a:t>
+              <a:t>5/3/2026</a:t>
             </a:fld>
             <a:endParaRPr lang="en-US"/>
           </a:p>
@@ -3097,7 +3097,7 @@
           <a:p>
             <a:fld id="{6E4A31BF-7266-4BEB-918B-ADC21C630A6F}" type="datetimeFigureOut">
               <a:rPr lang="en-US" smtClean="0"/>
-              <a:t>9/3/2025</a:t>
+              <a:t>5/3/2026</a:t>
             </a:fld>
             <a:endParaRPr lang="en-US"/>
           </a:p>
@@ -3408,7 +3408,7 @@
           <a:p>
             <a:fld id="{6E4A31BF-7266-4BEB-918B-ADC21C630A6F}" type="datetimeFigureOut">
               <a:rPr lang="en-US" smtClean="0"/>
-              <a:t>9/3/2025</a:t>
+              <a:t>5/3/2026</a:t>
             </a:fld>
             <a:endParaRPr lang="en-US"/>
           </a:p>
@@ -3696,7 +3696,7 @@
           <a:p>
             <a:fld id="{6E4A31BF-7266-4BEB-918B-ADC21C630A6F}" type="datetimeFigureOut">
               <a:rPr lang="en-US" smtClean="0"/>
-              <a:t>9/3/2025</a:t>
+              <a:t>5/3/2026</a:t>
             </a:fld>
             <a:endParaRPr lang="en-US"/>
           </a:p>
@@ -3937,7 +3937,7 @@
           <a:p>
             <a:fld id="{6E4A31BF-7266-4BEB-918B-ADC21C630A6F}" type="datetimeFigureOut">
               <a:rPr lang="en-US" smtClean="0"/>
-              <a:t>9/3/2025</a:t>
+              <a:t>5/3/2026</a:t>
             </a:fld>
             <a:endParaRPr lang="en-US"/>
           </a:p>
@@ -4527,7 +4527,7 @@
             <a:pPr algn="ctr"/>
             <a:r>
               <a:rPr lang="en-US" sz="1100" dirty="0"/>
-              <a:t>Copyright 2021, 2022, 2023 2024, 2025 Stephen F Elston. All rights reserved</a:t>
+              <a:t>Copyright 2021, 2022, 2023 2024, 2025, 2026 Stephen F Elston. All rights reserved</a:t>
             </a:r>
             <a:r>
               <a:rPr lang="en-US" dirty="0"/>
@@ -26730,8 +26730,8 @@
           <a:chExt cx="0" cy="0"/>
         </a:xfrm>
       </p:grpSpPr>
-      <mc:AlternateContent xmlns:mc="http://schemas.openxmlformats.org/markup-compatibility/2006">
-        <mc:Choice xmlns:a14="http://schemas.microsoft.com/office/drawing/2010/main" Requires="a14">
+      <mc:AlternateContent xmlns:mc="http://schemas.openxmlformats.org/markup-compatibility/2006" xmlns:a14="http://schemas.microsoft.com/office/drawing/2010/main">
+        <mc:Choice Requires="a14">
           <p:sp>
             <p:nvSpPr>
               <p:cNvPr id="3" name="Content Placeholder 2">
@@ -27096,7 +27096,7 @@
             </p:txBody>
           </p:sp>
         </mc:Choice>
-        <mc:Fallback>
+        <mc:Fallback xmlns="">
           <p:sp>
             <p:nvSpPr>
               <p:cNvPr id="3" name="Content Placeholder 2">
@@ -28677,8 +28677,8 @@
           <a:chExt cx="0" cy="0"/>
         </a:xfrm>
       </p:grpSpPr>
-      <mc:AlternateContent xmlns:mc="http://schemas.openxmlformats.org/markup-compatibility/2006">
-        <mc:Choice xmlns:a14="http://schemas.microsoft.com/office/drawing/2010/main" Requires="a14">
+      <mc:AlternateContent xmlns:mc="http://schemas.openxmlformats.org/markup-compatibility/2006" xmlns:a14="http://schemas.microsoft.com/office/drawing/2010/main">
+        <mc:Choice Requires="a14">
           <p:sp>
             <p:nvSpPr>
               <p:cNvPr id="3" name="Content Placeholder 2">
@@ -29381,7 +29381,7 @@
             </p:txBody>
           </p:sp>
         </mc:Choice>
-        <mc:Fallback>
+        <mc:Fallback xmlns="">
           <p:sp>
             <p:nvSpPr>
               <p:cNvPr id="3" name="Content Placeholder 2">
@@ -29812,8 +29812,8 @@
           <a:chExt cx="0" cy="0"/>
         </a:xfrm>
       </p:grpSpPr>
-      <mc:AlternateContent xmlns:mc="http://schemas.openxmlformats.org/markup-compatibility/2006">
-        <mc:Choice xmlns:a14="http://schemas.microsoft.com/office/drawing/2010/main" Requires="a14">
+      <mc:AlternateContent xmlns:mc="http://schemas.openxmlformats.org/markup-compatibility/2006" xmlns:a14="http://schemas.microsoft.com/office/drawing/2010/main">
+        <mc:Choice Requires="a14">
           <p:sp>
             <p:nvSpPr>
               <p:cNvPr id="3" name="Content Placeholder 2">
@@ -30151,7 +30151,7 @@
             </p:txBody>
           </p:sp>
         </mc:Choice>
-        <mc:Fallback>
+        <mc:Fallback xmlns="">
           <p:sp>
             <p:nvSpPr>
               <p:cNvPr id="3" name="Content Placeholder 2">
@@ -44755,8 +44755,8 @@
           <a:chExt cx="0" cy="0"/>
         </a:xfrm>
       </p:grpSpPr>
-      <mc:AlternateContent xmlns:mc="http://schemas.openxmlformats.org/markup-compatibility/2006">
-        <mc:Choice xmlns:a14="http://schemas.microsoft.com/office/drawing/2010/main" Requires="a14">
+      <mc:AlternateContent xmlns:mc="http://schemas.openxmlformats.org/markup-compatibility/2006" xmlns:a14="http://schemas.microsoft.com/office/drawing/2010/main">
+        <mc:Choice Requires="a14">
           <p:sp>
             <p:nvSpPr>
               <p:cNvPr id="3" name="Content Placeholder 2">
@@ -45357,7 +45357,7 @@
             </p:txBody>
           </p:sp>
         </mc:Choice>
-        <mc:Fallback>
+        <mc:Fallback xmlns="">
           <p:sp>
             <p:nvSpPr>
               <p:cNvPr id="3" name="Content Placeholder 2">

--- a/slides/1_Introduction.pptx
+++ b/slides/1_Introduction.pptx
@@ -5,7 +5,7 @@
     <p:sldMasterId id="2147483648" r:id="rId1"/>
   </p:sldMasterIdLst>
   <p:notesMasterIdLst>
-    <p:notesMasterId r:id="rId50"/>
+    <p:notesMasterId r:id="rId54"/>
   </p:notesMasterIdLst>
   <p:sldIdLst>
     <p:sldId id="256" r:id="rId2"/>
@@ -16,8 +16,8 @@
     <p:sldId id="356" r:id="rId7"/>
     <p:sldId id="712" r:id="rId8"/>
     <p:sldId id="288" r:id="rId9"/>
-    <p:sldId id="732" r:id="rId10"/>
-    <p:sldId id="733" r:id="rId11"/>
+    <p:sldId id="733" r:id="rId10"/>
+    <p:sldId id="732" r:id="rId11"/>
     <p:sldId id="724" r:id="rId12"/>
     <p:sldId id="397" r:id="rId13"/>
     <p:sldId id="718" r:id="rId14"/>
@@ -48,14 +48,18 @@
     <p:sldId id="374" r:id="rId39"/>
     <p:sldId id="375" r:id="rId40"/>
     <p:sldId id="376" r:id="rId41"/>
-    <p:sldId id="728" r:id="rId42"/>
-    <p:sldId id="377" r:id="rId43"/>
-    <p:sldId id="729" r:id="rId44"/>
-    <p:sldId id="730" r:id="rId45"/>
-    <p:sldId id="378" r:id="rId46"/>
-    <p:sldId id="379" r:id="rId47"/>
-    <p:sldId id="380" r:id="rId48"/>
-    <p:sldId id="384" r:id="rId49"/>
+    <p:sldId id="734" r:id="rId42"/>
+    <p:sldId id="737" r:id="rId43"/>
+    <p:sldId id="736" r:id="rId44"/>
+    <p:sldId id="735" r:id="rId45"/>
+    <p:sldId id="728" r:id="rId46"/>
+    <p:sldId id="377" r:id="rId47"/>
+    <p:sldId id="729" r:id="rId48"/>
+    <p:sldId id="730" r:id="rId49"/>
+    <p:sldId id="378" r:id="rId50"/>
+    <p:sldId id="379" r:id="rId51"/>
+    <p:sldId id="380" r:id="rId52"/>
+    <p:sldId id="384" r:id="rId53"/>
   </p:sldIdLst>
   <p:sldSz cx="12192000" cy="6858000"/>
   <p:notesSz cx="6858000" cy="9144000"/>
@@ -244,7 +248,7 @@
           <a:p>
             <a:fld id="{2F3ABF1A-8818-4472-8518-E71DC7B5D2F7}" type="datetimeFigureOut">
               <a:rPr lang="en-US" smtClean="0"/>
-              <a:t>5/12/2026</a:t>
+              <a:t>5/19/2026</a:t>
             </a:fld>
             <a:endParaRPr lang="en-US"/>
           </a:p>
@@ -658,7 +662,7 @@
           <a:p>
             <a:fld id="{6E4A31BF-7266-4BEB-918B-ADC21C630A6F}" type="datetimeFigureOut">
               <a:rPr lang="en-US" smtClean="0"/>
-              <a:t>5/12/2026</a:t>
+              <a:t>5/19/2026</a:t>
             </a:fld>
             <a:endParaRPr lang="en-US"/>
           </a:p>
@@ -856,7 +860,7 @@
           <a:p>
             <a:fld id="{6E4A31BF-7266-4BEB-918B-ADC21C630A6F}" type="datetimeFigureOut">
               <a:rPr lang="en-US" smtClean="0"/>
-              <a:t>5/12/2026</a:t>
+              <a:t>5/19/2026</a:t>
             </a:fld>
             <a:endParaRPr lang="en-US"/>
           </a:p>
@@ -1064,7 +1068,7 @@
           <a:p>
             <a:fld id="{6E4A31BF-7266-4BEB-918B-ADC21C630A6F}" type="datetimeFigureOut">
               <a:rPr lang="en-US" smtClean="0"/>
-              <a:t>5/12/2026</a:t>
+              <a:t>5/19/2026</a:t>
             </a:fld>
             <a:endParaRPr lang="en-US"/>
           </a:p>
@@ -1262,7 +1266,7 @@
           <a:p>
             <a:fld id="{6E4A31BF-7266-4BEB-918B-ADC21C630A6F}" type="datetimeFigureOut">
               <a:rPr lang="en-US" smtClean="0"/>
-              <a:t>5/12/2026</a:t>
+              <a:t>5/19/2026</a:t>
             </a:fld>
             <a:endParaRPr lang="en-US"/>
           </a:p>
@@ -1537,7 +1541,7 @@
           <a:p>
             <a:fld id="{6E4A31BF-7266-4BEB-918B-ADC21C630A6F}" type="datetimeFigureOut">
               <a:rPr lang="en-US" smtClean="0"/>
-              <a:t>5/12/2026</a:t>
+              <a:t>5/19/2026</a:t>
             </a:fld>
             <a:endParaRPr lang="en-US"/>
           </a:p>
@@ -1802,7 +1806,7 @@
           <a:p>
             <a:fld id="{6E4A31BF-7266-4BEB-918B-ADC21C630A6F}" type="datetimeFigureOut">
               <a:rPr lang="en-US" smtClean="0"/>
-              <a:t>5/12/2026</a:t>
+              <a:t>5/19/2026</a:t>
             </a:fld>
             <a:endParaRPr lang="en-US"/>
           </a:p>
@@ -2214,7 +2218,7 @@
           <a:p>
             <a:fld id="{6E4A31BF-7266-4BEB-918B-ADC21C630A6F}" type="datetimeFigureOut">
               <a:rPr lang="en-US" smtClean="0"/>
-              <a:t>5/12/2026</a:t>
+              <a:t>5/19/2026</a:t>
             </a:fld>
             <a:endParaRPr lang="en-US"/>
           </a:p>
@@ -2355,7 +2359,7 @@
           <a:p>
             <a:fld id="{6E4A31BF-7266-4BEB-918B-ADC21C630A6F}" type="datetimeFigureOut">
               <a:rPr lang="en-US" smtClean="0"/>
-              <a:t>5/12/2026</a:t>
+              <a:t>5/19/2026</a:t>
             </a:fld>
             <a:endParaRPr lang="en-US"/>
           </a:p>
@@ -2468,7 +2472,7 @@
           <a:p>
             <a:fld id="{6E4A31BF-7266-4BEB-918B-ADC21C630A6F}" type="datetimeFigureOut">
               <a:rPr lang="en-US" smtClean="0"/>
-              <a:t>5/12/2026</a:t>
+              <a:t>5/19/2026</a:t>
             </a:fld>
             <a:endParaRPr lang="en-US"/>
           </a:p>
@@ -2779,7 +2783,7 @@
           <a:p>
             <a:fld id="{6E4A31BF-7266-4BEB-918B-ADC21C630A6F}" type="datetimeFigureOut">
               <a:rPr lang="en-US" smtClean="0"/>
-              <a:t>5/12/2026</a:t>
+              <a:t>5/19/2026</a:t>
             </a:fld>
             <a:endParaRPr lang="en-US"/>
           </a:p>
@@ -3067,7 +3071,7 @@
           <a:p>
             <a:fld id="{6E4A31BF-7266-4BEB-918B-ADC21C630A6F}" type="datetimeFigureOut">
               <a:rPr lang="en-US" smtClean="0"/>
-              <a:t>5/12/2026</a:t>
+              <a:t>5/19/2026</a:t>
             </a:fld>
             <a:endParaRPr lang="en-US"/>
           </a:p>
@@ -3308,7 +3312,7 @@
           <a:p>
             <a:fld id="{6E4A31BF-7266-4BEB-918B-ADC21C630A6F}" type="datetimeFigureOut">
               <a:rPr lang="en-US" smtClean="0"/>
-              <a:t>5/12/2026</a:t>
+              <a:t>5/19/2026</a:t>
             </a:fld>
             <a:endParaRPr lang="en-US"/>
           </a:p>
@@ -3942,7 +3946,7 @@
           <p:cNvPr id="2" name="Title 1">
             <a:extLst>
               <a:ext uri="{FF2B5EF4-FFF2-40B4-BE49-F238E27FC236}">
-                <a16:creationId xmlns:a16="http://schemas.microsoft.com/office/drawing/2014/main" id="{26597D24-DFF0-4128-2724-AA23D1E91FF3}"/>
+                <a16:creationId xmlns:a16="http://schemas.microsoft.com/office/drawing/2014/main" id="{3B3EA3CE-8DB0-40A5-B4A6-AFCE2156CC1F}"/>
               </a:ext>
             </a:extLst>
           </p:cNvPr>
@@ -3950,204 +3954,148 @@
             <a:spLocks noGrp="1"/>
           </p:cNvSpPr>
           <p:nvPr>
-            <p:ph type="ctrTitle"/>
+            <p:ph type="title"/>
           </p:nvPr>
         </p:nvSpPr>
         <p:spPr>
           <a:xfrm>
-            <a:off x="280216" y="296446"/>
-            <a:ext cx="9625781" cy="796413"/>
+            <a:off x="838200" y="365126"/>
+            <a:ext cx="10515600" cy="486573"/>
           </a:xfrm>
         </p:spPr>
         <p:txBody>
           <a:bodyPr>
-            <a:normAutofit/>
+            <a:normAutofit fontScale="90000"/>
           </a:bodyPr>
           <a:lstStyle/>
           <a:p>
-            <a:pPr algn="l"/>
-            <a:r>
-              <a:rPr lang="en-US" sz="4000" dirty="0"/>
-              <a:t>Teaching Assistant: Waree Protprommart</a:t>
-            </a:r>
+            <a:r>
+              <a:rPr lang="en-US" dirty="0">
+                <a:latin typeface="+mn-lt"/>
+              </a:rPr>
+              <a:t>About your TA: Eric </a:t>
+            </a:r>
+            <a:r>
+              <a:rPr lang="en-US" dirty="0" err="1">
+                <a:latin typeface="+mn-lt"/>
+              </a:rPr>
+              <a:t>Trucksess</a:t>
+            </a:r>
+            <a:endParaRPr lang="en-US" dirty="0">
+              <a:latin typeface="+mn-lt"/>
+            </a:endParaRPr>
           </a:p>
         </p:txBody>
       </p:sp>
       <p:sp>
         <p:nvSpPr>
-          <p:cNvPr id="4" name="TextBox 3">
+          <p:cNvPr id="3" name="Content Placeholder 2">
             <a:extLst>
               <a:ext uri="{FF2B5EF4-FFF2-40B4-BE49-F238E27FC236}">
-                <a16:creationId xmlns:a16="http://schemas.microsoft.com/office/drawing/2014/main" id="{C4D01460-3AF6-B73A-91A2-A0CB1EF58CE4}"/>
+                <a16:creationId xmlns:a16="http://schemas.microsoft.com/office/drawing/2014/main" id="{CA03134D-F068-4BC9-B038-F3D5CBDDE3F9}"/>
               </a:ext>
             </a:extLst>
           </p:cNvPr>
-          <p:cNvSpPr txBox="1"/>
-          <p:nvPr/>
+          <p:cNvSpPr>
+            <a:spLocks noGrp="1"/>
+          </p:cNvSpPr>
+          <p:nvPr>
+            <p:ph idx="1"/>
+          </p:nvPr>
         </p:nvSpPr>
         <p:spPr>
           <a:xfrm>
-            <a:off x="341667" y="1345984"/>
-            <a:ext cx="7231629" cy="4893647"/>
+            <a:off x="672105" y="1095916"/>
+            <a:ext cx="10515600" cy="4538867"/>
           </a:xfrm>
-          <a:prstGeom prst="rect">
-            <a:avLst/>
-          </a:prstGeom>
-          <a:noFill/>
         </p:spPr>
         <p:txBody>
-          <a:bodyPr wrap="square" rtlCol="0">
-            <a:spAutoFit/>
+          <a:bodyPr>
+            <a:noAutofit/>
           </a:bodyPr>
           <a:lstStyle/>
           <a:p>
-            <a:pPr marL="285750" indent="-285750">
-              <a:buFont typeface="Arial" panose="020B0604020202020204" pitchFamily="34" charset="0"/>
-              <a:buChar char="•"/>
+            <a:pPr>
+              <a:spcBef>
+                <a:spcPts val="600"/>
+              </a:spcBef>
             </a:pPr>
             <a:r>
-              <a:rPr lang="en-US" sz="2400" dirty="0"/>
-              <a:t>ALM Student in Data Science at HES</a:t>
-            </a:r>
-          </a:p>
-          <a:p>
-            <a:pPr marL="285750" indent="-285750">
-              <a:buFont typeface="Arial" panose="020B0604020202020204" pitchFamily="34" charset="0"/>
-              <a:buChar char="•"/>
+              <a:rPr lang="en-US" sz="2933" dirty="0">
+                <a:cs typeface="Arial" panose="020B0604020202020204" pitchFamily="34" charset="0"/>
+              </a:rPr>
+              <a:t>Patent attorney focused on the chemical arts, particularly pharmaceuticals, solid state devices and polymeric coatings</a:t>
+            </a:r>
+          </a:p>
+          <a:p>
+            <a:pPr>
+              <a:spcBef>
+                <a:spcPts val="600"/>
+              </a:spcBef>
             </a:pPr>
             <a:r>
-              <a:rPr lang="en-US" sz="2400" dirty="0"/>
-              <a:t>BS in Biology from Mount Saint Mary’s University</a:t>
-            </a:r>
-          </a:p>
-          <a:p>
-            <a:pPr marL="285750" indent="-285750">
-              <a:buFont typeface="Arial" panose="020B0604020202020204" pitchFamily="34" charset="0"/>
-              <a:buChar char="•"/>
+              <a:rPr lang="en-US" sz="2933" dirty="0">
+                <a:cs typeface="Arial" panose="020B0604020202020204" pitchFamily="34" charset="0"/>
+              </a:rPr>
+              <a:t>Founder/architect of </a:t>
+            </a:r>
+            <a:r>
+              <a:rPr lang="en-US" sz="2933" dirty="0" err="1">
+                <a:cs typeface="Arial" panose="020B0604020202020204" pitchFamily="34" charset="0"/>
+              </a:rPr>
+              <a:t>HasHave</a:t>
+            </a:r>
+            <a:r>
+              <a:rPr lang="en-US" sz="2933" dirty="0">
+                <a:cs typeface="Arial" panose="020B0604020202020204" pitchFamily="34" charset="0"/>
+              </a:rPr>
+              <a:t>, formerly an online bartering site which facilitated the exchange of goods and services amongst member</a:t>
+            </a:r>
+          </a:p>
+          <a:p>
+            <a:pPr>
+              <a:spcBef>
+                <a:spcPts val="600"/>
+              </a:spcBef>
             </a:pPr>
             <a:r>
-              <a:rPr lang="en-US" sz="2400" dirty="0"/>
-              <a:t>Disaster planning and information at the American Red Cross</a:t>
-            </a:r>
-          </a:p>
-          <a:p>
-            <a:pPr marL="285750" indent="-285750">
-              <a:buFont typeface="Arial" panose="020B0604020202020204" pitchFamily="34" charset="0"/>
-              <a:buChar char="•"/>
+              <a:rPr lang="en-US" sz="2933" dirty="0">
+                <a:cs typeface="Arial" panose="020B0604020202020204" pitchFamily="34" charset="0"/>
+              </a:rPr>
+              <a:t>Counsel to </a:t>
+            </a:r>
+            <a:r>
+              <a:rPr lang="en-US" sz="2933" dirty="0" err="1">
+                <a:cs typeface="Arial" panose="020B0604020202020204" pitchFamily="34" charset="0"/>
+              </a:rPr>
+              <a:t>RocketFuel</a:t>
+            </a:r>
+            <a:r>
+              <a:rPr lang="en-US" sz="2933" dirty="0">
+                <a:cs typeface="Arial" panose="020B0604020202020204" pitchFamily="34" charset="0"/>
+              </a:rPr>
+              <a:t>, an early-generation targeted marketing firm that applied ML principles in online marketing campaigns</a:t>
+            </a:r>
+          </a:p>
+          <a:p>
+            <a:pPr>
+              <a:spcBef>
+                <a:spcPts val="600"/>
+              </a:spcBef>
             </a:pPr>
             <a:r>
-              <a:rPr lang="en-US" sz="2400" dirty="0"/>
-              <a:t>Substitute teaching K-12 part-time for STEM subjects </a:t>
-            </a:r>
-          </a:p>
-          <a:p>
-            <a:pPr marL="285750" indent="-285750">
-              <a:buFont typeface="Arial" panose="020B0604020202020204" pitchFamily="34" charset="0"/>
-              <a:buChar char="•"/>
-            </a:pPr>
-            <a:r>
-              <a:rPr lang="en-US" sz="2400" dirty="0"/>
-              <a:t>Worked as a research technician at the California Institute of Technology</a:t>
-            </a:r>
-          </a:p>
-          <a:p>
-            <a:pPr marL="285750" indent="-285750">
-              <a:buFont typeface="Arial" panose="020B0604020202020204" pitchFamily="34" charset="0"/>
-              <a:buChar char="•"/>
-            </a:pPr>
-            <a:r>
-              <a:rPr lang="en-US" sz="2400" dirty="0"/>
-              <a:t>Interned at the UCLA School of Engineering, researching a 6-degree-of-freedom robotic arm hand signal detection.</a:t>
-            </a:r>
-          </a:p>
-          <a:p>
-            <a:pPr marL="285750" indent="-285750">
-              <a:buFont typeface="Arial" panose="020B0604020202020204" pitchFamily="34" charset="0"/>
-              <a:buChar char="•"/>
-            </a:pPr>
-            <a:r>
-              <a:rPr lang="en-US" sz="2400" dirty="0"/>
-              <a:t>Hobbies: Surfing, Hiking, Camping, Gardening, Zumba, Lying down and watching TV</a:t>
+              <a:rPr lang="en-US" sz="2933" dirty="0">
+                <a:cs typeface="Arial" panose="020B0604020202020204" pitchFamily="34" charset="0"/>
+              </a:rPr>
+              <a:t>Currently, consultant to a Dubai-based horse racing betting platform assisting in the collection, analysis and digestion of racing data</a:t>
             </a:r>
           </a:p>
         </p:txBody>
       </p:sp>
-      <p:pic>
-        <p:nvPicPr>
-          <p:cNvPr id="6" name="Picture 5" descr="A person standing next to a sign&#10;&#10;AI-generated content may be incorrect.">
-            <a:extLst>
-              <a:ext uri="{FF2B5EF4-FFF2-40B4-BE49-F238E27FC236}">
-                <a16:creationId xmlns:a16="http://schemas.microsoft.com/office/drawing/2014/main" id="{288C65B2-DBC8-4754-089E-6EDA50443613}"/>
-              </a:ext>
-            </a:extLst>
-          </p:cNvPr>
-          <p:cNvPicPr>
-            <a:picLocks noChangeAspect="1"/>
-          </p:cNvPicPr>
-          <p:nvPr/>
-        </p:nvPicPr>
-        <p:blipFill>
-          <a:blip r:embed="rId2">
-            <a:extLst>
-              <a:ext uri="{28A0092B-C50C-407E-A947-70E740481C1C}">
-                <a14:useLocalDpi xmlns:a14="http://schemas.microsoft.com/office/drawing/2010/main" val="0"/>
-              </a:ext>
-            </a:extLst>
-          </a:blip>
-          <a:stretch>
-            <a:fillRect/>
-          </a:stretch>
-        </p:blipFill>
-        <p:spPr>
-          <a:xfrm>
-            <a:off x="9146827" y="115529"/>
-            <a:ext cx="2583057" cy="3429000"/>
-          </a:xfrm>
-          <a:prstGeom prst="rect">
-            <a:avLst/>
-          </a:prstGeom>
-        </p:spPr>
-      </p:pic>
-      <p:pic>
-        <p:nvPicPr>
-          <p:cNvPr id="8" name="Picture 7" descr="A papaya tree with a white fence&#10;&#10;AI-generated content may be incorrect.">
-            <a:extLst>
-              <a:ext uri="{FF2B5EF4-FFF2-40B4-BE49-F238E27FC236}">
-                <a16:creationId xmlns:a16="http://schemas.microsoft.com/office/drawing/2014/main" id="{19B050A4-3A39-40C6-8D62-D5CF77015B90}"/>
-              </a:ext>
-            </a:extLst>
-          </p:cNvPr>
-          <p:cNvPicPr>
-            <a:picLocks noChangeAspect="1"/>
-          </p:cNvPicPr>
-          <p:nvPr/>
-        </p:nvPicPr>
-        <p:blipFill>
-          <a:blip r:embed="rId3">
-            <a:extLst>
-              <a:ext uri="{28A0092B-C50C-407E-A947-70E740481C1C}">
-                <a14:useLocalDpi xmlns:a14="http://schemas.microsoft.com/office/drawing/2010/main" val="0"/>
-              </a:ext>
-            </a:extLst>
-          </a:blip>
-          <a:stretch>
-            <a:fillRect/>
-          </a:stretch>
-        </p:blipFill>
-        <p:spPr>
-          <a:xfrm>
-            <a:off x="8076586" y="3313471"/>
-            <a:ext cx="2571750" cy="3429000"/>
-          </a:xfrm>
-          <a:prstGeom prst="rect">
-            <a:avLst/>
-          </a:prstGeom>
-        </p:spPr>
-      </p:pic>
     </p:spTree>
     <p:extLst>
       <p:ext uri="{BB962C8B-B14F-4D97-AF65-F5344CB8AC3E}">
-        <p14:creationId xmlns:p14="http://schemas.microsoft.com/office/powerpoint/2010/main" val="2046974052"/>
+        <p14:creationId xmlns:p14="http://schemas.microsoft.com/office/powerpoint/2010/main" val="2028118686"/>
       </p:ext>
     </p:extLst>
   </p:cSld>
@@ -9664,7 +9612,7 @@
           </a:p>
           <a:p>
             <a:r>
-              <a:rPr lang="en-US" b="1" dirty="0">
+              <a:rPr lang="en-US" sz="3200" b="1" dirty="0">
                 <a:solidFill>
                   <a:srgbClr val="C00000"/>
                 </a:solidFill>
@@ -10926,11 +10874,8 @@
             </a:r>
           </a:p>
           <a:p>
-            <a:pPr marL="0" indent="0">
-              <a:buNone/>
-            </a:pPr>
-            <a:r>
-              <a:rPr lang="en-US" dirty="0">
+            <a:r>
+              <a:rPr lang="en-US" b="1" dirty="0">
                 <a:solidFill>
                   <a:srgbClr val="C00000"/>
                 </a:solidFill>
@@ -11006,6 +10951,289 @@
   <p:clrMapOvr>
     <a:masterClrMapping/>
   </p:clrMapOvr>
+  <p:timing>
+    <p:tnLst>
+      <p:par>
+        <p:cTn id="1" dur="indefinite" restart="never" nodeType="tmRoot">
+          <p:childTnLst>
+            <p:seq concurrent="1" nextAc="seek">
+              <p:cTn id="2" dur="indefinite" nodeType="mainSeq">
+                <p:childTnLst>
+                  <p:par>
+                    <p:cTn id="3" fill="hold">
+                      <p:stCondLst>
+                        <p:cond delay="indefinite"/>
+                      </p:stCondLst>
+                      <p:childTnLst>
+                        <p:par>
+                          <p:cTn id="4" fill="hold">
+                            <p:stCondLst>
+                              <p:cond delay="0"/>
+                            </p:stCondLst>
+                            <p:childTnLst>
+                              <p:par>
+                                <p:cTn id="5" presetID="1" presetClass="entr" presetSubtype="0" fill="hold" nodeType="clickEffect">
+                                  <p:stCondLst>
+                                    <p:cond delay="0"/>
+                                  </p:stCondLst>
+                                  <p:childTnLst>
+                                    <p:set>
+                                      <p:cBhvr>
+                                        <p:cTn id="6" dur="1" fill="hold">
+                                          <p:stCondLst>
+                                            <p:cond delay="0"/>
+                                          </p:stCondLst>
+                                        </p:cTn>
+                                        <p:tgtEl>
+                                          <p:spTgt spid="3">
+                                            <p:txEl>
+                                              <p:pRg st="1" end="1"/>
+                                            </p:txEl>
+                                          </p:spTgt>
+                                        </p:tgtEl>
+                                        <p:attrNameLst>
+                                          <p:attrName>style.visibility</p:attrName>
+                                        </p:attrNameLst>
+                                      </p:cBhvr>
+                                      <p:to>
+                                        <p:strVal val="visible"/>
+                                      </p:to>
+                                    </p:set>
+                                  </p:childTnLst>
+                                </p:cTn>
+                              </p:par>
+                            </p:childTnLst>
+                          </p:cTn>
+                        </p:par>
+                      </p:childTnLst>
+                    </p:cTn>
+                  </p:par>
+                  <p:par>
+                    <p:cTn id="7" fill="hold">
+                      <p:stCondLst>
+                        <p:cond delay="indefinite"/>
+                      </p:stCondLst>
+                      <p:childTnLst>
+                        <p:par>
+                          <p:cTn id="8" fill="hold">
+                            <p:stCondLst>
+                              <p:cond delay="0"/>
+                            </p:stCondLst>
+                            <p:childTnLst>
+                              <p:par>
+                                <p:cTn id="9" presetID="1" presetClass="entr" presetSubtype="0" fill="hold" nodeType="clickEffect">
+                                  <p:stCondLst>
+                                    <p:cond delay="0"/>
+                                  </p:stCondLst>
+                                  <p:childTnLst>
+                                    <p:set>
+                                      <p:cBhvr>
+                                        <p:cTn id="10" dur="1" fill="hold">
+                                          <p:stCondLst>
+                                            <p:cond delay="0"/>
+                                          </p:stCondLst>
+                                        </p:cTn>
+                                        <p:tgtEl>
+                                          <p:spTgt spid="3">
+                                            <p:txEl>
+                                              <p:pRg st="2" end="2"/>
+                                            </p:txEl>
+                                          </p:spTgt>
+                                        </p:tgtEl>
+                                        <p:attrNameLst>
+                                          <p:attrName>style.visibility</p:attrName>
+                                        </p:attrNameLst>
+                                      </p:cBhvr>
+                                      <p:to>
+                                        <p:strVal val="visible"/>
+                                      </p:to>
+                                    </p:set>
+                                  </p:childTnLst>
+                                </p:cTn>
+                              </p:par>
+                              <p:par>
+                                <p:cTn id="11" presetID="1" presetClass="entr" presetSubtype="0" fill="hold" nodeType="withEffect">
+                                  <p:stCondLst>
+                                    <p:cond delay="0"/>
+                                  </p:stCondLst>
+                                  <p:childTnLst>
+                                    <p:set>
+                                      <p:cBhvr>
+                                        <p:cTn id="12" dur="1" fill="hold">
+                                          <p:stCondLst>
+                                            <p:cond delay="0"/>
+                                          </p:stCondLst>
+                                        </p:cTn>
+                                        <p:tgtEl>
+                                          <p:spTgt spid="3">
+                                            <p:txEl>
+                                              <p:pRg st="3" end="3"/>
+                                            </p:txEl>
+                                          </p:spTgt>
+                                        </p:tgtEl>
+                                        <p:attrNameLst>
+                                          <p:attrName>style.visibility</p:attrName>
+                                        </p:attrNameLst>
+                                      </p:cBhvr>
+                                      <p:to>
+                                        <p:strVal val="visible"/>
+                                      </p:to>
+                                    </p:set>
+                                  </p:childTnLst>
+                                </p:cTn>
+                              </p:par>
+                              <p:par>
+                                <p:cTn id="13" presetID="1" presetClass="entr" presetSubtype="0" fill="hold" nodeType="withEffect">
+                                  <p:stCondLst>
+                                    <p:cond delay="0"/>
+                                  </p:stCondLst>
+                                  <p:childTnLst>
+                                    <p:set>
+                                      <p:cBhvr>
+                                        <p:cTn id="14" dur="1" fill="hold">
+                                          <p:stCondLst>
+                                            <p:cond delay="0"/>
+                                          </p:stCondLst>
+                                        </p:cTn>
+                                        <p:tgtEl>
+                                          <p:spTgt spid="3">
+                                            <p:txEl>
+                                              <p:pRg st="4" end="4"/>
+                                            </p:txEl>
+                                          </p:spTgt>
+                                        </p:tgtEl>
+                                        <p:attrNameLst>
+                                          <p:attrName>style.visibility</p:attrName>
+                                        </p:attrNameLst>
+                                      </p:cBhvr>
+                                      <p:to>
+                                        <p:strVal val="visible"/>
+                                      </p:to>
+                                    </p:set>
+                                  </p:childTnLst>
+                                </p:cTn>
+                              </p:par>
+                              <p:par>
+                                <p:cTn id="15" presetID="1" presetClass="entr" presetSubtype="0" fill="hold" nodeType="withEffect">
+                                  <p:stCondLst>
+                                    <p:cond delay="0"/>
+                                  </p:stCondLst>
+                                  <p:childTnLst>
+                                    <p:set>
+                                      <p:cBhvr>
+                                        <p:cTn id="16" dur="1" fill="hold">
+                                          <p:stCondLst>
+                                            <p:cond delay="0"/>
+                                          </p:stCondLst>
+                                        </p:cTn>
+                                        <p:tgtEl>
+                                          <p:spTgt spid="3">
+                                            <p:txEl>
+                                              <p:pRg st="5" end="5"/>
+                                            </p:txEl>
+                                          </p:spTgt>
+                                        </p:tgtEl>
+                                        <p:attrNameLst>
+                                          <p:attrName>style.visibility</p:attrName>
+                                        </p:attrNameLst>
+                                      </p:cBhvr>
+                                      <p:to>
+                                        <p:strVal val="visible"/>
+                                      </p:to>
+                                    </p:set>
+                                  </p:childTnLst>
+                                </p:cTn>
+                              </p:par>
+                              <p:par>
+                                <p:cTn id="17" presetID="1" presetClass="entr" presetSubtype="0" fill="hold" nodeType="withEffect">
+                                  <p:stCondLst>
+                                    <p:cond delay="0"/>
+                                  </p:stCondLst>
+                                  <p:childTnLst>
+                                    <p:set>
+                                      <p:cBhvr>
+                                        <p:cTn id="18" dur="1" fill="hold">
+                                          <p:stCondLst>
+                                            <p:cond delay="0"/>
+                                          </p:stCondLst>
+                                        </p:cTn>
+                                        <p:tgtEl>
+                                          <p:spTgt spid="3">
+                                            <p:txEl>
+                                              <p:pRg st="6" end="6"/>
+                                            </p:txEl>
+                                          </p:spTgt>
+                                        </p:tgtEl>
+                                        <p:attrNameLst>
+                                          <p:attrName>style.visibility</p:attrName>
+                                        </p:attrNameLst>
+                                      </p:cBhvr>
+                                      <p:to>
+                                        <p:strVal val="visible"/>
+                                      </p:to>
+                                    </p:set>
+                                  </p:childTnLst>
+                                </p:cTn>
+                              </p:par>
+                              <p:par>
+                                <p:cTn id="19" presetID="1" presetClass="entr" presetSubtype="0" fill="hold" nodeType="withEffect">
+                                  <p:stCondLst>
+                                    <p:cond delay="0"/>
+                                  </p:stCondLst>
+                                  <p:childTnLst>
+                                    <p:set>
+                                      <p:cBhvr>
+                                        <p:cTn id="20" dur="1" fill="hold">
+                                          <p:stCondLst>
+                                            <p:cond delay="0"/>
+                                          </p:stCondLst>
+                                        </p:cTn>
+                                        <p:tgtEl>
+                                          <p:spTgt spid="3">
+                                            <p:txEl>
+                                              <p:pRg st="7" end="7"/>
+                                            </p:txEl>
+                                          </p:spTgt>
+                                        </p:tgtEl>
+                                        <p:attrNameLst>
+                                          <p:attrName>style.visibility</p:attrName>
+                                        </p:attrNameLst>
+                                      </p:cBhvr>
+                                      <p:to>
+                                        <p:strVal val="visible"/>
+                                      </p:to>
+                                    </p:set>
+                                  </p:childTnLst>
+                                </p:cTn>
+                              </p:par>
+                            </p:childTnLst>
+                          </p:cTn>
+                        </p:par>
+                      </p:childTnLst>
+                    </p:cTn>
+                  </p:par>
+                </p:childTnLst>
+              </p:cTn>
+              <p:prevCondLst>
+                <p:cond evt="onPrev" delay="0">
+                  <p:tgtEl>
+                    <p:sldTgt/>
+                  </p:tgtEl>
+                </p:cond>
+              </p:prevCondLst>
+              <p:nextCondLst>
+                <p:cond evt="onNext" delay="0">
+                  <p:tgtEl>
+                    <p:sldTgt/>
+                  </p:tgtEl>
+                </p:cond>
+              </p:nextCondLst>
+            </p:seq>
+          </p:childTnLst>
+        </p:cTn>
+      </p:par>
+    </p:tnLst>
+  </p:timing>
 </p:sld>
 </file>
 
@@ -11261,6 +11489,511 @@
   <p:clrMapOvr>
     <a:masterClrMapping/>
   </p:clrMapOvr>
+  <p:timing>
+    <p:tnLst>
+      <p:par>
+        <p:cTn id="1" dur="indefinite" restart="never" nodeType="tmRoot">
+          <p:childTnLst>
+            <p:seq concurrent="1" nextAc="seek">
+              <p:cTn id="2" dur="indefinite" nodeType="mainSeq">
+                <p:childTnLst>
+                  <p:par>
+                    <p:cTn id="3" fill="hold">
+                      <p:stCondLst>
+                        <p:cond delay="indefinite"/>
+                      </p:stCondLst>
+                      <p:childTnLst>
+                        <p:par>
+                          <p:cTn id="4" fill="hold">
+                            <p:stCondLst>
+                              <p:cond delay="0"/>
+                            </p:stCondLst>
+                            <p:childTnLst>
+                              <p:par>
+                                <p:cTn id="5" presetID="1" presetClass="entr" presetSubtype="0" fill="hold" nodeType="clickEffect">
+                                  <p:stCondLst>
+                                    <p:cond delay="0"/>
+                                  </p:stCondLst>
+                                  <p:childTnLst>
+                                    <p:set>
+                                      <p:cBhvr>
+                                        <p:cTn id="6" dur="1" fill="hold">
+                                          <p:stCondLst>
+                                            <p:cond delay="0"/>
+                                          </p:stCondLst>
+                                        </p:cTn>
+                                        <p:tgtEl>
+                                          <p:spTgt spid="3">
+                                            <p:txEl>
+                                              <p:pRg st="0" end="0"/>
+                                            </p:txEl>
+                                          </p:spTgt>
+                                        </p:tgtEl>
+                                        <p:attrNameLst>
+                                          <p:attrName>style.visibility</p:attrName>
+                                        </p:attrNameLst>
+                                      </p:cBhvr>
+                                      <p:to>
+                                        <p:strVal val="visible"/>
+                                      </p:to>
+                                    </p:set>
+                                  </p:childTnLst>
+                                </p:cTn>
+                              </p:par>
+                            </p:childTnLst>
+                          </p:cTn>
+                        </p:par>
+                      </p:childTnLst>
+                    </p:cTn>
+                  </p:par>
+                  <p:par>
+                    <p:cTn id="7" fill="hold">
+                      <p:stCondLst>
+                        <p:cond delay="indefinite"/>
+                      </p:stCondLst>
+                      <p:childTnLst>
+                        <p:par>
+                          <p:cTn id="8" fill="hold">
+                            <p:stCondLst>
+                              <p:cond delay="0"/>
+                            </p:stCondLst>
+                            <p:childTnLst>
+                              <p:par>
+                                <p:cTn id="9" presetID="1" presetClass="entr" presetSubtype="0" fill="hold" nodeType="clickEffect">
+                                  <p:stCondLst>
+                                    <p:cond delay="0"/>
+                                  </p:stCondLst>
+                                  <p:childTnLst>
+                                    <p:set>
+                                      <p:cBhvr>
+                                        <p:cTn id="10" dur="1" fill="hold">
+                                          <p:stCondLst>
+                                            <p:cond delay="0"/>
+                                          </p:stCondLst>
+                                        </p:cTn>
+                                        <p:tgtEl>
+                                          <p:spTgt spid="3">
+                                            <p:txEl>
+                                              <p:pRg st="1" end="1"/>
+                                            </p:txEl>
+                                          </p:spTgt>
+                                        </p:tgtEl>
+                                        <p:attrNameLst>
+                                          <p:attrName>style.visibility</p:attrName>
+                                        </p:attrNameLst>
+                                      </p:cBhvr>
+                                      <p:to>
+                                        <p:strVal val="visible"/>
+                                      </p:to>
+                                    </p:set>
+                                  </p:childTnLst>
+                                </p:cTn>
+                              </p:par>
+                              <p:par>
+                                <p:cTn id="11" presetID="1" presetClass="entr" presetSubtype="0" fill="hold" nodeType="withEffect">
+                                  <p:stCondLst>
+                                    <p:cond delay="0"/>
+                                  </p:stCondLst>
+                                  <p:childTnLst>
+                                    <p:set>
+                                      <p:cBhvr>
+                                        <p:cTn id="12" dur="1" fill="hold">
+                                          <p:stCondLst>
+                                            <p:cond delay="0"/>
+                                          </p:stCondLst>
+                                        </p:cTn>
+                                        <p:tgtEl>
+                                          <p:spTgt spid="3">
+                                            <p:txEl>
+                                              <p:pRg st="2" end="2"/>
+                                            </p:txEl>
+                                          </p:spTgt>
+                                        </p:tgtEl>
+                                        <p:attrNameLst>
+                                          <p:attrName>style.visibility</p:attrName>
+                                        </p:attrNameLst>
+                                      </p:cBhvr>
+                                      <p:to>
+                                        <p:strVal val="visible"/>
+                                      </p:to>
+                                    </p:set>
+                                  </p:childTnLst>
+                                </p:cTn>
+                              </p:par>
+                              <p:par>
+                                <p:cTn id="13" presetID="1" presetClass="entr" presetSubtype="0" fill="hold" nodeType="withEffect">
+                                  <p:stCondLst>
+                                    <p:cond delay="0"/>
+                                  </p:stCondLst>
+                                  <p:childTnLst>
+                                    <p:set>
+                                      <p:cBhvr>
+                                        <p:cTn id="14" dur="1" fill="hold">
+                                          <p:stCondLst>
+                                            <p:cond delay="0"/>
+                                          </p:stCondLst>
+                                        </p:cTn>
+                                        <p:tgtEl>
+                                          <p:spTgt spid="3">
+                                            <p:txEl>
+                                              <p:pRg st="3" end="3"/>
+                                            </p:txEl>
+                                          </p:spTgt>
+                                        </p:tgtEl>
+                                        <p:attrNameLst>
+                                          <p:attrName>style.visibility</p:attrName>
+                                        </p:attrNameLst>
+                                      </p:cBhvr>
+                                      <p:to>
+                                        <p:strVal val="visible"/>
+                                      </p:to>
+                                    </p:set>
+                                  </p:childTnLst>
+                                </p:cTn>
+                              </p:par>
+                              <p:par>
+                                <p:cTn id="15" presetID="1" presetClass="entr" presetSubtype="0" fill="hold" nodeType="withEffect">
+                                  <p:stCondLst>
+                                    <p:cond delay="0"/>
+                                  </p:stCondLst>
+                                  <p:childTnLst>
+                                    <p:set>
+                                      <p:cBhvr>
+                                        <p:cTn id="16" dur="1" fill="hold">
+                                          <p:stCondLst>
+                                            <p:cond delay="0"/>
+                                          </p:stCondLst>
+                                        </p:cTn>
+                                        <p:tgtEl>
+                                          <p:spTgt spid="3">
+                                            <p:txEl>
+                                              <p:pRg st="4" end="4"/>
+                                            </p:txEl>
+                                          </p:spTgt>
+                                        </p:tgtEl>
+                                        <p:attrNameLst>
+                                          <p:attrName>style.visibility</p:attrName>
+                                        </p:attrNameLst>
+                                      </p:cBhvr>
+                                      <p:to>
+                                        <p:strVal val="visible"/>
+                                      </p:to>
+                                    </p:set>
+                                  </p:childTnLst>
+                                </p:cTn>
+                              </p:par>
+                              <p:par>
+                                <p:cTn id="17" presetID="1" presetClass="entr" presetSubtype="0" fill="hold" nodeType="withEffect">
+                                  <p:stCondLst>
+                                    <p:cond delay="0"/>
+                                  </p:stCondLst>
+                                  <p:childTnLst>
+                                    <p:set>
+                                      <p:cBhvr>
+                                        <p:cTn id="18" dur="1" fill="hold">
+                                          <p:stCondLst>
+                                            <p:cond delay="0"/>
+                                          </p:stCondLst>
+                                        </p:cTn>
+                                        <p:tgtEl>
+                                          <p:spTgt spid="3">
+                                            <p:txEl>
+                                              <p:pRg st="5" end="5"/>
+                                            </p:txEl>
+                                          </p:spTgt>
+                                        </p:tgtEl>
+                                        <p:attrNameLst>
+                                          <p:attrName>style.visibility</p:attrName>
+                                        </p:attrNameLst>
+                                      </p:cBhvr>
+                                      <p:to>
+                                        <p:strVal val="visible"/>
+                                      </p:to>
+                                    </p:set>
+                                  </p:childTnLst>
+                                </p:cTn>
+                              </p:par>
+                            </p:childTnLst>
+                          </p:cTn>
+                        </p:par>
+                      </p:childTnLst>
+                    </p:cTn>
+                  </p:par>
+                  <p:par>
+                    <p:cTn id="19" fill="hold">
+                      <p:stCondLst>
+                        <p:cond delay="indefinite"/>
+                      </p:stCondLst>
+                      <p:childTnLst>
+                        <p:par>
+                          <p:cTn id="20" fill="hold">
+                            <p:stCondLst>
+                              <p:cond delay="0"/>
+                            </p:stCondLst>
+                            <p:childTnLst>
+                              <p:par>
+                                <p:cTn id="21" presetID="1" presetClass="entr" presetSubtype="0" fill="hold" nodeType="clickEffect">
+                                  <p:stCondLst>
+                                    <p:cond delay="0"/>
+                                  </p:stCondLst>
+                                  <p:childTnLst>
+                                    <p:set>
+                                      <p:cBhvr>
+                                        <p:cTn id="22" dur="1" fill="hold">
+                                          <p:stCondLst>
+                                            <p:cond delay="0"/>
+                                          </p:stCondLst>
+                                        </p:cTn>
+                                        <p:tgtEl>
+                                          <p:spTgt spid="3">
+                                            <p:txEl>
+                                              <p:pRg st="6" end="6"/>
+                                            </p:txEl>
+                                          </p:spTgt>
+                                        </p:tgtEl>
+                                        <p:attrNameLst>
+                                          <p:attrName>style.visibility</p:attrName>
+                                        </p:attrNameLst>
+                                      </p:cBhvr>
+                                      <p:to>
+                                        <p:strVal val="visible"/>
+                                      </p:to>
+                                    </p:set>
+                                  </p:childTnLst>
+                                </p:cTn>
+                              </p:par>
+                              <p:par>
+                                <p:cTn id="23" presetID="1" presetClass="entr" presetSubtype="0" fill="hold" nodeType="withEffect">
+                                  <p:stCondLst>
+                                    <p:cond delay="0"/>
+                                  </p:stCondLst>
+                                  <p:childTnLst>
+                                    <p:set>
+                                      <p:cBhvr>
+                                        <p:cTn id="24" dur="1" fill="hold">
+                                          <p:stCondLst>
+                                            <p:cond delay="0"/>
+                                          </p:stCondLst>
+                                        </p:cTn>
+                                        <p:tgtEl>
+                                          <p:spTgt spid="3">
+                                            <p:txEl>
+                                              <p:pRg st="7" end="7"/>
+                                            </p:txEl>
+                                          </p:spTgt>
+                                        </p:tgtEl>
+                                        <p:attrNameLst>
+                                          <p:attrName>style.visibility</p:attrName>
+                                        </p:attrNameLst>
+                                      </p:cBhvr>
+                                      <p:to>
+                                        <p:strVal val="visible"/>
+                                      </p:to>
+                                    </p:set>
+                                  </p:childTnLst>
+                                </p:cTn>
+                              </p:par>
+                              <p:par>
+                                <p:cTn id="25" presetID="1" presetClass="entr" presetSubtype="0" fill="hold" nodeType="withEffect">
+                                  <p:stCondLst>
+                                    <p:cond delay="0"/>
+                                  </p:stCondLst>
+                                  <p:childTnLst>
+                                    <p:set>
+                                      <p:cBhvr>
+                                        <p:cTn id="26" dur="1" fill="hold">
+                                          <p:stCondLst>
+                                            <p:cond delay="0"/>
+                                          </p:stCondLst>
+                                        </p:cTn>
+                                        <p:tgtEl>
+                                          <p:spTgt spid="3">
+                                            <p:txEl>
+                                              <p:pRg st="8" end="8"/>
+                                            </p:txEl>
+                                          </p:spTgt>
+                                        </p:tgtEl>
+                                        <p:attrNameLst>
+                                          <p:attrName>style.visibility</p:attrName>
+                                        </p:attrNameLst>
+                                      </p:cBhvr>
+                                      <p:to>
+                                        <p:strVal val="visible"/>
+                                      </p:to>
+                                    </p:set>
+                                  </p:childTnLst>
+                                </p:cTn>
+                              </p:par>
+                              <p:par>
+                                <p:cTn id="27" presetID="1" presetClass="entr" presetSubtype="0" fill="hold" nodeType="withEffect">
+                                  <p:stCondLst>
+                                    <p:cond delay="0"/>
+                                  </p:stCondLst>
+                                  <p:childTnLst>
+                                    <p:set>
+                                      <p:cBhvr>
+                                        <p:cTn id="28" dur="1" fill="hold">
+                                          <p:stCondLst>
+                                            <p:cond delay="0"/>
+                                          </p:stCondLst>
+                                        </p:cTn>
+                                        <p:tgtEl>
+                                          <p:spTgt spid="3">
+                                            <p:txEl>
+                                              <p:pRg st="9" end="9"/>
+                                            </p:txEl>
+                                          </p:spTgt>
+                                        </p:tgtEl>
+                                        <p:attrNameLst>
+                                          <p:attrName>style.visibility</p:attrName>
+                                        </p:attrNameLst>
+                                      </p:cBhvr>
+                                      <p:to>
+                                        <p:strVal val="visible"/>
+                                      </p:to>
+                                    </p:set>
+                                  </p:childTnLst>
+                                </p:cTn>
+                              </p:par>
+                            </p:childTnLst>
+                          </p:cTn>
+                        </p:par>
+                      </p:childTnLst>
+                    </p:cTn>
+                  </p:par>
+                  <p:par>
+                    <p:cTn id="29" fill="hold">
+                      <p:stCondLst>
+                        <p:cond delay="indefinite"/>
+                      </p:stCondLst>
+                      <p:childTnLst>
+                        <p:par>
+                          <p:cTn id="30" fill="hold">
+                            <p:stCondLst>
+                              <p:cond delay="0"/>
+                            </p:stCondLst>
+                            <p:childTnLst>
+                              <p:par>
+                                <p:cTn id="31" presetID="1" presetClass="entr" presetSubtype="0" fill="hold" nodeType="clickEffect">
+                                  <p:stCondLst>
+                                    <p:cond delay="0"/>
+                                  </p:stCondLst>
+                                  <p:childTnLst>
+                                    <p:set>
+                                      <p:cBhvr>
+                                        <p:cTn id="32" dur="1" fill="hold">
+                                          <p:stCondLst>
+                                            <p:cond delay="0"/>
+                                          </p:stCondLst>
+                                        </p:cTn>
+                                        <p:tgtEl>
+                                          <p:spTgt spid="3">
+                                            <p:txEl>
+                                              <p:pRg st="10" end="10"/>
+                                            </p:txEl>
+                                          </p:spTgt>
+                                        </p:tgtEl>
+                                        <p:attrNameLst>
+                                          <p:attrName>style.visibility</p:attrName>
+                                        </p:attrNameLst>
+                                      </p:cBhvr>
+                                      <p:to>
+                                        <p:strVal val="visible"/>
+                                      </p:to>
+                                    </p:set>
+                                  </p:childTnLst>
+                                </p:cTn>
+                              </p:par>
+                              <p:par>
+                                <p:cTn id="33" presetID="1" presetClass="entr" presetSubtype="0" fill="hold" nodeType="withEffect">
+                                  <p:stCondLst>
+                                    <p:cond delay="0"/>
+                                  </p:stCondLst>
+                                  <p:childTnLst>
+                                    <p:set>
+                                      <p:cBhvr>
+                                        <p:cTn id="34" dur="1" fill="hold">
+                                          <p:stCondLst>
+                                            <p:cond delay="0"/>
+                                          </p:stCondLst>
+                                        </p:cTn>
+                                        <p:tgtEl>
+                                          <p:spTgt spid="3">
+                                            <p:txEl>
+                                              <p:pRg st="11" end="11"/>
+                                            </p:txEl>
+                                          </p:spTgt>
+                                        </p:tgtEl>
+                                        <p:attrNameLst>
+                                          <p:attrName>style.visibility</p:attrName>
+                                        </p:attrNameLst>
+                                      </p:cBhvr>
+                                      <p:to>
+                                        <p:strVal val="visible"/>
+                                      </p:to>
+                                    </p:set>
+                                  </p:childTnLst>
+                                </p:cTn>
+                              </p:par>
+                              <p:par>
+                                <p:cTn id="35" presetID="1" presetClass="entr" presetSubtype="0" fill="hold" nodeType="withEffect">
+                                  <p:stCondLst>
+                                    <p:cond delay="0"/>
+                                  </p:stCondLst>
+                                  <p:childTnLst>
+                                    <p:set>
+                                      <p:cBhvr>
+                                        <p:cTn id="36" dur="1" fill="hold">
+                                          <p:stCondLst>
+                                            <p:cond delay="0"/>
+                                          </p:stCondLst>
+                                        </p:cTn>
+                                        <p:tgtEl>
+                                          <p:spTgt spid="3">
+                                            <p:txEl>
+                                              <p:pRg st="12" end="12"/>
+                                            </p:txEl>
+                                          </p:spTgt>
+                                        </p:tgtEl>
+                                        <p:attrNameLst>
+                                          <p:attrName>style.visibility</p:attrName>
+                                        </p:attrNameLst>
+                                      </p:cBhvr>
+                                      <p:to>
+                                        <p:strVal val="visible"/>
+                                      </p:to>
+                                    </p:set>
+                                  </p:childTnLst>
+                                </p:cTn>
+                              </p:par>
+                            </p:childTnLst>
+                          </p:cTn>
+                        </p:par>
+                      </p:childTnLst>
+                    </p:cTn>
+                  </p:par>
+                </p:childTnLst>
+              </p:cTn>
+              <p:prevCondLst>
+                <p:cond evt="onPrev" delay="0">
+                  <p:tgtEl>
+                    <p:sldTgt/>
+                  </p:tgtEl>
+                </p:cond>
+              </p:prevCondLst>
+              <p:nextCondLst>
+                <p:cond evt="onNext" delay="0">
+                  <p:tgtEl>
+                    <p:sldTgt/>
+                  </p:tgtEl>
+                </p:cond>
+              </p:nextCondLst>
+            </p:seq>
+          </p:childTnLst>
+        </p:cTn>
+      </p:par>
+    </p:tnLst>
+  </p:timing>
 </p:sld>
 </file>
 
@@ -11773,7 +12506,11 @@
           </a:p>
           <a:p>
             <a:r>
-              <a:rPr lang="en-US" b="1" dirty="0"/>
+              <a:rPr lang="en-US" b="1" dirty="0">
+                <a:solidFill>
+                  <a:srgbClr val="C00000"/>
+                </a:solidFill>
+              </a:rPr>
               <a:t>Do not use Canvas messages, unless you want a delayed response!   </a:t>
             </a:r>
           </a:p>
@@ -11845,6 +12582,387 @@
   <p:clrMapOvr>
     <a:masterClrMapping/>
   </p:clrMapOvr>
+  <p:timing>
+    <p:tnLst>
+      <p:par>
+        <p:cTn id="1" dur="indefinite" restart="never" nodeType="tmRoot">
+          <p:childTnLst>
+            <p:seq concurrent="1" nextAc="seek">
+              <p:cTn id="2" dur="indefinite" nodeType="mainSeq">
+                <p:childTnLst>
+                  <p:par>
+                    <p:cTn id="3" fill="hold">
+                      <p:stCondLst>
+                        <p:cond delay="indefinite"/>
+                      </p:stCondLst>
+                      <p:childTnLst>
+                        <p:par>
+                          <p:cTn id="4" fill="hold">
+                            <p:stCondLst>
+                              <p:cond delay="0"/>
+                            </p:stCondLst>
+                            <p:childTnLst>
+                              <p:par>
+                                <p:cTn id="5" presetID="1" presetClass="entr" presetSubtype="0" fill="hold" nodeType="clickEffect">
+                                  <p:stCondLst>
+                                    <p:cond delay="0"/>
+                                  </p:stCondLst>
+                                  <p:childTnLst>
+                                    <p:set>
+                                      <p:cBhvr>
+                                        <p:cTn id="6" dur="1" fill="hold">
+                                          <p:stCondLst>
+                                            <p:cond delay="0"/>
+                                          </p:stCondLst>
+                                        </p:cTn>
+                                        <p:tgtEl>
+                                          <p:spTgt spid="3">
+                                            <p:txEl>
+                                              <p:pRg st="1" end="1"/>
+                                            </p:txEl>
+                                          </p:spTgt>
+                                        </p:tgtEl>
+                                        <p:attrNameLst>
+                                          <p:attrName>style.visibility</p:attrName>
+                                        </p:attrNameLst>
+                                      </p:cBhvr>
+                                      <p:to>
+                                        <p:strVal val="visible"/>
+                                      </p:to>
+                                    </p:set>
+                                  </p:childTnLst>
+                                </p:cTn>
+                              </p:par>
+                              <p:par>
+                                <p:cTn id="7" presetID="1" presetClass="entr" presetSubtype="0" fill="hold" nodeType="withEffect">
+                                  <p:stCondLst>
+                                    <p:cond delay="0"/>
+                                  </p:stCondLst>
+                                  <p:childTnLst>
+                                    <p:set>
+                                      <p:cBhvr>
+                                        <p:cTn id="8" dur="1" fill="hold">
+                                          <p:stCondLst>
+                                            <p:cond delay="0"/>
+                                          </p:stCondLst>
+                                        </p:cTn>
+                                        <p:tgtEl>
+                                          <p:spTgt spid="3">
+                                            <p:txEl>
+                                              <p:pRg st="2" end="2"/>
+                                            </p:txEl>
+                                          </p:spTgt>
+                                        </p:tgtEl>
+                                        <p:attrNameLst>
+                                          <p:attrName>style.visibility</p:attrName>
+                                        </p:attrNameLst>
+                                      </p:cBhvr>
+                                      <p:to>
+                                        <p:strVal val="visible"/>
+                                      </p:to>
+                                    </p:set>
+                                  </p:childTnLst>
+                                </p:cTn>
+                              </p:par>
+                              <p:par>
+                                <p:cTn id="9" presetID="1" presetClass="entr" presetSubtype="0" fill="hold" nodeType="withEffect">
+                                  <p:stCondLst>
+                                    <p:cond delay="0"/>
+                                  </p:stCondLst>
+                                  <p:childTnLst>
+                                    <p:set>
+                                      <p:cBhvr>
+                                        <p:cTn id="10" dur="1" fill="hold">
+                                          <p:stCondLst>
+                                            <p:cond delay="0"/>
+                                          </p:stCondLst>
+                                        </p:cTn>
+                                        <p:tgtEl>
+                                          <p:spTgt spid="3">
+                                            <p:txEl>
+                                              <p:pRg st="3" end="3"/>
+                                            </p:txEl>
+                                          </p:spTgt>
+                                        </p:tgtEl>
+                                        <p:attrNameLst>
+                                          <p:attrName>style.visibility</p:attrName>
+                                        </p:attrNameLst>
+                                      </p:cBhvr>
+                                      <p:to>
+                                        <p:strVal val="visible"/>
+                                      </p:to>
+                                    </p:set>
+                                  </p:childTnLst>
+                                </p:cTn>
+                              </p:par>
+                            </p:childTnLst>
+                          </p:cTn>
+                        </p:par>
+                      </p:childTnLst>
+                    </p:cTn>
+                  </p:par>
+                  <p:par>
+                    <p:cTn id="11" fill="hold">
+                      <p:stCondLst>
+                        <p:cond delay="indefinite"/>
+                      </p:stCondLst>
+                      <p:childTnLst>
+                        <p:par>
+                          <p:cTn id="12" fill="hold">
+                            <p:stCondLst>
+                              <p:cond delay="0"/>
+                            </p:stCondLst>
+                            <p:childTnLst>
+                              <p:par>
+                                <p:cTn id="13" presetID="1" presetClass="entr" presetSubtype="0" fill="hold" nodeType="clickEffect">
+                                  <p:stCondLst>
+                                    <p:cond delay="0"/>
+                                  </p:stCondLst>
+                                  <p:childTnLst>
+                                    <p:set>
+                                      <p:cBhvr>
+                                        <p:cTn id="14" dur="1" fill="hold">
+                                          <p:stCondLst>
+                                            <p:cond delay="0"/>
+                                          </p:stCondLst>
+                                        </p:cTn>
+                                        <p:tgtEl>
+                                          <p:spTgt spid="3">
+                                            <p:txEl>
+                                              <p:pRg st="4" end="4"/>
+                                            </p:txEl>
+                                          </p:spTgt>
+                                        </p:tgtEl>
+                                        <p:attrNameLst>
+                                          <p:attrName>style.visibility</p:attrName>
+                                        </p:attrNameLst>
+                                      </p:cBhvr>
+                                      <p:to>
+                                        <p:strVal val="visible"/>
+                                      </p:to>
+                                    </p:set>
+                                  </p:childTnLst>
+                                </p:cTn>
+                              </p:par>
+                            </p:childTnLst>
+                          </p:cTn>
+                        </p:par>
+                      </p:childTnLst>
+                    </p:cTn>
+                  </p:par>
+                  <p:par>
+                    <p:cTn id="15" fill="hold">
+                      <p:stCondLst>
+                        <p:cond delay="indefinite"/>
+                      </p:stCondLst>
+                      <p:childTnLst>
+                        <p:par>
+                          <p:cTn id="16" fill="hold">
+                            <p:stCondLst>
+                              <p:cond delay="0"/>
+                            </p:stCondLst>
+                            <p:childTnLst>
+                              <p:par>
+                                <p:cTn id="17" presetID="1" presetClass="entr" presetSubtype="0" fill="hold" nodeType="clickEffect">
+                                  <p:stCondLst>
+                                    <p:cond delay="0"/>
+                                  </p:stCondLst>
+                                  <p:childTnLst>
+                                    <p:set>
+                                      <p:cBhvr>
+                                        <p:cTn id="18" dur="1" fill="hold">
+                                          <p:stCondLst>
+                                            <p:cond delay="0"/>
+                                          </p:stCondLst>
+                                        </p:cTn>
+                                        <p:tgtEl>
+                                          <p:spTgt spid="3">
+                                            <p:txEl>
+                                              <p:pRg st="5" end="5"/>
+                                            </p:txEl>
+                                          </p:spTgt>
+                                        </p:tgtEl>
+                                        <p:attrNameLst>
+                                          <p:attrName>style.visibility</p:attrName>
+                                        </p:attrNameLst>
+                                      </p:cBhvr>
+                                      <p:to>
+                                        <p:strVal val="visible"/>
+                                      </p:to>
+                                    </p:set>
+                                  </p:childTnLst>
+                                </p:cTn>
+                              </p:par>
+                              <p:par>
+                                <p:cTn id="19" presetID="1" presetClass="entr" presetSubtype="0" fill="hold" nodeType="withEffect">
+                                  <p:stCondLst>
+                                    <p:cond delay="0"/>
+                                  </p:stCondLst>
+                                  <p:childTnLst>
+                                    <p:set>
+                                      <p:cBhvr>
+                                        <p:cTn id="20" dur="1" fill="hold">
+                                          <p:stCondLst>
+                                            <p:cond delay="0"/>
+                                          </p:stCondLst>
+                                        </p:cTn>
+                                        <p:tgtEl>
+                                          <p:spTgt spid="3">
+                                            <p:txEl>
+                                              <p:pRg st="6" end="6"/>
+                                            </p:txEl>
+                                          </p:spTgt>
+                                        </p:tgtEl>
+                                        <p:attrNameLst>
+                                          <p:attrName>style.visibility</p:attrName>
+                                        </p:attrNameLst>
+                                      </p:cBhvr>
+                                      <p:to>
+                                        <p:strVal val="visible"/>
+                                      </p:to>
+                                    </p:set>
+                                  </p:childTnLst>
+                                </p:cTn>
+                              </p:par>
+                              <p:par>
+                                <p:cTn id="21" presetID="1" presetClass="entr" presetSubtype="0" fill="hold" nodeType="withEffect">
+                                  <p:stCondLst>
+                                    <p:cond delay="0"/>
+                                  </p:stCondLst>
+                                  <p:childTnLst>
+                                    <p:set>
+                                      <p:cBhvr>
+                                        <p:cTn id="22" dur="1" fill="hold">
+                                          <p:stCondLst>
+                                            <p:cond delay="0"/>
+                                          </p:stCondLst>
+                                        </p:cTn>
+                                        <p:tgtEl>
+                                          <p:spTgt spid="3">
+                                            <p:txEl>
+                                              <p:pRg st="7" end="7"/>
+                                            </p:txEl>
+                                          </p:spTgt>
+                                        </p:tgtEl>
+                                        <p:attrNameLst>
+                                          <p:attrName>style.visibility</p:attrName>
+                                        </p:attrNameLst>
+                                      </p:cBhvr>
+                                      <p:to>
+                                        <p:strVal val="visible"/>
+                                      </p:to>
+                                    </p:set>
+                                  </p:childTnLst>
+                                </p:cTn>
+                              </p:par>
+                              <p:par>
+                                <p:cTn id="23" presetID="1" presetClass="entr" presetSubtype="0" fill="hold" nodeType="withEffect">
+                                  <p:stCondLst>
+                                    <p:cond delay="0"/>
+                                  </p:stCondLst>
+                                  <p:childTnLst>
+                                    <p:set>
+                                      <p:cBhvr>
+                                        <p:cTn id="24" dur="1" fill="hold">
+                                          <p:stCondLst>
+                                            <p:cond delay="0"/>
+                                          </p:stCondLst>
+                                        </p:cTn>
+                                        <p:tgtEl>
+                                          <p:spTgt spid="3">
+                                            <p:txEl>
+                                              <p:pRg st="8" end="8"/>
+                                            </p:txEl>
+                                          </p:spTgt>
+                                        </p:tgtEl>
+                                        <p:attrNameLst>
+                                          <p:attrName>style.visibility</p:attrName>
+                                        </p:attrNameLst>
+                                      </p:cBhvr>
+                                      <p:to>
+                                        <p:strVal val="visible"/>
+                                      </p:to>
+                                    </p:set>
+                                  </p:childTnLst>
+                                </p:cTn>
+                              </p:par>
+                            </p:childTnLst>
+                          </p:cTn>
+                        </p:par>
+                      </p:childTnLst>
+                    </p:cTn>
+                  </p:par>
+                  <p:par>
+                    <p:cTn id="25" fill="hold">
+                      <p:stCondLst>
+                        <p:cond delay="indefinite"/>
+                      </p:stCondLst>
+                      <p:childTnLst>
+                        <p:par>
+                          <p:cTn id="26" fill="hold">
+                            <p:stCondLst>
+                              <p:cond delay="0"/>
+                            </p:stCondLst>
+                            <p:childTnLst>
+                              <p:par>
+                                <p:cTn id="27" presetID="1" presetClass="entr" presetSubtype="0" fill="hold" nodeType="clickEffect">
+                                  <p:stCondLst>
+                                    <p:cond delay="0"/>
+                                  </p:stCondLst>
+                                  <p:childTnLst>
+                                    <p:set>
+                                      <p:cBhvr>
+                                        <p:cTn id="28" dur="1" fill="hold">
+                                          <p:stCondLst>
+                                            <p:cond delay="0"/>
+                                          </p:stCondLst>
+                                        </p:cTn>
+                                        <p:tgtEl>
+                                          <p:spTgt spid="3">
+                                            <p:txEl>
+                                              <p:pRg st="9" end="9"/>
+                                            </p:txEl>
+                                          </p:spTgt>
+                                        </p:tgtEl>
+                                        <p:attrNameLst>
+                                          <p:attrName>style.visibility</p:attrName>
+                                        </p:attrNameLst>
+                                      </p:cBhvr>
+                                      <p:to>
+                                        <p:strVal val="visible"/>
+                                      </p:to>
+                                    </p:set>
+                                  </p:childTnLst>
+                                </p:cTn>
+                              </p:par>
+                            </p:childTnLst>
+                          </p:cTn>
+                        </p:par>
+                      </p:childTnLst>
+                    </p:cTn>
+                  </p:par>
+                </p:childTnLst>
+              </p:cTn>
+              <p:prevCondLst>
+                <p:cond evt="onPrev" delay="0">
+                  <p:tgtEl>
+                    <p:sldTgt/>
+                  </p:tgtEl>
+                </p:cond>
+              </p:prevCondLst>
+              <p:nextCondLst>
+                <p:cond evt="onNext" delay="0">
+                  <p:tgtEl>
+                    <p:sldTgt/>
+                  </p:tgtEl>
+                </p:cond>
+              </p:nextCondLst>
+            </p:seq>
+          </p:childTnLst>
+        </p:cTn>
+      </p:par>
+    </p:tnLst>
+  </p:timing>
 </p:sld>
 </file>
 
@@ -11895,7 +13013,7 @@
         </p:spPr>
         <p:txBody>
           <a:bodyPr>
-            <a:normAutofit fontScale="92500"/>
+            <a:normAutofit/>
           </a:bodyPr>
           <a:lstStyle/>
           <a:p>
@@ -11931,14 +13049,7 @@
             </a:r>
             <a:r>
               <a:rPr lang="en-US" dirty="0"/>
-              <a:t>You may use AI to generate discrete portions of code. </a:t>
-            </a:r>
-          </a:p>
-          <a:p>
-            <a:pPr lvl="1"/>
-            <a:r>
-              <a:rPr lang="en-US" dirty="0"/>
-              <a:t>Required: Include the exact prompt(s) used to generate the code in your submission </a:t>
+              <a:t>You may use AI to generate discrete portions of code and to resolve exceptions </a:t>
             </a:r>
           </a:p>
           <a:p>
@@ -11960,14 +13071,7 @@
             </a:r>
             <a:r>
               <a:rPr lang="en-US" dirty="0"/>
-              <a:t> Cite AI use per the Harvard Academic Integrity Policy (e.g., "Code generated using [Tool Name] with prompt: ‘...’")</a:t>
-            </a:r>
-          </a:p>
-          <a:p>
-            <a:pPr lvl="1"/>
-            <a:r>
-              <a:rPr lang="en-US" dirty="0"/>
-              <a:t>An exception message is a valid prompt </a:t>
+              <a:t> Cite AI use per the Harvard Academic Integrity Policy</a:t>
             </a:r>
           </a:p>
           <a:p>
@@ -12045,6 +13149,281 @@
   <p:clrMapOvr>
     <a:masterClrMapping/>
   </p:clrMapOvr>
+  <p:timing>
+    <p:tnLst>
+      <p:par>
+        <p:cTn id="1" dur="indefinite" restart="never" nodeType="tmRoot">
+          <p:childTnLst>
+            <p:seq concurrent="1" nextAc="seek">
+              <p:cTn id="2" dur="indefinite" nodeType="mainSeq">
+                <p:childTnLst>
+                  <p:par>
+                    <p:cTn id="3" fill="hold">
+                      <p:stCondLst>
+                        <p:cond delay="indefinite"/>
+                      </p:stCondLst>
+                      <p:childTnLst>
+                        <p:par>
+                          <p:cTn id="4" fill="hold">
+                            <p:stCondLst>
+                              <p:cond delay="0"/>
+                            </p:stCondLst>
+                            <p:childTnLst>
+                              <p:par>
+                                <p:cTn id="5" presetID="1" presetClass="entr" presetSubtype="0" fill="hold" nodeType="clickEffect">
+                                  <p:stCondLst>
+                                    <p:cond delay="0"/>
+                                  </p:stCondLst>
+                                  <p:childTnLst>
+                                    <p:set>
+                                      <p:cBhvr>
+                                        <p:cTn id="6" dur="1" fill="hold">
+                                          <p:stCondLst>
+                                            <p:cond delay="0"/>
+                                          </p:stCondLst>
+                                        </p:cTn>
+                                        <p:tgtEl>
+                                          <p:spTgt spid="3">
+                                            <p:txEl>
+                                              <p:pRg st="1" end="1"/>
+                                            </p:txEl>
+                                          </p:spTgt>
+                                        </p:tgtEl>
+                                        <p:attrNameLst>
+                                          <p:attrName>style.visibility</p:attrName>
+                                        </p:attrNameLst>
+                                      </p:cBhvr>
+                                      <p:to>
+                                        <p:strVal val="visible"/>
+                                      </p:to>
+                                    </p:set>
+                                  </p:childTnLst>
+                                </p:cTn>
+                              </p:par>
+                            </p:childTnLst>
+                          </p:cTn>
+                        </p:par>
+                      </p:childTnLst>
+                    </p:cTn>
+                  </p:par>
+                  <p:par>
+                    <p:cTn id="7" fill="hold">
+                      <p:stCondLst>
+                        <p:cond delay="indefinite"/>
+                      </p:stCondLst>
+                      <p:childTnLst>
+                        <p:par>
+                          <p:cTn id="8" fill="hold">
+                            <p:stCondLst>
+                              <p:cond delay="0"/>
+                            </p:stCondLst>
+                            <p:childTnLst>
+                              <p:par>
+                                <p:cTn id="9" presetID="1" presetClass="entr" presetSubtype="0" fill="hold" nodeType="clickEffect">
+                                  <p:stCondLst>
+                                    <p:cond delay="0"/>
+                                  </p:stCondLst>
+                                  <p:childTnLst>
+                                    <p:set>
+                                      <p:cBhvr>
+                                        <p:cTn id="10" dur="1" fill="hold">
+                                          <p:stCondLst>
+                                            <p:cond delay="0"/>
+                                          </p:stCondLst>
+                                        </p:cTn>
+                                        <p:tgtEl>
+                                          <p:spTgt spid="3">
+                                            <p:txEl>
+                                              <p:pRg st="2" end="2"/>
+                                            </p:txEl>
+                                          </p:spTgt>
+                                        </p:tgtEl>
+                                        <p:attrNameLst>
+                                          <p:attrName>style.visibility</p:attrName>
+                                        </p:attrNameLst>
+                                      </p:cBhvr>
+                                      <p:to>
+                                        <p:strVal val="visible"/>
+                                      </p:to>
+                                    </p:set>
+                                  </p:childTnLst>
+                                </p:cTn>
+                              </p:par>
+                            </p:childTnLst>
+                          </p:cTn>
+                        </p:par>
+                      </p:childTnLst>
+                    </p:cTn>
+                  </p:par>
+                  <p:par>
+                    <p:cTn id="11" fill="hold">
+                      <p:stCondLst>
+                        <p:cond delay="indefinite"/>
+                      </p:stCondLst>
+                      <p:childTnLst>
+                        <p:par>
+                          <p:cTn id="12" fill="hold">
+                            <p:stCondLst>
+                              <p:cond delay="0"/>
+                            </p:stCondLst>
+                            <p:childTnLst>
+                              <p:par>
+                                <p:cTn id="13" presetID="1" presetClass="entr" presetSubtype="0" fill="hold" nodeType="clickEffect">
+                                  <p:stCondLst>
+                                    <p:cond delay="0"/>
+                                  </p:stCondLst>
+                                  <p:childTnLst>
+                                    <p:set>
+                                      <p:cBhvr>
+                                        <p:cTn id="14" dur="1" fill="hold">
+                                          <p:stCondLst>
+                                            <p:cond delay="0"/>
+                                          </p:stCondLst>
+                                        </p:cTn>
+                                        <p:tgtEl>
+                                          <p:spTgt spid="3">
+                                            <p:txEl>
+                                              <p:pRg st="3" end="3"/>
+                                            </p:txEl>
+                                          </p:spTgt>
+                                        </p:tgtEl>
+                                        <p:attrNameLst>
+                                          <p:attrName>style.visibility</p:attrName>
+                                        </p:attrNameLst>
+                                      </p:cBhvr>
+                                      <p:to>
+                                        <p:strVal val="visible"/>
+                                      </p:to>
+                                    </p:set>
+                                  </p:childTnLst>
+                                </p:cTn>
+                              </p:par>
+                            </p:childTnLst>
+                          </p:cTn>
+                        </p:par>
+                      </p:childTnLst>
+                    </p:cTn>
+                  </p:par>
+                  <p:par>
+                    <p:cTn id="15" fill="hold">
+                      <p:stCondLst>
+                        <p:cond delay="indefinite"/>
+                      </p:stCondLst>
+                      <p:childTnLst>
+                        <p:par>
+                          <p:cTn id="16" fill="hold">
+                            <p:stCondLst>
+                              <p:cond delay="0"/>
+                            </p:stCondLst>
+                            <p:childTnLst>
+                              <p:par>
+                                <p:cTn id="17" presetID="1" presetClass="entr" presetSubtype="0" fill="hold" nodeType="clickEffect">
+                                  <p:stCondLst>
+                                    <p:cond delay="0"/>
+                                  </p:stCondLst>
+                                  <p:childTnLst>
+                                    <p:set>
+                                      <p:cBhvr>
+                                        <p:cTn id="18" dur="1" fill="hold">
+                                          <p:stCondLst>
+                                            <p:cond delay="0"/>
+                                          </p:stCondLst>
+                                        </p:cTn>
+                                        <p:tgtEl>
+                                          <p:spTgt spid="3">
+                                            <p:txEl>
+                                              <p:pRg st="4" end="4"/>
+                                            </p:txEl>
+                                          </p:spTgt>
+                                        </p:tgtEl>
+                                        <p:attrNameLst>
+                                          <p:attrName>style.visibility</p:attrName>
+                                        </p:attrNameLst>
+                                      </p:cBhvr>
+                                      <p:to>
+                                        <p:strVal val="visible"/>
+                                      </p:to>
+                                    </p:set>
+                                  </p:childTnLst>
+                                </p:cTn>
+                              </p:par>
+                            </p:childTnLst>
+                          </p:cTn>
+                        </p:par>
+                      </p:childTnLst>
+                    </p:cTn>
+                  </p:par>
+                  <p:par>
+                    <p:cTn id="19" fill="hold">
+                      <p:stCondLst>
+                        <p:cond delay="indefinite"/>
+                      </p:stCondLst>
+                      <p:childTnLst>
+                        <p:par>
+                          <p:cTn id="20" fill="hold">
+                            <p:stCondLst>
+                              <p:cond delay="0"/>
+                            </p:stCondLst>
+                            <p:childTnLst>
+                              <p:par>
+                                <p:cTn id="21" presetID="1" presetClass="entr" presetSubtype="0" fill="hold" nodeType="clickEffect">
+                                  <p:stCondLst>
+                                    <p:cond delay="0"/>
+                                  </p:stCondLst>
+                                  <p:childTnLst>
+                                    <p:set>
+                                      <p:cBhvr>
+                                        <p:cTn id="22" dur="1" fill="hold">
+                                          <p:stCondLst>
+                                            <p:cond delay="0"/>
+                                          </p:stCondLst>
+                                        </p:cTn>
+                                        <p:tgtEl>
+                                          <p:spTgt spid="3">
+                                            <p:txEl>
+                                              <p:pRg st="5" end="5"/>
+                                            </p:txEl>
+                                          </p:spTgt>
+                                        </p:tgtEl>
+                                        <p:attrNameLst>
+                                          <p:attrName>style.visibility</p:attrName>
+                                        </p:attrNameLst>
+                                      </p:cBhvr>
+                                      <p:to>
+                                        <p:strVal val="visible"/>
+                                      </p:to>
+                                    </p:set>
+                                  </p:childTnLst>
+                                </p:cTn>
+                              </p:par>
+                            </p:childTnLst>
+                          </p:cTn>
+                        </p:par>
+                      </p:childTnLst>
+                    </p:cTn>
+                  </p:par>
+                </p:childTnLst>
+              </p:cTn>
+              <p:prevCondLst>
+                <p:cond evt="onPrev" delay="0">
+                  <p:tgtEl>
+                    <p:sldTgt/>
+                  </p:tgtEl>
+                </p:cond>
+              </p:prevCondLst>
+              <p:nextCondLst>
+                <p:cond evt="onNext" delay="0">
+                  <p:tgtEl>
+                    <p:sldTgt/>
+                  </p:tgtEl>
+                </p:cond>
+              </p:nextCondLst>
+            </p:seq>
+          </p:childTnLst>
+        </p:cTn>
+      </p:par>
+    </p:tnLst>
+  </p:timing>
 </p:sld>
 </file>
 
@@ -15055,8 +16434,8 @@
           <a:chExt cx="0" cy="0"/>
         </a:xfrm>
       </p:grpSpPr>
-      <mc:AlternateContent xmlns:mc="http://schemas.openxmlformats.org/markup-compatibility/2006" xmlns:a14="http://schemas.microsoft.com/office/drawing/2010/main">
-        <mc:Choice Requires="a14">
+      <mc:AlternateContent xmlns:mc="http://schemas.openxmlformats.org/markup-compatibility/2006">
+        <mc:Choice xmlns:a14="http://schemas.microsoft.com/office/drawing/2010/main" Requires="a14">
           <p:sp>
             <p:nvSpPr>
               <p:cNvPr id="3" name="Content Placeholder 2">
@@ -15158,7 +16537,14 @@
                 </a:r>
                 <a:r>
                   <a:rPr lang="en-US" dirty="0"/>
-                  <a:t> is a core technique for scaling data mining algorithms   </a:t>
+                  <a:t> is a core technique for massively scaling data mining algorithms</a:t>
+                </a:r>
+              </a:p>
+              <a:p>
+                <a:pPr lvl="1"/>
+                <a:r>
+                  <a:rPr lang="en-US" dirty="0"/>
+                  <a:t>Massive scalability is a theme of this course  </a:t>
                 </a:r>
               </a:p>
               <a:p>
@@ -15173,7 +16559,7 @@
             </p:txBody>
           </p:sp>
         </mc:Choice>
-        <mc:Fallback xmlns="">
+        <mc:Fallback>
           <p:sp>
             <p:nvSpPr>
               <p:cNvPr id="3" name="Content Placeholder 2">
@@ -15494,6 +16880,37 @@
                                   </p:childTnLst>
                                 </p:cTn>
                               </p:par>
+                              <p:par>
+                                <p:cTn id="19" presetID="1" presetClass="entr" presetSubtype="0" fill="hold" nodeType="withEffect">
+                                  <p:stCondLst>
+                                    <p:cond delay="0"/>
+                                  </p:stCondLst>
+                                  <p:childTnLst>
+                                    <p:set>
+                                      <p:cBhvr>
+                                        <p:cTn id="20" dur="1" fill="hold">
+                                          <p:stCondLst>
+                                            <p:cond delay="0"/>
+                                          </p:stCondLst>
+                                        </p:cTn>
+                                        <p:tgtEl>
+                                          <p:spTgt spid="3">
+                                            <p:txEl>
+                                              <p:pRg st="6" end="6"/>
+                                            </p:txEl>
+                                          </p:spTgt>
+                                        </p:tgtEl>
+                                        <p:attrNameLst>
+                                          <p:attrName>style.visibility</p:attrName>
+                                        </p:attrNameLst>
+                                      </p:cBhvr>
+                                      <p:to>
+                                        <p:strVal val="visible"/>
+                                      </p:to>
+                                    </p:set>
+                                  </p:childTnLst>
+                                </p:cTn>
+                              </p:par>
                             </p:childTnLst>
                           </p:cTn>
                         </p:par>
@@ -15548,8 +16965,8 @@
           <a:chExt cx="0" cy="0"/>
         </a:xfrm>
       </p:grpSpPr>
-      <mc:AlternateContent xmlns:mc="http://schemas.openxmlformats.org/markup-compatibility/2006">
-        <mc:Choice xmlns:a14="http://schemas.microsoft.com/office/drawing/2010/main" Requires="a14">
+      <mc:AlternateContent xmlns:mc="http://schemas.openxmlformats.org/markup-compatibility/2006" xmlns:a14="http://schemas.microsoft.com/office/drawing/2010/main">
+        <mc:Choice Requires="a14">
           <p:sp>
             <p:nvSpPr>
               <p:cNvPr id="3" name="Content Placeholder 2">
@@ -15806,7 +17223,7 @@
             </p:txBody>
           </p:sp>
         </mc:Choice>
-        <mc:Fallback>
+        <mc:Fallback xmlns="">
           <p:sp>
             <p:nvSpPr>
               <p:cNvPr id="3" name="Content Placeholder 2">
@@ -16220,8 +17637,8 @@
           </a:p>
         </p:txBody>
       </p:sp>
-      <mc:AlternateContent xmlns:mc="http://schemas.openxmlformats.org/markup-compatibility/2006">
-        <mc:Choice xmlns:a14="http://schemas.microsoft.com/office/drawing/2010/main" Requires="a14">
+      <mc:AlternateContent xmlns:mc="http://schemas.openxmlformats.org/markup-compatibility/2006" xmlns:a14="http://schemas.microsoft.com/office/drawing/2010/main">
+        <mc:Choice Requires="a14">
           <p:graphicFrame>
             <p:nvGraphicFramePr>
               <p:cNvPr id="2" name="Table 3">
@@ -17876,7 +19293,7 @@
             </a:graphic>
           </p:graphicFrame>
         </mc:Choice>
-        <mc:Fallback>
+        <mc:Fallback xmlns="">
           <p:graphicFrame>
             <p:nvGraphicFramePr>
               <p:cNvPr id="2" name="Table 3">
@@ -21001,8 +22418,8 @@
           </a:p>
         </p:txBody>
       </p:sp>
-      <mc:AlternateContent xmlns:mc="http://schemas.openxmlformats.org/markup-compatibility/2006" xmlns:a14="http://schemas.microsoft.com/office/drawing/2010/main">
-        <mc:Choice Requires="a14">
+      <mc:AlternateContent xmlns:mc="http://schemas.openxmlformats.org/markup-compatibility/2006">
+        <mc:Choice xmlns:a14="http://schemas.microsoft.com/office/drawing/2010/main" Requires="a14">
           <p:sp>
             <p:nvSpPr>
               <p:cNvPr id="42" name="Content Placeholder 2">
@@ -21246,26 +22663,37 @@
                 <a14:m>
                   <m:oMath xmlns:m="http://schemas.openxmlformats.org/officeDocument/2006/math">
                     <m:r>
-                      <a:rPr lang="en-US" b="1" i="1">
+                      <a:rPr lang="en-US" b="1" i="1" smtClean="0">
                         <a:latin typeface="Cambria Math" panose="02040503050406030204" pitchFamily="18" charset="0"/>
+                        <a:ea typeface="Cambria Math" panose="02040503050406030204" pitchFamily="18" charset="0"/>
+                      </a:rPr>
+                      <m:t>≤</m:t>
+                    </m:r>
+                    <m:r>
+                      <a:rPr lang="en-US" b="1" i="1" smtClean="0">
+                        <a:latin typeface="Cambria Math" panose="02040503050406030204" pitchFamily="18" charset="0"/>
+                        <a:ea typeface="Cambria Math" panose="02040503050406030204" pitchFamily="18" charset="0"/>
                       </a:rPr>
                       <m:t>𝑶</m:t>
                     </m:r>
                     <m:r>
-                      <a:rPr lang="en-US" b="1" i="1">
+                      <a:rPr lang="en-US" b="1" i="1" smtClean="0">
                         <a:latin typeface="Cambria Math" panose="02040503050406030204" pitchFamily="18" charset="0"/>
+                        <a:ea typeface="Cambria Math" panose="02040503050406030204" pitchFamily="18" charset="0"/>
                       </a:rPr>
                       <m:t>(</m:t>
                     </m:r>
                     <m:r>
-                      <a:rPr lang="en-US" b="1" i="1">
+                      <a:rPr lang="en-US" b="1" i="1" smtClean="0">
                         <a:latin typeface="Cambria Math" panose="02040503050406030204" pitchFamily="18" charset="0"/>
+                        <a:ea typeface="Cambria Math" panose="02040503050406030204" pitchFamily="18" charset="0"/>
                       </a:rPr>
                       <m:t>𝟏</m:t>
                     </m:r>
                     <m:r>
-                      <a:rPr lang="en-US" b="1" i="1">
+                      <a:rPr lang="en-US" b="1" i="1" smtClean="0">
                         <a:latin typeface="Cambria Math" panose="02040503050406030204" pitchFamily="18" charset="0"/>
+                        <a:ea typeface="Cambria Math" panose="02040503050406030204" pitchFamily="18" charset="0"/>
                       </a:rPr>
                       <m:t>)</m:t>
                     </m:r>
@@ -21273,7 +22701,7 @@
                 </a14:m>
                 <a:r>
                   <a:rPr lang="en-US" b="1" dirty="0"/>
-                  <a:t> average time!</a:t>
+                  <a:t> average time</a:t>
                 </a:r>
               </a:p>
               <a:p>
@@ -21285,7 +22713,7 @@
             </p:txBody>
           </p:sp>
         </mc:Choice>
-        <mc:Fallback xmlns="">
+        <mc:Fallback>
           <p:sp>
             <p:nvSpPr>
               <p:cNvPr id="42" name="Content Placeholder 2">
@@ -21629,35 +23057,26 @@
                                   </p:childTnLst>
                                 </p:cTn>
                               </p:par>
+                            </p:childTnLst>
+                          </p:cTn>
+                        </p:par>
+                      </p:childTnLst>
+                    </p:cTn>
+                  </p:par>
+                  <p:par>
+                    <p:cTn id="7" fill="hold">
+                      <p:stCondLst>
+                        <p:cond delay="indefinite"/>
+                      </p:stCondLst>
+                      <p:childTnLst>
+                        <p:par>
+                          <p:cTn id="8" fill="hold">
+                            <p:stCondLst>
+                              <p:cond delay="0"/>
+                            </p:stCondLst>
+                            <p:childTnLst>
                               <p:par>
-                                <p:cTn id="7" presetID="1" presetClass="entr" presetSubtype="0" fill="hold" nodeType="withEffect">
-                                  <p:stCondLst>
-                                    <p:cond delay="0"/>
-                                  </p:stCondLst>
-                                  <p:childTnLst>
-                                    <p:set>
-                                      <p:cBhvr>
-                                        <p:cTn id="8" dur="1" fill="hold">
-                                          <p:stCondLst>
-                                            <p:cond delay="0"/>
-                                          </p:stCondLst>
-                                        </p:cTn>
-                                        <p:tgtEl>
-                                          <p:spTgt spid="9"/>
-                                        </p:tgtEl>
-                                        <p:attrNameLst>
-                                          <p:attrName>style.visibility</p:attrName>
-                                        </p:attrNameLst>
-                                      </p:cBhvr>
-                                      <p:to>
-                                        <p:strVal val="visible"/>
-                                      </p:to>
-                                    </p:set>
-                                  </p:childTnLst>
-                                </p:cTn>
-                              </p:par>
-                              <p:par>
-                                <p:cTn id="9" presetID="1" presetClass="entr" presetSubtype="0" fill="hold" grpId="0" nodeType="withEffect">
+                                <p:cTn id="9" presetID="1" presetClass="entr" presetSubtype="0" fill="hold" nodeType="clickEffect">
                                   <p:stCondLst>
                                     <p:cond delay="0"/>
                                   </p:stCondLst>
@@ -21670,7 +23089,11 @@
                                           </p:stCondLst>
                                         </p:cTn>
                                         <p:tgtEl>
-                                          <p:spTgt spid="40"/>
+                                          <p:spTgt spid="42">
+                                            <p:txEl>
+                                              <p:pRg st="1" end="1"/>
+                                            </p:txEl>
+                                          </p:spTgt>
                                         </p:tgtEl>
                                         <p:attrNameLst>
                                           <p:attrName>style.visibility</p:attrName>
@@ -21717,514 +23140,6 @@
                                         <p:tgtEl>
                                           <p:spTgt spid="42">
                                             <p:txEl>
-                                              <p:pRg st="1" end="1"/>
-                                            </p:txEl>
-                                          </p:spTgt>
-                                        </p:tgtEl>
-                                        <p:attrNameLst>
-                                          <p:attrName>style.visibility</p:attrName>
-                                        </p:attrNameLst>
-                                      </p:cBhvr>
-                                      <p:to>
-                                        <p:strVal val="visible"/>
-                                      </p:to>
-                                    </p:set>
-                                  </p:childTnLst>
-                                </p:cTn>
-                              </p:par>
-                              <p:par>
-                                <p:cTn id="15" presetID="1" presetClass="entr" presetSubtype="0" fill="hold" grpId="0" nodeType="withEffect">
-                                  <p:stCondLst>
-                                    <p:cond delay="0"/>
-                                  </p:stCondLst>
-                                  <p:childTnLst>
-                                    <p:set>
-                                      <p:cBhvr>
-                                        <p:cTn id="16" dur="1" fill="hold">
-                                          <p:stCondLst>
-                                            <p:cond delay="0"/>
-                                          </p:stCondLst>
-                                        </p:cTn>
-                                        <p:tgtEl>
-                                          <p:spTgt spid="23"/>
-                                        </p:tgtEl>
-                                        <p:attrNameLst>
-                                          <p:attrName>style.visibility</p:attrName>
-                                        </p:attrNameLst>
-                                      </p:cBhvr>
-                                      <p:to>
-                                        <p:strVal val="visible"/>
-                                      </p:to>
-                                    </p:set>
-                                  </p:childTnLst>
-                                </p:cTn>
-                              </p:par>
-                              <p:par>
-                                <p:cTn id="17" presetID="1" presetClass="entr" presetSubtype="0" fill="hold" grpId="0" nodeType="withEffect">
-                                  <p:stCondLst>
-                                    <p:cond delay="0"/>
-                                  </p:stCondLst>
-                                  <p:childTnLst>
-                                    <p:set>
-                                      <p:cBhvr>
-                                        <p:cTn id="18" dur="1" fill="hold">
-                                          <p:stCondLst>
-                                            <p:cond delay="0"/>
-                                          </p:stCondLst>
-                                        </p:cTn>
-                                        <p:tgtEl>
-                                          <p:spTgt spid="2"/>
-                                        </p:tgtEl>
-                                        <p:attrNameLst>
-                                          <p:attrName>style.visibility</p:attrName>
-                                        </p:attrNameLst>
-                                      </p:cBhvr>
-                                      <p:to>
-                                        <p:strVal val="visible"/>
-                                      </p:to>
-                                    </p:set>
-                                  </p:childTnLst>
-                                </p:cTn>
-                              </p:par>
-                              <p:par>
-                                <p:cTn id="19" presetID="1" presetClass="entr" presetSubtype="0" fill="hold" grpId="0" nodeType="withEffect">
-                                  <p:stCondLst>
-                                    <p:cond delay="0"/>
-                                  </p:stCondLst>
-                                  <p:childTnLst>
-                                    <p:set>
-                                      <p:cBhvr>
-                                        <p:cTn id="20" dur="1" fill="hold">
-                                          <p:stCondLst>
-                                            <p:cond delay="0"/>
-                                          </p:stCondLst>
-                                        </p:cTn>
-                                        <p:tgtEl>
-                                          <p:spTgt spid="5"/>
-                                        </p:tgtEl>
-                                        <p:attrNameLst>
-                                          <p:attrName>style.visibility</p:attrName>
-                                        </p:attrNameLst>
-                                      </p:cBhvr>
-                                      <p:to>
-                                        <p:strVal val="visible"/>
-                                      </p:to>
-                                    </p:set>
-                                  </p:childTnLst>
-                                </p:cTn>
-                              </p:par>
-                              <p:par>
-                                <p:cTn id="21" presetID="1" presetClass="entr" presetSubtype="0" fill="hold" grpId="0" nodeType="withEffect">
-                                  <p:stCondLst>
-                                    <p:cond delay="0"/>
-                                  </p:stCondLst>
-                                  <p:childTnLst>
-                                    <p:set>
-                                      <p:cBhvr>
-                                        <p:cTn id="22" dur="1" fill="hold">
-                                          <p:stCondLst>
-                                            <p:cond delay="0"/>
-                                          </p:stCondLst>
-                                        </p:cTn>
-                                        <p:tgtEl>
-                                          <p:spTgt spid="11"/>
-                                        </p:tgtEl>
-                                        <p:attrNameLst>
-                                          <p:attrName>style.visibility</p:attrName>
-                                        </p:attrNameLst>
-                                      </p:cBhvr>
-                                      <p:to>
-                                        <p:strVal val="visible"/>
-                                      </p:to>
-                                    </p:set>
-                                  </p:childTnLst>
-                                </p:cTn>
-                              </p:par>
-                              <p:par>
-                                <p:cTn id="23" presetID="1" presetClass="entr" presetSubtype="0" fill="hold" grpId="0" nodeType="withEffect">
-                                  <p:stCondLst>
-                                    <p:cond delay="0"/>
-                                  </p:stCondLst>
-                                  <p:childTnLst>
-                                    <p:set>
-                                      <p:cBhvr>
-                                        <p:cTn id="24" dur="1" fill="hold">
-                                          <p:stCondLst>
-                                            <p:cond delay="0"/>
-                                          </p:stCondLst>
-                                        </p:cTn>
-                                        <p:tgtEl>
-                                          <p:spTgt spid="12"/>
-                                        </p:tgtEl>
-                                        <p:attrNameLst>
-                                          <p:attrName>style.visibility</p:attrName>
-                                        </p:attrNameLst>
-                                      </p:cBhvr>
-                                      <p:to>
-                                        <p:strVal val="visible"/>
-                                      </p:to>
-                                    </p:set>
-                                  </p:childTnLst>
-                                </p:cTn>
-                              </p:par>
-                              <p:par>
-                                <p:cTn id="25" presetID="1" presetClass="entr" presetSubtype="0" fill="hold" grpId="0" nodeType="withEffect">
-                                  <p:stCondLst>
-                                    <p:cond delay="0"/>
-                                  </p:stCondLst>
-                                  <p:childTnLst>
-                                    <p:set>
-                                      <p:cBhvr>
-                                        <p:cTn id="26" dur="1" fill="hold">
-                                          <p:stCondLst>
-                                            <p:cond delay="0"/>
-                                          </p:stCondLst>
-                                        </p:cTn>
-                                        <p:tgtEl>
-                                          <p:spTgt spid="14"/>
-                                        </p:tgtEl>
-                                        <p:attrNameLst>
-                                          <p:attrName>style.visibility</p:attrName>
-                                        </p:attrNameLst>
-                                      </p:cBhvr>
-                                      <p:to>
-                                        <p:strVal val="visible"/>
-                                      </p:to>
-                                    </p:set>
-                                  </p:childTnLst>
-                                </p:cTn>
-                              </p:par>
-                              <p:par>
-                                <p:cTn id="27" presetID="1" presetClass="entr" presetSubtype="0" fill="hold" grpId="0" nodeType="withEffect">
-                                  <p:stCondLst>
-                                    <p:cond delay="0"/>
-                                  </p:stCondLst>
-                                  <p:childTnLst>
-                                    <p:set>
-                                      <p:cBhvr>
-                                        <p:cTn id="28" dur="1" fill="hold">
-                                          <p:stCondLst>
-                                            <p:cond delay="0"/>
-                                          </p:stCondLst>
-                                        </p:cTn>
-                                        <p:tgtEl>
-                                          <p:spTgt spid="15"/>
-                                        </p:tgtEl>
-                                        <p:attrNameLst>
-                                          <p:attrName>style.visibility</p:attrName>
-                                        </p:attrNameLst>
-                                      </p:cBhvr>
-                                      <p:to>
-                                        <p:strVal val="visible"/>
-                                      </p:to>
-                                    </p:set>
-                                  </p:childTnLst>
-                                </p:cTn>
-                              </p:par>
-                              <p:par>
-                                <p:cTn id="29" presetID="1" presetClass="entr" presetSubtype="0" fill="hold" grpId="0" nodeType="withEffect">
-                                  <p:stCondLst>
-                                    <p:cond delay="0"/>
-                                  </p:stCondLst>
-                                  <p:childTnLst>
-                                    <p:set>
-                                      <p:cBhvr>
-                                        <p:cTn id="30" dur="1" fill="hold">
-                                          <p:stCondLst>
-                                            <p:cond delay="0"/>
-                                          </p:stCondLst>
-                                        </p:cTn>
-                                        <p:tgtEl>
-                                          <p:spTgt spid="24"/>
-                                        </p:tgtEl>
-                                        <p:attrNameLst>
-                                          <p:attrName>style.visibility</p:attrName>
-                                        </p:attrNameLst>
-                                      </p:cBhvr>
-                                      <p:to>
-                                        <p:strVal val="visible"/>
-                                      </p:to>
-                                    </p:set>
-                                  </p:childTnLst>
-                                </p:cTn>
-                              </p:par>
-                              <p:par>
-                                <p:cTn id="31" presetID="1" presetClass="entr" presetSubtype="0" fill="hold" grpId="0" nodeType="withEffect">
-                                  <p:stCondLst>
-                                    <p:cond delay="0"/>
-                                  </p:stCondLst>
-                                  <p:childTnLst>
-                                    <p:set>
-                                      <p:cBhvr>
-                                        <p:cTn id="32" dur="1" fill="hold">
-                                          <p:stCondLst>
-                                            <p:cond delay="0"/>
-                                          </p:stCondLst>
-                                        </p:cTn>
-                                        <p:tgtEl>
-                                          <p:spTgt spid="29"/>
-                                        </p:tgtEl>
-                                        <p:attrNameLst>
-                                          <p:attrName>style.visibility</p:attrName>
-                                        </p:attrNameLst>
-                                      </p:cBhvr>
-                                      <p:to>
-                                        <p:strVal val="visible"/>
-                                      </p:to>
-                                    </p:set>
-                                  </p:childTnLst>
-                                </p:cTn>
-                              </p:par>
-                              <p:par>
-                                <p:cTn id="33" presetID="1" presetClass="entr" presetSubtype="0" fill="hold" grpId="0" nodeType="withEffect">
-                                  <p:stCondLst>
-                                    <p:cond delay="0"/>
-                                  </p:stCondLst>
-                                  <p:childTnLst>
-                                    <p:set>
-                                      <p:cBhvr>
-                                        <p:cTn id="34" dur="1" fill="hold">
-                                          <p:stCondLst>
-                                            <p:cond delay="0"/>
-                                          </p:stCondLst>
-                                        </p:cTn>
-                                        <p:tgtEl>
-                                          <p:spTgt spid="30"/>
-                                        </p:tgtEl>
-                                        <p:attrNameLst>
-                                          <p:attrName>style.visibility</p:attrName>
-                                        </p:attrNameLst>
-                                      </p:cBhvr>
-                                      <p:to>
-                                        <p:strVal val="visible"/>
-                                      </p:to>
-                                    </p:set>
-                                  </p:childTnLst>
-                                </p:cTn>
-                              </p:par>
-                              <p:par>
-                                <p:cTn id="35" presetID="1" presetClass="entr" presetSubtype="0" fill="hold" grpId="0" nodeType="withEffect">
-                                  <p:stCondLst>
-                                    <p:cond delay="0"/>
-                                  </p:stCondLst>
-                                  <p:childTnLst>
-                                    <p:set>
-                                      <p:cBhvr>
-                                        <p:cTn id="36" dur="1" fill="hold">
-                                          <p:stCondLst>
-                                            <p:cond delay="0"/>
-                                          </p:stCondLst>
-                                        </p:cTn>
-                                        <p:tgtEl>
-                                          <p:spTgt spid="31"/>
-                                        </p:tgtEl>
-                                        <p:attrNameLst>
-                                          <p:attrName>style.visibility</p:attrName>
-                                        </p:attrNameLst>
-                                      </p:cBhvr>
-                                      <p:to>
-                                        <p:strVal val="visible"/>
-                                      </p:to>
-                                    </p:set>
-                                  </p:childTnLst>
-                                </p:cTn>
-                              </p:par>
-                              <p:par>
-                                <p:cTn id="37" presetID="1" presetClass="entr" presetSubtype="0" fill="hold" grpId="0" nodeType="withEffect">
-                                  <p:stCondLst>
-                                    <p:cond delay="0"/>
-                                  </p:stCondLst>
-                                  <p:childTnLst>
-                                    <p:set>
-                                      <p:cBhvr>
-                                        <p:cTn id="38" dur="1" fill="hold">
-                                          <p:stCondLst>
-                                            <p:cond delay="0"/>
-                                          </p:stCondLst>
-                                        </p:cTn>
-                                        <p:tgtEl>
-                                          <p:spTgt spid="32"/>
-                                        </p:tgtEl>
-                                        <p:attrNameLst>
-                                          <p:attrName>style.visibility</p:attrName>
-                                        </p:attrNameLst>
-                                      </p:cBhvr>
-                                      <p:to>
-                                        <p:strVal val="visible"/>
-                                      </p:to>
-                                    </p:set>
-                                  </p:childTnLst>
-                                </p:cTn>
-                              </p:par>
-                              <p:par>
-                                <p:cTn id="39" presetID="1" presetClass="entr" presetSubtype="0" fill="hold" grpId="0" nodeType="withEffect">
-                                  <p:stCondLst>
-                                    <p:cond delay="0"/>
-                                  </p:stCondLst>
-                                  <p:childTnLst>
-                                    <p:set>
-                                      <p:cBhvr>
-                                        <p:cTn id="40" dur="1" fill="hold">
-                                          <p:stCondLst>
-                                            <p:cond delay="0"/>
-                                          </p:stCondLst>
-                                        </p:cTn>
-                                        <p:tgtEl>
-                                          <p:spTgt spid="33"/>
-                                        </p:tgtEl>
-                                        <p:attrNameLst>
-                                          <p:attrName>style.visibility</p:attrName>
-                                        </p:attrNameLst>
-                                      </p:cBhvr>
-                                      <p:to>
-                                        <p:strVal val="visible"/>
-                                      </p:to>
-                                    </p:set>
-                                  </p:childTnLst>
-                                </p:cTn>
-                              </p:par>
-                              <p:par>
-                                <p:cTn id="41" presetID="1" presetClass="entr" presetSubtype="0" fill="hold" grpId="0" nodeType="withEffect">
-                                  <p:stCondLst>
-                                    <p:cond delay="0"/>
-                                  </p:stCondLst>
-                                  <p:childTnLst>
-                                    <p:set>
-                                      <p:cBhvr>
-                                        <p:cTn id="42" dur="1" fill="hold">
-                                          <p:stCondLst>
-                                            <p:cond delay="0"/>
-                                          </p:stCondLst>
-                                        </p:cTn>
-                                        <p:tgtEl>
-                                          <p:spTgt spid="36"/>
-                                        </p:tgtEl>
-                                        <p:attrNameLst>
-                                          <p:attrName>style.visibility</p:attrName>
-                                        </p:attrNameLst>
-                                      </p:cBhvr>
-                                      <p:to>
-                                        <p:strVal val="visible"/>
-                                      </p:to>
-                                    </p:set>
-                                  </p:childTnLst>
-                                </p:cTn>
-                              </p:par>
-                              <p:par>
-                                <p:cTn id="43" presetID="1" presetClass="entr" presetSubtype="0" fill="hold" grpId="0" nodeType="withEffect">
-                                  <p:stCondLst>
-                                    <p:cond delay="0"/>
-                                  </p:stCondLst>
-                                  <p:childTnLst>
-                                    <p:set>
-                                      <p:cBhvr>
-                                        <p:cTn id="44" dur="1" fill="hold">
-                                          <p:stCondLst>
-                                            <p:cond delay="0"/>
-                                          </p:stCondLst>
-                                        </p:cTn>
-                                        <p:tgtEl>
-                                          <p:spTgt spid="37"/>
-                                        </p:tgtEl>
-                                        <p:attrNameLst>
-                                          <p:attrName>style.visibility</p:attrName>
-                                        </p:attrNameLst>
-                                      </p:cBhvr>
-                                      <p:to>
-                                        <p:strVal val="visible"/>
-                                      </p:to>
-                                    </p:set>
-                                  </p:childTnLst>
-                                </p:cTn>
-                              </p:par>
-                              <p:par>
-                                <p:cTn id="45" presetID="1" presetClass="entr" presetSubtype="0" fill="hold" grpId="0" nodeType="withEffect">
-                                  <p:stCondLst>
-                                    <p:cond delay="0"/>
-                                  </p:stCondLst>
-                                  <p:childTnLst>
-                                    <p:set>
-                                      <p:cBhvr>
-                                        <p:cTn id="46" dur="1" fill="hold">
-                                          <p:stCondLst>
-                                            <p:cond delay="0"/>
-                                          </p:stCondLst>
-                                        </p:cTn>
-                                        <p:tgtEl>
-                                          <p:spTgt spid="38"/>
-                                        </p:tgtEl>
-                                        <p:attrNameLst>
-                                          <p:attrName>style.visibility</p:attrName>
-                                        </p:attrNameLst>
-                                      </p:cBhvr>
-                                      <p:to>
-                                        <p:strVal val="visible"/>
-                                      </p:to>
-                                    </p:set>
-                                  </p:childTnLst>
-                                </p:cTn>
-                              </p:par>
-                              <p:par>
-                                <p:cTn id="47" presetID="1" presetClass="entr" presetSubtype="0" fill="hold" grpId="0" nodeType="withEffect">
-                                  <p:stCondLst>
-                                    <p:cond delay="0"/>
-                                  </p:stCondLst>
-                                  <p:childTnLst>
-                                    <p:set>
-                                      <p:cBhvr>
-                                        <p:cTn id="48" dur="1" fill="hold">
-                                          <p:stCondLst>
-                                            <p:cond delay="0"/>
-                                          </p:stCondLst>
-                                        </p:cTn>
-                                        <p:tgtEl>
-                                          <p:spTgt spid="41"/>
-                                        </p:tgtEl>
-                                        <p:attrNameLst>
-                                          <p:attrName>style.visibility</p:attrName>
-                                        </p:attrNameLst>
-                                      </p:cBhvr>
-                                      <p:to>
-                                        <p:strVal val="visible"/>
-                                      </p:to>
-                                    </p:set>
-                                  </p:childTnLst>
-                                </p:cTn>
-                              </p:par>
-                            </p:childTnLst>
-                          </p:cTn>
-                        </p:par>
-                      </p:childTnLst>
-                    </p:cTn>
-                  </p:par>
-                  <p:par>
-                    <p:cTn id="49" fill="hold">
-                      <p:stCondLst>
-                        <p:cond delay="indefinite"/>
-                      </p:stCondLst>
-                      <p:childTnLst>
-                        <p:par>
-                          <p:cTn id="50" fill="hold">
-                            <p:stCondLst>
-                              <p:cond delay="0"/>
-                            </p:stCondLst>
-                            <p:childTnLst>
-                              <p:par>
-                                <p:cTn id="51" presetID="1" presetClass="entr" presetSubtype="0" fill="hold" nodeType="clickEffect">
-                                  <p:stCondLst>
-                                    <p:cond delay="0"/>
-                                  </p:stCondLst>
-                                  <p:childTnLst>
-                                    <p:set>
-                                      <p:cBhvr>
-                                        <p:cTn id="52" dur="1" fill="hold">
-                                          <p:stCondLst>
-                                            <p:cond delay="0"/>
-                                          </p:stCondLst>
-                                        </p:cTn>
-                                        <p:tgtEl>
-                                          <p:spTgt spid="42">
-                                            <p:txEl>
                                               <p:pRg st="2" end="2"/>
                                             </p:txEl>
                                           </p:spTgt>
@@ -22247,26 +23162,26 @@
                     </p:cTn>
                   </p:par>
                   <p:par>
-                    <p:cTn id="53" fill="hold">
+                    <p:cTn id="15" fill="hold">
                       <p:stCondLst>
                         <p:cond delay="indefinite"/>
                       </p:stCondLst>
                       <p:childTnLst>
                         <p:par>
-                          <p:cTn id="54" fill="hold">
+                          <p:cTn id="16" fill="hold">
                             <p:stCondLst>
                               <p:cond delay="0"/>
                             </p:stCondLst>
                             <p:childTnLst>
                               <p:par>
-                                <p:cTn id="55" presetID="1" presetClass="entr" presetSubtype="0" fill="hold" nodeType="clickEffect">
+                                <p:cTn id="17" presetID="1" presetClass="entr" presetSubtype="0" fill="hold" nodeType="clickEffect">
                                   <p:stCondLst>
                                     <p:cond delay="0"/>
                                   </p:stCondLst>
                                   <p:childTnLst>
                                     <p:set>
                                       <p:cBhvr>
-                                        <p:cTn id="56" dur="1" fill="hold">
+                                        <p:cTn id="18" dur="1" fill="hold">
                                           <p:stCondLst>
                                             <p:cond delay="0"/>
                                           </p:stCondLst>
@@ -22296,26 +23211,26 @@
                     </p:cTn>
                   </p:par>
                   <p:par>
-                    <p:cTn id="57" fill="hold">
+                    <p:cTn id="19" fill="hold">
                       <p:stCondLst>
                         <p:cond delay="indefinite"/>
                       </p:stCondLst>
                       <p:childTnLst>
                         <p:par>
-                          <p:cTn id="58" fill="hold">
+                          <p:cTn id="20" fill="hold">
                             <p:stCondLst>
                               <p:cond delay="0"/>
                             </p:stCondLst>
                             <p:childTnLst>
                               <p:par>
-                                <p:cTn id="59" presetID="1" presetClass="entr" presetSubtype="0" fill="hold" nodeType="clickEffect">
+                                <p:cTn id="21" presetID="1" presetClass="entr" presetSubtype="0" fill="hold" nodeType="clickEffect">
                                   <p:stCondLst>
                                     <p:cond delay="0"/>
                                   </p:stCondLst>
                                   <p:childTnLst>
                                     <p:set>
                                       <p:cBhvr>
-                                        <p:cTn id="60" dur="1" fill="hold">
+                                        <p:cTn id="22" dur="1" fill="hold">
                                           <p:stCondLst>
                                             <p:cond delay="0"/>
                                           </p:stCondLst>
@@ -22338,8 +23253,511 @@
                                   </p:childTnLst>
                                 </p:cTn>
                               </p:par>
+                            </p:childTnLst>
+                          </p:cTn>
+                        </p:par>
+                      </p:childTnLst>
+                    </p:cTn>
+                  </p:par>
+                  <p:par>
+                    <p:cTn id="23" fill="hold">
+                      <p:stCondLst>
+                        <p:cond delay="indefinite"/>
+                      </p:stCondLst>
+                      <p:childTnLst>
+                        <p:par>
+                          <p:cTn id="24" fill="hold">
+                            <p:stCondLst>
+                              <p:cond delay="0"/>
+                            </p:stCondLst>
+                            <p:childTnLst>
                               <p:par>
-                                <p:cTn id="61" presetID="1" presetClass="entr" presetSubtype="0" fill="hold" nodeType="withEffect">
+                                <p:cTn id="25" presetID="1" presetClass="entr" presetSubtype="0" fill="hold" nodeType="clickEffect">
+                                  <p:stCondLst>
+                                    <p:cond delay="0"/>
+                                  </p:stCondLst>
+                                  <p:childTnLst>
+                                    <p:set>
+                                      <p:cBhvr>
+                                        <p:cTn id="26" dur="1" fill="hold">
+                                          <p:stCondLst>
+                                            <p:cond delay="0"/>
+                                          </p:stCondLst>
+                                        </p:cTn>
+                                        <p:tgtEl>
+                                          <p:spTgt spid="42">
+                                            <p:txEl>
+                                              <p:pRg st="5" end="5"/>
+                                            </p:txEl>
+                                          </p:spTgt>
+                                        </p:tgtEl>
+                                        <p:attrNameLst>
+                                          <p:attrName>style.visibility</p:attrName>
+                                        </p:attrNameLst>
+                                      </p:cBhvr>
+                                      <p:to>
+                                        <p:strVal val="visible"/>
+                                      </p:to>
+                                    </p:set>
+                                  </p:childTnLst>
+                                </p:cTn>
+                              </p:par>
+                            </p:childTnLst>
+                          </p:cTn>
+                        </p:par>
+                      </p:childTnLst>
+                    </p:cTn>
+                  </p:par>
+                  <p:par>
+                    <p:cTn id="27" fill="hold">
+                      <p:stCondLst>
+                        <p:cond delay="indefinite"/>
+                      </p:stCondLst>
+                      <p:childTnLst>
+                        <p:par>
+                          <p:cTn id="28" fill="hold">
+                            <p:stCondLst>
+                              <p:cond delay="0"/>
+                            </p:stCondLst>
+                            <p:childTnLst>
+                              <p:par>
+                                <p:cTn id="29" presetID="1" presetClass="entr" presetSubtype="0" fill="hold" nodeType="clickEffect">
+                                  <p:stCondLst>
+                                    <p:cond delay="0"/>
+                                  </p:stCondLst>
+                                  <p:childTnLst>
+                                    <p:set>
+                                      <p:cBhvr>
+                                        <p:cTn id="30" dur="1" fill="hold">
+                                          <p:stCondLst>
+                                            <p:cond delay="0"/>
+                                          </p:stCondLst>
+                                        </p:cTn>
+                                        <p:tgtEl>
+                                          <p:spTgt spid="42">
+                                            <p:txEl>
+                                              <p:pRg st="6" end="6"/>
+                                            </p:txEl>
+                                          </p:spTgt>
+                                        </p:tgtEl>
+                                        <p:attrNameLst>
+                                          <p:attrName>style.visibility</p:attrName>
+                                        </p:attrNameLst>
+                                      </p:cBhvr>
+                                      <p:to>
+                                        <p:strVal val="visible"/>
+                                      </p:to>
+                                    </p:set>
+                                  </p:childTnLst>
+                                </p:cTn>
+                              </p:par>
+                              <p:par>
+                                <p:cTn id="31" presetID="1" presetClass="entr" presetSubtype="0" fill="hold" nodeType="withEffect">
+                                  <p:stCondLst>
+                                    <p:cond delay="0"/>
+                                  </p:stCondLst>
+                                  <p:childTnLst>
+                                    <p:set>
+                                      <p:cBhvr>
+                                        <p:cTn id="32" dur="1" fill="hold">
+                                          <p:stCondLst>
+                                            <p:cond delay="0"/>
+                                          </p:stCondLst>
+                                        </p:cTn>
+                                        <p:tgtEl>
+                                          <p:spTgt spid="9"/>
+                                        </p:tgtEl>
+                                        <p:attrNameLst>
+                                          <p:attrName>style.visibility</p:attrName>
+                                        </p:attrNameLst>
+                                      </p:cBhvr>
+                                      <p:to>
+                                        <p:strVal val="visible"/>
+                                      </p:to>
+                                    </p:set>
+                                  </p:childTnLst>
+                                </p:cTn>
+                              </p:par>
+                              <p:par>
+                                <p:cTn id="33" presetID="1" presetClass="entr" presetSubtype="0" fill="hold" grpId="0" nodeType="withEffect">
+                                  <p:stCondLst>
+                                    <p:cond delay="0"/>
+                                  </p:stCondLst>
+                                  <p:childTnLst>
+                                    <p:set>
+                                      <p:cBhvr>
+                                        <p:cTn id="34" dur="1" fill="hold">
+                                          <p:stCondLst>
+                                            <p:cond delay="0"/>
+                                          </p:stCondLst>
+                                        </p:cTn>
+                                        <p:tgtEl>
+                                          <p:spTgt spid="40"/>
+                                        </p:tgtEl>
+                                        <p:attrNameLst>
+                                          <p:attrName>style.visibility</p:attrName>
+                                        </p:attrNameLst>
+                                      </p:cBhvr>
+                                      <p:to>
+                                        <p:strVal val="visible"/>
+                                      </p:to>
+                                    </p:set>
+                                  </p:childTnLst>
+                                </p:cTn>
+                              </p:par>
+                              <p:par>
+                                <p:cTn id="35" presetID="1" presetClass="entr" presetSubtype="0" fill="hold" grpId="0" nodeType="withEffect">
+                                  <p:stCondLst>
+                                    <p:cond delay="0"/>
+                                  </p:stCondLst>
+                                  <p:childTnLst>
+                                    <p:set>
+                                      <p:cBhvr>
+                                        <p:cTn id="36" dur="1" fill="hold">
+                                          <p:stCondLst>
+                                            <p:cond delay="0"/>
+                                          </p:stCondLst>
+                                        </p:cTn>
+                                        <p:tgtEl>
+                                          <p:spTgt spid="23"/>
+                                        </p:tgtEl>
+                                        <p:attrNameLst>
+                                          <p:attrName>style.visibility</p:attrName>
+                                        </p:attrNameLst>
+                                      </p:cBhvr>
+                                      <p:to>
+                                        <p:strVal val="visible"/>
+                                      </p:to>
+                                    </p:set>
+                                  </p:childTnLst>
+                                </p:cTn>
+                              </p:par>
+                              <p:par>
+                                <p:cTn id="37" presetID="1" presetClass="entr" presetSubtype="0" fill="hold" grpId="0" nodeType="withEffect">
+                                  <p:stCondLst>
+                                    <p:cond delay="0"/>
+                                  </p:stCondLst>
+                                  <p:childTnLst>
+                                    <p:set>
+                                      <p:cBhvr>
+                                        <p:cTn id="38" dur="1" fill="hold">
+                                          <p:stCondLst>
+                                            <p:cond delay="0"/>
+                                          </p:stCondLst>
+                                        </p:cTn>
+                                        <p:tgtEl>
+                                          <p:spTgt spid="2"/>
+                                        </p:tgtEl>
+                                        <p:attrNameLst>
+                                          <p:attrName>style.visibility</p:attrName>
+                                        </p:attrNameLst>
+                                      </p:cBhvr>
+                                      <p:to>
+                                        <p:strVal val="visible"/>
+                                      </p:to>
+                                    </p:set>
+                                  </p:childTnLst>
+                                </p:cTn>
+                              </p:par>
+                              <p:par>
+                                <p:cTn id="39" presetID="1" presetClass="entr" presetSubtype="0" fill="hold" grpId="0" nodeType="withEffect">
+                                  <p:stCondLst>
+                                    <p:cond delay="0"/>
+                                  </p:stCondLst>
+                                  <p:childTnLst>
+                                    <p:set>
+                                      <p:cBhvr>
+                                        <p:cTn id="40" dur="1" fill="hold">
+                                          <p:stCondLst>
+                                            <p:cond delay="0"/>
+                                          </p:stCondLst>
+                                        </p:cTn>
+                                        <p:tgtEl>
+                                          <p:spTgt spid="5"/>
+                                        </p:tgtEl>
+                                        <p:attrNameLst>
+                                          <p:attrName>style.visibility</p:attrName>
+                                        </p:attrNameLst>
+                                      </p:cBhvr>
+                                      <p:to>
+                                        <p:strVal val="visible"/>
+                                      </p:to>
+                                    </p:set>
+                                  </p:childTnLst>
+                                </p:cTn>
+                              </p:par>
+                              <p:par>
+                                <p:cTn id="41" presetID="1" presetClass="entr" presetSubtype="0" fill="hold" grpId="0" nodeType="withEffect">
+                                  <p:stCondLst>
+                                    <p:cond delay="0"/>
+                                  </p:stCondLst>
+                                  <p:childTnLst>
+                                    <p:set>
+                                      <p:cBhvr>
+                                        <p:cTn id="42" dur="1" fill="hold">
+                                          <p:stCondLst>
+                                            <p:cond delay="0"/>
+                                          </p:stCondLst>
+                                        </p:cTn>
+                                        <p:tgtEl>
+                                          <p:spTgt spid="11"/>
+                                        </p:tgtEl>
+                                        <p:attrNameLst>
+                                          <p:attrName>style.visibility</p:attrName>
+                                        </p:attrNameLst>
+                                      </p:cBhvr>
+                                      <p:to>
+                                        <p:strVal val="visible"/>
+                                      </p:to>
+                                    </p:set>
+                                  </p:childTnLst>
+                                </p:cTn>
+                              </p:par>
+                              <p:par>
+                                <p:cTn id="43" presetID="1" presetClass="entr" presetSubtype="0" fill="hold" grpId="0" nodeType="withEffect">
+                                  <p:stCondLst>
+                                    <p:cond delay="0"/>
+                                  </p:stCondLst>
+                                  <p:childTnLst>
+                                    <p:set>
+                                      <p:cBhvr>
+                                        <p:cTn id="44" dur="1" fill="hold">
+                                          <p:stCondLst>
+                                            <p:cond delay="0"/>
+                                          </p:stCondLst>
+                                        </p:cTn>
+                                        <p:tgtEl>
+                                          <p:spTgt spid="12"/>
+                                        </p:tgtEl>
+                                        <p:attrNameLst>
+                                          <p:attrName>style.visibility</p:attrName>
+                                        </p:attrNameLst>
+                                      </p:cBhvr>
+                                      <p:to>
+                                        <p:strVal val="visible"/>
+                                      </p:to>
+                                    </p:set>
+                                  </p:childTnLst>
+                                </p:cTn>
+                              </p:par>
+                              <p:par>
+                                <p:cTn id="45" presetID="1" presetClass="entr" presetSubtype="0" fill="hold" grpId="0" nodeType="withEffect">
+                                  <p:stCondLst>
+                                    <p:cond delay="0"/>
+                                  </p:stCondLst>
+                                  <p:childTnLst>
+                                    <p:set>
+                                      <p:cBhvr>
+                                        <p:cTn id="46" dur="1" fill="hold">
+                                          <p:stCondLst>
+                                            <p:cond delay="0"/>
+                                          </p:stCondLst>
+                                        </p:cTn>
+                                        <p:tgtEl>
+                                          <p:spTgt spid="14"/>
+                                        </p:tgtEl>
+                                        <p:attrNameLst>
+                                          <p:attrName>style.visibility</p:attrName>
+                                        </p:attrNameLst>
+                                      </p:cBhvr>
+                                      <p:to>
+                                        <p:strVal val="visible"/>
+                                      </p:to>
+                                    </p:set>
+                                  </p:childTnLst>
+                                </p:cTn>
+                              </p:par>
+                              <p:par>
+                                <p:cTn id="47" presetID="1" presetClass="entr" presetSubtype="0" fill="hold" grpId="0" nodeType="withEffect">
+                                  <p:stCondLst>
+                                    <p:cond delay="0"/>
+                                  </p:stCondLst>
+                                  <p:childTnLst>
+                                    <p:set>
+                                      <p:cBhvr>
+                                        <p:cTn id="48" dur="1" fill="hold">
+                                          <p:stCondLst>
+                                            <p:cond delay="0"/>
+                                          </p:stCondLst>
+                                        </p:cTn>
+                                        <p:tgtEl>
+                                          <p:spTgt spid="15"/>
+                                        </p:tgtEl>
+                                        <p:attrNameLst>
+                                          <p:attrName>style.visibility</p:attrName>
+                                        </p:attrNameLst>
+                                      </p:cBhvr>
+                                      <p:to>
+                                        <p:strVal val="visible"/>
+                                      </p:to>
+                                    </p:set>
+                                  </p:childTnLst>
+                                </p:cTn>
+                              </p:par>
+                              <p:par>
+                                <p:cTn id="49" presetID="1" presetClass="entr" presetSubtype="0" fill="hold" grpId="0" nodeType="withEffect">
+                                  <p:stCondLst>
+                                    <p:cond delay="0"/>
+                                  </p:stCondLst>
+                                  <p:childTnLst>
+                                    <p:set>
+                                      <p:cBhvr>
+                                        <p:cTn id="50" dur="1" fill="hold">
+                                          <p:stCondLst>
+                                            <p:cond delay="0"/>
+                                          </p:stCondLst>
+                                        </p:cTn>
+                                        <p:tgtEl>
+                                          <p:spTgt spid="24"/>
+                                        </p:tgtEl>
+                                        <p:attrNameLst>
+                                          <p:attrName>style.visibility</p:attrName>
+                                        </p:attrNameLst>
+                                      </p:cBhvr>
+                                      <p:to>
+                                        <p:strVal val="visible"/>
+                                      </p:to>
+                                    </p:set>
+                                  </p:childTnLst>
+                                </p:cTn>
+                              </p:par>
+                              <p:par>
+                                <p:cTn id="51" presetID="1" presetClass="entr" presetSubtype="0" fill="hold" grpId="0" nodeType="withEffect">
+                                  <p:stCondLst>
+                                    <p:cond delay="0"/>
+                                  </p:stCondLst>
+                                  <p:childTnLst>
+                                    <p:set>
+                                      <p:cBhvr>
+                                        <p:cTn id="52" dur="1" fill="hold">
+                                          <p:stCondLst>
+                                            <p:cond delay="0"/>
+                                          </p:stCondLst>
+                                        </p:cTn>
+                                        <p:tgtEl>
+                                          <p:spTgt spid="29"/>
+                                        </p:tgtEl>
+                                        <p:attrNameLst>
+                                          <p:attrName>style.visibility</p:attrName>
+                                        </p:attrNameLst>
+                                      </p:cBhvr>
+                                      <p:to>
+                                        <p:strVal val="visible"/>
+                                      </p:to>
+                                    </p:set>
+                                  </p:childTnLst>
+                                </p:cTn>
+                              </p:par>
+                              <p:par>
+                                <p:cTn id="53" presetID="1" presetClass="entr" presetSubtype="0" fill="hold" grpId="0" nodeType="withEffect">
+                                  <p:stCondLst>
+                                    <p:cond delay="0"/>
+                                  </p:stCondLst>
+                                  <p:childTnLst>
+                                    <p:set>
+                                      <p:cBhvr>
+                                        <p:cTn id="54" dur="1" fill="hold">
+                                          <p:stCondLst>
+                                            <p:cond delay="0"/>
+                                          </p:stCondLst>
+                                        </p:cTn>
+                                        <p:tgtEl>
+                                          <p:spTgt spid="30"/>
+                                        </p:tgtEl>
+                                        <p:attrNameLst>
+                                          <p:attrName>style.visibility</p:attrName>
+                                        </p:attrNameLst>
+                                      </p:cBhvr>
+                                      <p:to>
+                                        <p:strVal val="visible"/>
+                                      </p:to>
+                                    </p:set>
+                                  </p:childTnLst>
+                                </p:cTn>
+                              </p:par>
+                              <p:par>
+                                <p:cTn id="55" presetID="1" presetClass="entr" presetSubtype="0" fill="hold" grpId="0" nodeType="withEffect">
+                                  <p:stCondLst>
+                                    <p:cond delay="0"/>
+                                  </p:stCondLst>
+                                  <p:childTnLst>
+                                    <p:set>
+                                      <p:cBhvr>
+                                        <p:cTn id="56" dur="1" fill="hold">
+                                          <p:stCondLst>
+                                            <p:cond delay="0"/>
+                                          </p:stCondLst>
+                                        </p:cTn>
+                                        <p:tgtEl>
+                                          <p:spTgt spid="31"/>
+                                        </p:tgtEl>
+                                        <p:attrNameLst>
+                                          <p:attrName>style.visibility</p:attrName>
+                                        </p:attrNameLst>
+                                      </p:cBhvr>
+                                      <p:to>
+                                        <p:strVal val="visible"/>
+                                      </p:to>
+                                    </p:set>
+                                  </p:childTnLst>
+                                </p:cTn>
+                              </p:par>
+                              <p:par>
+                                <p:cTn id="57" presetID="1" presetClass="entr" presetSubtype="0" fill="hold" grpId="0" nodeType="withEffect">
+                                  <p:stCondLst>
+                                    <p:cond delay="0"/>
+                                  </p:stCondLst>
+                                  <p:childTnLst>
+                                    <p:set>
+                                      <p:cBhvr>
+                                        <p:cTn id="58" dur="1" fill="hold">
+                                          <p:stCondLst>
+                                            <p:cond delay="0"/>
+                                          </p:stCondLst>
+                                        </p:cTn>
+                                        <p:tgtEl>
+                                          <p:spTgt spid="32"/>
+                                        </p:tgtEl>
+                                        <p:attrNameLst>
+                                          <p:attrName>style.visibility</p:attrName>
+                                        </p:attrNameLst>
+                                      </p:cBhvr>
+                                      <p:to>
+                                        <p:strVal val="visible"/>
+                                      </p:to>
+                                    </p:set>
+                                  </p:childTnLst>
+                                </p:cTn>
+                              </p:par>
+                              <p:par>
+                                <p:cTn id="59" presetID="1" presetClass="entr" presetSubtype="0" fill="hold" grpId="0" nodeType="withEffect">
+                                  <p:stCondLst>
+                                    <p:cond delay="0"/>
+                                  </p:stCondLst>
+                                  <p:childTnLst>
+                                    <p:set>
+                                      <p:cBhvr>
+                                        <p:cTn id="60" dur="1" fill="hold">
+                                          <p:stCondLst>
+                                            <p:cond delay="0"/>
+                                          </p:stCondLst>
+                                        </p:cTn>
+                                        <p:tgtEl>
+                                          <p:spTgt spid="33"/>
+                                        </p:tgtEl>
+                                        <p:attrNameLst>
+                                          <p:attrName>style.visibility</p:attrName>
+                                        </p:attrNameLst>
+                                      </p:cBhvr>
+                                      <p:to>
+                                        <p:strVal val="visible"/>
+                                      </p:to>
+                                    </p:set>
+                                  </p:childTnLst>
+                                </p:cTn>
+                              </p:par>
+                              <p:par>
+                                <p:cTn id="61" presetID="1" presetClass="entr" presetSubtype="0" fill="hold" grpId="0" nodeType="withEffect">
                                   <p:stCondLst>
                                     <p:cond delay="0"/>
                                   </p:stCondLst>
@@ -22352,7 +23770,7 @@
                                           </p:stCondLst>
                                         </p:cTn>
                                         <p:tgtEl>
-                                          <p:spTgt spid="10"/>
+                                          <p:spTgt spid="36"/>
                                         </p:tgtEl>
                                         <p:attrNameLst>
                                           <p:attrName>style.visibility</p:attrName>
@@ -22379,7 +23797,7 @@
                                           </p:stCondLst>
                                         </p:cTn>
                                         <p:tgtEl>
-                                          <p:spTgt spid="16"/>
+                                          <p:spTgt spid="37"/>
                                         </p:tgtEl>
                                         <p:attrNameLst>
                                           <p:attrName>style.visibility</p:attrName>
@@ -22392,26 +23810,35 @@
                                   </p:childTnLst>
                                 </p:cTn>
                               </p:par>
-                            </p:childTnLst>
-                          </p:cTn>
-                        </p:par>
-                      </p:childTnLst>
-                    </p:cTn>
-                  </p:par>
-                  <p:par>
-                    <p:cTn id="65" fill="hold">
-                      <p:stCondLst>
-                        <p:cond delay="indefinite"/>
-                      </p:stCondLst>
-                      <p:childTnLst>
-                        <p:par>
-                          <p:cTn id="66" fill="hold">
-                            <p:stCondLst>
-                              <p:cond delay="0"/>
-                            </p:stCondLst>
-                            <p:childTnLst>
                               <p:par>
-                                <p:cTn id="67" presetID="1" presetClass="entr" presetSubtype="0" fill="hold" nodeType="clickEffect">
+                                <p:cTn id="65" presetID="1" presetClass="entr" presetSubtype="0" fill="hold" grpId="0" nodeType="withEffect">
+                                  <p:stCondLst>
+                                    <p:cond delay="0"/>
+                                  </p:stCondLst>
+                                  <p:childTnLst>
+                                    <p:set>
+                                      <p:cBhvr>
+                                        <p:cTn id="66" dur="1" fill="hold">
+                                          <p:stCondLst>
+                                            <p:cond delay="0"/>
+                                          </p:stCondLst>
+                                        </p:cTn>
+                                        <p:tgtEl>
+                                          <p:spTgt spid="38"/>
+                                        </p:tgtEl>
+                                        <p:attrNameLst>
+                                          <p:attrName>style.visibility</p:attrName>
+                                        </p:attrNameLst>
+                                      </p:cBhvr>
+                                      <p:to>
+                                        <p:strVal val="visible"/>
+                                      </p:to>
+                                    </p:set>
+                                  </p:childTnLst>
+                                </p:cTn>
+                              </p:par>
+                              <p:par>
+                                <p:cTn id="67" presetID="1" presetClass="entr" presetSubtype="0" fill="hold" grpId="0" nodeType="withEffect">
                                   <p:stCondLst>
                                     <p:cond delay="0"/>
                                   </p:stCondLst>
@@ -22424,11 +23851,7 @@
                                           </p:stCondLst>
                                         </p:cTn>
                                         <p:tgtEl>
-                                          <p:spTgt spid="42">
-                                            <p:txEl>
-                                              <p:pRg st="5" end="5"/>
-                                            </p:txEl>
-                                          </p:spTgt>
+                                          <p:spTgt spid="41"/>
                                         </p:tgtEl>
                                         <p:attrNameLst>
                                           <p:attrName>style.visibility</p:attrName>
@@ -22455,7 +23878,7 @@
                                           </p:stCondLst>
                                         </p:cTn>
                                         <p:tgtEl>
-                                          <p:spTgt spid="34"/>
+                                          <p:spTgt spid="10"/>
                                         </p:tgtEl>
                                         <p:attrNameLst>
                                           <p:attrName>style.visibility</p:attrName>
@@ -22468,26 +23891,35 @@
                                   </p:childTnLst>
                                 </p:cTn>
                               </p:par>
-                            </p:childTnLst>
-                          </p:cTn>
-                        </p:par>
-                      </p:childTnLst>
-                    </p:cTn>
-                  </p:par>
-                  <p:par>
-                    <p:cTn id="71" fill="hold">
-                      <p:stCondLst>
-                        <p:cond delay="indefinite"/>
-                      </p:stCondLst>
-                      <p:childTnLst>
-                        <p:par>
-                          <p:cTn id="72" fill="hold">
-                            <p:stCondLst>
-                              <p:cond delay="0"/>
-                            </p:stCondLst>
-                            <p:childTnLst>
                               <p:par>
-                                <p:cTn id="73" presetID="1" presetClass="entr" presetSubtype="0" fill="hold" nodeType="clickEffect">
+                                <p:cTn id="71" presetID="1" presetClass="entr" presetSubtype="0" fill="hold" grpId="0" nodeType="withEffect">
+                                  <p:stCondLst>
+                                    <p:cond delay="0"/>
+                                  </p:stCondLst>
+                                  <p:childTnLst>
+                                    <p:set>
+                                      <p:cBhvr>
+                                        <p:cTn id="72" dur="1" fill="hold">
+                                          <p:stCondLst>
+                                            <p:cond delay="0"/>
+                                          </p:stCondLst>
+                                        </p:cTn>
+                                        <p:tgtEl>
+                                          <p:spTgt spid="16"/>
+                                        </p:tgtEl>
+                                        <p:attrNameLst>
+                                          <p:attrName>style.visibility</p:attrName>
+                                        </p:attrNameLst>
+                                      </p:cBhvr>
+                                      <p:to>
+                                        <p:strVal val="visible"/>
+                                      </p:to>
+                                    </p:set>
+                                  </p:childTnLst>
+                                </p:cTn>
+                              </p:par>
+                              <p:par>
+                                <p:cTn id="73" presetID="1" presetClass="entr" presetSubtype="0" fill="hold" nodeType="withEffect">
                                   <p:stCondLst>
                                     <p:cond delay="0"/>
                                   </p:stCondLst>
@@ -22500,11 +23932,7 @@
                                           </p:stCondLst>
                                         </p:cTn>
                                         <p:tgtEl>
-                                          <p:spTgt spid="42">
-                                            <p:txEl>
-                                              <p:pRg st="6" end="6"/>
-                                            </p:txEl>
-                                          </p:spTgt>
+                                          <p:spTgt spid="34"/>
                                         </p:tgtEl>
                                         <p:attrNameLst>
                                           <p:attrName>style.visibility</p:attrName>
@@ -25950,8 +27378,8 @@
           <a:chExt cx="0" cy="0"/>
         </a:xfrm>
       </p:grpSpPr>
-      <mc:AlternateContent xmlns:mc="http://schemas.openxmlformats.org/markup-compatibility/2006">
-        <mc:Choice xmlns:a14="http://schemas.microsoft.com/office/drawing/2010/main" Requires="a14">
+      <mc:AlternateContent xmlns:mc="http://schemas.openxmlformats.org/markup-compatibility/2006" xmlns:a14="http://schemas.microsoft.com/office/drawing/2010/main">
+        <mc:Choice Requires="a14">
           <p:sp>
             <p:nvSpPr>
               <p:cNvPr id="3" name="Content Placeholder 2">
@@ -26323,7 +27751,7 @@
             </p:txBody>
           </p:sp>
         </mc:Choice>
-        <mc:Fallback>
+        <mc:Fallback xmlns="">
           <p:sp>
             <p:nvSpPr>
               <p:cNvPr id="3" name="Content Placeholder 2">
@@ -26758,6 +28186,2923 @@
         <p:cNvPr id="1" name="">
           <a:extLst>
             <a:ext uri="{FF2B5EF4-FFF2-40B4-BE49-F238E27FC236}">
+              <a16:creationId xmlns:a16="http://schemas.microsoft.com/office/drawing/2014/main" id="{D2C058C5-0152-2390-D97D-AB6BB0B5CEC4}"/>
+            </a:ext>
+          </a:extLst>
+        </p:cNvPr>
+        <p:cNvGrpSpPr/>
+        <p:nvPr/>
+      </p:nvGrpSpPr>
+      <p:grpSpPr>
+        <a:xfrm>
+          <a:off x="0" y="0"/>
+          <a:ext cx="0" cy="0"/>
+          <a:chOff x="0" y="0"/>
+          <a:chExt cx="0" cy="0"/>
+        </a:xfrm>
+      </p:grpSpPr>
+      <mc:AlternateContent xmlns:mc="http://schemas.openxmlformats.org/markup-compatibility/2006">
+        <mc:Choice xmlns:a14="http://schemas.microsoft.com/office/drawing/2010/main" Requires="a14">
+          <p:sp>
+            <p:nvSpPr>
+              <p:cNvPr id="3" name="Content Placeholder 2">
+                <a:extLst>
+                  <a:ext uri="{FF2B5EF4-FFF2-40B4-BE49-F238E27FC236}">
+                    <a16:creationId xmlns:a16="http://schemas.microsoft.com/office/drawing/2014/main" id="{A578F3F2-F45D-ECCF-E9E9-805FBD91726A}"/>
+                  </a:ext>
+                </a:extLst>
+              </p:cNvPr>
+              <p:cNvSpPr>
+                <a:spLocks noGrp="1"/>
+              </p:cNvSpPr>
+              <p:nvPr>
+                <p:ph idx="1"/>
+              </p:nvPr>
+            </p:nvSpPr>
+            <p:spPr>
+              <a:xfrm>
+                <a:off x="838200" y="1123406"/>
+                <a:ext cx="10515600" cy="5470724"/>
+              </a:xfrm>
+            </p:spPr>
+            <p:txBody>
+              <a:bodyPr>
+                <a:normAutofit/>
+              </a:bodyPr>
+              <a:lstStyle/>
+              <a:p>
+                <a:pPr marL="0" indent="0">
+                  <a:buNone/>
+                </a:pPr>
+                <a:r>
+                  <a:rPr lang="en-US" dirty="0"/>
+                  <a:t>What are the properties of a good hash function?  </a:t>
+                </a:r>
+              </a:p>
+              <a:p>
+                <a:pPr marL="514350" indent="-514350">
+                  <a:buFont typeface="+mj-lt"/>
+                  <a:buAutoNum type="arabicPeriod"/>
+                </a:pPr>
+                <a:r>
+                  <a:rPr lang="en-US" dirty="0"/>
+                  <a:t>For key values, </a:t>
+                </a:r>
+                <a14:m>
+                  <m:oMath xmlns:m="http://schemas.openxmlformats.org/officeDocument/2006/math">
+                    <m:r>
+                      <a:rPr lang="en-US" i="1">
+                        <a:latin typeface="Cambria Math" panose="02040503050406030204" pitchFamily="18" charset="0"/>
+                      </a:rPr>
+                      <m:t>𝐾</m:t>
+                    </m:r>
+                  </m:oMath>
+                </a14:m>
+                <a:r>
+                  <a:rPr lang="en-US" dirty="0"/>
+                  <a:t>, want a </a:t>
+                </a:r>
+                <a:r>
+                  <a:rPr lang="en-US" b="1" dirty="0"/>
+                  <a:t>uniform distribution over </a:t>
+                </a:r>
+                <a14:m>
+                  <m:oMath xmlns:m="http://schemas.openxmlformats.org/officeDocument/2006/math">
+                    <m:r>
+                      <a:rPr lang="en-US" b="1" i="1" smtClean="0">
+                        <a:latin typeface="Cambria Math" panose="02040503050406030204" pitchFamily="18" charset="0"/>
+                      </a:rPr>
+                      <m:t>𝒎</m:t>
+                    </m:r>
+                  </m:oMath>
+                </a14:m>
+                <a:r>
+                  <a:rPr lang="en-US" b="1" dirty="0"/>
+                  <a:t> hash values</a:t>
+                </a:r>
+              </a:p>
+              <a:p>
+                <a:pPr marL="457200" lvl="1" indent="0">
+                  <a:buNone/>
+                </a:pPr>
+                <a14:m>
+                  <m:oMathPara xmlns:m="http://schemas.openxmlformats.org/officeDocument/2006/math">
+                    <m:oMathParaPr>
+                      <m:jc m:val="centerGroup"/>
+                    </m:oMathParaPr>
+                    <m:oMath xmlns:m="http://schemas.openxmlformats.org/officeDocument/2006/math">
+                      <m:r>
+                        <a:rPr lang="en-US" b="1" i="1">
+                          <a:latin typeface="Cambria Math" panose="02040503050406030204" pitchFamily="18" charset="0"/>
+                        </a:rPr>
+                        <m:t>𝒇</m:t>
+                      </m:r>
+                      <m:r>
+                        <a:rPr lang="en-US" b="1" i="1">
+                          <a:latin typeface="Cambria Math" panose="02040503050406030204" pitchFamily="18" charset="0"/>
+                        </a:rPr>
+                        <m:t>(</m:t>
+                      </m:r>
+                      <m:r>
+                        <a:rPr lang="en-US" b="1" i="1">
+                          <a:latin typeface="Cambria Math" panose="02040503050406030204" pitchFamily="18" charset="0"/>
+                        </a:rPr>
+                        <m:t>𝒌</m:t>
+                      </m:r>
+                      <m:r>
+                        <a:rPr lang="en-US" b="1" i="1">
+                          <a:latin typeface="Cambria Math" panose="02040503050406030204" pitchFamily="18" charset="0"/>
+                        </a:rPr>
+                        <m:t>)~</m:t>
+                      </m:r>
+                      <m:r>
+                        <a:rPr lang="en-US" b="1" i="1">
+                          <a:latin typeface="Cambria Math" panose="02040503050406030204" pitchFamily="18" charset="0"/>
+                          <a:ea typeface="Cambria Math" panose="02040503050406030204" pitchFamily="18" charset="0"/>
+                        </a:rPr>
+                        <m:t>𝑼</m:t>
+                      </m:r>
+                      <m:r>
+                        <a:rPr lang="en-US" b="1" i="1">
+                          <a:latin typeface="Cambria Math" panose="02040503050406030204" pitchFamily="18" charset="0"/>
+                          <a:ea typeface="Cambria Math" panose="02040503050406030204" pitchFamily="18" charset="0"/>
+                        </a:rPr>
+                        <m:t>(</m:t>
+                      </m:r>
+                      <m:r>
+                        <a:rPr lang="en-US" b="1" i="1">
+                          <a:latin typeface="Cambria Math" panose="02040503050406030204" pitchFamily="18" charset="0"/>
+                          <a:ea typeface="Cambria Math" panose="02040503050406030204" pitchFamily="18" charset="0"/>
+                        </a:rPr>
+                        <m:t>𝟎</m:t>
+                      </m:r>
+                      <m:r>
+                        <a:rPr lang="en-US" b="1" i="1">
+                          <a:latin typeface="Cambria Math" panose="02040503050406030204" pitchFamily="18" charset="0"/>
+                          <a:ea typeface="Cambria Math" panose="02040503050406030204" pitchFamily="18" charset="0"/>
+                        </a:rPr>
+                        <m:t>,</m:t>
+                      </m:r>
+                      <m:r>
+                        <a:rPr lang="en-US" b="1" i="1" smtClean="0">
+                          <a:latin typeface="Cambria Math" panose="02040503050406030204" pitchFamily="18" charset="0"/>
+                          <a:ea typeface="Cambria Math" panose="02040503050406030204" pitchFamily="18" charset="0"/>
+                        </a:rPr>
+                        <m:t>𝒎</m:t>
+                      </m:r>
+                      <m:r>
+                        <a:rPr lang="en-US" b="1" i="1">
+                          <a:latin typeface="Cambria Math" panose="02040503050406030204" pitchFamily="18" charset="0"/>
+                          <a:ea typeface="Cambria Math" panose="02040503050406030204" pitchFamily="18" charset="0"/>
+                        </a:rPr>
+                        <m:t>)</m:t>
+                      </m:r>
+                    </m:oMath>
+                  </m:oMathPara>
+                </a14:m>
+                <a:endParaRPr lang="en-US" b="1" dirty="0"/>
+              </a:p>
+              <a:p>
+                <a:pPr lvl="1"/>
+                <a:r>
+                  <a:rPr lang="en-US" dirty="0"/>
+                  <a:t>For </a:t>
+                </a:r>
+                <a14:m>
+                  <m:oMath xmlns:m="http://schemas.openxmlformats.org/officeDocument/2006/math">
+                    <m:r>
+                      <a:rPr lang="en-US" b="0" i="1" smtClean="0">
+                        <a:latin typeface="Cambria Math" panose="02040503050406030204" pitchFamily="18" charset="0"/>
+                      </a:rPr>
+                      <m:t>𝑚</m:t>
+                    </m:r>
+                  </m:oMath>
+                </a14:m>
+                <a:r>
+                  <a:rPr lang="en-US" dirty="0"/>
+                  <a:t> length hash table probability of bucket </a:t>
+                </a:r>
+                <a14:m>
+                  <m:oMath xmlns:m="http://schemas.openxmlformats.org/officeDocument/2006/math">
+                    <m:r>
+                      <a:rPr lang="en-US" b="0" i="1" smtClean="0">
+                        <a:latin typeface="Cambria Math" panose="02040503050406030204" pitchFamily="18" charset="0"/>
+                      </a:rPr>
+                      <m:t>𝑖</m:t>
+                    </m:r>
+                  </m:oMath>
+                </a14:m>
+                <a:r>
+                  <a:rPr lang="en-US" dirty="0"/>
+                  <a:t> being occupied is: </a:t>
+                </a:r>
+              </a:p>
+              <a:p>
+                <a:pPr marL="457200" lvl="1" indent="0">
+                  <a:buNone/>
+                </a:pPr>
+                <a14:m>
+                  <m:oMathPara xmlns:m="http://schemas.openxmlformats.org/officeDocument/2006/math">
+                    <m:oMathParaPr>
+                      <m:jc m:val="centerGroup"/>
+                    </m:oMathParaPr>
+                    <m:oMath xmlns:m="http://schemas.openxmlformats.org/officeDocument/2006/math">
+                      <m:r>
+                        <m:rPr>
+                          <m:sty m:val="p"/>
+                        </m:rPr>
+                        <a:rPr lang="en-US" b="0" i="0" smtClean="0">
+                          <a:latin typeface="Cambria Math" panose="02040503050406030204" pitchFamily="18" charset="0"/>
+                        </a:rPr>
+                        <m:t>P</m:t>
+                      </m:r>
+                      <m:d>
+                        <m:dPr>
+                          <m:ctrlPr>
+                            <a:rPr lang="en-US" i="1" smtClean="0">
+                              <a:latin typeface="Cambria Math" panose="02040503050406030204" pitchFamily="18" charset="0"/>
+                            </a:rPr>
+                          </m:ctrlPr>
+                        </m:dPr>
+                        <m:e>
+                          <m:r>
+                            <a:rPr lang="en-US" b="0" i="1">
+                              <a:latin typeface="Cambria Math" panose="02040503050406030204" pitchFamily="18" charset="0"/>
+                            </a:rPr>
+                            <m:t>𝑓</m:t>
+                          </m:r>
+                          <m:d>
+                            <m:dPr>
+                              <m:ctrlPr>
+                                <a:rPr lang="en-US" i="1">
+                                  <a:latin typeface="Cambria Math" panose="02040503050406030204" pitchFamily="18" charset="0"/>
+                                </a:rPr>
+                              </m:ctrlPr>
+                            </m:dPr>
+                            <m:e>
+                              <m:r>
+                                <a:rPr lang="en-US" b="0" i="1">
+                                  <a:latin typeface="Cambria Math" panose="02040503050406030204" pitchFamily="18" charset="0"/>
+                                </a:rPr>
+                                <m:t>𝑘</m:t>
+                              </m:r>
+                            </m:e>
+                          </m:d>
+                          <m:r>
+                            <a:rPr lang="en-US" b="0" i="1" smtClean="0">
+                              <a:latin typeface="Cambria Math" panose="02040503050406030204" pitchFamily="18" charset="0"/>
+                            </a:rPr>
+                            <m:t>=</m:t>
+                          </m:r>
+                          <m:r>
+                            <a:rPr lang="en-US" b="0" i="1" smtClean="0">
+                              <a:latin typeface="Cambria Math" panose="02040503050406030204" pitchFamily="18" charset="0"/>
+                            </a:rPr>
+                            <m:t>𝑖</m:t>
+                          </m:r>
+                        </m:e>
+                      </m:d>
+                      <m:r>
+                        <a:rPr lang="en-US" b="0" i="1" smtClean="0">
+                          <a:latin typeface="Cambria Math" panose="02040503050406030204" pitchFamily="18" charset="0"/>
+                        </a:rPr>
+                        <m:t>=</m:t>
+                      </m:r>
+                      <m:f>
+                        <m:fPr>
+                          <m:ctrlPr>
+                            <a:rPr lang="en-US" b="0" i="1" smtClean="0">
+                              <a:latin typeface="Cambria Math" panose="02040503050406030204" pitchFamily="18" charset="0"/>
+                            </a:rPr>
+                          </m:ctrlPr>
+                        </m:fPr>
+                        <m:num>
+                          <m:r>
+                            <a:rPr lang="en-US" b="0" i="1" smtClean="0">
+                              <a:latin typeface="Cambria Math" panose="02040503050406030204" pitchFamily="18" charset="0"/>
+                            </a:rPr>
+                            <m:t>1</m:t>
+                          </m:r>
+                        </m:num>
+                        <m:den>
+                          <m:r>
+                            <a:rPr lang="en-US" b="0" i="1" smtClean="0">
+                              <a:latin typeface="Cambria Math" panose="02040503050406030204" pitchFamily="18" charset="0"/>
+                            </a:rPr>
+                            <m:t>𝑚</m:t>
+                          </m:r>
+                        </m:den>
+                      </m:f>
+                    </m:oMath>
+                  </m:oMathPara>
+                </a14:m>
+                <a:endParaRPr lang="en-US" dirty="0"/>
+              </a:p>
+              <a:p>
+                <a:pPr lvl="1"/>
+                <a:r>
+                  <a:rPr lang="en-US" b="1" dirty="0"/>
+                  <a:t>Lumpy hash values </a:t>
+                </a:r>
+                <a:r>
+                  <a:rPr lang="en-US" dirty="0"/>
+                  <a:t>lead to increased </a:t>
+                </a:r>
+                <a:r>
+                  <a:rPr lang="en-US" b="1" dirty="0"/>
+                  <a:t>hash collisions </a:t>
+                </a:r>
+              </a:p>
+              <a:p>
+                <a:pPr lvl="1"/>
+                <a:r>
+                  <a:rPr lang="en-US" dirty="0"/>
+                  <a:t>Can verify with </a:t>
+                </a:r>
+                <a14:m>
+                  <m:oMath xmlns:m="http://schemas.openxmlformats.org/officeDocument/2006/math">
+                    <m:sSup>
+                      <m:sSupPr>
+                        <m:ctrlPr>
+                          <a:rPr lang="en-US" i="1">
+                            <a:latin typeface="Cambria Math" panose="02040503050406030204" pitchFamily="18" charset="0"/>
+                          </a:rPr>
+                        </m:ctrlPr>
+                      </m:sSupPr>
+                      <m:e>
+                        <m:r>
+                          <a:rPr lang="en-US" i="1">
+                            <a:latin typeface="Cambria Math" panose="02040503050406030204" pitchFamily="18" charset="0"/>
+                            <a:ea typeface="Cambria Math" panose="02040503050406030204" pitchFamily="18" charset="0"/>
+                          </a:rPr>
+                          <m:t>𝜒</m:t>
+                        </m:r>
+                      </m:e>
+                      <m:sup>
+                        <m:r>
+                          <a:rPr lang="en-US" i="1">
+                            <a:latin typeface="Cambria Math" panose="02040503050406030204" pitchFamily="18" charset="0"/>
+                          </a:rPr>
+                          <m:t>2</m:t>
+                        </m:r>
+                      </m:sup>
+                    </m:sSup>
+                  </m:oMath>
+                </a14:m>
+                <a:r>
+                  <a:rPr lang="en-US" dirty="0"/>
+                  <a:t> test</a:t>
+                </a:r>
+              </a:p>
+              <a:p>
+                <a:pPr marL="514350" indent="-514350">
+                  <a:buFont typeface="+mj-lt"/>
+                  <a:buAutoNum type="arabicPeriod"/>
+                </a:pPr>
+                <a:r>
+                  <a:rPr lang="en-US" dirty="0"/>
+                  <a:t>For a uniformly distributed hash function the probability of a hash collision with </a:t>
+                </a:r>
+                <a14:m>
+                  <m:oMath xmlns:m="http://schemas.openxmlformats.org/officeDocument/2006/math">
+                    <m:r>
+                      <a:rPr lang="en-US" i="1">
+                        <a:latin typeface="Cambria Math" panose="02040503050406030204" pitchFamily="18" charset="0"/>
+                        <a:ea typeface="Cambria Math" panose="02040503050406030204" pitchFamily="18" charset="0"/>
+                      </a:rPr>
+                      <m:t>𝑛</m:t>
+                    </m:r>
+                  </m:oMath>
+                </a14:m>
+                <a:r>
+                  <a:rPr lang="en-US" dirty="0"/>
+                  <a:t> elements filled in the table is    </a:t>
+                </a:r>
+              </a:p>
+              <a:p>
+                <a:pPr marL="0" indent="0">
+                  <a:buNone/>
+                </a:pPr>
+                <a14:m>
+                  <m:oMathPara xmlns:m="http://schemas.openxmlformats.org/officeDocument/2006/math">
+                    <m:oMathParaPr>
+                      <m:jc m:val="centerGroup"/>
+                    </m:oMathParaPr>
+                    <m:oMath xmlns:m="http://schemas.openxmlformats.org/officeDocument/2006/math">
+                      <m:r>
+                        <a:rPr lang="en-US" b="0" i="1" smtClean="0">
+                          <a:latin typeface="Cambria Math" panose="02040503050406030204" pitchFamily="18" charset="0"/>
+                        </a:rPr>
+                        <m:t>𝑃</m:t>
+                      </m:r>
+                      <m:d>
+                        <m:dPr>
+                          <m:ctrlPr>
+                            <a:rPr lang="en-US" b="0" i="1" smtClean="0">
+                              <a:latin typeface="Cambria Math" panose="02040503050406030204" pitchFamily="18" charset="0"/>
+                            </a:rPr>
+                          </m:ctrlPr>
+                        </m:dPr>
+                        <m:e>
+                          <m:r>
+                            <a:rPr lang="en-US" b="0" i="1" smtClean="0">
+                              <a:latin typeface="Cambria Math" panose="02040503050406030204" pitchFamily="18" charset="0"/>
+                            </a:rPr>
+                            <m:t>𝑚</m:t>
+                          </m:r>
+                          <m:r>
+                            <a:rPr lang="en-US" b="0" i="1" smtClean="0">
+                              <a:latin typeface="Cambria Math" panose="02040503050406030204" pitchFamily="18" charset="0"/>
+                            </a:rPr>
+                            <m:t>,</m:t>
+                          </m:r>
+                          <m:r>
+                            <a:rPr lang="en-US" b="0" i="1" smtClean="0">
+                              <a:latin typeface="Cambria Math" panose="02040503050406030204" pitchFamily="18" charset="0"/>
+                            </a:rPr>
+                            <m:t>𝑛</m:t>
+                          </m:r>
+                        </m:e>
+                      </m:d>
+                      <m:r>
+                        <a:rPr lang="en-US" i="1">
+                          <a:latin typeface="Cambria Math" panose="02040503050406030204" pitchFamily="18" charset="0"/>
+                          <a:ea typeface="Cambria Math" panose="02040503050406030204" pitchFamily="18" charset="0"/>
+                        </a:rPr>
+                        <m:t>≈</m:t>
+                      </m:r>
+                      <m:r>
+                        <a:rPr lang="en-US" b="0" i="1" smtClean="0">
+                          <a:latin typeface="Cambria Math" panose="02040503050406030204" pitchFamily="18" charset="0"/>
+                          <a:ea typeface="Cambria Math" panose="02040503050406030204" pitchFamily="18" charset="0"/>
+                        </a:rPr>
+                        <m:t>1−</m:t>
+                      </m:r>
+                      <m:r>
+                        <a:rPr lang="en-US" b="0" i="1" smtClean="0">
+                          <a:latin typeface="Cambria Math" panose="02040503050406030204" pitchFamily="18" charset="0"/>
+                          <a:ea typeface="Cambria Math" panose="02040503050406030204" pitchFamily="18" charset="0"/>
+                        </a:rPr>
+                        <m:t>𝑒𝑥𝑝</m:t>
+                      </m:r>
+                      <m:d>
+                        <m:dPr>
+                          <m:begChr m:val="["/>
+                          <m:endChr m:val="]"/>
+                          <m:ctrlPr>
+                            <a:rPr lang="en-US" b="0" i="1" smtClean="0">
+                              <a:latin typeface="Cambria Math" panose="02040503050406030204" pitchFamily="18" charset="0"/>
+                              <a:ea typeface="Cambria Math" panose="02040503050406030204" pitchFamily="18" charset="0"/>
+                            </a:rPr>
+                          </m:ctrlPr>
+                        </m:dPr>
+                        <m:e>
+                          <m:r>
+                            <a:rPr lang="en-US" b="0" i="1" smtClean="0">
+                              <a:latin typeface="Cambria Math" panose="02040503050406030204" pitchFamily="18" charset="0"/>
+                              <a:ea typeface="Cambria Math" panose="02040503050406030204" pitchFamily="18" charset="0"/>
+                            </a:rPr>
+                            <m:t>−</m:t>
+                          </m:r>
+                          <m:f>
+                            <m:fPr>
+                              <m:ctrlPr>
+                                <a:rPr lang="en-US" b="0" i="1" smtClean="0">
+                                  <a:latin typeface="Cambria Math" panose="02040503050406030204" pitchFamily="18" charset="0"/>
+                                  <a:ea typeface="Cambria Math" panose="02040503050406030204" pitchFamily="18" charset="0"/>
+                                </a:rPr>
+                              </m:ctrlPr>
+                            </m:fPr>
+                            <m:num>
+                              <m:r>
+                                <a:rPr lang="en-US" b="0" i="1" smtClean="0">
+                                  <a:latin typeface="Cambria Math" panose="02040503050406030204" pitchFamily="18" charset="0"/>
+                                  <a:ea typeface="Cambria Math" panose="02040503050406030204" pitchFamily="18" charset="0"/>
+                                </a:rPr>
+                                <m:t>𝑚</m:t>
+                              </m:r>
+                              <m:d>
+                                <m:dPr>
+                                  <m:ctrlPr>
+                                    <a:rPr lang="en-US" b="0" i="1" smtClean="0">
+                                      <a:latin typeface="Cambria Math" panose="02040503050406030204" pitchFamily="18" charset="0"/>
+                                      <a:ea typeface="Cambria Math" panose="02040503050406030204" pitchFamily="18" charset="0"/>
+                                    </a:rPr>
+                                  </m:ctrlPr>
+                                </m:dPr>
+                                <m:e>
+                                  <m:r>
+                                    <a:rPr lang="en-US" b="0" i="1" smtClean="0">
+                                      <a:latin typeface="Cambria Math" panose="02040503050406030204" pitchFamily="18" charset="0"/>
+                                      <a:ea typeface="Cambria Math" panose="02040503050406030204" pitchFamily="18" charset="0"/>
+                                    </a:rPr>
+                                    <m:t>𝑛</m:t>
+                                  </m:r>
+                                  <m:r>
+                                    <a:rPr lang="en-US" b="0" i="1" smtClean="0">
+                                      <a:latin typeface="Cambria Math" panose="02040503050406030204" pitchFamily="18" charset="0"/>
+                                      <a:ea typeface="Cambria Math" panose="02040503050406030204" pitchFamily="18" charset="0"/>
+                                    </a:rPr>
+                                    <m:t>−1</m:t>
+                                  </m:r>
+                                </m:e>
+                              </m:d>
+                            </m:num>
+                            <m:den>
+                              <m:r>
+                                <a:rPr lang="en-US" b="0" i="1" smtClean="0">
+                                  <a:latin typeface="Cambria Math" panose="02040503050406030204" pitchFamily="18" charset="0"/>
+                                  <a:ea typeface="Cambria Math" panose="02040503050406030204" pitchFamily="18" charset="0"/>
+                                </a:rPr>
+                                <m:t>2</m:t>
+                              </m:r>
+                              <m:r>
+                                <a:rPr lang="en-US" b="0" i="1" smtClean="0">
+                                  <a:latin typeface="Cambria Math" panose="02040503050406030204" pitchFamily="18" charset="0"/>
+                                  <a:ea typeface="Cambria Math" panose="02040503050406030204" pitchFamily="18" charset="0"/>
+                                </a:rPr>
+                                <m:t>𝑚</m:t>
+                              </m:r>
+                            </m:den>
+                          </m:f>
+                        </m:e>
+                      </m:d>
+                    </m:oMath>
+                  </m:oMathPara>
+                </a14:m>
+                <a:endParaRPr lang="en-US" dirty="0"/>
+              </a:p>
+            </p:txBody>
+          </p:sp>
+        </mc:Choice>
+        <mc:Fallback>
+          <p:sp>
+            <p:nvSpPr>
+              <p:cNvPr id="3" name="Content Placeholder 2">
+                <a:extLst>
+                  <a:ext uri="{FF2B5EF4-FFF2-40B4-BE49-F238E27FC236}">
+                    <a16:creationId xmlns:a16="http://schemas.microsoft.com/office/drawing/2014/main" id="{A578F3F2-F45D-ECCF-E9E9-805FBD91726A}"/>
+                  </a:ext>
+                </a:extLst>
+              </p:cNvPr>
+              <p:cNvSpPr>
+                <a:spLocks noGrp="1" noRot="1" noChangeAspect="1" noMove="1" noResize="1" noEditPoints="1" noAdjustHandles="1" noChangeArrowheads="1" noChangeShapeType="1" noTextEdit="1"/>
+              </p:cNvSpPr>
+              <p:nvPr>
+                <p:ph idx="1"/>
+              </p:nvPr>
+            </p:nvSpPr>
+            <p:spPr>
+              <a:xfrm>
+                <a:off x="838200" y="1123406"/>
+                <a:ext cx="10515600" cy="5470724"/>
+              </a:xfrm>
+              <a:blipFill>
+                <a:blip r:embed="rId2"/>
+                <a:stretch>
+                  <a:fillRect l="-1217" t="-1782"/>
+                </a:stretch>
+              </a:blipFill>
+            </p:spPr>
+            <p:txBody>
+              <a:bodyPr/>
+              <a:lstStyle/>
+              <a:p>
+                <a:r>
+                  <a:rPr lang="en-US">
+                    <a:noFill/>
+                  </a:rPr>
+                  <a:t> </a:t>
+                </a:r>
+              </a:p>
+            </p:txBody>
+          </p:sp>
+        </mc:Fallback>
+      </mc:AlternateContent>
+      <p:sp>
+        <p:nvSpPr>
+          <p:cNvPr id="6" name="Title 1">
+            <a:extLst>
+              <a:ext uri="{FF2B5EF4-FFF2-40B4-BE49-F238E27FC236}">
+                <a16:creationId xmlns:a16="http://schemas.microsoft.com/office/drawing/2014/main" id="{7E988630-3E71-AF2E-A2B3-DE1DF5E9439C}"/>
+              </a:ext>
+            </a:extLst>
+          </p:cNvPr>
+          <p:cNvSpPr txBox="1">
+            <a:spLocks/>
+          </p:cNvSpPr>
+          <p:nvPr/>
+        </p:nvSpPr>
+        <p:spPr>
+          <a:xfrm>
+            <a:off x="838200" y="-635"/>
+            <a:ext cx="10515600" cy="1325563"/>
+          </a:xfrm>
+          <a:prstGeom prst="rect">
+            <a:avLst/>
+          </a:prstGeom>
+        </p:spPr>
+        <p:txBody>
+          <a:bodyPr vert="horz" lIns="91440" tIns="45720" rIns="91440" bIns="45720" rtlCol="0" anchor="ctr">
+            <a:normAutofit/>
+          </a:bodyPr>
+          <a:lstStyle>
+            <a:lvl1pPr algn="l" defTabSz="914400" rtl="0" eaLnBrk="1" latinLnBrk="0" hangingPunct="1">
+              <a:lnSpc>
+                <a:spcPct val="90000"/>
+              </a:lnSpc>
+              <a:spcBef>
+                <a:spcPct val="0"/>
+              </a:spcBef>
+              <a:buNone/>
+              <a:defRPr sz="4400" kern="1200">
+                <a:solidFill>
+                  <a:schemeClr val="tx1"/>
+                </a:solidFill>
+                <a:latin typeface="+mj-lt"/>
+                <a:ea typeface="+mj-ea"/>
+                <a:cs typeface="+mj-cs"/>
+              </a:defRPr>
+            </a:lvl1pPr>
+          </a:lstStyle>
+          <a:p>
+            <a:r>
+              <a:rPr lang="en-US" dirty="0">
+                <a:latin typeface="+mn-lt"/>
+              </a:rPr>
+              <a:t>Introduction to Hashing</a:t>
+            </a:r>
+          </a:p>
+        </p:txBody>
+      </p:sp>
+    </p:spTree>
+    <p:extLst>
+      <p:ext uri="{BB962C8B-B14F-4D97-AF65-F5344CB8AC3E}">
+        <p14:creationId xmlns:p14="http://schemas.microsoft.com/office/powerpoint/2010/main" val="3241084479"/>
+      </p:ext>
+    </p:extLst>
+  </p:cSld>
+  <p:clrMapOvr>
+    <a:masterClrMapping/>
+  </p:clrMapOvr>
+</p:sld>
+</file>
+
+<file path=ppt/slides/slide42.xml><?xml version="1.0" encoding="utf-8"?>
+<p:sld xmlns:a="http://schemas.openxmlformats.org/drawingml/2006/main" xmlns:r="http://schemas.openxmlformats.org/officeDocument/2006/relationships" xmlns:p="http://schemas.openxmlformats.org/presentationml/2006/main">
+  <p:cSld>
+    <p:spTree>
+      <p:nvGrpSpPr>
+        <p:cNvPr id="1" name="">
+          <a:extLst>
+            <a:ext uri="{FF2B5EF4-FFF2-40B4-BE49-F238E27FC236}">
+              <a16:creationId xmlns:a16="http://schemas.microsoft.com/office/drawing/2014/main" id="{BC89F83D-5DFC-29AF-B4FF-9D0545A0FCDA}"/>
+            </a:ext>
+          </a:extLst>
+        </p:cNvPr>
+        <p:cNvGrpSpPr/>
+        <p:nvPr/>
+      </p:nvGrpSpPr>
+      <p:grpSpPr>
+        <a:xfrm>
+          <a:off x="0" y="0"/>
+          <a:ext cx="0" cy="0"/>
+          <a:chOff x="0" y="0"/>
+          <a:chExt cx="0" cy="0"/>
+        </a:xfrm>
+      </p:grpSpPr>
+      <mc:AlternateContent xmlns:mc="http://schemas.openxmlformats.org/markup-compatibility/2006">
+        <mc:Choice xmlns:a14="http://schemas.microsoft.com/office/drawing/2010/main" Requires="a14">
+          <p:sp>
+            <p:nvSpPr>
+              <p:cNvPr id="3" name="Content Placeholder 2">
+                <a:extLst>
+                  <a:ext uri="{FF2B5EF4-FFF2-40B4-BE49-F238E27FC236}">
+                    <a16:creationId xmlns:a16="http://schemas.microsoft.com/office/drawing/2014/main" id="{62709B48-58A5-623B-9852-30181B5EE4F8}"/>
+                  </a:ext>
+                </a:extLst>
+              </p:cNvPr>
+              <p:cNvSpPr>
+                <a:spLocks noGrp="1"/>
+              </p:cNvSpPr>
+              <p:nvPr>
+                <p:ph idx="1"/>
+              </p:nvPr>
+            </p:nvSpPr>
+            <p:spPr>
+              <a:xfrm>
+                <a:off x="838200" y="1123406"/>
+                <a:ext cx="10515600" cy="5470724"/>
+              </a:xfrm>
+            </p:spPr>
+            <p:txBody>
+              <a:bodyPr>
+                <a:normAutofit/>
+              </a:bodyPr>
+              <a:lstStyle/>
+              <a:p>
+                <a:pPr marL="0" indent="0">
+                  <a:buNone/>
+                </a:pPr>
+                <a:r>
+                  <a:rPr lang="en-US" dirty="0"/>
+                  <a:t>What are the properties of a good hash function?  </a:t>
+                </a:r>
+              </a:p>
+              <a:p>
+                <a:pPr marL="514350" indent="-514350">
+                  <a:buFont typeface="+mj-lt"/>
+                  <a:buAutoNum type="arabicPeriod" startAt="2"/>
+                </a:pPr>
+                <a:r>
+                  <a:rPr lang="en-US" dirty="0"/>
+                  <a:t>For a uniformly distributed hash function the probability of a hash collision with </a:t>
+                </a:r>
+                <a14:m>
+                  <m:oMath xmlns:m="http://schemas.openxmlformats.org/officeDocument/2006/math">
+                    <m:r>
+                      <a:rPr lang="en-US" i="1">
+                        <a:latin typeface="Cambria Math" panose="02040503050406030204" pitchFamily="18" charset="0"/>
+                        <a:ea typeface="Cambria Math" panose="02040503050406030204" pitchFamily="18" charset="0"/>
+                      </a:rPr>
+                      <m:t>𝑛</m:t>
+                    </m:r>
+                  </m:oMath>
+                </a14:m>
+                <a:r>
+                  <a:rPr lang="en-US" dirty="0"/>
+                  <a:t> elements filled in the table is    </a:t>
+                </a:r>
+              </a:p>
+              <a:p>
+                <a:pPr marL="0" indent="0">
+                  <a:buNone/>
+                </a:pPr>
+                <a14:m>
+                  <m:oMathPara xmlns:m="http://schemas.openxmlformats.org/officeDocument/2006/math">
+                    <m:oMathParaPr>
+                      <m:jc m:val="centerGroup"/>
+                    </m:oMathParaPr>
+                    <m:oMath xmlns:m="http://schemas.openxmlformats.org/officeDocument/2006/math">
+                      <m:r>
+                        <a:rPr lang="en-US" b="0" i="1" smtClean="0">
+                          <a:latin typeface="Cambria Math" panose="02040503050406030204" pitchFamily="18" charset="0"/>
+                        </a:rPr>
+                        <m:t>𝑃</m:t>
+                      </m:r>
+                      <m:d>
+                        <m:dPr>
+                          <m:ctrlPr>
+                            <a:rPr lang="en-US" b="0" i="1" smtClean="0">
+                              <a:latin typeface="Cambria Math" panose="02040503050406030204" pitchFamily="18" charset="0"/>
+                            </a:rPr>
+                          </m:ctrlPr>
+                        </m:dPr>
+                        <m:e>
+                          <m:r>
+                            <a:rPr lang="en-US" b="0" i="1" smtClean="0">
+                              <a:latin typeface="Cambria Math" panose="02040503050406030204" pitchFamily="18" charset="0"/>
+                            </a:rPr>
+                            <m:t>𝑚</m:t>
+                          </m:r>
+                          <m:r>
+                            <a:rPr lang="en-US" b="0" i="1" smtClean="0">
+                              <a:latin typeface="Cambria Math" panose="02040503050406030204" pitchFamily="18" charset="0"/>
+                            </a:rPr>
+                            <m:t>,</m:t>
+                          </m:r>
+                          <m:r>
+                            <a:rPr lang="en-US" b="0" i="1" smtClean="0">
+                              <a:latin typeface="Cambria Math" panose="02040503050406030204" pitchFamily="18" charset="0"/>
+                            </a:rPr>
+                            <m:t>𝑛</m:t>
+                          </m:r>
+                        </m:e>
+                      </m:d>
+                      <m:r>
+                        <a:rPr lang="en-US" i="1">
+                          <a:latin typeface="Cambria Math" panose="02040503050406030204" pitchFamily="18" charset="0"/>
+                          <a:ea typeface="Cambria Math" panose="02040503050406030204" pitchFamily="18" charset="0"/>
+                        </a:rPr>
+                        <m:t>≈</m:t>
+                      </m:r>
+                      <m:r>
+                        <a:rPr lang="en-US" b="0" i="1" smtClean="0">
+                          <a:latin typeface="Cambria Math" panose="02040503050406030204" pitchFamily="18" charset="0"/>
+                          <a:ea typeface="Cambria Math" panose="02040503050406030204" pitchFamily="18" charset="0"/>
+                        </a:rPr>
+                        <m:t>1−</m:t>
+                      </m:r>
+                      <m:r>
+                        <a:rPr lang="en-US" b="0" i="1" smtClean="0">
+                          <a:latin typeface="Cambria Math" panose="02040503050406030204" pitchFamily="18" charset="0"/>
+                          <a:ea typeface="Cambria Math" panose="02040503050406030204" pitchFamily="18" charset="0"/>
+                        </a:rPr>
+                        <m:t>𝑒𝑥𝑝</m:t>
+                      </m:r>
+                      <m:d>
+                        <m:dPr>
+                          <m:begChr m:val="["/>
+                          <m:endChr m:val="]"/>
+                          <m:ctrlPr>
+                            <a:rPr lang="en-US" b="0" i="1" smtClean="0">
+                              <a:latin typeface="Cambria Math" panose="02040503050406030204" pitchFamily="18" charset="0"/>
+                              <a:ea typeface="Cambria Math" panose="02040503050406030204" pitchFamily="18" charset="0"/>
+                            </a:rPr>
+                          </m:ctrlPr>
+                        </m:dPr>
+                        <m:e>
+                          <m:r>
+                            <a:rPr lang="en-US" b="0" i="1" smtClean="0">
+                              <a:latin typeface="Cambria Math" panose="02040503050406030204" pitchFamily="18" charset="0"/>
+                              <a:ea typeface="Cambria Math" panose="02040503050406030204" pitchFamily="18" charset="0"/>
+                            </a:rPr>
+                            <m:t>−</m:t>
+                          </m:r>
+                          <m:f>
+                            <m:fPr>
+                              <m:ctrlPr>
+                                <a:rPr lang="en-US" b="0" i="1" smtClean="0">
+                                  <a:latin typeface="Cambria Math" panose="02040503050406030204" pitchFamily="18" charset="0"/>
+                                  <a:ea typeface="Cambria Math" panose="02040503050406030204" pitchFamily="18" charset="0"/>
+                                </a:rPr>
+                              </m:ctrlPr>
+                            </m:fPr>
+                            <m:num>
+                              <m:r>
+                                <a:rPr lang="en-US" b="0" i="1" smtClean="0">
+                                  <a:latin typeface="Cambria Math" panose="02040503050406030204" pitchFamily="18" charset="0"/>
+                                  <a:ea typeface="Cambria Math" panose="02040503050406030204" pitchFamily="18" charset="0"/>
+                                </a:rPr>
+                                <m:t>𝑚</m:t>
+                              </m:r>
+                              <m:d>
+                                <m:dPr>
+                                  <m:ctrlPr>
+                                    <a:rPr lang="en-US" b="0" i="1" smtClean="0">
+                                      <a:latin typeface="Cambria Math" panose="02040503050406030204" pitchFamily="18" charset="0"/>
+                                      <a:ea typeface="Cambria Math" panose="02040503050406030204" pitchFamily="18" charset="0"/>
+                                    </a:rPr>
+                                  </m:ctrlPr>
+                                </m:dPr>
+                                <m:e>
+                                  <m:r>
+                                    <a:rPr lang="en-US" b="0" i="1" smtClean="0">
+                                      <a:latin typeface="Cambria Math" panose="02040503050406030204" pitchFamily="18" charset="0"/>
+                                      <a:ea typeface="Cambria Math" panose="02040503050406030204" pitchFamily="18" charset="0"/>
+                                    </a:rPr>
+                                    <m:t>𝑛</m:t>
+                                  </m:r>
+                                  <m:r>
+                                    <a:rPr lang="en-US" b="0" i="1" smtClean="0">
+                                      <a:latin typeface="Cambria Math" panose="02040503050406030204" pitchFamily="18" charset="0"/>
+                                      <a:ea typeface="Cambria Math" panose="02040503050406030204" pitchFamily="18" charset="0"/>
+                                    </a:rPr>
+                                    <m:t>−1</m:t>
+                                  </m:r>
+                                </m:e>
+                              </m:d>
+                            </m:num>
+                            <m:den>
+                              <m:r>
+                                <a:rPr lang="en-US" b="0" i="1" smtClean="0">
+                                  <a:latin typeface="Cambria Math" panose="02040503050406030204" pitchFamily="18" charset="0"/>
+                                  <a:ea typeface="Cambria Math" panose="02040503050406030204" pitchFamily="18" charset="0"/>
+                                </a:rPr>
+                                <m:t>2</m:t>
+                              </m:r>
+                              <m:r>
+                                <a:rPr lang="en-US" b="0" i="1" smtClean="0">
+                                  <a:latin typeface="Cambria Math" panose="02040503050406030204" pitchFamily="18" charset="0"/>
+                                  <a:ea typeface="Cambria Math" panose="02040503050406030204" pitchFamily="18" charset="0"/>
+                                </a:rPr>
+                                <m:t>𝑚</m:t>
+                              </m:r>
+                            </m:den>
+                          </m:f>
+                        </m:e>
+                      </m:d>
+                    </m:oMath>
+                  </m:oMathPara>
+                </a14:m>
+                <a:endParaRPr lang="en-US" dirty="0"/>
+              </a:p>
+              <a:p>
+                <a:pPr marL="514350" indent="-514350">
+                  <a:buFont typeface="+mj-lt"/>
+                  <a:buAutoNum type="arabicPeriod" startAt="3"/>
+                </a:pPr>
+                <a:r>
+                  <a:rPr lang="en-US" dirty="0"/>
+                  <a:t>Given table utilization, </a:t>
+                </a:r>
+                <a14:m>
+                  <m:oMath xmlns:m="http://schemas.openxmlformats.org/officeDocument/2006/math">
+                    <m:r>
+                      <a:rPr lang="en-US" i="1" smtClean="0">
+                        <a:latin typeface="Cambria Math" panose="02040503050406030204" pitchFamily="18" charset="0"/>
+                        <a:ea typeface="Cambria Math" panose="02040503050406030204" pitchFamily="18" charset="0"/>
+                      </a:rPr>
+                      <m:t>𝛼</m:t>
+                    </m:r>
+                    <m:r>
+                      <a:rPr lang="en-US" b="0" i="1" smtClean="0">
+                        <a:latin typeface="Cambria Math" panose="02040503050406030204" pitchFamily="18" charset="0"/>
+                        <a:ea typeface="Cambria Math" panose="02040503050406030204" pitchFamily="18" charset="0"/>
+                      </a:rPr>
+                      <m:t>=</m:t>
+                    </m:r>
+                    <m:r>
+                      <a:rPr lang="en-US" b="0" i="1" smtClean="0">
+                        <a:latin typeface="Cambria Math" panose="02040503050406030204" pitchFamily="18" charset="0"/>
+                        <a:ea typeface="Cambria Math" panose="02040503050406030204" pitchFamily="18" charset="0"/>
+                      </a:rPr>
+                      <m:t>𝑛</m:t>
+                    </m:r>
+                    <m:r>
+                      <a:rPr lang="en-US" b="0" i="1" smtClean="0">
+                        <a:latin typeface="Cambria Math" panose="02040503050406030204" pitchFamily="18" charset="0"/>
+                        <a:ea typeface="Cambria Math" panose="02040503050406030204" pitchFamily="18" charset="0"/>
+                      </a:rPr>
+                      <m:t>/</m:t>
+                    </m:r>
+                    <m:r>
+                      <a:rPr lang="en-US" b="0" i="1" smtClean="0">
+                        <a:latin typeface="Cambria Math" panose="02040503050406030204" pitchFamily="18" charset="0"/>
+                        <a:ea typeface="Cambria Math" panose="02040503050406030204" pitchFamily="18" charset="0"/>
+                      </a:rPr>
+                      <m:t>𝑚</m:t>
+                    </m:r>
+                  </m:oMath>
+                </a14:m>
+                <a:r>
+                  <a:rPr lang="en-US" dirty="0"/>
+                  <a:t>, the number of probes required to find an open bucket is   </a:t>
+                </a:r>
+              </a:p>
+              <a:p>
+                <a:pPr marL="0" indent="0">
+                  <a:buNone/>
+                </a:pPr>
+                <a14:m>
+                  <m:oMathPara xmlns:m="http://schemas.openxmlformats.org/officeDocument/2006/math">
+                    <m:oMathParaPr>
+                      <m:jc m:val="centerGroup"/>
+                    </m:oMathParaPr>
+                    <m:oMath xmlns:m="http://schemas.openxmlformats.org/officeDocument/2006/math">
+                      <m:sSub>
+                        <m:sSubPr>
+                          <m:ctrlPr>
+                            <a:rPr lang="en-US" i="1" smtClean="0">
+                              <a:latin typeface="Cambria Math" panose="02040503050406030204" pitchFamily="18" charset="0"/>
+                              <a:ea typeface="Cambria Math" panose="02040503050406030204" pitchFamily="18" charset="0"/>
+                            </a:rPr>
+                          </m:ctrlPr>
+                        </m:sSubPr>
+                        <m:e>
+                          <m:r>
+                            <a:rPr lang="en-US" b="0" i="1" smtClean="0">
+                              <a:latin typeface="Cambria Math" panose="02040503050406030204" pitchFamily="18" charset="0"/>
+                              <a:ea typeface="Cambria Math" panose="02040503050406030204" pitchFamily="18" charset="0"/>
+                            </a:rPr>
+                            <m:t>𝑁</m:t>
+                          </m:r>
+                        </m:e>
+                        <m:sub>
+                          <m:r>
+                            <a:rPr lang="en-US" b="0" i="1" smtClean="0">
+                              <a:latin typeface="Cambria Math" panose="02040503050406030204" pitchFamily="18" charset="0"/>
+                              <a:ea typeface="Cambria Math" panose="02040503050406030204" pitchFamily="18" charset="0"/>
+                            </a:rPr>
+                            <m:t>𝑝𝑟𝑜𝑏𝑠</m:t>
+                          </m:r>
+                        </m:sub>
+                      </m:sSub>
+                      <m:r>
+                        <a:rPr lang="en-US" i="1" smtClean="0">
+                          <a:latin typeface="Cambria Math" panose="02040503050406030204" pitchFamily="18" charset="0"/>
+                          <a:ea typeface="Cambria Math" panose="02040503050406030204" pitchFamily="18" charset="0"/>
+                        </a:rPr>
+                        <m:t>≈</m:t>
+                      </m:r>
+                      <m:f>
+                        <m:fPr>
+                          <m:ctrlPr>
+                            <a:rPr lang="en-US" i="1" smtClean="0">
+                              <a:latin typeface="Cambria Math" panose="02040503050406030204" pitchFamily="18" charset="0"/>
+                              <a:ea typeface="Cambria Math" panose="02040503050406030204" pitchFamily="18" charset="0"/>
+                            </a:rPr>
+                          </m:ctrlPr>
+                        </m:fPr>
+                        <m:num>
+                          <m:r>
+                            <a:rPr lang="en-US" b="0" i="1" smtClean="0">
+                              <a:latin typeface="Cambria Math" panose="02040503050406030204" pitchFamily="18" charset="0"/>
+                              <a:ea typeface="Cambria Math" panose="02040503050406030204" pitchFamily="18" charset="0"/>
+                            </a:rPr>
+                            <m:t>1</m:t>
+                          </m:r>
+                        </m:num>
+                        <m:den>
+                          <m:r>
+                            <a:rPr lang="en-US" i="1" smtClean="0">
+                              <a:latin typeface="Cambria Math" panose="02040503050406030204" pitchFamily="18" charset="0"/>
+                              <a:ea typeface="Cambria Math" panose="02040503050406030204" pitchFamily="18" charset="0"/>
+                            </a:rPr>
+                            <m:t>𝛼</m:t>
+                          </m:r>
+                        </m:den>
+                      </m:f>
+                      <m:func>
+                        <m:funcPr>
+                          <m:ctrlPr>
+                            <a:rPr lang="en-US" i="1" smtClean="0">
+                              <a:latin typeface="Cambria Math" panose="02040503050406030204" pitchFamily="18" charset="0"/>
+                              <a:ea typeface="Cambria Math" panose="02040503050406030204" pitchFamily="18" charset="0"/>
+                            </a:rPr>
+                          </m:ctrlPr>
+                        </m:funcPr>
+                        <m:fName>
+                          <m:r>
+                            <m:rPr>
+                              <m:sty m:val="p"/>
+                            </m:rPr>
+                            <a:rPr lang="en-US" b="0" i="0" smtClean="0">
+                              <a:latin typeface="Cambria Math" panose="02040503050406030204" pitchFamily="18" charset="0"/>
+                              <a:ea typeface="Cambria Math" panose="02040503050406030204" pitchFamily="18" charset="0"/>
+                            </a:rPr>
+                            <m:t>ln</m:t>
+                          </m:r>
+                        </m:fName>
+                        <m:e>
+                          <m:f>
+                            <m:fPr>
+                              <m:ctrlPr>
+                                <a:rPr lang="en-US" i="1" smtClean="0">
+                                  <a:latin typeface="Cambria Math" panose="02040503050406030204" pitchFamily="18" charset="0"/>
+                                  <a:ea typeface="Cambria Math" panose="02040503050406030204" pitchFamily="18" charset="0"/>
+                                </a:rPr>
+                              </m:ctrlPr>
+                            </m:fPr>
+                            <m:num>
+                              <m:r>
+                                <a:rPr lang="en-US" b="0" i="1" smtClean="0">
+                                  <a:latin typeface="Cambria Math" panose="02040503050406030204" pitchFamily="18" charset="0"/>
+                                  <a:ea typeface="Cambria Math" panose="02040503050406030204" pitchFamily="18" charset="0"/>
+                                </a:rPr>
+                                <m:t>1</m:t>
+                              </m:r>
+                            </m:num>
+                            <m:den>
+                              <m:r>
+                                <a:rPr lang="en-US" b="0" i="1" smtClean="0">
+                                  <a:latin typeface="Cambria Math" panose="02040503050406030204" pitchFamily="18" charset="0"/>
+                                  <a:ea typeface="Cambria Math" panose="02040503050406030204" pitchFamily="18" charset="0"/>
+                                </a:rPr>
+                                <m:t>1−</m:t>
+                              </m:r>
+                              <m:r>
+                                <a:rPr lang="en-US" b="0" i="1" smtClean="0">
+                                  <a:latin typeface="Cambria Math" panose="02040503050406030204" pitchFamily="18" charset="0"/>
+                                  <a:ea typeface="Cambria Math" panose="02040503050406030204" pitchFamily="18" charset="0"/>
+                                </a:rPr>
+                                <m:t>𝛼</m:t>
+                              </m:r>
+                            </m:den>
+                          </m:f>
+                        </m:e>
+                      </m:func>
+                    </m:oMath>
+                  </m:oMathPara>
+                </a14:m>
+                <a:endParaRPr lang="en-US" dirty="0"/>
+              </a:p>
+              <a:p>
+                <a:pPr marL="457200" lvl="1" indent="0">
+                  <a:buNone/>
+                </a:pPr>
+                <a:r>
+                  <a:rPr lang="en-US" dirty="0"/>
+                  <a:t>Where the chance of success is </a:t>
+                </a:r>
+                <a14:m>
+                  <m:oMath xmlns:m="http://schemas.openxmlformats.org/officeDocument/2006/math">
+                    <m:r>
+                      <a:rPr lang="en-US" i="1" smtClean="0">
+                        <a:latin typeface="Cambria Math" panose="02040503050406030204" pitchFamily="18" charset="0"/>
+                        <a:ea typeface="Cambria Math" panose="02040503050406030204" pitchFamily="18" charset="0"/>
+                      </a:rPr>
+                      <m:t>≈</m:t>
+                    </m:r>
+                    <m:f>
+                      <m:fPr>
+                        <m:ctrlPr>
+                          <a:rPr lang="en-US" i="1">
+                            <a:latin typeface="Cambria Math" panose="02040503050406030204" pitchFamily="18" charset="0"/>
+                            <a:ea typeface="Cambria Math" panose="02040503050406030204" pitchFamily="18" charset="0"/>
+                          </a:rPr>
+                        </m:ctrlPr>
+                      </m:fPr>
+                      <m:num>
+                        <m:r>
+                          <a:rPr lang="en-US" i="1">
+                            <a:latin typeface="Cambria Math" panose="02040503050406030204" pitchFamily="18" charset="0"/>
+                            <a:ea typeface="Cambria Math" panose="02040503050406030204" pitchFamily="18" charset="0"/>
+                          </a:rPr>
+                          <m:t>1</m:t>
+                        </m:r>
+                      </m:num>
+                      <m:den>
+                        <m:r>
+                          <a:rPr lang="en-US" i="1">
+                            <a:latin typeface="Cambria Math" panose="02040503050406030204" pitchFamily="18" charset="0"/>
+                            <a:ea typeface="Cambria Math" panose="02040503050406030204" pitchFamily="18" charset="0"/>
+                          </a:rPr>
+                          <m:t>1−</m:t>
+                        </m:r>
+                        <m:r>
+                          <a:rPr lang="en-US" i="1">
+                            <a:latin typeface="Cambria Math" panose="02040503050406030204" pitchFamily="18" charset="0"/>
+                            <a:ea typeface="Cambria Math" panose="02040503050406030204" pitchFamily="18" charset="0"/>
+                          </a:rPr>
+                          <m:t>𝛼</m:t>
+                        </m:r>
+                      </m:den>
+                    </m:f>
+                  </m:oMath>
+                </a14:m>
+                <a:endParaRPr lang="en-US" dirty="0"/>
+              </a:p>
+            </p:txBody>
+          </p:sp>
+        </mc:Choice>
+        <mc:Fallback>
+          <p:sp>
+            <p:nvSpPr>
+              <p:cNvPr id="3" name="Content Placeholder 2">
+                <a:extLst>
+                  <a:ext uri="{FF2B5EF4-FFF2-40B4-BE49-F238E27FC236}">
+                    <a16:creationId xmlns:a16="http://schemas.microsoft.com/office/drawing/2014/main" id="{62709B48-58A5-623B-9852-30181B5EE4F8}"/>
+                  </a:ext>
+                </a:extLst>
+              </p:cNvPr>
+              <p:cNvSpPr>
+                <a:spLocks noGrp="1" noRot="1" noChangeAspect="1" noMove="1" noResize="1" noEditPoints="1" noAdjustHandles="1" noChangeArrowheads="1" noChangeShapeType="1" noTextEdit="1"/>
+              </p:cNvSpPr>
+              <p:nvPr>
+                <p:ph idx="1"/>
+              </p:nvPr>
+            </p:nvSpPr>
+            <p:spPr>
+              <a:xfrm>
+                <a:off x="838200" y="1123406"/>
+                <a:ext cx="10515600" cy="5470724"/>
+              </a:xfrm>
+              <a:blipFill>
+                <a:blip r:embed="rId2"/>
+                <a:stretch>
+                  <a:fillRect l="-1217" t="-1782" r="-986"/>
+                </a:stretch>
+              </a:blipFill>
+            </p:spPr>
+            <p:txBody>
+              <a:bodyPr/>
+              <a:lstStyle/>
+              <a:p>
+                <a:r>
+                  <a:rPr lang="en-US">
+                    <a:noFill/>
+                  </a:rPr>
+                  <a:t> </a:t>
+                </a:r>
+              </a:p>
+            </p:txBody>
+          </p:sp>
+        </mc:Fallback>
+      </mc:AlternateContent>
+      <p:sp>
+        <p:nvSpPr>
+          <p:cNvPr id="6" name="Title 1">
+            <a:extLst>
+              <a:ext uri="{FF2B5EF4-FFF2-40B4-BE49-F238E27FC236}">
+                <a16:creationId xmlns:a16="http://schemas.microsoft.com/office/drawing/2014/main" id="{B7CB3FB6-304E-F342-6AED-DDAE3A8C27FD}"/>
+              </a:ext>
+            </a:extLst>
+          </p:cNvPr>
+          <p:cNvSpPr txBox="1">
+            <a:spLocks/>
+          </p:cNvSpPr>
+          <p:nvPr/>
+        </p:nvSpPr>
+        <p:spPr>
+          <a:xfrm>
+            <a:off x="838200" y="-635"/>
+            <a:ext cx="10515600" cy="1325563"/>
+          </a:xfrm>
+          <a:prstGeom prst="rect">
+            <a:avLst/>
+          </a:prstGeom>
+        </p:spPr>
+        <p:txBody>
+          <a:bodyPr vert="horz" lIns="91440" tIns="45720" rIns="91440" bIns="45720" rtlCol="0" anchor="ctr">
+            <a:normAutofit/>
+          </a:bodyPr>
+          <a:lstStyle>
+            <a:lvl1pPr algn="l" defTabSz="914400" rtl="0" eaLnBrk="1" latinLnBrk="0" hangingPunct="1">
+              <a:lnSpc>
+                <a:spcPct val="90000"/>
+              </a:lnSpc>
+              <a:spcBef>
+                <a:spcPct val="0"/>
+              </a:spcBef>
+              <a:buNone/>
+              <a:defRPr sz="4400" kern="1200">
+                <a:solidFill>
+                  <a:schemeClr val="tx1"/>
+                </a:solidFill>
+                <a:latin typeface="+mj-lt"/>
+                <a:ea typeface="+mj-ea"/>
+                <a:cs typeface="+mj-cs"/>
+              </a:defRPr>
+            </a:lvl1pPr>
+          </a:lstStyle>
+          <a:p>
+            <a:r>
+              <a:rPr lang="en-US" dirty="0">
+                <a:latin typeface="+mn-lt"/>
+              </a:rPr>
+              <a:t>Introduction to Hashing</a:t>
+            </a:r>
+          </a:p>
+        </p:txBody>
+      </p:sp>
+    </p:spTree>
+    <p:extLst>
+      <p:ext uri="{BB962C8B-B14F-4D97-AF65-F5344CB8AC3E}">
+        <p14:creationId xmlns:p14="http://schemas.microsoft.com/office/powerpoint/2010/main" val="1567949118"/>
+      </p:ext>
+    </p:extLst>
+  </p:cSld>
+  <p:clrMapOvr>
+    <a:masterClrMapping/>
+  </p:clrMapOvr>
+</p:sld>
+</file>
+
+<file path=ppt/slides/slide43.xml><?xml version="1.0" encoding="utf-8"?>
+<p:sld xmlns:a="http://schemas.openxmlformats.org/drawingml/2006/main" xmlns:r="http://schemas.openxmlformats.org/officeDocument/2006/relationships" xmlns:p="http://schemas.openxmlformats.org/presentationml/2006/main" show="0">
+  <p:cSld>
+    <p:spTree>
+      <p:nvGrpSpPr>
+        <p:cNvPr id="1" name="">
+          <a:extLst>
+            <a:ext uri="{FF2B5EF4-FFF2-40B4-BE49-F238E27FC236}">
+              <a16:creationId xmlns:a16="http://schemas.microsoft.com/office/drawing/2014/main" id="{F312079E-A579-442A-F635-1F9B39891F38}"/>
+            </a:ext>
+          </a:extLst>
+        </p:cNvPr>
+        <p:cNvGrpSpPr/>
+        <p:nvPr/>
+      </p:nvGrpSpPr>
+      <p:grpSpPr>
+        <a:xfrm>
+          <a:off x="0" y="0"/>
+          <a:ext cx="0" cy="0"/>
+          <a:chOff x="0" y="0"/>
+          <a:chExt cx="0" cy="0"/>
+        </a:xfrm>
+      </p:grpSpPr>
+      <mc:AlternateContent xmlns:mc="http://schemas.openxmlformats.org/markup-compatibility/2006">
+        <mc:Choice xmlns:a14="http://schemas.microsoft.com/office/drawing/2010/main" Requires="a14">
+          <p:sp>
+            <p:nvSpPr>
+              <p:cNvPr id="3" name="Content Placeholder 2">
+                <a:extLst>
+                  <a:ext uri="{FF2B5EF4-FFF2-40B4-BE49-F238E27FC236}">
+                    <a16:creationId xmlns:a16="http://schemas.microsoft.com/office/drawing/2014/main" id="{9034E94E-8B65-013C-A4FA-49F30AF8ED1C}"/>
+                  </a:ext>
+                </a:extLst>
+              </p:cNvPr>
+              <p:cNvSpPr>
+                <a:spLocks noGrp="1"/>
+              </p:cNvSpPr>
+              <p:nvPr>
+                <p:ph idx="1"/>
+              </p:nvPr>
+            </p:nvSpPr>
+            <p:spPr>
+              <a:xfrm>
+                <a:off x="838200" y="1123406"/>
+                <a:ext cx="10515600" cy="5470724"/>
+              </a:xfrm>
+            </p:spPr>
+            <p:txBody>
+              <a:bodyPr>
+                <a:normAutofit/>
+              </a:bodyPr>
+              <a:lstStyle/>
+              <a:p>
+                <a:pPr marL="0" indent="0">
+                  <a:buNone/>
+                </a:pPr>
+                <a:r>
+                  <a:rPr lang="en-US" dirty="0"/>
+                  <a:t>What are the properties of a good hash function?  </a:t>
+                </a:r>
+              </a:p>
+              <a:p>
+                <a:pPr marL="514350" indent="-514350">
+                  <a:buFont typeface="+mj-lt"/>
+                  <a:buAutoNum type="arabicPeriod"/>
+                </a:pPr>
+                <a:r>
+                  <a:rPr lang="en-US" dirty="0"/>
+                  <a:t>For key values, </a:t>
+                </a:r>
+                <a14:m>
+                  <m:oMath xmlns:m="http://schemas.openxmlformats.org/officeDocument/2006/math">
+                    <m:r>
+                      <a:rPr lang="en-US" i="1">
+                        <a:latin typeface="Cambria Math" panose="02040503050406030204" pitchFamily="18" charset="0"/>
+                      </a:rPr>
+                      <m:t>𝐾</m:t>
+                    </m:r>
+                  </m:oMath>
+                </a14:m>
+                <a:r>
+                  <a:rPr lang="en-US" dirty="0"/>
+                  <a:t>, want a </a:t>
+                </a:r>
+                <a:r>
+                  <a:rPr lang="en-US" b="1" dirty="0"/>
+                  <a:t>uniform distribution over </a:t>
+                </a:r>
+                <a14:m>
+                  <m:oMath xmlns:m="http://schemas.openxmlformats.org/officeDocument/2006/math">
+                    <m:r>
+                      <a:rPr lang="en-US" b="1" i="1" smtClean="0">
+                        <a:latin typeface="Cambria Math" panose="02040503050406030204" pitchFamily="18" charset="0"/>
+                      </a:rPr>
+                      <m:t>𝒎</m:t>
+                    </m:r>
+                  </m:oMath>
+                </a14:m>
+                <a:r>
+                  <a:rPr lang="en-US" b="1" dirty="0"/>
+                  <a:t> hash values</a:t>
+                </a:r>
+              </a:p>
+              <a:p>
+                <a:pPr marL="457200" lvl="1" indent="0">
+                  <a:buNone/>
+                </a:pPr>
+                <a14:m>
+                  <m:oMathPara xmlns:m="http://schemas.openxmlformats.org/officeDocument/2006/math">
+                    <m:oMathParaPr>
+                      <m:jc m:val="centerGroup"/>
+                    </m:oMathParaPr>
+                    <m:oMath xmlns:m="http://schemas.openxmlformats.org/officeDocument/2006/math">
+                      <m:r>
+                        <a:rPr lang="en-US" b="1" i="1">
+                          <a:latin typeface="Cambria Math" panose="02040503050406030204" pitchFamily="18" charset="0"/>
+                        </a:rPr>
+                        <m:t>𝒇</m:t>
+                      </m:r>
+                      <m:r>
+                        <a:rPr lang="en-US" b="1" i="1">
+                          <a:latin typeface="Cambria Math" panose="02040503050406030204" pitchFamily="18" charset="0"/>
+                        </a:rPr>
+                        <m:t>(</m:t>
+                      </m:r>
+                      <m:r>
+                        <a:rPr lang="en-US" b="1" i="1">
+                          <a:latin typeface="Cambria Math" panose="02040503050406030204" pitchFamily="18" charset="0"/>
+                        </a:rPr>
+                        <m:t>𝒌</m:t>
+                      </m:r>
+                      <m:r>
+                        <a:rPr lang="en-US" b="1" i="1">
+                          <a:latin typeface="Cambria Math" panose="02040503050406030204" pitchFamily="18" charset="0"/>
+                        </a:rPr>
+                        <m:t>)~</m:t>
+                      </m:r>
+                      <m:r>
+                        <a:rPr lang="en-US" b="1" i="1">
+                          <a:latin typeface="Cambria Math" panose="02040503050406030204" pitchFamily="18" charset="0"/>
+                          <a:ea typeface="Cambria Math" panose="02040503050406030204" pitchFamily="18" charset="0"/>
+                        </a:rPr>
+                        <m:t>𝑼</m:t>
+                      </m:r>
+                      <m:r>
+                        <a:rPr lang="en-US" b="1" i="1">
+                          <a:latin typeface="Cambria Math" panose="02040503050406030204" pitchFamily="18" charset="0"/>
+                          <a:ea typeface="Cambria Math" panose="02040503050406030204" pitchFamily="18" charset="0"/>
+                        </a:rPr>
+                        <m:t>(</m:t>
+                      </m:r>
+                      <m:r>
+                        <a:rPr lang="en-US" b="1" i="1">
+                          <a:latin typeface="Cambria Math" panose="02040503050406030204" pitchFamily="18" charset="0"/>
+                          <a:ea typeface="Cambria Math" panose="02040503050406030204" pitchFamily="18" charset="0"/>
+                        </a:rPr>
+                        <m:t>𝟎</m:t>
+                      </m:r>
+                      <m:r>
+                        <a:rPr lang="en-US" b="1" i="1">
+                          <a:latin typeface="Cambria Math" panose="02040503050406030204" pitchFamily="18" charset="0"/>
+                          <a:ea typeface="Cambria Math" panose="02040503050406030204" pitchFamily="18" charset="0"/>
+                        </a:rPr>
+                        <m:t>,</m:t>
+                      </m:r>
+                      <m:r>
+                        <a:rPr lang="en-US" b="1" i="1" smtClean="0">
+                          <a:latin typeface="Cambria Math" panose="02040503050406030204" pitchFamily="18" charset="0"/>
+                          <a:ea typeface="Cambria Math" panose="02040503050406030204" pitchFamily="18" charset="0"/>
+                        </a:rPr>
+                        <m:t>𝒎</m:t>
+                      </m:r>
+                      <m:r>
+                        <a:rPr lang="en-US" b="1" i="1">
+                          <a:latin typeface="Cambria Math" panose="02040503050406030204" pitchFamily="18" charset="0"/>
+                          <a:ea typeface="Cambria Math" panose="02040503050406030204" pitchFamily="18" charset="0"/>
+                        </a:rPr>
+                        <m:t>)</m:t>
+                      </m:r>
+                    </m:oMath>
+                  </m:oMathPara>
+                </a14:m>
+                <a:endParaRPr lang="en-US" b="1" dirty="0"/>
+              </a:p>
+              <a:p>
+                <a:pPr lvl="1"/>
+                <a:r>
+                  <a:rPr lang="en-US" dirty="0"/>
+                  <a:t>For </a:t>
+                </a:r>
+                <a14:m>
+                  <m:oMath xmlns:m="http://schemas.openxmlformats.org/officeDocument/2006/math">
+                    <m:r>
+                      <a:rPr lang="en-US" b="0" i="1" smtClean="0">
+                        <a:latin typeface="Cambria Math" panose="02040503050406030204" pitchFamily="18" charset="0"/>
+                      </a:rPr>
+                      <m:t>𝑚</m:t>
+                    </m:r>
+                  </m:oMath>
+                </a14:m>
+                <a:r>
+                  <a:rPr lang="en-US" dirty="0"/>
+                  <a:t> length hash table probability of bucket </a:t>
+                </a:r>
+                <a14:m>
+                  <m:oMath xmlns:m="http://schemas.openxmlformats.org/officeDocument/2006/math">
+                    <m:r>
+                      <a:rPr lang="en-US" b="0" i="1" smtClean="0">
+                        <a:latin typeface="Cambria Math" panose="02040503050406030204" pitchFamily="18" charset="0"/>
+                      </a:rPr>
+                      <m:t>𝑖</m:t>
+                    </m:r>
+                  </m:oMath>
+                </a14:m>
+                <a:r>
+                  <a:rPr lang="en-US" dirty="0"/>
+                  <a:t>: </a:t>
+                </a:r>
+              </a:p>
+              <a:p>
+                <a:pPr marL="457200" lvl="1" indent="0">
+                  <a:buNone/>
+                </a:pPr>
+                <a14:m>
+                  <m:oMathPara xmlns:m="http://schemas.openxmlformats.org/officeDocument/2006/math">
+                    <m:oMathParaPr>
+                      <m:jc m:val="centerGroup"/>
+                    </m:oMathParaPr>
+                    <m:oMath xmlns:m="http://schemas.openxmlformats.org/officeDocument/2006/math">
+                      <m:r>
+                        <m:rPr>
+                          <m:sty m:val="p"/>
+                        </m:rPr>
+                        <a:rPr lang="en-US" b="0" i="0" smtClean="0">
+                          <a:latin typeface="Cambria Math" panose="02040503050406030204" pitchFamily="18" charset="0"/>
+                        </a:rPr>
+                        <m:t>P</m:t>
+                      </m:r>
+                      <m:d>
+                        <m:dPr>
+                          <m:ctrlPr>
+                            <a:rPr lang="en-US" i="1" smtClean="0">
+                              <a:latin typeface="Cambria Math" panose="02040503050406030204" pitchFamily="18" charset="0"/>
+                            </a:rPr>
+                          </m:ctrlPr>
+                        </m:dPr>
+                        <m:e>
+                          <m:r>
+                            <a:rPr lang="en-US" b="0" i="1">
+                              <a:latin typeface="Cambria Math" panose="02040503050406030204" pitchFamily="18" charset="0"/>
+                            </a:rPr>
+                            <m:t>𝑓</m:t>
+                          </m:r>
+                          <m:d>
+                            <m:dPr>
+                              <m:ctrlPr>
+                                <a:rPr lang="en-US" i="1">
+                                  <a:latin typeface="Cambria Math" panose="02040503050406030204" pitchFamily="18" charset="0"/>
+                                </a:rPr>
+                              </m:ctrlPr>
+                            </m:dPr>
+                            <m:e>
+                              <m:r>
+                                <a:rPr lang="en-US" b="0" i="1">
+                                  <a:latin typeface="Cambria Math" panose="02040503050406030204" pitchFamily="18" charset="0"/>
+                                </a:rPr>
+                                <m:t>𝑘</m:t>
+                              </m:r>
+                            </m:e>
+                          </m:d>
+                          <m:r>
+                            <a:rPr lang="en-US" b="0" i="1" smtClean="0">
+                              <a:latin typeface="Cambria Math" panose="02040503050406030204" pitchFamily="18" charset="0"/>
+                            </a:rPr>
+                            <m:t>=</m:t>
+                          </m:r>
+                          <m:r>
+                            <a:rPr lang="en-US" b="0" i="1" smtClean="0">
+                              <a:latin typeface="Cambria Math" panose="02040503050406030204" pitchFamily="18" charset="0"/>
+                            </a:rPr>
+                            <m:t>𝑖</m:t>
+                          </m:r>
+                        </m:e>
+                      </m:d>
+                      <m:r>
+                        <a:rPr lang="en-US" b="0" i="1" smtClean="0">
+                          <a:latin typeface="Cambria Math" panose="02040503050406030204" pitchFamily="18" charset="0"/>
+                        </a:rPr>
+                        <m:t>=</m:t>
+                      </m:r>
+                      <m:f>
+                        <m:fPr>
+                          <m:ctrlPr>
+                            <a:rPr lang="en-US" b="0" i="1" smtClean="0">
+                              <a:latin typeface="Cambria Math" panose="02040503050406030204" pitchFamily="18" charset="0"/>
+                            </a:rPr>
+                          </m:ctrlPr>
+                        </m:fPr>
+                        <m:num>
+                          <m:r>
+                            <a:rPr lang="en-US" b="0" i="1" smtClean="0">
+                              <a:latin typeface="Cambria Math" panose="02040503050406030204" pitchFamily="18" charset="0"/>
+                            </a:rPr>
+                            <m:t>1</m:t>
+                          </m:r>
+                        </m:num>
+                        <m:den>
+                          <m:r>
+                            <a:rPr lang="en-US" b="0" i="1" smtClean="0">
+                              <a:latin typeface="Cambria Math" panose="02040503050406030204" pitchFamily="18" charset="0"/>
+                            </a:rPr>
+                            <m:t>𝑚</m:t>
+                          </m:r>
+                        </m:den>
+                      </m:f>
+                    </m:oMath>
+                  </m:oMathPara>
+                </a14:m>
+                <a:endParaRPr lang="en-US" dirty="0"/>
+              </a:p>
+              <a:p>
+                <a:pPr lvl="1"/>
+                <a:r>
+                  <a:rPr lang="en-US" b="1" dirty="0"/>
+                  <a:t>Lumpy hash values </a:t>
+                </a:r>
+                <a:r>
+                  <a:rPr lang="en-US" dirty="0"/>
+                  <a:t>lead to increased </a:t>
+                </a:r>
+                <a:r>
+                  <a:rPr lang="en-US" b="1" dirty="0"/>
+                  <a:t>hash collisions </a:t>
+                </a:r>
+              </a:p>
+              <a:p>
+                <a:pPr lvl="1"/>
+                <a:r>
+                  <a:rPr lang="en-US" dirty="0"/>
+                  <a:t>Can verify with </a:t>
+                </a:r>
+                <a14:m>
+                  <m:oMath xmlns:m="http://schemas.openxmlformats.org/officeDocument/2006/math">
+                    <m:sSup>
+                      <m:sSupPr>
+                        <m:ctrlPr>
+                          <a:rPr lang="en-US" i="1">
+                            <a:latin typeface="Cambria Math" panose="02040503050406030204" pitchFamily="18" charset="0"/>
+                          </a:rPr>
+                        </m:ctrlPr>
+                      </m:sSupPr>
+                      <m:e>
+                        <m:r>
+                          <a:rPr lang="en-US" i="1">
+                            <a:latin typeface="Cambria Math" panose="02040503050406030204" pitchFamily="18" charset="0"/>
+                            <a:ea typeface="Cambria Math" panose="02040503050406030204" pitchFamily="18" charset="0"/>
+                          </a:rPr>
+                          <m:t>𝜒</m:t>
+                        </m:r>
+                      </m:e>
+                      <m:sup>
+                        <m:r>
+                          <a:rPr lang="en-US" i="1">
+                            <a:latin typeface="Cambria Math" panose="02040503050406030204" pitchFamily="18" charset="0"/>
+                          </a:rPr>
+                          <m:t>2</m:t>
+                        </m:r>
+                      </m:sup>
+                    </m:sSup>
+                  </m:oMath>
+                </a14:m>
+                <a:r>
+                  <a:rPr lang="en-US" dirty="0"/>
+                  <a:t> test</a:t>
+                </a:r>
+              </a:p>
+              <a:p>
+                <a:pPr marL="514350" indent="-514350">
+                  <a:buFont typeface="+mj-lt"/>
+                  <a:buAutoNum type="arabicPeriod"/>
+                </a:pPr>
+                <a:r>
+                  <a:rPr lang="en-US" dirty="0"/>
+                  <a:t>Resolution method for inevitable hash collisions</a:t>
+                </a:r>
+              </a:p>
+              <a:p>
+                <a:pPr lvl="1"/>
+                <a:r>
+                  <a:rPr lang="en-US" dirty="0"/>
+                  <a:t>Probability of collision increases as table fills </a:t>
+                </a:r>
+              </a:p>
+            </p:txBody>
+          </p:sp>
+        </mc:Choice>
+        <mc:Fallback>
+          <p:sp>
+            <p:nvSpPr>
+              <p:cNvPr id="3" name="Content Placeholder 2">
+                <a:extLst>
+                  <a:ext uri="{FF2B5EF4-FFF2-40B4-BE49-F238E27FC236}">
+                    <a16:creationId xmlns:a16="http://schemas.microsoft.com/office/drawing/2014/main" id="{9034E94E-8B65-013C-A4FA-49F30AF8ED1C}"/>
+                  </a:ext>
+                </a:extLst>
+              </p:cNvPr>
+              <p:cNvSpPr>
+                <a:spLocks noGrp="1" noRot="1" noChangeAspect="1" noMove="1" noResize="1" noEditPoints="1" noAdjustHandles="1" noChangeArrowheads="1" noChangeShapeType="1" noTextEdit="1"/>
+              </p:cNvSpPr>
+              <p:nvPr>
+                <p:ph idx="1"/>
+              </p:nvPr>
+            </p:nvSpPr>
+            <p:spPr>
+              <a:xfrm>
+                <a:off x="838200" y="1123406"/>
+                <a:ext cx="10515600" cy="5470724"/>
+              </a:xfrm>
+              <a:blipFill>
+                <a:blip r:embed="rId2"/>
+                <a:stretch>
+                  <a:fillRect l="-1217" t="-1782"/>
+                </a:stretch>
+              </a:blipFill>
+            </p:spPr>
+            <p:txBody>
+              <a:bodyPr/>
+              <a:lstStyle/>
+              <a:p>
+                <a:r>
+                  <a:rPr lang="en-US">
+                    <a:noFill/>
+                  </a:rPr>
+                  <a:t> </a:t>
+                </a:r>
+              </a:p>
+            </p:txBody>
+          </p:sp>
+        </mc:Fallback>
+      </mc:AlternateContent>
+      <p:sp>
+        <p:nvSpPr>
+          <p:cNvPr id="6" name="Title 1">
+            <a:extLst>
+              <a:ext uri="{FF2B5EF4-FFF2-40B4-BE49-F238E27FC236}">
+                <a16:creationId xmlns:a16="http://schemas.microsoft.com/office/drawing/2014/main" id="{56C775A4-7225-18DA-6A31-640370B86EE0}"/>
+              </a:ext>
+            </a:extLst>
+          </p:cNvPr>
+          <p:cNvSpPr txBox="1">
+            <a:spLocks/>
+          </p:cNvSpPr>
+          <p:nvPr/>
+        </p:nvSpPr>
+        <p:spPr>
+          <a:xfrm>
+            <a:off x="838200" y="-635"/>
+            <a:ext cx="10515600" cy="1325563"/>
+          </a:xfrm>
+          <a:prstGeom prst="rect">
+            <a:avLst/>
+          </a:prstGeom>
+        </p:spPr>
+        <p:txBody>
+          <a:bodyPr vert="horz" lIns="91440" tIns="45720" rIns="91440" bIns="45720" rtlCol="0" anchor="ctr">
+            <a:normAutofit/>
+          </a:bodyPr>
+          <a:lstStyle>
+            <a:lvl1pPr algn="l" defTabSz="914400" rtl="0" eaLnBrk="1" latinLnBrk="0" hangingPunct="1">
+              <a:lnSpc>
+                <a:spcPct val="90000"/>
+              </a:lnSpc>
+              <a:spcBef>
+                <a:spcPct val="0"/>
+              </a:spcBef>
+              <a:buNone/>
+              <a:defRPr sz="4400" kern="1200">
+                <a:solidFill>
+                  <a:schemeClr val="tx1"/>
+                </a:solidFill>
+                <a:latin typeface="+mj-lt"/>
+                <a:ea typeface="+mj-ea"/>
+                <a:cs typeface="+mj-cs"/>
+              </a:defRPr>
+            </a:lvl1pPr>
+          </a:lstStyle>
+          <a:p>
+            <a:r>
+              <a:rPr lang="en-US" dirty="0">
+                <a:latin typeface="+mn-lt"/>
+              </a:rPr>
+              <a:t>Introduction to Hashing</a:t>
+            </a:r>
+          </a:p>
+        </p:txBody>
+      </p:sp>
+    </p:spTree>
+    <p:extLst>
+      <p:ext uri="{BB962C8B-B14F-4D97-AF65-F5344CB8AC3E}">
+        <p14:creationId xmlns:p14="http://schemas.microsoft.com/office/powerpoint/2010/main" val="1328736250"/>
+      </p:ext>
+    </p:extLst>
+  </p:cSld>
+  <p:clrMapOvr>
+    <a:masterClrMapping/>
+  </p:clrMapOvr>
+  <p:timing>
+    <p:tnLst>
+      <p:par>
+        <p:cTn id="1" dur="indefinite" restart="never" nodeType="tmRoot">
+          <p:childTnLst>
+            <p:seq concurrent="1" nextAc="seek">
+              <p:cTn id="2" dur="indefinite" nodeType="mainSeq">
+                <p:childTnLst>
+                  <p:par>
+                    <p:cTn id="3" fill="hold">
+                      <p:stCondLst>
+                        <p:cond delay="indefinite"/>
+                      </p:stCondLst>
+                      <p:childTnLst>
+                        <p:par>
+                          <p:cTn id="4" fill="hold">
+                            <p:stCondLst>
+                              <p:cond delay="0"/>
+                            </p:stCondLst>
+                            <p:childTnLst>
+                              <p:par>
+                                <p:cTn id="5" presetID="1" presetClass="entr" presetSubtype="0" fill="hold" nodeType="clickEffect">
+                                  <p:stCondLst>
+                                    <p:cond delay="0"/>
+                                  </p:stCondLst>
+                                  <p:childTnLst>
+                                    <p:set>
+                                      <p:cBhvr>
+                                        <p:cTn id="6" dur="1" fill="hold">
+                                          <p:stCondLst>
+                                            <p:cond delay="0"/>
+                                          </p:stCondLst>
+                                        </p:cTn>
+                                        <p:tgtEl>
+                                          <p:spTgt spid="3">
+                                            <p:txEl>
+                                              <p:pRg st="1" end="1"/>
+                                            </p:txEl>
+                                          </p:spTgt>
+                                        </p:tgtEl>
+                                        <p:attrNameLst>
+                                          <p:attrName>style.visibility</p:attrName>
+                                        </p:attrNameLst>
+                                      </p:cBhvr>
+                                      <p:to>
+                                        <p:strVal val="visible"/>
+                                      </p:to>
+                                    </p:set>
+                                  </p:childTnLst>
+                                </p:cTn>
+                              </p:par>
+                              <p:par>
+                                <p:cTn id="7" presetID="1" presetClass="entr" presetSubtype="0" fill="hold" nodeType="withEffect">
+                                  <p:stCondLst>
+                                    <p:cond delay="0"/>
+                                  </p:stCondLst>
+                                  <p:childTnLst>
+                                    <p:set>
+                                      <p:cBhvr>
+                                        <p:cTn id="8" dur="1" fill="hold">
+                                          <p:stCondLst>
+                                            <p:cond delay="0"/>
+                                          </p:stCondLst>
+                                        </p:cTn>
+                                        <p:tgtEl>
+                                          <p:spTgt spid="3">
+                                            <p:txEl>
+                                              <p:pRg st="2" end="2"/>
+                                            </p:txEl>
+                                          </p:spTgt>
+                                        </p:tgtEl>
+                                        <p:attrNameLst>
+                                          <p:attrName>style.visibility</p:attrName>
+                                        </p:attrNameLst>
+                                      </p:cBhvr>
+                                      <p:to>
+                                        <p:strVal val="visible"/>
+                                      </p:to>
+                                    </p:set>
+                                  </p:childTnLst>
+                                </p:cTn>
+                              </p:par>
+                              <p:par>
+                                <p:cTn id="9" presetID="1" presetClass="entr" presetSubtype="0" fill="hold" nodeType="withEffect">
+                                  <p:stCondLst>
+                                    <p:cond delay="0"/>
+                                  </p:stCondLst>
+                                  <p:childTnLst>
+                                    <p:set>
+                                      <p:cBhvr>
+                                        <p:cTn id="10" dur="1" fill="hold">
+                                          <p:stCondLst>
+                                            <p:cond delay="0"/>
+                                          </p:stCondLst>
+                                        </p:cTn>
+                                        <p:tgtEl>
+                                          <p:spTgt spid="3">
+                                            <p:txEl>
+                                              <p:pRg st="3" end="3"/>
+                                            </p:txEl>
+                                          </p:spTgt>
+                                        </p:tgtEl>
+                                        <p:attrNameLst>
+                                          <p:attrName>style.visibility</p:attrName>
+                                        </p:attrNameLst>
+                                      </p:cBhvr>
+                                      <p:to>
+                                        <p:strVal val="visible"/>
+                                      </p:to>
+                                    </p:set>
+                                  </p:childTnLst>
+                                </p:cTn>
+                              </p:par>
+                              <p:par>
+                                <p:cTn id="11" presetID="1" presetClass="entr" presetSubtype="0" fill="hold" nodeType="withEffect">
+                                  <p:stCondLst>
+                                    <p:cond delay="0"/>
+                                  </p:stCondLst>
+                                  <p:childTnLst>
+                                    <p:set>
+                                      <p:cBhvr>
+                                        <p:cTn id="12" dur="1" fill="hold">
+                                          <p:stCondLst>
+                                            <p:cond delay="0"/>
+                                          </p:stCondLst>
+                                        </p:cTn>
+                                        <p:tgtEl>
+                                          <p:spTgt spid="3">
+                                            <p:txEl>
+                                              <p:pRg st="4" end="4"/>
+                                            </p:txEl>
+                                          </p:spTgt>
+                                        </p:tgtEl>
+                                        <p:attrNameLst>
+                                          <p:attrName>style.visibility</p:attrName>
+                                        </p:attrNameLst>
+                                      </p:cBhvr>
+                                      <p:to>
+                                        <p:strVal val="visible"/>
+                                      </p:to>
+                                    </p:set>
+                                  </p:childTnLst>
+                                </p:cTn>
+                              </p:par>
+                              <p:par>
+                                <p:cTn id="13" presetID="1" presetClass="entr" presetSubtype="0" fill="hold" nodeType="withEffect">
+                                  <p:stCondLst>
+                                    <p:cond delay="0"/>
+                                  </p:stCondLst>
+                                  <p:childTnLst>
+                                    <p:set>
+                                      <p:cBhvr>
+                                        <p:cTn id="14" dur="1" fill="hold">
+                                          <p:stCondLst>
+                                            <p:cond delay="0"/>
+                                          </p:stCondLst>
+                                        </p:cTn>
+                                        <p:tgtEl>
+                                          <p:spTgt spid="3">
+                                            <p:txEl>
+                                              <p:pRg st="5" end="5"/>
+                                            </p:txEl>
+                                          </p:spTgt>
+                                        </p:tgtEl>
+                                        <p:attrNameLst>
+                                          <p:attrName>style.visibility</p:attrName>
+                                        </p:attrNameLst>
+                                      </p:cBhvr>
+                                      <p:to>
+                                        <p:strVal val="visible"/>
+                                      </p:to>
+                                    </p:set>
+                                  </p:childTnLst>
+                                </p:cTn>
+                              </p:par>
+                              <p:par>
+                                <p:cTn id="15" presetID="1" presetClass="entr" presetSubtype="0" fill="hold" nodeType="withEffect">
+                                  <p:stCondLst>
+                                    <p:cond delay="0"/>
+                                  </p:stCondLst>
+                                  <p:childTnLst>
+                                    <p:set>
+                                      <p:cBhvr>
+                                        <p:cTn id="16" dur="1" fill="hold">
+                                          <p:stCondLst>
+                                            <p:cond delay="0"/>
+                                          </p:stCondLst>
+                                        </p:cTn>
+                                        <p:tgtEl>
+                                          <p:spTgt spid="3">
+                                            <p:txEl>
+                                              <p:pRg st="6" end="6"/>
+                                            </p:txEl>
+                                          </p:spTgt>
+                                        </p:tgtEl>
+                                        <p:attrNameLst>
+                                          <p:attrName>style.visibility</p:attrName>
+                                        </p:attrNameLst>
+                                      </p:cBhvr>
+                                      <p:to>
+                                        <p:strVal val="visible"/>
+                                      </p:to>
+                                    </p:set>
+                                  </p:childTnLst>
+                                </p:cTn>
+                              </p:par>
+                            </p:childTnLst>
+                          </p:cTn>
+                        </p:par>
+                      </p:childTnLst>
+                    </p:cTn>
+                  </p:par>
+                  <p:par>
+                    <p:cTn id="17" fill="hold">
+                      <p:stCondLst>
+                        <p:cond delay="indefinite"/>
+                      </p:stCondLst>
+                      <p:childTnLst>
+                        <p:par>
+                          <p:cTn id="18" fill="hold">
+                            <p:stCondLst>
+                              <p:cond delay="0"/>
+                            </p:stCondLst>
+                            <p:childTnLst>
+                              <p:par>
+                                <p:cTn id="19" presetID="1" presetClass="entr" presetSubtype="0" fill="hold" nodeType="clickEffect">
+                                  <p:stCondLst>
+                                    <p:cond delay="0"/>
+                                  </p:stCondLst>
+                                  <p:childTnLst>
+                                    <p:set>
+                                      <p:cBhvr>
+                                        <p:cTn id="20" dur="1" fill="hold">
+                                          <p:stCondLst>
+                                            <p:cond delay="0"/>
+                                          </p:stCondLst>
+                                        </p:cTn>
+                                        <p:tgtEl>
+                                          <p:spTgt spid="3">
+                                            <p:txEl>
+                                              <p:pRg st="7" end="7"/>
+                                            </p:txEl>
+                                          </p:spTgt>
+                                        </p:tgtEl>
+                                        <p:attrNameLst>
+                                          <p:attrName>style.visibility</p:attrName>
+                                        </p:attrNameLst>
+                                      </p:cBhvr>
+                                      <p:to>
+                                        <p:strVal val="visible"/>
+                                      </p:to>
+                                    </p:set>
+                                  </p:childTnLst>
+                                </p:cTn>
+                              </p:par>
+                              <p:par>
+                                <p:cTn id="21" presetID="1" presetClass="entr" presetSubtype="0" fill="hold" nodeType="withEffect">
+                                  <p:stCondLst>
+                                    <p:cond delay="0"/>
+                                  </p:stCondLst>
+                                  <p:childTnLst>
+                                    <p:set>
+                                      <p:cBhvr>
+                                        <p:cTn id="22" dur="1" fill="hold">
+                                          <p:stCondLst>
+                                            <p:cond delay="0"/>
+                                          </p:stCondLst>
+                                        </p:cTn>
+                                        <p:tgtEl>
+                                          <p:spTgt spid="3">
+                                            <p:txEl>
+                                              <p:pRg st="8" end="8"/>
+                                            </p:txEl>
+                                          </p:spTgt>
+                                        </p:tgtEl>
+                                        <p:attrNameLst>
+                                          <p:attrName>style.visibility</p:attrName>
+                                        </p:attrNameLst>
+                                      </p:cBhvr>
+                                      <p:to>
+                                        <p:strVal val="visible"/>
+                                      </p:to>
+                                    </p:set>
+                                  </p:childTnLst>
+                                </p:cTn>
+                              </p:par>
+                            </p:childTnLst>
+                          </p:cTn>
+                        </p:par>
+                      </p:childTnLst>
+                    </p:cTn>
+                  </p:par>
+                </p:childTnLst>
+              </p:cTn>
+              <p:prevCondLst>
+                <p:cond evt="onPrev" delay="0">
+                  <p:tgtEl>
+                    <p:sldTgt/>
+                  </p:tgtEl>
+                </p:cond>
+              </p:prevCondLst>
+              <p:nextCondLst>
+                <p:cond evt="onNext" delay="0">
+                  <p:tgtEl>
+                    <p:sldTgt/>
+                  </p:tgtEl>
+                </p:cond>
+              </p:nextCondLst>
+            </p:seq>
+          </p:childTnLst>
+        </p:cTn>
+      </p:par>
+    </p:tnLst>
+  </p:timing>
+</p:sld>
+</file>
+
+<file path=ppt/slides/slide44.xml><?xml version="1.0" encoding="utf-8"?>
+<p:sld xmlns:a="http://schemas.openxmlformats.org/drawingml/2006/main" xmlns:r="http://schemas.openxmlformats.org/officeDocument/2006/relationships" xmlns:p="http://schemas.openxmlformats.org/presentationml/2006/main" show="0">
+  <p:cSld>
+    <p:spTree>
+      <p:nvGrpSpPr>
+        <p:cNvPr id="1" name="">
+          <a:extLst>
+            <a:ext uri="{FF2B5EF4-FFF2-40B4-BE49-F238E27FC236}">
+              <a16:creationId xmlns:a16="http://schemas.microsoft.com/office/drawing/2014/main" id="{3DEF50BD-DE05-3210-D4B9-8B33DAC1E71F}"/>
+            </a:ext>
+          </a:extLst>
+        </p:cNvPr>
+        <p:cNvGrpSpPr/>
+        <p:nvPr/>
+      </p:nvGrpSpPr>
+      <p:grpSpPr>
+        <a:xfrm>
+          <a:off x="0" y="0"/>
+          <a:ext cx="0" cy="0"/>
+          <a:chOff x="0" y="0"/>
+          <a:chExt cx="0" cy="0"/>
+        </a:xfrm>
+      </p:grpSpPr>
+      <mc:AlternateContent xmlns:mc="http://schemas.openxmlformats.org/markup-compatibility/2006">
+        <mc:Choice xmlns:a14="http://schemas.microsoft.com/office/drawing/2010/main" Requires="a14">
+          <p:sp>
+            <p:nvSpPr>
+              <p:cNvPr id="3" name="Content Placeholder 2">
+                <a:extLst>
+                  <a:ext uri="{FF2B5EF4-FFF2-40B4-BE49-F238E27FC236}">
+                    <a16:creationId xmlns:a16="http://schemas.microsoft.com/office/drawing/2014/main" id="{E7FF2D76-4C35-A40C-9269-D6BC220EB91C}"/>
+                  </a:ext>
+                </a:extLst>
+              </p:cNvPr>
+              <p:cNvSpPr>
+                <a:spLocks noGrp="1"/>
+              </p:cNvSpPr>
+              <p:nvPr>
+                <p:ph idx="1"/>
+              </p:nvPr>
+            </p:nvSpPr>
+            <p:spPr>
+              <a:xfrm>
+                <a:off x="838200" y="1123406"/>
+                <a:ext cx="10515600" cy="5470724"/>
+              </a:xfrm>
+            </p:spPr>
+            <p:txBody>
+              <a:bodyPr>
+                <a:normAutofit/>
+              </a:bodyPr>
+              <a:lstStyle/>
+              <a:p>
+                <a:pPr marL="0" indent="0">
+                  <a:buNone/>
+                </a:pPr>
+                <a:r>
+                  <a:rPr lang="en-US" dirty="0"/>
+                  <a:t>What are the properties of a good hash function?  </a:t>
+                </a:r>
+              </a:p>
+              <a:p>
+                <a:pPr marL="514350" indent="-514350">
+                  <a:buFont typeface="+mj-lt"/>
+                  <a:buAutoNum type="arabicPeriod"/>
+                </a:pPr>
+                <a:r>
+                  <a:rPr lang="en-US" dirty="0"/>
+                  <a:t>For key values, </a:t>
+                </a:r>
+                <a14:m>
+                  <m:oMath xmlns:m="http://schemas.openxmlformats.org/officeDocument/2006/math">
+                    <m:r>
+                      <a:rPr lang="en-US" i="1">
+                        <a:latin typeface="Cambria Math" panose="02040503050406030204" pitchFamily="18" charset="0"/>
+                      </a:rPr>
+                      <m:t>𝐾</m:t>
+                    </m:r>
+                  </m:oMath>
+                </a14:m>
+                <a:r>
+                  <a:rPr lang="en-US" dirty="0"/>
+                  <a:t>, want a </a:t>
+                </a:r>
+                <a:r>
+                  <a:rPr lang="en-US" b="1" dirty="0"/>
+                  <a:t>uniform distribution over </a:t>
+                </a:r>
+                <a14:m>
+                  <m:oMath xmlns:m="http://schemas.openxmlformats.org/officeDocument/2006/math">
+                    <m:r>
+                      <a:rPr lang="en-US" b="1" i="1" smtClean="0">
+                        <a:latin typeface="Cambria Math" panose="02040503050406030204" pitchFamily="18" charset="0"/>
+                      </a:rPr>
+                      <m:t>𝒎</m:t>
+                    </m:r>
+                  </m:oMath>
+                </a14:m>
+                <a:r>
+                  <a:rPr lang="en-US" b="1" dirty="0"/>
+                  <a:t> hash values</a:t>
+                </a:r>
+              </a:p>
+              <a:p>
+                <a:pPr marL="457200" lvl="1" indent="0">
+                  <a:buNone/>
+                </a:pPr>
+                <a14:m>
+                  <m:oMathPara xmlns:m="http://schemas.openxmlformats.org/officeDocument/2006/math">
+                    <m:oMathParaPr>
+                      <m:jc m:val="centerGroup"/>
+                    </m:oMathParaPr>
+                    <m:oMath xmlns:m="http://schemas.openxmlformats.org/officeDocument/2006/math">
+                      <m:r>
+                        <a:rPr lang="en-US" b="1" i="1">
+                          <a:latin typeface="Cambria Math" panose="02040503050406030204" pitchFamily="18" charset="0"/>
+                        </a:rPr>
+                        <m:t>𝒇</m:t>
+                      </m:r>
+                      <m:r>
+                        <a:rPr lang="en-US" b="1" i="1">
+                          <a:latin typeface="Cambria Math" panose="02040503050406030204" pitchFamily="18" charset="0"/>
+                        </a:rPr>
+                        <m:t>(</m:t>
+                      </m:r>
+                      <m:r>
+                        <a:rPr lang="en-US" b="1" i="1">
+                          <a:latin typeface="Cambria Math" panose="02040503050406030204" pitchFamily="18" charset="0"/>
+                        </a:rPr>
+                        <m:t>𝒌</m:t>
+                      </m:r>
+                      <m:r>
+                        <a:rPr lang="en-US" b="1" i="1">
+                          <a:latin typeface="Cambria Math" panose="02040503050406030204" pitchFamily="18" charset="0"/>
+                        </a:rPr>
+                        <m:t>)~</m:t>
+                      </m:r>
+                      <m:r>
+                        <a:rPr lang="en-US" b="1" i="1">
+                          <a:latin typeface="Cambria Math" panose="02040503050406030204" pitchFamily="18" charset="0"/>
+                          <a:ea typeface="Cambria Math" panose="02040503050406030204" pitchFamily="18" charset="0"/>
+                        </a:rPr>
+                        <m:t>𝑼</m:t>
+                      </m:r>
+                      <m:r>
+                        <a:rPr lang="en-US" b="1" i="1">
+                          <a:latin typeface="Cambria Math" panose="02040503050406030204" pitchFamily="18" charset="0"/>
+                          <a:ea typeface="Cambria Math" panose="02040503050406030204" pitchFamily="18" charset="0"/>
+                        </a:rPr>
+                        <m:t>(</m:t>
+                      </m:r>
+                      <m:r>
+                        <a:rPr lang="en-US" b="1" i="1">
+                          <a:latin typeface="Cambria Math" panose="02040503050406030204" pitchFamily="18" charset="0"/>
+                          <a:ea typeface="Cambria Math" panose="02040503050406030204" pitchFamily="18" charset="0"/>
+                        </a:rPr>
+                        <m:t>𝟎</m:t>
+                      </m:r>
+                      <m:r>
+                        <a:rPr lang="en-US" b="1" i="1">
+                          <a:latin typeface="Cambria Math" panose="02040503050406030204" pitchFamily="18" charset="0"/>
+                          <a:ea typeface="Cambria Math" panose="02040503050406030204" pitchFamily="18" charset="0"/>
+                        </a:rPr>
+                        <m:t>,</m:t>
+                      </m:r>
+                      <m:r>
+                        <a:rPr lang="en-US" b="1" i="1" smtClean="0">
+                          <a:latin typeface="Cambria Math" panose="02040503050406030204" pitchFamily="18" charset="0"/>
+                          <a:ea typeface="Cambria Math" panose="02040503050406030204" pitchFamily="18" charset="0"/>
+                        </a:rPr>
+                        <m:t>𝒎</m:t>
+                      </m:r>
+                      <m:r>
+                        <a:rPr lang="en-US" b="1" i="1">
+                          <a:latin typeface="Cambria Math" panose="02040503050406030204" pitchFamily="18" charset="0"/>
+                          <a:ea typeface="Cambria Math" panose="02040503050406030204" pitchFamily="18" charset="0"/>
+                        </a:rPr>
+                        <m:t>)</m:t>
+                      </m:r>
+                    </m:oMath>
+                  </m:oMathPara>
+                </a14:m>
+                <a:endParaRPr lang="en-US" b="1" dirty="0"/>
+              </a:p>
+              <a:p>
+                <a:pPr lvl="1"/>
+                <a:r>
+                  <a:rPr lang="en-US" dirty="0"/>
+                  <a:t>For </a:t>
+                </a:r>
+                <a14:m>
+                  <m:oMath xmlns:m="http://schemas.openxmlformats.org/officeDocument/2006/math">
+                    <m:r>
+                      <a:rPr lang="en-US" b="0" i="1" smtClean="0">
+                        <a:latin typeface="Cambria Math" panose="02040503050406030204" pitchFamily="18" charset="0"/>
+                      </a:rPr>
+                      <m:t>𝑚</m:t>
+                    </m:r>
+                  </m:oMath>
+                </a14:m>
+                <a:r>
+                  <a:rPr lang="en-US" dirty="0"/>
+                  <a:t> length hash table probability of bucket </a:t>
+                </a:r>
+                <a14:m>
+                  <m:oMath xmlns:m="http://schemas.openxmlformats.org/officeDocument/2006/math">
+                    <m:r>
+                      <a:rPr lang="en-US" b="0" i="1" smtClean="0">
+                        <a:latin typeface="Cambria Math" panose="02040503050406030204" pitchFamily="18" charset="0"/>
+                      </a:rPr>
+                      <m:t>𝑖</m:t>
+                    </m:r>
+                  </m:oMath>
+                </a14:m>
+                <a:r>
+                  <a:rPr lang="en-US" dirty="0"/>
+                  <a:t>: </a:t>
+                </a:r>
+              </a:p>
+              <a:p>
+                <a:pPr marL="457200" lvl="1" indent="0">
+                  <a:buNone/>
+                </a:pPr>
+                <a14:m>
+                  <m:oMathPara xmlns:m="http://schemas.openxmlformats.org/officeDocument/2006/math">
+                    <m:oMathParaPr>
+                      <m:jc m:val="centerGroup"/>
+                    </m:oMathParaPr>
+                    <m:oMath xmlns:m="http://schemas.openxmlformats.org/officeDocument/2006/math">
+                      <m:r>
+                        <m:rPr>
+                          <m:sty m:val="p"/>
+                        </m:rPr>
+                        <a:rPr lang="en-US" b="0" i="0" smtClean="0">
+                          <a:latin typeface="Cambria Math" panose="02040503050406030204" pitchFamily="18" charset="0"/>
+                        </a:rPr>
+                        <m:t>P</m:t>
+                      </m:r>
+                      <m:d>
+                        <m:dPr>
+                          <m:ctrlPr>
+                            <a:rPr lang="en-US" i="1" smtClean="0">
+                              <a:latin typeface="Cambria Math" panose="02040503050406030204" pitchFamily="18" charset="0"/>
+                            </a:rPr>
+                          </m:ctrlPr>
+                        </m:dPr>
+                        <m:e>
+                          <m:r>
+                            <a:rPr lang="en-US" b="0" i="1">
+                              <a:latin typeface="Cambria Math" panose="02040503050406030204" pitchFamily="18" charset="0"/>
+                            </a:rPr>
+                            <m:t>𝑓</m:t>
+                          </m:r>
+                          <m:d>
+                            <m:dPr>
+                              <m:ctrlPr>
+                                <a:rPr lang="en-US" i="1">
+                                  <a:latin typeface="Cambria Math" panose="02040503050406030204" pitchFamily="18" charset="0"/>
+                                </a:rPr>
+                              </m:ctrlPr>
+                            </m:dPr>
+                            <m:e>
+                              <m:r>
+                                <a:rPr lang="en-US" b="0" i="1">
+                                  <a:latin typeface="Cambria Math" panose="02040503050406030204" pitchFamily="18" charset="0"/>
+                                </a:rPr>
+                                <m:t>𝑘</m:t>
+                              </m:r>
+                            </m:e>
+                          </m:d>
+                          <m:r>
+                            <a:rPr lang="en-US" b="0" i="1" smtClean="0">
+                              <a:latin typeface="Cambria Math" panose="02040503050406030204" pitchFamily="18" charset="0"/>
+                            </a:rPr>
+                            <m:t>=</m:t>
+                          </m:r>
+                          <m:r>
+                            <a:rPr lang="en-US" b="0" i="1" smtClean="0">
+                              <a:latin typeface="Cambria Math" panose="02040503050406030204" pitchFamily="18" charset="0"/>
+                            </a:rPr>
+                            <m:t>𝑖</m:t>
+                          </m:r>
+                        </m:e>
+                      </m:d>
+                      <m:r>
+                        <a:rPr lang="en-US" b="0" i="1" smtClean="0">
+                          <a:latin typeface="Cambria Math" panose="02040503050406030204" pitchFamily="18" charset="0"/>
+                        </a:rPr>
+                        <m:t>=</m:t>
+                      </m:r>
+                      <m:f>
+                        <m:fPr>
+                          <m:ctrlPr>
+                            <a:rPr lang="en-US" b="0" i="1" smtClean="0">
+                              <a:latin typeface="Cambria Math" panose="02040503050406030204" pitchFamily="18" charset="0"/>
+                            </a:rPr>
+                          </m:ctrlPr>
+                        </m:fPr>
+                        <m:num>
+                          <m:r>
+                            <a:rPr lang="en-US" b="0" i="1" smtClean="0">
+                              <a:latin typeface="Cambria Math" panose="02040503050406030204" pitchFamily="18" charset="0"/>
+                            </a:rPr>
+                            <m:t>1</m:t>
+                          </m:r>
+                        </m:num>
+                        <m:den>
+                          <m:r>
+                            <a:rPr lang="en-US" b="0" i="1" smtClean="0">
+                              <a:latin typeface="Cambria Math" panose="02040503050406030204" pitchFamily="18" charset="0"/>
+                            </a:rPr>
+                            <m:t>𝑚</m:t>
+                          </m:r>
+                        </m:den>
+                      </m:f>
+                    </m:oMath>
+                  </m:oMathPara>
+                </a14:m>
+                <a:endParaRPr lang="en-US" dirty="0"/>
+              </a:p>
+              <a:p>
+                <a:pPr lvl="1"/>
+                <a:r>
+                  <a:rPr lang="en-US" b="1" dirty="0"/>
+                  <a:t>Lumpy hash values </a:t>
+                </a:r>
+                <a:r>
+                  <a:rPr lang="en-US" dirty="0"/>
+                  <a:t>lead to increased </a:t>
+                </a:r>
+                <a:r>
+                  <a:rPr lang="en-US" b="1" dirty="0"/>
+                  <a:t>hash collisions </a:t>
+                </a:r>
+              </a:p>
+              <a:p>
+                <a:pPr lvl="1"/>
+                <a:r>
+                  <a:rPr lang="en-US" dirty="0"/>
+                  <a:t>Can verify with </a:t>
+                </a:r>
+                <a14:m>
+                  <m:oMath xmlns:m="http://schemas.openxmlformats.org/officeDocument/2006/math">
+                    <m:sSup>
+                      <m:sSupPr>
+                        <m:ctrlPr>
+                          <a:rPr lang="en-US" i="1">
+                            <a:latin typeface="Cambria Math" panose="02040503050406030204" pitchFamily="18" charset="0"/>
+                          </a:rPr>
+                        </m:ctrlPr>
+                      </m:sSupPr>
+                      <m:e>
+                        <m:r>
+                          <a:rPr lang="en-US" i="1">
+                            <a:latin typeface="Cambria Math" panose="02040503050406030204" pitchFamily="18" charset="0"/>
+                            <a:ea typeface="Cambria Math" panose="02040503050406030204" pitchFamily="18" charset="0"/>
+                          </a:rPr>
+                          <m:t>𝜒</m:t>
+                        </m:r>
+                      </m:e>
+                      <m:sup>
+                        <m:r>
+                          <a:rPr lang="en-US" i="1">
+                            <a:latin typeface="Cambria Math" panose="02040503050406030204" pitchFamily="18" charset="0"/>
+                          </a:rPr>
+                          <m:t>2</m:t>
+                        </m:r>
+                      </m:sup>
+                    </m:sSup>
+                  </m:oMath>
+                </a14:m>
+                <a:r>
+                  <a:rPr lang="en-US" dirty="0"/>
+                  <a:t> test</a:t>
+                </a:r>
+              </a:p>
+              <a:p>
+                <a:pPr marL="514350" indent="-514350">
+                  <a:buFont typeface="+mj-lt"/>
+                  <a:buAutoNum type="arabicPeriod"/>
+                </a:pPr>
+                <a:r>
+                  <a:rPr lang="en-US" dirty="0"/>
+                  <a:t>Resolution method for inevitable hash collisions</a:t>
+                </a:r>
+              </a:p>
+              <a:p>
+                <a:pPr lvl="1"/>
+                <a:r>
+                  <a:rPr lang="en-US" dirty="0"/>
+                  <a:t>Probability of collision increases as table fills </a:t>
+                </a:r>
+              </a:p>
+            </p:txBody>
+          </p:sp>
+        </mc:Choice>
+        <mc:Fallback>
+          <p:sp>
+            <p:nvSpPr>
+              <p:cNvPr id="3" name="Content Placeholder 2">
+                <a:extLst>
+                  <a:ext uri="{FF2B5EF4-FFF2-40B4-BE49-F238E27FC236}">
+                    <a16:creationId xmlns:a16="http://schemas.microsoft.com/office/drawing/2014/main" id="{E7FF2D76-4C35-A40C-9269-D6BC220EB91C}"/>
+                  </a:ext>
+                </a:extLst>
+              </p:cNvPr>
+              <p:cNvSpPr>
+                <a:spLocks noGrp="1" noRot="1" noChangeAspect="1" noMove="1" noResize="1" noEditPoints="1" noAdjustHandles="1" noChangeArrowheads="1" noChangeShapeType="1" noTextEdit="1"/>
+              </p:cNvSpPr>
+              <p:nvPr>
+                <p:ph idx="1"/>
+              </p:nvPr>
+            </p:nvSpPr>
+            <p:spPr>
+              <a:xfrm>
+                <a:off x="838200" y="1123406"/>
+                <a:ext cx="10515600" cy="5470724"/>
+              </a:xfrm>
+              <a:blipFill>
+                <a:blip r:embed="rId2"/>
+                <a:stretch>
+                  <a:fillRect l="-1217" t="-1782"/>
+                </a:stretch>
+              </a:blipFill>
+            </p:spPr>
+            <p:txBody>
+              <a:bodyPr/>
+              <a:lstStyle/>
+              <a:p>
+                <a:r>
+                  <a:rPr lang="en-US">
+                    <a:noFill/>
+                  </a:rPr>
+                  <a:t> </a:t>
+                </a:r>
+              </a:p>
+            </p:txBody>
+          </p:sp>
+        </mc:Fallback>
+      </mc:AlternateContent>
+      <p:sp>
+        <p:nvSpPr>
+          <p:cNvPr id="6" name="Title 1">
+            <a:extLst>
+              <a:ext uri="{FF2B5EF4-FFF2-40B4-BE49-F238E27FC236}">
+                <a16:creationId xmlns:a16="http://schemas.microsoft.com/office/drawing/2014/main" id="{54D4B1D6-DA17-4F02-0980-FCFD3F705CFE}"/>
+              </a:ext>
+            </a:extLst>
+          </p:cNvPr>
+          <p:cNvSpPr txBox="1">
+            <a:spLocks/>
+          </p:cNvSpPr>
+          <p:nvPr/>
+        </p:nvSpPr>
+        <p:spPr>
+          <a:xfrm>
+            <a:off x="838200" y="-635"/>
+            <a:ext cx="10515600" cy="1325563"/>
+          </a:xfrm>
+          <a:prstGeom prst="rect">
+            <a:avLst/>
+          </a:prstGeom>
+        </p:spPr>
+        <p:txBody>
+          <a:bodyPr vert="horz" lIns="91440" tIns="45720" rIns="91440" bIns="45720" rtlCol="0" anchor="ctr">
+            <a:normAutofit/>
+          </a:bodyPr>
+          <a:lstStyle>
+            <a:lvl1pPr algn="l" defTabSz="914400" rtl="0" eaLnBrk="1" latinLnBrk="0" hangingPunct="1">
+              <a:lnSpc>
+                <a:spcPct val="90000"/>
+              </a:lnSpc>
+              <a:spcBef>
+                <a:spcPct val="0"/>
+              </a:spcBef>
+              <a:buNone/>
+              <a:defRPr sz="4400" kern="1200">
+                <a:solidFill>
+                  <a:schemeClr val="tx1"/>
+                </a:solidFill>
+                <a:latin typeface="+mj-lt"/>
+                <a:ea typeface="+mj-ea"/>
+                <a:cs typeface="+mj-cs"/>
+              </a:defRPr>
+            </a:lvl1pPr>
+          </a:lstStyle>
+          <a:p>
+            <a:r>
+              <a:rPr lang="en-US" dirty="0">
+                <a:latin typeface="+mn-lt"/>
+              </a:rPr>
+              <a:t>Introduction to Hashing</a:t>
+            </a:r>
+          </a:p>
+        </p:txBody>
+      </p:sp>
+    </p:spTree>
+    <p:extLst>
+      <p:ext uri="{BB962C8B-B14F-4D97-AF65-F5344CB8AC3E}">
+        <p14:creationId xmlns:p14="http://schemas.microsoft.com/office/powerpoint/2010/main" val="311143311"/>
+      </p:ext>
+    </p:extLst>
+  </p:cSld>
+  <p:clrMapOvr>
+    <a:masterClrMapping/>
+  </p:clrMapOvr>
+  <p:timing>
+    <p:tnLst>
+      <p:par>
+        <p:cTn id="1" dur="indefinite" restart="never" nodeType="tmRoot">
+          <p:childTnLst>
+            <p:seq concurrent="1" nextAc="seek">
+              <p:cTn id="2" dur="indefinite" nodeType="mainSeq">
+                <p:childTnLst>
+                  <p:par>
+                    <p:cTn id="3" fill="hold">
+                      <p:stCondLst>
+                        <p:cond delay="indefinite"/>
+                      </p:stCondLst>
+                      <p:childTnLst>
+                        <p:par>
+                          <p:cTn id="4" fill="hold">
+                            <p:stCondLst>
+                              <p:cond delay="0"/>
+                            </p:stCondLst>
+                            <p:childTnLst>
+                              <p:par>
+                                <p:cTn id="5" presetID="1" presetClass="entr" presetSubtype="0" fill="hold" nodeType="clickEffect">
+                                  <p:stCondLst>
+                                    <p:cond delay="0"/>
+                                  </p:stCondLst>
+                                  <p:childTnLst>
+                                    <p:set>
+                                      <p:cBhvr>
+                                        <p:cTn id="6" dur="1" fill="hold">
+                                          <p:stCondLst>
+                                            <p:cond delay="0"/>
+                                          </p:stCondLst>
+                                        </p:cTn>
+                                        <p:tgtEl>
+                                          <p:spTgt spid="3">
+                                            <p:txEl>
+                                              <p:pRg st="1" end="1"/>
+                                            </p:txEl>
+                                          </p:spTgt>
+                                        </p:tgtEl>
+                                        <p:attrNameLst>
+                                          <p:attrName>style.visibility</p:attrName>
+                                        </p:attrNameLst>
+                                      </p:cBhvr>
+                                      <p:to>
+                                        <p:strVal val="visible"/>
+                                      </p:to>
+                                    </p:set>
+                                  </p:childTnLst>
+                                </p:cTn>
+                              </p:par>
+                              <p:par>
+                                <p:cTn id="7" presetID="1" presetClass="entr" presetSubtype="0" fill="hold" nodeType="withEffect">
+                                  <p:stCondLst>
+                                    <p:cond delay="0"/>
+                                  </p:stCondLst>
+                                  <p:childTnLst>
+                                    <p:set>
+                                      <p:cBhvr>
+                                        <p:cTn id="8" dur="1" fill="hold">
+                                          <p:stCondLst>
+                                            <p:cond delay="0"/>
+                                          </p:stCondLst>
+                                        </p:cTn>
+                                        <p:tgtEl>
+                                          <p:spTgt spid="3">
+                                            <p:txEl>
+                                              <p:pRg st="2" end="2"/>
+                                            </p:txEl>
+                                          </p:spTgt>
+                                        </p:tgtEl>
+                                        <p:attrNameLst>
+                                          <p:attrName>style.visibility</p:attrName>
+                                        </p:attrNameLst>
+                                      </p:cBhvr>
+                                      <p:to>
+                                        <p:strVal val="visible"/>
+                                      </p:to>
+                                    </p:set>
+                                  </p:childTnLst>
+                                </p:cTn>
+                              </p:par>
+                              <p:par>
+                                <p:cTn id="9" presetID="1" presetClass="entr" presetSubtype="0" fill="hold" nodeType="withEffect">
+                                  <p:stCondLst>
+                                    <p:cond delay="0"/>
+                                  </p:stCondLst>
+                                  <p:childTnLst>
+                                    <p:set>
+                                      <p:cBhvr>
+                                        <p:cTn id="10" dur="1" fill="hold">
+                                          <p:stCondLst>
+                                            <p:cond delay="0"/>
+                                          </p:stCondLst>
+                                        </p:cTn>
+                                        <p:tgtEl>
+                                          <p:spTgt spid="3">
+                                            <p:txEl>
+                                              <p:pRg st="3" end="3"/>
+                                            </p:txEl>
+                                          </p:spTgt>
+                                        </p:tgtEl>
+                                        <p:attrNameLst>
+                                          <p:attrName>style.visibility</p:attrName>
+                                        </p:attrNameLst>
+                                      </p:cBhvr>
+                                      <p:to>
+                                        <p:strVal val="visible"/>
+                                      </p:to>
+                                    </p:set>
+                                  </p:childTnLst>
+                                </p:cTn>
+                              </p:par>
+                              <p:par>
+                                <p:cTn id="11" presetID="1" presetClass="entr" presetSubtype="0" fill="hold" nodeType="withEffect">
+                                  <p:stCondLst>
+                                    <p:cond delay="0"/>
+                                  </p:stCondLst>
+                                  <p:childTnLst>
+                                    <p:set>
+                                      <p:cBhvr>
+                                        <p:cTn id="12" dur="1" fill="hold">
+                                          <p:stCondLst>
+                                            <p:cond delay="0"/>
+                                          </p:stCondLst>
+                                        </p:cTn>
+                                        <p:tgtEl>
+                                          <p:spTgt spid="3">
+                                            <p:txEl>
+                                              <p:pRg st="4" end="4"/>
+                                            </p:txEl>
+                                          </p:spTgt>
+                                        </p:tgtEl>
+                                        <p:attrNameLst>
+                                          <p:attrName>style.visibility</p:attrName>
+                                        </p:attrNameLst>
+                                      </p:cBhvr>
+                                      <p:to>
+                                        <p:strVal val="visible"/>
+                                      </p:to>
+                                    </p:set>
+                                  </p:childTnLst>
+                                </p:cTn>
+                              </p:par>
+                              <p:par>
+                                <p:cTn id="13" presetID="1" presetClass="entr" presetSubtype="0" fill="hold" nodeType="withEffect">
+                                  <p:stCondLst>
+                                    <p:cond delay="0"/>
+                                  </p:stCondLst>
+                                  <p:childTnLst>
+                                    <p:set>
+                                      <p:cBhvr>
+                                        <p:cTn id="14" dur="1" fill="hold">
+                                          <p:stCondLst>
+                                            <p:cond delay="0"/>
+                                          </p:stCondLst>
+                                        </p:cTn>
+                                        <p:tgtEl>
+                                          <p:spTgt spid="3">
+                                            <p:txEl>
+                                              <p:pRg st="5" end="5"/>
+                                            </p:txEl>
+                                          </p:spTgt>
+                                        </p:tgtEl>
+                                        <p:attrNameLst>
+                                          <p:attrName>style.visibility</p:attrName>
+                                        </p:attrNameLst>
+                                      </p:cBhvr>
+                                      <p:to>
+                                        <p:strVal val="visible"/>
+                                      </p:to>
+                                    </p:set>
+                                  </p:childTnLst>
+                                </p:cTn>
+                              </p:par>
+                              <p:par>
+                                <p:cTn id="15" presetID="1" presetClass="entr" presetSubtype="0" fill="hold" nodeType="withEffect">
+                                  <p:stCondLst>
+                                    <p:cond delay="0"/>
+                                  </p:stCondLst>
+                                  <p:childTnLst>
+                                    <p:set>
+                                      <p:cBhvr>
+                                        <p:cTn id="16" dur="1" fill="hold">
+                                          <p:stCondLst>
+                                            <p:cond delay="0"/>
+                                          </p:stCondLst>
+                                        </p:cTn>
+                                        <p:tgtEl>
+                                          <p:spTgt spid="3">
+                                            <p:txEl>
+                                              <p:pRg st="6" end="6"/>
+                                            </p:txEl>
+                                          </p:spTgt>
+                                        </p:tgtEl>
+                                        <p:attrNameLst>
+                                          <p:attrName>style.visibility</p:attrName>
+                                        </p:attrNameLst>
+                                      </p:cBhvr>
+                                      <p:to>
+                                        <p:strVal val="visible"/>
+                                      </p:to>
+                                    </p:set>
+                                  </p:childTnLst>
+                                </p:cTn>
+                              </p:par>
+                            </p:childTnLst>
+                          </p:cTn>
+                        </p:par>
+                      </p:childTnLst>
+                    </p:cTn>
+                  </p:par>
+                  <p:par>
+                    <p:cTn id="17" fill="hold">
+                      <p:stCondLst>
+                        <p:cond delay="indefinite"/>
+                      </p:stCondLst>
+                      <p:childTnLst>
+                        <p:par>
+                          <p:cTn id="18" fill="hold">
+                            <p:stCondLst>
+                              <p:cond delay="0"/>
+                            </p:stCondLst>
+                            <p:childTnLst>
+                              <p:par>
+                                <p:cTn id="19" presetID="1" presetClass="entr" presetSubtype="0" fill="hold" nodeType="clickEffect">
+                                  <p:stCondLst>
+                                    <p:cond delay="0"/>
+                                  </p:stCondLst>
+                                  <p:childTnLst>
+                                    <p:set>
+                                      <p:cBhvr>
+                                        <p:cTn id="20" dur="1" fill="hold">
+                                          <p:stCondLst>
+                                            <p:cond delay="0"/>
+                                          </p:stCondLst>
+                                        </p:cTn>
+                                        <p:tgtEl>
+                                          <p:spTgt spid="3">
+                                            <p:txEl>
+                                              <p:pRg st="7" end="7"/>
+                                            </p:txEl>
+                                          </p:spTgt>
+                                        </p:tgtEl>
+                                        <p:attrNameLst>
+                                          <p:attrName>style.visibility</p:attrName>
+                                        </p:attrNameLst>
+                                      </p:cBhvr>
+                                      <p:to>
+                                        <p:strVal val="visible"/>
+                                      </p:to>
+                                    </p:set>
+                                  </p:childTnLst>
+                                </p:cTn>
+                              </p:par>
+                              <p:par>
+                                <p:cTn id="21" presetID="1" presetClass="entr" presetSubtype="0" fill="hold" nodeType="withEffect">
+                                  <p:stCondLst>
+                                    <p:cond delay="0"/>
+                                  </p:stCondLst>
+                                  <p:childTnLst>
+                                    <p:set>
+                                      <p:cBhvr>
+                                        <p:cTn id="22" dur="1" fill="hold">
+                                          <p:stCondLst>
+                                            <p:cond delay="0"/>
+                                          </p:stCondLst>
+                                        </p:cTn>
+                                        <p:tgtEl>
+                                          <p:spTgt spid="3">
+                                            <p:txEl>
+                                              <p:pRg st="8" end="8"/>
+                                            </p:txEl>
+                                          </p:spTgt>
+                                        </p:tgtEl>
+                                        <p:attrNameLst>
+                                          <p:attrName>style.visibility</p:attrName>
+                                        </p:attrNameLst>
+                                      </p:cBhvr>
+                                      <p:to>
+                                        <p:strVal val="visible"/>
+                                      </p:to>
+                                    </p:set>
+                                  </p:childTnLst>
+                                </p:cTn>
+                              </p:par>
+                            </p:childTnLst>
+                          </p:cTn>
+                        </p:par>
+                      </p:childTnLst>
+                    </p:cTn>
+                  </p:par>
+                </p:childTnLst>
+              </p:cTn>
+              <p:prevCondLst>
+                <p:cond evt="onPrev" delay="0">
+                  <p:tgtEl>
+                    <p:sldTgt/>
+                  </p:tgtEl>
+                </p:cond>
+              </p:prevCondLst>
+              <p:nextCondLst>
+                <p:cond evt="onNext" delay="0">
+                  <p:tgtEl>
+                    <p:sldTgt/>
+                  </p:tgtEl>
+                </p:cond>
+              </p:nextCondLst>
+            </p:seq>
+          </p:childTnLst>
+        </p:cTn>
+      </p:par>
+    </p:tnLst>
+  </p:timing>
+</p:sld>
+</file>
+
+<file path=ppt/slides/slide45.xml><?xml version="1.0" encoding="utf-8"?>
+<p:sld xmlns:a="http://schemas.openxmlformats.org/drawingml/2006/main" xmlns:r="http://schemas.openxmlformats.org/officeDocument/2006/relationships" xmlns:p="http://schemas.openxmlformats.org/presentationml/2006/main">
+  <p:cSld>
+    <p:spTree>
+      <p:nvGrpSpPr>
+        <p:cNvPr id="1" name="">
+          <a:extLst>
+            <a:ext uri="{FF2B5EF4-FFF2-40B4-BE49-F238E27FC236}">
               <a16:creationId xmlns:a16="http://schemas.microsoft.com/office/drawing/2014/main" id="{F371966D-4FEB-4376-ED9A-7E24B5D5C48E}"/>
             </a:ext>
           </a:extLst>
@@ -26812,7 +31157,7 @@
           <a:p>
             <a:pPr marL="514350" indent="-514350">
               <a:buFont typeface="+mj-lt"/>
-              <a:buAutoNum type="arabicPeriod" startAt="3"/>
+              <a:buAutoNum type="arabicPeriod" startAt="4"/>
             </a:pPr>
             <a:r>
               <a:rPr lang="en-US" dirty="0"/>
@@ -27259,7 +31604,7 @@
 </p:sld>
 </file>
 
-<file path=ppt/slides/slide42.xml><?xml version="1.0" encoding="utf-8"?>
+<file path=ppt/slides/slide46.xml><?xml version="1.0" encoding="utf-8"?>
 <p:sld xmlns:a="http://schemas.openxmlformats.org/drawingml/2006/main" xmlns:r="http://schemas.openxmlformats.org/officeDocument/2006/relationships" xmlns:p="http://schemas.openxmlformats.org/presentationml/2006/main">
   <p:cSld>
     <p:spTree>
@@ -27663,7 +32008,7 @@
 </p:sld>
 </file>
 
-<file path=ppt/slides/slide43.xml><?xml version="1.0" encoding="utf-8"?>
+<file path=ppt/slides/slide47.xml><?xml version="1.0" encoding="utf-8"?>
 <p:sld xmlns:a="http://schemas.openxmlformats.org/drawingml/2006/main" xmlns:r="http://schemas.openxmlformats.org/officeDocument/2006/relationships" xmlns:p="http://schemas.openxmlformats.org/presentationml/2006/main">
   <p:cSld>
     <p:spTree>
@@ -28185,7 +32530,7 @@
 </p:sld>
 </file>
 
-<file path=ppt/slides/slide44.xml><?xml version="1.0" encoding="utf-8"?>
+<file path=ppt/slides/slide48.xml><?xml version="1.0" encoding="utf-8"?>
 <p:sld xmlns:a="http://schemas.openxmlformats.org/drawingml/2006/main" xmlns:r="http://schemas.openxmlformats.org/officeDocument/2006/relationships" xmlns:p="http://schemas.openxmlformats.org/presentationml/2006/main">
   <p:cSld>
     <p:spTree>
@@ -29324,7 +33669,7 @@
 </p:sld>
 </file>
 
-<file path=ppt/slides/slide45.xml><?xml version="1.0" encoding="utf-8"?>
+<file path=ppt/slides/slide49.xml><?xml version="1.0" encoding="utf-8"?>
 <p:sld xmlns:a="http://schemas.openxmlformats.org/drawingml/2006/main" xmlns:r="http://schemas.openxmlformats.org/officeDocument/2006/relationships" xmlns:p="http://schemas.openxmlformats.org/presentationml/2006/main">
   <p:cSld>
     <p:spTree>
@@ -30272,7 +34617,401 @@
 </p:sld>
 </file>
 
-<file path=ppt/slides/slide46.xml><?xml version="1.0" encoding="utf-8"?>
+<file path=ppt/slides/slide5.xml><?xml version="1.0" encoding="utf-8"?>
+<p:sld xmlns:a="http://schemas.openxmlformats.org/drawingml/2006/main" xmlns:r="http://schemas.openxmlformats.org/officeDocument/2006/relationships" xmlns:p="http://schemas.openxmlformats.org/presentationml/2006/main">
+  <p:cSld>
+    <p:spTree>
+      <p:nvGrpSpPr>
+        <p:cNvPr id="1" name=""/>
+        <p:cNvGrpSpPr/>
+        <p:nvPr/>
+      </p:nvGrpSpPr>
+      <p:grpSpPr>
+        <a:xfrm>
+          <a:off x="0" y="0"/>
+          <a:ext cx="0" cy="0"/>
+          <a:chOff x="0" y="0"/>
+          <a:chExt cx="0" cy="0"/>
+        </a:xfrm>
+      </p:grpSpPr>
+      <p:sp>
+        <p:nvSpPr>
+          <p:cNvPr id="3" name="Content Placeholder 2">
+            <a:extLst>
+              <a:ext uri="{FF2B5EF4-FFF2-40B4-BE49-F238E27FC236}">
+                <a16:creationId xmlns:a16="http://schemas.microsoft.com/office/drawing/2014/main" id="{258E6AF3-7615-4BD1-878E-A94C93E98F90}"/>
+              </a:ext>
+            </a:extLst>
+          </p:cNvPr>
+          <p:cNvSpPr>
+            <a:spLocks noGrp="1"/>
+          </p:cNvSpPr>
+          <p:nvPr>
+            <p:ph idx="1"/>
+          </p:nvPr>
+        </p:nvSpPr>
+        <p:spPr>
+          <a:xfrm>
+            <a:off x="838200" y="1217458"/>
+            <a:ext cx="10515600" cy="5640542"/>
+          </a:xfrm>
+        </p:spPr>
+        <p:txBody>
+          <a:bodyPr>
+            <a:normAutofit fontScale="92500" lnSpcReduction="10000"/>
+          </a:bodyPr>
+          <a:lstStyle/>
+          <a:p>
+            <a:pPr marL="0" indent="0">
+              <a:buNone/>
+            </a:pPr>
+            <a:r>
+              <a:rPr lang="en-US" sz="3200" dirty="0"/>
+              <a:t>What is the KDD process?   </a:t>
+            </a:r>
+          </a:p>
+          <a:p>
+            <a:pPr marL="0" indent="0">
+              <a:buNone/>
+            </a:pPr>
+            <a:endParaRPr lang="en-US" dirty="0"/>
+          </a:p>
+          <a:p>
+            <a:pPr marL="0" indent="0">
+              <a:buNone/>
+            </a:pPr>
+            <a:endParaRPr lang="en-US" dirty="0"/>
+          </a:p>
+          <a:p>
+            <a:pPr marL="0" indent="0">
+              <a:buNone/>
+            </a:pPr>
+            <a:endParaRPr lang="en-US" dirty="0"/>
+          </a:p>
+          <a:p>
+            <a:pPr marL="0" indent="0">
+              <a:buNone/>
+            </a:pPr>
+            <a:endParaRPr lang="en-US" dirty="0"/>
+          </a:p>
+          <a:p>
+            <a:pPr marL="0" indent="0">
+              <a:buNone/>
+            </a:pPr>
+            <a:endParaRPr lang="en-US" dirty="0"/>
+          </a:p>
+          <a:p>
+            <a:pPr marL="0" indent="0">
+              <a:buNone/>
+            </a:pPr>
+            <a:endParaRPr lang="en-US" dirty="0"/>
+          </a:p>
+          <a:p>
+            <a:pPr marL="0" indent="0">
+              <a:buNone/>
+            </a:pPr>
+            <a:endParaRPr lang="en-US" dirty="0"/>
+          </a:p>
+          <a:p>
+            <a:pPr marL="0" indent="0">
+              <a:buNone/>
+            </a:pPr>
+            <a:endParaRPr lang="en-US" dirty="0">
+              <a:solidFill>
+                <a:schemeClr val="accent1"/>
+              </a:solidFill>
+            </a:endParaRPr>
+          </a:p>
+          <a:p>
+            <a:pPr marL="0" indent="0">
+              <a:buNone/>
+            </a:pPr>
+            <a:endParaRPr lang="en-US" dirty="0">
+              <a:solidFill>
+                <a:schemeClr val="accent1"/>
+              </a:solidFill>
+            </a:endParaRPr>
+          </a:p>
+          <a:p>
+            <a:pPr marL="0" indent="0">
+              <a:buNone/>
+            </a:pPr>
+            <a:endParaRPr lang="en-US" dirty="0">
+              <a:solidFill>
+                <a:schemeClr val="accent1"/>
+              </a:solidFill>
+            </a:endParaRPr>
+          </a:p>
+          <a:p>
+            <a:pPr marL="0" indent="0">
+              <a:buNone/>
+            </a:pPr>
+            <a:r>
+              <a:rPr lang="en-US" dirty="0">
+                <a:solidFill>
+                  <a:schemeClr val="accent1"/>
+                </a:solidFill>
+              </a:rPr>
+              <a:t>Is this old diagram representative?  - e.g. Fayyad et.al. 1996 </a:t>
+            </a:r>
+          </a:p>
+        </p:txBody>
+      </p:sp>
+      <p:sp>
+        <p:nvSpPr>
+          <p:cNvPr id="6" name="Title 1">
+            <a:extLst>
+              <a:ext uri="{FF2B5EF4-FFF2-40B4-BE49-F238E27FC236}">
+                <a16:creationId xmlns:a16="http://schemas.microsoft.com/office/drawing/2014/main" id="{CD29F70F-B868-451B-A65D-8721F4C7A2D9}"/>
+              </a:ext>
+            </a:extLst>
+          </p:cNvPr>
+          <p:cNvSpPr txBox="1">
+            <a:spLocks/>
+          </p:cNvSpPr>
+          <p:nvPr/>
+        </p:nvSpPr>
+        <p:spPr>
+          <a:xfrm>
+            <a:off x="838200" y="-635"/>
+            <a:ext cx="10515600" cy="1325563"/>
+          </a:xfrm>
+          <a:prstGeom prst="rect">
+            <a:avLst/>
+          </a:prstGeom>
+        </p:spPr>
+        <p:txBody>
+          <a:bodyPr vert="horz" lIns="91440" tIns="45720" rIns="91440" bIns="45720" rtlCol="0" anchor="ctr">
+            <a:normAutofit/>
+          </a:bodyPr>
+          <a:lstStyle>
+            <a:lvl1pPr algn="l" defTabSz="914400" rtl="0" eaLnBrk="1" latinLnBrk="0" hangingPunct="1">
+              <a:lnSpc>
+                <a:spcPct val="90000"/>
+              </a:lnSpc>
+              <a:spcBef>
+                <a:spcPct val="0"/>
+              </a:spcBef>
+              <a:buNone/>
+              <a:defRPr sz="4400" kern="1200">
+                <a:solidFill>
+                  <a:schemeClr val="tx1"/>
+                </a:solidFill>
+                <a:latin typeface="+mj-lt"/>
+                <a:ea typeface="+mj-ea"/>
+                <a:cs typeface="+mj-cs"/>
+              </a:defRPr>
+            </a:lvl1pPr>
+          </a:lstStyle>
+          <a:p>
+            <a:r>
+              <a:rPr lang="en-US" dirty="0">
+                <a:latin typeface="+mn-lt"/>
+              </a:rPr>
+              <a:t>KDD process</a:t>
+            </a:r>
+          </a:p>
+        </p:txBody>
+      </p:sp>
+      <p:pic>
+        <p:nvPicPr>
+          <p:cNvPr id="4" name="Picture 3">
+            <a:extLst>
+              <a:ext uri="{FF2B5EF4-FFF2-40B4-BE49-F238E27FC236}">
+                <a16:creationId xmlns:a16="http://schemas.microsoft.com/office/drawing/2014/main" id="{41A10601-345E-4A04-878A-28FFF71506B5}"/>
+              </a:ext>
+            </a:extLst>
+          </p:cNvPr>
+          <p:cNvPicPr>
+            <a:picLocks noChangeAspect="1"/>
+          </p:cNvPicPr>
+          <p:nvPr/>
+        </p:nvPicPr>
+        <p:blipFill>
+          <a:blip r:embed="rId2"/>
+          <a:stretch>
+            <a:fillRect/>
+          </a:stretch>
+        </p:blipFill>
+        <p:spPr>
+          <a:xfrm>
+            <a:off x="951375" y="1651145"/>
+            <a:ext cx="8488232" cy="4404795"/>
+          </a:xfrm>
+          <a:prstGeom prst="rect">
+            <a:avLst/>
+          </a:prstGeom>
+        </p:spPr>
+      </p:pic>
+    </p:spTree>
+    <p:extLst>
+      <p:ext uri="{BB962C8B-B14F-4D97-AF65-F5344CB8AC3E}">
+        <p14:creationId xmlns:p14="http://schemas.microsoft.com/office/powerpoint/2010/main" val="2011350768"/>
+      </p:ext>
+    </p:extLst>
+  </p:cSld>
+  <p:clrMapOvr>
+    <a:masterClrMapping/>
+  </p:clrMapOvr>
+  <p:timing>
+    <p:tnLst>
+      <p:par>
+        <p:cTn id="1" dur="indefinite" restart="never" nodeType="tmRoot">
+          <p:childTnLst>
+            <p:seq concurrent="1" nextAc="seek">
+              <p:cTn id="2" dur="indefinite" nodeType="mainSeq">
+                <p:childTnLst>
+                  <p:par>
+                    <p:cTn id="3" fill="hold">
+                      <p:stCondLst>
+                        <p:cond delay="indefinite"/>
+                      </p:stCondLst>
+                      <p:childTnLst>
+                        <p:par>
+                          <p:cTn id="4" fill="hold">
+                            <p:stCondLst>
+                              <p:cond delay="0"/>
+                            </p:stCondLst>
+                            <p:childTnLst>
+                              <p:par>
+                                <p:cTn id="5" presetID="1" presetClass="entr" presetSubtype="0" fill="hold" nodeType="clickEffect">
+                                  <p:stCondLst>
+                                    <p:cond delay="0"/>
+                                  </p:stCondLst>
+                                  <p:childTnLst>
+                                    <p:set>
+                                      <p:cBhvr>
+                                        <p:cTn id="6" dur="1" fill="hold">
+                                          <p:stCondLst>
+                                            <p:cond delay="0"/>
+                                          </p:stCondLst>
+                                        </p:cTn>
+                                        <p:tgtEl>
+                                          <p:spTgt spid="3">
+                                            <p:txEl>
+                                              <p:pRg st="0" end="0"/>
+                                            </p:txEl>
+                                          </p:spTgt>
+                                        </p:tgtEl>
+                                        <p:attrNameLst>
+                                          <p:attrName>style.visibility</p:attrName>
+                                        </p:attrNameLst>
+                                      </p:cBhvr>
+                                      <p:to>
+                                        <p:strVal val="visible"/>
+                                      </p:to>
+                                    </p:set>
+                                  </p:childTnLst>
+                                </p:cTn>
+                              </p:par>
+                            </p:childTnLst>
+                          </p:cTn>
+                        </p:par>
+                      </p:childTnLst>
+                    </p:cTn>
+                  </p:par>
+                  <p:par>
+                    <p:cTn id="7" fill="hold">
+                      <p:stCondLst>
+                        <p:cond delay="indefinite"/>
+                      </p:stCondLst>
+                      <p:childTnLst>
+                        <p:par>
+                          <p:cTn id="8" fill="hold">
+                            <p:stCondLst>
+                              <p:cond delay="0"/>
+                            </p:stCondLst>
+                            <p:childTnLst>
+                              <p:par>
+                                <p:cTn id="9" presetID="1" presetClass="entr" presetSubtype="0" fill="hold" nodeType="clickEffect">
+                                  <p:stCondLst>
+                                    <p:cond delay="0"/>
+                                  </p:stCondLst>
+                                  <p:childTnLst>
+                                    <p:set>
+                                      <p:cBhvr>
+                                        <p:cTn id="10" dur="1" fill="hold">
+                                          <p:stCondLst>
+                                            <p:cond delay="0"/>
+                                          </p:stCondLst>
+                                        </p:cTn>
+                                        <p:tgtEl>
+                                          <p:spTgt spid="3">
+                                            <p:txEl>
+                                              <p:pRg st="11" end="11"/>
+                                            </p:txEl>
+                                          </p:spTgt>
+                                        </p:tgtEl>
+                                        <p:attrNameLst>
+                                          <p:attrName>style.visibility</p:attrName>
+                                        </p:attrNameLst>
+                                      </p:cBhvr>
+                                      <p:to>
+                                        <p:strVal val="visible"/>
+                                      </p:to>
+                                    </p:set>
+                                  </p:childTnLst>
+                                </p:cTn>
+                              </p:par>
+                              <p:par>
+                                <p:cTn id="11" presetID="1" presetClass="entr" presetSubtype="0" fill="hold" nodeType="withEffect">
+                                  <p:stCondLst>
+                                    <p:cond delay="0"/>
+                                  </p:stCondLst>
+                                  <p:childTnLst>
+                                    <p:set>
+                                      <p:cBhvr>
+                                        <p:cTn id="12" dur="1" fill="hold">
+                                          <p:stCondLst>
+                                            <p:cond delay="0"/>
+                                          </p:stCondLst>
+                                        </p:cTn>
+                                        <p:tgtEl>
+                                          <p:spTgt spid="4"/>
+                                        </p:tgtEl>
+                                        <p:attrNameLst>
+                                          <p:attrName>style.visibility</p:attrName>
+                                        </p:attrNameLst>
+                                      </p:cBhvr>
+                                      <p:to>
+                                        <p:strVal val="visible"/>
+                                      </p:to>
+                                    </p:set>
+                                  </p:childTnLst>
+                                </p:cTn>
+                              </p:par>
+                            </p:childTnLst>
+                          </p:cTn>
+                        </p:par>
+                      </p:childTnLst>
+                    </p:cTn>
+                  </p:par>
+                </p:childTnLst>
+              </p:cTn>
+              <p:prevCondLst>
+                <p:cond evt="onPrev" delay="0">
+                  <p:tgtEl>
+                    <p:sldTgt/>
+                  </p:tgtEl>
+                </p:cond>
+              </p:prevCondLst>
+              <p:nextCondLst>
+                <p:cond evt="onNext" delay="0">
+                  <p:tgtEl>
+                    <p:sldTgt/>
+                  </p:tgtEl>
+                </p:cond>
+              </p:nextCondLst>
+            </p:seq>
+          </p:childTnLst>
+        </p:cTn>
+      </p:par>
+    </p:tnLst>
+  </p:timing>
+</p:sld>
+</file>
+
+<file path=ppt/slides/slide50.xml><?xml version="1.0" encoding="utf-8"?>
 <p:sld xmlns:a="http://schemas.openxmlformats.org/drawingml/2006/main" xmlns:r="http://schemas.openxmlformats.org/officeDocument/2006/relationships" xmlns:p="http://schemas.openxmlformats.org/presentationml/2006/main">
   <p:cSld>
     <p:spTree>
@@ -30871,7 +35610,7 @@
 </p:sld>
 </file>
 
-<file path=ppt/slides/slide47.xml><?xml version="1.0" encoding="utf-8"?>
+<file path=ppt/slides/slide51.xml><?xml version="1.0" encoding="utf-8"?>
 <p:sld xmlns:a="http://schemas.openxmlformats.org/drawingml/2006/main" xmlns:r="http://schemas.openxmlformats.org/officeDocument/2006/relationships" xmlns:p="http://schemas.openxmlformats.org/presentationml/2006/main">
   <p:cSld>
     <p:spTree>
@@ -31460,7 +36199,7 @@
 </p:sld>
 </file>
 
-<file path=ppt/slides/slide48.xml><?xml version="1.0" encoding="utf-8"?>
+<file path=ppt/slides/slide52.xml><?xml version="1.0" encoding="utf-8"?>
 <p:sld xmlns:a="http://schemas.openxmlformats.org/drawingml/2006/main" xmlns:r="http://schemas.openxmlformats.org/officeDocument/2006/relationships" xmlns:p="http://schemas.openxmlformats.org/presentationml/2006/main">
   <p:cSld>
     <p:spTree>
@@ -31631,400 +36370,6 @@
   <p:clrMapOvr>
     <a:masterClrMapping/>
   </p:clrMapOvr>
-</p:sld>
-</file>
-
-<file path=ppt/slides/slide5.xml><?xml version="1.0" encoding="utf-8"?>
-<p:sld xmlns:a="http://schemas.openxmlformats.org/drawingml/2006/main" xmlns:r="http://schemas.openxmlformats.org/officeDocument/2006/relationships" xmlns:p="http://schemas.openxmlformats.org/presentationml/2006/main">
-  <p:cSld>
-    <p:spTree>
-      <p:nvGrpSpPr>
-        <p:cNvPr id="1" name=""/>
-        <p:cNvGrpSpPr/>
-        <p:nvPr/>
-      </p:nvGrpSpPr>
-      <p:grpSpPr>
-        <a:xfrm>
-          <a:off x="0" y="0"/>
-          <a:ext cx="0" cy="0"/>
-          <a:chOff x="0" y="0"/>
-          <a:chExt cx="0" cy="0"/>
-        </a:xfrm>
-      </p:grpSpPr>
-      <p:sp>
-        <p:nvSpPr>
-          <p:cNvPr id="3" name="Content Placeholder 2">
-            <a:extLst>
-              <a:ext uri="{FF2B5EF4-FFF2-40B4-BE49-F238E27FC236}">
-                <a16:creationId xmlns:a16="http://schemas.microsoft.com/office/drawing/2014/main" id="{258E6AF3-7615-4BD1-878E-A94C93E98F90}"/>
-              </a:ext>
-            </a:extLst>
-          </p:cNvPr>
-          <p:cNvSpPr>
-            <a:spLocks noGrp="1"/>
-          </p:cNvSpPr>
-          <p:nvPr>
-            <p:ph idx="1"/>
-          </p:nvPr>
-        </p:nvSpPr>
-        <p:spPr>
-          <a:xfrm>
-            <a:off x="838200" y="1217458"/>
-            <a:ext cx="10515600" cy="5640542"/>
-          </a:xfrm>
-        </p:spPr>
-        <p:txBody>
-          <a:bodyPr>
-            <a:normAutofit fontScale="92500" lnSpcReduction="10000"/>
-          </a:bodyPr>
-          <a:lstStyle/>
-          <a:p>
-            <a:pPr marL="0" indent="0">
-              <a:buNone/>
-            </a:pPr>
-            <a:r>
-              <a:rPr lang="en-US" sz="3200" dirty="0"/>
-              <a:t>What is the KDD process?   </a:t>
-            </a:r>
-          </a:p>
-          <a:p>
-            <a:pPr marL="0" indent="0">
-              <a:buNone/>
-            </a:pPr>
-            <a:endParaRPr lang="en-US" dirty="0"/>
-          </a:p>
-          <a:p>
-            <a:pPr marL="0" indent="0">
-              <a:buNone/>
-            </a:pPr>
-            <a:endParaRPr lang="en-US" dirty="0"/>
-          </a:p>
-          <a:p>
-            <a:pPr marL="0" indent="0">
-              <a:buNone/>
-            </a:pPr>
-            <a:endParaRPr lang="en-US" dirty="0"/>
-          </a:p>
-          <a:p>
-            <a:pPr marL="0" indent="0">
-              <a:buNone/>
-            </a:pPr>
-            <a:endParaRPr lang="en-US" dirty="0"/>
-          </a:p>
-          <a:p>
-            <a:pPr marL="0" indent="0">
-              <a:buNone/>
-            </a:pPr>
-            <a:endParaRPr lang="en-US" dirty="0"/>
-          </a:p>
-          <a:p>
-            <a:pPr marL="0" indent="0">
-              <a:buNone/>
-            </a:pPr>
-            <a:endParaRPr lang="en-US" dirty="0"/>
-          </a:p>
-          <a:p>
-            <a:pPr marL="0" indent="0">
-              <a:buNone/>
-            </a:pPr>
-            <a:endParaRPr lang="en-US" dirty="0"/>
-          </a:p>
-          <a:p>
-            <a:pPr marL="0" indent="0">
-              <a:buNone/>
-            </a:pPr>
-            <a:endParaRPr lang="en-US" dirty="0">
-              <a:solidFill>
-                <a:schemeClr val="accent1"/>
-              </a:solidFill>
-            </a:endParaRPr>
-          </a:p>
-          <a:p>
-            <a:pPr marL="0" indent="0">
-              <a:buNone/>
-            </a:pPr>
-            <a:endParaRPr lang="en-US" dirty="0">
-              <a:solidFill>
-                <a:schemeClr val="accent1"/>
-              </a:solidFill>
-            </a:endParaRPr>
-          </a:p>
-          <a:p>
-            <a:pPr marL="0" indent="0">
-              <a:buNone/>
-            </a:pPr>
-            <a:endParaRPr lang="en-US" dirty="0">
-              <a:solidFill>
-                <a:schemeClr val="accent1"/>
-              </a:solidFill>
-            </a:endParaRPr>
-          </a:p>
-          <a:p>
-            <a:pPr marL="0" indent="0">
-              <a:buNone/>
-            </a:pPr>
-            <a:r>
-              <a:rPr lang="en-US" dirty="0">
-                <a:solidFill>
-                  <a:schemeClr val="accent1"/>
-                </a:solidFill>
-              </a:rPr>
-              <a:t>Is this old diagram representative?  - e.g. Fayyad et.al. 1996 </a:t>
-            </a:r>
-          </a:p>
-        </p:txBody>
-      </p:sp>
-      <p:sp>
-        <p:nvSpPr>
-          <p:cNvPr id="6" name="Title 1">
-            <a:extLst>
-              <a:ext uri="{FF2B5EF4-FFF2-40B4-BE49-F238E27FC236}">
-                <a16:creationId xmlns:a16="http://schemas.microsoft.com/office/drawing/2014/main" id="{CD29F70F-B868-451B-A65D-8721F4C7A2D9}"/>
-              </a:ext>
-            </a:extLst>
-          </p:cNvPr>
-          <p:cNvSpPr txBox="1">
-            <a:spLocks/>
-          </p:cNvSpPr>
-          <p:nvPr/>
-        </p:nvSpPr>
-        <p:spPr>
-          <a:xfrm>
-            <a:off x="838200" y="-635"/>
-            <a:ext cx="10515600" cy="1325563"/>
-          </a:xfrm>
-          <a:prstGeom prst="rect">
-            <a:avLst/>
-          </a:prstGeom>
-        </p:spPr>
-        <p:txBody>
-          <a:bodyPr vert="horz" lIns="91440" tIns="45720" rIns="91440" bIns="45720" rtlCol="0" anchor="ctr">
-            <a:normAutofit/>
-          </a:bodyPr>
-          <a:lstStyle>
-            <a:lvl1pPr algn="l" defTabSz="914400" rtl="0" eaLnBrk="1" latinLnBrk="0" hangingPunct="1">
-              <a:lnSpc>
-                <a:spcPct val="90000"/>
-              </a:lnSpc>
-              <a:spcBef>
-                <a:spcPct val="0"/>
-              </a:spcBef>
-              <a:buNone/>
-              <a:defRPr sz="4400" kern="1200">
-                <a:solidFill>
-                  <a:schemeClr val="tx1"/>
-                </a:solidFill>
-                <a:latin typeface="+mj-lt"/>
-                <a:ea typeface="+mj-ea"/>
-                <a:cs typeface="+mj-cs"/>
-              </a:defRPr>
-            </a:lvl1pPr>
-          </a:lstStyle>
-          <a:p>
-            <a:r>
-              <a:rPr lang="en-US" dirty="0">
-                <a:latin typeface="+mn-lt"/>
-              </a:rPr>
-              <a:t>KDD process</a:t>
-            </a:r>
-          </a:p>
-        </p:txBody>
-      </p:sp>
-      <p:pic>
-        <p:nvPicPr>
-          <p:cNvPr id="4" name="Picture 3">
-            <a:extLst>
-              <a:ext uri="{FF2B5EF4-FFF2-40B4-BE49-F238E27FC236}">
-                <a16:creationId xmlns:a16="http://schemas.microsoft.com/office/drawing/2014/main" id="{41A10601-345E-4A04-878A-28FFF71506B5}"/>
-              </a:ext>
-            </a:extLst>
-          </p:cNvPr>
-          <p:cNvPicPr>
-            <a:picLocks noChangeAspect="1"/>
-          </p:cNvPicPr>
-          <p:nvPr/>
-        </p:nvPicPr>
-        <p:blipFill>
-          <a:blip r:embed="rId2"/>
-          <a:stretch>
-            <a:fillRect/>
-          </a:stretch>
-        </p:blipFill>
-        <p:spPr>
-          <a:xfrm>
-            <a:off x="951375" y="1651145"/>
-            <a:ext cx="8488232" cy="4404795"/>
-          </a:xfrm>
-          <a:prstGeom prst="rect">
-            <a:avLst/>
-          </a:prstGeom>
-        </p:spPr>
-      </p:pic>
-    </p:spTree>
-    <p:extLst>
-      <p:ext uri="{BB962C8B-B14F-4D97-AF65-F5344CB8AC3E}">
-        <p14:creationId xmlns:p14="http://schemas.microsoft.com/office/powerpoint/2010/main" val="2011350768"/>
-      </p:ext>
-    </p:extLst>
-  </p:cSld>
-  <p:clrMapOvr>
-    <a:masterClrMapping/>
-  </p:clrMapOvr>
-  <p:timing>
-    <p:tnLst>
-      <p:par>
-        <p:cTn id="1" dur="indefinite" restart="never" nodeType="tmRoot">
-          <p:childTnLst>
-            <p:seq concurrent="1" nextAc="seek">
-              <p:cTn id="2" dur="indefinite" nodeType="mainSeq">
-                <p:childTnLst>
-                  <p:par>
-                    <p:cTn id="3" fill="hold">
-                      <p:stCondLst>
-                        <p:cond delay="indefinite"/>
-                      </p:stCondLst>
-                      <p:childTnLst>
-                        <p:par>
-                          <p:cTn id="4" fill="hold">
-                            <p:stCondLst>
-                              <p:cond delay="0"/>
-                            </p:stCondLst>
-                            <p:childTnLst>
-                              <p:par>
-                                <p:cTn id="5" presetID="1" presetClass="entr" presetSubtype="0" fill="hold" nodeType="clickEffect">
-                                  <p:stCondLst>
-                                    <p:cond delay="0"/>
-                                  </p:stCondLst>
-                                  <p:childTnLst>
-                                    <p:set>
-                                      <p:cBhvr>
-                                        <p:cTn id="6" dur="1" fill="hold">
-                                          <p:stCondLst>
-                                            <p:cond delay="0"/>
-                                          </p:stCondLst>
-                                        </p:cTn>
-                                        <p:tgtEl>
-                                          <p:spTgt spid="3">
-                                            <p:txEl>
-                                              <p:pRg st="0" end="0"/>
-                                            </p:txEl>
-                                          </p:spTgt>
-                                        </p:tgtEl>
-                                        <p:attrNameLst>
-                                          <p:attrName>style.visibility</p:attrName>
-                                        </p:attrNameLst>
-                                      </p:cBhvr>
-                                      <p:to>
-                                        <p:strVal val="visible"/>
-                                      </p:to>
-                                    </p:set>
-                                  </p:childTnLst>
-                                </p:cTn>
-                              </p:par>
-                            </p:childTnLst>
-                          </p:cTn>
-                        </p:par>
-                      </p:childTnLst>
-                    </p:cTn>
-                  </p:par>
-                  <p:par>
-                    <p:cTn id="7" fill="hold">
-                      <p:stCondLst>
-                        <p:cond delay="indefinite"/>
-                      </p:stCondLst>
-                      <p:childTnLst>
-                        <p:par>
-                          <p:cTn id="8" fill="hold">
-                            <p:stCondLst>
-                              <p:cond delay="0"/>
-                            </p:stCondLst>
-                            <p:childTnLst>
-                              <p:par>
-                                <p:cTn id="9" presetID="1" presetClass="entr" presetSubtype="0" fill="hold" nodeType="clickEffect">
-                                  <p:stCondLst>
-                                    <p:cond delay="0"/>
-                                  </p:stCondLst>
-                                  <p:childTnLst>
-                                    <p:set>
-                                      <p:cBhvr>
-                                        <p:cTn id="10" dur="1" fill="hold">
-                                          <p:stCondLst>
-                                            <p:cond delay="0"/>
-                                          </p:stCondLst>
-                                        </p:cTn>
-                                        <p:tgtEl>
-                                          <p:spTgt spid="3">
-                                            <p:txEl>
-                                              <p:pRg st="11" end="11"/>
-                                            </p:txEl>
-                                          </p:spTgt>
-                                        </p:tgtEl>
-                                        <p:attrNameLst>
-                                          <p:attrName>style.visibility</p:attrName>
-                                        </p:attrNameLst>
-                                      </p:cBhvr>
-                                      <p:to>
-                                        <p:strVal val="visible"/>
-                                      </p:to>
-                                    </p:set>
-                                  </p:childTnLst>
-                                </p:cTn>
-                              </p:par>
-                              <p:par>
-                                <p:cTn id="11" presetID="1" presetClass="entr" presetSubtype="0" fill="hold" nodeType="withEffect">
-                                  <p:stCondLst>
-                                    <p:cond delay="0"/>
-                                  </p:stCondLst>
-                                  <p:childTnLst>
-                                    <p:set>
-                                      <p:cBhvr>
-                                        <p:cTn id="12" dur="1" fill="hold">
-                                          <p:stCondLst>
-                                            <p:cond delay="0"/>
-                                          </p:stCondLst>
-                                        </p:cTn>
-                                        <p:tgtEl>
-                                          <p:spTgt spid="4"/>
-                                        </p:tgtEl>
-                                        <p:attrNameLst>
-                                          <p:attrName>style.visibility</p:attrName>
-                                        </p:attrNameLst>
-                                      </p:cBhvr>
-                                      <p:to>
-                                        <p:strVal val="visible"/>
-                                      </p:to>
-                                    </p:set>
-                                  </p:childTnLst>
-                                </p:cTn>
-                              </p:par>
-                            </p:childTnLst>
-                          </p:cTn>
-                        </p:par>
-                      </p:childTnLst>
-                    </p:cTn>
-                  </p:par>
-                </p:childTnLst>
-              </p:cTn>
-              <p:prevCondLst>
-                <p:cond evt="onPrev" delay="0">
-                  <p:tgtEl>
-                    <p:sldTgt/>
-                  </p:tgtEl>
-                </p:cond>
-              </p:prevCondLst>
-              <p:nextCondLst>
-                <p:cond evt="onNext" delay="0">
-                  <p:tgtEl>
-                    <p:sldTgt/>
-                  </p:tgtEl>
-                </p:cond>
-              </p:nextCondLst>
-            </p:seq>
-          </p:childTnLst>
-        </p:cTn>
-      </p:par>
-    </p:tnLst>
-  </p:timing>
 </p:sld>
 </file>
 
@@ -33204,10 +37549,10 @@
       </p:grpSpPr>
       <p:sp>
         <p:nvSpPr>
-          <p:cNvPr id="2" name="Title 1">
+          <p:cNvPr id="4" name="Title 3">
             <a:extLst>
               <a:ext uri="{FF2B5EF4-FFF2-40B4-BE49-F238E27FC236}">
-                <a16:creationId xmlns:a16="http://schemas.microsoft.com/office/drawing/2014/main" id="{2EAB3E39-E4CD-B6D2-21FE-E3DF3151138A}"/>
+                <a16:creationId xmlns:a16="http://schemas.microsoft.com/office/drawing/2014/main" id="{1BCE2B5B-E165-AFE7-3BF6-9F7655565AD7}"/>
               </a:ext>
             </a:extLst>
           </p:cNvPr>
@@ -33220,40 +37565,22 @@
         </p:nvSpPr>
         <p:spPr/>
         <p:txBody>
-          <a:bodyPr>
-            <a:normAutofit/>
-          </a:bodyPr>
+          <a:bodyPr/>
           <a:lstStyle/>
           <a:p>
             <a:r>
-              <a:rPr lang="en-US" sz="4000" i="0" dirty="0">
-                <a:solidFill>
-                  <a:srgbClr val="000000"/>
-                </a:solidFill>
-                <a:effectLst/>
-                <a:latin typeface="+mn-lt"/>
-              </a:rPr>
-              <a:t>Teaching Assistant: Tatyana Boland</a:t>
-            </a:r>
-            <a:br>
-              <a:rPr lang="en-US" sz="4000" b="1" i="0" dirty="0">
-                <a:solidFill>
-                  <a:srgbClr val="000000"/>
-                </a:solidFill>
-                <a:effectLst/>
-                <a:latin typeface="Gill Sans MT" panose="020B0502020104020203" pitchFamily="34" charset="0"/>
-              </a:rPr>
-            </a:br>
-            <a:endParaRPr lang="en-US" sz="4000" dirty="0"/>
+              <a:rPr lang="en-DE" dirty="0"/>
+              <a:t>About your TA: Jacqueline Hardy</a:t>
+            </a:r>
           </a:p>
         </p:txBody>
       </p:sp>
       <p:sp>
         <p:nvSpPr>
-          <p:cNvPr id="3" name="Content Placeholder 2">
+          <p:cNvPr id="5" name="Content Placeholder 4">
             <a:extLst>
               <a:ext uri="{FF2B5EF4-FFF2-40B4-BE49-F238E27FC236}">
-                <a16:creationId xmlns:a16="http://schemas.microsoft.com/office/drawing/2014/main" id="{4BA949B7-1683-2432-EC26-A7F815D02FE9}"/>
+                <a16:creationId xmlns:a16="http://schemas.microsoft.com/office/drawing/2014/main" id="{0E53D9F3-C1CB-AE91-44FA-A9A184CF447C}"/>
               </a:ext>
             </a:extLst>
           </p:cNvPr>
@@ -33267,142 +37594,94 @@
         <p:spPr/>
         <p:txBody>
           <a:bodyPr>
-            <a:normAutofit lnSpcReduction="10000"/>
+            <a:normAutofit fontScale="92500" lnSpcReduction="20000"/>
           </a:bodyPr>
           <a:lstStyle/>
           <a:p>
-            <a:pPr algn="l">
-              <a:buFont typeface="Arial" panose="020B0604020202020204" pitchFamily="34" charset="0"/>
-              <a:buChar char="•"/>
-            </a:pPr>
-            <a:r>
-              <a:rPr lang="en-US" b="0" i="0" dirty="0">
-                <a:solidFill>
-                  <a:srgbClr val="000000"/>
-                </a:solidFill>
-                <a:effectLst/>
-                <a:latin typeface="Gill Sans MT" panose="020B0502020104020203" pitchFamily="34" charset="0"/>
-              </a:rPr>
-              <a:t>MBA in Finance from Texas A&amp;M</a:t>
-            </a:r>
-          </a:p>
-          <a:p>
-            <a:pPr algn="l">
-              <a:buFont typeface="Arial" panose="020B0604020202020204" pitchFamily="34" charset="0"/>
-              <a:buChar char="•"/>
-            </a:pPr>
-            <a:r>
-              <a:rPr lang="en-US" b="0" i="0" dirty="0">
-                <a:solidFill>
-                  <a:srgbClr val="000000"/>
-                </a:solidFill>
-                <a:effectLst/>
-                <a:latin typeface="Gill Sans MT" panose="020B0502020104020203" pitchFamily="34" charset="0"/>
-              </a:rPr>
-              <a:t>MLA from Harvard Extension School in Sustainability &amp; Environmental Management</a:t>
-            </a:r>
-          </a:p>
-          <a:p>
-            <a:pPr algn="l">
-              <a:buFont typeface="Arial" panose="020B0604020202020204" pitchFamily="34" charset="0"/>
-              <a:buChar char="•"/>
-            </a:pPr>
-            <a:r>
-              <a:rPr lang="en-US" b="0" i="0" dirty="0">
-                <a:solidFill>
-                  <a:srgbClr val="000000"/>
-                </a:solidFill>
-                <a:effectLst/>
-                <a:latin typeface="Gill Sans MT" panose="020B0502020104020203" pitchFamily="34" charset="0"/>
-              </a:rPr>
-              <a:t>BA in Political Science from University of Washington</a:t>
-            </a:r>
-          </a:p>
-          <a:p>
-            <a:pPr algn="l">
-              <a:buFont typeface="Arial" panose="020B0604020202020204" pitchFamily="34" charset="0"/>
-              <a:buChar char="•"/>
-            </a:pPr>
-            <a:r>
-              <a:rPr lang="en-US" dirty="0">
-                <a:solidFill>
-                  <a:srgbClr val="000000"/>
-                </a:solidFill>
-                <a:latin typeface="Gill Sans MT" panose="020B0502020104020203" pitchFamily="34" charset="0"/>
-              </a:rPr>
-              <a:t>Program manager for cloud products at Nvidia</a:t>
-            </a:r>
-            <a:endParaRPr lang="en-US" b="0" i="0" dirty="0">
-              <a:solidFill>
-                <a:srgbClr val="000000"/>
-              </a:solidFill>
-              <a:effectLst/>
-              <a:latin typeface="Gill Sans MT" panose="020B0502020104020203" pitchFamily="34" charset="0"/>
-            </a:endParaRPr>
-          </a:p>
-          <a:p>
-            <a:pPr algn="l">
-              <a:buFont typeface="Arial" panose="020B0604020202020204" pitchFamily="34" charset="0"/>
-              <a:buChar char="•"/>
-            </a:pPr>
-            <a:r>
-              <a:rPr lang="en-US" b="0" i="0" dirty="0">
-                <a:solidFill>
-                  <a:srgbClr val="000000"/>
-                </a:solidFill>
-                <a:effectLst/>
-                <a:latin typeface="Gill Sans MT" panose="020B0502020104020203" pitchFamily="34" charset="0"/>
-              </a:rPr>
-              <a:t>Worked previously at Oracle OCI as Principal Technical Program Manager in Physical Networking team</a:t>
-            </a:r>
-          </a:p>
-          <a:p>
-            <a:pPr algn="l">
-              <a:buFont typeface="Arial" panose="020B0604020202020204" pitchFamily="34" charset="0"/>
-              <a:buChar char="•"/>
-            </a:pPr>
-            <a:r>
-              <a:rPr lang="en-US" dirty="0">
-                <a:solidFill>
-                  <a:srgbClr val="222222"/>
-                </a:solidFill>
-                <a:latin typeface="Arial" panose="020B0604020202020204" pitchFamily="34" charset="0"/>
-              </a:rPr>
-              <a:t>L</a:t>
-            </a:r>
-            <a:r>
-              <a:rPr lang="en-US" b="0" i="0" dirty="0">
-                <a:solidFill>
-                  <a:srgbClr val="222222"/>
-                </a:solidFill>
-                <a:effectLst/>
-                <a:latin typeface="Arial" panose="020B0604020202020204" pitchFamily="34" charset="0"/>
-              </a:rPr>
-              <a:t>oves playing the piano and playing and with my cats</a:t>
-            </a:r>
-            <a:endParaRPr lang="en-US" b="0" i="0" dirty="0">
-              <a:solidFill>
-                <a:srgbClr val="000000"/>
-              </a:solidFill>
-              <a:effectLst/>
-              <a:latin typeface="Gill Sans MT" panose="020B0502020104020203" pitchFamily="34" charset="0"/>
-            </a:endParaRPr>
-          </a:p>
-          <a:p>
-            <a:pPr marL="0" indent="0">
-              <a:buNone/>
-            </a:pPr>
-            <a:br>
-              <a:rPr lang="en-US" dirty="0"/>
-            </a:br>
-            <a:endParaRPr lang="en-US" dirty="0"/>
+            <a:r>
+              <a:rPr lang="en-DE" dirty="0"/>
+              <a:t>Bachelor’s Degree from Harvard Extension School (2015-2018)</a:t>
+            </a:r>
+          </a:p>
+          <a:p>
+            <a:pPr lvl="1"/>
+            <a:r>
+              <a:rPr lang="en-DE" dirty="0"/>
+              <a:t>Field of Study: International Relations</a:t>
+            </a:r>
+          </a:p>
+          <a:p>
+            <a:pPr lvl="1"/>
+            <a:r>
+              <a:rPr lang="en-DE" dirty="0"/>
+              <a:t>Minors: Quantitative Analysis &amp; Government</a:t>
+            </a:r>
+          </a:p>
+          <a:p>
+            <a:r>
+              <a:rPr lang="en-DE" dirty="0"/>
+              <a:t>Master’s Degree from Harvard Extension School (2022-2024)</a:t>
+            </a:r>
+          </a:p>
+          <a:p>
+            <a:pPr lvl="1"/>
+            <a:r>
+              <a:rPr lang="en-DE" dirty="0"/>
+              <a:t>Field of Study: Data Science</a:t>
+            </a:r>
+          </a:p>
+          <a:p>
+            <a:r>
+              <a:rPr lang="en-DE" dirty="0"/>
+              <a:t>LG Electronics: </a:t>
+            </a:r>
+          </a:p>
+          <a:p>
+            <a:pPr lvl="1"/>
+            <a:r>
+              <a:rPr lang="en-DE" dirty="0"/>
+              <a:t>Product Specialist </a:t>
+            </a:r>
+          </a:p>
+          <a:p>
+            <a:pPr lvl="1"/>
+            <a:r>
+              <a:rPr lang="en-DE" dirty="0"/>
+              <a:t>Go-to-Market Manager</a:t>
+            </a:r>
+          </a:p>
+          <a:p>
+            <a:pPr lvl="1"/>
+            <a:r>
+              <a:rPr lang="en-DE" dirty="0"/>
+              <a:t>Data Analytics Specialist </a:t>
+            </a:r>
+          </a:p>
+          <a:p>
+            <a:r>
+              <a:rPr lang="en-DE" dirty="0"/>
+              <a:t>SharkNinja </a:t>
+            </a:r>
+          </a:p>
+          <a:p>
+            <a:pPr lvl="1"/>
+            <a:r>
+              <a:rPr lang="en-DE" dirty="0"/>
+              <a:t>Strategic Planning and Operations Data Scientist </a:t>
+            </a:r>
+          </a:p>
+          <a:p>
+            <a:r>
+              <a:rPr lang="en-DE" dirty="0"/>
+              <a:t>Building my own Data Science Consulting Firm</a:t>
+            </a:r>
           </a:p>
         </p:txBody>
       </p:sp>
     </p:spTree>
     <p:extLst>
       <p:ext uri="{BB962C8B-B14F-4D97-AF65-F5344CB8AC3E}">
-        <p14:creationId xmlns:p14="http://schemas.microsoft.com/office/powerpoint/2010/main" val="3067415561"/>
+        <p14:creationId xmlns:p14="http://schemas.microsoft.com/office/powerpoint/2010/main" val="2292487268"/>
       </p:ext>
     </p:extLst>
   </p:cSld>

--- a/slides/1_Introduction.pptx
+++ b/slides/1_Introduction.pptx
@@ -5,7 +5,7 @@
     <p:sldMasterId id="2147483648" r:id="rId1"/>
   </p:sldMasterIdLst>
   <p:notesMasterIdLst>
-    <p:notesMasterId r:id="rId54"/>
+    <p:notesMasterId r:id="rId55"/>
   </p:notesMasterIdLst>
   <p:sldIdLst>
     <p:sldId id="256" r:id="rId2"/>
@@ -47,19 +47,20 @@
     <p:sldId id="731" r:id="rId38"/>
     <p:sldId id="374" r:id="rId39"/>
     <p:sldId id="375" r:id="rId40"/>
-    <p:sldId id="376" r:id="rId41"/>
-    <p:sldId id="734" r:id="rId42"/>
-    <p:sldId id="737" r:id="rId43"/>
-    <p:sldId id="736" r:id="rId44"/>
-    <p:sldId id="735" r:id="rId45"/>
-    <p:sldId id="728" r:id="rId46"/>
-    <p:sldId id="377" r:id="rId47"/>
-    <p:sldId id="729" r:id="rId48"/>
-    <p:sldId id="730" r:id="rId49"/>
-    <p:sldId id="378" r:id="rId50"/>
+    <p:sldId id="738" r:id="rId41"/>
+    <p:sldId id="377" r:id="rId42"/>
+    <p:sldId id="729" r:id="rId43"/>
+    <p:sldId id="730" r:id="rId44"/>
+    <p:sldId id="739" r:id="rId45"/>
+    <p:sldId id="376" r:id="rId46"/>
+    <p:sldId id="378" r:id="rId47"/>
+    <p:sldId id="734" r:id="rId48"/>
+    <p:sldId id="737" r:id="rId49"/>
+    <p:sldId id="728" r:id="rId50"/>
     <p:sldId id="379" r:id="rId51"/>
     <p:sldId id="380" r:id="rId52"/>
-    <p:sldId id="384" r:id="rId53"/>
+    <p:sldId id="740" r:id="rId53"/>
+    <p:sldId id="384" r:id="rId54"/>
   </p:sldIdLst>
   <p:sldSz cx="12192000" cy="6858000"/>
   <p:notesSz cx="6858000" cy="9144000"/>
@@ -248,7 +249,7 @@
           <a:p>
             <a:fld id="{2F3ABF1A-8818-4472-8518-E71DC7B5D2F7}" type="datetimeFigureOut">
               <a:rPr lang="en-US" smtClean="0"/>
-              <a:t>5/19/2026</a:t>
+              <a:t>5/20/2026</a:t>
             </a:fld>
             <a:endParaRPr lang="en-US"/>
           </a:p>
@@ -662,7 +663,7 @@
           <a:p>
             <a:fld id="{6E4A31BF-7266-4BEB-918B-ADC21C630A6F}" type="datetimeFigureOut">
               <a:rPr lang="en-US" smtClean="0"/>
-              <a:t>5/19/2026</a:t>
+              <a:t>5/20/2026</a:t>
             </a:fld>
             <a:endParaRPr lang="en-US"/>
           </a:p>
@@ -860,7 +861,7 @@
           <a:p>
             <a:fld id="{6E4A31BF-7266-4BEB-918B-ADC21C630A6F}" type="datetimeFigureOut">
               <a:rPr lang="en-US" smtClean="0"/>
-              <a:t>5/19/2026</a:t>
+              <a:t>5/20/2026</a:t>
             </a:fld>
             <a:endParaRPr lang="en-US"/>
           </a:p>
@@ -1068,7 +1069,7 @@
           <a:p>
             <a:fld id="{6E4A31BF-7266-4BEB-918B-ADC21C630A6F}" type="datetimeFigureOut">
               <a:rPr lang="en-US" smtClean="0"/>
-              <a:t>5/19/2026</a:t>
+              <a:t>5/20/2026</a:t>
             </a:fld>
             <a:endParaRPr lang="en-US"/>
           </a:p>
@@ -1266,7 +1267,7 @@
           <a:p>
             <a:fld id="{6E4A31BF-7266-4BEB-918B-ADC21C630A6F}" type="datetimeFigureOut">
               <a:rPr lang="en-US" smtClean="0"/>
-              <a:t>5/19/2026</a:t>
+              <a:t>5/20/2026</a:t>
             </a:fld>
             <a:endParaRPr lang="en-US"/>
           </a:p>
@@ -1541,7 +1542,7 @@
           <a:p>
             <a:fld id="{6E4A31BF-7266-4BEB-918B-ADC21C630A6F}" type="datetimeFigureOut">
               <a:rPr lang="en-US" smtClean="0"/>
-              <a:t>5/19/2026</a:t>
+              <a:t>5/20/2026</a:t>
             </a:fld>
             <a:endParaRPr lang="en-US"/>
           </a:p>
@@ -1806,7 +1807,7 @@
           <a:p>
             <a:fld id="{6E4A31BF-7266-4BEB-918B-ADC21C630A6F}" type="datetimeFigureOut">
               <a:rPr lang="en-US" smtClean="0"/>
-              <a:t>5/19/2026</a:t>
+              <a:t>5/20/2026</a:t>
             </a:fld>
             <a:endParaRPr lang="en-US"/>
           </a:p>
@@ -2218,7 +2219,7 @@
           <a:p>
             <a:fld id="{6E4A31BF-7266-4BEB-918B-ADC21C630A6F}" type="datetimeFigureOut">
               <a:rPr lang="en-US" smtClean="0"/>
-              <a:t>5/19/2026</a:t>
+              <a:t>5/20/2026</a:t>
             </a:fld>
             <a:endParaRPr lang="en-US"/>
           </a:p>
@@ -2359,7 +2360,7 @@
           <a:p>
             <a:fld id="{6E4A31BF-7266-4BEB-918B-ADC21C630A6F}" type="datetimeFigureOut">
               <a:rPr lang="en-US" smtClean="0"/>
-              <a:t>5/19/2026</a:t>
+              <a:t>5/20/2026</a:t>
             </a:fld>
             <a:endParaRPr lang="en-US"/>
           </a:p>
@@ -2472,7 +2473,7 @@
           <a:p>
             <a:fld id="{6E4A31BF-7266-4BEB-918B-ADC21C630A6F}" type="datetimeFigureOut">
               <a:rPr lang="en-US" smtClean="0"/>
-              <a:t>5/19/2026</a:t>
+              <a:t>5/20/2026</a:t>
             </a:fld>
             <a:endParaRPr lang="en-US"/>
           </a:p>
@@ -2783,7 +2784,7 @@
           <a:p>
             <a:fld id="{6E4A31BF-7266-4BEB-918B-ADC21C630A6F}" type="datetimeFigureOut">
               <a:rPr lang="en-US" smtClean="0"/>
-              <a:t>5/19/2026</a:t>
+              <a:t>5/20/2026</a:t>
             </a:fld>
             <a:endParaRPr lang="en-US"/>
           </a:p>
@@ -3071,7 +3072,7 @@
           <a:p>
             <a:fld id="{6E4A31BF-7266-4BEB-918B-ADC21C630A6F}" type="datetimeFigureOut">
               <a:rPr lang="en-US" smtClean="0"/>
-              <a:t>5/19/2026</a:t>
+              <a:t>5/20/2026</a:t>
             </a:fld>
             <a:endParaRPr lang="en-US"/>
           </a:p>
@@ -3312,7 +3313,7 @@
           <a:p>
             <a:fld id="{6E4A31BF-7266-4BEB-918B-ADC21C630A6F}" type="datetimeFigureOut">
               <a:rPr lang="en-US" smtClean="0"/>
-              <a:t>5/19/2026</a:t>
+              <a:t>5/20/2026</a:t>
             </a:fld>
             <a:endParaRPr lang="en-US"/>
           </a:p>
@@ -16434,8 +16435,8 @@
           <a:chExt cx="0" cy="0"/>
         </a:xfrm>
       </p:grpSpPr>
-      <mc:AlternateContent xmlns:mc="http://schemas.openxmlformats.org/markup-compatibility/2006">
-        <mc:Choice xmlns:a14="http://schemas.microsoft.com/office/drawing/2010/main" Requires="a14">
+      <mc:AlternateContent xmlns:mc="http://schemas.openxmlformats.org/markup-compatibility/2006" xmlns:a14="http://schemas.microsoft.com/office/drawing/2010/main">
+        <mc:Choice Requires="a14">
           <p:sp>
             <p:nvSpPr>
               <p:cNvPr id="3" name="Content Placeholder 2">
@@ -16559,7 +16560,7 @@
             </p:txBody>
           </p:sp>
         </mc:Choice>
-        <mc:Fallback>
+        <mc:Fallback xmlns="">
           <p:sp>
             <p:nvSpPr>
               <p:cNvPr id="3" name="Content Placeholder 2">
@@ -22418,8 +22419,8 @@
           </a:p>
         </p:txBody>
       </p:sp>
-      <mc:AlternateContent xmlns:mc="http://schemas.openxmlformats.org/markup-compatibility/2006">
-        <mc:Choice xmlns:a14="http://schemas.microsoft.com/office/drawing/2010/main" Requires="a14">
+      <mc:AlternateContent xmlns:mc="http://schemas.openxmlformats.org/markup-compatibility/2006" xmlns:a14="http://schemas.microsoft.com/office/drawing/2010/main">
+        <mc:Choice Requires="a14">
           <p:sp>
             <p:nvSpPr>
               <p:cNvPr id="42" name="Content Placeholder 2">
@@ -22713,7 +22714,7 @@
             </p:txBody>
           </p:sp>
         </mc:Choice>
-        <mc:Fallback>
+        <mc:Fallback xmlns="">
           <p:sp>
             <p:nvSpPr>
               <p:cNvPr id="42" name="Content Placeholder 2">
@@ -27366,3744 +27367,10 @@
   <p:cSld>
     <p:spTree>
       <p:nvGrpSpPr>
-        <p:cNvPr id="1" name=""/>
-        <p:cNvGrpSpPr/>
-        <p:nvPr/>
-      </p:nvGrpSpPr>
-      <p:grpSpPr>
-        <a:xfrm>
-          <a:off x="0" y="0"/>
-          <a:ext cx="0" cy="0"/>
-          <a:chOff x="0" y="0"/>
-          <a:chExt cx="0" cy="0"/>
-        </a:xfrm>
-      </p:grpSpPr>
-      <mc:AlternateContent xmlns:mc="http://schemas.openxmlformats.org/markup-compatibility/2006" xmlns:a14="http://schemas.microsoft.com/office/drawing/2010/main">
-        <mc:Choice Requires="a14">
-          <p:sp>
-            <p:nvSpPr>
-              <p:cNvPr id="3" name="Content Placeholder 2">
-                <a:extLst>
-                  <a:ext uri="{FF2B5EF4-FFF2-40B4-BE49-F238E27FC236}">
-                    <a16:creationId xmlns:a16="http://schemas.microsoft.com/office/drawing/2014/main" id="{258E6AF3-7615-4BD1-878E-A94C93E98F90}"/>
-                  </a:ext>
-                </a:extLst>
-              </p:cNvPr>
-              <p:cNvSpPr>
-                <a:spLocks noGrp="1"/>
-              </p:cNvSpPr>
-              <p:nvPr>
-                <p:ph idx="1"/>
-              </p:nvPr>
-            </p:nvSpPr>
-            <p:spPr>
-              <a:xfrm>
-                <a:off x="838200" y="1123406"/>
-                <a:ext cx="10515600" cy="5470724"/>
-              </a:xfrm>
-            </p:spPr>
-            <p:txBody>
-              <a:bodyPr>
-                <a:normAutofit/>
-              </a:bodyPr>
-              <a:lstStyle/>
-              <a:p>
-                <a:pPr marL="0" indent="0">
-                  <a:buNone/>
-                </a:pPr>
-                <a:r>
-                  <a:rPr lang="en-US" dirty="0"/>
-                  <a:t>What are the properties of a good hash function?  </a:t>
-                </a:r>
-              </a:p>
-              <a:p>
-                <a:pPr marL="514350" indent="-514350">
-                  <a:buFont typeface="+mj-lt"/>
-                  <a:buAutoNum type="arabicPeriod"/>
-                </a:pPr>
-                <a:r>
-                  <a:rPr lang="en-US" dirty="0"/>
-                  <a:t>For key values, </a:t>
-                </a:r>
-                <a14:m>
-                  <m:oMath xmlns:m="http://schemas.openxmlformats.org/officeDocument/2006/math">
-                    <m:r>
-                      <a:rPr lang="en-US" i="1">
-                        <a:latin typeface="Cambria Math" panose="02040503050406030204" pitchFamily="18" charset="0"/>
-                      </a:rPr>
-                      <m:t>𝐾</m:t>
-                    </m:r>
-                  </m:oMath>
-                </a14:m>
-                <a:r>
-                  <a:rPr lang="en-US" dirty="0"/>
-                  <a:t>, want a </a:t>
-                </a:r>
-                <a:r>
-                  <a:rPr lang="en-US" b="1" dirty="0"/>
-                  <a:t>uniform distribution over </a:t>
-                </a:r>
-                <a14:m>
-                  <m:oMath xmlns:m="http://schemas.openxmlformats.org/officeDocument/2006/math">
-                    <m:r>
-                      <a:rPr lang="en-US" b="1" i="1" smtClean="0">
-                        <a:latin typeface="Cambria Math" panose="02040503050406030204" pitchFamily="18" charset="0"/>
-                      </a:rPr>
-                      <m:t>𝒎</m:t>
-                    </m:r>
-                  </m:oMath>
-                </a14:m>
-                <a:r>
-                  <a:rPr lang="en-US" b="1" dirty="0"/>
-                  <a:t> hash values</a:t>
-                </a:r>
-              </a:p>
-              <a:p>
-                <a:pPr marL="457200" lvl="1" indent="0">
-                  <a:buNone/>
-                </a:pPr>
-                <a14:m>
-                  <m:oMathPara xmlns:m="http://schemas.openxmlformats.org/officeDocument/2006/math">
-                    <m:oMathParaPr>
-                      <m:jc m:val="centerGroup"/>
-                    </m:oMathParaPr>
-                    <m:oMath xmlns:m="http://schemas.openxmlformats.org/officeDocument/2006/math">
-                      <m:r>
-                        <a:rPr lang="en-US" b="1" i="1">
-                          <a:latin typeface="Cambria Math" panose="02040503050406030204" pitchFamily="18" charset="0"/>
-                        </a:rPr>
-                        <m:t>𝒇</m:t>
-                      </m:r>
-                      <m:r>
-                        <a:rPr lang="en-US" b="1" i="1">
-                          <a:latin typeface="Cambria Math" panose="02040503050406030204" pitchFamily="18" charset="0"/>
-                        </a:rPr>
-                        <m:t>(</m:t>
-                      </m:r>
-                      <m:r>
-                        <a:rPr lang="en-US" b="1" i="1">
-                          <a:latin typeface="Cambria Math" panose="02040503050406030204" pitchFamily="18" charset="0"/>
-                        </a:rPr>
-                        <m:t>𝒌</m:t>
-                      </m:r>
-                      <m:r>
-                        <a:rPr lang="en-US" b="1" i="1">
-                          <a:latin typeface="Cambria Math" panose="02040503050406030204" pitchFamily="18" charset="0"/>
-                        </a:rPr>
-                        <m:t>)~</m:t>
-                      </m:r>
-                      <m:r>
-                        <a:rPr lang="en-US" b="1" i="1">
-                          <a:latin typeface="Cambria Math" panose="02040503050406030204" pitchFamily="18" charset="0"/>
-                          <a:ea typeface="Cambria Math" panose="02040503050406030204" pitchFamily="18" charset="0"/>
-                        </a:rPr>
-                        <m:t>𝑼</m:t>
-                      </m:r>
-                      <m:r>
-                        <a:rPr lang="en-US" b="1" i="1">
-                          <a:latin typeface="Cambria Math" panose="02040503050406030204" pitchFamily="18" charset="0"/>
-                          <a:ea typeface="Cambria Math" panose="02040503050406030204" pitchFamily="18" charset="0"/>
-                        </a:rPr>
-                        <m:t>(</m:t>
-                      </m:r>
-                      <m:r>
-                        <a:rPr lang="en-US" b="1" i="1">
-                          <a:latin typeface="Cambria Math" panose="02040503050406030204" pitchFamily="18" charset="0"/>
-                          <a:ea typeface="Cambria Math" panose="02040503050406030204" pitchFamily="18" charset="0"/>
-                        </a:rPr>
-                        <m:t>𝟎</m:t>
-                      </m:r>
-                      <m:r>
-                        <a:rPr lang="en-US" b="1" i="1">
-                          <a:latin typeface="Cambria Math" panose="02040503050406030204" pitchFamily="18" charset="0"/>
-                          <a:ea typeface="Cambria Math" panose="02040503050406030204" pitchFamily="18" charset="0"/>
-                        </a:rPr>
-                        <m:t>,</m:t>
-                      </m:r>
-                      <m:r>
-                        <a:rPr lang="en-US" b="1" i="1" smtClean="0">
-                          <a:latin typeface="Cambria Math" panose="02040503050406030204" pitchFamily="18" charset="0"/>
-                          <a:ea typeface="Cambria Math" panose="02040503050406030204" pitchFamily="18" charset="0"/>
-                        </a:rPr>
-                        <m:t>𝒎</m:t>
-                      </m:r>
-                      <m:r>
-                        <a:rPr lang="en-US" b="1" i="1">
-                          <a:latin typeface="Cambria Math" panose="02040503050406030204" pitchFamily="18" charset="0"/>
-                          <a:ea typeface="Cambria Math" panose="02040503050406030204" pitchFamily="18" charset="0"/>
-                        </a:rPr>
-                        <m:t>)</m:t>
-                      </m:r>
-                    </m:oMath>
-                  </m:oMathPara>
-                </a14:m>
-                <a:endParaRPr lang="en-US" b="1" dirty="0"/>
-              </a:p>
-              <a:p>
-                <a:pPr lvl="1"/>
-                <a:r>
-                  <a:rPr lang="en-US" dirty="0"/>
-                  <a:t>For </a:t>
-                </a:r>
-                <a14:m>
-                  <m:oMath xmlns:m="http://schemas.openxmlformats.org/officeDocument/2006/math">
-                    <m:r>
-                      <a:rPr lang="en-US" b="0" i="1" smtClean="0">
-                        <a:latin typeface="Cambria Math" panose="02040503050406030204" pitchFamily="18" charset="0"/>
-                      </a:rPr>
-                      <m:t>𝑚</m:t>
-                    </m:r>
-                  </m:oMath>
-                </a14:m>
-                <a:r>
-                  <a:rPr lang="en-US" dirty="0"/>
-                  <a:t> length hash table probability of bucket </a:t>
-                </a:r>
-                <a14:m>
-                  <m:oMath xmlns:m="http://schemas.openxmlformats.org/officeDocument/2006/math">
-                    <m:r>
-                      <a:rPr lang="en-US" b="0" i="1" smtClean="0">
-                        <a:latin typeface="Cambria Math" panose="02040503050406030204" pitchFamily="18" charset="0"/>
-                      </a:rPr>
-                      <m:t>𝑖</m:t>
-                    </m:r>
-                  </m:oMath>
-                </a14:m>
-                <a:r>
-                  <a:rPr lang="en-US" dirty="0"/>
-                  <a:t>: </a:t>
-                </a:r>
-              </a:p>
-              <a:p>
-                <a:pPr marL="457200" lvl="1" indent="0">
-                  <a:buNone/>
-                </a:pPr>
-                <a14:m>
-                  <m:oMathPara xmlns:m="http://schemas.openxmlformats.org/officeDocument/2006/math">
-                    <m:oMathParaPr>
-                      <m:jc m:val="centerGroup"/>
-                    </m:oMathParaPr>
-                    <m:oMath xmlns:m="http://schemas.openxmlformats.org/officeDocument/2006/math">
-                      <m:r>
-                        <m:rPr>
-                          <m:sty m:val="p"/>
-                        </m:rPr>
-                        <a:rPr lang="en-US" b="0" i="0" smtClean="0">
-                          <a:latin typeface="Cambria Math" panose="02040503050406030204" pitchFamily="18" charset="0"/>
-                        </a:rPr>
-                        <m:t>P</m:t>
-                      </m:r>
-                      <m:d>
-                        <m:dPr>
-                          <m:ctrlPr>
-                            <a:rPr lang="en-US" i="1" smtClean="0">
-                              <a:latin typeface="Cambria Math" panose="02040503050406030204" pitchFamily="18" charset="0"/>
-                            </a:rPr>
-                          </m:ctrlPr>
-                        </m:dPr>
-                        <m:e>
-                          <m:r>
-                            <a:rPr lang="en-US" b="0" i="1">
-                              <a:latin typeface="Cambria Math" panose="02040503050406030204" pitchFamily="18" charset="0"/>
-                            </a:rPr>
-                            <m:t>𝑓</m:t>
-                          </m:r>
-                          <m:d>
-                            <m:dPr>
-                              <m:ctrlPr>
-                                <a:rPr lang="en-US" i="1">
-                                  <a:latin typeface="Cambria Math" panose="02040503050406030204" pitchFamily="18" charset="0"/>
-                                </a:rPr>
-                              </m:ctrlPr>
-                            </m:dPr>
-                            <m:e>
-                              <m:r>
-                                <a:rPr lang="en-US" b="0" i="1">
-                                  <a:latin typeface="Cambria Math" panose="02040503050406030204" pitchFamily="18" charset="0"/>
-                                </a:rPr>
-                                <m:t>𝑘</m:t>
-                              </m:r>
-                            </m:e>
-                          </m:d>
-                          <m:r>
-                            <a:rPr lang="en-US" b="0" i="1" smtClean="0">
-                              <a:latin typeface="Cambria Math" panose="02040503050406030204" pitchFamily="18" charset="0"/>
-                            </a:rPr>
-                            <m:t>=</m:t>
-                          </m:r>
-                          <m:r>
-                            <a:rPr lang="en-US" b="0" i="1" smtClean="0">
-                              <a:latin typeface="Cambria Math" panose="02040503050406030204" pitchFamily="18" charset="0"/>
-                            </a:rPr>
-                            <m:t>𝑖</m:t>
-                          </m:r>
-                        </m:e>
-                      </m:d>
-                      <m:r>
-                        <a:rPr lang="en-US" b="0" i="1" smtClean="0">
-                          <a:latin typeface="Cambria Math" panose="02040503050406030204" pitchFamily="18" charset="0"/>
-                        </a:rPr>
-                        <m:t>=</m:t>
-                      </m:r>
-                      <m:f>
-                        <m:fPr>
-                          <m:ctrlPr>
-                            <a:rPr lang="en-US" b="0" i="1" smtClean="0">
-                              <a:latin typeface="Cambria Math" panose="02040503050406030204" pitchFamily="18" charset="0"/>
-                            </a:rPr>
-                          </m:ctrlPr>
-                        </m:fPr>
-                        <m:num>
-                          <m:r>
-                            <a:rPr lang="en-US" b="0" i="1" smtClean="0">
-                              <a:latin typeface="Cambria Math" panose="02040503050406030204" pitchFamily="18" charset="0"/>
-                            </a:rPr>
-                            <m:t>1</m:t>
-                          </m:r>
-                        </m:num>
-                        <m:den>
-                          <m:r>
-                            <a:rPr lang="en-US" b="0" i="1" smtClean="0">
-                              <a:latin typeface="Cambria Math" panose="02040503050406030204" pitchFamily="18" charset="0"/>
-                            </a:rPr>
-                            <m:t>𝑚</m:t>
-                          </m:r>
-                        </m:den>
-                      </m:f>
-                    </m:oMath>
-                  </m:oMathPara>
-                </a14:m>
-                <a:endParaRPr lang="en-US" dirty="0"/>
-              </a:p>
-              <a:p>
-                <a:pPr lvl="1"/>
-                <a:r>
-                  <a:rPr lang="en-US" b="1" dirty="0"/>
-                  <a:t>Lumpy hash values </a:t>
-                </a:r>
-                <a:r>
-                  <a:rPr lang="en-US" dirty="0"/>
-                  <a:t>lead to increased </a:t>
-                </a:r>
-                <a:r>
-                  <a:rPr lang="en-US" b="1" dirty="0"/>
-                  <a:t>hash collisions </a:t>
-                </a:r>
-              </a:p>
-              <a:p>
-                <a:pPr lvl="1"/>
-                <a:r>
-                  <a:rPr lang="en-US" dirty="0"/>
-                  <a:t>Can verify with </a:t>
-                </a:r>
-                <a14:m>
-                  <m:oMath xmlns:m="http://schemas.openxmlformats.org/officeDocument/2006/math">
-                    <m:sSup>
-                      <m:sSupPr>
-                        <m:ctrlPr>
-                          <a:rPr lang="en-US" i="1">
-                            <a:latin typeface="Cambria Math" panose="02040503050406030204" pitchFamily="18" charset="0"/>
-                          </a:rPr>
-                        </m:ctrlPr>
-                      </m:sSupPr>
-                      <m:e>
-                        <m:r>
-                          <a:rPr lang="en-US" i="1">
-                            <a:latin typeface="Cambria Math" panose="02040503050406030204" pitchFamily="18" charset="0"/>
-                            <a:ea typeface="Cambria Math" panose="02040503050406030204" pitchFamily="18" charset="0"/>
-                          </a:rPr>
-                          <m:t>𝜒</m:t>
-                        </m:r>
-                      </m:e>
-                      <m:sup>
-                        <m:r>
-                          <a:rPr lang="en-US" i="1">
-                            <a:latin typeface="Cambria Math" panose="02040503050406030204" pitchFamily="18" charset="0"/>
-                          </a:rPr>
-                          <m:t>2</m:t>
-                        </m:r>
-                      </m:sup>
-                    </m:sSup>
-                  </m:oMath>
-                </a14:m>
-                <a:r>
-                  <a:rPr lang="en-US" dirty="0"/>
-                  <a:t> test</a:t>
-                </a:r>
-              </a:p>
-              <a:p>
-                <a:pPr marL="514350" indent="-514350">
-                  <a:buFont typeface="+mj-lt"/>
-                  <a:buAutoNum type="arabicPeriod"/>
-                </a:pPr>
-                <a:r>
-                  <a:rPr lang="en-US" dirty="0"/>
-                  <a:t>Resolution method for inevitable hash collisions</a:t>
-                </a:r>
-              </a:p>
-              <a:p>
-                <a:pPr lvl="1"/>
-                <a:r>
-                  <a:rPr lang="en-US" dirty="0"/>
-                  <a:t>Probability of collision increases as table fills </a:t>
-                </a:r>
-              </a:p>
-            </p:txBody>
-          </p:sp>
-        </mc:Choice>
-        <mc:Fallback xmlns="">
-          <p:sp>
-            <p:nvSpPr>
-              <p:cNvPr id="3" name="Content Placeholder 2">
-                <a:extLst>
-                  <a:ext uri="{FF2B5EF4-FFF2-40B4-BE49-F238E27FC236}">
-                    <a16:creationId xmlns:a16="http://schemas.microsoft.com/office/drawing/2014/main" id="{258E6AF3-7615-4BD1-878E-A94C93E98F90}"/>
-                  </a:ext>
-                </a:extLst>
-              </p:cNvPr>
-              <p:cNvSpPr>
-                <a:spLocks noGrp="1" noRot="1" noChangeAspect="1" noMove="1" noResize="1" noEditPoints="1" noAdjustHandles="1" noChangeArrowheads="1" noChangeShapeType="1" noTextEdit="1"/>
-              </p:cNvSpPr>
-              <p:nvPr>
-                <p:ph idx="1"/>
-              </p:nvPr>
-            </p:nvSpPr>
-            <p:spPr>
-              <a:xfrm>
-                <a:off x="838200" y="1123406"/>
-                <a:ext cx="10515600" cy="5470724"/>
-              </a:xfrm>
-              <a:blipFill>
-                <a:blip r:embed="rId2"/>
-                <a:stretch>
-                  <a:fillRect l="-1217" t="-1782"/>
-                </a:stretch>
-              </a:blipFill>
-            </p:spPr>
-            <p:txBody>
-              <a:bodyPr/>
-              <a:lstStyle/>
-              <a:p>
-                <a:r>
-                  <a:rPr lang="en-US">
-                    <a:noFill/>
-                  </a:rPr>
-                  <a:t> </a:t>
-                </a:r>
-              </a:p>
-            </p:txBody>
-          </p:sp>
-        </mc:Fallback>
-      </mc:AlternateContent>
-      <p:sp>
-        <p:nvSpPr>
-          <p:cNvPr id="6" name="Title 1">
-            <a:extLst>
-              <a:ext uri="{FF2B5EF4-FFF2-40B4-BE49-F238E27FC236}">
-                <a16:creationId xmlns:a16="http://schemas.microsoft.com/office/drawing/2014/main" id="{CD29F70F-B868-451B-A65D-8721F4C7A2D9}"/>
-              </a:ext>
-            </a:extLst>
-          </p:cNvPr>
-          <p:cNvSpPr txBox="1">
-            <a:spLocks/>
-          </p:cNvSpPr>
-          <p:nvPr/>
-        </p:nvSpPr>
-        <p:spPr>
-          <a:xfrm>
-            <a:off x="838200" y="-635"/>
-            <a:ext cx="10515600" cy="1325563"/>
-          </a:xfrm>
-          <a:prstGeom prst="rect">
-            <a:avLst/>
-          </a:prstGeom>
-        </p:spPr>
-        <p:txBody>
-          <a:bodyPr vert="horz" lIns="91440" tIns="45720" rIns="91440" bIns="45720" rtlCol="0" anchor="ctr">
-            <a:normAutofit/>
-          </a:bodyPr>
-          <a:lstStyle>
-            <a:lvl1pPr algn="l" defTabSz="914400" rtl="0" eaLnBrk="1" latinLnBrk="0" hangingPunct="1">
-              <a:lnSpc>
-                <a:spcPct val="90000"/>
-              </a:lnSpc>
-              <a:spcBef>
-                <a:spcPct val="0"/>
-              </a:spcBef>
-              <a:buNone/>
-              <a:defRPr sz="4400" kern="1200">
-                <a:solidFill>
-                  <a:schemeClr val="tx1"/>
-                </a:solidFill>
-                <a:latin typeface="+mj-lt"/>
-                <a:ea typeface="+mj-ea"/>
-                <a:cs typeface="+mj-cs"/>
-              </a:defRPr>
-            </a:lvl1pPr>
-          </a:lstStyle>
-          <a:p>
-            <a:r>
-              <a:rPr lang="en-US" dirty="0">
-                <a:latin typeface="+mn-lt"/>
-              </a:rPr>
-              <a:t>Introduction to Hashing</a:t>
-            </a:r>
-          </a:p>
-        </p:txBody>
-      </p:sp>
-    </p:spTree>
-    <p:extLst>
-      <p:ext uri="{BB962C8B-B14F-4D97-AF65-F5344CB8AC3E}">
-        <p14:creationId xmlns:p14="http://schemas.microsoft.com/office/powerpoint/2010/main" val="302899262"/>
-      </p:ext>
-    </p:extLst>
-  </p:cSld>
-  <p:clrMapOvr>
-    <a:masterClrMapping/>
-  </p:clrMapOvr>
-  <p:timing>
-    <p:tnLst>
-      <p:par>
-        <p:cTn id="1" dur="indefinite" restart="never" nodeType="tmRoot">
-          <p:childTnLst>
-            <p:seq concurrent="1" nextAc="seek">
-              <p:cTn id="2" dur="indefinite" nodeType="mainSeq">
-                <p:childTnLst>
-                  <p:par>
-                    <p:cTn id="3" fill="hold">
-                      <p:stCondLst>
-                        <p:cond delay="indefinite"/>
-                      </p:stCondLst>
-                      <p:childTnLst>
-                        <p:par>
-                          <p:cTn id="4" fill="hold">
-                            <p:stCondLst>
-                              <p:cond delay="0"/>
-                            </p:stCondLst>
-                            <p:childTnLst>
-                              <p:par>
-                                <p:cTn id="5" presetID="1" presetClass="entr" presetSubtype="0" fill="hold" nodeType="clickEffect">
-                                  <p:stCondLst>
-                                    <p:cond delay="0"/>
-                                  </p:stCondLst>
-                                  <p:childTnLst>
-                                    <p:set>
-                                      <p:cBhvr>
-                                        <p:cTn id="6" dur="1" fill="hold">
-                                          <p:stCondLst>
-                                            <p:cond delay="0"/>
-                                          </p:stCondLst>
-                                        </p:cTn>
-                                        <p:tgtEl>
-                                          <p:spTgt spid="3">
-                                            <p:txEl>
-                                              <p:pRg st="1" end="1"/>
-                                            </p:txEl>
-                                          </p:spTgt>
-                                        </p:tgtEl>
-                                        <p:attrNameLst>
-                                          <p:attrName>style.visibility</p:attrName>
-                                        </p:attrNameLst>
-                                      </p:cBhvr>
-                                      <p:to>
-                                        <p:strVal val="visible"/>
-                                      </p:to>
-                                    </p:set>
-                                  </p:childTnLst>
-                                </p:cTn>
-                              </p:par>
-                              <p:par>
-                                <p:cTn id="7" presetID="1" presetClass="entr" presetSubtype="0" fill="hold" nodeType="withEffect">
-                                  <p:stCondLst>
-                                    <p:cond delay="0"/>
-                                  </p:stCondLst>
-                                  <p:childTnLst>
-                                    <p:set>
-                                      <p:cBhvr>
-                                        <p:cTn id="8" dur="1" fill="hold">
-                                          <p:stCondLst>
-                                            <p:cond delay="0"/>
-                                          </p:stCondLst>
-                                        </p:cTn>
-                                        <p:tgtEl>
-                                          <p:spTgt spid="3">
-                                            <p:txEl>
-                                              <p:pRg st="2" end="2"/>
-                                            </p:txEl>
-                                          </p:spTgt>
-                                        </p:tgtEl>
-                                        <p:attrNameLst>
-                                          <p:attrName>style.visibility</p:attrName>
-                                        </p:attrNameLst>
-                                      </p:cBhvr>
-                                      <p:to>
-                                        <p:strVal val="visible"/>
-                                      </p:to>
-                                    </p:set>
-                                  </p:childTnLst>
-                                </p:cTn>
-                              </p:par>
-                              <p:par>
-                                <p:cTn id="9" presetID="1" presetClass="entr" presetSubtype="0" fill="hold" nodeType="withEffect">
-                                  <p:stCondLst>
-                                    <p:cond delay="0"/>
-                                  </p:stCondLst>
-                                  <p:childTnLst>
-                                    <p:set>
-                                      <p:cBhvr>
-                                        <p:cTn id="10" dur="1" fill="hold">
-                                          <p:stCondLst>
-                                            <p:cond delay="0"/>
-                                          </p:stCondLst>
-                                        </p:cTn>
-                                        <p:tgtEl>
-                                          <p:spTgt spid="3">
-                                            <p:txEl>
-                                              <p:pRg st="3" end="3"/>
-                                            </p:txEl>
-                                          </p:spTgt>
-                                        </p:tgtEl>
-                                        <p:attrNameLst>
-                                          <p:attrName>style.visibility</p:attrName>
-                                        </p:attrNameLst>
-                                      </p:cBhvr>
-                                      <p:to>
-                                        <p:strVal val="visible"/>
-                                      </p:to>
-                                    </p:set>
-                                  </p:childTnLst>
-                                </p:cTn>
-                              </p:par>
-                              <p:par>
-                                <p:cTn id="11" presetID="1" presetClass="entr" presetSubtype="0" fill="hold" nodeType="withEffect">
-                                  <p:stCondLst>
-                                    <p:cond delay="0"/>
-                                  </p:stCondLst>
-                                  <p:childTnLst>
-                                    <p:set>
-                                      <p:cBhvr>
-                                        <p:cTn id="12" dur="1" fill="hold">
-                                          <p:stCondLst>
-                                            <p:cond delay="0"/>
-                                          </p:stCondLst>
-                                        </p:cTn>
-                                        <p:tgtEl>
-                                          <p:spTgt spid="3">
-                                            <p:txEl>
-                                              <p:pRg st="4" end="4"/>
-                                            </p:txEl>
-                                          </p:spTgt>
-                                        </p:tgtEl>
-                                        <p:attrNameLst>
-                                          <p:attrName>style.visibility</p:attrName>
-                                        </p:attrNameLst>
-                                      </p:cBhvr>
-                                      <p:to>
-                                        <p:strVal val="visible"/>
-                                      </p:to>
-                                    </p:set>
-                                  </p:childTnLst>
-                                </p:cTn>
-                              </p:par>
-                              <p:par>
-                                <p:cTn id="13" presetID="1" presetClass="entr" presetSubtype="0" fill="hold" nodeType="withEffect">
-                                  <p:stCondLst>
-                                    <p:cond delay="0"/>
-                                  </p:stCondLst>
-                                  <p:childTnLst>
-                                    <p:set>
-                                      <p:cBhvr>
-                                        <p:cTn id="14" dur="1" fill="hold">
-                                          <p:stCondLst>
-                                            <p:cond delay="0"/>
-                                          </p:stCondLst>
-                                        </p:cTn>
-                                        <p:tgtEl>
-                                          <p:spTgt spid="3">
-                                            <p:txEl>
-                                              <p:pRg st="5" end="5"/>
-                                            </p:txEl>
-                                          </p:spTgt>
-                                        </p:tgtEl>
-                                        <p:attrNameLst>
-                                          <p:attrName>style.visibility</p:attrName>
-                                        </p:attrNameLst>
-                                      </p:cBhvr>
-                                      <p:to>
-                                        <p:strVal val="visible"/>
-                                      </p:to>
-                                    </p:set>
-                                  </p:childTnLst>
-                                </p:cTn>
-                              </p:par>
-                              <p:par>
-                                <p:cTn id="15" presetID="1" presetClass="entr" presetSubtype="0" fill="hold" nodeType="withEffect">
-                                  <p:stCondLst>
-                                    <p:cond delay="0"/>
-                                  </p:stCondLst>
-                                  <p:childTnLst>
-                                    <p:set>
-                                      <p:cBhvr>
-                                        <p:cTn id="16" dur="1" fill="hold">
-                                          <p:stCondLst>
-                                            <p:cond delay="0"/>
-                                          </p:stCondLst>
-                                        </p:cTn>
-                                        <p:tgtEl>
-                                          <p:spTgt spid="3">
-                                            <p:txEl>
-                                              <p:pRg st="6" end="6"/>
-                                            </p:txEl>
-                                          </p:spTgt>
-                                        </p:tgtEl>
-                                        <p:attrNameLst>
-                                          <p:attrName>style.visibility</p:attrName>
-                                        </p:attrNameLst>
-                                      </p:cBhvr>
-                                      <p:to>
-                                        <p:strVal val="visible"/>
-                                      </p:to>
-                                    </p:set>
-                                  </p:childTnLst>
-                                </p:cTn>
-                              </p:par>
-                            </p:childTnLst>
-                          </p:cTn>
-                        </p:par>
-                      </p:childTnLst>
-                    </p:cTn>
-                  </p:par>
-                  <p:par>
-                    <p:cTn id="17" fill="hold">
-                      <p:stCondLst>
-                        <p:cond delay="indefinite"/>
-                      </p:stCondLst>
-                      <p:childTnLst>
-                        <p:par>
-                          <p:cTn id="18" fill="hold">
-                            <p:stCondLst>
-                              <p:cond delay="0"/>
-                            </p:stCondLst>
-                            <p:childTnLst>
-                              <p:par>
-                                <p:cTn id="19" presetID="1" presetClass="entr" presetSubtype="0" fill="hold" nodeType="clickEffect">
-                                  <p:stCondLst>
-                                    <p:cond delay="0"/>
-                                  </p:stCondLst>
-                                  <p:childTnLst>
-                                    <p:set>
-                                      <p:cBhvr>
-                                        <p:cTn id="20" dur="1" fill="hold">
-                                          <p:stCondLst>
-                                            <p:cond delay="0"/>
-                                          </p:stCondLst>
-                                        </p:cTn>
-                                        <p:tgtEl>
-                                          <p:spTgt spid="3">
-                                            <p:txEl>
-                                              <p:pRg st="7" end="7"/>
-                                            </p:txEl>
-                                          </p:spTgt>
-                                        </p:tgtEl>
-                                        <p:attrNameLst>
-                                          <p:attrName>style.visibility</p:attrName>
-                                        </p:attrNameLst>
-                                      </p:cBhvr>
-                                      <p:to>
-                                        <p:strVal val="visible"/>
-                                      </p:to>
-                                    </p:set>
-                                  </p:childTnLst>
-                                </p:cTn>
-                              </p:par>
-                              <p:par>
-                                <p:cTn id="21" presetID="1" presetClass="entr" presetSubtype="0" fill="hold" nodeType="withEffect">
-                                  <p:stCondLst>
-                                    <p:cond delay="0"/>
-                                  </p:stCondLst>
-                                  <p:childTnLst>
-                                    <p:set>
-                                      <p:cBhvr>
-                                        <p:cTn id="22" dur="1" fill="hold">
-                                          <p:stCondLst>
-                                            <p:cond delay="0"/>
-                                          </p:stCondLst>
-                                        </p:cTn>
-                                        <p:tgtEl>
-                                          <p:spTgt spid="3">
-                                            <p:txEl>
-                                              <p:pRg st="8" end="8"/>
-                                            </p:txEl>
-                                          </p:spTgt>
-                                        </p:tgtEl>
-                                        <p:attrNameLst>
-                                          <p:attrName>style.visibility</p:attrName>
-                                        </p:attrNameLst>
-                                      </p:cBhvr>
-                                      <p:to>
-                                        <p:strVal val="visible"/>
-                                      </p:to>
-                                    </p:set>
-                                  </p:childTnLst>
-                                </p:cTn>
-                              </p:par>
-                            </p:childTnLst>
-                          </p:cTn>
-                        </p:par>
-                      </p:childTnLst>
-                    </p:cTn>
-                  </p:par>
-                </p:childTnLst>
-              </p:cTn>
-              <p:prevCondLst>
-                <p:cond evt="onPrev" delay="0">
-                  <p:tgtEl>
-                    <p:sldTgt/>
-                  </p:tgtEl>
-                </p:cond>
-              </p:prevCondLst>
-              <p:nextCondLst>
-                <p:cond evt="onNext" delay="0">
-                  <p:tgtEl>
-                    <p:sldTgt/>
-                  </p:tgtEl>
-                </p:cond>
-              </p:nextCondLst>
-            </p:seq>
-          </p:childTnLst>
-        </p:cTn>
-      </p:par>
-    </p:tnLst>
-  </p:timing>
-</p:sld>
-</file>
-
-<file path=ppt/slides/slide41.xml><?xml version="1.0" encoding="utf-8"?>
-<p:sld xmlns:a="http://schemas.openxmlformats.org/drawingml/2006/main" xmlns:r="http://schemas.openxmlformats.org/officeDocument/2006/relationships" xmlns:p="http://schemas.openxmlformats.org/presentationml/2006/main">
-  <p:cSld>
-    <p:spTree>
-      <p:nvGrpSpPr>
         <p:cNvPr id="1" name="">
           <a:extLst>
             <a:ext uri="{FF2B5EF4-FFF2-40B4-BE49-F238E27FC236}">
-              <a16:creationId xmlns:a16="http://schemas.microsoft.com/office/drawing/2014/main" id="{D2C058C5-0152-2390-D97D-AB6BB0B5CEC4}"/>
-            </a:ext>
-          </a:extLst>
-        </p:cNvPr>
-        <p:cNvGrpSpPr/>
-        <p:nvPr/>
-      </p:nvGrpSpPr>
-      <p:grpSpPr>
-        <a:xfrm>
-          <a:off x="0" y="0"/>
-          <a:ext cx="0" cy="0"/>
-          <a:chOff x="0" y="0"/>
-          <a:chExt cx="0" cy="0"/>
-        </a:xfrm>
-      </p:grpSpPr>
-      <mc:AlternateContent xmlns:mc="http://schemas.openxmlformats.org/markup-compatibility/2006">
-        <mc:Choice xmlns:a14="http://schemas.microsoft.com/office/drawing/2010/main" Requires="a14">
-          <p:sp>
-            <p:nvSpPr>
-              <p:cNvPr id="3" name="Content Placeholder 2">
-                <a:extLst>
-                  <a:ext uri="{FF2B5EF4-FFF2-40B4-BE49-F238E27FC236}">
-                    <a16:creationId xmlns:a16="http://schemas.microsoft.com/office/drawing/2014/main" id="{A578F3F2-F45D-ECCF-E9E9-805FBD91726A}"/>
-                  </a:ext>
-                </a:extLst>
-              </p:cNvPr>
-              <p:cNvSpPr>
-                <a:spLocks noGrp="1"/>
-              </p:cNvSpPr>
-              <p:nvPr>
-                <p:ph idx="1"/>
-              </p:nvPr>
-            </p:nvSpPr>
-            <p:spPr>
-              <a:xfrm>
-                <a:off x="838200" y="1123406"/>
-                <a:ext cx="10515600" cy="5470724"/>
-              </a:xfrm>
-            </p:spPr>
-            <p:txBody>
-              <a:bodyPr>
-                <a:normAutofit/>
-              </a:bodyPr>
-              <a:lstStyle/>
-              <a:p>
-                <a:pPr marL="0" indent="0">
-                  <a:buNone/>
-                </a:pPr>
-                <a:r>
-                  <a:rPr lang="en-US" dirty="0"/>
-                  <a:t>What are the properties of a good hash function?  </a:t>
-                </a:r>
-              </a:p>
-              <a:p>
-                <a:pPr marL="514350" indent="-514350">
-                  <a:buFont typeface="+mj-lt"/>
-                  <a:buAutoNum type="arabicPeriod"/>
-                </a:pPr>
-                <a:r>
-                  <a:rPr lang="en-US" dirty="0"/>
-                  <a:t>For key values, </a:t>
-                </a:r>
-                <a14:m>
-                  <m:oMath xmlns:m="http://schemas.openxmlformats.org/officeDocument/2006/math">
-                    <m:r>
-                      <a:rPr lang="en-US" i="1">
-                        <a:latin typeface="Cambria Math" panose="02040503050406030204" pitchFamily="18" charset="0"/>
-                      </a:rPr>
-                      <m:t>𝐾</m:t>
-                    </m:r>
-                  </m:oMath>
-                </a14:m>
-                <a:r>
-                  <a:rPr lang="en-US" dirty="0"/>
-                  <a:t>, want a </a:t>
-                </a:r>
-                <a:r>
-                  <a:rPr lang="en-US" b="1" dirty="0"/>
-                  <a:t>uniform distribution over </a:t>
-                </a:r>
-                <a14:m>
-                  <m:oMath xmlns:m="http://schemas.openxmlformats.org/officeDocument/2006/math">
-                    <m:r>
-                      <a:rPr lang="en-US" b="1" i="1" smtClean="0">
-                        <a:latin typeface="Cambria Math" panose="02040503050406030204" pitchFamily="18" charset="0"/>
-                      </a:rPr>
-                      <m:t>𝒎</m:t>
-                    </m:r>
-                  </m:oMath>
-                </a14:m>
-                <a:r>
-                  <a:rPr lang="en-US" b="1" dirty="0"/>
-                  <a:t> hash values</a:t>
-                </a:r>
-              </a:p>
-              <a:p>
-                <a:pPr marL="457200" lvl="1" indent="0">
-                  <a:buNone/>
-                </a:pPr>
-                <a14:m>
-                  <m:oMathPara xmlns:m="http://schemas.openxmlformats.org/officeDocument/2006/math">
-                    <m:oMathParaPr>
-                      <m:jc m:val="centerGroup"/>
-                    </m:oMathParaPr>
-                    <m:oMath xmlns:m="http://schemas.openxmlformats.org/officeDocument/2006/math">
-                      <m:r>
-                        <a:rPr lang="en-US" b="1" i="1">
-                          <a:latin typeface="Cambria Math" panose="02040503050406030204" pitchFamily="18" charset="0"/>
-                        </a:rPr>
-                        <m:t>𝒇</m:t>
-                      </m:r>
-                      <m:r>
-                        <a:rPr lang="en-US" b="1" i="1">
-                          <a:latin typeface="Cambria Math" panose="02040503050406030204" pitchFamily="18" charset="0"/>
-                        </a:rPr>
-                        <m:t>(</m:t>
-                      </m:r>
-                      <m:r>
-                        <a:rPr lang="en-US" b="1" i="1">
-                          <a:latin typeface="Cambria Math" panose="02040503050406030204" pitchFamily="18" charset="0"/>
-                        </a:rPr>
-                        <m:t>𝒌</m:t>
-                      </m:r>
-                      <m:r>
-                        <a:rPr lang="en-US" b="1" i="1">
-                          <a:latin typeface="Cambria Math" panose="02040503050406030204" pitchFamily="18" charset="0"/>
-                        </a:rPr>
-                        <m:t>)~</m:t>
-                      </m:r>
-                      <m:r>
-                        <a:rPr lang="en-US" b="1" i="1">
-                          <a:latin typeface="Cambria Math" panose="02040503050406030204" pitchFamily="18" charset="0"/>
-                          <a:ea typeface="Cambria Math" panose="02040503050406030204" pitchFamily="18" charset="0"/>
-                        </a:rPr>
-                        <m:t>𝑼</m:t>
-                      </m:r>
-                      <m:r>
-                        <a:rPr lang="en-US" b="1" i="1">
-                          <a:latin typeface="Cambria Math" panose="02040503050406030204" pitchFamily="18" charset="0"/>
-                          <a:ea typeface="Cambria Math" panose="02040503050406030204" pitchFamily="18" charset="0"/>
-                        </a:rPr>
-                        <m:t>(</m:t>
-                      </m:r>
-                      <m:r>
-                        <a:rPr lang="en-US" b="1" i="1">
-                          <a:latin typeface="Cambria Math" panose="02040503050406030204" pitchFamily="18" charset="0"/>
-                          <a:ea typeface="Cambria Math" panose="02040503050406030204" pitchFamily="18" charset="0"/>
-                        </a:rPr>
-                        <m:t>𝟎</m:t>
-                      </m:r>
-                      <m:r>
-                        <a:rPr lang="en-US" b="1" i="1">
-                          <a:latin typeface="Cambria Math" panose="02040503050406030204" pitchFamily="18" charset="0"/>
-                          <a:ea typeface="Cambria Math" panose="02040503050406030204" pitchFamily="18" charset="0"/>
-                        </a:rPr>
-                        <m:t>,</m:t>
-                      </m:r>
-                      <m:r>
-                        <a:rPr lang="en-US" b="1" i="1" smtClean="0">
-                          <a:latin typeface="Cambria Math" panose="02040503050406030204" pitchFamily="18" charset="0"/>
-                          <a:ea typeface="Cambria Math" panose="02040503050406030204" pitchFamily="18" charset="0"/>
-                        </a:rPr>
-                        <m:t>𝒎</m:t>
-                      </m:r>
-                      <m:r>
-                        <a:rPr lang="en-US" b="1" i="1">
-                          <a:latin typeface="Cambria Math" panose="02040503050406030204" pitchFamily="18" charset="0"/>
-                          <a:ea typeface="Cambria Math" panose="02040503050406030204" pitchFamily="18" charset="0"/>
-                        </a:rPr>
-                        <m:t>)</m:t>
-                      </m:r>
-                    </m:oMath>
-                  </m:oMathPara>
-                </a14:m>
-                <a:endParaRPr lang="en-US" b="1" dirty="0"/>
-              </a:p>
-              <a:p>
-                <a:pPr lvl="1"/>
-                <a:r>
-                  <a:rPr lang="en-US" dirty="0"/>
-                  <a:t>For </a:t>
-                </a:r>
-                <a14:m>
-                  <m:oMath xmlns:m="http://schemas.openxmlformats.org/officeDocument/2006/math">
-                    <m:r>
-                      <a:rPr lang="en-US" b="0" i="1" smtClean="0">
-                        <a:latin typeface="Cambria Math" panose="02040503050406030204" pitchFamily="18" charset="0"/>
-                      </a:rPr>
-                      <m:t>𝑚</m:t>
-                    </m:r>
-                  </m:oMath>
-                </a14:m>
-                <a:r>
-                  <a:rPr lang="en-US" dirty="0"/>
-                  <a:t> length hash table probability of bucket </a:t>
-                </a:r>
-                <a14:m>
-                  <m:oMath xmlns:m="http://schemas.openxmlformats.org/officeDocument/2006/math">
-                    <m:r>
-                      <a:rPr lang="en-US" b="0" i="1" smtClean="0">
-                        <a:latin typeface="Cambria Math" panose="02040503050406030204" pitchFamily="18" charset="0"/>
-                      </a:rPr>
-                      <m:t>𝑖</m:t>
-                    </m:r>
-                  </m:oMath>
-                </a14:m>
-                <a:r>
-                  <a:rPr lang="en-US" dirty="0"/>
-                  <a:t> being occupied is: </a:t>
-                </a:r>
-              </a:p>
-              <a:p>
-                <a:pPr marL="457200" lvl="1" indent="0">
-                  <a:buNone/>
-                </a:pPr>
-                <a14:m>
-                  <m:oMathPara xmlns:m="http://schemas.openxmlformats.org/officeDocument/2006/math">
-                    <m:oMathParaPr>
-                      <m:jc m:val="centerGroup"/>
-                    </m:oMathParaPr>
-                    <m:oMath xmlns:m="http://schemas.openxmlformats.org/officeDocument/2006/math">
-                      <m:r>
-                        <m:rPr>
-                          <m:sty m:val="p"/>
-                        </m:rPr>
-                        <a:rPr lang="en-US" b="0" i="0" smtClean="0">
-                          <a:latin typeface="Cambria Math" panose="02040503050406030204" pitchFamily="18" charset="0"/>
-                        </a:rPr>
-                        <m:t>P</m:t>
-                      </m:r>
-                      <m:d>
-                        <m:dPr>
-                          <m:ctrlPr>
-                            <a:rPr lang="en-US" i="1" smtClean="0">
-                              <a:latin typeface="Cambria Math" panose="02040503050406030204" pitchFamily="18" charset="0"/>
-                            </a:rPr>
-                          </m:ctrlPr>
-                        </m:dPr>
-                        <m:e>
-                          <m:r>
-                            <a:rPr lang="en-US" b="0" i="1">
-                              <a:latin typeface="Cambria Math" panose="02040503050406030204" pitchFamily="18" charset="0"/>
-                            </a:rPr>
-                            <m:t>𝑓</m:t>
-                          </m:r>
-                          <m:d>
-                            <m:dPr>
-                              <m:ctrlPr>
-                                <a:rPr lang="en-US" i="1">
-                                  <a:latin typeface="Cambria Math" panose="02040503050406030204" pitchFamily="18" charset="0"/>
-                                </a:rPr>
-                              </m:ctrlPr>
-                            </m:dPr>
-                            <m:e>
-                              <m:r>
-                                <a:rPr lang="en-US" b="0" i="1">
-                                  <a:latin typeface="Cambria Math" panose="02040503050406030204" pitchFamily="18" charset="0"/>
-                                </a:rPr>
-                                <m:t>𝑘</m:t>
-                              </m:r>
-                            </m:e>
-                          </m:d>
-                          <m:r>
-                            <a:rPr lang="en-US" b="0" i="1" smtClean="0">
-                              <a:latin typeface="Cambria Math" panose="02040503050406030204" pitchFamily="18" charset="0"/>
-                            </a:rPr>
-                            <m:t>=</m:t>
-                          </m:r>
-                          <m:r>
-                            <a:rPr lang="en-US" b="0" i="1" smtClean="0">
-                              <a:latin typeface="Cambria Math" panose="02040503050406030204" pitchFamily="18" charset="0"/>
-                            </a:rPr>
-                            <m:t>𝑖</m:t>
-                          </m:r>
-                        </m:e>
-                      </m:d>
-                      <m:r>
-                        <a:rPr lang="en-US" b="0" i="1" smtClean="0">
-                          <a:latin typeface="Cambria Math" panose="02040503050406030204" pitchFamily="18" charset="0"/>
-                        </a:rPr>
-                        <m:t>=</m:t>
-                      </m:r>
-                      <m:f>
-                        <m:fPr>
-                          <m:ctrlPr>
-                            <a:rPr lang="en-US" b="0" i="1" smtClean="0">
-                              <a:latin typeface="Cambria Math" panose="02040503050406030204" pitchFamily="18" charset="0"/>
-                            </a:rPr>
-                          </m:ctrlPr>
-                        </m:fPr>
-                        <m:num>
-                          <m:r>
-                            <a:rPr lang="en-US" b="0" i="1" smtClean="0">
-                              <a:latin typeface="Cambria Math" panose="02040503050406030204" pitchFamily="18" charset="0"/>
-                            </a:rPr>
-                            <m:t>1</m:t>
-                          </m:r>
-                        </m:num>
-                        <m:den>
-                          <m:r>
-                            <a:rPr lang="en-US" b="0" i="1" smtClean="0">
-                              <a:latin typeface="Cambria Math" panose="02040503050406030204" pitchFamily="18" charset="0"/>
-                            </a:rPr>
-                            <m:t>𝑚</m:t>
-                          </m:r>
-                        </m:den>
-                      </m:f>
-                    </m:oMath>
-                  </m:oMathPara>
-                </a14:m>
-                <a:endParaRPr lang="en-US" dirty="0"/>
-              </a:p>
-              <a:p>
-                <a:pPr lvl="1"/>
-                <a:r>
-                  <a:rPr lang="en-US" b="1" dirty="0"/>
-                  <a:t>Lumpy hash values </a:t>
-                </a:r>
-                <a:r>
-                  <a:rPr lang="en-US" dirty="0"/>
-                  <a:t>lead to increased </a:t>
-                </a:r>
-                <a:r>
-                  <a:rPr lang="en-US" b="1" dirty="0"/>
-                  <a:t>hash collisions </a:t>
-                </a:r>
-              </a:p>
-              <a:p>
-                <a:pPr lvl="1"/>
-                <a:r>
-                  <a:rPr lang="en-US" dirty="0"/>
-                  <a:t>Can verify with </a:t>
-                </a:r>
-                <a14:m>
-                  <m:oMath xmlns:m="http://schemas.openxmlformats.org/officeDocument/2006/math">
-                    <m:sSup>
-                      <m:sSupPr>
-                        <m:ctrlPr>
-                          <a:rPr lang="en-US" i="1">
-                            <a:latin typeface="Cambria Math" panose="02040503050406030204" pitchFamily="18" charset="0"/>
-                          </a:rPr>
-                        </m:ctrlPr>
-                      </m:sSupPr>
-                      <m:e>
-                        <m:r>
-                          <a:rPr lang="en-US" i="1">
-                            <a:latin typeface="Cambria Math" panose="02040503050406030204" pitchFamily="18" charset="0"/>
-                            <a:ea typeface="Cambria Math" panose="02040503050406030204" pitchFamily="18" charset="0"/>
-                          </a:rPr>
-                          <m:t>𝜒</m:t>
-                        </m:r>
-                      </m:e>
-                      <m:sup>
-                        <m:r>
-                          <a:rPr lang="en-US" i="1">
-                            <a:latin typeface="Cambria Math" panose="02040503050406030204" pitchFamily="18" charset="0"/>
-                          </a:rPr>
-                          <m:t>2</m:t>
-                        </m:r>
-                      </m:sup>
-                    </m:sSup>
-                  </m:oMath>
-                </a14:m>
-                <a:r>
-                  <a:rPr lang="en-US" dirty="0"/>
-                  <a:t> test</a:t>
-                </a:r>
-              </a:p>
-              <a:p>
-                <a:pPr marL="514350" indent="-514350">
-                  <a:buFont typeface="+mj-lt"/>
-                  <a:buAutoNum type="arabicPeriod"/>
-                </a:pPr>
-                <a:r>
-                  <a:rPr lang="en-US" dirty="0"/>
-                  <a:t>For a uniformly distributed hash function the probability of a hash collision with </a:t>
-                </a:r>
-                <a14:m>
-                  <m:oMath xmlns:m="http://schemas.openxmlformats.org/officeDocument/2006/math">
-                    <m:r>
-                      <a:rPr lang="en-US" i="1">
-                        <a:latin typeface="Cambria Math" panose="02040503050406030204" pitchFamily="18" charset="0"/>
-                        <a:ea typeface="Cambria Math" panose="02040503050406030204" pitchFamily="18" charset="0"/>
-                      </a:rPr>
-                      <m:t>𝑛</m:t>
-                    </m:r>
-                  </m:oMath>
-                </a14:m>
-                <a:r>
-                  <a:rPr lang="en-US" dirty="0"/>
-                  <a:t> elements filled in the table is    </a:t>
-                </a:r>
-              </a:p>
-              <a:p>
-                <a:pPr marL="0" indent="0">
-                  <a:buNone/>
-                </a:pPr>
-                <a14:m>
-                  <m:oMathPara xmlns:m="http://schemas.openxmlformats.org/officeDocument/2006/math">
-                    <m:oMathParaPr>
-                      <m:jc m:val="centerGroup"/>
-                    </m:oMathParaPr>
-                    <m:oMath xmlns:m="http://schemas.openxmlformats.org/officeDocument/2006/math">
-                      <m:r>
-                        <a:rPr lang="en-US" b="0" i="1" smtClean="0">
-                          <a:latin typeface="Cambria Math" panose="02040503050406030204" pitchFamily="18" charset="0"/>
-                        </a:rPr>
-                        <m:t>𝑃</m:t>
-                      </m:r>
-                      <m:d>
-                        <m:dPr>
-                          <m:ctrlPr>
-                            <a:rPr lang="en-US" b="0" i="1" smtClean="0">
-                              <a:latin typeface="Cambria Math" panose="02040503050406030204" pitchFamily="18" charset="0"/>
-                            </a:rPr>
-                          </m:ctrlPr>
-                        </m:dPr>
-                        <m:e>
-                          <m:r>
-                            <a:rPr lang="en-US" b="0" i="1" smtClean="0">
-                              <a:latin typeface="Cambria Math" panose="02040503050406030204" pitchFamily="18" charset="0"/>
-                            </a:rPr>
-                            <m:t>𝑚</m:t>
-                          </m:r>
-                          <m:r>
-                            <a:rPr lang="en-US" b="0" i="1" smtClean="0">
-                              <a:latin typeface="Cambria Math" panose="02040503050406030204" pitchFamily="18" charset="0"/>
-                            </a:rPr>
-                            <m:t>,</m:t>
-                          </m:r>
-                          <m:r>
-                            <a:rPr lang="en-US" b="0" i="1" smtClean="0">
-                              <a:latin typeface="Cambria Math" panose="02040503050406030204" pitchFamily="18" charset="0"/>
-                            </a:rPr>
-                            <m:t>𝑛</m:t>
-                          </m:r>
-                        </m:e>
-                      </m:d>
-                      <m:r>
-                        <a:rPr lang="en-US" i="1">
-                          <a:latin typeface="Cambria Math" panose="02040503050406030204" pitchFamily="18" charset="0"/>
-                          <a:ea typeface="Cambria Math" panose="02040503050406030204" pitchFamily="18" charset="0"/>
-                        </a:rPr>
-                        <m:t>≈</m:t>
-                      </m:r>
-                      <m:r>
-                        <a:rPr lang="en-US" b="0" i="1" smtClean="0">
-                          <a:latin typeface="Cambria Math" panose="02040503050406030204" pitchFamily="18" charset="0"/>
-                          <a:ea typeface="Cambria Math" panose="02040503050406030204" pitchFamily="18" charset="0"/>
-                        </a:rPr>
-                        <m:t>1−</m:t>
-                      </m:r>
-                      <m:r>
-                        <a:rPr lang="en-US" b="0" i="1" smtClean="0">
-                          <a:latin typeface="Cambria Math" panose="02040503050406030204" pitchFamily="18" charset="0"/>
-                          <a:ea typeface="Cambria Math" panose="02040503050406030204" pitchFamily="18" charset="0"/>
-                        </a:rPr>
-                        <m:t>𝑒𝑥𝑝</m:t>
-                      </m:r>
-                      <m:d>
-                        <m:dPr>
-                          <m:begChr m:val="["/>
-                          <m:endChr m:val="]"/>
-                          <m:ctrlPr>
-                            <a:rPr lang="en-US" b="0" i="1" smtClean="0">
-                              <a:latin typeface="Cambria Math" panose="02040503050406030204" pitchFamily="18" charset="0"/>
-                              <a:ea typeface="Cambria Math" panose="02040503050406030204" pitchFamily="18" charset="0"/>
-                            </a:rPr>
-                          </m:ctrlPr>
-                        </m:dPr>
-                        <m:e>
-                          <m:r>
-                            <a:rPr lang="en-US" b="0" i="1" smtClean="0">
-                              <a:latin typeface="Cambria Math" panose="02040503050406030204" pitchFamily="18" charset="0"/>
-                              <a:ea typeface="Cambria Math" panose="02040503050406030204" pitchFamily="18" charset="0"/>
-                            </a:rPr>
-                            <m:t>−</m:t>
-                          </m:r>
-                          <m:f>
-                            <m:fPr>
-                              <m:ctrlPr>
-                                <a:rPr lang="en-US" b="0" i="1" smtClean="0">
-                                  <a:latin typeface="Cambria Math" panose="02040503050406030204" pitchFamily="18" charset="0"/>
-                                  <a:ea typeface="Cambria Math" panose="02040503050406030204" pitchFamily="18" charset="0"/>
-                                </a:rPr>
-                              </m:ctrlPr>
-                            </m:fPr>
-                            <m:num>
-                              <m:r>
-                                <a:rPr lang="en-US" b="0" i="1" smtClean="0">
-                                  <a:latin typeface="Cambria Math" panose="02040503050406030204" pitchFamily="18" charset="0"/>
-                                  <a:ea typeface="Cambria Math" panose="02040503050406030204" pitchFamily="18" charset="0"/>
-                                </a:rPr>
-                                <m:t>𝑚</m:t>
-                              </m:r>
-                              <m:d>
-                                <m:dPr>
-                                  <m:ctrlPr>
-                                    <a:rPr lang="en-US" b="0" i="1" smtClean="0">
-                                      <a:latin typeface="Cambria Math" panose="02040503050406030204" pitchFamily="18" charset="0"/>
-                                      <a:ea typeface="Cambria Math" panose="02040503050406030204" pitchFamily="18" charset="0"/>
-                                    </a:rPr>
-                                  </m:ctrlPr>
-                                </m:dPr>
-                                <m:e>
-                                  <m:r>
-                                    <a:rPr lang="en-US" b="0" i="1" smtClean="0">
-                                      <a:latin typeface="Cambria Math" panose="02040503050406030204" pitchFamily="18" charset="0"/>
-                                      <a:ea typeface="Cambria Math" panose="02040503050406030204" pitchFamily="18" charset="0"/>
-                                    </a:rPr>
-                                    <m:t>𝑛</m:t>
-                                  </m:r>
-                                  <m:r>
-                                    <a:rPr lang="en-US" b="0" i="1" smtClean="0">
-                                      <a:latin typeface="Cambria Math" panose="02040503050406030204" pitchFamily="18" charset="0"/>
-                                      <a:ea typeface="Cambria Math" panose="02040503050406030204" pitchFamily="18" charset="0"/>
-                                    </a:rPr>
-                                    <m:t>−1</m:t>
-                                  </m:r>
-                                </m:e>
-                              </m:d>
-                            </m:num>
-                            <m:den>
-                              <m:r>
-                                <a:rPr lang="en-US" b="0" i="1" smtClean="0">
-                                  <a:latin typeface="Cambria Math" panose="02040503050406030204" pitchFamily="18" charset="0"/>
-                                  <a:ea typeface="Cambria Math" panose="02040503050406030204" pitchFamily="18" charset="0"/>
-                                </a:rPr>
-                                <m:t>2</m:t>
-                              </m:r>
-                              <m:r>
-                                <a:rPr lang="en-US" b="0" i="1" smtClean="0">
-                                  <a:latin typeface="Cambria Math" panose="02040503050406030204" pitchFamily="18" charset="0"/>
-                                  <a:ea typeface="Cambria Math" panose="02040503050406030204" pitchFamily="18" charset="0"/>
-                                </a:rPr>
-                                <m:t>𝑚</m:t>
-                              </m:r>
-                            </m:den>
-                          </m:f>
-                        </m:e>
-                      </m:d>
-                    </m:oMath>
-                  </m:oMathPara>
-                </a14:m>
-                <a:endParaRPr lang="en-US" dirty="0"/>
-              </a:p>
-            </p:txBody>
-          </p:sp>
-        </mc:Choice>
-        <mc:Fallback>
-          <p:sp>
-            <p:nvSpPr>
-              <p:cNvPr id="3" name="Content Placeholder 2">
-                <a:extLst>
-                  <a:ext uri="{FF2B5EF4-FFF2-40B4-BE49-F238E27FC236}">
-                    <a16:creationId xmlns:a16="http://schemas.microsoft.com/office/drawing/2014/main" id="{A578F3F2-F45D-ECCF-E9E9-805FBD91726A}"/>
-                  </a:ext>
-                </a:extLst>
-              </p:cNvPr>
-              <p:cNvSpPr>
-                <a:spLocks noGrp="1" noRot="1" noChangeAspect="1" noMove="1" noResize="1" noEditPoints="1" noAdjustHandles="1" noChangeArrowheads="1" noChangeShapeType="1" noTextEdit="1"/>
-              </p:cNvSpPr>
-              <p:nvPr>
-                <p:ph idx="1"/>
-              </p:nvPr>
-            </p:nvSpPr>
-            <p:spPr>
-              <a:xfrm>
-                <a:off x="838200" y="1123406"/>
-                <a:ext cx="10515600" cy="5470724"/>
-              </a:xfrm>
-              <a:blipFill>
-                <a:blip r:embed="rId2"/>
-                <a:stretch>
-                  <a:fillRect l="-1217" t="-1782"/>
-                </a:stretch>
-              </a:blipFill>
-            </p:spPr>
-            <p:txBody>
-              <a:bodyPr/>
-              <a:lstStyle/>
-              <a:p>
-                <a:r>
-                  <a:rPr lang="en-US">
-                    <a:noFill/>
-                  </a:rPr>
-                  <a:t> </a:t>
-                </a:r>
-              </a:p>
-            </p:txBody>
-          </p:sp>
-        </mc:Fallback>
-      </mc:AlternateContent>
-      <p:sp>
-        <p:nvSpPr>
-          <p:cNvPr id="6" name="Title 1">
-            <a:extLst>
-              <a:ext uri="{FF2B5EF4-FFF2-40B4-BE49-F238E27FC236}">
-                <a16:creationId xmlns:a16="http://schemas.microsoft.com/office/drawing/2014/main" id="{7E988630-3E71-AF2E-A2B3-DE1DF5E9439C}"/>
-              </a:ext>
-            </a:extLst>
-          </p:cNvPr>
-          <p:cNvSpPr txBox="1">
-            <a:spLocks/>
-          </p:cNvSpPr>
-          <p:nvPr/>
-        </p:nvSpPr>
-        <p:spPr>
-          <a:xfrm>
-            <a:off x="838200" y="-635"/>
-            <a:ext cx="10515600" cy="1325563"/>
-          </a:xfrm>
-          <a:prstGeom prst="rect">
-            <a:avLst/>
-          </a:prstGeom>
-        </p:spPr>
-        <p:txBody>
-          <a:bodyPr vert="horz" lIns="91440" tIns="45720" rIns="91440" bIns="45720" rtlCol="0" anchor="ctr">
-            <a:normAutofit/>
-          </a:bodyPr>
-          <a:lstStyle>
-            <a:lvl1pPr algn="l" defTabSz="914400" rtl="0" eaLnBrk="1" latinLnBrk="0" hangingPunct="1">
-              <a:lnSpc>
-                <a:spcPct val="90000"/>
-              </a:lnSpc>
-              <a:spcBef>
-                <a:spcPct val="0"/>
-              </a:spcBef>
-              <a:buNone/>
-              <a:defRPr sz="4400" kern="1200">
-                <a:solidFill>
-                  <a:schemeClr val="tx1"/>
-                </a:solidFill>
-                <a:latin typeface="+mj-lt"/>
-                <a:ea typeface="+mj-ea"/>
-                <a:cs typeface="+mj-cs"/>
-              </a:defRPr>
-            </a:lvl1pPr>
-          </a:lstStyle>
-          <a:p>
-            <a:r>
-              <a:rPr lang="en-US" dirty="0">
-                <a:latin typeface="+mn-lt"/>
-              </a:rPr>
-              <a:t>Introduction to Hashing</a:t>
-            </a:r>
-          </a:p>
-        </p:txBody>
-      </p:sp>
-    </p:spTree>
-    <p:extLst>
-      <p:ext uri="{BB962C8B-B14F-4D97-AF65-F5344CB8AC3E}">
-        <p14:creationId xmlns:p14="http://schemas.microsoft.com/office/powerpoint/2010/main" val="3241084479"/>
-      </p:ext>
-    </p:extLst>
-  </p:cSld>
-  <p:clrMapOvr>
-    <a:masterClrMapping/>
-  </p:clrMapOvr>
-</p:sld>
-</file>
-
-<file path=ppt/slides/slide42.xml><?xml version="1.0" encoding="utf-8"?>
-<p:sld xmlns:a="http://schemas.openxmlformats.org/drawingml/2006/main" xmlns:r="http://schemas.openxmlformats.org/officeDocument/2006/relationships" xmlns:p="http://schemas.openxmlformats.org/presentationml/2006/main">
-  <p:cSld>
-    <p:spTree>
-      <p:nvGrpSpPr>
-        <p:cNvPr id="1" name="">
-          <a:extLst>
-            <a:ext uri="{FF2B5EF4-FFF2-40B4-BE49-F238E27FC236}">
-              <a16:creationId xmlns:a16="http://schemas.microsoft.com/office/drawing/2014/main" id="{BC89F83D-5DFC-29AF-B4FF-9D0545A0FCDA}"/>
-            </a:ext>
-          </a:extLst>
-        </p:cNvPr>
-        <p:cNvGrpSpPr/>
-        <p:nvPr/>
-      </p:nvGrpSpPr>
-      <p:grpSpPr>
-        <a:xfrm>
-          <a:off x="0" y="0"/>
-          <a:ext cx="0" cy="0"/>
-          <a:chOff x="0" y="0"/>
-          <a:chExt cx="0" cy="0"/>
-        </a:xfrm>
-      </p:grpSpPr>
-      <mc:AlternateContent xmlns:mc="http://schemas.openxmlformats.org/markup-compatibility/2006">
-        <mc:Choice xmlns:a14="http://schemas.microsoft.com/office/drawing/2010/main" Requires="a14">
-          <p:sp>
-            <p:nvSpPr>
-              <p:cNvPr id="3" name="Content Placeholder 2">
-                <a:extLst>
-                  <a:ext uri="{FF2B5EF4-FFF2-40B4-BE49-F238E27FC236}">
-                    <a16:creationId xmlns:a16="http://schemas.microsoft.com/office/drawing/2014/main" id="{62709B48-58A5-623B-9852-30181B5EE4F8}"/>
-                  </a:ext>
-                </a:extLst>
-              </p:cNvPr>
-              <p:cNvSpPr>
-                <a:spLocks noGrp="1"/>
-              </p:cNvSpPr>
-              <p:nvPr>
-                <p:ph idx="1"/>
-              </p:nvPr>
-            </p:nvSpPr>
-            <p:spPr>
-              <a:xfrm>
-                <a:off x="838200" y="1123406"/>
-                <a:ext cx="10515600" cy="5470724"/>
-              </a:xfrm>
-            </p:spPr>
-            <p:txBody>
-              <a:bodyPr>
-                <a:normAutofit/>
-              </a:bodyPr>
-              <a:lstStyle/>
-              <a:p>
-                <a:pPr marL="0" indent="0">
-                  <a:buNone/>
-                </a:pPr>
-                <a:r>
-                  <a:rPr lang="en-US" dirty="0"/>
-                  <a:t>What are the properties of a good hash function?  </a:t>
-                </a:r>
-              </a:p>
-              <a:p>
-                <a:pPr marL="514350" indent="-514350">
-                  <a:buFont typeface="+mj-lt"/>
-                  <a:buAutoNum type="arabicPeriod" startAt="2"/>
-                </a:pPr>
-                <a:r>
-                  <a:rPr lang="en-US" dirty="0"/>
-                  <a:t>For a uniformly distributed hash function the probability of a hash collision with </a:t>
-                </a:r>
-                <a14:m>
-                  <m:oMath xmlns:m="http://schemas.openxmlformats.org/officeDocument/2006/math">
-                    <m:r>
-                      <a:rPr lang="en-US" i="1">
-                        <a:latin typeface="Cambria Math" panose="02040503050406030204" pitchFamily="18" charset="0"/>
-                        <a:ea typeface="Cambria Math" panose="02040503050406030204" pitchFamily="18" charset="0"/>
-                      </a:rPr>
-                      <m:t>𝑛</m:t>
-                    </m:r>
-                  </m:oMath>
-                </a14:m>
-                <a:r>
-                  <a:rPr lang="en-US" dirty="0"/>
-                  <a:t> elements filled in the table is    </a:t>
-                </a:r>
-              </a:p>
-              <a:p>
-                <a:pPr marL="0" indent="0">
-                  <a:buNone/>
-                </a:pPr>
-                <a14:m>
-                  <m:oMathPara xmlns:m="http://schemas.openxmlformats.org/officeDocument/2006/math">
-                    <m:oMathParaPr>
-                      <m:jc m:val="centerGroup"/>
-                    </m:oMathParaPr>
-                    <m:oMath xmlns:m="http://schemas.openxmlformats.org/officeDocument/2006/math">
-                      <m:r>
-                        <a:rPr lang="en-US" b="0" i="1" smtClean="0">
-                          <a:latin typeface="Cambria Math" panose="02040503050406030204" pitchFamily="18" charset="0"/>
-                        </a:rPr>
-                        <m:t>𝑃</m:t>
-                      </m:r>
-                      <m:d>
-                        <m:dPr>
-                          <m:ctrlPr>
-                            <a:rPr lang="en-US" b="0" i="1" smtClean="0">
-                              <a:latin typeface="Cambria Math" panose="02040503050406030204" pitchFamily="18" charset="0"/>
-                            </a:rPr>
-                          </m:ctrlPr>
-                        </m:dPr>
-                        <m:e>
-                          <m:r>
-                            <a:rPr lang="en-US" b="0" i="1" smtClean="0">
-                              <a:latin typeface="Cambria Math" panose="02040503050406030204" pitchFamily="18" charset="0"/>
-                            </a:rPr>
-                            <m:t>𝑚</m:t>
-                          </m:r>
-                          <m:r>
-                            <a:rPr lang="en-US" b="0" i="1" smtClean="0">
-                              <a:latin typeface="Cambria Math" panose="02040503050406030204" pitchFamily="18" charset="0"/>
-                            </a:rPr>
-                            <m:t>,</m:t>
-                          </m:r>
-                          <m:r>
-                            <a:rPr lang="en-US" b="0" i="1" smtClean="0">
-                              <a:latin typeface="Cambria Math" panose="02040503050406030204" pitchFamily="18" charset="0"/>
-                            </a:rPr>
-                            <m:t>𝑛</m:t>
-                          </m:r>
-                        </m:e>
-                      </m:d>
-                      <m:r>
-                        <a:rPr lang="en-US" i="1">
-                          <a:latin typeface="Cambria Math" panose="02040503050406030204" pitchFamily="18" charset="0"/>
-                          <a:ea typeface="Cambria Math" panose="02040503050406030204" pitchFamily="18" charset="0"/>
-                        </a:rPr>
-                        <m:t>≈</m:t>
-                      </m:r>
-                      <m:r>
-                        <a:rPr lang="en-US" b="0" i="1" smtClean="0">
-                          <a:latin typeface="Cambria Math" panose="02040503050406030204" pitchFamily="18" charset="0"/>
-                          <a:ea typeface="Cambria Math" panose="02040503050406030204" pitchFamily="18" charset="0"/>
-                        </a:rPr>
-                        <m:t>1−</m:t>
-                      </m:r>
-                      <m:r>
-                        <a:rPr lang="en-US" b="0" i="1" smtClean="0">
-                          <a:latin typeface="Cambria Math" panose="02040503050406030204" pitchFamily="18" charset="0"/>
-                          <a:ea typeface="Cambria Math" panose="02040503050406030204" pitchFamily="18" charset="0"/>
-                        </a:rPr>
-                        <m:t>𝑒𝑥𝑝</m:t>
-                      </m:r>
-                      <m:d>
-                        <m:dPr>
-                          <m:begChr m:val="["/>
-                          <m:endChr m:val="]"/>
-                          <m:ctrlPr>
-                            <a:rPr lang="en-US" b="0" i="1" smtClean="0">
-                              <a:latin typeface="Cambria Math" panose="02040503050406030204" pitchFamily="18" charset="0"/>
-                              <a:ea typeface="Cambria Math" panose="02040503050406030204" pitchFamily="18" charset="0"/>
-                            </a:rPr>
-                          </m:ctrlPr>
-                        </m:dPr>
-                        <m:e>
-                          <m:r>
-                            <a:rPr lang="en-US" b="0" i="1" smtClean="0">
-                              <a:latin typeface="Cambria Math" panose="02040503050406030204" pitchFamily="18" charset="0"/>
-                              <a:ea typeface="Cambria Math" panose="02040503050406030204" pitchFamily="18" charset="0"/>
-                            </a:rPr>
-                            <m:t>−</m:t>
-                          </m:r>
-                          <m:f>
-                            <m:fPr>
-                              <m:ctrlPr>
-                                <a:rPr lang="en-US" b="0" i="1" smtClean="0">
-                                  <a:latin typeface="Cambria Math" panose="02040503050406030204" pitchFamily="18" charset="0"/>
-                                  <a:ea typeface="Cambria Math" panose="02040503050406030204" pitchFamily="18" charset="0"/>
-                                </a:rPr>
-                              </m:ctrlPr>
-                            </m:fPr>
-                            <m:num>
-                              <m:r>
-                                <a:rPr lang="en-US" b="0" i="1" smtClean="0">
-                                  <a:latin typeface="Cambria Math" panose="02040503050406030204" pitchFamily="18" charset="0"/>
-                                  <a:ea typeface="Cambria Math" panose="02040503050406030204" pitchFamily="18" charset="0"/>
-                                </a:rPr>
-                                <m:t>𝑚</m:t>
-                              </m:r>
-                              <m:d>
-                                <m:dPr>
-                                  <m:ctrlPr>
-                                    <a:rPr lang="en-US" b="0" i="1" smtClean="0">
-                                      <a:latin typeface="Cambria Math" panose="02040503050406030204" pitchFamily="18" charset="0"/>
-                                      <a:ea typeface="Cambria Math" panose="02040503050406030204" pitchFamily="18" charset="0"/>
-                                    </a:rPr>
-                                  </m:ctrlPr>
-                                </m:dPr>
-                                <m:e>
-                                  <m:r>
-                                    <a:rPr lang="en-US" b="0" i="1" smtClean="0">
-                                      <a:latin typeface="Cambria Math" panose="02040503050406030204" pitchFamily="18" charset="0"/>
-                                      <a:ea typeface="Cambria Math" panose="02040503050406030204" pitchFamily="18" charset="0"/>
-                                    </a:rPr>
-                                    <m:t>𝑛</m:t>
-                                  </m:r>
-                                  <m:r>
-                                    <a:rPr lang="en-US" b="0" i="1" smtClean="0">
-                                      <a:latin typeface="Cambria Math" panose="02040503050406030204" pitchFamily="18" charset="0"/>
-                                      <a:ea typeface="Cambria Math" panose="02040503050406030204" pitchFamily="18" charset="0"/>
-                                    </a:rPr>
-                                    <m:t>−1</m:t>
-                                  </m:r>
-                                </m:e>
-                              </m:d>
-                            </m:num>
-                            <m:den>
-                              <m:r>
-                                <a:rPr lang="en-US" b="0" i="1" smtClean="0">
-                                  <a:latin typeface="Cambria Math" panose="02040503050406030204" pitchFamily="18" charset="0"/>
-                                  <a:ea typeface="Cambria Math" panose="02040503050406030204" pitchFamily="18" charset="0"/>
-                                </a:rPr>
-                                <m:t>2</m:t>
-                              </m:r>
-                              <m:r>
-                                <a:rPr lang="en-US" b="0" i="1" smtClean="0">
-                                  <a:latin typeface="Cambria Math" panose="02040503050406030204" pitchFamily="18" charset="0"/>
-                                  <a:ea typeface="Cambria Math" panose="02040503050406030204" pitchFamily="18" charset="0"/>
-                                </a:rPr>
-                                <m:t>𝑚</m:t>
-                              </m:r>
-                            </m:den>
-                          </m:f>
-                        </m:e>
-                      </m:d>
-                    </m:oMath>
-                  </m:oMathPara>
-                </a14:m>
-                <a:endParaRPr lang="en-US" dirty="0"/>
-              </a:p>
-              <a:p>
-                <a:pPr marL="514350" indent="-514350">
-                  <a:buFont typeface="+mj-lt"/>
-                  <a:buAutoNum type="arabicPeriod" startAt="3"/>
-                </a:pPr>
-                <a:r>
-                  <a:rPr lang="en-US" dirty="0"/>
-                  <a:t>Given table utilization, </a:t>
-                </a:r>
-                <a14:m>
-                  <m:oMath xmlns:m="http://schemas.openxmlformats.org/officeDocument/2006/math">
-                    <m:r>
-                      <a:rPr lang="en-US" i="1" smtClean="0">
-                        <a:latin typeface="Cambria Math" panose="02040503050406030204" pitchFamily="18" charset="0"/>
-                        <a:ea typeface="Cambria Math" panose="02040503050406030204" pitchFamily="18" charset="0"/>
-                      </a:rPr>
-                      <m:t>𝛼</m:t>
-                    </m:r>
-                    <m:r>
-                      <a:rPr lang="en-US" b="0" i="1" smtClean="0">
-                        <a:latin typeface="Cambria Math" panose="02040503050406030204" pitchFamily="18" charset="0"/>
-                        <a:ea typeface="Cambria Math" panose="02040503050406030204" pitchFamily="18" charset="0"/>
-                      </a:rPr>
-                      <m:t>=</m:t>
-                    </m:r>
-                    <m:r>
-                      <a:rPr lang="en-US" b="0" i="1" smtClean="0">
-                        <a:latin typeface="Cambria Math" panose="02040503050406030204" pitchFamily="18" charset="0"/>
-                        <a:ea typeface="Cambria Math" panose="02040503050406030204" pitchFamily="18" charset="0"/>
-                      </a:rPr>
-                      <m:t>𝑛</m:t>
-                    </m:r>
-                    <m:r>
-                      <a:rPr lang="en-US" b="0" i="1" smtClean="0">
-                        <a:latin typeface="Cambria Math" panose="02040503050406030204" pitchFamily="18" charset="0"/>
-                        <a:ea typeface="Cambria Math" panose="02040503050406030204" pitchFamily="18" charset="0"/>
-                      </a:rPr>
-                      <m:t>/</m:t>
-                    </m:r>
-                    <m:r>
-                      <a:rPr lang="en-US" b="0" i="1" smtClean="0">
-                        <a:latin typeface="Cambria Math" panose="02040503050406030204" pitchFamily="18" charset="0"/>
-                        <a:ea typeface="Cambria Math" panose="02040503050406030204" pitchFamily="18" charset="0"/>
-                      </a:rPr>
-                      <m:t>𝑚</m:t>
-                    </m:r>
-                  </m:oMath>
-                </a14:m>
-                <a:r>
-                  <a:rPr lang="en-US" dirty="0"/>
-                  <a:t>, the number of probes required to find an open bucket is   </a:t>
-                </a:r>
-              </a:p>
-              <a:p>
-                <a:pPr marL="0" indent="0">
-                  <a:buNone/>
-                </a:pPr>
-                <a14:m>
-                  <m:oMathPara xmlns:m="http://schemas.openxmlformats.org/officeDocument/2006/math">
-                    <m:oMathParaPr>
-                      <m:jc m:val="centerGroup"/>
-                    </m:oMathParaPr>
-                    <m:oMath xmlns:m="http://schemas.openxmlformats.org/officeDocument/2006/math">
-                      <m:sSub>
-                        <m:sSubPr>
-                          <m:ctrlPr>
-                            <a:rPr lang="en-US" i="1" smtClean="0">
-                              <a:latin typeface="Cambria Math" panose="02040503050406030204" pitchFamily="18" charset="0"/>
-                              <a:ea typeface="Cambria Math" panose="02040503050406030204" pitchFamily="18" charset="0"/>
-                            </a:rPr>
-                          </m:ctrlPr>
-                        </m:sSubPr>
-                        <m:e>
-                          <m:r>
-                            <a:rPr lang="en-US" b="0" i="1" smtClean="0">
-                              <a:latin typeface="Cambria Math" panose="02040503050406030204" pitchFamily="18" charset="0"/>
-                              <a:ea typeface="Cambria Math" panose="02040503050406030204" pitchFamily="18" charset="0"/>
-                            </a:rPr>
-                            <m:t>𝑁</m:t>
-                          </m:r>
-                        </m:e>
-                        <m:sub>
-                          <m:r>
-                            <a:rPr lang="en-US" b="0" i="1" smtClean="0">
-                              <a:latin typeface="Cambria Math" panose="02040503050406030204" pitchFamily="18" charset="0"/>
-                              <a:ea typeface="Cambria Math" panose="02040503050406030204" pitchFamily="18" charset="0"/>
-                            </a:rPr>
-                            <m:t>𝑝𝑟𝑜𝑏𝑠</m:t>
-                          </m:r>
-                        </m:sub>
-                      </m:sSub>
-                      <m:r>
-                        <a:rPr lang="en-US" i="1" smtClean="0">
-                          <a:latin typeface="Cambria Math" panose="02040503050406030204" pitchFamily="18" charset="0"/>
-                          <a:ea typeface="Cambria Math" panose="02040503050406030204" pitchFamily="18" charset="0"/>
-                        </a:rPr>
-                        <m:t>≈</m:t>
-                      </m:r>
-                      <m:f>
-                        <m:fPr>
-                          <m:ctrlPr>
-                            <a:rPr lang="en-US" i="1" smtClean="0">
-                              <a:latin typeface="Cambria Math" panose="02040503050406030204" pitchFamily="18" charset="0"/>
-                              <a:ea typeface="Cambria Math" panose="02040503050406030204" pitchFamily="18" charset="0"/>
-                            </a:rPr>
-                          </m:ctrlPr>
-                        </m:fPr>
-                        <m:num>
-                          <m:r>
-                            <a:rPr lang="en-US" b="0" i="1" smtClean="0">
-                              <a:latin typeface="Cambria Math" panose="02040503050406030204" pitchFamily="18" charset="0"/>
-                              <a:ea typeface="Cambria Math" panose="02040503050406030204" pitchFamily="18" charset="0"/>
-                            </a:rPr>
-                            <m:t>1</m:t>
-                          </m:r>
-                        </m:num>
-                        <m:den>
-                          <m:r>
-                            <a:rPr lang="en-US" i="1" smtClean="0">
-                              <a:latin typeface="Cambria Math" panose="02040503050406030204" pitchFamily="18" charset="0"/>
-                              <a:ea typeface="Cambria Math" panose="02040503050406030204" pitchFamily="18" charset="0"/>
-                            </a:rPr>
-                            <m:t>𝛼</m:t>
-                          </m:r>
-                        </m:den>
-                      </m:f>
-                      <m:func>
-                        <m:funcPr>
-                          <m:ctrlPr>
-                            <a:rPr lang="en-US" i="1" smtClean="0">
-                              <a:latin typeface="Cambria Math" panose="02040503050406030204" pitchFamily="18" charset="0"/>
-                              <a:ea typeface="Cambria Math" panose="02040503050406030204" pitchFamily="18" charset="0"/>
-                            </a:rPr>
-                          </m:ctrlPr>
-                        </m:funcPr>
-                        <m:fName>
-                          <m:r>
-                            <m:rPr>
-                              <m:sty m:val="p"/>
-                            </m:rPr>
-                            <a:rPr lang="en-US" b="0" i="0" smtClean="0">
-                              <a:latin typeface="Cambria Math" panose="02040503050406030204" pitchFamily="18" charset="0"/>
-                              <a:ea typeface="Cambria Math" panose="02040503050406030204" pitchFamily="18" charset="0"/>
-                            </a:rPr>
-                            <m:t>ln</m:t>
-                          </m:r>
-                        </m:fName>
-                        <m:e>
-                          <m:f>
-                            <m:fPr>
-                              <m:ctrlPr>
-                                <a:rPr lang="en-US" i="1" smtClean="0">
-                                  <a:latin typeface="Cambria Math" panose="02040503050406030204" pitchFamily="18" charset="0"/>
-                                  <a:ea typeface="Cambria Math" panose="02040503050406030204" pitchFamily="18" charset="0"/>
-                                </a:rPr>
-                              </m:ctrlPr>
-                            </m:fPr>
-                            <m:num>
-                              <m:r>
-                                <a:rPr lang="en-US" b="0" i="1" smtClean="0">
-                                  <a:latin typeface="Cambria Math" panose="02040503050406030204" pitchFamily="18" charset="0"/>
-                                  <a:ea typeface="Cambria Math" panose="02040503050406030204" pitchFamily="18" charset="0"/>
-                                </a:rPr>
-                                <m:t>1</m:t>
-                              </m:r>
-                            </m:num>
-                            <m:den>
-                              <m:r>
-                                <a:rPr lang="en-US" b="0" i="1" smtClean="0">
-                                  <a:latin typeface="Cambria Math" panose="02040503050406030204" pitchFamily="18" charset="0"/>
-                                  <a:ea typeface="Cambria Math" panose="02040503050406030204" pitchFamily="18" charset="0"/>
-                                </a:rPr>
-                                <m:t>1−</m:t>
-                              </m:r>
-                              <m:r>
-                                <a:rPr lang="en-US" b="0" i="1" smtClean="0">
-                                  <a:latin typeface="Cambria Math" panose="02040503050406030204" pitchFamily="18" charset="0"/>
-                                  <a:ea typeface="Cambria Math" panose="02040503050406030204" pitchFamily="18" charset="0"/>
-                                </a:rPr>
-                                <m:t>𝛼</m:t>
-                              </m:r>
-                            </m:den>
-                          </m:f>
-                        </m:e>
-                      </m:func>
-                    </m:oMath>
-                  </m:oMathPara>
-                </a14:m>
-                <a:endParaRPr lang="en-US" dirty="0"/>
-              </a:p>
-              <a:p>
-                <a:pPr marL="457200" lvl="1" indent="0">
-                  <a:buNone/>
-                </a:pPr>
-                <a:r>
-                  <a:rPr lang="en-US" dirty="0"/>
-                  <a:t>Where the chance of success is </a:t>
-                </a:r>
-                <a14:m>
-                  <m:oMath xmlns:m="http://schemas.openxmlformats.org/officeDocument/2006/math">
-                    <m:r>
-                      <a:rPr lang="en-US" i="1" smtClean="0">
-                        <a:latin typeface="Cambria Math" panose="02040503050406030204" pitchFamily="18" charset="0"/>
-                        <a:ea typeface="Cambria Math" panose="02040503050406030204" pitchFamily="18" charset="0"/>
-                      </a:rPr>
-                      <m:t>≈</m:t>
-                    </m:r>
-                    <m:f>
-                      <m:fPr>
-                        <m:ctrlPr>
-                          <a:rPr lang="en-US" i="1">
-                            <a:latin typeface="Cambria Math" panose="02040503050406030204" pitchFamily="18" charset="0"/>
-                            <a:ea typeface="Cambria Math" panose="02040503050406030204" pitchFamily="18" charset="0"/>
-                          </a:rPr>
-                        </m:ctrlPr>
-                      </m:fPr>
-                      <m:num>
-                        <m:r>
-                          <a:rPr lang="en-US" i="1">
-                            <a:latin typeface="Cambria Math" panose="02040503050406030204" pitchFamily="18" charset="0"/>
-                            <a:ea typeface="Cambria Math" panose="02040503050406030204" pitchFamily="18" charset="0"/>
-                          </a:rPr>
-                          <m:t>1</m:t>
-                        </m:r>
-                      </m:num>
-                      <m:den>
-                        <m:r>
-                          <a:rPr lang="en-US" i="1">
-                            <a:latin typeface="Cambria Math" panose="02040503050406030204" pitchFamily="18" charset="0"/>
-                            <a:ea typeface="Cambria Math" panose="02040503050406030204" pitchFamily="18" charset="0"/>
-                          </a:rPr>
-                          <m:t>1−</m:t>
-                        </m:r>
-                        <m:r>
-                          <a:rPr lang="en-US" i="1">
-                            <a:latin typeface="Cambria Math" panose="02040503050406030204" pitchFamily="18" charset="0"/>
-                            <a:ea typeface="Cambria Math" panose="02040503050406030204" pitchFamily="18" charset="0"/>
-                          </a:rPr>
-                          <m:t>𝛼</m:t>
-                        </m:r>
-                      </m:den>
-                    </m:f>
-                  </m:oMath>
-                </a14:m>
-                <a:endParaRPr lang="en-US" dirty="0"/>
-              </a:p>
-            </p:txBody>
-          </p:sp>
-        </mc:Choice>
-        <mc:Fallback>
-          <p:sp>
-            <p:nvSpPr>
-              <p:cNvPr id="3" name="Content Placeholder 2">
-                <a:extLst>
-                  <a:ext uri="{FF2B5EF4-FFF2-40B4-BE49-F238E27FC236}">
-                    <a16:creationId xmlns:a16="http://schemas.microsoft.com/office/drawing/2014/main" id="{62709B48-58A5-623B-9852-30181B5EE4F8}"/>
-                  </a:ext>
-                </a:extLst>
-              </p:cNvPr>
-              <p:cNvSpPr>
-                <a:spLocks noGrp="1" noRot="1" noChangeAspect="1" noMove="1" noResize="1" noEditPoints="1" noAdjustHandles="1" noChangeArrowheads="1" noChangeShapeType="1" noTextEdit="1"/>
-              </p:cNvSpPr>
-              <p:nvPr>
-                <p:ph idx="1"/>
-              </p:nvPr>
-            </p:nvSpPr>
-            <p:spPr>
-              <a:xfrm>
-                <a:off x="838200" y="1123406"/>
-                <a:ext cx="10515600" cy="5470724"/>
-              </a:xfrm>
-              <a:blipFill>
-                <a:blip r:embed="rId2"/>
-                <a:stretch>
-                  <a:fillRect l="-1217" t="-1782" r="-986"/>
-                </a:stretch>
-              </a:blipFill>
-            </p:spPr>
-            <p:txBody>
-              <a:bodyPr/>
-              <a:lstStyle/>
-              <a:p>
-                <a:r>
-                  <a:rPr lang="en-US">
-                    <a:noFill/>
-                  </a:rPr>
-                  <a:t> </a:t>
-                </a:r>
-              </a:p>
-            </p:txBody>
-          </p:sp>
-        </mc:Fallback>
-      </mc:AlternateContent>
-      <p:sp>
-        <p:nvSpPr>
-          <p:cNvPr id="6" name="Title 1">
-            <a:extLst>
-              <a:ext uri="{FF2B5EF4-FFF2-40B4-BE49-F238E27FC236}">
-                <a16:creationId xmlns:a16="http://schemas.microsoft.com/office/drawing/2014/main" id="{B7CB3FB6-304E-F342-6AED-DDAE3A8C27FD}"/>
-              </a:ext>
-            </a:extLst>
-          </p:cNvPr>
-          <p:cNvSpPr txBox="1">
-            <a:spLocks/>
-          </p:cNvSpPr>
-          <p:nvPr/>
-        </p:nvSpPr>
-        <p:spPr>
-          <a:xfrm>
-            <a:off x="838200" y="-635"/>
-            <a:ext cx="10515600" cy="1325563"/>
-          </a:xfrm>
-          <a:prstGeom prst="rect">
-            <a:avLst/>
-          </a:prstGeom>
-        </p:spPr>
-        <p:txBody>
-          <a:bodyPr vert="horz" lIns="91440" tIns="45720" rIns="91440" bIns="45720" rtlCol="0" anchor="ctr">
-            <a:normAutofit/>
-          </a:bodyPr>
-          <a:lstStyle>
-            <a:lvl1pPr algn="l" defTabSz="914400" rtl="0" eaLnBrk="1" latinLnBrk="0" hangingPunct="1">
-              <a:lnSpc>
-                <a:spcPct val="90000"/>
-              </a:lnSpc>
-              <a:spcBef>
-                <a:spcPct val="0"/>
-              </a:spcBef>
-              <a:buNone/>
-              <a:defRPr sz="4400" kern="1200">
-                <a:solidFill>
-                  <a:schemeClr val="tx1"/>
-                </a:solidFill>
-                <a:latin typeface="+mj-lt"/>
-                <a:ea typeface="+mj-ea"/>
-                <a:cs typeface="+mj-cs"/>
-              </a:defRPr>
-            </a:lvl1pPr>
-          </a:lstStyle>
-          <a:p>
-            <a:r>
-              <a:rPr lang="en-US" dirty="0">
-                <a:latin typeface="+mn-lt"/>
-              </a:rPr>
-              <a:t>Introduction to Hashing</a:t>
-            </a:r>
-          </a:p>
-        </p:txBody>
-      </p:sp>
-    </p:spTree>
-    <p:extLst>
-      <p:ext uri="{BB962C8B-B14F-4D97-AF65-F5344CB8AC3E}">
-        <p14:creationId xmlns:p14="http://schemas.microsoft.com/office/powerpoint/2010/main" val="1567949118"/>
-      </p:ext>
-    </p:extLst>
-  </p:cSld>
-  <p:clrMapOvr>
-    <a:masterClrMapping/>
-  </p:clrMapOvr>
-</p:sld>
-</file>
-
-<file path=ppt/slides/slide43.xml><?xml version="1.0" encoding="utf-8"?>
-<p:sld xmlns:a="http://schemas.openxmlformats.org/drawingml/2006/main" xmlns:r="http://schemas.openxmlformats.org/officeDocument/2006/relationships" xmlns:p="http://schemas.openxmlformats.org/presentationml/2006/main" show="0">
-  <p:cSld>
-    <p:spTree>
-      <p:nvGrpSpPr>
-        <p:cNvPr id="1" name="">
-          <a:extLst>
-            <a:ext uri="{FF2B5EF4-FFF2-40B4-BE49-F238E27FC236}">
-              <a16:creationId xmlns:a16="http://schemas.microsoft.com/office/drawing/2014/main" id="{F312079E-A579-442A-F635-1F9B39891F38}"/>
-            </a:ext>
-          </a:extLst>
-        </p:cNvPr>
-        <p:cNvGrpSpPr/>
-        <p:nvPr/>
-      </p:nvGrpSpPr>
-      <p:grpSpPr>
-        <a:xfrm>
-          <a:off x="0" y="0"/>
-          <a:ext cx="0" cy="0"/>
-          <a:chOff x="0" y="0"/>
-          <a:chExt cx="0" cy="0"/>
-        </a:xfrm>
-      </p:grpSpPr>
-      <mc:AlternateContent xmlns:mc="http://schemas.openxmlformats.org/markup-compatibility/2006">
-        <mc:Choice xmlns:a14="http://schemas.microsoft.com/office/drawing/2010/main" Requires="a14">
-          <p:sp>
-            <p:nvSpPr>
-              <p:cNvPr id="3" name="Content Placeholder 2">
-                <a:extLst>
-                  <a:ext uri="{FF2B5EF4-FFF2-40B4-BE49-F238E27FC236}">
-                    <a16:creationId xmlns:a16="http://schemas.microsoft.com/office/drawing/2014/main" id="{9034E94E-8B65-013C-A4FA-49F30AF8ED1C}"/>
-                  </a:ext>
-                </a:extLst>
-              </p:cNvPr>
-              <p:cNvSpPr>
-                <a:spLocks noGrp="1"/>
-              </p:cNvSpPr>
-              <p:nvPr>
-                <p:ph idx="1"/>
-              </p:nvPr>
-            </p:nvSpPr>
-            <p:spPr>
-              <a:xfrm>
-                <a:off x="838200" y="1123406"/>
-                <a:ext cx="10515600" cy="5470724"/>
-              </a:xfrm>
-            </p:spPr>
-            <p:txBody>
-              <a:bodyPr>
-                <a:normAutofit/>
-              </a:bodyPr>
-              <a:lstStyle/>
-              <a:p>
-                <a:pPr marL="0" indent="0">
-                  <a:buNone/>
-                </a:pPr>
-                <a:r>
-                  <a:rPr lang="en-US" dirty="0"/>
-                  <a:t>What are the properties of a good hash function?  </a:t>
-                </a:r>
-              </a:p>
-              <a:p>
-                <a:pPr marL="514350" indent="-514350">
-                  <a:buFont typeface="+mj-lt"/>
-                  <a:buAutoNum type="arabicPeriod"/>
-                </a:pPr>
-                <a:r>
-                  <a:rPr lang="en-US" dirty="0"/>
-                  <a:t>For key values, </a:t>
-                </a:r>
-                <a14:m>
-                  <m:oMath xmlns:m="http://schemas.openxmlformats.org/officeDocument/2006/math">
-                    <m:r>
-                      <a:rPr lang="en-US" i="1">
-                        <a:latin typeface="Cambria Math" panose="02040503050406030204" pitchFamily="18" charset="0"/>
-                      </a:rPr>
-                      <m:t>𝐾</m:t>
-                    </m:r>
-                  </m:oMath>
-                </a14:m>
-                <a:r>
-                  <a:rPr lang="en-US" dirty="0"/>
-                  <a:t>, want a </a:t>
-                </a:r>
-                <a:r>
-                  <a:rPr lang="en-US" b="1" dirty="0"/>
-                  <a:t>uniform distribution over </a:t>
-                </a:r>
-                <a14:m>
-                  <m:oMath xmlns:m="http://schemas.openxmlformats.org/officeDocument/2006/math">
-                    <m:r>
-                      <a:rPr lang="en-US" b="1" i="1" smtClean="0">
-                        <a:latin typeface="Cambria Math" panose="02040503050406030204" pitchFamily="18" charset="0"/>
-                      </a:rPr>
-                      <m:t>𝒎</m:t>
-                    </m:r>
-                  </m:oMath>
-                </a14:m>
-                <a:r>
-                  <a:rPr lang="en-US" b="1" dirty="0"/>
-                  <a:t> hash values</a:t>
-                </a:r>
-              </a:p>
-              <a:p>
-                <a:pPr marL="457200" lvl="1" indent="0">
-                  <a:buNone/>
-                </a:pPr>
-                <a14:m>
-                  <m:oMathPara xmlns:m="http://schemas.openxmlformats.org/officeDocument/2006/math">
-                    <m:oMathParaPr>
-                      <m:jc m:val="centerGroup"/>
-                    </m:oMathParaPr>
-                    <m:oMath xmlns:m="http://schemas.openxmlformats.org/officeDocument/2006/math">
-                      <m:r>
-                        <a:rPr lang="en-US" b="1" i="1">
-                          <a:latin typeface="Cambria Math" panose="02040503050406030204" pitchFamily="18" charset="0"/>
-                        </a:rPr>
-                        <m:t>𝒇</m:t>
-                      </m:r>
-                      <m:r>
-                        <a:rPr lang="en-US" b="1" i="1">
-                          <a:latin typeface="Cambria Math" panose="02040503050406030204" pitchFamily="18" charset="0"/>
-                        </a:rPr>
-                        <m:t>(</m:t>
-                      </m:r>
-                      <m:r>
-                        <a:rPr lang="en-US" b="1" i="1">
-                          <a:latin typeface="Cambria Math" panose="02040503050406030204" pitchFamily="18" charset="0"/>
-                        </a:rPr>
-                        <m:t>𝒌</m:t>
-                      </m:r>
-                      <m:r>
-                        <a:rPr lang="en-US" b="1" i="1">
-                          <a:latin typeface="Cambria Math" panose="02040503050406030204" pitchFamily="18" charset="0"/>
-                        </a:rPr>
-                        <m:t>)~</m:t>
-                      </m:r>
-                      <m:r>
-                        <a:rPr lang="en-US" b="1" i="1">
-                          <a:latin typeface="Cambria Math" panose="02040503050406030204" pitchFamily="18" charset="0"/>
-                          <a:ea typeface="Cambria Math" panose="02040503050406030204" pitchFamily="18" charset="0"/>
-                        </a:rPr>
-                        <m:t>𝑼</m:t>
-                      </m:r>
-                      <m:r>
-                        <a:rPr lang="en-US" b="1" i="1">
-                          <a:latin typeface="Cambria Math" panose="02040503050406030204" pitchFamily="18" charset="0"/>
-                          <a:ea typeface="Cambria Math" panose="02040503050406030204" pitchFamily="18" charset="0"/>
-                        </a:rPr>
-                        <m:t>(</m:t>
-                      </m:r>
-                      <m:r>
-                        <a:rPr lang="en-US" b="1" i="1">
-                          <a:latin typeface="Cambria Math" panose="02040503050406030204" pitchFamily="18" charset="0"/>
-                          <a:ea typeface="Cambria Math" panose="02040503050406030204" pitchFamily="18" charset="0"/>
-                        </a:rPr>
-                        <m:t>𝟎</m:t>
-                      </m:r>
-                      <m:r>
-                        <a:rPr lang="en-US" b="1" i="1">
-                          <a:latin typeface="Cambria Math" panose="02040503050406030204" pitchFamily="18" charset="0"/>
-                          <a:ea typeface="Cambria Math" panose="02040503050406030204" pitchFamily="18" charset="0"/>
-                        </a:rPr>
-                        <m:t>,</m:t>
-                      </m:r>
-                      <m:r>
-                        <a:rPr lang="en-US" b="1" i="1" smtClean="0">
-                          <a:latin typeface="Cambria Math" panose="02040503050406030204" pitchFamily="18" charset="0"/>
-                          <a:ea typeface="Cambria Math" panose="02040503050406030204" pitchFamily="18" charset="0"/>
-                        </a:rPr>
-                        <m:t>𝒎</m:t>
-                      </m:r>
-                      <m:r>
-                        <a:rPr lang="en-US" b="1" i="1">
-                          <a:latin typeface="Cambria Math" panose="02040503050406030204" pitchFamily="18" charset="0"/>
-                          <a:ea typeface="Cambria Math" panose="02040503050406030204" pitchFamily="18" charset="0"/>
-                        </a:rPr>
-                        <m:t>)</m:t>
-                      </m:r>
-                    </m:oMath>
-                  </m:oMathPara>
-                </a14:m>
-                <a:endParaRPr lang="en-US" b="1" dirty="0"/>
-              </a:p>
-              <a:p>
-                <a:pPr lvl="1"/>
-                <a:r>
-                  <a:rPr lang="en-US" dirty="0"/>
-                  <a:t>For </a:t>
-                </a:r>
-                <a14:m>
-                  <m:oMath xmlns:m="http://schemas.openxmlformats.org/officeDocument/2006/math">
-                    <m:r>
-                      <a:rPr lang="en-US" b="0" i="1" smtClean="0">
-                        <a:latin typeface="Cambria Math" panose="02040503050406030204" pitchFamily="18" charset="0"/>
-                      </a:rPr>
-                      <m:t>𝑚</m:t>
-                    </m:r>
-                  </m:oMath>
-                </a14:m>
-                <a:r>
-                  <a:rPr lang="en-US" dirty="0"/>
-                  <a:t> length hash table probability of bucket </a:t>
-                </a:r>
-                <a14:m>
-                  <m:oMath xmlns:m="http://schemas.openxmlformats.org/officeDocument/2006/math">
-                    <m:r>
-                      <a:rPr lang="en-US" b="0" i="1" smtClean="0">
-                        <a:latin typeface="Cambria Math" panose="02040503050406030204" pitchFamily="18" charset="0"/>
-                      </a:rPr>
-                      <m:t>𝑖</m:t>
-                    </m:r>
-                  </m:oMath>
-                </a14:m>
-                <a:r>
-                  <a:rPr lang="en-US" dirty="0"/>
-                  <a:t>: </a:t>
-                </a:r>
-              </a:p>
-              <a:p>
-                <a:pPr marL="457200" lvl="1" indent="0">
-                  <a:buNone/>
-                </a:pPr>
-                <a14:m>
-                  <m:oMathPara xmlns:m="http://schemas.openxmlformats.org/officeDocument/2006/math">
-                    <m:oMathParaPr>
-                      <m:jc m:val="centerGroup"/>
-                    </m:oMathParaPr>
-                    <m:oMath xmlns:m="http://schemas.openxmlformats.org/officeDocument/2006/math">
-                      <m:r>
-                        <m:rPr>
-                          <m:sty m:val="p"/>
-                        </m:rPr>
-                        <a:rPr lang="en-US" b="0" i="0" smtClean="0">
-                          <a:latin typeface="Cambria Math" panose="02040503050406030204" pitchFamily="18" charset="0"/>
-                        </a:rPr>
-                        <m:t>P</m:t>
-                      </m:r>
-                      <m:d>
-                        <m:dPr>
-                          <m:ctrlPr>
-                            <a:rPr lang="en-US" i="1" smtClean="0">
-                              <a:latin typeface="Cambria Math" panose="02040503050406030204" pitchFamily="18" charset="0"/>
-                            </a:rPr>
-                          </m:ctrlPr>
-                        </m:dPr>
-                        <m:e>
-                          <m:r>
-                            <a:rPr lang="en-US" b="0" i="1">
-                              <a:latin typeface="Cambria Math" panose="02040503050406030204" pitchFamily="18" charset="0"/>
-                            </a:rPr>
-                            <m:t>𝑓</m:t>
-                          </m:r>
-                          <m:d>
-                            <m:dPr>
-                              <m:ctrlPr>
-                                <a:rPr lang="en-US" i="1">
-                                  <a:latin typeface="Cambria Math" panose="02040503050406030204" pitchFamily="18" charset="0"/>
-                                </a:rPr>
-                              </m:ctrlPr>
-                            </m:dPr>
-                            <m:e>
-                              <m:r>
-                                <a:rPr lang="en-US" b="0" i="1">
-                                  <a:latin typeface="Cambria Math" panose="02040503050406030204" pitchFamily="18" charset="0"/>
-                                </a:rPr>
-                                <m:t>𝑘</m:t>
-                              </m:r>
-                            </m:e>
-                          </m:d>
-                          <m:r>
-                            <a:rPr lang="en-US" b="0" i="1" smtClean="0">
-                              <a:latin typeface="Cambria Math" panose="02040503050406030204" pitchFamily="18" charset="0"/>
-                            </a:rPr>
-                            <m:t>=</m:t>
-                          </m:r>
-                          <m:r>
-                            <a:rPr lang="en-US" b="0" i="1" smtClean="0">
-                              <a:latin typeface="Cambria Math" panose="02040503050406030204" pitchFamily="18" charset="0"/>
-                            </a:rPr>
-                            <m:t>𝑖</m:t>
-                          </m:r>
-                        </m:e>
-                      </m:d>
-                      <m:r>
-                        <a:rPr lang="en-US" b="0" i="1" smtClean="0">
-                          <a:latin typeface="Cambria Math" panose="02040503050406030204" pitchFamily="18" charset="0"/>
-                        </a:rPr>
-                        <m:t>=</m:t>
-                      </m:r>
-                      <m:f>
-                        <m:fPr>
-                          <m:ctrlPr>
-                            <a:rPr lang="en-US" b="0" i="1" smtClean="0">
-                              <a:latin typeface="Cambria Math" panose="02040503050406030204" pitchFamily="18" charset="0"/>
-                            </a:rPr>
-                          </m:ctrlPr>
-                        </m:fPr>
-                        <m:num>
-                          <m:r>
-                            <a:rPr lang="en-US" b="0" i="1" smtClean="0">
-                              <a:latin typeface="Cambria Math" panose="02040503050406030204" pitchFamily="18" charset="0"/>
-                            </a:rPr>
-                            <m:t>1</m:t>
-                          </m:r>
-                        </m:num>
-                        <m:den>
-                          <m:r>
-                            <a:rPr lang="en-US" b="0" i="1" smtClean="0">
-                              <a:latin typeface="Cambria Math" panose="02040503050406030204" pitchFamily="18" charset="0"/>
-                            </a:rPr>
-                            <m:t>𝑚</m:t>
-                          </m:r>
-                        </m:den>
-                      </m:f>
-                    </m:oMath>
-                  </m:oMathPara>
-                </a14:m>
-                <a:endParaRPr lang="en-US" dirty="0"/>
-              </a:p>
-              <a:p>
-                <a:pPr lvl="1"/>
-                <a:r>
-                  <a:rPr lang="en-US" b="1" dirty="0"/>
-                  <a:t>Lumpy hash values </a:t>
-                </a:r>
-                <a:r>
-                  <a:rPr lang="en-US" dirty="0"/>
-                  <a:t>lead to increased </a:t>
-                </a:r>
-                <a:r>
-                  <a:rPr lang="en-US" b="1" dirty="0"/>
-                  <a:t>hash collisions </a:t>
-                </a:r>
-              </a:p>
-              <a:p>
-                <a:pPr lvl="1"/>
-                <a:r>
-                  <a:rPr lang="en-US" dirty="0"/>
-                  <a:t>Can verify with </a:t>
-                </a:r>
-                <a14:m>
-                  <m:oMath xmlns:m="http://schemas.openxmlformats.org/officeDocument/2006/math">
-                    <m:sSup>
-                      <m:sSupPr>
-                        <m:ctrlPr>
-                          <a:rPr lang="en-US" i="1">
-                            <a:latin typeface="Cambria Math" panose="02040503050406030204" pitchFamily="18" charset="0"/>
-                          </a:rPr>
-                        </m:ctrlPr>
-                      </m:sSupPr>
-                      <m:e>
-                        <m:r>
-                          <a:rPr lang="en-US" i="1">
-                            <a:latin typeface="Cambria Math" panose="02040503050406030204" pitchFamily="18" charset="0"/>
-                            <a:ea typeface="Cambria Math" panose="02040503050406030204" pitchFamily="18" charset="0"/>
-                          </a:rPr>
-                          <m:t>𝜒</m:t>
-                        </m:r>
-                      </m:e>
-                      <m:sup>
-                        <m:r>
-                          <a:rPr lang="en-US" i="1">
-                            <a:latin typeface="Cambria Math" panose="02040503050406030204" pitchFamily="18" charset="0"/>
-                          </a:rPr>
-                          <m:t>2</m:t>
-                        </m:r>
-                      </m:sup>
-                    </m:sSup>
-                  </m:oMath>
-                </a14:m>
-                <a:r>
-                  <a:rPr lang="en-US" dirty="0"/>
-                  <a:t> test</a:t>
-                </a:r>
-              </a:p>
-              <a:p>
-                <a:pPr marL="514350" indent="-514350">
-                  <a:buFont typeface="+mj-lt"/>
-                  <a:buAutoNum type="arabicPeriod"/>
-                </a:pPr>
-                <a:r>
-                  <a:rPr lang="en-US" dirty="0"/>
-                  <a:t>Resolution method for inevitable hash collisions</a:t>
-                </a:r>
-              </a:p>
-              <a:p>
-                <a:pPr lvl="1"/>
-                <a:r>
-                  <a:rPr lang="en-US" dirty="0"/>
-                  <a:t>Probability of collision increases as table fills </a:t>
-                </a:r>
-              </a:p>
-            </p:txBody>
-          </p:sp>
-        </mc:Choice>
-        <mc:Fallback>
-          <p:sp>
-            <p:nvSpPr>
-              <p:cNvPr id="3" name="Content Placeholder 2">
-                <a:extLst>
-                  <a:ext uri="{FF2B5EF4-FFF2-40B4-BE49-F238E27FC236}">
-                    <a16:creationId xmlns:a16="http://schemas.microsoft.com/office/drawing/2014/main" id="{9034E94E-8B65-013C-A4FA-49F30AF8ED1C}"/>
-                  </a:ext>
-                </a:extLst>
-              </p:cNvPr>
-              <p:cNvSpPr>
-                <a:spLocks noGrp="1" noRot="1" noChangeAspect="1" noMove="1" noResize="1" noEditPoints="1" noAdjustHandles="1" noChangeArrowheads="1" noChangeShapeType="1" noTextEdit="1"/>
-              </p:cNvSpPr>
-              <p:nvPr>
-                <p:ph idx="1"/>
-              </p:nvPr>
-            </p:nvSpPr>
-            <p:spPr>
-              <a:xfrm>
-                <a:off x="838200" y="1123406"/>
-                <a:ext cx="10515600" cy="5470724"/>
-              </a:xfrm>
-              <a:blipFill>
-                <a:blip r:embed="rId2"/>
-                <a:stretch>
-                  <a:fillRect l="-1217" t="-1782"/>
-                </a:stretch>
-              </a:blipFill>
-            </p:spPr>
-            <p:txBody>
-              <a:bodyPr/>
-              <a:lstStyle/>
-              <a:p>
-                <a:r>
-                  <a:rPr lang="en-US">
-                    <a:noFill/>
-                  </a:rPr>
-                  <a:t> </a:t>
-                </a:r>
-              </a:p>
-            </p:txBody>
-          </p:sp>
-        </mc:Fallback>
-      </mc:AlternateContent>
-      <p:sp>
-        <p:nvSpPr>
-          <p:cNvPr id="6" name="Title 1">
-            <a:extLst>
-              <a:ext uri="{FF2B5EF4-FFF2-40B4-BE49-F238E27FC236}">
-                <a16:creationId xmlns:a16="http://schemas.microsoft.com/office/drawing/2014/main" id="{56C775A4-7225-18DA-6A31-640370B86EE0}"/>
-              </a:ext>
-            </a:extLst>
-          </p:cNvPr>
-          <p:cNvSpPr txBox="1">
-            <a:spLocks/>
-          </p:cNvSpPr>
-          <p:nvPr/>
-        </p:nvSpPr>
-        <p:spPr>
-          <a:xfrm>
-            <a:off x="838200" y="-635"/>
-            <a:ext cx="10515600" cy="1325563"/>
-          </a:xfrm>
-          <a:prstGeom prst="rect">
-            <a:avLst/>
-          </a:prstGeom>
-        </p:spPr>
-        <p:txBody>
-          <a:bodyPr vert="horz" lIns="91440" tIns="45720" rIns="91440" bIns="45720" rtlCol="0" anchor="ctr">
-            <a:normAutofit/>
-          </a:bodyPr>
-          <a:lstStyle>
-            <a:lvl1pPr algn="l" defTabSz="914400" rtl="0" eaLnBrk="1" latinLnBrk="0" hangingPunct="1">
-              <a:lnSpc>
-                <a:spcPct val="90000"/>
-              </a:lnSpc>
-              <a:spcBef>
-                <a:spcPct val="0"/>
-              </a:spcBef>
-              <a:buNone/>
-              <a:defRPr sz="4400" kern="1200">
-                <a:solidFill>
-                  <a:schemeClr val="tx1"/>
-                </a:solidFill>
-                <a:latin typeface="+mj-lt"/>
-                <a:ea typeface="+mj-ea"/>
-                <a:cs typeface="+mj-cs"/>
-              </a:defRPr>
-            </a:lvl1pPr>
-          </a:lstStyle>
-          <a:p>
-            <a:r>
-              <a:rPr lang="en-US" dirty="0">
-                <a:latin typeface="+mn-lt"/>
-              </a:rPr>
-              <a:t>Introduction to Hashing</a:t>
-            </a:r>
-          </a:p>
-        </p:txBody>
-      </p:sp>
-    </p:spTree>
-    <p:extLst>
-      <p:ext uri="{BB962C8B-B14F-4D97-AF65-F5344CB8AC3E}">
-        <p14:creationId xmlns:p14="http://schemas.microsoft.com/office/powerpoint/2010/main" val="1328736250"/>
-      </p:ext>
-    </p:extLst>
-  </p:cSld>
-  <p:clrMapOvr>
-    <a:masterClrMapping/>
-  </p:clrMapOvr>
-  <p:timing>
-    <p:tnLst>
-      <p:par>
-        <p:cTn id="1" dur="indefinite" restart="never" nodeType="tmRoot">
-          <p:childTnLst>
-            <p:seq concurrent="1" nextAc="seek">
-              <p:cTn id="2" dur="indefinite" nodeType="mainSeq">
-                <p:childTnLst>
-                  <p:par>
-                    <p:cTn id="3" fill="hold">
-                      <p:stCondLst>
-                        <p:cond delay="indefinite"/>
-                      </p:stCondLst>
-                      <p:childTnLst>
-                        <p:par>
-                          <p:cTn id="4" fill="hold">
-                            <p:stCondLst>
-                              <p:cond delay="0"/>
-                            </p:stCondLst>
-                            <p:childTnLst>
-                              <p:par>
-                                <p:cTn id="5" presetID="1" presetClass="entr" presetSubtype="0" fill="hold" nodeType="clickEffect">
-                                  <p:stCondLst>
-                                    <p:cond delay="0"/>
-                                  </p:stCondLst>
-                                  <p:childTnLst>
-                                    <p:set>
-                                      <p:cBhvr>
-                                        <p:cTn id="6" dur="1" fill="hold">
-                                          <p:stCondLst>
-                                            <p:cond delay="0"/>
-                                          </p:stCondLst>
-                                        </p:cTn>
-                                        <p:tgtEl>
-                                          <p:spTgt spid="3">
-                                            <p:txEl>
-                                              <p:pRg st="1" end="1"/>
-                                            </p:txEl>
-                                          </p:spTgt>
-                                        </p:tgtEl>
-                                        <p:attrNameLst>
-                                          <p:attrName>style.visibility</p:attrName>
-                                        </p:attrNameLst>
-                                      </p:cBhvr>
-                                      <p:to>
-                                        <p:strVal val="visible"/>
-                                      </p:to>
-                                    </p:set>
-                                  </p:childTnLst>
-                                </p:cTn>
-                              </p:par>
-                              <p:par>
-                                <p:cTn id="7" presetID="1" presetClass="entr" presetSubtype="0" fill="hold" nodeType="withEffect">
-                                  <p:stCondLst>
-                                    <p:cond delay="0"/>
-                                  </p:stCondLst>
-                                  <p:childTnLst>
-                                    <p:set>
-                                      <p:cBhvr>
-                                        <p:cTn id="8" dur="1" fill="hold">
-                                          <p:stCondLst>
-                                            <p:cond delay="0"/>
-                                          </p:stCondLst>
-                                        </p:cTn>
-                                        <p:tgtEl>
-                                          <p:spTgt spid="3">
-                                            <p:txEl>
-                                              <p:pRg st="2" end="2"/>
-                                            </p:txEl>
-                                          </p:spTgt>
-                                        </p:tgtEl>
-                                        <p:attrNameLst>
-                                          <p:attrName>style.visibility</p:attrName>
-                                        </p:attrNameLst>
-                                      </p:cBhvr>
-                                      <p:to>
-                                        <p:strVal val="visible"/>
-                                      </p:to>
-                                    </p:set>
-                                  </p:childTnLst>
-                                </p:cTn>
-                              </p:par>
-                              <p:par>
-                                <p:cTn id="9" presetID="1" presetClass="entr" presetSubtype="0" fill="hold" nodeType="withEffect">
-                                  <p:stCondLst>
-                                    <p:cond delay="0"/>
-                                  </p:stCondLst>
-                                  <p:childTnLst>
-                                    <p:set>
-                                      <p:cBhvr>
-                                        <p:cTn id="10" dur="1" fill="hold">
-                                          <p:stCondLst>
-                                            <p:cond delay="0"/>
-                                          </p:stCondLst>
-                                        </p:cTn>
-                                        <p:tgtEl>
-                                          <p:spTgt spid="3">
-                                            <p:txEl>
-                                              <p:pRg st="3" end="3"/>
-                                            </p:txEl>
-                                          </p:spTgt>
-                                        </p:tgtEl>
-                                        <p:attrNameLst>
-                                          <p:attrName>style.visibility</p:attrName>
-                                        </p:attrNameLst>
-                                      </p:cBhvr>
-                                      <p:to>
-                                        <p:strVal val="visible"/>
-                                      </p:to>
-                                    </p:set>
-                                  </p:childTnLst>
-                                </p:cTn>
-                              </p:par>
-                              <p:par>
-                                <p:cTn id="11" presetID="1" presetClass="entr" presetSubtype="0" fill="hold" nodeType="withEffect">
-                                  <p:stCondLst>
-                                    <p:cond delay="0"/>
-                                  </p:stCondLst>
-                                  <p:childTnLst>
-                                    <p:set>
-                                      <p:cBhvr>
-                                        <p:cTn id="12" dur="1" fill="hold">
-                                          <p:stCondLst>
-                                            <p:cond delay="0"/>
-                                          </p:stCondLst>
-                                        </p:cTn>
-                                        <p:tgtEl>
-                                          <p:spTgt spid="3">
-                                            <p:txEl>
-                                              <p:pRg st="4" end="4"/>
-                                            </p:txEl>
-                                          </p:spTgt>
-                                        </p:tgtEl>
-                                        <p:attrNameLst>
-                                          <p:attrName>style.visibility</p:attrName>
-                                        </p:attrNameLst>
-                                      </p:cBhvr>
-                                      <p:to>
-                                        <p:strVal val="visible"/>
-                                      </p:to>
-                                    </p:set>
-                                  </p:childTnLst>
-                                </p:cTn>
-                              </p:par>
-                              <p:par>
-                                <p:cTn id="13" presetID="1" presetClass="entr" presetSubtype="0" fill="hold" nodeType="withEffect">
-                                  <p:stCondLst>
-                                    <p:cond delay="0"/>
-                                  </p:stCondLst>
-                                  <p:childTnLst>
-                                    <p:set>
-                                      <p:cBhvr>
-                                        <p:cTn id="14" dur="1" fill="hold">
-                                          <p:stCondLst>
-                                            <p:cond delay="0"/>
-                                          </p:stCondLst>
-                                        </p:cTn>
-                                        <p:tgtEl>
-                                          <p:spTgt spid="3">
-                                            <p:txEl>
-                                              <p:pRg st="5" end="5"/>
-                                            </p:txEl>
-                                          </p:spTgt>
-                                        </p:tgtEl>
-                                        <p:attrNameLst>
-                                          <p:attrName>style.visibility</p:attrName>
-                                        </p:attrNameLst>
-                                      </p:cBhvr>
-                                      <p:to>
-                                        <p:strVal val="visible"/>
-                                      </p:to>
-                                    </p:set>
-                                  </p:childTnLst>
-                                </p:cTn>
-                              </p:par>
-                              <p:par>
-                                <p:cTn id="15" presetID="1" presetClass="entr" presetSubtype="0" fill="hold" nodeType="withEffect">
-                                  <p:stCondLst>
-                                    <p:cond delay="0"/>
-                                  </p:stCondLst>
-                                  <p:childTnLst>
-                                    <p:set>
-                                      <p:cBhvr>
-                                        <p:cTn id="16" dur="1" fill="hold">
-                                          <p:stCondLst>
-                                            <p:cond delay="0"/>
-                                          </p:stCondLst>
-                                        </p:cTn>
-                                        <p:tgtEl>
-                                          <p:spTgt spid="3">
-                                            <p:txEl>
-                                              <p:pRg st="6" end="6"/>
-                                            </p:txEl>
-                                          </p:spTgt>
-                                        </p:tgtEl>
-                                        <p:attrNameLst>
-                                          <p:attrName>style.visibility</p:attrName>
-                                        </p:attrNameLst>
-                                      </p:cBhvr>
-                                      <p:to>
-                                        <p:strVal val="visible"/>
-                                      </p:to>
-                                    </p:set>
-                                  </p:childTnLst>
-                                </p:cTn>
-                              </p:par>
-                            </p:childTnLst>
-                          </p:cTn>
-                        </p:par>
-                      </p:childTnLst>
-                    </p:cTn>
-                  </p:par>
-                  <p:par>
-                    <p:cTn id="17" fill="hold">
-                      <p:stCondLst>
-                        <p:cond delay="indefinite"/>
-                      </p:stCondLst>
-                      <p:childTnLst>
-                        <p:par>
-                          <p:cTn id="18" fill="hold">
-                            <p:stCondLst>
-                              <p:cond delay="0"/>
-                            </p:stCondLst>
-                            <p:childTnLst>
-                              <p:par>
-                                <p:cTn id="19" presetID="1" presetClass="entr" presetSubtype="0" fill="hold" nodeType="clickEffect">
-                                  <p:stCondLst>
-                                    <p:cond delay="0"/>
-                                  </p:stCondLst>
-                                  <p:childTnLst>
-                                    <p:set>
-                                      <p:cBhvr>
-                                        <p:cTn id="20" dur="1" fill="hold">
-                                          <p:stCondLst>
-                                            <p:cond delay="0"/>
-                                          </p:stCondLst>
-                                        </p:cTn>
-                                        <p:tgtEl>
-                                          <p:spTgt spid="3">
-                                            <p:txEl>
-                                              <p:pRg st="7" end="7"/>
-                                            </p:txEl>
-                                          </p:spTgt>
-                                        </p:tgtEl>
-                                        <p:attrNameLst>
-                                          <p:attrName>style.visibility</p:attrName>
-                                        </p:attrNameLst>
-                                      </p:cBhvr>
-                                      <p:to>
-                                        <p:strVal val="visible"/>
-                                      </p:to>
-                                    </p:set>
-                                  </p:childTnLst>
-                                </p:cTn>
-                              </p:par>
-                              <p:par>
-                                <p:cTn id="21" presetID="1" presetClass="entr" presetSubtype="0" fill="hold" nodeType="withEffect">
-                                  <p:stCondLst>
-                                    <p:cond delay="0"/>
-                                  </p:stCondLst>
-                                  <p:childTnLst>
-                                    <p:set>
-                                      <p:cBhvr>
-                                        <p:cTn id="22" dur="1" fill="hold">
-                                          <p:stCondLst>
-                                            <p:cond delay="0"/>
-                                          </p:stCondLst>
-                                        </p:cTn>
-                                        <p:tgtEl>
-                                          <p:spTgt spid="3">
-                                            <p:txEl>
-                                              <p:pRg st="8" end="8"/>
-                                            </p:txEl>
-                                          </p:spTgt>
-                                        </p:tgtEl>
-                                        <p:attrNameLst>
-                                          <p:attrName>style.visibility</p:attrName>
-                                        </p:attrNameLst>
-                                      </p:cBhvr>
-                                      <p:to>
-                                        <p:strVal val="visible"/>
-                                      </p:to>
-                                    </p:set>
-                                  </p:childTnLst>
-                                </p:cTn>
-                              </p:par>
-                            </p:childTnLst>
-                          </p:cTn>
-                        </p:par>
-                      </p:childTnLst>
-                    </p:cTn>
-                  </p:par>
-                </p:childTnLst>
-              </p:cTn>
-              <p:prevCondLst>
-                <p:cond evt="onPrev" delay="0">
-                  <p:tgtEl>
-                    <p:sldTgt/>
-                  </p:tgtEl>
-                </p:cond>
-              </p:prevCondLst>
-              <p:nextCondLst>
-                <p:cond evt="onNext" delay="0">
-                  <p:tgtEl>
-                    <p:sldTgt/>
-                  </p:tgtEl>
-                </p:cond>
-              </p:nextCondLst>
-            </p:seq>
-          </p:childTnLst>
-        </p:cTn>
-      </p:par>
-    </p:tnLst>
-  </p:timing>
-</p:sld>
-</file>
-
-<file path=ppt/slides/slide44.xml><?xml version="1.0" encoding="utf-8"?>
-<p:sld xmlns:a="http://schemas.openxmlformats.org/drawingml/2006/main" xmlns:r="http://schemas.openxmlformats.org/officeDocument/2006/relationships" xmlns:p="http://schemas.openxmlformats.org/presentationml/2006/main" show="0">
-  <p:cSld>
-    <p:spTree>
-      <p:nvGrpSpPr>
-        <p:cNvPr id="1" name="">
-          <a:extLst>
-            <a:ext uri="{FF2B5EF4-FFF2-40B4-BE49-F238E27FC236}">
-              <a16:creationId xmlns:a16="http://schemas.microsoft.com/office/drawing/2014/main" id="{3DEF50BD-DE05-3210-D4B9-8B33DAC1E71F}"/>
-            </a:ext>
-          </a:extLst>
-        </p:cNvPr>
-        <p:cNvGrpSpPr/>
-        <p:nvPr/>
-      </p:nvGrpSpPr>
-      <p:grpSpPr>
-        <a:xfrm>
-          <a:off x="0" y="0"/>
-          <a:ext cx="0" cy="0"/>
-          <a:chOff x="0" y="0"/>
-          <a:chExt cx="0" cy="0"/>
-        </a:xfrm>
-      </p:grpSpPr>
-      <mc:AlternateContent xmlns:mc="http://schemas.openxmlformats.org/markup-compatibility/2006">
-        <mc:Choice xmlns:a14="http://schemas.microsoft.com/office/drawing/2010/main" Requires="a14">
-          <p:sp>
-            <p:nvSpPr>
-              <p:cNvPr id="3" name="Content Placeholder 2">
-                <a:extLst>
-                  <a:ext uri="{FF2B5EF4-FFF2-40B4-BE49-F238E27FC236}">
-                    <a16:creationId xmlns:a16="http://schemas.microsoft.com/office/drawing/2014/main" id="{E7FF2D76-4C35-A40C-9269-D6BC220EB91C}"/>
-                  </a:ext>
-                </a:extLst>
-              </p:cNvPr>
-              <p:cNvSpPr>
-                <a:spLocks noGrp="1"/>
-              </p:cNvSpPr>
-              <p:nvPr>
-                <p:ph idx="1"/>
-              </p:nvPr>
-            </p:nvSpPr>
-            <p:spPr>
-              <a:xfrm>
-                <a:off x="838200" y="1123406"/>
-                <a:ext cx="10515600" cy="5470724"/>
-              </a:xfrm>
-            </p:spPr>
-            <p:txBody>
-              <a:bodyPr>
-                <a:normAutofit/>
-              </a:bodyPr>
-              <a:lstStyle/>
-              <a:p>
-                <a:pPr marL="0" indent="0">
-                  <a:buNone/>
-                </a:pPr>
-                <a:r>
-                  <a:rPr lang="en-US" dirty="0"/>
-                  <a:t>What are the properties of a good hash function?  </a:t>
-                </a:r>
-              </a:p>
-              <a:p>
-                <a:pPr marL="514350" indent="-514350">
-                  <a:buFont typeface="+mj-lt"/>
-                  <a:buAutoNum type="arabicPeriod"/>
-                </a:pPr>
-                <a:r>
-                  <a:rPr lang="en-US" dirty="0"/>
-                  <a:t>For key values, </a:t>
-                </a:r>
-                <a14:m>
-                  <m:oMath xmlns:m="http://schemas.openxmlformats.org/officeDocument/2006/math">
-                    <m:r>
-                      <a:rPr lang="en-US" i="1">
-                        <a:latin typeface="Cambria Math" panose="02040503050406030204" pitchFamily="18" charset="0"/>
-                      </a:rPr>
-                      <m:t>𝐾</m:t>
-                    </m:r>
-                  </m:oMath>
-                </a14:m>
-                <a:r>
-                  <a:rPr lang="en-US" dirty="0"/>
-                  <a:t>, want a </a:t>
-                </a:r>
-                <a:r>
-                  <a:rPr lang="en-US" b="1" dirty="0"/>
-                  <a:t>uniform distribution over </a:t>
-                </a:r>
-                <a14:m>
-                  <m:oMath xmlns:m="http://schemas.openxmlformats.org/officeDocument/2006/math">
-                    <m:r>
-                      <a:rPr lang="en-US" b="1" i="1" smtClean="0">
-                        <a:latin typeface="Cambria Math" panose="02040503050406030204" pitchFamily="18" charset="0"/>
-                      </a:rPr>
-                      <m:t>𝒎</m:t>
-                    </m:r>
-                  </m:oMath>
-                </a14:m>
-                <a:r>
-                  <a:rPr lang="en-US" b="1" dirty="0"/>
-                  <a:t> hash values</a:t>
-                </a:r>
-              </a:p>
-              <a:p>
-                <a:pPr marL="457200" lvl="1" indent="0">
-                  <a:buNone/>
-                </a:pPr>
-                <a14:m>
-                  <m:oMathPara xmlns:m="http://schemas.openxmlformats.org/officeDocument/2006/math">
-                    <m:oMathParaPr>
-                      <m:jc m:val="centerGroup"/>
-                    </m:oMathParaPr>
-                    <m:oMath xmlns:m="http://schemas.openxmlformats.org/officeDocument/2006/math">
-                      <m:r>
-                        <a:rPr lang="en-US" b="1" i="1">
-                          <a:latin typeface="Cambria Math" panose="02040503050406030204" pitchFamily="18" charset="0"/>
-                        </a:rPr>
-                        <m:t>𝒇</m:t>
-                      </m:r>
-                      <m:r>
-                        <a:rPr lang="en-US" b="1" i="1">
-                          <a:latin typeface="Cambria Math" panose="02040503050406030204" pitchFamily="18" charset="0"/>
-                        </a:rPr>
-                        <m:t>(</m:t>
-                      </m:r>
-                      <m:r>
-                        <a:rPr lang="en-US" b="1" i="1">
-                          <a:latin typeface="Cambria Math" panose="02040503050406030204" pitchFamily="18" charset="0"/>
-                        </a:rPr>
-                        <m:t>𝒌</m:t>
-                      </m:r>
-                      <m:r>
-                        <a:rPr lang="en-US" b="1" i="1">
-                          <a:latin typeface="Cambria Math" panose="02040503050406030204" pitchFamily="18" charset="0"/>
-                        </a:rPr>
-                        <m:t>)~</m:t>
-                      </m:r>
-                      <m:r>
-                        <a:rPr lang="en-US" b="1" i="1">
-                          <a:latin typeface="Cambria Math" panose="02040503050406030204" pitchFamily="18" charset="0"/>
-                          <a:ea typeface="Cambria Math" panose="02040503050406030204" pitchFamily="18" charset="0"/>
-                        </a:rPr>
-                        <m:t>𝑼</m:t>
-                      </m:r>
-                      <m:r>
-                        <a:rPr lang="en-US" b="1" i="1">
-                          <a:latin typeface="Cambria Math" panose="02040503050406030204" pitchFamily="18" charset="0"/>
-                          <a:ea typeface="Cambria Math" panose="02040503050406030204" pitchFamily="18" charset="0"/>
-                        </a:rPr>
-                        <m:t>(</m:t>
-                      </m:r>
-                      <m:r>
-                        <a:rPr lang="en-US" b="1" i="1">
-                          <a:latin typeface="Cambria Math" panose="02040503050406030204" pitchFamily="18" charset="0"/>
-                          <a:ea typeface="Cambria Math" panose="02040503050406030204" pitchFamily="18" charset="0"/>
-                        </a:rPr>
-                        <m:t>𝟎</m:t>
-                      </m:r>
-                      <m:r>
-                        <a:rPr lang="en-US" b="1" i="1">
-                          <a:latin typeface="Cambria Math" panose="02040503050406030204" pitchFamily="18" charset="0"/>
-                          <a:ea typeface="Cambria Math" panose="02040503050406030204" pitchFamily="18" charset="0"/>
-                        </a:rPr>
-                        <m:t>,</m:t>
-                      </m:r>
-                      <m:r>
-                        <a:rPr lang="en-US" b="1" i="1" smtClean="0">
-                          <a:latin typeface="Cambria Math" panose="02040503050406030204" pitchFamily="18" charset="0"/>
-                          <a:ea typeface="Cambria Math" panose="02040503050406030204" pitchFamily="18" charset="0"/>
-                        </a:rPr>
-                        <m:t>𝒎</m:t>
-                      </m:r>
-                      <m:r>
-                        <a:rPr lang="en-US" b="1" i="1">
-                          <a:latin typeface="Cambria Math" panose="02040503050406030204" pitchFamily="18" charset="0"/>
-                          <a:ea typeface="Cambria Math" panose="02040503050406030204" pitchFamily="18" charset="0"/>
-                        </a:rPr>
-                        <m:t>)</m:t>
-                      </m:r>
-                    </m:oMath>
-                  </m:oMathPara>
-                </a14:m>
-                <a:endParaRPr lang="en-US" b="1" dirty="0"/>
-              </a:p>
-              <a:p>
-                <a:pPr lvl="1"/>
-                <a:r>
-                  <a:rPr lang="en-US" dirty="0"/>
-                  <a:t>For </a:t>
-                </a:r>
-                <a14:m>
-                  <m:oMath xmlns:m="http://schemas.openxmlformats.org/officeDocument/2006/math">
-                    <m:r>
-                      <a:rPr lang="en-US" b="0" i="1" smtClean="0">
-                        <a:latin typeface="Cambria Math" panose="02040503050406030204" pitchFamily="18" charset="0"/>
-                      </a:rPr>
-                      <m:t>𝑚</m:t>
-                    </m:r>
-                  </m:oMath>
-                </a14:m>
-                <a:r>
-                  <a:rPr lang="en-US" dirty="0"/>
-                  <a:t> length hash table probability of bucket </a:t>
-                </a:r>
-                <a14:m>
-                  <m:oMath xmlns:m="http://schemas.openxmlformats.org/officeDocument/2006/math">
-                    <m:r>
-                      <a:rPr lang="en-US" b="0" i="1" smtClean="0">
-                        <a:latin typeface="Cambria Math" panose="02040503050406030204" pitchFamily="18" charset="0"/>
-                      </a:rPr>
-                      <m:t>𝑖</m:t>
-                    </m:r>
-                  </m:oMath>
-                </a14:m>
-                <a:r>
-                  <a:rPr lang="en-US" dirty="0"/>
-                  <a:t>: </a:t>
-                </a:r>
-              </a:p>
-              <a:p>
-                <a:pPr marL="457200" lvl="1" indent="0">
-                  <a:buNone/>
-                </a:pPr>
-                <a14:m>
-                  <m:oMathPara xmlns:m="http://schemas.openxmlformats.org/officeDocument/2006/math">
-                    <m:oMathParaPr>
-                      <m:jc m:val="centerGroup"/>
-                    </m:oMathParaPr>
-                    <m:oMath xmlns:m="http://schemas.openxmlformats.org/officeDocument/2006/math">
-                      <m:r>
-                        <m:rPr>
-                          <m:sty m:val="p"/>
-                        </m:rPr>
-                        <a:rPr lang="en-US" b="0" i="0" smtClean="0">
-                          <a:latin typeface="Cambria Math" panose="02040503050406030204" pitchFamily="18" charset="0"/>
-                        </a:rPr>
-                        <m:t>P</m:t>
-                      </m:r>
-                      <m:d>
-                        <m:dPr>
-                          <m:ctrlPr>
-                            <a:rPr lang="en-US" i="1" smtClean="0">
-                              <a:latin typeface="Cambria Math" panose="02040503050406030204" pitchFamily="18" charset="0"/>
-                            </a:rPr>
-                          </m:ctrlPr>
-                        </m:dPr>
-                        <m:e>
-                          <m:r>
-                            <a:rPr lang="en-US" b="0" i="1">
-                              <a:latin typeface="Cambria Math" panose="02040503050406030204" pitchFamily="18" charset="0"/>
-                            </a:rPr>
-                            <m:t>𝑓</m:t>
-                          </m:r>
-                          <m:d>
-                            <m:dPr>
-                              <m:ctrlPr>
-                                <a:rPr lang="en-US" i="1">
-                                  <a:latin typeface="Cambria Math" panose="02040503050406030204" pitchFamily="18" charset="0"/>
-                                </a:rPr>
-                              </m:ctrlPr>
-                            </m:dPr>
-                            <m:e>
-                              <m:r>
-                                <a:rPr lang="en-US" b="0" i="1">
-                                  <a:latin typeface="Cambria Math" panose="02040503050406030204" pitchFamily="18" charset="0"/>
-                                </a:rPr>
-                                <m:t>𝑘</m:t>
-                              </m:r>
-                            </m:e>
-                          </m:d>
-                          <m:r>
-                            <a:rPr lang="en-US" b="0" i="1" smtClean="0">
-                              <a:latin typeface="Cambria Math" panose="02040503050406030204" pitchFamily="18" charset="0"/>
-                            </a:rPr>
-                            <m:t>=</m:t>
-                          </m:r>
-                          <m:r>
-                            <a:rPr lang="en-US" b="0" i="1" smtClean="0">
-                              <a:latin typeface="Cambria Math" panose="02040503050406030204" pitchFamily="18" charset="0"/>
-                            </a:rPr>
-                            <m:t>𝑖</m:t>
-                          </m:r>
-                        </m:e>
-                      </m:d>
-                      <m:r>
-                        <a:rPr lang="en-US" b="0" i="1" smtClean="0">
-                          <a:latin typeface="Cambria Math" panose="02040503050406030204" pitchFamily="18" charset="0"/>
-                        </a:rPr>
-                        <m:t>=</m:t>
-                      </m:r>
-                      <m:f>
-                        <m:fPr>
-                          <m:ctrlPr>
-                            <a:rPr lang="en-US" b="0" i="1" smtClean="0">
-                              <a:latin typeface="Cambria Math" panose="02040503050406030204" pitchFamily="18" charset="0"/>
-                            </a:rPr>
-                          </m:ctrlPr>
-                        </m:fPr>
-                        <m:num>
-                          <m:r>
-                            <a:rPr lang="en-US" b="0" i="1" smtClean="0">
-                              <a:latin typeface="Cambria Math" panose="02040503050406030204" pitchFamily="18" charset="0"/>
-                            </a:rPr>
-                            <m:t>1</m:t>
-                          </m:r>
-                        </m:num>
-                        <m:den>
-                          <m:r>
-                            <a:rPr lang="en-US" b="0" i="1" smtClean="0">
-                              <a:latin typeface="Cambria Math" panose="02040503050406030204" pitchFamily="18" charset="0"/>
-                            </a:rPr>
-                            <m:t>𝑚</m:t>
-                          </m:r>
-                        </m:den>
-                      </m:f>
-                    </m:oMath>
-                  </m:oMathPara>
-                </a14:m>
-                <a:endParaRPr lang="en-US" dirty="0"/>
-              </a:p>
-              <a:p>
-                <a:pPr lvl="1"/>
-                <a:r>
-                  <a:rPr lang="en-US" b="1" dirty="0"/>
-                  <a:t>Lumpy hash values </a:t>
-                </a:r>
-                <a:r>
-                  <a:rPr lang="en-US" dirty="0"/>
-                  <a:t>lead to increased </a:t>
-                </a:r>
-                <a:r>
-                  <a:rPr lang="en-US" b="1" dirty="0"/>
-                  <a:t>hash collisions </a:t>
-                </a:r>
-              </a:p>
-              <a:p>
-                <a:pPr lvl="1"/>
-                <a:r>
-                  <a:rPr lang="en-US" dirty="0"/>
-                  <a:t>Can verify with </a:t>
-                </a:r>
-                <a14:m>
-                  <m:oMath xmlns:m="http://schemas.openxmlformats.org/officeDocument/2006/math">
-                    <m:sSup>
-                      <m:sSupPr>
-                        <m:ctrlPr>
-                          <a:rPr lang="en-US" i="1">
-                            <a:latin typeface="Cambria Math" panose="02040503050406030204" pitchFamily="18" charset="0"/>
-                          </a:rPr>
-                        </m:ctrlPr>
-                      </m:sSupPr>
-                      <m:e>
-                        <m:r>
-                          <a:rPr lang="en-US" i="1">
-                            <a:latin typeface="Cambria Math" panose="02040503050406030204" pitchFamily="18" charset="0"/>
-                            <a:ea typeface="Cambria Math" panose="02040503050406030204" pitchFamily="18" charset="0"/>
-                          </a:rPr>
-                          <m:t>𝜒</m:t>
-                        </m:r>
-                      </m:e>
-                      <m:sup>
-                        <m:r>
-                          <a:rPr lang="en-US" i="1">
-                            <a:latin typeface="Cambria Math" panose="02040503050406030204" pitchFamily="18" charset="0"/>
-                          </a:rPr>
-                          <m:t>2</m:t>
-                        </m:r>
-                      </m:sup>
-                    </m:sSup>
-                  </m:oMath>
-                </a14:m>
-                <a:r>
-                  <a:rPr lang="en-US" dirty="0"/>
-                  <a:t> test</a:t>
-                </a:r>
-              </a:p>
-              <a:p>
-                <a:pPr marL="514350" indent="-514350">
-                  <a:buFont typeface="+mj-lt"/>
-                  <a:buAutoNum type="arabicPeriod"/>
-                </a:pPr>
-                <a:r>
-                  <a:rPr lang="en-US" dirty="0"/>
-                  <a:t>Resolution method for inevitable hash collisions</a:t>
-                </a:r>
-              </a:p>
-              <a:p>
-                <a:pPr lvl="1"/>
-                <a:r>
-                  <a:rPr lang="en-US" dirty="0"/>
-                  <a:t>Probability of collision increases as table fills </a:t>
-                </a:r>
-              </a:p>
-            </p:txBody>
-          </p:sp>
-        </mc:Choice>
-        <mc:Fallback>
-          <p:sp>
-            <p:nvSpPr>
-              <p:cNvPr id="3" name="Content Placeholder 2">
-                <a:extLst>
-                  <a:ext uri="{FF2B5EF4-FFF2-40B4-BE49-F238E27FC236}">
-                    <a16:creationId xmlns:a16="http://schemas.microsoft.com/office/drawing/2014/main" id="{E7FF2D76-4C35-A40C-9269-D6BC220EB91C}"/>
-                  </a:ext>
-                </a:extLst>
-              </p:cNvPr>
-              <p:cNvSpPr>
-                <a:spLocks noGrp="1" noRot="1" noChangeAspect="1" noMove="1" noResize="1" noEditPoints="1" noAdjustHandles="1" noChangeArrowheads="1" noChangeShapeType="1" noTextEdit="1"/>
-              </p:cNvSpPr>
-              <p:nvPr>
-                <p:ph idx="1"/>
-              </p:nvPr>
-            </p:nvSpPr>
-            <p:spPr>
-              <a:xfrm>
-                <a:off x="838200" y="1123406"/>
-                <a:ext cx="10515600" cy="5470724"/>
-              </a:xfrm>
-              <a:blipFill>
-                <a:blip r:embed="rId2"/>
-                <a:stretch>
-                  <a:fillRect l="-1217" t="-1782"/>
-                </a:stretch>
-              </a:blipFill>
-            </p:spPr>
-            <p:txBody>
-              <a:bodyPr/>
-              <a:lstStyle/>
-              <a:p>
-                <a:r>
-                  <a:rPr lang="en-US">
-                    <a:noFill/>
-                  </a:rPr>
-                  <a:t> </a:t>
-                </a:r>
-              </a:p>
-            </p:txBody>
-          </p:sp>
-        </mc:Fallback>
-      </mc:AlternateContent>
-      <p:sp>
-        <p:nvSpPr>
-          <p:cNvPr id="6" name="Title 1">
-            <a:extLst>
-              <a:ext uri="{FF2B5EF4-FFF2-40B4-BE49-F238E27FC236}">
-                <a16:creationId xmlns:a16="http://schemas.microsoft.com/office/drawing/2014/main" id="{54D4B1D6-DA17-4F02-0980-FCFD3F705CFE}"/>
-              </a:ext>
-            </a:extLst>
-          </p:cNvPr>
-          <p:cNvSpPr txBox="1">
-            <a:spLocks/>
-          </p:cNvSpPr>
-          <p:nvPr/>
-        </p:nvSpPr>
-        <p:spPr>
-          <a:xfrm>
-            <a:off x="838200" y="-635"/>
-            <a:ext cx="10515600" cy="1325563"/>
-          </a:xfrm>
-          <a:prstGeom prst="rect">
-            <a:avLst/>
-          </a:prstGeom>
-        </p:spPr>
-        <p:txBody>
-          <a:bodyPr vert="horz" lIns="91440" tIns="45720" rIns="91440" bIns="45720" rtlCol="0" anchor="ctr">
-            <a:normAutofit/>
-          </a:bodyPr>
-          <a:lstStyle>
-            <a:lvl1pPr algn="l" defTabSz="914400" rtl="0" eaLnBrk="1" latinLnBrk="0" hangingPunct="1">
-              <a:lnSpc>
-                <a:spcPct val="90000"/>
-              </a:lnSpc>
-              <a:spcBef>
-                <a:spcPct val="0"/>
-              </a:spcBef>
-              <a:buNone/>
-              <a:defRPr sz="4400" kern="1200">
-                <a:solidFill>
-                  <a:schemeClr val="tx1"/>
-                </a:solidFill>
-                <a:latin typeface="+mj-lt"/>
-                <a:ea typeface="+mj-ea"/>
-                <a:cs typeface="+mj-cs"/>
-              </a:defRPr>
-            </a:lvl1pPr>
-          </a:lstStyle>
-          <a:p>
-            <a:r>
-              <a:rPr lang="en-US" dirty="0">
-                <a:latin typeface="+mn-lt"/>
-              </a:rPr>
-              <a:t>Introduction to Hashing</a:t>
-            </a:r>
-          </a:p>
-        </p:txBody>
-      </p:sp>
-    </p:spTree>
-    <p:extLst>
-      <p:ext uri="{BB962C8B-B14F-4D97-AF65-F5344CB8AC3E}">
-        <p14:creationId xmlns:p14="http://schemas.microsoft.com/office/powerpoint/2010/main" val="311143311"/>
-      </p:ext>
-    </p:extLst>
-  </p:cSld>
-  <p:clrMapOvr>
-    <a:masterClrMapping/>
-  </p:clrMapOvr>
-  <p:timing>
-    <p:tnLst>
-      <p:par>
-        <p:cTn id="1" dur="indefinite" restart="never" nodeType="tmRoot">
-          <p:childTnLst>
-            <p:seq concurrent="1" nextAc="seek">
-              <p:cTn id="2" dur="indefinite" nodeType="mainSeq">
-                <p:childTnLst>
-                  <p:par>
-                    <p:cTn id="3" fill="hold">
-                      <p:stCondLst>
-                        <p:cond delay="indefinite"/>
-                      </p:stCondLst>
-                      <p:childTnLst>
-                        <p:par>
-                          <p:cTn id="4" fill="hold">
-                            <p:stCondLst>
-                              <p:cond delay="0"/>
-                            </p:stCondLst>
-                            <p:childTnLst>
-                              <p:par>
-                                <p:cTn id="5" presetID="1" presetClass="entr" presetSubtype="0" fill="hold" nodeType="clickEffect">
-                                  <p:stCondLst>
-                                    <p:cond delay="0"/>
-                                  </p:stCondLst>
-                                  <p:childTnLst>
-                                    <p:set>
-                                      <p:cBhvr>
-                                        <p:cTn id="6" dur="1" fill="hold">
-                                          <p:stCondLst>
-                                            <p:cond delay="0"/>
-                                          </p:stCondLst>
-                                        </p:cTn>
-                                        <p:tgtEl>
-                                          <p:spTgt spid="3">
-                                            <p:txEl>
-                                              <p:pRg st="1" end="1"/>
-                                            </p:txEl>
-                                          </p:spTgt>
-                                        </p:tgtEl>
-                                        <p:attrNameLst>
-                                          <p:attrName>style.visibility</p:attrName>
-                                        </p:attrNameLst>
-                                      </p:cBhvr>
-                                      <p:to>
-                                        <p:strVal val="visible"/>
-                                      </p:to>
-                                    </p:set>
-                                  </p:childTnLst>
-                                </p:cTn>
-                              </p:par>
-                              <p:par>
-                                <p:cTn id="7" presetID="1" presetClass="entr" presetSubtype="0" fill="hold" nodeType="withEffect">
-                                  <p:stCondLst>
-                                    <p:cond delay="0"/>
-                                  </p:stCondLst>
-                                  <p:childTnLst>
-                                    <p:set>
-                                      <p:cBhvr>
-                                        <p:cTn id="8" dur="1" fill="hold">
-                                          <p:stCondLst>
-                                            <p:cond delay="0"/>
-                                          </p:stCondLst>
-                                        </p:cTn>
-                                        <p:tgtEl>
-                                          <p:spTgt spid="3">
-                                            <p:txEl>
-                                              <p:pRg st="2" end="2"/>
-                                            </p:txEl>
-                                          </p:spTgt>
-                                        </p:tgtEl>
-                                        <p:attrNameLst>
-                                          <p:attrName>style.visibility</p:attrName>
-                                        </p:attrNameLst>
-                                      </p:cBhvr>
-                                      <p:to>
-                                        <p:strVal val="visible"/>
-                                      </p:to>
-                                    </p:set>
-                                  </p:childTnLst>
-                                </p:cTn>
-                              </p:par>
-                              <p:par>
-                                <p:cTn id="9" presetID="1" presetClass="entr" presetSubtype="0" fill="hold" nodeType="withEffect">
-                                  <p:stCondLst>
-                                    <p:cond delay="0"/>
-                                  </p:stCondLst>
-                                  <p:childTnLst>
-                                    <p:set>
-                                      <p:cBhvr>
-                                        <p:cTn id="10" dur="1" fill="hold">
-                                          <p:stCondLst>
-                                            <p:cond delay="0"/>
-                                          </p:stCondLst>
-                                        </p:cTn>
-                                        <p:tgtEl>
-                                          <p:spTgt spid="3">
-                                            <p:txEl>
-                                              <p:pRg st="3" end="3"/>
-                                            </p:txEl>
-                                          </p:spTgt>
-                                        </p:tgtEl>
-                                        <p:attrNameLst>
-                                          <p:attrName>style.visibility</p:attrName>
-                                        </p:attrNameLst>
-                                      </p:cBhvr>
-                                      <p:to>
-                                        <p:strVal val="visible"/>
-                                      </p:to>
-                                    </p:set>
-                                  </p:childTnLst>
-                                </p:cTn>
-                              </p:par>
-                              <p:par>
-                                <p:cTn id="11" presetID="1" presetClass="entr" presetSubtype="0" fill="hold" nodeType="withEffect">
-                                  <p:stCondLst>
-                                    <p:cond delay="0"/>
-                                  </p:stCondLst>
-                                  <p:childTnLst>
-                                    <p:set>
-                                      <p:cBhvr>
-                                        <p:cTn id="12" dur="1" fill="hold">
-                                          <p:stCondLst>
-                                            <p:cond delay="0"/>
-                                          </p:stCondLst>
-                                        </p:cTn>
-                                        <p:tgtEl>
-                                          <p:spTgt spid="3">
-                                            <p:txEl>
-                                              <p:pRg st="4" end="4"/>
-                                            </p:txEl>
-                                          </p:spTgt>
-                                        </p:tgtEl>
-                                        <p:attrNameLst>
-                                          <p:attrName>style.visibility</p:attrName>
-                                        </p:attrNameLst>
-                                      </p:cBhvr>
-                                      <p:to>
-                                        <p:strVal val="visible"/>
-                                      </p:to>
-                                    </p:set>
-                                  </p:childTnLst>
-                                </p:cTn>
-                              </p:par>
-                              <p:par>
-                                <p:cTn id="13" presetID="1" presetClass="entr" presetSubtype="0" fill="hold" nodeType="withEffect">
-                                  <p:stCondLst>
-                                    <p:cond delay="0"/>
-                                  </p:stCondLst>
-                                  <p:childTnLst>
-                                    <p:set>
-                                      <p:cBhvr>
-                                        <p:cTn id="14" dur="1" fill="hold">
-                                          <p:stCondLst>
-                                            <p:cond delay="0"/>
-                                          </p:stCondLst>
-                                        </p:cTn>
-                                        <p:tgtEl>
-                                          <p:spTgt spid="3">
-                                            <p:txEl>
-                                              <p:pRg st="5" end="5"/>
-                                            </p:txEl>
-                                          </p:spTgt>
-                                        </p:tgtEl>
-                                        <p:attrNameLst>
-                                          <p:attrName>style.visibility</p:attrName>
-                                        </p:attrNameLst>
-                                      </p:cBhvr>
-                                      <p:to>
-                                        <p:strVal val="visible"/>
-                                      </p:to>
-                                    </p:set>
-                                  </p:childTnLst>
-                                </p:cTn>
-                              </p:par>
-                              <p:par>
-                                <p:cTn id="15" presetID="1" presetClass="entr" presetSubtype="0" fill="hold" nodeType="withEffect">
-                                  <p:stCondLst>
-                                    <p:cond delay="0"/>
-                                  </p:stCondLst>
-                                  <p:childTnLst>
-                                    <p:set>
-                                      <p:cBhvr>
-                                        <p:cTn id="16" dur="1" fill="hold">
-                                          <p:stCondLst>
-                                            <p:cond delay="0"/>
-                                          </p:stCondLst>
-                                        </p:cTn>
-                                        <p:tgtEl>
-                                          <p:spTgt spid="3">
-                                            <p:txEl>
-                                              <p:pRg st="6" end="6"/>
-                                            </p:txEl>
-                                          </p:spTgt>
-                                        </p:tgtEl>
-                                        <p:attrNameLst>
-                                          <p:attrName>style.visibility</p:attrName>
-                                        </p:attrNameLst>
-                                      </p:cBhvr>
-                                      <p:to>
-                                        <p:strVal val="visible"/>
-                                      </p:to>
-                                    </p:set>
-                                  </p:childTnLst>
-                                </p:cTn>
-                              </p:par>
-                            </p:childTnLst>
-                          </p:cTn>
-                        </p:par>
-                      </p:childTnLst>
-                    </p:cTn>
-                  </p:par>
-                  <p:par>
-                    <p:cTn id="17" fill="hold">
-                      <p:stCondLst>
-                        <p:cond delay="indefinite"/>
-                      </p:stCondLst>
-                      <p:childTnLst>
-                        <p:par>
-                          <p:cTn id="18" fill="hold">
-                            <p:stCondLst>
-                              <p:cond delay="0"/>
-                            </p:stCondLst>
-                            <p:childTnLst>
-                              <p:par>
-                                <p:cTn id="19" presetID="1" presetClass="entr" presetSubtype="0" fill="hold" nodeType="clickEffect">
-                                  <p:stCondLst>
-                                    <p:cond delay="0"/>
-                                  </p:stCondLst>
-                                  <p:childTnLst>
-                                    <p:set>
-                                      <p:cBhvr>
-                                        <p:cTn id="20" dur="1" fill="hold">
-                                          <p:stCondLst>
-                                            <p:cond delay="0"/>
-                                          </p:stCondLst>
-                                        </p:cTn>
-                                        <p:tgtEl>
-                                          <p:spTgt spid="3">
-                                            <p:txEl>
-                                              <p:pRg st="7" end="7"/>
-                                            </p:txEl>
-                                          </p:spTgt>
-                                        </p:tgtEl>
-                                        <p:attrNameLst>
-                                          <p:attrName>style.visibility</p:attrName>
-                                        </p:attrNameLst>
-                                      </p:cBhvr>
-                                      <p:to>
-                                        <p:strVal val="visible"/>
-                                      </p:to>
-                                    </p:set>
-                                  </p:childTnLst>
-                                </p:cTn>
-                              </p:par>
-                              <p:par>
-                                <p:cTn id="21" presetID="1" presetClass="entr" presetSubtype="0" fill="hold" nodeType="withEffect">
-                                  <p:stCondLst>
-                                    <p:cond delay="0"/>
-                                  </p:stCondLst>
-                                  <p:childTnLst>
-                                    <p:set>
-                                      <p:cBhvr>
-                                        <p:cTn id="22" dur="1" fill="hold">
-                                          <p:stCondLst>
-                                            <p:cond delay="0"/>
-                                          </p:stCondLst>
-                                        </p:cTn>
-                                        <p:tgtEl>
-                                          <p:spTgt spid="3">
-                                            <p:txEl>
-                                              <p:pRg st="8" end="8"/>
-                                            </p:txEl>
-                                          </p:spTgt>
-                                        </p:tgtEl>
-                                        <p:attrNameLst>
-                                          <p:attrName>style.visibility</p:attrName>
-                                        </p:attrNameLst>
-                                      </p:cBhvr>
-                                      <p:to>
-                                        <p:strVal val="visible"/>
-                                      </p:to>
-                                    </p:set>
-                                  </p:childTnLst>
-                                </p:cTn>
-                              </p:par>
-                            </p:childTnLst>
-                          </p:cTn>
-                        </p:par>
-                      </p:childTnLst>
-                    </p:cTn>
-                  </p:par>
-                </p:childTnLst>
-              </p:cTn>
-              <p:prevCondLst>
-                <p:cond evt="onPrev" delay="0">
-                  <p:tgtEl>
-                    <p:sldTgt/>
-                  </p:tgtEl>
-                </p:cond>
-              </p:prevCondLst>
-              <p:nextCondLst>
-                <p:cond evt="onNext" delay="0">
-                  <p:tgtEl>
-                    <p:sldTgt/>
-                  </p:tgtEl>
-                </p:cond>
-              </p:nextCondLst>
-            </p:seq>
-          </p:childTnLst>
-        </p:cTn>
-      </p:par>
-    </p:tnLst>
-  </p:timing>
-</p:sld>
-</file>
-
-<file path=ppt/slides/slide45.xml><?xml version="1.0" encoding="utf-8"?>
-<p:sld xmlns:a="http://schemas.openxmlformats.org/drawingml/2006/main" xmlns:r="http://schemas.openxmlformats.org/officeDocument/2006/relationships" xmlns:p="http://schemas.openxmlformats.org/presentationml/2006/main">
-  <p:cSld>
-    <p:spTree>
-      <p:nvGrpSpPr>
-        <p:cNvPr id="1" name="">
-          <a:extLst>
-            <a:ext uri="{FF2B5EF4-FFF2-40B4-BE49-F238E27FC236}">
-              <a16:creationId xmlns:a16="http://schemas.microsoft.com/office/drawing/2014/main" id="{F371966D-4FEB-4376-ED9A-7E24B5D5C48E}"/>
+              <a16:creationId xmlns:a16="http://schemas.microsoft.com/office/drawing/2014/main" id="{B6B4C975-B64B-4985-7BB7-F3995B17CFA7}"/>
             </a:ext>
           </a:extLst>
         </p:cNvPr>
@@ -31120,10 +27387,10 @@
       </p:grpSpPr>
       <p:sp>
         <p:nvSpPr>
-          <p:cNvPr id="3" name="Content Placeholder 2">
+          <p:cNvPr id="2" name="Title 1">
             <a:extLst>
               <a:ext uri="{FF2B5EF4-FFF2-40B4-BE49-F238E27FC236}">
-                <a16:creationId xmlns:a16="http://schemas.microsoft.com/office/drawing/2014/main" id="{73B713D0-5220-5B90-B085-A26344BE90C3}"/>
+                <a16:creationId xmlns:a16="http://schemas.microsoft.com/office/drawing/2014/main" id="{9CD7C15A-15E9-AC73-BE5F-B25552E48A1B}"/>
               </a:ext>
             </a:extLst>
           </p:cNvPr>
@@ -31131,148 +27398,19 @@
             <a:spLocks noGrp="1"/>
           </p:cNvSpPr>
           <p:nvPr>
-            <p:ph idx="1"/>
+            <p:ph type="ctrTitle"/>
           </p:nvPr>
         </p:nvSpPr>
-        <p:spPr>
-          <a:xfrm>
-            <a:off x="838200" y="1123406"/>
-            <a:ext cx="10515600" cy="5470724"/>
-          </a:xfrm>
-        </p:spPr>
+        <p:spPr/>
         <p:txBody>
           <a:bodyPr>
             <a:normAutofit/>
           </a:bodyPr>
           <a:lstStyle/>
           <a:p>
-            <a:pPr marL="0" indent="0">
-              <a:buNone/>
-            </a:pPr>
-            <a:r>
-              <a:rPr lang="en-US" dirty="0"/>
-              <a:t>What are the properties of a good hash function?   </a:t>
-            </a:r>
-          </a:p>
-          <a:p>
-            <a:pPr marL="514350" indent="-514350">
-              <a:buFont typeface="+mj-lt"/>
-              <a:buAutoNum type="arabicPeriod" startAt="4"/>
-            </a:pPr>
-            <a:r>
-              <a:rPr lang="en-US" dirty="0"/>
-              <a:t>Appropriate for the table or required size</a:t>
-            </a:r>
-          </a:p>
-          <a:p>
-            <a:pPr lvl="1"/>
-            <a:r>
-              <a:rPr lang="en-US" dirty="0"/>
-              <a:t>Hash functions produce limited range of hash values   </a:t>
-            </a:r>
-          </a:p>
-          <a:p>
-            <a:pPr lvl="1"/>
-            <a:r>
-              <a:rPr lang="en-US" dirty="0"/>
-              <a:t>Too large wastes space</a:t>
-            </a:r>
-          </a:p>
-          <a:p>
-            <a:pPr lvl="1"/>
-            <a:r>
-              <a:rPr lang="en-US" dirty="0"/>
-              <a:t>Too small leads to collisions</a:t>
-            </a:r>
-          </a:p>
-          <a:p>
-            <a:pPr lvl="1"/>
-            <a:r>
-              <a:rPr lang="en-US" dirty="0"/>
-              <a:t>Ideally make hash table resizable - Half or double as needed </a:t>
-            </a:r>
-          </a:p>
-          <a:p>
-            <a:pPr marL="514350" indent="-514350">
-              <a:buFont typeface="+mj-lt"/>
-              <a:buAutoNum type="arabicPeriod" startAt="4"/>
-            </a:pPr>
-            <a:r>
-              <a:rPr lang="en-US" dirty="0"/>
-              <a:t>Ability to merge hash tables </a:t>
-            </a:r>
-          </a:p>
-          <a:p>
-            <a:pPr lvl="1"/>
-            <a:r>
-              <a:rPr lang="en-US" dirty="0"/>
-              <a:t>Enables parallel processing </a:t>
-            </a:r>
-          </a:p>
-          <a:p>
-            <a:pPr lvl="1"/>
-            <a:r>
-              <a:rPr lang="en-US" dirty="0"/>
-              <a:t>Hash multiple data streams </a:t>
-            </a:r>
-          </a:p>
-          <a:p>
-            <a:endParaRPr lang="en-US" dirty="0"/>
-          </a:p>
-        </p:txBody>
-      </p:sp>
-      <p:sp>
-        <p:nvSpPr>
-          <p:cNvPr id="6" name="Title 1">
-            <a:extLst>
-              <a:ext uri="{FF2B5EF4-FFF2-40B4-BE49-F238E27FC236}">
-                <a16:creationId xmlns:a16="http://schemas.microsoft.com/office/drawing/2014/main" id="{6A499FEE-81C5-CA87-ABD6-FE7C5C870E57}"/>
-              </a:ext>
-            </a:extLst>
-          </p:cNvPr>
-          <p:cNvSpPr txBox="1">
-            <a:spLocks/>
-          </p:cNvSpPr>
-          <p:nvPr/>
-        </p:nvSpPr>
-        <p:spPr>
-          <a:xfrm>
-            <a:off x="838200" y="-635"/>
-            <a:ext cx="10515600" cy="1325563"/>
-          </a:xfrm>
-          <a:prstGeom prst="rect">
-            <a:avLst/>
-          </a:prstGeom>
-        </p:spPr>
-        <p:txBody>
-          <a:bodyPr vert="horz" lIns="91440" tIns="45720" rIns="91440" bIns="45720" rtlCol="0" anchor="ctr">
-            <a:normAutofit/>
-          </a:bodyPr>
-          <a:lstStyle>
-            <a:lvl1pPr algn="l" defTabSz="914400" rtl="0" eaLnBrk="1" latinLnBrk="0" hangingPunct="1">
-              <a:lnSpc>
-                <a:spcPct val="90000"/>
-              </a:lnSpc>
-              <a:spcBef>
-                <a:spcPct val="0"/>
-              </a:spcBef>
-              <a:buNone/>
-              <a:defRPr sz="4400" kern="1200">
-                <a:solidFill>
-                  <a:schemeClr val="tx1"/>
-                </a:solidFill>
-                <a:latin typeface="+mj-lt"/>
-                <a:ea typeface="+mj-ea"/>
-                <a:cs typeface="+mj-cs"/>
-              </a:defRPr>
-            </a:lvl1pPr>
-          </a:lstStyle>
-          <a:p>
-            <a:r>
-              <a:rPr lang="en-US" dirty="0">
-                <a:latin typeface="+mn-lt"/>
-              </a:rPr>
-              <a:t>Introduction to Hashing</a:t>
+            <a:r>
+              <a:rPr lang="en-US" sz="4400" dirty="0"/>
+              <a:t>Hash Functions</a:t>
             </a:r>
           </a:p>
         </p:txBody>
@@ -31280,331 +27418,17 @@
     </p:spTree>
     <p:extLst>
       <p:ext uri="{BB962C8B-B14F-4D97-AF65-F5344CB8AC3E}">
-        <p14:creationId xmlns:p14="http://schemas.microsoft.com/office/powerpoint/2010/main" val="913992634"/>
+        <p14:creationId xmlns:p14="http://schemas.microsoft.com/office/powerpoint/2010/main" val="1330754712"/>
       </p:ext>
     </p:extLst>
   </p:cSld>
   <p:clrMapOvr>
     <a:masterClrMapping/>
   </p:clrMapOvr>
-  <p:timing>
-    <p:tnLst>
-      <p:par>
-        <p:cTn id="1" dur="indefinite" restart="never" nodeType="tmRoot">
-          <p:childTnLst>
-            <p:seq concurrent="1" nextAc="seek">
-              <p:cTn id="2" dur="indefinite" nodeType="mainSeq">
-                <p:childTnLst>
-                  <p:par>
-                    <p:cTn id="3" fill="hold">
-                      <p:stCondLst>
-                        <p:cond delay="indefinite"/>
-                      </p:stCondLst>
-                      <p:childTnLst>
-                        <p:par>
-                          <p:cTn id="4" fill="hold">
-                            <p:stCondLst>
-                              <p:cond delay="0"/>
-                            </p:stCondLst>
-                            <p:childTnLst>
-                              <p:par>
-                                <p:cTn id="5" presetID="1" presetClass="entr" presetSubtype="0" fill="hold" nodeType="clickEffect">
-                                  <p:stCondLst>
-                                    <p:cond delay="0"/>
-                                  </p:stCondLst>
-                                  <p:childTnLst>
-                                    <p:set>
-                                      <p:cBhvr>
-                                        <p:cTn id="6" dur="1" fill="hold">
-                                          <p:stCondLst>
-                                            <p:cond delay="0"/>
-                                          </p:stCondLst>
-                                        </p:cTn>
-                                        <p:tgtEl>
-                                          <p:spTgt spid="3">
-                                            <p:txEl>
-                                              <p:pRg st="1" end="1"/>
-                                            </p:txEl>
-                                          </p:spTgt>
-                                        </p:tgtEl>
-                                        <p:attrNameLst>
-                                          <p:attrName>style.visibility</p:attrName>
-                                        </p:attrNameLst>
-                                      </p:cBhvr>
-                                      <p:to>
-                                        <p:strVal val="visible"/>
-                                      </p:to>
-                                    </p:set>
-                                  </p:childTnLst>
-                                </p:cTn>
-                              </p:par>
-                              <p:par>
-                                <p:cTn id="7" presetID="1" presetClass="entr" presetSubtype="0" fill="hold" nodeType="withEffect">
-                                  <p:stCondLst>
-                                    <p:cond delay="0"/>
-                                  </p:stCondLst>
-                                  <p:childTnLst>
-                                    <p:set>
-                                      <p:cBhvr>
-                                        <p:cTn id="8" dur="1" fill="hold">
-                                          <p:stCondLst>
-                                            <p:cond delay="0"/>
-                                          </p:stCondLst>
-                                        </p:cTn>
-                                        <p:tgtEl>
-                                          <p:spTgt spid="3">
-                                            <p:txEl>
-                                              <p:pRg st="2" end="2"/>
-                                            </p:txEl>
-                                          </p:spTgt>
-                                        </p:tgtEl>
-                                        <p:attrNameLst>
-                                          <p:attrName>style.visibility</p:attrName>
-                                        </p:attrNameLst>
-                                      </p:cBhvr>
-                                      <p:to>
-                                        <p:strVal val="visible"/>
-                                      </p:to>
-                                    </p:set>
-                                  </p:childTnLst>
-                                </p:cTn>
-                              </p:par>
-                              <p:par>
-                                <p:cTn id="9" presetID="1" presetClass="entr" presetSubtype="0" fill="hold" nodeType="withEffect">
-                                  <p:stCondLst>
-                                    <p:cond delay="0"/>
-                                  </p:stCondLst>
-                                  <p:childTnLst>
-                                    <p:set>
-                                      <p:cBhvr>
-                                        <p:cTn id="10" dur="1" fill="hold">
-                                          <p:stCondLst>
-                                            <p:cond delay="0"/>
-                                          </p:stCondLst>
-                                        </p:cTn>
-                                        <p:tgtEl>
-                                          <p:spTgt spid="3">
-                                            <p:txEl>
-                                              <p:pRg st="3" end="3"/>
-                                            </p:txEl>
-                                          </p:spTgt>
-                                        </p:tgtEl>
-                                        <p:attrNameLst>
-                                          <p:attrName>style.visibility</p:attrName>
-                                        </p:attrNameLst>
-                                      </p:cBhvr>
-                                      <p:to>
-                                        <p:strVal val="visible"/>
-                                      </p:to>
-                                    </p:set>
-                                  </p:childTnLst>
-                                </p:cTn>
-                              </p:par>
-                              <p:par>
-                                <p:cTn id="11" presetID="1" presetClass="entr" presetSubtype="0" fill="hold" nodeType="withEffect">
-                                  <p:stCondLst>
-                                    <p:cond delay="0"/>
-                                  </p:stCondLst>
-                                  <p:childTnLst>
-                                    <p:set>
-                                      <p:cBhvr>
-                                        <p:cTn id="12" dur="1" fill="hold">
-                                          <p:stCondLst>
-                                            <p:cond delay="0"/>
-                                          </p:stCondLst>
-                                        </p:cTn>
-                                        <p:tgtEl>
-                                          <p:spTgt spid="3">
-                                            <p:txEl>
-                                              <p:pRg st="4" end="4"/>
-                                            </p:txEl>
-                                          </p:spTgt>
-                                        </p:tgtEl>
-                                        <p:attrNameLst>
-                                          <p:attrName>style.visibility</p:attrName>
-                                        </p:attrNameLst>
-                                      </p:cBhvr>
-                                      <p:to>
-                                        <p:strVal val="visible"/>
-                                      </p:to>
-                                    </p:set>
-                                  </p:childTnLst>
-                                </p:cTn>
-                              </p:par>
-                              <p:par>
-                                <p:cTn id="13" presetID="1" presetClass="entr" presetSubtype="0" fill="hold" nodeType="withEffect">
-                                  <p:stCondLst>
-                                    <p:cond delay="0"/>
-                                  </p:stCondLst>
-                                  <p:childTnLst>
-                                    <p:set>
-                                      <p:cBhvr>
-                                        <p:cTn id="14" dur="1" fill="hold">
-                                          <p:stCondLst>
-                                            <p:cond delay="0"/>
-                                          </p:stCondLst>
-                                        </p:cTn>
-                                        <p:tgtEl>
-                                          <p:spTgt spid="3">
-                                            <p:txEl>
-                                              <p:pRg st="5" end="5"/>
-                                            </p:txEl>
-                                          </p:spTgt>
-                                        </p:tgtEl>
-                                        <p:attrNameLst>
-                                          <p:attrName>style.visibility</p:attrName>
-                                        </p:attrNameLst>
-                                      </p:cBhvr>
-                                      <p:to>
-                                        <p:strVal val="visible"/>
-                                      </p:to>
-                                    </p:set>
-                                  </p:childTnLst>
-                                </p:cTn>
-                              </p:par>
-                            </p:childTnLst>
-                          </p:cTn>
-                        </p:par>
-                      </p:childTnLst>
-                    </p:cTn>
-                  </p:par>
-                  <p:par>
-                    <p:cTn id="15" fill="hold">
-                      <p:stCondLst>
-                        <p:cond delay="indefinite"/>
-                      </p:stCondLst>
-                      <p:childTnLst>
-                        <p:par>
-                          <p:cTn id="16" fill="hold">
-                            <p:stCondLst>
-                              <p:cond delay="0"/>
-                            </p:stCondLst>
-                            <p:childTnLst>
-                              <p:par>
-                                <p:cTn id="17" presetID="1" presetClass="entr" presetSubtype="0" fill="hold" nodeType="clickEffect">
-                                  <p:stCondLst>
-                                    <p:cond delay="0"/>
-                                  </p:stCondLst>
-                                  <p:childTnLst>
-                                    <p:set>
-                                      <p:cBhvr>
-                                        <p:cTn id="18" dur="1" fill="hold">
-                                          <p:stCondLst>
-                                            <p:cond delay="0"/>
-                                          </p:stCondLst>
-                                        </p:cTn>
-                                        <p:tgtEl>
-                                          <p:spTgt spid="3">
-                                            <p:txEl>
-                                              <p:pRg st="6" end="6"/>
-                                            </p:txEl>
-                                          </p:spTgt>
-                                        </p:tgtEl>
-                                        <p:attrNameLst>
-                                          <p:attrName>style.visibility</p:attrName>
-                                        </p:attrNameLst>
-                                      </p:cBhvr>
-                                      <p:to>
-                                        <p:strVal val="visible"/>
-                                      </p:to>
-                                    </p:set>
-                                  </p:childTnLst>
-                                </p:cTn>
-                              </p:par>
-                              <p:par>
-                                <p:cTn id="19" presetID="1" presetClass="entr" presetSubtype="0" fill="hold" nodeType="withEffect">
-                                  <p:stCondLst>
-                                    <p:cond delay="0"/>
-                                  </p:stCondLst>
-                                  <p:childTnLst>
-                                    <p:set>
-                                      <p:cBhvr>
-                                        <p:cTn id="20" dur="1" fill="hold">
-                                          <p:stCondLst>
-                                            <p:cond delay="0"/>
-                                          </p:stCondLst>
-                                        </p:cTn>
-                                        <p:tgtEl>
-                                          <p:spTgt spid="3">
-                                            <p:txEl>
-                                              <p:pRg st="7" end="7"/>
-                                            </p:txEl>
-                                          </p:spTgt>
-                                        </p:tgtEl>
-                                        <p:attrNameLst>
-                                          <p:attrName>style.visibility</p:attrName>
-                                        </p:attrNameLst>
-                                      </p:cBhvr>
-                                      <p:to>
-                                        <p:strVal val="visible"/>
-                                      </p:to>
-                                    </p:set>
-                                  </p:childTnLst>
-                                </p:cTn>
-                              </p:par>
-                              <p:par>
-                                <p:cTn id="21" presetID="1" presetClass="entr" presetSubtype="0" fill="hold" nodeType="withEffect">
-                                  <p:stCondLst>
-                                    <p:cond delay="0"/>
-                                  </p:stCondLst>
-                                  <p:childTnLst>
-                                    <p:set>
-                                      <p:cBhvr>
-                                        <p:cTn id="22" dur="1" fill="hold">
-                                          <p:stCondLst>
-                                            <p:cond delay="0"/>
-                                          </p:stCondLst>
-                                        </p:cTn>
-                                        <p:tgtEl>
-                                          <p:spTgt spid="3">
-                                            <p:txEl>
-                                              <p:pRg st="8" end="8"/>
-                                            </p:txEl>
-                                          </p:spTgt>
-                                        </p:tgtEl>
-                                        <p:attrNameLst>
-                                          <p:attrName>style.visibility</p:attrName>
-                                        </p:attrNameLst>
-                                      </p:cBhvr>
-                                      <p:to>
-                                        <p:strVal val="visible"/>
-                                      </p:to>
-                                    </p:set>
-                                  </p:childTnLst>
-                                </p:cTn>
-                              </p:par>
-                            </p:childTnLst>
-                          </p:cTn>
-                        </p:par>
-                      </p:childTnLst>
-                    </p:cTn>
-                  </p:par>
-                </p:childTnLst>
-              </p:cTn>
-              <p:prevCondLst>
-                <p:cond evt="onPrev" delay="0">
-                  <p:tgtEl>
-                    <p:sldTgt/>
-                  </p:tgtEl>
-                </p:cond>
-              </p:prevCondLst>
-              <p:nextCondLst>
-                <p:cond evt="onNext" delay="0">
-                  <p:tgtEl>
-                    <p:sldTgt/>
-                  </p:tgtEl>
-                </p:cond>
-              </p:nextCondLst>
-            </p:seq>
-          </p:childTnLst>
-        </p:cTn>
-      </p:par>
-    </p:tnLst>
-  </p:timing>
 </p:sld>
 </file>
 
-<file path=ppt/slides/slide46.xml><?xml version="1.0" encoding="utf-8"?>
+<file path=ppt/slides/slide41.xml><?xml version="1.0" encoding="utf-8"?>
 <p:sld xmlns:a="http://schemas.openxmlformats.org/drawingml/2006/main" xmlns:r="http://schemas.openxmlformats.org/officeDocument/2006/relationships" xmlns:p="http://schemas.openxmlformats.org/presentationml/2006/main">
   <p:cSld>
     <p:spTree>
@@ -32008,7 +27832,7 @@
 </p:sld>
 </file>
 
-<file path=ppt/slides/slide47.xml><?xml version="1.0" encoding="utf-8"?>
+<file path=ppt/slides/slide42.xml><?xml version="1.0" encoding="utf-8"?>
 <p:sld xmlns:a="http://schemas.openxmlformats.org/drawingml/2006/main" xmlns:r="http://schemas.openxmlformats.org/officeDocument/2006/relationships" xmlns:p="http://schemas.openxmlformats.org/presentationml/2006/main">
   <p:cSld>
     <p:spTree>
@@ -32530,7 +28354,7 @@
 </p:sld>
 </file>
 
-<file path=ppt/slides/slide48.xml><?xml version="1.0" encoding="utf-8"?>
+<file path=ppt/slides/slide43.xml><?xml version="1.0" encoding="utf-8"?>
 <p:sld xmlns:a="http://schemas.openxmlformats.org/drawingml/2006/main" xmlns:r="http://schemas.openxmlformats.org/officeDocument/2006/relationships" xmlns:p="http://schemas.openxmlformats.org/presentationml/2006/main">
   <p:cSld>
     <p:spTree>
@@ -33669,7 +29493,890 @@
 </p:sld>
 </file>
 
-<file path=ppt/slides/slide49.xml><?xml version="1.0" encoding="utf-8"?>
+<file path=ppt/slides/slide44.xml><?xml version="1.0" encoding="utf-8"?>
+<p:sld xmlns:a="http://schemas.openxmlformats.org/drawingml/2006/main" xmlns:r="http://schemas.openxmlformats.org/officeDocument/2006/relationships" xmlns:p="http://schemas.openxmlformats.org/presentationml/2006/main">
+  <p:cSld>
+    <p:spTree>
+      <p:nvGrpSpPr>
+        <p:cNvPr id="1" name="">
+          <a:extLst>
+            <a:ext uri="{FF2B5EF4-FFF2-40B4-BE49-F238E27FC236}">
+              <a16:creationId xmlns:a16="http://schemas.microsoft.com/office/drawing/2014/main" id="{E72348CF-3DE8-C147-4B0C-26587F28C142}"/>
+            </a:ext>
+          </a:extLst>
+        </p:cNvPr>
+        <p:cNvGrpSpPr/>
+        <p:nvPr/>
+      </p:nvGrpSpPr>
+      <p:grpSpPr>
+        <a:xfrm>
+          <a:off x="0" y="0"/>
+          <a:ext cx="0" cy="0"/>
+          <a:chOff x="0" y="0"/>
+          <a:chExt cx="0" cy="0"/>
+        </a:xfrm>
+      </p:grpSpPr>
+      <p:sp>
+        <p:nvSpPr>
+          <p:cNvPr id="2" name="Title 1">
+            <a:extLst>
+              <a:ext uri="{FF2B5EF4-FFF2-40B4-BE49-F238E27FC236}">
+                <a16:creationId xmlns:a16="http://schemas.microsoft.com/office/drawing/2014/main" id="{47F2A4D2-70CD-4CEA-D93E-4759FF44341E}"/>
+              </a:ext>
+            </a:extLst>
+          </p:cNvPr>
+          <p:cNvSpPr>
+            <a:spLocks noGrp="1"/>
+          </p:cNvSpPr>
+          <p:nvPr>
+            <p:ph type="ctrTitle"/>
+          </p:nvPr>
+        </p:nvSpPr>
+        <p:spPr/>
+        <p:txBody>
+          <a:bodyPr>
+            <a:normAutofit/>
+          </a:bodyPr>
+          <a:lstStyle/>
+          <a:p>
+            <a:r>
+              <a:rPr lang="en-US" sz="4400" dirty="0"/>
+              <a:t>Hash Collisions</a:t>
+            </a:r>
+          </a:p>
+        </p:txBody>
+      </p:sp>
+    </p:spTree>
+    <p:extLst>
+      <p:ext uri="{BB962C8B-B14F-4D97-AF65-F5344CB8AC3E}">
+        <p14:creationId xmlns:p14="http://schemas.microsoft.com/office/powerpoint/2010/main" val="2491891260"/>
+      </p:ext>
+    </p:extLst>
+  </p:cSld>
+  <p:clrMapOvr>
+    <a:masterClrMapping/>
+  </p:clrMapOvr>
+</p:sld>
+</file>
+
+<file path=ppt/slides/slide45.xml><?xml version="1.0" encoding="utf-8"?>
+<p:sld xmlns:a="http://schemas.openxmlformats.org/drawingml/2006/main" xmlns:r="http://schemas.openxmlformats.org/officeDocument/2006/relationships" xmlns:p="http://schemas.openxmlformats.org/presentationml/2006/main" show="0">
+  <p:cSld>
+    <p:spTree>
+      <p:nvGrpSpPr>
+        <p:cNvPr id="1" name=""/>
+        <p:cNvGrpSpPr/>
+        <p:nvPr/>
+      </p:nvGrpSpPr>
+      <p:grpSpPr>
+        <a:xfrm>
+          <a:off x="0" y="0"/>
+          <a:ext cx="0" cy="0"/>
+          <a:chOff x="0" y="0"/>
+          <a:chExt cx="0" cy="0"/>
+        </a:xfrm>
+      </p:grpSpPr>
+      <mc:AlternateContent xmlns:mc="http://schemas.openxmlformats.org/markup-compatibility/2006" xmlns:a14="http://schemas.microsoft.com/office/drawing/2010/main">
+        <mc:Choice Requires="a14">
+          <p:sp>
+            <p:nvSpPr>
+              <p:cNvPr id="3" name="Content Placeholder 2">
+                <a:extLst>
+                  <a:ext uri="{FF2B5EF4-FFF2-40B4-BE49-F238E27FC236}">
+                    <a16:creationId xmlns:a16="http://schemas.microsoft.com/office/drawing/2014/main" id="{258E6AF3-7615-4BD1-878E-A94C93E98F90}"/>
+                  </a:ext>
+                </a:extLst>
+              </p:cNvPr>
+              <p:cNvSpPr>
+                <a:spLocks noGrp="1"/>
+              </p:cNvSpPr>
+              <p:nvPr>
+                <p:ph idx="1"/>
+              </p:nvPr>
+            </p:nvSpPr>
+            <p:spPr>
+              <a:xfrm>
+                <a:off x="838200" y="1123406"/>
+                <a:ext cx="10515600" cy="5470724"/>
+              </a:xfrm>
+            </p:spPr>
+            <p:txBody>
+              <a:bodyPr>
+                <a:normAutofit/>
+              </a:bodyPr>
+              <a:lstStyle/>
+              <a:p>
+                <a:pPr marL="0" indent="0">
+                  <a:buNone/>
+                </a:pPr>
+                <a:r>
+                  <a:rPr lang="en-US" dirty="0"/>
+                  <a:t>What are the properties of a good hash function?  </a:t>
+                </a:r>
+              </a:p>
+              <a:p>
+                <a:pPr marL="514350" indent="-514350">
+                  <a:buFont typeface="+mj-lt"/>
+                  <a:buAutoNum type="arabicPeriod"/>
+                </a:pPr>
+                <a:r>
+                  <a:rPr lang="en-US" dirty="0"/>
+                  <a:t>For key values, </a:t>
+                </a:r>
+                <a14:m>
+                  <m:oMath xmlns:m="http://schemas.openxmlformats.org/officeDocument/2006/math">
+                    <m:r>
+                      <a:rPr lang="en-US" i="1">
+                        <a:latin typeface="Cambria Math" panose="02040503050406030204" pitchFamily="18" charset="0"/>
+                      </a:rPr>
+                      <m:t>𝐾</m:t>
+                    </m:r>
+                  </m:oMath>
+                </a14:m>
+                <a:r>
+                  <a:rPr lang="en-US" dirty="0"/>
+                  <a:t>, want a </a:t>
+                </a:r>
+                <a:r>
+                  <a:rPr lang="en-US" b="1" dirty="0"/>
+                  <a:t>uniform distribution over </a:t>
+                </a:r>
+                <a14:m>
+                  <m:oMath xmlns:m="http://schemas.openxmlformats.org/officeDocument/2006/math">
+                    <m:r>
+                      <a:rPr lang="en-US" b="1" i="1" smtClean="0">
+                        <a:latin typeface="Cambria Math" panose="02040503050406030204" pitchFamily="18" charset="0"/>
+                      </a:rPr>
+                      <m:t>𝒎</m:t>
+                    </m:r>
+                  </m:oMath>
+                </a14:m>
+                <a:r>
+                  <a:rPr lang="en-US" b="1" dirty="0"/>
+                  <a:t> hash values</a:t>
+                </a:r>
+              </a:p>
+              <a:p>
+                <a:pPr marL="457200" lvl="1" indent="0">
+                  <a:buNone/>
+                </a:pPr>
+                <a14:m>
+                  <m:oMathPara xmlns:m="http://schemas.openxmlformats.org/officeDocument/2006/math">
+                    <m:oMathParaPr>
+                      <m:jc m:val="centerGroup"/>
+                    </m:oMathParaPr>
+                    <m:oMath xmlns:m="http://schemas.openxmlformats.org/officeDocument/2006/math">
+                      <m:r>
+                        <a:rPr lang="en-US" b="1" i="1">
+                          <a:latin typeface="Cambria Math" panose="02040503050406030204" pitchFamily="18" charset="0"/>
+                        </a:rPr>
+                        <m:t>𝒇</m:t>
+                      </m:r>
+                      <m:r>
+                        <a:rPr lang="en-US" b="1" i="1">
+                          <a:latin typeface="Cambria Math" panose="02040503050406030204" pitchFamily="18" charset="0"/>
+                        </a:rPr>
+                        <m:t>(</m:t>
+                      </m:r>
+                      <m:r>
+                        <a:rPr lang="en-US" b="1" i="1">
+                          <a:latin typeface="Cambria Math" panose="02040503050406030204" pitchFamily="18" charset="0"/>
+                        </a:rPr>
+                        <m:t>𝒌</m:t>
+                      </m:r>
+                      <m:r>
+                        <a:rPr lang="en-US" b="1" i="1">
+                          <a:latin typeface="Cambria Math" panose="02040503050406030204" pitchFamily="18" charset="0"/>
+                        </a:rPr>
+                        <m:t>)~</m:t>
+                      </m:r>
+                      <m:r>
+                        <a:rPr lang="en-US" b="1" i="1">
+                          <a:latin typeface="Cambria Math" panose="02040503050406030204" pitchFamily="18" charset="0"/>
+                          <a:ea typeface="Cambria Math" panose="02040503050406030204" pitchFamily="18" charset="0"/>
+                        </a:rPr>
+                        <m:t>𝑼</m:t>
+                      </m:r>
+                      <m:r>
+                        <a:rPr lang="en-US" b="1" i="1">
+                          <a:latin typeface="Cambria Math" panose="02040503050406030204" pitchFamily="18" charset="0"/>
+                          <a:ea typeface="Cambria Math" panose="02040503050406030204" pitchFamily="18" charset="0"/>
+                        </a:rPr>
+                        <m:t>(</m:t>
+                      </m:r>
+                      <m:r>
+                        <a:rPr lang="en-US" b="1" i="1">
+                          <a:latin typeface="Cambria Math" panose="02040503050406030204" pitchFamily="18" charset="0"/>
+                          <a:ea typeface="Cambria Math" panose="02040503050406030204" pitchFamily="18" charset="0"/>
+                        </a:rPr>
+                        <m:t>𝟎</m:t>
+                      </m:r>
+                      <m:r>
+                        <a:rPr lang="en-US" b="1" i="1">
+                          <a:latin typeface="Cambria Math" panose="02040503050406030204" pitchFamily="18" charset="0"/>
+                          <a:ea typeface="Cambria Math" panose="02040503050406030204" pitchFamily="18" charset="0"/>
+                        </a:rPr>
+                        <m:t>,</m:t>
+                      </m:r>
+                      <m:r>
+                        <a:rPr lang="en-US" b="1" i="1" smtClean="0">
+                          <a:latin typeface="Cambria Math" panose="02040503050406030204" pitchFamily="18" charset="0"/>
+                          <a:ea typeface="Cambria Math" panose="02040503050406030204" pitchFamily="18" charset="0"/>
+                        </a:rPr>
+                        <m:t>𝒎</m:t>
+                      </m:r>
+                      <m:r>
+                        <a:rPr lang="en-US" b="1" i="1">
+                          <a:latin typeface="Cambria Math" panose="02040503050406030204" pitchFamily="18" charset="0"/>
+                          <a:ea typeface="Cambria Math" panose="02040503050406030204" pitchFamily="18" charset="0"/>
+                        </a:rPr>
+                        <m:t>)</m:t>
+                      </m:r>
+                    </m:oMath>
+                  </m:oMathPara>
+                </a14:m>
+                <a:endParaRPr lang="en-US" b="1" dirty="0"/>
+              </a:p>
+              <a:p>
+                <a:pPr lvl="1"/>
+                <a:r>
+                  <a:rPr lang="en-US" dirty="0"/>
+                  <a:t>For </a:t>
+                </a:r>
+                <a14:m>
+                  <m:oMath xmlns:m="http://schemas.openxmlformats.org/officeDocument/2006/math">
+                    <m:r>
+                      <a:rPr lang="en-US" b="0" i="1" smtClean="0">
+                        <a:latin typeface="Cambria Math" panose="02040503050406030204" pitchFamily="18" charset="0"/>
+                      </a:rPr>
+                      <m:t>𝑚</m:t>
+                    </m:r>
+                  </m:oMath>
+                </a14:m>
+                <a:r>
+                  <a:rPr lang="en-US" dirty="0"/>
+                  <a:t> length hash table probability of bucket </a:t>
+                </a:r>
+                <a14:m>
+                  <m:oMath xmlns:m="http://schemas.openxmlformats.org/officeDocument/2006/math">
+                    <m:r>
+                      <a:rPr lang="en-US" b="0" i="1" smtClean="0">
+                        <a:latin typeface="Cambria Math" panose="02040503050406030204" pitchFamily="18" charset="0"/>
+                      </a:rPr>
+                      <m:t>𝑖</m:t>
+                    </m:r>
+                  </m:oMath>
+                </a14:m>
+                <a:r>
+                  <a:rPr lang="en-US" dirty="0"/>
+                  <a:t>: </a:t>
+                </a:r>
+              </a:p>
+              <a:p>
+                <a:pPr marL="457200" lvl="1" indent="0">
+                  <a:buNone/>
+                </a:pPr>
+                <a14:m>
+                  <m:oMathPara xmlns:m="http://schemas.openxmlformats.org/officeDocument/2006/math">
+                    <m:oMathParaPr>
+                      <m:jc m:val="centerGroup"/>
+                    </m:oMathParaPr>
+                    <m:oMath xmlns:m="http://schemas.openxmlformats.org/officeDocument/2006/math">
+                      <m:r>
+                        <m:rPr>
+                          <m:sty m:val="p"/>
+                        </m:rPr>
+                        <a:rPr lang="en-US" b="0" i="0" smtClean="0">
+                          <a:latin typeface="Cambria Math" panose="02040503050406030204" pitchFamily="18" charset="0"/>
+                        </a:rPr>
+                        <m:t>P</m:t>
+                      </m:r>
+                      <m:d>
+                        <m:dPr>
+                          <m:ctrlPr>
+                            <a:rPr lang="en-US" i="1" smtClean="0">
+                              <a:latin typeface="Cambria Math" panose="02040503050406030204" pitchFamily="18" charset="0"/>
+                            </a:rPr>
+                          </m:ctrlPr>
+                        </m:dPr>
+                        <m:e>
+                          <m:r>
+                            <a:rPr lang="en-US" b="0" i="1">
+                              <a:latin typeface="Cambria Math" panose="02040503050406030204" pitchFamily="18" charset="0"/>
+                            </a:rPr>
+                            <m:t>𝑓</m:t>
+                          </m:r>
+                          <m:d>
+                            <m:dPr>
+                              <m:ctrlPr>
+                                <a:rPr lang="en-US" i="1">
+                                  <a:latin typeface="Cambria Math" panose="02040503050406030204" pitchFamily="18" charset="0"/>
+                                </a:rPr>
+                              </m:ctrlPr>
+                            </m:dPr>
+                            <m:e>
+                              <m:r>
+                                <a:rPr lang="en-US" b="0" i="1">
+                                  <a:latin typeface="Cambria Math" panose="02040503050406030204" pitchFamily="18" charset="0"/>
+                                </a:rPr>
+                                <m:t>𝑘</m:t>
+                              </m:r>
+                            </m:e>
+                          </m:d>
+                          <m:r>
+                            <a:rPr lang="en-US" b="0" i="1" smtClean="0">
+                              <a:latin typeface="Cambria Math" panose="02040503050406030204" pitchFamily="18" charset="0"/>
+                            </a:rPr>
+                            <m:t>=</m:t>
+                          </m:r>
+                          <m:r>
+                            <a:rPr lang="en-US" b="0" i="1" smtClean="0">
+                              <a:latin typeface="Cambria Math" panose="02040503050406030204" pitchFamily="18" charset="0"/>
+                            </a:rPr>
+                            <m:t>𝑖</m:t>
+                          </m:r>
+                        </m:e>
+                      </m:d>
+                      <m:r>
+                        <a:rPr lang="en-US" b="0" i="1" smtClean="0">
+                          <a:latin typeface="Cambria Math" panose="02040503050406030204" pitchFamily="18" charset="0"/>
+                        </a:rPr>
+                        <m:t>=</m:t>
+                      </m:r>
+                      <m:f>
+                        <m:fPr>
+                          <m:ctrlPr>
+                            <a:rPr lang="en-US" b="0" i="1" smtClean="0">
+                              <a:latin typeface="Cambria Math" panose="02040503050406030204" pitchFamily="18" charset="0"/>
+                            </a:rPr>
+                          </m:ctrlPr>
+                        </m:fPr>
+                        <m:num>
+                          <m:r>
+                            <a:rPr lang="en-US" b="0" i="1" smtClean="0">
+                              <a:latin typeface="Cambria Math" panose="02040503050406030204" pitchFamily="18" charset="0"/>
+                            </a:rPr>
+                            <m:t>1</m:t>
+                          </m:r>
+                        </m:num>
+                        <m:den>
+                          <m:r>
+                            <a:rPr lang="en-US" b="0" i="1" smtClean="0">
+                              <a:latin typeface="Cambria Math" panose="02040503050406030204" pitchFamily="18" charset="0"/>
+                            </a:rPr>
+                            <m:t>𝑚</m:t>
+                          </m:r>
+                        </m:den>
+                      </m:f>
+                    </m:oMath>
+                  </m:oMathPara>
+                </a14:m>
+                <a:endParaRPr lang="en-US" dirty="0"/>
+              </a:p>
+              <a:p>
+                <a:pPr lvl="1"/>
+                <a:r>
+                  <a:rPr lang="en-US" b="1" dirty="0"/>
+                  <a:t>Lumpy hash values </a:t>
+                </a:r>
+                <a:r>
+                  <a:rPr lang="en-US" dirty="0"/>
+                  <a:t>lead to increased </a:t>
+                </a:r>
+                <a:r>
+                  <a:rPr lang="en-US" b="1" dirty="0"/>
+                  <a:t>hash collisions </a:t>
+                </a:r>
+              </a:p>
+              <a:p>
+                <a:pPr lvl="1"/>
+                <a:r>
+                  <a:rPr lang="en-US" dirty="0"/>
+                  <a:t>Can verify with </a:t>
+                </a:r>
+                <a14:m>
+                  <m:oMath xmlns:m="http://schemas.openxmlformats.org/officeDocument/2006/math">
+                    <m:sSup>
+                      <m:sSupPr>
+                        <m:ctrlPr>
+                          <a:rPr lang="en-US" i="1">
+                            <a:latin typeface="Cambria Math" panose="02040503050406030204" pitchFamily="18" charset="0"/>
+                          </a:rPr>
+                        </m:ctrlPr>
+                      </m:sSupPr>
+                      <m:e>
+                        <m:r>
+                          <a:rPr lang="en-US" i="1">
+                            <a:latin typeface="Cambria Math" panose="02040503050406030204" pitchFamily="18" charset="0"/>
+                            <a:ea typeface="Cambria Math" panose="02040503050406030204" pitchFamily="18" charset="0"/>
+                          </a:rPr>
+                          <m:t>𝜒</m:t>
+                        </m:r>
+                      </m:e>
+                      <m:sup>
+                        <m:r>
+                          <a:rPr lang="en-US" i="1">
+                            <a:latin typeface="Cambria Math" panose="02040503050406030204" pitchFamily="18" charset="0"/>
+                          </a:rPr>
+                          <m:t>2</m:t>
+                        </m:r>
+                      </m:sup>
+                    </m:sSup>
+                  </m:oMath>
+                </a14:m>
+                <a:r>
+                  <a:rPr lang="en-US" dirty="0"/>
+                  <a:t> test</a:t>
+                </a:r>
+              </a:p>
+              <a:p>
+                <a:pPr marL="514350" indent="-514350">
+                  <a:buFont typeface="+mj-lt"/>
+                  <a:buAutoNum type="arabicPeriod"/>
+                </a:pPr>
+                <a:r>
+                  <a:rPr lang="en-US" dirty="0"/>
+                  <a:t>Resolution method for inevitable hash collisions</a:t>
+                </a:r>
+              </a:p>
+              <a:p>
+                <a:pPr lvl="1"/>
+                <a:r>
+                  <a:rPr lang="en-US" dirty="0"/>
+                  <a:t>Probability of collision increases as table fills </a:t>
+                </a:r>
+              </a:p>
+            </p:txBody>
+          </p:sp>
+        </mc:Choice>
+        <mc:Fallback xmlns="">
+          <p:sp>
+            <p:nvSpPr>
+              <p:cNvPr id="3" name="Content Placeholder 2">
+                <a:extLst>
+                  <a:ext uri="{FF2B5EF4-FFF2-40B4-BE49-F238E27FC236}">
+                    <a16:creationId xmlns:a16="http://schemas.microsoft.com/office/drawing/2014/main" id="{258E6AF3-7615-4BD1-878E-A94C93E98F90}"/>
+                  </a:ext>
+                </a:extLst>
+              </p:cNvPr>
+              <p:cNvSpPr>
+                <a:spLocks noGrp="1" noRot="1" noChangeAspect="1" noMove="1" noResize="1" noEditPoints="1" noAdjustHandles="1" noChangeArrowheads="1" noChangeShapeType="1" noTextEdit="1"/>
+              </p:cNvSpPr>
+              <p:nvPr>
+                <p:ph idx="1"/>
+              </p:nvPr>
+            </p:nvSpPr>
+            <p:spPr>
+              <a:xfrm>
+                <a:off x="838200" y="1123406"/>
+                <a:ext cx="10515600" cy="5470724"/>
+              </a:xfrm>
+              <a:blipFill>
+                <a:blip r:embed="rId2"/>
+                <a:stretch>
+                  <a:fillRect l="-1217" t="-1782"/>
+                </a:stretch>
+              </a:blipFill>
+            </p:spPr>
+            <p:txBody>
+              <a:bodyPr/>
+              <a:lstStyle/>
+              <a:p>
+                <a:r>
+                  <a:rPr lang="en-US">
+                    <a:noFill/>
+                  </a:rPr>
+                  <a:t> </a:t>
+                </a:r>
+              </a:p>
+            </p:txBody>
+          </p:sp>
+        </mc:Fallback>
+      </mc:AlternateContent>
+      <p:sp>
+        <p:nvSpPr>
+          <p:cNvPr id="6" name="Title 1">
+            <a:extLst>
+              <a:ext uri="{FF2B5EF4-FFF2-40B4-BE49-F238E27FC236}">
+                <a16:creationId xmlns:a16="http://schemas.microsoft.com/office/drawing/2014/main" id="{CD29F70F-B868-451B-A65D-8721F4C7A2D9}"/>
+              </a:ext>
+            </a:extLst>
+          </p:cNvPr>
+          <p:cNvSpPr txBox="1">
+            <a:spLocks/>
+          </p:cNvSpPr>
+          <p:nvPr/>
+        </p:nvSpPr>
+        <p:spPr>
+          <a:xfrm>
+            <a:off x="838200" y="-635"/>
+            <a:ext cx="10515600" cy="1325563"/>
+          </a:xfrm>
+          <a:prstGeom prst="rect">
+            <a:avLst/>
+          </a:prstGeom>
+        </p:spPr>
+        <p:txBody>
+          <a:bodyPr vert="horz" lIns="91440" tIns="45720" rIns="91440" bIns="45720" rtlCol="0" anchor="ctr">
+            <a:normAutofit/>
+          </a:bodyPr>
+          <a:lstStyle>
+            <a:lvl1pPr algn="l" defTabSz="914400" rtl="0" eaLnBrk="1" latinLnBrk="0" hangingPunct="1">
+              <a:lnSpc>
+                <a:spcPct val="90000"/>
+              </a:lnSpc>
+              <a:spcBef>
+                <a:spcPct val="0"/>
+              </a:spcBef>
+              <a:buNone/>
+              <a:defRPr sz="4400" kern="1200">
+                <a:solidFill>
+                  <a:schemeClr val="tx1"/>
+                </a:solidFill>
+                <a:latin typeface="+mj-lt"/>
+                <a:ea typeface="+mj-ea"/>
+                <a:cs typeface="+mj-cs"/>
+              </a:defRPr>
+            </a:lvl1pPr>
+          </a:lstStyle>
+          <a:p>
+            <a:r>
+              <a:rPr lang="en-US" dirty="0">
+                <a:latin typeface="+mn-lt"/>
+              </a:rPr>
+              <a:t>Introduction to Hashing</a:t>
+            </a:r>
+          </a:p>
+        </p:txBody>
+      </p:sp>
+    </p:spTree>
+    <p:extLst>
+      <p:ext uri="{BB962C8B-B14F-4D97-AF65-F5344CB8AC3E}">
+        <p14:creationId xmlns:p14="http://schemas.microsoft.com/office/powerpoint/2010/main" val="302899262"/>
+      </p:ext>
+    </p:extLst>
+  </p:cSld>
+  <p:clrMapOvr>
+    <a:masterClrMapping/>
+  </p:clrMapOvr>
+  <p:timing>
+    <p:tnLst>
+      <p:par>
+        <p:cTn id="1" dur="indefinite" restart="never" nodeType="tmRoot">
+          <p:childTnLst>
+            <p:seq concurrent="1" nextAc="seek">
+              <p:cTn id="2" dur="indefinite" nodeType="mainSeq">
+                <p:childTnLst>
+                  <p:par>
+                    <p:cTn id="3" fill="hold">
+                      <p:stCondLst>
+                        <p:cond delay="indefinite"/>
+                      </p:stCondLst>
+                      <p:childTnLst>
+                        <p:par>
+                          <p:cTn id="4" fill="hold">
+                            <p:stCondLst>
+                              <p:cond delay="0"/>
+                            </p:stCondLst>
+                            <p:childTnLst>
+                              <p:par>
+                                <p:cTn id="5" presetID="1" presetClass="entr" presetSubtype="0" fill="hold" nodeType="clickEffect">
+                                  <p:stCondLst>
+                                    <p:cond delay="0"/>
+                                  </p:stCondLst>
+                                  <p:childTnLst>
+                                    <p:set>
+                                      <p:cBhvr>
+                                        <p:cTn id="6" dur="1" fill="hold">
+                                          <p:stCondLst>
+                                            <p:cond delay="0"/>
+                                          </p:stCondLst>
+                                        </p:cTn>
+                                        <p:tgtEl>
+                                          <p:spTgt spid="3">
+                                            <p:txEl>
+                                              <p:pRg st="1" end="1"/>
+                                            </p:txEl>
+                                          </p:spTgt>
+                                        </p:tgtEl>
+                                        <p:attrNameLst>
+                                          <p:attrName>style.visibility</p:attrName>
+                                        </p:attrNameLst>
+                                      </p:cBhvr>
+                                      <p:to>
+                                        <p:strVal val="visible"/>
+                                      </p:to>
+                                    </p:set>
+                                  </p:childTnLst>
+                                </p:cTn>
+                              </p:par>
+                              <p:par>
+                                <p:cTn id="7" presetID="1" presetClass="entr" presetSubtype="0" fill="hold" nodeType="withEffect">
+                                  <p:stCondLst>
+                                    <p:cond delay="0"/>
+                                  </p:stCondLst>
+                                  <p:childTnLst>
+                                    <p:set>
+                                      <p:cBhvr>
+                                        <p:cTn id="8" dur="1" fill="hold">
+                                          <p:stCondLst>
+                                            <p:cond delay="0"/>
+                                          </p:stCondLst>
+                                        </p:cTn>
+                                        <p:tgtEl>
+                                          <p:spTgt spid="3">
+                                            <p:txEl>
+                                              <p:pRg st="2" end="2"/>
+                                            </p:txEl>
+                                          </p:spTgt>
+                                        </p:tgtEl>
+                                        <p:attrNameLst>
+                                          <p:attrName>style.visibility</p:attrName>
+                                        </p:attrNameLst>
+                                      </p:cBhvr>
+                                      <p:to>
+                                        <p:strVal val="visible"/>
+                                      </p:to>
+                                    </p:set>
+                                  </p:childTnLst>
+                                </p:cTn>
+                              </p:par>
+                              <p:par>
+                                <p:cTn id="9" presetID="1" presetClass="entr" presetSubtype="0" fill="hold" nodeType="withEffect">
+                                  <p:stCondLst>
+                                    <p:cond delay="0"/>
+                                  </p:stCondLst>
+                                  <p:childTnLst>
+                                    <p:set>
+                                      <p:cBhvr>
+                                        <p:cTn id="10" dur="1" fill="hold">
+                                          <p:stCondLst>
+                                            <p:cond delay="0"/>
+                                          </p:stCondLst>
+                                        </p:cTn>
+                                        <p:tgtEl>
+                                          <p:spTgt spid="3">
+                                            <p:txEl>
+                                              <p:pRg st="3" end="3"/>
+                                            </p:txEl>
+                                          </p:spTgt>
+                                        </p:tgtEl>
+                                        <p:attrNameLst>
+                                          <p:attrName>style.visibility</p:attrName>
+                                        </p:attrNameLst>
+                                      </p:cBhvr>
+                                      <p:to>
+                                        <p:strVal val="visible"/>
+                                      </p:to>
+                                    </p:set>
+                                  </p:childTnLst>
+                                </p:cTn>
+                              </p:par>
+                              <p:par>
+                                <p:cTn id="11" presetID="1" presetClass="entr" presetSubtype="0" fill="hold" nodeType="withEffect">
+                                  <p:stCondLst>
+                                    <p:cond delay="0"/>
+                                  </p:stCondLst>
+                                  <p:childTnLst>
+                                    <p:set>
+                                      <p:cBhvr>
+                                        <p:cTn id="12" dur="1" fill="hold">
+                                          <p:stCondLst>
+                                            <p:cond delay="0"/>
+                                          </p:stCondLst>
+                                        </p:cTn>
+                                        <p:tgtEl>
+                                          <p:spTgt spid="3">
+                                            <p:txEl>
+                                              <p:pRg st="4" end="4"/>
+                                            </p:txEl>
+                                          </p:spTgt>
+                                        </p:tgtEl>
+                                        <p:attrNameLst>
+                                          <p:attrName>style.visibility</p:attrName>
+                                        </p:attrNameLst>
+                                      </p:cBhvr>
+                                      <p:to>
+                                        <p:strVal val="visible"/>
+                                      </p:to>
+                                    </p:set>
+                                  </p:childTnLst>
+                                </p:cTn>
+                              </p:par>
+                              <p:par>
+                                <p:cTn id="13" presetID="1" presetClass="entr" presetSubtype="0" fill="hold" nodeType="withEffect">
+                                  <p:stCondLst>
+                                    <p:cond delay="0"/>
+                                  </p:stCondLst>
+                                  <p:childTnLst>
+                                    <p:set>
+                                      <p:cBhvr>
+                                        <p:cTn id="14" dur="1" fill="hold">
+                                          <p:stCondLst>
+                                            <p:cond delay="0"/>
+                                          </p:stCondLst>
+                                        </p:cTn>
+                                        <p:tgtEl>
+                                          <p:spTgt spid="3">
+                                            <p:txEl>
+                                              <p:pRg st="5" end="5"/>
+                                            </p:txEl>
+                                          </p:spTgt>
+                                        </p:tgtEl>
+                                        <p:attrNameLst>
+                                          <p:attrName>style.visibility</p:attrName>
+                                        </p:attrNameLst>
+                                      </p:cBhvr>
+                                      <p:to>
+                                        <p:strVal val="visible"/>
+                                      </p:to>
+                                    </p:set>
+                                  </p:childTnLst>
+                                </p:cTn>
+                              </p:par>
+                              <p:par>
+                                <p:cTn id="15" presetID="1" presetClass="entr" presetSubtype="0" fill="hold" nodeType="withEffect">
+                                  <p:stCondLst>
+                                    <p:cond delay="0"/>
+                                  </p:stCondLst>
+                                  <p:childTnLst>
+                                    <p:set>
+                                      <p:cBhvr>
+                                        <p:cTn id="16" dur="1" fill="hold">
+                                          <p:stCondLst>
+                                            <p:cond delay="0"/>
+                                          </p:stCondLst>
+                                        </p:cTn>
+                                        <p:tgtEl>
+                                          <p:spTgt spid="3">
+                                            <p:txEl>
+                                              <p:pRg st="6" end="6"/>
+                                            </p:txEl>
+                                          </p:spTgt>
+                                        </p:tgtEl>
+                                        <p:attrNameLst>
+                                          <p:attrName>style.visibility</p:attrName>
+                                        </p:attrNameLst>
+                                      </p:cBhvr>
+                                      <p:to>
+                                        <p:strVal val="visible"/>
+                                      </p:to>
+                                    </p:set>
+                                  </p:childTnLst>
+                                </p:cTn>
+                              </p:par>
+                            </p:childTnLst>
+                          </p:cTn>
+                        </p:par>
+                      </p:childTnLst>
+                    </p:cTn>
+                  </p:par>
+                  <p:par>
+                    <p:cTn id="17" fill="hold">
+                      <p:stCondLst>
+                        <p:cond delay="indefinite"/>
+                      </p:stCondLst>
+                      <p:childTnLst>
+                        <p:par>
+                          <p:cTn id="18" fill="hold">
+                            <p:stCondLst>
+                              <p:cond delay="0"/>
+                            </p:stCondLst>
+                            <p:childTnLst>
+                              <p:par>
+                                <p:cTn id="19" presetID="1" presetClass="entr" presetSubtype="0" fill="hold" nodeType="clickEffect">
+                                  <p:stCondLst>
+                                    <p:cond delay="0"/>
+                                  </p:stCondLst>
+                                  <p:childTnLst>
+                                    <p:set>
+                                      <p:cBhvr>
+                                        <p:cTn id="20" dur="1" fill="hold">
+                                          <p:stCondLst>
+                                            <p:cond delay="0"/>
+                                          </p:stCondLst>
+                                        </p:cTn>
+                                        <p:tgtEl>
+                                          <p:spTgt spid="3">
+                                            <p:txEl>
+                                              <p:pRg st="7" end="7"/>
+                                            </p:txEl>
+                                          </p:spTgt>
+                                        </p:tgtEl>
+                                        <p:attrNameLst>
+                                          <p:attrName>style.visibility</p:attrName>
+                                        </p:attrNameLst>
+                                      </p:cBhvr>
+                                      <p:to>
+                                        <p:strVal val="visible"/>
+                                      </p:to>
+                                    </p:set>
+                                  </p:childTnLst>
+                                </p:cTn>
+                              </p:par>
+                              <p:par>
+                                <p:cTn id="21" presetID="1" presetClass="entr" presetSubtype="0" fill="hold" nodeType="withEffect">
+                                  <p:stCondLst>
+                                    <p:cond delay="0"/>
+                                  </p:stCondLst>
+                                  <p:childTnLst>
+                                    <p:set>
+                                      <p:cBhvr>
+                                        <p:cTn id="22" dur="1" fill="hold">
+                                          <p:stCondLst>
+                                            <p:cond delay="0"/>
+                                          </p:stCondLst>
+                                        </p:cTn>
+                                        <p:tgtEl>
+                                          <p:spTgt spid="3">
+                                            <p:txEl>
+                                              <p:pRg st="8" end="8"/>
+                                            </p:txEl>
+                                          </p:spTgt>
+                                        </p:tgtEl>
+                                        <p:attrNameLst>
+                                          <p:attrName>style.visibility</p:attrName>
+                                        </p:attrNameLst>
+                                      </p:cBhvr>
+                                      <p:to>
+                                        <p:strVal val="visible"/>
+                                      </p:to>
+                                    </p:set>
+                                  </p:childTnLst>
+                                </p:cTn>
+                              </p:par>
+                            </p:childTnLst>
+                          </p:cTn>
+                        </p:par>
+                      </p:childTnLst>
+                    </p:cTn>
+                  </p:par>
+                </p:childTnLst>
+              </p:cTn>
+              <p:prevCondLst>
+                <p:cond evt="onPrev" delay="0">
+                  <p:tgtEl>
+                    <p:sldTgt/>
+                  </p:tgtEl>
+                </p:cond>
+              </p:prevCondLst>
+              <p:nextCondLst>
+                <p:cond evt="onNext" delay="0">
+                  <p:tgtEl>
+                    <p:sldTgt/>
+                  </p:tgtEl>
+                </p:cond>
+              </p:nextCondLst>
+            </p:seq>
+          </p:childTnLst>
+        </p:cTn>
+      </p:par>
+    </p:tnLst>
+  </p:timing>
+</p:sld>
+</file>
+
+<file path=ppt/slides/slide46.xml><?xml version="1.0" encoding="utf-8"?>
 <p:sld xmlns:a="http://schemas.openxmlformats.org/drawingml/2006/main" xmlns:r="http://schemas.openxmlformats.org/officeDocument/2006/relationships" xmlns:p="http://schemas.openxmlformats.org/presentationml/2006/main">
   <p:cSld>
     <p:spTree>
@@ -34617,6 +31324,1786 @@
 </p:sld>
 </file>
 
+<file path=ppt/slides/slide47.xml><?xml version="1.0" encoding="utf-8"?>
+<p:sld xmlns:a="http://schemas.openxmlformats.org/drawingml/2006/main" xmlns:r="http://schemas.openxmlformats.org/officeDocument/2006/relationships" xmlns:p="http://schemas.openxmlformats.org/presentationml/2006/main">
+  <p:cSld>
+    <p:spTree>
+      <p:nvGrpSpPr>
+        <p:cNvPr id="1" name="">
+          <a:extLst>
+            <a:ext uri="{FF2B5EF4-FFF2-40B4-BE49-F238E27FC236}">
+              <a16:creationId xmlns:a16="http://schemas.microsoft.com/office/drawing/2014/main" id="{D2C058C5-0152-2390-D97D-AB6BB0B5CEC4}"/>
+            </a:ext>
+          </a:extLst>
+        </p:cNvPr>
+        <p:cNvGrpSpPr/>
+        <p:nvPr/>
+      </p:nvGrpSpPr>
+      <p:grpSpPr>
+        <a:xfrm>
+          <a:off x="0" y="0"/>
+          <a:ext cx="0" cy="0"/>
+          <a:chOff x="0" y="0"/>
+          <a:chExt cx="0" cy="0"/>
+        </a:xfrm>
+      </p:grpSpPr>
+      <mc:AlternateContent xmlns:mc="http://schemas.openxmlformats.org/markup-compatibility/2006" xmlns:a14="http://schemas.microsoft.com/office/drawing/2010/main">
+        <mc:Choice Requires="a14">
+          <p:sp>
+            <p:nvSpPr>
+              <p:cNvPr id="3" name="Content Placeholder 2">
+                <a:extLst>
+                  <a:ext uri="{FF2B5EF4-FFF2-40B4-BE49-F238E27FC236}">
+                    <a16:creationId xmlns:a16="http://schemas.microsoft.com/office/drawing/2014/main" id="{A578F3F2-F45D-ECCF-E9E9-805FBD91726A}"/>
+                  </a:ext>
+                </a:extLst>
+              </p:cNvPr>
+              <p:cNvSpPr>
+                <a:spLocks noGrp="1"/>
+              </p:cNvSpPr>
+              <p:nvPr>
+                <p:ph idx="1"/>
+              </p:nvPr>
+            </p:nvSpPr>
+            <p:spPr>
+              <a:xfrm>
+                <a:off x="838200" y="1123406"/>
+                <a:ext cx="10515600" cy="5470724"/>
+              </a:xfrm>
+            </p:spPr>
+            <p:txBody>
+              <a:bodyPr>
+                <a:normAutofit/>
+              </a:bodyPr>
+              <a:lstStyle/>
+              <a:p>
+                <a:pPr marL="0" indent="0">
+                  <a:buNone/>
+                </a:pPr>
+                <a:r>
+                  <a:rPr lang="en-US" dirty="0"/>
+                  <a:t>What are the properties of a good hash function?  </a:t>
+                </a:r>
+              </a:p>
+              <a:p>
+                <a:pPr marL="514350" indent="-514350">
+                  <a:buFont typeface="+mj-lt"/>
+                  <a:buAutoNum type="arabicPeriod"/>
+                </a:pPr>
+                <a:r>
+                  <a:rPr lang="en-US" dirty="0"/>
+                  <a:t>For key values, </a:t>
+                </a:r>
+                <a14:m>
+                  <m:oMath xmlns:m="http://schemas.openxmlformats.org/officeDocument/2006/math">
+                    <m:r>
+                      <a:rPr lang="en-US" i="1">
+                        <a:latin typeface="Cambria Math" panose="02040503050406030204" pitchFamily="18" charset="0"/>
+                      </a:rPr>
+                      <m:t>𝐾</m:t>
+                    </m:r>
+                  </m:oMath>
+                </a14:m>
+                <a:r>
+                  <a:rPr lang="en-US" dirty="0"/>
+                  <a:t>, want a </a:t>
+                </a:r>
+                <a:r>
+                  <a:rPr lang="en-US" b="1" dirty="0"/>
+                  <a:t>uniform distribution over </a:t>
+                </a:r>
+                <a14:m>
+                  <m:oMath xmlns:m="http://schemas.openxmlformats.org/officeDocument/2006/math">
+                    <m:r>
+                      <a:rPr lang="en-US" b="1" i="1" smtClean="0">
+                        <a:latin typeface="Cambria Math" panose="02040503050406030204" pitchFamily="18" charset="0"/>
+                      </a:rPr>
+                      <m:t>𝒎</m:t>
+                    </m:r>
+                  </m:oMath>
+                </a14:m>
+                <a:r>
+                  <a:rPr lang="en-US" b="1" dirty="0"/>
+                  <a:t> hash values</a:t>
+                </a:r>
+              </a:p>
+              <a:p>
+                <a:pPr marL="457200" lvl="1" indent="0">
+                  <a:buNone/>
+                </a:pPr>
+                <a14:m>
+                  <m:oMathPara xmlns:m="http://schemas.openxmlformats.org/officeDocument/2006/math">
+                    <m:oMathParaPr>
+                      <m:jc m:val="centerGroup"/>
+                    </m:oMathParaPr>
+                    <m:oMath xmlns:m="http://schemas.openxmlformats.org/officeDocument/2006/math">
+                      <m:r>
+                        <a:rPr lang="en-US" b="1" i="1">
+                          <a:latin typeface="Cambria Math" panose="02040503050406030204" pitchFamily="18" charset="0"/>
+                        </a:rPr>
+                        <m:t>𝒇</m:t>
+                      </m:r>
+                      <m:r>
+                        <a:rPr lang="en-US" b="1" i="1">
+                          <a:latin typeface="Cambria Math" panose="02040503050406030204" pitchFamily="18" charset="0"/>
+                        </a:rPr>
+                        <m:t>(</m:t>
+                      </m:r>
+                      <m:r>
+                        <a:rPr lang="en-US" b="1" i="1">
+                          <a:latin typeface="Cambria Math" panose="02040503050406030204" pitchFamily="18" charset="0"/>
+                        </a:rPr>
+                        <m:t>𝒌</m:t>
+                      </m:r>
+                      <m:r>
+                        <a:rPr lang="en-US" b="1" i="1">
+                          <a:latin typeface="Cambria Math" panose="02040503050406030204" pitchFamily="18" charset="0"/>
+                        </a:rPr>
+                        <m:t>)~</m:t>
+                      </m:r>
+                      <m:r>
+                        <a:rPr lang="en-US" b="1" i="1">
+                          <a:latin typeface="Cambria Math" panose="02040503050406030204" pitchFamily="18" charset="0"/>
+                          <a:ea typeface="Cambria Math" panose="02040503050406030204" pitchFamily="18" charset="0"/>
+                        </a:rPr>
+                        <m:t>𝑼</m:t>
+                      </m:r>
+                      <m:r>
+                        <a:rPr lang="en-US" b="1" i="1">
+                          <a:latin typeface="Cambria Math" panose="02040503050406030204" pitchFamily="18" charset="0"/>
+                          <a:ea typeface="Cambria Math" panose="02040503050406030204" pitchFamily="18" charset="0"/>
+                        </a:rPr>
+                        <m:t>(</m:t>
+                      </m:r>
+                      <m:r>
+                        <a:rPr lang="en-US" b="1" i="1">
+                          <a:latin typeface="Cambria Math" panose="02040503050406030204" pitchFamily="18" charset="0"/>
+                          <a:ea typeface="Cambria Math" panose="02040503050406030204" pitchFamily="18" charset="0"/>
+                        </a:rPr>
+                        <m:t>𝟎</m:t>
+                      </m:r>
+                      <m:r>
+                        <a:rPr lang="en-US" b="1" i="1">
+                          <a:latin typeface="Cambria Math" panose="02040503050406030204" pitchFamily="18" charset="0"/>
+                          <a:ea typeface="Cambria Math" panose="02040503050406030204" pitchFamily="18" charset="0"/>
+                        </a:rPr>
+                        <m:t>,</m:t>
+                      </m:r>
+                      <m:r>
+                        <a:rPr lang="en-US" b="1" i="1" smtClean="0">
+                          <a:latin typeface="Cambria Math" panose="02040503050406030204" pitchFamily="18" charset="0"/>
+                          <a:ea typeface="Cambria Math" panose="02040503050406030204" pitchFamily="18" charset="0"/>
+                        </a:rPr>
+                        <m:t>𝒎</m:t>
+                      </m:r>
+                      <m:r>
+                        <a:rPr lang="en-US" b="1" i="1">
+                          <a:latin typeface="Cambria Math" panose="02040503050406030204" pitchFamily="18" charset="0"/>
+                          <a:ea typeface="Cambria Math" panose="02040503050406030204" pitchFamily="18" charset="0"/>
+                        </a:rPr>
+                        <m:t>)</m:t>
+                      </m:r>
+                    </m:oMath>
+                  </m:oMathPara>
+                </a14:m>
+                <a:endParaRPr lang="en-US" b="1" dirty="0"/>
+              </a:p>
+              <a:p>
+                <a:pPr lvl="1"/>
+                <a:r>
+                  <a:rPr lang="en-US" dirty="0"/>
+                  <a:t>For </a:t>
+                </a:r>
+                <a14:m>
+                  <m:oMath xmlns:m="http://schemas.openxmlformats.org/officeDocument/2006/math">
+                    <m:r>
+                      <a:rPr lang="en-US" b="0" i="1" smtClean="0">
+                        <a:latin typeface="Cambria Math" panose="02040503050406030204" pitchFamily="18" charset="0"/>
+                      </a:rPr>
+                      <m:t>𝑚</m:t>
+                    </m:r>
+                  </m:oMath>
+                </a14:m>
+                <a:r>
+                  <a:rPr lang="en-US" dirty="0"/>
+                  <a:t> length hash table probability of bucket </a:t>
+                </a:r>
+                <a14:m>
+                  <m:oMath xmlns:m="http://schemas.openxmlformats.org/officeDocument/2006/math">
+                    <m:r>
+                      <a:rPr lang="en-US" b="0" i="1" smtClean="0">
+                        <a:latin typeface="Cambria Math" panose="02040503050406030204" pitchFamily="18" charset="0"/>
+                      </a:rPr>
+                      <m:t>𝑖</m:t>
+                    </m:r>
+                  </m:oMath>
+                </a14:m>
+                <a:r>
+                  <a:rPr lang="en-US" dirty="0"/>
+                  <a:t> being occupied is: </a:t>
+                </a:r>
+              </a:p>
+              <a:p>
+                <a:pPr marL="457200" lvl="1" indent="0">
+                  <a:buNone/>
+                </a:pPr>
+                <a14:m>
+                  <m:oMathPara xmlns:m="http://schemas.openxmlformats.org/officeDocument/2006/math">
+                    <m:oMathParaPr>
+                      <m:jc m:val="centerGroup"/>
+                    </m:oMathParaPr>
+                    <m:oMath xmlns:m="http://schemas.openxmlformats.org/officeDocument/2006/math">
+                      <m:r>
+                        <m:rPr>
+                          <m:sty m:val="p"/>
+                        </m:rPr>
+                        <a:rPr lang="en-US" b="0" i="0" smtClean="0">
+                          <a:latin typeface="Cambria Math" panose="02040503050406030204" pitchFamily="18" charset="0"/>
+                        </a:rPr>
+                        <m:t>P</m:t>
+                      </m:r>
+                      <m:d>
+                        <m:dPr>
+                          <m:ctrlPr>
+                            <a:rPr lang="en-US" i="1" smtClean="0">
+                              <a:latin typeface="Cambria Math" panose="02040503050406030204" pitchFamily="18" charset="0"/>
+                            </a:rPr>
+                          </m:ctrlPr>
+                        </m:dPr>
+                        <m:e>
+                          <m:r>
+                            <a:rPr lang="en-US" b="0" i="1">
+                              <a:latin typeface="Cambria Math" panose="02040503050406030204" pitchFamily="18" charset="0"/>
+                            </a:rPr>
+                            <m:t>𝑓</m:t>
+                          </m:r>
+                          <m:d>
+                            <m:dPr>
+                              <m:ctrlPr>
+                                <a:rPr lang="en-US" i="1">
+                                  <a:latin typeface="Cambria Math" panose="02040503050406030204" pitchFamily="18" charset="0"/>
+                                </a:rPr>
+                              </m:ctrlPr>
+                            </m:dPr>
+                            <m:e>
+                              <m:r>
+                                <a:rPr lang="en-US" b="0" i="1">
+                                  <a:latin typeface="Cambria Math" panose="02040503050406030204" pitchFamily="18" charset="0"/>
+                                </a:rPr>
+                                <m:t>𝑘</m:t>
+                              </m:r>
+                            </m:e>
+                          </m:d>
+                          <m:r>
+                            <a:rPr lang="en-US" b="0" i="1" smtClean="0">
+                              <a:latin typeface="Cambria Math" panose="02040503050406030204" pitchFamily="18" charset="0"/>
+                            </a:rPr>
+                            <m:t>=</m:t>
+                          </m:r>
+                          <m:r>
+                            <a:rPr lang="en-US" b="0" i="1" smtClean="0">
+                              <a:latin typeface="Cambria Math" panose="02040503050406030204" pitchFamily="18" charset="0"/>
+                            </a:rPr>
+                            <m:t>𝑖</m:t>
+                          </m:r>
+                        </m:e>
+                      </m:d>
+                      <m:r>
+                        <a:rPr lang="en-US" b="0" i="1" smtClean="0">
+                          <a:latin typeface="Cambria Math" panose="02040503050406030204" pitchFamily="18" charset="0"/>
+                        </a:rPr>
+                        <m:t>=</m:t>
+                      </m:r>
+                      <m:f>
+                        <m:fPr>
+                          <m:ctrlPr>
+                            <a:rPr lang="en-US" b="0" i="1" smtClean="0">
+                              <a:latin typeface="Cambria Math" panose="02040503050406030204" pitchFamily="18" charset="0"/>
+                            </a:rPr>
+                          </m:ctrlPr>
+                        </m:fPr>
+                        <m:num>
+                          <m:r>
+                            <a:rPr lang="en-US" b="0" i="1" smtClean="0">
+                              <a:latin typeface="Cambria Math" panose="02040503050406030204" pitchFamily="18" charset="0"/>
+                            </a:rPr>
+                            <m:t>1</m:t>
+                          </m:r>
+                        </m:num>
+                        <m:den>
+                          <m:r>
+                            <a:rPr lang="en-US" b="0" i="1" smtClean="0">
+                              <a:latin typeface="Cambria Math" panose="02040503050406030204" pitchFamily="18" charset="0"/>
+                            </a:rPr>
+                            <m:t>𝑚</m:t>
+                          </m:r>
+                        </m:den>
+                      </m:f>
+                    </m:oMath>
+                  </m:oMathPara>
+                </a14:m>
+                <a:endParaRPr lang="en-US" dirty="0"/>
+              </a:p>
+              <a:p>
+                <a:pPr lvl="1"/>
+                <a:r>
+                  <a:rPr lang="en-US" b="1" dirty="0"/>
+                  <a:t>Lumpy hash values </a:t>
+                </a:r>
+                <a:r>
+                  <a:rPr lang="en-US" dirty="0"/>
+                  <a:t>lead to increased </a:t>
+                </a:r>
+                <a:r>
+                  <a:rPr lang="en-US" b="1" dirty="0"/>
+                  <a:t>hash collisions </a:t>
+                </a:r>
+              </a:p>
+              <a:p>
+                <a:pPr lvl="1"/>
+                <a:r>
+                  <a:rPr lang="en-US" dirty="0"/>
+                  <a:t>Can verify with </a:t>
+                </a:r>
+                <a14:m>
+                  <m:oMath xmlns:m="http://schemas.openxmlformats.org/officeDocument/2006/math">
+                    <m:sSup>
+                      <m:sSupPr>
+                        <m:ctrlPr>
+                          <a:rPr lang="en-US" i="1">
+                            <a:latin typeface="Cambria Math" panose="02040503050406030204" pitchFamily="18" charset="0"/>
+                          </a:rPr>
+                        </m:ctrlPr>
+                      </m:sSupPr>
+                      <m:e>
+                        <m:r>
+                          <a:rPr lang="en-US" i="1">
+                            <a:latin typeface="Cambria Math" panose="02040503050406030204" pitchFamily="18" charset="0"/>
+                            <a:ea typeface="Cambria Math" panose="02040503050406030204" pitchFamily="18" charset="0"/>
+                          </a:rPr>
+                          <m:t>𝜒</m:t>
+                        </m:r>
+                      </m:e>
+                      <m:sup>
+                        <m:r>
+                          <a:rPr lang="en-US" i="1">
+                            <a:latin typeface="Cambria Math" panose="02040503050406030204" pitchFamily="18" charset="0"/>
+                          </a:rPr>
+                          <m:t>2</m:t>
+                        </m:r>
+                      </m:sup>
+                    </m:sSup>
+                  </m:oMath>
+                </a14:m>
+                <a:r>
+                  <a:rPr lang="en-US" dirty="0"/>
+                  <a:t> test</a:t>
+                </a:r>
+              </a:p>
+              <a:p>
+                <a:pPr marL="514350" indent="-514350">
+                  <a:buFont typeface="+mj-lt"/>
+                  <a:buAutoNum type="arabicPeriod"/>
+                </a:pPr>
+                <a:r>
+                  <a:rPr lang="en-US" dirty="0"/>
+                  <a:t>For a uniformly distributed hash function the probability of a hash collision with </a:t>
+                </a:r>
+                <a14:m>
+                  <m:oMath xmlns:m="http://schemas.openxmlformats.org/officeDocument/2006/math">
+                    <m:r>
+                      <a:rPr lang="en-US" i="1">
+                        <a:latin typeface="Cambria Math" panose="02040503050406030204" pitchFamily="18" charset="0"/>
+                        <a:ea typeface="Cambria Math" panose="02040503050406030204" pitchFamily="18" charset="0"/>
+                      </a:rPr>
+                      <m:t>𝑛</m:t>
+                    </m:r>
+                  </m:oMath>
+                </a14:m>
+                <a:r>
+                  <a:rPr lang="en-US" dirty="0"/>
+                  <a:t> elements filled in the table is    </a:t>
+                </a:r>
+              </a:p>
+              <a:p>
+                <a:pPr marL="0" indent="0">
+                  <a:buNone/>
+                </a:pPr>
+                <a14:m>
+                  <m:oMathPara xmlns:m="http://schemas.openxmlformats.org/officeDocument/2006/math">
+                    <m:oMathParaPr>
+                      <m:jc m:val="centerGroup"/>
+                    </m:oMathParaPr>
+                    <m:oMath xmlns:m="http://schemas.openxmlformats.org/officeDocument/2006/math">
+                      <m:r>
+                        <a:rPr lang="en-US" b="0" i="1" smtClean="0">
+                          <a:latin typeface="Cambria Math" panose="02040503050406030204" pitchFamily="18" charset="0"/>
+                        </a:rPr>
+                        <m:t>𝑃</m:t>
+                      </m:r>
+                      <m:d>
+                        <m:dPr>
+                          <m:ctrlPr>
+                            <a:rPr lang="en-US" b="0" i="1" smtClean="0">
+                              <a:latin typeface="Cambria Math" panose="02040503050406030204" pitchFamily="18" charset="0"/>
+                            </a:rPr>
+                          </m:ctrlPr>
+                        </m:dPr>
+                        <m:e>
+                          <m:r>
+                            <a:rPr lang="en-US" b="0" i="1" smtClean="0">
+                              <a:latin typeface="Cambria Math" panose="02040503050406030204" pitchFamily="18" charset="0"/>
+                            </a:rPr>
+                            <m:t>𝑚</m:t>
+                          </m:r>
+                          <m:r>
+                            <a:rPr lang="en-US" b="0" i="1" smtClean="0">
+                              <a:latin typeface="Cambria Math" panose="02040503050406030204" pitchFamily="18" charset="0"/>
+                            </a:rPr>
+                            <m:t>,</m:t>
+                          </m:r>
+                          <m:r>
+                            <a:rPr lang="en-US" b="0" i="1" smtClean="0">
+                              <a:latin typeface="Cambria Math" panose="02040503050406030204" pitchFamily="18" charset="0"/>
+                            </a:rPr>
+                            <m:t>𝑛</m:t>
+                          </m:r>
+                        </m:e>
+                      </m:d>
+                      <m:r>
+                        <a:rPr lang="en-US" i="1">
+                          <a:latin typeface="Cambria Math" panose="02040503050406030204" pitchFamily="18" charset="0"/>
+                          <a:ea typeface="Cambria Math" panose="02040503050406030204" pitchFamily="18" charset="0"/>
+                        </a:rPr>
+                        <m:t>≈</m:t>
+                      </m:r>
+                      <m:r>
+                        <a:rPr lang="en-US" b="0" i="1" smtClean="0">
+                          <a:latin typeface="Cambria Math" panose="02040503050406030204" pitchFamily="18" charset="0"/>
+                          <a:ea typeface="Cambria Math" panose="02040503050406030204" pitchFamily="18" charset="0"/>
+                        </a:rPr>
+                        <m:t>1−</m:t>
+                      </m:r>
+                      <m:r>
+                        <a:rPr lang="en-US" b="0" i="1" smtClean="0">
+                          <a:latin typeface="Cambria Math" panose="02040503050406030204" pitchFamily="18" charset="0"/>
+                          <a:ea typeface="Cambria Math" panose="02040503050406030204" pitchFamily="18" charset="0"/>
+                        </a:rPr>
+                        <m:t>𝑒𝑥𝑝</m:t>
+                      </m:r>
+                      <m:d>
+                        <m:dPr>
+                          <m:begChr m:val="["/>
+                          <m:endChr m:val="]"/>
+                          <m:ctrlPr>
+                            <a:rPr lang="en-US" b="0" i="1" smtClean="0">
+                              <a:latin typeface="Cambria Math" panose="02040503050406030204" pitchFamily="18" charset="0"/>
+                              <a:ea typeface="Cambria Math" panose="02040503050406030204" pitchFamily="18" charset="0"/>
+                            </a:rPr>
+                          </m:ctrlPr>
+                        </m:dPr>
+                        <m:e>
+                          <m:r>
+                            <a:rPr lang="en-US" b="0" i="1" smtClean="0">
+                              <a:latin typeface="Cambria Math" panose="02040503050406030204" pitchFamily="18" charset="0"/>
+                              <a:ea typeface="Cambria Math" panose="02040503050406030204" pitchFamily="18" charset="0"/>
+                            </a:rPr>
+                            <m:t>−</m:t>
+                          </m:r>
+                          <m:f>
+                            <m:fPr>
+                              <m:ctrlPr>
+                                <a:rPr lang="en-US" b="0" i="1" smtClean="0">
+                                  <a:latin typeface="Cambria Math" panose="02040503050406030204" pitchFamily="18" charset="0"/>
+                                  <a:ea typeface="Cambria Math" panose="02040503050406030204" pitchFamily="18" charset="0"/>
+                                </a:rPr>
+                              </m:ctrlPr>
+                            </m:fPr>
+                            <m:num>
+                              <m:r>
+                                <a:rPr lang="en-US" b="0" i="1" smtClean="0">
+                                  <a:latin typeface="Cambria Math" panose="02040503050406030204" pitchFamily="18" charset="0"/>
+                                  <a:ea typeface="Cambria Math" panose="02040503050406030204" pitchFamily="18" charset="0"/>
+                                </a:rPr>
+                                <m:t>𝑚</m:t>
+                              </m:r>
+                              <m:d>
+                                <m:dPr>
+                                  <m:ctrlPr>
+                                    <a:rPr lang="en-US" b="0" i="1" smtClean="0">
+                                      <a:latin typeface="Cambria Math" panose="02040503050406030204" pitchFamily="18" charset="0"/>
+                                      <a:ea typeface="Cambria Math" panose="02040503050406030204" pitchFamily="18" charset="0"/>
+                                    </a:rPr>
+                                  </m:ctrlPr>
+                                </m:dPr>
+                                <m:e>
+                                  <m:r>
+                                    <a:rPr lang="en-US" b="0" i="1" smtClean="0">
+                                      <a:latin typeface="Cambria Math" panose="02040503050406030204" pitchFamily="18" charset="0"/>
+                                      <a:ea typeface="Cambria Math" panose="02040503050406030204" pitchFamily="18" charset="0"/>
+                                    </a:rPr>
+                                    <m:t>𝑛</m:t>
+                                  </m:r>
+                                  <m:r>
+                                    <a:rPr lang="en-US" b="0" i="1" smtClean="0">
+                                      <a:latin typeface="Cambria Math" panose="02040503050406030204" pitchFamily="18" charset="0"/>
+                                      <a:ea typeface="Cambria Math" panose="02040503050406030204" pitchFamily="18" charset="0"/>
+                                    </a:rPr>
+                                    <m:t>−1</m:t>
+                                  </m:r>
+                                </m:e>
+                              </m:d>
+                            </m:num>
+                            <m:den>
+                              <m:r>
+                                <a:rPr lang="en-US" b="0" i="1" smtClean="0">
+                                  <a:latin typeface="Cambria Math" panose="02040503050406030204" pitchFamily="18" charset="0"/>
+                                  <a:ea typeface="Cambria Math" panose="02040503050406030204" pitchFamily="18" charset="0"/>
+                                </a:rPr>
+                                <m:t>2</m:t>
+                              </m:r>
+                              <m:r>
+                                <a:rPr lang="en-US" b="0" i="1" smtClean="0">
+                                  <a:latin typeface="Cambria Math" panose="02040503050406030204" pitchFamily="18" charset="0"/>
+                                  <a:ea typeface="Cambria Math" panose="02040503050406030204" pitchFamily="18" charset="0"/>
+                                </a:rPr>
+                                <m:t>𝑚</m:t>
+                              </m:r>
+                            </m:den>
+                          </m:f>
+                        </m:e>
+                      </m:d>
+                    </m:oMath>
+                  </m:oMathPara>
+                </a14:m>
+                <a:endParaRPr lang="en-US" dirty="0"/>
+              </a:p>
+            </p:txBody>
+          </p:sp>
+        </mc:Choice>
+        <mc:Fallback xmlns="">
+          <p:sp>
+            <p:nvSpPr>
+              <p:cNvPr id="3" name="Content Placeholder 2">
+                <a:extLst>
+                  <a:ext uri="{FF2B5EF4-FFF2-40B4-BE49-F238E27FC236}">
+                    <a16:creationId xmlns:a16="http://schemas.microsoft.com/office/drawing/2014/main" id="{A578F3F2-F45D-ECCF-E9E9-805FBD91726A}"/>
+                  </a:ext>
+                </a:extLst>
+              </p:cNvPr>
+              <p:cNvSpPr>
+                <a:spLocks noGrp="1" noRot="1" noChangeAspect="1" noMove="1" noResize="1" noEditPoints="1" noAdjustHandles="1" noChangeArrowheads="1" noChangeShapeType="1" noTextEdit="1"/>
+              </p:cNvSpPr>
+              <p:nvPr>
+                <p:ph idx="1"/>
+              </p:nvPr>
+            </p:nvSpPr>
+            <p:spPr>
+              <a:xfrm>
+                <a:off x="838200" y="1123406"/>
+                <a:ext cx="10515600" cy="5470724"/>
+              </a:xfrm>
+              <a:blipFill>
+                <a:blip r:embed="rId2"/>
+                <a:stretch>
+                  <a:fillRect l="-1217" t="-1782"/>
+                </a:stretch>
+              </a:blipFill>
+            </p:spPr>
+            <p:txBody>
+              <a:bodyPr/>
+              <a:lstStyle/>
+              <a:p>
+                <a:r>
+                  <a:rPr lang="en-US">
+                    <a:noFill/>
+                  </a:rPr>
+                  <a:t> </a:t>
+                </a:r>
+              </a:p>
+            </p:txBody>
+          </p:sp>
+        </mc:Fallback>
+      </mc:AlternateContent>
+      <p:sp>
+        <p:nvSpPr>
+          <p:cNvPr id="6" name="Title 1">
+            <a:extLst>
+              <a:ext uri="{FF2B5EF4-FFF2-40B4-BE49-F238E27FC236}">
+                <a16:creationId xmlns:a16="http://schemas.microsoft.com/office/drawing/2014/main" id="{7E988630-3E71-AF2E-A2B3-DE1DF5E9439C}"/>
+              </a:ext>
+            </a:extLst>
+          </p:cNvPr>
+          <p:cNvSpPr txBox="1">
+            <a:spLocks/>
+          </p:cNvSpPr>
+          <p:nvPr/>
+        </p:nvSpPr>
+        <p:spPr>
+          <a:xfrm>
+            <a:off x="838200" y="-635"/>
+            <a:ext cx="10515600" cy="1325563"/>
+          </a:xfrm>
+          <a:prstGeom prst="rect">
+            <a:avLst/>
+          </a:prstGeom>
+        </p:spPr>
+        <p:txBody>
+          <a:bodyPr vert="horz" lIns="91440" tIns="45720" rIns="91440" bIns="45720" rtlCol="0" anchor="ctr">
+            <a:normAutofit/>
+          </a:bodyPr>
+          <a:lstStyle>
+            <a:lvl1pPr algn="l" defTabSz="914400" rtl="0" eaLnBrk="1" latinLnBrk="0" hangingPunct="1">
+              <a:lnSpc>
+                <a:spcPct val="90000"/>
+              </a:lnSpc>
+              <a:spcBef>
+                <a:spcPct val="0"/>
+              </a:spcBef>
+              <a:buNone/>
+              <a:defRPr sz="4400" kern="1200">
+                <a:solidFill>
+                  <a:schemeClr val="tx1"/>
+                </a:solidFill>
+                <a:latin typeface="+mj-lt"/>
+                <a:ea typeface="+mj-ea"/>
+                <a:cs typeface="+mj-cs"/>
+              </a:defRPr>
+            </a:lvl1pPr>
+          </a:lstStyle>
+          <a:p>
+            <a:r>
+              <a:rPr lang="en-US" dirty="0">
+                <a:latin typeface="+mn-lt"/>
+              </a:rPr>
+              <a:t>Introduction to Hashing</a:t>
+            </a:r>
+          </a:p>
+        </p:txBody>
+      </p:sp>
+    </p:spTree>
+    <p:extLst>
+      <p:ext uri="{BB962C8B-B14F-4D97-AF65-F5344CB8AC3E}">
+        <p14:creationId xmlns:p14="http://schemas.microsoft.com/office/powerpoint/2010/main" val="3993204374"/>
+      </p:ext>
+    </p:extLst>
+  </p:cSld>
+  <p:clrMapOvr>
+    <a:masterClrMapping/>
+  </p:clrMapOvr>
+</p:sld>
+</file>
+
+<file path=ppt/slides/slide48.xml><?xml version="1.0" encoding="utf-8"?>
+<p:sld xmlns:a="http://schemas.openxmlformats.org/drawingml/2006/main" xmlns:r="http://schemas.openxmlformats.org/officeDocument/2006/relationships" xmlns:p="http://schemas.openxmlformats.org/presentationml/2006/main">
+  <p:cSld>
+    <p:spTree>
+      <p:nvGrpSpPr>
+        <p:cNvPr id="1" name="">
+          <a:extLst>
+            <a:ext uri="{FF2B5EF4-FFF2-40B4-BE49-F238E27FC236}">
+              <a16:creationId xmlns:a16="http://schemas.microsoft.com/office/drawing/2014/main" id="{BC89F83D-5DFC-29AF-B4FF-9D0545A0FCDA}"/>
+            </a:ext>
+          </a:extLst>
+        </p:cNvPr>
+        <p:cNvGrpSpPr/>
+        <p:nvPr/>
+      </p:nvGrpSpPr>
+      <p:grpSpPr>
+        <a:xfrm>
+          <a:off x="0" y="0"/>
+          <a:ext cx="0" cy="0"/>
+          <a:chOff x="0" y="0"/>
+          <a:chExt cx="0" cy="0"/>
+        </a:xfrm>
+      </p:grpSpPr>
+      <mc:AlternateContent xmlns:mc="http://schemas.openxmlformats.org/markup-compatibility/2006">
+        <mc:Choice xmlns:a14="http://schemas.microsoft.com/office/drawing/2010/main" Requires="a14">
+          <p:sp>
+            <p:nvSpPr>
+              <p:cNvPr id="3" name="Content Placeholder 2">
+                <a:extLst>
+                  <a:ext uri="{FF2B5EF4-FFF2-40B4-BE49-F238E27FC236}">
+                    <a16:creationId xmlns:a16="http://schemas.microsoft.com/office/drawing/2014/main" id="{62709B48-58A5-623B-9852-30181B5EE4F8}"/>
+                  </a:ext>
+                </a:extLst>
+              </p:cNvPr>
+              <p:cNvSpPr>
+                <a:spLocks noGrp="1"/>
+              </p:cNvSpPr>
+              <p:nvPr>
+                <p:ph idx="1"/>
+              </p:nvPr>
+            </p:nvSpPr>
+            <p:spPr>
+              <a:xfrm>
+                <a:off x="838200" y="1123406"/>
+                <a:ext cx="10515600" cy="5470724"/>
+              </a:xfrm>
+            </p:spPr>
+            <p:txBody>
+              <a:bodyPr>
+                <a:normAutofit/>
+              </a:bodyPr>
+              <a:lstStyle/>
+              <a:p>
+                <a:pPr marL="0" indent="0">
+                  <a:buNone/>
+                </a:pPr>
+                <a:r>
+                  <a:rPr lang="en-US" dirty="0"/>
+                  <a:t>What are the properties of a good hash function?  </a:t>
+                </a:r>
+              </a:p>
+              <a:p>
+                <a:pPr marL="514350" indent="-514350">
+                  <a:buFont typeface="+mj-lt"/>
+                  <a:buAutoNum type="arabicPeriod" startAt="3"/>
+                </a:pPr>
+                <a:r>
+                  <a:rPr lang="en-US" dirty="0"/>
+                  <a:t>For a uniformly distributed hash function the probability of a hash collision with </a:t>
+                </a:r>
+                <a14:m>
+                  <m:oMath xmlns:m="http://schemas.openxmlformats.org/officeDocument/2006/math">
+                    <m:r>
+                      <a:rPr lang="en-US" i="1">
+                        <a:latin typeface="Cambria Math" panose="02040503050406030204" pitchFamily="18" charset="0"/>
+                        <a:ea typeface="Cambria Math" panose="02040503050406030204" pitchFamily="18" charset="0"/>
+                      </a:rPr>
+                      <m:t>𝑛</m:t>
+                    </m:r>
+                  </m:oMath>
+                </a14:m>
+                <a:r>
+                  <a:rPr lang="en-US" dirty="0"/>
+                  <a:t> elements filled in the table is    </a:t>
+                </a:r>
+              </a:p>
+              <a:p>
+                <a:pPr marL="0" indent="0">
+                  <a:buNone/>
+                </a:pPr>
+                <a14:m>
+                  <m:oMathPara xmlns:m="http://schemas.openxmlformats.org/officeDocument/2006/math">
+                    <m:oMathParaPr>
+                      <m:jc m:val="centerGroup"/>
+                    </m:oMathParaPr>
+                    <m:oMath xmlns:m="http://schemas.openxmlformats.org/officeDocument/2006/math">
+                      <m:r>
+                        <a:rPr lang="en-US" b="0" i="1" smtClean="0">
+                          <a:latin typeface="Cambria Math" panose="02040503050406030204" pitchFamily="18" charset="0"/>
+                        </a:rPr>
+                        <m:t>𝑃</m:t>
+                      </m:r>
+                      <m:d>
+                        <m:dPr>
+                          <m:ctrlPr>
+                            <a:rPr lang="en-US" b="0" i="1" smtClean="0">
+                              <a:latin typeface="Cambria Math" panose="02040503050406030204" pitchFamily="18" charset="0"/>
+                            </a:rPr>
+                          </m:ctrlPr>
+                        </m:dPr>
+                        <m:e>
+                          <m:r>
+                            <a:rPr lang="en-US" b="0" i="1" smtClean="0">
+                              <a:latin typeface="Cambria Math" panose="02040503050406030204" pitchFamily="18" charset="0"/>
+                            </a:rPr>
+                            <m:t>𝑚</m:t>
+                          </m:r>
+                          <m:r>
+                            <a:rPr lang="en-US" b="0" i="1" smtClean="0">
+                              <a:latin typeface="Cambria Math" panose="02040503050406030204" pitchFamily="18" charset="0"/>
+                            </a:rPr>
+                            <m:t>,</m:t>
+                          </m:r>
+                          <m:r>
+                            <a:rPr lang="en-US" b="0" i="1" smtClean="0">
+                              <a:latin typeface="Cambria Math" panose="02040503050406030204" pitchFamily="18" charset="0"/>
+                            </a:rPr>
+                            <m:t>𝑛</m:t>
+                          </m:r>
+                        </m:e>
+                      </m:d>
+                      <m:r>
+                        <a:rPr lang="en-US" i="1">
+                          <a:latin typeface="Cambria Math" panose="02040503050406030204" pitchFamily="18" charset="0"/>
+                          <a:ea typeface="Cambria Math" panose="02040503050406030204" pitchFamily="18" charset="0"/>
+                        </a:rPr>
+                        <m:t>≈</m:t>
+                      </m:r>
+                      <m:r>
+                        <a:rPr lang="en-US" b="0" i="1" smtClean="0">
+                          <a:latin typeface="Cambria Math" panose="02040503050406030204" pitchFamily="18" charset="0"/>
+                          <a:ea typeface="Cambria Math" panose="02040503050406030204" pitchFamily="18" charset="0"/>
+                        </a:rPr>
+                        <m:t>1−</m:t>
+                      </m:r>
+                      <m:r>
+                        <a:rPr lang="en-US" b="0" i="1" smtClean="0">
+                          <a:latin typeface="Cambria Math" panose="02040503050406030204" pitchFamily="18" charset="0"/>
+                          <a:ea typeface="Cambria Math" panose="02040503050406030204" pitchFamily="18" charset="0"/>
+                        </a:rPr>
+                        <m:t>𝑒𝑥𝑝</m:t>
+                      </m:r>
+                      <m:d>
+                        <m:dPr>
+                          <m:begChr m:val="["/>
+                          <m:endChr m:val="]"/>
+                          <m:ctrlPr>
+                            <a:rPr lang="en-US" b="0" i="1" smtClean="0">
+                              <a:latin typeface="Cambria Math" panose="02040503050406030204" pitchFamily="18" charset="0"/>
+                              <a:ea typeface="Cambria Math" panose="02040503050406030204" pitchFamily="18" charset="0"/>
+                            </a:rPr>
+                          </m:ctrlPr>
+                        </m:dPr>
+                        <m:e>
+                          <m:r>
+                            <a:rPr lang="en-US" b="0" i="1" smtClean="0">
+                              <a:latin typeface="Cambria Math" panose="02040503050406030204" pitchFamily="18" charset="0"/>
+                              <a:ea typeface="Cambria Math" panose="02040503050406030204" pitchFamily="18" charset="0"/>
+                            </a:rPr>
+                            <m:t>−</m:t>
+                          </m:r>
+                          <m:f>
+                            <m:fPr>
+                              <m:ctrlPr>
+                                <a:rPr lang="en-US" b="0" i="1" smtClean="0">
+                                  <a:latin typeface="Cambria Math" panose="02040503050406030204" pitchFamily="18" charset="0"/>
+                                  <a:ea typeface="Cambria Math" panose="02040503050406030204" pitchFamily="18" charset="0"/>
+                                </a:rPr>
+                              </m:ctrlPr>
+                            </m:fPr>
+                            <m:num>
+                              <m:r>
+                                <a:rPr lang="en-US" b="0" i="1" smtClean="0">
+                                  <a:latin typeface="Cambria Math" panose="02040503050406030204" pitchFamily="18" charset="0"/>
+                                  <a:ea typeface="Cambria Math" panose="02040503050406030204" pitchFamily="18" charset="0"/>
+                                </a:rPr>
+                                <m:t>𝑚</m:t>
+                              </m:r>
+                              <m:d>
+                                <m:dPr>
+                                  <m:ctrlPr>
+                                    <a:rPr lang="en-US" b="0" i="1" smtClean="0">
+                                      <a:latin typeface="Cambria Math" panose="02040503050406030204" pitchFamily="18" charset="0"/>
+                                      <a:ea typeface="Cambria Math" panose="02040503050406030204" pitchFamily="18" charset="0"/>
+                                    </a:rPr>
+                                  </m:ctrlPr>
+                                </m:dPr>
+                                <m:e>
+                                  <m:r>
+                                    <a:rPr lang="en-US" b="0" i="1" smtClean="0">
+                                      <a:latin typeface="Cambria Math" panose="02040503050406030204" pitchFamily="18" charset="0"/>
+                                      <a:ea typeface="Cambria Math" panose="02040503050406030204" pitchFamily="18" charset="0"/>
+                                    </a:rPr>
+                                    <m:t>𝑛</m:t>
+                                  </m:r>
+                                  <m:r>
+                                    <a:rPr lang="en-US" b="0" i="1" smtClean="0">
+                                      <a:latin typeface="Cambria Math" panose="02040503050406030204" pitchFamily="18" charset="0"/>
+                                      <a:ea typeface="Cambria Math" panose="02040503050406030204" pitchFamily="18" charset="0"/>
+                                    </a:rPr>
+                                    <m:t>−1</m:t>
+                                  </m:r>
+                                </m:e>
+                              </m:d>
+                            </m:num>
+                            <m:den>
+                              <m:r>
+                                <a:rPr lang="en-US" b="0" i="1" smtClean="0">
+                                  <a:latin typeface="Cambria Math" panose="02040503050406030204" pitchFamily="18" charset="0"/>
+                                  <a:ea typeface="Cambria Math" panose="02040503050406030204" pitchFamily="18" charset="0"/>
+                                </a:rPr>
+                                <m:t>2</m:t>
+                              </m:r>
+                              <m:r>
+                                <a:rPr lang="en-US" b="0" i="1" smtClean="0">
+                                  <a:latin typeface="Cambria Math" panose="02040503050406030204" pitchFamily="18" charset="0"/>
+                                  <a:ea typeface="Cambria Math" panose="02040503050406030204" pitchFamily="18" charset="0"/>
+                                </a:rPr>
+                                <m:t>𝑚</m:t>
+                              </m:r>
+                            </m:den>
+                          </m:f>
+                        </m:e>
+                      </m:d>
+                    </m:oMath>
+                  </m:oMathPara>
+                </a14:m>
+                <a:endParaRPr lang="en-US" dirty="0"/>
+              </a:p>
+              <a:p>
+                <a:pPr marL="514350" indent="-514350">
+                  <a:buFont typeface="+mj-lt"/>
+                  <a:buAutoNum type="arabicPeriod" startAt="4"/>
+                </a:pPr>
+                <a:r>
+                  <a:rPr lang="en-US" dirty="0"/>
+                  <a:t>Given table utilization, </a:t>
+                </a:r>
+                <a14:m>
+                  <m:oMath xmlns:m="http://schemas.openxmlformats.org/officeDocument/2006/math">
+                    <m:r>
+                      <a:rPr lang="en-US" i="1" smtClean="0">
+                        <a:latin typeface="Cambria Math" panose="02040503050406030204" pitchFamily="18" charset="0"/>
+                        <a:ea typeface="Cambria Math" panose="02040503050406030204" pitchFamily="18" charset="0"/>
+                      </a:rPr>
+                      <m:t>𝛼</m:t>
+                    </m:r>
+                    <m:r>
+                      <a:rPr lang="en-US" b="0" i="1" smtClean="0">
+                        <a:latin typeface="Cambria Math" panose="02040503050406030204" pitchFamily="18" charset="0"/>
+                        <a:ea typeface="Cambria Math" panose="02040503050406030204" pitchFamily="18" charset="0"/>
+                      </a:rPr>
+                      <m:t>=</m:t>
+                    </m:r>
+                    <m:r>
+                      <a:rPr lang="en-US" b="0" i="1" smtClean="0">
+                        <a:latin typeface="Cambria Math" panose="02040503050406030204" pitchFamily="18" charset="0"/>
+                        <a:ea typeface="Cambria Math" panose="02040503050406030204" pitchFamily="18" charset="0"/>
+                      </a:rPr>
+                      <m:t>𝑛</m:t>
+                    </m:r>
+                    <m:r>
+                      <a:rPr lang="en-US" b="0" i="1" smtClean="0">
+                        <a:latin typeface="Cambria Math" panose="02040503050406030204" pitchFamily="18" charset="0"/>
+                        <a:ea typeface="Cambria Math" panose="02040503050406030204" pitchFamily="18" charset="0"/>
+                      </a:rPr>
+                      <m:t>/</m:t>
+                    </m:r>
+                    <m:r>
+                      <a:rPr lang="en-US" b="0" i="1" smtClean="0">
+                        <a:latin typeface="Cambria Math" panose="02040503050406030204" pitchFamily="18" charset="0"/>
+                        <a:ea typeface="Cambria Math" panose="02040503050406030204" pitchFamily="18" charset="0"/>
+                      </a:rPr>
+                      <m:t>𝑚</m:t>
+                    </m:r>
+                  </m:oMath>
+                </a14:m>
+                <a:r>
+                  <a:rPr lang="en-US" dirty="0"/>
+                  <a:t>, the number of probes required to find an open bucket is   </a:t>
+                </a:r>
+              </a:p>
+              <a:p>
+                <a:pPr marL="0" indent="0">
+                  <a:buNone/>
+                </a:pPr>
+                <a14:m>
+                  <m:oMathPara xmlns:m="http://schemas.openxmlformats.org/officeDocument/2006/math">
+                    <m:oMathParaPr>
+                      <m:jc m:val="centerGroup"/>
+                    </m:oMathParaPr>
+                    <m:oMath xmlns:m="http://schemas.openxmlformats.org/officeDocument/2006/math">
+                      <m:sSub>
+                        <m:sSubPr>
+                          <m:ctrlPr>
+                            <a:rPr lang="en-US" i="1" smtClean="0">
+                              <a:latin typeface="Cambria Math" panose="02040503050406030204" pitchFamily="18" charset="0"/>
+                              <a:ea typeface="Cambria Math" panose="02040503050406030204" pitchFamily="18" charset="0"/>
+                            </a:rPr>
+                          </m:ctrlPr>
+                        </m:sSubPr>
+                        <m:e>
+                          <m:r>
+                            <a:rPr lang="en-US" b="0" i="1" smtClean="0">
+                              <a:latin typeface="Cambria Math" panose="02040503050406030204" pitchFamily="18" charset="0"/>
+                              <a:ea typeface="Cambria Math" panose="02040503050406030204" pitchFamily="18" charset="0"/>
+                            </a:rPr>
+                            <m:t>𝑁</m:t>
+                          </m:r>
+                        </m:e>
+                        <m:sub>
+                          <m:r>
+                            <a:rPr lang="en-US" b="0" i="1" smtClean="0">
+                              <a:latin typeface="Cambria Math" panose="02040503050406030204" pitchFamily="18" charset="0"/>
+                              <a:ea typeface="Cambria Math" panose="02040503050406030204" pitchFamily="18" charset="0"/>
+                            </a:rPr>
+                            <m:t>𝑝𝑟𝑜𝑏𝑠</m:t>
+                          </m:r>
+                        </m:sub>
+                      </m:sSub>
+                      <m:r>
+                        <a:rPr lang="en-US" i="1" smtClean="0">
+                          <a:latin typeface="Cambria Math" panose="02040503050406030204" pitchFamily="18" charset="0"/>
+                          <a:ea typeface="Cambria Math" panose="02040503050406030204" pitchFamily="18" charset="0"/>
+                        </a:rPr>
+                        <m:t>≈</m:t>
+                      </m:r>
+                      <m:f>
+                        <m:fPr>
+                          <m:ctrlPr>
+                            <a:rPr lang="en-US" i="1" smtClean="0">
+                              <a:latin typeface="Cambria Math" panose="02040503050406030204" pitchFamily="18" charset="0"/>
+                              <a:ea typeface="Cambria Math" panose="02040503050406030204" pitchFamily="18" charset="0"/>
+                            </a:rPr>
+                          </m:ctrlPr>
+                        </m:fPr>
+                        <m:num>
+                          <m:r>
+                            <a:rPr lang="en-US" b="0" i="1" smtClean="0">
+                              <a:latin typeface="Cambria Math" panose="02040503050406030204" pitchFamily="18" charset="0"/>
+                              <a:ea typeface="Cambria Math" panose="02040503050406030204" pitchFamily="18" charset="0"/>
+                            </a:rPr>
+                            <m:t>1</m:t>
+                          </m:r>
+                        </m:num>
+                        <m:den>
+                          <m:r>
+                            <a:rPr lang="en-US" i="1" smtClean="0">
+                              <a:latin typeface="Cambria Math" panose="02040503050406030204" pitchFamily="18" charset="0"/>
+                              <a:ea typeface="Cambria Math" panose="02040503050406030204" pitchFamily="18" charset="0"/>
+                            </a:rPr>
+                            <m:t>𝛼</m:t>
+                          </m:r>
+                        </m:den>
+                      </m:f>
+                      <m:func>
+                        <m:funcPr>
+                          <m:ctrlPr>
+                            <a:rPr lang="en-US" i="1" smtClean="0">
+                              <a:latin typeface="Cambria Math" panose="02040503050406030204" pitchFamily="18" charset="0"/>
+                              <a:ea typeface="Cambria Math" panose="02040503050406030204" pitchFamily="18" charset="0"/>
+                            </a:rPr>
+                          </m:ctrlPr>
+                        </m:funcPr>
+                        <m:fName>
+                          <m:r>
+                            <m:rPr>
+                              <m:sty m:val="p"/>
+                            </m:rPr>
+                            <a:rPr lang="en-US" b="0" i="0" smtClean="0">
+                              <a:latin typeface="Cambria Math" panose="02040503050406030204" pitchFamily="18" charset="0"/>
+                              <a:ea typeface="Cambria Math" panose="02040503050406030204" pitchFamily="18" charset="0"/>
+                            </a:rPr>
+                            <m:t>ln</m:t>
+                          </m:r>
+                        </m:fName>
+                        <m:e>
+                          <m:f>
+                            <m:fPr>
+                              <m:ctrlPr>
+                                <a:rPr lang="en-US" i="1" smtClean="0">
+                                  <a:latin typeface="Cambria Math" panose="02040503050406030204" pitchFamily="18" charset="0"/>
+                                  <a:ea typeface="Cambria Math" panose="02040503050406030204" pitchFamily="18" charset="0"/>
+                                </a:rPr>
+                              </m:ctrlPr>
+                            </m:fPr>
+                            <m:num>
+                              <m:r>
+                                <a:rPr lang="en-US" b="0" i="1" smtClean="0">
+                                  <a:latin typeface="Cambria Math" panose="02040503050406030204" pitchFamily="18" charset="0"/>
+                                  <a:ea typeface="Cambria Math" panose="02040503050406030204" pitchFamily="18" charset="0"/>
+                                </a:rPr>
+                                <m:t>1</m:t>
+                              </m:r>
+                            </m:num>
+                            <m:den>
+                              <m:r>
+                                <a:rPr lang="en-US" b="0" i="1" smtClean="0">
+                                  <a:latin typeface="Cambria Math" panose="02040503050406030204" pitchFamily="18" charset="0"/>
+                                  <a:ea typeface="Cambria Math" panose="02040503050406030204" pitchFamily="18" charset="0"/>
+                                </a:rPr>
+                                <m:t>1−</m:t>
+                              </m:r>
+                              <m:r>
+                                <a:rPr lang="en-US" b="0" i="1" smtClean="0">
+                                  <a:latin typeface="Cambria Math" panose="02040503050406030204" pitchFamily="18" charset="0"/>
+                                  <a:ea typeface="Cambria Math" panose="02040503050406030204" pitchFamily="18" charset="0"/>
+                                </a:rPr>
+                                <m:t>𝛼</m:t>
+                              </m:r>
+                            </m:den>
+                          </m:f>
+                        </m:e>
+                      </m:func>
+                    </m:oMath>
+                  </m:oMathPara>
+                </a14:m>
+                <a:endParaRPr lang="en-US" dirty="0"/>
+              </a:p>
+              <a:p>
+                <a:pPr marL="457200" lvl="1" indent="0">
+                  <a:buNone/>
+                </a:pPr>
+                <a:r>
+                  <a:rPr lang="en-US" dirty="0"/>
+                  <a:t>Where the chance of success is </a:t>
+                </a:r>
+                <a14:m>
+                  <m:oMath xmlns:m="http://schemas.openxmlformats.org/officeDocument/2006/math">
+                    <m:r>
+                      <a:rPr lang="en-US" i="1" smtClean="0">
+                        <a:latin typeface="Cambria Math" panose="02040503050406030204" pitchFamily="18" charset="0"/>
+                        <a:ea typeface="Cambria Math" panose="02040503050406030204" pitchFamily="18" charset="0"/>
+                      </a:rPr>
+                      <m:t>≈</m:t>
+                    </m:r>
+                    <m:f>
+                      <m:fPr>
+                        <m:ctrlPr>
+                          <a:rPr lang="en-US" i="1">
+                            <a:latin typeface="Cambria Math" panose="02040503050406030204" pitchFamily="18" charset="0"/>
+                            <a:ea typeface="Cambria Math" panose="02040503050406030204" pitchFamily="18" charset="0"/>
+                          </a:rPr>
+                        </m:ctrlPr>
+                      </m:fPr>
+                      <m:num>
+                        <m:r>
+                          <a:rPr lang="en-US" i="1">
+                            <a:latin typeface="Cambria Math" panose="02040503050406030204" pitchFamily="18" charset="0"/>
+                            <a:ea typeface="Cambria Math" panose="02040503050406030204" pitchFamily="18" charset="0"/>
+                          </a:rPr>
+                          <m:t>1</m:t>
+                        </m:r>
+                      </m:num>
+                      <m:den>
+                        <m:r>
+                          <a:rPr lang="en-US" i="1">
+                            <a:latin typeface="Cambria Math" panose="02040503050406030204" pitchFamily="18" charset="0"/>
+                            <a:ea typeface="Cambria Math" panose="02040503050406030204" pitchFamily="18" charset="0"/>
+                          </a:rPr>
+                          <m:t>1−</m:t>
+                        </m:r>
+                        <m:r>
+                          <a:rPr lang="en-US" i="1">
+                            <a:latin typeface="Cambria Math" panose="02040503050406030204" pitchFamily="18" charset="0"/>
+                            <a:ea typeface="Cambria Math" panose="02040503050406030204" pitchFamily="18" charset="0"/>
+                          </a:rPr>
+                          <m:t>𝛼</m:t>
+                        </m:r>
+                      </m:den>
+                    </m:f>
+                  </m:oMath>
+                </a14:m>
+                <a:endParaRPr lang="en-US" dirty="0"/>
+              </a:p>
+            </p:txBody>
+          </p:sp>
+        </mc:Choice>
+        <mc:Fallback>
+          <p:sp>
+            <p:nvSpPr>
+              <p:cNvPr id="3" name="Content Placeholder 2">
+                <a:extLst>
+                  <a:ext uri="{FF2B5EF4-FFF2-40B4-BE49-F238E27FC236}">
+                    <a16:creationId xmlns:a16="http://schemas.microsoft.com/office/drawing/2014/main" id="{62709B48-58A5-623B-9852-30181B5EE4F8}"/>
+                  </a:ext>
+                </a:extLst>
+              </p:cNvPr>
+              <p:cNvSpPr>
+                <a:spLocks noGrp="1" noRot="1" noChangeAspect="1" noMove="1" noResize="1" noEditPoints="1" noAdjustHandles="1" noChangeArrowheads="1" noChangeShapeType="1" noTextEdit="1"/>
+              </p:cNvSpPr>
+              <p:nvPr>
+                <p:ph idx="1"/>
+              </p:nvPr>
+            </p:nvSpPr>
+            <p:spPr>
+              <a:xfrm>
+                <a:off x="838200" y="1123406"/>
+                <a:ext cx="10515600" cy="5470724"/>
+              </a:xfrm>
+              <a:blipFill>
+                <a:blip r:embed="rId2"/>
+                <a:stretch>
+                  <a:fillRect l="-1217" t="-1782" r="-986"/>
+                </a:stretch>
+              </a:blipFill>
+            </p:spPr>
+            <p:txBody>
+              <a:bodyPr/>
+              <a:lstStyle/>
+              <a:p>
+                <a:r>
+                  <a:rPr lang="en-US">
+                    <a:noFill/>
+                  </a:rPr>
+                  <a:t> </a:t>
+                </a:r>
+              </a:p>
+            </p:txBody>
+          </p:sp>
+        </mc:Fallback>
+      </mc:AlternateContent>
+      <p:sp>
+        <p:nvSpPr>
+          <p:cNvPr id="6" name="Title 1">
+            <a:extLst>
+              <a:ext uri="{FF2B5EF4-FFF2-40B4-BE49-F238E27FC236}">
+                <a16:creationId xmlns:a16="http://schemas.microsoft.com/office/drawing/2014/main" id="{B7CB3FB6-304E-F342-6AED-DDAE3A8C27FD}"/>
+              </a:ext>
+            </a:extLst>
+          </p:cNvPr>
+          <p:cNvSpPr txBox="1">
+            <a:spLocks/>
+          </p:cNvSpPr>
+          <p:nvPr/>
+        </p:nvSpPr>
+        <p:spPr>
+          <a:xfrm>
+            <a:off x="838200" y="-635"/>
+            <a:ext cx="10515600" cy="1325563"/>
+          </a:xfrm>
+          <a:prstGeom prst="rect">
+            <a:avLst/>
+          </a:prstGeom>
+        </p:spPr>
+        <p:txBody>
+          <a:bodyPr vert="horz" lIns="91440" tIns="45720" rIns="91440" bIns="45720" rtlCol="0" anchor="ctr">
+            <a:normAutofit/>
+          </a:bodyPr>
+          <a:lstStyle>
+            <a:lvl1pPr algn="l" defTabSz="914400" rtl="0" eaLnBrk="1" latinLnBrk="0" hangingPunct="1">
+              <a:lnSpc>
+                <a:spcPct val="90000"/>
+              </a:lnSpc>
+              <a:spcBef>
+                <a:spcPct val="0"/>
+              </a:spcBef>
+              <a:buNone/>
+              <a:defRPr sz="4400" kern="1200">
+                <a:solidFill>
+                  <a:schemeClr val="tx1"/>
+                </a:solidFill>
+                <a:latin typeface="+mj-lt"/>
+                <a:ea typeface="+mj-ea"/>
+                <a:cs typeface="+mj-cs"/>
+              </a:defRPr>
+            </a:lvl1pPr>
+          </a:lstStyle>
+          <a:p>
+            <a:r>
+              <a:rPr lang="en-US" dirty="0">
+                <a:latin typeface="+mn-lt"/>
+              </a:rPr>
+              <a:t>Introduction to Hashing</a:t>
+            </a:r>
+          </a:p>
+        </p:txBody>
+      </p:sp>
+    </p:spTree>
+    <p:extLst>
+      <p:ext uri="{BB962C8B-B14F-4D97-AF65-F5344CB8AC3E}">
+        <p14:creationId xmlns:p14="http://schemas.microsoft.com/office/powerpoint/2010/main" val="2983353550"/>
+      </p:ext>
+    </p:extLst>
+  </p:cSld>
+  <p:clrMapOvr>
+    <a:masterClrMapping/>
+  </p:clrMapOvr>
+</p:sld>
+</file>
+
+<file path=ppt/slides/slide49.xml><?xml version="1.0" encoding="utf-8"?>
+<p:sld xmlns:a="http://schemas.openxmlformats.org/drawingml/2006/main" xmlns:r="http://schemas.openxmlformats.org/officeDocument/2006/relationships" xmlns:p="http://schemas.openxmlformats.org/presentationml/2006/main">
+  <p:cSld>
+    <p:spTree>
+      <p:nvGrpSpPr>
+        <p:cNvPr id="1" name="">
+          <a:extLst>
+            <a:ext uri="{FF2B5EF4-FFF2-40B4-BE49-F238E27FC236}">
+              <a16:creationId xmlns:a16="http://schemas.microsoft.com/office/drawing/2014/main" id="{F371966D-4FEB-4376-ED9A-7E24B5D5C48E}"/>
+            </a:ext>
+          </a:extLst>
+        </p:cNvPr>
+        <p:cNvGrpSpPr/>
+        <p:nvPr/>
+      </p:nvGrpSpPr>
+      <p:grpSpPr>
+        <a:xfrm>
+          <a:off x="0" y="0"/>
+          <a:ext cx="0" cy="0"/>
+          <a:chOff x="0" y="0"/>
+          <a:chExt cx="0" cy="0"/>
+        </a:xfrm>
+      </p:grpSpPr>
+      <p:sp>
+        <p:nvSpPr>
+          <p:cNvPr id="3" name="Content Placeholder 2">
+            <a:extLst>
+              <a:ext uri="{FF2B5EF4-FFF2-40B4-BE49-F238E27FC236}">
+                <a16:creationId xmlns:a16="http://schemas.microsoft.com/office/drawing/2014/main" id="{73B713D0-5220-5B90-B085-A26344BE90C3}"/>
+              </a:ext>
+            </a:extLst>
+          </p:cNvPr>
+          <p:cNvSpPr>
+            <a:spLocks noGrp="1"/>
+          </p:cNvSpPr>
+          <p:nvPr>
+            <p:ph idx="1"/>
+          </p:nvPr>
+        </p:nvSpPr>
+        <p:spPr>
+          <a:xfrm>
+            <a:off x="838200" y="1123406"/>
+            <a:ext cx="10515600" cy="5470724"/>
+          </a:xfrm>
+        </p:spPr>
+        <p:txBody>
+          <a:bodyPr>
+            <a:normAutofit/>
+          </a:bodyPr>
+          <a:lstStyle/>
+          <a:p>
+            <a:pPr marL="0" indent="0">
+              <a:buNone/>
+            </a:pPr>
+            <a:r>
+              <a:rPr lang="en-US" dirty="0"/>
+              <a:t>What are the properties of a good hash function?   </a:t>
+            </a:r>
+          </a:p>
+          <a:p>
+            <a:pPr marL="514350" indent="-514350">
+              <a:buFont typeface="+mj-lt"/>
+              <a:buAutoNum type="arabicPeriod" startAt="5"/>
+            </a:pPr>
+            <a:r>
+              <a:rPr lang="en-US" dirty="0"/>
+              <a:t>Appropriate for the table or required size</a:t>
+            </a:r>
+          </a:p>
+          <a:p>
+            <a:pPr lvl="1"/>
+            <a:r>
+              <a:rPr lang="en-US" dirty="0"/>
+              <a:t>Hash functions produce limited range of hash values   </a:t>
+            </a:r>
+          </a:p>
+          <a:p>
+            <a:pPr lvl="1"/>
+            <a:r>
+              <a:rPr lang="en-US" dirty="0"/>
+              <a:t>Too large wastes space</a:t>
+            </a:r>
+          </a:p>
+          <a:p>
+            <a:pPr lvl="1"/>
+            <a:r>
+              <a:rPr lang="en-US" dirty="0"/>
+              <a:t>Too small leads to collisions</a:t>
+            </a:r>
+          </a:p>
+          <a:p>
+            <a:pPr lvl="1"/>
+            <a:r>
+              <a:rPr lang="en-US" dirty="0"/>
+              <a:t>Ideally make hash table resizable - Half or double as needed </a:t>
+            </a:r>
+          </a:p>
+          <a:p>
+            <a:pPr marL="514350" indent="-514350">
+              <a:buFont typeface="+mj-lt"/>
+              <a:buAutoNum type="arabicPeriod" startAt="5"/>
+            </a:pPr>
+            <a:r>
+              <a:rPr lang="en-US" dirty="0"/>
+              <a:t>Ability to merge hash tables </a:t>
+            </a:r>
+          </a:p>
+          <a:p>
+            <a:pPr lvl="1"/>
+            <a:r>
+              <a:rPr lang="en-US" dirty="0"/>
+              <a:t>Enables parallel processing </a:t>
+            </a:r>
+          </a:p>
+          <a:p>
+            <a:pPr lvl="1"/>
+            <a:r>
+              <a:rPr lang="en-US" dirty="0"/>
+              <a:t>Hash multiple data streams </a:t>
+            </a:r>
+          </a:p>
+          <a:p>
+            <a:endParaRPr lang="en-US" dirty="0"/>
+          </a:p>
+        </p:txBody>
+      </p:sp>
+      <p:sp>
+        <p:nvSpPr>
+          <p:cNvPr id="6" name="Title 1">
+            <a:extLst>
+              <a:ext uri="{FF2B5EF4-FFF2-40B4-BE49-F238E27FC236}">
+                <a16:creationId xmlns:a16="http://schemas.microsoft.com/office/drawing/2014/main" id="{6A499FEE-81C5-CA87-ABD6-FE7C5C870E57}"/>
+              </a:ext>
+            </a:extLst>
+          </p:cNvPr>
+          <p:cNvSpPr txBox="1">
+            <a:spLocks/>
+          </p:cNvSpPr>
+          <p:nvPr/>
+        </p:nvSpPr>
+        <p:spPr>
+          <a:xfrm>
+            <a:off x="838200" y="-635"/>
+            <a:ext cx="10515600" cy="1325563"/>
+          </a:xfrm>
+          <a:prstGeom prst="rect">
+            <a:avLst/>
+          </a:prstGeom>
+        </p:spPr>
+        <p:txBody>
+          <a:bodyPr vert="horz" lIns="91440" tIns="45720" rIns="91440" bIns="45720" rtlCol="0" anchor="ctr">
+            <a:normAutofit/>
+          </a:bodyPr>
+          <a:lstStyle>
+            <a:lvl1pPr algn="l" defTabSz="914400" rtl="0" eaLnBrk="1" latinLnBrk="0" hangingPunct="1">
+              <a:lnSpc>
+                <a:spcPct val="90000"/>
+              </a:lnSpc>
+              <a:spcBef>
+                <a:spcPct val="0"/>
+              </a:spcBef>
+              <a:buNone/>
+              <a:defRPr sz="4400" kern="1200">
+                <a:solidFill>
+                  <a:schemeClr val="tx1"/>
+                </a:solidFill>
+                <a:latin typeface="+mj-lt"/>
+                <a:ea typeface="+mj-ea"/>
+                <a:cs typeface="+mj-cs"/>
+              </a:defRPr>
+            </a:lvl1pPr>
+          </a:lstStyle>
+          <a:p>
+            <a:r>
+              <a:rPr lang="en-US" dirty="0">
+                <a:latin typeface="+mn-lt"/>
+              </a:rPr>
+              <a:t>Introduction to Hashing</a:t>
+            </a:r>
+          </a:p>
+        </p:txBody>
+      </p:sp>
+    </p:spTree>
+    <p:extLst>
+      <p:ext uri="{BB962C8B-B14F-4D97-AF65-F5344CB8AC3E}">
+        <p14:creationId xmlns:p14="http://schemas.microsoft.com/office/powerpoint/2010/main" val="691031706"/>
+      </p:ext>
+    </p:extLst>
+  </p:cSld>
+  <p:clrMapOvr>
+    <a:masterClrMapping/>
+  </p:clrMapOvr>
+  <p:timing>
+    <p:tnLst>
+      <p:par>
+        <p:cTn id="1" dur="indefinite" restart="never" nodeType="tmRoot">
+          <p:childTnLst>
+            <p:seq concurrent="1" nextAc="seek">
+              <p:cTn id="2" dur="indefinite" nodeType="mainSeq">
+                <p:childTnLst>
+                  <p:par>
+                    <p:cTn id="3" fill="hold">
+                      <p:stCondLst>
+                        <p:cond delay="indefinite"/>
+                      </p:stCondLst>
+                      <p:childTnLst>
+                        <p:par>
+                          <p:cTn id="4" fill="hold">
+                            <p:stCondLst>
+                              <p:cond delay="0"/>
+                            </p:stCondLst>
+                            <p:childTnLst>
+                              <p:par>
+                                <p:cTn id="5" presetID="1" presetClass="entr" presetSubtype="0" fill="hold" nodeType="clickEffect">
+                                  <p:stCondLst>
+                                    <p:cond delay="0"/>
+                                  </p:stCondLst>
+                                  <p:childTnLst>
+                                    <p:set>
+                                      <p:cBhvr>
+                                        <p:cTn id="6" dur="1" fill="hold">
+                                          <p:stCondLst>
+                                            <p:cond delay="0"/>
+                                          </p:stCondLst>
+                                        </p:cTn>
+                                        <p:tgtEl>
+                                          <p:spTgt spid="3">
+                                            <p:txEl>
+                                              <p:pRg st="1" end="1"/>
+                                            </p:txEl>
+                                          </p:spTgt>
+                                        </p:tgtEl>
+                                        <p:attrNameLst>
+                                          <p:attrName>style.visibility</p:attrName>
+                                        </p:attrNameLst>
+                                      </p:cBhvr>
+                                      <p:to>
+                                        <p:strVal val="visible"/>
+                                      </p:to>
+                                    </p:set>
+                                  </p:childTnLst>
+                                </p:cTn>
+                              </p:par>
+                              <p:par>
+                                <p:cTn id="7" presetID="1" presetClass="entr" presetSubtype="0" fill="hold" nodeType="withEffect">
+                                  <p:stCondLst>
+                                    <p:cond delay="0"/>
+                                  </p:stCondLst>
+                                  <p:childTnLst>
+                                    <p:set>
+                                      <p:cBhvr>
+                                        <p:cTn id="8" dur="1" fill="hold">
+                                          <p:stCondLst>
+                                            <p:cond delay="0"/>
+                                          </p:stCondLst>
+                                        </p:cTn>
+                                        <p:tgtEl>
+                                          <p:spTgt spid="3">
+                                            <p:txEl>
+                                              <p:pRg st="2" end="2"/>
+                                            </p:txEl>
+                                          </p:spTgt>
+                                        </p:tgtEl>
+                                        <p:attrNameLst>
+                                          <p:attrName>style.visibility</p:attrName>
+                                        </p:attrNameLst>
+                                      </p:cBhvr>
+                                      <p:to>
+                                        <p:strVal val="visible"/>
+                                      </p:to>
+                                    </p:set>
+                                  </p:childTnLst>
+                                </p:cTn>
+                              </p:par>
+                              <p:par>
+                                <p:cTn id="9" presetID="1" presetClass="entr" presetSubtype="0" fill="hold" nodeType="withEffect">
+                                  <p:stCondLst>
+                                    <p:cond delay="0"/>
+                                  </p:stCondLst>
+                                  <p:childTnLst>
+                                    <p:set>
+                                      <p:cBhvr>
+                                        <p:cTn id="10" dur="1" fill="hold">
+                                          <p:stCondLst>
+                                            <p:cond delay="0"/>
+                                          </p:stCondLst>
+                                        </p:cTn>
+                                        <p:tgtEl>
+                                          <p:spTgt spid="3">
+                                            <p:txEl>
+                                              <p:pRg st="3" end="3"/>
+                                            </p:txEl>
+                                          </p:spTgt>
+                                        </p:tgtEl>
+                                        <p:attrNameLst>
+                                          <p:attrName>style.visibility</p:attrName>
+                                        </p:attrNameLst>
+                                      </p:cBhvr>
+                                      <p:to>
+                                        <p:strVal val="visible"/>
+                                      </p:to>
+                                    </p:set>
+                                  </p:childTnLst>
+                                </p:cTn>
+                              </p:par>
+                              <p:par>
+                                <p:cTn id="11" presetID="1" presetClass="entr" presetSubtype="0" fill="hold" nodeType="withEffect">
+                                  <p:stCondLst>
+                                    <p:cond delay="0"/>
+                                  </p:stCondLst>
+                                  <p:childTnLst>
+                                    <p:set>
+                                      <p:cBhvr>
+                                        <p:cTn id="12" dur="1" fill="hold">
+                                          <p:stCondLst>
+                                            <p:cond delay="0"/>
+                                          </p:stCondLst>
+                                        </p:cTn>
+                                        <p:tgtEl>
+                                          <p:spTgt spid="3">
+                                            <p:txEl>
+                                              <p:pRg st="4" end="4"/>
+                                            </p:txEl>
+                                          </p:spTgt>
+                                        </p:tgtEl>
+                                        <p:attrNameLst>
+                                          <p:attrName>style.visibility</p:attrName>
+                                        </p:attrNameLst>
+                                      </p:cBhvr>
+                                      <p:to>
+                                        <p:strVal val="visible"/>
+                                      </p:to>
+                                    </p:set>
+                                  </p:childTnLst>
+                                </p:cTn>
+                              </p:par>
+                              <p:par>
+                                <p:cTn id="13" presetID="1" presetClass="entr" presetSubtype="0" fill="hold" nodeType="withEffect">
+                                  <p:stCondLst>
+                                    <p:cond delay="0"/>
+                                  </p:stCondLst>
+                                  <p:childTnLst>
+                                    <p:set>
+                                      <p:cBhvr>
+                                        <p:cTn id="14" dur="1" fill="hold">
+                                          <p:stCondLst>
+                                            <p:cond delay="0"/>
+                                          </p:stCondLst>
+                                        </p:cTn>
+                                        <p:tgtEl>
+                                          <p:spTgt spid="3">
+                                            <p:txEl>
+                                              <p:pRg st="5" end="5"/>
+                                            </p:txEl>
+                                          </p:spTgt>
+                                        </p:tgtEl>
+                                        <p:attrNameLst>
+                                          <p:attrName>style.visibility</p:attrName>
+                                        </p:attrNameLst>
+                                      </p:cBhvr>
+                                      <p:to>
+                                        <p:strVal val="visible"/>
+                                      </p:to>
+                                    </p:set>
+                                  </p:childTnLst>
+                                </p:cTn>
+                              </p:par>
+                            </p:childTnLst>
+                          </p:cTn>
+                        </p:par>
+                      </p:childTnLst>
+                    </p:cTn>
+                  </p:par>
+                  <p:par>
+                    <p:cTn id="15" fill="hold">
+                      <p:stCondLst>
+                        <p:cond delay="indefinite"/>
+                      </p:stCondLst>
+                      <p:childTnLst>
+                        <p:par>
+                          <p:cTn id="16" fill="hold">
+                            <p:stCondLst>
+                              <p:cond delay="0"/>
+                            </p:stCondLst>
+                            <p:childTnLst>
+                              <p:par>
+                                <p:cTn id="17" presetID="1" presetClass="entr" presetSubtype="0" fill="hold" nodeType="clickEffect">
+                                  <p:stCondLst>
+                                    <p:cond delay="0"/>
+                                  </p:stCondLst>
+                                  <p:childTnLst>
+                                    <p:set>
+                                      <p:cBhvr>
+                                        <p:cTn id="18" dur="1" fill="hold">
+                                          <p:stCondLst>
+                                            <p:cond delay="0"/>
+                                          </p:stCondLst>
+                                        </p:cTn>
+                                        <p:tgtEl>
+                                          <p:spTgt spid="3">
+                                            <p:txEl>
+                                              <p:pRg st="6" end="6"/>
+                                            </p:txEl>
+                                          </p:spTgt>
+                                        </p:tgtEl>
+                                        <p:attrNameLst>
+                                          <p:attrName>style.visibility</p:attrName>
+                                        </p:attrNameLst>
+                                      </p:cBhvr>
+                                      <p:to>
+                                        <p:strVal val="visible"/>
+                                      </p:to>
+                                    </p:set>
+                                  </p:childTnLst>
+                                </p:cTn>
+                              </p:par>
+                              <p:par>
+                                <p:cTn id="19" presetID="1" presetClass="entr" presetSubtype="0" fill="hold" nodeType="withEffect">
+                                  <p:stCondLst>
+                                    <p:cond delay="0"/>
+                                  </p:stCondLst>
+                                  <p:childTnLst>
+                                    <p:set>
+                                      <p:cBhvr>
+                                        <p:cTn id="20" dur="1" fill="hold">
+                                          <p:stCondLst>
+                                            <p:cond delay="0"/>
+                                          </p:stCondLst>
+                                        </p:cTn>
+                                        <p:tgtEl>
+                                          <p:spTgt spid="3">
+                                            <p:txEl>
+                                              <p:pRg st="7" end="7"/>
+                                            </p:txEl>
+                                          </p:spTgt>
+                                        </p:tgtEl>
+                                        <p:attrNameLst>
+                                          <p:attrName>style.visibility</p:attrName>
+                                        </p:attrNameLst>
+                                      </p:cBhvr>
+                                      <p:to>
+                                        <p:strVal val="visible"/>
+                                      </p:to>
+                                    </p:set>
+                                  </p:childTnLst>
+                                </p:cTn>
+                              </p:par>
+                              <p:par>
+                                <p:cTn id="21" presetID="1" presetClass="entr" presetSubtype="0" fill="hold" nodeType="withEffect">
+                                  <p:stCondLst>
+                                    <p:cond delay="0"/>
+                                  </p:stCondLst>
+                                  <p:childTnLst>
+                                    <p:set>
+                                      <p:cBhvr>
+                                        <p:cTn id="22" dur="1" fill="hold">
+                                          <p:stCondLst>
+                                            <p:cond delay="0"/>
+                                          </p:stCondLst>
+                                        </p:cTn>
+                                        <p:tgtEl>
+                                          <p:spTgt spid="3">
+                                            <p:txEl>
+                                              <p:pRg st="8" end="8"/>
+                                            </p:txEl>
+                                          </p:spTgt>
+                                        </p:tgtEl>
+                                        <p:attrNameLst>
+                                          <p:attrName>style.visibility</p:attrName>
+                                        </p:attrNameLst>
+                                      </p:cBhvr>
+                                      <p:to>
+                                        <p:strVal val="visible"/>
+                                      </p:to>
+                                    </p:set>
+                                  </p:childTnLst>
+                                </p:cTn>
+                              </p:par>
+                            </p:childTnLst>
+                          </p:cTn>
+                        </p:par>
+                      </p:childTnLst>
+                    </p:cTn>
+                  </p:par>
+                </p:childTnLst>
+              </p:cTn>
+              <p:prevCondLst>
+                <p:cond evt="onPrev" delay="0">
+                  <p:tgtEl>
+                    <p:sldTgt/>
+                  </p:tgtEl>
+                </p:cond>
+              </p:prevCondLst>
+              <p:nextCondLst>
+                <p:cond evt="onNext" delay="0">
+                  <p:tgtEl>
+                    <p:sldTgt/>
+                  </p:tgtEl>
+                </p:cond>
+              </p:nextCondLst>
+            </p:seq>
+          </p:childTnLst>
+        </p:cTn>
+      </p:par>
+    </p:tnLst>
+  </p:timing>
+</p:sld>
+</file>
+
 <file path=ppt/slides/slide5.xml><?xml version="1.0" encoding="utf-8"?>
 <p:sld xmlns:a="http://schemas.openxmlformats.org/drawingml/2006/main" xmlns:r="http://schemas.openxmlformats.org/officeDocument/2006/relationships" xmlns:p="http://schemas.openxmlformats.org/presentationml/2006/main">
   <p:cSld>
@@ -36200,6 +34687,72 @@
 </file>
 
 <file path=ppt/slides/slide52.xml><?xml version="1.0" encoding="utf-8"?>
+<p:sld xmlns:a="http://schemas.openxmlformats.org/drawingml/2006/main" xmlns:r="http://schemas.openxmlformats.org/officeDocument/2006/relationships" xmlns:p="http://schemas.openxmlformats.org/presentationml/2006/main">
+  <p:cSld>
+    <p:spTree>
+      <p:nvGrpSpPr>
+        <p:cNvPr id="1" name="">
+          <a:extLst>
+            <a:ext uri="{FF2B5EF4-FFF2-40B4-BE49-F238E27FC236}">
+              <a16:creationId xmlns:a16="http://schemas.microsoft.com/office/drawing/2014/main" id="{52887113-4FF5-4C8C-6DD2-6ED943D7E03F}"/>
+            </a:ext>
+          </a:extLst>
+        </p:cNvPr>
+        <p:cNvGrpSpPr/>
+        <p:nvPr/>
+      </p:nvGrpSpPr>
+      <p:grpSpPr>
+        <a:xfrm>
+          <a:off x="0" y="0"/>
+          <a:ext cx="0" cy="0"/>
+          <a:chOff x="0" y="0"/>
+          <a:chExt cx="0" cy="0"/>
+        </a:xfrm>
+      </p:grpSpPr>
+      <p:sp>
+        <p:nvSpPr>
+          <p:cNvPr id="2" name="Title 1">
+            <a:extLst>
+              <a:ext uri="{FF2B5EF4-FFF2-40B4-BE49-F238E27FC236}">
+                <a16:creationId xmlns:a16="http://schemas.microsoft.com/office/drawing/2014/main" id="{89FE4D97-C525-0D5F-DBA4-E2E62A9E4503}"/>
+              </a:ext>
+            </a:extLst>
+          </p:cNvPr>
+          <p:cNvSpPr>
+            <a:spLocks noGrp="1"/>
+          </p:cNvSpPr>
+          <p:nvPr>
+            <p:ph type="ctrTitle"/>
+          </p:nvPr>
+        </p:nvSpPr>
+        <p:spPr/>
+        <p:txBody>
+          <a:bodyPr>
+            <a:normAutofit/>
+          </a:bodyPr>
+          <a:lstStyle/>
+          <a:p>
+            <a:r>
+              <a:rPr lang="en-US" sz="4400" dirty="0"/>
+              <a:t>Summary</a:t>
+            </a:r>
+          </a:p>
+        </p:txBody>
+      </p:sp>
+    </p:spTree>
+    <p:extLst>
+      <p:ext uri="{BB962C8B-B14F-4D97-AF65-F5344CB8AC3E}">
+        <p14:creationId xmlns:p14="http://schemas.microsoft.com/office/powerpoint/2010/main" val="2665533874"/>
+      </p:ext>
+    </p:extLst>
+  </p:cSld>
+  <p:clrMapOvr>
+    <a:masterClrMapping/>
+  </p:clrMapOvr>
+</p:sld>
+</file>
+
+<file path=ppt/slides/slide53.xml><?xml version="1.0" encoding="utf-8"?>
 <p:sld xmlns:a="http://schemas.openxmlformats.org/drawingml/2006/main" xmlns:r="http://schemas.openxmlformats.org/officeDocument/2006/relationships" xmlns:p="http://schemas.openxmlformats.org/presentationml/2006/main">
   <p:cSld>
     <p:spTree>

--- a/slides/1_Introduction.pptx
+++ b/slides/1_Introduction.pptx
@@ -53,12 +53,12 @@
     <p:sldId id="730" r:id="rId44"/>
     <p:sldId id="739" r:id="rId45"/>
     <p:sldId id="376" r:id="rId46"/>
-    <p:sldId id="378" r:id="rId47"/>
-    <p:sldId id="734" r:id="rId48"/>
-    <p:sldId id="737" r:id="rId49"/>
-    <p:sldId id="728" r:id="rId50"/>
-    <p:sldId id="379" r:id="rId51"/>
-    <p:sldId id="380" r:id="rId52"/>
+    <p:sldId id="728" r:id="rId47"/>
+    <p:sldId id="379" r:id="rId48"/>
+    <p:sldId id="380" r:id="rId49"/>
+    <p:sldId id="742" r:id="rId50"/>
+    <p:sldId id="743" r:id="rId51"/>
+    <p:sldId id="744" r:id="rId52"/>
     <p:sldId id="740" r:id="rId53"/>
     <p:sldId id="384" r:id="rId54"/>
   </p:sldIdLst>
@@ -249,7 +249,7 @@
           <a:p>
             <a:fld id="{2F3ABF1A-8818-4472-8518-E71DC7B5D2F7}" type="datetimeFigureOut">
               <a:rPr lang="en-US" smtClean="0"/>
-              <a:t>5/20/2026</a:t>
+              <a:t>5/29/2026</a:t>
             </a:fld>
             <a:endParaRPr lang="en-US"/>
           </a:p>
@@ -663,7 +663,7 @@
           <a:p>
             <a:fld id="{6E4A31BF-7266-4BEB-918B-ADC21C630A6F}" type="datetimeFigureOut">
               <a:rPr lang="en-US" smtClean="0"/>
-              <a:t>5/20/2026</a:t>
+              <a:t>5/29/2026</a:t>
             </a:fld>
             <a:endParaRPr lang="en-US"/>
           </a:p>
@@ -861,7 +861,7 @@
           <a:p>
             <a:fld id="{6E4A31BF-7266-4BEB-918B-ADC21C630A6F}" type="datetimeFigureOut">
               <a:rPr lang="en-US" smtClean="0"/>
-              <a:t>5/20/2026</a:t>
+              <a:t>5/29/2026</a:t>
             </a:fld>
             <a:endParaRPr lang="en-US"/>
           </a:p>
@@ -1069,7 +1069,7 @@
           <a:p>
             <a:fld id="{6E4A31BF-7266-4BEB-918B-ADC21C630A6F}" type="datetimeFigureOut">
               <a:rPr lang="en-US" smtClean="0"/>
-              <a:t>5/20/2026</a:t>
+              <a:t>5/29/2026</a:t>
             </a:fld>
             <a:endParaRPr lang="en-US"/>
           </a:p>
@@ -1267,7 +1267,7 @@
           <a:p>
             <a:fld id="{6E4A31BF-7266-4BEB-918B-ADC21C630A6F}" type="datetimeFigureOut">
               <a:rPr lang="en-US" smtClean="0"/>
-              <a:t>5/20/2026</a:t>
+              <a:t>5/29/2026</a:t>
             </a:fld>
             <a:endParaRPr lang="en-US"/>
           </a:p>
@@ -1542,7 +1542,7 @@
           <a:p>
             <a:fld id="{6E4A31BF-7266-4BEB-918B-ADC21C630A6F}" type="datetimeFigureOut">
               <a:rPr lang="en-US" smtClean="0"/>
-              <a:t>5/20/2026</a:t>
+              <a:t>5/29/2026</a:t>
             </a:fld>
             <a:endParaRPr lang="en-US"/>
           </a:p>
@@ -1807,7 +1807,7 @@
           <a:p>
             <a:fld id="{6E4A31BF-7266-4BEB-918B-ADC21C630A6F}" type="datetimeFigureOut">
               <a:rPr lang="en-US" smtClean="0"/>
-              <a:t>5/20/2026</a:t>
+              <a:t>5/29/2026</a:t>
             </a:fld>
             <a:endParaRPr lang="en-US"/>
           </a:p>
@@ -2219,7 +2219,7 @@
           <a:p>
             <a:fld id="{6E4A31BF-7266-4BEB-918B-ADC21C630A6F}" type="datetimeFigureOut">
               <a:rPr lang="en-US" smtClean="0"/>
-              <a:t>5/20/2026</a:t>
+              <a:t>5/29/2026</a:t>
             </a:fld>
             <a:endParaRPr lang="en-US"/>
           </a:p>
@@ -2360,7 +2360,7 @@
           <a:p>
             <a:fld id="{6E4A31BF-7266-4BEB-918B-ADC21C630A6F}" type="datetimeFigureOut">
               <a:rPr lang="en-US" smtClean="0"/>
-              <a:t>5/20/2026</a:t>
+              <a:t>5/29/2026</a:t>
             </a:fld>
             <a:endParaRPr lang="en-US"/>
           </a:p>
@@ -2473,7 +2473,7 @@
           <a:p>
             <a:fld id="{6E4A31BF-7266-4BEB-918B-ADC21C630A6F}" type="datetimeFigureOut">
               <a:rPr lang="en-US" smtClean="0"/>
-              <a:t>5/20/2026</a:t>
+              <a:t>5/29/2026</a:t>
             </a:fld>
             <a:endParaRPr lang="en-US"/>
           </a:p>
@@ -2784,7 +2784,7 @@
           <a:p>
             <a:fld id="{6E4A31BF-7266-4BEB-918B-ADC21C630A6F}" type="datetimeFigureOut">
               <a:rPr lang="en-US" smtClean="0"/>
-              <a:t>5/20/2026</a:t>
+              <a:t>5/29/2026</a:t>
             </a:fld>
             <a:endParaRPr lang="en-US"/>
           </a:p>
@@ -3072,7 +3072,7 @@
           <a:p>
             <a:fld id="{6E4A31BF-7266-4BEB-918B-ADC21C630A6F}" type="datetimeFigureOut">
               <a:rPr lang="en-US" smtClean="0"/>
-              <a:t>5/20/2026</a:t>
+              <a:t>5/29/2026</a:t>
             </a:fld>
             <a:endParaRPr lang="en-US"/>
           </a:p>
@@ -3313,7 +3313,7 @@
           <a:p>
             <a:fld id="{6E4A31BF-7266-4BEB-918B-ADC21C630A6F}" type="datetimeFigureOut">
               <a:rPr lang="en-US" smtClean="0"/>
-              <a:t>5/20/2026</a:t>
+              <a:t>5/29/2026</a:t>
             </a:fld>
             <a:endParaRPr lang="en-US"/>
           </a:p>
@@ -29560,7 +29560,7 @@
 </file>
 
 <file path=ppt/slides/slide45.xml><?xml version="1.0" encoding="utf-8"?>
-<p:sld xmlns:a="http://schemas.openxmlformats.org/drawingml/2006/main" xmlns:r="http://schemas.openxmlformats.org/officeDocument/2006/relationships" xmlns:p="http://schemas.openxmlformats.org/presentationml/2006/main" show="0">
+<p:sld xmlns:a="http://schemas.openxmlformats.org/drawingml/2006/main" xmlns:r="http://schemas.openxmlformats.org/officeDocument/2006/relationships" xmlns:p="http://schemas.openxmlformats.org/presentationml/2006/main">
   <p:cSld>
     <p:spTree>
       <p:nvGrpSpPr>
@@ -29576,8 +29576,8 @@
           <a:chExt cx="0" cy="0"/>
         </a:xfrm>
       </p:grpSpPr>
-      <mc:AlternateContent xmlns:mc="http://schemas.openxmlformats.org/markup-compatibility/2006" xmlns:a14="http://schemas.microsoft.com/office/drawing/2010/main">
-        <mc:Choice Requires="a14">
+      <mc:AlternateContent xmlns:mc="http://schemas.openxmlformats.org/markup-compatibility/2006">
+        <mc:Choice xmlns:a14="http://schemas.microsoft.com/office/drawing/2010/main" Requires="a14">
           <p:sp>
             <p:nvSpPr>
               <p:cNvPr id="3" name="Content Placeholder 2">
@@ -29949,7 +29949,7 @@
             </p:txBody>
           </p:sp>
         </mc:Choice>
-        <mc:Fallback xmlns="">
+        <mc:Fallback>
           <p:sp>
             <p:nvSpPr>
               <p:cNvPr id="3" name="Content Placeholder 2">
@@ -30381,2225 +30381,6 @@
   <p:cSld>
     <p:spTree>
       <p:nvGrpSpPr>
-        <p:cNvPr id="1" name=""/>
-        <p:cNvGrpSpPr/>
-        <p:nvPr/>
-      </p:nvGrpSpPr>
-      <p:grpSpPr>
-        <a:xfrm>
-          <a:off x="0" y="0"/>
-          <a:ext cx="0" cy="0"/>
-          <a:chOff x="0" y="0"/>
-          <a:chExt cx="0" cy="0"/>
-        </a:xfrm>
-      </p:grpSpPr>
-      <mc:AlternateContent xmlns:mc="http://schemas.openxmlformats.org/markup-compatibility/2006" xmlns:a14="http://schemas.microsoft.com/office/drawing/2010/main">
-        <mc:Choice Requires="a14">
-          <p:sp>
-            <p:nvSpPr>
-              <p:cNvPr id="3" name="Content Placeholder 2">
-                <a:extLst>
-                  <a:ext uri="{FF2B5EF4-FFF2-40B4-BE49-F238E27FC236}">
-                    <a16:creationId xmlns:a16="http://schemas.microsoft.com/office/drawing/2014/main" id="{258E6AF3-7615-4BD1-878E-A94C93E98F90}"/>
-                  </a:ext>
-                </a:extLst>
-              </p:cNvPr>
-              <p:cNvSpPr>
-                <a:spLocks noGrp="1"/>
-              </p:cNvSpPr>
-              <p:nvPr>
-                <p:ph idx="1"/>
-              </p:nvPr>
-            </p:nvSpPr>
-            <p:spPr>
-              <a:xfrm>
-                <a:off x="838200" y="1123406"/>
-                <a:ext cx="10515600" cy="5470724"/>
-              </a:xfrm>
-            </p:spPr>
-            <p:txBody>
-              <a:bodyPr>
-                <a:normAutofit lnSpcReduction="10000"/>
-              </a:bodyPr>
-              <a:lstStyle/>
-              <a:p>
-                <a:pPr marL="0" indent="0">
-                  <a:buNone/>
-                </a:pPr>
-                <a:r>
-                  <a:rPr lang="en-US" dirty="0"/>
-                  <a:t>Hash key collisions   </a:t>
-                </a:r>
-              </a:p>
-              <a:p>
-                <a:r>
-                  <a:rPr lang="en-US" dirty="0"/>
-                  <a:t>Are hash keys always unique? </a:t>
-                </a:r>
-              </a:p>
-              <a:p>
-                <a:r>
-                  <a:rPr lang="en-US" dirty="0"/>
-                  <a:t>No!</a:t>
-                </a:r>
-              </a:p>
-              <a:p>
-                <a:r>
-                  <a:rPr lang="en-US" dirty="0"/>
-                  <a:t>Consider a </a:t>
-                </a:r>
-                <a:r>
-                  <a:rPr lang="en-US" b="1" dirty="0"/>
-                  <a:t>division hash </a:t>
-                </a:r>
-                <a:r>
-                  <a:rPr lang="en-US" dirty="0"/>
-                  <a:t>function</a:t>
-                </a:r>
-              </a:p>
-              <a:p>
-                <a:pPr marL="0" indent="0">
-                  <a:buNone/>
-                </a:pPr>
-                <a14:m>
-                  <m:oMathPara xmlns:m="http://schemas.openxmlformats.org/officeDocument/2006/math">
-                    <m:oMathParaPr>
-                      <m:jc m:val="centerGroup"/>
-                    </m:oMathParaPr>
-                    <m:oMath xmlns:m="http://schemas.openxmlformats.org/officeDocument/2006/math">
-                      <m:r>
-                        <m:rPr>
-                          <m:sty m:val="p"/>
-                        </m:rPr>
-                        <a:rPr lang="en-US" i="1">
-                          <a:latin typeface="Cambria Math" panose="02040503050406030204" pitchFamily="18" charset="0"/>
-                        </a:rPr>
-                        <m:t>f</m:t>
-                      </m:r>
-                      <m:d>
-                        <m:dPr>
-                          <m:ctrlPr>
-                            <a:rPr lang="en-US" i="1">
-                              <a:latin typeface="Cambria Math" panose="02040503050406030204" pitchFamily="18" charset="0"/>
-                            </a:rPr>
-                          </m:ctrlPr>
-                        </m:dPr>
-                        <m:e>
-                          <m:r>
-                            <a:rPr lang="en-US" i="1">
-                              <a:latin typeface="Cambria Math" panose="02040503050406030204" pitchFamily="18" charset="0"/>
-                            </a:rPr>
-                            <m:t>𝑘</m:t>
-                          </m:r>
-                        </m:e>
-                      </m:d>
-                      <m:r>
-                        <a:rPr lang="en-US" i="1">
-                          <a:latin typeface="Cambria Math" panose="02040503050406030204" pitchFamily="18" charset="0"/>
-                        </a:rPr>
-                        <m:t>=</m:t>
-                      </m:r>
-                      <m:d>
-                        <m:dPr>
-                          <m:begChr m:val="["/>
-                          <m:endChr m:val="]"/>
-                          <m:ctrlPr>
-                            <a:rPr lang="en-US" i="1">
-                              <a:latin typeface="Cambria Math" panose="02040503050406030204" pitchFamily="18" charset="0"/>
-                            </a:rPr>
-                          </m:ctrlPr>
-                        </m:dPr>
-                        <m:e>
-                          <m:d>
-                            <m:dPr>
-                              <m:ctrlPr>
-                                <a:rPr lang="en-US" i="1">
-                                  <a:latin typeface="Cambria Math" panose="02040503050406030204" pitchFamily="18" charset="0"/>
-                                </a:rPr>
-                              </m:ctrlPr>
-                            </m:dPr>
-                            <m:e>
-                              <m:r>
-                                <a:rPr lang="en-US" i="1">
-                                  <a:latin typeface="Cambria Math" panose="02040503050406030204" pitchFamily="18" charset="0"/>
-                                </a:rPr>
-                                <m:t>𝑎</m:t>
-                              </m:r>
-                              <m:r>
-                                <a:rPr lang="en-US" i="1">
-                                  <a:latin typeface="Cambria Math" panose="02040503050406030204" pitchFamily="18" charset="0"/>
-                                </a:rPr>
-                                <m:t> </m:t>
-                              </m:r>
-                              <m:r>
-                                <a:rPr lang="en-US" i="1">
-                                  <a:latin typeface="Cambria Math" panose="02040503050406030204" pitchFamily="18" charset="0"/>
-                                </a:rPr>
-                                <m:t>𝑖</m:t>
-                              </m:r>
-                              <m:r>
-                                <a:rPr lang="en-US" i="1">
-                                  <a:latin typeface="Cambria Math" panose="02040503050406030204" pitchFamily="18" charset="0"/>
-                                </a:rPr>
-                                <m:t>+</m:t>
-                              </m:r>
-                              <m:r>
-                                <a:rPr lang="en-US" i="1">
-                                  <a:latin typeface="Cambria Math" panose="02040503050406030204" pitchFamily="18" charset="0"/>
-                                </a:rPr>
-                                <m:t>𝑏</m:t>
-                              </m:r>
-                            </m:e>
-                          </m:d>
-                          <m:r>
-                            <a:rPr lang="en-US" i="1">
-                              <a:latin typeface="Cambria Math" panose="02040503050406030204" pitchFamily="18" charset="0"/>
-                            </a:rPr>
-                            <m:t> </m:t>
-                          </m:r>
-                          <m:r>
-                            <a:rPr lang="en-US" i="1">
-                              <a:latin typeface="Cambria Math" panose="02040503050406030204" pitchFamily="18" charset="0"/>
-                            </a:rPr>
-                            <m:t>𝑚𝑜𝑑</m:t>
-                          </m:r>
-                          <m:r>
-                            <a:rPr lang="en-US" i="1">
-                              <a:latin typeface="Cambria Math" panose="02040503050406030204" pitchFamily="18" charset="0"/>
-                            </a:rPr>
-                            <m:t> </m:t>
-                          </m:r>
-                          <m:r>
-                            <a:rPr lang="en-US" i="1">
-                              <a:latin typeface="Cambria Math" panose="02040503050406030204" pitchFamily="18" charset="0"/>
-                            </a:rPr>
-                            <m:t>𝑝</m:t>
-                          </m:r>
-                        </m:e>
-                      </m:d>
-                      <m:r>
-                        <a:rPr lang="en-US" i="1">
-                          <a:latin typeface="Cambria Math" panose="02040503050406030204" pitchFamily="18" charset="0"/>
-                        </a:rPr>
-                        <m:t>𝑚𝑜𝑑</m:t>
-                      </m:r>
-                      <m:r>
-                        <a:rPr lang="en-US" i="1">
-                          <a:latin typeface="Cambria Math" panose="02040503050406030204" pitchFamily="18" charset="0"/>
-                        </a:rPr>
-                        <m:t> </m:t>
-                      </m:r>
-                      <m:r>
-                        <a:rPr lang="en-US" i="1">
-                          <a:latin typeface="Cambria Math" panose="02040503050406030204" pitchFamily="18" charset="0"/>
-                        </a:rPr>
-                        <m:t>𝑚</m:t>
-                      </m:r>
-                      <m:r>
-                        <a:rPr lang="en-US" i="1">
-                          <a:latin typeface="Cambria Math" panose="02040503050406030204" pitchFamily="18" charset="0"/>
-                        </a:rPr>
-                        <m:t> </m:t>
-                      </m:r>
-                    </m:oMath>
-                  </m:oMathPara>
-                </a14:m>
-                <a:endParaRPr lang="en-US" dirty="0"/>
-              </a:p>
-              <a:p>
-                <a:r>
-                  <a:rPr lang="en-US" dirty="0"/>
-                  <a:t>Table is limited to size </a:t>
-                </a:r>
-                <a14:m>
-                  <m:oMath xmlns:m="http://schemas.openxmlformats.org/officeDocument/2006/math">
-                    <m:r>
-                      <a:rPr lang="en-US" b="0" i="1" smtClean="0">
-                        <a:latin typeface="Cambria Math" panose="02040503050406030204" pitchFamily="18" charset="0"/>
-                      </a:rPr>
-                      <m:t>𝑚</m:t>
-                    </m:r>
-                  </m:oMath>
-                </a14:m>
-                <a:endParaRPr lang="en-US" dirty="0"/>
-              </a:p>
-              <a:p>
-                <a:r>
-                  <a:rPr lang="en-US" dirty="0"/>
-                  <a:t>But even for </a:t>
-                </a:r>
-                <a14:m>
-                  <m:oMath xmlns:m="http://schemas.openxmlformats.org/officeDocument/2006/math">
-                    <m:d>
-                      <m:dPr>
-                        <m:begChr m:val="|"/>
-                        <m:endChr m:val="|"/>
-                        <m:ctrlPr>
-                          <a:rPr lang="en-US" b="0" i="1" smtClean="0">
-                            <a:latin typeface="Cambria Math" panose="02040503050406030204" pitchFamily="18" charset="0"/>
-                          </a:rPr>
-                        </m:ctrlPr>
-                      </m:dPr>
-                      <m:e>
-                        <m:r>
-                          <a:rPr lang="en-US" b="0" i="1" smtClean="0">
-                            <a:latin typeface="Cambria Math" panose="02040503050406030204" pitchFamily="18" charset="0"/>
-                          </a:rPr>
-                          <m:t>𝑈</m:t>
-                        </m:r>
-                      </m:e>
-                    </m:d>
-                    <m:r>
-                      <a:rPr lang="en-US" b="0" i="1" smtClean="0">
-                        <a:latin typeface="Cambria Math" panose="02040503050406030204" pitchFamily="18" charset="0"/>
-                        <a:ea typeface="Cambria Math" panose="02040503050406030204" pitchFamily="18" charset="0"/>
-                      </a:rPr>
-                      <m:t>≤</m:t>
-                    </m:r>
-                    <m:r>
-                      <a:rPr lang="en-US" b="0" i="1" smtClean="0">
-                        <a:latin typeface="Cambria Math" panose="02040503050406030204" pitchFamily="18" charset="0"/>
-                        <a:ea typeface="Cambria Math" panose="02040503050406030204" pitchFamily="18" charset="0"/>
-                      </a:rPr>
-                      <m:t>𝑚</m:t>
-                    </m:r>
-                  </m:oMath>
-                </a14:m>
-                <a:r>
-                  <a:rPr lang="en-US" dirty="0"/>
-                  <a:t> there is a probability of key collisions </a:t>
-                </a:r>
-              </a:p>
-              <a:p>
-                <a:pPr lvl="1"/>
-                <a:r>
-                  <a:rPr lang="en-US" dirty="0"/>
-                  <a:t>Probabilities are derived analogous to the famous </a:t>
-                </a:r>
-                <a:r>
-                  <a:rPr lang="en-US" b="1" dirty="0">
-                    <a:hlinkClick r:id="rId2"/>
-                  </a:rPr>
-                  <a:t>birthday problem</a:t>
-                </a:r>
-                <a:endParaRPr lang="en-US" b="1" dirty="0"/>
-              </a:p>
-              <a:p>
-                <a:r>
-                  <a:rPr lang="en-US" dirty="0"/>
-                  <a:t>Need a </a:t>
-                </a:r>
-                <a:r>
-                  <a:rPr lang="en-US" b="1" dirty="0">
-                    <a:hlinkClick r:id="rId3"/>
-                  </a:rPr>
-                  <a:t>hash collision </a:t>
-                </a:r>
-                <a:r>
-                  <a:rPr lang="en-US" b="1" dirty="0"/>
-                  <a:t>resolution </a:t>
-                </a:r>
-                <a:r>
-                  <a:rPr lang="en-US" dirty="0"/>
-                  <a:t>mechanism</a:t>
-                </a:r>
-              </a:p>
-              <a:p>
-                <a:pPr lvl="1"/>
-                <a:r>
-                  <a:rPr lang="en-US" dirty="0"/>
-                  <a:t>Many algorithms in use</a:t>
-                </a:r>
-              </a:p>
-              <a:p>
-                <a:pPr lvl="1"/>
-                <a:r>
-                  <a:rPr lang="en-US" dirty="0"/>
-                  <a:t>Chaining</a:t>
-                </a:r>
-              </a:p>
-              <a:p>
-                <a:pPr lvl="1"/>
-                <a:r>
-                  <a:rPr lang="en-US" dirty="0"/>
-                  <a:t>Open Addressing</a:t>
-                </a:r>
-              </a:p>
-              <a:p>
-                <a:pPr lvl="1"/>
-                <a:endParaRPr lang="en-US" sz="2200" dirty="0"/>
-              </a:p>
-            </p:txBody>
-          </p:sp>
-        </mc:Choice>
-        <mc:Fallback xmlns="">
-          <p:sp>
-            <p:nvSpPr>
-              <p:cNvPr id="3" name="Content Placeholder 2">
-                <a:extLst>
-                  <a:ext uri="{FF2B5EF4-FFF2-40B4-BE49-F238E27FC236}">
-                    <a16:creationId xmlns:a16="http://schemas.microsoft.com/office/drawing/2014/main" id="{258E6AF3-7615-4BD1-878E-A94C93E98F90}"/>
-                  </a:ext>
-                </a:extLst>
-              </p:cNvPr>
-              <p:cNvSpPr>
-                <a:spLocks noGrp="1" noRot="1" noChangeAspect="1" noMove="1" noResize="1" noEditPoints="1" noAdjustHandles="1" noChangeArrowheads="1" noChangeShapeType="1" noTextEdit="1"/>
-              </p:cNvSpPr>
-              <p:nvPr>
-                <p:ph idx="1"/>
-              </p:nvPr>
-            </p:nvSpPr>
-            <p:spPr>
-              <a:xfrm>
-                <a:off x="838200" y="1123406"/>
-                <a:ext cx="10515600" cy="5470724"/>
-              </a:xfrm>
-              <a:blipFill>
-                <a:blip r:embed="rId4"/>
-                <a:stretch>
-                  <a:fillRect l="-1217" t="-2450"/>
-                </a:stretch>
-              </a:blipFill>
-            </p:spPr>
-            <p:txBody>
-              <a:bodyPr/>
-              <a:lstStyle/>
-              <a:p>
-                <a:r>
-                  <a:rPr lang="en-US">
-                    <a:noFill/>
-                  </a:rPr>
-                  <a:t> </a:t>
-                </a:r>
-              </a:p>
-            </p:txBody>
-          </p:sp>
-        </mc:Fallback>
-      </mc:AlternateContent>
-      <p:sp>
-        <p:nvSpPr>
-          <p:cNvPr id="6" name="Title 1">
-            <a:extLst>
-              <a:ext uri="{FF2B5EF4-FFF2-40B4-BE49-F238E27FC236}">
-                <a16:creationId xmlns:a16="http://schemas.microsoft.com/office/drawing/2014/main" id="{CD29F70F-B868-451B-A65D-8721F4C7A2D9}"/>
-              </a:ext>
-            </a:extLst>
-          </p:cNvPr>
-          <p:cNvSpPr txBox="1">
-            <a:spLocks/>
-          </p:cNvSpPr>
-          <p:nvPr/>
-        </p:nvSpPr>
-        <p:spPr>
-          <a:xfrm>
-            <a:off x="838200" y="-635"/>
-            <a:ext cx="10515600" cy="1325563"/>
-          </a:xfrm>
-          <a:prstGeom prst="rect">
-            <a:avLst/>
-          </a:prstGeom>
-        </p:spPr>
-        <p:txBody>
-          <a:bodyPr vert="horz" lIns="91440" tIns="45720" rIns="91440" bIns="45720" rtlCol="0" anchor="ctr">
-            <a:normAutofit/>
-          </a:bodyPr>
-          <a:lstStyle>
-            <a:lvl1pPr algn="l" defTabSz="914400" rtl="0" eaLnBrk="1" latinLnBrk="0" hangingPunct="1">
-              <a:lnSpc>
-                <a:spcPct val="90000"/>
-              </a:lnSpc>
-              <a:spcBef>
-                <a:spcPct val="0"/>
-              </a:spcBef>
-              <a:buNone/>
-              <a:defRPr sz="4400" kern="1200">
-                <a:solidFill>
-                  <a:schemeClr val="tx1"/>
-                </a:solidFill>
-                <a:latin typeface="+mj-lt"/>
-                <a:ea typeface="+mj-ea"/>
-                <a:cs typeface="+mj-cs"/>
-              </a:defRPr>
-            </a:lvl1pPr>
-          </a:lstStyle>
-          <a:p>
-            <a:r>
-              <a:rPr lang="en-US" dirty="0">
-                <a:latin typeface="+mn-lt"/>
-              </a:rPr>
-              <a:t>Introduction to Hashing</a:t>
-            </a:r>
-          </a:p>
-        </p:txBody>
-      </p:sp>
-    </p:spTree>
-    <p:extLst>
-      <p:ext uri="{BB962C8B-B14F-4D97-AF65-F5344CB8AC3E}">
-        <p14:creationId xmlns:p14="http://schemas.microsoft.com/office/powerpoint/2010/main" val="3531941353"/>
-      </p:ext>
-    </p:extLst>
-  </p:cSld>
-  <p:clrMapOvr>
-    <a:masterClrMapping/>
-  </p:clrMapOvr>
-  <p:timing>
-    <p:tnLst>
-      <p:par>
-        <p:cTn id="1" dur="indefinite" restart="never" nodeType="tmRoot">
-          <p:childTnLst>
-            <p:seq concurrent="1" nextAc="seek">
-              <p:cTn id="2" dur="indefinite" nodeType="mainSeq">
-                <p:childTnLst>
-                  <p:par>
-                    <p:cTn id="3" fill="hold">
-                      <p:stCondLst>
-                        <p:cond delay="indefinite"/>
-                      </p:stCondLst>
-                      <p:childTnLst>
-                        <p:par>
-                          <p:cTn id="4" fill="hold">
-                            <p:stCondLst>
-                              <p:cond delay="0"/>
-                            </p:stCondLst>
-                            <p:childTnLst>
-                              <p:par>
-                                <p:cTn id="5" presetID="1" presetClass="entr" presetSubtype="0" fill="hold" nodeType="clickEffect">
-                                  <p:stCondLst>
-                                    <p:cond delay="0"/>
-                                  </p:stCondLst>
-                                  <p:childTnLst>
-                                    <p:set>
-                                      <p:cBhvr>
-                                        <p:cTn id="6" dur="1" fill="hold">
-                                          <p:stCondLst>
-                                            <p:cond delay="0"/>
-                                          </p:stCondLst>
-                                        </p:cTn>
-                                        <p:tgtEl>
-                                          <p:spTgt spid="3">
-                                            <p:txEl>
-                                              <p:pRg st="1" end="1"/>
-                                            </p:txEl>
-                                          </p:spTgt>
-                                        </p:tgtEl>
-                                        <p:attrNameLst>
-                                          <p:attrName>style.visibility</p:attrName>
-                                        </p:attrNameLst>
-                                      </p:cBhvr>
-                                      <p:to>
-                                        <p:strVal val="visible"/>
-                                      </p:to>
-                                    </p:set>
-                                  </p:childTnLst>
-                                </p:cTn>
-                              </p:par>
-                            </p:childTnLst>
-                          </p:cTn>
-                        </p:par>
-                      </p:childTnLst>
-                    </p:cTn>
-                  </p:par>
-                  <p:par>
-                    <p:cTn id="7" fill="hold">
-                      <p:stCondLst>
-                        <p:cond delay="indefinite"/>
-                      </p:stCondLst>
-                      <p:childTnLst>
-                        <p:par>
-                          <p:cTn id="8" fill="hold">
-                            <p:stCondLst>
-                              <p:cond delay="0"/>
-                            </p:stCondLst>
-                            <p:childTnLst>
-                              <p:par>
-                                <p:cTn id="9" presetID="1" presetClass="entr" presetSubtype="0" fill="hold" nodeType="clickEffect">
-                                  <p:stCondLst>
-                                    <p:cond delay="0"/>
-                                  </p:stCondLst>
-                                  <p:childTnLst>
-                                    <p:set>
-                                      <p:cBhvr>
-                                        <p:cTn id="10" dur="1" fill="hold">
-                                          <p:stCondLst>
-                                            <p:cond delay="0"/>
-                                          </p:stCondLst>
-                                        </p:cTn>
-                                        <p:tgtEl>
-                                          <p:spTgt spid="3">
-                                            <p:txEl>
-                                              <p:pRg st="2" end="2"/>
-                                            </p:txEl>
-                                          </p:spTgt>
-                                        </p:tgtEl>
-                                        <p:attrNameLst>
-                                          <p:attrName>style.visibility</p:attrName>
-                                        </p:attrNameLst>
-                                      </p:cBhvr>
-                                      <p:to>
-                                        <p:strVal val="visible"/>
-                                      </p:to>
-                                    </p:set>
-                                  </p:childTnLst>
-                                </p:cTn>
-                              </p:par>
-                            </p:childTnLst>
-                          </p:cTn>
-                        </p:par>
-                      </p:childTnLst>
-                    </p:cTn>
-                  </p:par>
-                  <p:par>
-                    <p:cTn id="11" fill="hold">
-                      <p:stCondLst>
-                        <p:cond delay="indefinite"/>
-                      </p:stCondLst>
-                      <p:childTnLst>
-                        <p:par>
-                          <p:cTn id="12" fill="hold">
-                            <p:stCondLst>
-                              <p:cond delay="0"/>
-                            </p:stCondLst>
-                            <p:childTnLst>
-                              <p:par>
-                                <p:cTn id="13" presetID="1" presetClass="entr" presetSubtype="0" fill="hold" nodeType="clickEffect">
-                                  <p:stCondLst>
-                                    <p:cond delay="0"/>
-                                  </p:stCondLst>
-                                  <p:childTnLst>
-                                    <p:set>
-                                      <p:cBhvr>
-                                        <p:cTn id="14" dur="1" fill="hold">
-                                          <p:stCondLst>
-                                            <p:cond delay="0"/>
-                                          </p:stCondLst>
-                                        </p:cTn>
-                                        <p:tgtEl>
-                                          <p:spTgt spid="3">
-                                            <p:txEl>
-                                              <p:pRg st="3" end="3"/>
-                                            </p:txEl>
-                                          </p:spTgt>
-                                        </p:tgtEl>
-                                        <p:attrNameLst>
-                                          <p:attrName>style.visibility</p:attrName>
-                                        </p:attrNameLst>
-                                      </p:cBhvr>
-                                      <p:to>
-                                        <p:strVal val="visible"/>
-                                      </p:to>
-                                    </p:set>
-                                  </p:childTnLst>
-                                </p:cTn>
-                              </p:par>
-                              <p:par>
-                                <p:cTn id="15" presetID="1" presetClass="entr" presetSubtype="0" fill="hold" nodeType="withEffect">
-                                  <p:stCondLst>
-                                    <p:cond delay="0"/>
-                                  </p:stCondLst>
-                                  <p:childTnLst>
-                                    <p:set>
-                                      <p:cBhvr>
-                                        <p:cTn id="16" dur="1" fill="hold">
-                                          <p:stCondLst>
-                                            <p:cond delay="0"/>
-                                          </p:stCondLst>
-                                        </p:cTn>
-                                        <p:tgtEl>
-                                          <p:spTgt spid="3">
-                                            <p:txEl>
-                                              <p:pRg st="4" end="4"/>
-                                            </p:txEl>
-                                          </p:spTgt>
-                                        </p:tgtEl>
-                                        <p:attrNameLst>
-                                          <p:attrName>style.visibility</p:attrName>
-                                        </p:attrNameLst>
-                                      </p:cBhvr>
-                                      <p:to>
-                                        <p:strVal val="visible"/>
-                                      </p:to>
-                                    </p:set>
-                                  </p:childTnLst>
-                                </p:cTn>
-                              </p:par>
-                            </p:childTnLst>
-                          </p:cTn>
-                        </p:par>
-                      </p:childTnLst>
-                    </p:cTn>
-                  </p:par>
-                  <p:par>
-                    <p:cTn id="17" fill="hold">
-                      <p:stCondLst>
-                        <p:cond delay="indefinite"/>
-                      </p:stCondLst>
-                      <p:childTnLst>
-                        <p:par>
-                          <p:cTn id="18" fill="hold">
-                            <p:stCondLst>
-                              <p:cond delay="0"/>
-                            </p:stCondLst>
-                            <p:childTnLst>
-                              <p:par>
-                                <p:cTn id="19" presetID="1" presetClass="entr" presetSubtype="0" fill="hold" nodeType="clickEffect">
-                                  <p:stCondLst>
-                                    <p:cond delay="0"/>
-                                  </p:stCondLst>
-                                  <p:childTnLst>
-                                    <p:set>
-                                      <p:cBhvr>
-                                        <p:cTn id="20" dur="1" fill="hold">
-                                          <p:stCondLst>
-                                            <p:cond delay="0"/>
-                                          </p:stCondLst>
-                                        </p:cTn>
-                                        <p:tgtEl>
-                                          <p:spTgt spid="3">
-                                            <p:txEl>
-                                              <p:pRg st="5" end="5"/>
-                                            </p:txEl>
-                                          </p:spTgt>
-                                        </p:tgtEl>
-                                        <p:attrNameLst>
-                                          <p:attrName>style.visibility</p:attrName>
-                                        </p:attrNameLst>
-                                      </p:cBhvr>
-                                      <p:to>
-                                        <p:strVal val="visible"/>
-                                      </p:to>
-                                    </p:set>
-                                  </p:childTnLst>
-                                </p:cTn>
-                              </p:par>
-                            </p:childTnLst>
-                          </p:cTn>
-                        </p:par>
-                      </p:childTnLst>
-                    </p:cTn>
-                  </p:par>
-                  <p:par>
-                    <p:cTn id="21" fill="hold">
-                      <p:stCondLst>
-                        <p:cond delay="indefinite"/>
-                      </p:stCondLst>
-                      <p:childTnLst>
-                        <p:par>
-                          <p:cTn id="22" fill="hold">
-                            <p:stCondLst>
-                              <p:cond delay="0"/>
-                            </p:stCondLst>
-                            <p:childTnLst>
-                              <p:par>
-                                <p:cTn id="23" presetID="1" presetClass="entr" presetSubtype="0" fill="hold" nodeType="clickEffect">
-                                  <p:stCondLst>
-                                    <p:cond delay="0"/>
-                                  </p:stCondLst>
-                                  <p:childTnLst>
-                                    <p:set>
-                                      <p:cBhvr>
-                                        <p:cTn id="24" dur="1" fill="hold">
-                                          <p:stCondLst>
-                                            <p:cond delay="0"/>
-                                          </p:stCondLst>
-                                        </p:cTn>
-                                        <p:tgtEl>
-                                          <p:spTgt spid="3">
-                                            <p:txEl>
-                                              <p:pRg st="6" end="6"/>
-                                            </p:txEl>
-                                          </p:spTgt>
-                                        </p:tgtEl>
-                                        <p:attrNameLst>
-                                          <p:attrName>style.visibility</p:attrName>
-                                        </p:attrNameLst>
-                                      </p:cBhvr>
-                                      <p:to>
-                                        <p:strVal val="visible"/>
-                                      </p:to>
-                                    </p:set>
-                                  </p:childTnLst>
-                                </p:cTn>
-                              </p:par>
-                              <p:par>
-                                <p:cTn id="25" presetID="1" presetClass="entr" presetSubtype="0" fill="hold" nodeType="withEffect">
-                                  <p:stCondLst>
-                                    <p:cond delay="0"/>
-                                  </p:stCondLst>
-                                  <p:childTnLst>
-                                    <p:set>
-                                      <p:cBhvr>
-                                        <p:cTn id="26" dur="1" fill="hold">
-                                          <p:stCondLst>
-                                            <p:cond delay="0"/>
-                                          </p:stCondLst>
-                                        </p:cTn>
-                                        <p:tgtEl>
-                                          <p:spTgt spid="3">
-                                            <p:txEl>
-                                              <p:pRg st="7" end="7"/>
-                                            </p:txEl>
-                                          </p:spTgt>
-                                        </p:tgtEl>
-                                        <p:attrNameLst>
-                                          <p:attrName>style.visibility</p:attrName>
-                                        </p:attrNameLst>
-                                      </p:cBhvr>
-                                      <p:to>
-                                        <p:strVal val="visible"/>
-                                      </p:to>
-                                    </p:set>
-                                  </p:childTnLst>
-                                </p:cTn>
-                              </p:par>
-                            </p:childTnLst>
-                          </p:cTn>
-                        </p:par>
-                      </p:childTnLst>
-                    </p:cTn>
-                  </p:par>
-                  <p:par>
-                    <p:cTn id="27" fill="hold">
-                      <p:stCondLst>
-                        <p:cond delay="indefinite"/>
-                      </p:stCondLst>
-                      <p:childTnLst>
-                        <p:par>
-                          <p:cTn id="28" fill="hold">
-                            <p:stCondLst>
-                              <p:cond delay="0"/>
-                            </p:stCondLst>
-                            <p:childTnLst>
-                              <p:par>
-                                <p:cTn id="29" presetID="1" presetClass="entr" presetSubtype="0" fill="hold" nodeType="clickEffect">
-                                  <p:stCondLst>
-                                    <p:cond delay="0"/>
-                                  </p:stCondLst>
-                                  <p:childTnLst>
-                                    <p:set>
-                                      <p:cBhvr>
-                                        <p:cTn id="30" dur="1" fill="hold">
-                                          <p:stCondLst>
-                                            <p:cond delay="0"/>
-                                          </p:stCondLst>
-                                        </p:cTn>
-                                        <p:tgtEl>
-                                          <p:spTgt spid="3">
-                                            <p:txEl>
-                                              <p:pRg st="8" end="8"/>
-                                            </p:txEl>
-                                          </p:spTgt>
-                                        </p:tgtEl>
-                                        <p:attrNameLst>
-                                          <p:attrName>style.visibility</p:attrName>
-                                        </p:attrNameLst>
-                                      </p:cBhvr>
-                                      <p:to>
-                                        <p:strVal val="visible"/>
-                                      </p:to>
-                                    </p:set>
-                                  </p:childTnLst>
-                                </p:cTn>
-                              </p:par>
-                              <p:par>
-                                <p:cTn id="31" presetID="1" presetClass="entr" presetSubtype="0" fill="hold" nodeType="withEffect">
-                                  <p:stCondLst>
-                                    <p:cond delay="0"/>
-                                  </p:stCondLst>
-                                  <p:childTnLst>
-                                    <p:set>
-                                      <p:cBhvr>
-                                        <p:cTn id="32" dur="1" fill="hold">
-                                          <p:stCondLst>
-                                            <p:cond delay="0"/>
-                                          </p:stCondLst>
-                                        </p:cTn>
-                                        <p:tgtEl>
-                                          <p:spTgt spid="3">
-                                            <p:txEl>
-                                              <p:pRg st="9" end="9"/>
-                                            </p:txEl>
-                                          </p:spTgt>
-                                        </p:tgtEl>
-                                        <p:attrNameLst>
-                                          <p:attrName>style.visibility</p:attrName>
-                                        </p:attrNameLst>
-                                      </p:cBhvr>
-                                      <p:to>
-                                        <p:strVal val="visible"/>
-                                      </p:to>
-                                    </p:set>
-                                  </p:childTnLst>
-                                </p:cTn>
-                              </p:par>
-                              <p:par>
-                                <p:cTn id="33" presetID="1" presetClass="entr" presetSubtype="0" fill="hold" nodeType="withEffect">
-                                  <p:stCondLst>
-                                    <p:cond delay="0"/>
-                                  </p:stCondLst>
-                                  <p:childTnLst>
-                                    <p:set>
-                                      <p:cBhvr>
-                                        <p:cTn id="34" dur="1" fill="hold">
-                                          <p:stCondLst>
-                                            <p:cond delay="0"/>
-                                          </p:stCondLst>
-                                        </p:cTn>
-                                        <p:tgtEl>
-                                          <p:spTgt spid="3">
-                                            <p:txEl>
-                                              <p:pRg st="10" end="10"/>
-                                            </p:txEl>
-                                          </p:spTgt>
-                                        </p:tgtEl>
-                                        <p:attrNameLst>
-                                          <p:attrName>style.visibility</p:attrName>
-                                        </p:attrNameLst>
-                                      </p:cBhvr>
-                                      <p:to>
-                                        <p:strVal val="visible"/>
-                                      </p:to>
-                                    </p:set>
-                                  </p:childTnLst>
-                                </p:cTn>
-                              </p:par>
-                              <p:par>
-                                <p:cTn id="35" presetID="1" presetClass="entr" presetSubtype="0" fill="hold" nodeType="withEffect">
-                                  <p:stCondLst>
-                                    <p:cond delay="0"/>
-                                  </p:stCondLst>
-                                  <p:childTnLst>
-                                    <p:set>
-                                      <p:cBhvr>
-                                        <p:cTn id="36" dur="1" fill="hold">
-                                          <p:stCondLst>
-                                            <p:cond delay="0"/>
-                                          </p:stCondLst>
-                                        </p:cTn>
-                                        <p:tgtEl>
-                                          <p:spTgt spid="3">
-                                            <p:txEl>
-                                              <p:pRg st="11" end="11"/>
-                                            </p:txEl>
-                                          </p:spTgt>
-                                        </p:tgtEl>
-                                        <p:attrNameLst>
-                                          <p:attrName>style.visibility</p:attrName>
-                                        </p:attrNameLst>
-                                      </p:cBhvr>
-                                      <p:to>
-                                        <p:strVal val="visible"/>
-                                      </p:to>
-                                    </p:set>
-                                  </p:childTnLst>
-                                </p:cTn>
-                              </p:par>
-                            </p:childTnLst>
-                          </p:cTn>
-                        </p:par>
-                      </p:childTnLst>
-                    </p:cTn>
-                  </p:par>
-                </p:childTnLst>
-              </p:cTn>
-              <p:prevCondLst>
-                <p:cond evt="onPrev" delay="0">
-                  <p:tgtEl>
-                    <p:sldTgt/>
-                  </p:tgtEl>
-                </p:cond>
-              </p:prevCondLst>
-              <p:nextCondLst>
-                <p:cond evt="onNext" delay="0">
-                  <p:tgtEl>
-                    <p:sldTgt/>
-                  </p:tgtEl>
-                </p:cond>
-              </p:nextCondLst>
-            </p:seq>
-          </p:childTnLst>
-        </p:cTn>
-      </p:par>
-    </p:tnLst>
-  </p:timing>
-</p:sld>
-</file>
-
-<file path=ppt/slides/slide47.xml><?xml version="1.0" encoding="utf-8"?>
-<p:sld xmlns:a="http://schemas.openxmlformats.org/drawingml/2006/main" xmlns:r="http://schemas.openxmlformats.org/officeDocument/2006/relationships" xmlns:p="http://schemas.openxmlformats.org/presentationml/2006/main">
-  <p:cSld>
-    <p:spTree>
-      <p:nvGrpSpPr>
-        <p:cNvPr id="1" name="">
-          <a:extLst>
-            <a:ext uri="{FF2B5EF4-FFF2-40B4-BE49-F238E27FC236}">
-              <a16:creationId xmlns:a16="http://schemas.microsoft.com/office/drawing/2014/main" id="{D2C058C5-0152-2390-D97D-AB6BB0B5CEC4}"/>
-            </a:ext>
-          </a:extLst>
-        </p:cNvPr>
-        <p:cNvGrpSpPr/>
-        <p:nvPr/>
-      </p:nvGrpSpPr>
-      <p:grpSpPr>
-        <a:xfrm>
-          <a:off x="0" y="0"/>
-          <a:ext cx="0" cy="0"/>
-          <a:chOff x="0" y="0"/>
-          <a:chExt cx="0" cy="0"/>
-        </a:xfrm>
-      </p:grpSpPr>
-      <mc:AlternateContent xmlns:mc="http://schemas.openxmlformats.org/markup-compatibility/2006" xmlns:a14="http://schemas.microsoft.com/office/drawing/2010/main">
-        <mc:Choice Requires="a14">
-          <p:sp>
-            <p:nvSpPr>
-              <p:cNvPr id="3" name="Content Placeholder 2">
-                <a:extLst>
-                  <a:ext uri="{FF2B5EF4-FFF2-40B4-BE49-F238E27FC236}">
-                    <a16:creationId xmlns:a16="http://schemas.microsoft.com/office/drawing/2014/main" id="{A578F3F2-F45D-ECCF-E9E9-805FBD91726A}"/>
-                  </a:ext>
-                </a:extLst>
-              </p:cNvPr>
-              <p:cNvSpPr>
-                <a:spLocks noGrp="1"/>
-              </p:cNvSpPr>
-              <p:nvPr>
-                <p:ph idx="1"/>
-              </p:nvPr>
-            </p:nvSpPr>
-            <p:spPr>
-              <a:xfrm>
-                <a:off x="838200" y="1123406"/>
-                <a:ext cx="10515600" cy="5470724"/>
-              </a:xfrm>
-            </p:spPr>
-            <p:txBody>
-              <a:bodyPr>
-                <a:normAutofit/>
-              </a:bodyPr>
-              <a:lstStyle/>
-              <a:p>
-                <a:pPr marL="0" indent="0">
-                  <a:buNone/>
-                </a:pPr>
-                <a:r>
-                  <a:rPr lang="en-US" dirty="0"/>
-                  <a:t>What are the properties of a good hash function?  </a:t>
-                </a:r>
-              </a:p>
-              <a:p>
-                <a:pPr marL="514350" indent="-514350">
-                  <a:buFont typeface="+mj-lt"/>
-                  <a:buAutoNum type="arabicPeriod"/>
-                </a:pPr>
-                <a:r>
-                  <a:rPr lang="en-US" dirty="0"/>
-                  <a:t>For key values, </a:t>
-                </a:r>
-                <a14:m>
-                  <m:oMath xmlns:m="http://schemas.openxmlformats.org/officeDocument/2006/math">
-                    <m:r>
-                      <a:rPr lang="en-US" i="1">
-                        <a:latin typeface="Cambria Math" panose="02040503050406030204" pitchFamily="18" charset="0"/>
-                      </a:rPr>
-                      <m:t>𝐾</m:t>
-                    </m:r>
-                  </m:oMath>
-                </a14:m>
-                <a:r>
-                  <a:rPr lang="en-US" dirty="0"/>
-                  <a:t>, want a </a:t>
-                </a:r>
-                <a:r>
-                  <a:rPr lang="en-US" b="1" dirty="0"/>
-                  <a:t>uniform distribution over </a:t>
-                </a:r>
-                <a14:m>
-                  <m:oMath xmlns:m="http://schemas.openxmlformats.org/officeDocument/2006/math">
-                    <m:r>
-                      <a:rPr lang="en-US" b="1" i="1" smtClean="0">
-                        <a:latin typeface="Cambria Math" panose="02040503050406030204" pitchFamily="18" charset="0"/>
-                      </a:rPr>
-                      <m:t>𝒎</m:t>
-                    </m:r>
-                  </m:oMath>
-                </a14:m>
-                <a:r>
-                  <a:rPr lang="en-US" b="1" dirty="0"/>
-                  <a:t> hash values</a:t>
-                </a:r>
-              </a:p>
-              <a:p>
-                <a:pPr marL="457200" lvl="1" indent="0">
-                  <a:buNone/>
-                </a:pPr>
-                <a14:m>
-                  <m:oMathPara xmlns:m="http://schemas.openxmlformats.org/officeDocument/2006/math">
-                    <m:oMathParaPr>
-                      <m:jc m:val="centerGroup"/>
-                    </m:oMathParaPr>
-                    <m:oMath xmlns:m="http://schemas.openxmlformats.org/officeDocument/2006/math">
-                      <m:r>
-                        <a:rPr lang="en-US" b="1" i="1">
-                          <a:latin typeface="Cambria Math" panose="02040503050406030204" pitchFamily="18" charset="0"/>
-                        </a:rPr>
-                        <m:t>𝒇</m:t>
-                      </m:r>
-                      <m:r>
-                        <a:rPr lang="en-US" b="1" i="1">
-                          <a:latin typeface="Cambria Math" panose="02040503050406030204" pitchFamily="18" charset="0"/>
-                        </a:rPr>
-                        <m:t>(</m:t>
-                      </m:r>
-                      <m:r>
-                        <a:rPr lang="en-US" b="1" i="1">
-                          <a:latin typeface="Cambria Math" panose="02040503050406030204" pitchFamily="18" charset="0"/>
-                        </a:rPr>
-                        <m:t>𝒌</m:t>
-                      </m:r>
-                      <m:r>
-                        <a:rPr lang="en-US" b="1" i="1">
-                          <a:latin typeface="Cambria Math" panose="02040503050406030204" pitchFamily="18" charset="0"/>
-                        </a:rPr>
-                        <m:t>)~</m:t>
-                      </m:r>
-                      <m:r>
-                        <a:rPr lang="en-US" b="1" i="1">
-                          <a:latin typeface="Cambria Math" panose="02040503050406030204" pitchFamily="18" charset="0"/>
-                          <a:ea typeface="Cambria Math" panose="02040503050406030204" pitchFamily="18" charset="0"/>
-                        </a:rPr>
-                        <m:t>𝑼</m:t>
-                      </m:r>
-                      <m:r>
-                        <a:rPr lang="en-US" b="1" i="1">
-                          <a:latin typeface="Cambria Math" panose="02040503050406030204" pitchFamily="18" charset="0"/>
-                          <a:ea typeface="Cambria Math" panose="02040503050406030204" pitchFamily="18" charset="0"/>
-                        </a:rPr>
-                        <m:t>(</m:t>
-                      </m:r>
-                      <m:r>
-                        <a:rPr lang="en-US" b="1" i="1">
-                          <a:latin typeface="Cambria Math" panose="02040503050406030204" pitchFamily="18" charset="0"/>
-                          <a:ea typeface="Cambria Math" panose="02040503050406030204" pitchFamily="18" charset="0"/>
-                        </a:rPr>
-                        <m:t>𝟎</m:t>
-                      </m:r>
-                      <m:r>
-                        <a:rPr lang="en-US" b="1" i="1">
-                          <a:latin typeface="Cambria Math" panose="02040503050406030204" pitchFamily="18" charset="0"/>
-                          <a:ea typeface="Cambria Math" panose="02040503050406030204" pitchFamily="18" charset="0"/>
-                        </a:rPr>
-                        <m:t>,</m:t>
-                      </m:r>
-                      <m:r>
-                        <a:rPr lang="en-US" b="1" i="1" smtClean="0">
-                          <a:latin typeface="Cambria Math" panose="02040503050406030204" pitchFamily="18" charset="0"/>
-                          <a:ea typeface="Cambria Math" panose="02040503050406030204" pitchFamily="18" charset="0"/>
-                        </a:rPr>
-                        <m:t>𝒎</m:t>
-                      </m:r>
-                      <m:r>
-                        <a:rPr lang="en-US" b="1" i="1">
-                          <a:latin typeface="Cambria Math" panose="02040503050406030204" pitchFamily="18" charset="0"/>
-                          <a:ea typeface="Cambria Math" panose="02040503050406030204" pitchFamily="18" charset="0"/>
-                        </a:rPr>
-                        <m:t>)</m:t>
-                      </m:r>
-                    </m:oMath>
-                  </m:oMathPara>
-                </a14:m>
-                <a:endParaRPr lang="en-US" b="1" dirty="0"/>
-              </a:p>
-              <a:p>
-                <a:pPr lvl="1"/>
-                <a:r>
-                  <a:rPr lang="en-US" dirty="0"/>
-                  <a:t>For </a:t>
-                </a:r>
-                <a14:m>
-                  <m:oMath xmlns:m="http://schemas.openxmlformats.org/officeDocument/2006/math">
-                    <m:r>
-                      <a:rPr lang="en-US" b="0" i="1" smtClean="0">
-                        <a:latin typeface="Cambria Math" panose="02040503050406030204" pitchFamily="18" charset="0"/>
-                      </a:rPr>
-                      <m:t>𝑚</m:t>
-                    </m:r>
-                  </m:oMath>
-                </a14:m>
-                <a:r>
-                  <a:rPr lang="en-US" dirty="0"/>
-                  <a:t> length hash table probability of bucket </a:t>
-                </a:r>
-                <a14:m>
-                  <m:oMath xmlns:m="http://schemas.openxmlformats.org/officeDocument/2006/math">
-                    <m:r>
-                      <a:rPr lang="en-US" b="0" i="1" smtClean="0">
-                        <a:latin typeface="Cambria Math" panose="02040503050406030204" pitchFamily="18" charset="0"/>
-                      </a:rPr>
-                      <m:t>𝑖</m:t>
-                    </m:r>
-                  </m:oMath>
-                </a14:m>
-                <a:r>
-                  <a:rPr lang="en-US" dirty="0"/>
-                  <a:t> being occupied is: </a:t>
-                </a:r>
-              </a:p>
-              <a:p>
-                <a:pPr marL="457200" lvl="1" indent="0">
-                  <a:buNone/>
-                </a:pPr>
-                <a14:m>
-                  <m:oMathPara xmlns:m="http://schemas.openxmlformats.org/officeDocument/2006/math">
-                    <m:oMathParaPr>
-                      <m:jc m:val="centerGroup"/>
-                    </m:oMathParaPr>
-                    <m:oMath xmlns:m="http://schemas.openxmlformats.org/officeDocument/2006/math">
-                      <m:r>
-                        <m:rPr>
-                          <m:sty m:val="p"/>
-                        </m:rPr>
-                        <a:rPr lang="en-US" b="0" i="0" smtClean="0">
-                          <a:latin typeface="Cambria Math" panose="02040503050406030204" pitchFamily="18" charset="0"/>
-                        </a:rPr>
-                        <m:t>P</m:t>
-                      </m:r>
-                      <m:d>
-                        <m:dPr>
-                          <m:ctrlPr>
-                            <a:rPr lang="en-US" i="1" smtClean="0">
-                              <a:latin typeface="Cambria Math" panose="02040503050406030204" pitchFamily="18" charset="0"/>
-                            </a:rPr>
-                          </m:ctrlPr>
-                        </m:dPr>
-                        <m:e>
-                          <m:r>
-                            <a:rPr lang="en-US" b="0" i="1">
-                              <a:latin typeface="Cambria Math" panose="02040503050406030204" pitchFamily="18" charset="0"/>
-                            </a:rPr>
-                            <m:t>𝑓</m:t>
-                          </m:r>
-                          <m:d>
-                            <m:dPr>
-                              <m:ctrlPr>
-                                <a:rPr lang="en-US" i="1">
-                                  <a:latin typeface="Cambria Math" panose="02040503050406030204" pitchFamily="18" charset="0"/>
-                                </a:rPr>
-                              </m:ctrlPr>
-                            </m:dPr>
-                            <m:e>
-                              <m:r>
-                                <a:rPr lang="en-US" b="0" i="1">
-                                  <a:latin typeface="Cambria Math" panose="02040503050406030204" pitchFamily="18" charset="0"/>
-                                </a:rPr>
-                                <m:t>𝑘</m:t>
-                              </m:r>
-                            </m:e>
-                          </m:d>
-                          <m:r>
-                            <a:rPr lang="en-US" b="0" i="1" smtClean="0">
-                              <a:latin typeface="Cambria Math" panose="02040503050406030204" pitchFamily="18" charset="0"/>
-                            </a:rPr>
-                            <m:t>=</m:t>
-                          </m:r>
-                          <m:r>
-                            <a:rPr lang="en-US" b="0" i="1" smtClean="0">
-                              <a:latin typeface="Cambria Math" panose="02040503050406030204" pitchFamily="18" charset="0"/>
-                            </a:rPr>
-                            <m:t>𝑖</m:t>
-                          </m:r>
-                        </m:e>
-                      </m:d>
-                      <m:r>
-                        <a:rPr lang="en-US" b="0" i="1" smtClean="0">
-                          <a:latin typeface="Cambria Math" panose="02040503050406030204" pitchFamily="18" charset="0"/>
-                        </a:rPr>
-                        <m:t>=</m:t>
-                      </m:r>
-                      <m:f>
-                        <m:fPr>
-                          <m:ctrlPr>
-                            <a:rPr lang="en-US" b="0" i="1" smtClean="0">
-                              <a:latin typeface="Cambria Math" panose="02040503050406030204" pitchFamily="18" charset="0"/>
-                            </a:rPr>
-                          </m:ctrlPr>
-                        </m:fPr>
-                        <m:num>
-                          <m:r>
-                            <a:rPr lang="en-US" b="0" i="1" smtClean="0">
-                              <a:latin typeface="Cambria Math" panose="02040503050406030204" pitchFamily="18" charset="0"/>
-                            </a:rPr>
-                            <m:t>1</m:t>
-                          </m:r>
-                        </m:num>
-                        <m:den>
-                          <m:r>
-                            <a:rPr lang="en-US" b="0" i="1" smtClean="0">
-                              <a:latin typeface="Cambria Math" panose="02040503050406030204" pitchFamily="18" charset="0"/>
-                            </a:rPr>
-                            <m:t>𝑚</m:t>
-                          </m:r>
-                        </m:den>
-                      </m:f>
-                    </m:oMath>
-                  </m:oMathPara>
-                </a14:m>
-                <a:endParaRPr lang="en-US" dirty="0"/>
-              </a:p>
-              <a:p>
-                <a:pPr lvl="1"/>
-                <a:r>
-                  <a:rPr lang="en-US" b="1" dirty="0"/>
-                  <a:t>Lumpy hash values </a:t>
-                </a:r>
-                <a:r>
-                  <a:rPr lang="en-US" dirty="0"/>
-                  <a:t>lead to increased </a:t>
-                </a:r>
-                <a:r>
-                  <a:rPr lang="en-US" b="1" dirty="0"/>
-                  <a:t>hash collisions </a:t>
-                </a:r>
-              </a:p>
-              <a:p>
-                <a:pPr lvl="1"/>
-                <a:r>
-                  <a:rPr lang="en-US" dirty="0"/>
-                  <a:t>Can verify with </a:t>
-                </a:r>
-                <a14:m>
-                  <m:oMath xmlns:m="http://schemas.openxmlformats.org/officeDocument/2006/math">
-                    <m:sSup>
-                      <m:sSupPr>
-                        <m:ctrlPr>
-                          <a:rPr lang="en-US" i="1">
-                            <a:latin typeface="Cambria Math" panose="02040503050406030204" pitchFamily="18" charset="0"/>
-                          </a:rPr>
-                        </m:ctrlPr>
-                      </m:sSupPr>
-                      <m:e>
-                        <m:r>
-                          <a:rPr lang="en-US" i="1">
-                            <a:latin typeface="Cambria Math" panose="02040503050406030204" pitchFamily="18" charset="0"/>
-                            <a:ea typeface="Cambria Math" panose="02040503050406030204" pitchFamily="18" charset="0"/>
-                          </a:rPr>
-                          <m:t>𝜒</m:t>
-                        </m:r>
-                      </m:e>
-                      <m:sup>
-                        <m:r>
-                          <a:rPr lang="en-US" i="1">
-                            <a:latin typeface="Cambria Math" panose="02040503050406030204" pitchFamily="18" charset="0"/>
-                          </a:rPr>
-                          <m:t>2</m:t>
-                        </m:r>
-                      </m:sup>
-                    </m:sSup>
-                  </m:oMath>
-                </a14:m>
-                <a:r>
-                  <a:rPr lang="en-US" dirty="0"/>
-                  <a:t> test</a:t>
-                </a:r>
-              </a:p>
-              <a:p>
-                <a:pPr marL="514350" indent="-514350">
-                  <a:buFont typeface="+mj-lt"/>
-                  <a:buAutoNum type="arabicPeriod"/>
-                </a:pPr>
-                <a:r>
-                  <a:rPr lang="en-US" dirty="0"/>
-                  <a:t>For a uniformly distributed hash function the probability of a hash collision with </a:t>
-                </a:r>
-                <a14:m>
-                  <m:oMath xmlns:m="http://schemas.openxmlformats.org/officeDocument/2006/math">
-                    <m:r>
-                      <a:rPr lang="en-US" i="1">
-                        <a:latin typeface="Cambria Math" panose="02040503050406030204" pitchFamily="18" charset="0"/>
-                        <a:ea typeface="Cambria Math" panose="02040503050406030204" pitchFamily="18" charset="0"/>
-                      </a:rPr>
-                      <m:t>𝑛</m:t>
-                    </m:r>
-                  </m:oMath>
-                </a14:m>
-                <a:r>
-                  <a:rPr lang="en-US" dirty="0"/>
-                  <a:t> elements filled in the table is    </a:t>
-                </a:r>
-              </a:p>
-              <a:p>
-                <a:pPr marL="0" indent="0">
-                  <a:buNone/>
-                </a:pPr>
-                <a14:m>
-                  <m:oMathPara xmlns:m="http://schemas.openxmlformats.org/officeDocument/2006/math">
-                    <m:oMathParaPr>
-                      <m:jc m:val="centerGroup"/>
-                    </m:oMathParaPr>
-                    <m:oMath xmlns:m="http://schemas.openxmlformats.org/officeDocument/2006/math">
-                      <m:r>
-                        <a:rPr lang="en-US" b="0" i="1" smtClean="0">
-                          <a:latin typeface="Cambria Math" panose="02040503050406030204" pitchFamily="18" charset="0"/>
-                        </a:rPr>
-                        <m:t>𝑃</m:t>
-                      </m:r>
-                      <m:d>
-                        <m:dPr>
-                          <m:ctrlPr>
-                            <a:rPr lang="en-US" b="0" i="1" smtClean="0">
-                              <a:latin typeface="Cambria Math" panose="02040503050406030204" pitchFamily="18" charset="0"/>
-                            </a:rPr>
-                          </m:ctrlPr>
-                        </m:dPr>
-                        <m:e>
-                          <m:r>
-                            <a:rPr lang="en-US" b="0" i="1" smtClean="0">
-                              <a:latin typeface="Cambria Math" panose="02040503050406030204" pitchFamily="18" charset="0"/>
-                            </a:rPr>
-                            <m:t>𝑚</m:t>
-                          </m:r>
-                          <m:r>
-                            <a:rPr lang="en-US" b="0" i="1" smtClean="0">
-                              <a:latin typeface="Cambria Math" panose="02040503050406030204" pitchFamily="18" charset="0"/>
-                            </a:rPr>
-                            <m:t>,</m:t>
-                          </m:r>
-                          <m:r>
-                            <a:rPr lang="en-US" b="0" i="1" smtClean="0">
-                              <a:latin typeface="Cambria Math" panose="02040503050406030204" pitchFamily="18" charset="0"/>
-                            </a:rPr>
-                            <m:t>𝑛</m:t>
-                          </m:r>
-                        </m:e>
-                      </m:d>
-                      <m:r>
-                        <a:rPr lang="en-US" i="1">
-                          <a:latin typeface="Cambria Math" panose="02040503050406030204" pitchFamily="18" charset="0"/>
-                          <a:ea typeface="Cambria Math" panose="02040503050406030204" pitchFamily="18" charset="0"/>
-                        </a:rPr>
-                        <m:t>≈</m:t>
-                      </m:r>
-                      <m:r>
-                        <a:rPr lang="en-US" b="0" i="1" smtClean="0">
-                          <a:latin typeface="Cambria Math" panose="02040503050406030204" pitchFamily="18" charset="0"/>
-                          <a:ea typeface="Cambria Math" panose="02040503050406030204" pitchFamily="18" charset="0"/>
-                        </a:rPr>
-                        <m:t>1−</m:t>
-                      </m:r>
-                      <m:r>
-                        <a:rPr lang="en-US" b="0" i="1" smtClean="0">
-                          <a:latin typeface="Cambria Math" panose="02040503050406030204" pitchFamily="18" charset="0"/>
-                          <a:ea typeface="Cambria Math" panose="02040503050406030204" pitchFamily="18" charset="0"/>
-                        </a:rPr>
-                        <m:t>𝑒𝑥𝑝</m:t>
-                      </m:r>
-                      <m:d>
-                        <m:dPr>
-                          <m:begChr m:val="["/>
-                          <m:endChr m:val="]"/>
-                          <m:ctrlPr>
-                            <a:rPr lang="en-US" b="0" i="1" smtClean="0">
-                              <a:latin typeface="Cambria Math" panose="02040503050406030204" pitchFamily="18" charset="0"/>
-                              <a:ea typeface="Cambria Math" panose="02040503050406030204" pitchFamily="18" charset="0"/>
-                            </a:rPr>
-                          </m:ctrlPr>
-                        </m:dPr>
-                        <m:e>
-                          <m:r>
-                            <a:rPr lang="en-US" b="0" i="1" smtClean="0">
-                              <a:latin typeface="Cambria Math" panose="02040503050406030204" pitchFamily="18" charset="0"/>
-                              <a:ea typeface="Cambria Math" panose="02040503050406030204" pitchFamily="18" charset="0"/>
-                            </a:rPr>
-                            <m:t>−</m:t>
-                          </m:r>
-                          <m:f>
-                            <m:fPr>
-                              <m:ctrlPr>
-                                <a:rPr lang="en-US" b="0" i="1" smtClean="0">
-                                  <a:latin typeface="Cambria Math" panose="02040503050406030204" pitchFamily="18" charset="0"/>
-                                  <a:ea typeface="Cambria Math" panose="02040503050406030204" pitchFamily="18" charset="0"/>
-                                </a:rPr>
-                              </m:ctrlPr>
-                            </m:fPr>
-                            <m:num>
-                              <m:r>
-                                <a:rPr lang="en-US" b="0" i="1" smtClean="0">
-                                  <a:latin typeface="Cambria Math" panose="02040503050406030204" pitchFamily="18" charset="0"/>
-                                  <a:ea typeface="Cambria Math" panose="02040503050406030204" pitchFamily="18" charset="0"/>
-                                </a:rPr>
-                                <m:t>𝑚</m:t>
-                              </m:r>
-                              <m:d>
-                                <m:dPr>
-                                  <m:ctrlPr>
-                                    <a:rPr lang="en-US" b="0" i="1" smtClean="0">
-                                      <a:latin typeface="Cambria Math" panose="02040503050406030204" pitchFamily="18" charset="0"/>
-                                      <a:ea typeface="Cambria Math" panose="02040503050406030204" pitchFamily="18" charset="0"/>
-                                    </a:rPr>
-                                  </m:ctrlPr>
-                                </m:dPr>
-                                <m:e>
-                                  <m:r>
-                                    <a:rPr lang="en-US" b="0" i="1" smtClean="0">
-                                      <a:latin typeface="Cambria Math" panose="02040503050406030204" pitchFamily="18" charset="0"/>
-                                      <a:ea typeface="Cambria Math" panose="02040503050406030204" pitchFamily="18" charset="0"/>
-                                    </a:rPr>
-                                    <m:t>𝑛</m:t>
-                                  </m:r>
-                                  <m:r>
-                                    <a:rPr lang="en-US" b="0" i="1" smtClean="0">
-                                      <a:latin typeface="Cambria Math" panose="02040503050406030204" pitchFamily="18" charset="0"/>
-                                      <a:ea typeface="Cambria Math" panose="02040503050406030204" pitchFamily="18" charset="0"/>
-                                    </a:rPr>
-                                    <m:t>−1</m:t>
-                                  </m:r>
-                                </m:e>
-                              </m:d>
-                            </m:num>
-                            <m:den>
-                              <m:r>
-                                <a:rPr lang="en-US" b="0" i="1" smtClean="0">
-                                  <a:latin typeface="Cambria Math" panose="02040503050406030204" pitchFamily="18" charset="0"/>
-                                  <a:ea typeface="Cambria Math" panose="02040503050406030204" pitchFamily="18" charset="0"/>
-                                </a:rPr>
-                                <m:t>2</m:t>
-                              </m:r>
-                              <m:r>
-                                <a:rPr lang="en-US" b="0" i="1" smtClean="0">
-                                  <a:latin typeface="Cambria Math" panose="02040503050406030204" pitchFamily="18" charset="0"/>
-                                  <a:ea typeface="Cambria Math" panose="02040503050406030204" pitchFamily="18" charset="0"/>
-                                </a:rPr>
-                                <m:t>𝑚</m:t>
-                              </m:r>
-                            </m:den>
-                          </m:f>
-                        </m:e>
-                      </m:d>
-                    </m:oMath>
-                  </m:oMathPara>
-                </a14:m>
-                <a:endParaRPr lang="en-US" dirty="0"/>
-              </a:p>
-            </p:txBody>
-          </p:sp>
-        </mc:Choice>
-        <mc:Fallback xmlns="">
-          <p:sp>
-            <p:nvSpPr>
-              <p:cNvPr id="3" name="Content Placeholder 2">
-                <a:extLst>
-                  <a:ext uri="{FF2B5EF4-FFF2-40B4-BE49-F238E27FC236}">
-                    <a16:creationId xmlns:a16="http://schemas.microsoft.com/office/drawing/2014/main" id="{A578F3F2-F45D-ECCF-E9E9-805FBD91726A}"/>
-                  </a:ext>
-                </a:extLst>
-              </p:cNvPr>
-              <p:cNvSpPr>
-                <a:spLocks noGrp="1" noRot="1" noChangeAspect="1" noMove="1" noResize="1" noEditPoints="1" noAdjustHandles="1" noChangeArrowheads="1" noChangeShapeType="1" noTextEdit="1"/>
-              </p:cNvSpPr>
-              <p:nvPr>
-                <p:ph idx="1"/>
-              </p:nvPr>
-            </p:nvSpPr>
-            <p:spPr>
-              <a:xfrm>
-                <a:off x="838200" y="1123406"/>
-                <a:ext cx="10515600" cy="5470724"/>
-              </a:xfrm>
-              <a:blipFill>
-                <a:blip r:embed="rId2"/>
-                <a:stretch>
-                  <a:fillRect l="-1217" t="-1782"/>
-                </a:stretch>
-              </a:blipFill>
-            </p:spPr>
-            <p:txBody>
-              <a:bodyPr/>
-              <a:lstStyle/>
-              <a:p>
-                <a:r>
-                  <a:rPr lang="en-US">
-                    <a:noFill/>
-                  </a:rPr>
-                  <a:t> </a:t>
-                </a:r>
-              </a:p>
-            </p:txBody>
-          </p:sp>
-        </mc:Fallback>
-      </mc:AlternateContent>
-      <p:sp>
-        <p:nvSpPr>
-          <p:cNvPr id="6" name="Title 1">
-            <a:extLst>
-              <a:ext uri="{FF2B5EF4-FFF2-40B4-BE49-F238E27FC236}">
-                <a16:creationId xmlns:a16="http://schemas.microsoft.com/office/drawing/2014/main" id="{7E988630-3E71-AF2E-A2B3-DE1DF5E9439C}"/>
-              </a:ext>
-            </a:extLst>
-          </p:cNvPr>
-          <p:cNvSpPr txBox="1">
-            <a:spLocks/>
-          </p:cNvSpPr>
-          <p:nvPr/>
-        </p:nvSpPr>
-        <p:spPr>
-          <a:xfrm>
-            <a:off x="838200" y="-635"/>
-            <a:ext cx="10515600" cy="1325563"/>
-          </a:xfrm>
-          <a:prstGeom prst="rect">
-            <a:avLst/>
-          </a:prstGeom>
-        </p:spPr>
-        <p:txBody>
-          <a:bodyPr vert="horz" lIns="91440" tIns="45720" rIns="91440" bIns="45720" rtlCol="0" anchor="ctr">
-            <a:normAutofit/>
-          </a:bodyPr>
-          <a:lstStyle>
-            <a:lvl1pPr algn="l" defTabSz="914400" rtl="0" eaLnBrk="1" latinLnBrk="0" hangingPunct="1">
-              <a:lnSpc>
-                <a:spcPct val="90000"/>
-              </a:lnSpc>
-              <a:spcBef>
-                <a:spcPct val="0"/>
-              </a:spcBef>
-              <a:buNone/>
-              <a:defRPr sz="4400" kern="1200">
-                <a:solidFill>
-                  <a:schemeClr val="tx1"/>
-                </a:solidFill>
-                <a:latin typeface="+mj-lt"/>
-                <a:ea typeface="+mj-ea"/>
-                <a:cs typeface="+mj-cs"/>
-              </a:defRPr>
-            </a:lvl1pPr>
-          </a:lstStyle>
-          <a:p>
-            <a:r>
-              <a:rPr lang="en-US" dirty="0">
-                <a:latin typeface="+mn-lt"/>
-              </a:rPr>
-              <a:t>Introduction to Hashing</a:t>
-            </a:r>
-          </a:p>
-        </p:txBody>
-      </p:sp>
-    </p:spTree>
-    <p:extLst>
-      <p:ext uri="{BB962C8B-B14F-4D97-AF65-F5344CB8AC3E}">
-        <p14:creationId xmlns:p14="http://schemas.microsoft.com/office/powerpoint/2010/main" val="3993204374"/>
-      </p:ext>
-    </p:extLst>
-  </p:cSld>
-  <p:clrMapOvr>
-    <a:masterClrMapping/>
-  </p:clrMapOvr>
-</p:sld>
-</file>
-
-<file path=ppt/slides/slide48.xml><?xml version="1.0" encoding="utf-8"?>
-<p:sld xmlns:a="http://schemas.openxmlformats.org/drawingml/2006/main" xmlns:r="http://schemas.openxmlformats.org/officeDocument/2006/relationships" xmlns:p="http://schemas.openxmlformats.org/presentationml/2006/main">
-  <p:cSld>
-    <p:spTree>
-      <p:nvGrpSpPr>
-        <p:cNvPr id="1" name="">
-          <a:extLst>
-            <a:ext uri="{FF2B5EF4-FFF2-40B4-BE49-F238E27FC236}">
-              <a16:creationId xmlns:a16="http://schemas.microsoft.com/office/drawing/2014/main" id="{BC89F83D-5DFC-29AF-B4FF-9D0545A0FCDA}"/>
-            </a:ext>
-          </a:extLst>
-        </p:cNvPr>
-        <p:cNvGrpSpPr/>
-        <p:nvPr/>
-      </p:nvGrpSpPr>
-      <p:grpSpPr>
-        <a:xfrm>
-          <a:off x="0" y="0"/>
-          <a:ext cx="0" cy="0"/>
-          <a:chOff x="0" y="0"/>
-          <a:chExt cx="0" cy="0"/>
-        </a:xfrm>
-      </p:grpSpPr>
-      <mc:AlternateContent xmlns:mc="http://schemas.openxmlformats.org/markup-compatibility/2006">
-        <mc:Choice xmlns:a14="http://schemas.microsoft.com/office/drawing/2010/main" Requires="a14">
-          <p:sp>
-            <p:nvSpPr>
-              <p:cNvPr id="3" name="Content Placeholder 2">
-                <a:extLst>
-                  <a:ext uri="{FF2B5EF4-FFF2-40B4-BE49-F238E27FC236}">
-                    <a16:creationId xmlns:a16="http://schemas.microsoft.com/office/drawing/2014/main" id="{62709B48-58A5-623B-9852-30181B5EE4F8}"/>
-                  </a:ext>
-                </a:extLst>
-              </p:cNvPr>
-              <p:cNvSpPr>
-                <a:spLocks noGrp="1"/>
-              </p:cNvSpPr>
-              <p:nvPr>
-                <p:ph idx="1"/>
-              </p:nvPr>
-            </p:nvSpPr>
-            <p:spPr>
-              <a:xfrm>
-                <a:off x="838200" y="1123406"/>
-                <a:ext cx="10515600" cy="5470724"/>
-              </a:xfrm>
-            </p:spPr>
-            <p:txBody>
-              <a:bodyPr>
-                <a:normAutofit/>
-              </a:bodyPr>
-              <a:lstStyle/>
-              <a:p>
-                <a:pPr marL="0" indent="0">
-                  <a:buNone/>
-                </a:pPr>
-                <a:r>
-                  <a:rPr lang="en-US" dirty="0"/>
-                  <a:t>What are the properties of a good hash function?  </a:t>
-                </a:r>
-              </a:p>
-              <a:p>
-                <a:pPr marL="514350" indent="-514350">
-                  <a:buFont typeface="+mj-lt"/>
-                  <a:buAutoNum type="arabicPeriod" startAt="3"/>
-                </a:pPr>
-                <a:r>
-                  <a:rPr lang="en-US" dirty="0"/>
-                  <a:t>For a uniformly distributed hash function the probability of a hash collision with </a:t>
-                </a:r>
-                <a14:m>
-                  <m:oMath xmlns:m="http://schemas.openxmlformats.org/officeDocument/2006/math">
-                    <m:r>
-                      <a:rPr lang="en-US" i="1">
-                        <a:latin typeface="Cambria Math" panose="02040503050406030204" pitchFamily="18" charset="0"/>
-                        <a:ea typeface="Cambria Math" panose="02040503050406030204" pitchFamily="18" charset="0"/>
-                      </a:rPr>
-                      <m:t>𝑛</m:t>
-                    </m:r>
-                  </m:oMath>
-                </a14:m>
-                <a:r>
-                  <a:rPr lang="en-US" dirty="0"/>
-                  <a:t> elements filled in the table is    </a:t>
-                </a:r>
-              </a:p>
-              <a:p>
-                <a:pPr marL="0" indent="0">
-                  <a:buNone/>
-                </a:pPr>
-                <a14:m>
-                  <m:oMathPara xmlns:m="http://schemas.openxmlformats.org/officeDocument/2006/math">
-                    <m:oMathParaPr>
-                      <m:jc m:val="centerGroup"/>
-                    </m:oMathParaPr>
-                    <m:oMath xmlns:m="http://schemas.openxmlformats.org/officeDocument/2006/math">
-                      <m:r>
-                        <a:rPr lang="en-US" b="0" i="1" smtClean="0">
-                          <a:latin typeface="Cambria Math" panose="02040503050406030204" pitchFamily="18" charset="0"/>
-                        </a:rPr>
-                        <m:t>𝑃</m:t>
-                      </m:r>
-                      <m:d>
-                        <m:dPr>
-                          <m:ctrlPr>
-                            <a:rPr lang="en-US" b="0" i="1" smtClean="0">
-                              <a:latin typeface="Cambria Math" panose="02040503050406030204" pitchFamily="18" charset="0"/>
-                            </a:rPr>
-                          </m:ctrlPr>
-                        </m:dPr>
-                        <m:e>
-                          <m:r>
-                            <a:rPr lang="en-US" b="0" i="1" smtClean="0">
-                              <a:latin typeface="Cambria Math" panose="02040503050406030204" pitchFamily="18" charset="0"/>
-                            </a:rPr>
-                            <m:t>𝑚</m:t>
-                          </m:r>
-                          <m:r>
-                            <a:rPr lang="en-US" b="0" i="1" smtClean="0">
-                              <a:latin typeface="Cambria Math" panose="02040503050406030204" pitchFamily="18" charset="0"/>
-                            </a:rPr>
-                            <m:t>,</m:t>
-                          </m:r>
-                          <m:r>
-                            <a:rPr lang="en-US" b="0" i="1" smtClean="0">
-                              <a:latin typeface="Cambria Math" panose="02040503050406030204" pitchFamily="18" charset="0"/>
-                            </a:rPr>
-                            <m:t>𝑛</m:t>
-                          </m:r>
-                        </m:e>
-                      </m:d>
-                      <m:r>
-                        <a:rPr lang="en-US" i="1">
-                          <a:latin typeface="Cambria Math" panose="02040503050406030204" pitchFamily="18" charset="0"/>
-                          <a:ea typeface="Cambria Math" panose="02040503050406030204" pitchFamily="18" charset="0"/>
-                        </a:rPr>
-                        <m:t>≈</m:t>
-                      </m:r>
-                      <m:r>
-                        <a:rPr lang="en-US" b="0" i="1" smtClean="0">
-                          <a:latin typeface="Cambria Math" panose="02040503050406030204" pitchFamily="18" charset="0"/>
-                          <a:ea typeface="Cambria Math" panose="02040503050406030204" pitchFamily="18" charset="0"/>
-                        </a:rPr>
-                        <m:t>1−</m:t>
-                      </m:r>
-                      <m:r>
-                        <a:rPr lang="en-US" b="0" i="1" smtClean="0">
-                          <a:latin typeface="Cambria Math" panose="02040503050406030204" pitchFamily="18" charset="0"/>
-                          <a:ea typeface="Cambria Math" panose="02040503050406030204" pitchFamily="18" charset="0"/>
-                        </a:rPr>
-                        <m:t>𝑒𝑥𝑝</m:t>
-                      </m:r>
-                      <m:d>
-                        <m:dPr>
-                          <m:begChr m:val="["/>
-                          <m:endChr m:val="]"/>
-                          <m:ctrlPr>
-                            <a:rPr lang="en-US" b="0" i="1" smtClean="0">
-                              <a:latin typeface="Cambria Math" panose="02040503050406030204" pitchFamily="18" charset="0"/>
-                              <a:ea typeface="Cambria Math" panose="02040503050406030204" pitchFamily="18" charset="0"/>
-                            </a:rPr>
-                          </m:ctrlPr>
-                        </m:dPr>
-                        <m:e>
-                          <m:r>
-                            <a:rPr lang="en-US" b="0" i="1" smtClean="0">
-                              <a:latin typeface="Cambria Math" panose="02040503050406030204" pitchFamily="18" charset="0"/>
-                              <a:ea typeface="Cambria Math" panose="02040503050406030204" pitchFamily="18" charset="0"/>
-                            </a:rPr>
-                            <m:t>−</m:t>
-                          </m:r>
-                          <m:f>
-                            <m:fPr>
-                              <m:ctrlPr>
-                                <a:rPr lang="en-US" b="0" i="1" smtClean="0">
-                                  <a:latin typeface="Cambria Math" panose="02040503050406030204" pitchFamily="18" charset="0"/>
-                                  <a:ea typeface="Cambria Math" panose="02040503050406030204" pitchFamily="18" charset="0"/>
-                                </a:rPr>
-                              </m:ctrlPr>
-                            </m:fPr>
-                            <m:num>
-                              <m:r>
-                                <a:rPr lang="en-US" b="0" i="1" smtClean="0">
-                                  <a:latin typeface="Cambria Math" panose="02040503050406030204" pitchFamily="18" charset="0"/>
-                                  <a:ea typeface="Cambria Math" panose="02040503050406030204" pitchFamily="18" charset="0"/>
-                                </a:rPr>
-                                <m:t>𝑚</m:t>
-                              </m:r>
-                              <m:d>
-                                <m:dPr>
-                                  <m:ctrlPr>
-                                    <a:rPr lang="en-US" b="0" i="1" smtClean="0">
-                                      <a:latin typeface="Cambria Math" panose="02040503050406030204" pitchFamily="18" charset="0"/>
-                                      <a:ea typeface="Cambria Math" panose="02040503050406030204" pitchFamily="18" charset="0"/>
-                                    </a:rPr>
-                                  </m:ctrlPr>
-                                </m:dPr>
-                                <m:e>
-                                  <m:r>
-                                    <a:rPr lang="en-US" b="0" i="1" smtClean="0">
-                                      <a:latin typeface="Cambria Math" panose="02040503050406030204" pitchFamily="18" charset="0"/>
-                                      <a:ea typeface="Cambria Math" panose="02040503050406030204" pitchFamily="18" charset="0"/>
-                                    </a:rPr>
-                                    <m:t>𝑛</m:t>
-                                  </m:r>
-                                  <m:r>
-                                    <a:rPr lang="en-US" b="0" i="1" smtClean="0">
-                                      <a:latin typeface="Cambria Math" panose="02040503050406030204" pitchFamily="18" charset="0"/>
-                                      <a:ea typeface="Cambria Math" panose="02040503050406030204" pitchFamily="18" charset="0"/>
-                                    </a:rPr>
-                                    <m:t>−1</m:t>
-                                  </m:r>
-                                </m:e>
-                              </m:d>
-                            </m:num>
-                            <m:den>
-                              <m:r>
-                                <a:rPr lang="en-US" b="0" i="1" smtClean="0">
-                                  <a:latin typeface="Cambria Math" panose="02040503050406030204" pitchFamily="18" charset="0"/>
-                                  <a:ea typeface="Cambria Math" panose="02040503050406030204" pitchFamily="18" charset="0"/>
-                                </a:rPr>
-                                <m:t>2</m:t>
-                              </m:r>
-                              <m:r>
-                                <a:rPr lang="en-US" b="0" i="1" smtClean="0">
-                                  <a:latin typeface="Cambria Math" panose="02040503050406030204" pitchFamily="18" charset="0"/>
-                                  <a:ea typeface="Cambria Math" panose="02040503050406030204" pitchFamily="18" charset="0"/>
-                                </a:rPr>
-                                <m:t>𝑚</m:t>
-                              </m:r>
-                            </m:den>
-                          </m:f>
-                        </m:e>
-                      </m:d>
-                    </m:oMath>
-                  </m:oMathPara>
-                </a14:m>
-                <a:endParaRPr lang="en-US" dirty="0"/>
-              </a:p>
-              <a:p>
-                <a:pPr marL="514350" indent="-514350">
-                  <a:buFont typeface="+mj-lt"/>
-                  <a:buAutoNum type="arabicPeriod" startAt="4"/>
-                </a:pPr>
-                <a:r>
-                  <a:rPr lang="en-US" dirty="0"/>
-                  <a:t>Given table utilization, </a:t>
-                </a:r>
-                <a14:m>
-                  <m:oMath xmlns:m="http://schemas.openxmlformats.org/officeDocument/2006/math">
-                    <m:r>
-                      <a:rPr lang="en-US" i="1" smtClean="0">
-                        <a:latin typeface="Cambria Math" panose="02040503050406030204" pitchFamily="18" charset="0"/>
-                        <a:ea typeface="Cambria Math" panose="02040503050406030204" pitchFamily="18" charset="0"/>
-                      </a:rPr>
-                      <m:t>𝛼</m:t>
-                    </m:r>
-                    <m:r>
-                      <a:rPr lang="en-US" b="0" i="1" smtClean="0">
-                        <a:latin typeface="Cambria Math" panose="02040503050406030204" pitchFamily="18" charset="0"/>
-                        <a:ea typeface="Cambria Math" panose="02040503050406030204" pitchFamily="18" charset="0"/>
-                      </a:rPr>
-                      <m:t>=</m:t>
-                    </m:r>
-                    <m:r>
-                      <a:rPr lang="en-US" b="0" i="1" smtClean="0">
-                        <a:latin typeface="Cambria Math" panose="02040503050406030204" pitchFamily="18" charset="0"/>
-                        <a:ea typeface="Cambria Math" panose="02040503050406030204" pitchFamily="18" charset="0"/>
-                      </a:rPr>
-                      <m:t>𝑛</m:t>
-                    </m:r>
-                    <m:r>
-                      <a:rPr lang="en-US" b="0" i="1" smtClean="0">
-                        <a:latin typeface="Cambria Math" panose="02040503050406030204" pitchFamily="18" charset="0"/>
-                        <a:ea typeface="Cambria Math" panose="02040503050406030204" pitchFamily="18" charset="0"/>
-                      </a:rPr>
-                      <m:t>/</m:t>
-                    </m:r>
-                    <m:r>
-                      <a:rPr lang="en-US" b="0" i="1" smtClean="0">
-                        <a:latin typeface="Cambria Math" panose="02040503050406030204" pitchFamily="18" charset="0"/>
-                        <a:ea typeface="Cambria Math" panose="02040503050406030204" pitchFamily="18" charset="0"/>
-                      </a:rPr>
-                      <m:t>𝑚</m:t>
-                    </m:r>
-                  </m:oMath>
-                </a14:m>
-                <a:r>
-                  <a:rPr lang="en-US" dirty="0"/>
-                  <a:t>, the number of probes required to find an open bucket is   </a:t>
-                </a:r>
-              </a:p>
-              <a:p>
-                <a:pPr marL="0" indent="0">
-                  <a:buNone/>
-                </a:pPr>
-                <a14:m>
-                  <m:oMathPara xmlns:m="http://schemas.openxmlformats.org/officeDocument/2006/math">
-                    <m:oMathParaPr>
-                      <m:jc m:val="centerGroup"/>
-                    </m:oMathParaPr>
-                    <m:oMath xmlns:m="http://schemas.openxmlformats.org/officeDocument/2006/math">
-                      <m:sSub>
-                        <m:sSubPr>
-                          <m:ctrlPr>
-                            <a:rPr lang="en-US" i="1" smtClean="0">
-                              <a:latin typeface="Cambria Math" panose="02040503050406030204" pitchFamily="18" charset="0"/>
-                              <a:ea typeface="Cambria Math" panose="02040503050406030204" pitchFamily="18" charset="0"/>
-                            </a:rPr>
-                          </m:ctrlPr>
-                        </m:sSubPr>
-                        <m:e>
-                          <m:r>
-                            <a:rPr lang="en-US" b="0" i="1" smtClean="0">
-                              <a:latin typeface="Cambria Math" panose="02040503050406030204" pitchFamily="18" charset="0"/>
-                              <a:ea typeface="Cambria Math" panose="02040503050406030204" pitchFamily="18" charset="0"/>
-                            </a:rPr>
-                            <m:t>𝑁</m:t>
-                          </m:r>
-                        </m:e>
-                        <m:sub>
-                          <m:r>
-                            <a:rPr lang="en-US" b="0" i="1" smtClean="0">
-                              <a:latin typeface="Cambria Math" panose="02040503050406030204" pitchFamily="18" charset="0"/>
-                              <a:ea typeface="Cambria Math" panose="02040503050406030204" pitchFamily="18" charset="0"/>
-                            </a:rPr>
-                            <m:t>𝑝𝑟𝑜𝑏𝑠</m:t>
-                          </m:r>
-                        </m:sub>
-                      </m:sSub>
-                      <m:r>
-                        <a:rPr lang="en-US" i="1" smtClean="0">
-                          <a:latin typeface="Cambria Math" panose="02040503050406030204" pitchFamily="18" charset="0"/>
-                          <a:ea typeface="Cambria Math" panose="02040503050406030204" pitchFamily="18" charset="0"/>
-                        </a:rPr>
-                        <m:t>≈</m:t>
-                      </m:r>
-                      <m:f>
-                        <m:fPr>
-                          <m:ctrlPr>
-                            <a:rPr lang="en-US" i="1" smtClean="0">
-                              <a:latin typeface="Cambria Math" panose="02040503050406030204" pitchFamily="18" charset="0"/>
-                              <a:ea typeface="Cambria Math" panose="02040503050406030204" pitchFamily="18" charset="0"/>
-                            </a:rPr>
-                          </m:ctrlPr>
-                        </m:fPr>
-                        <m:num>
-                          <m:r>
-                            <a:rPr lang="en-US" b="0" i="1" smtClean="0">
-                              <a:latin typeface="Cambria Math" panose="02040503050406030204" pitchFamily="18" charset="0"/>
-                              <a:ea typeface="Cambria Math" panose="02040503050406030204" pitchFamily="18" charset="0"/>
-                            </a:rPr>
-                            <m:t>1</m:t>
-                          </m:r>
-                        </m:num>
-                        <m:den>
-                          <m:r>
-                            <a:rPr lang="en-US" i="1" smtClean="0">
-                              <a:latin typeface="Cambria Math" panose="02040503050406030204" pitchFamily="18" charset="0"/>
-                              <a:ea typeface="Cambria Math" panose="02040503050406030204" pitchFamily="18" charset="0"/>
-                            </a:rPr>
-                            <m:t>𝛼</m:t>
-                          </m:r>
-                        </m:den>
-                      </m:f>
-                      <m:func>
-                        <m:funcPr>
-                          <m:ctrlPr>
-                            <a:rPr lang="en-US" i="1" smtClean="0">
-                              <a:latin typeface="Cambria Math" panose="02040503050406030204" pitchFamily="18" charset="0"/>
-                              <a:ea typeface="Cambria Math" panose="02040503050406030204" pitchFamily="18" charset="0"/>
-                            </a:rPr>
-                          </m:ctrlPr>
-                        </m:funcPr>
-                        <m:fName>
-                          <m:r>
-                            <m:rPr>
-                              <m:sty m:val="p"/>
-                            </m:rPr>
-                            <a:rPr lang="en-US" b="0" i="0" smtClean="0">
-                              <a:latin typeface="Cambria Math" panose="02040503050406030204" pitchFamily="18" charset="0"/>
-                              <a:ea typeface="Cambria Math" panose="02040503050406030204" pitchFamily="18" charset="0"/>
-                            </a:rPr>
-                            <m:t>ln</m:t>
-                          </m:r>
-                        </m:fName>
-                        <m:e>
-                          <m:f>
-                            <m:fPr>
-                              <m:ctrlPr>
-                                <a:rPr lang="en-US" i="1" smtClean="0">
-                                  <a:latin typeface="Cambria Math" panose="02040503050406030204" pitchFamily="18" charset="0"/>
-                                  <a:ea typeface="Cambria Math" panose="02040503050406030204" pitchFamily="18" charset="0"/>
-                                </a:rPr>
-                              </m:ctrlPr>
-                            </m:fPr>
-                            <m:num>
-                              <m:r>
-                                <a:rPr lang="en-US" b="0" i="1" smtClean="0">
-                                  <a:latin typeface="Cambria Math" panose="02040503050406030204" pitchFamily="18" charset="0"/>
-                                  <a:ea typeface="Cambria Math" panose="02040503050406030204" pitchFamily="18" charset="0"/>
-                                </a:rPr>
-                                <m:t>1</m:t>
-                              </m:r>
-                            </m:num>
-                            <m:den>
-                              <m:r>
-                                <a:rPr lang="en-US" b="0" i="1" smtClean="0">
-                                  <a:latin typeface="Cambria Math" panose="02040503050406030204" pitchFamily="18" charset="0"/>
-                                  <a:ea typeface="Cambria Math" panose="02040503050406030204" pitchFamily="18" charset="0"/>
-                                </a:rPr>
-                                <m:t>1−</m:t>
-                              </m:r>
-                              <m:r>
-                                <a:rPr lang="en-US" b="0" i="1" smtClean="0">
-                                  <a:latin typeface="Cambria Math" panose="02040503050406030204" pitchFamily="18" charset="0"/>
-                                  <a:ea typeface="Cambria Math" panose="02040503050406030204" pitchFamily="18" charset="0"/>
-                                </a:rPr>
-                                <m:t>𝛼</m:t>
-                              </m:r>
-                            </m:den>
-                          </m:f>
-                        </m:e>
-                      </m:func>
-                    </m:oMath>
-                  </m:oMathPara>
-                </a14:m>
-                <a:endParaRPr lang="en-US" dirty="0"/>
-              </a:p>
-              <a:p>
-                <a:pPr marL="457200" lvl="1" indent="0">
-                  <a:buNone/>
-                </a:pPr>
-                <a:r>
-                  <a:rPr lang="en-US" dirty="0"/>
-                  <a:t>Where the chance of success is </a:t>
-                </a:r>
-                <a14:m>
-                  <m:oMath xmlns:m="http://schemas.openxmlformats.org/officeDocument/2006/math">
-                    <m:r>
-                      <a:rPr lang="en-US" i="1" smtClean="0">
-                        <a:latin typeface="Cambria Math" panose="02040503050406030204" pitchFamily="18" charset="0"/>
-                        <a:ea typeface="Cambria Math" panose="02040503050406030204" pitchFamily="18" charset="0"/>
-                      </a:rPr>
-                      <m:t>≈</m:t>
-                    </m:r>
-                    <m:f>
-                      <m:fPr>
-                        <m:ctrlPr>
-                          <a:rPr lang="en-US" i="1">
-                            <a:latin typeface="Cambria Math" panose="02040503050406030204" pitchFamily="18" charset="0"/>
-                            <a:ea typeface="Cambria Math" panose="02040503050406030204" pitchFamily="18" charset="0"/>
-                          </a:rPr>
-                        </m:ctrlPr>
-                      </m:fPr>
-                      <m:num>
-                        <m:r>
-                          <a:rPr lang="en-US" i="1">
-                            <a:latin typeface="Cambria Math" panose="02040503050406030204" pitchFamily="18" charset="0"/>
-                            <a:ea typeface="Cambria Math" panose="02040503050406030204" pitchFamily="18" charset="0"/>
-                          </a:rPr>
-                          <m:t>1</m:t>
-                        </m:r>
-                      </m:num>
-                      <m:den>
-                        <m:r>
-                          <a:rPr lang="en-US" i="1">
-                            <a:latin typeface="Cambria Math" panose="02040503050406030204" pitchFamily="18" charset="0"/>
-                            <a:ea typeface="Cambria Math" panose="02040503050406030204" pitchFamily="18" charset="0"/>
-                          </a:rPr>
-                          <m:t>1−</m:t>
-                        </m:r>
-                        <m:r>
-                          <a:rPr lang="en-US" i="1">
-                            <a:latin typeface="Cambria Math" panose="02040503050406030204" pitchFamily="18" charset="0"/>
-                            <a:ea typeface="Cambria Math" panose="02040503050406030204" pitchFamily="18" charset="0"/>
-                          </a:rPr>
-                          <m:t>𝛼</m:t>
-                        </m:r>
-                      </m:den>
-                    </m:f>
-                  </m:oMath>
-                </a14:m>
-                <a:endParaRPr lang="en-US" dirty="0"/>
-              </a:p>
-            </p:txBody>
-          </p:sp>
-        </mc:Choice>
-        <mc:Fallback>
-          <p:sp>
-            <p:nvSpPr>
-              <p:cNvPr id="3" name="Content Placeholder 2">
-                <a:extLst>
-                  <a:ext uri="{FF2B5EF4-FFF2-40B4-BE49-F238E27FC236}">
-                    <a16:creationId xmlns:a16="http://schemas.microsoft.com/office/drawing/2014/main" id="{62709B48-58A5-623B-9852-30181B5EE4F8}"/>
-                  </a:ext>
-                </a:extLst>
-              </p:cNvPr>
-              <p:cNvSpPr>
-                <a:spLocks noGrp="1" noRot="1" noChangeAspect="1" noMove="1" noResize="1" noEditPoints="1" noAdjustHandles="1" noChangeArrowheads="1" noChangeShapeType="1" noTextEdit="1"/>
-              </p:cNvSpPr>
-              <p:nvPr>
-                <p:ph idx="1"/>
-              </p:nvPr>
-            </p:nvSpPr>
-            <p:spPr>
-              <a:xfrm>
-                <a:off x="838200" y="1123406"/>
-                <a:ext cx="10515600" cy="5470724"/>
-              </a:xfrm>
-              <a:blipFill>
-                <a:blip r:embed="rId2"/>
-                <a:stretch>
-                  <a:fillRect l="-1217" t="-1782" r="-986"/>
-                </a:stretch>
-              </a:blipFill>
-            </p:spPr>
-            <p:txBody>
-              <a:bodyPr/>
-              <a:lstStyle/>
-              <a:p>
-                <a:r>
-                  <a:rPr lang="en-US">
-                    <a:noFill/>
-                  </a:rPr>
-                  <a:t> </a:t>
-                </a:r>
-              </a:p>
-            </p:txBody>
-          </p:sp>
-        </mc:Fallback>
-      </mc:AlternateContent>
-      <p:sp>
-        <p:nvSpPr>
-          <p:cNvPr id="6" name="Title 1">
-            <a:extLst>
-              <a:ext uri="{FF2B5EF4-FFF2-40B4-BE49-F238E27FC236}">
-                <a16:creationId xmlns:a16="http://schemas.microsoft.com/office/drawing/2014/main" id="{B7CB3FB6-304E-F342-6AED-DDAE3A8C27FD}"/>
-              </a:ext>
-            </a:extLst>
-          </p:cNvPr>
-          <p:cNvSpPr txBox="1">
-            <a:spLocks/>
-          </p:cNvSpPr>
-          <p:nvPr/>
-        </p:nvSpPr>
-        <p:spPr>
-          <a:xfrm>
-            <a:off x="838200" y="-635"/>
-            <a:ext cx="10515600" cy="1325563"/>
-          </a:xfrm>
-          <a:prstGeom prst="rect">
-            <a:avLst/>
-          </a:prstGeom>
-        </p:spPr>
-        <p:txBody>
-          <a:bodyPr vert="horz" lIns="91440" tIns="45720" rIns="91440" bIns="45720" rtlCol="0" anchor="ctr">
-            <a:normAutofit/>
-          </a:bodyPr>
-          <a:lstStyle>
-            <a:lvl1pPr algn="l" defTabSz="914400" rtl="0" eaLnBrk="1" latinLnBrk="0" hangingPunct="1">
-              <a:lnSpc>
-                <a:spcPct val="90000"/>
-              </a:lnSpc>
-              <a:spcBef>
-                <a:spcPct val="0"/>
-              </a:spcBef>
-              <a:buNone/>
-              <a:defRPr sz="4400" kern="1200">
-                <a:solidFill>
-                  <a:schemeClr val="tx1"/>
-                </a:solidFill>
-                <a:latin typeface="+mj-lt"/>
-                <a:ea typeface="+mj-ea"/>
-                <a:cs typeface="+mj-cs"/>
-              </a:defRPr>
-            </a:lvl1pPr>
-          </a:lstStyle>
-          <a:p>
-            <a:r>
-              <a:rPr lang="en-US" dirty="0">
-                <a:latin typeface="+mn-lt"/>
-              </a:rPr>
-              <a:t>Introduction to Hashing</a:t>
-            </a:r>
-          </a:p>
-        </p:txBody>
-      </p:sp>
-    </p:spTree>
-    <p:extLst>
-      <p:ext uri="{BB962C8B-B14F-4D97-AF65-F5344CB8AC3E}">
-        <p14:creationId xmlns:p14="http://schemas.microsoft.com/office/powerpoint/2010/main" val="2983353550"/>
-      </p:ext>
-    </p:extLst>
-  </p:cSld>
-  <p:clrMapOvr>
-    <a:masterClrMapping/>
-  </p:clrMapOvr>
-</p:sld>
-</file>
-
-<file path=ppt/slides/slide49.xml><?xml version="1.0" encoding="utf-8"?>
-<p:sld xmlns:a="http://schemas.openxmlformats.org/drawingml/2006/main" xmlns:r="http://schemas.openxmlformats.org/officeDocument/2006/relationships" xmlns:p="http://schemas.openxmlformats.org/presentationml/2006/main">
-  <p:cSld>
-    <p:spTree>
-      <p:nvGrpSpPr>
         <p:cNvPr id="1" name="">
           <a:extLst>
             <a:ext uri="{FF2B5EF4-FFF2-40B4-BE49-F238E27FC236}">
@@ -32651,17 +30432,17 @@
             </a:pPr>
             <a:r>
               <a:rPr lang="en-US" dirty="0"/>
-              <a:t>What are the properties of a good hash function?   </a:t>
+              <a:t>What are the properties of a good hash tables?   </a:t>
             </a:r>
           </a:p>
           <a:p>
             <a:pPr marL="514350" indent="-514350">
               <a:buFont typeface="+mj-lt"/>
-              <a:buAutoNum type="arabicPeriod" startAt="5"/>
+              <a:buAutoNum type="arabicPeriod" startAt="3"/>
             </a:pPr>
             <a:r>
               <a:rPr lang="en-US" dirty="0"/>
-              <a:t>Appropriate for the table or required size</a:t>
+              <a:t>Appropriate table size</a:t>
             </a:r>
           </a:p>
           <a:p>
@@ -32695,7 +30476,7 @@
           <a:p>
             <a:pPr marL="514350" indent="-514350">
               <a:buFont typeface="+mj-lt"/>
-              <a:buAutoNum type="arabicPeriod" startAt="5"/>
+              <a:buAutoNum type="arabicPeriod" startAt="3"/>
             </a:pPr>
             <a:r>
               <a:rPr lang="en-US" dirty="0"/>
@@ -32714,6 +30495,13 @@
             <a:r>
               <a:rPr lang="en-US" dirty="0"/>
               <a:t>Hash multiple data streams </a:t>
+            </a:r>
+          </a:p>
+          <a:p>
+            <a:pPr lvl="1"/>
+            <a:r>
+              <a:rPr lang="en-US" dirty="0"/>
+              <a:t>More on this later in the course</a:t>
             </a:r>
           </a:p>
           <a:p>
@@ -33073,302 +30861,15 @@
                                   </p:childTnLst>
                                 </p:cTn>
                               </p:par>
-                            </p:childTnLst>
-                          </p:cTn>
-                        </p:par>
-                      </p:childTnLst>
-                    </p:cTn>
-                  </p:par>
-                </p:childTnLst>
-              </p:cTn>
-              <p:prevCondLst>
-                <p:cond evt="onPrev" delay="0">
-                  <p:tgtEl>
-                    <p:sldTgt/>
-                  </p:tgtEl>
-                </p:cond>
-              </p:prevCondLst>
-              <p:nextCondLst>
-                <p:cond evt="onNext" delay="0">
-                  <p:tgtEl>
-                    <p:sldTgt/>
-                  </p:tgtEl>
-                </p:cond>
-              </p:nextCondLst>
-            </p:seq>
-          </p:childTnLst>
-        </p:cTn>
-      </p:par>
-    </p:tnLst>
-  </p:timing>
-</p:sld>
-</file>
-
-<file path=ppt/slides/slide5.xml><?xml version="1.0" encoding="utf-8"?>
-<p:sld xmlns:a="http://schemas.openxmlformats.org/drawingml/2006/main" xmlns:r="http://schemas.openxmlformats.org/officeDocument/2006/relationships" xmlns:p="http://schemas.openxmlformats.org/presentationml/2006/main">
-  <p:cSld>
-    <p:spTree>
-      <p:nvGrpSpPr>
-        <p:cNvPr id="1" name=""/>
-        <p:cNvGrpSpPr/>
-        <p:nvPr/>
-      </p:nvGrpSpPr>
-      <p:grpSpPr>
-        <a:xfrm>
-          <a:off x="0" y="0"/>
-          <a:ext cx="0" cy="0"/>
-          <a:chOff x="0" y="0"/>
-          <a:chExt cx="0" cy="0"/>
-        </a:xfrm>
-      </p:grpSpPr>
-      <p:sp>
-        <p:nvSpPr>
-          <p:cNvPr id="3" name="Content Placeholder 2">
-            <a:extLst>
-              <a:ext uri="{FF2B5EF4-FFF2-40B4-BE49-F238E27FC236}">
-                <a16:creationId xmlns:a16="http://schemas.microsoft.com/office/drawing/2014/main" id="{258E6AF3-7615-4BD1-878E-A94C93E98F90}"/>
-              </a:ext>
-            </a:extLst>
-          </p:cNvPr>
-          <p:cNvSpPr>
-            <a:spLocks noGrp="1"/>
-          </p:cNvSpPr>
-          <p:nvPr>
-            <p:ph idx="1"/>
-          </p:nvPr>
-        </p:nvSpPr>
-        <p:spPr>
-          <a:xfrm>
-            <a:off x="838200" y="1217458"/>
-            <a:ext cx="10515600" cy="5640542"/>
-          </a:xfrm>
-        </p:spPr>
-        <p:txBody>
-          <a:bodyPr>
-            <a:normAutofit fontScale="92500" lnSpcReduction="10000"/>
-          </a:bodyPr>
-          <a:lstStyle/>
-          <a:p>
-            <a:pPr marL="0" indent="0">
-              <a:buNone/>
-            </a:pPr>
-            <a:r>
-              <a:rPr lang="en-US" sz="3200" dirty="0"/>
-              <a:t>What is the KDD process?   </a:t>
-            </a:r>
-          </a:p>
-          <a:p>
-            <a:pPr marL="0" indent="0">
-              <a:buNone/>
-            </a:pPr>
-            <a:endParaRPr lang="en-US" dirty="0"/>
-          </a:p>
-          <a:p>
-            <a:pPr marL="0" indent="0">
-              <a:buNone/>
-            </a:pPr>
-            <a:endParaRPr lang="en-US" dirty="0"/>
-          </a:p>
-          <a:p>
-            <a:pPr marL="0" indent="0">
-              <a:buNone/>
-            </a:pPr>
-            <a:endParaRPr lang="en-US" dirty="0"/>
-          </a:p>
-          <a:p>
-            <a:pPr marL="0" indent="0">
-              <a:buNone/>
-            </a:pPr>
-            <a:endParaRPr lang="en-US" dirty="0"/>
-          </a:p>
-          <a:p>
-            <a:pPr marL="0" indent="0">
-              <a:buNone/>
-            </a:pPr>
-            <a:endParaRPr lang="en-US" dirty="0"/>
-          </a:p>
-          <a:p>
-            <a:pPr marL="0" indent="0">
-              <a:buNone/>
-            </a:pPr>
-            <a:endParaRPr lang="en-US" dirty="0"/>
-          </a:p>
-          <a:p>
-            <a:pPr marL="0" indent="0">
-              <a:buNone/>
-            </a:pPr>
-            <a:endParaRPr lang="en-US" dirty="0"/>
-          </a:p>
-          <a:p>
-            <a:pPr marL="0" indent="0">
-              <a:buNone/>
-            </a:pPr>
-            <a:endParaRPr lang="en-US" dirty="0">
-              <a:solidFill>
-                <a:schemeClr val="accent1"/>
-              </a:solidFill>
-            </a:endParaRPr>
-          </a:p>
-          <a:p>
-            <a:pPr marL="0" indent="0">
-              <a:buNone/>
-            </a:pPr>
-            <a:endParaRPr lang="en-US" dirty="0">
-              <a:solidFill>
-                <a:schemeClr val="accent1"/>
-              </a:solidFill>
-            </a:endParaRPr>
-          </a:p>
-          <a:p>
-            <a:pPr marL="0" indent="0">
-              <a:buNone/>
-            </a:pPr>
-            <a:endParaRPr lang="en-US" dirty="0">
-              <a:solidFill>
-                <a:schemeClr val="accent1"/>
-              </a:solidFill>
-            </a:endParaRPr>
-          </a:p>
-          <a:p>
-            <a:pPr marL="0" indent="0">
-              <a:buNone/>
-            </a:pPr>
-            <a:r>
-              <a:rPr lang="en-US" dirty="0">
-                <a:solidFill>
-                  <a:schemeClr val="accent1"/>
-                </a:solidFill>
-              </a:rPr>
-              <a:t>Is this old diagram representative?  - e.g. Fayyad et.al. 1996 </a:t>
-            </a:r>
-          </a:p>
-        </p:txBody>
-      </p:sp>
-      <p:sp>
-        <p:nvSpPr>
-          <p:cNvPr id="6" name="Title 1">
-            <a:extLst>
-              <a:ext uri="{FF2B5EF4-FFF2-40B4-BE49-F238E27FC236}">
-                <a16:creationId xmlns:a16="http://schemas.microsoft.com/office/drawing/2014/main" id="{CD29F70F-B868-451B-A65D-8721F4C7A2D9}"/>
-              </a:ext>
-            </a:extLst>
-          </p:cNvPr>
-          <p:cNvSpPr txBox="1">
-            <a:spLocks/>
-          </p:cNvSpPr>
-          <p:nvPr/>
-        </p:nvSpPr>
-        <p:spPr>
-          <a:xfrm>
-            <a:off x="838200" y="-635"/>
-            <a:ext cx="10515600" cy="1325563"/>
-          </a:xfrm>
-          <a:prstGeom prst="rect">
-            <a:avLst/>
-          </a:prstGeom>
-        </p:spPr>
-        <p:txBody>
-          <a:bodyPr vert="horz" lIns="91440" tIns="45720" rIns="91440" bIns="45720" rtlCol="0" anchor="ctr">
-            <a:normAutofit/>
-          </a:bodyPr>
-          <a:lstStyle>
-            <a:lvl1pPr algn="l" defTabSz="914400" rtl="0" eaLnBrk="1" latinLnBrk="0" hangingPunct="1">
-              <a:lnSpc>
-                <a:spcPct val="90000"/>
-              </a:lnSpc>
-              <a:spcBef>
-                <a:spcPct val="0"/>
-              </a:spcBef>
-              <a:buNone/>
-              <a:defRPr sz="4400" kern="1200">
-                <a:solidFill>
-                  <a:schemeClr val="tx1"/>
-                </a:solidFill>
-                <a:latin typeface="+mj-lt"/>
-                <a:ea typeface="+mj-ea"/>
-                <a:cs typeface="+mj-cs"/>
-              </a:defRPr>
-            </a:lvl1pPr>
-          </a:lstStyle>
-          <a:p>
-            <a:r>
-              <a:rPr lang="en-US" dirty="0">
-                <a:latin typeface="+mn-lt"/>
-              </a:rPr>
-              <a:t>KDD process</a:t>
-            </a:r>
-          </a:p>
-        </p:txBody>
-      </p:sp>
-      <p:pic>
-        <p:nvPicPr>
-          <p:cNvPr id="4" name="Picture 3">
-            <a:extLst>
-              <a:ext uri="{FF2B5EF4-FFF2-40B4-BE49-F238E27FC236}">
-                <a16:creationId xmlns:a16="http://schemas.microsoft.com/office/drawing/2014/main" id="{41A10601-345E-4A04-878A-28FFF71506B5}"/>
-              </a:ext>
-            </a:extLst>
-          </p:cNvPr>
-          <p:cNvPicPr>
-            <a:picLocks noChangeAspect="1"/>
-          </p:cNvPicPr>
-          <p:nvPr/>
-        </p:nvPicPr>
-        <p:blipFill>
-          <a:blip r:embed="rId2"/>
-          <a:stretch>
-            <a:fillRect/>
-          </a:stretch>
-        </p:blipFill>
-        <p:spPr>
-          <a:xfrm>
-            <a:off x="951375" y="1651145"/>
-            <a:ext cx="8488232" cy="4404795"/>
-          </a:xfrm>
-          <a:prstGeom prst="rect">
-            <a:avLst/>
-          </a:prstGeom>
-        </p:spPr>
-      </p:pic>
-    </p:spTree>
-    <p:extLst>
-      <p:ext uri="{BB962C8B-B14F-4D97-AF65-F5344CB8AC3E}">
-        <p14:creationId xmlns:p14="http://schemas.microsoft.com/office/powerpoint/2010/main" val="2011350768"/>
-      </p:ext>
-    </p:extLst>
-  </p:cSld>
-  <p:clrMapOvr>
-    <a:masterClrMapping/>
-  </p:clrMapOvr>
-  <p:timing>
-    <p:tnLst>
-      <p:par>
-        <p:cTn id="1" dur="indefinite" restart="never" nodeType="tmRoot">
-          <p:childTnLst>
-            <p:seq concurrent="1" nextAc="seek">
-              <p:cTn id="2" dur="indefinite" nodeType="mainSeq">
-                <p:childTnLst>
-                  <p:par>
-                    <p:cTn id="3" fill="hold">
-                      <p:stCondLst>
-                        <p:cond delay="indefinite"/>
-                      </p:stCondLst>
-                      <p:childTnLst>
-                        <p:par>
-                          <p:cTn id="4" fill="hold">
-                            <p:stCondLst>
-                              <p:cond delay="0"/>
-                            </p:stCondLst>
-                            <p:childTnLst>
                               <p:par>
-                                <p:cTn id="5" presetID="1" presetClass="entr" presetSubtype="0" fill="hold" nodeType="clickEffect">
+                                <p:cTn id="23" presetID="1" presetClass="entr" presetSubtype="0" fill="hold" nodeType="withEffect">
                                   <p:stCondLst>
                                     <p:cond delay="0"/>
                                   </p:stCondLst>
                                   <p:childTnLst>
                                     <p:set>
                                       <p:cBhvr>
-                                        <p:cTn id="6" dur="1" fill="hold">
+                                        <p:cTn id="24" dur="1" fill="hold">
                                           <p:stCondLst>
                                             <p:cond delay="0"/>
                                           </p:stCondLst>
@@ -33376,85 +30877,9 @@
                                         <p:tgtEl>
                                           <p:spTgt spid="3">
                                             <p:txEl>
-                                              <p:pRg st="0" end="0"/>
+                                              <p:pRg st="9" end="9"/>
                                             </p:txEl>
                                           </p:spTgt>
-                                        </p:tgtEl>
-                                        <p:attrNameLst>
-                                          <p:attrName>style.visibility</p:attrName>
-                                        </p:attrNameLst>
-                                      </p:cBhvr>
-                                      <p:to>
-                                        <p:strVal val="visible"/>
-                                      </p:to>
-                                    </p:set>
-                                  </p:childTnLst>
-                                </p:cTn>
-                              </p:par>
-                            </p:childTnLst>
-                          </p:cTn>
-                        </p:par>
-                      </p:childTnLst>
-                    </p:cTn>
-                  </p:par>
-                  <p:par>
-                    <p:cTn id="7" fill="hold">
-                      <p:stCondLst>
-                        <p:cond delay="indefinite"/>
-                      </p:stCondLst>
-                      <p:childTnLst>
-                        <p:par>
-                          <p:cTn id="8" fill="hold">
-                            <p:stCondLst>
-                              <p:cond delay="0"/>
-                            </p:stCondLst>
-                            <p:childTnLst>
-                              <p:par>
-                                <p:cTn id="9" presetID="1" presetClass="entr" presetSubtype="0" fill="hold" nodeType="clickEffect">
-                                  <p:stCondLst>
-                                    <p:cond delay="0"/>
-                                  </p:stCondLst>
-                                  <p:childTnLst>
-                                    <p:set>
-                                      <p:cBhvr>
-                                        <p:cTn id="10" dur="1" fill="hold">
-                                          <p:stCondLst>
-                                            <p:cond delay="0"/>
-                                          </p:stCondLst>
-                                        </p:cTn>
-                                        <p:tgtEl>
-                                          <p:spTgt spid="3">
-                                            <p:txEl>
-                                              <p:pRg st="11" end="11"/>
-                                            </p:txEl>
-                                          </p:spTgt>
-                                        </p:tgtEl>
-                                        <p:attrNameLst>
-                                          <p:attrName>style.visibility</p:attrName>
-                                        </p:attrNameLst>
-                                      </p:cBhvr>
-                                      <p:to>
-                                        <p:strVal val="visible"/>
-                                      </p:to>
-                                    </p:set>
-                                  </p:childTnLst>
-                                </p:cTn>
-                              </p:par>
-                              <p:par>
-                                <p:cTn id="11" presetID="1" presetClass="entr" presetSubtype="0" fill="hold" nodeType="withEffect">
-                                  <p:stCondLst>
-                                    <p:cond delay="0"/>
-                                  </p:stCondLst>
-                                  <p:childTnLst>
-                                    <p:set>
-                                      <p:cBhvr>
-                                        <p:cTn id="12" dur="1" fill="hold">
-                                          <p:stCondLst>
-                                            <p:cond delay="0"/>
-                                          </p:stCondLst>
-                                        </p:cTn>
-                                        <p:tgtEl>
-                                          <p:spTgt spid="4"/>
                                         </p:tgtEl>
                                         <p:attrNameLst>
                                           <p:attrName>style.visibility</p:attrName>
@@ -33498,7 +30923,7 @@
 </p:sld>
 </file>
 
-<file path=ppt/slides/slide50.xml><?xml version="1.0" encoding="utf-8"?>
+<file path=ppt/slides/slide47.xml><?xml version="1.0" encoding="utf-8"?>
 <p:sld xmlns:a="http://schemas.openxmlformats.org/drawingml/2006/main" xmlns:r="http://schemas.openxmlformats.org/officeDocument/2006/relationships" xmlns:p="http://schemas.openxmlformats.org/presentationml/2006/main">
   <p:cSld>
     <p:spTree>
@@ -34097,7 +31522,7 @@
 </p:sld>
 </file>
 
-<file path=ppt/slides/slide51.xml><?xml version="1.0" encoding="utf-8"?>
+<file path=ppt/slides/slide48.xml><?xml version="1.0" encoding="utf-8"?>
 <p:sld xmlns:a="http://schemas.openxmlformats.org/drawingml/2006/main" xmlns:r="http://schemas.openxmlformats.org/officeDocument/2006/relationships" xmlns:p="http://schemas.openxmlformats.org/presentationml/2006/main">
   <p:cSld>
     <p:spTree>
@@ -34682,6 +32107,2457 @@
     <p:bldLst>
       <p:bldP spid="5" grpId="0"/>
     </p:bldLst>
+  </p:timing>
+</p:sld>
+</file>
+
+<file path=ppt/slides/slide49.xml><?xml version="1.0" encoding="utf-8"?>
+<p:sld xmlns:a="http://schemas.openxmlformats.org/drawingml/2006/main" xmlns:r="http://schemas.openxmlformats.org/officeDocument/2006/relationships" xmlns:p="http://schemas.openxmlformats.org/presentationml/2006/main">
+  <p:cSld>
+    <p:spTree>
+      <p:nvGrpSpPr>
+        <p:cNvPr id="1" name="">
+          <a:extLst>
+            <a:ext uri="{FF2B5EF4-FFF2-40B4-BE49-F238E27FC236}">
+              <a16:creationId xmlns:a16="http://schemas.microsoft.com/office/drawing/2014/main" id="{6B4A905F-17EC-9351-E47A-0E13F736181A}"/>
+            </a:ext>
+          </a:extLst>
+        </p:cNvPr>
+        <p:cNvGrpSpPr/>
+        <p:nvPr/>
+      </p:nvGrpSpPr>
+      <p:grpSpPr>
+        <a:xfrm>
+          <a:off x="0" y="0"/>
+          <a:ext cx="0" cy="0"/>
+          <a:chOff x="0" y="0"/>
+          <a:chExt cx="0" cy="0"/>
+        </a:xfrm>
+      </p:grpSpPr>
+      <mc:AlternateContent xmlns:mc="http://schemas.openxmlformats.org/markup-compatibility/2006">
+        <mc:Choice xmlns:a14="http://schemas.microsoft.com/office/drawing/2010/main" Requires="a14">
+          <p:sp>
+            <p:nvSpPr>
+              <p:cNvPr id="3" name="Content Placeholder 2">
+                <a:extLst>
+                  <a:ext uri="{FF2B5EF4-FFF2-40B4-BE49-F238E27FC236}">
+                    <a16:creationId xmlns:a16="http://schemas.microsoft.com/office/drawing/2014/main" id="{54F6F35F-5504-3FF6-7F3F-F41955A601FA}"/>
+                  </a:ext>
+                </a:extLst>
+              </p:cNvPr>
+              <p:cNvSpPr>
+                <a:spLocks noGrp="1"/>
+              </p:cNvSpPr>
+              <p:nvPr>
+                <p:ph idx="1"/>
+              </p:nvPr>
+            </p:nvSpPr>
+            <p:spPr>
+              <a:xfrm>
+                <a:off x="838200" y="1123406"/>
+                <a:ext cx="10515600" cy="5470724"/>
+              </a:xfrm>
+            </p:spPr>
+            <p:txBody>
+              <a:bodyPr>
+                <a:normAutofit/>
+              </a:bodyPr>
+              <a:lstStyle/>
+              <a:p>
+                <a:pPr marL="0" indent="0">
+                  <a:buNone/>
+                </a:pPr>
+                <a:r>
+                  <a:rPr lang="en-US" dirty="0"/>
+                  <a:t>What are the properties of a good hash function?  </a:t>
+                </a:r>
+              </a:p>
+              <a:p>
+                <a:r>
+                  <a:rPr lang="en-US" dirty="0"/>
+                  <a:t>For key values, </a:t>
+                </a:r>
+                <a14:m>
+                  <m:oMath xmlns:m="http://schemas.openxmlformats.org/officeDocument/2006/math">
+                    <m:r>
+                      <a:rPr lang="en-US" i="1">
+                        <a:latin typeface="Cambria Math" panose="02040503050406030204" pitchFamily="18" charset="0"/>
+                      </a:rPr>
+                      <m:t>𝐾</m:t>
+                    </m:r>
+                  </m:oMath>
+                </a14:m>
+                <a:r>
+                  <a:rPr lang="en-US" dirty="0"/>
+                  <a:t>, want a </a:t>
+                </a:r>
+                <a:r>
+                  <a:rPr lang="en-US" b="1" dirty="0"/>
+                  <a:t>uniform distribution over </a:t>
+                </a:r>
+                <a14:m>
+                  <m:oMath xmlns:m="http://schemas.openxmlformats.org/officeDocument/2006/math">
+                    <m:r>
+                      <a:rPr lang="en-US" b="1" i="1" smtClean="0">
+                        <a:latin typeface="Cambria Math" panose="02040503050406030204" pitchFamily="18" charset="0"/>
+                      </a:rPr>
+                      <m:t>𝒎</m:t>
+                    </m:r>
+                  </m:oMath>
+                </a14:m>
+                <a:r>
+                  <a:rPr lang="en-US" b="1" dirty="0"/>
+                  <a:t> hash values</a:t>
+                </a:r>
+              </a:p>
+              <a:p>
+                <a:pPr marL="457200" lvl="1" indent="0">
+                  <a:buNone/>
+                </a:pPr>
+                <a14:m>
+                  <m:oMathPara xmlns:m="http://schemas.openxmlformats.org/officeDocument/2006/math">
+                    <m:oMathParaPr>
+                      <m:jc m:val="centerGroup"/>
+                    </m:oMathParaPr>
+                    <m:oMath xmlns:m="http://schemas.openxmlformats.org/officeDocument/2006/math">
+                      <m:r>
+                        <a:rPr lang="en-US" b="1" i="1">
+                          <a:latin typeface="Cambria Math" panose="02040503050406030204" pitchFamily="18" charset="0"/>
+                        </a:rPr>
+                        <m:t>𝒇</m:t>
+                      </m:r>
+                      <m:r>
+                        <a:rPr lang="en-US" b="1" i="1">
+                          <a:latin typeface="Cambria Math" panose="02040503050406030204" pitchFamily="18" charset="0"/>
+                        </a:rPr>
+                        <m:t>(</m:t>
+                      </m:r>
+                      <m:r>
+                        <a:rPr lang="en-US" b="1" i="1">
+                          <a:latin typeface="Cambria Math" panose="02040503050406030204" pitchFamily="18" charset="0"/>
+                        </a:rPr>
+                        <m:t>𝒌</m:t>
+                      </m:r>
+                      <m:r>
+                        <a:rPr lang="en-US" b="1" i="1">
+                          <a:latin typeface="Cambria Math" panose="02040503050406030204" pitchFamily="18" charset="0"/>
+                        </a:rPr>
+                        <m:t>)~</m:t>
+                      </m:r>
+                      <m:r>
+                        <a:rPr lang="en-US" b="1" i="1">
+                          <a:latin typeface="Cambria Math" panose="02040503050406030204" pitchFamily="18" charset="0"/>
+                          <a:ea typeface="Cambria Math" panose="02040503050406030204" pitchFamily="18" charset="0"/>
+                        </a:rPr>
+                        <m:t>𝑼</m:t>
+                      </m:r>
+                      <m:r>
+                        <a:rPr lang="en-US" b="1" i="1">
+                          <a:latin typeface="Cambria Math" panose="02040503050406030204" pitchFamily="18" charset="0"/>
+                          <a:ea typeface="Cambria Math" panose="02040503050406030204" pitchFamily="18" charset="0"/>
+                        </a:rPr>
+                        <m:t>(</m:t>
+                      </m:r>
+                      <m:r>
+                        <a:rPr lang="en-US" b="1" i="1">
+                          <a:latin typeface="Cambria Math" panose="02040503050406030204" pitchFamily="18" charset="0"/>
+                          <a:ea typeface="Cambria Math" panose="02040503050406030204" pitchFamily="18" charset="0"/>
+                        </a:rPr>
+                        <m:t>𝟎</m:t>
+                      </m:r>
+                      <m:r>
+                        <a:rPr lang="en-US" b="1" i="1">
+                          <a:latin typeface="Cambria Math" panose="02040503050406030204" pitchFamily="18" charset="0"/>
+                          <a:ea typeface="Cambria Math" panose="02040503050406030204" pitchFamily="18" charset="0"/>
+                        </a:rPr>
+                        <m:t>,</m:t>
+                      </m:r>
+                      <m:r>
+                        <a:rPr lang="en-US" b="1" i="1" smtClean="0">
+                          <a:latin typeface="Cambria Math" panose="02040503050406030204" pitchFamily="18" charset="0"/>
+                          <a:ea typeface="Cambria Math" panose="02040503050406030204" pitchFamily="18" charset="0"/>
+                        </a:rPr>
+                        <m:t>𝒎</m:t>
+                      </m:r>
+                      <m:r>
+                        <a:rPr lang="en-US" b="1" i="1">
+                          <a:latin typeface="Cambria Math" panose="02040503050406030204" pitchFamily="18" charset="0"/>
+                          <a:ea typeface="Cambria Math" panose="02040503050406030204" pitchFamily="18" charset="0"/>
+                        </a:rPr>
+                        <m:t>)</m:t>
+                      </m:r>
+                    </m:oMath>
+                  </m:oMathPara>
+                </a14:m>
+                <a:endParaRPr lang="en-US" b="1" dirty="0"/>
+              </a:p>
+              <a:p>
+                <a:pPr lvl="1"/>
+                <a:r>
+                  <a:rPr lang="en-US" dirty="0"/>
+                  <a:t>For </a:t>
+                </a:r>
+                <a14:m>
+                  <m:oMath xmlns:m="http://schemas.openxmlformats.org/officeDocument/2006/math">
+                    <m:r>
+                      <a:rPr lang="en-US" b="0" i="1" smtClean="0">
+                        <a:latin typeface="Cambria Math" panose="02040503050406030204" pitchFamily="18" charset="0"/>
+                      </a:rPr>
+                      <m:t>𝑚</m:t>
+                    </m:r>
+                  </m:oMath>
+                </a14:m>
+                <a:r>
+                  <a:rPr lang="en-US" dirty="0"/>
+                  <a:t> length hash table probability of bucket </a:t>
+                </a:r>
+                <a14:m>
+                  <m:oMath xmlns:m="http://schemas.openxmlformats.org/officeDocument/2006/math">
+                    <m:r>
+                      <a:rPr lang="en-US" b="0" i="1" smtClean="0">
+                        <a:latin typeface="Cambria Math" panose="02040503050406030204" pitchFamily="18" charset="0"/>
+                      </a:rPr>
+                      <m:t>𝑖</m:t>
+                    </m:r>
+                  </m:oMath>
+                </a14:m>
+                <a:r>
+                  <a:rPr lang="en-US" dirty="0"/>
+                  <a:t> being occupied is: </a:t>
+                </a:r>
+              </a:p>
+              <a:p>
+                <a:pPr marL="457200" lvl="1" indent="0">
+                  <a:buNone/>
+                </a:pPr>
+                <a14:m>
+                  <m:oMathPara xmlns:m="http://schemas.openxmlformats.org/officeDocument/2006/math">
+                    <m:oMathParaPr>
+                      <m:jc m:val="centerGroup"/>
+                    </m:oMathParaPr>
+                    <m:oMath xmlns:m="http://schemas.openxmlformats.org/officeDocument/2006/math">
+                      <m:r>
+                        <m:rPr>
+                          <m:sty m:val="p"/>
+                        </m:rPr>
+                        <a:rPr lang="en-US" b="0" i="0" smtClean="0">
+                          <a:latin typeface="Cambria Math" panose="02040503050406030204" pitchFamily="18" charset="0"/>
+                        </a:rPr>
+                        <m:t>P</m:t>
+                      </m:r>
+                      <m:d>
+                        <m:dPr>
+                          <m:ctrlPr>
+                            <a:rPr lang="en-US" i="1" smtClean="0">
+                              <a:latin typeface="Cambria Math" panose="02040503050406030204" pitchFamily="18" charset="0"/>
+                            </a:rPr>
+                          </m:ctrlPr>
+                        </m:dPr>
+                        <m:e>
+                          <m:r>
+                            <a:rPr lang="en-US" b="0" i="1">
+                              <a:latin typeface="Cambria Math" panose="02040503050406030204" pitchFamily="18" charset="0"/>
+                            </a:rPr>
+                            <m:t>𝑓</m:t>
+                          </m:r>
+                          <m:d>
+                            <m:dPr>
+                              <m:ctrlPr>
+                                <a:rPr lang="en-US" i="1">
+                                  <a:latin typeface="Cambria Math" panose="02040503050406030204" pitchFamily="18" charset="0"/>
+                                </a:rPr>
+                              </m:ctrlPr>
+                            </m:dPr>
+                            <m:e>
+                              <m:r>
+                                <a:rPr lang="en-US" b="0" i="1">
+                                  <a:latin typeface="Cambria Math" panose="02040503050406030204" pitchFamily="18" charset="0"/>
+                                </a:rPr>
+                                <m:t>𝑘</m:t>
+                              </m:r>
+                            </m:e>
+                          </m:d>
+                          <m:r>
+                            <a:rPr lang="en-US" b="0" i="1" smtClean="0">
+                              <a:latin typeface="Cambria Math" panose="02040503050406030204" pitchFamily="18" charset="0"/>
+                            </a:rPr>
+                            <m:t>=</m:t>
+                          </m:r>
+                          <m:r>
+                            <a:rPr lang="en-US" b="0" i="1" smtClean="0">
+                              <a:latin typeface="Cambria Math" panose="02040503050406030204" pitchFamily="18" charset="0"/>
+                            </a:rPr>
+                            <m:t>𝑖</m:t>
+                          </m:r>
+                        </m:e>
+                      </m:d>
+                      <m:r>
+                        <a:rPr lang="en-US" b="0" i="1" smtClean="0">
+                          <a:latin typeface="Cambria Math" panose="02040503050406030204" pitchFamily="18" charset="0"/>
+                        </a:rPr>
+                        <m:t>=</m:t>
+                      </m:r>
+                      <m:f>
+                        <m:fPr>
+                          <m:ctrlPr>
+                            <a:rPr lang="en-US" b="0" i="1" smtClean="0">
+                              <a:latin typeface="Cambria Math" panose="02040503050406030204" pitchFamily="18" charset="0"/>
+                            </a:rPr>
+                          </m:ctrlPr>
+                        </m:fPr>
+                        <m:num>
+                          <m:r>
+                            <a:rPr lang="en-US" b="0" i="1" smtClean="0">
+                              <a:latin typeface="Cambria Math" panose="02040503050406030204" pitchFamily="18" charset="0"/>
+                            </a:rPr>
+                            <m:t>1</m:t>
+                          </m:r>
+                        </m:num>
+                        <m:den>
+                          <m:r>
+                            <a:rPr lang="en-US" b="0" i="1" smtClean="0">
+                              <a:latin typeface="Cambria Math" panose="02040503050406030204" pitchFamily="18" charset="0"/>
+                            </a:rPr>
+                            <m:t>𝑚</m:t>
+                          </m:r>
+                        </m:den>
+                      </m:f>
+                    </m:oMath>
+                  </m:oMathPara>
+                </a14:m>
+                <a:endParaRPr lang="en-US" dirty="0"/>
+              </a:p>
+              <a:p>
+                <a:pPr lvl="1"/>
+                <a:r>
+                  <a:rPr lang="en-US" b="1" dirty="0"/>
+                  <a:t>Lumpy hash values </a:t>
+                </a:r>
+                <a:r>
+                  <a:rPr lang="en-US" dirty="0"/>
+                  <a:t>lead to increased </a:t>
+                </a:r>
+                <a:r>
+                  <a:rPr lang="en-US" b="1" dirty="0"/>
+                  <a:t>hash collisions </a:t>
+                </a:r>
+              </a:p>
+              <a:p>
+                <a:pPr lvl="1"/>
+                <a:r>
+                  <a:rPr lang="en-US" dirty="0"/>
+                  <a:t>Can verify with </a:t>
+                </a:r>
+                <a14:m>
+                  <m:oMath xmlns:m="http://schemas.openxmlformats.org/officeDocument/2006/math">
+                    <m:sSup>
+                      <m:sSupPr>
+                        <m:ctrlPr>
+                          <a:rPr lang="en-US" i="1">
+                            <a:latin typeface="Cambria Math" panose="02040503050406030204" pitchFamily="18" charset="0"/>
+                          </a:rPr>
+                        </m:ctrlPr>
+                      </m:sSupPr>
+                      <m:e>
+                        <m:r>
+                          <a:rPr lang="en-US" i="1">
+                            <a:latin typeface="Cambria Math" panose="02040503050406030204" pitchFamily="18" charset="0"/>
+                            <a:ea typeface="Cambria Math" panose="02040503050406030204" pitchFamily="18" charset="0"/>
+                          </a:rPr>
+                          <m:t>𝜒</m:t>
+                        </m:r>
+                      </m:e>
+                      <m:sup>
+                        <m:r>
+                          <a:rPr lang="en-US" i="1">
+                            <a:latin typeface="Cambria Math" panose="02040503050406030204" pitchFamily="18" charset="0"/>
+                          </a:rPr>
+                          <m:t>2</m:t>
+                        </m:r>
+                      </m:sup>
+                    </m:sSup>
+                  </m:oMath>
+                </a14:m>
+                <a:r>
+                  <a:rPr lang="en-US" dirty="0"/>
+                  <a:t> test</a:t>
+                </a:r>
+              </a:p>
+              <a:p>
+                <a:r>
+                  <a:rPr lang="en-US" dirty="0"/>
+                  <a:t>For a uniformly distributed hash function the probability of a hash collision with </a:t>
+                </a:r>
+                <a14:m>
+                  <m:oMath xmlns:m="http://schemas.openxmlformats.org/officeDocument/2006/math">
+                    <m:r>
+                      <a:rPr lang="en-US" i="1">
+                        <a:latin typeface="Cambria Math" panose="02040503050406030204" pitchFamily="18" charset="0"/>
+                        <a:ea typeface="Cambria Math" panose="02040503050406030204" pitchFamily="18" charset="0"/>
+                      </a:rPr>
+                      <m:t>𝑛</m:t>
+                    </m:r>
+                  </m:oMath>
+                </a14:m>
+                <a:r>
+                  <a:rPr lang="en-US" dirty="0"/>
+                  <a:t> elements filled in the table, </a:t>
+                </a:r>
+                <a14:m>
+                  <m:oMath xmlns:m="http://schemas.openxmlformats.org/officeDocument/2006/math">
+                    <m:r>
+                      <a:rPr lang="en-US" i="1" smtClean="0">
+                        <a:latin typeface="Cambria Math" panose="02040503050406030204" pitchFamily="18" charset="0"/>
+                        <a:ea typeface="Cambria Math" panose="02040503050406030204" pitchFamily="18" charset="0"/>
+                      </a:rPr>
+                      <m:t>𝛼</m:t>
+                    </m:r>
+                  </m:oMath>
+                </a14:m>
+                <a:r>
+                  <a:rPr lang="en-US" dirty="0"/>
+                  <a:t>    </a:t>
+                </a:r>
+              </a:p>
+              <a:p>
+                <a:pPr marL="0" indent="0">
+                  <a:buNone/>
+                </a:pPr>
+                <a14:m>
+                  <m:oMathPara xmlns:m="http://schemas.openxmlformats.org/officeDocument/2006/math">
+                    <m:oMathParaPr>
+                      <m:jc m:val="centerGroup"/>
+                    </m:oMathParaPr>
+                    <m:oMath xmlns:m="http://schemas.openxmlformats.org/officeDocument/2006/math">
+                      <m:r>
+                        <a:rPr lang="en-US" b="0" i="1" smtClean="0">
+                          <a:latin typeface="Cambria Math" panose="02040503050406030204" pitchFamily="18" charset="0"/>
+                        </a:rPr>
+                        <m:t>𝑃</m:t>
+                      </m:r>
+                      <m:d>
+                        <m:dPr>
+                          <m:ctrlPr>
+                            <a:rPr lang="en-US" b="0" i="1" smtClean="0">
+                              <a:latin typeface="Cambria Math" panose="02040503050406030204" pitchFamily="18" charset="0"/>
+                            </a:rPr>
+                          </m:ctrlPr>
+                        </m:dPr>
+                        <m:e>
+                          <m:r>
+                            <a:rPr lang="en-US" b="0" i="1" smtClean="0">
+                              <a:latin typeface="Cambria Math" panose="02040503050406030204" pitchFamily="18" charset="0"/>
+                            </a:rPr>
+                            <m:t>𝑚</m:t>
+                          </m:r>
+                          <m:r>
+                            <a:rPr lang="en-US" b="0" i="1" smtClean="0">
+                              <a:latin typeface="Cambria Math" panose="02040503050406030204" pitchFamily="18" charset="0"/>
+                            </a:rPr>
+                            <m:t>,</m:t>
+                          </m:r>
+                          <m:r>
+                            <a:rPr lang="en-US" b="0" i="1" smtClean="0">
+                              <a:latin typeface="Cambria Math" panose="02040503050406030204" pitchFamily="18" charset="0"/>
+                            </a:rPr>
+                            <m:t>𝑛</m:t>
+                          </m:r>
+                        </m:e>
+                      </m:d>
+                      <m:r>
+                        <a:rPr lang="en-US" b="0" i="1" smtClean="0">
+                          <a:latin typeface="Cambria Math" panose="02040503050406030204" pitchFamily="18" charset="0"/>
+                        </a:rPr>
+                        <m:t>=</m:t>
+                      </m:r>
+                      <m:r>
+                        <a:rPr lang="en-US" i="1">
+                          <a:latin typeface="Cambria Math" panose="02040503050406030204" pitchFamily="18" charset="0"/>
+                          <a:ea typeface="Cambria Math" panose="02040503050406030204" pitchFamily="18" charset="0"/>
+                        </a:rPr>
+                        <m:t>𝛼</m:t>
+                      </m:r>
+                      <m:r>
+                        <a:rPr lang="en-US" b="0" i="1" smtClean="0">
+                          <a:latin typeface="Cambria Math" panose="02040503050406030204" pitchFamily="18" charset="0"/>
+                          <a:ea typeface="Cambria Math" panose="02040503050406030204" pitchFamily="18" charset="0"/>
+                        </a:rPr>
+                        <m:t>=</m:t>
+                      </m:r>
+                      <m:f>
+                        <m:fPr>
+                          <m:ctrlPr>
+                            <a:rPr lang="en-US" i="1">
+                              <a:latin typeface="Cambria Math" panose="02040503050406030204" pitchFamily="18" charset="0"/>
+                            </a:rPr>
+                          </m:ctrlPr>
+                        </m:fPr>
+                        <m:num>
+                          <m:r>
+                            <a:rPr lang="en-US" b="0" i="1" smtClean="0">
+                              <a:latin typeface="Cambria Math" panose="02040503050406030204" pitchFamily="18" charset="0"/>
+                            </a:rPr>
+                            <m:t>𝑛</m:t>
+                          </m:r>
+                        </m:num>
+                        <m:den>
+                          <m:r>
+                            <a:rPr lang="en-US" i="1">
+                              <a:latin typeface="Cambria Math" panose="02040503050406030204" pitchFamily="18" charset="0"/>
+                            </a:rPr>
+                            <m:t>𝑚</m:t>
+                          </m:r>
+                        </m:den>
+                      </m:f>
+                    </m:oMath>
+                  </m:oMathPara>
+                </a14:m>
+                <a:endParaRPr lang="en-US" dirty="0"/>
+              </a:p>
+            </p:txBody>
+          </p:sp>
+        </mc:Choice>
+        <mc:Fallback>
+          <p:sp>
+            <p:nvSpPr>
+              <p:cNvPr id="3" name="Content Placeholder 2">
+                <a:extLst>
+                  <a:ext uri="{FF2B5EF4-FFF2-40B4-BE49-F238E27FC236}">
+                    <a16:creationId xmlns:a16="http://schemas.microsoft.com/office/drawing/2014/main" id="{54F6F35F-5504-3FF6-7F3F-F41955A601FA}"/>
+                  </a:ext>
+                </a:extLst>
+              </p:cNvPr>
+              <p:cNvSpPr>
+                <a:spLocks noGrp="1" noRot="1" noChangeAspect="1" noMove="1" noResize="1" noEditPoints="1" noAdjustHandles="1" noChangeArrowheads="1" noChangeShapeType="1" noTextEdit="1"/>
+              </p:cNvSpPr>
+              <p:nvPr>
+                <p:ph idx="1"/>
+              </p:nvPr>
+            </p:nvSpPr>
+            <p:spPr>
+              <a:xfrm>
+                <a:off x="838200" y="1123406"/>
+                <a:ext cx="10515600" cy="5470724"/>
+              </a:xfrm>
+              <a:blipFill>
+                <a:blip r:embed="rId2"/>
+                <a:stretch>
+                  <a:fillRect l="-1217" t="-1782"/>
+                </a:stretch>
+              </a:blipFill>
+            </p:spPr>
+            <p:txBody>
+              <a:bodyPr/>
+              <a:lstStyle/>
+              <a:p>
+                <a:r>
+                  <a:rPr lang="en-US">
+                    <a:noFill/>
+                  </a:rPr>
+                  <a:t> </a:t>
+                </a:r>
+              </a:p>
+            </p:txBody>
+          </p:sp>
+        </mc:Fallback>
+      </mc:AlternateContent>
+      <p:sp>
+        <p:nvSpPr>
+          <p:cNvPr id="6" name="Title 1">
+            <a:extLst>
+              <a:ext uri="{FF2B5EF4-FFF2-40B4-BE49-F238E27FC236}">
+                <a16:creationId xmlns:a16="http://schemas.microsoft.com/office/drawing/2014/main" id="{9CDD3AB4-A9E3-8623-71E8-A086F9266E92}"/>
+              </a:ext>
+            </a:extLst>
+          </p:cNvPr>
+          <p:cNvSpPr txBox="1">
+            <a:spLocks/>
+          </p:cNvSpPr>
+          <p:nvPr/>
+        </p:nvSpPr>
+        <p:spPr>
+          <a:xfrm>
+            <a:off x="838200" y="-635"/>
+            <a:ext cx="10515600" cy="1325563"/>
+          </a:xfrm>
+          <a:prstGeom prst="rect">
+            <a:avLst/>
+          </a:prstGeom>
+        </p:spPr>
+        <p:txBody>
+          <a:bodyPr vert="horz" lIns="91440" tIns="45720" rIns="91440" bIns="45720" rtlCol="0" anchor="ctr">
+            <a:normAutofit/>
+          </a:bodyPr>
+          <a:lstStyle>
+            <a:lvl1pPr algn="l" defTabSz="914400" rtl="0" eaLnBrk="1" latinLnBrk="0" hangingPunct="1">
+              <a:lnSpc>
+                <a:spcPct val="90000"/>
+              </a:lnSpc>
+              <a:spcBef>
+                <a:spcPct val="0"/>
+              </a:spcBef>
+              <a:buNone/>
+              <a:defRPr sz="4400" kern="1200">
+                <a:solidFill>
+                  <a:schemeClr val="tx1"/>
+                </a:solidFill>
+                <a:latin typeface="+mj-lt"/>
+                <a:ea typeface="+mj-ea"/>
+                <a:cs typeface="+mj-cs"/>
+              </a:defRPr>
+            </a:lvl1pPr>
+          </a:lstStyle>
+          <a:p>
+            <a:r>
+              <a:rPr lang="en-US" dirty="0">
+                <a:latin typeface="+mn-lt"/>
+              </a:rPr>
+              <a:t>Introduction to Hashing</a:t>
+            </a:r>
+          </a:p>
+        </p:txBody>
+      </p:sp>
+    </p:spTree>
+    <p:extLst>
+      <p:ext uri="{BB962C8B-B14F-4D97-AF65-F5344CB8AC3E}">
+        <p14:creationId xmlns:p14="http://schemas.microsoft.com/office/powerpoint/2010/main" val="918666340"/>
+      </p:ext>
+    </p:extLst>
+  </p:cSld>
+  <p:clrMapOvr>
+    <a:masterClrMapping/>
+  </p:clrMapOvr>
+  <p:timing>
+    <p:tnLst>
+      <p:par>
+        <p:cTn id="1" dur="indefinite" restart="never" nodeType="tmRoot">
+          <p:childTnLst>
+            <p:seq concurrent="1" nextAc="seek">
+              <p:cTn id="2" dur="indefinite" nodeType="mainSeq">
+                <p:childTnLst>
+                  <p:par>
+                    <p:cTn id="3" fill="hold">
+                      <p:stCondLst>
+                        <p:cond delay="indefinite"/>
+                      </p:stCondLst>
+                      <p:childTnLst>
+                        <p:par>
+                          <p:cTn id="4" fill="hold">
+                            <p:stCondLst>
+                              <p:cond delay="0"/>
+                            </p:stCondLst>
+                            <p:childTnLst>
+                              <p:par>
+                                <p:cTn id="5" presetID="1" presetClass="entr" presetSubtype="0" fill="hold" nodeType="clickEffect">
+                                  <p:stCondLst>
+                                    <p:cond delay="0"/>
+                                  </p:stCondLst>
+                                  <p:childTnLst>
+                                    <p:set>
+                                      <p:cBhvr>
+                                        <p:cTn id="6" dur="1" fill="hold">
+                                          <p:stCondLst>
+                                            <p:cond delay="0"/>
+                                          </p:stCondLst>
+                                        </p:cTn>
+                                        <p:tgtEl>
+                                          <p:spTgt spid="3">
+                                            <p:txEl>
+                                              <p:pRg st="1" end="1"/>
+                                            </p:txEl>
+                                          </p:spTgt>
+                                        </p:tgtEl>
+                                        <p:attrNameLst>
+                                          <p:attrName>style.visibility</p:attrName>
+                                        </p:attrNameLst>
+                                      </p:cBhvr>
+                                      <p:to>
+                                        <p:strVal val="visible"/>
+                                      </p:to>
+                                    </p:set>
+                                  </p:childTnLst>
+                                </p:cTn>
+                              </p:par>
+                              <p:par>
+                                <p:cTn id="7" presetID="1" presetClass="entr" presetSubtype="0" fill="hold" nodeType="withEffect">
+                                  <p:stCondLst>
+                                    <p:cond delay="0"/>
+                                  </p:stCondLst>
+                                  <p:childTnLst>
+                                    <p:set>
+                                      <p:cBhvr>
+                                        <p:cTn id="8" dur="1" fill="hold">
+                                          <p:stCondLst>
+                                            <p:cond delay="0"/>
+                                          </p:stCondLst>
+                                        </p:cTn>
+                                        <p:tgtEl>
+                                          <p:spTgt spid="3">
+                                            <p:txEl>
+                                              <p:pRg st="2" end="2"/>
+                                            </p:txEl>
+                                          </p:spTgt>
+                                        </p:tgtEl>
+                                        <p:attrNameLst>
+                                          <p:attrName>style.visibility</p:attrName>
+                                        </p:attrNameLst>
+                                      </p:cBhvr>
+                                      <p:to>
+                                        <p:strVal val="visible"/>
+                                      </p:to>
+                                    </p:set>
+                                  </p:childTnLst>
+                                </p:cTn>
+                              </p:par>
+                              <p:par>
+                                <p:cTn id="9" presetID="1" presetClass="entr" presetSubtype="0" fill="hold" nodeType="withEffect">
+                                  <p:stCondLst>
+                                    <p:cond delay="0"/>
+                                  </p:stCondLst>
+                                  <p:childTnLst>
+                                    <p:set>
+                                      <p:cBhvr>
+                                        <p:cTn id="10" dur="1" fill="hold">
+                                          <p:stCondLst>
+                                            <p:cond delay="0"/>
+                                          </p:stCondLst>
+                                        </p:cTn>
+                                        <p:tgtEl>
+                                          <p:spTgt spid="3">
+                                            <p:txEl>
+                                              <p:pRg st="3" end="3"/>
+                                            </p:txEl>
+                                          </p:spTgt>
+                                        </p:tgtEl>
+                                        <p:attrNameLst>
+                                          <p:attrName>style.visibility</p:attrName>
+                                        </p:attrNameLst>
+                                      </p:cBhvr>
+                                      <p:to>
+                                        <p:strVal val="visible"/>
+                                      </p:to>
+                                    </p:set>
+                                  </p:childTnLst>
+                                </p:cTn>
+                              </p:par>
+                              <p:par>
+                                <p:cTn id="11" presetID="1" presetClass="entr" presetSubtype="0" fill="hold" nodeType="withEffect">
+                                  <p:stCondLst>
+                                    <p:cond delay="0"/>
+                                  </p:stCondLst>
+                                  <p:childTnLst>
+                                    <p:set>
+                                      <p:cBhvr>
+                                        <p:cTn id="12" dur="1" fill="hold">
+                                          <p:stCondLst>
+                                            <p:cond delay="0"/>
+                                          </p:stCondLst>
+                                        </p:cTn>
+                                        <p:tgtEl>
+                                          <p:spTgt spid="3">
+                                            <p:txEl>
+                                              <p:pRg st="4" end="4"/>
+                                            </p:txEl>
+                                          </p:spTgt>
+                                        </p:tgtEl>
+                                        <p:attrNameLst>
+                                          <p:attrName>style.visibility</p:attrName>
+                                        </p:attrNameLst>
+                                      </p:cBhvr>
+                                      <p:to>
+                                        <p:strVal val="visible"/>
+                                      </p:to>
+                                    </p:set>
+                                  </p:childTnLst>
+                                </p:cTn>
+                              </p:par>
+                              <p:par>
+                                <p:cTn id="13" presetID="1" presetClass="entr" presetSubtype="0" fill="hold" nodeType="withEffect">
+                                  <p:stCondLst>
+                                    <p:cond delay="0"/>
+                                  </p:stCondLst>
+                                  <p:childTnLst>
+                                    <p:set>
+                                      <p:cBhvr>
+                                        <p:cTn id="14" dur="1" fill="hold">
+                                          <p:stCondLst>
+                                            <p:cond delay="0"/>
+                                          </p:stCondLst>
+                                        </p:cTn>
+                                        <p:tgtEl>
+                                          <p:spTgt spid="3">
+                                            <p:txEl>
+                                              <p:pRg st="5" end="5"/>
+                                            </p:txEl>
+                                          </p:spTgt>
+                                        </p:tgtEl>
+                                        <p:attrNameLst>
+                                          <p:attrName>style.visibility</p:attrName>
+                                        </p:attrNameLst>
+                                      </p:cBhvr>
+                                      <p:to>
+                                        <p:strVal val="visible"/>
+                                      </p:to>
+                                    </p:set>
+                                  </p:childTnLst>
+                                </p:cTn>
+                              </p:par>
+                              <p:par>
+                                <p:cTn id="15" presetID="1" presetClass="entr" presetSubtype="0" fill="hold" nodeType="withEffect">
+                                  <p:stCondLst>
+                                    <p:cond delay="0"/>
+                                  </p:stCondLst>
+                                  <p:childTnLst>
+                                    <p:set>
+                                      <p:cBhvr>
+                                        <p:cTn id="16" dur="1" fill="hold">
+                                          <p:stCondLst>
+                                            <p:cond delay="0"/>
+                                          </p:stCondLst>
+                                        </p:cTn>
+                                        <p:tgtEl>
+                                          <p:spTgt spid="3">
+                                            <p:txEl>
+                                              <p:pRg st="6" end="6"/>
+                                            </p:txEl>
+                                          </p:spTgt>
+                                        </p:tgtEl>
+                                        <p:attrNameLst>
+                                          <p:attrName>style.visibility</p:attrName>
+                                        </p:attrNameLst>
+                                      </p:cBhvr>
+                                      <p:to>
+                                        <p:strVal val="visible"/>
+                                      </p:to>
+                                    </p:set>
+                                  </p:childTnLst>
+                                </p:cTn>
+                              </p:par>
+                            </p:childTnLst>
+                          </p:cTn>
+                        </p:par>
+                      </p:childTnLst>
+                    </p:cTn>
+                  </p:par>
+                  <p:par>
+                    <p:cTn id="17" fill="hold">
+                      <p:stCondLst>
+                        <p:cond delay="indefinite"/>
+                      </p:stCondLst>
+                      <p:childTnLst>
+                        <p:par>
+                          <p:cTn id="18" fill="hold">
+                            <p:stCondLst>
+                              <p:cond delay="0"/>
+                            </p:stCondLst>
+                            <p:childTnLst>
+                              <p:par>
+                                <p:cTn id="19" presetID="1" presetClass="entr" presetSubtype="0" fill="hold" nodeType="clickEffect">
+                                  <p:stCondLst>
+                                    <p:cond delay="0"/>
+                                  </p:stCondLst>
+                                  <p:childTnLst>
+                                    <p:set>
+                                      <p:cBhvr>
+                                        <p:cTn id="20" dur="1" fill="hold">
+                                          <p:stCondLst>
+                                            <p:cond delay="0"/>
+                                          </p:stCondLst>
+                                        </p:cTn>
+                                        <p:tgtEl>
+                                          <p:spTgt spid="3">
+                                            <p:txEl>
+                                              <p:pRg st="7" end="7"/>
+                                            </p:txEl>
+                                          </p:spTgt>
+                                        </p:tgtEl>
+                                        <p:attrNameLst>
+                                          <p:attrName>style.visibility</p:attrName>
+                                        </p:attrNameLst>
+                                      </p:cBhvr>
+                                      <p:to>
+                                        <p:strVal val="visible"/>
+                                      </p:to>
+                                    </p:set>
+                                  </p:childTnLst>
+                                </p:cTn>
+                              </p:par>
+                              <p:par>
+                                <p:cTn id="21" presetID="1" presetClass="entr" presetSubtype="0" fill="hold" nodeType="withEffect">
+                                  <p:stCondLst>
+                                    <p:cond delay="0"/>
+                                  </p:stCondLst>
+                                  <p:childTnLst>
+                                    <p:set>
+                                      <p:cBhvr>
+                                        <p:cTn id="22" dur="1" fill="hold">
+                                          <p:stCondLst>
+                                            <p:cond delay="0"/>
+                                          </p:stCondLst>
+                                        </p:cTn>
+                                        <p:tgtEl>
+                                          <p:spTgt spid="3">
+                                            <p:txEl>
+                                              <p:pRg st="8" end="8"/>
+                                            </p:txEl>
+                                          </p:spTgt>
+                                        </p:tgtEl>
+                                        <p:attrNameLst>
+                                          <p:attrName>style.visibility</p:attrName>
+                                        </p:attrNameLst>
+                                      </p:cBhvr>
+                                      <p:to>
+                                        <p:strVal val="visible"/>
+                                      </p:to>
+                                    </p:set>
+                                  </p:childTnLst>
+                                </p:cTn>
+                              </p:par>
+                            </p:childTnLst>
+                          </p:cTn>
+                        </p:par>
+                      </p:childTnLst>
+                    </p:cTn>
+                  </p:par>
+                </p:childTnLst>
+              </p:cTn>
+              <p:prevCondLst>
+                <p:cond evt="onPrev" delay="0">
+                  <p:tgtEl>
+                    <p:sldTgt/>
+                  </p:tgtEl>
+                </p:cond>
+              </p:prevCondLst>
+              <p:nextCondLst>
+                <p:cond evt="onNext" delay="0">
+                  <p:tgtEl>
+                    <p:sldTgt/>
+                  </p:tgtEl>
+                </p:cond>
+              </p:nextCondLst>
+            </p:seq>
+          </p:childTnLst>
+        </p:cTn>
+      </p:par>
+    </p:tnLst>
+  </p:timing>
+</p:sld>
+</file>
+
+<file path=ppt/slides/slide5.xml><?xml version="1.0" encoding="utf-8"?>
+<p:sld xmlns:a="http://schemas.openxmlformats.org/drawingml/2006/main" xmlns:r="http://schemas.openxmlformats.org/officeDocument/2006/relationships" xmlns:p="http://schemas.openxmlformats.org/presentationml/2006/main">
+  <p:cSld>
+    <p:spTree>
+      <p:nvGrpSpPr>
+        <p:cNvPr id="1" name=""/>
+        <p:cNvGrpSpPr/>
+        <p:nvPr/>
+      </p:nvGrpSpPr>
+      <p:grpSpPr>
+        <a:xfrm>
+          <a:off x="0" y="0"/>
+          <a:ext cx="0" cy="0"/>
+          <a:chOff x="0" y="0"/>
+          <a:chExt cx="0" cy="0"/>
+        </a:xfrm>
+      </p:grpSpPr>
+      <p:sp>
+        <p:nvSpPr>
+          <p:cNvPr id="3" name="Content Placeholder 2">
+            <a:extLst>
+              <a:ext uri="{FF2B5EF4-FFF2-40B4-BE49-F238E27FC236}">
+                <a16:creationId xmlns:a16="http://schemas.microsoft.com/office/drawing/2014/main" id="{258E6AF3-7615-4BD1-878E-A94C93E98F90}"/>
+              </a:ext>
+            </a:extLst>
+          </p:cNvPr>
+          <p:cNvSpPr>
+            <a:spLocks noGrp="1"/>
+          </p:cNvSpPr>
+          <p:nvPr>
+            <p:ph idx="1"/>
+          </p:nvPr>
+        </p:nvSpPr>
+        <p:spPr>
+          <a:xfrm>
+            <a:off x="838200" y="1217458"/>
+            <a:ext cx="10515600" cy="5640542"/>
+          </a:xfrm>
+        </p:spPr>
+        <p:txBody>
+          <a:bodyPr>
+            <a:normAutofit fontScale="92500" lnSpcReduction="10000"/>
+          </a:bodyPr>
+          <a:lstStyle/>
+          <a:p>
+            <a:pPr marL="0" indent="0">
+              <a:buNone/>
+            </a:pPr>
+            <a:r>
+              <a:rPr lang="en-US" sz="3200" dirty="0"/>
+              <a:t>What is the KDD process?   </a:t>
+            </a:r>
+          </a:p>
+          <a:p>
+            <a:pPr marL="0" indent="0">
+              <a:buNone/>
+            </a:pPr>
+            <a:endParaRPr lang="en-US" dirty="0"/>
+          </a:p>
+          <a:p>
+            <a:pPr marL="0" indent="0">
+              <a:buNone/>
+            </a:pPr>
+            <a:endParaRPr lang="en-US" dirty="0"/>
+          </a:p>
+          <a:p>
+            <a:pPr marL="0" indent="0">
+              <a:buNone/>
+            </a:pPr>
+            <a:endParaRPr lang="en-US" dirty="0"/>
+          </a:p>
+          <a:p>
+            <a:pPr marL="0" indent="0">
+              <a:buNone/>
+            </a:pPr>
+            <a:endParaRPr lang="en-US" dirty="0"/>
+          </a:p>
+          <a:p>
+            <a:pPr marL="0" indent="0">
+              <a:buNone/>
+            </a:pPr>
+            <a:endParaRPr lang="en-US" dirty="0"/>
+          </a:p>
+          <a:p>
+            <a:pPr marL="0" indent="0">
+              <a:buNone/>
+            </a:pPr>
+            <a:endParaRPr lang="en-US" dirty="0"/>
+          </a:p>
+          <a:p>
+            <a:pPr marL="0" indent="0">
+              <a:buNone/>
+            </a:pPr>
+            <a:endParaRPr lang="en-US" dirty="0"/>
+          </a:p>
+          <a:p>
+            <a:pPr marL="0" indent="0">
+              <a:buNone/>
+            </a:pPr>
+            <a:endParaRPr lang="en-US" dirty="0">
+              <a:solidFill>
+                <a:schemeClr val="accent1"/>
+              </a:solidFill>
+            </a:endParaRPr>
+          </a:p>
+          <a:p>
+            <a:pPr marL="0" indent="0">
+              <a:buNone/>
+            </a:pPr>
+            <a:endParaRPr lang="en-US" dirty="0">
+              <a:solidFill>
+                <a:schemeClr val="accent1"/>
+              </a:solidFill>
+            </a:endParaRPr>
+          </a:p>
+          <a:p>
+            <a:pPr marL="0" indent="0">
+              <a:buNone/>
+            </a:pPr>
+            <a:endParaRPr lang="en-US" dirty="0">
+              <a:solidFill>
+                <a:schemeClr val="accent1"/>
+              </a:solidFill>
+            </a:endParaRPr>
+          </a:p>
+          <a:p>
+            <a:pPr marL="0" indent="0">
+              <a:buNone/>
+            </a:pPr>
+            <a:r>
+              <a:rPr lang="en-US" dirty="0">
+                <a:solidFill>
+                  <a:schemeClr val="accent1"/>
+                </a:solidFill>
+              </a:rPr>
+              <a:t>Is this old diagram representative?  - e.g. Fayyad et.al. 1996 </a:t>
+            </a:r>
+          </a:p>
+        </p:txBody>
+      </p:sp>
+      <p:sp>
+        <p:nvSpPr>
+          <p:cNvPr id="6" name="Title 1">
+            <a:extLst>
+              <a:ext uri="{FF2B5EF4-FFF2-40B4-BE49-F238E27FC236}">
+                <a16:creationId xmlns:a16="http://schemas.microsoft.com/office/drawing/2014/main" id="{CD29F70F-B868-451B-A65D-8721F4C7A2D9}"/>
+              </a:ext>
+            </a:extLst>
+          </p:cNvPr>
+          <p:cNvSpPr txBox="1">
+            <a:spLocks/>
+          </p:cNvSpPr>
+          <p:nvPr/>
+        </p:nvSpPr>
+        <p:spPr>
+          <a:xfrm>
+            <a:off x="838200" y="-635"/>
+            <a:ext cx="10515600" cy="1325563"/>
+          </a:xfrm>
+          <a:prstGeom prst="rect">
+            <a:avLst/>
+          </a:prstGeom>
+        </p:spPr>
+        <p:txBody>
+          <a:bodyPr vert="horz" lIns="91440" tIns="45720" rIns="91440" bIns="45720" rtlCol="0" anchor="ctr">
+            <a:normAutofit/>
+          </a:bodyPr>
+          <a:lstStyle>
+            <a:lvl1pPr algn="l" defTabSz="914400" rtl="0" eaLnBrk="1" latinLnBrk="0" hangingPunct="1">
+              <a:lnSpc>
+                <a:spcPct val="90000"/>
+              </a:lnSpc>
+              <a:spcBef>
+                <a:spcPct val="0"/>
+              </a:spcBef>
+              <a:buNone/>
+              <a:defRPr sz="4400" kern="1200">
+                <a:solidFill>
+                  <a:schemeClr val="tx1"/>
+                </a:solidFill>
+                <a:latin typeface="+mj-lt"/>
+                <a:ea typeface="+mj-ea"/>
+                <a:cs typeface="+mj-cs"/>
+              </a:defRPr>
+            </a:lvl1pPr>
+          </a:lstStyle>
+          <a:p>
+            <a:r>
+              <a:rPr lang="en-US" dirty="0">
+                <a:latin typeface="+mn-lt"/>
+              </a:rPr>
+              <a:t>KDD process</a:t>
+            </a:r>
+          </a:p>
+        </p:txBody>
+      </p:sp>
+      <p:pic>
+        <p:nvPicPr>
+          <p:cNvPr id="4" name="Picture 3">
+            <a:extLst>
+              <a:ext uri="{FF2B5EF4-FFF2-40B4-BE49-F238E27FC236}">
+                <a16:creationId xmlns:a16="http://schemas.microsoft.com/office/drawing/2014/main" id="{41A10601-345E-4A04-878A-28FFF71506B5}"/>
+              </a:ext>
+            </a:extLst>
+          </p:cNvPr>
+          <p:cNvPicPr>
+            <a:picLocks noChangeAspect="1"/>
+          </p:cNvPicPr>
+          <p:nvPr/>
+        </p:nvPicPr>
+        <p:blipFill>
+          <a:blip r:embed="rId2"/>
+          <a:stretch>
+            <a:fillRect/>
+          </a:stretch>
+        </p:blipFill>
+        <p:spPr>
+          <a:xfrm>
+            <a:off x="951375" y="1651145"/>
+            <a:ext cx="8488232" cy="4404795"/>
+          </a:xfrm>
+          <a:prstGeom prst="rect">
+            <a:avLst/>
+          </a:prstGeom>
+        </p:spPr>
+      </p:pic>
+    </p:spTree>
+    <p:extLst>
+      <p:ext uri="{BB962C8B-B14F-4D97-AF65-F5344CB8AC3E}">
+        <p14:creationId xmlns:p14="http://schemas.microsoft.com/office/powerpoint/2010/main" val="2011350768"/>
+      </p:ext>
+    </p:extLst>
+  </p:cSld>
+  <p:clrMapOvr>
+    <a:masterClrMapping/>
+  </p:clrMapOvr>
+  <p:timing>
+    <p:tnLst>
+      <p:par>
+        <p:cTn id="1" dur="indefinite" restart="never" nodeType="tmRoot">
+          <p:childTnLst>
+            <p:seq concurrent="1" nextAc="seek">
+              <p:cTn id="2" dur="indefinite" nodeType="mainSeq">
+                <p:childTnLst>
+                  <p:par>
+                    <p:cTn id="3" fill="hold">
+                      <p:stCondLst>
+                        <p:cond delay="indefinite"/>
+                      </p:stCondLst>
+                      <p:childTnLst>
+                        <p:par>
+                          <p:cTn id="4" fill="hold">
+                            <p:stCondLst>
+                              <p:cond delay="0"/>
+                            </p:stCondLst>
+                            <p:childTnLst>
+                              <p:par>
+                                <p:cTn id="5" presetID="1" presetClass="entr" presetSubtype="0" fill="hold" nodeType="clickEffect">
+                                  <p:stCondLst>
+                                    <p:cond delay="0"/>
+                                  </p:stCondLst>
+                                  <p:childTnLst>
+                                    <p:set>
+                                      <p:cBhvr>
+                                        <p:cTn id="6" dur="1" fill="hold">
+                                          <p:stCondLst>
+                                            <p:cond delay="0"/>
+                                          </p:stCondLst>
+                                        </p:cTn>
+                                        <p:tgtEl>
+                                          <p:spTgt spid="3">
+                                            <p:txEl>
+                                              <p:pRg st="0" end="0"/>
+                                            </p:txEl>
+                                          </p:spTgt>
+                                        </p:tgtEl>
+                                        <p:attrNameLst>
+                                          <p:attrName>style.visibility</p:attrName>
+                                        </p:attrNameLst>
+                                      </p:cBhvr>
+                                      <p:to>
+                                        <p:strVal val="visible"/>
+                                      </p:to>
+                                    </p:set>
+                                  </p:childTnLst>
+                                </p:cTn>
+                              </p:par>
+                            </p:childTnLst>
+                          </p:cTn>
+                        </p:par>
+                      </p:childTnLst>
+                    </p:cTn>
+                  </p:par>
+                  <p:par>
+                    <p:cTn id="7" fill="hold">
+                      <p:stCondLst>
+                        <p:cond delay="indefinite"/>
+                      </p:stCondLst>
+                      <p:childTnLst>
+                        <p:par>
+                          <p:cTn id="8" fill="hold">
+                            <p:stCondLst>
+                              <p:cond delay="0"/>
+                            </p:stCondLst>
+                            <p:childTnLst>
+                              <p:par>
+                                <p:cTn id="9" presetID="1" presetClass="entr" presetSubtype="0" fill="hold" nodeType="clickEffect">
+                                  <p:stCondLst>
+                                    <p:cond delay="0"/>
+                                  </p:stCondLst>
+                                  <p:childTnLst>
+                                    <p:set>
+                                      <p:cBhvr>
+                                        <p:cTn id="10" dur="1" fill="hold">
+                                          <p:stCondLst>
+                                            <p:cond delay="0"/>
+                                          </p:stCondLst>
+                                        </p:cTn>
+                                        <p:tgtEl>
+                                          <p:spTgt spid="3">
+                                            <p:txEl>
+                                              <p:pRg st="11" end="11"/>
+                                            </p:txEl>
+                                          </p:spTgt>
+                                        </p:tgtEl>
+                                        <p:attrNameLst>
+                                          <p:attrName>style.visibility</p:attrName>
+                                        </p:attrNameLst>
+                                      </p:cBhvr>
+                                      <p:to>
+                                        <p:strVal val="visible"/>
+                                      </p:to>
+                                    </p:set>
+                                  </p:childTnLst>
+                                </p:cTn>
+                              </p:par>
+                              <p:par>
+                                <p:cTn id="11" presetID="1" presetClass="entr" presetSubtype="0" fill="hold" nodeType="withEffect">
+                                  <p:stCondLst>
+                                    <p:cond delay="0"/>
+                                  </p:stCondLst>
+                                  <p:childTnLst>
+                                    <p:set>
+                                      <p:cBhvr>
+                                        <p:cTn id="12" dur="1" fill="hold">
+                                          <p:stCondLst>
+                                            <p:cond delay="0"/>
+                                          </p:stCondLst>
+                                        </p:cTn>
+                                        <p:tgtEl>
+                                          <p:spTgt spid="4"/>
+                                        </p:tgtEl>
+                                        <p:attrNameLst>
+                                          <p:attrName>style.visibility</p:attrName>
+                                        </p:attrNameLst>
+                                      </p:cBhvr>
+                                      <p:to>
+                                        <p:strVal val="visible"/>
+                                      </p:to>
+                                    </p:set>
+                                  </p:childTnLst>
+                                </p:cTn>
+                              </p:par>
+                            </p:childTnLst>
+                          </p:cTn>
+                        </p:par>
+                      </p:childTnLst>
+                    </p:cTn>
+                  </p:par>
+                </p:childTnLst>
+              </p:cTn>
+              <p:prevCondLst>
+                <p:cond evt="onPrev" delay="0">
+                  <p:tgtEl>
+                    <p:sldTgt/>
+                  </p:tgtEl>
+                </p:cond>
+              </p:prevCondLst>
+              <p:nextCondLst>
+                <p:cond evt="onNext" delay="0">
+                  <p:tgtEl>
+                    <p:sldTgt/>
+                  </p:tgtEl>
+                </p:cond>
+              </p:nextCondLst>
+            </p:seq>
+          </p:childTnLst>
+        </p:cTn>
+      </p:par>
+    </p:tnLst>
+  </p:timing>
+</p:sld>
+</file>
+
+<file path=ppt/slides/slide50.xml><?xml version="1.0" encoding="utf-8"?>
+<p:sld xmlns:a="http://schemas.openxmlformats.org/drawingml/2006/main" xmlns:r="http://schemas.openxmlformats.org/officeDocument/2006/relationships" xmlns:p="http://schemas.openxmlformats.org/presentationml/2006/main">
+  <p:cSld>
+    <p:spTree>
+      <p:nvGrpSpPr>
+        <p:cNvPr id="1" name="">
+          <a:extLst>
+            <a:ext uri="{FF2B5EF4-FFF2-40B4-BE49-F238E27FC236}">
+              <a16:creationId xmlns:a16="http://schemas.microsoft.com/office/drawing/2014/main" id="{D75CA56C-70FE-5B2C-A831-909F1DDB9FFF}"/>
+            </a:ext>
+          </a:extLst>
+        </p:cNvPr>
+        <p:cNvGrpSpPr/>
+        <p:nvPr/>
+      </p:nvGrpSpPr>
+      <p:grpSpPr>
+        <a:xfrm>
+          <a:off x="0" y="0"/>
+          <a:ext cx="0" cy="0"/>
+          <a:chOff x="0" y="0"/>
+          <a:chExt cx="0" cy="0"/>
+        </a:xfrm>
+      </p:grpSpPr>
+      <mc:AlternateContent xmlns:mc="http://schemas.openxmlformats.org/markup-compatibility/2006">
+        <mc:Choice xmlns:a14="http://schemas.microsoft.com/office/drawing/2010/main" Requires="a14">
+          <p:sp>
+            <p:nvSpPr>
+              <p:cNvPr id="3" name="Content Placeholder 2">
+                <a:extLst>
+                  <a:ext uri="{FF2B5EF4-FFF2-40B4-BE49-F238E27FC236}">
+                    <a16:creationId xmlns:a16="http://schemas.microsoft.com/office/drawing/2014/main" id="{42B342E0-F512-00E2-2EB2-0181FBB761A5}"/>
+                  </a:ext>
+                </a:extLst>
+              </p:cNvPr>
+              <p:cNvSpPr>
+                <a:spLocks noGrp="1"/>
+              </p:cNvSpPr>
+              <p:nvPr>
+                <p:ph idx="1"/>
+              </p:nvPr>
+            </p:nvSpPr>
+            <p:spPr>
+              <a:xfrm>
+                <a:off x="838200" y="1123406"/>
+                <a:ext cx="10515600" cy="5470724"/>
+              </a:xfrm>
+            </p:spPr>
+            <p:txBody>
+              <a:bodyPr>
+                <a:normAutofit/>
+              </a:bodyPr>
+              <a:lstStyle/>
+              <a:p>
+                <a:pPr marL="0" indent="0">
+                  <a:buNone/>
+                </a:pPr>
+                <a:r>
+                  <a:rPr lang="en-US" dirty="0"/>
+                  <a:t>What are the properties of a good hash function?  </a:t>
+                </a:r>
+              </a:p>
+              <a:p>
+                <a:r>
+                  <a:rPr lang="en-US" dirty="0"/>
+                  <a:t>For a uniformly distributed hash function the probability of a hash collision with </a:t>
+                </a:r>
+                <a14:m>
+                  <m:oMath xmlns:m="http://schemas.openxmlformats.org/officeDocument/2006/math">
+                    <m:r>
+                      <a:rPr lang="en-US" i="1">
+                        <a:latin typeface="Cambria Math" panose="02040503050406030204" pitchFamily="18" charset="0"/>
+                        <a:ea typeface="Cambria Math" panose="02040503050406030204" pitchFamily="18" charset="0"/>
+                      </a:rPr>
+                      <m:t>𝑛</m:t>
+                    </m:r>
+                  </m:oMath>
+                </a14:m>
+                <a:r>
+                  <a:rPr lang="en-US" dirty="0"/>
+                  <a:t> elements filled in the table, </a:t>
+                </a:r>
+                <a14:m>
+                  <m:oMath xmlns:m="http://schemas.openxmlformats.org/officeDocument/2006/math">
+                    <m:r>
+                      <a:rPr lang="en-US" i="1">
+                        <a:latin typeface="Cambria Math" panose="02040503050406030204" pitchFamily="18" charset="0"/>
+                        <a:ea typeface="Cambria Math" panose="02040503050406030204" pitchFamily="18" charset="0"/>
+                      </a:rPr>
+                      <m:t>𝛼</m:t>
+                    </m:r>
+                  </m:oMath>
+                </a14:m>
+                <a:r>
+                  <a:rPr lang="en-US" dirty="0"/>
+                  <a:t>    </a:t>
+                </a:r>
+              </a:p>
+              <a:p>
+                <a:pPr marL="0" indent="0">
+                  <a:buNone/>
+                </a:pPr>
+                <a14:m>
+                  <m:oMathPara xmlns:m="http://schemas.openxmlformats.org/officeDocument/2006/math">
+                    <m:oMathParaPr>
+                      <m:jc m:val="centerGroup"/>
+                    </m:oMathParaPr>
+                    <m:oMath xmlns:m="http://schemas.openxmlformats.org/officeDocument/2006/math">
+                      <m:r>
+                        <a:rPr lang="en-US" i="1">
+                          <a:latin typeface="Cambria Math" panose="02040503050406030204" pitchFamily="18" charset="0"/>
+                        </a:rPr>
+                        <m:t>𝑃</m:t>
+                      </m:r>
+                      <m:d>
+                        <m:dPr>
+                          <m:ctrlPr>
+                            <a:rPr lang="en-US" i="1">
+                              <a:latin typeface="Cambria Math" panose="02040503050406030204" pitchFamily="18" charset="0"/>
+                            </a:rPr>
+                          </m:ctrlPr>
+                        </m:dPr>
+                        <m:e>
+                          <m:r>
+                            <a:rPr lang="en-US" i="1">
+                              <a:latin typeface="Cambria Math" panose="02040503050406030204" pitchFamily="18" charset="0"/>
+                            </a:rPr>
+                            <m:t>𝑚</m:t>
+                          </m:r>
+                          <m:r>
+                            <a:rPr lang="en-US" i="1">
+                              <a:latin typeface="Cambria Math" panose="02040503050406030204" pitchFamily="18" charset="0"/>
+                            </a:rPr>
+                            <m:t>,</m:t>
+                          </m:r>
+                          <m:r>
+                            <a:rPr lang="en-US" i="1">
+                              <a:latin typeface="Cambria Math" panose="02040503050406030204" pitchFamily="18" charset="0"/>
+                            </a:rPr>
+                            <m:t>𝑛</m:t>
+                          </m:r>
+                        </m:e>
+                      </m:d>
+                      <m:r>
+                        <a:rPr lang="en-US" i="1">
+                          <a:latin typeface="Cambria Math" panose="02040503050406030204" pitchFamily="18" charset="0"/>
+                        </a:rPr>
+                        <m:t>=</m:t>
+                      </m:r>
+                      <m:r>
+                        <a:rPr lang="en-US" i="1">
+                          <a:latin typeface="Cambria Math" panose="02040503050406030204" pitchFamily="18" charset="0"/>
+                          <a:ea typeface="Cambria Math" panose="02040503050406030204" pitchFamily="18" charset="0"/>
+                        </a:rPr>
+                        <m:t>𝛼</m:t>
+                      </m:r>
+                      <m:r>
+                        <a:rPr lang="en-US" i="1">
+                          <a:latin typeface="Cambria Math" panose="02040503050406030204" pitchFamily="18" charset="0"/>
+                          <a:ea typeface="Cambria Math" panose="02040503050406030204" pitchFamily="18" charset="0"/>
+                        </a:rPr>
+                        <m:t>=</m:t>
+                      </m:r>
+                      <m:f>
+                        <m:fPr>
+                          <m:ctrlPr>
+                            <a:rPr lang="en-US" i="1">
+                              <a:latin typeface="Cambria Math" panose="02040503050406030204" pitchFamily="18" charset="0"/>
+                            </a:rPr>
+                          </m:ctrlPr>
+                        </m:fPr>
+                        <m:num>
+                          <m:r>
+                            <a:rPr lang="en-US" i="1">
+                              <a:latin typeface="Cambria Math" panose="02040503050406030204" pitchFamily="18" charset="0"/>
+                            </a:rPr>
+                            <m:t>𝑛</m:t>
+                          </m:r>
+                        </m:num>
+                        <m:den>
+                          <m:r>
+                            <a:rPr lang="en-US" i="1">
+                              <a:latin typeface="Cambria Math" panose="02040503050406030204" pitchFamily="18" charset="0"/>
+                            </a:rPr>
+                            <m:t>𝑚</m:t>
+                          </m:r>
+                        </m:den>
+                      </m:f>
+                    </m:oMath>
+                  </m:oMathPara>
+                </a14:m>
+                <a:endParaRPr lang="en-US" dirty="0"/>
+              </a:p>
+              <a:p>
+                <a:r>
+                  <a:rPr lang="en-US" dirty="0"/>
+                  <a:t>Given table utilization, </a:t>
+                </a:r>
+                <a14:m>
+                  <m:oMath xmlns:m="http://schemas.openxmlformats.org/officeDocument/2006/math">
+                    <m:r>
+                      <a:rPr lang="en-US" i="1" smtClean="0">
+                        <a:latin typeface="Cambria Math" panose="02040503050406030204" pitchFamily="18" charset="0"/>
+                        <a:ea typeface="Cambria Math" panose="02040503050406030204" pitchFamily="18" charset="0"/>
+                      </a:rPr>
+                      <m:t>𝛼</m:t>
+                    </m:r>
+                    <m:r>
+                      <a:rPr lang="en-US" b="0" i="1" smtClean="0">
+                        <a:latin typeface="Cambria Math" panose="02040503050406030204" pitchFamily="18" charset="0"/>
+                        <a:ea typeface="Cambria Math" panose="02040503050406030204" pitchFamily="18" charset="0"/>
+                      </a:rPr>
+                      <m:t>=</m:t>
+                    </m:r>
+                    <m:r>
+                      <a:rPr lang="en-US" b="0" i="1" smtClean="0">
+                        <a:latin typeface="Cambria Math" panose="02040503050406030204" pitchFamily="18" charset="0"/>
+                        <a:ea typeface="Cambria Math" panose="02040503050406030204" pitchFamily="18" charset="0"/>
+                      </a:rPr>
+                      <m:t>𝑛</m:t>
+                    </m:r>
+                    <m:r>
+                      <a:rPr lang="en-US" b="0" i="1" smtClean="0">
+                        <a:latin typeface="Cambria Math" panose="02040503050406030204" pitchFamily="18" charset="0"/>
+                        <a:ea typeface="Cambria Math" panose="02040503050406030204" pitchFamily="18" charset="0"/>
+                      </a:rPr>
+                      <m:t>/</m:t>
+                    </m:r>
+                    <m:r>
+                      <a:rPr lang="en-US" b="0" i="1" smtClean="0">
+                        <a:latin typeface="Cambria Math" panose="02040503050406030204" pitchFamily="18" charset="0"/>
+                        <a:ea typeface="Cambria Math" panose="02040503050406030204" pitchFamily="18" charset="0"/>
+                      </a:rPr>
+                      <m:t>𝑚</m:t>
+                    </m:r>
+                  </m:oMath>
+                </a14:m>
+                <a:r>
+                  <a:rPr lang="en-US" dirty="0"/>
+                  <a:t>, the number of probes required to find an open bucket is   </a:t>
+                </a:r>
+              </a:p>
+              <a:p>
+                <a:pPr marL="0" indent="0">
+                  <a:buNone/>
+                </a:pPr>
+                <a14:m>
+                  <m:oMathPara xmlns:m="http://schemas.openxmlformats.org/officeDocument/2006/math">
+                    <m:oMathParaPr>
+                      <m:jc m:val="centerGroup"/>
+                    </m:oMathParaPr>
+                    <m:oMath xmlns:m="http://schemas.openxmlformats.org/officeDocument/2006/math">
+                      <m:sSub>
+                        <m:sSubPr>
+                          <m:ctrlPr>
+                            <a:rPr lang="en-US" i="1" smtClean="0">
+                              <a:latin typeface="Cambria Math" panose="02040503050406030204" pitchFamily="18" charset="0"/>
+                              <a:ea typeface="Cambria Math" panose="02040503050406030204" pitchFamily="18" charset="0"/>
+                            </a:rPr>
+                          </m:ctrlPr>
+                        </m:sSubPr>
+                        <m:e>
+                          <m:r>
+                            <a:rPr lang="en-US" b="0" i="1" smtClean="0">
+                              <a:latin typeface="Cambria Math" panose="02040503050406030204" pitchFamily="18" charset="0"/>
+                              <a:ea typeface="Cambria Math" panose="02040503050406030204" pitchFamily="18" charset="0"/>
+                            </a:rPr>
+                            <m:t>𝑁</m:t>
+                          </m:r>
+                        </m:e>
+                        <m:sub>
+                          <m:r>
+                            <a:rPr lang="en-US" b="0" i="1" smtClean="0">
+                              <a:latin typeface="Cambria Math" panose="02040503050406030204" pitchFamily="18" charset="0"/>
+                              <a:ea typeface="Cambria Math" panose="02040503050406030204" pitchFamily="18" charset="0"/>
+                            </a:rPr>
+                            <m:t>𝑝𝑟𝑜𝑏𝑠</m:t>
+                          </m:r>
+                        </m:sub>
+                      </m:sSub>
+                      <m:r>
+                        <a:rPr lang="en-US" i="1" smtClean="0">
+                          <a:latin typeface="Cambria Math" panose="02040503050406030204" pitchFamily="18" charset="0"/>
+                          <a:ea typeface="Cambria Math" panose="02040503050406030204" pitchFamily="18" charset="0"/>
+                        </a:rPr>
+                        <m:t>≈</m:t>
+                      </m:r>
+                      <m:r>
+                        <a:rPr lang="en-US" i="1" smtClean="0">
+                          <a:latin typeface="Cambria Math" panose="02040503050406030204" pitchFamily="18" charset="0"/>
+                          <a:ea typeface="Cambria Math" panose="02040503050406030204" pitchFamily="18" charset="0"/>
+                        </a:rPr>
+                        <m:t>1</m:t>
+                      </m:r>
+                      <m:r>
+                        <a:rPr lang="en-US" b="0" i="1" smtClean="0">
+                          <a:latin typeface="Cambria Math" panose="02040503050406030204" pitchFamily="18" charset="0"/>
+                          <a:ea typeface="Cambria Math" panose="02040503050406030204" pitchFamily="18" charset="0"/>
+                        </a:rPr>
+                        <m:t>+</m:t>
+                      </m:r>
+                      <m:f>
+                        <m:fPr>
+                          <m:ctrlPr>
+                            <a:rPr lang="en-US" i="1">
+                              <a:latin typeface="Cambria Math" panose="02040503050406030204" pitchFamily="18" charset="0"/>
+                            </a:rPr>
+                          </m:ctrlPr>
+                        </m:fPr>
+                        <m:num>
+                          <m:r>
+                            <a:rPr lang="en-US" b="0" i="1" smtClean="0">
+                              <a:latin typeface="Cambria Math" panose="02040503050406030204" pitchFamily="18" charset="0"/>
+                            </a:rPr>
+                            <m:t>1</m:t>
+                          </m:r>
+                        </m:num>
+                        <m:den>
+                          <m:r>
+                            <a:rPr lang="en-US" b="0" i="1" smtClean="0">
+                              <a:latin typeface="Cambria Math" panose="02040503050406030204" pitchFamily="18" charset="0"/>
+                            </a:rPr>
+                            <m:t>2</m:t>
+                          </m:r>
+                        </m:den>
+                      </m:f>
+                      <m:d>
+                        <m:dPr>
+                          <m:ctrlPr>
+                            <a:rPr lang="en-US" i="1" smtClean="0">
+                              <a:latin typeface="Cambria Math" panose="02040503050406030204" pitchFamily="18" charset="0"/>
+                            </a:rPr>
+                          </m:ctrlPr>
+                        </m:dPr>
+                        <m:e>
+                          <m:f>
+                            <m:fPr>
+                              <m:ctrlPr>
+                                <a:rPr lang="en-US" i="1" smtClean="0">
+                                  <a:latin typeface="Cambria Math" panose="02040503050406030204" pitchFamily="18" charset="0"/>
+                                </a:rPr>
+                              </m:ctrlPr>
+                            </m:fPr>
+                            <m:num>
+                              <m:r>
+                                <a:rPr lang="en-US" i="1">
+                                  <a:latin typeface="Cambria Math" panose="02040503050406030204" pitchFamily="18" charset="0"/>
+                                  <a:ea typeface="Cambria Math" panose="02040503050406030204" pitchFamily="18" charset="0"/>
+                                </a:rPr>
+                                <m:t>𝛼</m:t>
+                              </m:r>
+                            </m:num>
+                            <m:den>
+                              <m:r>
+                                <a:rPr lang="en-US" b="0" i="1" smtClean="0">
+                                  <a:latin typeface="Cambria Math" panose="02040503050406030204" pitchFamily="18" charset="0"/>
+                                </a:rPr>
+                                <m:t>1−</m:t>
+                              </m:r>
+                              <m:r>
+                                <a:rPr lang="en-US" i="1">
+                                  <a:latin typeface="Cambria Math" panose="02040503050406030204" pitchFamily="18" charset="0"/>
+                                  <a:ea typeface="Cambria Math" panose="02040503050406030204" pitchFamily="18" charset="0"/>
+                                </a:rPr>
+                                <m:t>𝛼</m:t>
+                              </m:r>
+                            </m:den>
+                          </m:f>
+                        </m:e>
+                      </m:d>
+                    </m:oMath>
+                  </m:oMathPara>
+                </a14:m>
+                <a:endParaRPr lang="en-US" dirty="0"/>
+              </a:p>
+              <a:p>
+                <a:pPr marL="457200" lvl="1" indent="0">
+                  <a:buNone/>
+                </a:pPr>
+                <a:endParaRPr lang="en-US" dirty="0"/>
+              </a:p>
+            </p:txBody>
+          </p:sp>
+        </mc:Choice>
+        <mc:Fallback>
+          <p:sp>
+            <p:nvSpPr>
+              <p:cNvPr id="3" name="Content Placeholder 2">
+                <a:extLst>
+                  <a:ext uri="{FF2B5EF4-FFF2-40B4-BE49-F238E27FC236}">
+                    <a16:creationId xmlns:a16="http://schemas.microsoft.com/office/drawing/2014/main" id="{42B342E0-F512-00E2-2EB2-0181FBB761A5}"/>
+                  </a:ext>
+                </a:extLst>
+              </p:cNvPr>
+              <p:cNvSpPr>
+                <a:spLocks noGrp="1" noRot="1" noChangeAspect="1" noMove="1" noResize="1" noEditPoints="1" noAdjustHandles="1" noChangeArrowheads="1" noChangeShapeType="1" noTextEdit="1"/>
+              </p:cNvSpPr>
+              <p:nvPr>
+                <p:ph idx="1"/>
+              </p:nvPr>
+            </p:nvSpPr>
+            <p:spPr>
+              <a:xfrm>
+                <a:off x="838200" y="1123406"/>
+                <a:ext cx="10515600" cy="5470724"/>
+              </a:xfrm>
+              <a:blipFill>
+                <a:blip r:embed="rId2"/>
+                <a:stretch>
+                  <a:fillRect l="-1217" t="-1782"/>
+                </a:stretch>
+              </a:blipFill>
+            </p:spPr>
+            <p:txBody>
+              <a:bodyPr/>
+              <a:lstStyle/>
+              <a:p>
+                <a:r>
+                  <a:rPr lang="en-US">
+                    <a:noFill/>
+                  </a:rPr>
+                  <a:t> </a:t>
+                </a:r>
+              </a:p>
+            </p:txBody>
+          </p:sp>
+        </mc:Fallback>
+      </mc:AlternateContent>
+      <p:sp>
+        <p:nvSpPr>
+          <p:cNvPr id="6" name="Title 1">
+            <a:extLst>
+              <a:ext uri="{FF2B5EF4-FFF2-40B4-BE49-F238E27FC236}">
+                <a16:creationId xmlns:a16="http://schemas.microsoft.com/office/drawing/2014/main" id="{6CA76E0F-11D1-BAC3-B65E-D210BD3050AB}"/>
+              </a:ext>
+            </a:extLst>
+          </p:cNvPr>
+          <p:cNvSpPr txBox="1">
+            <a:spLocks/>
+          </p:cNvSpPr>
+          <p:nvPr/>
+        </p:nvSpPr>
+        <p:spPr>
+          <a:xfrm>
+            <a:off x="838200" y="-635"/>
+            <a:ext cx="10515600" cy="1325563"/>
+          </a:xfrm>
+          <a:prstGeom prst="rect">
+            <a:avLst/>
+          </a:prstGeom>
+        </p:spPr>
+        <p:txBody>
+          <a:bodyPr vert="horz" lIns="91440" tIns="45720" rIns="91440" bIns="45720" rtlCol="0" anchor="ctr">
+            <a:normAutofit/>
+          </a:bodyPr>
+          <a:lstStyle>
+            <a:lvl1pPr algn="l" defTabSz="914400" rtl="0" eaLnBrk="1" latinLnBrk="0" hangingPunct="1">
+              <a:lnSpc>
+                <a:spcPct val="90000"/>
+              </a:lnSpc>
+              <a:spcBef>
+                <a:spcPct val="0"/>
+              </a:spcBef>
+              <a:buNone/>
+              <a:defRPr sz="4400" kern="1200">
+                <a:solidFill>
+                  <a:schemeClr val="tx1"/>
+                </a:solidFill>
+                <a:latin typeface="+mj-lt"/>
+                <a:ea typeface="+mj-ea"/>
+                <a:cs typeface="+mj-cs"/>
+              </a:defRPr>
+            </a:lvl1pPr>
+          </a:lstStyle>
+          <a:p>
+            <a:r>
+              <a:rPr lang="en-US" dirty="0">
+                <a:latin typeface="+mn-lt"/>
+              </a:rPr>
+              <a:t>Introduction to Hashing</a:t>
+            </a:r>
+          </a:p>
+        </p:txBody>
+      </p:sp>
+    </p:spTree>
+    <p:extLst>
+      <p:ext uri="{BB962C8B-B14F-4D97-AF65-F5344CB8AC3E}">
+        <p14:creationId xmlns:p14="http://schemas.microsoft.com/office/powerpoint/2010/main" val="395265166"/>
+      </p:ext>
+    </p:extLst>
+  </p:cSld>
+  <p:clrMapOvr>
+    <a:masterClrMapping/>
+  </p:clrMapOvr>
+  <p:timing>
+    <p:tnLst>
+      <p:par>
+        <p:cTn id="1" dur="indefinite" restart="never" nodeType="tmRoot">
+          <p:childTnLst>
+            <p:seq concurrent="1" nextAc="seek">
+              <p:cTn id="2" dur="indefinite" nodeType="mainSeq">
+                <p:childTnLst>
+                  <p:par>
+                    <p:cTn id="3" fill="hold">
+                      <p:stCondLst>
+                        <p:cond delay="indefinite"/>
+                      </p:stCondLst>
+                      <p:childTnLst>
+                        <p:par>
+                          <p:cTn id="4" fill="hold">
+                            <p:stCondLst>
+                              <p:cond delay="0"/>
+                            </p:stCondLst>
+                            <p:childTnLst>
+                              <p:par>
+                                <p:cTn id="5" presetID="1" presetClass="entr" presetSubtype="0" fill="hold" nodeType="clickEffect">
+                                  <p:stCondLst>
+                                    <p:cond delay="0"/>
+                                  </p:stCondLst>
+                                  <p:childTnLst>
+                                    <p:set>
+                                      <p:cBhvr>
+                                        <p:cTn id="6" dur="1" fill="hold">
+                                          <p:stCondLst>
+                                            <p:cond delay="0"/>
+                                          </p:stCondLst>
+                                        </p:cTn>
+                                        <p:tgtEl>
+                                          <p:spTgt spid="3">
+                                            <p:txEl>
+                                              <p:pRg st="3" end="3"/>
+                                            </p:txEl>
+                                          </p:spTgt>
+                                        </p:tgtEl>
+                                        <p:attrNameLst>
+                                          <p:attrName>style.visibility</p:attrName>
+                                        </p:attrNameLst>
+                                      </p:cBhvr>
+                                      <p:to>
+                                        <p:strVal val="visible"/>
+                                      </p:to>
+                                    </p:set>
+                                  </p:childTnLst>
+                                </p:cTn>
+                              </p:par>
+                              <p:par>
+                                <p:cTn id="7" presetID="1" presetClass="entr" presetSubtype="0" fill="hold" nodeType="withEffect">
+                                  <p:stCondLst>
+                                    <p:cond delay="0"/>
+                                  </p:stCondLst>
+                                  <p:childTnLst>
+                                    <p:set>
+                                      <p:cBhvr>
+                                        <p:cTn id="8" dur="1" fill="hold">
+                                          <p:stCondLst>
+                                            <p:cond delay="0"/>
+                                          </p:stCondLst>
+                                        </p:cTn>
+                                        <p:tgtEl>
+                                          <p:spTgt spid="3">
+                                            <p:txEl>
+                                              <p:pRg st="4" end="4"/>
+                                            </p:txEl>
+                                          </p:spTgt>
+                                        </p:tgtEl>
+                                        <p:attrNameLst>
+                                          <p:attrName>style.visibility</p:attrName>
+                                        </p:attrNameLst>
+                                      </p:cBhvr>
+                                      <p:to>
+                                        <p:strVal val="visible"/>
+                                      </p:to>
+                                    </p:set>
+                                  </p:childTnLst>
+                                </p:cTn>
+                              </p:par>
+                            </p:childTnLst>
+                          </p:cTn>
+                        </p:par>
+                      </p:childTnLst>
+                    </p:cTn>
+                  </p:par>
+                </p:childTnLst>
+              </p:cTn>
+              <p:prevCondLst>
+                <p:cond evt="onPrev" delay="0">
+                  <p:tgtEl>
+                    <p:sldTgt/>
+                  </p:tgtEl>
+                </p:cond>
+              </p:prevCondLst>
+              <p:nextCondLst>
+                <p:cond evt="onNext" delay="0">
+                  <p:tgtEl>
+                    <p:sldTgt/>
+                  </p:tgtEl>
+                </p:cond>
+              </p:nextCondLst>
+            </p:seq>
+          </p:childTnLst>
+        </p:cTn>
+      </p:par>
+    </p:tnLst>
+  </p:timing>
+</p:sld>
+</file>
+
+<file path=ppt/slides/slide51.xml><?xml version="1.0" encoding="utf-8"?>
+<p:sld xmlns:a="http://schemas.openxmlformats.org/drawingml/2006/main" xmlns:r="http://schemas.openxmlformats.org/officeDocument/2006/relationships" xmlns:p="http://schemas.openxmlformats.org/presentationml/2006/main">
+  <p:cSld>
+    <p:spTree>
+      <p:nvGrpSpPr>
+        <p:cNvPr id="1" name="">
+          <a:extLst>
+            <a:ext uri="{FF2B5EF4-FFF2-40B4-BE49-F238E27FC236}">
+              <a16:creationId xmlns:a16="http://schemas.microsoft.com/office/drawing/2014/main" id="{93027B62-95A2-A33F-3E97-DA8CBA75DEDC}"/>
+            </a:ext>
+          </a:extLst>
+        </p:cNvPr>
+        <p:cNvGrpSpPr/>
+        <p:nvPr/>
+      </p:nvGrpSpPr>
+      <p:grpSpPr>
+        <a:xfrm>
+          <a:off x="0" y="0"/>
+          <a:ext cx="0" cy="0"/>
+          <a:chOff x="0" y="0"/>
+          <a:chExt cx="0" cy="0"/>
+        </a:xfrm>
+      </p:grpSpPr>
+      <mc:AlternateContent xmlns:mc="http://schemas.openxmlformats.org/markup-compatibility/2006">
+        <mc:Choice xmlns:a14="http://schemas.microsoft.com/office/drawing/2010/main" Requires="a14">
+          <p:sp>
+            <p:nvSpPr>
+              <p:cNvPr id="3" name="Content Placeholder 2">
+                <a:extLst>
+                  <a:ext uri="{FF2B5EF4-FFF2-40B4-BE49-F238E27FC236}">
+                    <a16:creationId xmlns:a16="http://schemas.microsoft.com/office/drawing/2014/main" id="{893FE2C5-A1AE-9949-3815-87F58D10222A}"/>
+                  </a:ext>
+                </a:extLst>
+              </p:cNvPr>
+              <p:cNvSpPr>
+                <a:spLocks noGrp="1"/>
+              </p:cNvSpPr>
+              <p:nvPr>
+                <p:ph idx="1"/>
+              </p:nvPr>
+            </p:nvSpPr>
+            <p:spPr>
+              <a:xfrm>
+                <a:off x="838200" y="1123406"/>
+                <a:ext cx="4313791" cy="5470724"/>
+              </a:xfrm>
+            </p:spPr>
+            <p:txBody>
+              <a:bodyPr>
+                <a:normAutofit/>
+              </a:bodyPr>
+              <a:lstStyle/>
+              <a:p>
+                <a:pPr marL="0" indent="0">
+                  <a:buNone/>
+                </a:pPr>
+                <a:r>
+                  <a:rPr lang="en-US" dirty="0"/>
+                  <a:t>What are the properties of a good hash function?  </a:t>
+                </a:r>
+              </a:p>
+              <a:p>
+                <a:r>
+                  <a:rPr lang="en-US" dirty="0"/>
+                  <a:t>Given table utilization, </a:t>
+                </a:r>
+                <a14:m>
+                  <m:oMath xmlns:m="http://schemas.openxmlformats.org/officeDocument/2006/math">
+                    <m:r>
+                      <a:rPr lang="en-US" i="1" smtClean="0">
+                        <a:latin typeface="Cambria Math" panose="02040503050406030204" pitchFamily="18" charset="0"/>
+                        <a:ea typeface="Cambria Math" panose="02040503050406030204" pitchFamily="18" charset="0"/>
+                      </a:rPr>
+                      <m:t>𝛼</m:t>
+                    </m:r>
+                    <m:r>
+                      <a:rPr lang="en-US" b="0" i="1" smtClean="0">
+                        <a:latin typeface="Cambria Math" panose="02040503050406030204" pitchFamily="18" charset="0"/>
+                        <a:ea typeface="Cambria Math" panose="02040503050406030204" pitchFamily="18" charset="0"/>
+                      </a:rPr>
+                      <m:t>=</m:t>
+                    </m:r>
+                    <m:r>
+                      <a:rPr lang="en-US" b="0" i="1" smtClean="0">
+                        <a:latin typeface="Cambria Math" panose="02040503050406030204" pitchFamily="18" charset="0"/>
+                        <a:ea typeface="Cambria Math" panose="02040503050406030204" pitchFamily="18" charset="0"/>
+                      </a:rPr>
+                      <m:t>𝑛</m:t>
+                    </m:r>
+                    <m:r>
+                      <a:rPr lang="en-US" b="0" i="1" smtClean="0">
+                        <a:latin typeface="Cambria Math" panose="02040503050406030204" pitchFamily="18" charset="0"/>
+                        <a:ea typeface="Cambria Math" panose="02040503050406030204" pitchFamily="18" charset="0"/>
+                      </a:rPr>
+                      <m:t>/</m:t>
+                    </m:r>
+                    <m:r>
+                      <a:rPr lang="en-US" b="0" i="1" smtClean="0">
+                        <a:latin typeface="Cambria Math" panose="02040503050406030204" pitchFamily="18" charset="0"/>
+                        <a:ea typeface="Cambria Math" panose="02040503050406030204" pitchFamily="18" charset="0"/>
+                      </a:rPr>
+                      <m:t>𝑚</m:t>
+                    </m:r>
+                  </m:oMath>
+                </a14:m>
+                <a:r>
+                  <a:rPr lang="en-US" dirty="0"/>
+                  <a:t>, the number of probes required to find an open bucket is   </a:t>
+                </a:r>
+              </a:p>
+              <a:p>
+                <a:pPr marL="0" indent="0">
+                  <a:buNone/>
+                </a:pPr>
+                <a14:m>
+                  <m:oMathPara xmlns:m="http://schemas.openxmlformats.org/officeDocument/2006/math">
+                    <m:oMathParaPr>
+                      <m:jc m:val="centerGroup"/>
+                    </m:oMathParaPr>
+                    <m:oMath xmlns:m="http://schemas.openxmlformats.org/officeDocument/2006/math">
+                      <m:sSub>
+                        <m:sSubPr>
+                          <m:ctrlPr>
+                            <a:rPr lang="en-US" i="1" smtClean="0">
+                              <a:latin typeface="Cambria Math" panose="02040503050406030204" pitchFamily="18" charset="0"/>
+                              <a:ea typeface="Cambria Math" panose="02040503050406030204" pitchFamily="18" charset="0"/>
+                            </a:rPr>
+                          </m:ctrlPr>
+                        </m:sSubPr>
+                        <m:e>
+                          <m:r>
+                            <a:rPr lang="en-US" b="0" i="1" smtClean="0">
+                              <a:latin typeface="Cambria Math" panose="02040503050406030204" pitchFamily="18" charset="0"/>
+                              <a:ea typeface="Cambria Math" panose="02040503050406030204" pitchFamily="18" charset="0"/>
+                            </a:rPr>
+                            <m:t>𝑁</m:t>
+                          </m:r>
+                        </m:e>
+                        <m:sub>
+                          <m:r>
+                            <a:rPr lang="en-US" b="0" i="1" smtClean="0">
+                              <a:latin typeface="Cambria Math" panose="02040503050406030204" pitchFamily="18" charset="0"/>
+                              <a:ea typeface="Cambria Math" panose="02040503050406030204" pitchFamily="18" charset="0"/>
+                            </a:rPr>
+                            <m:t>𝑝𝑟𝑜𝑏𝑠</m:t>
+                          </m:r>
+                        </m:sub>
+                      </m:sSub>
+                      <m:r>
+                        <a:rPr lang="en-US" i="1" smtClean="0">
+                          <a:latin typeface="Cambria Math" panose="02040503050406030204" pitchFamily="18" charset="0"/>
+                          <a:ea typeface="Cambria Math" panose="02040503050406030204" pitchFamily="18" charset="0"/>
+                        </a:rPr>
+                        <m:t>≈1</m:t>
+                      </m:r>
+                      <m:r>
+                        <a:rPr lang="en-US" b="0" i="1" smtClean="0">
+                          <a:latin typeface="Cambria Math" panose="02040503050406030204" pitchFamily="18" charset="0"/>
+                          <a:ea typeface="Cambria Math" panose="02040503050406030204" pitchFamily="18" charset="0"/>
+                        </a:rPr>
+                        <m:t>+</m:t>
+                      </m:r>
+                      <m:f>
+                        <m:fPr>
+                          <m:ctrlPr>
+                            <a:rPr lang="en-US" i="1">
+                              <a:latin typeface="Cambria Math" panose="02040503050406030204" pitchFamily="18" charset="0"/>
+                            </a:rPr>
+                          </m:ctrlPr>
+                        </m:fPr>
+                        <m:num>
+                          <m:r>
+                            <a:rPr lang="en-US" b="0" i="1" smtClean="0">
+                              <a:latin typeface="Cambria Math" panose="02040503050406030204" pitchFamily="18" charset="0"/>
+                            </a:rPr>
+                            <m:t>1</m:t>
+                          </m:r>
+                        </m:num>
+                        <m:den>
+                          <m:r>
+                            <a:rPr lang="en-US" b="0" i="1" smtClean="0">
+                              <a:latin typeface="Cambria Math" panose="02040503050406030204" pitchFamily="18" charset="0"/>
+                            </a:rPr>
+                            <m:t>2</m:t>
+                          </m:r>
+                        </m:den>
+                      </m:f>
+                      <m:d>
+                        <m:dPr>
+                          <m:ctrlPr>
+                            <a:rPr lang="en-US" i="1" smtClean="0">
+                              <a:latin typeface="Cambria Math" panose="02040503050406030204" pitchFamily="18" charset="0"/>
+                            </a:rPr>
+                          </m:ctrlPr>
+                        </m:dPr>
+                        <m:e>
+                          <m:f>
+                            <m:fPr>
+                              <m:ctrlPr>
+                                <a:rPr lang="en-US" i="1" smtClean="0">
+                                  <a:latin typeface="Cambria Math" panose="02040503050406030204" pitchFamily="18" charset="0"/>
+                                </a:rPr>
+                              </m:ctrlPr>
+                            </m:fPr>
+                            <m:num>
+                              <m:r>
+                                <a:rPr lang="en-US" i="1">
+                                  <a:latin typeface="Cambria Math" panose="02040503050406030204" pitchFamily="18" charset="0"/>
+                                  <a:ea typeface="Cambria Math" panose="02040503050406030204" pitchFamily="18" charset="0"/>
+                                </a:rPr>
+                                <m:t>𝛼</m:t>
+                              </m:r>
+                            </m:num>
+                            <m:den>
+                              <m:r>
+                                <a:rPr lang="en-US" b="0" i="1" smtClean="0">
+                                  <a:latin typeface="Cambria Math" panose="02040503050406030204" pitchFamily="18" charset="0"/>
+                                </a:rPr>
+                                <m:t>1−</m:t>
+                              </m:r>
+                              <m:r>
+                                <a:rPr lang="en-US" i="1">
+                                  <a:latin typeface="Cambria Math" panose="02040503050406030204" pitchFamily="18" charset="0"/>
+                                  <a:ea typeface="Cambria Math" panose="02040503050406030204" pitchFamily="18" charset="0"/>
+                                </a:rPr>
+                                <m:t>𝛼</m:t>
+                              </m:r>
+                            </m:den>
+                          </m:f>
+                        </m:e>
+                      </m:d>
+                    </m:oMath>
+                  </m:oMathPara>
+                </a14:m>
+                <a:endParaRPr lang="en-US" dirty="0"/>
+              </a:p>
+              <a:p>
+                <a:r>
+                  <a:rPr lang="en-US" dirty="0"/>
+                  <a:t>Complexity of probing increases rapidly as table fills</a:t>
+                </a:r>
+              </a:p>
+              <a:p>
+                <a:pPr marL="457200" lvl="1" indent="0">
+                  <a:buNone/>
+                </a:pPr>
+                <a:endParaRPr lang="en-US" dirty="0"/>
+              </a:p>
+            </p:txBody>
+          </p:sp>
+        </mc:Choice>
+        <mc:Fallback>
+          <p:sp>
+            <p:nvSpPr>
+              <p:cNvPr id="3" name="Content Placeholder 2">
+                <a:extLst>
+                  <a:ext uri="{FF2B5EF4-FFF2-40B4-BE49-F238E27FC236}">
+                    <a16:creationId xmlns:a16="http://schemas.microsoft.com/office/drawing/2014/main" id="{893FE2C5-A1AE-9949-3815-87F58D10222A}"/>
+                  </a:ext>
+                </a:extLst>
+              </p:cNvPr>
+              <p:cNvSpPr>
+                <a:spLocks noGrp="1" noRot="1" noChangeAspect="1" noMove="1" noResize="1" noEditPoints="1" noAdjustHandles="1" noChangeArrowheads="1" noChangeShapeType="1" noTextEdit="1"/>
+              </p:cNvSpPr>
+              <p:nvPr>
+                <p:ph idx="1"/>
+              </p:nvPr>
+            </p:nvSpPr>
+            <p:spPr>
+              <a:xfrm>
+                <a:off x="838200" y="1123406"/>
+                <a:ext cx="4313791" cy="5470724"/>
+              </a:xfrm>
+              <a:blipFill>
+                <a:blip r:embed="rId2"/>
+                <a:stretch>
+                  <a:fillRect l="-2970" t="-1782" r="-4102"/>
+                </a:stretch>
+              </a:blipFill>
+            </p:spPr>
+            <p:txBody>
+              <a:bodyPr/>
+              <a:lstStyle/>
+              <a:p>
+                <a:r>
+                  <a:rPr lang="en-US">
+                    <a:noFill/>
+                  </a:rPr>
+                  <a:t> </a:t>
+                </a:r>
+              </a:p>
+            </p:txBody>
+          </p:sp>
+        </mc:Fallback>
+      </mc:AlternateContent>
+      <p:sp>
+        <p:nvSpPr>
+          <p:cNvPr id="6" name="Title 1">
+            <a:extLst>
+              <a:ext uri="{FF2B5EF4-FFF2-40B4-BE49-F238E27FC236}">
+                <a16:creationId xmlns:a16="http://schemas.microsoft.com/office/drawing/2014/main" id="{C4AA09B5-0045-DC0F-0835-D4290DB1F551}"/>
+              </a:ext>
+            </a:extLst>
+          </p:cNvPr>
+          <p:cNvSpPr txBox="1">
+            <a:spLocks/>
+          </p:cNvSpPr>
+          <p:nvPr/>
+        </p:nvSpPr>
+        <p:spPr>
+          <a:xfrm>
+            <a:off x="838200" y="-635"/>
+            <a:ext cx="10515600" cy="1325563"/>
+          </a:xfrm>
+          <a:prstGeom prst="rect">
+            <a:avLst/>
+          </a:prstGeom>
+        </p:spPr>
+        <p:txBody>
+          <a:bodyPr vert="horz" lIns="91440" tIns="45720" rIns="91440" bIns="45720" rtlCol="0" anchor="ctr">
+            <a:normAutofit/>
+          </a:bodyPr>
+          <a:lstStyle>
+            <a:lvl1pPr algn="l" defTabSz="914400" rtl="0" eaLnBrk="1" latinLnBrk="0" hangingPunct="1">
+              <a:lnSpc>
+                <a:spcPct val="90000"/>
+              </a:lnSpc>
+              <a:spcBef>
+                <a:spcPct val="0"/>
+              </a:spcBef>
+              <a:buNone/>
+              <a:defRPr sz="4400" kern="1200">
+                <a:solidFill>
+                  <a:schemeClr val="tx1"/>
+                </a:solidFill>
+                <a:latin typeface="+mj-lt"/>
+                <a:ea typeface="+mj-ea"/>
+                <a:cs typeface="+mj-cs"/>
+              </a:defRPr>
+            </a:lvl1pPr>
+          </a:lstStyle>
+          <a:p>
+            <a:r>
+              <a:rPr lang="en-US" dirty="0">
+                <a:latin typeface="+mn-lt"/>
+              </a:rPr>
+              <a:t>Introduction to Hashing</a:t>
+            </a:r>
+          </a:p>
+        </p:txBody>
+      </p:sp>
+      <p:pic>
+        <p:nvPicPr>
+          <p:cNvPr id="4" name="Picture 3">
+            <a:extLst>
+              <a:ext uri="{FF2B5EF4-FFF2-40B4-BE49-F238E27FC236}">
+                <a16:creationId xmlns:a16="http://schemas.microsoft.com/office/drawing/2014/main" id="{DABBAD6E-1AA4-B7BC-6C7C-7CC29E528ECA}"/>
+              </a:ext>
+            </a:extLst>
+          </p:cNvPr>
+          <p:cNvPicPr>
+            <a:picLocks noChangeAspect="1"/>
+          </p:cNvPicPr>
+          <p:nvPr/>
+        </p:nvPicPr>
+        <p:blipFill>
+          <a:blip r:embed="rId3"/>
+          <a:stretch>
+            <a:fillRect/>
+          </a:stretch>
+        </p:blipFill>
+        <p:spPr>
+          <a:xfrm>
+            <a:off x="6164592" y="1036018"/>
+            <a:ext cx="4953435" cy="5645500"/>
+          </a:xfrm>
+          <a:prstGeom prst="rect">
+            <a:avLst/>
+          </a:prstGeom>
+        </p:spPr>
+      </p:pic>
+    </p:spTree>
+    <p:extLst>
+      <p:ext uri="{BB962C8B-B14F-4D97-AF65-F5344CB8AC3E}">
+        <p14:creationId xmlns:p14="http://schemas.microsoft.com/office/powerpoint/2010/main" val="3488172116"/>
+      </p:ext>
+    </p:extLst>
+  </p:cSld>
+  <p:clrMapOvr>
+    <a:masterClrMapping/>
+  </p:clrMapOvr>
+  <p:timing>
+    <p:tnLst>
+      <p:par>
+        <p:cTn id="1" dur="indefinite" restart="never" nodeType="tmRoot">
+          <p:childTnLst>
+            <p:seq concurrent="1" nextAc="seek">
+              <p:cTn id="2" dur="indefinite" nodeType="mainSeq">
+                <p:childTnLst>
+                  <p:par>
+                    <p:cTn id="3" fill="hold">
+                      <p:stCondLst>
+                        <p:cond delay="indefinite"/>
+                      </p:stCondLst>
+                      <p:childTnLst>
+                        <p:par>
+                          <p:cTn id="4" fill="hold">
+                            <p:stCondLst>
+                              <p:cond delay="0"/>
+                            </p:stCondLst>
+                            <p:childTnLst>
+                              <p:par>
+                                <p:cTn id="5" presetID="1" presetClass="entr" presetSubtype="0" fill="hold" nodeType="clickEffect">
+                                  <p:stCondLst>
+                                    <p:cond delay="0"/>
+                                  </p:stCondLst>
+                                  <p:childTnLst>
+                                    <p:set>
+                                      <p:cBhvr>
+                                        <p:cTn id="6" dur="1" fill="hold">
+                                          <p:stCondLst>
+                                            <p:cond delay="0"/>
+                                          </p:stCondLst>
+                                        </p:cTn>
+                                        <p:tgtEl>
+                                          <p:spTgt spid="4"/>
+                                        </p:tgtEl>
+                                        <p:attrNameLst>
+                                          <p:attrName>style.visibility</p:attrName>
+                                        </p:attrNameLst>
+                                      </p:cBhvr>
+                                      <p:to>
+                                        <p:strVal val="visible"/>
+                                      </p:to>
+                                    </p:set>
+                                  </p:childTnLst>
+                                </p:cTn>
+                              </p:par>
+                            </p:childTnLst>
+                          </p:cTn>
+                        </p:par>
+                      </p:childTnLst>
+                    </p:cTn>
+                  </p:par>
+                  <p:par>
+                    <p:cTn id="7" fill="hold">
+                      <p:stCondLst>
+                        <p:cond delay="indefinite"/>
+                      </p:stCondLst>
+                      <p:childTnLst>
+                        <p:par>
+                          <p:cTn id="8" fill="hold">
+                            <p:stCondLst>
+                              <p:cond delay="0"/>
+                            </p:stCondLst>
+                            <p:childTnLst>
+                              <p:par>
+                                <p:cTn id="9" presetID="1" presetClass="entr" presetSubtype="0" fill="hold" nodeType="clickEffect">
+                                  <p:stCondLst>
+                                    <p:cond delay="0"/>
+                                  </p:stCondLst>
+                                  <p:childTnLst>
+                                    <p:set>
+                                      <p:cBhvr>
+                                        <p:cTn id="10" dur="1" fill="hold">
+                                          <p:stCondLst>
+                                            <p:cond delay="0"/>
+                                          </p:stCondLst>
+                                        </p:cTn>
+                                        <p:tgtEl>
+                                          <p:spTgt spid="3">
+                                            <p:txEl>
+                                              <p:pRg st="3" end="3"/>
+                                            </p:txEl>
+                                          </p:spTgt>
+                                        </p:tgtEl>
+                                        <p:attrNameLst>
+                                          <p:attrName>style.visibility</p:attrName>
+                                        </p:attrNameLst>
+                                      </p:cBhvr>
+                                      <p:to>
+                                        <p:strVal val="visible"/>
+                                      </p:to>
+                                    </p:set>
+                                  </p:childTnLst>
+                                </p:cTn>
+                              </p:par>
+                            </p:childTnLst>
+                          </p:cTn>
+                        </p:par>
+                      </p:childTnLst>
+                    </p:cTn>
+                  </p:par>
+                </p:childTnLst>
+              </p:cTn>
+              <p:prevCondLst>
+                <p:cond evt="onPrev" delay="0">
+                  <p:tgtEl>
+                    <p:sldTgt/>
+                  </p:tgtEl>
+                </p:cond>
+              </p:prevCondLst>
+              <p:nextCondLst>
+                <p:cond evt="onNext" delay="0">
+                  <p:tgtEl>
+                    <p:sldTgt/>
+                  </p:tgtEl>
+                </p:cond>
+              </p:nextCondLst>
+            </p:seq>
+          </p:childTnLst>
+        </p:cTn>
+      </p:par>
+    </p:tnLst>
   </p:timing>
 </p:sld>
 </file>

--- a/slides/1_Introduction.pptx
+++ b/slides/1_Introduction.pptx
@@ -5,7 +5,7 @@
     <p:sldMasterId id="2147483648" r:id="rId1"/>
   </p:sldMasterIdLst>
   <p:notesMasterIdLst>
-    <p:notesMasterId r:id="rId55"/>
+    <p:notesMasterId r:id="rId57"/>
   </p:notesMasterIdLst>
   <p:sldIdLst>
     <p:sldId id="256" r:id="rId2"/>
@@ -14,53 +14,55 @@
     <p:sldId id="354" r:id="rId5"/>
     <p:sldId id="353" r:id="rId6"/>
     <p:sldId id="356" r:id="rId7"/>
-    <p:sldId id="712" r:id="rId8"/>
-    <p:sldId id="288" r:id="rId9"/>
-    <p:sldId id="733" r:id="rId10"/>
-    <p:sldId id="732" r:id="rId11"/>
-    <p:sldId id="724" r:id="rId12"/>
-    <p:sldId id="397" r:id="rId13"/>
-    <p:sldId id="718" r:id="rId14"/>
-    <p:sldId id="723" r:id="rId15"/>
-    <p:sldId id="396" r:id="rId16"/>
-    <p:sldId id="400" r:id="rId17"/>
-    <p:sldId id="352" r:id="rId18"/>
-    <p:sldId id="388" r:id="rId19"/>
-    <p:sldId id="721" r:id="rId20"/>
-    <p:sldId id="402" r:id="rId21"/>
-    <p:sldId id="381" r:id="rId22"/>
-    <p:sldId id="722" r:id="rId23"/>
-    <p:sldId id="395" r:id="rId24"/>
-    <p:sldId id="725" r:id="rId25"/>
-    <p:sldId id="401" r:id="rId26"/>
-    <p:sldId id="713" r:id="rId27"/>
-    <p:sldId id="387" r:id="rId28"/>
-    <p:sldId id="720" r:id="rId29"/>
-    <p:sldId id="382" r:id="rId30"/>
-    <p:sldId id="357" r:id="rId31"/>
-    <p:sldId id="385" r:id="rId32"/>
-    <p:sldId id="359" r:id="rId33"/>
-    <p:sldId id="727" r:id="rId34"/>
-    <p:sldId id="386" r:id="rId35"/>
-    <p:sldId id="714" r:id="rId36"/>
-    <p:sldId id="360" r:id="rId37"/>
-    <p:sldId id="731" r:id="rId38"/>
-    <p:sldId id="374" r:id="rId39"/>
-    <p:sldId id="375" r:id="rId40"/>
-    <p:sldId id="738" r:id="rId41"/>
-    <p:sldId id="377" r:id="rId42"/>
-    <p:sldId id="729" r:id="rId43"/>
-    <p:sldId id="730" r:id="rId44"/>
-    <p:sldId id="739" r:id="rId45"/>
-    <p:sldId id="376" r:id="rId46"/>
-    <p:sldId id="728" r:id="rId47"/>
-    <p:sldId id="379" r:id="rId48"/>
-    <p:sldId id="380" r:id="rId49"/>
-    <p:sldId id="742" r:id="rId50"/>
-    <p:sldId id="743" r:id="rId51"/>
-    <p:sldId id="744" r:id="rId52"/>
-    <p:sldId id="740" r:id="rId53"/>
-    <p:sldId id="384" r:id="rId54"/>
+    <p:sldId id="782" r:id="rId8"/>
+    <p:sldId id="712" r:id="rId9"/>
+    <p:sldId id="288" r:id="rId10"/>
+    <p:sldId id="733" r:id="rId11"/>
+    <p:sldId id="732" r:id="rId12"/>
+    <p:sldId id="724" r:id="rId13"/>
+    <p:sldId id="397" r:id="rId14"/>
+    <p:sldId id="718" r:id="rId15"/>
+    <p:sldId id="723" r:id="rId16"/>
+    <p:sldId id="783" r:id="rId17"/>
+    <p:sldId id="396" r:id="rId18"/>
+    <p:sldId id="400" r:id="rId19"/>
+    <p:sldId id="352" r:id="rId20"/>
+    <p:sldId id="388" r:id="rId21"/>
+    <p:sldId id="721" r:id="rId22"/>
+    <p:sldId id="402" r:id="rId23"/>
+    <p:sldId id="381" r:id="rId24"/>
+    <p:sldId id="722" r:id="rId25"/>
+    <p:sldId id="395" r:id="rId26"/>
+    <p:sldId id="725" r:id="rId27"/>
+    <p:sldId id="401" r:id="rId28"/>
+    <p:sldId id="713" r:id="rId29"/>
+    <p:sldId id="387" r:id="rId30"/>
+    <p:sldId id="720" r:id="rId31"/>
+    <p:sldId id="382" r:id="rId32"/>
+    <p:sldId id="357" r:id="rId33"/>
+    <p:sldId id="385" r:id="rId34"/>
+    <p:sldId id="359" r:id="rId35"/>
+    <p:sldId id="727" r:id="rId36"/>
+    <p:sldId id="386" r:id="rId37"/>
+    <p:sldId id="714" r:id="rId38"/>
+    <p:sldId id="360" r:id="rId39"/>
+    <p:sldId id="731" r:id="rId40"/>
+    <p:sldId id="374" r:id="rId41"/>
+    <p:sldId id="375" r:id="rId42"/>
+    <p:sldId id="738" r:id="rId43"/>
+    <p:sldId id="377" r:id="rId44"/>
+    <p:sldId id="729" r:id="rId45"/>
+    <p:sldId id="730" r:id="rId46"/>
+    <p:sldId id="739" r:id="rId47"/>
+    <p:sldId id="376" r:id="rId48"/>
+    <p:sldId id="728" r:id="rId49"/>
+    <p:sldId id="379" r:id="rId50"/>
+    <p:sldId id="380" r:id="rId51"/>
+    <p:sldId id="742" r:id="rId52"/>
+    <p:sldId id="743" r:id="rId53"/>
+    <p:sldId id="744" r:id="rId54"/>
+    <p:sldId id="740" r:id="rId55"/>
+    <p:sldId id="384" r:id="rId56"/>
   </p:sldIdLst>
   <p:sldSz cx="12192000" cy="6858000"/>
   <p:notesSz cx="6858000" cy="9144000"/>
@@ -249,7 +251,7 @@
           <a:p>
             <a:fld id="{2F3ABF1A-8818-4472-8518-E71DC7B5D2F7}" type="datetimeFigureOut">
               <a:rPr lang="en-US" smtClean="0"/>
-              <a:t>5/29/2026</a:t>
+              <a:t>6/16/2026</a:t>
             </a:fld>
             <a:endParaRPr lang="en-US"/>
           </a:p>
@@ -516,6 +518,115 @@
 </p:notesMaster>
 </file>
 
+<file path=ppt/notesSlides/notesSlide1.xml><?xml version="1.0" encoding="utf-8"?>
+<p:notes xmlns:a="http://schemas.openxmlformats.org/drawingml/2006/main" xmlns:r="http://schemas.openxmlformats.org/officeDocument/2006/relationships" xmlns:p="http://schemas.openxmlformats.org/presentationml/2006/main">
+  <p:cSld>
+    <p:spTree>
+      <p:nvGrpSpPr>
+        <p:cNvPr id="1" name="">
+          <a:extLst>
+            <a:ext uri="{FF2B5EF4-FFF2-40B4-BE49-F238E27FC236}">
+              <a16:creationId xmlns:a16="http://schemas.microsoft.com/office/drawing/2014/main" id="{FF79087D-0DC7-6EEE-97E4-397D8D53934D}"/>
+            </a:ext>
+          </a:extLst>
+        </p:cNvPr>
+        <p:cNvGrpSpPr/>
+        <p:nvPr/>
+      </p:nvGrpSpPr>
+      <p:grpSpPr>
+        <a:xfrm>
+          <a:off x="0" y="0"/>
+          <a:ext cx="0" cy="0"/>
+          <a:chOff x="0" y="0"/>
+          <a:chExt cx="0" cy="0"/>
+        </a:xfrm>
+      </p:grpSpPr>
+      <p:sp>
+        <p:nvSpPr>
+          <p:cNvPr id="2" name="Slide Image Placeholder 1">
+            <a:extLst>
+              <a:ext uri="{FF2B5EF4-FFF2-40B4-BE49-F238E27FC236}">
+                <a16:creationId xmlns:a16="http://schemas.microsoft.com/office/drawing/2014/main" id="{7ECD0DAB-0CC1-C222-2E07-FB5FDB4F0896}"/>
+              </a:ext>
+            </a:extLst>
+          </p:cNvPr>
+          <p:cNvSpPr>
+            <a:spLocks noGrp="1" noRot="1" noChangeAspect="1"/>
+          </p:cNvSpPr>
+          <p:nvPr>
+            <p:ph type="sldImg"/>
+          </p:nvPr>
+        </p:nvSpPr>
+        <p:spPr/>
+      </p:sp>
+      <p:sp>
+        <p:nvSpPr>
+          <p:cNvPr id="3" name="Notes Placeholder 2">
+            <a:extLst>
+              <a:ext uri="{FF2B5EF4-FFF2-40B4-BE49-F238E27FC236}">
+                <a16:creationId xmlns:a16="http://schemas.microsoft.com/office/drawing/2014/main" id="{B5B64B4D-5979-0A6D-0EC2-F12F11AC3E84}"/>
+              </a:ext>
+            </a:extLst>
+          </p:cNvPr>
+          <p:cNvSpPr>
+            <a:spLocks noGrp="1"/>
+          </p:cNvSpPr>
+          <p:nvPr>
+            <p:ph type="body" idx="1"/>
+          </p:nvPr>
+        </p:nvSpPr>
+        <p:spPr/>
+        <p:txBody>
+          <a:bodyPr/>
+          <a:lstStyle/>
+          <a:p>
+            <a:endParaRPr lang="en-US" dirty="0"/>
+          </a:p>
+        </p:txBody>
+      </p:sp>
+      <p:sp>
+        <p:nvSpPr>
+          <p:cNvPr id="4" name="Slide Number Placeholder 3">
+            <a:extLst>
+              <a:ext uri="{FF2B5EF4-FFF2-40B4-BE49-F238E27FC236}">
+                <a16:creationId xmlns:a16="http://schemas.microsoft.com/office/drawing/2014/main" id="{A305FF45-43DE-E9BB-8216-D041F138DD59}"/>
+              </a:ext>
+            </a:extLst>
+          </p:cNvPr>
+          <p:cNvSpPr>
+            <a:spLocks noGrp="1"/>
+          </p:cNvSpPr>
+          <p:nvPr>
+            <p:ph type="sldNum" sz="quarter" idx="10"/>
+          </p:nvPr>
+        </p:nvSpPr>
+        <p:spPr/>
+        <p:txBody>
+          <a:bodyPr/>
+          <a:lstStyle/>
+          <a:p>
+            <a:fld id="{4CFD207A-07DF-40AD-A916-9872E089CE7A}" type="slidenum">
+              <a:rPr lang="en-US" smtClean="0"/>
+              <a:pPr/>
+              <a:t>7</a:t>
+            </a:fld>
+            <a:endParaRPr lang="en-US"/>
+          </a:p>
+        </p:txBody>
+      </p:sp>
+    </p:spTree>
+    <p:extLst>
+      <p:ext uri="{BB962C8B-B14F-4D97-AF65-F5344CB8AC3E}">
+        <p14:creationId xmlns:p14="http://schemas.microsoft.com/office/powerpoint/2010/main" val="2368658177"/>
+      </p:ext>
+    </p:extLst>
+  </p:cSld>
+  <p:clrMapOvr>
+    <a:masterClrMapping/>
+  </p:clrMapOvr>
+</p:notes>
+</file>
+
 <file path=ppt/slideLayouts/slideLayout1.xml><?xml version="1.0" encoding="utf-8"?>
 <p:sldLayout xmlns:a="http://schemas.openxmlformats.org/drawingml/2006/main" xmlns:r="http://schemas.openxmlformats.org/officeDocument/2006/relationships" xmlns:p="http://schemas.openxmlformats.org/presentationml/2006/main" type="title" preserve="1">
   <p:cSld name="Title Slide">
@@ -663,7 +774,7 @@
           <a:p>
             <a:fld id="{6E4A31BF-7266-4BEB-918B-ADC21C630A6F}" type="datetimeFigureOut">
               <a:rPr lang="en-US" smtClean="0"/>
-              <a:t>5/29/2026</a:t>
+              <a:t>6/16/2026</a:t>
             </a:fld>
             <a:endParaRPr lang="en-US"/>
           </a:p>
@@ -861,7 +972,7 @@
           <a:p>
             <a:fld id="{6E4A31BF-7266-4BEB-918B-ADC21C630A6F}" type="datetimeFigureOut">
               <a:rPr lang="en-US" smtClean="0"/>
-              <a:t>5/29/2026</a:t>
+              <a:t>6/16/2026</a:t>
             </a:fld>
             <a:endParaRPr lang="en-US"/>
           </a:p>
@@ -1069,7 +1180,7 @@
           <a:p>
             <a:fld id="{6E4A31BF-7266-4BEB-918B-ADC21C630A6F}" type="datetimeFigureOut">
               <a:rPr lang="en-US" smtClean="0"/>
-              <a:t>5/29/2026</a:t>
+              <a:t>6/16/2026</a:t>
             </a:fld>
             <a:endParaRPr lang="en-US"/>
           </a:p>
@@ -1133,6 +1244,178 @@
     <p:extLst>
       <p:ext uri="{BB962C8B-B14F-4D97-AF65-F5344CB8AC3E}">
         <p14:creationId xmlns:p14="http://schemas.microsoft.com/office/powerpoint/2010/main" val="4117671548"/>
+      </p:ext>
+    </p:extLst>
+  </p:cSld>
+  <p:clrMapOvr>
+    <a:masterClrMapping/>
+  </p:clrMapOvr>
+</p:sldLayout>
+</file>
+
+<file path=ppt/slideLayouts/slideLayout12.xml><?xml version="1.0" encoding="utf-8"?>
+<p:sldLayout xmlns:a="http://schemas.openxmlformats.org/drawingml/2006/main" xmlns:r="http://schemas.openxmlformats.org/officeDocument/2006/relationships" xmlns:p="http://schemas.openxmlformats.org/presentationml/2006/main" userDrawn="1">
+  <p:cSld name="3_Title and Content">
+    <p:spTree>
+      <p:nvGrpSpPr>
+        <p:cNvPr id="1" name=""/>
+        <p:cNvGrpSpPr/>
+        <p:nvPr/>
+      </p:nvGrpSpPr>
+      <p:grpSpPr>
+        <a:xfrm>
+          <a:off x="0" y="0"/>
+          <a:ext cx="0" cy="0"/>
+          <a:chOff x="0" y="0"/>
+          <a:chExt cx="0" cy="0"/>
+        </a:xfrm>
+      </p:grpSpPr>
+      <p:sp>
+        <p:nvSpPr>
+          <p:cNvPr id="3" name="Title 2"/>
+          <p:cNvSpPr>
+            <a:spLocks noGrp="1"/>
+          </p:cNvSpPr>
+          <p:nvPr>
+            <p:ph type="title"/>
+          </p:nvPr>
+        </p:nvSpPr>
+        <p:spPr/>
+        <p:txBody>
+          <a:bodyPr/>
+          <a:lstStyle>
+            <a:lvl1pPr>
+              <a:defRPr>
+                <a:latin typeface="Segoe UI" panose="020B0502040204020203" pitchFamily="34" charset="0"/>
+                <a:cs typeface="Segoe UI" panose="020B0502040204020203" pitchFamily="34" charset="0"/>
+              </a:defRPr>
+            </a:lvl1pPr>
+          </a:lstStyle>
+          <a:p>
+            <a:r>
+              <a:rPr lang="en-US" dirty="0"/>
+              <a:t>Click to edit Master title style</a:t>
+            </a:r>
+          </a:p>
+        </p:txBody>
+      </p:sp>
+      <p:sp>
+        <p:nvSpPr>
+          <p:cNvPr id="6" name="Content Placeholder 5"/>
+          <p:cNvSpPr>
+            <a:spLocks noGrp="1"/>
+          </p:cNvSpPr>
+          <p:nvPr>
+            <p:ph sz="quarter" idx="10"/>
+          </p:nvPr>
+        </p:nvSpPr>
+        <p:spPr>
+          <a:xfrm>
+            <a:off x="379413" y="1388226"/>
+            <a:ext cx="11525250" cy="5290388"/>
+          </a:xfrm>
+          <a:prstGeom prst="rect">
+            <a:avLst/>
+          </a:prstGeom>
+        </p:spPr>
+        <p:txBody>
+          <a:bodyPr/>
+          <a:lstStyle>
+            <a:lvl1pPr>
+              <a:spcBef>
+                <a:spcPts val="1400"/>
+              </a:spcBef>
+              <a:defRPr b="0">
+                <a:solidFill>
+                  <a:schemeClr val="tx1"/>
+                </a:solidFill>
+                <a:latin typeface="Segoe UI Light" panose="020B0502040204020203" pitchFamily="34" charset="0"/>
+                <a:ea typeface="Segoe UI Light" panose="020B0502040204020203" pitchFamily="34" charset="0"/>
+                <a:cs typeface="Segoe UI Light" panose="020B0502040204020203" pitchFamily="34" charset="0"/>
+              </a:defRPr>
+            </a:lvl1pPr>
+            <a:lvl2pPr>
+              <a:defRPr>
+                <a:solidFill>
+                  <a:schemeClr val="tx1"/>
+                </a:solidFill>
+                <a:latin typeface="Segoe UI Light" panose="020B0502040204020203" pitchFamily="34" charset="0"/>
+                <a:ea typeface="Segoe UI Light" panose="020B0502040204020203" pitchFamily="34" charset="0"/>
+                <a:cs typeface="Segoe UI Light" panose="020B0502040204020203" pitchFamily="34" charset="0"/>
+              </a:defRPr>
+            </a:lvl2pPr>
+            <a:lvl3pPr>
+              <a:defRPr>
+                <a:solidFill>
+                  <a:schemeClr val="tx1"/>
+                </a:solidFill>
+                <a:latin typeface="Segoe UI Light" panose="020B0502040204020203" pitchFamily="34" charset="0"/>
+                <a:ea typeface="Segoe UI Light" panose="020B0502040204020203" pitchFamily="34" charset="0"/>
+                <a:cs typeface="Segoe UI Light" panose="020B0502040204020203" pitchFamily="34" charset="0"/>
+              </a:defRPr>
+            </a:lvl3pPr>
+            <a:lvl4pPr>
+              <a:defRPr>
+                <a:solidFill>
+                  <a:schemeClr val="tx1"/>
+                </a:solidFill>
+                <a:latin typeface="Segoe UI Light" panose="020B0502040204020203" pitchFamily="34" charset="0"/>
+                <a:ea typeface="Segoe UI Light" panose="020B0502040204020203" pitchFamily="34" charset="0"/>
+                <a:cs typeface="Segoe UI Light" panose="020B0502040204020203" pitchFamily="34" charset="0"/>
+              </a:defRPr>
+            </a:lvl4pPr>
+            <a:lvl5pPr>
+              <a:defRPr>
+                <a:solidFill>
+                  <a:schemeClr val="tx1"/>
+                </a:solidFill>
+                <a:latin typeface="Segoe UI Light" panose="020B0502040204020203" pitchFamily="34" charset="0"/>
+                <a:ea typeface="Segoe UI Light" panose="020B0502040204020203" pitchFamily="34" charset="0"/>
+                <a:cs typeface="Segoe UI Light" panose="020B0502040204020203" pitchFamily="34" charset="0"/>
+              </a:defRPr>
+            </a:lvl5pPr>
+          </a:lstStyle>
+          <a:p>
+            <a:pPr lvl="0"/>
+            <a:r>
+              <a:rPr lang="en-US" dirty="0"/>
+              <a:t>Click to edit Master text styles</a:t>
+            </a:r>
+          </a:p>
+          <a:p>
+            <a:pPr lvl="1"/>
+            <a:r>
+              <a:rPr lang="en-US" dirty="0"/>
+              <a:t>Second level</a:t>
+            </a:r>
+          </a:p>
+          <a:p>
+            <a:pPr lvl="2"/>
+            <a:r>
+              <a:rPr lang="en-US" dirty="0"/>
+              <a:t>Third level</a:t>
+            </a:r>
+          </a:p>
+          <a:p>
+            <a:pPr lvl="3"/>
+            <a:r>
+              <a:rPr lang="en-US" dirty="0"/>
+              <a:t>Fourth level</a:t>
+            </a:r>
+          </a:p>
+          <a:p>
+            <a:pPr lvl="4"/>
+            <a:r>
+              <a:rPr lang="en-US" dirty="0"/>
+              <a:t>Fifth level</a:t>
+            </a:r>
+          </a:p>
+        </p:txBody>
+      </p:sp>
+    </p:spTree>
+    <p:extLst>
+      <p:ext uri="{BB962C8B-B14F-4D97-AF65-F5344CB8AC3E}">
+        <p14:creationId xmlns:p14="http://schemas.microsoft.com/office/powerpoint/2010/main" val="3130629946"/>
       </p:ext>
     </p:extLst>
   </p:cSld>
@@ -1267,7 +1550,7 @@
           <a:p>
             <a:fld id="{6E4A31BF-7266-4BEB-918B-ADC21C630A6F}" type="datetimeFigureOut">
               <a:rPr lang="en-US" smtClean="0"/>
-              <a:t>5/29/2026</a:t>
+              <a:t>6/16/2026</a:t>
             </a:fld>
             <a:endParaRPr lang="en-US"/>
           </a:p>
@@ -1542,7 +1825,7 @@
           <a:p>
             <a:fld id="{6E4A31BF-7266-4BEB-918B-ADC21C630A6F}" type="datetimeFigureOut">
               <a:rPr lang="en-US" smtClean="0"/>
-              <a:t>5/29/2026</a:t>
+              <a:t>6/16/2026</a:t>
             </a:fld>
             <a:endParaRPr lang="en-US"/>
           </a:p>
@@ -1807,7 +2090,7 @@
           <a:p>
             <a:fld id="{6E4A31BF-7266-4BEB-918B-ADC21C630A6F}" type="datetimeFigureOut">
               <a:rPr lang="en-US" smtClean="0"/>
-              <a:t>5/29/2026</a:t>
+              <a:t>6/16/2026</a:t>
             </a:fld>
             <a:endParaRPr lang="en-US"/>
           </a:p>
@@ -2219,7 +2502,7 @@
           <a:p>
             <a:fld id="{6E4A31BF-7266-4BEB-918B-ADC21C630A6F}" type="datetimeFigureOut">
               <a:rPr lang="en-US" smtClean="0"/>
-              <a:t>5/29/2026</a:t>
+              <a:t>6/16/2026</a:t>
             </a:fld>
             <a:endParaRPr lang="en-US"/>
           </a:p>
@@ -2360,7 +2643,7 @@
           <a:p>
             <a:fld id="{6E4A31BF-7266-4BEB-918B-ADC21C630A6F}" type="datetimeFigureOut">
               <a:rPr lang="en-US" smtClean="0"/>
-              <a:t>5/29/2026</a:t>
+              <a:t>6/16/2026</a:t>
             </a:fld>
             <a:endParaRPr lang="en-US"/>
           </a:p>
@@ -2473,7 +2756,7 @@
           <a:p>
             <a:fld id="{6E4A31BF-7266-4BEB-918B-ADC21C630A6F}" type="datetimeFigureOut">
               <a:rPr lang="en-US" smtClean="0"/>
-              <a:t>5/29/2026</a:t>
+              <a:t>6/16/2026</a:t>
             </a:fld>
             <a:endParaRPr lang="en-US"/>
           </a:p>
@@ -2784,7 +3067,7 @@
           <a:p>
             <a:fld id="{6E4A31BF-7266-4BEB-918B-ADC21C630A6F}" type="datetimeFigureOut">
               <a:rPr lang="en-US" smtClean="0"/>
-              <a:t>5/29/2026</a:t>
+              <a:t>6/16/2026</a:t>
             </a:fld>
             <a:endParaRPr lang="en-US"/>
           </a:p>
@@ -3072,7 +3355,7 @@
           <a:p>
             <a:fld id="{6E4A31BF-7266-4BEB-918B-ADC21C630A6F}" type="datetimeFigureOut">
               <a:rPr lang="en-US" smtClean="0"/>
-              <a:t>5/29/2026</a:t>
+              <a:t>6/16/2026</a:t>
             </a:fld>
             <a:endParaRPr lang="en-US"/>
           </a:p>
@@ -3313,7 +3596,7 @@
           <a:p>
             <a:fld id="{6E4A31BF-7266-4BEB-918B-ADC21C630A6F}" type="datetimeFigureOut">
               <a:rPr lang="en-US" smtClean="0"/>
-              <a:t>5/29/2026</a:t>
+              <a:t>6/16/2026</a:t>
             </a:fld>
             <a:endParaRPr lang="en-US"/>
           </a:p>
@@ -3429,6 +3712,7 @@
     <p:sldLayoutId id="2147483657" r:id="rId9"/>
     <p:sldLayoutId id="2147483658" r:id="rId10"/>
     <p:sldLayoutId id="2147483659" r:id="rId11"/>
+    <p:sldLayoutId id="2147483660" r:id="rId12"/>
   </p:sldLayoutIdLst>
   <p:txStyles>
     <p:titleStyle>
@@ -3944,6 +4228,167 @@
       </p:grpSpPr>
       <p:sp>
         <p:nvSpPr>
+          <p:cNvPr id="4" name="Title 3">
+            <a:extLst>
+              <a:ext uri="{FF2B5EF4-FFF2-40B4-BE49-F238E27FC236}">
+                <a16:creationId xmlns:a16="http://schemas.microsoft.com/office/drawing/2014/main" id="{1BCE2B5B-E165-AFE7-3BF6-9F7655565AD7}"/>
+              </a:ext>
+            </a:extLst>
+          </p:cNvPr>
+          <p:cNvSpPr>
+            <a:spLocks noGrp="1"/>
+          </p:cNvSpPr>
+          <p:nvPr>
+            <p:ph type="title"/>
+          </p:nvPr>
+        </p:nvSpPr>
+        <p:spPr/>
+        <p:txBody>
+          <a:bodyPr/>
+          <a:lstStyle/>
+          <a:p>
+            <a:r>
+              <a:rPr lang="en-DE" dirty="0"/>
+              <a:t>About your TA: Jacqueline Hardy</a:t>
+            </a:r>
+          </a:p>
+        </p:txBody>
+      </p:sp>
+      <p:sp>
+        <p:nvSpPr>
+          <p:cNvPr id="5" name="Content Placeholder 4">
+            <a:extLst>
+              <a:ext uri="{FF2B5EF4-FFF2-40B4-BE49-F238E27FC236}">
+                <a16:creationId xmlns:a16="http://schemas.microsoft.com/office/drawing/2014/main" id="{0E53D9F3-C1CB-AE91-44FA-A9A184CF447C}"/>
+              </a:ext>
+            </a:extLst>
+          </p:cNvPr>
+          <p:cNvSpPr>
+            <a:spLocks noGrp="1"/>
+          </p:cNvSpPr>
+          <p:nvPr>
+            <p:ph idx="1"/>
+          </p:nvPr>
+        </p:nvSpPr>
+        <p:spPr/>
+        <p:txBody>
+          <a:bodyPr>
+            <a:normAutofit fontScale="92500" lnSpcReduction="20000"/>
+          </a:bodyPr>
+          <a:lstStyle/>
+          <a:p>
+            <a:r>
+              <a:rPr lang="en-DE" dirty="0"/>
+              <a:t>Bachelor’s Degree from Harvard Extension School (2015-2018)</a:t>
+            </a:r>
+          </a:p>
+          <a:p>
+            <a:pPr lvl="1"/>
+            <a:r>
+              <a:rPr lang="en-DE" dirty="0"/>
+              <a:t>Field of Study: International Relations</a:t>
+            </a:r>
+          </a:p>
+          <a:p>
+            <a:pPr lvl="1"/>
+            <a:r>
+              <a:rPr lang="en-DE" dirty="0"/>
+              <a:t>Minors: Quantitative Analysis &amp; Government</a:t>
+            </a:r>
+          </a:p>
+          <a:p>
+            <a:r>
+              <a:rPr lang="en-DE" dirty="0"/>
+              <a:t>Master’s Degree from Harvard Extension School (2022-2024)</a:t>
+            </a:r>
+          </a:p>
+          <a:p>
+            <a:pPr lvl="1"/>
+            <a:r>
+              <a:rPr lang="en-DE" dirty="0"/>
+              <a:t>Field of Study: Data Science</a:t>
+            </a:r>
+          </a:p>
+          <a:p>
+            <a:r>
+              <a:rPr lang="en-DE" dirty="0"/>
+              <a:t>LG Electronics: </a:t>
+            </a:r>
+          </a:p>
+          <a:p>
+            <a:pPr lvl="1"/>
+            <a:r>
+              <a:rPr lang="en-DE" dirty="0"/>
+              <a:t>Product Specialist </a:t>
+            </a:r>
+          </a:p>
+          <a:p>
+            <a:pPr lvl="1"/>
+            <a:r>
+              <a:rPr lang="en-DE" dirty="0"/>
+              <a:t>Go-to-Market Manager</a:t>
+            </a:r>
+          </a:p>
+          <a:p>
+            <a:pPr lvl="1"/>
+            <a:r>
+              <a:rPr lang="en-DE" dirty="0"/>
+              <a:t>Data Analytics Specialist </a:t>
+            </a:r>
+          </a:p>
+          <a:p>
+            <a:r>
+              <a:rPr lang="en-DE" dirty="0"/>
+              <a:t>SharkNinja </a:t>
+            </a:r>
+          </a:p>
+          <a:p>
+            <a:pPr lvl="1"/>
+            <a:r>
+              <a:rPr lang="en-DE" dirty="0"/>
+              <a:t>Strategic Planning and Operations Data Scientist </a:t>
+            </a:r>
+          </a:p>
+          <a:p>
+            <a:r>
+              <a:rPr lang="en-DE" dirty="0"/>
+              <a:t>Building my own Data Science Consulting Firm</a:t>
+            </a:r>
+          </a:p>
+        </p:txBody>
+      </p:sp>
+    </p:spTree>
+    <p:extLst>
+      <p:ext uri="{BB962C8B-B14F-4D97-AF65-F5344CB8AC3E}">
+        <p14:creationId xmlns:p14="http://schemas.microsoft.com/office/powerpoint/2010/main" val="2292487268"/>
+      </p:ext>
+    </p:extLst>
+  </p:cSld>
+  <p:clrMapOvr>
+    <a:masterClrMapping/>
+  </p:clrMapOvr>
+</p:sld>
+</file>
+
+<file path=ppt/slides/slide11.xml><?xml version="1.0" encoding="utf-8"?>
+<p:sld xmlns:a="http://schemas.openxmlformats.org/drawingml/2006/main" xmlns:r="http://schemas.openxmlformats.org/officeDocument/2006/relationships" xmlns:p="http://schemas.openxmlformats.org/presentationml/2006/main">
+  <p:cSld>
+    <p:spTree>
+      <p:nvGrpSpPr>
+        <p:cNvPr id="1" name=""/>
+        <p:cNvGrpSpPr/>
+        <p:nvPr/>
+      </p:nvGrpSpPr>
+      <p:grpSpPr>
+        <a:xfrm>
+          <a:off x="0" y="0"/>
+          <a:ext cx="0" cy="0"/>
+          <a:chOff x="0" y="0"/>
+          <a:chExt cx="0" cy="0"/>
+        </a:xfrm>
+      </p:grpSpPr>
+      <p:sp>
+        <p:nvSpPr>
           <p:cNvPr id="2" name="Title 1">
             <a:extLst>
               <a:ext uri="{FF2B5EF4-FFF2-40B4-BE49-F238E27FC236}">
@@ -4106,7 +4551,7 @@
 </p:sld>
 </file>
 
-<file path=ppt/slides/slide11.xml><?xml version="1.0" encoding="utf-8"?>
+<file path=ppt/slides/slide12.xml><?xml version="1.0" encoding="utf-8"?>
 <p:sld xmlns:a="http://schemas.openxmlformats.org/drawingml/2006/main" xmlns:r="http://schemas.openxmlformats.org/officeDocument/2006/relationships" xmlns:p="http://schemas.openxmlformats.org/presentationml/2006/main">
   <p:cSld>
     <p:spTree>
@@ -4176,7 +4621,7 @@
             </a:r>
             <a:r>
               <a:rPr lang="en-US" b="1" dirty="0"/>
-              <a:t>highly scalable analytic KDD methods and algorithms    </a:t>
+              <a:t>highly scalable analytic KDD methods and algorithms for massive datasets     </a:t>
             </a:r>
           </a:p>
           <a:p>
@@ -4689,7 +5134,7 @@
 </p:sld>
 </file>
 
-<file path=ppt/slides/slide12.xml><?xml version="1.0" encoding="utf-8"?>
+<file path=ppt/slides/slide13.xml><?xml version="1.0" encoding="utf-8"?>
 <p:sld xmlns:a="http://schemas.openxmlformats.org/drawingml/2006/main" xmlns:r="http://schemas.openxmlformats.org/officeDocument/2006/relationships" xmlns:p="http://schemas.openxmlformats.org/presentationml/2006/main">
   <p:cSld>
     <p:spTree>
@@ -5358,7 +5803,7 @@
 </p:sld>
 </file>
 
-<file path=ppt/slides/slide13.xml><?xml version="1.0" encoding="utf-8"?>
+<file path=ppt/slides/slide14.xml><?xml version="1.0" encoding="utf-8"?>
 <p:sld xmlns:a="http://schemas.openxmlformats.org/drawingml/2006/main" xmlns:r="http://schemas.openxmlformats.org/officeDocument/2006/relationships" xmlns:p="http://schemas.openxmlformats.org/presentationml/2006/main">
   <p:cSld>
     <p:spTree>
@@ -5905,7 +6350,7 @@
 </p:sld>
 </file>
 
-<file path=ppt/slides/slide14.xml><?xml version="1.0" encoding="utf-8"?>
+<file path=ppt/slides/slide15.xml><?xml version="1.0" encoding="utf-8"?>
 <p:sld xmlns:a="http://schemas.openxmlformats.org/drawingml/2006/main" xmlns:r="http://schemas.openxmlformats.org/officeDocument/2006/relationships" xmlns:p="http://schemas.openxmlformats.org/presentationml/2006/main">
   <p:cSld>
     <p:spTree>
@@ -6038,7 +6483,7 @@
                   <a:schemeClr val="tx1"/>
                 </a:solidFill>
               </a:rPr>
-              <a:t>2. Hashing and K-V pair management </a:t>
+              <a:t>1. Hashing and K-V pair management </a:t>
             </a:r>
           </a:p>
         </p:txBody>
@@ -6097,7 +6542,7 @@
                   <a:schemeClr val="tx1"/>
                 </a:solidFill>
               </a:rPr>
-              <a:t>5. Distance and Similarity Metrics</a:t>
+              <a:t>2. Distance and Similarity Metrics</a:t>
             </a:r>
           </a:p>
         </p:txBody>
@@ -6156,7 +6601,7 @@
                   <a:schemeClr val="tx1"/>
                 </a:solidFill>
               </a:rPr>
-              <a:t>1. Large-Scale Statistics</a:t>
+              <a:t>3. Graph Algorithms</a:t>
             </a:r>
           </a:p>
         </p:txBody>
@@ -6215,7 +6660,7 @@
                   <a:schemeClr val="tx1"/>
                 </a:solidFill>
               </a:rPr>
-              <a:t>10. Dimensionality Reduction</a:t>
+              <a:t>2. Dimensionality Reduction</a:t>
             </a:r>
           </a:p>
         </p:txBody>
@@ -6521,7 +6966,7 @@
                   <a:schemeClr val="tx1"/>
                 </a:solidFill>
               </a:rPr>
-              <a:t>4. Graph and Social Network Analysis</a:t>
+              <a:t>3. Social Network Analysis</a:t>
             </a:r>
           </a:p>
         </p:txBody>
@@ -8543,7 +8988,7 @@
         </p:nvSpPr>
         <p:spPr>
           <a:xfrm rot="16200000">
-            <a:off x="-144370" y="4418977"/>
+            <a:off x="-99031" y="4377626"/>
             <a:ext cx="1571596" cy="707886"/>
           </a:xfrm>
           <a:prstGeom prst="rect">
@@ -8671,7 +9116,935 @@
 </p:sld>
 </file>
 
-<file path=ppt/slides/slide15.xml><?xml version="1.0" encoding="utf-8"?>
+<file path=ppt/slides/slide16.xml><?xml version="1.0" encoding="utf-8"?>
+<p:sld xmlns:a="http://schemas.openxmlformats.org/drawingml/2006/main" xmlns:r="http://schemas.openxmlformats.org/officeDocument/2006/relationships" xmlns:p="http://schemas.openxmlformats.org/presentationml/2006/main">
+  <p:cSld>
+    <p:spTree>
+      <p:nvGrpSpPr>
+        <p:cNvPr id="1" name=""/>
+        <p:cNvGrpSpPr/>
+        <p:nvPr/>
+      </p:nvGrpSpPr>
+      <p:grpSpPr>
+        <a:xfrm>
+          <a:off x="0" y="0"/>
+          <a:ext cx="0" cy="0"/>
+          <a:chOff x="0" y="0"/>
+          <a:chExt cx="0" cy="0"/>
+        </a:xfrm>
+      </p:grpSpPr>
+      <p:sp>
+        <p:nvSpPr>
+          <p:cNvPr id="2" name="Title 1">
+            <a:extLst>
+              <a:ext uri="{FF2B5EF4-FFF2-40B4-BE49-F238E27FC236}">
+                <a16:creationId xmlns:a16="http://schemas.microsoft.com/office/drawing/2014/main" id="{C56CF8BA-E77D-C360-AD5B-2CB98FDCA527}"/>
+              </a:ext>
+            </a:extLst>
+          </p:cNvPr>
+          <p:cNvSpPr>
+            <a:spLocks noGrp="1"/>
+          </p:cNvSpPr>
+          <p:nvPr>
+            <p:ph type="title"/>
+          </p:nvPr>
+        </p:nvSpPr>
+        <p:spPr>
+          <a:xfrm>
+            <a:off x="916187" y="249623"/>
+            <a:ext cx="10515600" cy="662230"/>
+          </a:xfrm>
+        </p:spPr>
+        <p:txBody>
+          <a:bodyPr>
+            <a:normAutofit fontScale="90000"/>
+          </a:bodyPr>
+          <a:lstStyle/>
+          <a:p>
+            <a:r>
+              <a:rPr lang="en-US" sz="4900" dirty="0">
+                <a:latin typeface="+mn-lt"/>
+              </a:rPr>
+              <a:t>Main topics in this course</a:t>
+            </a:r>
+            <a:br>
+              <a:rPr lang="en-US" sz="4000" dirty="0">
+                <a:latin typeface="+mn-lt"/>
+              </a:rPr>
+            </a:br>
+            <a:endParaRPr lang="en-US" sz="4000" dirty="0">
+              <a:latin typeface="+mn-lt"/>
+            </a:endParaRPr>
+          </a:p>
+        </p:txBody>
+      </p:sp>
+      <p:sp>
+        <p:nvSpPr>
+          <p:cNvPr id="3" name="Left Brace 2">
+            <a:extLst>
+              <a:ext uri="{FF2B5EF4-FFF2-40B4-BE49-F238E27FC236}">
+                <a16:creationId xmlns:a16="http://schemas.microsoft.com/office/drawing/2014/main" id="{722482C5-08B3-A90B-94B0-26B76C9150F3}"/>
+              </a:ext>
+            </a:extLst>
+          </p:cNvPr>
+          <p:cNvSpPr/>
+          <p:nvPr/>
+        </p:nvSpPr>
+        <p:spPr>
+          <a:xfrm>
+            <a:off x="756889" y="1964356"/>
+            <a:ext cx="225209" cy="1273261"/>
+          </a:xfrm>
+          <a:prstGeom prst="leftBrace">
+            <a:avLst/>
+          </a:prstGeom>
+          <a:ln w="19050">
+            <a:solidFill>
+              <a:schemeClr val="tx1"/>
+            </a:solidFill>
+          </a:ln>
+        </p:spPr>
+        <p:style>
+          <a:lnRef idx="1">
+            <a:schemeClr val="accent1"/>
+          </a:lnRef>
+          <a:fillRef idx="0">
+            <a:schemeClr val="accent1"/>
+          </a:fillRef>
+          <a:effectRef idx="0">
+            <a:schemeClr val="accent1"/>
+          </a:effectRef>
+          <a:fontRef idx="minor">
+            <a:schemeClr val="tx1"/>
+          </a:fontRef>
+        </p:style>
+        <p:txBody>
+          <a:bodyPr rtlCol="0" anchor="ctr"/>
+          <a:lstStyle/>
+          <a:p>
+            <a:pPr algn="ctr"/>
+            <a:endParaRPr lang="en-US"/>
+          </a:p>
+        </p:txBody>
+      </p:sp>
+      <p:sp>
+        <p:nvSpPr>
+          <p:cNvPr id="4" name="TextBox 3">
+            <a:extLst>
+              <a:ext uri="{FF2B5EF4-FFF2-40B4-BE49-F238E27FC236}">
+                <a16:creationId xmlns:a16="http://schemas.microsoft.com/office/drawing/2014/main" id="{40A58A67-EE46-2F4C-3457-22DB787F6AD6}"/>
+              </a:ext>
+            </a:extLst>
+          </p:cNvPr>
+          <p:cNvSpPr txBox="1"/>
+          <p:nvPr/>
+        </p:nvSpPr>
+        <p:spPr>
+          <a:xfrm rot="16200000">
+            <a:off x="-238228" y="2251765"/>
+            <a:ext cx="1571596" cy="400110"/>
+          </a:xfrm>
+          <a:prstGeom prst="rect">
+            <a:avLst/>
+          </a:prstGeom>
+          <a:noFill/>
+        </p:spPr>
+        <p:txBody>
+          <a:bodyPr wrap="square" rtlCol="0">
+            <a:spAutoFit/>
+          </a:bodyPr>
+          <a:lstStyle/>
+          <a:p>
+            <a:pPr algn="ctr"/>
+            <a:r>
+              <a:rPr lang="en-US" sz="2000" dirty="0"/>
+              <a:t>Foundations </a:t>
+            </a:r>
+          </a:p>
+        </p:txBody>
+      </p:sp>
+      <p:sp>
+        <p:nvSpPr>
+          <p:cNvPr id="5" name="Rectangle 4">
+            <a:extLst>
+              <a:ext uri="{FF2B5EF4-FFF2-40B4-BE49-F238E27FC236}">
+                <a16:creationId xmlns:a16="http://schemas.microsoft.com/office/drawing/2014/main" id="{4CD484FE-4881-3835-B8E6-5EB721D74315}"/>
+              </a:ext>
+            </a:extLst>
+          </p:cNvPr>
+          <p:cNvSpPr/>
+          <p:nvPr/>
+        </p:nvSpPr>
+        <p:spPr>
+          <a:xfrm>
+            <a:off x="1259812" y="1983695"/>
+            <a:ext cx="1951346" cy="1253922"/>
+          </a:xfrm>
+          <a:prstGeom prst="rect">
+            <a:avLst/>
+          </a:prstGeom>
+          <a:noFill/>
+          <a:ln w="19050">
+            <a:solidFill>
+              <a:schemeClr val="tx1"/>
+            </a:solidFill>
+          </a:ln>
+        </p:spPr>
+        <p:style>
+          <a:lnRef idx="2">
+            <a:schemeClr val="accent1">
+              <a:shade val="15000"/>
+            </a:schemeClr>
+          </a:lnRef>
+          <a:fillRef idx="1">
+            <a:schemeClr val="accent1"/>
+          </a:fillRef>
+          <a:effectRef idx="0">
+            <a:schemeClr val="accent1"/>
+          </a:effectRef>
+          <a:fontRef idx="minor">
+            <a:schemeClr val="lt1"/>
+          </a:fontRef>
+        </p:style>
+        <p:txBody>
+          <a:bodyPr rtlCol="0" anchor="ctr"/>
+          <a:lstStyle/>
+          <a:p>
+            <a:pPr algn="ctr"/>
+            <a:r>
+              <a:rPr lang="en-US" sz="2000" dirty="0">
+                <a:solidFill>
+                  <a:schemeClr val="tx1"/>
+                </a:solidFill>
+              </a:rPr>
+              <a:t>1. Hashing and K-V pair management </a:t>
+            </a:r>
+          </a:p>
+        </p:txBody>
+      </p:sp>
+      <p:sp>
+        <p:nvSpPr>
+          <p:cNvPr id="6" name="Rectangle 5">
+            <a:extLst>
+              <a:ext uri="{FF2B5EF4-FFF2-40B4-BE49-F238E27FC236}">
+                <a16:creationId xmlns:a16="http://schemas.microsoft.com/office/drawing/2014/main" id="{34CF4665-3B44-EC27-8017-63E9AAA04CB1}"/>
+              </a:ext>
+            </a:extLst>
+          </p:cNvPr>
+          <p:cNvSpPr/>
+          <p:nvPr/>
+        </p:nvSpPr>
+        <p:spPr>
+          <a:xfrm>
+            <a:off x="3740233" y="2021536"/>
+            <a:ext cx="2157426" cy="1178239"/>
+          </a:xfrm>
+          <a:prstGeom prst="rect">
+            <a:avLst/>
+          </a:prstGeom>
+          <a:noFill/>
+          <a:ln w="19050">
+            <a:solidFill>
+              <a:schemeClr val="tx1"/>
+            </a:solidFill>
+          </a:ln>
+        </p:spPr>
+        <p:style>
+          <a:lnRef idx="2">
+            <a:schemeClr val="accent1">
+              <a:shade val="15000"/>
+            </a:schemeClr>
+          </a:lnRef>
+          <a:fillRef idx="1">
+            <a:schemeClr val="accent1"/>
+          </a:fillRef>
+          <a:effectRef idx="0">
+            <a:schemeClr val="accent1"/>
+          </a:effectRef>
+          <a:fontRef idx="minor">
+            <a:schemeClr val="lt1"/>
+          </a:fontRef>
+        </p:style>
+        <p:txBody>
+          <a:bodyPr rtlCol="0" anchor="ctr"/>
+          <a:lstStyle/>
+          <a:p>
+            <a:pPr algn="ctr"/>
+            <a:r>
+              <a:rPr lang="en-US" sz="2000" dirty="0">
+                <a:solidFill>
+                  <a:schemeClr val="tx1"/>
+                </a:solidFill>
+              </a:rPr>
+              <a:t>2. Distance and Similarity Metrics</a:t>
+            </a:r>
+          </a:p>
+        </p:txBody>
+      </p:sp>
+      <p:sp>
+        <p:nvSpPr>
+          <p:cNvPr id="7" name="Rectangle 6">
+            <a:extLst>
+              <a:ext uri="{FF2B5EF4-FFF2-40B4-BE49-F238E27FC236}">
+                <a16:creationId xmlns:a16="http://schemas.microsoft.com/office/drawing/2014/main" id="{D3C8FAA9-78A8-E1CB-4EE1-8C4AA2B9313B}"/>
+              </a:ext>
+            </a:extLst>
+          </p:cNvPr>
+          <p:cNvSpPr/>
+          <p:nvPr/>
+        </p:nvSpPr>
+        <p:spPr>
+          <a:xfrm>
+            <a:off x="6408020" y="2037908"/>
+            <a:ext cx="2058805" cy="1213337"/>
+          </a:xfrm>
+          <a:prstGeom prst="rect">
+            <a:avLst/>
+          </a:prstGeom>
+          <a:noFill/>
+          <a:ln w="19050">
+            <a:solidFill>
+              <a:schemeClr val="tx1"/>
+            </a:solidFill>
+          </a:ln>
+        </p:spPr>
+        <p:style>
+          <a:lnRef idx="2">
+            <a:schemeClr val="accent1">
+              <a:shade val="15000"/>
+            </a:schemeClr>
+          </a:lnRef>
+          <a:fillRef idx="1">
+            <a:schemeClr val="accent1"/>
+          </a:fillRef>
+          <a:effectRef idx="0">
+            <a:schemeClr val="accent1"/>
+          </a:effectRef>
+          <a:fontRef idx="minor">
+            <a:schemeClr val="lt1"/>
+          </a:fontRef>
+        </p:style>
+        <p:txBody>
+          <a:bodyPr rtlCol="0" anchor="ctr"/>
+          <a:lstStyle/>
+          <a:p>
+            <a:pPr algn="ctr"/>
+            <a:r>
+              <a:rPr lang="en-US" sz="2000" dirty="0">
+                <a:solidFill>
+                  <a:schemeClr val="tx1"/>
+                </a:solidFill>
+              </a:rPr>
+              <a:t>3. Graph Algorithms</a:t>
+            </a:r>
+          </a:p>
+        </p:txBody>
+      </p:sp>
+      <p:sp>
+        <p:nvSpPr>
+          <p:cNvPr id="8" name="Rectangle 7">
+            <a:extLst>
+              <a:ext uri="{FF2B5EF4-FFF2-40B4-BE49-F238E27FC236}">
+                <a16:creationId xmlns:a16="http://schemas.microsoft.com/office/drawing/2014/main" id="{CE6405B6-04C8-5532-70BF-8921F993525F}"/>
+              </a:ext>
+            </a:extLst>
+          </p:cNvPr>
+          <p:cNvSpPr/>
+          <p:nvPr/>
+        </p:nvSpPr>
+        <p:spPr>
+          <a:xfrm>
+            <a:off x="1215334" y="3591320"/>
+            <a:ext cx="2085982" cy="1074244"/>
+          </a:xfrm>
+          <a:prstGeom prst="rect">
+            <a:avLst/>
+          </a:prstGeom>
+          <a:noFill/>
+          <a:ln w="19050">
+            <a:solidFill>
+              <a:schemeClr val="tx1"/>
+            </a:solidFill>
+          </a:ln>
+        </p:spPr>
+        <p:style>
+          <a:lnRef idx="2">
+            <a:schemeClr val="accent1">
+              <a:shade val="15000"/>
+            </a:schemeClr>
+          </a:lnRef>
+          <a:fillRef idx="1">
+            <a:schemeClr val="accent1"/>
+          </a:fillRef>
+          <a:effectRef idx="0">
+            <a:schemeClr val="accent1"/>
+          </a:effectRef>
+          <a:fontRef idx="minor">
+            <a:schemeClr val="lt1"/>
+          </a:fontRef>
+        </p:style>
+        <p:txBody>
+          <a:bodyPr rtlCol="0" anchor="ctr"/>
+          <a:lstStyle/>
+          <a:p>
+            <a:pPr algn="ctr"/>
+            <a:r>
+              <a:rPr lang="en-US" sz="2000" dirty="0">
+                <a:solidFill>
+                  <a:schemeClr val="tx1"/>
+                </a:solidFill>
+              </a:rPr>
+              <a:t>2. Dimensionality Reduction</a:t>
+            </a:r>
+          </a:p>
+        </p:txBody>
+      </p:sp>
+      <p:sp>
+        <p:nvSpPr>
+          <p:cNvPr id="10" name="Left Brace 9">
+            <a:extLst>
+              <a:ext uri="{FF2B5EF4-FFF2-40B4-BE49-F238E27FC236}">
+                <a16:creationId xmlns:a16="http://schemas.microsoft.com/office/drawing/2014/main" id="{4DF74A6A-43A3-532A-27C0-C25A4F8EBA58}"/>
+              </a:ext>
+            </a:extLst>
+          </p:cNvPr>
+          <p:cNvSpPr/>
+          <p:nvPr/>
+        </p:nvSpPr>
+        <p:spPr>
+          <a:xfrm>
+            <a:off x="865089" y="3571535"/>
+            <a:ext cx="172578" cy="1094029"/>
+          </a:xfrm>
+          <a:prstGeom prst="leftBrace">
+            <a:avLst/>
+          </a:prstGeom>
+          <a:ln w="19050">
+            <a:solidFill>
+              <a:schemeClr val="tx1"/>
+            </a:solidFill>
+          </a:ln>
+        </p:spPr>
+        <p:style>
+          <a:lnRef idx="1">
+            <a:schemeClr val="accent1"/>
+          </a:lnRef>
+          <a:fillRef idx="0">
+            <a:schemeClr val="accent1"/>
+          </a:fillRef>
+          <a:effectRef idx="0">
+            <a:schemeClr val="accent1"/>
+          </a:effectRef>
+          <a:fontRef idx="minor">
+            <a:schemeClr val="tx1"/>
+          </a:fontRef>
+        </p:style>
+        <p:txBody>
+          <a:bodyPr rtlCol="0" anchor="ctr"/>
+          <a:lstStyle/>
+          <a:p>
+            <a:pPr algn="ctr"/>
+            <a:endParaRPr lang="en-US"/>
+          </a:p>
+        </p:txBody>
+      </p:sp>
+      <p:sp>
+        <p:nvSpPr>
+          <p:cNvPr id="11" name="TextBox 10">
+            <a:extLst>
+              <a:ext uri="{FF2B5EF4-FFF2-40B4-BE49-F238E27FC236}">
+                <a16:creationId xmlns:a16="http://schemas.microsoft.com/office/drawing/2014/main" id="{5BA2D2F7-0D25-9291-81E1-B95A85194ECD}"/>
+              </a:ext>
+            </a:extLst>
+          </p:cNvPr>
+          <p:cNvSpPr txBox="1"/>
+          <p:nvPr/>
+        </p:nvSpPr>
+        <p:spPr>
+          <a:xfrm rot="16200000">
+            <a:off x="-286998" y="3724841"/>
+            <a:ext cx="1571596" cy="707886"/>
+          </a:xfrm>
+          <a:prstGeom prst="rect">
+            <a:avLst/>
+          </a:prstGeom>
+          <a:noFill/>
+        </p:spPr>
+        <p:txBody>
+          <a:bodyPr wrap="square" rtlCol="0">
+            <a:spAutoFit/>
+          </a:bodyPr>
+          <a:lstStyle/>
+          <a:p>
+            <a:pPr algn="ctr"/>
+            <a:r>
+              <a:rPr lang="en-US" sz="2000" dirty="0"/>
+              <a:t>Core Algorithms</a:t>
+            </a:r>
+          </a:p>
+        </p:txBody>
+      </p:sp>
+      <p:sp>
+        <p:nvSpPr>
+          <p:cNvPr id="12" name="Rectangle 11">
+            <a:extLst>
+              <a:ext uri="{FF2B5EF4-FFF2-40B4-BE49-F238E27FC236}">
+                <a16:creationId xmlns:a16="http://schemas.microsoft.com/office/drawing/2014/main" id="{E4FA9D0A-8D01-9127-4D33-1A9F6023056A}"/>
+              </a:ext>
+            </a:extLst>
+          </p:cNvPr>
+          <p:cNvSpPr/>
+          <p:nvPr/>
+        </p:nvSpPr>
+        <p:spPr>
+          <a:xfrm>
+            <a:off x="1280175" y="5154275"/>
+            <a:ext cx="1961804" cy="1264023"/>
+          </a:xfrm>
+          <a:prstGeom prst="rect">
+            <a:avLst/>
+          </a:prstGeom>
+          <a:noFill/>
+          <a:ln w="19050">
+            <a:solidFill>
+              <a:schemeClr val="tx1"/>
+            </a:solidFill>
+          </a:ln>
+        </p:spPr>
+        <p:style>
+          <a:lnRef idx="2">
+            <a:schemeClr val="accent1">
+              <a:shade val="15000"/>
+            </a:schemeClr>
+          </a:lnRef>
+          <a:fillRef idx="1">
+            <a:schemeClr val="accent1"/>
+          </a:fillRef>
+          <a:effectRef idx="0">
+            <a:schemeClr val="accent1"/>
+          </a:effectRef>
+          <a:fontRef idx="minor">
+            <a:schemeClr val="lt1"/>
+          </a:fontRef>
+        </p:style>
+        <p:txBody>
+          <a:bodyPr rtlCol="0" anchor="ctr"/>
+          <a:lstStyle/>
+          <a:p>
+            <a:pPr algn="ctr"/>
+            <a:r>
+              <a:rPr lang="en-US" sz="2000" dirty="0">
+                <a:solidFill>
+                  <a:schemeClr val="tx1"/>
+                </a:solidFill>
+              </a:rPr>
+              <a:t>3. Social Network Analysis</a:t>
+            </a:r>
+          </a:p>
+        </p:txBody>
+      </p:sp>
+      <p:sp>
+        <p:nvSpPr>
+          <p:cNvPr id="14" name="Left Brace 13">
+            <a:extLst>
+              <a:ext uri="{FF2B5EF4-FFF2-40B4-BE49-F238E27FC236}">
+                <a16:creationId xmlns:a16="http://schemas.microsoft.com/office/drawing/2014/main" id="{109C88A7-820F-F45D-06B9-AC6695899726}"/>
+              </a:ext>
+            </a:extLst>
+          </p:cNvPr>
+          <p:cNvSpPr/>
+          <p:nvPr/>
+        </p:nvSpPr>
+        <p:spPr>
+          <a:xfrm>
+            <a:off x="858563" y="5154275"/>
+            <a:ext cx="164275" cy="1264024"/>
+          </a:xfrm>
+          <a:prstGeom prst="leftBrace">
+            <a:avLst/>
+          </a:prstGeom>
+          <a:ln w="19050">
+            <a:solidFill>
+              <a:schemeClr val="tx1"/>
+            </a:solidFill>
+          </a:ln>
+        </p:spPr>
+        <p:style>
+          <a:lnRef idx="1">
+            <a:schemeClr val="accent1"/>
+          </a:lnRef>
+          <a:fillRef idx="0">
+            <a:schemeClr val="accent1"/>
+          </a:fillRef>
+          <a:effectRef idx="0">
+            <a:schemeClr val="accent1"/>
+          </a:effectRef>
+          <a:fontRef idx="minor">
+            <a:schemeClr val="tx1"/>
+          </a:fontRef>
+        </p:style>
+        <p:txBody>
+          <a:bodyPr rtlCol="0" anchor="ctr"/>
+          <a:lstStyle/>
+          <a:p>
+            <a:pPr algn="ctr"/>
+            <a:endParaRPr lang="en-US"/>
+          </a:p>
+        </p:txBody>
+      </p:sp>
+      <p:sp>
+        <p:nvSpPr>
+          <p:cNvPr id="15" name="TextBox 14">
+            <a:extLst>
+              <a:ext uri="{FF2B5EF4-FFF2-40B4-BE49-F238E27FC236}">
+                <a16:creationId xmlns:a16="http://schemas.microsoft.com/office/drawing/2014/main" id="{189A544B-C64D-C26D-379D-546D41202910}"/>
+              </a:ext>
+            </a:extLst>
+          </p:cNvPr>
+          <p:cNvSpPr txBox="1"/>
+          <p:nvPr/>
+        </p:nvSpPr>
+        <p:spPr>
+          <a:xfrm rot="16200000">
+            <a:off x="-322189" y="5405146"/>
+            <a:ext cx="1571596" cy="707886"/>
+          </a:xfrm>
+          <a:prstGeom prst="rect">
+            <a:avLst/>
+          </a:prstGeom>
+          <a:noFill/>
+        </p:spPr>
+        <p:txBody>
+          <a:bodyPr wrap="square" rtlCol="0">
+            <a:spAutoFit/>
+          </a:bodyPr>
+          <a:lstStyle/>
+          <a:p>
+            <a:pPr algn="ctr"/>
+            <a:r>
+              <a:rPr lang="en-US" sz="2000" dirty="0"/>
+              <a:t>Taks </a:t>
+            </a:r>
+            <a:r>
+              <a:rPr lang="en-US" sz="2000"/>
+              <a:t>Speific </a:t>
+            </a:r>
+            <a:r>
+              <a:rPr lang="en-US" sz="2000" dirty="0"/>
+              <a:t>Algorithms</a:t>
+            </a:r>
+          </a:p>
+        </p:txBody>
+      </p:sp>
+      <p:sp>
+        <p:nvSpPr>
+          <p:cNvPr id="16" name="Rectangle 15">
+            <a:extLst>
+              <a:ext uri="{FF2B5EF4-FFF2-40B4-BE49-F238E27FC236}">
+                <a16:creationId xmlns:a16="http://schemas.microsoft.com/office/drawing/2014/main" id="{F224B6E8-EE62-D057-75D7-D8EF7E5CA802}"/>
+              </a:ext>
+            </a:extLst>
+          </p:cNvPr>
+          <p:cNvSpPr/>
+          <p:nvPr/>
+        </p:nvSpPr>
+        <p:spPr>
+          <a:xfrm>
+            <a:off x="3811677" y="3631085"/>
+            <a:ext cx="2085982" cy="1094029"/>
+          </a:xfrm>
+          <a:prstGeom prst="rect">
+            <a:avLst/>
+          </a:prstGeom>
+          <a:noFill/>
+          <a:ln w="19050">
+            <a:solidFill>
+              <a:schemeClr val="tx1"/>
+            </a:solidFill>
+          </a:ln>
+        </p:spPr>
+        <p:style>
+          <a:lnRef idx="2">
+            <a:schemeClr val="accent1">
+              <a:shade val="15000"/>
+            </a:schemeClr>
+          </a:lnRef>
+          <a:fillRef idx="1">
+            <a:schemeClr val="accent1"/>
+          </a:fillRef>
+          <a:effectRef idx="0">
+            <a:schemeClr val="accent1"/>
+          </a:effectRef>
+          <a:fontRef idx="minor">
+            <a:schemeClr val="lt1"/>
+          </a:fontRef>
+        </p:style>
+        <p:txBody>
+          <a:bodyPr rtlCol="0" anchor="ctr"/>
+          <a:lstStyle/>
+          <a:p>
+            <a:pPr algn="ctr"/>
+            <a:r>
+              <a:rPr lang="en-US" sz="2000" dirty="0">
+                <a:solidFill>
+                  <a:schemeClr val="tx1"/>
+                </a:solidFill>
+              </a:rPr>
+              <a:t>5. Similarity Search and NN Algorithms</a:t>
+            </a:r>
+          </a:p>
+        </p:txBody>
+      </p:sp>
+      <p:sp>
+        <p:nvSpPr>
+          <p:cNvPr id="17" name="Rectangle 16">
+            <a:extLst>
+              <a:ext uri="{FF2B5EF4-FFF2-40B4-BE49-F238E27FC236}">
+                <a16:creationId xmlns:a16="http://schemas.microsoft.com/office/drawing/2014/main" id="{4E8CF822-5DC8-788F-175C-7F3FAAECF89C}"/>
+              </a:ext>
+            </a:extLst>
+          </p:cNvPr>
+          <p:cNvSpPr/>
+          <p:nvPr/>
+        </p:nvSpPr>
+        <p:spPr>
+          <a:xfrm>
+            <a:off x="6408020" y="3640978"/>
+            <a:ext cx="2038966" cy="1123564"/>
+          </a:xfrm>
+          <a:prstGeom prst="rect">
+            <a:avLst/>
+          </a:prstGeom>
+          <a:noFill/>
+          <a:ln w="19050">
+            <a:solidFill>
+              <a:schemeClr val="tx1"/>
+            </a:solidFill>
+          </a:ln>
+        </p:spPr>
+        <p:style>
+          <a:lnRef idx="2">
+            <a:schemeClr val="accent1">
+              <a:shade val="15000"/>
+            </a:schemeClr>
+          </a:lnRef>
+          <a:fillRef idx="1">
+            <a:schemeClr val="accent1"/>
+          </a:fillRef>
+          <a:effectRef idx="0">
+            <a:schemeClr val="accent1"/>
+          </a:effectRef>
+          <a:fontRef idx="minor">
+            <a:schemeClr val="lt1"/>
+          </a:fontRef>
+        </p:style>
+        <p:txBody>
+          <a:bodyPr rtlCol="0" anchor="ctr"/>
+          <a:lstStyle/>
+          <a:p>
+            <a:pPr algn="ctr"/>
+            <a:r>
+              <a:rPr lang="en-US" sz="2000" dirty="0">
+                <a:solidFill>
+                  <a:schemeClr val="tx1"/>
+                </a:solidFill>
+              </a:rPr>
+              <a:t>4. Online Algorithms</a:t>
+            </a:r>
+          </a:p>
+        </p:txBody>
+      </p:sp>
+      <p:sp>
+        <p:nvSpPr>
+          <p:cNvPr id="18" name="Rectangle 17">
+            <a:extLst>
+              <a:ext uri="{FF2B5EF4-FFF2-40B4-BE49-F238E27FC236}">
+                <a16:creationId xmlns:a16="http://schemas.microsoft.com/office/drawing/2014/main" id="{260E78D0-AC72-D4B1-530C-9DBE1AAF53B3}"/>
+              </a:ext>
+            </a:extLst>
+          </p:cNvPr>
+          <p:cNvSpPr/>
+          <p:nvPr/>
+        </p:nvSpPr>
+        <p:spPr>
+          <a:xfrm>
+            <a:off x="8985680" y="5155489"/>
+            <a:ext cx="1894527" cy="1262809"/>
+          </a:xfrm>
+          <a:prstGeom prst="rect">
+            <a:avLst/>
+          </a:prstGeom>
+          <a:noFill/>
+          <a:ln w="19050">
+            <a:solidFill>
+              <a:schemeClr val="tx1"/>
+            </a:solidFill>
+          </a:ln>
+        </p:spPr>
+        <p:style>
+          <a:lnRef idx="2">
+            <a:schemeClr val="accent1">
+              <a:shade val="15000"/>
+            </a:schemeClr>
+          </a:lnRef>
+          <a:fillRef idx="1">
+            <a:schemeClr val="accent1"/>
+          </a:fillRef>
+          <a:effectRef idx="0">
+            <a:schemeClr val="accent1"/>
+          </a:effectRef>
+          <a:fontRef idx="minor">
+            <a:schemeClr val="lt1"/>
+          </a:fontRef>
+        </p:style>
+        <p:txBody>
+          <a:bodyPr rtlCol="0" anchor="ctr"/>
+          <a:lstStyle/>
+          <a:p>
+            <a:pPr algn="ctr"/>
+            <a:r>
+              <a:rPr lang="en-US" sz="2000" dirty="0">
+                <a:solidFill>
+                  <a:schemeClr val="tx1"/>
+                </a:solidFill>
+              </a:rPr>
+              <a:t>8. Clustering Algorithms</a:t>
+            </a:r>
+          </a:p>
+        </p:txBody>
+      </p:sp>
+      <p:sp>
+        <p:nvSpPr>
+          <p:cNvPr id="20" name="Rectangle 19">
+            <a:extLst>
+              <a:ext uri="{FF2B5EF4-FFF2-40B4-BE49-F238E27FC236}">
+                <a16:creationId xmlns:a16="http://schemas.microsoft.com/office/drawing/2014/main" id="{1D5B69D8-949F-A5E1-038A-D7B3D5FE6133}"/>
+              </a:ext>
+            </a:extLst>
+          </p:cNvPr>
+          <p:cNvSpPr/>
+          <p:nvPr/>
+        </p:nvSpPr>
+        <p:spPr>
+          <a:xfrm>
+            <a:off x="6470354" y="5154275"/>
+            <a:ext cx="2016833" cy="1245689"/>
+          </a:xfrm>
+          <a:prstGeom prst="rect">
+            <a:avLst/>
+          </a:prstGeom>
+          <a:noFill/>
+          <a:ln w="19050">
+            <a:solidFill>
+              <a:schemeClr val="tx1"/>
+            </a:solidFill>
+          </a:ln>
+        </p:spPr>
+        <p:style>
+          <a:lnRef idx="2">
+            <a:schemeClr val="accent1">
+              <a:shade val="15000"/>
+            </a:schemeClr>
+          </a:lnRef>
+          <a:fillRef idx="1">
+            <a:schemeClr val="accent1"/>
+          </a:fillRef>
+          <a:effectRef idx="0">
+            <a:schemeClr val="accent1"/>
+          </a:effectRef>
+          <a:fontRef idx="minor">
+            <a:schemeClr val="lt1"/>
+          </a:fontRef>
+        </p:style>
+        <p:txBody>
+          <a:bodyPr rtlCol="0" anchor="ctr"/>
+          <a:lstStyle/>
+          <a:p>
+            <a:pPr algn="ctr"/>
+            <a:r>
+              <a:rPr lang="en-US" sz="2000" dirty="0">
+                <a:solidFill>
+                  <a:schemeClr val="tx1"/>
+                </a:solidFill>
+              </a:rPr>
+              <a:t>7. Recommender  Algorithms</a:t>
+            </a:r>
+          </a:p>
+        </p:txBody>
+      </p:sp>
+      <p:sp>
+        <p:nvSpPr>
+          <p:cNvPr id="21" name="Rectangle 20">
+            <a:extLst>
+              <a:ext uri="{FF2B5EF4-FFF2-40B4-BE49-F238E27FC236}">
+                <a16:creationId xmlns:a16="http://schemas.microsoft.com/office/drawing/2014/main" id="{66940847-DA8B-171F-5B55-F8479F15B7DD}"/>
+              </a:ext>
+            </a:extLst>
+          </p:cNvPr>
+          <p:cNvSpPr/>
+          <p:nvPr/>
+        </p:nvSpPr>
+        <p:spPr>
+          <a:xfrm>
+            <a:off x="3760595" y="5172609"/>
+            <a:ext cx="2085981" cy="1245689"/>
+          </a:xfrm>
+          <a:prstGeom prst="rect">
+            <a:avLst/>
+          </a:prstGeom>
+          <a:noFill/>
+          <a:ln w="19050">
+            <a:solidFill>
+              <a:schemeClr val="tx1"/>
+            </a:solidFill>
+          </a:ln>
+        </p:spPr>
+        <p:style>
+          <a:lnRef idx="2">
+            <a:schemeClr val="accent1">
+              <a:shade val="15000"/>
+            </a:schemeClr>
+          </a:lnRef>
+          <a:fillRef idx="1">
+            <a:schemeClr val="accent1"/>
+          </a:fillRef>
+          <a:effectRef idx="0">
+            <a:schemeClr val="accent1"/>
+          </a:effectRef>
+          <a:fontRef idx="minor">
+            <a:schemeClr val="lt1"/>
+          </a:fontRef>
+        </p:style>
+        <p:txBody>
+          <a:bodyPr rtlCol="0" anchor="ctr"/>
+          <a:lstStyle/>
+          <a:p>
+            <a:pPr algn="ctr"/>
+            <a:r>
+              <a:rPr lang="en-US" sz="2000" dirty="0">
+                <a:solidFill>
+                  <a:schemeClr val="tx1"/>
+                </a:solidFill>
+              </a:rPr>
+              <a:t>6. Web/Document ranking and search</a:t>
+            </a:r>
+          </a:p>
+        </p:txBody>
+      </p:sp>
+    </p:spTree>
+    <p:extLst>
+      <p:ext uri="{BB962C8B-B14F-4D97-AF65-F5344CB8AC3E}">
+        <p14:creationId xmlns:p14="http://schemas.microsoft.com/office/powerpoint/2010/main" val="461663716"/>
+      </p:ext>
+    </p:extLst>
+  </p:cSld>
+  <p:clrMapOvr>
+    <a:masterClrMapping/>
+  </p:clrMapOvr>
+</p:sld>
+</file>
+
+<file path=ppt/slides/slide17.xml><?xml version="1.0" encoding="utf-8"?>
 <p:sld xmlns:a="http://schemas.openxmlformats.org/drawingml/2006/main" xmlns:r="http://schemas.openxmlformats.org/officeDocument/2006/relationships" xmlns:p="http://schemas.openxmlformats.org/presentationml/2006/main" show="0">
   <p:cSld>
     <p:spTree>
@@ -9047,7 +10420,7 @@
 </p:sld>
 </file>
 
-<file path=ppt/slides/slide16.xml><?xml version="1.0" encoding="utf-8"?>
+<file path=ppt/slides/slide18.xml><?xml version="1.0" encoding="utf-8"?>
 <p:sld xmlns:a="http://schemas.openxmlformats.org/drawingml/2006/main" xmlns:r="http://schemas.openxmlformats.org/officeDocument/2006/relationships" xmlns:p="http://schemas.openxmlformats.org/presentationml/2006/main">
   <p:cSld>
     <p:spTree>
@@ -9479,7 +10852,7 @@
 </p:sld>
 </file>
 
-<file path=ppt/slides/slide17.xml><?xml version="1.0" encoding="utf-8"?>
+<file path=ppt/slides/slide19.xml><?xml version="1.0" encoding="utf-8"?>
 <p:sld xmlns:a="http://schemas.openxmlformats.org/drawingml/2006/main" xmlns:r="http://schemas.openxmlformats.org/officeDocument/2006/relationships" xmlns:p="http://schemas.openxmlformats.org/presentationml/2006/main">
   <p:cSld>
     <p:spTree>
@@ -10031,328 +11404,6 @@
 </p:sld>
 </file>
 
-<file path=ppt/slides/slide18.xml><?xml version="1.0" encoding="utf-8"?>
-<p:sld xmlns:a="http://schemas.openxmlformats.org/drawingml/2006/main" xmlns:r="http://schemas.openxmlformats.org/officeDocument/2006/relationships" xmlns:p="http://schemas.openxmlformats.org/presentationml/2006/main">
-  <p:cSld>
-    <p:spTree>
-      <p:nvGrpSpPr>
-        <p:cNvPr id="1" name=""/>
-        <p:cNvGrpSpPr/>
-        <p:nvPr/>
-      </p:nvGrpSpPr>
-      <p:grpSpPr>
-        <a:xfrm>
-          <a:off x="0" y="0"/>
-          <a:ext cx="0" cy="0"/>
-          <a:chOff x="0" y="0"/>
-          <a:chExt cx="0" cy="0"/>
-        </a:xfrm>
-      </p:grpSpPr>
-      <p:sp>
-        <p:nvSpPr>
-          <p:cNvPr id="3" name="Content Placeholder 2">
-            <a:extLst>
-              <a:ext uri="{FF2B5EF4-FFF2-40B4-BE49-F238E27FC236}">
-                <a16:creationId xmlns:a16="http://schemas.microsoft.com/office/drawing/2014/main" id="{258E6AF3-7615-4BD1-878E-A94C93E98F90}"/>
-              </a:ext>
-            </a:extLst>
-          </p:cNvPr>
-          <p:cNvSpPr>
-            <a:spLocks noGrp="1"/>
-          </p:cNvSpPr>
-          <p:nvPr>
-            <p:ph idx="1"/>
-          </p:nvPr>
-        </p:nvSpPr>
-        <p:spPr>
-          <a:xfrm>
-            <a:off x="838200" y="1324927"/>
-            <a:ext cx="10515600" cy="4898217"/>
-          </a:xfrm>
-        </p:spPr>
-        <p:txBody>
-          <a:bodyPr>
-            <a:normAutofit/>
-          </a:bodyPr>
-          <a:lstStyle/>
-          <a:p>
-            <a:pPr marL="0" indent="0">
-              <a:buNone/>
-            </a:pPr>
-            <a:r>
-              <a:rPr lang="en-US" dirty="0"/>
-              <a:t>Students enrolled for undergraduate credit are evaluated by the following weights: </a:t>
-            </a:r>
-          </a:p>
-          <a:p>
-            <a:r>
-              <a:rPr lang="en-US" b="1" dirty="0"/>
-              <a:t>10% Class Participation </a:t>
-            </a:r>
-            <a:r>
-              <a:rPr lang="en-US" dirty="0"/>
-              <a:t>– Class participation in online discussions</a:t>
-            </a:r>
-          </a:p>
-          <a:p>
-            <a:r>
-              <a:rPr lang="en-US" b="1" dirty="0"/>
-              <a:t>90%	Assignments </a:t>
-            </a:r>
-            <a:r>
-              <a:rPr lang="en-US" dirty="0"/>
-              <a:t>– Hands-on assignments for most lessons </a:t>
-            </a:r>
-          </a:p>
-          <a:p>
-            <a:pPr lvl="1"/>
-            <a:r>
-              <a:rPr lang="en-US" dirty="0"/>
-              <a:t>Expect 9 assignments</a:t>
-            </a:r>
-          </a:p>
-        </p:txBody>
-      </p:sp>
-      <p:sp>
-        <p:nvSpPr>
-          <p:cNvPr id="6" name="Title 1">
-            <a:extLst>
-              <a:ext uri="{FF2B5EF4-FFF2-40B4-BE49-F238E27FC236}">
-                <a16:creationId xmlns:a16="http://schemas.microsoft.com/office/drawing/2014/main" id="{CD29F70F-B868-451B-A65D-8721F4C7A2D9}"/>
-              </a:ext>
-            </a:extLst>
-          </p:cNvPr>
-          <p:cNvSpPr txBox="1">
-            <a:spLocks/>
-          </p:cNvSpPr>
-          <p:nvPr/>
-        </p:nvSpPr>
-        <p:spPr>
-          <a:xfrm>
-            <a:off x="838200" y="-635"/>
-            <a:ext cx="10515600" cy="1325563"/>
-          </a:xfrm>
-          <a:prstGeom prst="rect">
-            <a:avLst/>
-          </a:prstGeom>
-        </p:spPr>
-        <p:txBody>
-          <a:bodyPr vert="horz" lIns="91440" tIns="45720" rIns="91440" bIns="45720" rtlCol="0" anchor="ctr">
-            <a:normAutofit/>
-          </a:bodyPr>
-          <a:lstStyle>
-            <a:lvl1pPr algn="l" defTabSz="914400" rtl="0" eaLnBrk="1" latinLnBrk="0" hangingPunct="1">
-              <a:lnSpc>
-                <a:spcPct val="90000"/>
-              </a:lnSpc>
-              <a:spcBef>
-                <a:spcPct val="0"/>
-              </a:spcBef>
-              <a:buNone/>
-              <a:defRPr sz="4400" kern="1200">
-                <a:solidFill>
-                  <a:schemeClr val="tx1"/>
-                </a:solidFill>
-                <a:latin typeface="+mj-lt"/>
-                <a:ea typeface="+mj-ea"/>
-                <a:cs typeface="+mj-cs"/>
-              </a:defRPr>
-            </a:lvl1pPr>
-          </a:lstStyle>
-          <a:p>
-            <a:r>
-              <a:rPr lang="en-US" dirty="0">
-                <a:latin typeface="+mn-lt"/>
-              </a:rPr>
-              <a:t>Undergraduate Credit Grading</a:t>
-            </a:r>
-          </a:p>
-        </p:txBody>
-      </p:sp>
-    </p:spTree>
-    <p:extLst>
-      <p:ext uri="{BB962C8B-B14F-4D97-AF65-F5344CB8AC3E}">
-        <p14:creationId xmlns:p14="http://schemas.microsoft.com/office/powerpoint/2010/main" val="3245357042"/>
-      </p:ext>
-    </p:extLst>
-  </p:cSld>
-  <p:clrMapOvr>
-    <a:masterClrMapping/>
-  </p:clrMapOvr>
-</p:sld>
-</file>
-
-<file path=ppt/slides/slide19.xml><?xml version="1.0" encoding="utf-8"?>
-<p:sld xmlns:a="http://schemas.openxmlformats.org/drawingml/2006/main" xmlns:r="http://schemas.openxmlformats.org/officeDocument/2006/relationships" xmlns:p="http://schemas.openxmlformats.org/presentationml/2006/main">
-  <p:cSld>
-    <p:spTree>
-      <p:nvGrpSpPr>
-        <p:cNvPr id="1" name=""/>
-        <p:cNvGrpSpPr/>
-        <p:nvPr/>
-      </p:nvGrpSpPr>
-      <p:grpSpPr>
-        <a:xfrm>
-          <a:off x="0" y="0"/>
-          <a:ext cx="0" cy="0"/>
-          <a:chOff x="0" y="0"/>
-          <a:chExt cx="0" cy="0"/>
-        </a:xfrm>
-      </p:grpSpPr>
-      <p:sp>
-        <p:nvSpPr>
-          <p:cNvPr id="3" name="Content Placeholder 2">
-            <a:extLst>
-              <a:ext uri="{FF2B5EF4-FFF2-40B4-BE49-F238E27FC236}">
-                <a16:creationId xmlns:a16="http://schemas.microsoft.com/office/drawing/2014/main" id="{258E6AF3-7615-4BD1-878E-A94C93E98F90}"/>
-              </a:ext>
-            </a:extLst>
-          </p:cNvPr>
-          <p:cNvSpPr>
-            <a:spLocks noGrp="1"/>
-          </p:cNvSpPr>
-          <p:nvPr>
-            <p:ph idx="1"/>
-          </p:nvPr>
-        </p:nvSpPr>
-        <p:spPr>
-          <a:xfrm>
-            <a:off x="838200" y="1324927"/>
-            <a:ext cx="10515600" cy="4898217"/>
-          </a:xfrm>
-        </p:spPr>
-        <p:txBody>
-          <a:bodyPr>
-            <a:normAutofit/>
-          </a:bodyPr>
-          <a:lstStyle/>
-          <a:p>
-            <a:pPr marL="0" indent="0">
-              <a:buNone/>
-            </a:pPr>
-            <a:r>
-              <a:rPr lang="en-US" dirty="0"/>
-              <a:t>Students enrolled for graduate credit are evaluated by the following weights: </a:t>
-            </a:r>
-          </a:p>
-          <a:p>
-            <a:r>
-              <a:rPr lang="en-US" b="1" dirty="0"/>
-              <a:t>10% Class Participation </a:t>
-            </a:r>
-            <a:r>
-              <a:rPr lang="en-US" dirty="0"/>
-              <a:t>– Class participation in online discussions</a:t>
-            </a:r>
-          </a:p>
-          <a:p>
-            <a:r>
-              <a:rPr lang="en-US" b="1" dirty="0"/>
-              <a:t>65%	Assignments </a:t>
-            </a:r>
-            <a:r>
-              <a:rPr lang="en-US" dirty="0"/>
-              <a:t>– Hands-on assignments for most lessons</a:t>
-            </a:r>
-          </a:p>
-          <a:p>
-            <a:pPr lvl="1"/>
-            <a:r>
-              <a:rPr lang="en-US" dirty="0"/>
-              <a:t>Expect 9 assignments</a:t>
-            </a:r>
-          </a:p>
-          <a:p>
-            <a:r>
-              <a:rPr lang="en-US" b="1" dirty="0"/>
-              <a:t>5% Project proposal </a:t>
-            </a:r>
-            <a:r>
-              <a:rPr lang="en-US" dirty="0"/>
-              <a:t>– Proposal describing the problem you wish to address and methods you plan to apply. Based on your proposal, your instructor will approve your project as appropriate for the course. </a:t>
-            </a:r>
-          </a:p>
-          <a:p>
-            <a:r>
-              <a:rPr lang="en-US" b="1" dirty="0"/>
-              <a:t>20%	Project </a:t>
-            </a:r>
-            <a:r>
-              <a:rPr lang="en-US" dirty="0"/>
-              <a:t>– Independent data mining project report – More on this next class</a:t>
-            </a:r>
-          </a:p>
-        </p:txBody>
-      </p:sp>
-      <p:sp>
-        <p:nvSpPr>
-          <p:cNvPr id="6" name="Title 1">
-            <a:extLst>
-              <a:ext uri="{FF2B5EF4-FFF2-40B4-BE49-F238E27FC236}">
-                <a16:creationId xmlns:a16="http://schemas.microsoft.com/office/drawing/2014/main" id="{CD29F70F-B868-451B-A65D-8721F4C7A2D9}"/>
-              </a:ext>
-            </a:extLst>
-          </p:cNvPr>
-          <p:cNvSpPr txBox="1">
-            <a:spLocks/>
-          </p:cNvSpPr>
-          <p:nvPr/>
-        </p:nvSpPr>
-        <p:spPr>
-          <a:xfrm>
-            <a:off x="838200" y="-635"/>
-            <a:ext cx="10515600" cy="1325563"/>
-          </a:xfrm>
-          <a:prstGeom prst="rect">
-            <a:avLst/>
-          </a:prstGeom>
-        </p:spPr>
-        <p:txBody>
-          <a:bodyPr vert="horz" lIns="91440" tIns="45720" rIns="91440" bIns="45720" rtlCol="0" anchor="ctr">
-            <a:normAutofit/>
-          </a:bodyPr>
-          <a:lstStyle>
-            <a:lvl1pPr algn="l" defTabSz="914400" rtl="0" eaLnBrk="1" latinLnBrk="0" hangingPunct="1">
-              <a:lnSpc>
-                <a:spcPct val="90000"/>
-              </a:lnSpc>
-              <a:spcBef>
-                <a:spcPct val="0"/>
-              </a:spcBef>
-              <a:buNone/>
-              <a:defRPr sz="4400" kern="1200">
-                <a:solidFill>
-                  <a:schemeClr val="tx1"/>
-                </a:solidFill>
-                <a:latin typeface="+mj-lt"/>
-                <a:ea typeface="+mj-ea"/>
-                <a:cs typeface="+mj-cs"/>
-              </a:defRPr>
-            </a:lvl1pPr>
-          </a:lstStyle>
-          <a:p>
-            <a:r>
-              <a:rPr lang="en-US" dirty="0">
-                <a:latin typeface="+mn-lt"/>
-              </a:rPr>
-              <a:t>Graduate Credit Grading</a:t>
-            </a:r>
-          </a:p>
-        </p:txBody>
-      </p:sp>
-    </p:spTree>
-    <p:extLst>
-      <p:ext uri="{BB962C8B-B14F-4D97-AF65-F5344CB8AC3E}">
-        <p14:creationId xmlns:p14="http://schemas.microsoft.com/office/powerpoint/2010/main" val="3485671203"/>
-      </p:ext>
-    </p:extLst>
-  </p:cSld>
-  <p:clrMapOvr>
-    <a:masterClrMapping/>
-  </p:clrMapOvr>
-</p:sld>
-</file>
-
 <file path=ppt/slides/slide2.xml><?xml version="1.0" encoding="utf-8"?>
 <p:sld xmlns:a="http://schemas.openxmlformats.org/drawingml/2006/main" xmlns:r="http://schemas.openxmlformats.org/officeDocument/2006/relationships" xmlns:p="http://schemas.openxmlformats.org/presentationml/2006/main">
   <p:cSld>
@@ -10813,6 +11864,328 @@
         <p:spPr>
           <a:xfrm>
             <a:off x="838200" y="1324927"/>
+            <a:ext cx="10515600" cy="4898217"/>
+          </a:xfrm>
+        </p:spPr>
+        <p:txBody>
+          <a:bodyPr>
+            <a:normAutofit/>
+          </a:bodyPr>
+          <a:lstStyle/>
+          <a:p>
+            <a:pPr marL="0" indent="0">
+              <a:buNone/>
+            </a:pPr>
+            <a:r>
+              <a:rPr lang="en-US" dirty="0"/>
+              <a:t>Students enrolled for undergraduate credit are evaluated by the following weights: </a:t>
+            </a:r>
+          </a:p>
+          <a:p>
+            <a:r>
+              <a:rPr lang="en-US" b="1" dirty="0"/>
+              <a:t>10% Class Participation </a:t>
+            </a:r>
+            <a:r>
+              <a:rPr lang="en-US" dirty="0"/>
+              <a:t>– Class participation in online discussions</a:t>
+            </a:r>
+          </a:p>
+          <a:p>
+            <a:r>
+              <a:rPr lang="en-US" b="1" dirty="0"/>
+              <a:t>90%	Assignments </a:t>
+            </a:r>
+            <a:r>
+              <a:rPr lang="en-US" dirty="0"/>
+              <a:t>– Hands-on assignments for most lessons </a:t>
+            </a:r>
+          </a:p>
+          <a:p>
+            <a:pPr lvl="1"/>
+            <a:r>
+              <a:rPr lang="en-US" dirty="0"/>
+              <a:t>Expect 9 assignments</a:t>
+            </a:r>
+          </a:p>
+        </p:txBody>
+      </p:sp>
+      <p:sp>
+        <p:nvSpPr>
+          <p:cNvPr id="6" name="Title 1">
+            <a:extLst>
+              <a:ext uri="{FF2B5EF4-FFF2-40B4-BE49-F238E27FC236}">
+                <a16:creationId xmlns:a16="http://schemas.microsoft.com/office/drawing/2014/main" id="{CD29F70F-B868-451B-A65D-8721F4C7A2D9}"/>
+              </a:ext>
+            </a:extLst>
+          </p:cNvPr>
+          <p:cNvSpPr txBox="1">
+            <a:spLocks/>
+          </p:cNvSpPr>
+          <p:nvPr/>
+        </p:nvSpPr>
+        <p:spPr>
+          <a:xfrm>
+            <a:off x="838200" y="-635"/>
+            <a:ext cx="10515600" cy="1325563"/>
+          </a:xfrm>
+          <a:prstGeom prst="rect">
+            <a:avLst/>
+          </a:prstGeom>
+        </p:spPr>
+        <p:txBody>
+          <a:bodyPr vert="horz" lIns="91440" tIns="45720" rIns="91440" bIns="45720" rtlCol="0" anchor="ctr">
+            <a:normAutofit/>
+          </a:bodyPr>
+          <a:lstStyle>
+            <a:lvl1pPr algn="l" defTabSz="914400" rtl="0" eaLnBrk="1" latinLnBrk="0" hangingPunct="1">
+              <a:lnSpc>
+                <a:spcPct val="90000"/>
+              </a:lnSpc>
+              <a:spcBef>
+                <a:spcPct val="0"/>
+              </a:spcBef>
+              <a:buNone/>
+              <a:defRPr sz="4400" kern="1200">
+                <a:solidFill>
+                  <a:schemeClr val="tx1"/>
+                </a:solidFill>
+                <a:latin typeface="+mj-lt"/>
+                <a:ea typeface="+mj-ea"/>
+                <a:cs typeface="+mj-cs"/>
+              </a:defRPr>
+            </a:lvl1pPr>
+          </a:lstStyle>
+          <a:p>
+            <a:r>
+              <a:rPr lang="en-US" dirty="0">
+                <a:latin typeface="+mn-lt"/>
+              </a:rPr>
+              <a:t>Undergraduate Credit Grading</a:t>
+            </a:r>
+          </a:p>
+        </p:txBody>
+      </p:sp>
+    </p:spTree>
+    <p:extLst>
+      <p:ext uri="{BB962C8B-B14F-4D97-AF65-F5344CB8AC3E}">
+        <p14:creationId xmlns:p14="http://schemas.microsoft.com/office/powerpoint/2010/main" val="3245357042"/>
+      </p:ext>
+    </p:extLst>
+  </p:cSld>
+  <p:clrMapOvr>
+    <a:masterClrMapping/>
+  </p:clrMapOvr>
+</p:sld>
+</file>
+
+<file path=ppt/slides/slide21.xml><?xml version="1.0" encoding="utf-8"?>
+<p:sld xmlns:a="http://schemas.openxmlformats.org/drawingml/2006/main" xmlns:r="http://schemas.openxmlformats.org/officeDocument/2006/relationships" xmlns:p="http://schemas.openxmlformats.org/presentationml/2006/main">
+  <p:cSld>
+    <p:spTree>
+      <p:nvGrpSpPr>
+        <p:cNvPr id="1" name=""/>
+        <p:cNvGrpSpPr/>
+        <p:nvPr/>
+      </p:nvGrpSpPr>
+      <p:grpSpPr>
+        <a:xfrm>
+          <a:off x="0" y="0"/>
+          <a:ext cx="0" cy="0"/>
+          <a:chOff x="0" y="0"/>
+          <a:chExt cx="0" cy="0"/>
+        </a:xfrm>
+      </p:grpSpPr>
+      <p:sp>
+        <p:nvSpPr>
+          <p:cNvPr id="3" name="Content Placeholder 2">
+            <a:extLst>
+              <a:ext uri="{FF2B5EF4-FFF2-40B4-BE49-F238E27FC236}">
+                <a16:creationId xmlns:a16="http://schemas.microsoft.com/office/drawing/2014/main" id="{258E6AF3-7615-4BD1-878E-A94C93E98F90}"/>
+              </a:ext>
+            </a:extLst>
+          </p:cNvPr>
+          <p:cNvSpPr>
+            <a:spLocks noGrp="1"/>
+          </p:cNvSpPr>
+          <p:nvPr>
+            <p:ph idx="1"/>
+          </p:nvPr>
+        </p:nvSpPr>
+        <p:spPr>
+          <a:xfrm>
+            <a:off x="838200" y="1324927"/>
+            <a:ext cx="10515600" cy="4898217"/>
+          </a:xfrm>
+        </p:spPr>
+        <p:txBody>
+          <a:bodyPr>
+            <a:normAutofit/>
+          </a:bodyPr>
+          <a:lstStyle/>
+          <a:p>
+            <a:pPr marL="0" indent="0">
+              <a:buNone/>
+            </a:pPr>
+            <a:r>
+              <a:rPr lang="en-US" dirty="0"/>
+              <a:t>Students enrolled for graduate credit are evaluated by the following weights: </a:t>
+            </a:r>
+          </a:p>
+          <a:p>
+            <a:r>
+              <a:rPr lang="en-US" b="1" dirty="0"/>
+              <a:t>10% Class Participation </a:t>
+            </a:r>
+            <a:r>
+              <a:rPr lang="en-US" dirty="0"/>
+              <a:t>– Class participation in online discussions</a:t>
+            </a:r>
+          </a:p>
+          <a:p>
+            <a:r>
+              <a:rPr lang="en-US" b="1" dirty="0"/>
+              <a:t>65%	Assignments </a:t>
+            </a:r>
+            <a:r>
+              <a:rPr lang="en-US" dirty="0"/>
+              <a:t>– Hands-on assignments for most lessons</a:t>
+            </a:r>
+          </a:p>
+          <a:p>
+            <a:pPr lvl="1"/>
+            <a:r>
+              <a:rPr lang="en-US" dirty="0"/>
+              <a:t>Expect 9 assignments</a:t>
+            </a:r>
+          </a:p>
+          <a:p>
+            <a:r>
+              <a:rPr lang="en-US" b="1" dirty="0"/>
+              <a:t>5% Project proposal </a:t>
+            </a:r>
+            <a:r>
+              <a:rPr lang="en-US" dirty="0"/>
+              <a:t>– Proposal describing the problem you wish to address and methods you plan to apply. Based on your proposal, your instructor will approve your project as appropriate for the course. </a:t>
+            </a:r>
+          </a:p>
+          <a:p>
+            <a:r>
+              <a:rPr lang="en-US" b="1" dirty="0"/>
+              <a:t>20%	Project </a:t>
+            </a:r>
+            <a:r>
+              <a:rPr lang="en-US" dirty="0"/>
+              <a:t>– Independent data mining project report – More on this next class</a:t>
+            </a:r>
+          </a:p>
+        </p:txBody>
+      </p:sp>
+      <p:sp>
+        <p:nvSpPr>
+          <p:cNvPr id="6" name="Title 1">
+            <a:extLst>
+              <a:ext uri="{FF2B5EF4-FFF2-40B4-BE49-F238E27FC236}">
+                <a16:creationId xmlns:a16="http://schemas.microsoft.com/office/drawing/2014/main" id="{CD29F70F-B868-451B-A65D-8721F4C7A2D9}"/>
+              </a:ext>
+            </a:extLst>
+          </p:cNvPr>
+          <p:cNvSpPr txBox="1">
+            <a:spLocks/>
+          </p:cNvSpPr>
+          <p:nvPr/>
+        </p:nvSpPr>
+        <p:spPr>
+          <a:xfrm>
+            <a:off x="838200" y="-635"/>
+            <a:ext cx="10515600" cy="1325563"/>
+          </a:xfrm>
+          <a:prstGeom prst="rect">
+            <a:avLst/>
+          </a:prstGeom>
+        </p:spPr>
+        <p:txBody>
+          <a:bodyPr vert="horz" lIns="91440" tIns="45720" rIns="91440" bIns="45720" rtlCol="0" anchor="ctr">
+            <a:normAutofit/>
+          </a:bodyPr>
+          <a:lstStyle>
+            <a:lvl1pPr algn="l" defTabSz="914400" rtl="0" eaLnBrk="1" latinLnBrk="0" hangingPunct="1">
+              <a:lnSpc>
+                <a:spcPct val="90000"/>
+              </a:lnSpc>
+              <a:spcBef>
+                <a:spcPct val="0"/>
+              </a:spcBef>
+              <a:buNone/>
+              <a:defRPr sz="4400" kern="1200">
+                <a:solidFill>
+                  <a:schemeClr val="tx1"/>
+                </a:solidFill>
+                <a:latin typeface="+mj-lt"/>
+                <a:ea typeface="+mj-ea"/>
+                <a:cs typeface="+mj-cs"/>
+              </a:defRPr>
+            </a:lvl1pPr>
+          </a:lstStyle>
+          <a:p>
+            <a:r>
+              <a:rPr lang="en-US" dirty="0">
+                <a:latin typeface="+mn-lt"/>
+              </a:rPr>
+              <a:t>Graduate Credit Grading</a:t>
+            </a:r>
+          </a:p>
+        </p:txBody>
+      </p:sp>
+    </p:spTree>
+    <p:extLst>
+      <p:ext uri="{BB962C8B-B14F-4D97-AF65-F5344CB8AC3E}">
+        <p14:creationId xmlns:p14="http://schemas.microsoft.com/office/powerpoint/2010/main" val="3485671203"/>
+      </p:ext>
+    </p:extLst>
+  </p:cSld>
+  <p:clrMapOvr>
+    <a:masterClrMapping/>
+  </p:clrMapOvr>
+</p:sld>
+</file>
+
+<file path=ppt/slides/slide22.xml><?xml version="1.0" encoding="utf-8"?>
+<p:sld xmlns:a="http://schemas.openxmlformats.org/drawingml/2006/main" xmlns:r="http://schemas.openxmlformats.org/officeDocument/2006/relationships" xmlns:p="http://schemas.openxmlformats.org/presentationml/2006/main">
+  <p:cSld>
+    <p:spTree>
+      <p:nvGrpSpPr>
+        <p:cNvPr id="1" name=""/>
+        <p:cNvGrpSpPr/>
+        <p:nvPr/>
+      </p:nvGrpSpPr>
+      <p:grpSpPr>
+        <a:xfrm>
+          <a:off x="0" y="0"/>
+          <a:ext cx="0" cy="0"/>
+          <a:chOff x="0" y="0"/>
+          <a:chExt cx="0" cy="0"/>
+        </a:xfrm>
+      </p:grpSpPr>
+      <p:sp>
+        <p:nvSpPr>
+          <p:cNvPr id="3" name="Content Placeholder 2">
+            <a:extLst>
+              <a:ext uri="{FF2B5EF4-FFF2-40B4-BE49-F238E27FC236}">
+                <a16:creationId xmlns:a16="http://schemas.microsoft.com/office/drawing/2014/main" id="{258E6AF3-7615-4BD1-878E-A94C93E98F90}"/>
+              </a:ext>
+            </a:extLst>
+          </p:cNvPr>
+          <p:cNvSpPr>
+            <a:spLocks noGrp="1"/>
+          </p:cNvSpPr>
+          <p:nvPr>
+            <p:ph idx="1"/>
+          </p:nvPr>
+        </p:nvSpPr>
+        <p:spPr>
+          <a:xfrm>
+            <a:off x="838200" y="1324927"/>
             <a:ext cx="10515600" cy="5311004"/>
           </a:xfrm>
         </p:spPr>
@@ -11238,7 +12611,7 @@
 </p:sld>
 </file>
 
-<file path=ppt/slides/slide21.xml><?xml version="1.0" encoding="utf-8"?>
+<file path=ppt/slides/slide23.xml><?xml version="1.0" encoding="utf-8"?>
 <p:sld xmlns:a="http://schemas.openxmlformats.org/drawingml/2006/main" xmlns:r="http://schemas.openxmlformats.org/officeDocument/2006/relationships" xmlns:p="http://schemas.openxmlformats.org/presentationml/2006/main">
   <p:cSld>
     <p:spTree>
@@ -11998,7 +13371,7 @@
 </p:sld>
 </file>
 
-<file path=ppt/slides/slide22.xml><?xml version="1.0" encoding="utf-8"?>
+<file path=ppt/slides/slide24.xml><?xml version="1.0" encoding="utf-8"?>
 <p:sld xmlns:a="http://schemas.openxmlformats.org/drawingml/2006/main" xmlns:r="http://schemas.openxmlformats.org/officeDocument/2006/relationships" xmlns:p="http://schemas.openxmlformats.org/presentationml/2006/main">
   <p:cSld>
     <p:spTree>
@@ -12297,7 +13670,7 @@
 </p:sld>
 </file>
 
-<file path=ppt/slides/slide23.xml><?xml version="1.0" encoding="utf-8"?>
+<file path=ppt/slides/slide25.xml><?xml version="1.0" encoding="utf-8"?>
 <p:sld xmlns:a="http://schemas.openxmlformats.org/drawingml/2006/main" xmlns:r="http://schemas.openxmlformats.org/officeDocument/2006/relationships" xmlns:p="http://schemas.openxmlformats.org/presentationml/2006/main">
   <p:cSld>
     <p:spTree>
@@ -12967,7 +14340,7 @@
 </p:sld>
 </file>
 
-<file path=ppt/slides/slide24.xml><?xml version="1.0" encoding="utf-8"?>
+<file path=ppt/slides/slide26.xml><?xml version="1.0" encoding="utf-8"?>
 <p:sld xmlns:a="http://schemas.openxmlformats.org/drawingml/2006/main" xmlns:r="http://schemas.openxmlformats.org/officeDocument/2006/relationships" xmlns:p="http://schemas.openxmlformats.org/presentationml/2006/main">
   <p:cSld>
     <p:spTree>
@@ -13428,7 +14801,7 @@
 </p:sld>
 </file>
 
-<file path=ppt/slides/slide25.xml><?xml version="1.0" encoding="utf-8"?>
+<file path=ppt/slides/slide27.xml><?xml version="1.0" encoding="utf-8"?>
 <p:sld xmlns:a="http://schemas.openxmlformats.org/drawingml/2006/main" xmlns:r="http://schemas.openxmlformats.org/officeDocument/2006/relationships" xmlns:p="http://schemas.openxmlformats.org/presentationml/2006/main" show="0">
   <p:cSld>
     <p:spTree>
@@ -13607,7 +14980,7 @@
 </p:sld>
 </file>
 
-<file path=ppt/slides/slide26.xml><?xml version="1.0" encoding="utf-8"?>
+<file path=ppt/slides/slide28.xml><?xml version="1.0" encoding="utf-8"?>
 <p:sld xmlns:a="http://schemas.openxmlformats.org/drawingml/2006/main" xmlns:r="http://schemas.openxmlformats.org/officeDocument/2006/relationships" xmlns:p="http://schemas.openxmlformats.org/presentationml/2006/main">
   <p:cSld>
     <p:spTree>
@@ -13667,7 +15040,7 @@
 </p:sld>
 </file>
 
-<file path=ppt/slides/slide27.xml><?xml version="1.0" encoding="utf-8"?>
+<file path=ppt/slides/slide29.xml><?xml version="1.0" encoding="utf-8"?>
 <p:sld xmlns:a="http://schemas.openxmlformats.org/drawingml/2006/main" xmlns:r="http://schemas.openxmlformats.org/officeDocument/2006/relationships" xmlns:p="http://schemas.openxmlformats.org/presentationml/2006/main">
   <p:cSld>
     <p:spTree>
@@ -14053,7 +15426,509 @@
 </p:sld>
 </file>
 
-<file path=ppt/slides/slide28.xml><?xml version="1.0" encoding="utf-8"?>
+<file path=ppt/slides/slide3.xml><?xml version="1.0" encoding="utf-8"?>
+<p:sld xmlns:a="http://schemas.openxmlformats.org/drawingml/2006/main" xmlns:r="http://schemas.openxmlformats.org/officeDocument/2006/relationships" xmlns:p="http://schemas.openxmlformats.org/presentationml/2006/main">
+  <p:cSld>
+    <p:spTree>
+      <p:nvGrpSpPr>
+        <p:cNvPr id="1" name=""/>
+        <p:cNvGrpSpPr/>
+        <p:nvPr/>
+      </p:nvGrpSpPr>
+      <p:grpSpPr>
+        <a:xfrm>
+          <a:off x="0" y="0"/>
+          <a:ext cx="0" cy="0"/>
+          <a:chOff x="0" y="0"/>
+          <a:chExt cx="0" cy="0"/>
+        </a:xfrm>
+      </p:grpSpPr>
+      <p:sp>
+        <p:nvSpPr>
+          <p:cNvPr id="3" name="Content Placeholder 2">
+            <a:extLst>
+              <a:ext uri="{FF2B5EF4-FFF2-40B4-BE49-F238E27FC236}">
+                <a16:creationId xmlns:a16="http://schemas.microsoft.com/office/drawing/2014/main" id="{258E6AF3-7615-4BD1-878E-A94C93E98F90}"/>
+              </a:ext>
+            </a:extLst>
+          </p:cNvPr>
+          <p:cNvSpPr>
+            <a:spLocks noGrp="1"/>
+          </p:cNvSpPr>
+          <p:nvPr>
+            <p:ph idx="1"/>
+          </p:nvPr>
+        </p:nvSpPr>
+        <p:spPr/>
+        <p:txBody>
+          <a:bodyPr/>
+          <a:lstStyle/>
+          <a:p>
+            <a:pPr marL="0" indent="0">
+              <a:buNone/>
+            </a:pPr>
+            <a:r>
+              <a:rPr lang="en-US" dirty="0"/>
+              <a:t>Data mining is the science of </a:t>
+            </a:r>
+            <a:r>
+              <a:rPr lang="en-US" b="1" dirty="0"/>
+              <a:t>actionable knowledge discovery</a:t>
+            </a:r>
+            <a:r>
+              <a:rPr lang="en-US" dirty="0"/>
+              <a:t> from inferences on massive datasets </a:t>
+            </a:r>
+            <a:endParaRPr lang="en-US" b="1" dirty="0"/>
+          </a:p>
+          <a:p>
+            <a:r>
+              <a:rPr lang="en-US" dirty="0"/>
+              <a:t>Known as </a:t>
+            </a:r>
+            <a:r>
+              <a:rPr lang="en-US" b="1" dirty="0"/>
+              <a:t>knowledge discovery and data mining (KDD) </a:t>
+            </a:r>
+          </a:p>
+          <a:p>
+            <a:r>
+              <a:rPr lang="en-US" dirty="0"/>
+              <a:t>Data mining is an </a:t>
+            </a:r>
+            <a:r>
+              <a:rPr lang="en-US" b="1" dirty="0"/>
+              <a:t>iterative process of exploration   </a:t>
+            </a:r>
+          </a:p>
+          <a:p>
+            <a:r>
+              <a:rPr lang="en-US" dirty="0"/>
+              <a:t>Exploration is difficult   </a:t>
+            </a:r>
+          </a:p>
+          <a:p>
+            <a:pPr lvl="1"/>
+            <a:r>
+              <a:rPr lang="en-US" dirty="0"/>
+              <a:t>Many steps</a:t>
+            </a:r>
+          </a:p>
+          <a:p>
+            <a:pPr lvl="1"/>
+            <a:r>
+              <a:rPr lang="en-US" dirty="0"/>
+              <a:t>Only some attempts work </a:t>
+            </a:r>
+          </a:p>
+          <a:p>
+            <a:r>
+              <a:rPr lang="en-US" b="1" dirty="0">
+                <a:solidFill>
+                  <a:srgbClr val="C00000"/>
+                </a:solidFill>
+              </a:rPr>
+              <a:t>Try lots of ideas, fail fast, keep the ones that work! </a:t>
+            </a:r>
+          </a:p>
+          <a:p>
+            <a:pPr lvl="1"/>
+            <a:r>
+              <a:rPr lang="en-US" b="1" dirty="0"/>
+              <a:t>Keep this in mind when doing your graduate project!</a:t>
+            </a:r>
+          </a:p>
+        </p:txBody>
+      </p:sp>
+      <p:sp>
+        <p:nvSpPr>
+          <p:cNvPr id="6" name="Title 1">
+            <a:extLst>
+              <a:ext uri="{FF2B5EF4-FFF2-40B4-BE49-F238E27FC236}">
+                <a16:creationId xmlns:a16="http://schemas.microsoft.com/office/drawing/2014/main" id="{CD29F70F-B868-451B-A65D-8721F4C7A2D9}"/>
+              </a:ext>
+            </a:extLst>
+          </p:cNvPr>
+          <p:cNvSpPr txBox="1">
+            <a:spLocks/>
+          </p:cNvSpPr>
+          <p:nvPr/>
+        </p:nvSpPr>
+        <p:spPr>
+          <a:xfrm>
+            <a:off x="838200" y="-635"/>
+            <a:ext cx="10515600" cy="1325563"/>
+          </a:xfrm>
+          <a:prstGeom prst="rect">
+            <a:avLst/>
+          </a:prstGeom>
+        </p:spPr>
+        <p:txBody>
+          <a:bodyPr vert="horz" lIns="91440" tIns="45720" rIns="91440" bIns="45720" rtlCol="0" anchor="ctr">
+            <a:normAutofit/>
+          </a:bodyPr>
+          <a:lstStyle>
+            <a:lvl1pPr algn="l" defTabSz="914400" rtl="0" eaLnBrk="1" latinLnBrk="0" hangingPunct="1">
+              <a:lnSpc>
+                <a:spcPct val="90000"/>
+              </a:lnSpc>
+              <a:spcBef>
+                <a:spcPct val="0"/>
+              </a:spcBef>
+              <a:buNone/>
+              <a:defRPr sz="4400" kern="1200">
+                <a:solidFill>
+                  <a:schemeClr val="tx1"/>
+                </a:solidFill>
+                <a:latin typeface="+mj-lt"/>
+                <a:ea typeface="+mj-ea"/>
+                <a:cs typeface="+mj-cs"/>
+              </a:defRPr>
+            </a:lvl1pPr>
+          </a:lstStyle>
+          <a:p>
+            <a:r>
+              <a:rPr lang="en-US" dirty="0">
+                <a:latin typeface="+mn-lt"/>
+              </a:rPr>
+              <a:t>What is data mining?</a:t>
+            </a:r>
+          </a:p>
+        </p:txBody>
+      </p:sp>
+    </p:spTree>
+    <p:extLst>
+      <p:ext uri="{BB962C8B-B14F-4D97-AF65-F5344CB8AC3E}">
+        <p14:creationId xmlns:p14="http://schemas.microsoft.com/office/powerpoint/2010/main" val="115420158"/>
+      </p:ext>
+    </p:extLst>
+  </p:cSld>
+  <p:clrMapOvr>
+    <a:masterClrMapping/>
+  </p:clrMapOvr>
+  <p:timing>
+    <p:tnLst>
+      <p:par>
+        <p:cTn id="1" dur="indefinite" restart="never" nodeType="tmRoot">
+          <p:childTnLst>
+            <p:seq concurrent="1" nextAc="seek">
+              <p:cTn id="2" dur="indefinite" nodeType="mainSeq">
+                <p:childTnLst>
+                  <p:par>
+                    <p:cTn id="3" fill="hold">
+                      <p:stCondLst>
+                        <p:cond delay="indefinite"/>
+                      </p:stCondLst>
+                      <p:childTnLst>
+                        <p:par>
+                          <p:cTn id="4" fill="hold">
+                            <p:stCondLst>
+                              <p:cond delay="0"/>
+                            </p:stCondLst>
+                            <p:childTnLst>
+                              <p:par>
+                                <p:cTn id="5" presetID="1" presetClass="entr" presetSubtype="0" fill="hold" nodeType="clickEffect">
+                                  <p:stCondLst>
+                                    <p:cond delay="0"/>
+                                  </p:stCondLst>
+                                  <p:childTnLst>
+                                    <p:set>
+                                      <p:cBhvr>
+                                        <p:cTn id="6" dur="1" fill="hold">
+                                          <p:stCondLst>
+                                            <p:cond delay="0"/>
+                                          </p:stCondLst>
+                                        </p:cTn>
+                                        <p:tgtEl>
+                                          <p:spTgt spid="3">
+                                            <p:txEl>
+                                              <p:pRg st="1" end="1"/>
+                                            </p:txEl>
+                                          </p:spTgt>
+                                        </p:tgtEl>
+                                        <p:attrNameLst>
+                                          <p:attrName>style.visibility</p:attrName>
+                                        </p:attrNameLst>
+                                      </p:cBhvr>
+                                      <p:to>
+                                        <p:strVal val="visible"/>
+                                      </p:to>
+                                    </p:set>
+                                  </p:childTnLst>
+                                </p:cTn>
+                              </p:par>
+                            </p:childTnLst>
+                          </p:cTn>
+                        </p:par>
+                      </p:childTnLst>
+                    </p:cTn>
+                  </p:par>
+                  <p:par>
+                    <p:cTn id="7" fill="hold">
+                      <p:stCondLst>
+                        <p:cond delay="indefinite"/>
+                      </p:stCondLst>
+                      <p:childTnLst>
+                        <p:par>
+                          <p:cTn id="8" fill="hold">
+                            <p:stCondLst>
+                              <p:cond delay="0"/>
+                            </p:stCondLst>
+                            <p:childTnLst>
+                              <p:par>
+                                <p:cTn id="9" presetID="1" presetClass="entr" presetSubtype="0" fill="hold" nodeType="clickEffect">
+                                  <p:stCondLst>
+                                    <p:cond delay="0"/>
+                                  </p:stCondLst>
+                                  <p:childTnLst>
+                                    <p:set>
+                                      <p:cBhvr>
+                                        <p:cTn id="10" dur="1" fill="hold">
+                                          <p:stCondLst>
+                                            <p:cond delay="0"/>
+                                          </p:stCondLst>
+                                        </p:cTn>
+                                        <p:tgtEl>
+                                          <p:spTgt spid="3">
+                                            <p:txEl>
+                                              <p:pRg st="2" end="2"/>
+                                            </p:txEl>
+                                          </p:spTgt>
+                                        </p:tgtEl>
+                                        <p:attrNameLst>
+                                          <p:attrName>style.visibility</p:attrName>
+                                        </p:attrNameLst>
+                                      </p:cBhvr>
+                                      <p:to>
+                                        <p:strVal val="visible"/>
+                                      </p:to>
+                                    </p:set>
+                                  </p:childTnLst>
+                                </p:cTn>
+                              </p:par>
+                            </p:childTnLst>
+                          </p:cTn>
+                        </p:par>
+                      </p:childTnLst>
+                    </p:cTn>
+                  </p:par>
+                  <p:par>
+                    <p:cTn id="11" fill="hold">
+                      <p:stCondLst>
+                        <p:cond delay="indefinite"/>
+                      </p:stCondLst>
+                      <p:childTnLst>
+                        <p:par>
+                          <p:cTn id="12" fill="hold">
+                            <p:stCondLst>
+                              <p:cond delay="0"/>
+                            </p:stCondLst>
+                            <p:childTnLst>
+                              <p:par>
+                                <p:cTn id="13" presetID="1" presetClass="entr" presetSubtype="0" fill="hold" nodeType="clickEffect">
+                                  <p:stCondLst>
+                                    <p:cond delay="0"/>
+                                  </p:stCondLst>
+                                  <p:childTnLst>
+                                    <p:set>
+                                      <p:cBhvr>
+                                        <p:cTn id="14" dur="1" fill="hold">
+                                          <p:stCondLst>
+                                            <p:cond delay="0"/>
+                                          </p:stCondLst>
+                                        </p:cTn>
+                                        <p:tgtEl>
+                                          <p:spTgt spid="3">
+                                            <p:txEl>
+                                              <p:pRg st="3" end="3"/>
+                                            </p:txEl>
+                                          </p:spTgt>
+                                        </p:tgtEl>
+                                        <p:attrNameLst>
+                                          <p:attrName>style.visibility</p:attrName>
+                                        </p:attrNameLst>
+                                      </p:cBhvr>
+                                      <p:to>
+                                        <p:strVal val="visible"/>
+                                      </p:to>
+                                    </p:set>
+                                  </p:childTnLst>
+                                </p:cTn>
+                              </p:par>
+                              <p:par>
+                                <p:cTn id="15" presetID="1" presetClass="entr" presetSubtype="0" fill="hold" nodeType="withEffect">
+                                  <p:stCondLst>
+                                    <p:cond delay="0"/>
+                                  </p:stCondLst>
+                                  <p:childTnLst>
+                                    <p:set>
+                                      <p:cBhvr>
+                                        <p:cTn id="16" dur="1" fill="hold">
+                                          <p:stCondLst>
+                                            <p:cond delay="0"/>
+                                          </p:stCondLst>
+                                        </p:cTn>
+                                        <p:tgtEl>
+                                          <p:spTgt spid="3">
+                                            <p:txEl>
+                                              <p:pRg st="4" end="4"/>
+                                            </p:txEl>
+                                          </p:spTgt>
+                                        </p:tgtEl>
+                                        <p:attrNameLst>
+                                          <p:attrName>style.visibility</p:attrName>
+                                        </p:attrNameLst>
+                                      </p:cBhvr>
+                                      <p:to>
+                                        <p:strVal val="visible"/>
+                                      </p:to>
+                                    </p:set>
+                                  </p:childTnLst>
+                                </p:cTn>
+                              </p:par>
+                              <p:par>
+                                <p:cTn id="17" presetID="1" presetClass="entr" presetSubtype="0" fill="hold" nodeType="withEffect">
+                                  <p:stCondLst>
+                                    <p:cond delay="0"/>
+                                  </p:stCondLst>
+                                  <p:childTnLst>
+                                    <p:set>
+                                      <p:cBhvr>
+                                        <p:cTn id="18" dur="1" fill="hold">
+                                          <p:stCondLst>
+                                            <p:cond delay="0"/>
+                                          </p:stCondLst>
+                                        </p:cTn>
+                                        <p:tgtEl>
+                                          <p:spTgt spid="3">
+                                            <p:txEl>
+                                              <p:pRg st="5" end="5"/>
+                                            </p:txEl>
+                                          </p:spTgt>
+                                        </p:tgtEl>
+                                        <p:attrNameLst>
+                                          <p:attrName>style.visibility</p:attrName>
+                                        </p:attrNameLst>
+                                      </p:cBhvr>
+                                      <p:to>
+                                        <p:strVal val="visible"/>
+                                      </p:to>
+                                    </p:set>
+                                  </p:childTnLst>
+                                </p:cTn>
+                              </p:par>
+                            </p:childTnLst>
+                          </p:cTn>
+                        </p:par>
+                      </p:childTnLst>
+                    </p:cTn>
+                  </p:par>
+                  <p:par>
+                    <p:cTn id="19" fill="hold">
+                      <p:stCondLst>
+                        <p:cond delay="indefinite"/>
+                      </p:stCondLst>
+                      <p:childTnLst>
+                        <p:par>
+                          <p:cTn id="20" fill="hold">
+                            <p:stCondLst>
+                              <p:cond delay="0"/>
+                            </p:stCondLst>
+                            <p:childTnLst>
+                              <p:par>
+                                <p:cTn id="21" presetID="1" presetClass="entr" presetSubtype="0" fill="hold" nodeType="clickEffect">
+                                  <p:stCondLst>
+                                    <p:cond delay="0"/>
+                                  </p:stCondLst>
+                                  <p:childTnLst>
+                                    <p:set>
+                                      <p:cBhvr>
+                                        <p:cTn id="22" dur="1" fill="hold">
+                                          <p:stCondLst>
+                                            <p:cond delay="0"/>
+                                          </p:stCondLst>
+                                        </p:cTn>
+                                        <p:tgtEl>
+                                          <p:spTgt spid="3">
+                                            <p:txEl>
+                                              <p:pRg st="6" end="6"/>
+                                            </p:txEl>
+                                          </p:spTgt>
+                                        </p:tgtEl>
+                                        <p:attrNameLst>
+                                          <p:attrName>style.visibility</p:attrName>
+                                        </p:attrNameLst>
+                                      </p:cBhvr>
+                                      <p:to>
+                                        <p:strVal val="visible"/>
+                                      </p:to>
+                                    </p:set>
+                                  </p:childTnLst>
+                                </p:cTn>
+                              </p:par>
+                              <p:par>
+                                <p:cTn id="23" presetID="1" presetClass="entr" presetSubtype="0" fill="hold" nodeType="withEffect">
+                                  <p:stCondLst>
+                                    <p:cond delay="0"/>
+                                  </p:stCondLst>
+                                  <p:childTnLst>
+                                    <p:set>
+                                      <p:cBhvr>
+                                        <p:cTn id="24" dur="1" fill="hold">
+                                          <p:stCondLst>
+                                            <p:cond delay="0"/>
+                                          </p:stCondLst>
+                                        </p:cTn>
+                                        <p:tgtEl>
+                                          <p:spTgt spid="3">
+                                            <p:txEl>
+                                              <p:pRg st="7" end="7"/>
+                                            </p:txEl>
+                                          </p:spTgt>
+                                        </p:tgtEl>
+                                        <p:attrNameLst>
+                                          <p:attrName>style.visibility</p:attrName>
+                                        </p:attrNameLst>
+                                      </p:cBhvr>
+                                      <p:to>
+                                        <p:strVal val="visible"/>
+                                      </p:to>
+                                    </p:set>
+                                  </p:childTnLst>
+                                </p:cTn>
+                              </p:par>
+                            </p:childTnLst>
+                          </p:cTn>
+                        </p:par>
+                      </p:childTnLst>
+                    </p:cTn>
+                  </p:par>
+                </p:childTnLst>
+              </p:cTn>
+              <p:prevCondLst>
+                <p:cond evt="onPrev" delay="0">
+                  <p:tgtEl>
+                    <p:sldTgt/>
+                  </p:tgtEl>
+                </p:cond>
+              </p:prevCondLst>
+              <p:nextCondLst>
+                <p:cond evt="onNext" delay="0">
+                  <p:tgtEl>
+                    <p:sldTgt/>
+                  </p:tgtEl>
+                </p:cond>
+              </p:nextCondLst>
+            </p:seq>
+          </p:childTnLst>
+        </p:cTn>
+      </p:par>
+    </p:tnLst>
+  </p:timing>
+</p:sld>
+</file>
+
+<file path=ppt/slides/slide30.xml><?xml version="1.0" encoding="utf-8"?>
 <p:sld xmlns:a="http://schemas.openxmlformats.org/drawingml/2006/main" xmlns:r="http://schemas.openxmlformats.org/officeDocument/2006/relationships" xmlns:p="http://schemas.openxmlformats.org/presentationml/2006/main">
   <p:cSld>
     <p:spTree>
@@ -14113,7 +15988,7 @@
 </p:sld>
 </file>
 
-<file path=ppt/slides/slide29.xml><?xml version="1.0" encoding="utf-8"?>
+<file path=ppt/slides/slide31.xml><?xml version="1.0" encoding="utf-8"?>
 <p:sld xmlns:a="http://schemas.openxmlformats.org/drawingml/2006/main" xmlns:r="http://schemas.openxmlformats.org/officeDocument/2006/relationships" xmlns:p="http://schemas.openxmlformats.org/presentationml/2006/main">
   <p:cSld>
     <p:spTree>
@@ -14814,509 +16689,7 @@
 </p:sld>
 </file>
 
-<file path=ppt/slides/slide3.xml><?xml version="1.0" encoding="utf-8"?>
-<p:sld xmlns:a="http://schemas.openxmlformats.org/drawingml/2006/main" xmlns:r="http://schemas.openxmlformats.org/officeDocument/2006/relationships" xmlns:p="http://schemas.openxmlformats.org/presentationml/2006/main">
-  <p:cSld>
-    <p:spTree>
-      <p:nvGrpSpPr>
-        <p:cNvPr id="1" name=""/>
-        <p:cNvGrpSpPr/>
-        <p:nvPr/>
-      </p:nvGrpSpPr>
-      <p:grpSpPr>
-        <a:xfrm>
-          <a:off x="0" y="0"/>
-          <a:ext cx="0" cy="0"/>
-          <a:chOff x="0" y="0"/>
-          <a:chExt cx="0" cy="0"/>
-        </a:xfrm>
-      </p:grpSpPr>
-      <p:sp>
-        <p:nvSpPr>
-          <p:cNvPr id="3" name="Content Placeholder 2">
-            <a:extLst>
-              <a:ext uri="{FF2B5EF4-FFF2-40B4-BE49-F238E27FC236}">
-                <a16:creationId xmlns:a16="http://schemas.microsoft.com/office/drawing/2014/main" id="{258E6AF3-7615-4BD1-878E-A94C93E98F90}"/>
-              </a:ext>
-            </a:extLst>
-          </p:cNvPr>
-          <p:cNvSpPr>
-            <a:spLocks noGrp="1"/>
-          </p:cNvSpPr>
-          <p:nvPr>
-            <p:ph idx="1"/>
-          </p:nvPr>
-        </p:nvSpPr>
-        <p:spPr/>
-        <p:txBody>
-          <a:bodyPr/>
-          <a:lstStyle/>
-          <a:p>
-            <a:pPr marL="0" indent="0">
-              <a:buNone/>
-            </a:pPr>
-            <a:r>
-              <a:rPr lang="en-US" dirty="0"/>
-              <a:t>Data mining is the science of </a:t>
-            </a:r>
-            <a:r>
-              <a:rPr lang="en-US" b="1" dirty="0"/>
-              <a:t>actionable knowledge discovery</a:t>
-            </a:r>
-            <a:r>
-              <a:rPr lang="en-US" dirty="0"/>
-              <a:t> from inferences on massive datasets </a:t>
-            </a:r>
-            <a:endParaRPr lang="en-US" b="1" dirty="0"/>
-          </a:p>
-          <a:p>
-            <a:r>
-              <a:rPr lang="en-US" dirty="0"/>
-              <a:t>Known as </a:t>
-            </a:r>
-            <a:r>
-              <a:rPr lang="en-US" b="1" dirty="0"/>
-              <a:t>knowledge discovery and data mining (KDD) </a:t>
-            </a:r>
-          </a:p>
-          <a:p>
-            <a:r>
-              <a:rPr lang="en-US" dirty="0"/>
-              <a:t>Data mining is an </a:t>
-            </a:r>
-            <a:r>
-              <a:rPr lang="en-US" b="1" dirty="0"/>
-              <a:t>iterative process of exploration   </a:t>
-            </a:r>
-          </a:p>
-          <a:p>
-            <a:r>
-              <a:rPr lang="en-US" dirty="0"/>
-              <a:t>Exploration is difficult   </a:t>
-            </a:r>
-          </a:p>
-          <a:p>
-            <a:pPr lvl="1"/>
-            <a:r>
-              <a:rPr lang="en-US" dirty="0"/>
-              <a:t>Many steps</a:t>
-            </a:r>
-          </a:p>
-          <a:p>
-            <a:pPr lvl="1"/>
-            <a:r>
-              <a:rPr lang="en-US" dirty="0"/>
-              <a:t>Only some attempts work </a:t>
-            </a:r>
-          </a:p>
-          <a:p>
-            <a:r>
-              <a:rPr lang="en-US" b="1" dirty="0">
-                <a:solidFill>
-                  <a:srgbClr val="C00000"/>
-                </a:solidFill>
-              </a:rPr>
-              <a:t>Try lots of ideas, fail fast, keep the ones that work! </a:t>
-            </a:r>
-          </a:p>
-          <a:p>
-            <a:pPr lvl="1"/>
-            <a:r>
-              <a:rPr lang="en-US" b="1" dirty="0"/>
-              <a:t>Keep this in mind when doing your graduate project!</a:t>
-            </a:r>
-          </a:p>
-        </p:txBody>
-      </p:sp>
-      <p:sp>
-        <p:nvSpPr>
-          <p:cNvPr id="6" name="Title 1">
-            <a:extLst>
-              <a:ext uri="{FF2B5EF4-FFF2-40B4-BE49-F238E27FC236}">
-                <a16:creationId xmlns:a16="http://schemas.microsoft.com/office/drawing/2014/main" id="{CD29F70F-B868-451B-A65D-8721F4C7A2D9}"/>
-              </a:ext>
-            </a:extLst>
-          </p:cNvPr>
-          <p:cNvSpPr txBox="1">
-            <a:spLocks/>
-          </p:cNvSpPr>
-          <p:nvPr/>
-        </p:nvSpPr>
-        <p:spPr>
-          <a:xfrm>
-            <a:off x="838200" y="-635"/>
-            <a:ext cx="10515600" cy="1325563"/>
-          </a:xfrm>
-          <a:prstGeom prst="rect">
-            <a:avLst/>
-          </a:prstGeom>
-        </p:spPr>
-        <p:txBody>
-          <a:bodyPr vert="horz" lIns="91440" tIns="45720" rIns="91440" bIns="45720" rtlCol="0" anchor="ctr">
-            <a:normAutofit/>
-          </a:bodyPr>
-          <a:lstStyle>
-            <a:lvl1pPr algn="l" defTabSz="914400" rtl="0" eaLnBrk="1" latinLnBrk="0" hangingPunct="1">
-              <a:lnSpc>
-                <a:spcPct val="90000"/>
-              </a:lnSpc>
-              <a:spcBef>
-                <a:spcPct val="0"/>
-              </a:spcBef>
-              <a:buNone/>
-              <a:defRPr sz="4400" kern="1200">
-                <a:solidFill>
-                  <a:schemeClr val="tx1"/>
-                </a:solidFill>
-                <a:latin typeface="+mj-lt"/>
-                <a:ea typeface="+mj-ea"/>
-                <a:cs typeface="+mj-cs"/>
-              </a:defRPr>
-            </a:lvl1pPr>
-          </a:lstStyle>
-          <a:p>
-            <a:r>
-              <a:rPr lang="en-US" dirty="0">
-                <a:latin typeface="+mn-lt"/>
-              </a:rPr>
-              <a:t>What is data mining?</a:t>
-            </a:r>
-          </a:p>
-        </p:txBody>
-      </p:sp>
-    </p:spTree>
-    <p:extLst>
-      <p:ext uri="{BB962C8B-B14F-4D97-AF65-F5344CB8AC3E}">
-        <p14:creationId xmlns:p14="http://schemas.microsoft.com/office/powerpoint/2010/main" val="115420158"/>
-      </p:ext>
-    </p:extLst>
-  </p:cSld>
-  <p:clrMapOvr>
-    <a:masterClrMapping/>
-  </p:clrMapOvr>
-  <p:timing>
-    <p:tnLst>
-      <p:par>
-        <p:cTn id="1" dur="indefinite" restart="never" nodeType="tmRoot">
-          <p:childTnLst>
-            <p:seq concurrent="1" nextAc="seek">
-              <p:cTn id="2" dur="indefinite" nodeType="mainSeq">
-                <p:childTnLst>
-                  <p:par>
-                    <p:cTn id="3" fill="hold">
-                      <p:stCondLst>
-                        <p:cond delay="indefinite"/>
-                      </p:stCondLst>
-                      <p:childTnLst>
-                        <p:par>
-                          <p:cTn id="4" fill="hold">
-                            <p:stCondLst>
-                              <p:cond delay="0"/>
-                            </p:stCondLst>
-                            <p:childTnLst>
-                              <p:par>
-                                <p:cTn id="5" presetID="1" presetClass="entr" presetSubtype="0" fill="hold" nodeType="clickEffect">
-                                  <p:stCondLst>
-                                    <p:cond delay="0"/>
-                                  </p:stCondLst>
-                                  <p:childTnLst>
-                                    <p:set>
-                                      <p:cBhvr>
-                                        <p:cTn id="6" dur="1" fill="hold">
-                                          <p:stCondLst>
-                                            <p:cond delay="0"/>
-                                          </p:stCondLst>
-                                        </p:cTn>
-                                        <p:tgtEl>
-                                          <p:spTgt spid="3">
-                                            <p:txEl>
-                                              <p:pRg st="1" end="1"/>
-                                            </p:txEl>
-                                          </p:spTgt>
-                                        </p:tgtEl>
-                                        <p:attrNameLst>
-                                          <p:attrName>style.visibility</p:attrName>
-                                        </p:attrNameLst>
-                                      </p:cBhvr>
-                                      <p:to>
-                                        <p:strVal val="visible"/>
-                                      </p:to>
-                                    </p:set>
-                                  </p:childTnLst>
-                                </p:cTn>
-                              </p:par>
-                            </p:childTnLst>
-                          </p:cTn>
-                        </p:par>
-                      </p:childTnLst>
-                    </p:cTn>
-                  </p:par>
-                  <p:par>
-                    <p:cTn id="7" fill="hold">
-                      <p:stCondLst>
-                        <p:cond delay="indefinite"/>
-                      </p:stCondLst>
-                      <p:childTnLst>
-                        <p:par>
-                          <p:cTn id="8" fill="hold">
-                            <p:stCondLst>
-                              <p:cond delay="0"/>
-                            </p:stCondLst>
-                            <p:childTnLst>
-                              <p:par>
-                                <p:cTn id="9" presetID="1" presetClass="entr" presetSubtype="0" fill="hold" nodeType="clickEffect">
-                                  <p:stCondLst>
-                                    <p:cond delay="0"/>
-                                  </p:stCondLst>
-                                  <p:childTnLst>
-                                    <p:set>
-                                      <p:cBhvr>
-                                        <p:cTn id="10" dur="1" fill="hold">
-                                          <p:stCondLst>
-                                            <p:cond delay="0"/>
-                                          </p:stCondLst>
-                                        </p:cTn>
-                                        <p:tgtEl>
-                                          <p:spTgt spid="3">
-                                            <p:txEl>
-                                              <p:pRg st="2" end="2"/>
-                                            </p:txEl>
-                                          </p:spTgt>
-                                        </p:tgtEl>
-                                        <p:attrNameLst>
-                                          <p:attrName>style.visibility</p:attrName>
-                                        </p:attrNameLst>
-                                      </p:cBhvr>
-                                      <p:to>
-                                        <p:strVal val="visible"/>
-                                      </p:to>
-                                    </p:set>
-                                  </p:childTnLst>
-                                </p:cTn>
-                              </p:par>
-                            </p:childTnLst>
-                          </p:cTn>
-                        </p:par>
-                      </p:childTnLst>
-                    </p:cTn>
-                  </p:par>
-                  <p:par>
-                    <p:cTn id="11" fill="hold">
-                      <p:stCondLst>
-                        <p:cond delay="indefinite"/>
-                      </p:stCondLst>
-                      <p:childTnLst>
-                        <p:par>
-                          <p:cTn id="12" fill="hold">
-                            <p:stCondLst>
-                              <p:cond delay="0"/>
-                            </p:stCondLst>
-                            <p:childTnLst>
-                              <p:par>
-                                <p:cTn id="13" presetID="1" presetClass="entr" presetSubtype="0" fill="hold" nodeType="clickEffect">
-                                  <p:stCondLst>
-                                    <p:cond delay="0"/>
-                                  </p:stCondLst>
-                                  <p:childTnLst>
-                                    <p:set>
-                                      <p:cBhvr>
-                                        <p:cTn id="14" dur="1" fill="hold">
-                                          <p:stCondLst>
-                                            <p:cond delay="0"/>
-                                          </p:stCondLst>
-                                        </p:cTn>
-                                        <p:tgtEl>
-                                          <p:spTgt spid="3">
-                                            <p:txEl>
-                                              <p:pRg st="3" end="3"/>
-                                            </p:txEl>
-                                          </p:spTgt>
-                                        </p:tgtEl>
-                                        <p:attrNameLst>
-                                          <p:attrName>style.visibility</p:attrName>
-                                        </p:attrNameLst>
-                                      </p:cBhvr>
-                                      <p:to>
-                                        <p:strVal val="visible"/>
-                                      </p:to>
-                                    </p:set>
-                                  </p:childTnLst>
-                                </p:cTn>
-                              </p:par>
-                              <p:par>
-                                <p:cTn id="15" presetID="1" presetClass="entr" presetSubtype="0" fill="hold" nodeType="withEffect">
-                                  <p:stCondLst>
-                                    <p:cond delay="0"/>
-                                  </p:stCondLst>
-                                  <p:childTnLst>
-                                    <p:set>
-                                      <p:cBhvr>
-                                        <p:cTn id="16" dur="1" fill="hold">
-                                          <p:stCondLst>
-                                            <p:cond delay="0"/>
-                                          </p:stCondLst>
-                                        </p:cTn>
-                                        <p:tgtEl>
-                                          <p:spTgt spid="3">
-                                            <p:txEl>
-                                              <p:pRg st="4" end="4"/>
-                                            </p:txEl>
-                                          </p:spTgt>
-                                        </p:tgtEl>
-                                        <p:attrNameLst>
-                                          <p:attrName>style.visibility</p:attrName>
-                                        </p:attrNameLst>
-                                      </p:cBhvr>
-                                      <p:to>
-                                        <p:strVal val="visible"/>
-                                      </p:to>
-                                    </p:set>
-                                  </p:childTnLst>
-                                </p:cTn>
-                              </p:par>
-                              <p:par>
-                                <p:cTn id="17" presetID="1" presetClass="entr" presetSubtype="0" fill="hold" nodeType="withEffect">
-                                  <p:stCondLst>
-                                    <p:cond delay="0"/>
-                                  </p:stCondLst>
-                                  <p:childTnLst>
-                                    <p:set>
-                                      <p:cBhvr>
-                                        <p:cTn id="18" dur="1" fill="hold">
-                                          <p:stCondLst>
-                                            <p:cond delay="0"/>
-                                          </p:stCondLst>
-                                        </p:cTn>
-                                        <p:tgtEl>
-                                          <p:spTgt spid="3">
-                                            <p:txEl>
-                                              <p:pRg st="5" end="5"/>
-                                            </p:txEl>
-                                          </p:spTgt>
-                                        </p:tgtEl>
-                                        <p:attrNameLst>
-                                          <p:attrName>style.visibility</p:attrName>
-                                        </p:attrNameLst>
-                                      </p:cBhvr>
-                                      <p:to>
-                                        <p:strVal val="visible"/>
-                                      </p:to>
-                                    </p:set>
-                                  </p:childTnLst>
-                                </p:cTn>
-                              </p:par>
-                            </p:childTnLst>
-                          </p:cTn>
-                        </p:par>
-                      </p:childTnLst>
-                    </p:cTn>
-                  </p:par>
-                  <p:par>
-                    <p:cTn id="19" fill="hold">
-                      <p:stCondLst>
-                        <p:cond delay="indefinite"/>
-                      </p:stCondLst>
-                      <p:childTnLst>
-                        <p:par>
-                          <p:cTn id="20" fill="hold">
-                            <p:stCondLst>
-                              <p:cond delay="0"/>
-                            </p:stCondLst>
-                            <p:childTnLst>
-                              <p:par>
-                                <p:cTn id="21" presetID="1" presetClass="entr" presetSubtype="0" fill="hold" nodeType="clickEffect">
-                                  <p:stCondLst>
-                                    <p:cond delay="0"/>
-                                  </p:stCondLst>
-                                  <p:childTnLst>
-                                    <p:set>
-                                      <p:cBhvr>
-                                        <p:cTn id="22" dur="1" fill="hold">
-                                          <p:stCondLst>
-                                            <p:cond delay="0"/>
-                                          </p:stCondLst>
-                                        </p:cTn>
-                                        <p:tgtEl>
-                                          <p:spTgt spid="3">
-                                            <p:txEl>
-                                              <p:pRg st="6" end="6"/>
-                                            </p:txEl>
-                                          </p:spTgt>
-                                        </p:tgtEl>
-                                        <p:attrNameLst>
-                                          <p:attrName>style.visibility</p:attrName>
-                                        </p:attrNameLst>
-                                      </p:cBhvr>
-                                      <p:to>
-                                        <p:strVal val="visible"/>
-                                      </p:to>
-                                    </p:set>
-                                  </p:childTnLst>
-                                </p:cTn>
-                              </p:par>
-                              <p:par>
-                                <p:cTn id="23" presetID="1" presetClass="entr" presetSubtype="0" fill="hold" nodeType="withEffect">
-                                  <p:stCondLst>
-                                    <p:cond delay="0"/>
-                                  </p:stCondLst>
-                                  <p:childTnLst>
-                                    <p:set>
-                                      <p:cBhvr>
-                                        <p:cTn id="24" dur="1" fill="hold">
-                                          <p:stCondLst>
-                                            <p:cond delay="0"/>
-                                          </p:stCondLst>
-                                        </p:cTn>
-                                        <p:tgtEl>
-                                          <p:spTgt spid="3">
-                                            <p:txEl>
-                                              <p:pRg st="7" end="7"/>
-                                            </p:txEl>
-                                          </p:spTgt>
-                                        </p:tgtEl>
-                                        <p:attrNameLst>
-                                          <p:attrName>style.visibility</p:attrName>
-                                        </p:attrNameLst>
-                                      </p:cBhvr>
-                                      <p:to>
-                                        <p:strVal val="visible"/>
-                                      </p:to>
-                                    </p:set>
-                                  </p:childTnLst>
-                                </p:cTn>
-                              </p:par>
-                            </p:childTnLst>
-                          </p:cTn>
-                        </p:par>
-                      </p:childTnLst>
-                    </p:cTn>
-                  </p:par>
-                </p:childTnLst>
-              </p:cTn>
-              <p:prevCondLst>
-                <p:cond evt="onPrev" delay="0">
-                  <p:tgtEl>
-                    <p:sldTgt/>
-                  </p:tgtEl>
-                </p:cond>
-              </p:prevCondLst>
-              <p:nextCondLst>
-                <p:cond evt="onNext" delay="0">
-                  <p:tgtEl>
-                    <p:sldTgt/>
-                  </p:tgtEl>
-                </p:cond>
-              </p:nextCondLst>
-            </p:seq>
-          </p:childTnLst>
-        </p:cTn>
-      </p:par>
-    </p:tnLst>
-  </p:timing>
-</p:sld>
-</file>
-
-<file path=ppt/slides/slide30.xml><?xml version="1.0" encoding="utf-8"?>
+<file path=ppt/slides/slide32.xml><?xml version="1.0" encoding="utf-8"?>
 <p:sld xmlns:a="http://schemas.openxmlformats.org/drawingml/2006/main" xmlns:r="http://schemas.openxmlformats.org/officeDocument/2006/relationships" xmlns:p="http://schemas.openxmlformats.org/presentationml/2006/main">
   <p:cSld>
     <p:spTree>
@@ -15931,7 +17304,7 @@
 </p:sld>
 </file>
 
-<file path=ppt/slides/slide31.xml><?xml version="1.0" encoding="utf-8"?>
+<file path=ppt/slides/slide33.xml><?xml version="1.0" encoding="utf-8"?>
 <p:sld xmlns:a="http://schemas.openxmlformats.org/drawingml/2006/main" xmlns:r="http://schemas.openxmlformats.org/officeDocument/2006/relationships" xmlns:p="http://schemas.openxmlformats.org/presentationml/2006/main">
   <p:cSld>
     <p:spTree>
@@ -16418,7 +17791,7 @@
 </p:sld>
 </file>
 
-<file path=ppt/slides/slide32.xml><?xml version="1.0" encoding="utf-8"?>
+<file path=ppt/slides/slide34.xml><?xml version="1.0" encoding="utf-8"?>
 <p:sld xmlns:a="http://schemas.openxmlformats.org/drawingml/2006/main" xmlns:r="http://schemas.openxmlformats.org/officeDocument/2006/relationships" xmlns:p="http://schemas.openxmlformats.org/presentationml/2006/main">
   <p:cSld>
     <p:spTree>
@@ -16943,7 +18316,7 @@
 </p:sld>
 </file>
 
-<file path=ppt/slides/slide33.xml><?xml version="1.0" encoding="utf-8"?>
+<file path=ppt/slides/slide35.xml><?xml version="1.0" encoding="utf-8"?>
 <p:sld xmlns:a="http://schemas.openxmlformats.org/drawingml/2006/main" xmlns:r="http://schemas.openxmlformats.org/officeDocument/2006/relationships" xmlns:p="http://schemas.openxmlformats.org/presentationml/2006/main">
   <p:cSld>
     <p:spTree>
@@ -17527,7 +18900,7 @@
 </p:sld>
 </file>
 
-<file path=ppt/slides/slide34.xml><?xml version="1.0" encoding="utf-8"?>
+<file path=ppt/slides/slide36.xml><?xml version="1.0" encoding="utf-8"?>
 <p:sld xmlns:a="http://schemas.openxmlformats.org/drawingml/2006/main" xmlns:r="http://schemas.openxmlformats.org/officeDocument/2006/relationships" xmlns:p="http://schemas.openxmlformats.org/presentationml/2006/main">
   <p:cSld>
     <p:spTree>
@@ -19938,7 +21311,7 @@
 </p:sld>
 </file>
 
-<file path=ppt/slides/slide35.xml><?xml version="1.0" encoding="utf-8"?>
+<file path=ppt/slides/slide37.xml><?xml version="1.0" encoding="utf-8"?>
 <p:sld xmlns:a="http://schemas.openxmlformats.org/drawingml/2006/main" xmlns:r="http://schemas.openxmlformats.org/officeDocument/2006/relationships" xmlns:p="http://schemas.openxmlformats.org/presentationml/2006/main">
   <p:cSld>
     <p:spTree>
@@ -19998,7 +21371,7 @@
 </p:sld>
 </file>
 
-<file path=ppt/slides/slide36.xml><?xml version="1.0" encoding="utf-8"?>
+<file path=ppt/slides/slide38.xml><?xml version="1.0" encoding="utf-8"?>
 <p:sld xmlns:a="http://schemas.openxmlformats.org/drawingml/2006/main" xmlns:r="http://schemas.openxmlformats.org/officeDocument/2006/relationships" xmlns:p="http://schemas.openxmlformats.org/presentationml/2006/main">
   <p:cSld>
     <p:spTree>
@@ -20635,7 +22008,7 @@
 </p:sld>
 </file>
 
-<file path=ppt/slides/slide37.xml><?xml version="1.0" encoding="utf-8"?>
+<file path=ppt/slides/slide39.xml><?xml version="1.0" encoding="utf-8"?>
 <p:sld xmlns:a="http://schemas.openxmlformats.org/drawingml/2006/main" xmlns:r="http://schemas.openxmlformats.org/officeDocument/2006/relationships" xmlns:p="http://schemas.openxmlformats.org/presentationml/2006/main">
   <p:cSld>
     <p:spTree>
@@ -21070,7 +22443,496 @@
 </p:sld>
 </file>
 
-<file path=ppt/slides/slide38.xml><?xml version="1.0" encoding="utf-8"?>
+<file path=ppt/slides/slide4.xml><?xml version="1.0" encoding="utf-8"?>
+<p:sld xmlns:a="http://schemas.openxmlformats.org/drawingml/2006/main" xmlns:r="http://schemas.openxmlformats.org/officeDocument/2006/relationships" xmlns:p="http://schemas.openxmlformats.org/presentationml/2006/main">
+  <p:cSld>
+    <p:spTree>
+      <p:nvGrpSpPr>
+        <p:cNvPr id="1" name=""/>
+        <p:cNvGrpSpPr/>
+        <p:nvPr/>
+      </p:nvGrpSpPr>
+      <p:grpSpPr>
+        <a:xfrm>
+          <a:off x="0" y="0"/>
+          <a:ext cx="0" cy="0"/>
+          <a:chOff x="0" y="0"/>
+          <a:chExt cx="0" cy="0"/>
+        </a:xfrm>
+      </p:grpSpPr>
+      <p:sp>
+        <p:nvSpPr>
+          <p:cNvPr id="3" name="Content Placeholder 2">
+            <a:extLst>
+              <a:ext uri="{FF2B5EF4-FFF2-40B4-BE49-F238E27FC236}">
+                <a16:creationId xmlns:a16="http://schemas.microsoft.com/office/drawing/2014/main" id="{258E6AF3-7615-4BD1-878E-A94C93E98F90}"/>
+              </a:ext>
+            </a:extLst>
+          </p:cNvPr>
+          <p:cNvSpPr>
+            <a:spLocks noGrp="1"/>
+          </p:cNvSpPr>
+          <p:nvPr>
+            <p:ph idx="1"/>
+          </p:nvPr>
+        </p:nvSpPr>
+        <p:spPr/>
+        <p:txBody>
+          <a:bodyPr/>
+          <a:lstStyle/>
+          <a:p>
+            <a:pPr marL="0" indent="0">
+              <a:buNone/>
+            </a:pPr>
+            <a:r>
+              <a:rPr lang="en-US" dirty="0"/>
+              <a:t>Data mining (KDD) is generally performed at </a:t>
+            </a:r>
+            <a:r>
+              <a:rPr lang="en-US" b="1" dirty="0"/>
+              <a:t>large scale </a:t>
+            </a:r>
+          </a:p>
+          <a:p>
+            <a:r>
+              <a:rPr lang="en-US" dirty="0"/>
+              <a:t>Dataset size has grown nearly exponentially  </a:t>
+            </a:r>
+          </a:p>
+          <a:p>
+            <a:r>
+              <a:rPr lang="en-US" dirty="0"/>
+              <a:t>More importantly, </a:t>
+            </a:r>
+            <a:r>
+              <a:rPr lang="en-US" b="1" dirty="0"/>
+              <a:t>dataset and problem complexity has grown</a:t>
+            </a:r>
+          </a:p>
+          <a:p>
+            <a:r>
+              <a:rPr lang="en-US" dirty="0"/>
+              <a:t>Data mining is at the intersection of several subjects   </a:t>
+            </a:r>
+          </a:p>
+          <a:p>
+            <a:pPr lvl="1"/>
+            <a:r>
+              <a:rPr lang="en-US" b="1" dirty="0"/>
+              <a:t>Statistics:</a:t>
+            </a:r>
+            <a:r>
+              <a:rPr lang="en-US" dirty="0"/>
+              <a:t> What of significance can we learn from the data? </a:t>
+            </a:r>
+          </a:p>
+          <a:p>
+            <a:pPr lvl="1"/>
+            <a:r>
+              <a:rPr lang="en-US" b="1" dirty="0"/>
+              <a:t>Mathematics:</a:t>
+            </a:r>
+            <a:r>
+              <a:rPr lang="en-US" dirty="0"/>
+              <a:t> How do we represent a model of the data as, say, a graph?</a:t>
+            </a:r>
+          </a:p>
+          <a:p>
+            <a:pPr lvl="1"/>
+            <a:r>
+              <a:rPr lang="en-US" b="1" dirty="0"/>
+              <a:t>Algorithms: </a:t>
+            </a:r>
+            <a:r>
+              <a:rPr lang="en-US" dirty="0"/>
+              <a:t>How do we efficiently find important relationships in massive datasets? </a:t>
+            </a:r>
+          </a:p>
+          <a:p>
+            <a:pPr lvl="1"/>
+            <a:r>
+              <a:rPr lang="en-US" b="1" dirty="0"/>
+              <a:t>Technology:</a:t>
+            </a:r>
+            <a:r>
+              <a:rPr lang="en-US" dirty="0"/>
+              <a:t> How do we manage and process massive datasets? </a:t>
+            </a:r>
+            <a:endParaRPr lang="en-US" b="1" dirty="0"/>
+          </a:p>
+        </p:txBody>
+      </p:sp>
+      <p:sp>
+        <p:nvSpPr>
+          <p:cNvPr id="6" name="Title 1">
+            <a:extLst>
+              <a:ext uri="{FF2B5EF4-FFF2-40B4-BE49-F238E27FC236}">
+                <a16:creationId xmlns:a16="http://schemas.microsoft.com/office/drawing/2014/main" id="{CD29F70F-B868-451B-A65D-8721F4C7A2D9}"/>
+              </a:ext>
+            </a:extLst>
+          </p:cNvPr>
+          <p:cNvSpPr txBox="1">
+            <a:spLocks/>
+          </p:cNvSpPr>
+          <p:nvPr/>
+        </p:nvSpPr>
+        <p:spPr>
+          <a:xfrm>
+            <a:off x="838200" y="-635"/>
+            <a:ext cx="10515600" cy="1325563"/>
+          </a:xfrm>
+          <a:prstGeom prst="rect">
+            <a:avLst/>
+          </a:prstGeom>
+        </p:spPr>
+        <p:txBody>
+          <a:bodyPr vert="horz" lIns="91440" tIns="45720" rIns="91440" bIns="45720" rtlCol="0" anchor="ctr">
+            <a:normAutofit/>
+          </a:bodyPr>
+          <a:lstStyle>
+            <a:lvl1pPr algn="l" defTabSz="914400" rtl="0" eaLnBrk="1" latinLnBrk="0" hangingPunct="1">
+              <a:lnSpc>
+                <a:spcPct val="90000"/>
+              </a:lnSpc>
+              <a:spcBef>
+                <a:spcPct val="0"/>
+              </a:spcBef>
+              <a:buNone/>
+              <a:defRPr sz="4400" kern="1200">
+                <a:solidFill>
+                  <a:schemeClr val="tx1"/>
+                </a:solidFill>
+                <a:latin typeface="+mj-lt"/>
+                <a:ea typeface="+mj-ea"/>
+                <a:cs typeface="+mj-cs"/>
+              </a:defRPr>
+            </a:lvl1pPr>
+          </a:lstStyle>
+          <a:p>
+            <a:r>
+              <a:rPr lang="en-US" dirty="0">
+                <a:latin typeface="+mn-lt"/>
+              </a:rPr>
+              <a:t>What is data mining?</a:t>
+            </a:r>
+          </a:p>
+        </p:txBody>
+      </p:sp>
+    </p:spTree>
+    <p:extLst>
+      <p:ext uri="{BB962C8B-B14F-4D97-AF65-F5344CB8AC3E}">
+        <p14:creationId xmlns:p14="http://schemas.microsoft.com/office/powerpoint/2010/main" val="69986985"/>
+      </p:ext>
+    </p:extLst>
+  </p:cSld>
+  <p:clrMapOvr>
+    <a:masterClrMapping/>
+  </p:clrMapOvr>
+  <p:timing>
+    <p:tnLst>
+      <p:par>
+        <p:cTn id="1" dur="indefinite" restart="never" nodeType="tmRoot">
+          <p:childTnLst>
+            <p:seq concurrent="1" nextAc="seek">
+              <p:cTn id="2" dur="indefinite" nodeType="mainSeq">
+                <p:childTnLst>
+                  <p:par>
+                    <p:cTn id="3" fill="hold">
+                      <p:stCondLst>
+                        <p:cond delay="indefinite"/>
+                      </p:stCondLst>
+                      <p:childTnLst>
+                        <p:par>
+                          <p:cTn id="4" fill="hold">
+                            <p:stCondLst>
+                              <p:cond delay="0"/>
+                            </p:stCondLst>
+                            <p:childTnLst>
+                              <p:par>
+                                <p:cTn id="5" presetID="1" presetClass="entr" presetSubtype="0" fill="hold" nodeType="clickEffect">
+                                  <p:stCondLst>
+                                    <p:cond delay="0"/>
+                                  </p:stCondLst>
+                                  <p:childTnLst>
+                                    <p:set>
+                                      <p:cBhvr>
+                                        <p:cTn id="6" dur="1" fill="hold">
+                                          <p:stCondLst>
+                                            <p:cond delay="0"/>
+                                          </p:stCondLst>
+                                        </p:cTn>
+                                        <p:tgtEl>
+                                          <p:spTgt spid="3">
+                                            <p:txEl>
+                                              <p:pRg st="1" end="1"/>
+                                            </p:txEl>
+                                          </p:spTgt>
+                                        </p:tgtEl>
+                                        <p:attrNameLst>
+                                          <p:attrName>style.visibility</p:attrName>
+                                        </p:attrNameLst>
+                                      </p:cBhvr>
+                                      <p:to>
+                                        <p:strVal val="visible"/>
+                                      </p:to>
+                                    </p:set>
+                                  </p:childTnLst>
+                                </p:cTn>
+                              </p:par>
+                            </p:childTnLst>
+                          </p:cTn>
+                        </p:par>
+                      </p:childTnLst>
+                    </p:cTn>
+                  </p:par>
+                  <p:par>
+                    <p:cTn id="7" fill="hold">
+                      <p:stCondLst>
+                        <p:cond delay="indefinite"/>
+                      </p:stCondLst>
+                      <p:childTnLst>
+                        <p:par>
+                          <p:cTn id="8" fill="hold">
+                            <p:stCondLst>
+                              <p:cond delay="0"/>
+                            </p:stCondLst>
+                            <p:childTnLst>
+                              <p:par>
+                                <p:cTn id="9" presetID="1" presetClass="entr" presetSubtype="0" fill="hold" nodeType="clickEffect">
+                                  <p:stCondLst>
+                                    <p:cond delay="0"/>
+                                  </p:stCondLst>
+                                  <p:childTnLst>
+                                    <p:set>
+                                      <p:cBhvr>
+                                        <p:cTn id="10" dur="1" fill="hold">
+                                          <p:stCondLst>
+                                            <p:cond delay="0"/>
+                                          </p:stCondLst>
+                                        </p:cTn>
+                                        <p:tgtEl>
+                                          <p:spTgt spid="3">
+                                            <p:txEl>
+                                              <p:pRg st="2" end="2"/>
+                                            </p:txEl>
+                                          </p:spTgt>
+                                        </p:tgtEl>
+                                        <p:attrNameLst>
+                                          <p:attrName>style.visibility</p:attrName>
+                                        </p:attrNameLst>
+                                      </p:cBhvr>
+                                      <p:to>
+                                        <p:strVal val="visible"/>
+                                      </p:to>
+                                    </p:set>
+                                  </p:childTnLst>
+                                </p:cTn>
+                              </p:par>
+                            </p:childTnLst>
+                          </p:cTn>
+                        </p:par>
+                      </p:childTnLst>
+                    </p:cTn>
+                  </p:par>
+                  <p:par>
+                    <p:cTn id="11" fill="hold">
+                      <p:stCondLst>
+                        <p:cond delay="indefinite"/>
+                      </p:stCondLst>
+                      <p:childTnLst>
+                        <p:par>
+                          <p:cTn id="12" fill="hold">
+                            <p:stCondLst>
+                              <p:cond delay="0"/>
+                            </p:stCondLst>
+                            <p:childTnLst>
+                              <p:par>
+                                <p:cTn id="13" presetID="1" presetClass="entr" presetSubtype="0" fill="hold" nodeType="clickEffect">
+                                  <p:stCondLst>
+                                    <p:cond delay="0"/>
+                                  </p:stCondLst>
+                                  <p:childTnLst>
+                                    <p:set>
+                                      <p:cBhvr>
+                                        <p:cTn id="14" dur="1" fill="hold">
+                                          <p:stCondLst>
+                                            <p:cond delay="0"/>
+                                          </p:stCondLst>
+                                        </p:cTn>
+                                        <p:tgtEl>
+                                          <p:spTgt spid="3">
+                                            <p:txEl>
+                                              <p:pRg st="3" end="3"/>
+                                            </p:txEl>
+                                          </p:spTgt>
+                                        </p:tgtEl>
+                                        <p:attrNameLst>
+                                          <p:attrName>style.visibility</p:attrName>
+                                        </p:attrNameLst>
+                                      </p:cBhvr>
+                                      <p:to>
+                                        <p:strVal val="visible"/>
+                                      </p:to>
+                                    </p:set>
+                                  </p:childTnLst>
+                                </p:cTn>
+                              </p:par>
+                              <p:par>
+                                <p:cTn id="15" presetID="1" presetClass="entr" presetSubtype="0" fill="hold" nodeType="withEffect">
+                                  <p:stCondLst>
+                                    <p:cond delay="0"/>
+                                  </p:stCondLst>
+                                  <p:childTnLst>
+                                    <p:set>
+                                      <p:cBhvr>
+                                        <p:cTn id="16" dur="1" fill="hold">
+                                          <p:stCondLst>
+                                            <p:cond delay="0"/>
+                                          </p:stCondLst>
+                                        </p:cTn>
+                                        <p:tgtEl>
+                                          <p:spTgt spid="3">
+                                            <p:txEl>
+                                              <p:pRg st="4" end="4"/>
+                                            </p:txEl>
+                                          </p:spTgt>
+                                        </p:tgtEl>
+                                        <p:attrNameLst>
+                                          <p:attrName>style.visibility</p:attrName>
+                                        </p:attrNameLst>
+                                      </p:cBhvr>
+                                      <p:to>
+                                        <p:strVal val="visible"/>
+                                      </p:to>
+                                    </p:set>
+                                  </p:childTnLst>
+                                </p:cTn>
+                              </p:par>
+                              <p:par>
+                                <p:cTn id="17" presetID="1" presetClass="entr" presetSubtype="0" fill="hold" nodeType="withEffect">
+                                  <p:stCondLst>
+                                    <p:cond delay="0"/>
+                                  </p:stCondLst>
+                                  <p:childTnLst>
+                                    <p:set>
+                                      <p:cBhvr>
+                                        <p:cTn id="18" dur="1" fill="hold">
+                                          <p:stCondLst>
+                                            <p:cond delay="0"/>
+                                          </p:stCondLst>
+                                        </p:cTn>
+                                        <p:tgtEl>
+                                          <p:spTgt spid="3">
+                                            <p:txEl>
+                                              <p:pRg st="5" end="5"/>
+                                            </p:txEl>
+                                          </p:spTgt>
+                                        </p:tgtEl>
+                                        <p:attrNameLst>
+                                          <p:attrName>style.visibility</p:attrName>
+                                        </p:attrNameLst>
+                                      </p:cBhvr>
+                                      <p:to>
+                                        <p:strVal val="visible"/>
+                                      </p:to>
+                                    </p:set>
+                                  </p:childTnLst>
+                                </p:cTn>
+                              </p:par>
+                              <p:par>
+                                <p:cTn id="19" presetID="1" presetClass="entr" presetSubtype="0" fill="hold" nodeType="withEffect">
+                                  <p:stCondLst>
+                                    <p:cond delay="0"/>
+                                  </p:stCondLst>
+                                  <p:childTnLst>
+                                    <p:set>
+                                      <p:cBhvr>
+                                        <p:cTn id="20" dur="1" fill="hold">
+                                          <p:stCondLst>
+                                            <p:cond delay="0"/>
+                                          </p:stCondLst>
+                                        </p:cTn>
+                                        <p:tgtEl>
+                                          <p:spTgt spid="3">
+                                            <p:txEl>
+                                              <p:pRg st="6" end="6"/>
+                                            </p:txEl>
+                                          </p:spTgt>
+                                        </p:tgtEl>
+                                        <p:attrNameLst>
+                                          <p:attrName>style.visibility</p:attrName>
+                                        </p:attrNameLst>
+                                      </p:cBhvr>
+                                      <p:to>
+                                        <p:strVal val="visible"/>
+                                      </p:to>
+                                    </p:set>
+                                  </p:childTnLst>
+                                </p:cTn>
+                              </p:par>
+                              <p:par>
+                                <p:cTn id="21" presetID="1" presetClass="entr" presetSubtype="0" fill="hold" nodeType="withEffect">
+                                  <p:stCondLst>
+                                    <p:cond delay="0"/>
+                                  </p:stCondLst>
+                                  <p:childTnLst>
+                                    <p:set>
+                                      <p:cBhvr>
+                                        <p:cTn id="22" dur="1" fill="hold">
+                                          <p:stCondLst>
+                                            <p:cond delay="0"/>
+                                          </p:stCondLst>
+                                        </p:cTn>
+                                        <p:tgtEl>
+                                          <p:spTgt spid="3">
+                                            <p:txEl>
+                                              <p:pRg st="7" end="7"/>
+                                            </p:txEl>
+                                          </p:spTgt>
+                                        </p:tgtEl>
+                                        <p:attrNameLst>
+                                          <p:attrName>style.visibility</p:attrName>
+                                        </p:attrNameLst>
+                                      </p:cBhvr>
+                                      <p:to>
+                                        <p:strVal val="visible"/>
+                                      </p:to>
+                                    </p:set>
+                                  </p:childTnLst>
+                                </p:cTn>
+                              </p:par>
+                            </p:childTnLst>
+                          </p:cTn>
+                        </p:par>
+                      </p:childTnLst>
+                    </p:cTn>
+                  </p:par>
+                </p:childTnLst>
+              </p:cTn>
+              <p:prevCondLst>
+                <p:cond evt="onPrev" delay="0">
+                  <p:tgtEl>
+                    <p:sldTgt/>
+                  </p:tgtEl>
+                </p:cond>
+              </p:prevCondLst>
+              <p:nextCondLst>
+                <p:cond evt="onNext" delay="0">
+                  <p:tgtEl>
+                    <p:sldTgt/>
+                  </p:tgtEl>
+                </p:cond>
+              </p:nextCondLst>
+            </p:seq>
+          </p:childTnLst>
+        </p:cTn>
+      </p:par>
+    </p:tnLst>
+  </p:timing>
+</p:sld>
+</file>
+
+<file path=ppt/slides/slide40.xml><?xml version="1.0" encoding="utf-8"?>
 <p:sld xmlns:a="http://schemas.openxmlformats.org/drawingml/2006/main" xmlns:r="http://schemas.openxmlformats.org/officeDocument/2006/relationships" xmlns:p="http://schemas.openxmlformats.org/presentationml/2006/main">
   <p:cSld>
     <p:spTree>
@@ -23998,7 +25860,7 @@
 </p:sld>
 </file>
 
-<file path=ppt/slides/slide39.xml><?xml version="1.0" encoding="utf-8"?>
+<file path=ppt/slides/slide41.xml><?xml version="1.0" encoding="utf-8"?>
 <p:sld xmlns:a="http://schemas.openxmlformats.org/drawingml/2006/main" xmlns:r="http://schemas.openxmlformats.org/officeDocument/2006/relationships" xmlns:p="http://schemas.openxmlformats.org/presentationml/2006/main">
   <p:cSld>
     <p:spTree>
@@ -26873,496 +28735,7 @@
 </p:sld>
 </file>
 
-<file path=ppt/slides/slide4.xml><?xml version="1.0" encoding="utf-8"?>
-<p:sld xmlns:a="http://schemas.openxmlformats.org/drawingml/2006/main" xmlns:r="http://schemas.openxmlformats.org/officeDocument/2006/relationships" xmlns:p="http://schemas.openxmlformats.org/presentationml/2006/main">
-  <p:cSld>
-    <p:spTree>
-      <p:nvGrpSpPr>
-        <p:cNvPr id="1" name=""/>
-        <p:cNvGrpSpPr/>
-        <p:nvPr/>
-      </p:nvGrpSpPr>
-      <p:grpSpPr>
-        <a:xfrm>
-          <a:off x="0" y="0"/>
-          <a:ext cx="0" cy="0"/>
-          <a:chOff x="0" y="0"/>
-          <a:chExt cx="0" cy="0"/>
-        </a:xfrm>
-      </p:grpSpPr>
-      <p:sp>
-        <p:nvSpPr>
-          <p:cNvPr id="3" name="Content Placeholder 2">
-            <a:extLst>
-              <a:ext uri="{FF2B5EF4-FFF2-40B4-BE49-F238E27FC236}">
-                <a16:creationId xmlns:a16="http://schemas.microsoft.com/office/drawing/2014/main" id="{258E6AF3-7615-4BD1-878E-A94C93E98F90}"/>
-              </a:ext>
-            </a:extLst>
-          </p:cNvPr>
-          <p:cNvSpPr>
-            <a:spLocks noGrp="1"/>
-          </p:cNvSpPr>
-          <p:nvPr>
-            <p:ph idx="1"/>
-          </p:nvPr>
-        </p:nvSpPr>
-        <p:spPr/>
-        <p:txBody>
-          <a:bodyPr/>
-          <a:lstStyle/>
-          <a:p>
-            <a:pPr marL="0" indent="0">
-              <a:buNone/>
-            </a:pPr>
-            <a:r>
-              <a:rPr lang="en-US" dirty="0"/>
-              <a:t>Data mining (KDD) is generally performed at </a:t>
-            </a:r>
-            <a:r>
-              <a:rPr lang="en-US" b="1" dirty="0"/>
-              <a:t>large scale </a:t>
-            </a:r>
-          </a:p>
-          <a:p>
-            <a:r>
-              <a:rPr lang="en-US" dirty="0"/>
-              <a:t>Dataset size has grown nearly exponentially  </a:t>
-            </a:r>
-          </a:p>
-          <a:p>
-            <a:r>
-              <a:rPr lang="en-US" dirty="0"/>
-              <a:t>More importantly, </a:t>
-            </a:r>
-            <a:r>
-              <a:rPr lang="en-US" b="1" dirty="0"/>
-              <a:t>dataset and problem complexity has grown</a:t>
-            </a:r>
-          </a:p>
-          <a:p>
-            <a:r>
-              <a:rPr lang="en-US" dirty="0"/>
-              <a:t>Data mining is at the intersection of several subjects   </a:t>
-            </a:r>
-          </a:p>
-          <a:p>
-            <a:pPr lvl="1"/>
-            <a:r>
-              <a:rPr lang="en-US" b="1" dirty="0"/>
-              <a:t>Statistics:</a:t>
-            </a:r>
-            <a:r>
-              <a:rPr lang="en-US" dirty="0"/>
-              <a:t> What of significance can we learn from the data? </a:t>
-            </a:r>
-          </a:p>
-          <a:p>
-            <a:pPr lvl="1"/>
-            <a:r>
-              <a:rPr lang="en-US" b="1" dirty="0"/>
-              <a:t>Mathematics:</a:t>
-            </a:r>
-            <a:r>
-              <a:rPr lang="en-US" dirty="0"/>
-              <a:t> How do we represent a model of the data as, say, a graph?</a:t>
-            </a:r>
-          </a:p>
-          <a:p>
-            <a:pPr lvl="1"/>
-            <a:r>
-              <a:rPr lang="en-US" b="1" dirty="0"/>
-              <a:t>Algorithms: </a:t>
-            </a:r>
-            <a:r>
-              <a:rPr lang="en-US" dirty="0"/>
-              <a:t>How do we efficiently find important relationships in massive datasets? </a:t>
-            </a:r>
-          </a:p>
-          <a:p>
-            <a:pPr lvl="1"/>
-            <a:r>
-              <a:rPr lang="en-US" b="1" dirty="0"/>
-              <a:t>Technology:</a:t>
-            </a:r>
-            <a:r>
-              <a:rPr lang="en-US" dirty="0"/>
-              <a:t> How do we manage and process massive datasets? </a:t>
-            </a:r>
-            <a:endParaRPr lang="en-US" b="1" dirty="0"/>
-          </a:p>
-        </p:txBody>
-      </p:sp>
-      <p:sp>
-        <p:nvSpPr>
-          <p:cNvPr id="6" name="Title 1">
-            <a:extLst>
-              <a:ext uri="{FF2B5EF4-FFF2-40B4-BE49-F238E27FC236}">
-                <a16:creationId xmlns:a16="http://schemas.microsoft.com/office/drawing/2014/main" id="{CD29F70F-B868-451B-A65D-8721F4C7A2D9}"/>
-              </a:ext>
-            </a:extLst>
-          </p:cNvPr>
-          <p:cNvSpPr txBox="1">
-            <a:spLocks/>
-          </p:cNvSpPr>
-          <p:nvPr/>
-        </p:nvSpPr>
-        <p:spPr>
-          <a:xfrm>
-            <a:off x="838200" y="-635"/>
-            <a:ext cx="10515600" cy="1325563"/>
-          </a:xfrm>
-          <a:prstGeom prst="rect">
-            <a:avLst/>
-          </a:prstGeom>
-        </p:spPr>
-        <p:txBody>
-          <a:bodyPr vert="horz" lIns="91440" tIns="45720" rIns="91440" bIns="45720" rtlCol="0" anchor="ctr">
-            <a:normAutofit/>
-          </a:bodyPr>
-          <a:lstStyle>
-            <a:lvl1pPr algn="l" defTabSz="914400" rtl="0" eaLnBrk="1" latinLnBrk="0" hangingPunct="1">
-              <a:lnSpc>
-                <a:spcPct val="90000"/>
-              </a:lnSpc>
-              <a:spcBef>
-                <a:spcPct val="0"/>
-              </a:spcBef>
-              <a:buNone/>
-              <a:defRPr sz="4400" kern="1200">
-                <a:solidFill>
-                  <a:schemeClr val="tx1"/>
-                </a:solidFill>
-                <a:latin typeface="+mj-lt"/>
-                <a:ea typeface="+mj-ea"/>
-                <a:cs typeface="+mj-cs"/>
-              </a:defRPr>
-            </a:lvl1pPr>
-          </a:lstStyle>
-          <a:p>
-            <a:r>
-              <a:rPr lang="en-US" dirty="0">
-                <a:latin typeface="+mn-lt"/>
-              </a:rPr>
-              <a:t>What is data mining?</a:t>
-            </a:r>
-          </a:p>
-        </p:txBody>
-      </p:sp>
-    </p:spTree>
-    <p:extLst>
-      <p:ext uri="{BB962C8B-B14F-4D97-AF65-F5344CB8AC3E}">
-        <p14:creationId xmlns:p14="http://schemas.microsoft.com/office/powerpoint/2010/main" val="69986985"/>
-      </p:ext>
-    </p:extLst>
-  </p:cSld>
-  <p:clrMapOvr>
-    <a:masterClrMapping/>
-  </p:clrMapOvr>
-  <p:timing>
-    <p:tnLst>
-      <p:par>
-        <p:cTn id="1" dur="indefinite" restart="never" nodeType="tmRoot">
-          <p:childTnLst>
-            <p:seq concurrent="1" nextAc="seek">
-              <p:cTn id="2" dur="indefinite" nodeType="mainSeq">
-                <p:childTnLst>
-                  <p:par>
-                    <p:cTn id="3" fill="hold">
-                      <p:stCondLst>
-                        <p:cond delay="indefinite"/>
-                      </p:stCondLst>
-                      <p:childTnLst>
-                        <p:par>
-                          <p:cTn id="4" fill="hold">
-                            <p:stCondLst>
-                              <p:cond delay="0"/>
-                            </p:stCondLst>
-                            <p:childTnLst>
-                              <p:par>
-                                <p:cTn id="5" presetID="1" presetClass="entr" presetSubtype="0" fill="hold" nodeType="clickEffect">
-                                  <p:stCondLst>
-                                    <p:cond delay="0"/>
-                                  </p:stCondLst>
-                                  <p:childTnLst>
-                                    <p:set>
-                                      <p:cBhvr>
-                                        <p:cTn id="6" dur="1" fill="hold">
-                                          <p:stCondLst>
-                                            <p:cond delay="0"/>
-                                          </p:stCondLst>
-                                        </p:cTn>
-                                        <p:tgtEl>
-                                          <p:spTgt spid="3">
-                                            <p:txEl>
-                                              <p:pRg st="1" end="1"/>
-                                            </p:txEl>
-                                          </p:spTgt>
-                                        </p:tgtEl>
-                                        <p:attrNameLst>
-                                          <p:attrName>style.visibility</p:attrName>
-                                        </p:attrNameLst>
-                                      </p:cBhvr>
-                                      <p:to>
-                                        <p:strVal val="visible"/>
-                                      </p:to>
-                                    </p:set>
-                                  </p:childTnLst>
-                                </p:cTn>
-                              </p:par>
-                            </p:childTnLst>
-                          </p:cTn>
-                        </p:par>
-                      </p:childTnLst>
-                    </p:cTn>
-                  </p:par>
-                  <p:par>
-                    <p:cTn id="7" fill="hold">
-                      <p:stCondLst>
-                        <p:cond delay="indefinite"/>
-                      </p:stCondLst>
-                      <p:childTnLst>
-                        <p:par>
-                          <p:cTn id="8" fill="hold">
-                            <p:stCondLst>
-                              <p:cond delay="0"/>
-                            </p:stCondLst>
-                            <p:childTnLst>
-                              <p:par>
-                                <p:cTn id="9" presetID="1" presetClass="entr" presetSubtype="0" fill="hold" nodeType="clickEffect">
-                                  <p:stCondLst>
-                                    <p:cond delay="0"/>
-                                  </p:stCondLst>
-                                  <p:childTnLst>
-                                    <p:set>
-                                      <p:cBhvr>
-                                        <p:cTn id="10" dur="1" fill="hold">
-                                          <p:stCondLst>
-                                            <p:cond delay="0"/>
-                                          </p:stCondLst>
-                                        </p:cTn>
-                                        <p:tgtEl>
-                                          <p:spTgt spid="3">
-                                            <p:txEl>
-                                              <p:pRg st="2" end="2"/>
-                                            </p:txEl>
-                                          </p:spTgt>
-                                        </p:tgtEl>
-                                        <p:attrNameLst>
-                                          <p:attrName>style.visibility</p:attrName>
-                                        </p:attrNameLst>
-                                      </p:cBhvr>
-                                      <p:to>
-                                        <p:strVal val="visible"/>
-                                      </p:to>
-                                    </p:set>
-                                  </p:childTnLst>
-                                </p:cTn>
-                              </p:par>
-                            </p:childTnLst>
-                          </p:cTn>
-                        </p:par>
-                      </p:childTnLst>
-                    </p:cTn>
-                  </p:par>
-                  <p:par>
-                    <p:cTn id="11" fill="hold">
-                      <p:stCondLst>
-                        <p:cond delay="indefinite"/>
-                      </p:stCondLst>
-                      <p:childTnLst>
-                        <p:par>
-                          <p:cTn id="12" fill="hold">
-                            <p:stCondLst>
-                              <p:cond delay="0"/>
-                            </p:stCondLst>
-                            <p:childTnLst>
-                              <p:par>
-                                <p:cTn id="13" presetID="1" presetClass="entr" presetSubtype="0" fill="hold" nodeType="clickEffect">
-                                  <p:stCondLst>
-                                    <p:cond delay="0"/>
-                                  </p:stCondLst>
-                                  <p:childTnLst>
-                                    <p:set>
-                                      <p:cBhvr>
-                                        <p:cTn id="14" dur="1" fill="hold">
-                                          <p:stCondLst>
-                                            <p:cond delay="0"/>
-                                          </p:stCondLst>
-                                        </p:cTn>
-                                        <p:tgtEl>
-                                          <p:spTgt spid="3">
-                                            <p:txEl>
-                                              <p:pRg st="3" end="3"/>
-                                            </p:txEl>
-                                          </p:spTgt>
-                                        </p:tgtEl>
-                                        <p:attrNameLst>
-                                          <p:attrName>style.visibility</p:attrName>
-                                        </p:attrNameLst>
-                                      </p:cBhvr>
-                                      <p:to>
-                                        <p:strVal val="visible"/>
-                                      </p:to>
-                                    </p:set>
-                                  </p:childTnLst>
-                                </p:cTn>
-                              </p:par>
-                              <p:par>
-                                <p:cTn id="15" presetID="1" presetClass="entr" presetSubtype="0" fill="hold" nodeType="withEffect">
-                                  <p:stCondLst>
-                                    <p:cond delay="0"/>
-                                  </p:stCondLst>
-                                  <p:childTnLst>
-                                    <p:set>
-                                      <p:cBhvr>
-                                        <p:cTn id="16" dur="1" fill="hold">
-                                          <p:stCondLst>
-                                            <p:cond delay="0"/>
-                                          </p:stCondLst>
-                                        </p:cTn>
-                                        <p:tgtEl>
-                                          <p:spTgt spid="3">
-                                            <p:txEl>
-                                              <p:pRg st="4" end="4"/>
-                                            </p:txEl>
-                                          </p:spTgt>
-                                        </p:tgtEl>
-                                        <p:attrNameLst>
-                                          <p:attrName>style.visibility</p:attrName>
-                                        </p:attrNameLst>
-                                      </p:cBhvr>
-                                      <p:to>
-                                        <p:strVal val="visible"/>
-                                      </p:to>
-                                    </p:set>
-                                  </p:childTnLst>
-                                </p:cTn>
-                              </p:par>
-                              <p:par>
-                                <p:cTn id="17" presetID="1" presetClass="entr" presetSubtype="0" fill="hold" nodeType="withEffect">
-                                  <p:stCondLst>
-                                    <p:cond delay="0"/>
-                                  </p:stCondLst>
-                                  <p:childTnLst>
-                                    <p:set>
-                                      <p:cBhvr>
-                                        <p:cTn id="18" dur="1" fill="hold">
-                                          <p:stCondLst>
-                                            <p:cond delay="0"/>
-                                          </p:stCondLst>
-                                        </p:cTn>
-                                        <p:tgtEl>
-                                          <p:spTgt spid="3">
-                                            <p:txEl>
-                                              <p:pRg st="5" end="5"/>
-                                            </p:txEl>
-                                          </p:spTgt>
-                                        </p:tgtEl>
-                                        <p:attrNameLst>
-                                          <p:attrName>style.visibility</p:attrName>
-                                        </p:attrNameLst>
-                                      </p:cBhvr>
-                                      <p:to>
-                                        <p:strVal val="visible"/>
-                                      </p:to>
-                                    </p:set>
-                                  </p:childTnLst>
-                                </p:cTn>
-                              </p:par>
-                              <p:par>
-                                <p:cTn id="19" presetID="1" presetClass="entr" presetSubtype="0" fill="hold" nodeType="withEffect">
-                                  <p:stCondLst>
-                                    <p:cond delay="0"/>
-                                  </p:stCondLst>
-                                  <p:childTnLst>
-                                    <p:set>
-                                      <p:cBhvr>
-                                        <p:cTn id="20" dur="1" fill="hold">
-                                          <p:stCondLst>
-                                            <p:cond delay="0"/>
-                                          </p:stCondLst>
-                                        </p:cTn>
-                                        <p:tgtEl>
-                                          <p:spTgt spid="3">
-                                            <p:txEl>
-                                              <p:pRg st="6" end="6"/>
-                                            </p:txEl>
-                                          </p:spTgt>
-                                        </p:tgtEl>
-                                        <p:attrNameLst>
-                                          <p:attrName>style.visibility</p:attrName>
-                                        </p:attrNameLst>
-                                      </p:cBhvr>
-                                      <p:to>
-                                        <p:strVal val="visible"/>
-                                      </p:to>
-                                    </p:set>
-                                  </p:childTnLst>
-                                </p:cTn>
-                              </p:par>
-                              <p:par>
-                                <p:cTn id="21" presetID="1" presetClass="entr" presetSubtype="0" fill="hold" nodeType="withEffect">
-                                  <p:stCondLst>
-                                    <p:cond delay="0"/>
-                                  </p:stCondLst>
-                                  <p:childTnLst>
-                                    <p:set>
-                                      <p:cBhvr>
-                                        <p:cTn id="22" dur="1" fill="hold">
-                                          <p:stCondLst>
-                                            <p:cond delay="0"/>
-                                          </p:stCondLst>
-                                        </p:cTn>
-                                        <p:tgtEl>
-                                          <p:spTgt spid="3">
-                                            <p:txEl>
-                                              <p:pRg st="7" end="7"/>
-                                            </p:txEl>
-                                          </p:spTgt>
-                                        </p:tgtEl>
-                                        <p:attrNameLst>
-                                          <p:attrName>style.visibility</p:attrName>
-                                        </p:attrNameLst>
-                                      </p:cBhvr>
-                                      <p:to>
-                                        <p:strVal val="visible"/>
-                                      </p:to>
-                                    </p:set>
-                                  </p:childTnLst>
-                                </p:cTn>
-                              </p:par>
-                            </p:childTnLst>
-                          </p:cTn>
-                        </p:par>
-                      </p:childTnLst>
-                    </p:cTn>
-                  </p:par>
-                </p:childTnLst>
-              </p:cTn>
-              <p:prevCondLst>
-                <p:cond evt="onPrev" delay="0">
-                  <p:tgtEl>
-                    <p:sldTgt/>
-                  </p:tgtEl>
-                </p:cond>
-              </p:prevCondLst>
-              <p:nextCondLst>
-                <p:cond evt="onNext" delay="0">
-                  <p:tgtEl>
-                    <p:sldTgt/>
-                  </p:tgtEl>
-                </p:cond>
-              </p:nextCondLst>
-            </p:seq>
-          </p:childTnLst>
-        </p:cTn>
-      </p:par>
-    </p:tnLst>
-  </p:timing>
-</p:sld>
-</file>
-
-<file path=ppt/slides/slide40.xml><?xml version="1.0" encoding="utf-8"?>
+<file path=ppt/slides/slide42.xml><?xml version="1.0" encoding="utf-8"?>
 <p:sld xmlns:a="http://schemas.openxmlformats.org/drawingml/2006/main" xmlns:r="http://schemas.openxmlformats.org/officeDocument/2006/relationships" xmlns:p="http://schemas.openxmlformats.org/presentationml/2006/main">
   <p:cSld>
     <p:spTree>
@@ -27428,7 +28801,7 @@
 </p:sld>
 </file>
 
-<file path=ppt/slides/slide41.xml><?xml version="1.0" encoding="utf-8"?>
+<file path=ppt/slides/slide43.xml><?xml version="1.0" encoding="utf-8"?>
 <p:sld xmlns:a="http://schemas.openxmlformats.org/drawingml/2006/main" xmlns:r="http://schemas.openxmlformats.org/officeDocument/2006/relationships" xmlns:p="http://schemas.openxmlformats.org/presentationml/2006/main">
   <p:cSld>
     <p:spTree>
@@ -27832,7 +29205,7 @@
 </p:sld>
 </file>
 
-<file path=ppt/slides/slide42.xml><?xml version="1.0" encoding="utf-8"?>
+<file path=ppt/slides/slide44.xml><?xml version="1.0" encoding="utf-8"?>
 <p:sld xmlns:a="http://schemas.openxmlformats.org/drawingml/2006/main" xmlns:r="http://schemas.openxmlformats.org/officeDocument/2006/relationships" xmlns:p="http://schemas.openxmlformats.org/presentationml/2006/main">
   <p:cSld>
     <p:spTree>
@@ -28354,7 +29727,7 @@
 </p:sld>
 </file>
 
-<file path=ppt/slides/slide43.xml><?xml version="1.0" encoding="utf-8"?>
+<file path=ppt/slides/slide45.xml><?xml version="1.0" encoding="utf-8"?>
 <p:sld xmlns:a="http://schemas.openxmlformats.org/drawingml/2006/main" xmlns:r="http://schemas.openxmlformats.org/officeDocument/2006/relationships" xmlns:p="http://schemas.openxmlformats.org/presentationml/2006/main">
   <p:cSld>
     <p:spTree>
@@ -29493,7 +30866,7 @@
 </p:sld>
 </file>
 
-<file path=ppt/slides/slide44.xml><?xml version="1.0" encoding="utf-8"?>
+<file path=ppt/slides/slide46.xml><?xml version="1.0" encoding="utf-8"?>
 <p:sld xmlns:a="http://schemas.openxmlformats.org/drawingml/2006/main" xmlns:r="http://schemas.openxmlformats.org/officeDocument/2006/relationships" xmlns:p="http://schemas.openxmlformats.org/presentationml/2006/main">
   <p:cSld>
     <p:spTree>
@@ -29559,7 +30932,7 @@
 </p:sld>
 </file>
 
-<file path=ppt/slides/slide45.xml><?xml version="1.0" encoding="utf-8"?>
+<file path=ppt/slides/slide47.xml><?xml version="1.0" encoding="utf-8"?>
 <p:sld xmlns:a="http://schemas.openxmlformats.org/drawingml/2006/main" xmlns:r="http://schemas.openxmlformats.org/officeDocument/2006/relationships" xmlns:p="http://schemas.openxmlformats.org/presentationml/2006/main">
   <p:cSld>
     <p:spTree>
@@ -29576,8 +30949,8 @@
           <a:chExt cx="0" cy="0"/>
         </a:xfrm>
       </p:grpSpPr>
-      <mc:AlternateContent xmlns:mc="http://schemas.openxmlformats.org/markup-compatibility/2006">
-        <mc:Choice xmlns:a14="http://schemas.microsoft.com/office/drawing/2010/main" Requires="a14">
+      <mc:AlternateContent xmlns:mc="http://schemas.openxmlformats.org/markup-compatibility/2006" xmlns:a14="http://schemas.microsoft.com/office/drawing/2010/main">
+        <mc:Choice Requires="a14">
           <p:sp>
             <p:nvSpPr>
               <p:cNvPr id="3" name="Content Placeholder 2">
@@ -29949,7 +31322,7 @@
             </p:txBody>
           </p:sp>
         </mc:Choice>
-        <mc:Fallback>
+        <mc:Fallback xmlns="">
           <p:sp>
             <p:nvSpPr>
               <p:cNvPr id="3" name="Content Placeholder 2">
@@ -30376,7 +31749,7 @@
 </p:sld>
 </file>
 
-<file path=ppt/slides/slide46.xml><?xml version="1.0" encoding="utf-8"?>
+<file path=ppt/slides/slide48.xml><?xml version="1.0" encoding="utf-8"?>
 <p:sld xmlns:a="http://schemas.openxmlformats.org/drawingml/2006/main" xmlns:r="http://schemas.openxmlformats.org/officeDocument/2006/relationships" xmlns:p="http://schemas.openxmlformats.org/presentationml/2006/main">
   <p:cSld>
     <p:spTree>
@@ -30923,7 +32296,7 @@
 </p:sld>
 </file>
 
-<file path=ppt/slides/slide47.xml><?xml version="1.0" encoding="utf-8"?>
+<file path=ppt/slides/slide49.xml><?xml version="1.0" encoding="utf-8"?>
 <p:sld xmlns:a="http://schemas.openxmlformats.org/drawingml/2006/main" xmlns:r="http://schemas.openxmlformats.org/officeDocument/2006/relationships" xmlns:p="http://schemas.openxmlformats.org/presentationml/2006/main">
   <p:cSld>
     <p:spTree>
@@ -31522,7 +32895,401 @@
 </p:sld>
 </file>
 
-<file path=ppt/slides/slide48.xml><?xml version="1.0" encoding="utf-8"?>
+<file path=ppt/slides/slide5.xml><?xml version="1.0" encoding="utf-8"?>
+<p:sld xmlns:a="http://schemas.openxmlformats.org/drawingml/2006/main" xmlns:r="http://schemas.openxmlformats.org/officeDocument/2006/relationships" xmlns:p="http://schemas.openxmlformats.org/presentationml/2006/main">
+  <p:cSld>
+    <p:spTree>
+      <p:nvGrpSpPr>
+        <p:cNvPr id="1" name=""/>
+        <p:cNvGrpSpPr/>
+        <p:nvPr/>
+      </p:nvGrpSpPr>
+      <p:grpSpPr>
+        <a:xfrm>
+          <a:off x="0" y="0"/>
+          <a:ext cx="0" cy="0"/>
+          <a:chOff x="0" y="0"/>
+          <a:chExt cx="0" cy="0"/>
+        </a:xfrm>
+      </p:grpSpPr>
+      <p:sp>
+        <p:nvSpPr>
+          <p:cNvPr id="3" name="Content Placeholder 2">
+            <a:extLst>
+              <a:ext uri="{FF2B5EF4-FFF2-40B4-BE49-F238E27FC236}">
+                <a16:creationId xmlns:a16="http://schemas.microsoft.com/office/drawing/2014/main" id="{258E6AF3-7615-4BD1-878E-A94C93E98F90}"/>
+              </a:ext>
+            </a:extLst>
+          </p:cNvPr>
+          <p:cNvSpPr>
+            <a:spLocks noGrp="1"/>
+          </p:cNvSpPr>
+          <p:nvPr>
+            <p:ph idx="1"/>
+          </p:nvPr>
+        </p:nvSpPr>
+        <p:spPr>
+          <a:xfrm>
+            <a:off x="838200" y="1217458"/>
+            <a:ext cx="10515600" cy="5640542"/>
+          </a:xfrm>
+        </p:spPr>
+        <p:txBody>
+          <a:bodyPr>
+            <a:normAutofit fontScale="92500" lnSpcReduction="10000"/>
+          </a:bodyPr>
+          <a:lstStyle/>
+          <a:p>
+            <a:pPr marL="0" indent="0">
+              <a:buNone/>
+            </a:pPr>
+            <a:r>
+              <a:rPr lang="en-US" sz="3200" dirty="0"/>
+              <a:t>What is the KDD process?   </a:t>
+            </a:r>
+          </a:p>
+          <a:p>
+            <a:pPr marL="0" indent="0">
+              <a:buNone/>
+            </a:pPr>
+            <a:endParaRPr lang="en-US" dirty="0"/>
+          </a:p>
+          <a:p>
+            <a:pPr marL="0" indent="0">
+              <a:buNone/>
+            </a:pPr>
+            <a:endParaRPr lang="en-US" dirty="0"/>
+          </a:p>
+          <a:p>
+            <a:pPr marL="0" indent="0">
+              <a:buNone/>
+            </a:pPr>
+            <a:endParaRPr lang="en-US" dirty="0"/>
+          </a:p>
+          <a:p>
+            <a:pPr marL="0" indent="0">
+              <a:buNone/>
+            </a:pPr>
+            <a:endParaRPr lang="en-US" dirty="0"/>
+          </a:p>
+          <a:p>
+            <a:pPr marL="0" indent="0">
+              <a:buNone/>
+            </a:pPr>
+            <a:endParaRPr lang="en-US" dirty="0"/>
+          </a:p>
+          <a:p>
+            <a:pPr marL="0" indent="0">
+              <a:buNone/>
+            </a:pPr>
+            <a:endParaRPr lang="en-US" dirty="0"/>
+          </a:p>
+          <a:p>
+            <a:pPr marL="0" indent="0">
+              <a:buNone/>
+            </a:pPr>
+            <a:endParaRPr lang="en-US" dirty="0"/>
+          </a:p>
+          <a:p>
+            <a:pPr marL="0" indent="0">
+              <a:buNone/>
+            </a:pPr>
+            <a:endParaRPr lang="en-US" dirty="0">
+              <a:solidFill>
+                <a:schemeClr val="accent1"/>
+              </a:solidFill>
+            </a:endParaRPr>
+          </a:p>
+          <a:p>
+            <a:pPr marL="0" indent="0">
+              <a:buNone/>
+            </a:pPr>
+            <a:endParaRPr lang="en-US" dirty="0">
+              <a:solidFill>
+                <a:schemeClr val="accent1"/>
+              </a:solidFill>
+            </a:endParaRPr>
+          </a:p>
+          <a:p>
+            <a:pPr marL="0" indent="0">
+              <a:buNone/>
+            </a:pPr>
+            <a:endParaRPr lang="en-US" dirty="0">
+              <a:solidFill>
+                <a:schemeClr val="accent1"/>
+              </a:solidFill>
+            </a:endParaRPr>
+          </a:p>
+          <a:p>
+            <a:pPr marL="0" indent="0">
+              <a:buNone/>
+            </a:pPr>
+            <a:r>
+              <a:rPr lang="en-US" dirty="0">
+                <a:solidFill>
+                  <a:schemeClr val="accent1"/>
+                </a:solidFill>
+              </a:rPr>
+              <a:t>Is this old diagram representative?  - e.g. Fayyad et.al. 1996 </a:t>
+            </a:r>
+          </a:p>
+        </p:txBody>
+      </p:sp>
+      <p:sp>
+        <p:nvSpPr>
+          <p:cNvPr id="6" name="Title 1">
+            <a:extLst>
+              <a:ext uri="{FF2B5EF4-FFF2-40B4-BE49-F238E27FC236}">
+                <a16:creationId xmlns:a16="http://schemas.microsoft.com/office/drawing/2014/main" id="{CD29F70F-B868-451B-A65D-8721F4C7A2D9}"/>
+              </a:ext>
+            </a:extLst>
+          </p:cNvPr>
+          <p:cNvSpPr txBox="1">
+            <a:spLocks/>
+          </p:cNvSpPr>
+          <p:nvPr/>
+        </p:nvSpPr>
+        <p:spPr>
+          <a:xfrm>
+            <a:off x="838200" y="-635"/>
+            <a:ext cx="10515600" cy="1325563"/>
+          </a:xfrm>
+          <a:prstGeom prst="rect">
+            <a:avLst/>
+          </a:prstGeom>
+        </p:spPr>
+        <p:txBody>
+          <a:bodyPr vert="horz" lIns="91440" tIns="45720" rIns="91440" bIns="45720" rtlCol="0" anchor="ctr">
+            <a:normAutofit/>
+          </a:bodyPr>
+          <a:lstStyle>
+            <a:lvl1pPr algn="l" defTabSz="914400" rtl="0" eaLnBrk="1" latinLnBrk="0" hangingPunct="1">
+              <a:lnSpc>
+                <a:spcPct val="90000"/>
+              </a:lnSpc>
+              <a:spcBef>
+                <a:spcPct val="0"/>
+              </a:spcBef>
+              <a:buNone/>
+              <a:defRPr sz="4400" kern="1200">
+                <a:solidFill>
+                  <a:schemeClr val="tx1"/>
+                </a:solidFill>
+                <a:latin typeface="+mj-lt"/>
+                <a:ea typeface="+mj-ea"/>
+                <a:cs typeface="+mj-cs"/>
+              </a:defRPr>
+            </a:lvl1pPr>
+          </a:lstStyle>
+          <a:p>
+            <a:r>
+              <a:rPr lang="en-US" dirty="0">
+                <a:latin typeface="+mn-lt"/>
+              </a:rPr>
+              <a:t>KDD process</a:t>
+            </a:r>
+          </a:p>
+        </p:txBody>
+      </p:sp>
+      <p:pic>
+        <p:nvPicPr>
+          <p:cNvPr id="4" name="Picture 3">
+            <a:extLst>
+              <a:ext uri="{FF2B5EF4-FFF2-40B4-BE49-F238E27FC236}">
+                <a16:creationId xmlns:a16="http://schemas.microsoft.com/office/drawing/2014/main" id="{41A10601-345E-4A04-878A-28FFF71506B5}"/>
+              </a:ext>
+            </a:extLst>
+          </p:cNvPr>
+          <p:cNvPicPr>
+            <a:picLocks noChangeAspect="1"/>
+          </p:cNvPicPr>
+          <p:nvPr/>
+        </p:nvPicPr>
+        <p:blipFill>
+          <a:blip r:embed="rId2"/>
+          <a:stretch>
+            <a:fillRect/>
+          </a:stretch>
+        </p:blipFill>
+        <p:spPr>
+          <a:xfrm>
+            <a:off x="951375" y="1651145"/>
+            <a:ext cx="8488232" cy="4404795"/>
+          </a:xfrm>
+          <a:prstGeom prst="rect">
+            <a:avLst/>
+          </a:prstGeom>
+        </p:spPr>
+      </p:pic>
+    </p:spTree>
+    <p:extLst>
+      <p:ext uri="{BB962C8B-B14F-4D97-AF65-F5344CB8AC3E}">
+        <p14:creationId xmlns:p14="http://schemas.microsoft.com/office/powerpoint/2010/main" val="2011350768"/>
+      </p:ext>
+    </p:extLst>
+  </p:cSld>
+  <p:clrMapOvr>
+    <a:masterClrMapping/>
+  </p:clrMapOvr>
+  <p:timing>
+    <p:tnLst>
+      <p:par>
+        <p:cTn id="1" dur="indefinite" restart="never" nodeType="tmRoot">
+          <p:childTnLst>
+            <p:seq concurrent="1" nextAc="seek">
+              <p:cTn id="2" dur="indefinite" nodeType="mainSeq">
+                <p:childTnLst>
+                  <p:par>
+                    <p:cTn id="3" fill="hold">
+                      <p:stCondLst>
+                        <p:cond delay="indefinite"/>
+                      </p:stCondLst>
+                      <p:childTnLst>
+                        <p:par>
+                          <p:cTn id="4" fill="hold">
+                            <p:stCondLst>
+                              <p:cond delay="0"/>
+                            </p:stCondLst>
+                            <p:childTnLst>
+                              <p:par>
+                                <p:cTn id="5" presetID="1" presetClass="entr" presetSubtype="0" fill="hold" nodeType="clickEffect">
+                                  <p:stCondLst>
+                                    <p:cond delay="0"/>
+                                  </p:stCondLst>
+                                  <p:childTnLst>
+                                    <p:set>
+                                      <p:cBhvr>
+                                        <p:cTn id="6" dur="1" fill="hold">
+                                          <p:stCondLst>
+                                            <p:cond delay="0"/>
+                                          </p:stCondLst>
+                                        </p:cTn>
+                                        <p:tgtEl>
+                                          <p:spTgt spid="3">
+                                            <p:txEl>
+                                              <p:pRg st="0" end="0"/>
+                                            </p:txEl>
+                                          </p:spTgt>
+                                        </p:tgtEl>
+                                        <p:attrNameLst>
+                                          <p:attrName>style.visibility</p:attrName>
+                                        </p:attrNameLst>
+                                      </p:cBhvr>
+                                      <p:to>
+                                        <p:strVal val="visible"/>
+                                      </p:to>
+                                    </p:set>
+                                  </p:childTnLst>
+                                </p:cTn>
+                              </p:par>
+                            </p:childTnLst>
+                          </p:cTn>
+                        </p:par>
+                      </p:childTnLst>
+                    </p:cTn>
+                  </p:par>
+                  <p:par>
+                    <p:cTn id="7" fill="hold">
+                      <p:stCondLst>
+                        <p:cond delay="indefinite"/>
+                      </p:stCondLst>
+                      <p:childTnLst>
+                        <p:par>
+                          <p:cTn id="8" fill="hold">
+                            <p:stCondLst>
+                              <p:cond delay="0"/>
+                            </p:stCondLst>
+                            <p:childTnLst>
+                              <p:par>
+                                <p:cTn id="9" presetID="1" presetClass="entr" presetSubtype="0" fill="hold" nodeType="clickEffect">
+                                  <p:stCondLst>
+                                    <p:cond delay="0"/>
+                                  </p:stCondLst>
+                                  <p:childTnLst>
+                                    <p:set>
+                                      <p:cBhvr>
+                                        <p:cTn id="10" dur="1" fill="hold">
+                                          <p:stCondLst>
+                                            <p:cond delay="0"/>
+                                          </p:stCondLst>
+                                        </p:cTn>
+                                        <p:tgtEl>
+                                          <p:spTgt spid="3">
+                                            <p:txEl>
+                                              <p:pRg st="11" end="11"/>
+                                            </p:txEl>
+                                          </p:spTgt>
+                                        </p:tgtEl>
+                                        <p:attrNameLst>
+                                          <p:attrName>style.visibility</p:attrName>
+                                        </p:attrNameLst>
+                                      </p:cBhvr>
+                                      <p:to>
+                                        <p:strVal val="visible"/>
+                                      </p:to>
+                                    </p:set>
+                                  </p:childTnLst>
+                                </p:cTn>
+                              </p:par>
+                              <p:par>
+                                <p:cTn id="11" presetID="1" presetClass="entr" presetSubtype="0" fill="hold" nodeType="withEffect">
+                                  <p:stCondLst>
+                                    <p:cond delay="0"/>
+                                  </p:stCondLst>
+                                  <p:childTnLst>
+                                    <p:set>
+                                      <p:cBhvr>
+                                        <p:cTn id="12" dur="1" fill="hold">
+                                          <p:stCondLst>
+                                            <p:cond delay="0"/>
+                                          </p:stCondLst>
+                                        </p:cTn>
+                                        <p:tgtEl>
+                                          <p:spTgt spid="4"/>
+                                        </p:tgtEl>
+                                        <p:attrNameLst>
+                                          <p:attrName>style.visibility</p:attrName>
+                                        </p:attrNameLst>
+                                      </p:cBhvr>
+                                      <p:to>
+                                        <p:strVal val="visible"/>
+                                      </p:to>
+                                    </p:set>
+                                  </p:childTnLst>
+                                </p:cTn>
+                              </p:par>
+                            </p:childTnLst>
+                          </p:cTn>
+                        </p:par>
+                      </p:childTnLst>
+                    </p:cTn>
+                  </p:par>
+                </p:childTnLst>
+              </p:cTn>
+              <p:prevCondLst>
+                <p:cond evt="onPrev" delay="0">
+                  <p:tgtEl>
+                    <p:sldTgt/>
+                  </p:tgtEl>
+                </p:cond>
+              </p:prevCondLst>
+              <p:nextCondLst>
+                <p:cond evt="onNext" delay="0">
+                  <p:tgtEl>
+                    <p:sldTgt/>
+                  </p:tgtEl>
+                </p:cond>
+              </p:nextCondLst>
+            </p:seq>
+          </p:childTnLst>
+        </p:cTn>
+      </p:par>
+    </p:tnLst>
+  </p:timing>
+</p:sld>
+</file>
+
+<file path=ppt/slides/slide50.xml><?xml version="1.0" encoding="utf-8"?>
 <p:sld xmlns:a="http://schemas.openxmlformats.org/drawingml/2006/main" xmlns:r="http://schemas.openxmlformats.org/officeDocument/2006/relationships" xmlns:p="http://schemas.openxmlformats.org/presentationml/2006/main">
   <p:cSld>
     <p:spTree>
@@ -32111,7 +33878,7 @@
 </p:sld>
 </file>
 
-<file path=ppt/slides/slide49.xml><?xml version="1.0" encoding="utf-8"?>
+<file path=ppt/slides/slide51.xml><?xml version="1.0" encoding="utf-8"?>
 <p:sld xmlns:a="http://schemas.openxmlformats.org/drawingml/2006/main" xmlns:r="http://schemas.openxmlformats.org/officeDocument/2006/relationships" xmlns:p="http://schemas.openxmlformats.org/presentationml/2006/main">
   <p:cSld>
     <p:spTree>
@@ -32134,8 +33901,8 @@
           <a:chExt cx="0" cy="0"/>
         </a:xfrm>
       </p:grpSpPr>
-      <mc:AlternateContent xmlns:mc="http://schemas.openxmlformats.org/markup-compatibility/2006">
-        <mc:Choice xmlns:a14="http://schemas.microsoft.com/office/drawing/2010/main" Requires="a14">
+      <mc:AlternateContent xmlns:mc="http://schemas.openxmlformats.org/markup-compatibility/2006" xmlns:a14="http://schemas.microsoft.com/office/drawing/2010/main">
+        <mc:Choice Requires="a14">
           <p:sp>
             <p:nvSpPr>
               <p:cNvPr id="3" name="Content Placeholder 2">
@@ -32617,7 +34384,7 @@
             </p:txBody>
           </p:sp>
         </mc:Choice>
-        <mc:Fallback>
+        <mc:Fallback xmlns="">
           <p:sp>
             <p:nvSpPr>
               <p:cNvPr id="3" name="Content Placeholder 2">
@@ -33044,401 +34811,7 @@
 </p:sld>
 </file>
 
-<file path=ppt/slides/slide5.xml><?xml version="1.0" encoding="utf-8"?>
-<p:sld xmlns:a="http://schemas.openxmlformats.org/drawingml/2006/main" xmlns:r="http://schemas.openxmlformats.org/officeDocument/2006/relationships" xmlns:p="http://schemas.openxmlformats.org/presentationml/2006/main">
-  <p:cSld>
-    <p:spTree>
-      <p:nvGrpSpPr>
-        <p:cNvPr id="1" name=""/>
-        <p:cNvGrpSpPr/>
-        <p:nvPr/>
-      </p:nvGrpSpPr>
-      <p:grpSpPr>
-        <a:xfrm>
-          <a:off x="0" y="0"/>
-          <a:ext cx="0" cy="0"/>
-          <a:chOff x="0" y="0"/>
-          <a:chExt cx="0" cy="0"/>
-        </a:xfrm>
-      </p:grpSpPr>
-      <p:sp>
-        <p:nvSpPr>
-          <p:cNvPr id="3" name="Content Placeholder 2">
-            <a:extLst>
-              <a:ext uri="{FF2B5EF4-FFF2-40B4-BE49-F238E27FC236}">
-                <a16:creationId xmlns:a16="http://schemas.microsoft.com/office/drawing/2014/main" id="{258E6AF3-7615-4BD1-878E-A94C93E98F90}"/>
-              </a:ext>
-            </a:extLst>
-          </p:cNvPr>
-          <p:cNvSpPr>
-            <a:spLocks noGrp="1"/>
-          </p:cNvSpPr>
-          <p:nvPr>
-            <p:ph idx="1"/>
-          </p:nvPr>
-        </p:nvSpPr>
-        <p:spPr>
-          <a:xfrm>
-            <a:off x="838200" y="1217458"/>
-            <a:ext cx="10515600" cy="5640542"/>
-          </a:xfrm>
-        </p:spPr>
-        <p:txBody>
-          <a:bodyPr>
-            <a:normAutofit fontScale="92500" lnSpcReduction="10000"/>
-          </a:bodyPr>
-          <a:lstStyle/>
-          <a:p>
-            <a:pPr marL="0" indent="0">
-              <a:buNone/>
-            </a:pPr>
-            <a:r>
-              <a:rPr lang="en-US" sz="3200" dirty="0"/>
-              <a:t>What is the KDD process?   </a:t>
-            </a:r>
-          </a:p>
-          <a:p>
-            <a:pPr marL="0" indent="0">
-              <a:buNone/>
-            </a:pPr>
-            <a:endParaRPr lang="en-US" dirty="0"/>
-          </a:p>
-          <a:p>
-            <a:pPr marL="0" indent="0">
-              <a:buNone/>
-            </a:pPr>
-            <a:endParaRPr lang="en-US" dirty="0"/>
-          </a:p>
-          <a:p>
-            <a:pPr marL="0" indent="0">
-              <a:buNone/>
-            </a:pPr>
-            <a:endParaRPr lang="en-US" dirty="0"/>
-          </a:p>
-          <a:p>
-            <a:pPr marL="0" indent="0">
-              <a:buNone/>
-            </a:pPr>
-            <a:endParaRPr lang="en-US" dirty="0"/>
-          </a:p>
-          <a:p>
-            <a:pPr marL="0" indent="0">
-              <a:buNone/>
-            </a:pPr>
-            <a:endParaRPr lang="en-US" dirty="0"/>
-          </a:p>
-          <a:p>
-            <a:pPr marL="0" indent="0">
-              <a:buNone/>
-            </a:pPr>
-            <a:endParaRPr lang="en-US" dirty="0"/>
-          </a:p>
-          <a:p>
-            <a:pPr marL="0" indent="0">
-              <a:buNone/>
-            </a:pPr>
-            <a:endParaRPr lang="en-US" dirty="0"/>
-          </a:p>
-          <a:p>
-            <a:pPr marL="0" indent="0">
-              <a:buNone/>
-            </a:pPr>
-            <a:endParaRPr lang="en-US" dirty="0">
-              <a:solidFill>
-                <a:schemeClr val="accent1"/>
-              </a:solidFill>
-            </a:endParaRPr>
-          </a:p>
-          <a:p>
-            <a:pPr marL="0" indent="0">
-              <a:buNone/>
-            </a:pPr>
-            <a:endParaRPr lang="en-US" dirty="0">
-              <a:solidFill>
-                <a:schemeClr val="accent1"/>
-              </a:solidFill>
-            </a:endParaRPr>
-          </a:p>
-          <a:p>
-            <a:pPr marL="0" indent="0">
-              <a:buNone/>
-            </a:pPr>
-            <a:endParaRPr lang="en-US" dirty="0">
-              <a:solidFill>
-                <a:schemeClr val="accent1"/>
-              </a:solidFill>
-            </a:endParaRPr>
-          </a:p>
-          <a:p>
-            <a:pPr marL="0" indent="0">
-              <a:buNone/>
-            </a:pPr>
-            <a:r>
-              <a:rPr lang="en-US" dirty="0">
-                <a:solidFill>
-                  <a:schemeClr val="accent1"/>
-                </a:solidFill>
-              </a:rPr>
-              <a:t>Is this old diagram representative?  - e.g. Fayyad et.al. 1996 </a:t>
-            </a:r>
-          </a:p>
-        </p:txBody>
-      </p:sp>
-      <p:sp>
-        <p:nvSpPr>
-          <p:cNvPr id="6" name="Title 1">
-            <a:extLst>
-              <a:ext uri="{FF2B5EF4-FFF2-40B4-BE49-F238E27FC236}">
-                <a16:creationId xmlns:a16="http://schemas.microsoft.com/office/drawing/2014/main" id="{CD29F70F-B868-451B-A65D-8721F4C7A2D9}"/>
-              </a:ext>
-            </a:extLst>
-          </p:cNvPr>
-          <p:cNvSpPr txBox="1">
-            <a:spLocks/>
-          </p:cNvSpPr>
-          <p:nvPr/>
-        </p:nvSpPr>
-        <p:spPr>
-          <a:xfrm>
-            <a:off x="838200" y="-635"/>
-            <a:ext cx="10515600" cy="1325563"/>
-          </a:xfrm>
-          <a:prstGeom prst="rect">
-            <a:avLst/>
-          </a:prstGeom>
-        </p:spPr>
-        <p:txBody>
-          <a:bodyPr vert="horz" lIns="91440" tIns="45720" rIns="91440" bIns="45720" rtlCol="0" anchor="ctr">
-            <a:normAutofit/>
-          </a:bodyPr>
-          <a:lstStyle>
-            <a:lvl1pPr algn="l" defTabSz="914400" rtl="0" eaLnBrk="1" latinLnBrk="0" hangingPunct="1">
-              <a:lnSpc>
-                <a:spcPct val="90000"/>
-              </a:lnSpc>
-              <a:spcBef>
-                <a:spcPct val="0"/>
-              </a:spcBef>
-              <a:buNone/>
-              <a:defRPr sz="4400" kern="1200">
-                <a:solidFill>
-                  <a:schemeClr val="tx1"/>
-                </a:solidFill>
-                <a:latin typeface="+mj-lt"/>
-                <a:ea typeface="+mj-ea"/>
-                <a:cs typeface="+mj-cs"/>
-              </a:defRPr>
-            </a:lvl1pPr>
-          </a:lstStyle>
-          <a:p>
-            <a:r>
-              <a:rPr lang="en-US" dirty="0">
-                <a:latin typeface="+mn-lt"/>
-              </a:rPr>
-              <a:t>KDD process</a:t>
-            </a:r>
-          </a:p>
-        </p:txBody>
-      </p:sp>
-      <p:pic>
-        <p:nvPicPr>
-          <p:cNvPr id="4" name="Picture 3">
-            <a:extLst>
-              <a:ext uri="{FF2B5EF4-FFF2-40B4-BE49-F238E27FC236}">
-                <a16:creationId xmlns:a16="http://schemas.microsoft.com/office/drawing/2014/main" id="{41A10601-345E-4A04-878A-28FFF71506B5}"/>
-              </a:ext>
-            </a:extLst>
-          </p:cNvPr>
-          <p:cNvPicPr>
-            <a:picLocks noChangeAspect="1"/>
-          </p:cNvPicPr>
-          <p:nvPr/>
-        </p:nvPicPr>
-        <p:blipFill>
-          <a:blip r:embed="rId2"/>
-          <a:stretch>
-            <a:fillRect/>
-          </a:stretch>
-        </p:blipFill>
-        <p:spPr>
-          <a:xfrm>
-            <a:off x="951375" y="1651145"/>
-            <a:ext cx="8488232" cy="4404795"/>
-          </a:xfrm>
-          <a:prstGeom prst="rect">
-            <a:avLst/>
-          </a:prstGeom>
-        </p:spPr>
-      </p:pic>
-    </p:spTree>
-    <p:extLst>
-      <p:ext uri="{BB962C8B-B14F-4D97-AF65-F5344CB8AC3E}">
-        <p14:creationId xmlns:p14="http://schemas.microsoft.com/office/powerpoint/2010/main" val="2011350768"/>
-      </p:ext>
-    </p:extLst>
-  </p:cSld>
-  <p:clrMapOvr>
-    <a:masterClrMapping/>
-  </p:clrMapOvr>
-  <p:timing>
-    <p:tnLst>
-      <p:par>
-        <p:cTn id="1" dur="indefinite" restart="never" nodeType="tmRoot">
-          <p:childTnLst>
-            <p:seq concurrent="1" nextAc="seek">
-              <p:cTn id="2" dur="indefinite" nodeType="mainSeq">
-                <p:childTnLst>
-                  <p:par>
-                    <p:cTn id="3" fill="hold">
-                      <p:stCondLst>
-                        <p:cond delay="indefinite"/>
-                      </p:stCondLst>
-                      <p:childTnLst>
-                        <p:par>
-                          <p:cTn id="4" fill="hold">
-                            <p:stCondLst>
-                              <p:cond delay="0"/>
-                            </p:stCondLst>
-                            <p:childTnLst>
-                              <p:par>
-                                <p:cTn id="5" presetID="1" presetClass="entr" presetSubtype="0" fill="hold" nodeType="clickEffect">
-                                  <p:stCondLst>
-                                    <p:cond delay="0"/>
-                                  </p:stCondLst>
-                                  <p:childTnLst>
-                                    <p:set>
-                                      <p:cBhvr>
-                                        <p:cTn id="6" dur="1" fill="hold">
-                                          <p:stCondLst>
-                                            <p:cond delay="0"/>
-                                          </p:stCondLst>
-                                        </p:cTn>
-                                        <p:tgtEl>
-                                          <p:spTgt spid="3">
-                                            <p:txEl>
-                                              <p:pRg st="0" end="0"/>
-                                            </p:txEl>
-                                          </p:spTgt>
-                                        </p:tgtEl>
-                                        <p:attrNameLst>
-                                          <p:attrName>style.visibility</p:attrName>
-                                        </p:attrNameLst>
-                                      </p:cBhvr>
-                                      <p:to>
-                                        <p:strVal val="visible"/>
-                                      </p:to>
-                                    </p:set>
-                                  </p:childTnLst>
-                                </p:cTn>
-                              </p:par>
-                            </p:childTnLst>
-                          </p:cTn>
-                        </p:par>
-                      </p:childTnLst>
-                    </p:cTn>
-                  </p:par>
-                  <p:par>
-                    <p:cTn id="7" fill="hold">
-                      <p:stCondLst>
-                        <p:cond delay="indefinite"/>
-                      </p:stCondLst>
-                      <p:childTnLst>
-                        <p:par>
-                          <p:cTn id="8" fill="hold">
-                            <p:stCondLst>
-                              <p:cond delay="0"/>
-                            </p:stCondLst>
-                            <p:childTnLst>
-                              <p:par>
-                                <p:cTn id="9" presetID="1" presetClass="entr" presetSubtype="0" fill="hold" nodeType="clickEffect">
-                                  <p:stCondLst>
-                                    <p:cond delay="0"/>
-                                  </p:stCondLst>
-                                  <p:childTnLst>
-                                    <p:set>
-                                      <p:cBhvr>
-                                        <p:cTn id="10" dur="1" fill="hold">
-                                          <p:stCondLst>
-                                            <p:cond delay="0"/>
-                                          </p:stCondLst>
-                                        </p:cTn>
-                                        <p:tgtEl>
-                                          <p:spTgt spid="3">
-                                            <p:txEl>
-                                              <p:pRg st="11" end="11"/>
-                                            </p:txEl>
-                                          </p:spTgt>
-                                        </p:tgtEl>
-                                        <p:attrNameLst>
-                                          <p:attrName>style.visibility</p:attrName>
-                                        </p:attrNameLst>
-                                      </p:cBhvr>
-                                      <p:to>
-                                        <p:strVal val="visible"/>
-                                      </p:to>
-                                    </p:set>
-                                  </p:childTnLst>
-                                </p:cTn>
-                              </p:par>
-                              <p:par>
-                                <p:cTn id="11" presetID="1" presetClass="entr" presetSubtype="0" fill="hold" nodeType="withEffect">
-                                  <p:stCondLst>
-                                    <p:cond delay="0"/>
-                                  </p:stCondLst>
-                                  <p:childTnLst>
-                                    <p:set>
-                                      <p:cBhvr>
-                                        <p:cTn id="12" dur="1" fill="hold">
-                                          <p:stCondLst>
-                                            <p:cond delay="0"/>
-                                          </p:stCondLst>
-                                        </p:cTn>
-                                        <p:tgtEl>
-                                          <p:spTgt spid="4"/>
-                                        </p:tgtEl>
-                                        <p:attrNameLst>
-                                          <p:attrName>style.visibility</p:attrName>
-                                        </p:attrNameLst>
-                                      </p:cBhvr>
-                                      <p:to>
-                                        <p:strVal val="visible"/>
-                                      </p:to>
-                                    </p:set>
-                                  </p:childTnLst>
-                                </p:cTn>
-                              </p:par>
-                            </p:childTnLst>
-                          </p:cTn>
-                        </p:par>
-                      </p:childTnLst>
-                    </p:cTn>
-                  </p:par>
-                </p:childTnLst>
-              </p:cTn>
-              <p:prevCondLst>
-                <p:cond evt="onPrev" delay="0">
-                  <p:tgtEl>
-                    <p:sldTgt/>
-                  </p:tgtEl>
-                </p:cond>
-              </p:prevCondLst>
-              <p:nextCondLst>
-                <p:cond evt="onNext" delay="0">
-                  <p:tgtEl>
-                    <p:sldTgt/>
-                  </p:tgtEl>
-                </p:cond>
-              </p:nextCondLst>
-            </p:seq>
-          </p:childTnLst>
-        </p:cTn>
-      </p:par>
-    </p:tnLst>
-  </p:timing>
-</p:sld>
-</file>
-
-<file path=ppt/slides/slide50.xml><?xml version="1.0" encoding="utf-8"?>
+<file path=ppt/slides/slide52.xml><?xml version="1.0" encoding="utf-8"?>
 <p:sld xmlns:a="http://schemas.openxmlformats.org/drawingml/2006/main" xmlns:r="http://schemas.openxmlformats.org/officeDocument/2006/relationships" xmlns:p="http://schemas.openxmlformats.org/presentationml/2006/main">
   <p:cSld>
     <p:spTree>
@@ -33461,8 +34834,8 @@
           <a:chExt cx="0" cy="0"/>
         </a:xfrm>
       </p:grpSpPr>
-      <mc:AlternateContent xmlns:mc="http://schemas.openxmlformats.org/markup-compatibility/2006">
-        <mc:Choice xmlns:a14="http://schemas.microsoft.com/office/drawing/2010/main" Requires="a14">
+      <mc:AlternateContent xmlns:mc="http://schemas.openxmlformats.org/markup-compatibility/2006" xmlns:a14="http://schemas.microsoft.com/office/drawing/2010/main">
+        <mc:Choice Requires="a14">
           <p:sp>
             <p:nvSpPr>
               <p:cNvPr id="3" name="Content Placeholder 2">
@@ -33722,14 +35095,7 @@
                           <a:latin typeface="Cambria Math" panose="02040503050406030204" pitchFamily="18" charset="0"/>
                           <a:ea typeface="Cambria Math" panose="02040503050406030204" pitchFamily="18" charset="0"/>
                         </a:rPr>
-                        <m:t>≈</m:t>
-                      </m:r>
-                      <m:r>
-                        <a:rPr lang="en-US" i="1" smtClean="0">
-                          <a:latin typeface="Cambria Math" panose="02040503050406030204" pitchFamily="18" charset="0"/>
-                          <a:ea typeface="Cambria Math" panose="02040503050406030204" pitchFamily="18" charset="0"/>
-                        </a:rPr>
-                        <m:t>1</m:t>
+                        <m:t>≈1</m:t>
                       </m:r>
                       <m:r>
                         <a:rPr lang="en-US" b="0" i="1" smtClean="0">
@@ -33821,7 +35187,7 @@
             </p:txBody>
           </p:sp>
         </mc:Choice>
-        <mc:Fallback>
+        <mc:Fallback xmlns="">
           <p:sp>
             <p:nvSpPr>
               <p:cNvPr id="3" name="Content Placeholder 2">
@@ -34044,7 +35410,7 @@
 </p:sld>
 </file>
 
-<file path=ppt/slides/slide51.xml><?xml version="1.0" encoding="utf-8"?>
+<file path=ppt/slides/slide53.xml><?xml version="1.0" encoding="utf-8"?>
 <p:sld xmlns:a="http://schemas.openxmlformats.org/drawingml/2006/main" xmlns:r="http://schemas.openxmlformats.org/officeDocument/2006/relationships" xmlns:p="http://schemas.openxmlformats.org/presentationml/2006/main">
   <p:cSld>
     <p:spTree>
@@ -34067,8 +35433,8 @@
           <a:chExt cx="0" cy="0"/>
         </a:xfrm>
       </p:grpSpPr>
-      <mc:AlternateContent xmlns:mc="http://schemas.openxmlformats.org/markup-compatibility/2006">
-        <mc:Choice xmlns:a14="http://schemas.microsoft.com/office/drawing/2010/main" Requires="a14">
+      <mc:AlternateContent xmlns:mc="http://schemas.openxmlformats.org/markup-compatibility/2006" xmlns:a14="http://schemas.microsoft.com/office/drawing/2010/main">
+        <mc:Choice Requires="a14">
           <p:sp>
             <p:nvSpPr>
               <p:cNvPr id="3" name="Content Placeholder 2">
@@ -34295,7 +35661,7 @@
             </p:txBody>
           </p:sp>
         </mc:Choice>
-        <mc:Fallback>
+        <mc:Fallback xmlns="">
           <p:sp>
             <p:nvSpPr>
               <p:cNvPr id="3" name="Content Placeholder 2">
@@ -34562,7 +35928,7 @@
 </p:sld>
 </file>
 
-<file path=ppt/slides/slide52.xml><?xml version="1.0" encoding="utf-8"?>
+<file path=ppt/slides/slide54.xml><?xml version="1.0" encoding="utf-8"?>
 <p:sld xmlns:a="http://schemas.openxmlformats.org/drawingml/2006/main" xmlns:r="http://schemas.openxmlformats.org/officeDocument/2006/relationships" xmlns:p="http://schemas.openxmlformats.org/presentationml/2006/main">
   <p:cSld>
     <p:spTree>
@@ -34628,7 +35994,7 @@
 </p:sld>
 </file>
 
-<file path=ppt/slides/slide53.xml><?xml version="1.0" encoding="utf-8"?>
+<file path=ppt/slides/slide55.xml><?xml version="1.0" encoding="utf-8"?>
 <p:sld xmlns:a="http://schemas.openxmlformats.org/drawingml/2006/main" xmlns:r="http://schemas.openxmlformats.org/officeDocument/2006/relationships" xmlns:p="http://schemas.openxmlformats.org/presentationml/2006/main">
   <p:cSld>
     <p:spTree>
@@ -35675,6 +37041,918 @@
   <p:cSld>
     <p:spTree>
       <p:nvGrpSpPr>
+        <p:cNvPr id="1" name="">
+          <a:extLst>
+            <a:ext uri="{FF2B5EF4-FFF2-40B4-BE49-F238E27FC236}">
+              <a16:creationId xmlns:a16="http://schemas.microsoft.com/office/drawing/2014/main" id="{1D63D48E-7DDD-6156-0A05-4EB2033943D9}"/>
+            </a:ext>
+          </a:extLst>
+        </p:cNvPr>
+        <p:cNvGrpSpPr/>
+        <p:nvPr/>
+      </p:nvGrpSpPr>
+      <p:grpSpPr>
+        <a:xfrm>
+          <a:off x="0" y="0"/>
+          <a:ext cx="0" cy="0"/>
+          <a:chOff x="0" y="0"/>
+          <a:chExt cx="0" cy="0"/>
+        </a:xfrm>
+      </p:grpSpPr>
+      <p:sp>
+        <p:nvSpPr>
+          <p:cNvPr id="2" name="Title 1">
+            <a:extLst>
+              <a:ext uri="{FF2B5EF4-FFF2-40B4-BE49-F238E27FC236}">
+                <a16:creationId xmlns:a16="http://schemas.microsoft.com/office/drawing/2014/main" id="{55631A44-874E-8831-E915-8CFF2A4FB79F}"/>
+              </a:ext>
+            </a:extLst>
+          </p:cNvPr>
+          <p:cNvSpPr>
+            <a:spLocks noGrp="1"/>
+          </p:cNvSpPr>
+          <p:nvPr>
+            <p:ph type="title"/>
+          </p:nvPr>
+        </p:nvSpPr>
+        <p:spPr>
+          <a:xfrm>
+            <a:off x="584200" y="221992"/>
+            <a:ext cx="10515600" cy="530954"/>
+          </a:xfrm>
+        </p:spPr>
+        <p:txBody>
+          <a:bodyPr>
+            <a:normAutofit fontScale="90000"/>
+          </a:bodyPr>
+          <a:lstStyle/>
+          <a:p>
+            <a:r>
+              <a:rPr lang="en-US" dirty="0"/>
+              <a:t>Dimensions of Data Mining  </a:t>
+            </a:r>
+          </a:p>
+        </p:txBody>
+      </p:sp>
+      <p:sp>
+        <p:nvSpPr>
+          <p:cNvPr id="3" name="Content Placeholder 2">
+            <a:extLst>
+              <a:ext uri="{FF2B5EF4-FFF2-40B4-BE49-F238E27FC236}">
+                <a16:creationId xmlns:a16="http://schemas.microsoft.com/office/drawing/2014/main" id="{07B0CBF9-87CC-11AC-AD83-94CE226B28CC}"/>
+              </a:ext>
+            </a:extLst>
+          </p:cNvPr>
+          <p:cNvSpPr>
+            <a:spLocks noGrp="1"/>
+          </p:cNvSpPr>
+          <p:nvPr>
+            <p:ph sz="quarter" idx="10"/>
+          </p:nvPr>
+        </p:nvSpPr>
+        <p:spPr>
+          <a:xfrm>
+            <a:off x="333375" y="896079"/>
+            <a:ext cx="7187198" cy="5698998"/>
+          </a:xfrm>
+        </p:spPr>
+        <p:txBody>
+          <a:bodyPr>
+            <a:normAutofit/>
+          </a:bodyPr>
+          <a:lstStyle/>
+          <a:p>
+            <a:pPr marL="0" indent="0">
+              <a:buNone/>
+            </a:pPr>
+            <a:r>
+              <a:rPr lang="en-US" b="1" dirty="0">
+                <a:latin typeface="+mn-lt"/>
+              </a:rPr>
+              <a:t>Scalability is a key consideration </a:t>
+            </a:r>
+            <a:r>
+              <a:rPr lang="en-US" dirty="0">
+                <a:latin typeface="+mn-lt"/>
+              </a:rPr>
+              <a:t>when dealing with massive datasets!</a:t>
+            </a:r>
+          </a:p>
+          <a:p>
+            <a:r>
+              <a:rPr lang="en-US" dirty="0">
+                <a:latin typeface="+mn-lt"/>
+              </a:rPr>
+              <a:t>Scalability requires tradeoffs between three factors</a:t>
+            </a:r>
+          </a:p>
+          <a:p>
+            <a:pPr lvl="1"/>
+            <a:r>
+              <a:rPr lang="en-US" dirty="0">
+                <a:latin typeface="+mn-lt"/>
+              </a:rPr>
+              <a:t>Low memory use</a:t>
+            </a:r>
+          </a:p>
+          <a:p>
+            <a:pPr lvl="1"/>
+            <a:r>
+              <a:rPr lang="en-US" dirty="0">
+                <a:latin typeface="+mn-lt"/>
+              </a:rPr>
+              <a:t>Low computational complexity</a:t>
+            </a:r>
+          </a:p>
+          <a:p>
+            <a:pPr lvl="1"/>
+            <a:r>
+              <a:rPr lang="en-US" dirty="0">
+                <a:latin typeface="+mn-lt"/>
+              </a:rPr>
+              <a:t>Accuracy of results</a:t>
+            </a:r>
+          </a:p>
+          <a:p>
+            <a:r>
+              <a:rPr lang="en-US" dirty="0">
+                <a:latin typeface="+mn-lt"/>
+              </a:rPr>
+              <a:t>Must </a:t>
+            </a:r>
+            <a:r>
+              <a:rPr lang="en-US" b="1" dirty="0">
+                <a:latin typeface="+mn-lt"/>
+              </a:rPr>
+              <a:t>accept approximate results </a:t>
+            </a:r>
+            <a:r>
+              <a:rPr lang="en-US" dirty="0">
+                <a:latin typeface="+mn-lt"/>
+              </a:rPr>
+              <a:t>for massive scalability, low memory and complexity   </a:t>
+            </a:r>
+          </a:p>
+          <a:p>
+            <a:r>
+              <a:rPr lang="en-US" dirty="0">
+                <a:latin typeface="+mn-lt"/>
+              </a:rPr>
+              <a:t>LLMs have low scalability </a:t>
+            </a:r>
+          </a:p>
+          <a:p>
+            <a:pPr lvl="1"/>
+            <a:r>
+              <a:rPr lang="en-US" dirty="0">
+                <a:latin typeface="+mn-lt"/>
+              </a:rPr>
+              <a:t>Slow</a:t>
+            </a:r>
+          </a:p>
+          <a:p>
+            <a:pPr lvl="1"/>
+            <a:r>
+              <a:rPr lang="en-US" dirty="0">
+                <a:latin typeface="+mn-lt"/>
+              </a:rPr>
+              <a:t>Expensive</a:t>
+            </a:r>
+          </a:p>
+          <a:p>
+            <a:pPr lvl="1"/>
+            <a:r>
+              <a:rPr lang="en-US" dirty="0">
+                <a:latin typeface="+mn-lt"/>
+              </a:rPr>
+              <a:t>Accuracy?? – hard to quantify </a:t>
+            </a:r>
+          </a:p>
+          <a:p>
+            <a:pPr lvl="1"/>
+            <a:endParaRPr lang="en-US" dirty="0">
+              <a:latin typeface="+mn-lt"/>
+            </a:endParaRPr>
+          </a:p>
+          <a:p>
+            <a:pPr marL="0" indent="0">
+              <a:buNone/>
+            </a:pPr>
+            <a:endParaRPr lang="en-US" dirty="0">
+              <a:latin typeface="+mn-lt"/>
+            </a:endParaRPr>
+          </a:p>
+        </p:txBody>
+      </p:sp>
+      <p:sp>
+        <p:nvSpPr>
+          <p:cNvPr id="4" name="Isosceles Triangle 3">
+            <a:extLst>
+              <a:ext uri="{FF2B5EF4-FFF2-40B4-BE49-F238E27FC236}">
+                <a16:creationId xmlns:a16="http://schemas.microsoft.com/office/drawing/2014/main" id="{9725A6CF-0B0D-044D-B5B6-DE9B7965339A}"/>
+              </a:ext>
+            </a:extLst>
+          </p:cNvPr>
+          <p:cNvSpPr/>
+          <p:nvPr/>
+        </p:nvSpPr>
+        <p:spPr>
+          <a:xfrm>
+            <a:off x="8131804" y="2645404"/>
+            <a:ext cx="3618482" cy="2919234"/>
+          </a:xfrm>
+          <a:prstGeom prst="triangle">
+            <a:avLst/>
+          </a:prstGeom>
+          <a:noFill/>
+          <a:ln w="25400">
+            <a:solidFill>
+              <a:schemeClr val="tx1"/>
+            </a:solidFill>
+          </a:ln>
+        </p:spPr>
+        <p:style>
+          <a:lnRef idx="2">
+            <a:schemeClr val="accent1">
+              <a:shade val="15000"/>
+            </a:schemeClr>
+          </a:lnRef>
+          <a:fillRef idx="1">
+            <a:schemeClr val="accent1"/>
+          </a:fillRef>
+          <a:effectRef idx="0">
+            <a:schemeClr val="accent1"/>
+          </a:effectRef>
+          <a:fontRef idx="minor">
+            <a:schemeClr val="lt1"/>
+          </a:fontRef>
+        </p:style>
+        <p:txBody>
+          <a:bodyPr rtlCol="0" anchor="ctr"/>
+          <a:lstStyle/>
+          <a:p>
+            <a:pPr algn="ctr"/>
+            <a:endParaRPr lang="en-US"/>
+          </a:p>
+        </p:txBody>
+      </p:sp>
+      <p:sp>
+        <p:nvSpPr>
+          <p:cNvPr id="5" name="TextBox 4">
+            <a:extLst>
+              <a:ext uri="{FF2B5EF4-FFF2-40B4-BE49-F238E27FC236}">
+                <a16:creationId xmlns:a16="http://schemas.microsoft.com/office/drawing/2014/main" id="{B16EA804-9933-F229-12BD-74D194299BD8}"/>
+              </a:ext>
+            </a:extLst>
+          </p:cNvPr>
+          <p:cNvSpPr txBox="1"/>
+          <p:nvPr/>
+        </p:nvSpPr>
+        <p:spPr>
+          <a:xfrm>
+            <a:off x="9002152" y="1814407"/>
+            <a:ext cx="1877786" cy="830997"/>
+          </a:xfrm>
+          <a:prstGeom prst="rect">
+            <a:avLst/>
+          </a:prstGeom>
+          <a:noFill/>
+        </p:spPr>
+        <p:txBody>
+          <a:bodyPr wrap="square" rtlCol="0">
+            <a:spAutoFit/>
+          </a:bodyPr>
+          <a:lstStyle/>
+          <a:p>
+            <a:pPr algn="ctr"/>
+            <a:r>
+              <a:rPr lang="en-US" sz="2400" dirty="0"/>
+              <a:t>Low Memory -Scalable</a:t>
+            </a:r>
+          </a:p>
+        </p:txBody>
+      </p:sp>
+      <p:sp>
+        <p:nvSpPr>
+          <p:cNvPr id="6" name="TextBox 5">
+            <a:extLst>
+              <a:ext uri="{FF2B5EF4-FFF2-40B4-BE49-F238E27FC236}">
+                <a16:creationId xmlns:a16="http://schemas.microsoft.com/office/drawing/2014/main" id="{422A55F2-3C05-63F7-9CF9-01D795678EB1}"/>
+              </a:ext>
+            </a:extLst>
+          </p:cNvPr>
+          <p:cNvSpPr txBox="1"/>
+          <p:nvPr/>
+        </p:nvSpPr>
+        <p:spPr>
+          <a:xfrm>
+            <a:off x="7179129" y="5577562"/>
+            <a:ext cx="2661557" cy="1200329"/>
+          </a:xfrm>
+          <a:prstGeom prst="rect">
+            <a:avLst/>
+          </a:prstGeom>
+          <a:noFill/>
+        </p:spPr>
+        <p:txBody>
+          <a:bodyPr wrap="square" rtlCol="0">
+            <a:spAutoFit/>
+          </a:bodyPr>
+          <a:lstStyle/>
+          <a:p>
+            <a:pPr algn="ctr"/>
+            <a:r>
+              <a:rPr lang="en-US" sz="2400" dirty="0"/>
+              <a:t>Low Computational Complexity-Scalable</a:t>
+            </a:r>
+          </a:p>
+        </p:txBody>
+      </p:sp>
+      <p:sp>
+        <p:nvSpPr>
+          <p:cNvPr id="7" name="TextBox 6">
+            <a:extLst>
+              <a:ext uri="{FF2B5EF4-FFF2-40B4-BE49-F238E27FC236}">
+                <a16:creationId xmlns:a16="http://schemas.microsoft.com/office/drawing/2014/main" id="{002E1CDF-2012-FB77-C632-1BA165B1028C}"/>
+              </a:ext>
+            </a:extLst>
+          </p:cNvPr>
+          <p:cNvSpPr txBox="1"/>
+          <p:nvPr/>
+        </p:nvSpPr>
+        <p:spPr>
+          <a:xfrm>
+            <a:off x="10510157" y="5577562"/>
+            <a:ext cx="1681843" cy="830997"/>
+          </a:xfrm>
+          <a:prstGeom prst="rect">
+            <a:avLst/>
+          </a:prstGeom>
+          <a:noFill/>
+        </p:spPr>
+        <p:txBody>
+          <a:bodyPr wrap="square" rtlCol="0">
+            <a:spAutoFit/>
+          </a:bodyPr>
+          <a:lstStyle/>
+          <a:p>
+            <a:pPr algn="ctr"/>
+            <a:r>
+              <a:rPr lang="en-US" sz="2400" dirty="0"/>
+              <a:t>High Accuracy</a:t>
+            </a:r>
+          </a:p>
+        </p:txBody>
+      </p:sp>
+    </p:spTree>
+    <p:extLst>
+      <p:ext uri="{BB962C8B-B14F-4D97-AF65-F5344CB8AC3E}">
+        <p14:creationId xmlns:p14="http://schemas.microsoft.com/office/powerpoint/2010/main" val="3047731076"/>
+      </p:ext>
+    </p:extLst>
+  </p:cSld>
+  <p:clrMapOvr>
+    <a:masterClrMapping/>
+  </p:clrMapOvr>
+  <p:timing>
+    <p:tnLst>
+      <p:par>
+        <p:cTn id="1" dur="indefinite" restart="never" nodeType="tmRoot">
+          <p:childTnLst>
+            <p:seq concurrent="1" nextAc="seek">
+              <p:cTn id="2" dur="indefinite" nodeType="mainSeq">
+                <p:childTnLst>
+                  <p:par>
+                    <p:cTn id="3" fill="hold">
+                      <p:stCondLst>
+                        <p:cond delay="indefinite"/>
+                      </p:stCondLst>
+                      <p:childTnLst>
+                        <p:par>
+                          <p:cTn id="4" fill="hold">
+                            <p:stCondLst>
+                              <p:cond delay="0"/>
+                            </p:stCondLst>
+                            <p:childTnLst>
+                              <p:par>
+                                <p:cTn id="5" presetID="1" presetClass="entr" presetSubtype="0" fill="hold" nodeType="clickEffect">
+                                  <p:stCondLst>
+                                    <p:cond delay="0"/>
+                                  </p:stCondLst>
+                                  <p:childTnLst>
+                                    <p:set>
+                                      <p:cBhvr>
+                                        <p:cTn id="6" dur="1" fill="hold">
+                                          <p:stCondLst>
+                                            <p:cond delay="0"/>
+                                          </p:stCondLst>
+                                        </p:cTn>
+                                        <p:tgtEl>
+                                          <p:spTgt spid="3">
+                                            <p:txEl>
+                                              <p:pRg st="1" end="1"/>
+                                            </p:txEl>
+                                          </p:spTgt>
+                                        </p:tgtEl>
+                                        <p:attrNameLst>
+                                          <p:attrName>style.visibility</p:attrName>
+                                        </p:attrNameLst>
+                                      </p:cBhvr>
+                                      <p:to>
+                                        <p:strVal val="visible"/>
+                                      </p:to>
+                                    </p:set>
+                                  </p:childTnLst>
+                                </p:cTn>
+                              </p:par>
+                            </p:childTnLst>
+                          </p:cTn>
+                        </p:par>
+                      </p:childTnLst>
+                    </p:cTn>
+                  </p:par>
+                  <p:par>
+                    <p:cTn id="7" fill="hold">
+                      <p:stCondLst>
+                        <p:cond delay="indefinite"/>
+                      </p:stCondLst>
+                      <p:childTnLst>
+                        <p:par>
+                          <p:cTn id="8" fill="hold">
+                            <p:stCondLst>
+                              <p:cond delay="0"/>
+                            </p:stCondLst>
+                            <p:childTnLst>
+                              <p:par>
+                                <p:cTn id="9" presetID="1" presetClass="entr" presetSubtype="0" fill="hold" nodeType="clickEffect">
+                                  <p:stCondLst>
+                                    <p:cond delay="0"/>
+                                  </p:stCondLst>
+                                  <p:childTnLst>
+                                    <p:set>
+                                      <p:cBhvr>
+                                        <p:cTn id="10" dur="1" fill="hold">
+                                          <p:stCondLst>
+                                            <p:cond delay="0"/>
+                                          </p:stCondLst>
+                                        </p:cTn>
+                                        <p:tgtEl>
+                                          <p:spTgt spid="3">
+                                            <p:txEl>
+                                              <p:pRg st="2" end="2"/>
+                                            </p:txEl>
+                                          </p:spTgt>
+                                        </p:tgtEl>
+                                        <p:attrNameLst>
+                                          <p:attrName>style.visibility</p:attrName>
+                                        </p:attrNameLst>
+                                      </p:cBhvr>
+                                      <p:to>
+                                        <p:strVal val="visible"/>
+                                      </p:to>
+                                    </p:set>
+                                  </p:childTnLst>
+                                </p:cTn>
+                              </p:par>
+                              <p:par>
+                                <p:cTn id="11" presetID="1" presetClass="entr" presetSubtype="0" fill="hold" grpId="0" nodeType="withEffect">
+                                  <p:stCondLst>
+                                    <p:cond delay="0"/>
+                                  </p:stCondLst>
+                                  <p:childTnLst>
+                                    <p:set>
+                                      <p:cBhvr>
+                                        <p:cTn id="12" dur="1" fill="hold">
+                                          <p:stCondLst>
+                                            <p:cond delay="0"/>
+                                          </p:stCondLst>
+                                        </p:cTn>
+                                        <p:tgtEl>
+                                          <p:spTgt spid="4"/>
+                                        </p:tgtEl>
+                                        <p:attrNameLst>
+                                          <p:attrName>style.visibility</p:attrName>
+                                        </p:attrNameLst>
+                                      </p:cBhvr>
+                                      <p:to>
+                                        <p:strVal val="visible"/>
+                                      </p:to>
+                                    </p:set>
+                                  </p:childTnLst>
+                                </p:cTn>
+                              </p:par>
+                              <p:par>
+                                <p:cTn id="13" presetID="1" presetClass="entr" presetSubtype="0" fill="hold" grpId="0" nodeType="withEffect">
+                                  <p:stCondLst>
+                                    <p:cond delay="0"/>
+                                  </p:stCondLst>
+                                  <p:childTnLst>
+                                    <p:set>
+                                      <p:cBhvr>
+                                        <p:cTn id="14" dur="1" fill="hold">
+                                          <p:stCondLst>
+                                            <p:cond delay="0"/>
+                                          </p:stCondLst>
+                                        </p:cTn>
+                                        <p:tgtEl>
+                                          <p:spTgt spid="5"/>
+                                        </p:tgtEl>
+                                        <p:attrNameLst>
+                                          <p:attrName>style.visibility</p:attrName>
+                                        </p:attrNameLst>
+                                      </p:cBhvr>
+                                      <p:to>
+                                        <p:strVal val="visible"/>
+                                      </p:to>
+                                    </p:set>
+                                  </p:childTnLst>
+                                </p:cTn>
+                              </p:par>
+                            </p:childTnLst>
+                          </p:cTn>
+                        </p:par>
+                      </p:childTnLst>
+                    </p:cTn>
+                  </p:par>
+                  <p:par>
+                    <p:cTn id="15" fill="hold">
+                      <p:stCondLst>
+                        <p:cond delay="indefinite"/>
+                      </p:stCondLst>
+                      <p:childTnLst>
+                        <p:par>
+                          <p:cTn id="16" fill="hold">
+                            <p:stCondLst>
+                              <p:cond delay="0"/>
+                            </p:stCondLst>
+                            <p:childTnLst>
+                              <p:par>
+                                <p:cTn id="17" presetID="1" presetClass="entr" presetSubtype="0" fill="hold" nodeType="clickEffect">
+                                  <p:stCondLst>
+                                    <p:cond delay="0"/>
+                                  </p:stCondLst>
+                                  <p:childTnLst>
+                                    <p:set>
+                                      <p:cBhvr>
+                                        <p:cTn id="18" dur="1" fill="hold">
+                                          <p:stCondLst>
+                                            <p:cond delay="0"/>
+                                          </p:stCondLst>
+                                        </p:cTn>
+                                        <p:tgtEl>
+                                          <p:spTgt spid="3">
+                                            <p:txEl>
+                                              <p:pRg st="3" end="3"/>
+                                            </p:txEl>
+                                          </p:spTgt>
+                                        </p:tgtEl>
+                                        <p:attrNameLst>
+                                          <p:attrName>style.visibility</p:attrName>
+                                        </p:attrNameLst>
+                                      </p:cBhvr>
+                                      <p:to>
+                                        <p:strVal val="visible"/>
+                                      </p:to>
+                                    </p:set>
+                                  </p:childTnLst>
+                                </p:cTn>
+                              </p:par>
+                              <p:par>
+                                <p:cTn id="19" presetID="1" presetClass="entr" presetSubtype="0" fill="hold" grpId="0" nodeType="withEffect">
+                                  <p:stCondLst>
+                                    <p:cond delay="0"/>
+                                  </p:stCondLst>
+                                  <p:childTnLst>
+                                    <p:set>
+                                      <p:cBhvr>
+                                        <p:cTn id="20" dur="1" fill="hold">
+                                          <p:stCondLst>
+                                            <p:cond delay="0"/>
+                                          </p:stCondLst>
+                                        </p:cTn>
+                                        <p:tgtEl>
+                                          <p:spTgt spid="6"/>
+                                        </p:tgtEl>
+                                        <p:attrNameLst>
+                                          <p:attrName>style.visibility</p:attrName>
+                                        </p:attrNameLst>
+                                      </p:cBhvr>
+                                      <p:to>
+                                        <p:strVal val="visible"/>
+                                      </p:to>
+                                    </p:set>
+                                  </p:childTnLst>
+                                </p:cTn>
+                              </p:par>
+                            </p:childTnLst>
+                          </p:cTn>
+                        </p:par>
+                      </p:childTnLst>
+                    </p:cTn>
+                  </p:par>
+                  <p:par>
+                    <p:cTn id="21" fill="hold">
+                      <p:stCondLst>
+                        <p:cond delay="indefinite"/>
+                      </p:stCondLst>
+                      <p:childTnLst>
+                        <p:par>
+                          <p:cTn id="22" fill="hold">
+                            <p:stCondLst>
+                              <p:cond delay="0"/>
+                            </p:stCondLst>
+                            <p:childTnLst>
+                              <p:par>
+                                <p:cTn id="23" presetID="1" presetClass="entr" presetSubtype="0" fill="hold" nodeType="clickEffect">
+                                  <p:stCondLst>
+                                    <p:cond delay="0"/>
+                                  </p:stCondLst>
+                                  <p:childTnLst>
+                                    <p:set>
+                                      <p:cBhvr>
+                                        <p:cTn id="24" dur="1" fill="hold">
+                                          <p:stCondLst>
+                                            <p:cond delay="0"/>
+                                          </p:stCondLst>
+                                        </p:cTn>
+                                        <p:tgtEl>
+                                          <p:spTgt spid="3">
+                                            <p:txEl>
+                                              <p:pRg st="4" end="4"/>
+                                            </p:txEl>
+                                          </p:spTgt>
+                                        </p:tgtEl>
+                                        <p:attrNameLst>
+                                          <p:attrName>style.visibility</p:attrName>
+                                        </p:attrNameLst>
+                                      </p:cBhvr>
+                                      <p:to>
+                                        <p:strVal val="visible"/>
+                                      </p:to>
+                                    </p:set>
+                                  </p:childTnLst>
+                                </p:cTn>
+                              </p:par>
+                              <p:par>
+                                <p:cTn id="25" presetID="1" presetClass="entr" presetSubtype="0" fill="hold" grpId="0" nodeType="withEffect">
+                                  <p:stCondLst>
+                                    <p:cond delay="0"/>
+                                  </p:stCondLst>
+                                  <p:childTnLst>
+                                    <p:set>
+                                      <p:cBhvr>
+                                        <p:cTn id="26" dur="1" fill="hold">
+                                          <p:stCondLst>
+                                            <p:cond delay="0"/>
+                                          </p:stCondLst>
+                                        </p:cTn>
+                                        <p:tgtEl>
+                                          <p:spTgt spid="7"/>
+                                        </p:tgtEl>
+                                        <p:attrNameLst>
+                                          <p:attrName>style.visibility</p:attrName>
+                                        </p:attrNameLst>
+                                      </p:cBhvr>
+                                      <p:to>
+                                        <p:strVal val="visible"/>
+                                      </p:to>
+                                    </p:set>
+                                  </p:childTnLst>
+                                </p:cTn>
+                              </p:par>
+                            </p:childTnLst>
+                          </p:cTn>
+                        </p:par>
+                      </p:childTnLst>
+                    </p:cTn>
+                  </p:par>
+                  <p:par>
+                    <p:cTn id="27" fill="hold">
+                      <p:stCondLst>
+                        <p:cond delay="indefinite"/>
+                      </p:stCondLst>
+                      <p:childTnLst>
+                        <p:par>
+                          <p:cTn id="28" fill="hold">
+                            <p:stCondLst>
+                              <p:cond delay="0"/>
+                            </p:stCondLst>
+                            <p:childTnLst>
+                              <p:par>
+                                <p:cTn id="29" presetID="1" presetClass="entr" presetSubtype="0" fill="hold" nodeType="clickEffect">
+                                  <p:stCondLst>
+                                    <p:cond delay="0"/>
+                                  </p:stCondLst>
+                                  <p:childTnLst>
+                                    <p:set>
+                                      <p:cBhvr>
+                                        <p:cTn id="30" dur="1" fill="hold">
+                                          <p:stCondLst>
+                                            <p:cond delay="0"/>
+                                          </p:stCondLst>
+                                        </p:cTn>
+                                        <p:tgtEl>
+                                          <p:spTgt spid="3">
+                                            <p:txEl>
+                                              <p:pRg st="5" end="5"/>
+                                            </p:txEl>
+                                          </p:spTgt>
+                                        </p:tgtEl>
+                                        <p:attrNameLst>
+                                          <p:attrName>style.visibility</p:attrName>
+                                        </p:attrNameLst>
+                                      </p:cBhvr>
+                                      <p:to>
+                                        <p:strVal val="visible"/>
+                                      </p:to>
+                                    </p:set>
+                                  </p:childTnLst>
+                                </p:cTn>
+                              </p:par>
+                            </p:childTnLst>
+                          </p:cTn>
+                        </p:par>
+                      </p:childTnLst>
+                    </p:cTn>
+                  </p:par>
+                  <p:par>
+                    <p:cTn id="31" fill="hold">
+                      <p:stCondLst>
+                        <p:cond delay="indefinite"/>
+                      </p:stCondLst>
+                      <p:childTnLst>
+                        <p:par>
+                          <p:cTn id="32" fill="hold">
+                            <p:stCondLst>
+                              <p:cond delay="0"/>
+                            </p:stCondLst>
+                            <p:childTnLst>
+                              <p:par>
+                                <p:cTn id="33" presetID="1" presetClass="entr" presetSubtype="0" fill="hold" nodeType="clickEffect">
+                                  <p:stCondLst>
+                                    <p:cond delay="0"/>
+                                  </p:stCondLst>
+                                  <p:childTnLst>
+                                    <p:set>
+                                      <p:cBhvr>
+                                        <p:cTn id="34" dur="1" fill="hold">
+                                          <p:stCondLst>
+                                            <p:cond delay="0"/>
+                                          </p:stCondLst>
+                                        </p:cTn>
+                                        <p:tgtEl>
+                                          <p:spTgt spid="3">
+                                            <p:txEl>
+                                              <p:pRg st="6" end="6"/>
+                                            </p:txEl>
+                                          </p:spTgt>
+                                        </p:tgtEl>
+                                        <p:attrNameLst>
+                                          <p:attrName>style.visibility</p:attrName>
+                                        </p:attrNameLst>
+                                      </p:cBhvr>
+                                      <p:to>
+                                        <p:strVal val="visible"/>
+                                      </p:to>
+                                    </p:set>
+                                  </p:childTnLst>
+                                </p:cTn>
+                              </p:par>
+                              <p:par>
+                                <p:cTn id="35" presetID="1" presetClass="entr" presetSubtype="0" fill="hold" nodeType="withEffect">
+                                  <p:stCondLst>
+                                    <p:cond delay="0"/>
+                                  </p:stCondLst>
+                                  <p:childTnLst>
+                                    <p:set>
+                                      <p:cBhvr>
+                                        <p:cTn id="36" dur="1" fill="hold">
+                                          <p:stCondLst>
+                                            <p:cond delay="0"/>
+                                          </p:stCondLst>
+                                        </p:cTn>
+                                        <p:tgtEl>
+                                          <p:spTgt spid="3">
+                                            <p:txEl>
+                                              <p:pRg st="7" end="7"/>
+                                            </p:txEl>
+                                          </p:spTgt>
+                                        </p:tgtEl>
+                                        <p:attrNameLst>
+                                          <p:attrName>style.visibility</p:attrName>
+                                        </p:attrNameLst>
+                                      </p:cBhvr>
+                                      <p:to>
+                                        <p:strVal val="visible"/>
+                                      </p:to>
+                                    </p:set>
+                                  </p:childTnLst>
+                                </p:cTn>
+                              </p:par>
+                              <p:par>
+                                <p:cTn id="37" presetID="1" presetClass="entr" presetSubtype="0" fill="hold" nodeType="withEffect">
+                                  <p:stCondLst>
+                                    <p:cond delay="0"/>
+                                  </p:stCondLst>
+                                  <p:childTnLst>
+                                    <p:set>
+                                      <p:cBhvr>
+                                        <p:cTn id="38" dur="1" fill="hold">
+                                          <p:stCondLst>
+                                            <p:cond delay="0"/>
+                                          </p:stCondLst>
+                                        </p:cTn>
+                                        <p:tgtEl>
+                                          <p:spTgt spid="3">
+                                            <p:txEl>
+                                              <p:pRg st="8" end="8"/>
+                                            </p:txEl>
+                                          </p:spTgt>
+                                        </p:tgtEl>
+                                        <p:attrNameLst>
+                                          <p:attrName>style.visibility</p:attrName>
+                                        </p:attrNameLst>
+                                      </p:cBhvr>
+                                      <p:to>
+                                        <p:strVal val="visible"/>
+                                      </p:to>
+                                    </p:set>
+                                  </p:childTnLst>
+                                </p:cTn>
+                              </p:par>
+                              <p:par>
+                                <p:cTn id="39" presetID="1" presetClass="entr" presetSubtype="0" fill="hold" nodeType="withEffect">
+                                  <p:stCondLst>
+                                    <p:cond delay="0"/>
+                                  </p:stCondLst>
+                                  <p:childTnLst>
+                                    <p:set>
+                                      <p:cBhvr>
+                                        <p:cTn id="40" dur="1" fill="hold">
+                                          <p:stCondLst>
+                                            <p:cond delay="0"/>
+                                          </p:stCondLst>
+                                        </p:cTn>
+                                        <p:tgtEl>
+                                          <p:spTgt spid="3">
+                                            <p:txEl>
+                                              <p:pRg st="9" end="9"/>
+                                            </p:txEl>
+                                          </p:spTgt>
+                                        </p:tgtEl>
+                                        <p:attrNameLst>
+                                          <p:attrName>style.visibility</p:attrName>
+                                        </p:attrNameLst>
+                                      </p:cBhvr>
+                                      <p:to>
+                                        <p:strVal val="visible"/>
+                                      </p:to>
+                                    </p:set>
+                                  </p:childTnLst>
+                                </p:cTn>
+                              </p:par>
+                            </p:childTnLst>
+                          </p:cTn>
+                        </p:par>
+                      </p:childTnLst>
+                    </p:cTn>
+                  </p:par>
+                </p:childTnLst>
+              </p:cTn>
+              <p:prevCondLst>
+                <p:cond evt="onPrev" delay="0">
+                  <p:tgtEl>
+                    <p:sldTgt/>
+                  </p:tgtEl>
+                </p:cond>
+              </p:prevCondLst>
+              <p:nextCondLst>
+                <p:cond evt="onNext" delay="0">
+                  <p:tgtEl>
+                    <p:sldTgt/>
+                  </p:tgtEl>
+                </p:cond>
+              </p:nextCondLst>
+            </p:seq>
+          </p:childTnLst>
+        </p:cTn>
+      </p:par>
+    </p:tnLst>
+    <p:bldLst>
+      <p:bldP spid="4" grpId="0" animBg="1"/>
+      <p:bldP spid="5" grpId="0"/>
+      <p:bldP spid="6" grpId="0"/>
+      <p:bldP spid="7" grpId="0"/>
+    </p:bldLst>
+  </p:timing>
+</p:sld>
+</file>
+
+<file path=ppt/slides/slide8.xml><?xml version="1.0" encoding="utf-8"?>
+<p:sld xmlns:a="http://schemas.openxmlformats.org/drawingml/2006/main" xmlns:r="http://schemas.openxmlformats.org/officeDocument/2006/relationships" xmlns:p="http://schemas.openxmlformats.org/presentationml/2006/main">
+  <p:cSld>
+    <p:spTree>
+      <p:nvGrpSpPr>
         <p:cNvPr id="1" name=""/>
         <p:cNvGrpSpPr/>
         <p:nvPr/>
@@ -35730,7 +38008,7 @@
 </p:sld>
 </file>
 
-<file path=ppt/slides/slide8.xml><?xml version="1.0" encoding="utf-8"?>
+<file path=ppt/slides/slide9.xml><?xml version="1.0" encoding="utf-8"?>
 <p:sld xmlns:a="http://schemas.openxmlformats.org/drawingml/2006/main" xmlns:r="http://schemas.openxmlformats.org/officeDocument/2006/relationships" xmlns:p="http://schemas.openxmlformats.org/presentationml/2006/main">
   <p:cSld>
     <p:spTree>
@@ -35950,167 +38228,6 @@
     <p:extLst>
       <p:ext uri="{BB962C8B-B14F-4D97-AF65-F5344CB8AC3E}">
         <p14:creationId xmlns:p14="http://schemas.microsoft.com/office/powerpoint/2010/main" val="2505992720"/>
-      </p:ext>
-    </p:extLst>
-  </p:cSld>
-  <p:clrMapOvr>
-    <a:masterClrMapping/>
-  </p:clrMapOvr>
-</p:sld>
-</file>
-
-<file path=ppt/slides/slide9.xml><?xml version="1.0" encoding="utf-8"?>
-<p:sld xmlns:a="http://schemas.openxmlformats.org/drawingml/2006/main" xmlns:r="http://schemas.openxmlformats.org/officeDocument/2006/relationships" xmlns:p="http://schemas.openxmlformats.org/presentationml/2006/main">
-  <p:cSld>
-    <p:spTree>
-      <p:nvGrpSpPr>
-        <p:cNvPr id="1" name=""/>
-        <p:cNvGrpSpPr/>
-        <p:nvPr/>
-      </p:nvGrpSpPr>
-      <p:grpSpPr>
-        <a:xfrm>
-          <a:off x="0" y="0"/>
-          <a:ext cx="0" cy="0"/>
-          <a:chOff x="0" y="0"/>
-          <a:chExt cx="0" cy="0"/>
-        </a:xfrm>
-      </p:grpSpPr>
-      <p:sp>
-        <p:nvSpPr>
-          <p:cNvPr id="4" name="Title 3">
-            <a:extLst>
-              <a:ext uri="{FF2B5EF4-FFF2-40B4-BE49-F238E27FC236}">
-                <a16:creationId xmlns:a16="http://schemas.microsoft.com/office/drawing/2014/main" id="{1BCE2B5B-E165-AFE7-3BF6-9F7655565AD7}"/>
-              </a:ext>
-            </a:extLst>
-          </p:cNvPr>
-          <p:cNvSpPr>
-            <a:spLocks noGrp="1"/>
-          </p:cNvSpPr>
-          <p:nvPr>
-            <p:ph type="title"/>
-          </p:nvPr>
-        </p:nvSpPr>
-        <p:spPr/>
-        <p:txBody>
-          <a:bodyPr/>
-          <a:lstStyle/>
-          <a:p>
-            <a:r>
-              <a:rPr lang="en-DE" dirty="0"/>
-              <a:t>About your TA: Jacqueline Hardy</a:t>
-            </a:r>
-          </a:p>
-        </p:txBody>
-      </p:sp>
-      <p:sp>
-        <p:nvSpPr>
-          <p:cNvPr id="5" name="Content Placeholder 4">
-            <a:extLst>
-              <a:ext uri="{FF2B5EF4-FFF2-40B4-BE49-F238E27FC236}">
-                <a16:creationId xmlns:a16="http://schemas.microsoft.com/office/drawing/2014/main" id="{0E53D9F3-C1CB-AE91-44FA-A9A184CF447C}"/>
-              </a:ext>
-            </a:extLst>
-          </p:cNvPr>
-          <p:cNvSpPr>
-            <a:spLocks noGrp="1"/>
-          </p:cNvSpPr>
-          <p:nvPr>
-            <p:ph idx="1"/>
-          </p:nvPr>
-        </p:nvSpPr>
-        <p:spPr/>
-        <p:txBody>
-          <a:bodyPr>
-            <a:normAutofit fontScale="92500" lnSpcReduction="20000"/>
-          </a:bodyPr>
-          <a:lstStyle/>
-          <a:p>
-            <a:r>
-              <a:rPr lang="en-DE" dirty="0"/>
-              <a:t>Bachelor’s Degree from Harvard Extension School (2015-2018)</a:t>
-            </a:r>
-          </a:p>
-          <a:p>
-            <a:pPr lvl="1"/>
-            <a:r>
-              <a:rPr lang="en-DE" dirty="0"/>
-              <a:t>Field of Study: International Relations</a:t>
-            </a:r>
-          </a:p>
-          <a:p>
-            <a:pPr lvl="1"/>
-            <a:r>
-              <a:rPr lang="en-DE" dirty="0"/>
-              <a:t>Minors: Quantitative Analysis &amp; Government</a:t>
-            </a:r>
-          </a:p>
-          <a:p>
-            <a:r>
-              <a:rPr lang="en-DE" dirty="0"/>
-              <a:t>Master’s Degree from Harvard Extension School (2022-2024)</a:t>
-            </a:r>
-          </a:p>
-          <a:p>
-            <a:pPr lvl="1"/>
-            <a:r>
-              <a:rPr lang="en-DE" dirty="0"/>
-              <a:t>Field of Study: Data Science</a:t>
-            </a:r>
-          </a:p>
-          <a:p>
-            <a:r>
-              <a:rPr lang="en-DE" dirty="0"/>
-              <a:t>LG Electronics: </a:t>
-            </a:r>
-          </a:p>
-          <a:p>
-            <a:pPr lvl="1"/>
-            <a:r>
-              <a:rPr lang="en-DE" dirty="0"/>
-              <a:t>Product Specialist </a:t>
-            </a:r>
-          </a:p>
-          <a:p>
-            <a:pPr lvl="1"/>
-            <a:r>
-              <a:rPr lang="en-DE" dirty="0"/>
-              <a:t>Go-to-Market Manager</a:t>
-            </a:r>
-          </a:p>
-          <a:p>
-            <a:pPr lvl="1"/>
-            <a:r>
-              <a:rPr lang="en-DE" dirty="0"/>
-              <a:t>Data Analytics Specialist </a:t>
-            </a:r>
-          </a:p>
-          <a:p>
-            <a:r>
-              <a:rPr lang="en-DE" dirty="0"/>
-              <a:t>SharkNinja </a:t>
-            </a:r>
-          </a:p>
-          <a:p>
-            <a:pPr lvl="1"/>
-            <a:r>
-              <a:rPr lang="en-DE" dirty="0"/>
-              <a:t>Strategic Planning and Operations Data Scientist </a:t>
-            </a:r>
-          </a:p>
-          <a:p>
-            <a:r>
-              <a:rPr lang="en-DE" dirty="0"/>
-              <a:t>Building my own Data Science Consulting Firm</a:t>
-            </a:r>
-          </a:p>
-        </p:txBody>
-      </p:sp>
-    </p:spTree>
-    <p:extLst>
-      <p:ext uri="{BB962C8B-B14F-4D97-AF65-F5344CB8AC3E}">
-        <p14:creationId xmlns:p14="http://schemas.microsoft.com/office/powerpoint/2010/main" val="2292487268"/>
       </p:ext>
     </p:extLst>
   </p:cSld>

--- a/slides/1_Introduction.pptx
+++ b/slides/1_Introduction.pptx
@@ -5,7 +5,7 @@
     <p:sldMasterId id="2147483648" r:id="rId1"/>
   </p:sldMasterIdLst>
   <p:notesMasterIdLst>
-    <p:notesMasterId r:id="rId57"/>
+    <p:notesMasterId r:id="rId59"/>
   </p:notesMasterIdLst>
   <p:sldIdLst>
     <p:sldId id="256" r:id="rId2"/>
@@ -22,8 +22,8 @@
     <p:sldId id="724" r:id="rId13"/>
     <p:sldId id="397" r:id="rId14"/>
     <p:sldId id="718" r:id="rId15"/>
-    <p:sldId id="723" r:id="rId16"/>
-    <p:sldId id="783" r:id="rId17"/>
+    <p:sldId id="783" r:id="rId16"/>
+    <p:sldId id="723" r:id="rId17"/>
     <p:sldId id="396" r:id="rId18"/>
     <p:sldId id="400" r:id="rId19"/>
     <p:sldId id="352" r:id="rId20"/>
@@ -38,31 +38,33 @@
     <p:sldId id="713" r:id="rId29"/>
     <p:sldId id="387" r:id="rId30"/>
     <p:sldId id="720" r:id="rId31"/>
-    <p:sldId id="382" r:id="rId32"/>
-    <p:sldId id="357" r:id="rId33"/>
-    <p:sldId id="385" r:id="rId34"/>
-    <p:sldId id="359" r:id="rId35"/>
-    <p:sldId id="727" r:id="rId36"/>
-    <p:sldId id="386" r:id="rId37"/>
-    <p:sldId id="714" r:id="rId38"/>
-    <p:sldId id="360" r:id="rId39"/>
-    <p:sldId id="731" r:id="rId40"/>
-    <p:sldId id="374" r:id="rId41"/>
-    <p:sldId id="375" r:id="rId42"/>
-    <p:sldId id="738" r:id="rId43"/>
-    <p:sldId id="377" r:id="rId44"/>
-    <p:sldId id="729" r:id="rId45"/>
-    <p:sldId id="730" r:id="rId46"/>
-    <p:sldId id="739" r:id="rId47"/>
-    <p:sldId id="376" r:id="rId48"/>
-    <p:sldId id="728" r:id="rId49"/>
-    <p:sldId id="379" r:id="rId50"/>
-    <p:sldId id="380" r:id="rId51"/>
-    <p:sldId id="742" r:id="rId52"/>
-    <p:sldId id="743" r:id="rId53"/>
-    <p:sldId id="744" r:id="rId54"/>
-    <p:sldId id="740" r:id="rId55"/>
-    <p:sldId id="384" r:id="rId56"/>
+    <p:sldId id="784" r:id="rId32"/>
+    <p:sldId id="382" r:id="rId33"/>
+    <p:sldId id="357" r:id="rId34"/>
+    <p:sldId id="385" r:id="rId35"/>
+    <p:sldId id="359" r:id="rId36"/>
+    <p:sldId id="727" r:id="rId37"/>
+    <p:sldId id="386" r:id="rId38"/>
+    <p:sldId id="714" r:id="rId39"/>
+    <p:sldId id="360" r:id="rId40"/>
+    <p:sldId id="731" r:id="rId41"/>
+    <p:sldId id="374" r:id="rId42"/>
+    <p:sldId id="375" r:id="rId43"/>
+    <p:sldId id="738" r:id="rId44"/>
+    <p:sldId id="377" r:id="rId45"/>
+    <p:sldId id="729" r:id="rId46"/>
+    <p:sldId id="730" r:id="rId47"/>
+    <p:sldId id="739" r:id="rId48"/>
+    <p:sldId id="376" r:id="rId49"/>
+    <p:sldId id="728" r:id="rId50"/>
+    <p:sldId id="379" r:id="rId51"/>
+    <p:sldId id="380" r:id="rId52"/>
+    <p:sldId id="742" r:id="rId53"/>
+    <p:sldId id="743" r:id="rId54"/>
+    <p:sldId id="744" r:id="rId55"/>
+    <p:sldId id="785" r:id="rId56"/>
+    <p:sldId id="740" r:id="rId57"/>
+    <p:sldId id="384" r:id="rId58"/>
   </p:sldIdLst>
   <p:sldSz cx="12192000" cy="6858000"/>
   <p:notesSz cx="6858000" cy="9144000"/>
@@ -6352,6 +6354,1671 @@
 
 <file path=ppt/slides/slide15.xml><?xml version="1.0" encoding="utf-8"?>
 <p:sld xmlns:a="http://schemas.openxmlformats.org/drawingml/2006/main" xmlns:r="http://schemas.openxmlformats.org/officeDocument/2006/relationships" xmlns:p="http://schemas.openxmlformats.org/presentationml/2006/main">
+  <p:cSld>
+    <p:spTree>
+      <p:nvGrpSpPr>
+        <p:cNvPr id="1" name=""/>
+        <p:cNvGrpSpPr/>
+        <p:nvPr/>
+      </p:nvGrpSpPr>
+      <p:grpSpPr>
+        <a:xfrm>
+          <a:off x="0" y="0"/>
+          <a:ext cx="0" cy="0"/>
+          <a:chOff x="0" y="0"/>
+          <a:chExt cx="0" cy="0"/>
+        </a:xfrm>
+      </p:grpSpPr>
+      <p:sp>
+        <p:nvSpPr>
+          <p:cNvPr id="2" name="Title 1">
+            <a:extLst>
+              <a:ext uri="{FF2B5EF4-FFF2-40B4-BE49-F238E27FC236}">
+                <a16:creationId xmlns:a16="http://schemas.microsoft.com/office/drawing/2014/main" id="{C56CF8BA-E77D-C360-AD5B-2CB98FDCA527}"/>
+              </a:ext>
+            </a:extLst>
+          </p:cNvPr>
+          <p:cNvSpPr>
+            <a:spLocks noGrp="1"/>
+          </p:cNvSpPr>
+          <p:nvPr>
+            <p:ph type="title"/>
+          </p:nvPr>
+        </p:nvSpPr>
+        <p:spPr>
+          <a:xfrm>
+            <a:off x="916187" y="249623"/>
+            <a:ext cx="10515600" cy="662230"/>
+          </a:xfrm>
+        </p:spPr>
+        <p:txBody>
+          <a:bodyPr>
+            <a:normAutofit fontScale="90000"/>
+          </a:bodyPr>
+          <a:lstStyle/>
+          <a:p>
+            <a:r>
+              <a:rPr lang="en-US" sz="4900" dirty="0">
+                <a:latin typeface="+mn-lt"/>
+              </a:rPr>
+              <a:t>Main topics in this course</a:t>
+            </a:r>
+            <a:br>
+              <a:rPr lang="en-US" sz="4000" dirty="0">
+                <a:latin typeface="+mn-lt"/>
+              </a:rPr>
+            </a:br>
+            <a:endParaRPr lang="en-US" sz="4000" dirty="0">
+              <a:latin typeface="+mn-lt"/>
+            </a:endParaRPr>
+          </a:p>
+        </p:txBody>
+      </p:sp>
+      <p:sp>
+        <p:nvSpPr>
+          <p:cNvPr id="3" name="Left Brace 2">
+            <a:extLst>
+              <a:ext uri="{FF2B5EF4-FFF2-40B4-BE49-F238E27FC236}">
+                <a16:creationId xmlns:a16="http://schemas.microsoft.com/office/drawing/2014/main" id="{722482C5-08B3-A90B-94B0-26B76C9150F3}"/>
+              </a:ext>
+            </a:extLst>
+          </p:cNvPr>
+          <p:cNvSpPr/>
+          <p:nvPr/>
+        </p:nvSpPr>
+        <p:spPr>
+          <a:xfrm>
+            <a:off x="756889" y="1964356"/>
+            <a:ext cx="225209" cy="1273261"/>
+          </a:xfrm>
+          <a:prstGeom prst="leftBrace">
+            <a:avLst/>
+          </a:prstGeom>
+          <a:ln w="19050">
+            <a:solidFill>
+              <a:schemeClr val="tx1"/>
+            </a:solidFill>
+          </a:ln>
+        </p:spPr>
+        <p:style>
+          <a:lnRef idx="1">
+            <a:schemeClr val="accent1"/>
+          </a:lnRef>
+          <a:fillRef idx="0">
+            <a:schemeClr val="accent1"/>
+          </a:fillRef>
+          <a:effectRef idx="0">
+            <a:schemeClr val="accent1"/>
+          </a:effectRef>
+          <a:fontRef idx="minor">
+            <a:schemeClr val="tx1"/>
+          </a:fontRef>
+        </p:style>
+        <p:txBody>
+          <a:bodyPr rtlCol="0" anchor="ctr"/>
+          <a:lstStyle/>
+          <a:p>
+            <a:pPr algn="ctr"/>
+            <a:endParaRPr lang="en-US"/>
+          </a:p>
+        </p:txBody>
+      </p:sp>
+      <p:sp>
+        <p:nvSpPr>
+          <p:cNvPr id="4" name="TextBox 3">
+            <a:extLst>
+              <a:ext uri="{FF2B5EF4-FFF2-40B4-BE49-F238E27FC236}">
+                <a16:creationId xmlns:a16="http://schemas.microsoft.com/office/drawing/2014/main" id="{40A58A67-EE46-2F4C-3457-22DB787F6AD6}"/>
+              </a:ext>
+            </a:extLst>
+          </p:cNvPr>
+          <p:cNvSpPr txBox="1"/>
+          <p:nvPr/>
+        </p:nvSpPr>
+        <p:spPr>
+          <a:xfrm rot="16200000">
+            <a:off x="-238228" y="2251765"/>
+            <a:ext cx="1571596" cy="400110"/>
+          </a:xfrm>
+          <a:prstGeom prst="rect">
+            <a:avLst/>
+          </a:prstGeom>
+          <a:noFill/>
+        </p:spPr>
+        <p:txBody>
+          <a:bodyPr wrap="square" rtlCol="0">
+            <a:spAutoFit/>
+          </a:bodyPr>
+          <a:lstStyle/>
+          <a:p>
+            <a:pPr algn="ctr"/>
+            <a:r>
+              <a:rPr lang="en-US" sz="2000" dirty="0"/>
+              <a:t>Foundations </a:t>
+            </a:r>
+          </a:p>
+        </p:txBody>
+      </p:sp>
+      <p:sp>
+        <p:nvSpPr>
+          <p:cNvPr id="5" name="Rectangle 4">
+            <a:extLst>
+              <a:ext uri="{FF2B5EF4-FFF2-40B4-BE49-F238E27FC236}">
+                <a16:creationId xmlns:a16="http://schemas.microsoft.com/office/drawing/2014/main" id="{4CD484FE-4881-3835-B8E6-5EB721D74315}"/>
+              </a:ext>
+            </a:extLst>
+          </p:cNvPr>
+          <p:cNvSpPr/>
+          <p:nvPr/>
+        </p:nvSpPr>
+        <p:spPr>
+          <a:xfrm>
+            <a:off x="1259812" y="1983695"/>
+            <a:ext cx="1951346" cy="1253922"/>
+          </a:xfrm>
+          <a:prstGeom prst="rect">
+            <a:avLst/>
+          </a:prstGeom>
+          <a:noFill/>
+          <a:ln w="19050">
+            <a:solidFill>
+              <a:schemeClr val="tx1"/>
+            </a:solidFill>
+          </a:ln>
+        </p:spPr>
+        <p:style>
+          <a:lnRef idx="2">
+            <a:schemeClr val="accent1">
+              <a:shade val="15000"/>
+            </a:schemeClr>
+          </a:lnRef>
+          <a:fillRef idx="1">
+            <a:schemeClr val="accent1"/>
+          </a:fillRef>
+          <a:effectRef idx="0">
+            <a:schemeClr val="accent1"/>
+          </a:effectRef>
+          <a:fontRef idx="minor">
+            <a:schemeClr val="lt1"/>
+          </a:fontRef>
+        </p:style>
+        <p:txBody>
+          <a:bodyPr rtlCol="0" anchor="ctr"/>
+          <a:lstStyle/>
+          <a:p>
+            <a:pPr algn="ctr"/>
+            <a:r>
+              <a:rPr lang="en-US" sz="2000" dirty="0">
+                <a:solidFill>
+                  <a:schemeClr val="tx1"/>
+                </a:solidFill>
+              </a:rPr>
+              <a:t>1. Hashing and K-V pair management </a:t>
+            </a:r>
+          </a:p>
+        </p:txBody>
+      </p:sp>
+      <p:sp>
+        <p:nvSpPr>
+          <p:cNvPr id="6" name="Rectangle 5">
+            <a:extLst>
+              <a:ext uri="{FF2B5EF4-FFF2-40B4-BE49-F238E27FC236}">
+                <a16:creationId xmlns:a16="http://schemas.microsoft.com/office/drawing/2014/main" id="{34CF4665-3B44-EC27-8017-63E9AAA04CB1}"/>
+              </a:ext>
+            </a:extLst>
+          </p:cNvPr>
+          <p:cNvSpPr/>
+          <p:nvPr/>
+        </p:nvSpPr>
+        <p:spPr>
+          <a:xfrm>
+            <a:off x="3740233" y="2021536"/>
+            <a:ext cx="2157426" cy="1178239"/>
+          </a:xfrm>
+          <a:prstGeom prst="rect">
+            <a:avLst/>
+          </a:prstGeom>
+          <a:noFill/>
+          <a:ln w="19050">
+            <a:solidFill>
+              <a:schemeClr val="tx1"/>
+            </a:solidFill>
+          </a:ln>
+        </p:spPr>
+        <p:style>
+          <a:lnRef idx="2">
+            <a:schemeClr val="accent1">
+              <a:shade val="15000"/>
+            </a:schemeClr>
+          </a:lnRef>
+          <a:fillRef idx="1">
+            <a:schemeClr val="accent1"/>
+          </a:fillRef>
+          <a:effectRef idx="0">
+            <a:schemeClr val="accent1"/>
+          </a:effectRef>
+          <a:fontRef idx="minor">
+            <a:schemeClr val="lt1"/>
+          </a:fontRef>
+        </p:style>
+        <p:txBody>
+          <a:bodyPr rtlCol="0" anchor="ctr"/>
+          <a:lstStyle/>
+          <a:p>
+            <a:pPr algn="ctr"/>
+            <a:r>
+              <a:rPr lang="en-US" sz="2000" dirty="0">
+                <a:solidFill>
+                  <a:schemeClr val="tx1"/>
+                </a:solidFill>
+              </a:rPr>
+              <a:t>2. Distance and Similarity Metrics</a:t>
+            </a:r>
+          </a:p>
+        </p:txBody>
+      </p:sp>
+      <p:sp>
+        <p:nvSpPr>
+          <p:cNvPr id="7" name="Rectangle 6">
+            <a:extLst>
+              <a:ext uri="{FF2B5EF4-FFF2-40B4-BE49-F238E27FC236}">
+                <a16:creationId xmlns:a16="http://schemas.microsoft.com/office/drawing/2014/main" id="{D3C8FAA9-78A8-E1CB-4EE1-8C4AA2B9313B}"/>
+              </a:ext>
+            </a:extLst>
+          </p:cNvPr>
+          <p:cNvSpPr/>
+          <p:nvPr/>
+        </p:nvSpPr>
+        <p:spPr>
+          <a:xfrm>
+            <a:off x="6408020" y="2037908"/>
+            <a:ext cx="2058805" cy="1213337"/>
+          </a:xfrm>
+          <a:prstGeom prst="rect">
+            <a:avLst/>
+          </a:prstGeom>
+          <a:noFill/>
+          <a:ln w="19050">
+            <a:solidFill>
+              <a:schemeClr val="tx1"/>
+            </a:solidFill>
+          </a:ln>
+        </p:spPr>
+        <p:style>
+          <a:lnRef idx="2">
+            <a:schemeClr val="accent1">
+              <a:shade val="15000"/>
+            </a:schemeClr>
+          </a:lnRef>
+          <a:fillRef idx="1">
+            <a:schemeClr val="accent1"/>
+          </a:fillRef>
+          <a:effectRef idx="0">
+            <a:schemeClr val="accent1"/>
+          </a:effectRef>
+          <a:fontRef idx="minor">
+            <a:schemeClr val="lt1"/>
+          </a:fontRef>
+        </p:style>
+        <p:txBody>
+          <a:bodyPr rtlCol="0" anchor="ctr"/>
+          <a:lstStyle/>
+          <a:p>
+            <a:pPr algn="ctr"/>
+            <a:r>
+              <a:rPr lang="en-US" sz="2000" dirty="0">
+                <a:solidFill>
+                  <a:schemeClr val="tx1"/>
+                </a:solidFill>
+              </a:rPr>
+              <a:t>3. Graph Algorithms</a:t>
+            </a:r>
+          </a:p>
+        </p:txBody>
+      </p:sp>
+      <p:sp>
+        <p:nvSpPr>
+          <p:cNvPr id="8" name="Rectangle 7">
+            <a:extLst>
+              <a:ext uri="{FF2B5EF4-FFF2-40B4-BE49-F238E27FC236}">
+                <a16:creationId xmlns:a16="http://schemas.microsoft.com/office/drawing/2014/main" id="{CE6405B6-04C8-5532-70BF-8921F993525F}"/>
+              </a:ext>
+            </a:extLst>
+          </p:cNvPr>
+          <p:cNvSpPr/>
+          <p:nvPr/>
+        </p:nvSpPr>
+        <p:spPr>
+          <a:xfrm>
+            <a:off x="1215334" y="3591320"/>
+            <a:ext cx="2085982" cy="1074244"/>
+          </a:xfrm>
+          <a:prstGeom prst="rect">
+            <a:avLst/>
+          </a:prstGeom>
+          <a:noFill/>
+          <a:ln w="19050">
+            <a:solidFill>
+              <a:schemeClr val="tx1"/>
+            </a:solidFill>
+          </a:ln>
+        </p:spPr>
+        <p:style>
+          <a:lnRef idx="2">
+            <a:schemeClr val="accent1">
+              <a:shade val="15000"/>
+            </a:schemeClr>
+          </a:lnRef>
+          <a:fillRef idx="1">
+            <a:schemeClr val="accent1"/>
+          </a:fillRef>
+          <a:effectRef idx="0">
+            <a:schemeClr val="accent1"/>
+          </a:effectRef>
+          <a:fontRef idx="minor">
+            <a:schemeClr val="lt1"/>
+          </a:fontRef>
+        </p:style>
+        <p:txBody>
+          <a:bodyPr rtlCol="0" anchor="ctr"/>
+          <a:lstStyle/>
+          <a:p>
+            <a:pPr algn="ctr"/>
+            <a:r>
+              <a:rPr lang="en-US" sz="2000" dirty="0">
+                <a:solidFill>
+                  <a:schemeClr val="tx1"/>
+                </a:solidFill>
+              </a:rPr>
+              <a:t>2. Dimensionality Reduction</a:t>
+            </a:r>
+          </a:p>
+        </p:txBody>
+      </p:sp>
+      <p:sp>
+        <p:nvSpPr>
+          <p:cNvPr id="10" name="Left Brace 9">
+            <a:extLst>
+              <a:ext uri="{FF2B5EF4-FFF2-40B4-BE49-F238E27FC236}">
+                <a16:creationId xmlns:a16="http://schemas.microsoft.com/office/drawing/2014/main" id="{4DF74A6A-43A3-532A-27C0-C25A4F8EBA58}"/>
+              </a:ext>
+            </a:extLst>
+          </p:cNvPr>
+          <p:cNvSpPr/>
+          <p:nvPr/>
+        </p:nvSpPr>
+        <p:spPr>
+          <a:xfrm>
+            <a:off x="865089" y="3571535"/>
+            <a:ext cx="172578" cy="1094029"/>
+          </a:xfrm>
+          <a:prstGeom prst="leftBrace">
+            <a:avLst/>
+          </a:prstGeom>
+          <a:ln w="19050">
+            <a:solidFill>
+              <a:schemeClr val="tx1"/>
+            </a:solidFill>
+          </a:ln>
+        </p:spPr>
+        <p:style>
+          <a:lnRef idx="1">
+            <a:schemeClr val="accent1"/>
+          </a:lnRef>
+          <a:fillRef idx="0">
+            <a:schemeClr val="accent1"/>
+          </a:fillRef>
+          <a:effectRef idx="0">
+            <a:schemeClr val="accent1"/>
+          </a:effectRef>
+          <a:fontRef idx="minor">
+            <a:schemeClr val="tx1"/>
+          </a:fontRef>
+        </p:style>
+        <p:txBody>
+          <a:bodyPr rtlCol="0" anchor="ctr"/>
+          <a:lstStyle/>
+          <a:p>
+            <a:pPr algn="ctr"/>
+            <a:endParaRPr lang="en-US"/>
+          </a:p>
+        </p:txBody>
+      </p:sp>
+      <p:sp>
+        <p:nvSpPr>
+          <p:cNvPr id="11" name="TextBox 10">
+            <a:extLst>
+              <a:ext uri="{FF2B5EF4-FFF2-40B4-BE49-F238E27FC236}">
+                <a16:creationId xmlns:a16="http://schemas.microsoft.com/office/drawing/2014/main" id="{5BA2D2F7-0D25-9291-81E1-B95A85194ECD}"/>
+              </a:ext>
+            </a:extLst>
+          </p:cNvPr>
+          <p:cNvSpPr txBox="1"/>
+          <p:nvPr/>
+        </p:nvSpPr>
+        <p:spPr>
+          <a:xfrm rot="16200000">
+            <a:off x="-286998" y="3724841"/>
+            <a:ext cx="1571596" cy="707886"/>
+          </a:xfrm>
+          <a:prstGeom prst="rect">
+            <a:avLst/>
+          </a:prstGeom>
+          <a:noFill/>
+        </p:spPr>
+        <p:txBody>
+          <a:bodyPr wrap="square" rtlCol="0">
+            <a:spAutoFit/>
+          </a:bodyPr>
+          <a:lstStyle/>
+          <a:p>
+            <a:pPr algn="ctr"/>
+            <a:r>
+              <a:rPr lang="en-US" sz="2000" dirty="0"/>
+              <a:t>Core Algorithms</a:t>
+            </a:r>
+          </a:p>
+        </p:txBody>
+      </p:sp>
+      <p:sp>
+        <p:nvSpPr>
+          <p:cNvPr id="12" name="Rectangle 11">
+            <a:extLst>
+              <a:ext uri="{FF2B5EF4-FFF2-40B4-BE49-F238E27FC236}">
+                <a16:creationId xmlns:a16="http://schemas.microsoft.com/office/drawing/2014/main" id="{E4FA9D0A-8D01-9127-4D33-1A9F6023056A}"/>
+              </a:ext>
+            </a:extLst>
+          </p:cNvPr>
+          <p:cNvSpPr/>
+          <p:nvPr/>
+        </p:nvSpPr>
+        <p:spPr>
+          <a:xfrm>
+            <a:off x="1280175" y="5154275"/>
+            <a:ext cx="1961804" cy="1264023"/>
+          </a:xfrm>
+          <a:prstGeom prst="rect">
+            <a:avLst/>
+          </a:prstGeom>
+          <a:noFill/>
+          <a:ln w="19050">
+            <a:solidFill>
+              <a:schemeClr val="tx1"/>
+            </a:solidFill>
+          </a:ln>
+        </p:spPr>
+        <p:style>
+          <a:lnRef idx="2">
+            <a:schemeClr val="accent1">
+              <a:shade val="15000"/>
+            </a:schemeClr>
+          </a:lnRef>
+          <a:fillRef idx="1">
+            <a:schemeClr val="accent1"/>
+          </a:fillRef>
+          <a:effectRef idx="0">
+            <a:schemeClr val="accent1"/>
+          </a:effectRef>
+          <a:fontRef idx="minor">
+            <a:schemeClr val="lt1"/>
+          </a:fontRef>
+        </p:style>
+        <p:txBody>
+          <a:bodyPr rtlCol="0" anchor="ctr"/>
+          <a:lstStyle/>
+          <a:p>
+            <a:pPr algn="ctr"/>
+            <a:r>
+              <a:rPr lang="en-US" sz="2000" dirty="0">
+                <a:solidFill>
+                  <a:schemeClr val="tx1"/>
+                </a:solidFill>
+              </a:rPr>
+              <a:t>3. Social Network Analysis</a:t>
+            </a:r>
+          </a:p>
+        </p:txBody>
+      </p:sp>
+      <p:sp>
+        <p:nvSpPr>
+          <p:cNvPr id="14" name="Left Brace 13">
+            <a:extLst>
+              <a:ext uri="{FF2B5EF4-FFF2-40B4-BE49-F238E27FC236}">
+                <a16:creationId xmlns:a16="http://schemas.microsoft.com/office/drawing/2014/main" id="{109C88A7-820F-F45D-06B9-AC6695899726}"/>
+              </a:ext>
+            </a:extLst>
+          </p:cNvPr>
+          <p:cNvSpPr/>
+          <p:nvPr/>
+        </p:nvSpPr>
+        <p:spPr>
+          <a:xfrm>
+            <a:off x="858563" y="5154275"/>
+            <a:ext cx="164275" cy="1264024"/>
+          </a:xfrm>
+          <a:prstGeom prst="leftBrace">
+            <a:avLst/>
+          </a:prstGeom>
+          <a:ln w="19050">
+            <a:solidFill>
+              <a:schemeClr val="tx1"/>
+            </a:solidFill>
+          </a:ln>
+        </p:spPr>
+        <p:style>
+          <a:lnRef idx="1">
+            <a:schemeClr val="accent1"/>
+          </a:lnRef>
+          <a:fillRef idx="0">
+            <a:schemeClr val="accent1"/>
+          </a:fillRef>
+          <a:effectRef idx="0">
+            <a:schemeClr val="accent1"/>
+          </a:effectRef>
+          <a:fontRef idx="minor">
+            <a:schemeClr val="tx1"/>
+          </a:fontRef>
+        </p:style>
+        <p:txBody>
+          <a:bodyPr rtlCol="0" anchor="ctr"/>
+          <a:lstStyle/>
+          <a:p>
+            <a:pPr algn="ctr"/>
+            <a:endParaRPr lang="en-US"/>
+          </a:p>
+        </p:txBody>
+      </p:sp>
+      <p:sp>
+        <p:nvSpPr>
+          <p:cNvPr id="15" name="TextBox 14">
+            <a:extLst>
+              <a:ext uri="{FF2B5EF4-FFF2-40B4-BE49-F238E27FC236}">
+                <a16:creationId xmlns:a16="http://schemas.microsoft.com/office/drawing/2014/main" id="{189A544B-C64D-C26D-379D-546D41202910}"/>
+              </a:ext>
+            </a:extLst>
+          </p:cNvPr>
+          <p:cNvSpPr txBox="1"/>
+          <p:nvPr/>
+        </p:nvSpPr>
+        <p:spPr>
+          <a:xfrm rot="16200000">
+            <a:off x="-322189" y="5405146"/>
+            <a:ext cx="1571596" cy="707886"/>
+          </a:xfrm>
+          <a:prstGeom prst="rect">
+            <a:avLst/>
+          </a:prstGeom>
+          <a:noFill/>
+        </p:spPr>
+        <p:txBody>
+          <a:bodyPr wrap="square" rtlCol="0">
+            <a:spAutoFit/>
+          </a:bodyPr>
+          <a:lstStyle/>
+          <a:p>
+            <a:pPr algn="ctr"/>
+            <a:r>
+              <a:rPr lang="en-US" sz="2000" dirty="0"/>
+              <a:t>Taks </a:t>
+            </a:r>
+            <a:r>
+              <a:rPr lang="en-US" sz="2000"/>
+              <a:t>Speific </a:t>
+            </a:r>
+            <a:r>
+              <a:rPr lang="en-US" sz="2000" dirty="0"/>
+              <a:t>Algorithms</a:t>
+            </a:r>
+          </a:p>
+        </p:txBody>
+      </p:sp>
+      <p:sp>
+        <p:nvSpPr>
+          <p:cNvPr id="16" name="Rectangle 15">
+            <a:extLst>
+              <a:ext uri="{FF2B5EF4-FFF2-40B4-BE49-F238E27FC236}">
+                <a16:creationId xmlns:a16="http://schemas.microsoft.com/office/drawing/2014/main" id="{F224B6E8-EE62-D057-75D7-D8EF7E5CA802}"/>
+              </a:ext>
+            </a:extLst>
+          </p:cNvPr>
+          <p:cNvSpPr/>
+          <p:nvPr/>
+        </p:nvSpPr>
+        <p:spPr>
+          <a:xfrm>
+            <a:off x="3811677" y="3631085"/>
+            <a:ext cx="2085982" cy="1094029"/>
+          </a:xfrm>
+          <a:prstGeom prst="rect">
+            <a:avLst/>
+          </a:prstGeom>
+          <a:noFill/>
+          <a:ln w="19050">
+            <a:solidFill>
+              <a:schemeClr val="tx1"/>
+            </a:solidFill>
+          </a:ln>
+        </p:spPr>
+        <p:style>
+          <a:lnRef idx="2">
+            <a:schemeClr val="accent1">
+              <a:shade val="15000"/>
+            </a:schemeClr>
+          </a:lnRef>
+          <a:fillRef idx="1">
+            <a:schemeClr val="accent1"/>
+          </a:fillRef>
+          <a:effectRef idx="0">
+            <a:schemeClr val="accent1"/>
+          </a:effectRef>
+          <a:fontRef idx="minor">
+            <a:schemeClr val="lt1"/>
+          </a:fontRef>
+        </p:style>
+        <p:txBody>
+          <a:bodyPr rtlCol="0" anchor="ctr"/>
+          <a:lstStyle/>
+          <a:p>
+            <a:pPr algn="ctr"/>
+            <a:r>
+              <a:rPr lang="en-US" sz="2000" dirty="0">
+                <a:solidFill>
+                  <a:schemeClr val="tx1"/>
+                </a:solidFill>
+              </a:rPr>
+              <a:t>5. Similarity Search and NN Algorithms</a:t>
+            </a:r>
+          </a:p>
+        </p:txBody>
+      </p:sp>
+      <p:sp>
+        <p:nvSpPr>
+          <p:cNvPr id="17" name="Rectangle 16">
+            <a:extLst>
+              <a:ext uri="{FF2B5EF4-FFF2-40B4-BE49-F238E27FC236}">
+                <a16:creationId xmlns:a16="http://schemas.microsoft.com/office/drawing/2014/main" id="{4E8CF822-5DC8-788F-175C-7F3FAAECF89C}"/>
+              </a:ext>
+            </a:extLst>
+          </p:cNvPr>
+          <p:cNvSpPr/>
+          <p:nvPr/>
+        </p:nvSpPr>
+        <p:spPr>
+          <a:xfrm>
+            <a:off x="6408020" y="3640978"/>
+            <a:ext cx="2038966" cy="1123564"/>
+          </a:xfrm>
+          <a:prstGeom prst="rect">
+            <a:avLst/>
+          </a:prstGeom>
+          <a:noFill/>
+          <a:ln w="19050">
+            <a:solidFill>
+              <a:schemeClr val="tx1"/>
+            </a:solidFill>
+          </a:ln>
+        </p:spPr>
+        <p:style>
+          <a:lnRef idx="2">
+            <a:schemeClr val="accent1">
+              <a:shade val="15000"/>
+            </a:schemeClr>
+          </a:lnRef>
+          <a:fillRef idx="1">
+            <a:schemeClr val="accent1"/>
+          </a:fillRef>
+          <a:effectRef idx="0">
+            <a:schemeClr val="accent1"/>
+          </a:effectRef>
+          <a:fontRef idx="minor">
+            <a:schemeClr val="lt1"/>
+          </a:fontRef>
+        </p:style>
+        <p:txBody>
+          <a:bodyPr rtlCol="0" anchor="ctr"/>
+          <a:lstStyle/>
+          <a:p>
+            <a:pPr algn="ctr"/>
+            <a:r>
+              <a:rPr lang="en-US" sz="2000" dirty="0">
+                <a:solidFill>
+                  <a:schemeClr val="tx1"/>
+                </a:solidFill>
+              </a:rPr>
+              <a:t>4. Online Algorithms</a:t>
+            </a:r>
+          </a:p>
+        </p:txBody>
+      </p:sp>
+      <p:sp>
+        <p:nvSpPr>
+          <p:cNvPr id="18" name="Rectangle 17">
+            <a:extLst>
+              <a:ext uri="{FF2B5EF4-FFF2-40B4-BE49-F238E27FC236}">
+                <a16:creationId xmlns:a16="http://schemas.microsoft.com/office/drawing/2014/main" id="{260E78D0-AC72-D4B1-530C-9DBE1AAF53B3}"/>
+              </a:ext>
+            </a:extLst>
+          </p:cNvPr>
+          <p:cNvSpPr/>
+          <p:nvPr/>
+        </p:nvSpPr>
+        <p:spPr>
+          <a:xfrm>
+            <a:off x="8985680" y="5155489"/>
+            <a:ext cx="1894527" cy="1262809"/>
+          </a:xfrm>
+          <a:prstGeom prst="rect">
+            <a:avLst/>
+          </a:prstGeom>
+          <a:noFill/>
+          <a:ln w="19050">
+            <a:solidFill>
+              <a:schemeClr val="tx1"/>
+            </a:solidFill>
+          </a:ln>
+        </p:spPr>
+        <p:style>
+          <a:lnRef idx="2">
+            <a:schemeClr val="accent1">
+              <a:shade val="15000"/>
+            </a:schemeClr>
+          </a:lnRef>
+          <a:fillRef idx="1">
+            <a:schemeClr val="accent1"/>
+          </a:fillRef>
+          <a:effectRef idx="0">
+            <a:schemeClr val="accent1"/>
+          </a:effectRef>
+          <a:fontRef idx="minor">
+            <a:schemeClr val="lt1"/>
+          </a:fontRef>
+        </p:style>
+        <p:txBody>
+          <a:bodyPr rtlCol="0" anchor="ctr"/>
+          <a:lstStyle/>
+          <a:p>
+            <a:pPr algn="ctr"/>
+            <a:r>
+              <a:rPr lang="en-US" sz="2000" dirty="0">
+                <a:solidFill>
+                  <a:schemeClr val="tx1"/>
+                </a:solidFill>
+              </a:rPr>
+              <a:t>8. Clustering Algorithms</a:t>
+            </a:r>
+          </a:p>
+        </p:txBody>
+      </p:sp>
+      <p:sp>
+        <p:nvSpPr>
+          <p:cNvPr id="20" name="Rectangle 19">
+            <a:extLst>
+              <a:ext uri="{FF2B5EF4-FFF2-40B4-BE49-F238E27FC236}">
+                <a16:creationId xmlns:a16="http://schemas.microsoft.com/office/drawing/2014/main" id="{1D5B69D8-949F-A5E1-038A-D7B3D5FE6133}"/>
+              </a:ext>
+            </a:extLst>
+          </p:cNvPr>
+          <p:cNvSpPr/>
+          <p:nvPr/>
+        </p:nvSpPr>
+        <p:spPr>
+          <a:xfrm>
+            <a:off x="6470354" y="5154275"/>
+            <a:ext cx="2016833" cy="1245689"/>
+          </a:xfrm>
+          <a:prstGeom prst="rect">
+            <a:avLst/>
+          </a:prstGeom>
+          <a:noFill/>
+          <a:ln w="19050">
+            <a:solidFill>
+              <a:schemeClr val="tx1"/>
+            </a:solidFill>
+          </a:ln>
+        </p:spPr>
+        <p:style>
+          <a:lnRef idx="2">
+            <a:schemeClr val="accent1">
+              <a:shade val="15000"/>
+            </a:schemeClr>
+          </a:lnRef>
+          <a:fillRef idx="1">
+            <a:schemeClr val="accent1"/>
+          </a:fillRef>
+          <a:effectRef idx="0">
+            <a:schemeClr val="accent1"/>
+          </a:effectRef>
+          <a:fontRef idx="minor">
+            <a:schemeClr val="lt1"/>
+          </a:fontRef>
+        </p:style>
+        <p:txBody>
+          <a:bodyPr rtlCol="0" anchor="ctr"/>
+          <a:lstStyle/>
+          <a:p>
+            <a:pPr algn="ctr"/>
+            <a:r>
+              <a:rPr lang="en-US" sz="2000" dirty="0">
+                <a:solidFill>
+                  <a:schemeClr val="tx1"/>
+                </a:solidFill>
+              </a:rPr>
+              <a:t>7. Recommender  Algorithms</a:t>
+            </a:r>
+          </a:p>
+        </p:txBody>
+      </p:sp>
+      <p:sp>
+        <p:nvSpPr>
+          <p:cNvPr id="21" name="Rectangle 20">
+            <a:extLst>
+              <a:ext uri="{FF2B5EF4-FFF2-40B4-BE49-F238E27FC236}">
+                <a16:creationId xmlns:a16="http://schemas.microsoft.com/office/drawing/2014/main" id="{66940847-DA8B-171F-5B55-F8479F15B7DD}"/>
+              </a:ext>
+            </a:extLst>
+          </p:cNvPr>
+          <p:cNvSpPr/>
+          <p:nvPr/>
+        </p:nvSpPr>
+        <p:spPr>
+          <a:xfrm>
+            <a:off x="3760595" y="5172609"/>
+            <a:ext cx="2085981" cy="1245689"/>
+          </a:xfrm>
+          <a:prstGeom prst="rect">
+            <a:avLst/>
+          </a:prstGeom>
+          <a:noFill/>
+          <a:ln w="19050">
+            <a:solidFill>
+              <a:schemeClr val="tx1"/>
+            </a:solidFill>
+          </a:ln>
+        </p:spPr>
+        <p:style>
+          <a:lnRef idx="2">
+            <a:schemeClr val="accent1">
+              <a:shade val="15000"/>
+            </a:schemeClr>
+          </a:lnRef>
+          <a:fillRef idx="1">
+            <a:schemeClr val="accent1"/>
+          </a:fillRef>
+          <a:effectRef idx="0">
+            <a:schemeClr val="accent1"/>
+          </a:effectRef>
+          <a:fontRef idx="minor">
+            <a:schemeClr val="lt1"/>
+          </a:fontRef>
+        </p:style>
+        <p:txBody>
+          <a:bodyPr rtlCol="0" anchor="ctr"/>
+          <a:lstStyle/>
+          <a:p>
+            <a:pPr algn="ctr"/>
+            <a:r>
+              <a:rPr lang="en-US" sz="2000" dirty="0">
+                <a:solidFill>
+                  <a:schemeClr val="tx1"/>
+                </a:solidFill>
+              </a:rPr>
+              <a:t>6. Web/Document ranking and search</a:t>
+            </a:r>
+          </a:p>
+        </p:txBody>
+      </p:sp>
+      <p:sp>
+        <p:nvSpPr>
+          <p:cNvPr id="22" name="Content Placeholder 2">
+            <a:extLst>
+              <a:ext uri="{FF2B5EF4-FFF2-40B4-BE49-F238E27FC236}">
+                <a16:creationId xmlns:a16="http://schemas.microsoft.com/office/drawing/2014/main" id="{554ECB53-B003-A605-50EF-1194C4E34DE8}"/>
+              </a:ext>
+            </a:extLst>
+          </p:cNvPr>
+          <p:cNvSpPr txBox="1">
+            <a:spLocks/>
+          </p:cNvSpPr>
+          <p:nvPr/>
+        </p:nvSpPr>
+        <p:spPr>
+          <a:xfrm>
+            <a:off x="865089" y="797597"/>
+            <a:ext cx="10515600" cy="850578"/>
+          </a:xfrm>
+          <a:prstGeom prst="rect">
+            <a:avLst/>
+          </a:prstGeom>
+        </p:spPr>
+        <p:txBody>
+          <a:bodyPr>
+            <a:noAutofit/>
+          </a:bodyPr>
+          <a:lstStyle>
+            <a:lvl1pPr marL="228600" indent="-228600" algn="l" defTabSz="914400" rtl="0" eaLnBrk="1" latinLnBrk="0" hangingPunct="1">
+              <a:lnSpc>
+                <a:spcPct val="90000"/>
+              </a:lnSpc>
+              <a:spcBef>
+                <a:spcPts val="1000"/>
+              </a:spcBef>
+              <a:buFont typeface="Arial" panose="020B0604020202020204" pitchFamily="34" charset="0"/>
+              <a:buChar char="•"/>
+              <a:defRPr sz="2800" kern="1200">
+                <a:solidFill>
+                  <a:schemeClr val="tx1"/>
+                </a:solidFill>
+                <a:latin typeface="+mn-lt"/>
+                <a:ea typeface="+mn-ea"/>
+                <a:cs typeface="+mn-cs"/>
+              </a:defRPr>
+            </a:lvl1pPr>
+            <a:lvl2pPr marL="685800" indent="-228600" algn="l" defTabSz="914400" rtl="0" eaLnBrk="1" latinLnBrk="0" hangingPunct="1">
+              <a:lnSpc>
+                <a:spcPct val="90000"/>
+              </a:lnSpc>
+              <a:spcBef>
+                <a:spcPts val="500"/>
+              </a:spcBef>
+              <a:buFont typeface="Arial" panose="020B0604020202020204" pitchFamily="34" charset="0"/>
+              <a:buChar char="•"/>
+              <a:defRPr sz="2400" kern="1200">
+                <a:solidFill>
+                  <a:schemeClr val="tx1"/>
+                </a:solidFill>
+                <a:latin typeface="+mn-lt"/>
+                <a:ea typeface="+mn-ea"/>
+                <a:cs typeface="+mn-cs"/>
+              </a:defRPr>
+            </a:lvl2pPr>
+            <a:lvl3pPr marL="1143000" indent="-228600" algn="l" defTabSz="914400" rtl="0" eaLnBrk="1" latinLnBrk="0" hangingPunct="1">
+              <a:lnSpc>
+                <a:spcPct val="90000"/>
+              </a:lnSpc>
+              <a:spcBef>
+                <a:spcPts val="500"/>
+              </a:spcBef>
+              <a:buFont typeface="Arial" panose="020B0604020202020204" pitchFamily="34" charset="0"/>
+              <a:buChar char="•"/>
+              <a:defRPr sz="2000" kern="1200">
+                <a:solidFill>
+                  <a:schemeClr val="tx1"/>
+                </a:solidFill>
+                <a:latin typeface="+mn-lt"/>
+                <a:ea typeface="+mn-ea"/>
+                <a:cs typeface="+mn-cs"/>
+              </a:defRPr>
+            </a:lvl3pPr>
+            <a:lvl4pPr marL="1600200" indent="-228600" algn="l" defTabSz="914400" rtl="0" eaLnBrk="1" latinLnBrk="0" hangingPunct="1">
+              <a:lnSpc>
+                <a:spcPct val="90000"/>
+              </a:lnSpc>
+              <a:spcBef>
+                <a:spcPts val="500"/>
+              </a:spcBef>
+              <a:buFont typeface="Arial" panose="020B0604020202020204" pitchFamily="34" charset="0"/>
+              <a:buChar char="•"/>
+              <a:defRPr sz="1800" kern="1200">
+                <a:solidFill>
+                  <a:schemeClr val="tx1"/>
+                </a:solidFill>
+                <a:latin typeface="+mn-lt"/>
+                <a:ea typeface="+mn-ea"/>
+                <a:cs typeface="+mn-cs"/>
+              </a:defRPr>
+            </a:lvl4pPr>
+            <a:lvl5pPr marL="2057400" indent="-228600" algn="l" defTabSz="914400" rtl="0" eaLnBrk="1" latinLnBrk="0" hangingPunct="1">
+              <a:lnSpc>
+                <a:spcPct val="90000"/>
+              </a:lnSpc>
+              <a:spcBef>
+                <a:spcPts val="500"/>
+              </a:spcBef>
+              <a:buFont typeface="Arial" panose="020B0604020202020204" pitchFamily="34" charset="0"/>
+              <a:buChar char="•"/>
+              <a:defRPr sz="1800" kern="1200">
+                <a:solidFill>
+                  <a:schemeClr val="tx1"/>
+                </a:solidFill>
+                <a:latin typeface="+mn-lt"/>
+                <a:ea typeface="+mn-ea"/>
+                <a:cs typeface="+mn-cs"/>
+              </a:defRPr>
+            </a:lvl5pPr>
+            <a:lvl6pPr marL="2514600" indent="-228600" algn="l" defTabSz="914400" rtl="0" eaLnBrk="1" latinLnBrk="0" hangingPunct="1">
+              <a:lnSpc>
+                <a:spcPct val="90000"/>
+              </a:lnSpc>
+              <a:spcBef>
+                <a:spcPts val="500"/>
+              </a:spcBef>
+              <a:buFont typeface="Arial" panose="020B0604020202020204" pitchFamily="34" charset="0"/>
+              <a:buChar char="•"/>
+              <a:defRPr sz="1800" kern="1200">
+                <a:solidFill>
+                  <a:schemeClr val="tx1"/>
+                </a:solidFill>
+                <a:latin typeface="+mn-lt"/>
+                <a:ea typeface="+mn-ea"/>
+                <a:cs typeface="+mn-cs"/>
+              </a:defRPr>
+            </a:lvl6pPr>
+            <a:lvl7pPr marL="2971800" indent="-228600" algn="l" defTabSz="914400" rtl="0" eaLnBrk="1" latinLnBrk="0" hangingPunct="1">
+              <a:lnSpc>
+                <a:spcPct val="90000"/>
+              </a:lnSpc>
+              <a:spcBef>
+                <a:spcPts val="500"/>
+              </a:spcBef>
+              <a:buFont typeface="Arial" panose="020B0604020202020204" pitchFamily="34" charset="0"/>
+              <a:buChar char="•"/>
+              <a:defRPr sz="1800" kern="1200">
+                <a:solidFill>
+                  <a:schemeClr val="tx1"/>
+                </a:solidFill>
+                <a:latin typeface="+mn-lt"/>
+                <a:ea typeface="+mn-ea"/>
+                <a:cs typeface="+mn-cs"/>
+              </a:defRPr>
+            </a:lvl7pPr>
+            <a:lvl8pPr marL="3429000" indent="-228600" algn="l" defTabSz="914400" rtl="0" eaLnBrk="1" latinLnBrk="0" hangingPunct="1">
+              <a:lnSpc>
+                <a:spcPct val="90000"/>
+              </a:lnSpc>
+              <a:spcBef>
+                <a:spcPts val="500"/>
+              </a:spcBef>
+              <a:buFont typeface="Arial" panose="020B0604020202020204" pitchFamily="34" charset="0"/>
+              <a:buChar char="•"/>
+              <a:defRPr sz="1800" kern="1200">
+                <a:solidFill>
+                  <a:schemeClr val="tx1"/>
+                </a:solidFill>
+                <a:latin typeface="+mn-lt"/>
+                <a:ea typeface="+mn-ea"/>
+                <a:cs typeface="+mn-cs"/>
+              </a:defRPr>
+            </a:lvl8pPr>
+            <a:lvl9pPr marL="3886200" indent="-228600" algn="l" defTabSz="914400" rtl="0" eaLnBrk="1" latinLnBrk="0" hangingPunct="1">
+              <a:lnSpc>
+                <a:spcPct val="90000"/>
+              </a:lnSpc>
+              <a:spcBef>
+                <a:spcPts val="500"/>
+              </a:spcBef>
+              <a:buFont typeface="Arial" panose="020B0604020202020204" pitchFamily="34" charset="0"/>
+              <a:buChar char="•"/>
+              <a:defRPr sz="1800" kern="1200">
+                <a:solidFill>
+                  <a:schemeClr val="tx1"/>
+                </a:solidFill>
+                <a:latin typeface="+mn-lt"/>
+                <a:ea typeface="+mn-ea"/>
+                <a:cs typeface="+mn-cs"/>
+              </a:defRPr>
+            </a:lvl9pPr>
+          </a:lstStyle>
+          <a:p>
+            <a:pPr marL="0" indent="0">
+              <a:buFont typeface="Arial" panose="020B0604020202020204" pitchFamily="34" charset="0"/>
+              <a:buNone/>
+            </a:pPr>
+            <a:r>
+              <a:rPr lang="en-US" dirty="0"/>
+              <a:t>The main topics in this course are interconnected and build on each other</a:t>
+            </a:r>
+          </a:p>
+        </p:txBody>
+      </p:sp>
+    </p:spTree>
+    <p:extLst>
+      <p:ext uri="{BB962C8B-B14F-4D97-AF65-F5344CB8AC3E}">
+        <p14:creationId xmlns:p14="http://schemas.microsoft.com/office/powerpoint/2010/main" val="461663716"/>
+      </p:ext>
+    </p:extLst>
+  </p:cSld>
+  <p:clrMapOvr>
+    <a:masterClrMapping/>
+  </p:clrMapOvr>
+  <p:timing>
+    <p:tnLst>
+      <p:par>
+        <p:cTn id="1" dur="indefinite" restart="never" nodeType="tmRoot">
+          <p:childTnLst>
+            <p:seq concurrent="1" nextAc="seek">
+              <p:cTn id="2" dur="indefinite" nodeType="mainSeq">
+                <p:childTnLst>
+                  <p:par>
+                    <p:cTn id="3" fill="hold">
+                      <p:stCondLst>
+                        <p:cond delay="indefinite"/>
+                      </p:stCondLst>
+                      <p:childTnLst>
+                        <p:par>
+                          <p:cTn id="4" fill="hold">
+                            <p:stCondLst>
+                              <p:cond delay="0"/>
+                            </p:stCondLst>
+                            <p:childTnLst>
+                              <p:par>
+                                <p:cTn id="5" presetID="1" presetClass="entr" presetSubtype="0" fill="hold" grpId="0" nodeType="clickEffect">
+                                  <p:stCondLst>
+                                    <p:cond delay="0"/>
+                                  </p:stCondLst>
+                                  <p:childTnLst>
+                                    <p:set>
+                                      <p:cBhvr>
+                                        <p:cTn id="6" dur="1" fill="hold">
+                                          <p:stCondLst>
+                                            <p:cond delay="0"/>
+                                          </p:stCondLst>
+                                        </p:cTn>
+                                        <p:tgtEl>
+                                          <p:spTgt spid="3"/>
+                                        </p:tgtEl>
+                                        <p:attrNameLst>
+                                          <p:attrName>style.visibility</p:attrName>
+                                        </p:attrNameLst>
+                                      </p:cBhvr>
+                                      <p:to>
+                                        <p:strVal val="visible"/>
+                                      </p:to>
+                                    </p:set>
+                                  </p:childTnLst>
+                                </p:cTn>
+                              </p:par>
+                              <p:par>
+                                <p:cTn id="7" presetID="1" presetClass="entr" presetSubtype="0" fill="hold" grpId="0" nodeType="withEffect">
+                                  <p:stCondLst>
+                                    <p:cond delay="0"/>
+                                  </p:stCondLst>
+                                  <p:childTnLst>
+                                    <p:set>
+                                      <p:cBhvr>
+                                        <p:cTn id="8" dur="1" fill="hold">
+                                          <p:stCondLst>
+                                            <p:cond delay="0"/>
+                                          </p:stCondLst>
+                                        </p:cTn>
+                                        <p:tgtEl>
+                                          <p:spTgt spid="4"/>
+                                        </p:tgtEl>
+                                        <p:attrNameLst>
+                                          <p:attrName>style.visibility</p:attrName>
+                                        </p:attrNameLst>
+                                      </p:cBhvr>
+                                      <p:to>
+                                        <p:strVal val="visible"/>
+                                      </p:to>
+                                    </p:set>
+                                  </p:childTnLst>
+                                </p:cTn>
+                              </p:par>
+                              <p:par>
+                                <p:cTn id="9" presetID="1" presetClass="entr" presetSubtype="0" fill="hold" grpId="0" nodeType="withEffect">
+                                  <p:stCondLst>
+                                    <p:cond delay="0"/>
+                                  </p:stCondLst>
+                                  <p:childTnLst>
+                                    <p:set>
+                                      <p:cBhvr>
+                                        <p:cTn id="10" dur="1" fill="hold">
+                                          <p:stCondLst>
+                                            <p:cond delay="0"/>
+                                          </p:stCondLst>
+                                        </p:cTn>
+                                        <p:tgtEl>
+                                          <p:spTgt spid="5"/>
+                                        </p:tgtEl>
+                                        <p:attrNameLst>
+                                          <p:attrName>style.visibility</p:attrName>
+                                        </p:attrNameLst>
+                                      </p:cBhvr>
+                                      <p:to>
+                                        <p:strVal val="visible"/>
+                                      </p:to>
+                                    </p:set>
+                                  </p:childTnLst>
+                                </p:cTn>
+                              </p:par>
+                              <p:par>
+                                <p:cTn id="11" presetID="1" presetClass="entr" presetSubtype="0" fill="hold" grpId="0" nodeType="withEffect">
+                                  <p:stCondLst>
+                                    <p:cond delay="0"/>
+                                  </p:stCondLst>
+                                  <p:childTnLst>
+                                    <p:set>
+                                      <p:cBhvr>
+                                        <p:cTn id="12" dur="1" fill="hold">
+                                          <p:stCondLst>
+                                            <p:cond delay="0"/>
+                                          </p:stCondLst>
+                                        </p:cTn>
+                                        <p:tgtEl>
+                                          <p:spTgt spid="6"/>
+                                        </p:tgtEl>
+                                        <p:attrNameLst>
+                                          <p:attrName>style.visibility</p:attrName>
+                                        </p:attrNameLst>
+                                      </p:cBhvr>
+                                      <p:to>
+                                        <p:strVal val="visible"/>
+                                      </p:to>
+                                    </p:set>
+                                  </p:childTnLst>
+                                </p:cTn>
+                              </p:par>
+                              <p:par>
+                                <p:cTn id="13" presetID="1" presetClass="entr" presetSubtype="0" fill="hold" grpId="0" nodeType="withEffect">
+                                  <p:stCondLst>
+                                    <p:cond delay="0"/>
+                                  </p:stCondLst>
+                                  <p:childTnLst>
+                                    <p:set>
+                                      <p:cBhvr>
+                                        <p:cTn id="14" dur="1" fill="hold">
+                                          <p:stCondLst>
+                                            <p:cond delay="0"/>
+                                          </p:stCondLst>
+                                        </p:cTn>
+                                        <p:tgtEl>
+                                          <p:spTgt spid="7"/>
+                                        </p:tgtEl>
+                                        <p:attrNameLst>
+                                          <p:attrName>style.visibility</p:attrName>
+                                        </p:attrNameLst>
+                                      </p:cBhvr>
+                                      <p:to>
+                                        <p:strVal val="visible"/>
+                                      </p:to>
+                                    </p:set>
+                                  </p:childTnLst>
+                                </p:cTn>
+                              </p:par>
+                            </p:childTnLst>
+                          </p:cTn>
+                        </p:par>
+                      </p:childTnLst>
+                    </p:cTn>
+                  </p:par>
+                  <p:par>
+                    <p:cTn id="15" fill="hold">
+                      <p:stCondLst>
+                        <p:cond delay="indefinite"/>
+                      </p:stCondLst>
+                      <p:childTnLst>
+                        <p:par>
+                          <p:cTn id="16" fill="hold">
+                            <p:stCondLst>
+                              <p:cond delay="0"/>
+                            </p:stCondLst>
+                            <p:childTnLst>
+                              <p:par>
+                                <p:cTn id="17" presetID="1" presetClass="entr" presetSubtype="0" fill="hold" grpId="0" nodeType="clickEffect">
+                                  <p:stCondLst>
+                                    <p:cond delay="0"/>
+                                  </p:stCondLst>
+                                  <p:childTnLst>
+                                    <p:set>
+                                      <p:cBhvr>
+                                        <p:cTn id="18" dur="1" fill="hold">
+                                          <p:stCondLst>
+                                            <p:cond delay="0"/>
+                                          </p:stCondLst>
+                                        </p:cTn>
+                                        <p:tgtEl>
+                                          <p:spTgt spid="8"/>
+                                        </p:tgtEl>
+                                        <p:attrNameLst>
+                                          <p:attrName>style.visibility</p:attrName>
+                                        </p:attrNameLst>
+                                      </p:cBhvr>
+                                      <p:to>
+                                        <p:strVal val="visible"/>
+                                      </p:to>
+                                    </p:set>
+                                  </p:childTnLst>
+                                </p:cTn>
+                              </p:par>
+                              <p:par>
+                                <p:cTn id="19" presetID="1" presetClass="entr" presetSubtype="0" fill="hold" grpId="0" nodeType="withEffect">
+                                  <p:stCondLst>
+                                    <p:cond delay="0"/>
+                                  </p:stCondLst>
+                                  <p:childTnLst>
+                                    <p:set>
+                                      <p:cBhvr>
+                                        <p:cTn id="20" dur="1" fill="hold">
+                                          <p:stCondLst>
+                                            <p:cond delay="0"/>
+                                          </p:stCondLst>
+                                        </p:cTn>
+                                        <p:tgtEl>
+                                          <p:spTgt spid="10"/>
+                                        </p:tgtEl>
+                                        <p:attrNameLst>
+                                          <p:attrName>style.visibility</p:attrName>
+                                        </p:attrNameLst>
+                                      </p:cBhvr>
+                                      <p:to>
+                                        <p:strVal val="visible"/>
+                                      </p:to>
+                                    </p:set>
+                                  </p:childTnLst>
+                                </p:cTn>
+                              </p:par>
+                              <p:par>
+                                <p:cTn id="21" presetID="1" presetClass="entr" presetSubtype="0" fill="hold" grpId="0" nodeType="withEffect">
+                                  <p:stCondLst>
+                                    <p:cond delay="0"/>
+                                  </p:stCondLst>
+                                  <p:childTnLst>
+                                    <p:set>
+                                      <p:cBhvr>
+                                        <p:cTn id="22" dur="1" fill="hold">
+                                          <p:stCondLst>
+                                            <p:cond delay="0"/>
+                                          </p:stCondLst>
+                                        </p:cTn>
+                                        <p:tgtEl>
+                                          <p:spTgt spid="11"/>
+                                        </p:tgtEl>
+                                        <p:attrNameLst>
+                                          <p:attrName>style.visibility</p:attrName>
+                                        </p:attrNameLst>
+                                      </p:cBhvr>
+                                      <p:to>
+                                        <p:strVal val="visible"/>
+                                      </p:to>
+                                    </p:set>
+                                  </p:childTnLst>
+                                </p:cTn>
+                              </p:par>
+                              <p:par>
+                                <p:cTn id="23" presetID="1" presetClass="entr" presetSubtype="0" fill="hold" grpId="0" nodeType="withEffect">
+                                  <p:stCondLst>
+                                    <p:cond delay="0"/>
+                                  </p:stCondLst>
+                                  <p:childTnLst>
+                                    <p:set>
+                                      <p:cBhvr>
+                                        <p:cTn id="24" dur="1" fill="hold">
+                                          <p:stCondLst>
+                                            <p:cond delay="0"/>
+                                          </p:stCondLst>
+                                        </p:cTn>
+                                        <p:tgtEl>
+                                          <p:spTgt spid="16"/>
+                                        </p:tgtEl>
+                                        <p:attrNameLst>
+                                          <p:attrName>style.visibility</p:attrName>
+                                        </p:attrNameLst>
+                                      </p:cBhvr>
+                                      <p:to>
+                                        <p:strVal val="visible"/>
+                                      </p:to>
+                                    </p:set>
+                                  </p:childTnLst>
+                                </p:cTn>
+                              </p:par>
+                              <p:par>
+                                <p:cTn id="25" presetID="1" presetClass="entr" presetSubtype="0" fill="hold" grpId="0" nodeType="withEffect">
+                                  <p:stCondLst>
+                                    <p:cond delay="0"/>
+                                  </p:stCondLst>
+                                  <p:childTnLst>
+                                    <p:set>
+                                      <p:cBhvr>
+                                        <p:cTn id="26" dur="1" fill="hold">
+                                          <p:stCondLst>
+                                            <p:cond delay="0"/>
+                                          </p:stCondLst>
+                                        </p:cTn>
+                                        <p:tgtEl>
+                                          <p:spTgt spid="17"/>
+                                        </p:tgtEl>
+                                        <p:attrNameLst>
+                                          <p:attrName>style.visibility</p:attrName>
+                                        </p:attrNameLst>
+                                      </p:cBhvr>
+                                      <p:to>
+                                        <p:strVal val="visible"/>
+                                      </p:to>
+                                    </p:set>
+                                  </p:childTnLst>
+                                </p:cTn>
+                              </p:par>
+                            </p:childTnLst>
+                          </p:cTn>
+                        </p:par>
+                      </p:childTnLst>
+                    </p:cTn>
+                  </p:par>
+                  <p:par>
+                    <p:cTn id="27" fill="hold">
+                      <p:stCondLst>
+                        <p:cond delay="indefinite"/>
+                      </p:stCondLst>
+                      <p:childTnLst>
+                        <p:par>
+                          <p:cTn id="28" fill="hold">
+                            <p:stCondLst>
+                              <p:cond delay="0"/>
+                            </p:stCondLst>
+                            <p:childTnLst>
+                              <p:par>
+                                <p:cTn id="29" presetID="1" presetClass="entr" presetSubtype="0" fill="hold" grpId="0" nodeType="clickEffect">
+                                  <p:stCondLst>
+                                    <p:cond delay="0"/>
+                                  </p:stCondLst>
+                                  <p:childTnLst>
+                                    <p:set>
+                                      <p:cBhvr>
+                                        <p:cTn id="30" dur="1" fill="hold">
+                                          <p:stCondLst>
+                                            <p:cond delay="0"/>
+                                          </p:stCondLst>
+                                        </p:cTn>
+                                        <p:tgtEl>
+                                          <p:spTgt spid="12"/>
+                                        </p:tgtEl>
+                                        <p:attrNameLst>
+                                          <p:attrName>style.visibility</p:attrName>
+                                        </p:attrNameLst>
+                                      </p:cBhvr>
+                                      <p:to>
+                                        <p:strVal val="visible"/>
+                                      </p:to>
+                                    </p:set>
+                                  </p:childTnLst>
+                                </p:cTn>
+                              </p:par>
+                              <p:par>
+                                <p:cTn id="31" presetID="1" presetClass="entr" presetSubtype="0" fill="hold" grpId="0" nodeType="withEffect">
+                                  <p:stCondLst>
+                                    <p:cond delay="0"/>
+                                  </p:stCondLst>
+                                  <p:childTnLst>
+                                    <p:set>
+                                      <p:cBhvr>
+                                        <p:cTn id="32" dur="1" fill="hold">
+                                          <p:stCondLst>
+                                            <p:cond delay="0"/>
+                                          </p:stCondLst>
+                                        </p:cTn>
+                                        <p:tgtEl>
+                                          <p:spTgt spid="14"/>
+                                        </p:tgtEl>
+                                        <p:attrNameLst>
+                                          <p:attrName>style.visibility</p:attrName>
+                                        </p:attrNameLst>
+                                      </p:cBhvr>
+                                      <p:to>
+                                        <p:strVal val="visible"/>
+                                      </p:to>
+                                    </p:set>
+                                  </p:childTnLst>
+                                </p:cTn>
+                              </p:par>
+                              <p:par>
+                                <p:cTn id="33" presetID="1" presetClass="entr" presetSubtype="0" fill="hold" grpId="0" nodeType="withEffect">
+                                  <p:stCondLst>
+                                    <p:cond delay="0"/>
+                                  </p:stCondLst>
+                                  <p:childTnLst>
+                                    <p:set>
+                                      <p:cBhvr>
+                                        <p:cTn id="34" dur="1" fill="hold">
+                                          <p:stCondLst>
+                                            <p:cond delay="0"/>
+                                          </p:stCondLst>
+                                        </p:cTn>
+                                        <p:tgtEl>
+                                          <p:spTgt spid="15"/>
+                                        </p:tgtEl>
+                                        <p:attrNameLst>
+                                          <p:attrName>style.visibility</p:attrName>
+                                        </p:attrNameLst>
+                                      </p:cBhvr>
+                                      <p:to>
+                                        <p:strVal val="visible"/>
+                                      </p:to>
+                                    </p:set>
+                                  </p:childTnLst>
+                                </p:cTn>
+                              </p:par>
+                              <p:par>
+                                <p:cTn id="35" presetID="1" presetClass="entr" presetSubtype="0" fill="hold" grpId="0" nodeType="withEffect">
+                                  <p:stCondLst>
+                                    <p:cond delay="0"/>
+                                  </p:stCondLst>
+                                  <p:childTnLst>
+                                    <p:set>
+                                      <p:cBhvr>
+                                        <p:cTn id="36" dur="1" fill="hold">
+                                          <p:stCondLst>
+                                            <p:cond delay="0"/>
+                                          </p:stCondLst>
+                                        </p:cTn>
+                                        <p:tgtEl>
+                                          <p:spTgt spid="18"/>
+                                        </p:tgtEl>
+                                        <p:attrNameLst>
+                                          <p:attrName>style.visibility</p:attrName>
+                                        </p:attrNameLst>
+                                      </p:cBhvr>
+                                      <p:to>
+                                        <p:strVal val="visible"/>
+                                      </p:to>
+                                    </p:set>
+                                  </p:childTnLst>
+                                </p:cTn>
+                              </p:par>
+                              <p:par>
+                                <p:cTn id="37" presetID="1" presetClass="entr" presetSubtype="0" fill="hold" grpId="0" nodeType="withEffect">
+                                  <p:stCondLst>
+                                    <p:cond delay="0"/>
+                                  </p:stCondLst>
+                                  <p:childTnLst>
+                                    <p:set>
+                                      <p:cBhvr>
+                                        <p:cTn id="38" dur="1" fill="hold">
+                                          <p:stCondLst>
+                                            <p:cond delay="0"/>
+                                          </p:stCondLst>
+                                        </p:cTn>
+                                        <p:tgtEl>
+                                          <p:spTgt spid="20"/>
+                                        </p:tgtEl>
+                                        <p:attrNameLst>
+                                          <p:attrName>style.visibility</p:attrName>
+                                        </p:attrNameLst>
+                                      </p:cBhvr>
+                                      <p:to>
+                                        <p:strVal val="visible"/>
+                                      </p:to>
+                                    </p:set>
+                                  </p:childTnLst>
+                                </p:cTn>
+                              </p:par>
+                              <p:par>
+                                <p:cTn id="39" presetID="1" presetClass="entr" presetSubtype="0" fill="hold" grpId="0" nodeType="withEffect">
+                                  <p:stCondLst>
+                                    <p:cond delay="0"/>
+                                  </p:stCondLst>
+                                  <p:childTnLst>
+                                    <p:set>
+                                      <p:cBhvr>
+                                        <p:cTn id="40" dur="1" fill="hold">
+                                          <p:stCondLst>
+                                            <p:cond delay="0"/>
+                                          </p:stCondLst>
+                                        </p:cTn>
+                                        <p:tgtEl>
+                                          <p:spTgt spid="21"/>
+                                        </p:tgtEl>
+                                        <p:attrNameLst>
+                                          <p:attrName>style.visibility</p:attrName>
+                                        </p:attrNameLst>
+                                      </p:cBhvr>
+                                      <p:to>
+                                        <p:strVal val="visible"/>
+                                      </p:to>
+                                    </p:set>
+                                  </p:childTnLst>
+                                </p:cTn>
+                              </p:par>
+                            </p:childTnLst>
+                          </p:cTn>
+                        </p:par>
+                      </p:childTnLst>
+                    </p:cTn>
+                  </p:par>
+                </p:childTnLst>
+              </p:cTn>
+              <p:prevCondLst>
+                <p:cond evt="onPrev" delay="0">
+                  <p:tgtEl>
+                    <p:sldTgt/>
+                  </p:tgtEl>
+                </p:cond>
+              </p:prevCondLst>
+              <p:nextCondLst>
+                <p:cond evt="onNext" delay="0">
+                  <p:tgtEl>
+                    <p:sldTgt/>
+                  </p:tgtEl>
+                </p:cond>
+              </p:nextCondLst>
+            </p:seq>
+          </p:childTnLst>
+        </p:cTn>
+      </p:par>
+    </p:tnLst>
+    <p:bldLst>
+      <p:bldP spid="3" grpId="0" animBg="1"/>
+      <p:bldP spid="4" grpId="0"/>
+      <p:bldP spid="5" grpId="0" animBg="1"/>
+      <p:bldP spid="6" grpId="0" animBg="1"/>
+      <p:bldP spid="7" grpId="0" animBg="1"/>
+      <p:bldP spid="8" grpId="0" animBg="1"/>
+      <p:bldP spid="10" grpId="0" animBg="1"/>
+      <p:bldP spid="11" grpId="0"/>
+      <p:bldP spid="12" grpId="0" animBg="1"/>
+      <p:bldP spid="14" grpId="0" animBg="1"/>
+      <p:bldP spid="15" grpId="0"/>
+      <p:bldP spid="16" grpId="0" animBg="1"/>
+      <p:bldP spid="17" grpId="0" animBg="1"/>
+      <p:bldP spid="18" grpId="0" animBg="1"/>
+      <p:bldP spid="20" grpId="0" animBg="1"/>
+      <p:bldP spid="21" grpId="0" animBg="1"/>
+    </p:bldLst>
+  </p:timing>
+</p:sld>
+</file>
+
+<file path=ppt/slides/slide16.xml><?xml version="1.0" encoding="utf-8"?>
+<p:sld xmlns:a="http://schemas.openxmlformats.org/drawingml/2006/main" xmlns:r="http://schemas.openxmlformats.org/officeDocument/2006/relationships" xmlns:p="http://schemas.openxmlformats.org/presentationml/2006/main" show="0">
   <p:cSld>
     <p:spTree>
       <p:nvGrpSpPr>
@@ -9116,934 +10783,6 @@
 </p:sld>
 </file>
 
-<file path=ppt/slides/slide16.xml><?xml version="1.0" encoding="utf-8"?>
-<p:sld xmlns:a="http://schemas.openxmlformats.org/drawingml/2006/main" xmlns:r="http://schemas.openxmlformats.org/officeDocument/2006/relationships" xmlns:p="http://schemas.openxmlformats.org/presentationml/2006/main">
-  <p:cSld>
-    <p:spTree>
-      <p:nvGrpSpPr>
-        <p:cNvPr id="1" name=""/>
-        <p:cNvGrpSpPr/>
-        <p:nvPr/>
-      </p:nvGrpSpPr>
-      <p:grpSpPr>
-        <a:xfrm>
-          <a:off x="0" y="0"/>
-          <a:ext cx="0" cy="0"/>
-          <a:chOff x="0" y="0"/>
-          <a:chExt cx="0" cy="0"/>
-        </a:xfrm>
-      </p:grpSpPr>
-      <p:sp>
-        <p:nvSpPr>
-          <p:cNvPr id="2" name="Title 1">
-            <a:extLst>
-              <a:ext uri="{FF2B5EF4-FFF2-40B4-BE49-F238E27FC236}">
-                <a16:creationId xmlns:a16="http://schemas.microsoft.com/office/drawing/2014/main" id="{C56CF8BA-E77D-C360-AD5B-2CB98FDCA527}"/>
-              </a:ext>
-            </a:extLst>
-          </p:cNvPr>
-          <p:cNvSpPr>
-            <a:spLocks noGrp="1"/>
-          </p:cNvSpPr>
-          <p:nvPr>
-            <p:ph type="title"/>
-          </p:nvPr>
-        </p:nvSpPr>
-        <p:spPr>
-          <a:xfrm>
-            <a:off x="916187" y="249623"/>
-            <a:ext cx="10515600" cy="662230"/>
-          </a:xfrm>
-        </p:spPr>
-        <p:txBody>
-          <a:bodyPr>
-            <a:normAutofit fontScale="90000"/>
-          </a:bodyPr>
-          <a:lstStyle/>
-          <a:p>
-            <a:r>
-              <a:rPr lang="en-US" sz="4900" dirty="0">
-                <a:latin typeface="+mn-lt"/>
-              </a:rPr>
-              <a:t>Main topics in this course</a:t>
-            </a:r>
-            <a:br>
-              <a:rPr lang="en-US" sz="4000" dirty="0">
-                <a:latin typeface="+mn-lt"/>
-              </a:rPr>
-            </a:br>
-            <a:endParaRPr lang="en-US" sz="4000" dirty="0">
-              <a:latin typeface="+mn-lt"/>
-            </a:endParaRPr>
-          </a:p>
-        </p:txBody>
-      </p:sp>
-      <p:sp>
-        <p:nvSpPr>
-          <p:cNvPr id="3" name="Left Brace 2">
-            <a:extLst>
-              <a:ext uri="{FF2B5EF4-FFF2-40B4-BE49-F238E27FC236}">
-                <a16:creationId xmlns:a16="http://schemas.microsoft.com/office/drawing/2014/main" id="{722482C5-08B3-A90B-94B0-26B76C9150F3}"/>
-              </a:ext>
-            </a:extLst>
-          </p:cNvPr>
-          <p:cNvSpPr/>
-          <p:nvPr/>
-        </p:nvSpPr>
-        <p:spPr>
-          <a:xfrm>
-            <a:off x="756889" y="1964356"/>
-            <a:ext cx="225209" cy="1273261"/>
-          </a:xfrm>
-          <a:prstGeom prst="leftBrace">
-            <a:avLst/>
-          </a:prstGeom>
-          <a:ln w="19050">
-            <a:solidFill>
-              <a:schemeClr val="tx1"/>
-            </a:solidFill>
-          </a:ln>
-        </p:spPr>
-        <p:style>
-          <a:lnRef idx="1">
-            <a:schemeClr val="accent1"/>
-          </a:lnRef>
-          <a:fillRef idx="0">
-            <a:schemeClr val="accent1"/>
-          </a:fillRef>
-          <a:effectRef idx="0">
-            <a:schemeClr val="accent1"/>
-          </a:effectRef>
-          <a:fontRef idx="minor">
-            <a:schemeClr val="tx1"/>
-          </a:fontRef>
-        </p:style>
-        <p:txBody>
-          <a:bodyPr rtlCol="0" anchor="ctr"/>
-          <a:lstStyle/>
-          <a:p>
-            <a:pPr algn="ctr"/>
-            <a:endParaRPr lang="en-US"/>
-          </a:p>
-        </p:txBody>
-      </p:sp>
-      <p:sp>
-        <p:nvSpPr>
-          <p:cNvPr id="4" name="TextBox 3">
-            <a:extLst>
-              <a:ext uri="{FF2B5EF4-FFF2-40B4-BE49-F238E27FC236}">
-                <a16:creationId xmlns:a16="http://schemas.microsoft.com/office/drawing/2014/main" id="{40A58A67-EE46-2F4C-3457-22DB787F6AD6}"/>
-              </a:ext>
-            </a:extLst>
-          </p:cNvPr>
-          <p:cNvSpPr txBox="1"/>
-          <p:nvPr/>
-        </p:nvSpPr>
-        <p:spPr>
-          <a:xfrm rot="16200000">
-            <a:off x="-238228" y="2251765"/>
-            <a:ext cx="1571596" cy="400110"/>
-          </a:xfrm>
-          <a:prstGeom prst="rect">
-            <a:avLst/>
-          </a:prstGeom>
-          <a:noFill/>
-        </p:spPr>
-        <p:txBody>
-          <a:bodyPr wrap="square" rtlCol="0">
-            <a:spAutoFit/>
-          </a:bodyPr>
-          <a:lstStyle/>
-          <a:p>
-            <a:pPr algn="ctr"/>
-            <a:r>
-              <a:rPr lang="en-US" sz="2000" dirty="0"/>
-              <a:t>Foundations </a:t>
-            </a:r>
-          </a:p>
-        </p:txBody>
-      </p:sp>
-      <p:sp>
-        <p:nvSpPr>
-          <p:cNvPr id="5" name="Rectangle 4">
-            <a:extLst>
-              <a:ext uri="{FF2B5EF4-FFF2-40B4-BE49-F238E27FC236}">
-                <a16:creationId xmlns:a16="http://schemas.microsoft.com/office/drawing/2014/main" id="{4CD484FE-4881-3835-B8E6-5EB721D74315}"/>
-              </a:ext>
-            </a:extLst>
-          </p:cNvPr>
-          <p:cNvSpPr/>
-          <p:nvPr/>
-        </p:nvSpPr>
-        <p:spPr>
-          <a:xfrm>
-            <a:off x="1259812" y="1983695"/>
-            <a:ext cx="1951346" cy="1253922"/>
-          </a:xfrm>
-          <a:prstGeom prst="rect">
-            <a:avLst/>
-          </a:prstGeom>
-          <a:noFill/>
-          <a:ln w="19050">
-            <a:solidFill>
-              <a:schemeClr val="tx1"/>
-            </a:solidFill>
-          </a:ln>
-        </p:spPr>
-        <p:style>
-          <a:lnRef idx="2">
-            <a:schemeClr val="accent1">
-              <a:shade val="15000"/>
-            </a:schemeClr>
-          </a:lnRef>
-          <a:fillRef idx="1">
-            <a:schemeClr val="accent1"/>
-          </a:fillRef>
-          <a:effectRef idx="0">
-            <a:schemeClr val="accent1"/>
-          </a:effectRef>
-          <a:fontRef idx="minor">
-            <a:schemeClr val="lt1"/>
-          </a:fontRef>
-        </p:style>
-        <p:txBody>
-          <a:bodyPr rtlCol="0" anchor="ctr"/>
-          <a:lstStyle/>
-          <a:p>
-            <a:pPr algn="ctr"/>
-            <a:r>
-              <a:rPr lang="en-US" sz="2000" dirty="0">
-                <a:solidFill>
-                  <a:schemeClr val="tx1"/>
-                </a:solidFill>
-              </a:rPr>
-              <a:t>1. Hashing and K-V pair management </a:t>
-            </a:r>
-          </a:p>
-        </p:txBody>
-      </p:sp>
-      <p:sp>
-        <p:nvSpPr>
-          <p:cNvPr id="6" name="Rectangle 5">
-            <a:extLst>
-              <a:ext uri="{FF2B5EF4-FFF2-40B4-BE49-F238E27FC236}">
-                <a16:creationId xmlns:a16="http://schemas.microsoft.com/office/drawing/2014/main" id="{34CF4665-3B44-EC27-8017-63E9AAA04CB1}"/>
-              </a:ext>
-            </a:extLst>
-          </p:cNvPr>
-          <p:cNvSpPr/>
-          <p:nvPr/>
-        </p:nvSpPr>
-        <p:spPr>
-          <a:xfrm>
-            <a:off x="3740233" y="2021536"/>
-            <a:ext cx="2157426" cy="1178239"/>
-          </a:xfrm>
-          <a:prstGeom prst="rect">
-            <a:avLst/>
-          </a:prstGeom>
-          <a:noFill/>
-          <a:ln w="19050">
-            <a:solidFill>
-              <a:schemeClr val="tx1"/>
-            </a:solidFill>
-          </a:ln>
-        </p:spPr>
-        <p:style>
-          <a:lnRef idx="2">
-            <a:schemeClr val="accent1">
-              <a:shade val="15000"/>
-            </a:schemeClr>
-          </a:lnRef>
-          <a:fillRef idx="1">
-            <a:schemeClr val="accent1"/>
-          </a:fillRef>
-          <a:effectRef idx="0">
-            <a:schemeClr val="accent1"/>
-          </a:effectRef>
-          <a:fontRef idx="minor">
-            <a:schemeClr val="lt1"/>
-          </a:fontRef>
-        </p:style>
-        <p:txBody>
-          <a:bodyPr rtlCol="0" anchor="ctr"/>
-          <a:lstStyle/>
-          <a:p>
-            <a:pPr algn="ctr"/>
-            <a:r>
-              <a:rPr lang="en-US" sz="2000" dirty="0">
-                <a:solidFill>
-                  <a:schemeClr val="tx1"/>
-                </a:solidFill>
-              </a:rPr>
-              <a:t>2. Distance and Similarity Metrics</a:t>
-            </a:r>
-          </a:p>
-        </p:txBody>
-      </p:sp>
-      <p:sp>
-        <p:nvSpPr>
-          <p:cNvPr id="7" name="Rectangle 6">
-            <a:extLst>
-              <a:ext uri="{FF2B5EF4-FFF2-40B4-BE49-F238E27FC236}">
-                <a16:creationId xmlns:a16="http://schemas.microsoft.com/office/drawing/2014/main" id="{D3C8FAA9-78A8-E1CB-4EE1-8C4AA2B9313B}"/>
-              </a:ext>
-            </a:extLst>
-          </p:cNvPr>
-          <p:cNvSpPr/>
-          <p:nvPr/>
-        </p:nvSpPr>
-        <p:spPr>
-          <a:xfrm>
-            <a:off x="6408020" y="2037908"/>
-            <a:ext cx="2058805" cy="1213337"/>
-          </a:xfrm>
-          <a:prstGeom prst="rect">
-            <a:avLst/>
-          </a:prstGeom>
-          <a:noFill/>
-          <a:ln w="19050">
-            <a:solidFill>
-              <a:schemeClr val="tx1"/>
-            </a:solidFill>
-          </a:ln>
-        </p:spPr>
-        <p:style>
-          <a:lnRef idx="2">
-            <a:schemeClr val="accent1">
-              <a:shade val="15000"/>
-            </a:schemeClr>
-          </a:lnRef>
-          <a:fillRef idx="1">
-            <a:schemeClr val="accent1"/>
-          </a:fillRef>
-          <a:effectRef idx="0">
-            <a:schemeClr val="accent1"/>
-          </a:effectRef>
-          <a:fontRef idx="minor">
-            <a:schemeClr val="lt1"/>
-          </a:fontRef>
-        </p:style>
-        <p:txBody>
-          <a:bodyPr rtlCol="0" anchor="ctr"/>
-          <a:lstStyle/>
-          <a:p>
-            <a:pPr algn="ctr"/>
-            <a:r>
-              <a:rPr lang="en-US" sz="2000" dirty="0">
-                <a:solidFill>
-                  <a:schemeClr val="tx1"/>
-                </a:solidFill>
-              </a:rPr>
-              <a:t>3. Graph Algorithms</a:t>
-            </a:r>
-          </a:p>
-        </p:txBody>
-      </p:sp>
-      <p:sp>
-        <p:nvSpPr>
-          <p:cNvPr id="8" name="Rectangle 7">
-            <a:extLst>
-              <a:ext uri="{FF2B5EF4-FFF2-40B4-BE49-F238E27FC236}">
-                <a16:creationId xmlns:a16="http://schemas.microsoft.com/office/drawing/2014/main" id="{CE6405B6-04C8-5532-70BF-8921F993525F}"/>
-              </a:ext>
-            </a:extLst>
-          </p:cNvPr>
-          <p:cNvSpPr/>
-          <p:nvPr/>
-        </p:nvSpPr>
-        <p:spPr>
-          <a:xfrm>
-            <a:off x="1215334" y="3591320"/>
-            <a:ext cx="2085982" cy="1074244"/>
-          </a:xfrm>
-          <a:prstGeom prst="rect">
-            <a:avLst/>
-          </a:prstGeom>
-          <a:noFill/>
-          <a:ln w="19050">
-            <a:solidFill>
-              <a:schemeClr val="tx1"/>
-            </a:solidFill>
-          </a:ln>
-        </p:spPr>
-        <p:style>
-          <a:lnRef idx="2">
-            <a:schemeClr val="accent1">
-              <a:shade val="15000"/>
-            </a:schemeClr>
-          </a:lnRef>
-          <a:fillRef idx="1">
-            <a:schemeClr val="accent1"/>
-          </a:fillRef>
-          <a:effectRef idx="0">
-            <a:schemeClr val="accent1"/>
-          </a:effectRef>
-          <a:fontRef idx="minor">
-            <a:schemeClr val="lt1"/>
-          </a:fontRef>
-        </p:style>
-        <p:txBody>
-          <a:bodyPr rtlCol="0" anchor="ctr"/>
-          <a:lstStyle/>
-          <a:p>
-            <a:pPr algn="ctr"/>
-            <a:r>
-              <a:rPr lang="en-US" sz="2000" dirty="0">
-                <a:solidFill>
-                  <a:schemeClr val="tx1"/>
-                </a:solidFill>
-              </a:rPr>
-              <a:t>2. Dimensionality Reduction</a:t>
-            </a:r>
-          </a:p>
-        </p:txBody>
-      </p:sp>
-      <p:sp>
-        <p:nvSpPr>
-          <p:cNvPr id="10" name="Left Brace 9">
-            <a:extLst>
-              <a:ext uri="{FF2B5EF4-FFF2-40B4-BE49-F238E27FC236}">
-                <a16:creationId xmlns:a16="http://schemas.microsoft.com/office/drawing/2014/main" id="{4DF74A6A-43A3-532A-27C0-C25A4F8EBA58}"/>
-              </a:ext>
-            </a:extLst>
-          </p:cNvPr>
-          <p:cNvSpPr/>
-          <p:nvPr/>
-        </p:nvSpPr>
-        <p:spPr>
-          <a:xfrm>
-            <a:off x="865089" y="3571535"/>
-            <a:ext cx="172578" cy="1094029"/>
-          </a:xfrm>
-          <a:prstGeom prst="leftBrace">
-            <a:avLst/>
-          </a:prstGeom>
-          <a:ln w="19050">
-            <a:solidFill>
-              <a:schemeClr val="tx1"/>
-            </a:solidFill>
-          </a:ln>
-        </p:spPr>
-        <p:style>
-          <a:lnRef idx="1">
-            <a:schemeClr val="accent1"/>
-          </a:lnRef>
-          <a:fillRef idx="0">
-            <a:schemeClr val="accent1"/>
-          </a:fillRef>
-          <a:effectRef idx="0">
-            <a:schemeClr val="accent1"/>
-          </a:effectRef>
-          <a:fontRef idx="minor">
-            <a:schemeClr val="tx1"/>
-          </a:fontRef>
-        </p:style>
-        <p:txBody>
-          <a:bodyPr rtlCol="0" anchor="ctr"/>
-          <a:lstStyle/>
-          <a:p>
-            <a:pPr algn="ctr"/>
-            <a:endParaRPr lang="en-US"/>
-          </a:p>
-        </p:txBody>
-      </p:sp>
-      <p:sp>
-        <p:nvSpPr>
-          <p:cNvPr id="11" name="TextBox 10">
-            <a:extLst>
-              <a:ext uri="{FF2B5EF4-FFF2-40B4-BE49-F238E27FC236}">
-                <a16:creationId xmlns:a16="http://schemas.microsoft.com/office/drawing/2014/main" id="{5BA2D2F7-0D25-9291-81E1-B95A85194ECD}"/>
-              </a:ext>
-            </a:extLst>
-          </p:cNvPr>
-          <p:cNvSpPr txBox="1"/>
-          <p:nvPr/>
-        </p:nvSpPr>
-        <p:spPr>
-          <a:xfrm rot="16200000">
-            <a:off x="-286998" y="3724841"/>
-            <a:ext cx="1571596" cy="707886"/>
-          </a:xfrm>
-          <a:prstGeom prst="rect">
-            <a:avLst/>
-          </a:prstGeom>
-          <a:noFill/>
-        </p:spPr>
-        <p:txBody>
-          <a:bodyPr wrap="square" rtlCol="0">
-            <a:spAutoFit/>
-          </a:bodyPr>
-          <a:lstStyle/>
-          <a:p>
-            <a:pPr algn="ctr"/>
-            <a:r>
-              <a:rPr lang="en-US" sz="2000" dirty="0"/>
-              <a:t>Core Algorithms</a:t>
-            </a:r>
-          </a:p>
-        </p:txBody>
-      </p:sp>
-      <p:sp>
-        <p:nvSpPr>
-          <p:cNvPr id="12" name="Rectangle 11">
-            <a:extLst>
-              <a:ext uri="{FF2B5EF4-FFF2-40B4-BE49-F238E27FC236}">
-                <a16:creationId xmlns:a16="http://schemas.microsoft.com/office/drawing/2014/main" id="{E4FA9D0A-8D01-9127-4D33-1A9F6023056A}"/>
-              </a:ext>
-            </a:extLst>
-          </p:cNvPr>
-          <p:cNvSpPr/>
-          <p:nvPr/>
-        </p:nvSpPr>
-        <p:spPr>
-          <a:xfrm>
-            <a:off x="1280175" y="5154275"/>
-            <a:ext cx="1961804" cy="1264023"/>
-          </a:xfrm>
-          <a:prstGeom prst="rect">
-            <a:avLst/>
-          </a:prstGeom>
-          <a:noFill/>
-          <a:ln w="19050">
-            <a:solidFill>
-              <a:schemeClr val="tx1"/>
-            </a:solidFill>
-          </a:ln>
-        </p:spPr>
-        <p:style>
-          <a:lnRef idx="2">
-            <a:schemeClr val="accent1">
-              <a:shade val="15000"/>
-            </a:schemeClr>
-          </a:lnRef>
-          <a:fillRef idx="1">
-            <a:schemeClr val="accent1"/>
-          </a:fillRef>
-          <a:effectRef idx="0">
-            <a:schemeClr val="accent1"/>
-          </a:effectRef>
-          <a:fontRef idx="minor">
-            <a:schemeClr val="lt1"/>
-          </a:fontRef>
-        </p:style>
-        <p:txBody>
-          <a:bodyPr rtlCol="0" anchor="ctr"/>
-          <a:lstStyle/>
-          <a:p>
-            <a:pPr algn="ctr"/>
-            <a:r>
-              <a:rPr lang="en-US" sz="2000" dirty="0">
-                <a:solidFill>
-                  <a:schemeClr val="tx1"/>
-                </a:solidFill>
-              </a:rPr>
-              <a:t>3. Social Network Analysis</a:t>
-            </a:r>
-          </a:p>
-        </p:txBody>
-      </p:sp>
-      <p:sp>
-        <p:nvSpPr>
-          <p:cNvPr id="14" name="Left Brace 13">
-            <a:extLst>
-              <a:ext uri="{FF2B5EF4-FFF2-40B4-BE49-F238E27FC236}">
-                <a16:creationId xmlns:a16="http://schemas.microsoft.com/office/drawing/2014/main" id="{109C88A7-820F-F45D-06B9-AC6695899726}"/>
-              </a:ext>
-            </a:extLst>
-          </p:cNvPr>
-          <p:cNvSpPr/>
-          <p:nvPr/>
-        </p:nvSpPr>
-        <p:spPr>
-          <a:xfrm>
-            <a:off x="858563" y="5154275"/>
-            <a:ext cx="164275" cy="1264024"/>
-          </a:xfrm>
-          <a:prstGeom prst="leftBrace">
-            <a:avLst/>
-          </a:prstGeom>
-          <a:ln w="19050">
-            <a:solidFill>
-              <a:schemeClr val="tx1"/>
-            </a:solidFill>
-          </a:ln>
-        </p:spPr>
-        <p:style>
-          <a:lnRef idx="1">
-            <a:schemeClr val="accent1"/>
-          </a:lnRef>
-          <a:fillRef idx="0">
-            <a:schemeClr val="accent1"/>
-          </a:fillRef>
-          <a:effectRef idx="0">
-            <a:schemeClr val="accent1"/>
-          </a:effectRef>
-          <a:fontRef idx="minor">
-            <a:schemeClr val="tx1"/>
-          </a:fontRef>
-        </p:style>
-        <p:txBody>
-          <a:bodyPr rtlCol="0" anchor="ctr"/>
-          <a:lstStyle/>
-          <a:p>
-            <a:pPr algn="ctr"/>
-            <a:endParaRPr lang="en-US"/>
-          </a:p>
-        </p:txBody>
-      </p:sp>
-      <p:sp>
-        <p:nvSpPr>
-          <p:cNvPr id="15" name="TextBox 14">
-            <a:extLst>
-              <a:ext uri="{FF2B5EF4-FFF2-40B4-BE49-F238E27FC236}">
-                <a16:creationId xmlns:a16="http://schemas.microsoft.com/office/drawing/2014/main" id="{189A544B-C64D-C26D-379D-546D41202910}"/>
-              </a:ext>
-            </a:extLst>
-          </p:cNvPr>
-          <p:cNvSpPr txBox="1"/>
-          <p:nvPr/>
-        </p:nvSpPr>
-        <p:spPr>
-          <a:xfrm rot="16200000">
-            <a:off x="-322189" y="5405146"/>
-            <a:ext cx="1571596" cy="707886"/>
-          </a:xfrm>
-          <a:prstGeom prst="rect">
-            <a:avLst/>
-          </a:prstGeom>
-          <a:noFill/>
-        </p:spPr>
-        <p:txBody>
-          <a:bodyPr wrap="square" rtlCol="0">
-            <a:spAutoFit/>
-          </a:bodyPr>
-          <a:lstStyle/>
-          <a:p>
-            <a:pPr algn="ctr"/>
-            <a:r>
-              <a:rPr lang="en-US" sz="2000" dirty="0"/>
-              <a:t>Taks </a:t>
-            </a:r>
-            <a:r>
-              <a:rPr lang="en-US" sz="2000"/>
-              <a:t>Speific </a:t>
-            </a:r>
-            <a:r>
-              <a:rPr lang="en-US" sz="2000" dirty="0"/>
-              <a:t>Algorithms</a:t>
-            </a:r>
-          </a:p>
-        </p:txBody>
-      </p:sp>
-      <p:sp>
-        <p:nvSpPr>
-          <p:cNvPr id="16" name="Rectangle 15">
-            <a:extLst>
-              <a:ext uri="{FF2B5EF4-FFF2-40B4-BE49-F238E27FC236}">
-                <a16:creationId xmlns:a16="http://schemas.microsoft.com/office/drawing/2014/main" id="{F224B6E8-EE62-D057-75D7-D8EF7E5CA802}"/>
-              </a:ext>
-            </a:extLst>
-          </p:cNvPr>
-          <p:cNvSpPr/>
-          <p:nvPr/>
-        </p:nvSpPr>
-        <p:spPr>
-          <a:xfrm>
-            <a:off x="3811677" y="3631085"/>
-            <a:ext cx="2085982" cy="1094029"/>
-          </a:xfrm>
-          <a:prstGeom prst="rect">
-            <a:avLst/>
-          </a:prstGeom>
-          <a:noFill/>
-          <a:ln w="19050">
-            <a:solidFill>
-              <a:schemeClr val="tx1"/>
-            </a:solidFill>
-          </a:ln>
-        </p:spPr>
-        <p:style>
-          <a:lnRef idx="2">
-            <a:schemeClr val="accent1">
-              <a:shade val="15000"/>
-            </a:schemeClr>
-          </a:lnRef>
-          <a:fillRef idx="1">
-            <a:schemeClr val="accent1"/>
-          </a:fillRef>
-          <a:effectRef idx="0">
-            <a:schemeClr val="accent1"/>
-          </a:effectRef>
-          <a:fontRef idx="minor">
-            <a:schemeClr val="lt1"/>
-          </a:fontRef>
-        </p:style>
-        <p:txBody>
-          <a:bodyPr rtlCol="0" anchor="ctr"/>
-          <a:lstStyle/>
-          <a:p>
-            <a:pPr algn="ctr"/>
-            <a:r>
-              <a:rPr lang="en-US" sz="2000" dirty="0">
-                <a:solidFill>
-                  <a:schemeClr val="tx1"/>
-                </a:solidFill>
-              </a:rPr>
-              <a:t>5. Similarity Search and NN Algorithms</a:t>
-            </a:r>
-          </a:p>
-        </p:txBody>
-      </p:sp>
-      <p:sp>
-        <p:nvSpPr>
-          <p:cNvPr id="17" name="Rectangle 16">
-            <a:extLst>
-              <a:ext uri="{FF2B5EF4-FFF2-40B4-BE49-F238E27FC236}">
-                <a16:creationId xmlns:a16="http://schemas.microsoft.com/office/drawing/2014/main" id="{4E8CF822-5DC8-788F-175C-7F3FAAECF89C}"/>
-              </a:ext>
-            </a:extLst>
-          </p:cNvPr>
-          <p:cNvSpPr/>
-          <p:nvPr/>
-        </p:nvSpPr>
-        <p:spPr>
-          <a:xfrm>
-            <a:off x="6408020" y="3640978"/>
-            <a:ext cx="2038966" cy="1123564"/>
-          </a:xfrm>
-          <a:prstGeom prst="rect">
-            <a:avLst/>
-          </a:prstGeom>
-          <a:noFill/>
-          <a:ln w="19050">
-            <a:solidFill>
-              <a:schemeClr val="tx1"/>
-            </a:solidFill>
-          </a:ln>
-        </p:spPr>
-        <p:style>
-          <a:lnRef idx="2">
-            <a:schemeClr val="accent1">
-              <a:shade val="15000"/>
-            </a:schemeClr>
-          </a:lnRef>
-          <a:fillRef idx="1">
-            <a:schemeClr val="accent1"/>
-          </a:fillRef>
-          <a:effectRef idx="0">
-            <a:schemeClr val="accent1"/>
-          </a:effectRef>
-          <a:fontRef idx="minor">
-            <a:schemeClr val="lt1"/>
-          </a:fontRef>
-        </p:style>
-        <p:txBody>
-          <a:bodyPr rtlCol="0" anchor="ctr"/>
-          <a:lstStyle/>
-          <a:p>
-            <a:pPr algn="ctr"/>
-            <a:r>
-              <a:rPr lang="en-US" sz="2000" dirty="0">
-                <a:solidFill>
-                  <a:schemeClr val="tx1"/>
-                </a:solidFill>
-              </a:rPr>
-              <a:t>4. Online Algorithms</a:t>
-            </a:r>
-          </a:p>
-        </p:txBody>
-      </p:sp>
-      <p:sp>
-        <p:nvSpPr>
-          <p:cNvPr id="18" name="Rectangle 17">
-            <a:extLst>
-              <a:ext uri="{FF2B5EF4-FFF2-40B4-BE49-F238E27FC236}">
-                <a16:creationId xmlns:a16="http://schemas.microsoft.com/office/drawing/2014/main" id="{260E78D0-AC72-D4B1-530C-9DBE1AAF53B3}"/>
-              </a:ext>
-            </a:extLst>
-          </p:cNvPr>
-          <p:cNvSpPr/>
-          <p:nvPr/>
-        </p:nvSpPr>
-        <p:spPr>
-          <a:xfrm>
-            <a:off x="8985680" y="5155489"/>
-            <a:ext cx="1894527" cy="1262809"/>
-          </a:xfrm>
-          <a:prstGeom prst="rect">
-            <a:avLst/>
-          </a:prstGeom>
-          <a:noFill/>
-          <a:ln w="19050">
-            <a:solidFill>
-              <a:schemeClr val="tx1"/>
-            </a:solidFill>
-          </a:ln>
-        </p:spPr>
-        <p:style>
-          <a:lnRef idx="2">
-            <a:schemeClr val="accent1">
-              <a:shade val="15000"/>
-            </a:schemeClr>
-          </a:lnRef>
-          <a:fillRef idx="1">
-            <a:schemeClr val="accent1"/>
-          </a:fillRef>
-          <a:effectRef idx="0">
-            <a:schemeClr val="accent1"/>
-          </a:effectRef>
-          <a:fontRef idx="minor">
-            <a:schemeClr val="lt1"/>
-          </a:fontRef>
-        </p:style>
-        <p:txBody>
-          <a:bodyPr rtlCol="0" anchor="ctr"/>
-          <a:lstStyle/>
-          <a:p>
-            <a:pPr algn="ctr"/>
-            <a:r>
-              <a:rPr lang="en-US" sz="2000" dirty="0">
-                <a:solidFill>
-                  <a:schemeClr val="tx1"/>
-                </a:solidFill>
-              </a:rPr>
-              <a:t>8. Clustering Algorithms</a:t>
-            </a:r>
-          </a:p>
-        </p:txBody>
-      </p:sp>
-      <p:sp>
-        <p:nvSpPr>
-          <p:cNvPr id="20" name="Rectangle 19">
-            <a:extLst>
-              <a:ext uri="{FF2B5EF4-FFF2-40B4-BE49-F238E27FC236}">
-                <a16:creationId xmlns:a16="http://schemas.microsoft.com/office/drawing/2014/main" id="{1D5B69D8-949F-A5E1-038A-D7B3D5FE6133}"/>
-              </a:ext>
-            </a:extLst>
-          </p:cNvPr>
-          <p:cNvSpPr/>
-          <p:nvPr/>
-        </p:nvSpPr>
-        <p:spPr>
-          <a:xfrm>
-            <a:off x="6470354" y="5154275"/>
-            <a:ext cx="2016833" cy="1245689"/>
-          </a:xfrm>
-          <a:prstGeom prst="rect">
-            <a:avLst/>
-          </a:prstGeom>
-          <a:noFill/>
-          <a:ln w="19050">
-            <a:solidFill>
-              <a:schemeClr val="tx1"/>
-            </a:solidFill>
-          </a:ln>
-        </p:spPr>
-        <p:style>
-          <a:lnRef idx="2">
-            <a:schemeClr val="accent1">
-              <a:shade val="15000"/>
-            </a:schemeClr>
-          </a:lnRef>
-          <a:fillRef idx="1">
-            <a:schemeClr val="accent1"/>
-          </a:fillRef>
-          <a:effectRef idx="0">
-            <a:schemeClr val="accent1"/>
-          </a:effectRef>
-          <a:fontRef idx="minor">
-            <a:schemeClr val="lt1"/>
-          </a:fontRef>
-        </p:style>
-        <p:txBody>
-          <a:bodyPr rtlCol="0" anchor="ctr"/>
-          <a:lstStyle/>
-          <a:p>
-            <a:pPr algn="ctr"/>
-            <a:r>
-              <a:rPr lang="en-US" sz="2000" dirty="0">
-                <a:solidFill>
-                  <a:schemeClr val="tx1"/>
-                </a:solidFill>
-              </a:rPr>
-              <a:t>7. Recommender  Algorithms</a:t>
-            </a:r>
-          </a:p>
-        </p:txBody>
-      </p:sp>
-      <p:sp>
-        <p:nvSpPr>
-          <p:cNvPr id="21" name="Rectangle 20">
-            <a:extLst>
-              <a:ext uri="{FF2B5EF4-FFF2-40B4-BE49-F238E27FC236}">
-                <a16:creationId xmlns:a16="http://schemas.microsoft.com/office/drawing/2014/main" id="{66940847-DA8B-171F-5B55-F8479F15B7DD}"/>
-              </a:ext>
-            </a:extLst>
-          </p:cNvPr>
-          <p:cNvSpPr/>
-          <p:nvPr/>
-        </p:nvSpPr>
-        <p:spPr>
-          <a:xfrm>
-            <a:off x="3760595" y="5172609"/>
-            <a:ext cx="2085981" cy="1245689"/>
-          </a:xfrm>
-          <a:prstGeom prst="rect">
-            <a:avLst/>
-          </a:prstGeom>
-          <a:noFill/>
-          <a:ln w="19050">
-            <a:solidFill>
-              <a:schemeClr val="tx1"/>
-            </a:solidFill>
-          </a:ln>
-        </p:spPr>
-        <p:style>
-          <a:lnRef idx="2">
-            <a:schemeClr val="accent1">
-              <a:shade val="15000"/>
-            </a:schemeClr>
-          </a:lnRef>
-          <a:fillRef idx="1">
-            <a:schemeClr val="accent1"/>
-          </a:fillRef>
-          <a:effectRef idx="0">
-            <a:schemeClr val="accent1"/>
-          </a:effectRef>
-          <a:fontRef idx="minor">
-            <a:schemeClr val="lt1"/>
-          </a:fontRef>
-        </p:style>
-        <p:txBody>
-          <a:bodyPr rtlCol="0" anchor="ctr"/>
-          <a:lstStyle/>
-          <a:p>
-            <a:pPr algn="ctr"/>
-            <a:r>
-              <a:rPr lang="en-US" sz="2000" dirty="0">
-                <a:solidFill>
-                  <a:schemeClr val="tx1"/>
-                </a:solidFill>
-              </a:rPr>
-              <a:t>6. Web/Document ranking and search</a:t>
-            </a:r>
-          </a:p>
-        </p:txBody>
-      </p:sp>
-    </p:spTree>
-    <p:extLst>
-      <p:ext uri="{BB962C8B-B14F-4D97-AF65-F5344CB8AC3E}">
-        <p14:creationId xmlns:p14="http://schemas.microsoft.com/office/powerpoint/2010/main" val="461663716"/>
-      </p:ext>
-    </p:extLst>
-  </p:cSld>
-  <p:clrMapOvr>
-    <a:masterClrMapping/>
-  </p:clrMapOvr>
-</p:sld>
-</file>
-
 <file path=ppt/slides/slide17.xml><?xml version="1.0" encoding="utf-8"?>
 <p:sld xmlns:a="http://schemas.openxmlformats.org/drawingml/2006/main" xmlns:r="http://schemas.openxmlformats.org/officeDocument/2006/relationships" xmlns:p="http://schemas.openxmlformats.org/presentationml/2006/main" show="0">
   <p:cSld>
@@ -15993,6 +16732,1143 @@
   <p:cSld>
     <p:spTree>
       <p:nvGrpSpPr>
+        <p:cNvPr id="1" name="">
+          <a:extLst>
+            <a:ext uri="{FF2B5EF4-FFF2-40B4-BE49-F238E27FC236}">
+              <a16:creationId xmlns:a16="http://schemas.microsoft.com/office/drawing/2014/main" id="{ED7A9242-6F04-0255-B6E4-003EE805CF99}"/>
+            </a:ext>
+          </a:extLst>
+        </p:cNvPr>
+        <p:cNvGrpSpPr/>
+        <p:nvPr/>
+      </p:nvGrpSpPr>
+      <p:grpSpPr>
+        <a:xfrm>
+          <a:off x="0" y="0"/>
+          <a:ext cx="0" cy="0"/>
+          <a:chOff x="0" y="0"/>
+          <a:chExt cx="0" cy="0"/>
+        </a:xfrm>
+      </p:grpSpPr>
+      <p:sp>
+        <p:nvSpPr>
+          <p:cNvPr id="2" name="Title 1">
+            <a:extLst>
+              <a:ext uri="{FF2B5EF4-FFF2-40B4-BE49-F238E27FC236}">
+                <a16:creationId xmlns:a16="http://schemas.microsoft.com/office/drawing/2014/main" id="{97C0B4EF-F7E3-7E82-AE6D-66E8ED303FDB}"/>
+              </a:ext>
+            </a:extLst>
+          </p:cNvPr>
+          <p:cNvSpPr>
+            <a:spLocks noGrp="1"/>
+          </p:cNvSpPr>
+          <p:nvPr>
+            <p:ph type="title"/>
+          </p:nvPr>
+        </p:nvSpPr>
+        <p:spPr>
+          <a:xfrm>
+            <a:off x="916187" y="249623"/>
+            <a:ext cx="10515600" cy="662230"/>
+          </a:xfrm>
+        </p:spPr>
+        <p:txBody>
+          <a:bodyPr>
+            <a:normAutofit fontScale="90000"/>
+          </a:bodyPr>
+          <a:lstStyle/>
+          <a:p>
+            <a:r>
+              <a:rPr lang="en-US" sz="4900" dirty="0">
+                <a:latin typeface="+mn-lt"/>
+              </a:rPr>
+              <a:t>Main topics in this course</a:t>
+            </a:r>
+            <a:br>
+              <a:rPr lang="en-US" sz="4000" dirty="0">
+                <a:latin typeface="+mn-lt"/>
+              </a:rPr>
+            </a:br>
+            <a:endParaRPr lang="en-US" sz="4000" dirty="0">
+              <a:latin typeface="+mn-lt"/>
+            </a:endParaRPr>
+          </a:p>
+        </p:txBody>
+      </p:sp>
+      <p:sp>
+        <p:nvSpPr>
+          <p:cNvPr id="3" name="Left Brace 2">
+            <a:extLst>
+              <a:ext uri="{FF2B5EF4-FFF2-40B4-BE49-F238E27FC236}">
+                <a16:creationId xmlns:a16="http://schemas.microsoft.com/office/drawing/2014/main" id="{B43E0B5E-B811-4BBC-CEDF-97FC2AAC1766}"/>
+              </a:ext>
+            </a:extLst>
+          </p:cNvPr>
+          <p:cNvSpPr/>
+          <p:nvPr/>
+        </p:nvSpPr>
+        <p:spPr>
+          <a:xfrm>
+            <a:off x="756889" y="1964356"/>
+            <a:ext cx="225209" cy="1273261"/>
+          </a:xfrm>
+          <a:prstGeom prst="leftBrace">
+            <a:avLst/>
+          </a:prstGeom>
+          <a:ln w="19050">
+            <a:solidFill>
+              <a:schemeClr val="tx1"/>
+            </a:solidFill>
+          </a:ln>
+        </p:spPr>
+        <p:style>
+          <a:lnRef idx="1">
+            <a:schemeClr val="accent1"/>
+          </a:lnRef>
+          <a:fillRef idx="0">
+            <a:schemeClr val="accent1"/>
+          </a:fillRef>
+          <a:effectRef idx="0">
+            <a:schemeClr val="accent1"/>
+          </a:effectRef>
+          <a:fontRef idx="minor">
+            <a:schemeClr val="tx1"/>
+          </a:fontRef>
+        </p:style>
+        <p:txBody>
+          <a:bodyPr rtlCol="0" anchor="ctr"/>
+          <a:lstStyle/>
+          <a:p>
+            <a:pPr algn="ctr"/>
+            <a:endParaRPr lang="en-US"/>
+          </a:p>
+        </p:txBody>
+      </p:sp>
+      <p:sp>
+        <p:nvSpPr>
+          <p:cNvPr id="4" name="TextBox 3">
+            <a:extLst>
+              <a:ext uri="{FF2B5EF4-FFF2-40B4-BE49-F238E27FC236}">
+                <a16:creationId xmlns:a16="http://schemas.microsoft.com/office/drawing/2014/main" id="{77BB0425-4708-2E61-70FB-876C788A79E2}"/>
+              </a:ext>
+            </a:extLst>
+          </p:cNvPr>
+          <p:cNvSpPr txBox="1"/>
+          <p:nvPr/>
+        </p:nvSpPr>
+        <p:spPr>
+          <a:xfrm rot="16200000">
+            <a:off x="-238228" y="2251765"/>
+            <a:ext cx="1571596" cy="400110"/>
+          </a:xfrm>
+          <a:prstGeom prst="rect">
+            <a:avLst/>
+          </a:prstGeom>
+          <a:noFill/>
+        </p:spPr>
+        <p:txBody>
+          <a:bodyPr wrap="square" rtlCol="0">
+            <a:spAutoFit/>
+          </a:bodyPr>
+          <a:lstStyle/>
+          <a:p>
+            <a:pPr algn="ctr"/>
+            <a:r>
+              <a:rPr lang="en-US" sz="2000" dirty="0"/>
+              <a:t>Foundations </a:t>
+            </a:r>
+          </a:p>
+        </p:txBody>
+      </p:sp>
+      <p:sp>
+        <p:nvSpPr>
+          <p:cNvPr id="5" name="Rectangle 4">
+            <a:extLst>
+              <a:ext uri="{FF2B5EF4-FFF2-40B4-BE49-F238E27FC236}">
+                <a16:creationId xmlns:a16="http://schemas.microsoft.com/office/drawing/2014/main" id="{DAA42CDB-2EBC-28B2-6456-04829EC7EF48}"/>
+              </a:ext>
+            </a:extLst>
+          </p:cNvPr>
+          <p:cNvSpPr/>
+          <p:nvPr/>
+        </p:nvSpPr>
+        <p:spPr>
+          <a:xfrm>
+            <a:off x="1259812" y="1983695"/>
+            <a:ext cx="1951346" cy="1253922"/>
+          </a:xfrm>
+          <a:prstGeom prst="rect">
+            <a:avLst/>
+          </a:prstGeom>
+          <a:noFill/>
+          <a:ln w="38100">
+            <a:solidFill>
+              <a:srgbClr val="C00000"/>
+            </a:solidFill>
+          </a:ln>
+        </p:spPr>
+        <p:style>
+          <a:lnRef idx="2">
+            <a:schemeClr val="accent1">
+              <a:shade val="15000"/>
+            </a:schemeClr>
+          </a:lnRef>
+          <a:fillRef idx="1">
+            <a:schemeClr val="accent1"/>
+          </a:fillRef>
+          <a:effectRef idx="0">
+            <a:schemeClr val="accent1"/>
+          </a:effectRef>
+          <a:fontRef idx="minor">
+            <a:schemeClr val="lt1"/>
+          </a:fontRef>
+        </p:style>
+        <p:txBody>
+          <a:bodyPr rtlCol="0" anchor="ctr"/>
+          <a:lstStyle/>
+          <a:p>
+            <a:pPr algn="ctr"/>
+            <a:r>
+              <a:rPr lang="en-US" sz="2000" dirty="0">
+                <a:solidFill>
+                  <a:schemeClr val="tx1"/>
+                </a:solidFill>
+              </a:rPr>
+              <a:t>1. Hashing and K-V pair management </a:t>
+            </a:r>
+          </a:p>
+        </p:txBody>
+      </p:sp>
+      <p:sp>
+        <p:nvSpPr>
+          <p:cNvPr id="6" name="Rectangle 5">
+            <a:extLst>
+              <a:ext uri="{FF2B5EF4-FFF2-40B4-BE49-F238E27FC236}">
+                <a16:creationId xmlns:a16="http://schemas.microsoft.com/office/drawing/2014/main" id="{F5C7F060-78DB-AC42-6BFD-05BD50198440}"/>
+              </a:ext>
+            </a:extLst>
+          </p:cNvPr>
+          <p:cNvSpPr/>
+          <p:nvPr/>
+        </p:nvSpPr>
+        <p:spPr>
+          <a:xfrm>
+            <a:off x="3740233" y="2021536"/>
+            <a:ext cx="2157426" cy="1178239"/>
+          </a:xfrm>
+          <a:prstGeom prst="rect">
+            <a:avLst/>
+          </a:prstGeom>
+          <a:noFill/>
+          <a:ln w="19050">
+            <a:solidFill>
+              <a:schemeClr val="tx1"/>
+            </a:solidFill>
+          </a:ln>
+        </p:spPr>
+        <p:style>
+          <a:lnRef idx="2">
+            <a:schemeClr val="accent1">
+              <a:shade val="15000"/>
+            </a:schemeClr>
+          </a:lnRef>
+          <a:fillRef idx="1">
+            <a:schemeClr val="accent1"/>
+          </a:fillRef>
+          <a:effectRef idx="0">
+            <a:schemeClr val="accent1"/>
+          </a:effectRef>
+          <a:fontRef idx="minor">
+            <a:schemeClr val="lt1"/>
+          </a:fontRef>
+        </p:style>
+        <p:txBody>
+          <a:bodyPr rtlCol="0" anchor="ctr"/>
+          <a:lstStyle/>
+          <a:p>
+            <a:pPr algn="ctr"/>
+            <a:r>
+              <a:rPr lang="en-US" sz="2000" dirty="0">
+                <a:solidFill>
+                  <a:schemeClr val="tx1"/>
+                </a:solidFill>
+              </a:rPr>
+              <a:t>2. Distance and Similarity Metrics</a:t>
+            </a:r>
+          </a:p>
+        </p:txBody>
+      </p:sp>
+      <p:sp>
+        <p:nvSpPr>
+          <p:cNvPr id="7" name="Rectangle 6">
+            <a:extLst>
+              <a:ext uri="{FF2B5EF4-FFF2-40B4-BE49-F238E27FC236}">
+                <a16:creationId xmlns:a16="http://schemas.microsoft.com/office/drawing/2014/main" id="{F20B3888-4A09-E889-C7DE-5ECE32C17693}"/>
+              </a:ext>
+            </a:extLst>
+          </p:cNvPr>
+          <p:cNvSpPr/>
+          <p:nvPr/>
+        </p:nvSpPr>
+        <p:spPr>
+          <a:xfrm>
+            <a:off x="6408020" y="2037908"/>
+            <a:ext cx="2058805" cy="1213337"/>
+          </a:xfrm>
+          <a:prstGeom prst="rect">
+            <a:avLst/>
+          </a:prstGeom>
+          <a:noFill/>
+          <a:ln w="19050">
+            <a:solidFill>
+              <a:schemeClr val="tx1"/>
+            </a:solidFill>
+          </a:ln>
+        </p:spPr>
+        <p:style>
+          <a:lnRef idx="2">
+            <a:schemeClr val="accent1">
+              <a:shade val="15000"/>
+            </a:schemeClr>
+          </a:lnRef>
+          <a:fillRef idx="1">
+            <a:schemeClr val="accent1"/>
+          </a:fillRef>
+          <a:effectRef idx="0">
+            <a:schemeClr val="accent1"/>
+          </a:effectRef>
+          <a:fontRef idx="minor">
+            <a:schemeClr val="lt1"/>
+          </a:fontRef>
+        </p:style>
+        <p:txBody>
+          <a:bodyPr rtlCol="0" anchor="ctr"/>
+          <a:lstStyle/>
+          <a:p>
+            <a:pPr algn="ctr"/>
+            <a:r>
+              <a:rPr lang="en-US" sz="2000" dirty="0">
+                <a:solidFill>
+                  <a:schemeClr val="tx1"/>
+                </a:solidFill>
+              </a:rPr>
+              <a:t>3. Graph Algorithms</a:t>
+            </a:r>
+          </a:p>
+        </p:txBody>
+      </p:sp>
+      <p:sp>
+        <p:nvSpPr>
+          <p:cNvPr id="8" name="Rectangle 7">
+            <a:extLst>
+              <a:ext uri="{FF2B5EF4-FFF2-40B4-BE49-F238E27FC236}">
+                <a16:creationId xmlns:a16="http://schemas.microsoft.com/office/drawing/2014/main" id="{A234FC6E-068F-82BA-D948-0872902BF117}"/>
+              </a:ext>
+            </a:extLst>
+          </p:cNvPr>
+          <p:cNvSpPr/>
+          <p:nvPr/>
+        </p:nvSpPr>
+        <p:spPr>
+          <a:xfrm>
+            <a:off x="1215334" y="3591320"/>
+            <a:ext cx="2085982" cy="1074244"/>
+          </a:xfrm>
+          <a:prstGeom prst="rect">
+            <a:avLst/>
+          </a:prstGeom>
+          <a:noFill/>
+          <a:ln w="19050">
+            <a:solidFill>
+              <a:schemeClr val="tx1"/>
+            </a:solidFill>
+          </a:ln>
+        </p:spPr>
+        <p:style>
+          <a:lnRef idx="2">
+            <a:schemeClr val="accent1">
+              <a:shade val="15000"/>
+            </a:schemeClr>
+          </a:lnRef>
+          <a:fillRef idx="1">
+            <a:schemeClr val="accent1"/>
+          </a:fillRef>
+          <a:effectRef idx="0">
+            <a:schemeClr val="accent1"/>
+          </a:effectRef>
+          <a:fontRef idx="minor">
+            <a:schemeClr val="lt1"/>
+          </a:fontRef>
+        </p:style>
+        <p:txBody>
+          <a:bodyPr rtlCol="0" anchor="ctr"/>
+          <a:lstStyle/>
+          <a:p>
+            <a:pPr algn="ctr"/>
+            <a:r>
+              <a:rPr lang="en-US" sz="2000" dirty="0">
+                <a:solidFill>
+                  <a:schemeClr val="tx1"/>
+                </a:solidFill>
+              </a:rPr>
+              <a:t>2. Dimensionality Reduction</a:t>
+            </a:r>
+          </a:p>
+        </p:txBody>
+      </p:sp>
+      <p:sp>
+        <p:nvSpPr>
+          <p:cNvPr id="10" name="Left Brace 9">
+            <a:extLst>
+              <a:ext uri="{FF2B5EF4-FFF2-40B4-BE49-F238E27FC236}">
+                <a16:creationId xmlns:a16="http://schemas.microsoft.com/office/drawing/2014/main" id="{6B807C0C-B6B7-55FC-4A73-937C1A517C09}"/>
+              </a:ext>
+            </a:extLst>
+          </p:cNvPr>
+          <p:cNvSpPr/>
+          <p:nvPr/>
+        </p:nvSpPr>
+        <p:spPr>
+          <a:xfrm>
+            <a:off x="865089" y="3571535"/>
+            <a:ext cx="172578" cy="1094029"/>
+          </a:xfrm>
+          <a:prstGeom prst="leftBrace">
+            <a:avLst/>
+          </a:prstGeom>
+          <a:ln w="19050">
+            <a:solidFill>
+              <a:schemeClr val="tx1"/>
+            </a:solidFill>
+          </a:ln>
+        </p:spPr>
+        <p:style>
+          <a:lnRef idx="1">
+            <a:schemeClr val="accent1"/>
+          </a:lnRef>
+          <a:fillRef idx="0">
+            <a:schemeClr val="accent1"/>
+          </a:fillRef>
+          <a:effectRef idx="0">
+            <a:schemeClr val="accent1"/>
+          </a:effectRef>
+          <a:fontRef idx="minor">
+            <a:schemeClr val="tx1"/>
+          </a:fontRef>
+        </p:style>
+        <p:txBody>
+          <a:bodyPr rtlCol="0" anchor="ctr"/>
+          <a:lstStyle/>
+          <a:p>
+            <a:pPr algn="ctr"/>
+            <a:endParaRPr lang="en-US"/>
+          </a:p>
+        </p:txBody>
+      </p:sp>
+      <p:sp>
+        <p:nvSpPr>
+          <p:cNvPr id="11" name="TextBox 10">
+            <a:extLst>
+              <a:ext uri="{FF2B5EF4-FFF2-40B4-BE49-F238E27FC236}">
+                <a16:creationId xmlns:a16="http://schemas.microsoft.com/office/drawing/2014/main" id="{CD0513D5-3561-EC84-E71B-4706879A90A1}"/>
+              </a:ext>
+            </a:extLst>
+          </p:cNvPr>
+          <p:cNvSpPr txBox="1"/>
+          <p:nvPr/>
+        </p:nvSpPr>
+        <p:spPr>
+          <a:xfrm rot="16200000">
+            <a:off x="-286998" y="3724841"/>
+            <a:ext cx="1571596" cy="707886"/>
+          </a:xfrm>
+          <a:prstGeom prst="rect">
+            <a:avLst/>
+          </a:prstGeom>
+          <a:noFill/>
+        </p:spPr>
+        <p:txBody>
+          <a:bodyPr wrap="square" rtlCol="0">
+            <a:spAutoFit/>
+          </a:bodyPr>
+          <a:lstStyle/>
+          <a:p>
+            <a:pPr algn="ctr"/>
+            <a:r>
+              <a:rPr lang="en-US" sz="2000" dirty="0"/>
+              <a:t>Core Algorithms</a:t>
+            </a:r>
+          </a:p>
+        </p:txBody>
+      </p:sp>
+      <p:sp>
+        <p:nvSpPr>
+          <p:cNvPr id="12" name="Rectangle 11">
+            <a:extLst>
+              <a:ext uri="{FF2B5EF4-FFF2-40B4-BE49-F238E27FC236}">
+                <a16:creationId xmlns:a16="http://schemas.microsoft.com/office/drawing/2014/main" id="{B042D63B-E913-3364-5865-54C574ED22CD}"/>
+              </a:ext>
+            </a:extLst>
+          </p:cNvPr>
+          <p:cNvSpPr/>
+          <p:nvPr/>
+        </p:nvSpPr>
+        <p:spPr>
+          <a:xfrm>
+            <a:off x="1280175" y="5154275"/>
+            <a:ext cx="1961804" cy="1264023"/>
+          </a:xfrm>
+          <a:prstGeom prst="rect">
+            <a:avLst/>
+          </a:prstGeom>
+          <a:noFill/>
+          <a:ln w="19050">
+            <a:solidFill>
+              <a:schemeClr val="tx1"/>
+            </a:solidFill>
+          </a:ln>
+        </p:spPr>
+        <p:style>
+          <a:lnRef idx="2">
+            <a:schemeClr val="accent1">
+              <a:shade val="15000"/>
+            </a:schemeClr>
+          </a:lnRef>
+          <a:fillRef idx="1">
+            <a:schemeClr val="accent1"/>
+          </a:fillRef>
+          <a:effectRef idx="0">
+            <a:schemeClr val="accent1"/>
+          </a:effectRef>
+          <a:fontRef idx="minor">
+            <a:schemeClr val="lt1"/>
+          </a:fontRef>
+        </p:style>
+        <p:txBody>
+          <a:bodyPr rtlCol="0" anchor="ctr"/>
+          <a:lstStyle/>
+          <a:p>
+            <a:pPr algn="ctr"/>
+            <a:r>
+              <a:rPr lang="en-US" sz="2000" dirty="0">
+                <a:solidFill>
+                  <a:schemeClr val="tx1"/>
+                </a:solidFill>
+              </a:rPr>
+              <a:t>3. Social Network Analysis</a:t>
+            </a:r>
+          </a:p>
+        </p:txBody>
+      </p:sp>
+      <p:sp>
+        <p:nvSpPr>
+          <p:cNvPr id="14" name="Left Brace 13">
+            <a:extLst>
+              <a:ext uri="{FF2B5EF4-FFF2-40B4-BE49-F238E27FC236}">
+                <a16:creationId xmlns:a16="http://schemas.microsoft.com/office/drawing/2014/main" id="{35E5DEDA-5FFD-FC06-5888-EB758D78C155}"/>
+              </a:ext>
+            </a:extLst>
+          </p:cNvPr>
+          <p:cNvSpPr/>
+          <p:nvPr/>
+        </p:nvSpPr>
+        <p:spPr>
+          <a:xfrm>
+            <a:off x="858563" y="5154275"/>
+            <a:ext cx="164275" cy="1264024"/>
+          </a:xfrm>
+          <a:prstGeom prst="leftBrace">
+            <a:avLst/>
+          </a:prstGeom>
+          <a:ln w="19050">
+            <a:solidFill>
+              <a:schemeClr val="tx1"/>
+            </a:solidFill>
+          </a:ln>
+        </p:spPr>
+        <p:style>
+          <a:lnRef idx="1">
+            <a:schemeClr val="accent1"/>
+          </a:lnRef>
+          <a:fillRef idx="0">
+            <a:schemeClr val="accent1"/>
+          </a:fillRef>
+          <a:effectRef idx="0">
+            <a:schemeClr val="accent1"/>
+          </a:effectRef>
+          <a:fontRef idx="minor">
+            <a:schemeClr val="tx1"/>
+          </a:fontRef>
+        </p:style>
+        <p:txBody>
+          <a:bodyPr rtlCol="0" anchor="ctr"/>
+          <a:lstStyle/>
+          <a:p>
+            <a:pPr algn="ctr"/>
+            <a:endParaRPr lang="en-US"/>
+          </a:p>
+        </p:txBody>
+      </p:sp>
+      <p:sp>
+        <p:nvSpPr>
+          <p:cNvPr id="15" name="TextBox 14">
+            <a:extLst>
+              <a:ext uri="{FF2B5EF4-FFF2-40B4-BE49-F238E27FC236}">
+                <a16:creationId xmlns:a16="http://schemas.microsoft.com/office/drawing/2014/main" id="{3061D0C7-FA6D-00D7-CF2A-B875D7CF029B}"/>
+              </a:ext>
+            </a:extLst>
+          </p:cNvPr>
+          <p:cNvSpPr txBox="1"/>
+          <p:nvPr/>
+        </p:nvSpPr>
+        <p:spPr>
+          <a:xfrm rot="16200000">
+            <a:off x="-322189" y="5405146"/>
+            <a:ext cx="1571596" cy="707886"/>
+          </a:xfrm>
+          <a:prstGeom prst="rect">
+            <a:avLst/>
+          </a:prstGeom>
+          <a:noFill/>
+        </p:spPr>
+        <p:txBody>
+          <a:bodyPr wrap="square" rtlCol="0">
+            <a:spAutoFit/>
+          </a:bodyPr>
+          <a:lstStyle/>
+          <a:p>
+            <a:pPr algn="ctr"/>
+            <a:r>
+              <a:rPr lang="en-US" sz="2000" dirty="0"/>
+              <a:t>Taks </a:t>
+            </a:r>
+            <a:r>
+              <a:rPr lang="en-US" sz="2000"/>
+              <a:t>Speific </a:t>
+            </a:r>
+            <a:r>
+              <a:rPr lang="en-US" sz="2000" dirty="0"/>
+              <a:t>Algorithms</a:t>
+            </a:r>
+          </a:p>
+        </p:txBody>
+      </p:sp>
+      <p:sp>
+        <p:nvSpPr>
+          <p:cNvPr id="16" name="Rectangle 15">
+            <a:extLst>
+              <a:ext uri="{FF2B5EF4-FFF2-40B4-BE49-F238E27FC236}">
+                <a16:creationId xmlns:a16="http://schemas.microsoft.com/office/drawing/2014/main" id="{8BCB2792-FBF9-D76F-A378-7E6596D54E0F}"/>
+              </a:ext>
+            </a:extLst>
+          </p:cNvPr>
+          <p:cNvSpPr/>
+          <p:nvPr/>
+        </p:nvSpPr>
+        <p:spPr>
+          <a:xfrm>
+            <a:off x="3811677" y="3631085"/>
+            <a:ext cx="2085982" cy="1094029"/>
+          </a:xfrm>
+          <a:prstGeom prst="rect">
+            <a:avLst/>
+          </a:prstGeom>
+          <a:noFill/>
+          <a:ln w="19050">
+            <a:solidFill>
+              <a:schemeClr val="tx1"/>
+            </a:solidFill>
+          </a:ln>
+        </p:spPr>
+        <p:style>
+          <a:lnRef idx="2">
+            <a:schemeClr val="accent1">
+              <a:shade val="15000"/>
+            </a:schemeClr>
+          </a:lnRef>
+          <a:fillRef idx="1">
+            <a:schemeClr val="accent1"/>
+          </a:fillRef>
+          <a:effectRef idx="0">
+            <a:schemeClr val="accent1"/>
+          </a:effectRef>
+          <a:fontRef idx="minor">
+            <a:schemeClr val="lt1"/>
+          </a:fontRef>
+        </p:style>
+        <p:txBody>
+          <a:bodyPr rtlCol="0" anchor="ctr"/>
+          <a:lstStyle/>
+          <a:p>
+            <a:pPr algn="ctr"/>
+            <a:r>
+              <a:rPr lang="en-US" sz="2000" dirty="0">
+                <a:solidFill>
+                  <a:schemeClr val="tx1"/>
+                </a:solidFill>
+              </a:rPr>
+              <a:t>5. Similarity Search and NN Algorithms</a:t>
+            </a:r>
+          </a:p>
+        </p:txBody>
+      </p:sp>
+      <p:sp>
+        <p:nvSpPr>
+          <p:cNvPr id="17" name="Rectangle 16">
+            <a:extLst>
+              <a:ext uri="{FF2B5EF4-FFF2-40B4-BE49-F238E27FC236}">
+                <a16:creationId xmlns:a16="http://schemas.microsoft.com/office/drawing/2014/main" id="{9A8CAD2D-EC71-A5F3-683F-41BF65DE958F}"/>
+              </a:ext>
+            </a:extLst>
+          </p:cNvPr>
+          <p:cNvSpPr/>
+          <p:nvPr/>
+        </p:nvSpPr>
+        <p:spPr>
+          <a:xfrm>
+            <a:off x="6408020" y="3640978"/>
+            <a:ext cx="2038966" cy="1123564"/>
+          </a:xfrm>
+          <a:prstGeom prst="rect">
+            <a:avLst/>
+          </a:prstGeom>
+          <a:noFill/>
+          <a:ln w="19050">
+            <a:solidFill>
+              <a:schemeClr val="tx1"/>
+            </a:solidFill>
+          </a:ln>
+        </p:spPr>
+        <p:style>
+          <a:lnRef idx="2">
+            <a:schemeClr val="accent1">
+              <a:shade val="15000"/>
+            </a:schemeClr>
+          </a:lnRef>
+          <a:fillRef idx="1">
+            <a:schemeClr val="accent1"/>
+          </a:fillRef>
+          <a:effectRef idx="0">
+            <a:schemeClr val="accent1"/>
+          </a:effectRef>
+          <a:fontRef idx="minor">
+            <a:schemeClr val="lt1"/>
+          </a:fontRef>
+        </p:style>
+        <p:txBody>
+          <a:bodyPr rtlCol="0" anchor="ctr"/>
+          <a:lstStyle/>
+          <a:p>
+            <a:pPr algn="ctr"/>
+            <a:r>
+              <a:rPr lang="en-US" sz="2000" dirty="0">
+                <a:solidFill>
+                  <a:schemeClr val="tx1"/>
+                </a:solidFill>
+              </a:rPr>
+              <a:t>4. Online Algorithms</a:t>
+            </a:r>
+          </a:p>
+        </p:txBody>
+      </p:sp>
+      <p:sp>
+        <p:nvSpPr>
+          <p:cNvPr id="18" name="Rectangle 17">
+            <a:extLst>
+              <a:ext uri="{FF2B5EF4-FFF2-40B4-BE49-F238E27FC236}">
+                <a16:creationId xmlns:a16="http://schemas.microsoft.com/office/drawing/2014/main" id="{67EB3589-9BBE-D38D-C09A-C7A36757F4E1}"/>
+              </a:ext>
+            </a:extLst>
+          </p:cNvPr>
+          <p:cNvSpPr/>
+          <p:nvPr/>
+        </p:nvSpPr>
+        <p:spPr>
+          <a:xfrm>
+            <a:off x="8985680" y="5155489"/>
+            <a:ext cx="1894527" cy="1262809"/>
+          </a:xfrm>
+          <a:prstGeom prst="rect">
+            <a:avLst/>
+          </a:prstGeom>
+          <a:noFill/>
+          <a:ln w="19050">
+            <a:solidFill>
+              <a:schemeClr val="tx1"/>
+            </a:solidFill>
+          </a:ln>
+        </p:spPr>
+        <p:style>
+          <a:lnRef idx="2">
+            <a:schemeClr val="accent1">
+              <a:shade val="15000"/>
+            </a:schemeClr>
+          </a:lnRef>
+          <a:fillRef idx="1">
+            <a:schemeClr val="accent1"/>
+          </a:fillRef>
+          <a:effectRef idx="0">
+            <a:schemeClr val="accent1"/>
+          </a:effectRef>
+          <a:fontRef idx="minor">
+            <a:schemeClr val="lt1"/>
+          </a:fontRef>
+        </p:style>
+        <p:txBody>
+          <a:bodyPr rtlCol="0" anchor="ctr"/>
+          <a:lstStyle/>
+          <a:p>
+            <a:pPr algn="ctr"/>
+            <a:r>
+              <a:rPr lang="en-US" sz="2000" dirty="0">
+                <a:solidFill>
+                  <a:schemeClr val="tx1"/>
+                </a:solidFill>
+              </a:rPr>
+              <a:t>8. Clustering Algorithms</a:t>
+            </a:r>
+          </a:p>
+        </p:txBody>
+      </p:sp>
+      <p:sp>
+        <p:nvSpPr>
+          <p:cNvPr id="20" name="Rectangle 19">
+            <a:extLst>
+              <a:ext uri="{FF2B5EF4-FFF2-40B4-BE49-F238E27FC236}">
+                <a16:creationId xmlns:a16="http://schemas.microsoft.com/office/drawing/2014/main" id="{5C5EBFDB-140B-9B88-CE63-77419A11C6E4}"/>
+              </a:ext>
+            </a:extLst>
+          </p:cNvPr>
+          <p:cNvSpPr/>
+          <p:nvPr/>
+        </p:nvSpPr>
+        <p:spPr>
+          <a:xfrm>
+            <a:off x="6470354" y="5154275"/>
+            <a:ext cx="2016833" cy="1245689"/>
+          </a:xfrm>
+          <a:prstGeom prst="rect">
+            <a:avLst/>
+          </a:prstGeom>
+          <a:noFill/>
+          <a:ln w="19050">
+            <a:solidFill>
+              <a:schemeClr val="tx1"/>
+            </a:solidFill>
+          </a:ln>
+        </p:spPr>
+        <p:style>
+          <a:lnRef idx="2">
+            <a:schemeClr val="accent1">
+              <a:shade val="15000"/>
+            </a:schemeClr>
+          </a:lnRef>
+          <a:fillRef idx="1">
+            <a:schemeClr val="accent1"/>
+          </a:fillRef>
+          <a:effectRef idx="0">
+            <a:schemeClr val="accent1"/>
+          </a:effectRef>
+          <a:fontRef idx="minor">
+            <a:schemeClr val="lt1"/>
+          </a:fontRef>
+        </p:style>
+        <p:txBody>
+          <a:bodyPr rtlCol="0" anchor="ctr"/>
+          <a:lstStyle/>
+          <a:p>
+            <a:pPr algn="ctr"/>
+            <a:r>
+              <a:rPr lang="en-US" sz="2000" dirty="0">
+                <a:solidFill>
+                  <a:schemeClr val="tx1"/>
+                </a:solidFill>
+              </a:rPr>
+              <a:t>7. Recommender  Algorithms</a:t>
+            </a:r>
+          </a:p>
+        </p:txBody>
+      </p:sp>
+      <p:sp>
+        <p:nvSpPr>
+          <p:cNvPr id="21" name="Rectangle 20">
+            <a:extLst>
+              <a:ext uri="{FF2B5EF4-FFF2-40B4-BE49-F238E27FC236}">
+                <a16:creationId xmlns:a16="http://schemas.microsoft.com/office/drawing/2014/main" id="{69AB1FD0-27FA-3784-41E8-6432B45E080D}"/>
+              </a:ext>
+            </a:extLst>
+          </p:cNvPr>
+          <p:cNvSpPr/>
+          <p:nvPr/>
+        </p:nvSpPr>
+        <p:spPr>
+          <a:xfrm>
+            <a:off x="3760595" y="5172609"/>
+            <a:ext cx="2085981" cy="1245689"/>
+          </a:xfrm>
+          <a:prstGeom prst="rect">
+            <a:avLst/>
+          </a:prstGeom>
+          <a:noFill/>
+          <a:ln w="19050">
+            <a:solidFill>
+              <a:schemeClr val="tx1"/>
+            </a:solidFill>
+          </a:ln>
+        </p:spPr>
+        <p:style>
+          <a:lnRef idx="2">
+            <a:schemeClr val="accent1">
+              <a:shade val="15000"/>
+            </a:schemeClr>
+          </a:lnRef>
+          <a:fillRef idx="1">
+            <a:schemeClr val="accent1"/>
+          </a:fillRef>
+          <a:effectRef idx="0">
+            <a:schemeClr val="accent1"/>
+          </a:effectRef>
+          <a:fontRef idx="minor">
+            <a:schemeClr val="lt1"/>
+          </a:fontRef>
+        </p:style>
+        <p:txBody>
+          <a:bodyPr rtlCol="0" anchor="ctr"/>
+          <a:lstStyle/>
+          <a:p>
+            <a:pPr algn="ctr"/>
+            <a:r>
+              <a:rPr lang="en-US" sz="2000" dirty="0">
+                <a:solidFill>
+                  <a:schemeClr val="tx1"/>
+                </a:solidFill>
+              </a:rPr>
+              <a:t>6. Web/Document ranking and search</a:t>
+            </a:r>
+          </a:p>
+        </p:txBody>
+      </p:sp>
+      <p:sp>
+        <p:nvSpPr>
+          <p:cNvPr id="22" name="Content Placeholder 2">
+            <a:extLst>
+              <a:ext uri="{FF2B5EF4-FFF2-40B4-BE49-F238E27FC236}">
+                <a16:creationId xmlns:a16="http://schemas.microsoft.com/office/drawing/2014/main" id="{302608D4-DE73-B603-CD44-1D4BB221F2DE}"/>
+              </a:ext>
+            </a:extLst>
+          </p:cNvPr>
+          <p:cNvSpPr txBox="1">
+            <a:spLocks/>
+          </p:cNvSpPr>
+          <p:nvPr/>
+        </p:nvSpPr>
+        <p:spPr>
+          <a:xfrm>
+            <a:off x="865089" y="797597"/>
+            <a:ext cx="10515600" cy="850578"/>
+          </a:xfrm>
+          <a:prstGeom prst="rect">
+            <a:avLst/>
+          </a:prstGeom>
+        </p:spPr>
+        <p:txBody>
+          <a:bodyPr>
+            <a:noAutofit/>
+          </a:bodyPr>
+          <a:lstStyle>
+            <a:lvl1pPr marL="228600" indent="-228600" algn="l" defTabSz="914400" rtl="0" eaLnBrk="1" latinLnBrk="0" hangingPunct="1">
+              <a:lnSpc>
+                <a:spcPct val="90000"/>
+              </a:lnSpc>
+              <a:spcBef>
+                <a:spcPts val="1000"/>
+              </a:spcBef>
+              <a:buFont typeface="Arial" panose="020B0604020202020204" pitchFamily="34" charset="0"/>
+              <a:buChar char="•"/>
+              <a:defRPr sz="2800" kern="1200">
+                <a:solidFill>
+                  <a:schemeClr val="tx1"/>
+                </a:solidFill>
+                <a:latin typeface="+mn-lt"/>
+                <a:ea typeface="+mn-ea"/>
+                <a:cs typeface="+mn-cs"/>
+              </a:defRPr>
+            </a:lvl1pPr>
+            <a:lvl2pPr marL="685800" indent="-228600" algn="l" defTabSz="914400" rtl="0" eaLnBrk="1" latinLnBrk="0" hangingPunct="1">
+              <a:lnSpc>
+                <a:spcPct val="90000"/>
+              </a:lnSpc>
+              <a:spcBef>
+                <a:spcPts val="500"/>
+              </a:spcBef>
+              <a:buFont typeface="Arial" panose="020B0604020202020204" pitchFamily="34" charset="0"/>
+              <a:buChar char="•"/>
+              <a:defRPr sz="2400" kern="1200">
+                <a:solidFill>
+                  <a:schemeClr val="tx1"/>
+                </a:solidFill>
+                <a:latin typeface="+mn-lt"/>
+                <a:ea typeface="+mn-ea"/>
+                <a:cs typeface="+mn-cs"/>
+              </a:defRPr>
+            </a:lvl2pPr>
+            <a:lvl3pPr marL="1143000" indent="-228600" algn="l" defTabSz="914400" rtl="0" eaLnBrk="1" latinLnBrk="0" hangingPunct="1">
+              <a:lnSpc>
+                <a:spcPct val="90000"/>
+              </a:lnSpc>
+              <a:spcBef>
+                <a:spcPts val="500"/>
+              </a:spcBef>
+              <a:buFont typeface="Arial" panose="020B0604020202020204" pitchFamily="34" charset="0"/>
+              <a:buChar char="•"/>
+              <a:defRPr sz="2000" kern="1200">
+                <a:solidFill>
+                  <a:schemeClr val="tx1"/>
+                </a:solidFill>
+                <a:latin typeface="+mn-lt"/>
+                <a:ea typeface="+mn-ea"/>
+                <a:cs typeface="+mn-cs"/>
+              </a:defRPr>
+            </a:lvl3pPr>
+            <a:lvl4pPr marL="1600200" indent="-228600" algn="l" defTabSz="914400" rtl="0" eaLnBrk="1" latinLnBrk="0" hangingPunct="1">
+              <a:lnSpc>
+                <a:spcPct val="90000"/>
+              </a:lnSpc>
+              <a:spcBef>
+                <a:spcPts val="500"/>
+              </a:spcBef>
+              <a:buFont typeface="Arial" panose="020B0604020202020204" pitchFamily="34" charset="0"/>
+              <a:buChar char="•"/>
+              <a:defRPr sz="1800" kern="1200">
+                <a:solidFill>
+                  <a:schemeClr val="tx1"/>
+                </a:solidFill>
+                <a:latin typeface="+mn-lt"/>
+                <a:ea typeface="+mn-ea"/>
+                <a:cs typeface="+mn-cs"/>
+              </a:defRPr>
+            </a:lvl4pPr>
+            <a:lvl5pPr marL="2057400" indent="-228600" algn="l" defTabSz="914400" rtl="0" eaLnBrk="1" latinLnBrk="0" hangingPunct="1">
+              <a:lnSpc>
+                <a:spcPct val="90000"/>
+              </a:lnSpc>
+              <a:spcBef>
+                <a:spcPts val="500"/>
+              </a:spcBef>
+              <a:buFont typeface="Arial" panose="020B0604020202020204" pitchFamily="34" charset="0"/>
+              <a:buChar char="•"/>
+              <a:defRPr sz="1800" kern="1200">
+                <a:solidFill>
+                  <a:schemeClr val="tx1"/>
+                </a:solidFill>
+                <a:latin typeface="+mn-lt"/>
+                <a:ea typeface="+mn-ea"/>
+                <a:cs typeface="+mn-cs"/>
+              </a:defRPr>
+            </a:lvl5pPr>
+            <a:lvl6pPr marL="2514600" indent="-228600" algn="l" defTabSz="914400" rtl="0" eaLnBrk="1" latinLnBrk="0" hangingPunct="1">
+              <a:lnSpc>
+                <a:spcPct val="90000"/>
+              </a:lnSpc>
+              <a:spcBef>
+                <a:spcPts val="500"/>
+              </a:spcBef>
+              <a:buFont typeface="Arial" panose="020B0604020202020204" pitchFamily="34" charset="0"/>
+              <a:buChar char="•"/>
+              <a:defRPr sz="1800" kern="1200">
+                <a:solidFill>
+                  <a:schemeClr val="tx1"/>
+                </a:solidFill>
+                <a:latin typeface="+mn-lt"/>
+                <a:ea typeface="+mn-ea"/>
+                <a:cs typeface="+mn-cs"/>
+              </a:defRPr>
+            </a:lvl6pPr>
+            <a:lvl7pPr marL="2971800" indent="-228600" algn="l" defTabSz="914400" rtl="0" eaLnBrk="1" latinLnBrk="0" hangingPunct="1">
+              <a:lnSpc>
+                <a:spcPct val="90000"/>
+              </a:lnSpc>
+              <a:spcBef>
+                <a:spcPts val="500"/>
+              </a:spcBef>
+              <a:buFont typeface="Arial" panose="020B0604020202020204" pitchFamily="34" charset="0"/>
+              <a:buChar char="•"/>
+              <a:defRPr sz="1800" kern="1200">
+                <a:solidFill>
+                  <a:schemeClr val="tx1"/>
+                </a:solidFill>
+                <a:latin typeface="+mn-lt"/>
+                <a:ea typeface="+mn-ea"/>
+                <a:cs typeface="+mn-cs"/>
+              </a:defRPr>
+            </a:lvl7pPr>
+            <a:lvl8pPr marL="3429000" indent="-228600" algn="l" defTabSz="914400" rtl="0" eaLnBrk="1" latinLnBrk="0" hangingPunct="1">
+              <a:lnSpc>
+                <a:spcPct val="90000"/>
+              </a:lnSpc>
+              <a:spcBef>
+                <a:spcPts val="500"/>
+              </a:spcBef>
+              <a:buFont typeface="Arial" panose="020B0604020202020204" pitchFamily="34" charset="0"/>
+              <a:buChar char="•"/>
+              <a:defRPr sz="1800" kern="1200">
+                <a:solidFill>
+                  <a:schemeClr val="tx1"/>
+                </a:solidFill>
+                <a:latin typeface="+mn-lt"/>
+                <a:ea typeface="+mn-ea"/>
+                <a:cs typeface="+mn-cs"/>
+              </a:defRPr>
+            </a:lvl8pPr>
+            <a:lvl9pPr marL="3886200" indent="-228600" algn="l" defTabSz="914400" rtl="0" eaLnBrk="1" latinLnBrk="0" hangingPunct="1">
+              <a:lnSpc>
+                <a:spcPct val="90000"/>
+              </a:lnSpc>
+              <a:spcBef>
+                <a:spcPts val="500"/>
+              </a:spcBef>
+              <a:buFont typeface="Arial" panose="020B0604020202020204" pitchFamily="34" charset="0"/>
+              <a:buChar char="•"/>
+              <a:defRPr sz="1800" kern="1200">
+                <a:solidFill>
+                  <a:schemeClr val="tx1"/>
+                </a:solidFill>
+                <a:latin typeface="+mn-lt"/>
+                <a:ea typeface="+mn-ea"/>
+                <a:cs typeface="+mn-cs"/>
+              </a:defRPr>
+            </a:lvl9pPr>
+          </a:lstStyle>
+          <a:p>
+            <a:pPr marL="0" indent="0">
+              <a:buFont typeface="Arial" panose="020B0604020202020204" pitchFamily="34" charset="0"/>
+              <a:buNone/>
+            </a:pPr>
+            <a:r>
+              <a:rPr lang="en-US" dirty="0"/>
+              <a:t>The main topics in this course are interconnected and build on each other</a:t>
+            </a:r>
+          </a:p>
+        </p:txBody>
+      </p:sp>
+    </p:spTree>
+    <p:extLst>
+      <p:ext uri="{BB962C8B-B14F-4D97-AF65-F5344CB8AC3E}">
+        <p14:creationId xmlns:p14="http://schemas.microsoft.com/office/powerpoint/2010/main" val="581234857"/>
+      </p:ext>
+    </p:extLst>
+  </p:cSld>
+  <p:clrMapOvr>
+    <a:masterClrMapping/>
+  </p:clrMapOvr>
+</p:sld>
+</file>
+
+<file path=ppt/slides/slide32.xml><?xml version="1.0" encoding="utf-8"?>
+<p:sld xmlns:a="http://schemas.openxmlformats.org/drawingml/2006/main" xmlns:r="http://schemas.openxmlformats.org/officeDocument/2006/relationships" xmlns:p="http://schemas.openxmlformats.org/presentationml/2006/main">
+  <p:cSld>
+    <p:spTree>
+      <p:nvGrpSpPr>
         <p:cNvPr id="1" name=""/>
         <p:cNvGrpSpPr/>
         <p:nvPr/>
@@ -16689,7 +18565,7 @@
 </p:sld>
 </file>
 
-<file path=ppt/slides/slide32.xml><?xml version="1.0" encoding="utf-8"?>
+<file path=ppt/slides/slide33.xml><?xml version="1.0" encoding="utf-8"?>
 <p:sld xmlns:a="http://schemas.openxmlformats.org/drawingml/2006/main" xmlns:r="http://schemas.openxmlformats.org/officeDocument/2006/relationships" xmlns:p="http://schemas.openxmlformats.org/presentationml/2006/main">
   <p:cSld>
     <p:spTree>
@@ -17304,7 +19180,7 @@
 </p:sld>
 </file>
 
-<file path=ppt/slides/slide33.xml><?xml version="1.0" encoding="utf-8"?>
+<file path=ppt/slides/slide34.xml><?xml version="1.0" encoding="utf-8"?>
 <p:sld xmlns:a="http://schemas.openxmlformats.org/drawingml/2006/main" xmlns:r="http://schemas.openxmlformats.org/officeDocument/2006/relationships" xmlns:p="http://schemas.openxmlformats.org/presentationml/2006/main">
   <p:cSld>
     <p:spTree>
@@ -17791,7 +19667,7 @@
 </p:sld>
 </file>
 
-<file path=ppt/slides/slide34.xml><?xml version="1.0" encoding="utf-8"?>
+<file path=ppt/slides/slide35.xml><?xml version="1.0" encoding="utf-8"?>
 <p:sld xmlns:a="http://schemas.openxmlformats.org/drawingml/2006/main" xmlns:r="http://schemas.openxmlformats.org/officeDocument/2006/relationships" xmlns:p="http://schemas.openxmlformats.org/presentationml/2006/main">
   <p:cSld>
     <p:spTree>
@@ -18316,7 +20192,7 @@
 </p:sld>
 </file>
 
-<file path=ppt/slides/slide35.xml><?xml version="1.0" encoding="utf-8"?>
+<file path=ppt/slides/slide36.xml><?xml version="1.0" encoding="utf-8"?>
 <p:sld xmlns:a="http://schemas.openxmlformats.org/drawingml/2006/main" xmlns:r="http://schemas.openxmlformats.org/officeDocument/2006/relationships" xmlns:p="http://schemas.openxmlformats.org/presentationml/2006/main">
   <p:cSld>
     <p:spTree>
@@ -18900,7 +20776,7 @@
 </p:sld>
 </file>
 
-<file path=ppt/slides/slide36.xml><?xml version="1.0" encoding="utf-8"?>
+<file path=ppt/slides/slide37.xml><?xml version="1.0" encoding="utf-8"?>
 <p:sld xmlns:a="http://schemas.openxmlformats.org/drawingml/2006/main" xmlns:r="http://schemas.openxmlformats.org/officeDocument/2006/relationships" xmlns:p="http://schemas.openxmlformats.org/presentationml/2006/main">
   <p:cSld>
     <p:spTree>
@@ -21311,7 +23187,7 @@
 </p:sld>
 </file>
 
-<file path=ppt/slides/slide37.xml><?xml version="1.0" encoding="utf-8"?>
+<file path=ppt/slides/slide38.xml><?xml version="1.0" encoding="utf-8"?>
 <p:sld xmlns:a="http://schemas.openxmlformats.org/drawingml/2006/main" xmlns:r="http://schemas.openxmlformats.org/officeDocument/2006/relationships" xmlns:p="http://schemas.openxmlformats.org/presentationml/2006/main">
   <p:cSld>
     <p:spTree>
@@ -21371,7 +23247,7 @@
 </p:sld>
 </file>
 
-<file path=ppt/slides/slide38.xml><?xml version="1.0" encoding="utf-8"?>
+<file path=ppt/slides/slide39.xml><?xml version="1.0" encoding="utf-8"?>
 <p:sld xmlns:a="http://schemas.openxmlformats.org/drawingml/2006/main" xmlns:r="http://schemas.openxmlformats.org/officeDocument/2006/relationships" xmlns:p="http://schemas.openxmlformats.org/presentationml/2006/main">
   <p:cSld>
     <p:spTree>
@@ -22008,441 +23884,6 @@
 </p:sld>
 </file>
 
-<file path=ppt/slides/slide39.xml><?xml version="1.0" encoding="utf-8"?>
-<p:sld xmlns:a="http://schemas.openxmlformats.org/drawingml/2006/main" xmlns:r="http://schemas.openxmlformats.org/officeDocument/2006/relationships" xmlns:p="http://schemas.openxmlformats.org/presentationml/2006/main">
-  <p:cSld>
-    <p:spTree>
-      <p:nvGrpSpPr>
-        <p:cNvPr id="1" name="">
-          <a:extLst>
-            <a:ext uri="{FF2B5EF4-FFF2-40B4-BE49-F238E27FC236}">
-              <a16:creationId xmlns:a16="http://schemas.microsoft.com/office/drawing/2014/main" id="{FF456253-7795-52CD-DC89-671E47B62558}"/>
-            </a:ext>
-          </a:extLst>
-        </p:cNvPr>
-        <p:cNvGrpSpPr/>
-        <p:nvPr/>
-      </p:nvGrpSpPr>
-      <p:grpSpPr>
-        <a:xfrm>
-          <a:off x="0" y="0"/>
-          <a:ext cx="0" cy="0"/>
-          <a:chOff x="0" y="0"/>
-          <a:chExt cx="0" cy="0"/>
-        </a:xfrm>
-      </p:grpSpPr>
-      <p:sp>
-        <p:nvSpPr>
-          <p:cNvPr id="3" name="Content Placeholder 2">
-            <a:extLst>
-              <a:ext uri="{FF2B5EF4-FFF2-40B4-BE49-F238E27FC236}">
-                <a16:creationId xmlns:a16="http://schemas.microsoft.com/office/drawing/2014/main" id="{9E6F3064-C916-6D77-2E17-FC76AE5BB95F}"/>
-              </a:ext>
-            </a:extLst>
-          </p:cNvPr>
-          <p:cNvSpPr>
-            <a:spLocks noGrp="1"/>
-          </p:cNvSpPr>
-          <p:nvPr>
-            <p:ph idx="1"/>
-          </p:nvPr>
-        </p:nvSpPr>
-        <p:spPr>
-          <a:xfrm>
-            <a:off x="838200" y="1324928"/>
-            <a:ext cx="10515600" cy="5133349"/>
-          </a:xfrm>
-        </p:spPr>
-        <p:txBody>
-          <a:bodyPr>
-            <a:normAutofit/>
-          </a:bodyPr>
-          <a:lstStyle/>
-          <a:p>
-            <a:pPr marL="0" indent="0">
-              <a:buNone/>
-            </a:pPr>
-            <a:r>
-              <a:rPr lang="en-US" dirty="0"/>
-              <a:t>Generally speaking, there are two major types of hash functions </a:t>
-            </a:r>
-          </a:p>
-          <a:p>
-            <a:r>
-              <a:rPr lang="en-US" b="1" dirty="0"/>
-              <a:t>Cryptographic hash functions </a:t>
-            </a:r>
-            <a:r>
-              <a:rPr lang="en-US" dirty="0"/>
-              <a:t>are invertible encodings used to prevent unauthorized access </a:t>
-            </a:r>
-          </a:p>
-          <a:p>
-            <a:r>
-              <a:rPr lang="en-US" b="1" dirty="0"/>
-              <a:t>Address hash functions </a:t>
-            </a:r>
-            <a:r>
-              <a:rPr lang="en-US" dirty="0"/>
-              <a:t>compute a sequence of address values for access to buckets of data tables</a:t>
-            </a:r>
-          </a:p>
-          <a:p>
-            <a:pPr lvl="1"/>
-            <a:r>
-              <a:rPr lang="en-US" dirty="0"/>
-              <a:t>There is no need for invertibility  </a:t>
-            </a:r>
-          </a:p>
-          <a:p>
-            <a:r>
-              <a:rPr lang="en-US" dirty="0"/>
-              <a:t>There is a common body of theory underlying both types of hashes   </a:t>
-            </a:r>
-          </a:p>
-          <a:p>
-            <a:r>
-              <a:rPr lang="en-US" dirty="0"/>
-              <a:t>For data mining we apply address hashes to manage massive datasets</a:t>
-            </a:r>
-          </a:p>
-          <a:p>
-            <a:endParaRPr lang="en-US" dirty="0"/>
-          </a:p>
-          <a:p>
-            <a:pPr marL="0" indent="0">
-              <a:buNone/>
-            </a:pPr>
-            <a:endParaRPr lang="en-US" dirty="0"/>
-          </a:p>
-        </p:txBody>
-      </p:sp>
-      <p:sp>
-        <p:nvSpPr>
-          <p:cNvPr id="6" name="Title 1">
-            <a:extLst>
-              <a:ext uri="{FF2B5EF4-FFF2-40B4-BE49-F238E27FC236}">
-                <a16:creationId xmlns:a16="http://schemas.microsoft.com/office/drawing/2014/main" id="{CE66018C-A4DB-87C6-4869-5EAC4E862118}"/>
-              </a:ext>
-            </a:extLst>
-          </p:cNvPr>
-          <p:cNvSpPr txBox="1">
-            <a:spLocks/>
-          </p:cNvSpPr>
-          <p:nvPr/>
-        </p:nvSpPr>
-        <p:spPr>
-          <a:xfrm>
-            <a:off x="838200" y="-635"/>
-            <a:ext cx="10515600" cy="1325563"/>
-          </a:xfrm>
-          <a:prstGeom prst="rect">
-            <a:avLst/>
-          </a:prstGeom>
-        </p:spPr>
-        <p:txBody>
-          <a:bodyPr vert="horz" lIns="91440" tIns="45720" rIns="91440" bIns="45720" rtlCol="0" anchor="ctr">
-            <a:normAutofit/>
-          </a:bodyPr>
-          <a:lstStyle>
-            <a:lvl1pPr algn="l" defTabSz="914400" rtl="0" eaLnBrk="1" latinLnBrk="0" hangingPunct="1">
-              <a:lnSpc>
-                <a:spcPct val="90000"/>
-              </a:lnSpc>
-              <a:spcBef>
-                <a:spcPct val="0"/>
-              </a:spcBef>
-              <a:buNone/>
-              <a:defRPr sz="4400" kern="1200">
-                <a:solidFill>
-                  <a:schemeClr val="tx1"/>
-                </a:solidFill>
-                <a:latin typeface="+mj-lt"/>
-                <a:ea typeface="+mj-ea"/>
-                <a:cs typeface="+mj-cs"/>
-              </a:defRPr>
-            </a:lvl1pPr>
-          </a:lstStyle>
-          <a:p>
-            <a:r>
-              <a:rPr lang="en-US" dirty="0">
-                <a:latin typeface="+mn-lt"/>
-              </a:rPr>
-              <a:t>Introduction to Hashing</a:t>
-            </a:r>
-          </a:p>
-        </p:txBody>
-      </p:sp>
-    </p:spTree>
-    <p:extLst>
-      <p:ext uri="{BB962C8B-B14F-4D97-AF65-F5344CB8AC3E}">
-        <p14:creationId xmlns:p14="http://schemas.microsoft.com/office/powerpoint/2010/main" val="586682500"/>
-      </p:ext>
-    </p:extLst>
-  </p:cSld>
-  <p:clrMapOvr>
-    <a:masterClrMapping/>
-  </p:clrMapOvr>
-  <p:timing>
-    <p:tnLst>
-      <p:par>
-        <p:cTn id="1" dur="indefinite" restart="never" nodeType="tmRoot">
-          <p:childTnLst>
-            <p:seq concurrent="1" nextAc="seek">
-              <p:cTn id="2" dur="indefinite" nodeType="mainSeq">
-                <p:childTnLst>
-                  <p:par>
-                    <p:cTn id="3" fill="hold">
-                      <p:stCondLst>
-                        <p:cond delay="indefinite"/>
-                      </p:stCondLst>
-                      <p:childTnLst>
-                        <p:par>
-                          <p:cTn id="4" fill="hold">
-                            <p:stCondLst>
-                              <p:cond delay="0"/>
-                            </p:stCondLst>
-                            <p:childTnLst>
-                              <p:par>
-                                <p:cTn id="5" presetID="1" presetClass="entr" presetSubtype="0" fill="hold" nodeType="clickEffect">
-                                  <p:stCondLst>
-                                    <p:cond delay="0"/>
-                                  </p:stCondLst>
-                                  <p:childTnLst>
-                                    <p:set>
-                                      <p:cBhvr>
-                                        <p:cTn id="6" dur="1" fill="hold">
-                                          <p:stCondLst>
-                                            <p:cond delay="0"/>
-                                          </p:stCondLst>
-                                        </p:cTn>
-                                        <p:tgtEl>
-                                          <p:spTgt spid="3">
-                                            <p:txEl>
-                                              <p:pRg st="1" end="1"/>
-                                            </p:txEl>
-                                          </p:spTgt>
-                                        </p:tgtEl>
-                                        <p:attrNameLst>
-                                          <p:attrName>style.visibility</p:attrName>
-                                        </p:attrNameLst>
-                                      </p:cBhvr>
-                                      <p:to>
-                                        <p:strVal val="visible"/>
-                                      </p:to>
-                                    </p:set>
-                                  </p:childTnLst>
-                                </p:cTn>
-                              </p:par>
-                            </p:childTnLst>
-                          </p:cTn>
-                        </p:par>
-                      </p:childTnLst>
-                    </p:cTn>
-                  </p:par>
-                  <p:par>
-                    <p:cTn id="7" fill="hold">
-                      <p:stCondLst>
-                        <p:cond delay="indefinite"/>
-                      </p:stCondLst>
-                      <p:childTnLst>
-                        <p:par>
-                          <p:cTn id="8" fill="hold">
-                            <p:stCondLst>
-                              <p:cond delay="0"/>
-                            </p:stCondLst>
-                            <p:childTnLst>
-                              <p:par>
-                                <p:cTn id="9" presetID="1" presetClass="entr" presetSubtype="0" fill="hold" nodeType="clickEffect">
-                                  <p:stCondLst>
-                                    <p:cond delay="0"/>
-                                  </p:stCondLst>
-                                  <p:childTnLst>
-                                    <p:set>
-                                      <p:cBhvr>
-                                        <p:cTn id="10" dur="1" fill="hold">
-                                          <p:stCondLst>
-                                            <p:cond delay="0"/>
-                                          </p:stCondLst>
-                                        </p:cTn>
-                                        <p:tgtEl>
-                                          <p:spTgt spid="3">
-                                            <p:txEl>
-                                              <p:pRg st="2" end="2"/>
-                                            </p:txEl>
-                                          </p:spTgt>
-                                        </p:tgtEl>
-                                        <p:attrNameLst>
-                                          <p:attrName>style.visibility</p:attrName>
-                                        </p:attrNameLst>
-                                      </p:cBhvr>
-                                      <p:to>
-                                        <p:strVal val="visible"/>
-                                      </p:to>
-                                    </p:set>
-                                  </p:childTnLst>
-                                </p:cTn>
-                              </p:par>
-                              <p:par>
-                                <p:cTn id="11" presetID="1" presetClass="entr" presetSubtype="0" fill="hold" nodeType="withEffect">
-                                  <p:stCondLst>
-                                    <p:cond delay="0"/>
-                                  </p:stCondLst>
-                                  <p:childTnLst>
-                                    <p:set>
-                                      <p:cBhvr>
-                                        <p:cTn id="12" dur="1" fill="hold">
-                                          <p:stCondLst>
-                                            <p:cond delay="0"/>
-                                          </p:stCondLst>
-                                        </p:cTn>
-                                        <p:tgtEl>
-                                          <p:spTgt spid="3">
-                                            <p:txEl>
-                                              <p:pRg st="3" end="3"/>
-                                            </p:txEl>
-                                          </p:spTgt>
-                                        </p:tgtEl>
-                                        <p:attrNameLst>
-                                          <p:attrName>style.visibility</p:attrName>
-                                        </p:attrNameLst>
-                                      </p:cBhvr>
-                                      <p:to>
-                                        <p:strVal val="visible"/>
-                                      </p:to>
-                                    </p:set>
-                                  </p:childTnLst>
-                                </p:cTn>
-                              </p:par>
-                            </p:childTnLst>
-                          </p:cTn>
-                        </p:par>
-                      </p:childTnLst>
-                    </p:cTn>
-                  </p:par>
-                  <p:par>
-                    <p:cTn id="13" fill="hold">
-                      <p:stCondLst>
-                        <p:cond delay="indefinite"/>
-                      </p:stCondLst>
-                      <p:childTnLst>
-                        <p:par>
-                          <p:cTn id="14" fill="hold">
-                            <p:stCondLst>
-                              <p:cond delay="0"/>
-                            </p:stCondLst>
-                            <p:childTnLst>
-                              <p:par>
-                                <p:cTn id="15" presetID="1" presetClass="entr" presetSubtype="0" fill="hold" nodeType="clickEffect">
-                                  <p:stCondLst>
-                                    <p:cond delay="0"/>
-                                  </p:stCondLst>
-                                  <p:childTnLst>
-                                    <p:set>
-                                      <p:cBhvr>
-                                        <p:cTn id="16" dur="1" fill="hold">
-                                          <p:stCondLst>
-                                            <p:cond delay="0"/>
-                                          </p:stCondLst>
-                                        </p:cTn>
-                                        <p:tgtEl>
-                                          <p:spTgt spid="3">
-                                            <p:txEl>
-                                              <p:pRg st="4" end="4"/>
-                                            </p:txEl>
-                                          </p:spTgt>
-                                        </p:tgtEl>
-                                        <p:attrNameLst>
-                                          <p:attrName>style.visibility</p:attrName>
-                                        </p:attrNameLst>
-                                      </p:cBhvr>
-                                      <p:to>
-                                        <p:strVal val="visible"/>
-                                      </p:to>
-                                    </p:set>
-                                  </p:childTnLst>
-                                </p:cTn>
-                              </p:par>
-                            </p:childTnLst>
-                          </p:cTn>
-                        </p:par>
-                      </p:childTnLst>
-                    </p:cTn>
-                  </p:par>
-                  <p:par>
-                    <p:cTn id="17" fill="hold">
-                      <p:stCondLst>
-                        <p:cond delay="indefinite"/>
-                      </p:stCondLst>
-                      <p:childTnLst>
-                        <p:par>
-                          <p:cTn id="18" fill="hold">
-                            <p:stCondLst>
-                              <p:cond delay="0"/>
-                            </p:stCondLst>
-                            <p:childTnLst>
-                              <p:par>
-                                <p:cTn id="19" presetID="1" presetClass="entr" presetSubtype="0" fill="hold" nodeType="clickEffect">
-                                  <p:stCondLst>
-                                    <p:cond delay="0"/>
-                                  </p:stCondLst>
-                                  <p:childTnLst>
-                                    <p:set>
-                                      <p:cBhvr>
-                                        <p:cTn id="20" dur="1" fill="hold">
-                                          <p:stCondLst>
-                                            <p:cond delay="0"/>
-                                          </p:stCondLst>
-                                        </p:cTn>
-                                        <p:tgtEl>
-                                          <p:spTgt spid="3">
-                                            <p:txEl>
-                                              <p:pRg st="5" end="5"/>
-                                            </p:txEl>
-                                          </p:spTgt>
-                                        </p:tgtEl>
-                                        <p:attrNameLst>
-                                          <p:attrName>style.visibility</p:attrName>
-                                        </p:attrNameLst>
-                                      </p:cBhvr>
-                                      <p:to>
-                                        <p:strVal val="visible"/>
-                                      </p:to>
-                                    </p:set>
-                                  </p:childTnLst>
-                                </p:cTn>
-                              </p:par>
-                            </p:childTnLst>
-                          </p:cTn>
-                        </p:par>
-                      </p:childTnLst>
-                    </p:cTn>
-                  </p:par>
-                </p:childTnLst>
-              </p:cTn>
-              <p:prevCondLst>
-                <p:cond evt="onPrev" delay="0">
-                  <p:tgtEl>
-                    <p:sldTgt/>
-                  </p:tgtEl>
-                </p:cond>
-              </p:prevCondLst>
-              <p:nextCondLst>
-                <p:cond evt="onNext" delay="0">
-                  <p:tgtEl>
-                    <p:sldTgt/>
-                  </p:tgtEl>
-                </p:cond>
-              </p:nextCondLst>
-            </p:seq>
-          </p:childTnLst>
-        </p:cTn>
-      </p:par>
-    </p:tnLst>
-  </p:timing>
-</p:sld>
-</file>
-
 <file path=ppt/slides/slide4.xml><?xml version="1.0" encoding="utf-8"?>
 <p:sld xmlns:a="http://schemas.openxmlformats.org/drawingml/2006/main" xmlns:r="http://schemas.openxmlformats.org/officeDocument/2006/relationships" xmlns:p="http://schemas.openxmlformats.org/presentationml/2006/main">
   <p:cSld>
@@ -22933,6 +24374,479 @@
 </file>
 
 <file path=ppt/slides/slide40.xml><?xml version="1.0" encoding="utf-8"?>
+<p:sld xmlns:a="http://schemas.openxmlformats.org/drawingml/2006/main" xmlns:r="http://schemas.openxmlformats.org/officeDocument/2006/relationships" xmlns:p="http://schemas.openxmlformats.org/presentationml/2006/main">
+  <p:cSld>
+    <p:spTree>
+      <p:nvGrpSpPr>
+        <p:cNvPr id="1" name="">
+          <a:extLst>
+            <a:ext uri="{FF2B5EF4-FFF2-40B4-BE49-F238E27FC236}">
+              <a16:creationId xmlns:a16="http://schemas.microsoft.com/office/drawing/2014/main" id="{FF456253-7795-52CD-DC89-671E47B62558}"/>
+            </a:ext>
+          </a:extLst>
+        </p:cNvPr>
+        <p:cNvGrpSpPr/>
+        <p:nvPr/>
+      </p:nvGrpSpPr>
+      <p:grpSpPr>
+        <a:xfrm>
+          <a:off x="0" y="0"/>
+          <a:ext cx="0" cy="0"/>
+          <a:chOff x="0" y="0"/>
+          <a:chExt cx="0" cy="0"/>
+        </a:xfrm>
+      </p:grpSpPr>
+      <p:sp>
+        <p:nvSpPr>
+          <p:cNvPr id="3" name="Content Placeholder 2">
+            <a:extLst>
+              <a:ext uri="{FF2B5EF4-FFF2-40B4-BE49-F238E27FC236}">
+                <a16:creationId xmlns:a16="http://schemas.microsoft.com/office/drawing/2014/main" id="{9E6F3064-C916-6D77-2E17-FC76AE5BB95F}"/>
+              </a:ext>
+            </a:extLst>
+          </p:cNvPr>
+          <p:cNvSpPr>
+            <a:spLocks noGrp="1"/>
+          </p:cNvSpPr>
+          <p:nvPr>
+            <p:ph idx="1"/>
+          </p:nvPr>
+        </p:nvSpPr>
+        <p:spPr>
+          <a:xfrm>
+            <a:off x="838200" y="1324928"/>
+            <a:ext cx="10515600" cy="5133349"/>
+          </a:xfrm>
+        </p:spPr>
+        <p:txBody>
+          <a:bodyPr>
+            <a:normAutofit/>
+          </a:bodyPr>
+          <a:lstStyle/>
+          <a:p>
+            <a:pPr marL="0" indent="0">
+              <a:buNone/>
+            </a:pPr>
+            <a:r>
+              <a:rPr lang="en-US" dirty="0"/>
+              <a:t>Generally speaking, there are two major types of hash functions </a:t>
+            </a:r>
+          </a:p>
+          <a:p>
+            <a:r>
+              <a:rPr lang="en-US" b="1" dirty="0"/>
+              <a:t>Cryptographic hash functions </a:t>
+            </a:r>
+            <a:r>
+              <a:rPr lang="en-US" dirty="0"/>
+              <a:t>are invertible encodings used to prevent unauthorized access </a:t>
+            </a:r>
+          </a:p>
+          <a:p>
+            <a:pPr lvl="1"/>
+            <a:r>
+              <a:rPr lang="en-US" dirty="0"/>
+              <a:t>Not a data mining topic</a:t>
+            </a:r>
+          </a:p>
+          <a:p>
+            <a:r>
+              <a:rPr lang="en-US" b="1" dirty="0"/>
+              <a:t>Address hash functions </a:t>
+            </a:r>
+            <a:r>
+              <a:rPr lang="en-US" dirty="0"/>
+              <a:t>compute a sequence of address values for access to buckets of data tables</a:t>
+            </a:r>
+          </a:p>
+          <a:p>
+            <a:pPr lvl="1"/>
+            <a:r>
+              <a:rPr lang="en-US" dirty="0"/>
+              <a:t>There is no need for invertibility  </a:t>
+            </a:r>
+          </a:p>
+          <a:p>
+            <a:r>
+              <a:rPr lang="en-US" dirty="0"/>
+              <a:t>There is a common body of theory underlying both types of hashes   </a:t>
+            </a:r>
+          </a:p>
+          <a:p>
+            <a:r>
+              <a:rPr lang="en-US" dirty="0"/>
+              <a:t>For data mining we apply address hashes to manage massive datasets</a:t>
+            </a:r>
+          </a:p>
+          <a:p>
+            <a:endParaRPr lang="en-US" dirty="0"/>
+          </a:p>
+          <a:p>
+            <a:pPr marL="0" indent="0">
+              <a:buNone/>
+            </a:pPr>
+            <a:endParaRPr lang="en-US" dirty="0"/>
+          </a:p>
+        </p:txBody>
+      </p:sp>
+      <p:sp>
+        <p:nvSpPr>
+          <p:cNvPr id="6" name="Title 1">
+            <a:extLst>
+              <a:ext uri="{FF2B5EF4-FFF2-40B4-BE49-F238E27FC236}">
+                <a16:creationId xmlns:a16="http://schemas.microsoft.com/office/drawing/2014/main" id="{CE66018C-A4DB-87C6-4869-5EAC4E862118}"/>
+              </a:ext>
+            </a:extLst>
+          </p:cNvPr>
+          <p:cNvSpPr txBox="1">
+            <a:spLocks/>
+          </p:cNvSpPr>
+          <p:nvPr/>
+        </p:nvSpPr>
+        <p:spPr>
+          <a:xfrm>
+            <a:off x="838200" y="-635"/>
+            <a:ext cx="10515600" cy="1325563"/>
+          </a:xfrm>
+          <a:prstGeom prst="rect">
+            <a:avLst/>
+          </a:prstGeom>
+        </p:spPr>
+        <p:txBody>
+          <a:bodyPr vert="horz" lIns="91440" tIns="45720" rIns="91440" bIns="45720" rtlCol="0" anchor="ctr">
+            <a:normAutofit/>
+          </a:bodyPr>
+          <a:lstStyle>
+            <a:lvl1pPr algn="l" defTabSz="914400" rtl="0" eaLnBrk="1" latinLnBrk="0" hangingPunct="1">
+              <a:lnSpc>
+                <a:spcPct val="90000"/>
+              </a:lnSpc>
+              <a:spcBef>
+                <a:spcPct val="0"/>
+              </a:spcBef>
+              <a:buNone/>
+              <a:defRPr sz="4400" kern="1200">
+                <a:solidFill>
+                  <a:schemeClr val="tx1"/>
+                </a:solidFill>
+                <a:latin typeface="+mj-lt"/>
+                <a:ea typeface="+mj-ea"/>
+                <a:cs typeface="+mj-cs"/>
+              </a:defRPr>
+            </a:lvl1pPr>
+          </a:lstStyle>
+          <a:p>
+            <a:r>
+              <a:rPr lang="en-US" dirty="0">
+                <a:latin typeface="+mn-lt"/>
+              </a:rPr>
+              <a:t>Introduction to Hashing</a:t>
+            </a:r>
+          </a:p>
+        </p:txBody>
+      </p:sp>
+    </p:spTree>
+    <p:extLst>
+      <p:ext uri="{BB962C8B-B14F-4D97-AF65-F5344CB8AC3E}">
+        <p14:creationId xmlns:p14="http://schemas.microsoft.com/office/powerpoint/2010/main" val="586682500"/>
+      </p:ext>
+    </p:extLst>
+  </p:cSld>
+  <p:clrMapOvr>
+    <a:masterClrMapping/>
+  </p:clrMapOvr>
+  <p:timing>
+    <p:tnLst>
+      <p:par>
+        <p:cTn id="1" dur="indefinite" restart="never" nodeType="tmRoot">
+          <p:childTnLst>
+            <p:seq concurrent="1" nextAc="seek">
+              <p:cTn id="2" dur="indefinite" nodeType="mainSeq">
+                <p:childTnLst>
+                  <p:par>
+                    <p:cTn id="3" fill="hold">
+                      <p:stCondLst>
+                        <p:cond delay="indefinite"/>
+                      </p:stCondLst>
+                      <p:childTnLst>
+                        <p:par>
+                          <p:cTn id="4" fill="hold">
+                            <p:stCondLst>
+                              <p:cond delay="0"/>
+                            </p:stCondLst>
+                            <p:childTnLst>
+                              <p:par>
+                                <p:cTn id="5" presetID="1" presetClass="entr" presetSubtype="0" fill="hold" nodeType="clickEffect">
+                                  <p:stCondLst>
+                                    <p:cond delay="0"/>
+                                  </p:stCondLst>
+                                  <p:childTnLst>
+                                    <p:set>
+                                      <p:cBhvr>
+                                        <p:cTn id="6" dur="1" fill="hold">
+                                          <p:stCondLst>
+                                            <p:cond delay="0"/>
+                                          </p:stCondLst>
+                                        </p:cTn>
+                                        <p:tgtEl>
+                                          <p:spTgt spid="3">
+                                            <p:txEl>
+                                              <p:pRg st="1" end="1"/>
+                                            </p:txEl>
+                                          </p:spTgt>
+                                        </p:tgtEl>
+                                        <p:attrNameLst>
+                                          <p:attrName>style.visibility</p:attrName>
+                                        </p:attrNameLst>
+                                      </p:cBhvr>
+                                      <p:to>
+                                        <p:strVal val="visible"/>
+                                      </p:to>
+                                    </p:set>
+                                  </p:childTnLst>
+                                </p:cTn>
+                              </p:par>
+                              <p:par>
+                                <p:cTn id="7" presetID="1" presetClass="entr" presetSubtype="0" fill="hold" nodeType="withEffect">
+                                  <p:stCondLst>
+                                    <p:cond delay="0"/>
+                                  </p:stCondLst>
+                                  <p:childTnLst>
+                                    <p:set>
+                                      <p:cBhvr>
+                                        <p:cTn id="8" dur="1" fill="hold">
+                                          <p:stCondLst>
+                                            <p:cond delay="0"/>
+                                          </p:stCondLst>
+                                        </p:cTn>
+                                        <p:tgtEl>
+                                          <p:spTgt spid="3">
+                                            <p:txEl>
+                                              <p:pRg st="2" end="2"/>
+                                            </p:txEl>
+                                          </p:spTgt>
+                                        </p:tgtEl>
+                                        <p:attrNameLst>
+                                          <p:attrName>style.visibility</p:attrName>
+                                        </p:attrNameLst>
+                                      </p:cBhvr>
+                                      <p:to>
+                                        <p:strVal val="visible"/>
+                                      </p:to>
+                                    </p:set>
+                                  </p:childTnLst>
+                                </p:cTn>
+                              </p:par>
+                            </p:childTnLst>
+                          </p:cTn>
+                        </p:par>
+                      </p:childTnLst>
+                    </p:cTn>
+                  </p:par>
+                  <p:par>
+                    <p:cTn id="9" fill="hold">
+                      <p:stCondLst>
+                        <p:cond delay="indefinite"/>
+                      </p:stCondLst>
+                      <p:childTnLst>
+                        <p:par>
+                          <p:cTn id="10" fill="hold">
+                            <p:stCondLst>
+                              <p:cond delay="0"/>
+                            </p:stCondLst>
+                            <p:childTnLst>
+                              <p:par>
+                                <p:cTn id="11" presetID="1" presetClass="entr" presetSubtype="0" fill="hold" nodeType="clickEffect">
+                                  <p:stCondLst>
+                                    <p:cond delay="0"/>
+                                  </p:stCondLst>
+                                  <p:childTnLst>
+                                    <p:set>
+                                      <p:cBhvr>
+                                        <p:cTn id="12" dur="1" fill="hold">
+                                          <p:stCondLst>
+                                            <p:cond delay="0"/>
+                                          </p:stCondLst>
+                                        </p:cTn>
+                                        <p:tgtEl>
+                                          <p:spTgt spid="3">
+                                            <p:txEl>
+                                              <p:pRg st="3" end="3"/>
+                                            </p:txEl>
+                                          </p:spTgt>
+                                        </p:tgtEl>
+                                        <p:attrNameLst>
+                                          <p:attrName>style.visibility</p:attrName>
+                                        </p:attrNameLst>
+                                      </p:cBhvr>
+                                      <p:to>
+                                        <p:strVal val="visible"/>
+                                      </p:to>
+                                    </p:set>
+                                  </p:childTnLst>
+                                </p:cTn>
+                              </p:par>
+                              <p:par>
+                                <p:cTn id="13" presetID="1" presetClass="entr" presetSubtype="0" fill="hold" nodeType="withEffect">
+                                  <p:stCondLst>
+                                    <p:cond delay="0"/>
+                                  </p:stCondLst>
+                                  <p:childTnLst>
+                                    <p:set>
+                                      <p:cBhvr>
+                                        <p:cTn id="14" dur="1" fill="hold">
+                                          <p:stCondLst>
+                                            <p:cond delay="0"/>
+                                          </p:stCondLst>
+                                        </p:cTn>
+                                        <p:tgtEl>
+                                          <p:spTgt spid="3">
+                                            <p:txEl>
+                                              <p:pRg st="4" end="4"/>
+                                            </p:txEl>
+                                          </p:spTgt>
+                                        </p:tgtEl>
+                                        <p:attrNameLst>
+                                          <p:attrName>style.visibility</p:attrName>
+                                        </p:attrNameLst>
+                                      </p:cBhvr>
+                                      <p:to>
+                                        <p:strVal val="visible"/>
+                                      </p:to>
+                                    </p:set>
+                                  </p:childTnLst>
+                                </p:cTn>
+                              </p:par>
+                            </p:childTnLst>
+                          </p:cTn>
+                        </p:par>
+                      </p:childTnLst>
+                    </p:cTn>
+                  </p:par>
+                  <p:par>
+                    <p:cTn id="15" fill="hold">
+                      <p:stCondLst>
+                        <p:cond delay="indefinite"/>
+                      </p:stCondLst>
+                      <p:childTnLst>
+                        <p:par>
+                          <p:cTn id="16" fill="hold">
+                            <p:stCondLst>
+                              <p:cond delay="0"/>
+                            </p:stCondLst>
+                            <p:childTnLst>
+                              <p:par>
+                                <p:cTn id="17" presetID="1" presetClass="entr" presetSubtype="0" fill="hold" nodeType="clickEffect">
+                                  <p:stCondLst>
+                                    <p:cond delay="0"/>
+                                  </p:stCondLst>
+                                  <p:childTnLst>
+                                    <p:set>
+                                      <p:cBhvr>
+                                        <p:cTn id="18" dur="1" fill="hold">
+                                          <p:stCondLst>
+                                            <p:cond delay="0"/>
+                                          </p:stCondLst>
+                                        </p:cTn>
+                                        <p:tgtEl>
+                                          <p:spTgt spid="3">
+                                            <p:txEl>
+                                              <p:pRg st="5" end="5"/>
+                                            </p:txEl>
+                                          </p:spTgt>
+                                        </p:tgtEl>
+                                        <p:attrNameLst>
+                                          <p:attrName>style.visibility</p:attrName>
+                                        </p:attrNameLst>
+                                      </p:cBhvr>
+                                      <p:to>
+                                        <p:strVal val="visible"/>
+                                      </p:to>
+                                    </p:set>
+                                  </p:childTnLst>
+                                </p:cTn>
+                              </p:par>
+                            </p:childTnLst>
+                          </p:cTn>
+                        </p:par>
+                      </p:childTnLst>
+                    </p:cTn>
+                  </p:par>
+                  <p:par>
+                    <p:cTn id="19" fill="hold">
+                      <p:stCondLst>
+                        <p:cond delay="indefinite"/>
+                      </p:stCondLst>
+                      <p:childTnLst>
+                        <p:par>
+                          <p:cTn id="20" fill="hold">
+                            <p:stCondLst>
+                              <p:cond delay="0"/>
+                            </p:stCondLst>
+                            <p:childTnLst>
+                              <p:par>
+                                <p:cTn id="21" presetID="1" presetClass="entr" presetSubtype="0" fill="hold" nodeType="clickEffect">
+                                  <p:stCondLst>
+                                    <p:cond delay="0"/>
+                                  </p:stCondLst>
+                                  <p:childTnLst>
+                                    <p:set>
+                                      <p:cBhvr>
+                                        <p:cTn id="22" dur="1" fill="hold">
+                                          <p:stCondLst>
+                                            <p:cond delay="0"/>
+                                          </p:stCondLst>
+                                        </p:cTn>
+                                        <p:tgtEl>
+                                          <p:spTgt spid="3">
+                                            <p:txEl>
+                                              <p:pRg st="6" end="6"/>
+                                            </p:txEl>
+                                          </p:spTgt>
+                                        </p:tgtEl>
+                                        <p:attrNameLst>
+                                          <p:attrName>style.visibility</p:attrName>
+                                        </p:attrNameLst>
+                                      </p:cBhvr>
+                                      <p:to>
+                                        <p:strVal val="visible"/>
+                                      </p:to>
+                                    </p:set>
+                                  </p:childTnLst>
+                                </p:cTn>
+                              </p:par>
+                            </p:childTnLst>
+                          </p:cTn>
+                        </p:par>
+                      </p:childTnLst>
+                    </p:cTn>
+                  </p:par>
+                </p:childTnLst>
+              </p:cTn>
+              <p:prevCondLst>
+                <p:cond evt="onPrev" delay="0">
+                  <p:tgtEl>
+                    <p:sldTgt/>
+                  </p:tgtEl>
+                </p:cond>
+              </p:prevCondLst>
+              <p:nextCondLst>
+                <p:cond evt="onNext" delay="0">
+                  <p:tgtEl>
+                    <p:sldTgt/>
+                  </p:tgtEl>
+                </p:cond>
+              </p:nextCondLst>
+            </p:seq>
+          </p:childTnLst>
+        </p:cTn>
+      </p:par>
+    </p:tnLst>
+  </p:timing>
+</p:sld>
+</file>
+
+<file path=ppt/slides/slide41.xml><?xml version="1.0" encoding="utf-8"?>
 <p:sld xmlns:a="http://schemas.openxmlformats.org/drawingml/2006/main" xmlns:r="http://schemas.openxmlformats.org/officeDocument/2006/relationships" xmlns:p="http://schemas.openxmlformats.org/presentationml/2006/main">
   <p:cSld>
     <p:spTree>
@@ -25860,7 +27774,7 @@
 </p:sld>
 </file>
 
-<file path=ppt/slides/slide41.xml><?xml version="1.0" encoding="utf-8"?>
+<file path=ppt/slides/slide42.xml><?xml version="1.0" encoding="utf-8"?>
 <p:sld xmlns:a="http://schemas.openxmlformats.org/drawingml/2006/main" xmlns:r="http://schemas.openxmlformats.org/officeDocument/2006/relationships" xmlns:p="http://schemas.openxmlformats.org/presentationml/2006/main">
   <p:cSld>
     <p:spTree>
@@ -28735,7 +30649,7 @@
 </p:sld>
 </file>
 
-<file path=ppt/slides/slide42.xml><?xml version="1.0" encoding="utf-8"?>
+<file path=ppt/slides/slide43.xml><?xml version="1.0" encoding="utf-8"?>
 <p:sld xmlns:a="http://schemas.openxmlformats.org/drawingml/2006/main" xmlns:r="http://schemas.openxmlformats.org/officeDocument/2006/relationships" xmlns:p="http://schemas.openxmlformats.org/presentationml/2006/main">
   <p:cSld>
     <p:spTree>
@@ -28801,7 +30715,7 @@
 </p:sld>
 </file>
 
-<file path=ppt/slides/slide43.xml><?xml version="1.0" encoding="utf-8"?>
+<file path=ppt/slides/slide44.xml><?xml version="1.0" encoding="utf-8"?>
 <p:sld xmlns:a="http://schemas.openxmlformats.org/drawingml/2006/main" xmlns:r="http://schemas.openxmlformats.org/officeDocument/2006/relationships" xmlns:p="http://schemas.openxmlformats.org/presentationml/2006/main">
   <p:cSld>
     <p:spTree>
@@ -29205,7 +31119,7 @@
 </p:sld>
 </file>
 
-<file path=ppt/slides/slide44.xml><?xml version="1.0" encoding="utf-8"?>
+<file path=ppt/slides/slide45.xml><?xml version="1.0" encoding="utf-8"?>
 <p:sld xmlns:a="http://schemas.openxmlformats.org/drawingml/2006/main" xmlns:r="http://schemas.openxmlformats.org/officeDocument/2006/relationships" xmlns:p="http://schemas.openxmlformats.org/presentationml/2006/main">
   <p:cSld>
     <p:spTree>
@@ -29727,7 +31641,7 @@
 </p:sld>
 </file>
 
-<file path=ppt/slides/slide45.xml><?xml version="1.0" encoding="utf-8"?>
+<file path=ppt/slides/slide46.xml><?xml version="1.0" encoding="utf-8"?>
 <p:sld xmlns:a="http://schemas.openxmlformats.org/drawingml/2006/main" xmlns:r="http://schemas.openxmlformats.org/officeDocument/2006/relationships" xmlns:p="http://schemas.openxmlformats.org/presentationml/2006/main">
   <p:cSld>
     <p:spTree>
@@ -30866,7 +32780,7 @@
 </p:sld>
 </file>
 
-<file path=ppt/slides/slide46.xml><?xml version="1.0" encoding="utf-8"?>
+<file path=ppt/slides/slide47.xml><?xml version="1.0" encoding="utf-8"?>
 <p:sld xmlns:a="http://schemas.openxmlformats.org/drawingml/2006/main" xmlns:r="http://schemas.openxmlformats.org/officeDocument/2006/relationships" xmlns:p="http://schemas.openxmlformats.org/presentationml/2006/main">
   <p:cSld>
     <p:spTree>
@@ -30914,6 +32828,13 @@
           <a:p>
             <a:r>
               <a:rPr lang="en-US" sz="4400" dirty="0"/>
+              <a:t>Properties of Hash Functions and </a:t>
+            </a:r>
+            <a:br>
+              <a:rPr lang="en-US" sz="4400" dirty="0"/>
+            </a:br>
+            <a:r>
+              <a:rPr lang="en-US" sz="4400" dirty="0"/>
               <a:t>Hash Collisions</a:t>
             </a:r>
           </a:p>
@@ -30932,7 +32853,7 @@
 </p:sld>
 </file>
 
-<file path=ppt/slides/slide47.xml><?xml version="1.0" encoding="utf-8"?>
+<file path=ppt/slides/slide48.xml><?xml version="1.0" encoding="utf-8"?>
 <p:sld xmlns:a="http://schemas.openxmlformats.org/drawingml/2006/main" xmlns:r="http://schemas.openxmlformats.org/officeDocument/2006/relationships" xmlns:p="http://schemas.openxmlformats.org/presentationml/2006/main">
   <p:cSld>
     <p:spTree>
@@ -31749,7 +33670,7 @@
 </p:sld>
 </file>
 
-<file path=ppt/slides/slide48.xml><?xml version="1.0" encoding="utf-8"?>
+<file path=ppt/slides/slide49.xml><?xml version="1.0" encoding="utf-8"?>
 <p:sld xmlns:a="http://schemas.openxmlformats.org/drawingml/2006/main" xmlns:r="http://schemas.openxmlformats.org/officeDocument/2006/relationships" xmlns:p="http://schemas.openxmlformats.org/presentationml/2006/main">
   <p:cSld>
     <p:spTree>
@@ -32296,7 +34217,401 @@
 </p:sld>
 </file>
 
-<file path=ppt/slides/slide49.xml><?xml version="1.0" encoding="utf-8"?>
+<file path=ppt/slides/slide5.xml><?xml version="1.0" encoding="utf-8"?>
+<p:sld xmlns:a="http://schemas.openxmlformats.org/drawingml/2006/main" xmlns:r="http://schemas.openxmlformats.org/officeDocument/2006/relationships" xmlns:p="http://schemas.openxmlformats.org/presentationml/2006/main">
+  <p:cSld>
+    <p:spTree>
+      <p:nvGrpSpPr>
+        <p:cNvPr id="1" name=""/>
+        <p:cNvGrpSpPr/>
+        <p:nvPr/>
+      </p:nvGrpSpPr>
+      <p:grpSpPr>
+        <a:xfrm>
+          <a:off x="0" y="0"/>
+          <a:ext cx="0" cy="0"/>
+          <a:chOff x="0" y="0"/>
+          <a:chExt cx="0" cy="0"/>
+        </a:xfrm>
+      </p:grpSpPr>
+      <p:sp>
+        <p:nvSpPr>
+          <p:cNvPr id="3" name="Content Placeholder 2">
+            <a:extLst>
+              <a:ext uri="{FF2B5EF4-FFF2-40B4-BE49-F238E27FC236}">
+                <a16:creationId xmlns:a16="http://schemas.microsoft.com/office/drawing/2014/main" id="{258E6AF3-7615-4BD1-878E-A94C93E98F90}"/>
+              </a:ext>
+            </a:extLst>
+          </p:cNvPr>
+          <p:cNvSpPr>
+            <a:spLocks noGrp="1"/>
+          </p:cNvSpPr>
+          <p:nvPr>
+            <p:ph idx="1"/>
+          </p:nvPr>
+        </p:nvSpPr>
+        <p:spPr>
+          <a:xfrm>
+            <a:off x="838200" y="1217458"/>
+            <a:ext cx="10515600" cy="5640542"/>
+          </a:xfrm>
+        </p:spPr>
+        <p:txBody>
+          <a:bodyPr>
+            <a:normAutofit fontScale="92500" lnSpcReduction="10000"/>
+          </a:bodyPr>
+          <a:lstStyle/>
+          <a:p>
+            <a:pPr marL="0" indent="0">
+              <a:buNone/>
+            </a:pPr>
+            <a:r>
+              <a:rPr lang="en-US" sz="3200" dirty="0"/>
+              <a:t>What is the KDD process?   </a:t>
+            </a:r>
+          </a:p>
+          <a:p>
+            <a:pPr marL="0" indent="0">
+              <a:buNone/>
+            </a:pPr>
+            <a:endParaRPr lang="en-US" dirty="0"/>
+          </a:p>
+          <a:p>
+            <a:pPr marL="0" indent="0">
+              <a:buNone/>
+            </a:pPr>
+            <a:endParaRPr lang="en-US" dirty="0"/>
+          </a:p>
+          <a:p>
+            <a:pPr marL="0" indent="0">
+              <a:buNone/>
+            </a:pPr>
+            <a:endParaRPr lang="en-US" dirty="0"/>
+          </a:p>
+          <a:p>
+            <a:pPr marL="0" indent="0">
+              <a:buNone/>
+            </a:pPr>
+            <a:endParaRPr lang="en-US" dirty="0"/>
+          </a:p>
+          <a:p>
+            <a:pPr marL="0" indent="0">
+              <a:buNone/>
+            </a:pPr>
+            <a:endParaRPr lang="en-US" dirty="0"/>
+          </a:p>
+          <a:p>
+            <a:pPr marL="0" indent="0">
+              <a:buNone/>
+            </a:pPr>
+            <a:endParaRPr lang="en-US" dirty="0"/>
+          </a:p>
+          <a:p>
+            <a:pPr marL="0" indent="0">
+              <a:buNone/>
+            </a:pPr>
+            <a:endParaRPr lang="en-US" dirty="0"/>
+          </a:p>
+          <a:p>
+            <a:pPr marL="0" indent="0">
+              <a:buNone/>
+            </a:pPr>
+            <a:endParaRPr lang="en-US" dirty="0">
+              <a:solidFill>
+                <a:schemeClr val="accent1"/>
+              </a:solidFill>
+            </a:endParaRPr>
+          </a:p>
+          <a:p>
+            <a:pPr marL="0" indent="0">
+              <a:buNone/>
+            </a:pPr>
+            <a:endParaRPr lang="en-US" dirty="0">
+              <a:solidFill>
+                <a:schemeClr val="accent1"/>
+              </a:solidFill>
+            </a:endParaRPr>
+          </a:p>
+          <a:p>
+            <a:pPr marL="0" indent="0">
+              <a:buNone/>
+            </a:pPr>
+            <a:endParaRPr lang="en-US" dirty="0">
+              <a:solidFill>
+                <a:schemeClr val="accent1"/>
+              </a:solidFill>
+            </a:endParaRPr>
+          </a:p>
+          <a:p>
+            <a:pPr marL="0" indent="0">
+              <a:buNone/>
+            </a:pPr>
+            <a:r>
+              <a:rPr lang="en-US" dirty="0">
+                <a:solidFill>
+                  <a:schemeClr val="accent1"/>
+                </a:solidFill>
+              </a:rPr>
+              <a:t>Is this old diagram representative?  - e.g. Fayyad et.al. 1996 </a:t>
+            </a:r>
+          </a:p>
+        </p:txBody>
+      </p:sp>
+      <p:sp>
+        <p:nvSpPr>
+          <p:cNvPr id="6" name="Title 1">
+            <a:extLst>
+              <a:ext uri="{FF2B5EF4-FFF2-40B4-BE49-F238E27FC236}">
+                <a16:creationId xmlns:a16="http://schemas.microsoft.com/office/drawing/2014/main" id="{CD29F70F-B868-451B-A65D-8721F4C7A2D9}"/>
+              </a:ext>
+            </a:extLst>
+          </p:cNvPr>
+          <p:cNvSpPr txBox="1">
+            <a:spLocks/>
+          </p:cNvSpPr>
+          <p:nvPr/>
+        </p:nvSpPr>
+        <p:spPr>
+          <a:xfrm>
+            <a:off x="838200" y="-635"/>
+            <a:ext cx="10515600" cy="1325563"/>
+          </a:xfrm>
+          <a:prstGeom prst="rect">
+            <a:avLst/>
+          </a:prstGeom>
+        </p:spPr>
+        <p:txBody>
+          <a:bodyPr vert="horz" lIns="91440" tIns="45720" rIns="91440" bIns="45720" rtlCol="0" anchor="ctr">
+            <a:normAutofit/>
+          </a:bodyPr>
+          <a:lstStyle>
+            <a:lvl1pPr algn="l" defTabSz="914400" rtl="0" eaLnBrk="1" latinLnBrk="0" hangingPunct="1">
+              <a:lnSpc>
+                <a:spcPct val="90000"/>
+              </a:lnSpc>
+              <a:spcBef>
+                <a:spcPct val="0"/>
+              </a:spcBef>
+              <a:buNone/>
+              <a:defRPr sz="4400" kern="1200">
+                <a:solidFill>
+                  <a:schemeClr val="tx1"/>
+                </a:solidFill>
+                <a:latin typeface="+mj-lt"/>
+                <a:ea typeface="+mj-ea"/>
+                <a:cs typeface="+mj-cs"/>
+              </a:defRPr>
+            </a:lvl1pPr>
+          </a:lstStyle>
+          <a:p>
+            <a:r>
+              <a:rPr lang="en-US" dirty="0">
+                <a:latin typeface="+mn-lt"/>
+              </a:rPr>
+              <a:t>KDD process</a:t>
+            </a:r>
+          </a:p>
+        </p:txBody>
+      </p:sp>
+      <p:pic>
+        <p:nvPicPr>
+          <p:cNvPr id="4" name="Picture 3">
+            <a:extLst>
+              <a:ext uri="{FF2B5EF4-FFF2-40B4-BE49-F238E27FC236}">
+                <a16:creationId xmlns:a16="http://schemas.microsoft.com/office/drawing/2014/main" id="{41A10601-345E-4A04-878A-28FFF71506B5}"/>
+              </a:ext>
+            </a:extLst>
+          </p:cNvPr>
+          <p:cNvPicPr>
+            <a:picLocks noChangeAspect="1"/>
+          </p:cNvPicPr>
+          <p:nvPr/>
+        </p:nvPicPr>
+        <p:blipFill>
+          <a:blip r:embed="rId2"/>
+          <a:stretch>
+            <a:fillRect/>
+          </a:stretch>
+        </p:blipFill>
+        <p:spPr>
+          <a:xfrm>
+            <a:off x="951375" y="1651145"/>
+            <a:ext cx="8488232" cy="4404795"/>
+          </a:xfrm>
+          <a:prstGeom prst="rect">
+            <a:avLst/>
+          </a:prstGeom>
+        </p:spPr>
+      </p:pic>
+    </p:spTree>
+    <p:extLst>
+      <p:ext uri="{BB962C8B-B14F-4D97-AF65-F5344CB8AC3E}">
+        <p14:creationId xmlns:p14="http://schemas.microsoft.com/office/powerpoint/2010/main" val="2011350768"/>
+      </p:ext>
+    </p:extLst>
+  </p:cSld>
+  <p:clrMapOvr>
+    <a:masterClrMapping/>
+  </p:clrMapOvr>
+  <p:timing>
+    <p:tnLst>
+      <p:par>
+        <p:cTn id="1" dur="indefinite" restart="never" nodeType="tmRoot">
+          <p:childTnLst>
+            <p:seq concurrent="1" nextAc="seek">
+              <p:cTn id="2" dur="indefinite" nodeType="mainSeq">
+                <p:childTnLst>
+                  <p:par>
+                    <p:cTn id="3" fill="hold">
+                      <p:stCondLst>
+                        <p:cond delay="indefinite"/>
+                      </p:stCondLst>
+                      <p:childTnLst>
+                        <p:par>
+                          <p:cTn id="4" fill="hold">
+                            <p:stCondLst>
+                              <p:cond delay="0"/>
+                            </p:stCondLst>
+                            <p:childTnLst>
+                              <p:par>
+                                <p:cTn id="5" presetID="1" presetClass="entr" presetSubtype="0" fill="hold" nodeType="clickEffect">
+                                  <p:stCondLst>
+                                    <p:cond delay="0"/>
+                                  </p:stCondLst>
+                                  <p:childTnLst>
+                                    <p:set>
+                                      <p:cBhvr>
+                                        <p:cTn id="6" dur="1" fill="hold">
+                                          <p:stCondLst>
+                                            <p:cond delay="0"/>
+                                          </p:stCondLst>
+                                        </p:cTn>
+                                        <p:tgtEl>
+                                          <p:spTgt spid="3">
+                                            <p:txEl>
+                                              <p:pRg st="0" end="0"/>
+                                            </p:txEl>
+                                          </p:spTgt>
+                                        </p:tgtEl>
+                                        <p:attrNameLst>
+                                          <p:attrName>style.visibility</p:attrName>
+                                        </p:attrNameLst>
+                                      </p:cBhvr>
+                                      <p:to>
+                                        <p:strVal val="visible"/>
+                                      </p:to>
+                                    </p:set>
+                                  </p:childTnLst>
+                                </p:cTn>
+                              </p:par>
+                            </p:childTnLst>
+                          </p:cTn>
+                        </p:par>
+                      </p:childTnLst>
+                    </p:cTn>
+                  </p:par>
+                  <p:par>
+                    <p:cTn id="7" fill="hold">
+                      <p:stCondLst>
+                        <p:cond delay="indefinite"/>
+                      </p:stCondLst>
+                      <p:childTnLst>
+                        <p:par>
+                          <p:cTn id="8" fill="hold">
+                            <p:stCondLst>
+                              <p:cond delay="0"/>
+                            </p:stCondLst>
+                            <p:childTnLst>
+                              <p:par>
+                                <p:cTn id="9" presetID="1" presetClass="entr" presetSubtype="0" fill="hold" nodeType="clickEffect">
+                                  <p:stCondLst>
+                                    <p:cond delay="0"/>
+                                  </p:stCondLst>
+                                  <p:childTnLst>
+                                    <p:set>
+                                      <p:cBhvr>
+                                        <p:cTn id="10" dur="1" fill="hold">
+                                          <p:stCondLst>
+                                            <p:cond delay="0"/>
+                                          </p:stCondLst>
+                                        </p:cTn>
+                                        <p:tgtEl>
+                                          <p:spTgt spid="3">
+                                            <p:txEl>
+                                              <p:pRg st="11" end="11"/>
+                                            </p:txEl>
+                                          </p:spTgt>
+                                        </p:tgtEl>
+                                        <p:attrNameLst>
+                                          <p:attrName>style.visibility</p:attrName>
+                                        </p:attrNameLst>
+                                      </p:cBhvr>
+                                      <p:to>
+                                        <p:strVal val="visible"/>
+                                      </p:to>
+                                    </p:set>
+                                  </p:childTnLst>
+                                </p:cTn>
+                              </p:par>
+                              <p:par>
+                                <p:cTn id="11" presetID="1" presetClass="entr" presetSubtype="0" fill="hold" nodeType="withEffect">
+                                  <p:stCondLst>
+                                    <p:cond delay="0"/>
+                                  </p:stCondLst>
+                                  <p:childTnLst>
+                                    <p:set>
+                                      <p:cBhvr>
+                                        <p:cTn id="12" dur="1" fill="hold">
+                                          <p:stCondLst>
+                                            <p:cond delay="0"/>
+                                          </p:stCondLst>
+                                        </p:cTn>
+                                        <p:tgtEl>
+                                          <p:spTgt spid="4"/>
+                                        </p:tgtEl>
+                                        <p:attrNameLst>
+                                          <p:attrName>style.visibility</p:attrName>
+                                        </p:attrNameLst>
+                                      </p:cBhvr>
+                                      <p:to>
+                                        <p:strVal val="visible"/>
+                                      </p:to>
+                                    </p:set>
+                                  </p:childTnLst>
+                                </p:cTn>
+                              </p:par>
+                            </p:childTnLst>
+                          </p:cTn>
+                        </p:par>
+                      </p:childTnLst>
+                    </p:cTn>
+                  </p:par>
+                </p:childTnLst>
+              </p:cTn>
+              <p:prevCondLst>
+                <p:cond evt="onPrev" delay="0">
+                  <p:tgtEl>
+                    <p:sldTgt/>
+                  </p:tgtEl>
+                </p:cond>
+              </p:prevCondLst>
+              <p:nextCondLst>
+                <p:cond evt="onNext" delay="0">
+                  <p:tgtEl>
+                    <p:sldTgt/>
+                  </p:tgtEl>
+                </p:cond>
+              </p:nextCondLst>
+            </p:seq>
+          </p:childTnLst>
+        </p:cTn>
+      </p:par>
+    </p:tnLst>
+  </p:timing>
+</p:sld>
+</file>
+
+<file path=ppt/slides/slide50.xml><?xml version="1.0" encoding="utf-8"?>
 <p:sld xmlns:a="http://schemas.openxmlformats.org/drawingml/2006/main" xmlns:r="http://schemas.openxmlformats.org/officeDocument/2006/relationships" xmlns:p="http://schemas.openxmlformats.org/presentationml/2006/main">
   <p:cSld>
     <p:spTree>
@@ -32895,401 +35210,7 @@
 </p:sld>
 </file>
 
-<file path=ppt/slides/slide5.xml><?xml version="1.0" encoding="utf-8"?>
-<p:sld xmlns:a="http://schemas.openxmlformats.org/drawingml/2006/main" xmlns:r="http://schemas.openxmlformats.org/officeDocument/2006/relationships" xmlns:p="http://schemas.openxmlformats.org/presentationml/2006/main">
-  <p:cSld>
-    <p:spTree>
-      <p:nvGrpSpPr>
-        <p:cNvPr id="1" name=""/>
-        <p:cNvGrpSpPr/>
-        <p:nvPr/>
-      </p:nvGrpSpPr>
-      <p:grpSpPr>
-        <a:xfrm>
-          <a:off x="0" y="0"/>
-          <a:ext cx="0" cy="0"/>
-          <a:chOff x="0" y="0"/>
-          <a:chExt cx="0" cy="0"/>
-        </a:xfrm>
-      </p:grpSpPr>
-      <p:sp>
-        <p:nvSpPr>
-          <p:cNvPr id="3" name="Content Placeholder 2">
-            <a:extLst>
-              <a:ext uri="{FF2B5EF4-FFF2-40B4-BE49-F238E27FC236}">
-                <a16:creationId xmlns:a16="http://schemas.microsoft.com/office/drawing/2014/main" id="{258E6AF3-7615-4BD1-878E-A94C93E98F90}"/>
-              </a:ext>
-            </a:extLst>
-          </p:cNvPr>
-          <p:cNvSpPr>
-            <a:spLocks noGrp="1"/>
-          </p:cNvSpPr>
-          <p:nvPr>
-            <p:ph idx="1"/>
-          </p:nvPr>
-        </p:nvSpPr>
-        <p:spPr>
-          <a:xfrm>
-            <a:off x="838200" y="1217458"/>
-            <a:ext cx="10515600" cy="5640542"/>
-          </a:xfrm>
-        </p:spPr>
-        <p:txBody>
-          <a:bodyPr>
-            <a:normAutofit fontScale="92500" lnSpcReduction="10000"/>
-          </a:bodyPr>
-          <a:lstStyle/>
-          <a:p>
-            <a:pPr marL="0" indent="0">
-              <a:buNone/>
-            </a:pPr>
-            <a:r>
-              <a:rPr lang="en-US" sz="3200" dirty="0"/>
-              <a:t>What is the KDD process?   </a:t>
-            </a:r>
-          </a:p>
-          <a:p>
-            <a:pPr marL="0" indent="0">
-              <a:buNone/>
-            </a:pPr>
-            <a:endParaRPr lang="en-US" dirty="0"/>
-          </a:p>
-          <a:p>
-            <a:pPr marL="0" indent="0">
-              <a:buNone/>
-            </a:pPr>
-            <a:endParaRPr lang="en-US" dirty="0"/>
-          </a:p>
-          <a:p>
-            <a:pPr marL="0" indent="0">
-              <a:buNone/>
-            </a:pPr>
-            <a:endParaRPr lang="en-US" dirty="0"/>
-          </a:p>
-          <a:p>
-            <a:pPr marL="0" indent="0">
-              <a:buNone/>
-            </a:pPr>
-            <a:endParaRPr lang="en-US" dirty="0"/>
-          </a:p>
-          <a:p>
-            <a:pPr marL="0" indent="0">
-              <a:buNone/>
-            </a:pPr>
-            <a:endParaRPr lang="en-US" dirty="0"/>
-          </a:p>
-          <a:p>
-            <a:pPr marL="0" indent="0">
-              <a:buNone/>
-            </a:pPr>
-            <a:endParaRPr lang="en-US" dirty="0"/>
-          </a:p>
-          <a:p>
-            <a:pPr marL="0" indent="0">
-              <a:buNone/>
-            </a:pPr>
-            <a:endParaRPr lang="en-US" dirty="0"/>
-          </a:p>
-          <a:p>
-            <a:pPr marL="0" indent="0">
-              <a:buNone/>
-            </a:pPr>
-            <a:endParaRPr lang="en-US" dirty="0">
-              <a:solidFill>
-                <a:schemeClr val="accent1"/>
-              </a:solidFill>
-            </a:endParaRPr>
-          </a:p>
-          <a:p>
-            <a:pPr marL="0" indent="0">
-              <a:buNone/>
-            </a:pPr>
-            <a:endParaRPr lang="en-US" dirty="0">
-              <a:solidFill>
-                <a:schemeClr val="accent1"/>
-              </a:solidFill>
-            </a:endParaRPr>
-          </a:p>
-          <a:p>
-            <a:pPr marL="0" indent="0">
-              <a:buNone/>
-            </a:pPr>
-            <a:endParaRPr lang="en-US" dirty="0">
-              <a:solidFill>
-                <a:schemeClr val="accent1"/>
-              </a:solidFill>
-            </a:endParaRPr>
-          </a:p>
-          <a:p>
-            <a:pPr marL="0" indent="0">
-              <a:buNone/>
-            </a:pPr>
-            <a:r>
-              <a:rPr lang="en-US" dirty="0">
-                <a:solidFill>
-                  <a:schemeClr val="accent1"/>
-                </a:solidFill>
-              </a:rPr>
-              <a:t>Is this old diagram representative?  - e.g. Fayyad et.al. 1996 </a:t>
-            </a:r>
-          </a:p>
-        </p:txBody>
-      </p:sp>
-      <p:sp>
-        <p:nvSpPr>
-          <p:cNvPr id="6" name="Title 1">
-            <a:extLst>
-              <a:ext uri="{FF2B5EF4-FFF2-40B4-BE49-F238E27FC236}">
-                <a16:creationId xmlns:a16="http://schemas.microsoft.com/office/drawing/2014/main" id="{CD29F70F-B868-451B-A65D-8721F4C7A2D9}"/>
-              </a:ext>
-            </a:extLst>
-          </p:cNvPr>
-          <p:cNvSpPr txBox="1">
-            <a:spLocks/>
-          </p:cNvSpPr>
-          <p:nvPr/>
-        </p:nvSpPr>
-        <p:spPr>
-          <a:xfrm>
-            <a:off x="838200" y="-635"/>
-            <a:ext cx="10515600" cy="1325563"/>
-          </a:xfrm>
-          <a:prstGeom prst="rect">
-            <a:avLst/>
-          </a:prstGeom>
-        </p:spPr>
-        <p:txBody>
-          <a:bodyPr vert="horz" lIns="91440" tIns="45720" rIns="91440" bIns="45720" rtlCol="0" anchor="ctr">
-            <a:normAutofit/>
-          </a:bodyPr>
-          <a:lstStyle>
-            <a:lvl1pPr algn="l" defTabSz="914400" rtl="0" eaLnBrk="1" latinLnBrk="0" hangingPunct="1">
-              <a:lnSpc>
-                <a:spcPct val="90000"/>
-              </a:lnSpc>
-              <a:spcBef>
-                <a:spcPct val="0"/>
-              </a:spcBef>
-              <a:buNone/>
-              <a:defRPr sz="4400" kern="1200">
-                <a:solidFill>
-                  <a:schemeClr val="tx1"/>
-                </a:solidFill>
-                <a:latin typeface="+mj-lt"/>
-                <a:ea typeface="+mj-ea"/>
-                <a:cs typeface="+mj-cs"/>
-              </a:defRPr>
-            </a:lvl1pPr>
-          </a:lstStyle>
-          <a:p>
-            <a:r>
-              <a:rPr lang="en-US" dirty="0">
-                <a:latin typeface="+mn-lt"/>
-              </a:rPr>
-              <a:t>KDD process</a:t>
-            </a:r>
-          </a:p>
-        </p:txBody>
-      </p:sp>
-      <p:pic>
-        <p:nvPicPr>
-          <p:cNvPr id="4" name="Picture 3">
-            <a:extLst>
-              <a:ext uri="{FF2B5EF4-FFF2-40B4-BE49-F238E27FC236}">
-                <a16:creationId xmlns:a16="http://schemas.microsoft.com/office/drawing/2014/main" id="{41A10601-345E-4A04-878A-28FFF71506B5}"/>
-              </a:ext>
-            </a:extLst>
-          </p:cNvPr>
-          <p:cNvPicPr>
-            <a:picLocks noChangeAspect="1"/>
-          </p:cNvPicPr>
-          <p:nvPr/>
-        </p:nvPicPr>
-        <p:blipFill>
-          <a:blip r:embed="rId2"/>
-          <a:stretch>
-            <a:fillRect/>
-          </a:stretch>
-        </p:blipFill>
-        <p:spPr>
-          <a:xfrm>
-            <a:off x="951375" y="1651145"/>
-            <a:ext cx="8488232" cy="4404795"/>
-          </a:xfrm>
-          <a:prstGeom prst="rect">
-            <a:avLst/>
-          </a:prstGeom>
-        </p:spPr>
-      </p:pic>
-    </p:spTree>
-    <p:extLst>
-      <p:ext uri="{BB962C8B-B14F-4D97-AF65-F5344CB8AC3E}">
-        <p14:creationId xmlns:p14="http://schemas.microsoft.com/office/powerpoint/2010/main" val="2011350768"/>
-      </p:ext>
-    </p:extLst>
-  </p:cSld>
-  <p:clrMapOvr>
-    <a:masterClrMapping/>
-  </p:clrMapOvr>
-  <p:timing>
-    <p:tnLst>
-      <p:par>
-        <p:cTn id="1" dur="indefinite" restart="never" nodeType="tmRoot">
-          <p:childTnLst>
-            <p:seq concurrent="1" nextAc="seek">
-              <p:cTn id="2" dur="indefinite" nodeType="mainSeq">
-                <p:childTnLst>
-                  <p:par>
-                    <p:cTn id="3" fill="hold">
-                      <p:stCondLst>
-                        <p:cond delay="indefinite"/>
-                      </p:stCondLst>
-                      <p:childTnLst>
-                        <p:par>
-                          <p:cTn id="4" fill="hold">
-                            <p:stCondLst>
-                              <p:cond delay="0"/>
-                            </p:stCondLst>
-                            <p:childTnLst>
-                              <p:par>
-                                <p:cTn id="5" presetID="1" presetClass="entr" presetSubtype="0" fill="hold" nodeType="clickEffect">
-                                  <p:stCondLst>
-                                    <p:cond delay="0"/>
-                                  </p:stCondLst>
-                                  <p:childTnLst>
-                                    <p:set>
-                                      <p:cBhvr>
-                                        <p:cTn id="6" dur="1" fill="hold">
-                                          <p:stCondLst>
-                                            <p:cond delay="0"/>
-                                          </p:stCondLst>
-                                        </p:cTn>
-                                        <p:tgtEl>
-                                          <p:spTgt spid="3">
-                                            <p:txEl>
-                                              <p:pRg st="0" end="0"/>
-                                            </p:txEl>
-                                          </p:spTgt>
-                                        </p:tgtEl>
-                                        <p:attrNameLst>
-                                          <p:attrName>style.visibility</p:attrName>
-                                        </p:attrNameLst>
-                                      </p:cBhvr>
-                                      <p:to>
-                                        <p:strVal val="visible"/>
-                                      </p:to>
-                                    </p:set>
-                                  </p:childTnLst>
-                                </p:cTn>
-                              </p:par>
-                            </p:childTnLst>
-                          </p:cTn>
-                        </p:par>
-                      </p:childTnLst>
-                    </p:cTn>
-                  </p:par>
-                  <p:par>
-                    <p:cTn id="7" fill="hold">
-                      <p:stCondLst>
-                        <p:cond delay="indefinite"/>
-                      </p:stCondLst>
-                      <p:childTnLst>
-                        <p:par>
-                          <p:cTn id="8" fill="hold">
-                            <p:stCondLst>
-                              <p:cond delay="0"/>
-                            </p:stCondLst>
-                            <p:childTnLst>
-                              <p:par>
-                                <p:cTn id="9" presetID="1" presetClass="entr" presetSubtype="0" fill="hold" nodeType="clickEffect">
-                                  <p:stCondLst>
-                                    <p:cond delay="0"/>
-                                  </p:stCondLst>
-                                  <p:childTnLst>
-                                    <p:set>
-                                      <p:cBhvr>
-                                        <p:cTn id="10" dur="1" fill="hold">
-                                          <p:stCondLst>
-                                            <p:cond delay="0"/>
-                                          </p:stCondLst>
-                                        </p:cTn>
-                                        <p:tgtEl>
-                                          <p:spTgt spid="3">
-                                            <p:txEl>
-                                              <p:pRg st="11" end="11"/>
-                                            </p:txEl>
-                                          </p:spTgt>
-                                        </p:tgtEl>
-                                        <p:attrNameLst>
-                                          <p:attrName>style.visibility</p:attrName>
-                                        </p:attrNameLst>
-                                      </p:cBhvr>
-                                      <p:to>
-                                        <p:strVal val="visible"/>
-                                      </p:to>
-                                    </p:set>
-                                  </p:childTnLst>
-                                </p:cTn>
-                              </p:par>
-                              <p:par>
-                                <p:cTn id="11" presetID="1" presetClass="entr" presetSubtype="0" fill="hold" nodeType="withEffect">
-                                  <p:stCondLst>
-                                    <p:cond delay="0"/>
-                                  </p:stCondLst>
-                                  <p:childTnLst>
-                                    <p:set>
-                                      <p:cBhvr>
-                                        <p:cTn id="12" dur="1" fill="hold">
-                                          <p:stCondLst>
-                                            <p:cond delay="0"/>
-                                          </p:stCondLst>
-                                        </p:cTn>
-                                        <p:tgtEl>
-                                          <p:spTgt spid="4"/>
-                                        </p:tgtEl>
-                                        <p:attrNameLst>
-                                          <p:attrName>style.visibility</p:attrName>
-                                        </p:attrNameLst>
-                                      </p:cBhvr>
-                                      <p:to>
-                                        <p:strVal val="visible"/>
-                                      </p:to>
-                                    </p:set>
-                                  </p:childTnLst>
-                                </p:cTn>
-                              </p:par>
-                            </p:childTnLst>
-                          </p:cTn>
-                        </p:par>
-                      </p:childTnLst>
-                    </p:cTn>
-                  </p:par>
-                </p:childTnLst>
-              </p:cTn>
-              <p:prevCondLst>
-                <p:cond evt="onPrev" delay="0">
-                  <p:tgtEl>
-                    <p:sldTgt/>
-                  </p:tgtEl>
-                </p:cond>
-              </p:prevCondLst>
-              <p:nextCondLst>
-                <p:cond evt="onNext" delay="0">
-                  <p:tgtEl>
-                    <p:sldTgt/>
-                  </p:tgtEl>
-                </p:cond>
-              </p:nextCondLst>
-            </p:seq>
-          </p:childTnLst>
-        </p:cTn>
-      </p:par>
-    </p:tnLst>
-  </p:timing>
-</p:sld>
-</file>
-
-<file path=ppt/slides/slide50.xml><?xml version="1.0" encoding="utf-8"?>
+<file path=ppt/slides/slide51.xml><?xml version="1.0" encoding="utf-8"?>
 <p:sld xmlns:a="http://schemas.openxmlformats.org/drawingml/2006/main" xmlns:r="http://schemas.openxmlformats.org/officeDocument/2006/relationships" xmlns:p="http://schemas.openxmlformats.org/presentationml/2006/main">
   <p:cSld>
     <p:spTree>
@@ -33878,7 +35799,7 @@
 </p:sld>
 </file>
 
-<file path=ppt/slides/slide51.xml><?xml version="1.0" encoding="utf-8"?>
+<file path=ppt/slides/slide52.xml><?xml version="1.0" encoding="utf-8"?>
 <p:sld xmlns:a="http://schemas.openxmlformats.org/drawingml/2006/main" xmlns:r="http://schemas.openxmlformats.org/officeDocument/2006/relationships" xmlns:p="http://schemas.openxmlformats.org/presentationml/2006/main">
   <p:cSld>
     <p:spTree>
@@ -34811,7 +36732,7 @@
 </p:sld>
 </file>
 
-<file path=ppt/slides/slide52.xml><?xml version="1.0" encoding="utf-8"?>
+<file path=ppt/slides/slide53.xml><?xml version="1.0" encoding="utf-8"?>
 <p:sld xmlns:a="http://schemas.openxmlformats.org/drawingml/2006/main" xmlns:r="http://schemas.openxmlformats.org/officeDocument/2006/relationships" xmlns:p="http://schemas.openxmlformats.org/presentationml/2006/main">
   <p:cSld>
     <p:spTree>
@@ -35410,7 +37331,7 @@
 </p:sld>
 </file>
 
-<file path=ppt/slides/slide53.xml><?xml version="1.0" encoding="utf-8"?>
+<file path=ppt/slides/slide54.xml><?xml version="1.0" encoding="utf-8"?>
 <p:sld xmlns:a="http://schemas.openxmlformats.org/drawingml/2006/main" xmlns:r="http://schemas.openxmlformats.org/officeDocument/2006/relationships" xmlns:p="http://schemas.openxmlformats.org/presentationml/2006/main">
   <p:cSld>
     <p:spTree>
@@ -35928,7 +37849,485 @@
 </p:sld>
 </file>
 
-<file path=ppt/slides/slide54.xml><?xml version="1.0" encoding="utf-8"?>
+<file path=ppt/slides/slide55.xml><?xml version="1.0" encoding="utf-8"?>
+<p:sld xmlns:a="http://schemas.openxmlformats.org/drawingml/2006/main" xmlns:r="http://schemas.openxmlformats.org/officeDocument/2006/relationships" xmlns:p="http://schemas.openxmlformats.org/presentationml/2006/main">
+  <p:cSld>
+    <p:spTree>
+      <p:nvGrpSpPr>
+        <p:cNvPr id="1" name="">
+          <a:extLst>
+            <a:ext uri="{FF2B5EF4-FFF2-40B4-BE49-F238E27FC236}">
+              <a16:creationId xmlns:a16="http://schemas.microsoft.com/office/drawing/2014/main" id="{56B91A7B-B292-CB80-547D-AB4239419C42}"/>
+            </a:ext>
+          </a:extLst>
+        </p:cNvPr>
+        <p:cNvGrpSpPr/>
+        <p:nvPr/>
+      </p:nvGrpSpPr>
+      <p:grpSpPr>
+        <a:xfrm>
+          <a:off x="0" y="0"/>
+          <a:ext cx="0" cy="0"/>
+          <a:chOff x="0" y="0"/>
+          <a:chExt cx="0" cy="0"/>
+        </a:xfrm>
+      </p:grpSpPr>
+      <mc:AlternateContent xmlns:mc="http://schemas.openxmlformats.org/markup-compatibility/2006">
+        <mc:Choice xmlns:a14="http://schemas.microsoft.com/office/drawing/2010/main" Requires="a14">
+          <p:sp>
+            <p:nvSpPr>
+              <p:cNvPr id="3" name="Content Placeholder 2">
+                <a:extLst>
+                  <a:ext uri="{FF2B5EF4-FFF2-40B4-BE49-F238E27FC236}">
+                    <a16:creationId xmlns:a16="http://schemas.microsoft.com/office/drawing/2014/main" id="{2C31C620-67AE-577D-4AF0-75C4C5C08011}"/>
+                  </a:ext>
+                </a:extLst>
+              </p:cNvPr>
+              <p:cNvSpPr>
+                <a:spLocks noGrp="1"/>
+              </p:cNvSpPr>
+              <p:nvPr>
+                <p:ph idx="1"/>
+              </p:nvPr>
+            </p:nvSpPr>
+            <p:spPr>
+              <a:xfrm>
+                <a:off x="838200" y="1123406"/>
+                <a:ext cx="10515600" cy="5470724"/>
+              </a:xfrm>
+            </p:spPr>
+            <p:txBody>
+              <a:bodyPr>
+                <a:normAutofit/>
+              </a:bodyPr>
+              <a:lstStyle/>
+              <a:p>
+                <a:pPr marL="0" indent="0">
+                  <a:buNone/>
+                </a:pPr>
+                <a:r>
+                  <a:rPr lang="en-US" dirty="0"/>
+                  <a:t>What are the properties of a good hash function?  </a:t>
+                </a:r>
+              </a:p>
+              <a:p>
+                <a:r>
+                  <a:rPr lang="en-US" dirty="0"/>
+                  <a:t>For a uniformly distributed hash function the probability of a hash collision with </a:t>
+                </a:r>
+                <a14:m>
+                  <m:oMath xmlns:m="http://schemas.openxmlformats.org/officeDocument/2006/math">
+                    <m:r>
+                      <a:rPr lang="en-US" i="1">
+                        <a:latin typeface="Cambria Math" panose="02040503050406030204" pitchFamily="18" charset="0"/>
+                        <a:ea typeface="Cambria Math" panose="02040503050406030204" pitchFamily="18" charset="0"/>
+                      </a:rPr>
+                      <m:t>𝑛</m:t>
+                    </m:r>
+                  </m:oMath>
+                </a14:m>
+                <a:r>
+                  <a:rPr lang="en-US" dirty="0"/>
+                  <a:t> elements filled in the table, </a:t>
+                </a:r>
+                <a14:m>
+                  <m:oMath xmlns:m="http://schemas.openxmlformats.org/officeDocument/2006/math">
+                    <m:r>
+                      <a:rPr lang="en-US" i="1">
+                        <a:latin typeface="Cambria Math" panose="02040503050406030204" pitchFamily="18" charset="0"/>
+                        <a:ea typeface="Cambria Math" panose="02040503050406030204" pitchFamily="18" charset="0"/>
+                      </a:rPr>
+                      <m:t>𝛼</m:t>
+                    </m:r>
+                  </m:oMath>
+                </a14:m>
+                <a:r>
+                  <a:rPr lang="en-US" dirty="0"/>
+                  <a:t>    </a:t>
+                </a:r>
+              </a:p>
+              <a:p>
+                <a:pPr marL="0" indent="0">
+                  <a:buNone/>
+                </a:pPr>
+                <a14:m>
+                  <m:oMathPara xmlns:m="http://schemas.openxmlformats.org/officeDocument/2006/math">
+                    <m:oMathParaPr>
+                      <m:jc m:val="centerGroup"/>
+                    </m:oMathParaPr>
+                    <m:oMath xmlns:m="http://schemas.openxmlformats.org/officeDocument/2006/math">
+                      <m:r>
+                        <a:rPr lang="en-US" i="1">
+                          <a:latin typeface="Cambria Math" panose="02040503050406030204" pitchFamily="18" charset="0"/>
+                        </a:rPr>
+                        <m:t>𝑃</m:t>
+                      </m:r>
+                      <m:d>
+                        <m:dPr>
+                          <m:ctrlPr>
+                            <a:rPr lang="en-US" i="1">
+                              <a:latin typeface="Cambria Math" panose="02040503050406030204" pitchFamily="18" charset="0"/>
+                            </a:rPr>
+                          </m:ctrlPr>
+                        </m:dPr>
+                        <m:e>
+                          <m:r>
+                            <a:rPr lang="en-US" i="1">
+                              <a:latin typeface="Cambria Math" panose="02040503050406030204" pitchFamily="18" charset="0"/>
+                            </a:rPr>
+                            <m:t>𝑚</m:t>
+                          </m:r>
+                          <m:r>
+                            <a:rPr lang="en-US" i="1">
+                              <a:latin typeface="Cambria Math" panose="02040503050406030204" pitchFamily="18" charset="0"/>
+                            </a:rPr>
+                            <m:t>,</m:t>
+                          </m:r>
+                          <m:r>
+                            <a:rPr lang="en-US" i="1">
+                              <a:latin typeface="Cambria Math" panose="02040503050406030204" pitchFamily="18" charset="0"/>
+                            </a:rPr>
+                            <m:t>𝑛</m:t>
+                          </m:r>
+                        </m:e>
+                      </m:d>
+                      <m:r>
+                        <a:rPr lang="en-US" i="1">
+                          <a:latin typeface="Cambria Math" panose="02040503050406030204" pitchFamily="18" charset="0"/>
+                        </a:rPr>
+                        <m:t>=</m:t>
+                      </m:r>
+                      <m:r>
+                        <a:rPr lang="en-US" i="1">
+                          <a:latin typeface="Cambria Math" panose="02040503050406030204" pitchFamily="18" charset="0"/>
+                          <a:ea typeface="Cambria Math" panose="02040503050406030204" pitchFamily="18" charset="0"/>
+                        </a:rPr>
+                        <m:t>𝛼</m:t>
+                      </m:r>
+                      <m:r>
+                        <a:rPr lang="en-US" i="1">
+                          <a:latin typeface="Cambria Math" panose="02040503050406030204" pitchFamily="18" charset="0"/>
+                          <a:ea typeface="Cambria Math" panose="02040503050406030204" pitchFamily="18" charset="0"/>
+                        </a:rPr>
+                        <m:t>=</m:t>
+                      </m:r>
+                      <m:f>
+                        <m:fPr>
+                          <m:ctrlPr>
+                            <a:rPr lang="en-US" i="1">
+                              <a:latin typeface="Cambria Math" panose="02040503050406030204" pitchFamily="18" charset="0"/>
+                            </a:rPr>
+                          </m:ctrlPr>
+                        </m:fPr>
+                        <m:num>
+                          <m:r>
+                            <a:rPr lang="en-US" i="1">
+                              <a:latin typeface="Cambria Math" panose="02040503050406030204" pitchFamily="18" charset="0"/>
+                            </a:rPr>
+                            <m:t>𝑛</m:t>
+                          </m:r>
+                        </m:num>
+                        <m:den>
+                          <m:r>
+                            <a:rPr lang="en-US" i="1">
+                              <a:latin typeface="Cambria Math" panose="02040503050406030204" pitchFamily="18" charset="0"/>
+                            </a:rPr>
+                            <m:t>𝑚</m:t>
+                          </m:r>
+                        </m:den>
+                      </m:f>
+                    </m:oMath>
+                  </m:oMathPara>
+                </a14:m>
+                <a:endParaRPr lang="en-US" dirty="0"/>
+              </a:p>
+              <a:p>
+                <a:r>
+                  <a:rPr lang="en-US" dirty="0"/>
+                  <a:t>How can we do better than this?   </a:t>
+                </a:r>
+              </a:p>
+              <a:p>
+                <a:r>
+                  <a:rPr lang="en-US" dirty="0"/>
+                  <a:t>We can concatenate </a:t>
+                </a:r>
+                <a14:m>
+                  <m:oMath xmlns:m="http://schemas.openxmlformats.org/officeDocument/2006/math">
+                    <m:r>
+                      <a:rPr lang="en-US" b="0" i="1" smtClean="0">
+                        <a:latin typeface="Cambria Math" panose="02040503050406030204" pitchFamily="18" charset="0"/>
+                      </a:rPr>
+                      <m:t>𝑘</m:t>
+                    </m:r>
+                  </m:oMath>
+                </a14:m>
+                <a:r>
+                  <a:rPr lang="en-US" dirty="0"/>
+                  <a:t> hashes </a:t>
+                </a:r>
+              </a:p>
+              <a:p>
+                <a:r>
+                  <a:rPr lang="en-US" dirty="0"/>
+                  <a:t>The probability of a hash collisions with n elements filled becomes   </a:t>
+                </a:r>
+              </a:p>
+              <a:p>
+                <a:pPr marL="0" indent="0">
+                  <a:buNone/>
+                </a:pPr>
+                <a14:m>
+                  <m:oMathPara xmlns:m="http://schemas.openxmlformats.org/officeDocument/2006/math">
+                    <m:oMathParaPr>
+                      <m:jc m:val="centerGroup"/>
+                    </m:oMathParaPr>
+                    <m:oMath xmlns:m="http://schemas.openxmlformats.org/officeDocument/2006/math">
+                      <m:r>
+                        <a:rPr lang="en-US" b="0" i="1" smtClean="0">
+                          <a:latin typeface="Cambria Math" panose="02040503050406030204" pitchFamily="18" charset="0"/>
+                        </a:rPr>
+                        <m:t>𝑃</m:t>
+                      </m:r>
+                      <m:d>
+                        <m:dPr>
+                          <m:ctrlPr>
+                            <a:rPr lang="en-US" b="0" i="1" smtClean="0">
+                              <a:latin typeface="Cambria Math" panose="02040503050406030204" pitchFamily="18" charset="0"/>
+                            </a:rPr>
+                          </m:ctrlPr>
+                        </m:dPr>
+                        <m:e>
+                          <m:r>
+                            <a:rPr lang="en-US" b="0" i="1" smtClean="0">
+                              <a:latin typeface="Cambria Math" panose="02040503050406030204" pitchFamily="18" charset="0"/>
+                            </a:rPr>
+                            <m:t>𝑚</m:t>
+                          </m:r>
+                          <m:r>
+                            <a:rPr lang="en-US" b="0" i="1" smtClean="0">
+                              <a:latin typeface="Cambria Math" panose="02040503050406030204" pitchFamily="18" charset="0"/>
+                            </a:rPr>
+                            <m:t>,</m:t>
+                          </m:r>
+                          <m:r>
+                            <a:rPr lang="en-US" b="0" i="1" smtClean="0">
+                              <a:latin typeface="Cambria Math" panose="02040503050406030204" pitchFamily="18" charset="0"/>
+                            </a:rPr>
+                            <m:t>𝑛</m:t>
+                          </m:r>
+                          <m:r>
+                            <a:rPr lang="en-US" b="0" i="1" smtClean="0">
+                              <a:latin typeface="Cambria Math" panose="02040503050406030204" pitchFamily="18" charset="0"/>
+                            </a:rPr>
+                            <m:t>,</m:t>
+                          </m:r>
+                          <m:r>
+                            <a:rPr lang="en-US" b="0" i="1" smtClean="0">
+                              <a:latin typeface="Cambria Math" panose="02040503050406030204" pitchFamily="18" charset="0"/>
+                            </a:rPr>
+                            <m:t>𝑘</m:t>
+                          </m:r>
+                        </m:e>
+                      </m:d>
+                      <m:r>
+                        <a:rPr lang="en-US" b="0" i="1" smtClean="0">
+                          <a:latin typeface="Cambria Math" panose="02040503050406030204" pitchFamily="18" charset="0"/>
+                        </a:rPr>
+                        <m:t>=</m:t>
+                      </m:r>
+                      <m:f>
+                        <m:fPr>
+                          <m:ctrlPr>
+                            <a:rPr lang="en-US" b="0" i="1" smtClean="0">
+                              <a:latin typeface="Cambria Math" panose="02040503050406030204" pitchFamily="18" charset="0"/>
+                            </a:rPr>
+                          </m:ctrlPr>
+                        </m:fPr>
+                        <m:num>
+                          <m:r>
+                            <a:rPr lang="en-US" b="0" i="1" smtClean="0">
+                              <a:latin typeface="Cambria Math" panose="02040503050406030204" pitchFamily="18" charset="0"/>
+                            </a:rPr>
+                            <m:t>𝑛</m:t>
+                          </m:r>
+                        </m:num>
+                        <m:den>
+                          <m:sSup>
+                            <m:sSupPr>
+                              <m:ctrlPr>
+                                <a:rPr lang="en-US" b="0" i="1" smtClean="0">
+                                  <a:latin typeface="Cambria Math" panose="02040503050406030204" pitchFamily="18" charset="0"/>
+                                </a:rPr>
+                              </m:ctrlPr>
+                            </m:sSupPr>
+                            <m:e>
+                              <m:r>
+                                <a:rPr lang="en-US" b="0" i="1" smtClean="0">
+                                  <a:latin typeface="Cambria Math" panose="02040503050406030204" pitchFamily="18" charset="0"/>
+                                </a:rPr>
+                                <m:t>𝑚</m:t>
+                              </m:r>
+                            </m:e>
+                            <m:sup>
+                              <m:r>
+                                <a:rPr lang="en-US" b="0" i="1" smtClean="0">
+                                  <a:latin typeface="Cambria Math" panose="02040503050406030204" pitchFamily="18" charset="0"/>
+                                </a:rPr>
+                                <m:t>𝑘</m:t>
+                              </m:r>
+                            </m:sup>
+                          </m:sSup>
+                        </m:den>
+                      </m:f>
+                    </m:oMath>
+                  </m:oMathPara>
+                </a14:m>
+                <a:endParaRPr lang="en-US" dirty="0"/>
+              </a:p>
+              <a:p>
+                <a:pPr marL="457200" lvl="1" indent="0">
+                  <a:buNone/>
+                </a:pPr>
+                <a:r>
+                  <a:rPr lang="en-US" dirty="0"/>
+                  <a:t>More on this approach later in </a:t>
+                </a:r>
+                <a:r>
+                  <a:rPr lang="en-US"/>
+                  <a:t>the course</a:t>
+                </a:r>
+                <a:endParaRPr lang="en-US" dirty="0"/>
+              </a:p>
+              <a:p>
+                <a:pPr marL="0" indent="0">
+                  <a:buNone/>
+                </a:pPr>
+                <a:endParaRPr lang="en-US" dirty="0"/>
+              </a:p>
+              <a:p>
+                <a:pPr marL="457200" lvl="1" indent="0">
+                  <a:buNone/>
+                </a:pPr>
+                <a:endParaRPr lang="en-US" dirty="0"/>
+              </a:p>
+            </p:txBody>
+          </p:sp>
+        </mc:Choice>
+        <mc:Fallback>
+          <p:sp>
+            <p:nvSpPr>
+              <p:cNvPr id="3" name="Content Placeholder 2">
+                <a:extLst>
+                  <a:ext uri="{FF2B5EF4-FFF2-40B4-BE49-F238E27FC236}">
+                    <a16:creationId xmlns:a16="http://schemas.microsoft.com/office/drawing/2014/main" id="{2C31C620-67AE-577D-4AF0-75C4C5C08011}"/>
+                  </a:ext>
+                </a:extLst>
+              </p:cNvPr>
+              <p:cNvSpPr>
+                <a:spLocks noGrp="1" noRot="1" noChangeAspect="1" noMove="1" noResize="1" noEditPoints="1" noAdjustHandles="1" noChangeArrowheads="1" noChangeShapeType="1" noTextEdit="1"/>
+              </p:cNvSpPr>
+              <p:nvPr>
+                <p:ph idx="1"/>
+              </p:nvPr>
+            </p:nvSpPr>
+            <p:spPr>
+              <a:xfrm>
+                <a:off x="838200" y="1123406"/>
+                <a:ext cx="10515600" cy="5470724"/>
+              </a:xfrm>
+              <a:blipFill>
+                <a:blip r:embed="rId2"/>
+                <a:stretch>
+                  <a:fillRect l="-1217" t="-1782"/>
+                </a:stretch>
+              </a:blipFill>
+            </p:spPr>
+            <p:txBody>
+              <a:bodyPr/>
+              <a:lstStyle/>
+              <a:p>
+                <a:r>
+                  <a:rPr lang="en-US">
+                    <a:noFill/>
+                  </a:rPr>
+                  <a:t> </a:t>
+                </a:r>
+              </a:p>
+            </p:txBody>
+          </p:sp>
+        </mc:Fallback>
+      </mc:AlternateContent>
+      <p:sp>
+        <p:nvSpPr>
+          <p:cNvPr id="6" name="Title 1">
+            <a:extLst>
+              <a:ext uri="{FF2B5EF4-FFF2-40B4-BE49-F238E27FC236}">
+                <a16:creationId xmlns:a16="http://schemas.microsoft.com/office/drawing/2014/main" id="{169431E3-9330-1D27-19B1-308FC2EB5548}"/>
+              </a:ext>
+            </a:extLst>
+          </p:cNvPr>
+          <p:cNvSpPr txBox="1">
+            <a:spLocks/>
+          </p:cNvSpPr>
+          <p:nvPr/>
+        </p:nvSpPr>
+        <p:spPr>
+          <a:xfrm>
+            <a:off x="838200" y="-635"/>
+            <a:ext cx="10515600" cy="1325563"/>
+          </a:xfrm>
+          <a:prstGeom prst="rect">
+            <a:avLst/>
+          </a:prstGeom>
+        </p:spPr>
+        <p:txBody>
+          <a:bodyPr vert="horz" lIns="91440" tIns="45720" rIns="91440" bIns="45720" rtlCol="0" anchor="ctr">
+            <a:normAutofit/>
+          </a:bodyPr>
+          <a:lstStyle>
+            <a:lvl1pPr algn="l" defTabSz="914400" rtl="0" eaLnBrk="1" latinLnBrk="0" hangingPunct="1">
+              <a:lnSpc>
+                <a:spcPct val="90000"/>
+              </a:lnSpc>
+              <a:spcBef>
+                <a:spcPct val="0"/>
+              </a:spcBef>
+              <a:buNone/>
+              <a:defRPr sz="4400" kern="1200">
+                <a:solidFill>
+                  <a:schemeClr val="tx1"/>
+                </a:solidFill>
+                <a:latin typeface="+mj-lt"/>
+                <a:ea typeface="+mj-ea"/>
+                <a:cs typeface="+mj-cs"/>
+              </a:defRPr>
+            </a:lvl1pPr>
+          </a:lstStyle>
+          <a:p>
+            <a:r>
+              <a:rPr lang="en-US" dirty="0">
+                <a:latin typeface="+mn-lt"/>
+              </a:rPr>
+              <a:t>Introduction to Hashing</a:t>
+            </a:r>
+          </a:p>
+        </p:txBody>
+      </p:sp>
+    </p:spTree>
+    <p:extLst>
+      <p:ext uri="{BB962C8B-B14F-4D97-AF65-F5344CB8AC3E}">
+        <p14:creationId xmlns:p14="http://schemas.microsoft.com/office/powerpoint/2010/main" val="3523570463"/>
+      </p:ext>
+    </p:extLst>
+  </p:cSld>
+  <p:clrMapOvr>
+    <a:masterClrMapping/>
+  </p:clrMapOvr>
+</p:sld>
+</file>
+
+<file path=ppt/slides/slide56.xml><?xml version="1.0" encoding="utf-8"?>
 <p:sld xmlns:a="http://schemas.openxmlformats.org/drawingml/2006/main" xmlns:r="http://schemas.openxmlformats.org/officeDocument/2006/relationships" xmlns:p="http://schemas.openxmlformats.org/presentationml/2006/main">
   <p:cSld>
     <p:spTree>
@@ -35994,7 +38393,7 @@
 </p:sld>
 </file>
 
-<file path=ppt/slides/slide55.xml><?xml version="1.0" encoding="utf-8"?>
+<file path=ppt/slides/slide57.xml><?xml version="1.0" encoding="utf-8"?>
 <p:sld xmlns:a="http://schemas.openxmlformats.org/drawingml/2006/main" xmlns:r="http://schemas.openxmlformats.org/officeDocument/2006/relationships" xmlns:p="http://schemas.openxmlformats.org/presentationml/2006/main">
   <p:cSld>
     <p:spTree>

--- a/slides/1_Introduction.pptx
+++ b/slides/1_Introduction.pptx
@@ -5,7 +5,7 @@
     <p:sldMasterId id="2147483648" r:id="rId1"/>
   </p:sldMasterIdLst>
   <p:notesMasterIdLst>
-    <p:notesMasterId r:id="rId59"/>
+    <p:notesMasterId r:id="rId60"/>
   </p:notesMasterIdLst>
   <p:sldIdLst>
     <p:sldId id="256" r:id="rId2"/>
@@ -23,48 +23,49 @@
     <p:sldId id="397" r:id="rId14"/>
     <p:sldId id="718" r:id="rId15"/>
     <p:sldId id="783" r:id="rId16"/>
-    <p:sldId id="723" r:id="rId17"/>
-    <p:sldId id="396" r:id="rId18"/>
-    <p:sldId id="400" r:id="rId19"/>
-    <p:sldId id="352" r:id="rId20"/>
-    <p:sldId id="388" r:id="rId21"/>
-    <p:sldId id="721" r:id="rId22"/>
-    <p:sldId id="402" r:id="rId23"/>
-    <p:sldId id="381" r:id="rId24"/>
-    <p:sldId id="722" r:id="rId25"/>
-    <p:sldId id="395" r:id="rId26"/>
-    <p:sldId id="725" r:id="rId27"/>
-    <p:sldId id="401" r:id="rId28"/>
-    <p:sldId id="713" r:id="rId29"/>
-    <p:sldId id="387" r:id="rId30"/>
-    <p:sldId id="720" r:id="rId31"/>
-    <p:sldId id="784" r:id="rId32"/>
-    <p:sldId id="382" r:id="rId33"/>
-    <p:sldId id="357" r:id="rId34"/>
-    <p:sldId id="385" r:id="rId35"/>
-    <p:sldId id="359" r:id="rId36"/>
-    <p:sldId id="727" r:id="rId37"/>
-    <p:sldId id="386" r:id="rId38"/>
-    <p:sldId id="714" r:id="rId39"/>
-    <p:sldId id="360" r:id="rId40"/>
-    <p:sldId id="731" r:id="rId41"/>
-    <p:sldId id="374" r:id="rId42"/>
-    <p:sldId id="375" r:id="rId43"/>
-    <p:sldId id="738" r:id="rId44"/>
-    <p:sldId id="377" r:id="rId45"/>
-    <p:sldId id="729" r:id="rId46"/>
-    <p:sldId id="730" r:id="rId47"/>
-    <p:sldId id="739" r:id="rId48"/>
-    <p:sldId id="376" r:id="rId49"/>
-    <p:sldId id="728" r:id="rId50"/>
-    <p:sldId id="379" r:id="rId51"/>
-    <p:sldId id="380" r:id="rId52"/>
-    <p:sldId id="742" r:id="rId53"/>
-    <p:sldId id="743" r:id="rId54"/>
-    <p:sldId id="744" r:id="rId55"/>
-    <p:sldId id="785" r:id="rId56"/>
-    <p:sldId id="740" r:id="rId57"/>
-    <p:sldId id="384" r:id="rId58"/>
+    <p:sldId id="786" r:id="rId17"/>
+    <p:sldId id="723" r:id="rId18"/>
+    <p:sldId id="396" r:id="rId19"/>
+    <p:sldId id="400" r:id="rId20"/>
+    <p:sldId id="352" r:id="rId21"/>
+    <p:sldId id="388" r:id="rId22"/>
+    <p:sldId id="721" r:id="rId23"/>
+    <p:sldId id="402" r:id="rId24"/>
+    <p:sldId id="381" r:id="rId25"/>
+    <p:sldId id="722" r:id="rId26"/>
+    <p:sldId id="395" r:id="rId27"/>
+    <p:sldId id="725" r:id="rId28"/>
+    <p:sldId id="401" r:id="rId29"/>
+    <p:sldId id="713" r:id="rId30"/>
+    <p:sldId id="387" r:id="rId31"/>
+    <p:sldId id="720" r:id="rId32"/>
+    <p:sldId id="784" r:id="rId33"/>
+    <p:sldId id="382" r:id="rId34"/>
+    <p:sldId id="357" r:id="rId35"/>
+    <p:sldId id="385" r:id="rId36"/>
+    <p:sldId id="359" r:id="rId37"/>
+    <p:sldId id="727" r:id="rId38"/>
+    <p:sldId id="386" r:id="rId39"/>
+    <p:sldId id="714" r:id="rId40"/>
+    <p:sldId id="360" r:id="rId41"/>
+    <p:sldId id="731" r:id="rId42"/>
+    <p:sldId id="374" r:id="rId43"/>
+    <p:sldId id="375" r:id="rId44"/>
+    <p:sldId id="738" r:id="rId45"/>
+    <p:sldId id="377" r:id="rId46"/>
+    <p:sldId id="729" r:id="rId47"/>
+    <p:sldId id="730" r:id="rId48"/>
+    <p:sldId id="739" r:id="rId49"/>
+    <p:sldId id="376" r:id="rId50"/>
+    <p:sldId id="728" r:id="rId51"/>
+    <p:sldId id="379" r:id="rId52"/>
+    <p:sldId id="380" r:id="rId53"/>
+    <p:sldId id="742" r:id="rId54"/>
+    <p:sldId id="743" r:id="rId55"/>
+    <p:sldId id="744" r:id="rId56"/>
+    <p:sldId id="785" r:id="rId57"/>
+    <p:sldId id="740" r:id="rId58"/>
+    <p:sldId id="384" r:id="rId59"/>
   </p:sldIdLst>
   <p:sldSz cx="12192000" cy="6858000"/>
   <p:notesSz cx="6858000" cy="9144000"/>
@@ -253,7 +254,7 @@
           <a:p>
             <a:fld id="{2F3ABF1A-8818-4472-8518-E71DC7B5D2F7}" type="datetimeFigureOut">
               <a:rPr lang="en-US" smtClean="0"/>
-              <a:t>6/16/2026</a:t>
+              <a:t>6/18/2026</a:t>
             </a:fld>
             <a:endParaRPr lang="en-US"/>
           </a:p>
@@ -776,7 +777,7 @@
           <a:p>
             <a:fld id="{6E4A31BF-7266-4BEB-918B-ADC21C630A6F}" type="datetimeFigureOut">
               <a:rPr lang="en-US" smtClean="0"/>
-              <a:t>6/16/2026</a:t>
+              <a:t>6/18/2026</a:t>
             </a:fld>
             <a:endParaRPr lang="en-US"/>
           </a:p>
@@ -974,7 +975,7 @@
           <a:p>
             <a:fld id="{6E4A31BF-7266-4BEB-918B-ADC21C630A6F}" type="datetimeFigureOut">
               <a:rPr lang="en-US" smtClean="0"/>
-              <a:t>6/16/2026</a:t>
+              <a:t>6/18/2026</a:t>
             </a:fld>
             <a:endParaRPr lang="en-US"/>
           </a:p>
@@ -1182,7 +1183,7 @@
           <a:p>
             <a:fld id="{6E4A31BF-7266-4BEB-918B-ADC21C630A6F}" type="datetimeFigureOut">
               <a:rPr lang="en-US" smtClean="0"/>
-              <a:t>6/16/2026</a:t>
+              <a:t>6/18/2026</a:t>
             </a:fld>
             <a:endParaRPr lang="en-US"/>
           </a:p>
@@ -1552,7 +1553,7 @@
           <a:p>
             <a:fld id="{6E4A31BF-7266-4BEB-918B-ADC21C630A6F}" type="datetimeFigureOut">
               <a:rPr lang="en-US" smtClean="0"/>
-              <a:t>6/16/2026</a:t>
+              <a:t>6/18/2026</a:t>
             </a:fld>
             <a:endParaRPr lang="en-US"/>
           </a:p>
@@ -1827,7 +1828,7 @@
           <a:p>
             <a:fld id="{6E4A31BF-7266-4BEB-918B-ADC21C630A6F}" type="datetimeFigureOut">
               <a:rPr lang="en-US" smtClean="0"/>
-              <a:t>6/16/2026</a:t>
+              <a:t>6/18/2026</a:t>
             </a:fld>
             <a:endParaRPr lang="en-US"/>
           </a:p>
@@ -2092,7 +2093,7 @@
           <a:p>
             <a:fld id="{6E4A31BF-7266-4BEB-918B-ADC21C630A6F}" type="datetimeFigureOut">
               <a:rPr lang="en-US" smtClean="0"/>
-              <a:t>6/16/2026</a:t>
+              <a:t>6/18/2026</a:t>
             </a:fld>
             <a:endParaRPr lang="en-US"/>
           </a:p>
@@ -2504,7 +2505,7 @@
           <a:p>
             <a:fld id="{6E4A31BF-7266-4BEB-918B-ADC21C630A6F}" type="datetimeFigureOut">
               <a:rPr lang="en-US" smtClean="0"/>
-              <a:t>6/16/2026</a:t>
+              <a:t>6/18/2026</a:t>
             </a:fld>
             <a:endParaRPr lang="en-US"/>
           </a:p>
@@ -2645,7 +2646,7 @@
           <a:p>
             <a:fld id="{6E4A31BF-7266-4BEB-918B-ADC21C630A6F}" type="datetimeFigureOut">
               <a:rPr lang="en-US" smtClean="0"/>
-              <a:t>6/16/2026</a:t>
+              <a:t>6/18/2026</a:t>
             </a:fld>
             <a:endParaRPr lang="en-US"/>
           </a:p>
@@ -2758,7 +2759,7 @@
           <a:p>
             <a:fld id="{6E4A31BF-7266-4BEB-918B-ADC21C630A6F}" type="datetimeFigureOut">
               <a:rPr lang="en-US" smtClean="0"/>
-              <a:t>6/16/2026</a:t>
+              <a:t>6/18/2026</a:t>
             </a:fld>
             <a:endParaRPr lang="en-US"/>
           </a:p>
@@ -3069,7 +3070,7 @@
           <a:p>
             <a:fld id="{6E4A31BF-7266-4BEB-918B-ADC21C630A6F}" type="datetimeFigureOut">
               <a:rPr lang="en-US" smtClean="0"/>
-              <a:t>6/16/2026</a:t>
+              <a:t>6/18/2026</a:t>
             </a:fld>
             <a:endParaRPr lang="en-US"/>
           </a:p>
@@ -3357,7 +3358,7 @@
           <a:p>
             <a:fld id="{6E4A31BF-7266-4BEB-918B-ADC21C630A6F}" type="datetimeFigureOut">
               <a:rPr lang="en-US" smtClean="0"/>
-              <a:t>6/16/2026</a:t>
+              <a:t>6/18/2026</a:t>
             </a:fld>
             <a:endParaRPr lang="en-US"/>
           </a:p>
@@ -3598,7 +3599,7 @@
           <a:p>
             <a:fld id="{6E4A31BF-7266-4BEB-918B-ADC21C630A6F}" type="datetimeFigureOut">
               <a:rPr lang="en-US" smtClean="0"/>
-              <a:t>6/16/2026</a:t>
+              <a:t>6/18/2026</a:t>
             </a:fld>
             <a:endParaRPr lang="en-US"/>
           </a:p>
@@ -5224,7 +5225,11 @@
           <a:p>
             <a:r>
               <a:rPr lang="en-US" dirty="0"/>
-              <a:t>Focus on unsupervised learning</a:t>
+              <a:t>Focus on </a:t>
+            </a:r>
+            <a:r>
+              <a:rPr lang="en-US" b="1" dirty="0"/>
+              <a:t>unsupervised learning</a:t>
             </a:r>
           </a:p>
           <a:p>
@@ -5251,7 +5256,7 @@
           <a:p>
             <a:r>
               <a:rPr lang="en-US" dirty="0"/>
-              <a:t>Algorithms for infinite data – streaming data </a:t>
+              <a:t>Algorithms for online and infinite or streaming data </a:t>
             </a:r>
           </a:p>
           <a:p>
@@ -7104,8 +7109,8 @@
         </p:nvSpPr>
         <p:spPr>
           <a:xfrm>
-            <a:off x="8985680" y="5155489"/>
-            <a:ext cx="1894527" cy="1262809"/>
+            <a:off x="6408020" y="5184729"/>
+            <a:ext cx="2038966" cy="1262809"/>
           </a:xfrm>
           <a:prstGeom prst="rect">
             <a:avLst/>
@@ -7163,7 +7168,7 @@
         </p:nvSpPr>
         <p:spPr>
           <a:xfrm>
-            <a:off x="6470354" y="5154275"/>
+            <a:off x="9100598" y="5172609"/>
             <a:ext cx="2016833" cy="1245689"/>
           </a:xfrm>
           <a:prstGeom prst="rect">
@@ -8018,6 +8023,1641 @@
 </file>
 
 <file path=ppt/slides/slide16.xml><?xml version="1.0" encoding="utf-8"?>
+<p:sld xmlns:a="http://schemas.openxmlformats.org/drawingml/2006/main" xmlns:r="http://schemas.openxmlformats.org/officeDocument/2006/relationships" xmlns:p="http://schemas.openxmlformats.org/presentationml/2006/main">
+  <p:cSld>
+    <p:spTree>
+      <p:nvGrpSpPr>
+        <p:cNvPr id="1" name="">
+          <a:extLst>
+            <a:ext uri="{FF2B5EF4-FFF2-40B4-BE49-F238E27FC236}">
+              <a16:creationId xmlns:a16="http://schemas.microsoft.com/office/drawing/2014/main" id="{3CA90CA8-F246-D25E-AEB4-FF2EAA595A0C}"/>
+            </a:ext>
+          </a:extLst>
+        </p:cNvPr>
+        <p:cNvGrpSpPr/>
+        <p:nvPr/>
+      </p:nvGrpSpPr>
+      <p:grpSpPr>
+        <a:xfrm>
+          <a:off x="0" y="0"/>
+          <a:ext cx="0" cy="0"/>
+          <a:chOff x="0" y="0"/>
+          <a:chExt cx="0" cy="0"/>
+        </a:xfrm>
+      </p:grpSpPr>
+      <p:sp>
+        <p:nvSpPr>
+          <p:cNvPr id="2" name="Title 1">
+            <a:extLst>
+              <a:ext uri="{FF2B5EF4-FFF2-40B4-BE49-F238E27FC236}">
+                <a16:creationId xmlns:a16="http://schemas.microsoft.com/office/drawing/2014/main" id="{C726756E-8F78-AACA-E637-4E5F98E3A793}"/>
+              </a:ext>
+            </a:extLst>
+          </p:cNvPr>
+          <p:cNvSpPr>
+            <a:spLocks noGrp="1"/>
+          </p:cNvSpPr>
+          <p:nvPr>
+            <p:ph type="title"/>
+          </p:nvPr>
+        </p:nvSpPr>
+        <p:spPr>
+          <a:xfrm>
+            <a:off x="916187" y="249623"/>
+            <a:ext cx="10515600" cy="662230"/>
+          </a:xfrm>
+        </p:spPr>
+        <p:txBody>
+          <a:bodyPr>
+            <a:normAutofit fontScale="90000"/>
+          </a:bodyPr>
+          <a:lstStyle/>
+          <a:p>
+            <a:r>
+              <a:rPr lang="en-US" sz="4900" dirty="0">
+                <a:latin typeface="+mn-lt"/>
+              </a:rPr>
+              <a:t>Main topics in this course</a:t>
+            </a:r>
+            <a:br>
+              <a:rPr lang="en-US" sz="4000" dirty="0">
+                <a:latin typeface="+mn-lt"/>
+              </a:rPr>
+            </a:br>
+            <a:endParaRPr lang="en-US" sz="4000" dirty="0">
+              <a:latin typeface="+mn-lt"/>
+            </a:endParaRPr>
+          </a:p>
+        </p:txBody>
+      </p:sp>
+      <p:sp>
+        <p:nvSpPr>
+          <p:cNvPr id="3" name="Left Brace 2">
+            <a:extLst>
+              <a:ext uri="{FF2B5EF4-FFF2-40B4-BE49-F238E27FC236}">
+                <a16:creationId xmlns:a16="http://schemas.microsoft.com/office/drawing/2014/main" id="{9786F116-C61A-EF87-1D9A-3C1848FAD4BB}"/>
+              </a:ext>
+            </a:extLst>
+          </p:cNvPr>
+          <p:cNvSpPr/>
+          <p:nvPr/>
+        </p:nvSpPr>
+        <p:spPr>
+          <a:xfrm>
+            <a:off x="756889" y="1964356"/>
+            <a:ext cx="225209" cy="1273261"/>
+          </a:xfrm>
+          <a:prstGeom prst="leftBrace">
+            <a:avLst/>
+          </a:prstGeom>
+          <a:ln w="19050">
+            <a:solidFill>
+              <a:schemeClr val="tx1"/>
+            </a:solidFill>
+          </a:ln>
+        </p:spPr>
+        <p:style>
+          <a:lnRef idx="1">
+            <a:schemeClr val="accent1"/>
+          </a:lnRef>
+          <a:fillRef idx="0">
+            <a:schemeClr val="accent1"/>
+          </a:fillRef>
+          <a:effectRef idx="0">
+            <a:schemeClr val="accent1"/>
+          </a:effectRef>
+          <a:fontRef idx="minor">
+            <a:schemeClr val="tx1"/>
+          </a:fontRef>
+        </p:style>
+        <p:txBody>
+          <a:bodyPr rtlCol="0" anchor="ctr"/>
+          <a:lstStyle/>
+          <a:p>
+            <a:pPr algn="ctr"/>
+            <a:endParaRPr lang="en-US"/>
+          </a:p>
+        </p:txBody>
+      </p:sp>
+      <p:sp>
+        <p:nvSpPr>
+          <p:cNvPr id="4" name="TextBox 3">
+            <a:extLst>
+              <a:ext uri="{FF2B5EF4-FFF2-40B4-BE49-F238E27FC236}">
+                <a16:creationId xmlns:a16="http://schemas.microsoft.com/office/drawing/2014/main" id="{D861FC16-0D71-48D6-3153-B5B870F2D088}"/>
+              </a:ext>
+            </a:extLst>
+          </p:cNvPr>
+          <p:cNvSpPr txBox="1"/>
+          <p:nvPr/>
+        </p:nvSpPr>
+        <p:spPr>
+          <a:xfrm rot="16200000">
+            <a:off x="-238228" y="2251765"/>
+            <a:ext cx="1571596" cy="400110"/>
+          </a:xfrm>
+          <a:prstGeom prst="rect">
+            <a:avLst/>
+          </a:prstGeom>
+          <a:noFill/>
+        </p:spPr>
+        <p:txBody>
+          <a:bodyPr wrap="square" rtlCol="0">
+            <a:spAutoFit/>
+          </a:bodyPr>
+          <a:lstStyle/>
+          <a:p>
+            <a:pPr algn="ctr"/>
+            <a:r>
+              <a:rPr lang="en-US" sz="2000" dirty="0"/>
+              <a:t>Foundations </a:t>
+            </a:r>
+          </a:p>
+        </p:txBody>
+      </p:sp>
+      <p:sp>
+        <p:nvSpPr>
+          <p:cNvPr id="5" name="Rectangle 4">
+            <a:extLst>
+              <a:ext uri="{FF2B5EF4-FFF2-40B4-BE49-F238E27FC236}">
+                <a16:creationId xmlns:a16="http://schemas.microsoft.com/office/drawing/2014/main" id="{33C8A127-7421-03C2-E792-96131AA908D1}"/>
+              </a:ext>
+            </a:extLst>
+          </p:cNvPr>
+          <p:cNvSpPr/>
+          <p:nvPr/>
+        </p:nvSpPr>
+        <p:spPr>
+          <a:xfrm>
+            <a:off x="1259812" y="1983695"/>
+            <a:ext cx="1951346" cy="1253922"/>
+          </a:xfrm>
+          <a:prstGeom prst="rect">
+            <a:avLst/>
+          </a:prstGeom>
+          <a:noFill/>
+          <a:ln w="38100">
+            <a:solidFill>
+              <a:srgbClr val="C00000"/>
+            </a:solidFill>
+          </a:ln>
+        </p:spPr>
+        <p:style>
+          <a:lnRef idx="2">
+            <a:schemeClr val="accent1">
+              <a:shade val="15000"/>
+            </a:schemeClr>
+          </a:lnRef>
+          <a:fillRef idx="1">
+            <a:schemeClr val="accent1"/>
+          </a:fillRef>
+          <a:effectRef idx="0">
+            <a:schemeClr val="accent1"/>
+          </a:effectRef>
+          <a:fontRef idx="minor">
+            <a:schemeClr val="lt1"/>
+          </a:fontRef>
+        </p:style>
+        <p:txBody>
+          <a:bodyPr rtlCol="0" anchor="ctr"/>
+          <a:lstStyle/>
+          <a:p>
+            <a:pPr algn="ctr"/>
+            <a:r>
+              <a:rPr lang="en-US" sz="2000" dirty="0">
+                <a:solidFill>
+                  <a:schemeClr val="tx1"/>
+                </a:solidFill>
+              </a:rPr>
+              <a:t>1. Hashing and K-V pair management </a:t>
+            </a:r>
+          </a:p>
+        </p:txBody>
+      </p:sp>
+      <p:sp>
+        <p:nvSpPr>
+          <p:cNvPr id="6" name="Rectangle 5">
+            <a:extLst>
+              <a:ext uri="{FF2B5EF4-FFF2-40B4-BE49-F238E27FC236}">
+                <a16:creationId xmlns:a16="http://schemas.microsoft.com/office/drawing/2014/main" id="{41727B61-9452-BD73-E54B-C84CB425B143}"/>
+              </a:ext>
+            </a:extLst>
+          </p:cNvPr>
+          <p:cNvSpPr/>
+          <p:nvPr/>
+        </p:nvSpPr>
+        <p:spPr>
+          <a:xfrm>
+            <a:off x="3740233" y="2021536"/>
+            <a:ext cx="2157426" cy="1178239"/>
+          </a:xfrm>
+          <a:prstGeom prst="rect">
+            <a:avLst/>
+          </a:prstGeom>
+          <a:noFill/>
+          <a:ln w="38100">
+            <a:solidFill>
+              <a:srgbClr val="C00000"/>
+            </a:solidFill>
+          </a:ln>
+        </p:spPr>
+        <p:style>
+          <a:lnRef idx="2">
+            <a:schemeClr val="accent1">
+              <a:shade val="15000"/>
+            </a:schemeClr>
+          </a:lnRef>
+          <a:fillRef idx="1">
+            <a:schemeClr val="accent1"/>
+          </a:fillRef>
+          <a:effectRef idx="0">
+            <a:schemeClr val="accent1"/>
+          </a:effectRef>
+          <a:fontRef idx="minor">
+            <a:schemeClr val="lt1"/>
+          </a:fontRef>
+        </p:style>
+        <p:txBody>
+          <a:bodyPr rtlCol="0" anchor="ctr"/>
+          <a:lstStyle/>
+          <a:p>
+            <a:pPr algn="ctr"/>
+            <a:r>
+              <a:rPr lang="en-US" sz="2000" dirty="0">
+                <a:solidFill>
+                  <a:schemeClr val="tx1"/>
+                </a:solidFill>
+              </a:rPr>
+              <a:t>2. Distance and Similarity Metrics</a:t>
+            </a:r>
+          </a:p>
+        </p:txBody>
+      </p:sp>
+      <p:sp>
+        <p:nvSpPr>
+          <p:cNvPr id="7" name="Rectangle 6">
+            <a:extLst>
+              <a:ext uri="{FF2B5EF4-FFF2-40B4-BE49-F238E27FC236}">
+                <a16:creationId xmlns:a16="http://schemas.microsoft.com/office/drawing/2014/main" id="{269FBF6A-FC8A-B135-25F7-875F755739D8}"/>
+              </a:ext>
+            </a:extLst>
+          </p:cNvPr>
+          <p:cNvSpPr/>
+          <p:nvPr/>
+        </p:nvSpPr>
+        <p:spPr>
+          <a:xfrm>
+            <a:off x="6408020" y="2037908"/>
+            <a:ext cx="2058805" cy="1213337"/>
+          </a:xfrm>
+          <a:prstGeom prst="rect">
+            <a:avLst/>
+          </a:prstGeom>
+          <a:noFill/>
+          <a:ln w="38100">
+            <a:solidFill>
+              <a:srgbClr val="C00000"/>
+            </a:solidFill>
+          </a:ln>
+        </p:spPr>
+        <p:style>
+          <a:lnRef idx="2">
+            <a:schemeClr val="accent1">
+              <a:shade val="15000"/>
+            </a:schemeClr>
+          </a:lnRef>
+          <a:fillRef idx="1">
+            <a:schemeClr val="accent1"/>
+          </a:fillRef>
+          <a:effectRef idx="0">
+            <a:schemeClr val="accent1"/>
+          </a:effectRef>
+          <a:fontRef idx="minor">
+            <a:schemeClr val="lt1"/>
+          </a:fontRef>
+        </p:style>
+        <p:txBody>
+          <a:bodyPr rtlCol="0" anchor="ctr"/>
+          <a:lstStyle/>
+          <a:p>
+            <a:pPr algn="ctr"/>
+            <a:r>
+              <a:rPr lang="en-US" sz="2000" dirty="0">
+                <a:solidFill>
+                  <a:schemeClr val="tx1"/>
+                </a:solidFill>
+              </a:rPr>
+              <a:t>3. Graph Algorithms</a:t>
+            </a:r>
+          </a:p>
+        </p:txBody>
+      </p:sp>
+      <p:sp>
+        <p:nvSpPr>
+          <p:cNvPr id="8" name="Rectangle 7">
+            <a:extLst>
+              <a:ext uri="{FF2B5EF4-FFF2-40B4-BE49-F238E27FC236}">
+                <a16:creationId xmlns:a16="http://schemas.microsoft.com/office/drawing/2014/main" id="{2B987E0C-5A66-5719-01D3-420E2D78C0B7}"/>
+              </a:ext>
+            </a:extLst>
+          </p:cNvPr>
+          <p:cNvSpPr/>
+          <p:nvPr/>
+        </p:nvSpPr>
+        <p:spPr>
+          <a:xfrm>
+            <a:off x="1215334" y="3591320"/>
+            <a:ext cx="2085982" cy="1074244"/>
+          </a:xfrm>
+          <a:prstGeom prst="rect">
+            <a:avLst/>
+          </a:prstGeom>
+          <a:noFill/>
+          <a:ln w="38100">
+            <a:solidFill>
+              <a:srgbClr val="C00000"/>
+            </a:solidFill>
+          </a:ln>
+        </p:spPr>
+        <p:style>
+          <a:lnRef idx="2">
+            <a:schemeClr val="accent1">
+              <a:shade val="15000"/>
+            </a:schemeClr>
+          </a:lnRef>
+          <a:fillRef idx="1">
+            <a:schemeClr val="accent1"/>
+          </a:fillRef>
+          <a:effectRef idx="0">
+            <a:schemeClr val="accent1"/>
+          </a:effectRef>
+          <a:fontRef idx="minor">
+            <a:schemeClr val="lt1"/>
+          </a:fontRef>
+        </p:style>
+        <p:txBody>
+          <a:bodyPr rtlCol="0" anchor="ctr"/>
+          <a:lstStyle/>
+          <a:p>
+            <a:pPr algn="ctr"/>
+            <a:r>
+              <a:rPr lang="en-US" sz="2000" dirty="0">
+                <a:solidFill>
+                  <a:schemeClr val="tx1"/>
+                </a:solidFill>
+              </a:rPr>
+              <a:t>2. Dimensionality Reduction</a:t>
+            </a:r>
+          </a:p>
+        </p:txBody>
+      </p:sp>
+      <p:sp>
+        <p:nvSpPr>
+          <p:cNvPr id="10" name="Left Brace 9">
+            <a:extLst>
+              <a:ext uri="{FF2B5EF4-FFF2-40B4-BE49-F238E27FC236}">
+                <a16:creationId xmlns:a16="http://schemas.microsoft.com/office/drawing/2014/main" id="{4E85F025-A246-CDCD-DD0C-9E612E9B26F4}"/>
+              </a:ext>
+            </a:extLst>
+          </p:cNvPr>
+          <p:cNvSpPr/>
+          <p:nvPr/>
+        </p:nvSpPr>
+        <p:spPr>
+          <a:xfrm>
+            <a:off x="865089" y="3571535"/>
+            <a:ext cx="172578" cy="1094029"/>
+          </a:xfrm>
+          <a:prstGeom prst="leftBrace">
+            <a:avLst/>
+          </a:prstGeom>
+          <a:ln w="19050">
+            <a:solidFill>
+              <a:schemeClr val="tx1"/>
+            </a:solidFill>
+          </a:ln>
+        </p:spPr>
+        <p:style>
+          <a:lnRef idx="1">
+            <a:schemeClr val="accent1"/>
+          </a:lnRef>
+          <a:fillRef idx="0">
+            <a:schemeClr val="accent1"/>
+          </a:fillRef>
+          <a:effectRef idx="0">
+            <a:schemeClr val="accent1"/>
+          </a:effectRef>
+          <a:fontRef idx="minor">
+            <a:schemeClr val="tx1"/>
+          </a:fontRef>
+        </p:style>
+        <p:txBody>
+          <a:bodyPr rtlCol="0" anchor="ctr"/>
+          <a:lstStyle/>
+          <a:p>
+            <a:pPr algn="ctr"/>
+            <a:endParaRPr lang="en-US"/>
+          </a:p>
+        </p:txBody>
+      </p:sp>
+      <p:sp>
+        <p:nvSpPr>
+          <p:cNvPr id="11" name="TextBox 10">
+            <a:extLst>
+              <a:ext uri="{FF2B5EF4-FFF2-40B4-BE49-F238E27FC236}">
+                <a16:creationId xmlns:a16="http://schemas.microsoft.com/office/drawing/2014/main" id="{E94B15ED-5464-98E7-9051-875021799A74}"/>
+              </a:ext>
+            </a:extLst>
+          </p:cNvPr>
+          <p:cNvSpPr txBox="1"/>
+          <p:nvPr/>
+        </p:nvSpPr>
+        <p:spPr>
+          <a:xfrm rot="16200000">
+            <a:off x="-286998" y="3724841"/>
+            <a:ext cx="1571596" cy="707886"/>
+          </a:xfrm>
+          <a:prstGeom prst="rect">
+            <a:avLst/>
+          </a:prstGeom>
+          <a:noFill/>
+        </p:spPr>
+        <p:txBody>
+          <a:bodyPr wrap="square" rtlCol="0">
+            <a:spAutoFit/>
+          </a:bodyPr>
+          <a:lstStyle/>
+          <a:p>
+            <a:pPr algn="ctr"/>
+            <a:r>
+              <a:rPr lang="en-US" sz="2000" dirty="0"/>
+              <a:t>Core Algorithms</a:t>
+            </a:r>
+          </a:p>
+        </p:txBody>
+      </p:sp>
+      <p:sp>
+        <p:nvSpPr>
+          <p:cNvPr id="12" name="Rectangle 11">
+            <a:extLst>
+              <a:ext uri="{FF2B5EF4-FFF2-40B4-BE49-F238E27FC236}">
+                <a16:creationId xmlns:a16="http://schemas.microsoft.com/office/drawing/2014/main" id="{5C89D265-DA24-3EC7-FE84-F48CCC1837A3}"/>
+              </a:ext>
+            </a:extLst>
+          </p:cNvPr>
+          <p:cNvSpPr/>
+          <p:nvPr/>
+        </p:nvSpPr>
+        <p:spPr>
+          <a:xfrm>
+            <a:off x="1280175" y="5154275"/>
+            <a:ext cx="1961804" cy="1264023"/>
+          </a:xfrm>
+          <a:prstGeom prst="rect">
+            <a:avLst/>
+          </a:prstGeom>
+          <a:noFill/>
+          <a:ln w="38100">
+            <a:solidFill>
+              <a:srgbClr val="C00000"/>
+            </a:solidFill>
+          </a:ln>
+        </p:spPr>
+        <p:style>
+          <a:lnRef idx="2">
+            <a:schemeClr val="accent1">
+              <a:shade val="15000"/>
+            </a:schemeClr>
+          </a:lnRef>
+          <a:fillRef idx="1">
+            <a:schemeClr val="accent1"/>
+          </a:fillRef>
+          <a:effectRef idx="0">
+            <a:schemeClr val="accent1"/>
+          </a:effectRef>
+          <a:fontRef idx="minor">
+            <a:schemeClr val="lt1"/>
+          </a:fontRef>
+        </p:style>
+        <p:txBody>
+          <a:bodyPr rtlCol="0" anchor="ctr"/>
+          <a:lstStyle/>
+          <a:p>
+            <a:pPr algn="ctr"/>
+            <a:r>
+              <a:rPr lang="en-US" sz="2000" dirty="0">
+                <a:solidFill>
+                  <a:schemeClr val="tx1"/>
+                </a:solidFill>
+              </a:rPr>
+              <a:t>3. Social Network Analysis</a:t>
+            </a:r>
+          </a:p>
+        </p:txBody>
+      </p:sp>
+      <p:sp>
+        <p:nvSpPr>
+          <p:cNvPr id="14" name="Left Brace 13">
+            <a:extLst>
+              <a:ext uri="{FF2B5EF4-FFF2-40B4-BE49-F238E27FC236}">
+                <a16:creationId xmlns:a16="http://schemas.microsoft.com/office/drawing/2014/main" id="{AB4D9DB2-E8B7-4F1D-E860-F2AD00D99130}"/>
+              </a:ext>
+            </a:extLst>
+          </p:cNvPr>
+          <p:cNvSpPr/>
+          <p:nvPr/>
+        </p:nvSpPr>
+        <p:spPr>
+          <a:xfrm>
+            <a:off x="858563" y="5154275"/>
+            <a:ext cx="164275" cy="1264024"/>
+          </a:xfrm>
+          <a:prstGeom prst="leftBrace">
+            <a:avLst/>
+          </a:prstGeom>
+          <a:ln w="19050">
+            <a:solidFill>
+              <a:schemeClr val="tx1"/>
+            </a:solidFill>
+          </a:ln>
+        </p:spPr>
+        <p:style>
+          <a:lnRef idx="1">
+            <a:schemeClr val="accent1"/>
+          </a:lnRef>
+          <a:fillRef idx="0">
+            <a:schemeClr val="accent1"/>
+          </a:fillRef>
+          <a:effectRef idx="0">
+            <a:schemeClr val="accent1"/>
+          </a:effectRef>
+          <a:fontRef idx="minor">
+            <a:schemeClr val="tx1"/>
+          </a:fontRef>
+        </p:style>
+        <p:txBody>
+          <a:bodyPr rtlCol="0" anchor="ctr"/>
+          <a:lstStyle/>
+          <a:p>
+            <a:pPr algn="ctr"/>
+            <a:endParaRPr lang="en-US"/>
+          </a:p>
+        </p:txBody>
+      </p:sp>
+      <p:sp>
+        <p:nvSpPr>
+          <p:cNvPr id="15" name="TextBox 14">
+            <a:extLst>
+              <a:ext uri="{FF2B5EF4-FFF2-40B4-BE49-F238E27FC236}">
+                <a16:creationId xmlns:a16="http://schemas.microsoft.com/office/drawing/2014/main" id="{B1F52434-9868-798E-70EF-71A6EC9E5661}"/>
+              </a:ext>
+            </a:extLst>
+          </p:cNvPr>
+          <p:cNvSpPr txBox="1"/>
+          <p:nvPr/>
+        </p:nvSpPr>
+        <p:spPr>
+          <a:xfrm rot="16200000">
+            <a:off x="-322189" y="5405146"/>
+            <a:ext cx="1571596" cy="707886"/>
+          </a:xfrm>
+          <a:prstGeom prst="rect">
+            <a:avLst/>
+          </a:prstGeom>
+          <a:noFill/>
+        </p:spPr>
+        <p:txBody>
+          <a:bodyPr wrap="square" rtlCol="0">
+            <a:spAutoFit/>
+          </a:bodyPr>
+          <a:lstStyle/>
+          <a:p>
+            <a:pPr algn="ctr"/>
+            <a:r>
+              <a:rPr lang="en-US" sz="2000" dirty="0"/>
+              <a:t>Taks </a:t>
+            </a:r>
+            <a:r>
+              <a:rPr lang="en-US" sz="2000"/>
+              <a:t>Speific </a:t>
+            </a:r>
+            <a:r>
+              <a:rPr lang="en-US" sz="2000" dirty="0"/>
+              <a:t>Algorithms</a:t>
+            </a:r>
+          </a:p>
+        </p:txBody>
+      </p:sp>
+      <p:sp>
+        <p:nvSpPr>
+          <p:cNvPr id="16" name="Rectangle 15">
+            <a:extLst>
+              <a:ext uri="{FF2B5EF4-FFF2-40B4-BE49-F238E27FC236}">
+                <a16:creationId xmlns:a16="http://schemas.microsoft.com/office/drawing/2014/main" id="{0B27B5DF-8D47-1003-9138-36BB0ACC1DE9}"/>
+              </a:ext>
+            </a:extLst>
+          </p:cNvPr>
+          <p:cNvSpPr/>
+          <p:nvPr/>
+        </p:nvSpPr>
+        <p:spPr>
+          <a:xfrm>
+            <a:off x="3811677" y="3631085"/>
+            <a:ext cx="2085982" cy="1094029"/>
+          </a:xfrm>
+          <a:prstGeom prst="rect">
+            <a:avLst/>
+          </a:prstGeom>
+          <a:noFill/>
+          <a:ln w="38100">
+            <a:solidFill>
+              <a:srgbClr val="C00000"/>
+            </a:solidFill>
+          </a:ln>
+        </p:spPr>
+        <p:style>
+          <a:lnRef idx="2">
+            <a:schemeClr val="accent1">
+              <a:shade val="15000"/>
+            </a:schemeClr>
+          </a:lnRef>
+          <a:fillRef idx="1">
+            <a:schemeClr val="accent1"/>
+          </a:fillRef>
+          <a:effectRef idx="0">
+            <a:schemeClr val="accent1"/>
+          </a:effectRef>
+          <a:fontRef idx="minor">
+            <a:schemeClr val="lt1"/>
+          </a:fontRef>
+        </p:style>
+        <p:txBody>
+          <a:bodyPr rtlCol="0" anchor="ctr"/>
+          <a:lstStyle/>
+          <a:p>
+            <a:pPr algn="ctr"/>
+            <a:r>
+              <a:rPr lang="en-US" sz="2000" dirty="0">
+                <a:solidFill>
+                  <a:schemeClr val="tx1"/>
+                </a:solidFill>
+              </a:rPr>
+              <a:t>5. Similarity Search and NN Algorithms</a:t>
+            </a:r>
+          </a:p>
+        </p:txBody>
+      </p:sp>
+      <p:sp>
+        <p:nvSpPr>
+          <p:cNvPr id="17" name="Rectangle 16">
+            <a:extLst>
+              <a:ext uri="{FF2B5EF4-FFF2-40B4-BE49-F238E27FC236}">
+                <a16:creationId xmlns:a16="http://schemas.microsoft.com/office/drawing/2014/main" id="{391CFD9D-CF7E-4959-5A17-17F2C919787A}"/>
+              </a:ext>
+            </a:extLst>
+          </p:cNvPr>
+          <p:cNvSpPr/>
+          <p:nvPr/>
+        </p:nvSpPr>
+        <p:spPr>
+          <a:xfrm>
+            <a:off x="6408020" y="3640978"/>
+            <a:ext cx="2038966" cy="1123564"/>
+          </a:xfrm>
+          <a:prstGeom prst="rect">
+            <a:avLst/>
+          </a:prstGeom>
+          <a:noFill/>
+          <a:ln w="38100">
+            <a:solidFill>
+              <a:srgbClr val="C00000"/>
+            </a:solidFill>
+          </a:ln>
+        </p:spPr>
+        <p:style>
+          <a:lnRef idx="2">
+            <a:schemeClr val="accent1">
+              <a:shade val="15000"/>
+            </a:schemeClr>
+          </a:lnRef>
+          <a:fillRef idx="1">
+            <a:schemeClr val="accent1"/>
+          </a:fillRef>
+          <a:effectRef idx="0">
+            <a:schemeClr val="accent1"/>
+          </a:effectRef>
+          <a:fontRef idx="minor">
+            <a:schemeClr val="lt1"/>
+          </a:fontRef>
+        </p:style>
+        <p:txBody>
+          <a:bodyPr rtlCol="0" anchor="ctr"/>
+          <a:lstStyle/>
+          <a:p>
+            <a:pPr algn="ctr"/>
+            <a:r>
+              <a:rPr lang="en-US" sz="2000" dirty="0">
+                <a:solidFill>
+                  <a:schemeClr val="tx1"/>
+                </a:solidFill>
+              </a:rPr>
+              <a:t>4. Online Algorithms</a:t>
+            </a:r>
+          </a:p>
+        </p:txBody>
+      </p:sp>
+      <p:sp>
+        <p:nvSpPr>
+          <p:cNvPr id="18" name="Rectangle 17">
+            <a:extLst>
+              <a:ext uri="{FF2B5EF4-FFF2-40B4-BE49-F238E27FC236}">
+                <a16:creationId xmlns:a16="http://schemas.microsoft.com/office/drawing/2014/main" id="{8D6CDD49-8319-CF77-74A6-A001FD008EB5}"/>
+              </a:ext>
+            </a:extLst>
+          </p:cNvPr>
+          <p:cNvSpPr/>
+          <p:nvPr/>
+        </p:nvSpPr>
+        <p:spPr>
+          <a:xfrm>
+            <a:off x="6408020" y="5181547"/>
+            <a:ext cx="2038966" cy="1262809"/>
+          </a:xfrm>
+          <a:prstGeom prst="rect">
+            <a:avLst/>
+          </a:prstGeom>
+          <a:noFill/>
+          <a:ln w="38100">
+            <a:solidFill>
+              <a:srgbClr val="C00000"/>
+            </a:solidFill>
+          </a:ln>
+        </p:spPr>
+        <p:style>
+          <a:lnRef idx="2">
+            <a:schemeClr val="accent1">
+              <a:shade val="15000"/>
+            </a:schemeClr>
+          </a:lnRef>
+          <a:fillRef idx="1">
+            <a:schemeClr val="accent1"/>
+          </a:fillRef>
+          <a:effectRef idx="0">
+            <a:schemeClr val="accent1"/>
+          </a:effectRef>
+          <a:fontRef idx="minor">
+            <a:schemeClr val="lt1"/>
+          </a:fontRef>
+        </p:style>
+        <p:txBody>
+          <a:bodyPr rtlCol="0" anchor="ctr"/>
+          <a:lstStyle/>
+          <a:p>
+            <a:pPr algn="ctr"/>
+            <a:r>
+              <a:rPr lang="en-US" sz="2000" dirty="0">
+                <a:solidFill>
+                  <a:schemeClr val="tx1"/>
+                </a:solidFill>
+              </a:rPr>
+              <a:t>8. Clustering Algorithms</a:t>
+            </a:r>
+          </a:p>
+        </p:txBody>
+      </p:sp>
+      <p:sp>
+        <p:nvSpPr>
+          <p:cNvPr id="20" name="Rectangle 19">
+            <a:extLst>
+              <a:ext uri="{FF2B5EF4-FFF2-40B4-BE49-F238E27FC236}">
+                <a16:creationId xmlns:a16="http://schemas.microsoft.com/office/drawing/2014/main" id="{B5FA6190-3519-18D7-4DC6-3AE9F5323611}"/>
+              </a:ext>
+            </a:extLst>
+          </p:cNvPr>
+          <p:cNvSpPr/>
+          <p:nvPr/>
+        </p:nvSpPr>
+        <p:spPr>
+          <a:xfrm>
+            <a:off x="9062948" y="5166367"/>
+            <a:ext cx="2016833" cy="1245689"/>
+          </a:xfrm>
+          <a:prstGeom prst="rect">
+            <a:avLst/>
+          </a:prstGeom>
+          <a:noFill/>
+          <a:ln w="19050">
+            <a:solidFill>
+              <a:schemeClr val="tx1"/>
+            </a:solidFill>
+          </a:ln>
+        </p:spPr>
+        <p:style>
+          <a:lnRef idx="2">
+            <a:schemeClr val="accent1">
+              <a:shade val="15000"/>
+            </a:schemeClr>
+          </a:lnRef>
+          <a:fillRef idx="1">
+            <a:schemeClr val="accent1"/>
+          </a:fillRef>
+          <a:effectRef idx="0">
+            <a:schemeClr val="accent1"/>
+          </a:effectRef>
+          <a:fontRef idx="minor">
+            <a:schemeClr val="lt1"/>
+          </a:fontRef>
+        </p:style>
+        <p:txBody>
+          <a:bodyPr rtlCol="0" anchor="ctr"/>
+          <a:lstStyle/>
+          <a:p>
+            <a:pPr algn="ctr"/>
+            <a:r>
+              <a:rPr lang="en-US" sz="2000" dirty="0">
+                <a:solidFill>
+                  <a:schemeClr val="tx1"/>
+                </a:solidFill>
+              </a:rPr>
+              <a:t>7. Recommender  Algorithms</a:t>
+            </a:r>
+          </a:p>
+        </p:txBody>
+      </p:sp>
+      <p:sp>
+        <p:nvSpPr>
+          <p:cNvPr id="21" name="Rectangle 20">
+            <a:extLst>
+              <a:ext uri="{FF2B5EF4-FFF2-40B4-BE49-F238E27FC236}">
+                <a16:creationId xmlns:a16="http://schemas.microsoft.com/office/drawing/2014/main" id="{7B83853F-A8B1-FFC7-2974-7FB192052C02}"/>
+              </a:ext>
+            </a:extLst>
+          </p:cNvPr>
+          <p:cNvSpPr/>
+          <p:nvPr/>
+        </p:nvSpPr>
+        <p:spPr>
+          <a:xfrm>
+            <a:off x="3760595" y="5172609"/>
+            <a:ext cx="2085981" cy="1245689"/>
+          </a:xfrm>
+          <a:prstGeom prst="rect">
+            <a:avLst/>
+          </a:prstGeom>
+          <a:noFill/>
+          <a:ln w="38100">
+            <a:solidFill>
+              <a:srgbClr val="C00000"/>
+            </a:solidFill>
+          </a:ln>
+        </p:spPr>
+        <p:style>
+          <a:lnRef idx="2">
+            <a:schemeClr val="accent1">
+              <a:shade val="15000"/>
+            </a:schemeClr>
+          </a:lnRef>
+          <a:fillRef idx="1">
+            <a:schemeClr val="accent1"/>
+          </a:fillRef>
+          <a:effectRef idx="0">
+            <a:schemeClr val="accent1"/>
+          </a:effectRef>
+          <a:fontRef idx="minor">
+            <a:schemeClr val="lt1"/>
+          </a:fontRef>
+        </p:style>
+        <p:txBody>
+          <a:bodyPr rtlCol="0" anchor="ctr"/>
+          <a:lstStyle/>
+          <a:p>
+            <a:pPr algn="ctr"/>
+            <a:r>
+              <a:rPr lang="en-US" sz="2000" dirty="0">
+                <a:solidFill>
+                  <a:schemeClr val="tx1"/>
+                </a:solidFill>
+              </a:rPr>
+              <a:t>6. Web/Document ranking and search</a:t>
+            </a:r>
+          </a:p>
+        </p:txBody>
+      </p:sp>
+      <p:sp>
+        <p:nvSpPr>
+          <p:cNvPr id="22" name="Content Placeholder 2">
+            <a:extLst>
+              <a:ext uri="{FF2B5EF4-FFF2-40B4-BE49-F238E27FC236}">
+                <a16:creationId xmlns:a16="http://schemas.microsoft.com/office/drawing/2014/main" id="{7CC00380-3ACC-792E-4339-EA61C9C9951D}"/>
+              </a:ext>
+            </a:extLst>
+          </p:cNvPr>
+          <p:cNvSpPr txBox="1">
+            <a:spLocks/>
+          </p:cNvSpPr>
+          <p:nvPr/>
+        </p:nvSpPr>
+        <p:spPr>
+          <a:xfrm>
+            <a:off x="865089" y="797597"/>
+            <a:ext cx="10515600" cy="850578"/>
+          </a:xfrm>
+          <a:prstGeom prst="rect">
+            <a:avLst/>
+          </a:prstGeom>
+        </p:spPr>
+        <p:txBody>
+          <a:bodyPr>
+            <a:noAutofit/>
+          </a:bodyPr>
+          <a:lstStyle>
+            <a:lvl1pPr marL="228600" indent="-228600" algn="l" defTabSz="914400" rtl="0" eaLnBrk="1" latinLnBrk="0" hangingPunct="1">
+              <a:lnSpc>
+                <a:spcPct val="90000"/>
+              </a:lnSpc>
+              <a:spcBef>
+                <a:spcPts val="1000"/>
+              </a:spcBef>
+              <a:buFont typeface="Arial" panose="020B0604020202020204" pitchFamily="34" charset="0"/>
+              <a:buChar char="•"/>
+              <a:defRPr sz="2800" kern="1200">
+                <a:solidFill>
+                  <a:schemeClr val="tx1"/>
+                </a:solidFill>
+                <a:latin typeface="+mn-lt"/>
+                <a:ea typeface="+mn-ea"/>
+                <a:cs typeface="+mn-cs"/>
+              </a:defRPr>
+            </a:lvl1pPr>
+            <a:lvl2pPr marL="685800" indent="-228600" algn="l" defTabSz="914400" rtl="0" eaLnBrk="1" latinLnBrk="0" hangingPunct="1">
+              <a:lnSpc>
+                <a:spcPct val="90000"/>
+              </a:lnSpc>
+              <a:spcBef>
+                <a:spcPts val="500"/>
+              </a:spcBef>
+              <a:buFont typeface="Arial" panose="020B0604020202020204" pitchFamily="34" charset="0"/>
+              <a:buChar char="•"/>
+              <a:defRPr sz="2400" kern="1200">
+                <a:solidFill>
+                  <a:schemeClr val="tx1"/>
+                </a:solidFill>
+                <a:latin typeface="+mn-lt"/>
+                <a:ea typeface="+mn-ea"/>
+                <a:cs typeface="+mn-cs"/>
+              </a:defRPr>
+            </a:lvl2pPr>
+            <a:lvl3pPr marL="1143000" indent="-228600" algn="l" defTabSz="914400" rtl="0" eaLnBrk="1" latinLnBrk="0" hangingPunct="1">
+              <a:lnSpc>
+                <a:spcPct val="90000"/>
+              </a:lnSpc>
+              <a:spcBef>
+                <a:spcPts val="500"/>
+              </a:spcBef>
+              <a:buFont typeface="Arial" panose="020B0604020202020204" pitchFamily="34" charset="0"/>
+              <a:buChar char="•"/>
+              <a:defRPr sz="2000" kern="1200">
+                <a:solidFill>
+                  <a:schemeClr val="tx1"/>
+                </a:solidFill>
+                <a:latin typeface="+mn-lt"/>
+                <a:ea typeface="+mn-ea"/>
+                <a:cs typeface="+mn-cs"/>
+              </a:defRPr>
+            </a:lvl3pPr>
+            <a:lvl4pPr marL="1600200" indent="-228600" algn="l" defTabSz="914400" rtl="0" eaLnBrk="1" latinLnBrk="0" hangingPunct="1">
+              <a:lnSpc>
+                <a:spcPct val="90000"/>
+              </a:lnSpc>
+              <a:spcBef>
+                <a:spcPts val="500"/>
+              </a:spcBef>
+              <a:buFont typeface="Arial" panose="020B0604020202020204" pitchFamily="34" charset="0"/>
+              <a:buChar char="•"/>
+              <a:defRPr sz="1800" kern="1200">
+                <a:solidFill>
+                  <a:schemeClr val="tx1"/>
+                </a:solidFill>
+                <a:latin typeface="+mn-lt"/>
+                <a:ea typeface="+mn-ea"/>
+                <a:cs typeface="+mn-cs"/>
+              </a:defRPr>
+            </a:lvl4pPr>
+            <a:lvl5pPr marL="2057400" indent="-228600" algn="l" defTabSz="914400" rtl="0" eaLnBrk="1" latinLnBrk="0" hangingPunct="1">
+              <a:lnSpc>
+                <a:spcPct val="90000"/>
+              </a:lnSpc>
+              <a:spcBef>
+                <a:spcPts val="500"/>
+              </a:spcBef>
+              <a:buFont typeface="Arial" panose="020B0604020202020204" pitchFamily="34" charset="0"/>
+              <a:buChar char="•"/>
+              <a:defRPr sz="1800" kern="1200">
+                <a:solidFill>
+                  <a:schemeClr val="tx1"/>
+                </a:solidFill>
+                <a:latin typeface="+mn-lt"/>
+                <a:ea typeface="+mn-ea"/>
+                <a:cs typeface="+mn-cs"/>
+              </a:defRPr>
+            </a:lvl5pPr>
+            <a:lvl6pPr marL="2514600" indent="-228600" algn="l" defTabSz="914400" rtl="0" eaLnBrk="1" latinLnBrk="0" hangingPunct="1">
+              <a:lnSpc>
+                <a:spcPct val="90000"/>
+              </a:lnSpc>
+              <a:spcBef>
+                <a:spcPts val="500"/>
+              </a:spcBef>
+              <a:buFont typeface="Arial" panose="020B0604020202020204" pitchFamily="34" charset="0"/>
+              <a:buChar char="•"/>
+              <a:defRPr sz="1800" kern="1200">
+                <a:solidFill>
+                  <a:schemeClr val="tx1"/>
+                </a:solidFill>
+                <a:latin typeface="+mn-lt"/>
+                <a:ea typeface="+mn-ea"/>
+                <a:cs typeface="+mn-cs"/>
+              </a:defRPr>
+            </a:lvl6pPr>
+            <a:lvl7pPr marL="2971800" indent="-228600" algn="l" defTabSz="914400" rtl="0" eaLnBrk="1" latinLnBrk="0" hangingPunct="1">
+              <a:lnSpc>
+                <a:spcPct val="90000"/>
+              </a:lnSpc>
+              <a:spcBef>
+                <a:spcPts val="500"/>
+              </a:spcBef>
+              <a:buFont typeface="Arial" panose="020B0604020202020204" pitchFamily="34" charset="0"/>
+              <a:buChar char="•"/>
+              <a:defRPr sz="1800" kern="1200">
+                <a:solidFill>
+                  <a:schemeClr val="tx1"/>
+                </a:solidFill>
+                <a:latin typeface="+mn-lt"/>
+                <a:ea typeface="+mn-ea"/>
+                <a:cs typeface="+mn-cs"/>
+              </a:defRPr>
+            </a:lvl7pPr>
+            <a:lvl8pPr marL="3429000" indent="-228600" algn="l" defTabSz="914400" rtl="0" eaLnBrk="1" latinLnBrk="0" hangingPunct="1">
+              <a:lnSpc>
+                <a:spcPct val="90000"/>
+              </a:lnSpc>
+              <a:spcBef>
+                <a:spcPts val="500"/>
+              </a:spcBef>
+              <a:buFont typeface="Arial" panose="020B0604020202020204" pitchFamily="34" charset="0"/>
+              <a:buChar char="•"/>
+              <a:defRPr sz="1800" kern="1200">
+                <a:solidFill>
+                  <a:schemeClr val="tx1"/>
+                </a:solidFill>
+                <a:latin typeface="+mn-lt"/>
+                <a:ea typeface="+mn-ea"/>
+                <a:cs typeface="+mn-cs"/>
+              </a:defRPr>
+            </a:lvl8pPr>
+            <a:lvl9pPr marL="3886200" indent="-228600" algn="l" defTabSz="914400" rtl="0" eaLnBrk="1" latinLnBrk="0" hangingPunct="1">
+              <a:lnSpc>
+                <a:spcPct val="90000"/>
+              </a:lnSpc>
+              <a:spcBef>
+                <a:spcPts val="500"/>
+              </a:spcBef>
+              <a:buFont typeface="Arial" panose="020B0604020202020204" pitchFamily="34" charset="0"/>
+              <a:buChar char="•"/>
+              <a:defRPr sz="1800" kern="1200">
+                <a:solidFill>
+                  <a:schemeClr val="tx1"/>
+                </a:solidFill>
+                <a:latin typeface="+mn-lt"/>
+                <a:ea typeface="+mn-ea"/>
+                <a:cs typeface="+mn-cs"/>
+              </a:defRPr>
+            </a:lvl9pPr>
+          </a:lstStyle>
+          <a:p>
+            <a:pPr marL="0" indent="0">
+              <a:buFont typeface="Arial" panose="020B0604020202020204" pitchFamily="34" charset="0"/>
+              <a:buNone/>
+            </a:pPr>
+            <a:r>
+              <a:rPr lang="en-US" dirty="0"/>
+              <a:t>Unsupervised learning dominates the topics in this course</a:t>
+            </a:r>
+          </a:p>
+        </p:txBody>
+      </p:sp>
+    </p:spTree>
+    <p:extLst>
+      <p:ext uri="{BB962C8B-B14F-4D97-AF65-F5344CB8AC3E}">
+        <p14:creationId xmlns:p14="http://schemas.microsoft.com/office/powerpoint/2010/main" val="1085165510"/>
+      </p:ext>
+    </p:extLst>
+  </p:cSld>
+  <p:clrMapOvr>
+    <a:masterClrMapping/>
+  </p:clrMapOvr>
+  <p:timing>
+    <p:tnLst>
+      <p:par>
+        <p:cTn id="1" dur="indefinite" restart="never" nodeType="tmRoot">
+          <p:childTnLst>
+            <p:seq concurrent="1" nextAc="seek">
+              <p:cTn id="2" dur="indefinite" nodeType="mainSeq">
+                <p:childTnLst>
+                  <p:par>
+                    <p:cTn id="3" fill="hold">
+                      <p:stCondLst>
+                        <p:cond delay="indefinite"/>
+                      </p:stCondLst>
+                      <p:childTnLst>
+                        <p:par>
+                          <p:cTn id="4" fill="hold">
+                            <p:stCondLst>
+                              <p:cond delay="0"/>
+                            </p:stCondLst>
+                            <p:childTnLst>
+                              <p:par>
+                                <p:cTn id="5" presetID="1" presetClass="entr" presetSubtype="0" fill="hold" grpId="0" nodeType="clickEffect">
+                                  <p:stCondLst>
+                                    <p:cond delay="0"/>
+                                  </p:stCondLst>
+                                  <p:childTnLst>
+                                    <p:set>
+                                      <p:cBhvr>
+                                        <p:cTn id="6" dur="1" fill="hold">
+                                          <p:stCondLst>
+                                            <p:cond delay="0"/>
+                                          </p:stCondLst>
+                                        </p:cTn>
+                                        <p:tgtEl>
+                                          <p:spTgt spid="3"/>
+                                        </p:tgtEl>
+                                        <p:attrNameLst>
+                                          <p:attrName>style.visibility</p:attrName>
+                                        </p:attrNameLst>
+                                      </p:cBhvr>
+                                      <p:to>
+                                        <p:strVal val="visible"/>
+                                      </p:to>
+                                    </p:set>
+                                  </p:childTnLst>
+                                </p:cTn>
+                              </p:par>
+                              <p:par>
+                                <p:cTn id="7" presetID="1" presetClass="entr" presetSubtype="0" fill="hold" grpId="0" nodeType="withEffect">
+                                  <p:stCondLst>
+                                    <p:cond delay="0"/>
+                                  </p:stCondLst>
+                                  <p:childTnLst>
+                                    <p:set>
+                                      <p:cBhvr>
+                                        <p:cTn id="8" dur="1" fill="hold">
+                                          <p:stCondLst>
+                                            <p:cond delay="0"/>
+                                          </p:stCondLst>
+                                        </p:cTn>
+                                        <p:tgtEl>
+                                          <p:spTgt spid="4"/>
+                                        </p:tgtEl>
+                                        <p:attrNameLst>
+                                          <p:attrName>style.visibility</p:attrName>
+                                        </p:attrNameLst>
+                                      </p:cBhvr>
+                                      <p:to>
+                                        <p:strVal val="visible"/>
+                                      </p:to>
+                                    </p:set>
+                                  </p:childTnLst>
+                                </p:cTn>
+                              </p:par>
+                              <p:par>
+                                <p:cTn id="9" presetID="1" presetClass="entr" presetSubtype="0" fill="hold" grpId="0" nodeType="withEffect">
+                                  <p:stCondLst>
+                                    <p:cond delay="0"/>
+                                  </p:stCondLst>
+                                  <p:childTnLst>
+                                    <p:set>
+                                      <p:cBhvr>
+                                        <p:cTn id="10" dur="1" fill="hold">
+                                          <p:stCondLst>
+                                            <p:cond delay="0"/>
+                                          </p:stCondLst>
+                                        </p:cTn>
+                                        <p:tgtEl>
+                                          <p:spTgt spid="5"/>
+                                        </p:tgtEl>
+                                        <p:attrNameLst>
+                                          <p:attrName>style.visibility</p:attrName>
+                                        </p:attrNameLst>
+                                      </p:cBhvr>
+                                      <p:to>
+                                        <p:strVal val="visible"/>
+                                      </p:to>
+                                    </p:set>
+                                  </p:childTnLst>
+                                </p:cTn>
+                              </p:par>
+                              <p:par>
+                                <p:cTn id="11" presetID="1" presetClass="entr" presetSubtype="0" fill="hold" grpId="0" nodeType="withEffect">
+                                  <p:stCondLst>
+                                    <p:cond delay="0"/>
+                                  </p:stCondLst>
+                                  <p:childTnLst>
+                                    <p:set>
+                                      <p:cBhvr>
+                                        <p:cTn id="12" dur="1" fill="hold">
+                                          <p:stCondLst>
+                                            <p:cond delay="0"/>
+                                          </p:stCondLst>
+                                        </p:cTn>
+                                        <p:tgtEl>
+                                          <p:spTgt spid="6"/>
+                                        </p:tgtEl>
+                                        <p:attrNameLst>
+                                          <p:attrName>style.visibility</p:attrName>
+                                        </p:attrNameLst>
+                                      </p:cBhvr>
+                                      <p:to>
+                                        <p:strVal val="visible"/>
+                                      </p:to>
+                                    </p:set>
+                                  </p:childTnLst>
+                                </p:cTn>
+                              </p:par>
+                              <p:par>
+                                <p:cTn id="13" presetID="1" presetClass="entr" presetSubtype="0" fill="hold" grpId="0" nodeType="withEffect">
+                                  <p:stCondLst>
+                                    <p:cond delay="0"/>
+                                  </p:stCondLst>
+                                  <p:childTnLst>
+                                    <p:set>
+                                      <p:cBhvr>
+                                        <p:cTn id="14" dur="1" fill="hold">
+                                          <p:stCondLst>
+                                            <p:cond delay="0"/>
+                                          </p:stCondLst>
+                                        </p:cTn>
+                                        <p:tgtEl>
+                                          <p:spTgt spid="7"/>
+                                        </p:tgtEl>
+                                        <p:attrNameLst>
+                                          <p:attrName>style.visibility</p:attrName>
+                                        </p:attrNameLst>
+                                      </p:cBhvr>
+                                      <p:to>
+                                        <p:strVal val="visible"/>
+                                      </p:to>
+                                    </p:set>
+                                  </p:childTnLst>
+                                </p:cTn>
+                              </p:par>
+                              <p:par>
+                                <p:cTn id="15" presetID="1" presetClass="entr" presetSubtype="0" fill="hold" grpId="0" nodeType="withEffect">
+                                  <p:stCondLst>
+                                    <p:cond delay="0"/>
+                                  </p:stCondLst>
+                                  <p:childTnLst>
+                                    <p:set>
+                                      <p:cBhvr>
+                                        <p:cTn id="16" dur="1" fill="hold">
+                                          <p:stCondLst>
+                                            <p:cond delay="0"/>
+                                          </p:stCondLst>
+                                        </p:cTn>
+                                        <p:tgtEl>
+                                          <p:spTgt spid="8"/>
+                                        </p:tgtEl>
+                                        <p:attrNameLst>
+                                          <p:attrName>style.visibility</p:attrName>
+                                        </p:attrNameLst>
+                                      </p:cBhvr>
+                                      <p:to>
+                                        <p:strVal val="visible"/>
+                                      </p:to>
+                                    </p:set>
+                                  </p:childTnLst>
+                                </p:cTn>
+                              </p:par>
+                              <p:par>
+                                <p:cTn id="17" presetID="1" presetClass="entr" presetSubtype="0" fill="hold" grpId="0" nodeType="withEffect">
+                                  <p:stCondLst>
+                                    <p:cond delay="0"/>
+                                  </p:stCondLst>
+                                  <p:childTnLst>
+                                    <p:set>
+                                      <p:cBhvr>
+                                        <p:cTn id="18" dur="1" fill="hold">
+                                          <p:stCondLst>
+                                            <p:cond delay="0"/>
+                                          </p:stCondLst>
+                                        </p:cTn>
+                                        <p:tgtEl>
+                                          <p:spTgt spid="10"/>
+                                        </p:tgtEl>
+                                        <p:attrNameLst>
+                                          <p:attrName>style.visibility</p:attrName>
+                                        </p:attrNameLst>
+                                      </p:cBhvr>
+                                      <p:to>
+                                        <p:strVal val="visible"/>
+                                      </p:to>
+                                    </p:set>
+                                  </p:childTnLst>
+                                </p:cTn>
+                              </p:par>
+                              <p:par>
+                                <p:cTn id="19" presetID="1" presetClass="entr" presetSubtype="0" fill="hold" grpId="0" nodeType="withEffect">
+                                  <p:stCondLst>
+                                    <p:cond delay="0"/>
+                                  </p:stCondLst>
+                                  <p:childTnLst>
+                                    <p:set>
+                                      <p:cBhvr>
+                                        <p:cTn id="20" dur="1" fill="hold">
+                                          <p:stCondLst>
+                                            <p:cond delay="0"/>
+                                          </p:stCondLst>
+                                        </p:cTn>
+                                        <p:tgtEl>
+                                          <p:spTgt spid="11"/>
+                                        </p:tgtEl>
+                                        <p:attrNameLst>
+                                          <p:attrName>style.visibility</p:attrName>
+                                        </p:attrNameLst>
+                                      </p:cBhvr>
+                                      <p:to>
+                                        <p:strVal val="visible"/>
+                                      </p:to>
+                                    </p:set>
+                                  </p:childTnLst>
+                                </p:cTn>
+                              </p:par>
+                              <p:par>
+                                <p:cTn id="21" presetID="1" presetClass="entr" presetSubtype="0" fill="hold" grpId="0" nodeType="withEffect">
+                                  <p:stCondLst>
+                                    <p:cond delay="0"/>
+                                  </p:stCondLst>
+                                  <p:childTnLst>
+                                    <p:set>
+                                      <p:cBhvr>
+                                        <p:cTn id="22" dur="1" fill="hold">
+                                          <p:stCondLst>
+                                            <p:cond delay="0"/>
+                                          </p:stCondLst>
+                                        </p:cTn>
+                                        <p:tgtEl>
+                                          <p:spTgt spid="16"/>
+                                        </p:tgtEl>
+                                        <p:attrNameLst>
+                                          <p:attrName>style.visibility</p:attrName>
+                                        </p:attrNameLst>
+                                      </p:cBhvr>
+                                      <p:to>
+                                        <p:strVal val="visible"/>
+                                      </p:to>
+                                    </p:set>
+                                  </p:childTnLst>
+                                </p:cTn>
+                              </p:par>
+                              <p:par>
+                                <p:cTn id="23" presetID="1" presetClass="entr" presetSubtype="0" fill="hold" grpId="0" nodeType="withEffect">
+                                  <p:stCondLst>
+                                    <p:cond delay="0"/>
+                                  </p:stCondLst>
+                                  <p:childTnLst>
+                                    <p:set>
+                                      <p:cBhvr>
+                                        <p:cTn id="24" dur="1" fill="hold">
+                                          <p:stCondLst>
+                                            <p:cond delay="0"/>
+                                          </p:stCondLst>
+                                        </p:cTn>
+                                        <p:tgtEl>
+                                          <p:spTgt spid="17"/>
+                                        </p:tgtEl>
+                                        <p:attrNameLst>
+                                          <p:attrName>style.visibility</p:attrName>
+                                        </p:attrNameLst>
+                                      </p:cBhvr>
+                                      <p:to>
+                                        <p:strVal val="visible"/>
+                                      </p:to>
+                                    </p:set>
+                                  </p:childTnLst>
+                                </p:cTn>
+                              </p:par>
+                              <p:par>
+                                <p:cTn id="25" presetID="1" presetClass="entr" presetSubtype="0" fill="hold" grpId="0" nodeType="withEffect">
+                                  <p:stCondLst>
+                                    <p:cond delay="0"/>
+                                  </p:stCondLst>
+                                  <p:childTnLst>
+                                    <p:set>
+                                      <p:cBhvr>
+                                        <p:cTn id="26" dur="1" fill="hold">
+                                          <p:stCondLst>
+                                            <p:cond delay="0"/>
+                                          </p:stCondLst>
+                                        </p:cTn>
+                                        <p:tgtEl>
+                                          <p:spTgt spid="12"/>
+                                        </p:tgtEl>
+                                        <p:attrNameLst>
+                                          <p:attrName>style.visibility</p:attrName>
+                                        </p:attrNameLst>
+                                      </p:cBhvr>
+                                      <p:to>
+                                        <p:strVal val="visible"/>
+                                      </p:to>
+                                    </p:set>
+                                  </p:childTnLst>
+                                </p:cTn>
+                              </p:par>
+                              <p:par>
+                                <p:cTn id="27" presetID="1" presetClass="entr" presetSubtype="0" fill="hold" grpId="0" nodeType="withEffect">
+                                  <p:stCondLst>
+                                    <p:cond delay="0"/>
+                                  </p:stCondLst>
+                                  <p:childTnLst>
+                                    <p:set>
+                                      <p:cBhvr>
+                                        <p:cTn id="28" dur="1" fill="hold">
+                                          <p:stCondLst>
+                                            <p:cond delay="0"/>
+                                          </p:stCondLst>
+                                        </p:cTn>
+                                        <p:tgtEl>
+                                          <p:spTgt spid="14"/>
+                                        </p:tgtEl>
+                                        <p:attrNameLst>
+                                          <p:attrName>style.visibility</p:attrName>
+                                        </p:attrNameLst>
+                                      </p:cBhvr>
+                                      <p:to>
+                                        <p:strVal val="visible"/>
+                                      </p:to>
+                                    </p:set>
+                                  </p:childTnLst>
+                                </p:cTn>
+                              </p:par>
+                              <p:par>
+                                <p:cTn id="29" presetID="1" presetClass="entr" presetSubtype="0" fill="hold" grpId="0" nodeType="withEffect">
+                                  <p:stCondLst>
+                                    <p:cond delay="0"/>
+                                  </p:stCondLst>
+                                  <p:childTnLst>
+                                    <p:set>
+                                      <p:cBhvr>
+                                        <p:cTn id="30" dur="1" fill="hold">
+                                          <p:stCondLst>
+                                            <p:cond delay="0"/>
+                                          </p:stCondLst>
+                                        </p:cTn>
+                                        <p:tgtEl>
+                                          <p:spTgt spid="15"/>
+                                        </p:tgtEl>
+                                        <p:attrNameLst>
+                                          <p:attrName>style.visibility</p:attrName>
+                                        </p:attrNameLst>
+                                      </p:cBhvr>
+                                      <p:to>
+                                        <p:strVal val="visible"/>
+                                      </p:to>
+                                    </p:set>
+                                  </p:childTnLst>
+                                </p:cTn>
+                              </p:par>
+                              <p:par>
+                                <p:cTn id="31" presetID="1" presetClass="entr" presetSubtype="0" fill="hold" grpId="0" nodeType="withEffect">
+                                  <p:stCondLst>
+                                    <p:cond delay="0"/>
+                                  </p:stCondLst>
+                                  <p:childTnLst>
+                                    <p:set>
+                                      <p:cBhvr>
+                                        <p:cTn id="32" dur="1" fill="hold">
+                                          <p:stCondLst>
+                                            <p:cond delay="0"/>
+                                          </p:stCondLst>
+                                        </p:cTn>
+                                        <p:tgtEl>
+                                          <p:spTgt spid="18"/>
+                                        </p:tgtEl>
+                                        <p:attrNameLst>
+                                          <p:attrName>style.visibility</p:attrName>
+                                        </p:attrNameLst>
+                                      </p:cBhvr>
+                                      <p:to>
+                                        <p:strVal val="visible"/>
+                                      </p:to>
+                                    </p:set>
+                                  </p:childTnLst>
+                                </p:cTn>
+                              </p:par>
+                              <p:par>
+                                <p:cTn id="33" presetID="1" presetClass="entr" presetSubtype="0" fill="hold" grpId="0" nodeType="withEffect">
+                                  <p:stCondLst>
+                                    <p:cond delay="0"/>
+                                  </p:stCondLst>
+                                  <p:childTnLst>
+                                    <p:set>
+                                      <p:cBhvr>
+                                        <p:cTn id="34" dur="1" fill="hold">
+                                          <p:stCondLst>
+                                            <p:cond delay="0"/>
+                                          </p:stCondLst>
+                                        </p:cTn>
+                                        <p:tgtEl>
+                                          <p:spTgt spid="20"/>
+                                        </p:tgtEl>
+                                        <p:attrNameLst>
+                                          <p:attrName>style.visibility</p:attrName>
+                                        </p:attrNameLst>
+                                      </p:cBhvr>
+                                      <p:to>
+                                        <p:strVal val="visible"/>
+                                      </p:to>
+                                    </p:set>
+                                  </p:childTnLst>
+                                </p:cTn>
+                              </p:par>
+                              <p:par>
+                                <p:cTn id="35" presetID="1" presetClass="entr" presetSubtype="0" fill="hold" grpId="0" nodeType="withEffect">
+                                  <p:stCondLst>
+                                    <p:cond delay="0"/>
+                                  </p:stCondLst>
+                                  <p:childTnLst>
+                                    <p:set>
+                                      <p:cBhvr>
+                                        <p:cTn id="36" dur="1" fill="hold">
+                                          <p:stCondLst>
+                                            <p:cond delay="0"/>
+                                          </p:stCondLst>
+                                        </p:cTn>
+                                        <p:tgtEl>
+                                          <p:spTgt spid="21"/>
+                                        </p:tgtEl>
+                                        <p:attrNameLst>
+                                          <p:attrName>style.visibility</p:attrName>
+                                        </p:attrNameLst>
+                                      </p:cBhvr>
+                                      <p:to>
+                                        <p:strVal val="visible"/>
+                                      </p:to>
+                                    </p:set>
+                                  </p:childTnLst>
+                                </p:cTn>
+                              </p:par>
+                            </p:childTnLst>
+                          </p:cTn>
+                        </p:par>
+                      </p:childTnLst>
+                    </p:cTn>
+                  </p:par>
+                </p:childTnLst>
+              </p:cTn>
+              <p:prevCondLst>
+                <p:cond evt="onPrev" delay="0">
+                  <p:tgtEl>
+                    <p:sldTgt/>
+                  </p:tgtEl>
+                </p:cond>
+              </p:prevCondLst>
+              <p:nextCondLst>
+                <p:cond evt="onNext" delay="0">
+                  <p:tgtEl>
+                    <p:sldTgt/>
+                  </p:tgtEl>
+                </p:cond>
+              </p:nextCondLst>
+            </p:seq>
+          </p:childTnLst>
+        </p:cTn>
+      </p:par>
+    </p:tnLst>
+    <p:bldLst>
+      <p:bldP spid="3" grpId="0" animBg="1"/>
+      <p:bldP spid="4" grpId="0"/>
+      <p:bldP spid="5" grpId="0" animBg="1"/>
+      <p:bldP spid="6" grpId="0" animBg="1"/>
+      <p:bldP spid="7" grpId="0" animBg="1"/>
+      <p:bldP spid="8" grpId="0" animBg="1"/>
+      <p:bldP spid="10" grpId="0" animBg="1"/>
+      <p:bldP spid="11" grpId="0"/>
+      <p:bldP spid="12" grpId="0" animBg="1"/>
+      <p:bldP spid="14" grpId="0" animBg="1"/>
+      <p:bldP spid="15" grpId="0"/>
+      <p:bldP spid="16" grpId="0" animBg="1"/>
+      <p:bldP spid="17" grpId="0" animBg="1"/>
+      <p:bldP spid="18" grpId="0" animBg="1"/>
+      <p:bldP spid="20" grpId="0" animBg="1"/>
+      <p:bldP spid="21" grpId="0" animBg="1"/>
+    </p:bldLst>
+  </p:timing>
+</p:sld>
+</file>
+
+<file path=ppt/slides/slide17.xml><?xml version="1.0" encoding="utf-8"?>
 <p:sld xmlns:a="http://schemas.openxmlformats.org/drawingml/2006/main" xmlns:r="http://schemas.openxmlformats.org/officeDocument/2006/relationships" xmlns:p="http://schemas.openxmlformats.org/presentationml/2006/main" show="0">
   <p:cSld>
     <p:spTree>
@@ -10783,7 +12423,7 @@
 </p:sld>
 </file>
 
-<file path=ppt/slides/slide17.xml><?xml version="1.0" encoding="utf-8"?>
+<file path=ppt/slides/slide18.xml><?xml version="1.0" encoding="utf-8"?>
 <p:sld xmlns:a="http://schemas.openxmlformats.org/drawingml/2006/main" xmlns:r="http://schemas.openxmlformats.org/officeDocument/2006/relationships" xmlns:p="http://schemas.openxmlformats.org/presentationml/2006/main" show="0">
   <p:cSld>
     <p:spTree>
@@ -11159,7 +12799,7 @@
 </p:sld>
 </file>
 
-<file path=ppt/slides/slide18.xml><?xml version="1.0" encoding="utf-8"?>
+<file path=ppt/slides/slide19.xml><?xml version="1.0" encoding="utf-8"?>
 <p:sld xmlns:a="http://schemas.openxmlformats.org/drawingml/2006/main" xmlns:r="http://schemas.openxmlformats.org/officeDocument/2006/relationships" xmlns:p="http://schemas.openxmlformats.org/presentationml/2006/main">
   <p:cSld>
     <p:spTree>
@@ -11591,7 +13231,431 @@
 </p:sld>
 </file>
 
-<file path=ppt/slides/slide19.xml><?xml version="1.0" encoding="utf-8"?>
+<file path=ppt/slides/slide2.xml><?xml version="1.0" encoding="utf-8"?>
+<p:sld xmlns:a="http://schemas.openxmlformats.org/drawingml/2006/main" xmlns:r="http://schemas.openxmlformats.org/officeDocument/2006/relationships" xmlns:p="http://schemas.openxmlformats.org/presentationml/2006/main">
+  <p:cSld>
+    <p:spTree>
+      <p:nvGrpSpPr>
+        <p:cNvPr id="1" name=""/>
+        <p:cNvGrpSpPr/>
+        <p:nvPr/>
+      </p:nvGrpSpPr>
+      <p:grpSpPr>
+        <a:xfrm>
+          <a:off x="0" y="0"/>
+          <a:ext cx="0" cy="0"/>
+          <a:chOff x="0" y="0"/>
+          <a:chExt cx="0" cy="0"/>
+        </a:xfrm>
+      </p:grpSpPr>
+      <p:sp>
+        <p:nvSpPr>
+          <p:cNvPr id="3" name="Content Placeholder 2">
+            <a:extLst>
+              <a:ext uri="{FF2B5EF4-FFF2-40B4-BE49-F238E27FC236}">
+                <a16:creationId xmlns:a16="http://schemas.microsoft.com/office/drawing/2014/main" id="{258E6AF3-7615-4BD1-878E-A94C93E98F90}"/>
+              </a:ext>
+            </a:extLst>
+          </p:cNvPr>
+          <p:cNvSpPr>
+            <a:spLocks noGrp="1"/>
+          </p:cNvSpPr>
+          <p:nvPr>
+            <p:ph idx="1"/>
+          </p:nvPr>
+        </p:nvSpPr>
+        <p:spPr/>
+        <p:txBody>
+          <a:bodyPr/>
+          <a:lstStyle/>
+          <a:p>
+            <a:r>
+              <a:rPr lang="en-US" dirty="0"/>
+              <a:t>What is data mining? </a:t>
+            </a:r>
+          </a:p>
+          <a:p>
+            <a:pPr lvl="1"/>
+            <a:r>
+              <a:rPr lang="en-US" dirty="0"/>
+              <a:t>Data mining is the science of </a:t>
+            </a:r>
+            <a:r>
+              <a:rPr lang="en-US" b="1" dirty="0"/>
+              <a:t>knowledge discovery  </a:t>
+            </a:r>
+          </a:p>
+          <a:p>
+            <a:r>
+              <a:rPr lang="en-US" dirty="0"/>
+              <a:t>About this course  </a:t>
+            </a:r>
+          </a:p>
+          <a:p>
+            <a:r>
+              <a:rPr lang="en-US" dirty="0"/>
+              <a:t>Data mining often uses massive data sets</a:t>
+            </a:r>
+          </a:p>
+          <a:p>
+            <a:pPr lvl="1"/>
+            <a:r>
+              <a:rPr lang="en-US" dirty="0"/>
+              <a:t>Manage massive data with key-values pairs </a:t>
+            </a:r>
+          </a:p>
+          <a:p>
+            <a:pPr lvl="1"/>
+            <a:r>
+              <a:rPr lang="en-US" dirty="0"/>
+              <a:t>Efficient management of key-value pairs requires hashing </a:t>
+            </a:r>
+          </a:p>
+          <a:p>
+            <a:endParaRPr lang="en-US" dirty="0"/>
+          </a:p>
+        </p:txBody>
+      </p:sp>
+      <p:sp>
+        <p:nvSpPr>
+          <p:cNvPr id="6" name="Title 1">
+            <a:extLst>
+              <a:ext uri="{FF2B5EF4-FFF2-40B4-BE49-F238E27FC236}">
+                <a16:creationId xmlns:a16="http://schemas.microsoft.com/office/drawing/2014/main" id="{CD29F70F-B868-451B-A65D-8721F4C7A2D9}"/>
+              </a:ext>
+            </a:extLst>
+          </p:cNvPr>
+          <p:cNvSpPr txBox="1">
+            <a:spLocks/>
+          </p:cNvSpPr>
+          <p:nvPr/>
+        </p:nvSpPr>
+        <p:spPr>
+          <a:xfrm>
+            <a:off x="838200" y="-635"/>
+            <a:ext cx="10515600" cy="1325563"/>
+          </a:xfrm>
+          <a:prstGeom prst="rect">
+            <a:avLst/>
+          </a:prstGeom>
+        </p:spPr>
+        <p:txBody>
+          <a:bodyPr vert="horz" lIns="91440" tIns="45720" rIns="91440" bIns="45720" rtlCol="0" anchor="ctr">
+            <a:normAutofit/>
+          </a:bodyPr>
+          <a:lstStyle>
+            <a:lvl1pPr algn="l" defTabSz="914400" rtl="0" eaLnBrk="1" latinLnBrk="0" hangingPunct="1">
+              <a:lnSpc>
+                <a:spcPct val="90000"/>
+              </a:lnSpc>
+              <a:spcBef>
+                <a:spcPct val="0"/>
+              </a:spcBef>
+              <a:buNone/>
+              <a:defRPr sz="4400" kern="1200">
+                <a:solidFill>
+                  <a:schemeClr val="tx1"/>
+                </a:solidFill>
+                <a:latin typeface="+mj-lt"/>
+                <a:ea typeface="+mj-ea"/>
+                <a:cs typeface="+mj-cs"/>
+              </a:defRPr>
+            </a:lvl1pPr>
+          </a:lstStyle>
+          <a:p>
+            <a:r>
+              <a:rPr lang="en-US" dirty="0">
+                <a:latin typeface="+mn-lt"/>
+              </a:rPr>
+              <a:t>Overview of Today’s Lesson</a:t>
+            </a:r>
+          </a:p>
+        </p:txBody>
+      </p:sp>
+    </p:spTree>
+    <p:extLst>
+      <p:ext uri="{BB962C8B-B14F-4D97-AF65-F5344CB8AC3E}">
+        <p14:creationId xmlns:p14="http://schemas.microsoft.com/office/powerpoint/2010/main" val="2482426584"/>
+      </p:ext>
+    </p:extLst>
+  </p:cSld>
+  <p:clrMapOvr>
+    <a:masterClrMapping/>
+  </p:clrMapOvr>
+  <p:timing>
+    <p:tnLst>
+      <p:par>
+        <p:cTn id="1" dur="indefinite" restart="never" nodeType="tmRoot">
+          <p:childTnLst>
+            <p:seq concurrent="1" nextAc="seek">
+              <p:cTn id="2" dur="indefinite" nodeType="mainSeq">
+                <p:childTnLst>
+                  <p:par>
+                    <p:cTn id="3" fill="hold">
+                      <p:stCondLst>
+                        <p:cond delay="indefinite"/>
+                      </p:stCondLst>
+                      <p:childTnLst>
+                        <p:par>
+                          <p:cTn id="4" fill="hold">
+                            <p:stCondLst>
+                              <p:cond delay="0"/>
+                            </p:stCondLst>
+                            <p:childTnLst>
+                              <p:par>
+                                <p:cTn id="5" presetID="1" presetClass="entr" presetSubtype="0" fill="hold" nodeType="clickEffect">
+                                  <p:stCondLst>
+                                    <p:cond delay="0"/>
+                                  </p:stCondLst>
+                                  <p:childTnLst>
+                                    <p:set>
+                                      <p:cBhvr>
+                                        <p:cTn id="6" dur="1" fill="hold">
+                                          <p:stCondLst>
+                                            <p:cond delay="0"/>
+                                          </p:stCondLst>
+                                        </p:cTn>
+                                        <p:tgtEl>
+                                          <p:spTgt spid="3">
+                                            <p:txEl>
+                                              <p:pRg st="0" end="0"/>
+                                            </p:txEl>
+                                          </p:spTgt>
+                                        </p:tgtEl>
+                                        <p:attrNameLst>
+                                          <p:attrName>style.visibility</p:attrName>
+                                        </p:attrNameLst>
+                                      </p:cBhvr>
+                                      <p:to>
+                                        <p:strVal val="visible"/>
+                                      </p:to>
+                                    </p:set>
+                                  </p:childTnLst>
+                                </p:cTn>
+                              </p:par>
+                              <p:par>
+                                <p:cTn id="7" presetID="1" presetClass="entr" presetSubtype="0" fill="hold" nodeType="withEffect">
+                                  <p:stCondLst>
+                                    <p:cond delay="0"/>
+                                  </p:stCondLst>
+                                  <p:childTnLst>
+                                    <p:set>
+                                      <p:cBhvr>
+                                        <p:cTn id="8" dur="1" fill="hold">
+                                          <p:stCondLst>
+                                            <p:cond delay="0"/>
+                                          </p:stCondLst>
+                                        </p:cTn>
+                                        <p:tgtEl>
+                                          <p:spTgt spid="3">
+                                            <p:txEl>
+                                              <p:pRg st="1" end="1"/>
+                                            </p:txEl>
+                                          </p:spTgt>
+                                        </p:tgtEl>
+                                        <p:attrNameLst>
+                                          <p:attrName>style.visibility</p:attrName>
+                                        </p:attrNameLst>
+                                      </p:cBhvr>
+                                      <p:to>
+                                        <p:strVal val="visible"/>
+                                      </p:to>
+                                    </p:set>
+                                  </p:childTnLst>
+                                </p:cTn>
+                              </p:par>
+                            </p:childTnLst>
+                          </p:cTn>
+                        </p:par>
+                      </p:childTnLst>
+                    </p:cTn>
+                  </p:par>
+                  <p:par>
+                    <p:cTn id="9" fill="hold">
+                      <p:stCondLst>
+                        <p:cond delay="indefinite"/>
+                      </p:stCondLst>
+                      <p:childTnLst>
+                        <p:par>
+                          <p:cTn id="10" fill="hold">
+                            <p:stCondLst>
+                              <p:cond delay="0"/>
+                            </p:stCondLst>
+                            <p:childTnLst>
+                              <p:par>
+                                <p:cTn id="11" presetID="1" presetClass="entr" presetSubtype="0" fill="hold" nodeType="clickEffect">
+                                  <p:stCondLst>
+                                    <p:cond delay="0"/>
+                                  </p:stCondLst>
+                                  <p:childTnLst>
+                                    <p:set>
+                                      <p:cBhvr>
+                                        <p:cTn id="12" dur="1" fill="hold">
+                                          <p:stCondLst>
+                                            <p:cond delay="0"/>
+                                          </p:stCondLst>
+                                        </p:cTn>
+                                        <p:tgtEl>
+                                          <p:spTgt spid="3">
+                                            <p:txEl>
+                                              <p:pRg st="2" end="2"/>
+                                            </p:txEl>
+                                          </p:spTgt>
+                                        </p:tgtEl>
+                                        <p:attrNameLst>
+                                          <p:attrName>style.visibility</p:attrName>
+                                        </p:attrNameLst>
+                                      </p:cBhvr>
+                                      <p:to>
+                                        <p:strVal val="visible"/>
+                                      </p:to>
+                                    </p:set>
+                                  </p:childTnLst>
+                                </p:cTn>
+                              </p:par>
+                            </p:childTnLst>
+                          </p:cTn>
+                        </p:par>
+                      </p:childTnLst>
+                    </p:cTn>
+                  </p:par>
+                  <p:par>
+                    <p:cTn id="13" fill="hold">
+                      <p:stCondLst>
+                        <p:cond delay="indefinite"/>
+                      </p:stCondLst>
+                      <p:childTnLst>
+                        <p:par>
+                          <p:cTn id="14" fill="hold">
+                            <p:stCondLst>
+                              <p:cond delay="0"/>
+                            </p:stCondLst>
+                            <p:childTnLst>
+                              <p:par>
+                                <p:cTn id="15" presetID="1" presetClass="entr" presetSubtype="0" fill="hold" nodeType="clickEffect">
+                                  <p:stCondLst>
+                                    <p:cond delay="0"/>
+                                  </p:stCondLst>
+                                  <p:childTnLst>
+                                    <p:set>
+                                      <p:cBhvr>
+                                        <p:cTn id="16" dur="1" fill="hold">
+                                          <p:stCondLst>
+                                            <p:cond delay="0"/>
+                                          </p:stCondLst>
+                                        </p:cTn>
+                                        <p:tgtEl>
+                                          <p:spTgt spid="3">
+                                            <p:txEl>
+                                              <p:pRg st="3" end="3"/>
+                                            </p:txEl>
+                                          </p:spTgt>
+                                        </p:tgtEl>
+                                        <p:attrNameLst>
+                                          <p:attrName>style.visibility</p:attrName>
+                                        </p:attrNameLst>
+                                      </p:cBhvr>
+                                      <p:to>
+                                        <p:strVal val="visible"/>
+                                      </p:to>
+                                    </p:set>
+                                  </p:childTnLst>
+                                </p:cTn>
+                              </p:par>
+                              <p:par>
+                                <p:cTn id="17" presetID="1" presetClass="entr" presetSubtype="0" fill="hold" nodeType="withEffect">
+                                  <p:stCondLst>
+                                    <p:cond delay="0"/>
+                                  </p:stCondLst>
+                                  <p:childTnLst>
+                                    <p:set>
+                                      <p:cBhvr>
+                                        <p:cTn id="18" dur="1" fill="hold">
+                                          <p:stCondLst>
+                                            <p:cond delay="0"/>
+                                          </p:stCondLst>
+                                        </p:cTn>
+                                        <p:tgtEl>
+                                          <p:spTgt spid="3">
+                                            <p:txEl>
+                                              <p:pRg st="4" end="4"/>
+                                            </p:txEl>
+                                          </p:spTgt>
+                                        </p:tgtEl>
+                                        <p:attrNameLst>
+                                          <p:attrName>style.visibility</p:attrName>
+                                        </p:attrNameLst>
+                                      </p:cBhvr>
+                                      <p:to>
+                                        <p:strVal val="visible"/>
+                                      </p:to>
+                                    </p:set>
+                                  </p:childTnLst>
+                                </p:cTn>
+                              </p:par>
+                              <p:par>
+                                <p:cTn id="19" presetID="1" presetClass="entr" presetSubtype="0" fill="hold" nodeType="withEffect">
+                                  <p:stCondLst>
+                                    <p:cond delay="0"/>
+                                  </p:stCondLst>
+                                  <p:childTnLst>
+                                    <p:set>
+                                      <p:cBhvr>
+                                        <p:cTn id="20" dur="1" fill="hold">
+                                          <p:stCondLst>
+                                            <p:cond delay="0"/>
+                                          </p:stCondLst>
+                                        </p:cTn>
+                                        <p:tgtEl>
+                                          <p:spTgt spid="3">
+                                            <p:txEl>
+                                              <p:pRg st="5" end="5"/>
+                                            </p:txEl>
+                                          </p:spTgt>
+                                        </p:tgtEl>
+                                        <p:attrNameLst>
+                                          <p:attrName>style.visibility</p:attrName>
+                                        </p:attrNameLst>
+                                      </p:cBhvr>
+                                      <p:to>
+                                        <p:strVal val="visible"/>
+                                      </p:to>
+                                    </p:set>
+                                  </p:childTnLst>
+                                </p:cTn>
+                              </p:par>
+                            </p:childTnLst>
+                          </p:cTn>
+                        </p:par>
+                      </p:childTnLst>
+                    </p:cTn>
+                  </p:par>
+                </p:childTnLst>
+              </p:cTn>
+              <p:prevCondLst>
+                <p:cond evt="onPrev" delay="0">
+                  <p:tgtEl>
+                    <p:sldTgt/>
+                  </p:tgtEl>
+                </p:cond>
+              </p:prevCondLst>
+              <p:nextCondLst>
+                <p:cond evt="onNext" delay="0">
+                  <p:tgtEl>
+                    <p:sldTgt/>
+                  </p:tgtEl>
+                </p:cond>
+              </p:nextCondLst>
+            </p:seq>
+          </p:childTnLst>
+        </p:cTn>
+      </p:par>
+    </p:tnLst>
+  </p:timing>
+</p:sld>
+</file>
+
+<file path=ppt/slides/slide20.xml><?xml version="1.0" encoding="utf-8"?>
 <p:sld xmlns:a="http://schemas.openxmlformats.org/drawingml/2006/main" xmlns:r="http://schemas.openxmlformats.org/officeDocument/2006/relationships" xmlns:p="http://schemas.openxmlformats.org/presentationml/2006/main">
   <p:cSld>
     <p:spTree>
@@ -12143,7 +14207,7 @@
 </p:sld>
 </file>
 
-<file path=ppt/slides/slide2.xml><?xml version="1.0" encoding="utf-8"?>
+<file path=ppt/slides/slide21.xml><?xml version="1.0" encoding="utf-8"?>
 <p:sld xmlns:a="http://schemas.openxmlformats.org/drawingml/2006/main" xmlns:r="http://schemas.openxmlformats.org/officeDocument/2006/relationships" xmlns:p="http://schemas.openxmlformats.org/presentationml/2006/main">
   <p:cSld>
     <p:spTree>
@@ -12176,55 +14240,52 @@
             <p:ph idx="1"/>
           </p:nvPr>
         </p:nvSpPr>
-        <p:spPr/>
+        <p:spPr>
+          <a:xfrm>
+            <a:off x="838200" y="1324927"/>
+            <a:ext cx="10515600" cy="4898217"/>
+          </a:xfrm>
+        </p:spPr>
         <p:txBody>
-          <a:bodyPr/>
+          <a:bodyPr>
+            <a:normAutofit/>
+          </a:bodyPr>
           <a:lstStyle/>
           <a:p>
+            <a:pPr marL="0" indent="0">
+              <a:buNone/>
+            </a:pPr>
             <a:r>
               <a:rPr lang="en-US" dirty="0"/>
-              <a:t>What is data mining? </a:t>
+              <a:t>Students enrolled for undergraduate credit are evaluated by the following weights: </a:t>
+            </a:r>
+          </a:p>
+          <a:p>
+            <a:r>
+              <a:rPr lang="en-US" b="1" dirty="0"/>
+              <a:t>10% Class Participation </a:t>
+            </a:r>
+            <a:r>
+              <a:rPr lang="en-US" dirty="0"/>
+              <a:t>– Class participation in online discussions</a:t>
+            </a:r>
+          </a:p>
+          <a:p>
+            <a:r>
+              <a:rPr lang="en-US" b="1" dirty="0"/>
+              <a:t>90%	Assignments </a:t>
+            </a:r>
+            <a:r>
+              <a:rPr lang="en-US" dirty="0"/>
+              <a:t>– Hands-on assignments for most lessons </a:t>
             </a:r>
           </a:p>
           <a:p>
             <a:pPr lvl="1"/>
             <a:r>
               <a:rPr lang="en-US" dirty="0"/>
-              <a:t>Data mining is the science of </a:t>
-            </a:r>
-            <a:r>
-              <a:rPr lang="en-US" b="1" dirty="0"/>
-              <a:t>knowledge discovery  </a:t>
-            </a:r>
-          </a:p>
-          <a:p>
-            <a:r>
-              <a:rPr lang="en-US" dirty="0"/>
-              <a:t>About this course  </a:t>
-            </a:r>
-          </a:p>
-          <a:p>
-            <a:r>
-              <a:rPr lang="en-US" dirty="0"/>
-              <a:t>Data mining often uses massive data sets</a:t>
-            </a:r>
-          </a:p>
-          <a:p>
-            <a:pPr lvl="1"/>
-            <a:r>
-              <a:rPr lang="en-US" dirty="0"/>
-              <a:t>Manage massive data with key-values pairs </a:t>
-            </a:r>
-          </a:p>
-          <a:p>
-            <a:pPr lvl="1"/>
-            <a:r>
-              <a:rPr lang="en-US" dirty="0"/>
-              <a:t>Efficient management of key-value pairs requires hashing </a:t>
-            </a:r>
-          </a:p>
-          <a:p>
-            <a:endParaRPr lang="en-US" dirty="0"/>
+              <a:t>Expect 9 assignments</a:t>
+            </a:r>
           </a:p>
         </p:txBody>
       </p:sp>
@@ -12279,7 +14340,7 @@
               <a:rPr lang="en-US" dirty="0">
                 <a:latin typeface="+mn-lt"/>
               </a:rPr>
-              <a:t>Overview of Today’s Lesson</a:t>
+              <a:t>Undergraduate Credit Grading</a:t>
             </a:r>
           </a:p>
         </p:txBody>
@@ -12287,287 +14348,17 @@
     </p:spTree>
     <p:extLst>
       <p:ext uri="{BB962C8B-B14F-4D97-AF65-F5344CB8AC3E}">
-        <p14:creationId xmlns:p14="http://schemas.microsoft.com/office/powerpoint/2010/main" val="2482426584"/>
+        <p14:creationId xmlns:p14="http://schemas.microsoft.com/office/powerpoint/2010/main" val="3245357042"/>
       </p:ext>
     </p:extLst>
   </p:cSld>
   <p:clrMapOvr>
     <a:masterClrMapping/>
   </p:clrMapOvr>
-  <p:timing>
-    <p:tnLst>
-      <p:par>
-        <p:cTn id="1" dur="indefinite" restart="never" nodeType="tmRoot">
-          <p:childTnLst>
-            <p:seq concurrent="1" nextAc="seek">
-              <p:cTn id="2" dur="indefinite" nodeType="mainSeq">
-                <p:childTnLst>
-                  <p:par>
-                    <p:cTn id="3" fill="hold">
-                      <p:stCondLst>
-                        <p:cond delay="indefinite"/>
-                      </p:stCondLst>
-                      <p:childTnLst>
-                        <p:par>
-                          <p:cTn id="4" fill="hold">
-                            <p:stCondLst>
-                              <p:cond delay="0"/>
-                            </p:stCondLst>
-                            <p:childTnLst>
-                              <p:par>
-                                <p:cTn id="5" presetID="1" presetClass="entr" presetSubtype="0" fill="hold" nodeType="clickEffect">
-                                  <p:stCondLst>
-                                    <p:cond delay="0"/>
-                                  </p:stCondLst>
-                                  <p:childTnLst>
-                                    <p:set>
-                                      <p:cBhvr>
-                                        <p:cTn id="6" dur="1" fill="hold">
-                                          <p:stCondLst>
-                                            <p:cond delay="0"/>
-                                          </p:stCondLst>
-                                        </p:cTn>
-                                        <p:tgtEl>
-                                          <p:spTgt spid="3">
-                                            <p:txEl>
-                                              <p:pRg st="0" end="0"/>
-                                            </p:txEl>
-                                          </p:spTgt>
-                                        </p:tgtEl>
-                                        <p:attrNameLst>
-                                          <p:attrName>style.visibility</p:attrName>
-                                        </p:attrNameLst>
-                                      </p:cBhvr>
-                                      <p:to>
-                                        <p:strVal val="visible"/>
-                                      </p:to>
-                                    </p:set>
-                                  </p:childTnLst>
-                                </p:cTn>
-                              </p:par>
-                              <p:par>
-                                <p:cTn id="7" presetID="1" presetClass="entr" presetSubtype="0" fill="hold" nodeType="withEffect">
-                                  <p:stCondLst>
-                                    <p:cond delay="0"/>
-                                  </p:stCondLst>
-                                  <p:childTnLst>
-                                    <p:set>
-                                      <p:cBhvr>
-                                        <p:cTn id="8" dur="1" fill="hold">
-                                          <p:stCondLst>
-                                            <p:cond delay="0"/>
-                                          </p:stCondLst>
-                                        </p:cTn>
-                                        <p:tgtEl>
-                                          <p:spTgt spid="3">
-                                            <p:txEl>
-                                              <p:pRg st="1" end="1"/>
-                                            </p:txEl>
-                                          </p:spTgt>
-                                        </p:tgtEl>
-                                        <p:attrNameLst>
-                                          <p:attrName>style.visibility</p:attrName>
-                                        </p:attrNameLst>
-                                      </p:cBhvr>
-                                      <p:to>
-                                        <p:strVal val="visible"/>
-                                      </p:to>
-                                    </p:set>
-                                  </p:childTnLst>
-                                </p:cTn>
-                              </p:par>
-                            </p:childTnLst>
-                          </p:cTn>
-                        </p:par>
-                      </p:childTnLst>
-                    </p:cTn>
-                  </p:par>
-                  <p:par>
-                    <p:cTn id="9" fill="hold">
-                      <p:stCondLst>
-                        <p:cond delay="indefinite"/>
-                      </p:stCondLst>
-                      <p:childTnLst>
-                        <p:par>
-                          <p:cTn id="10" fill="hold">
-                            <p:stCondLst>
-                              <p:cond delay="0"/>
-                            </p:stCondLst>
-                            <p:childTnLst>
-                              <p:par>
-                                <p:cTn id="11" presetID="1" presetClass="entr" presetSubtype="0" fill="hold" nodeType="clickEffect">
-                                  <p:stCondLst>
-                                    <p:cond delay="0"/>
-                                  </p:stCondLst>
-                                  <p:childTnLst>
-                                    <p:set>
-                                      <p:cBhvr>
-                                        <p:cTn id="12" dur="1" fill="hold">
-                                          <p:stCondLst>
-                                            <p:cond delay="0"/>
-                                          </p:stCondLst>
-                                        </p:cTn>
-                                        <p:tgtEl>
-                                          <p:spTgt spid="3">
-                                            <p:txEl>
-                                              <p:pRg st="2" end="2"/>
-                                            </p:txEl>
-                                          </p:spTgt>
-                                        </p:tgtEl>
-                                        <p:attrNameLst>
-                                          <p:attrName>style.visibility</p:attrName>
-                                        </p:attrNameLst>
-                                      </p:cBhvr>
-                                      <p:to>
-                                        <p:strVal val="visible"/>
-                                      </p:to>
-                                    </p:set>
-                                  </p:childTnLst>
-                                </p:cTn>
-                              </p:par>
-                            </p:childTnLst>
-                          </p:cTn>
-                        </p:par>
-                      </p:childTnLst>
-                    </p:cTn>
-                  </p:par>
-                  <p:par>
-                    <p:cTn id="13" fill="hold">
-                      <p:stCondLst>
-                        <p:cond delay="indefinite"/>
-                      </p:stCondLst>
-                      <p:childTnLst>
-                        <p:par>
-                          <p:cTn id="14" fill="hold">
-                            <p:stCondLst>
-                              <p:cond delay="0"/>
-                            </p:stCondLst>
-                            <p:childTnLst>
-                              <p:par>
-                                <p:cTn id="15" presetID="1" presetClass="entr" presetSubtype="0" fill="hold" nodeType="clickEffect">
-                                  <p:stCondLst>
-                                    <p:cond delay="0"/>
-                                  </p:stCondLst>
-                                  <p:childTnLst>
-                                    <p:set>
-                                      <p:cBhvr>
-                                        <p:cTn id="16" dur="1" fill="hold">
-                                          <p:stCondLst>
-                                            <p:cond delay="0"/>
-                                          </p:stCondLst>
-                                        </p:cTn>
-                                        <p:tgtEl>
-                                          <p:spTgt spid="3">
-                                            <p:txEl>
-                                              <p:pRg st="3" end="3"/>
-                                            </p:txEl>
-                                          </p:spTgt>
-                                        </p:tgtEl>
-                                        <p:attrNameLst>
-                                          <p:attrName>style.visibility</p:attrName>
-                                        </p:attrNameLst>
-                                      </p:cBhvr>
-                                      <p:to>
-                                        <p:strVal val="visible"/>
-                                      </p:to>
-                                    </p:set>
-                                  </p:childTnLst>
-                                </p:cTn>
-                              </p:par>
-                              <p:par>
-                                <p:cTn id="17" presetID="1" presetClass="entr" presetSubtype="0" fill="hold" nodeType="withEffect">
-                                  <p:stCondLst>
-                                    <p:cond delay="0"/>
-                                  </p:stCondLst>
-                                  <p:childTnLst>
-                                    <p:set>
-                                      <p:cBhvr>
-                                        <p:cTn id="18" dur="1" fill="hold">
-                                          <p:stCondLst>
-                                            <p:cond delay="0"/>
-                                          </p:stCondLst>
-                                        </p:cTn>
-                                        <p:tgtEl>
-                                          <p:spTgt spid="3">
-                                            <p:txEl>
-                                              <p:pRg st="4" end="4"/>
-                                            </p:txEl>
-                                          </p:spTgt>
-                                        </p:tgtEl>
-                                        <p:attrNameLst>
-                                          <p:attrName>style.visibility</p:attrName>
-                                        </p:attrNameLst>
-                                      </p:cBhvr>
-                                      <p:to>
-                                        <p:strVal val="visible"/>
-                                      </p:to>
-                                    </p:set>
-                                  </p:childTnLst>
-                                </p:cTn>
-                              </p:par>
-                              <p:par>
-                                <p:cTn id="19" presetID="1" presetClass="entr" presetSubtype="0" fill="hold" nodeType="withEffect">
-                                  <p:stCondLst>
-                                    <p:cond delay="0"/>
-                                  </p:stCondLst>
-                                  <p:childTnLst>
-                                    <p:set>
-                                      <p:cBhvr>
-                                        <p:cTn id="20" dur="1" fill="hold">
-                                          <p:stCondLst>
-                                            <p:cond delay="0"/>
-                                          </p:stCondLst>
-                                        </p:cTn>
-                                        <p:tgtEl>
-                                          <p:spTgt spid="3">
-                                            <p:txEl>
-                                              <p:pRg st="5" end="5"/>
-                                            </p:txEl>
-                                          </p:spTgt>
-                                        </p:tgtEl>
-                                        <p:attrNameLst>
-                                          <p:attrName>style.visibility</p:attrName>
-                                        </p:attrNameLst>
-                                      </p:cBhvr>
-                                      <p:to>
-                                        <p:strVal val="visible"/>
-                                      </p:to>
-                                    </p:set>
-                                  </p:childTnLst>
-                                </p:cTn>
-                              </p:par>
-                            </p:childTnLst>
-                          </p:cTn>
-                        </p:par>
-                      </p:childTnLst>
-                    </p:cTn>
-                  </p:par>
-                </p:childTnLst>
-              </p:cTn>
-              <p:prevCondLst>
-                <p:cond evt="onPrev" delay="0">
-                  <p:tgtEl>
-                    <p:sldTgt/>
-                  </p:tgtEl>
-                </p:cond>
-              </p:prevCondLst>
-              <p:nextCondLst>
-                <p:cond evt="onNext" delay="0">
-                  <p:tgtEl>
-                    <p:sldTgt/>
-                  </p:tgtEl>
-                </p:cond>
-              </p:nextCondLst>
-            </p:seq>
-          </p:childTnLst>
-        </p:cTn>
-      </p:par>
-    </p:tnLst>
-  </p:timing>
 </p:sld>
 </file>
 
-<file path=ppt/slides/slide20.xml><?xml version="1.0" encoding="utf-8"?>
+<file path=ppt/slides/slide22.xml><?xml version="1.0" encoding="utf-8"?>
 <p:sld xmlns:a="http://schemas.openxmlformats.org/drawingml/2006/main" xmlns:r="http://schemas.openxmlformats.org/officeDocument/2006/relationships" xmlns:p="http://schemas.openxmlformats.org/presentationml/2006/main">
   <p:cSld>
     <p:spTree>
@@ -12617,7 +14408,7 @@
             </a:pPr>
             <a:r>
               <a:rPr lang="en-US" dirty="0"/>
-              <a:t>Students enrolled for undergraduate credit are evaluated by the following weights: </a:t>
+              <a:t>Students enrolled for graduate credit are evaluated by the following weights: </a:t>
             </a:r>
           </a:p>
           <a:p>
@@ -12633,11 +14424,11 @@
           <a:p>
             <a:r>
               <a:rPr lang="en-US" b="1" dirty="0"/>
-              <a:t>90%	Assignments </a:t>
+              <a:t>65%	Assignments </a:t>
             </a:r>
             <a:r>
               <a:rPr lang="en-US" dirty="0"/>
-              <a:t>– Hands-on assignments for most lessons </a:t>
+              <a:t>– Hands-on assignments for most lessons</a:t>
             </a:r>
           </a:p>
           <a:p>
@@ -12645,6 +14436,26 @@
             <a:r>
               <a:rPr lang="en-US" dirty="0"/>
               <a:t>Expect 9 assignments</a:t>
+            </a:r>
+          </a:p>
+          <a:p>
+            <a:r>
+              <a:rPr lang="en-US" b="1" dirty="0"/>
+              <a:t>5% Project proposal </a:t>
+            </a:r>
+            <a:r>
+              <a:rPr lang="en-US" dirty="0"/>
+              <a:t>– Proposal describing the problem you wish to address and methods you plan to apply. Based on your proposal, your instructor will approve your project as appropriate for the course. </a:t>
+            </a:r>
+          </a:p>
+          <a:p>
+            <a:r>
+              <a:rPr lang="en-US" b="1" dirty="0"/>
+              <a:t>20%	Project </a:t>
+            </a:r>
+            <a:r>
+              <a:rPr lang="en-US" dirty="0"/>
+              <a:t>– Independent data mining project report – More on this next class</a:t>
             </a:r>
           </a:p>
         </p:txBody>
@@ -12700,177 +14511,6 @@
               <a:rPr lang="en-US" dirty="0">
                 <a:latin typeface="+mn-lt"/>
               </a:rPr>
-              <a:t>Undergraduate Credit Grading</a:t>
-            </a:r>
-          </a:p>
-        </p:txBody>
-      </p:sp>
-    </p:spTree>
-    <p:extLst>
-      <p:ext uri="{BB962C8B-B14F-4D97-AF65-F5344CB8AC3E}">
-        <p14:creationId xmlns:p14="http://schemas.microsoft.com/office/powerpoint/2010/main" val="3245357042"/>
-      </p:ext>
-    </p:extLst>
-  </p:cSld>
-  <p:clrMapOvr>
-    <a:masterClrMapping/>
-  </p:clrMapOvr>
-</p:sld>
-</file>
-
-<file path=ppt/slides/slide21.xml><?xml version="1.0" encoding="utf-8"?>
-<p:sld xmlns:a="http://schemas.openxmlformats.org/drawingml/2006/main" xmlns:r="http://schemas.openxmlformats.org/officeDocument/2006/relationships" xmlns:p="http://schemas.openxmlformats.org/presentationml/2006/main">
-  <p:cSld>
-    <p:spTree>
-      <p:nvGrpSpPr>
-        <p:cNvPr id="1" name=""/>
-        <p:cNvGrpSpPr/>
-        <p:nvPr/>
-      </p:nvGrpSpPr>
-      <p:grpSpPr>
-        <a:xfrm>
-          <a:off x="0" y="0"/>
-          <a:ext cx="0" cy="0"/>
-          <a:chOff x="0" y="0"/>
-          <a:chExt cx="0" cy="0"/>
-        </a:xfrm>
-      </p:grpSpPr>
-      <p:sp>
-        <p:nvSpPr>
-          <p:cNvPr id="3" name="Content Placeholder 2">
-            <a:extLst>
-              <a:ext uri="{FF2B5EF4-FFF2-40B4-BE49-F238E27FC236}">
-                <a16:creationId xmlns:a16="http://schemas.microsoft.com/office/drawing/2014/main" id="{258E6AF3-7615-4BD1-878E-A94C93E98F90}"/>
-              </a:ext>
-            </a:extLst>
-          </p:cNvPr>
-          <p:cNvSpPr>
-            <a:spLocks noGrp="1"/>
-          </p:cNvSpPr>
-          <p:nvPr>
-            <p:ph idx="1"/>
-          </p:nvPr>
-        </p:nvSpPr>
-        <p:spPr>
-          <a:xfrm>
-            <a:off x="838200" y="1324927"/>
-            <a:ext cx="10515600" cy="4898217"/>
-          </a:xfrm>
-        </p:spPr>
-        <p:txBody>
-          <a:bodyPr>
-            <a:normAutofit/>
-          </a:bodyPr>
-          <a:lstStyle/>
-          <a:p>
-            <a:pPr marL="0" indent="0">
-              <a:buNone/>
-            </a:pPr>
-            <a:r>
-              <a:rPr lang="en-US" dirty="0"/>
-              <a:t>Students enrolled for graduate credit are evaluated by the following weights: </a:t>
-            </a:r>
-          </a:p>
-          <a:p>
-            <a:r>
-              <a:rPr lang="en-US" b="1" dirty="0"/>
-              <a:t>10% Class Participation </a:t>
-            </a:r>
-            <a:r>
-              <a:rPr lang="en-US" dirty="0"/>
-              <a:t>– Class participation in online discussions</a:t>
-            </a:r>
-          </a:p>
-          <a:p>
-            <a:r>
-              <a:rPr lang="en-US" b="1" dirty="0"/>
-              <a:t>65%	Assignments </a:t>
-            </a:r>
-            <a:r>
-              <a:rPr lang="en-US" dirty="0"/>
-              <a:t>– Hands-on assignments for most lessons</a:t>
-            </a:r>
-          </a:p>
-          <a:p>
-            <a:pPr lvl="1"/>
-            <a:r>
-              <a:rPr lang="en-US" dirty="0"/>
-              <a:t>Expect 9 assignments</a:t>
-            </a:r>
-          </a:p>
-          <a:p>
-            <a:r>
-              <a:rPr lang="en-US" b="1" dirty="0"/>
-              <a:t>5% Project proposal </a:t>
-            </a:r>
-            <a:r>
-              <a:rPr lang="en-US" dirty="0"/>
-              <a:t>– Proposal describing the problem you wish to address and methods you plan to apply. Based on your proposal, your instructor will approve your project as appropriate for the course. </a:t>
-            </a:r>
-          </a:p>
-          <a:p>
-            <a:r>
-              <a:rPr lang="en-US" b="1" dirty="0"/>
-              <a:t>20%	Project </a:t>
-            </a:r>
-            <a:r>
-              <a:rPr lang="en-US" dirty="0"/>
-              <a:t>– Independent data mining project report – More on this next class</a:t>
-            </a:r>
-          </a:p>
-        </p:txBody>
-      </p:sp>
-      <p:sp>
-        <p:nvSpPr>
-          <p:cNvPr id="6" name="Title 1">
-            <a:extLst>
-              <a:ext uri="{FF2B5EF4-FFF2-40B4-BE49-F238E27FC236}">
-                <a16:creationId xmlns:a16="http://schemas.microsoft.com/office/drawing/2014/main" id="{CD29F70F-B868-451B-A65D-8721F4C7A2D9}"/>
-              </a:ext>
-            </a:extLst>
-          </p:cNvPr>
-          <p:cNvSpPr txBox="1">
-            <a:spLocks/>
-          </p:cNvSpPr>
-          <p:nvPr/>
-        </p:nvSpPr>
-        <p:spPr>
-          <a:xfrm>
-            <a:off x="838200" y="-635"/>
-            <a:ext cx="10515600" cy="1325563"/>
-          </a:xfrm>
-          <a:prstGeom prst="rect">
-            <a:avLst/>
-          </a:prstGeom>
-        </p:spPr>
-        <p:txBody>
-          <a:bodyPr vert="horz" lIns="91440" tIns="45720" rIns="91440" bIns="45720" rtlCol="0" anchor="ctr">
-            <a:normAutofit/>
-          </a:bodyPr>
-          <a:lstStyle>
-            <a:lvl1pPr algn="l" defTabSz="914400" rtl="0" eaLnBrk="1" latinLnBrk="0" hangingPunct="1">
-              <a:lnSpc>
-                <a:spcPct val="90000"/>
-              </a:lnSpc>
-              <a:spcBef>
-                <a:spcPct val="0"/>
-              </a:spcBef>
-              <a:buNone/>
-              <a:defRPr sz="4400" kern="1200">
-                <a:solidFill>
-                  <a:schemeClr val="tx1"/>
-                </a:solidFill>
-                <a:latin typeface="+mj-lt"/>
-                <a:ea typeface="+mj-ea"/>
-                <a:cs typeface="+mj-cs"/>
-              </a:defRPr>
-            </a:lvl1pPr>
-          </a:lstStyle>
-          <a:p>
-            <a:r>
-              <a:rPr lang="en-US" dirty="0">
-                <a:latin typeface="+mn-lt"/>
-              </a:rPr>
               <a:t>Graduate Credit Grading</a:t>
             </a:r>
           </a:p>
@@ -12889,7 +14529,7 @@
 </p:sld>
 </file>
 
-<file path=ppt/slides/slide22.xml><?xml version="1.0" encoding="utf-8"?>
+<file path=ppt/slides/slide23.xml><?xml version="1.0" encoding="utf-8"?>
 <p:sld xmlns:a="http://schemas.openxmlformats.org/drawingml/2006/main" xmlns:r="http://schemas.openxmlformats.org/officeDocument/2006/relationships" xmlns:p="http://schemas.openxmlformats.org/presentationml/2006/main">
   <p:cSld>
     <p:spTree>
@@ -13350,7 +14990,7 @@
 </p:sld>
 </file>
 
-<file path=ppt/slides/slide23.xml><?xml version="1.0" encoding="utf-8"?>
+<file path=ppt/slides/slide24.xml><?xml version="1.0" encoding="utf-8"?>
 <p:sld xmlns:a="http://schemas.openxmlformats.org/drawingml/2006/main" xmlns:r="http://schemas.openxmlformats.org/officeDocument/2006/relationships" xmlns:p="http://schemas.openxmlformats.org/presentationml/2006/main">
   <p:cSld>
     <p:spTree>
@@ -14110,7 +15750,7 @@
 </p:sld>
 </file>
 
-<file path=ppt/slides/slide24.xml><?xml version="1.0" encoding="utf-8"?>
+<file path=ppt/slides/slide25.xml><?xml version="1.0" encoding="utf-8"?>
 <p:sld xmlns:a="http://schemas.openxmlformats.org/drawingml/2006/main" xmlns:r="http://schemas.openxmlformats.org/officeDocument/2006/relationships" xmlns:p="http://schemas.openxmlformats.org/presentationml/2006/main">
   <p:cSld>
     <p:spTree>
@@ -14409,7 +16049,7 @@
 </p:sld>
 </file>
 
-<file path=ppt/slides/slide25.xml><?xml version="1.0" encoding="utf-8"?>
+<file path=ppt/slides/slide26.xml><?xml version="1.0" encoding="utf-8"?>
 <p:sld xmlns:a="http://schemas.openxmlformats.org/drawingml/2006/main" xmlns:r="http://schemas.openxmlformats.org/officeDocument/2006/relationships" xmlns:p="http://schemas.openxmlformats.org/presentationml/2006/main">
   <p:cSld>
     <p:spTree>
@@ -15079,7 +16719,7 @@
 </p:sld>
 </file>
 
-<file path=ppt/slides/slide26.xml><?xml version="1.0" encoding="utf-8"?>
+<file path=ppt/slides/slide27.xml><?xml version="1.0" encoding="utf-8"?>
 <p:sld xmlns:a="http://schemas.openxmlformats.org/drawingml/2006/main" xmlns:r="http://schemas.openxmlformats.org/officeDocument/2006/relationships" xmlns:p="http://schemas.openxmlformats.org/presentationml/2006/main">
   <p:cSld>
     <p:spTree>
@@ -15540,7 +17180,7 @@
 </p:sld>
 </file>
 
-<file path=ppt/slides/slide27.xml><?xml version="1.0" encoding="utf-8"?>
+<file path=ppt/slides/slide28.xml><?xml version="1.0" encoding="utf-8"?>
 <p:sld xmlns:a="http://schemas.openxmlformats.org/drawingml/2006/main" xmlns:r="http://schemas.openxmlformats.org/officeDocument/2006/relationships" xmlns:p="http://schemas.openxmlformats.org/presentationml/2006/main" show="0">
   <p:cSld>
     <p:spTree>
@@ -15719,7 +17359,7 @@
 </p:sld>
 </file>
 
-<file path=ppt/slides/slide28.xml><?xml version="1.0" encoding="utf-8"?>
+<file path=ppt/slides/slide29.xml><?xml version="1.0" encoding="utf-8"?>
 <p:sld xmlns:a="http://schemas.openxmlformats.org/drawingml/2006/main" xmlns:r="http://schemas.openxmlformats.org/officeDocument/2006/relationships" xmlns:p="http://schemas.openxmlformats.org/presentationml/2006/main">
   <p:cSld>
     <p:spTree>
@@ -15779,7 +17419,608 @@
 </p:sld>
 </file>
 
-<file path=ppt/slides/slide29.xml><?xml version="1.0" encoding="utf-8"?>
+<file path=ppt/slides/slide3.xml><?xml version="1.0" encoding="utf-8"?>
+<p:sld xmlns:a="http://schemas.openxmlformats.org/drawingml/2006/main" xmlns:r="http://schemas.openxmlformats.org/officeDocument/2006/relationships" xmlns:p="http://schemas.openxmlformats.org/presentationml/2006/main">
+  <p:cSld>
+    <p:spTree>
+      <p:nvGrpSpPr>
+        <p:cNvPr id="1" name=""/>
+        <p:cNvGrpSpPr/>
+        <p:nvPr/>
+      </p:nvGrpSpPr>
+      <p:grpSpPr>
+        <a:xfrm>
+          <a:off x="0" y="0"/>
+          <a:ext cx="0" cy="0"/>
+          <a:chOff x="0" y="0"/>
+          <a:chExt cx="0" cy="0"/>
+        </a:xfrm>
+      </p:grpSpPr>
+      <p:sp>
+        <p:nvSpPr>
+          <p:cNvPr id="3" name="Content Placeholder 2">
+            <a:extLst>
+              <a:ext uri="{FF2B5EF4-FFF2-40B4-BE49-F238E27FC236}">
+                <a16:creationId xmlns:a16="http://schemas.microsoft.com/office/drawing/2014/main" id="{258E6AF3-7615-4BD1-878E-A94C93E98F90}"/>
+              </a:ext>
+            </a:extLst>
+          </p:cNvPr>
+          <p:cNvSpPr>
+            <a:spLocks noGrp="1"/>
+          </p:cNvSpPr>
+          <p:nvPr>
+            <p:ph idx="1"/>
+          </p:nvPr>
+        </p:nvSpPr>
+        <p:spPr/>
+        <p:txBody>
+          <a:bodyPr>
+            <a:normAutofit fontScale="92500" lnSpcReduction="10000"/>
+          </a:bodyPr>
+          <a:lstStyle/>
+          <a:p>
+            <a:pPr marL="0" indent="0">
+              <a:buNone/>
+            </a:pPr>
+            <a:r>
+              <a:rPr lang="en-US" dirty="0"/>
+              <a:t>Data mining is the science of </a:t>
+            </a:r>
+            <a:r>
+              <a:rPr lang="en-US" b="1" dirty="0"/>
+              <a:t>actionable knowledge discovery</a:t>
+            </a:r>
+            <a:r>
+              <a:rPr lang="en-US" dirty="0"/>
+              <a:t> from inferences on massive datasets </a:t>
+            </a:r>
+            <a:endParaRPr lang="en-US" b="1" dirty="0"/>
+          </a:p>
+          <a:p>
+            <a:r>
+              <a:rPr lang="en-US" dirty="0"/>
+              <a:t>Known as </a:t>
+            </a:r>
+            <a:r>
+              <a:rPr lang="en-US" b="1" dirty="0"/>
+              <a:t>knowledge discovery and data mining (KDD) </a:t>
+            </a:r>
+          </a:p>
+          <a:p>
+            <a:r>
+              <a:rPr lang="en-US" dirty="0"/>
+              <a:t>Data mining is an </a:t>
+            </a:r>
+            <a:r>
+              <a:rPr lang="en-US" b="1" dirty="0"/>
+              <a:t>iterative process of exploration   </a:t>
+            </a:r>
+          </a:p>
+          <a:p>
+            <a:r>
+              <a:rPr lang="en-US" dirty="0"/>
+              <a:t>Most data mining is </a:t>
+            </a:r>
+            <a:r>
+              <a:rPr lang="en-US" b="1" dirty="0"/>
+              <a:t>unsupervised </a:t>
+            </a:r>
+          </a:p>
+          <a:p>
+            <a:pPr lvl="1"/>
+            <a:r>
+              <a:rPr lang="en-US" dirty="0"/>
+              <a:t>If we had known labels we could use supervised ML</a:t>
+            </a:r>
+          </a:p>
+          <a:p>
+            <a:r>
+              <a:rPr lang="en-US" dirty="0"/>
+              <a:t>Exploration is difficult   </a:t>
+            </a:r>
+          </a:p>
+          <a:p>
+            <a:pPr lvl="1"/>
+            <a:r>
+              <a:rPr lang="en-US" dirty="0"/>
+              <a:t>Many steps</a:t>
+            </a:r>
+          </a:p>
+          <a:p>
+            <a:pPr lvl="1"/>
+            <a:r>
+              <a:rPr lang="en-US" dirty="0"/>
+              <a:t>Only some attempts work </a:t>
+            </a:r>
+          </a:p>
+          <a:p>
+            <a:r>
+              <a:rPr lang="en-US" b="1" dirty="0">
+                <a:solidFill>
+                  <a:srgbClr val="C00000"/>
+                </a:solidFill>
+              </a:rPr>
+              <a:t>Try lots of ideas, fail fast, keep the ones that work! </a:t>
+            </a:r>
+          </a:p>
+          <a:p>
+            <a:pPr lvl="1"/>
+            <a:r>
+              <a:rPr lang="en-US" b="1" dirty="0"/>
+              <a:t>Keep this in mind when doing your graduate project!</a:t>
+            </a:r>
+          </a:p>
+        </p:txBody>
+      </p:sp>
+      <p:sp>
+        <p:nvSpPr>
+          <p:cNvPr id="6" name="Title 1">
+            <a:extLst>
+              <a:ext uri="{FF2B5EF4-FFF2-40B4-BE49-F238E27FC236}">
+                <a16:creationId xmlns:a16="http://schemas.microsoft.com/office/drawing/2014/main" id="{CD29F70F-B868-451B-A65D-8721F4C7A2D9}"/>
+              </a:ext>
+            </a:extLst>
+          </p:cNvPr>
+          <p:cNvSpPr txBox="1">
+            <a:spLocks/>
+          </p:cNvSpPr>
+          <p:nvPr/>
+        </p:nvSpPr>
+        <p:spPr>
+          <a:xfrm>
+            <a:off x="838200" y="-635"/>
+            <a:ext cx="10515600" cy="1325563"/>
+          </a:xfrm>
+          <a:prstGeom prst="rect">
+            <a:avLst/>
+          </a:prstGeom>
+        </p:spPr>
+        <p:txBody>
+          <a:bodyPr vert="horz" lIns="91440" tIns="45720" rIns="91440" bIns="45720" rtlCol="0" anchor="ctr">
+            <a:normAutofit/>
+          </a:bodyPr>
+          <a:lstStyle>
+            <a:lvl1pPr algn="l" defTabSz="914400" rtl="0" eaLnBrk="1" latinLnBrk="0" hangingPunct="1">
+              <a:lnSpc>
+                <a:spcPct val="90000"/>
+              </a:lnSpc>
+              <a:spcBef>
+                <a:spcPct val="0"/>
+              </a:spcBef>
+              <a:buNone/>
+              <a:defRPr sz="4400" kern="1200">
+                <a:solidFill>
+                  <a:schemeClr val="tx1"/>
+                </a:solidFill>
+                <a:latin typeface="+mj-lt"/>
+                <a:ea typeface="+mj-ea"/>
+                <a:cs typeface="+mj-cs"/>
+              </a:defRPr>
+            </a:lvl1pPr>
+          </a:lstStyle>
+          <a:p>
+            <a:r>
+              <a:rPr lang="en-US" dirty="0">
+                <a:latin typeface="+mn-lt"/>
+              </a:rPr>
+              <a:t>What is data mining?</a:t>
+            </a:r>
+          </a:p>
+        </p:txBody>
+      </p:sp>
+    </p:spTree>
+    <p:extLst>
+      <p:ext uri="{BB962C8B-B14F-4D97-AF65-F5344CB8AC3E}">
+        <p14:creationId xmlns:p14="http://schemas.microsoft.com/office/powerpoint/2010/main" val="115420158"/>
+      </p:ext>
+    </p:extLst>
+  </p:cSld>
+  <p:clrMapOvr>
+    <a:masterClrMapping/>
+  </p:clrMapOvr>
+  <p:timing>
+    <p:tnLst>
+      <p:par>
+        <p:cTn id="1" dur="indefinite" restart="never" nodeType="tmRoot">
+          <p:childTnLst>
+            <p:seq concurrent="1" nextAc="seek">
+              <p:cTn id="2" dur="indefinite" nodeType="mainSeq">
+                <p:childTnLst>
+                  <p:par>
+                    <p:cTn id="3" fill="hold">
+                      <p:stCondLst>
+                        <p:cond delay="indefinite"/>
+                      </p:stCondLst>
+                      <p:childTnLst>
+                        <p:par>
+                          <p:cTn id="4" fill="hold">
+                            <p:stCondLst>
+                              <p:cond delay="0"/>
+                            </p:stCondLst>
+                            <p:childTnLst>
+                              <p:par>
+                                <p:cTn id="5" presetID="1" presetClass="entr" presetSubtype="0" fill="hold" nodeType="clickEffect">
+                                  <p:stCondLst>
+                                    <p:cond delay="0"/>
+                                  </p:stCondLst>
+                                  <p:childTnLst>
+                                    <p:set>
+                                      <p:cBhvr>
+                                        <p:cTn id="6" dur="1" fill="hold">
+                                          <p:stCondLst>
+                                            <p:cond delay="0"/>
+                                          </p:stCondLst>
+                                        </p:cTn>
+                                        <p:tgtEl>
+                                          <p:spTgt spid="3">
+                                            <p:txEl>
+                                              <p:pRg st="1" end="1"/>
+                                            </p:txEl>
+                                          </p:spTgt>
+                                        </p:tgtEl>
+                                        <p:attrNameLst>
+                                          <p:attrName>style.visibility</p:attrName>
+                                        </p:attrNameLst>
+                                      </p:cBhvr>
+                                      <p:to>
+                                        <p:strVal val="visible"/>
+                                      </p:to>
+                                    </p:set>
+                                  </p:childTnLst>
+                                </p:cTn>
+                              </p:par>
+                            </p:childTnLst>
+                          </p:cTn>
+                        </p:par>
+                      </p:childTnLst>
+                    </p:cTn>
+                  </p:par>
+                  <p:par>
+                    <p:cTn id="7" fill="hold">
+                      <p:stCondLst>
+                        <p:cond delay="indefinite"/>
+                      </p:stCondLst>
+                      <p:childTnLst>
+                        <p:par>
+                          <p:cTn id="8" fill="hold">
+                            <p:stCondLst>
+                              <p:cond delay="0"/>
+                            </p:stCondLst>
+                            <p:childTnLst>
+                              <p:par>
+                                <p:cTn id="9" presetID="1" presetClass="entr" presetSubtype="0" fill="hold" nodeType="clickEffect">
+                                  <p:stCondLst>
+                                    <p:cond delay="0"/>
+                                  </p:stCondLst>
+                                  <p:childTnLst>
+                                    <p:set>
+                                      <p:cBhvr>
+                                        <p:cTn id="10" dur="1" fill="hold">
+                                          <p:stCondLst>
+                                            <p:cond delay="0"/>
+                                          </p:stCondLst>
+                                        </p:cTn>
+                                        <p:tgtEl>
+                                          <p:spTgt spid="3">
+                                            <p:txEl>
+                                              <p:pRg st="2" end="2"/>
+                                            </p:txEl>
+                                          </p:spTgt>
+                                        </p:tgtEl>
+                                        <p:attrNameLst>
+                                          <p:attrName>style.visibility</p:attrName>
+                                        </p:attrNameLst>
+                                      </p:cBhvr>
+                                      <p:to>
+                                        <p:strVal val="visible"/>
+                                      </p:to>
+                                    </p:set>
+                                  </p:childTnLst>
+                                </p:cTn>
+                              </p:par>
+                            </p:childTnLst>
+                          </p:cTn>
+                        </p:par>
+                      </p:childTnLst>
+                    </p:cTn>
+                  </p:par>
+                  <p:par>
+                    <p:cTn id="11" fill="hold">
+                      <p:stCondLst>
+                        <p:cond delay="indefinite"/>
+                      </p:stCondLst>
+                      <p:childTnLst>
+                        <p:par>
+                          <p:cTn id="12" fill="hold">
+                            <p:stCondLst>
+                              <p:cond delay="0"/>
+                            </p:stCondLst>
+                            <p:childTnLst>
+                              <p:par>
+                                <p:cTn id="13" presetID="1" presetClass="entr" presetSubtype="0" fill="hold" nodeType="clickEffect">
+                                  <p:stCondLst>
+                                    <p:cond delay="0"/>
+                                  </p:stCondLst>
+                                  <p:childTnLst>
+                                    <p:set>
+                                      <p:cBhvr>
+                                        <p:cTn id="14" dur="1" fill="hold">
+                                          <p:stCondLst>
+                                            <p:cond delay="0"/>
+                                          </p:stCondLst>
+                                        </p:cTn>
+                                        <p:tgtEl>
+                                          <p:spTgt spid="3">
+                                            <p:txEl>
+                                              <p:pRg st="3" end="3"/>
+                                            </p:txEl>
+                                          </p:spTgt>
+                                        </p:tgtEl>
+                                        <p:attrNameLst>
+                                          <p:attrName>style.visibility</p:attrName>
+                                        </p:attrNameLst>
+                                      </p:cBhvr>
+                                      <p:to>
+                                        <p:strVal val="visible"/>
+                                      </p:to>
+                                    </p:set>
+                                  </p:childTnLst>
+                                </p:cTn>
+                              </p:par>
+                              <p:par>
+                                <p:cTn id="15" presetID="1" presetClass="entr" presetSubtype="0" fill="hold" nodeType="withEffect">
+                                  <p:stCondLst>
+                                    <p:cond delay="0"/>
+                                  </p:stCondLst>
+                                  <p:childTnLst>
+                                    <p:set>
+                                      <p:cBhvr>
+                                        <p:cTn id="16" dur="1" fill="hold">
+                                          <p:stCondLst>
+                                            <p:cond delay="0"/>
+                                          </p:stCondLst>
+                                        </p:cTn>
+                                        <p:tgtEl>
+                                          <p:spTgt spid="3">
+                                            <p:txEl>
+                                              <p:pRg st="4" end="4"/>
+                                            </p:txEl>
+                                          </p:spTgt>
+                                        </p:tgtEl>
+                                        <p:attrNameLst>
+                                          <p:attrName>style.visibility</p:attrName>
+                                        </p:attrNameLst>
+                                      </p:cBhvr>
+                                      <p:to>
+                                        <p:strVal val="visible"/>
+                                      </p:to>
+                                    </p:set>
+                                  </p:childTnLst>
+                                </p:cTn>
+                              </p:par>
+                            </p:childTnLst>
+                          </p:cTn>
+                        </p:par>
+                      </p:childTnLst>
+                    </p:cTn>
+                  </p:par>
+                  <p:par>
+                    <p:cTn id="17" fill="hold">
+                      <p:stCondLst>
+                        <p:cond delay="indefinite"/>
+                      </p:stCondLst>
+                      <p:childTnLst>
+                        <p:par>
+                          <p:cTn id="18" fill="hold">
+                            <p:stCondLst>
+                              <p:cond delay="0"/>
+                            </p:stCondLst>
+                            <p:childTnLst>
+                              <p:par>
+                                <p:cTn id="19" presetID="1" presetClass="entr" presetSubtype="0" fill="hold" nodeType="clickEffect">
+                                  <p:stCondLst>
+                                    <p:cond delay="0"/>
+                                  </p:stCondLst>
+                                  <p:childTnLst>
+                                    <p:set>
+                                      <p:cBhvr>
+                                        <p:cTn id="20" dur="1" fill="hold">
+                                          <p:stCondLst>
+                                            <p:cond delay="0"/>
+                                          </p:stCondLst>
+                                        </p:cTn>
+                                        <p:tgtEl>
+                                          <p:spTgt spid="3">
+                                            <p:txEl>
+                                              <p:pRg st="5" end="5"/>
+                                            </p:txEl>
+                                          </p:spTgt>
+                                        </p:tgtEl>
+                                        <p:attrNameLst>
+                                          <p:attrName>style.visibility</p:attrName>
+                                        </p:attrNameLst>
+                                      </p:cBhvr>
+                                      <p:to>
+                                        <p:strVal val="visible"/>
+                                      </p:to>
+                                    </p:set>
+                                  </p:childTnLst>
+                                </p:cTn>
+                              </p:par>
+                              <p:par>
+                                <p:cTn id="21" presetID="1" presetClass="entr" presetSubtype="0" fill="hold" nodeType="withEffect">
+                                  <p:stCondLst>
+                                    <p:cond delay="0"/>
+                                  </p:stCondLst>
+                                  <p:childTnLst>
+                                    <p:set>
+                                      <p:cBhvr>
+                                        <p:cTn id="22" dur="1" fill="hold">
+                                          <p:stCondLst>
+                                            <p:cond delay="0"/>
+                                          </p:stCondLst>
+                                        </p:cTn>
+                                        <p:tgtEl>
+                                          <p:spTgt spid="3">
+                                            <p:txEl>
+                                              <p:pRg st="6" end="6"/>
+                                            </p:txEl>
+                                          </p:spTgt>
+                                        </p:tgtEl>
+                                        <p:attrNameLst>
+                                          <p:attrName>style.visibility</p:attrName>
+                                        </p:attrNameLst>
+                                      </p:cBhvr>
+                                      <p:to>
+                                        <p:strVal val="visible"/>
+                                      </p:to>
+                                    </p:set>
+                                  </p:childTnLst>
+                                </p:cTn>
+                              </p:par>
+                              <p:par>
+                                <p:cTn id="23" presetID="1" presetClass="entr" presetSubtype="0" fill="hold" nodeType="withEffect">
+                                  <p:stCondLst>
+                                    <p:cond delay="0"/>
+                                  </p:stCondLst>
+                                  <p:childTnLst>
+                                    <p:set>
+                                      <p:cBhvr>
+                                        <p:cTn id="24" dur="1" fill="hold">
+                                          <p:stCondLst>
+                                            <p:cond delay="0"/>
+                                          </p:stCondLst>
+                                        </p:cTn>
+                                        <p:tgtEl>
+                                          <p:spTgt spid="3">
+                                            <p:txEl>
+                                              <p:pRg st="7" end="7"/>
+                                            </p:txEl>
+                                          </p:spTgt>
+                                        </p:tgtEl>
+                                        <p:attrNameLst>
+                                          <p:attrName>style.visibility</p:attrName>
+                                        </p:attrNameLst>
+                                      </p:cBhvr>
+                                      <p:to>
+                                        <p:strVal val="visible"/>
+                                      </p:to>
+                                    </p:set>
+                                  </p:childTnLst>
+                                </p:cTn>
+                              </p:par>
+                            </p:childTnLst>
+                          </p:cTn>
+                        </p:par>
+                      </p:childTnLst>
+                    </p:cTn>
+                  </p:par>
+                  <p:par>
+                    <p:cTn id="25" fill="hold">
+                      <p:stCondLst>
+                        <p:cond delay="indefinite"/>
+                      </p:stCondLst>
+                      <p:childTnLst>
+                        <p:par>
+                          <p:cTn id="26" fill="hold">
+                            <p:stCondLst>
+                              <p:cond delay="0"/>
+                            </p:stCondLst>
+                            <p:childTnLst>
+                              <p:par>
+                                <p:cTn id="27" presetID="1" presetClass="entr" presetSubtype="0" fill="hold" nodeType="clickEffect">
+                                  <p:stCondLst>
+                                    <p:cond delay="0"/>
+                                  </p:stCondLst>
+                                  <p:childTnLst>
+                                    <p:set>
+                                      <p:cBhvr>
+                                        <p:cTn id="28" dur="1" fill="hold">
+                                          <p:stCondLst>
+                                            <p:cond delay="0"/>
+                                          </p:stCondLst>
+                                        </p:cTn>
+                                        <p:tgtEl>
+                                          <p:spTgt spid="3">
+                                            <p:txEl>
+                                              <p:pRg st="8" end="8"/>
+                                            </p:txEl>
+                                          </p:spTgt>
+                                        </p:tgtEl>
+                                        <p:attrNameLst>
+                                          <p:attrName>style.visibility</p:attrName>
+                                        </p:attrNameLst>
+                                      </p:cBhvr>
+                                      <p:to>
+                                        <p:strVal val="visible"/>
+                                      </p:to>
+                                    </p:set>
+                                  </p:childTnLst>
+                                </p:cTn>
+                              </p:par>
+                              <p:par>
+                                <p:cTn id="29" presetID="1" presetClass="entr" presetSubtype="0" fill="hold" nodeType="withEffect">
+                                  <p:stCondLst>
+                                    <p:cond delay="0"/>
+                                  </p:stCondLst>
+                                  <p:childTnLst>
+                                    <p:set>
+                                      <p:cBhvr>
+                                        <p:cTn id="30" dur="1" fill="hold">
+                                          <p:stCondLst>
+                                            <p:cond delay="0"/>
+                                          </p:stCondLst>
+                                        </p:cTn>
+                                        <p:tgtEl>
+                                          <p:spTgt spid="3">
+                                            <p:txEl>
+                                              <p:pRg st="9" end="9"/>
+                                            </p:txEl>
+                                          </p:spTgt>
+                                        </p:tgtEl>
+                                        <p:attrNameLst>
+                                          <p:attrName>style.visibility</p:attrName>
+                                        </p:attrNameLst>
+                                      </p:cBhvr>
+                                      <p:to>
+                                        <p:strVal val="visible"/>
+                                      </p:to>
+                                    </p:set>
+                                  </p:childTnLst>
+                                </p:cTn>
+                              </p:par>
+                            </p:childTnLst>
+                          </p:cTn>
+                        </p:par>
+                      </p:childTnLst>
+                    </p:cTn>
+                  </p:par>
+                </p:childTnLst>
+              </p:cTn>
+              <p:prevCondLst>
+                <p:cond evt="onPrev" delay="0">
+                  <p:tgtEl>
+                    <p:sldTgt/>
+                  </p:tgtEl>
+                </p:cond>
+              </p:prevCondLst>
+              <p:nextCondLst>
+                <p:cond evt="onNext" delay="0">
+                  <p:tgtEl>
+                    <p:sldTgt/>
+                  </p:tgtEl>
+                </p:cond>
+              </p:nextCondLst>
+            </p:seq>
+          </p:childTnLst>
+        </p:cTn>
+      </p:par>
+    </p:tnLst>
+  </p:timing>
+</p:sld>
+</file>
+
+<file path=ppt/slides/slide30.xml><?xml version="1.0" encoding="utf-8"?>
 <p:sld xmlns:a="http://schemas.openxmlformats.org/drawingml/2006/main" xmlns:r="http://schemas.openxmlformats.org/officeDocument/2006/relationships" xmlns:p="http://schemas.openxmlformats.org/presentationml/2006/main">
   <p:cSld>
     <p:spTree>
@@ -16165,509 +18406,7 @@
 </p:sld>
 </file>
 
-<file path=ppt/slides/slide3.xml><?xml version="1.0" encoding="utf-8"?>
-<p:sld xmlns:a="http://schemas.openxmlformats.org/drawingml/2006/main" xmlns:r="http://schemas.openxmlformats.org/officeDocument/2006/relationships" xmlns:p="http://schemas.openxmlformats.org/presentationml/2006/main">
-  <p:cSld>
-    <p:spTree>
-      <p:nvGrpSpPr>
-        <p:cNvPr id="1" name=""/>
-        <p:cNvGrpSpPr/>
-        <p:nvPr/>
-      </p:nvGrpSpPr>
-      <p:grpSpPr>
-        <a:xfrm>
-          <a:off x="0" y="0"/>
-          <a:ext cx="0" cy="0"/>
-          <a:chOff x="0" y="0"/>
-          <a:chExt cx="0" cy="0"/>
-        </a:xfrm>
-      </p:grpSpPr>
-      <p:sp>
-        <p:nvSpPr>
-          <p:cNvPr id="3" name="Content Placeholder 2">
-            <a:extLst>
-              <a:ext uri="{FF2B5EF4-FFF2-40B4-BE49-F238E27FC236}">
-                <a16:creationId xmlns:a16="http://schemas.microsoft.com/office/drawing/2014/main" id="{258E6AF3-7615-4BD1-878E-A94C93E98F90}"/>
-              </a:ext>
-            </a:extLst>
-          </p:cNvPr>
-          <p:cNvSpPr>
-            <a:spLocks noGrp="1"/>
-          </p:cNvSpPr>
-          <p:nvPr>
-            <p:ph idx="1"/>
-          </p:nvPr>
-        </p:nvSpPr>
-        <p:spPr/>
-        <p:txBody>
-          <a:bodyPr/>
-          <a:lstStyle/>
-          <a:p>
-            <a:pPr marL="0" indent="0">
-              <a:buNone/>
-            </a:pPr>
-            <a:r>
-              <a:rPr lang="en-US" dirty="0"/>
-              <a:t>Data mining is the science of </a:t>
-            </a:r>
-            <a:r>
-              <a:rPr lang="en-US" b="1" dirty="0"/>
-              <a:t>actionable knowledge discovery</a:t>
-            </a:r>
-            <a:r>
-              <a:rPr lang="en-US" dirty="0"/>
-              <a:t> from inferences on massive datasets </a:t>
-            </a:r>
-            <a:endParaRPr lang="en-US" b="1" dirty="0"/>
-          </a:p>
-          <a:p>
-            <a:r>
-              <a:rPr lang="en-US" dirty="0"/>
-              <a:t>Known as </a:t>
-            </a:r>
-            <a:r>
-              <a:rPr lang="en-US" b="1" dirty="0"/>
-              <a:t>knowledge discovery and data mining (KDD) </a:t>
-            </a:r>
-          </a:p>
-          <a:p>
-            <a:r>
-              <a:rPr lang="en-US" dirty="0"/>
-              <a:t>Data mining is an </a:t>
-            </a:r>
-            <a:r>
-              <a:rPr lang="en-US" b="1" dirty="0"/>
-              <a:t>iterative process of exploration   </a:t>
-            </a:r>
-          </a:p>
-          <a:p>
-            <a:r>
-              <a:rPr lang="en-US" dirty="0"/>
-              <a:t>Exploration is difficult   </a:t>
-            </a:r>
-          </a:p>
-          <a:p>
-            <a:pPr lvl="1"/>
-            <a:r>
-              <a:rPr lang="en-US" dirty="0"/>
-              <a:t>Many steps</a:t>
-            </a:r>
-          </a:p>
-          <a:p>
-            <a:pPr lvl="1"/>
-            <a:r>
-              <a:rPr lang="en-US" dirty="0"/>
-              <a:t>Only some attempts work </a:t>
-            </a:r>
-          </a:p>
-          <a:p>
-            <a:r>
-              <a:rPr lang="en-US" b="1" dirty="0">
-                <a:solidFill>
-                  <a:srgbClr val="C00000"/>
-                </a:solidFill>
-              </a:rPr>
-              <a:t>Try lots of ideas, fail fast, keep the ones that work! </a:t>
-            </a:r>
-          </a:p>
-          <a:p>
-            <a:pPr lvl="1"/>
-            <a:r>
-              <a:rPr lang="en-US" b="1" dirty="0"/>
-              <a:t>Keep this in mind when doing your graduate project!</a:t>
-            </a:r>
-          </a:p>
-        </p:txBody>
-      </p:sp>
-      <p:sp>
-        <p:nvSpPr>
-          <p:cNvPr id="6" name="Title 1">
-            <a:extLst>
-              <a:ext uri="{FF2B5EF4-FFF2-40B4-BE49-F238E27FC236}">
-                <a16:creationId xmlns:a16="http://schemas.microsoft.com/office/drawing/2014/main" id="{CD29F70F-B868-451B-A65D-8721F4C7A2D9}"/>
-              </a:ext>
-            </a:extLst>
-          </p:cNvPr>
-          <p:cNvSpPr txBox="1">
-            <a:spLocks/>
-          </p:cNvSpPr>
-          <p:nvPr/>
-        </p:nvSpPr>
-        <p:spPr>
-          <a:xfrm>
-            <a:off x="838200" y="-635"/>
-            <a:ext cx="10515600" cy="1325563"/>
-          </a:xfrm>
-          <a:prstGeom prst="rect">
-            <a:avLst/>
-          </a:prstGeom>
-        </p:spPr>
-        <p:txBody>
-          <a:bodyPr vert="horz" lIns="91440" tIns="45720" rIns="91440" bIns="45720" rtlCol="0" anchor="ctr">
-            <a:normAutofit/>
-          </a:bodyPr>
-          <a:lstStyle>
-            <a:lvl1pPr algn="l" defTabSz="914400" rtl="0" eaLnBrk="1" latinLnBrk="0" hangingPunct="1">
-              <a:lnSpc>
-                <a:spcPct val="90000"/>
-              </a:lnSpc>
-              <a:spcBef>
-                <a:spcPct val="0"/>
-              </a:spcBef>
-              <a:buNone/>
-              <a:defRPr sz="4400" kern="1200">
-                <a:solidFill>
-                  <a:schemeClr val="tx1"/>
-                </a:solidFill>
-                <a:latin typeface="+mj-lt"/>
-                <a:ea typeface="+mj-ea"/>
-                <a:cs typeface="+mj-cs"/>
-              </a:defRPr>
-            </a:lvl1pPr>
-          </a:lstStyle>
-          <a:p>
-            <a:r>
-              <a:rPr lang="en-US" dirty="0">
-                <a:latin typeface="+mn-lt"/>
-              </a:rPr>
-              <a:t>What is data mining?</a:t>
-            </a:r>
-          </a:p>
-        </p:txBody>
-      </p:sp>
-    </p:spTree>
-    <p:extLst>
-      <p:ext uri="{BB962C8B-B14F-4D97-AF65-F5344CB8AC3E}">
-        <p14:creationId xmlns:p14="http://schemas.microsoft.com/office/powerpoint/2010/main" val="115420158"/>
-      </p:ext>
-    </p:extLst>
-  </p:cSld>
-  <p:clrMapOvr>
-    <a:masterClrMapping/>
-  </p:clrMapOvr>
-  <p:timing>
-    <p:tnLst>
-      <p:par>
-        <p:cTn id="1" dur="indefinite" restart="never" nodeType="tmRoot">
-          <p:childTnLst>
-            <p:seq concurrent="1" nextAc="seek">
-              <p:cTn id="2" dur="indefinite" nodeType="mainSeq">
-                <p:childTnLst>
-                  <p:par>
-                    <p:cTn id="3" fill="hold">
-                      <p:stCondLst>
-                        <p:cond delay="indefinite"/>
-                      </p:stCondLst>
-                      <p:childTnLst>
-                        <p:par>
-                          <p:cTn id="4" fill="hold">
-                            <p:stCondLst>
-                              <p:cond delay="0"/>
-                            </p:stCondLst>
-                            <p:childTnLst>
-                              <p:par>
-                                <p:cTn id="5" presetID="1" presetClass="entr" presetSubtype="0" fill="hold" nodeType="clickEffect">
-                                  <p:stCondLst>
-                                    <p:cond delay="0"/>
-                                  </p:stCondLst>
-                                  <p:childTnLst>
-                                    <p:set>
-                                      <p:cBhvr>
-                                        <p:cTn id="6" dur="1" fill="hold">
-                                          <p:stCondLst>
-                                            <p:cond delay="0"/>
-                                          </p:stCondLst>
-                                        </p:cTn>
-                                        <p:tgtEl>
-                                          <p:spTgt spid="3">
-                                            <p:txEl>
-                                              <p:pRg st="1" end="1"/>
-                                            </p:txEl>
-                                          </p:spTgt>
-                                        </p:tgtEl>
-                                        <p:attrNameLst>
-                                          <p:attrName>style.visibility</p:attrName>
-                                        </p:attrNameLst>
-                                      </p:cBhvr>
-                                      <p:to>
-                                        <p:strVal val="visible"/>
-                                      </p:to>
-                                    </p:set>
-                                  </p:childTnLst>
-                                </p:cTn>
-                              </p:par>
-                            </p:childTnLst>
-                          </p:cTn>
-                        </p:par>
-                      </p:childTnLst>
-                    </p:cTn>
-                  </p:par>
-                  <p:par>
-                    <p:cTn id="7" fill="hold">
-                      <p:stCondLst>
-                        <p:cond delay="indefinite"/>
-                      </p:stCondLst>
-                      <p:childTnLst>
-                        <p:par>
-                          <p:cTn id="8" fill="hold">
-                            <p:stCondLst>
-                              <p:cond delay="0"/>
-                            </p:stCondLst>
-                            <p:childTnLst>
-                              <p:par>
-                                <p:cTn id="9" presetID="1" presetClass="entr" presetSubtype="0" fill="hold" nodeType="clickEffect">
-                                  <p:stCondLst>
-                                    <p:cond delay="0"/>
-                                  </p:stCondLst>
-                                  <p:childTnLst>
-                                    <p:set>
-                                      <p:cBhvr>
-                                        <p:cTn id="10" dur="1" fill="hold">
-                                          <p:stCondLst>
-                                            <p:cond delay="0"/>
-                                          </p:stCondLst>
-                                        </p:cTn>
-                                        <p:tgtEl>
-                                          <p:spTgt spid="3">
-                                            <p:txEl>
-                                              <p:pRg st="2" end="2"/>
-                                            </p:txEl>
-                                          </p:spTgt>
-                                        </p:tgtEl>
-                                        <p:attrNameLst>
-                                          <p:attrName>style.visibility</p:attrName>
-                                        </p:attrNameLst>
-                                      </p:cBhvr>
-                                      <p:to>
-                                        <p:strVal val="visible"/>
-                                      </p:to>
-                                    </p:set>
-                                  </p:childTnLst>
-                                </p:cTn>
-                              </p:par>
-                            </p:childTnLst>
-                          </p:cTn>
-                        </p:par>
-                      </p:childTnLst>
-                    </p:cTn>
-                  </p:par>
-                  <p:par>
-                    <p:cTn id="11" fill="hold">
-                      <p:stCondLst>
-                        <p:cond delay="indefinite"/>
-                      </p:stCondLst>
-                      <p:childTnLst>
-                        <p:par>
-                          <p:cTn id="12" fill="hold">
-                            <p:stCondLst>
-                              <p:cond delay="0"/>
-                            </p:stCondLst>
-                            <p:childTnLst>
-                              <p:par>
-                                <p:cTn id="13" presetID="1" presetClass="entr" presetSubtype="0" fill="hold" nodeType="clickEffect">
-                                  <p:stCondLst>
-                                    <p:cond delay="0"/>
-                                  </p:stCondLst>
-                                  <p:childTnLst>
-                                    <p:set>
-                                      <p:cBhvr>
-                                        <p:cTn id="14" dur="1" fill="hold">
-                                          <p:stCondLst>
-                                            <p:cond delay="0"/>
-                                          </p:stCondLst>
-                                        </p:cTn>
-                                        <p:tgtEl>
-                                          <p:spTgt spid="3">
-                                            <p:txEl>
-                                              <p:pRg st="3" end="3"/>
-                                            </p:txEl>
-                                          </p:spTgt>
-                                        </p:tgtEl>
-                                        <p:attrNameLst>
-                                          <p:attrName>style.visibility</p:attrName>
-                                        </p:attrNameLst>
-                                      </p:cBhvr>
-                                      <p:to>
-                                        <p:strVal val="visible"/>
-                                      </p:to>
-                                    </p:set>
-                                  </p:childTnLst>
-                                </p:cTn>
-                              </p:par>
-                              <p:par>
-                                <p:cTn id="15" presetID="1" presetClass="entr" presetSubtype="0" fill="hold" nodeType="withEffect">
-                                  <p:stCondLst>
-                                    <p:cond delay="0"/>
-                                  </p:stCondLst>
-                                  <p:childTnLst>
-                                    <p:set>
-                                      <p:cBhvr>
-                                        <p:cTn id="16" dur="1" fill="hold">
-                                          <p:stCondLst>
-                                            <p:cond delay="0"/>
-                                          </p:stCondLst>
-                                        </p:cTn>
-                                        <p:tgtEl>
-                                          <p:spTgt spid="3">
-                                            <p:txEl>
-                                              <p:pRg st="4" end="4"/>
-                                            </p:txEl>
-                                          </p:spTgt>
-                                        </p:tgtEl>
-                                        <p:attrNameLst>
-                                          <p:attrName>style.visibility</p:attrName>
-                                        </p:attrNameLst>
-                                      </p:cBhvr>
-                                      <p:to>
-                                        <p:strVal val="visible"/>
-                                      </p:to>
-                                    </p:set>
-                                  </p:childTnLst>
-                                </p:cTn>
-                              </p:par>
-                              <p:par>
-                                <p:cTn id="17" presetID="1" presetClass="entr" presetSubtype="0" fill="hold" nodeType="withEffect">
-                                  <p:stCondLst>
-                                    <p:cond delay="0"/>
-                                  </p:stCondLst>
-                                  <p:childTnLst>
-                                    <p:set>
-                                      <p:cBhvr>
-                                        <p:cTn id="18" dur="1" fill="hold">
-                                          <p:stCondLst>
-                                            <p:cond delay="0"/>
-                                          </p:stCondLst>
-                                        </p:cTn>
-                                        <p:tgtEl>
-                                          <p:spTgt spid="3">
-                                            <p:txEl>
-                                              <p:pRg st="5" end="5"/>
-                                            </p:txEl>
-                                          </p:spTgt>
-                                        </p:tgtEl>
-                                        <p:attrNameLst>
-                                          <p:attrName>style.visibility</p:attrName>
-                                        </p:attrNameLst>
-                                      </p:cBhvr>
-                                      <p:to>
-                                        <p:strVal val="visible"/>
-                                      </p:to>
-                                    </p:set>
-                                  </p:childTnLst>
-                                </p:cTn>
-                              </p:par>
-                            </p:childTnLst>
-                          </p:cTn>
-                        </p:par>
-                      </p:childTnLst>
-                    </p:cTn>
-                  </p:par>
-                  <p:par>
-                    <p:cTn id="19" fill="hold">
-                      <p:stCondLst>
-                        <p:cond delay="indefinite"/>
-                      </p:stCondLst>
-                      <p:childTnLst>
-                        <p:par>
-                          <p:cTn id="20" fill="hold">
-                            <p:stCondLst>
-                              <p:cond delay="0"/>
-                            </p:stCondLst>
-                            <p:childTnLst>
-                              <p:par>
-                                <p:cTn id="21" presetID="1" presetClass="entr" presetSubtype="0" fill="hold" nodeType="clickEffect">
-                                  <p:stCondLst>
-                                    <p:cond delay="0"/>
-                                  </p:stCondLst>
-                                  <p:childTnLst>
-                                    <p:set>
-                                      <p:cBhvr>
-                                        <p:cTn id="22" dur="1" fill="hold">
-                                          <p:stCondLst>
-                                            <p:cond delay="0"/>
-                                          </p:stCondLst>
-                                        </p:cTn>
-                                        <p:tgtEl>
-                                          <p:spTgt spid="3">
-                                            <p:txEl>
-                                              <p:pRg st="6" end="6"/>
-                                            </p:txEl>
-                                          </p:spTgt>
-                                        </p:tgtEl>
-                                        <p:attrNameLst>
-                                          <p:attrName>style.visibility</p:attrName>
-                                        </p:attrNameLst>
-                                      </p:cBhvr>
-                                      <p:to>
-                                        <p:strVal val="visible"/>
-                                      </p:to>
-                                    </p:set>
-                                  </p:childTnLst>
-                                </p:cTn>
-                              </p:par>
-                              <p:par>
-                                <p:cTn id="23" presetID="1" presetClass="entr" presetSubtype="0" fill="hold" nodeType="withEffect">
-                                  <p:stCondLst>
-                                    <p:cond delay="0"/>
-                                  </p:stCondLst>
-                                  <p:childTnLst>
-                                    <p:set>
-                                      <p:cBhvr>
-                                        <p:cTn id="24" dur="1" fill="hold">
-                                          <p:stCondLst>
-                                            <p:cond delay="0"/>
-                                          </p:stCondLst>
-                                        </p:cTn>
-                                        <p:tgtEl>
-                                          <p:spTgt spid="3">
-                                            <p:txEl>
-                                              <p:pRg st="7" end="7"/>
-                                            </p:txEl>
-                                          </p:spTgt>
-                                        </p:tgtEl>
-                                        <p:attrNameLst>
-                                          <p:attrName>style.visibility</p:attrName>
-                                        </p:attrNameLst>
-                                      </p:cBhvr>
-                                      <p:to>
-                                        <p:strVal val="visible"/>
-                                      </p:to>
-                                    </p:set>
-                                  </p:childTnLst>
-                                </p:cTn>
-                              </p:par>
-                            </p:childTnLst>
-                          </p:cTn>
-                        </p:par>
-                      </p:childTnLst>
-                    </p:cTn>
-                  </p:par>
-                </p:childTnLst>
-              </p:cTn>
-              <p:prevCondLst>
-                <p:cond evt="onPrev" delay="0">
-                  <p:tgtEl>
-                    <p:sldTgt/>
-                  </p:tgtEl>
-                </p:cond>
-              </p:prevCondLst>
-              <p:nextCondLst>
-                <p:cond evt="onNext" delay="0">
-                  <p:tgtEl>
-                    <p:sldTgt/>
-                  </p:tgtEl>
-                </p:cond>
-              </p:nextCondLst>
-            </p:seq>
-          </p:childTnLst>
-        </p:cTn>
-      </p:par>
-    </p:tnLst>
-  </p:timing>
-</p:sld>
-</file>
-
-<file path=ppt/slides/slide30.xml><?xml version="1.0" encoding="utf-8"?>
+<file path=ppt/slides/slide31.xml><?xml version="1.0" encoding="utf-8"?>
 <p:sld xmlns:a="http://schemas.openxmlformats.org/drawingml/2006/main" xmlns:r="http://schemas.openxmlformats.org/officeDocument/2006/relationships" xmlns:p="http://schemas.openxmlformats.org/presentationml/2006/main">
   <p:cSld>
     <p:spTree>
@@ -16727,7 +18466,7 @@
 </p:sld>
 </file>
 
-<file path=ppt/slides/slide31.xml><?xml version="1.0" encoding="utf-8"?>
+<file path=ppt/slides/slide32.xml><?xml version="1.0" encoding="utf-8"?>
 <p:sld xmlns:a="http://schemas.openxmlformats.org/drawingml/2006/main" xmlns:r="http://schemas.openxmlformats.org/officeDocument/2006/relationships" xmlns:p="http://schemas.openxmlformats.org/presentationml/2006/main">
   <p:cSld>
     <p:spTree>
@@ -17864,7 +19603,7 @@
 </p:sld>
 </file>
 
-<file path=ppt/slides/slide32.xml><?xml version="1.0" encoding="utf-8"?>
+<file path=ppt/slides/slide33.xml><?xml version="1.0" encoding="utf-8"?>
 <p:sld xmlns:a="http://schemas.openxmlformats.org/drawingml/2006/main" xmlns:r="http://schemas.openxmlformats.org/officeDocument/2006/relationships" xmlns:p="http://schemas.openxmlformats.org/presentationml/2006/main">
   <p:cSld>
     <p:spTree>
@@ -18565,7 +20304,7 @@
 </p:sld>
 </file>
 
-<file path=ppt/slides/slide33.xml><?xml version="1.0" encoding="utf-8"?>
+<file path=ppt/slides/slide34.xml><?xml version="1.0" encoding="utf-8"?>
 <p:sld xmlns:a="http://schemas.openxmlformats.org/drawingml/2006/main" xmlns:r="http://schemas.openxmlformats.org/officeDocument/2006/relationships" xmlns:p="http://schemas.openxmlformats.org/presentationml/2006/main">
   <p:cSld>
     <p:spTree>
@@ -19180,7 +20919,7 @@
 </p:sld>
 </file>
 
-<file path=ppt/slides/slide34.xml><?xml version="1.0" encoding="utf-8"?>
+<file path=ppt/slides/slide35.xml><?xml version="1.0" encoding="utf-8"?>
 <p:sld xmlns:a="http://schemas.openxmlformats.org/drawingml/2006/main" xmlns:r="http://schemas.openxmlformats.org/officeDocument/2006/relationships" xmlns:p="http://schemas.openxmlformats.org/presentationml/2006/main">
   <p:cSld>
     <p:spTree>
@@ -19667,7 +21406,7 @@
 </p:sld>
 </file>
 
-<file path=ppt/slides/slide35.xml><?xml version="1.0" encoding="utf-8"?>
+<file path=ppt/slides/slide36.xml><?xml version="1.0" encoding="utf-8"?>
 <p:sld xmlns:a="http://schemas.openxmlformats.org/drawingml/2006/main" xmlns:r="http://schemas.openxmlformats.org/officeDocument/2006/relationships" xmlns:p="http://schemas.openxmlformats.org/presentationml/2006/main">
   <p:cSld>
     <p:spTree>
@@ -20192,7 +21931,7 @@
 </p:sld>
 </file>
 
-<file path=ppt/slides/slide36.xml><?xml version="1.0" encoding="utf-8"?>
+<file path=ppt/slides/slide37.xml><?xml version="1.0" encoding="utf-8"?>
 <p:sld xmlns:a="http://schemas.openxmlformats.org/drawingml/2006/main" xmlns:r="http://schemas.openxmlformats.org/officeDocument/2006/relationships" xmlns:p="http://schemas.openxmlformats.org/presentationml/2006/main">
   <p:cSld>
     <p:spTree>
@@ -20776,7 +22515,7 @@
 </p:sld>
 </file>
 
-<file path=ppt/slides/slide37.xml><?xml version="1.0" encoding="utf-8"?>
+<file path=ppt/slides/slide38.xml><?xml version="1.0" encoding="utf-8"?>
 <p:sld xmlns:a="http://schemas.openxmlformats.org/drawingml/2006/main" xmlns:r="http://schemas.openxmlformats.org/officeDocument/2006/relationships" xmlns:p="http://schemas.openxmlformats.org/presentationml/2006/main">
   <p:cSld>
     <p:spTree>
@@ -23187,7 +24926,7 @@
 </p:sld>
 </file>
 
-<file path=ppt/slides/slide38.xml><?xml version="1.0" encoding="utf-8"?>
+<file path=ppt/slides/slide39.xml><?xml version="1.0" encoding="utf-8"?>
 <p:sld xmlns:a="http://schemas.openxmlformats.org/drawingml/2006/main" xmlns:r="http://schemas.openxmlformats.org/officeDocument/2006/relationships" xmlns:p="http://schemas.openxmlformats.org/presentationml/2006/main">
   <p:cSld>
     <p:spTree>
@@ -23247,7 +24986,496 @@
 </p:sld>
 </file>
 
-<file path=ppt/slides/slide39.xml><?xml version="1.0" encoding="utf-8"?>
+<file path=ppt/slides/slide4.xml><?xml version="1.0" encoding="utf-8"?>
+<p:sld xmlns:a="http://schemas.openxmlformats.org/drawingml/2006/main" xmlns:r="http://schemas.openxmlformats.org/officeDocument/2006/relationships" xmlns:p="http://schemas.openxmlformats.org/presentationml/2006/main">
+  <p:cSld>
+    <p:spTree>
+      <p:nvGrpSpPr>
+        <p:cNvPr id="1" name=""/>
+        <p:cNvGrpSpPr/>
+        <p:nvPr/>
+      </p:nvGrpSpPr>
+      <p:grpSpPr>
+        <a:xfrm>
+          <a:off x="0" y="0"/>
+          <a:ext cx="0" cy="0"/>
+          <a:chOff x="0" y="0"/>
+          <a:chExt cx="0" cy="0"/>
+        </a:xfrm>
+      </p:grpSpPr>
+      <p:sp>
+        <p:nvSpPr>
+          <p:cNvPr id="3" name="Content Placeholder 2">
+            <a:extLst>
+              <a:ext uri="{FF2B5EF4-FFF2-40B4-BE49-F238E27FC236}">
+                <a16:creationId xmlns:a16="http://schemas.microsoft.com/office/drawing/2014/main" id="{258E6AF3-7615-4BD1-878E-A94C93E98F90}"/>
+              </a:ext>
+            </a:extLst>
+          </p:cNvPr>
+          <p:cNvSpPr>
+            <a:spLocks noGrp="1"/>
+          </p:cNvSpPr>
+          <p:nvPr>
+            <p:ph idx="1"/>
+          </p:nvPr>
+        </p:nvSpPr>
+        <p:spPr/>
+        <p:txBody>
+          <a:bodyPr/>
+          <a:lstStyle/>
+          <a:p>
+            <a:pPr marL="0" indent="0">
+              <a:buNone/>
+            </a:pPr>
+            <a:r>
+              <a:rPr lang="en-US" dirty="0"/>
+              <a:t>Data mining (KDD) is generally performed at </a:t>
+            </a:r>
+            <a:r>
+              <a:rPr lang="en-US" b="1" dirty="0"/>
+              <a:t>large scale </a:t>
+            </a:r>
+          </a:p>
+          <a:p>
+            <a:r>
+              <a:rPr lang="en-US" dirty="0"/>
+              <a:t>Dataset size has grown nearly exponentially  </a:t>
+            </a:r>
+          </a:p>
+          <a:p>
+            <a:r>
+              <a:rPr lang="en-US" dirty="0"/>
+              <a:t>More importantly, </a:t>
+            </a:r>
+            <a:r>
+              <a:rPr lang="en-US" b="1" dirty="0"/>
+              <a:t>dataset and problem complexity has grown</a:t>
+            </a:r>
+          </a:p>
+          <a:p>
+            <a:r>
+              <a:rPr lang="en-US" dirty="0"/>
+              <a:t>Data mining is at the intersection of several subjects   </a:t>
+            </a:r>
+          </a:p>
+          <a:p>
+            <a:pPr lvl="1"/>
+            <a:r>
+              <a:rPr lang="en-US" b="1" dirty="0"/>
+              <a:t>Statistics:</a:t>
+            </a:r>
+            <a:r>
+              <a:rPr lang="en-US" dirty="0"/>
+              <a:t> What of significance can we learn from the data? </a:t>
+            </a:r>
+          </a:p>
+          <a:p>
+            <a:pPr lvl="1"/>
+            <a:r>
+              <a:rPr lang="en-US" b="1" dirty="0"/>
+              <a:t>Mathematics:</a:t>
+            </a:r>
+            <a:r>
+              <a:rPr lang="en-US" dirty="0"/>
+              <a:t> How do we represent a model of the data as, say, a graph?</a:t>
+            </a:r>
+          </a:p>
+          <a:p>
+            <a:pPr lvl="1"/>
+            <a:r>
+              <a:rPr lang="en-US" b="1" dirty="0"/>
+              <a:t>Algorithms: </a:t>
+            </a:r>
+            <a:r>
+              <a:rPr lang="en-US" dirty="0"/>
+              <a:t>How do we efficiently find important relationships in massive datasets? </a:t>
+            </a:r>
+          </a:p>
+          <a:p>
+            <a:pPr lvl="1"/>
+            <a:r>
+              <a:rPr lang="en-US" b="1" dirty="0"/>
+              <a:t>Technology:</a:t>
+            </a:r>
+            <a:r>
+              <a:rPr lang="en-US" dirty="0"/>
+              <a:t> How do we manage and process massive datasets? </a:t>
+            </a:r>
+            <a:endParaRPr lang="en-US" b="1" dirty="0"/>
+          </a:p>
+        </p:txBody>
+      </p:sp>
+      <p:sp>
+        <p:nvSpPr>
+          <p:cNvPr id="6" name="Title 1">
+            <a:extLst>
+              <a:ext uri="{FF2B5EF4-FFF2-40B4-BE49-F238E27FC236}">
+                <a16:creationId xmlns:a16="http://schemas.microsoft.com/office/drawing/2014/main" id="{CD29F70F-B868-451B-A65D-8721F4C7A2D9}"/>
+              </a:ext>
+            </a:extLst>
+          </p:cNvPr>
+          <p:cNvSpPr txBox="1">
+            <a:spLocks/>
+          </p:cNvSpPr>
+          <p:nvPr/>
+        </p:nvSpPr>
+        <p:spPr>
+          <a:xfrm>
+            <a:off x="838200" y="-635"/>
+            <a:ext cx="10515600" cy="1325563"/>
+          </a:xfrm>
+          <a:prstGeom prst="rect">
+            <a:avLst/>
+          </a:prstGeom>
+        </p:spPr>
+        <p:txBody>
+          <a:bodyPr vert="horz" lIns="91440" tIns="45720" rIns="91440" bIns="45720" rtlCol="0" anchor="ctr">
+            <a:normAutofit/>
+          </a:bodyPr>
+          <a:lstStyle>
+            <a:lvl1pPr algn="l" defTabSz="914400" rtl="0" eaLnBrk="1" latinLnBrk="0" hangingPunct="1">
+              <a:lnSpc>
+                <a:spcPct val="90000"/>
+              </a:lnSpc>
+              <a:spcBef>
+                <a:spcPct val="0"/>
+              </a:spcBef>
+              <a:buNone/>
+              <a:defRPr sz="4400" kern="1200">
+                <a:solidFill>
+                  <a:schemeClr val="tx1"/>
+                </a:solidFill>
+                <a:latin typeface="+mj-lt"/>
+                <a:ea typeface="+mj-ea"/>
+                <a:cs typeface="+mj-cs"/>
+              </a:defRPr>
+            </a:lvl1pPr>
+          </a:lstStyle>
+          <a:p>
+            <a:r>
+              <a:rPr lang="en-US" dirty="0">
+                <a:latin typeface="+mn-lt"/>
+              </a:rPr>
+              <a:t>What is data mining?</a:t>
+            </a:r>
+          </a:p>
+        </p:txBody>
+      </p:sp>
+    </p:spTree>
+    <p:extLst>
+      <p:ext uri="{BB962C8B-B14F-4D97-AF65-F5344CB8AC3E}">
+        <p14:creationId xmlns:p14="http://schemas.microsoft.com/office/powerpoint/2010/main" val="69986985"/>
+      </p:ext>
+    </p:extLst>
+  </p:cSld>
+  <p:clrMapOvr>
+    <a:masterClrMapping/>
+  </p:clrMapOvr>
+  <p:timing>
+    <p:tnLst>
+      <p:par>
+        <p:cTn id="1" dur="indefinite" restart="never" nodeType="tmRoot">
+          <p:childTnLst>
+            <p:seq concurrent="1" nextAc="seek">
+              <p:cTn id="2" dur="indefinite" nodeType="mainSeq">
+                <p:childTnLst>
+                  <p:par>
+                    <p:cTn id="3" fill="hold">
+                      <p:stCondLst>
+                        <p:cond delay="indefinite"/>
+                      </p:stCondLst>
+                      <p:childTnLst>
+                        <p:par>
+                          <p:cTn id="4" fill="hold">
+                            <p:stCondLst>
+                              <p:cond delay="0"/>
+                            </p:stCondLst>
+                            <p:childTnLst>
+                              <p:par>
+                                <p:cTn id="5" presetID="1" presetClass="entr" presetSubtype="0" fill="hold" nodeType="clickEffect">
+                                  <p:stCondLst>
+                                    <p:cond delay="0"/>
+                                  </p:stCondLst>
+                                  <p:childTnLst>
+                                    <p:set>
+                                      <p:cBhvr>
+                                        <p:cTn id="6" dur="1" fill="hold">
+                                          <p:stCondLst>
+                                            <p:cond delay="0"/>
+                                          </p:stCondLst>
+                                        </p:cTn>
+                                        <p:tgtEl>
+                                          <p:spTgt spid="3">
+                                            <p:txEl>
+                                              <p:pRg st="1" end="1"/>
+                                            </p:txEl>
+                                          </p:spTgt>
+                                        </p:tgtEl>
+                                        <p:attrNameLst>
+                                          <p:attrName>style.visibility</p:attrName>
+                                        </p:attrNameLst>
+                                      </p:cBhvr>
+                                      <p:to>
+                                        <p:strVal val="visible"/>
+                                      </p:to>
+                                    </p:set>
+                                  </p:childTnLst>
+                                </p:cTn>
+                              </p:par>
+                            </p:childTnLst>
+                          </p:cTn>
+                        </p:par>
+                      </p:childTnLst>
+                    </p:cTn>
+                  </p:par>
+                  <p:par>
+                    <p:cTn id="7" fill="hold">
+                      <p:stCondLst>
+                        <p:cond delay="indefinite"/>
+                      </p:stCondLst>
+                      <p:childTnLst>
+                        <p:par>
+                          <p:cTn id="8" fill="hold">
+                            <p:stCondLst>
+                              <p:cond delay="0"/>
+                            </p:stCondLst>
+                            <p:childTnLst>
+                              <p:par>
+                                <p:cTn id="9" presetID="1" presetClass="entr" presetSubtype="0" fill="hold" nodeType="clickEffect">
+                                  <p:stCondLst>
+                                    <p:cond delay="0"/>
+                                  </p:stCondLst>
+                                  <p:childTnLst>
+                                    <p:set>
+                                      <p:cBhvr>
+                                        <p:cTn id="10" dur="1" fill="hold">
+                                          <p:stCondLst>
+                                            <p:cond delay="0"/>
+                                          </p:stCondLst>
+                                        </p:cTn>
+                                        <p:tgtEl>
+                                          <p:spTgt spid="3">
+                                            <p:txEl>
+                                              <p:pRg st="2" end="2"/>
+                                            </p:txEl>
+                                          </p:spTgt>
+                                        </p:tgtEl>
+                                        <p:attrNameLst>
+                                          <p:attrName>style.visibility</p:attrName>
+                                        </p:attrNameLst>
+                                      </p:cBhvr>
+                                      <p:to>
+                                        <p:strVal val="visible"/>
+                                      </p:to>
+                                    </p:set>
+                                  </p:childTnLst>
+                                </p:cTn>
+                              </p:par>
+                            </p:childTnLst>
+                          </p:cTn>
+                        </p:par>
+                      </p:childTnLst>
+                    </p:cTn>
+                  </p:par>
+                  <p:par>
+                    <p:cTn id="11" fill="hold">
+                      <p:stCondLst>
+                        <p:cond delay="indefinite"/>
+                      </p:stCondLst>
+                      <p:childTnLst>
+                        <p:par>
+                          <p:cTn id="12" fill="hold">
+                            <p:stCondLst>
+                              <p:cond delay="0"/>
+                            </p:stCondLst>
+                            <p:childTnLst>
+                              <p:par>
+                                <p:cTn id="13" presetID="1" presetClass="entr" presetSubtype="0" fill="hold" nodeType="clickEffect">
+                                  <p:stCondLst>
+                                    <p:cond delay="0"/>
+                                  </p:stCondLst>
+                                  <p:childTnLst>
+                                    <p:set>
+                                      <p:cBhvr>
+                                        <p:cTn id="14" dur="1" fill="hold">
+                                          <p:stCondLst>
+                                            <p:cond delay="0"/>
+                                          </p:stCondLst>
+                                        </p:cTn>
+                                        <p:tgtEl>
+                                          <p:spTgt spid="3">
+                                            <p:txEl>
+                                              <p:pRg st="3" end="3"/>
+                                            </p:txEl>
+                                          </p:spTgt>
+                                        </p:tgtEl>
+                                        <p:attrNameLst>
+                                          <p:attrName>style.visibility</p:attrName>
+                                        </p:attrNameLst>
+                                      </p:cBhvr>
+                                      <p:to>
+                                        <p:strVal val="visible"/>
+                                      </p:to>
+                                    </p:set>
+                                  </p:childTnLst>
+                                </p:cTn>
+                              </p:par>
+                              <p:par>
+                                <p:cTn id="15" presetID="1" presetClass="entr" presetSubtype="0" fill="hold" nodeType="withEffect">
+                                  <p:stCondLst>
+                                    <p:cond delay="0"/>
+                                  </p:stCondLst>
+                                  <p:childTnLst>
+                                    <p:set>
+                                      <p:cBhvr>
+                                        <p:cTn id="16" dur="1" fill="hold">
+                                          <p:stCondLst>
+                                            <p:cond delay="0"/>
+                                          </p:stCondLst>
+                                        </p:cTn>
+                                        <p:tgtEl>
+                                          <p:spTgt spid="3">
+                                            <p:txEl>
+                                              <p:pRg st="4" end="4"/>
+                                            </p:txEl>
+                                          </p:spTgt>
+                                        </p:tgtEl>
+                                        <p:attrNameLst>
+                                          <p:attrName>style.visibility</p:attrName>
+                                        </p:attrNameLst>
+                                      </p:cBhvr>
+                                      <p:to>
+                                        <p:strVal val="visible"/>
+                                      </p:to>
+                                    </p:set>
+                                  </p:childTnLst>
+                                </p:cTn>
+                              </p:par>
+                              <p:par>
+                                <p:cTn id="17" presetID="1" presetClass="entr" presetSubtype="0" fill="hold" nodeType="withEffect">
+                                  <p:stCondLst>
+                                    <p:cond delay="0"/>
+                                  </p:stCondLst>
+                                  <p:childTnLst>
+                                    <p:set>
+                                      <p:cBhvr>
+                                        <p:cTn id="18" dur="1" fill="hold">
+                                          <p:stCondLst>
+                                            <p:cond delay="0"/>
+                                          </p:stCondLst>
+                                        </p:cTn>
+                                        <p:tgtEl>
+                                          <p:spTgt spid="3">
+                                            <p:txEl>
+                                              <p:pRg st="5" end="5"/>
+                                            </p:txEl>
+                                          </p:spTgt>
+                                        </p:tgtEl>
+                                        <p:attrNameLst>
+                                          <p:attrName>style.visibility</p:attrName>
+                                        </p:attrNameLst>
+                                      </p:cBhvr>
+                                      <p:to>
+                                        <p:strVal val="visible"/>
+                                      </p:to>
+                                    </p:set>
+                                  </p:childTnLst>
+                                </p:cTn>
+                              </p:par>
+                              <p:par>
+                                <p:cTn id="19" presetID="1" presetClass="entr" presetSubtype="0" fill="hold" nodeType="withEffect">
+                                  <p:stCondLst>
+                                    <p:cond delay="0"/>
+                                  </p:stCondLst>
+                                  <p:childTnLst>
+                                    <p:set>
+                                      <p:cBhvr>
+                                        <p:cTn id="20" dur="1" fill="hold">
+                                          <p:stCondLst>
+                                            <p:cond delay="0"/>
+                                          </p:stCondLst>
+                                        </p:cTn>
+                                        <p:tgtEl>
+                                          <p:spTgt spid="3">
+                                            <p:txEl>
+                                              <p:pRg st="6" end="6"/>
+                                            </p:txEl>
+                                          </p:spTgt>
+                                        </p:tgtEl>
+                                        <p:attrNameLst>
+                                          <p:attrName>style.visibility</p:attrName>
+                                        </p:attrNameLst>
+                                      </p:cBhvr>
+                                      <p:to>
+                                        <p:strVal val="visible"/>
+                                      </p:to>
+                                    </p:set>
+                                  </p:childTnLst>
+                                </p:cTn>
+                              </p:par>
+                              <p:par>
+                                <p:cTn id="21" presetID="1" presetClass="entr" presetSubtype="0" fill="hold" nodeType="withEffect">
+                                  <p:stCondLst>
+                                    <p:cond delay="0"/>
+                                  </p:stCondLst>
+                                  <p:childTnLst>
+                                    <p:set>
+                                      <p:cBhvr>
+                                        <p:cTn id="22" dur="1" fill="hold">
+                                          <p:stCondLst>
+                                            <p:cond delay="0"/>
+                                          </p:stCondLst>
+                                        </p:cTn>
+                                        <p:tgtEl>
+                                          <p:spTgt spid="3">
+                                            <p:txEl>
+                                              <p:pRg st="7" end="7"/>
+                                            </p:txEl>
+                                          </p:spTgt>
+                                        </p:tgtEl>
+                                        <p:attrNameLst>
+                                          <p:attrName>style.visibility</p:attrName>
+                                        </p:attrNameLst>
+                                      </p:cBhvr>
+                                      <p:to>
+                                        <p:strVal val="visible"/>
+                                      </p:to>
+                                    </p:set>
+                                  </p:childTnLst>
+                                </p:cTn>
+                              </p:par>
+                            </p:childTnLst>
+                          </p:cTn>
+                        </p:par>
+                      </p:childTnLst>
+                    </p:cTn>
+                  </p:par>
+                </p:childTnLst>
+              </p:cTn>
+              <p:prevCondLst>
+                <p:cond evt="onPrev" delay="0">
+                  <p:tgtEl>
+                    <p:sldTgt/>
+                  </p:tgtEl>
+                </p:cond>
+              </p:prevCondLst>
+              <p:nextCondLst>
+                <p:cond evt="onNext" delay="0">
+                  <p:tgtEl>
+                    <p:sldTgt/>
+                  </p:tgtEl>
+                </p:cond>
+              </p:nextCondLst>
+            </p:seq>
+          </p:childTnLst>
+        </p:cTn>
+      </p:par>
+    </p:tnLst>
+  </p:timing>
+</p:sld>
+</file>
+
+<file path=ppt/slides/slide40.xml><?xml version="1.0" encoding="utf-8"?>
 <p:sld xmlns:a="http://schemas.openxmlformats.org/drawingml/2006/main" xmlns:r="http://schemas.openxmlformats.org/officeDocument/2006/relationships" xmlns:p="http://schemas.openxmlformats.org/presentationml/2006/main">
   <p:cSld>
     <p:spTree>
@@ -23884,496 +26112,7 @@
 </p:sld>
 </file>
 
-<file path=ppt/slides/slide4.xml><?xml version="1.0" encoding="utf-8"?>
-<p:sld xmlns:a="http://schemas.openxmlformats.org/drawingml/2006/main" xmlns:r="http://schemas.openxmlformats.org/officeDocument/2006/relationships" xmlns:p="http://schemas.openxmlformats.org/presentationml/2006/main">
-  <p:cSld>
-    <p:spTree>
-      <p:nvGrpSpPr>
-        <p:cNvPr id="1" name=""/>
-        <p:cNvGrpSpPr/>
-        <p:nvPr/>
-      </p:nvGrpSpPr>
-      <p:grpSpPr>
-        <a:xfrm>
-          <a:off x="0" y="0"/>
-          <a:ext cx="0" cy="0"/>
-          <a:chOff x="0" y="0"/>
-          <a:chExt cx="0" cy="0"/>
-        </a:xfrm>
-      </p:grpSpPr>
-      <p:sp>
-        <p:nvSpPr>
-          <p:cNvPr id="3" name="Content Placeholder 2">
-            <a:extLst>
-              <a:ext uri="{FF2B5EF4-FFF2-40B4-BE49-F238E27FC236}">
-                <a16:creationId xmlns:a16="http://schemas.microsoft.com/office/drawing/2014/main" id="{258E6AF3-7615-4BD1-878E-A94C93E98F90}"/>
-              </a:ext>
-            </a:extLst>
-          </p:cNvPr>
-          <p:cNvSpPr>
-            <a:spLocks noGrp="1"/>
-          </p:cNvSpPr>
-          <p:nvPr>
-            <p:ph idx="1"/>
-          </p:nvPr>
-        </p:nvSpPr>
-        <p:spPr/>
-        <p:txBody>
-          <a:bodyPr/>
-          <a:lstStyle/>
-          <a:p>
-            <a:pPr marL="0" indent="0">
-              <a:buNone/>
-            </a:pPr>
-            <a:r>
-              <a:rPr lang="en-US" dirty="0"/>
-              <a:t>Data mining (KDD) is generally performed at </a:t>
-            </a:r>
-            <a:r>
-              <a:rPr lang="en-US" b="1" dirty="0"/>
-              <a:t>large scale </a:t>
-            </a:r>
-          </a:p>
-          <a:p>
-            <a:r>
-              <a:rPr lang="en-US" dirty="0"/>
-              <a:t>Dataset size has grown nearly exponentially  </a:t>
-            </a:r>
-          </a:p>
-          <a:p>
-            <a:r>
-              <a:rPr lang="en-US" dirty="0"/>
-              <a:t>More importantly, </a:t>
-            </a:r>
-            <a:r>
-              <a:rPr lang="en-US" b="1" dirty="0"/>
-              <a:t>dataset and problem complexity has grown</a:t>
-            </a:r>
-          </a:p>
-          <a:p>
-            <a:r>
-              <a:rPr lang="en-US" dirty="0"/>
-              <a:t>Data mining is at the intersection of several subjects   </a:t>
-            </a:r>
-          </a:p>
-          <a:p>
-            <a:pPr lvl="1"/>
-            <a:r>
-              <a:rPr lang="en-US" b="1" dirty="0"/>
-              <a:t>Statistics:</a:t>
-            </a:r>
-            <a:r>
-              <a:rPr lang="en-US" dirty="0"/>
-              <a:t> What of significance can we learn from the data? </a:t>
-            </a:r>
-          </a:p>
-          <a:p>
-            <a:pPr lvl="1"/>
-            <a:r>
-              <a:rPr lang="en-US" b="1" dirty="0"/>
-              <a:t>Mathematics:</a:t>
-            </a:r>
-            <a:r>
-              <a:rPr lang="en-US" dirty="0"/>
-              <a:t> How do we represent a model of the data as, say, a graph?</a:t>
-            </a:r>
-          </a:p>
-          <a:p>
-            <a:pPr lvl="1"/>
-            <a:r>
-              <a:rPr lang="en-US" b="1" dirty="0"/>
-              <a:t>Algorithms: </a:t>
-            </a:r>
-            <a:r>
-              <a:rPr lang="en-US" dirty="0"/>
-              <a:t>How do we efficiently find important relationships in massive datasets? </a:t>
-            </a:r>
-          </a:p>
-          <a:p>
-            <a:pPr lvl="1"/>
-            <a:r>
-              <a:rPr lang="en-US" b="1" dirty="0"/>
-              <a:t>Technology:</a:t>
-            </a:r>
-            <a:r>
-              <a:rPr lang="en-US" dirty="0"/>
-              <a:t> How do we manage and process massive datasets? </a:t>
-            </a:r>
-            <a:endParaRPr lang="en-US" b="1" dirty="0"/>
-          </a:p>
-        </p:txBody>
-      </p:sp>
-      <p:sp>
-        <p:nvSpPr>
-          <p:cNvPr id="6" name="Title 1">
-            <a:extLst>
-              <a:ext uri="{FF2B5EF4-FFF2-40B4-BE49-F238E27FC236}">
-                <a16:creationId xmlns:a16="http://schemas.microsoft.com/office/drawing/2014/main" id="{CD29F70F-B868-451B-A65D-8721F4C7A2D9}"/>
-              </a:ext>
-            </a:extLst>
-          </p:cNvPr>
-          <p:cNvSpPr txBox="1">
-            <a:spLocks/>
-          </p:cNvSpPr>
-          <p:nvPr/>
-        </p:nvSpPr>
-        <p:spPr>
-          <a:xfrm>
-            <a:off x="838200" y="-635"/>
-            <a:ext cx="10515600" cy="1325563"/>
-          </a:xfrm>
-          <a:prstGeom prst="rect">
-            <a:avLst/>
-          </a:prstGeom>
-        </p:spPr>
-        <p:txBody>
-          <a:bodyPr vert="horz" lIns="91440" tIns="45720" rIns="91440" bIns="45720" rtlCol="0" anchor="ctr">
-            <a:normAutofit/>
-          </a:bodyPr>
-          <a:lstStyle>
-            <a:lvl1pPr algn="l" defTabSz="914400" rtl="0" eaLnBrk="1" latinLnBrk="0" hangingPunct="1">
-              <a:lnSpc>
-                <a:spcPct val="90000"/>
-              </a:lnSpc>
-              <a:spcBef>
-                <a:spcPct val="0"/>
-              </a:spcBef>
-              <a:buNone/>
-              <a:defRPr sz="4400" kern="1200">
-                <a:solidFill>
-                  <a:schemeClr val="tx1"/>
-                </a:solidFill>
-                <a:latin typeface="+mj-lt"/>
-                <a:ea typeface="+mj-ea"/>
-                <a:cs typeface="+mj-cs"/>
-              </a:defRPr>
-            </a:lvl1pPr>
-          </a:lstStyle>
-          <a:p>
-            <a:r>
-              <a:rPr lang="en-US" dirty="0">
-                <a:latin typeface="+mn-lt"/>
-              </a:rPr>
-              <a:t>What is data mining?</a:t>
-            </a:r>
-          </a:p>
-        </p:txBody>
-      </p:sp>
-    </p:spTree>
-    <p:extLst>
-      <p:ext uri="{BB962C8B-B14F-4D97-AF65-F5344CB8AC3E}">
-        <p14:creationId xmlns:p14="http://schemas.microsoft.com/office/powerpoint/2010/main" val="69986985"/>
-      </p:ext>
-    </p:extLst>
-  </p:cSld>
-  <p:clrMapOvr>
-    <a:masterClrMapping/>
-  </p:clrMapOvr>
-  <p:timing>
-    <p:tnLst>
-      <p:par>
-        <p:cTn id="1" dur="indefinite" restart="never" nodeType="tmRoot">
-          <p:childTnLst>
-            <p:seq concurrent="1" nextAc="seek">
-              <p:cTn id="2" dur="indefinite" nodeType="mainSeq">
-                <p:childTnLst>
-                  <p:par>
-                    <p:cTn id="3" fill="hold">
-                      <p:stCondLst>
-                        <p:cond delay="indefinite"/>
-                      </p:stCondLst>
-                      <p:childTnLst>
-                        <p:par>
-                          <p:cTn id="4" fill="hold">
-                            <p:stCondLst>
-                              <p:cond delay="0"/>
-                            </p:stCondLst>
-                            <p:childTnLst>
-                              <p:par>
-                                <p:cTn id="5" presetID="1" presetClass="entr" presetSubtype="0" fill="hold" nodeType="clickEffect">
-                                  <p:stCondLst>
-                                    <p:cond delay="0"/>
-                                  </p:stCondLst>
-                                  <p:childTnLst>
-                                    <p:set>
-                                      <p:cBhvr>
-                                        <p:cTn id="6" dur="1" fill="hold">
-                                          <p:stCondLst>
-                                            <p:cond delay="0"/>
-                                          </p:stCondLst>
-                                        </p:cTn>
-                                        <p:tgtEl>
-                                          <p:spTgt spid="3">
-                                            <p:txEl>
-                                              <p:pRg st="1" end="1"/>
-                                            </p:txEl>
-                                          </p:spTgt>
-                                        </p:tgtEl>
-                                        <p:attrNameLst>
-                                          <p:attrName>style.visibility</p:attrName>
-                                        </p:attrNameLst>
-                                      </p:cBhvr>
-                                      <p:to>
-                                        <p:strVal val="visible"/>
-                                      </p:to>
-                                    </p:set>
-                                  </p:childTnLst>
-                                </p:cTn>
-                              </p:par>
-                            </p:childTnLst>
-                          </p:cTn>
-                        </p:par>
-                      </p:childTnLst>
-                    </p:cTn>
-                  </p:par>
-                  <p:par>
-                    <p:cTn id="7" fill="hold">
-                      <p:stCondLst>
-                        <p:cond delay="indefinite"/>
-                      </p:stCondLst>
-                      <p:childTnLst>
-                        <p:par>
-                          <p:cTn id="8" fill="hold">
-                            <p:stCondLst>
-                              <p:cond delay="0"/>
-                            </p:stCondLst>
-                            <p:childTnLst>
-                              <p:par>
-                                <p:cTn id="9" presetID="1" presetClass="entr" presetSubtype="0" fill="hold" nodeType="clickEffect">
-                                  <p:stCondLst>
-                                    <p:cond delay="0"/>
-                                  </p:stCondLst>
-                                  <p:childTnLst>
-                                    <p:set>
-                                      <p:cBhvr>
-                                        <p:cTn id="10" dur="1" fill="hold">
-                                          <p:stCondLst>
-                                            <p:cond delay="0"/>
-                                          </p:stCondLst>
-                                        </p:cTn>
-                                        <p:tgtEl>
-                                          <p:spTgt spid="3">
-                                            <p:txEl>
-                                              <p:pRg st="2" end="2"/>
-                                            </p:txEl>
-                                          </p:spTgt>
-                                        </p:tgtEl>
-                                        <p:attrNameLst>
-                                          <p:attrName>style.visibility</p:attrName>
-                                        </p:attrNameLst>
-                                      </p:cBhvr>
-                                      <p:to>
-                                        <p:strVal val="visible"/>
-                                      </p:to>
-                                    </p:set>
-                                  </p:childTnLst>
-                                </p:cTn>
-                              </p:par>
-                            </p:childTnLst>
-                          </p:cTn>
-                        </p:par>
-                      </p:childTnLst>
-                    </p:cTn>
-                  </p:par>
-                  <p:par>
-                    <p:cTn id="11" fill="hold">
-                      <p:stCondLst>
-                        <p:cond delay="indefinite"/>
-                      </p:stCondLst>
-                      <p:childTnLst>
-                        <p:par>
-                          <p:cTn id="12" fill="hold">
-                            <p:stCondLst>
-                              <p:cond delay="0"/>
-                            </p:stCondLst>
-                            <p:childTnLst>
-                              <p:par>
-                                <p:cTn id="13" presetID="1" presetClass="entr" presetSubtype="0" fill="hold" nodeType="clickEffect">
-                                  <p:stCondLst>
-                                    <p:cond delay="0"/>
-                                  </p:stCondLst>
-                                  <p:childTnLst>
-                                    <p:set>
-                                      <p:cBhvr>
-                                        <p:cTn id="14" dur="1" fill="hold">
-                                          <p:stCondLst>
-                                            <p:cond delay="0"/>
-                                          </p:stCondLst>
-                                        </p:cTn>
-                                        <p:tgtEl>
-                                          <p:spTgt spid="3">
-                                            <p:txEl>
-                                              <p:pRg st="3" end="3"/>
-                                            </p:txEl>
-                                          </p:spTgt>
-                                        </p:tgtEl>
-                                        <p:attrNameLst>
-                                          <p:attrName>style.visibility</p:attrName>
-                                        </p:attrNameLst>
-                                      </p:cBhvr>
-                                      <p:to>
-                                        <p:strVal val="visible"/>
-                                      </p:to>
-                                    </p:set>
-                                  </p:childTnLst>
-                                </p:cTn>
-                              </p:par>
-                              <p:par>
-                                <p:cTn id="15" presetID="1" presetClass="entr" presetSubtype="0" fill="hold" nodeType="withEffect">
-                                  <p:stCondLst>
-                                    <p:cond delay="0"/>
-                                  </p:stCondLst>
-                                  <p:childTnLst>
-                                    <p:set>
-                                      <p:cBhvr>
-                                        <p:cTn id="16" dur="1" fill="hold">
-                                          <p:stCondLst>
-                                            <p:cond delay="0"/>
-                                          </p:stCondLst>
-                                        </p:cTn>
-                                        <p:tgtEl>
-                                          <p:spTgt spid="3">
-                                            <p:txEl>
-                                              <p:pRg st="4" end="4"/>
-                                            </p:txEl>
-                                          </p:spTgt>
-                                        </p:tgtEl>
-                                        <p:attrNameLst>
-                                          <p:attrName>style.visibility</p:attrName>
-                                        </p:attrNameLst>
-                                      </p:cBhvr>
-                                      <p:to>
-                                        <p:strVal val="visible"/>
-                                      </p:to>
-                                    </p:set>
-                                  </p:childTnLst>
-                                </p:cTn>
-                              </p:par>
-                              <p:par>
-                                <p:cTn id="17" presetID="1" presetClass="entr" presetSubtype="0" fill="hold" nodeType="withEffect">
-                                  <p:stCondLst>
-                                    <p:cond delay="0"/>
-                                  </p:stCondLst>
-                                  <p:childTnLst>
-                                    <p:set>
-                                      <p:cBhvr>
-                                        <p:cTn id="18" dur="1" fill="hold">
-                                          <p:stCondLst>
-                                            <p:cond delay="0"/>
-                                          </p:stCondLst>
-                                        </p:cTn>
-                                        <p:tgtEl>
-                                          <p:spTgt spid="3">
-                                            <p:txEl>
-                                              <p:pRg st="5" end="5"/>
-                                            </p:txEl>
-                                          </p:spTgt>
-                                        </p:tgtEl>
-                                        <p:attrNameLst>
-                                          <p:attrName>style.visibility</p:attrName>
-                                        </p:attrNameLst>
-                                      </p:cBhvr>
-                                      <p:to>
-                                        <p:strVal val="visible"/>
-                                      </p:to>
-                                    </p:set>
-                                  </p:childTnLst>
-                                </p:cTn>
-                              </p:par>
-                              <p:par>
-                                <p:cTn id="19" presetID="1" presetClass="entr" presetSubtype="0" fill="hold" nodeType="withEffect">
-                                  <p:stCondLst>
-                                    <p:cond delay="0"/>
-                                  </p:stCondLst>
-                                  <p:childTnLst>
-                                    <p:set>
-                                      <p:cBhvr>
-                                        <p:cTn id="20" dur="1" fill="hold">
-                                          <p:stCondLst>
-                                            <p:cond delay="0"/>
-                                          </p:stCondLst>
-                                        </p:cTn>
-                                        <p:tgtEl>
-                                          <p:spTgt spid="3">
-                                            <p:txEl>
-                                              <p:pRg st="6" end="6"/>
-                                            </p:txEl>
-                                          </p:spTgt>
-                                        </p:tgtEl>
-                                        <p:attrNameLst>
-                                          <p:attrName>style.visibility</p:attrName>
-                                        </p:attrNameLst>
-                                      </p:cBhvr>
-                                      <p:to>
-                                        <p:strVal val="visible"/>
-                                      </p:to>
-                                    </p:set>
-                                  </p:childTnLst>
-                                </p:cTn>
-                              </p:par>
-                              <p:par>
-                                <p:cTn id="21" presetID="1" presetClass="entr" presetSubtype="0" fill="hold" nodeType="withEffect">
-                                  <p:stCondLst>
-                                    <p:cond delay="0"/>
-                                  </p:stCondLst>
-                                  <p:childTnLst>
-                                    <p:set>
-                                      <p:cBhvr>
-                                        <p:cTn id="22" dur="1" fill="hold">
-                                          <p:stCondLst>
-                                            <p:cond delay="0"/>
-                                          </p:stCondLst>
-                                        </p:cTn>
-                                        <p:tgtEl>
-                                          <p:spTgt spid="3">
-                                            <p:txEl>
-                                              <p:pRg st="7" end="7"/>
-                                            </p:txEl>
-                                          </p:spTgt>
-                                        </p:tgtEl>
-                                        <p:attrNameLst>
-                                          <p:attrName>style.visibility</p:attrName>
-                                        </p:attrNameLst>
-                                      </p:cBhvr>
-                                      <p:to>
-                                        <p:strVal val="visible"/>
-                                      </p:to>
-                                    </p:set>
-                                  </p:childTnLst>
-                                </p:cTn>
-                              </p:par>
-                            </p:childTnLst>
-                          </p:cTn>
-                        </p:par>
-                      </p:childTnLst>
-                    </p:cTn>
-                  </p:par>
-                </p:childTnLst>
-              </p:cTn>
-              <p:prevCondLst>
-                <p:cond evt="onPrev" delay="0">
-                  <p:tgtEl>
-                    <p:sldTgt/>
-                  </p:tgtEl>
-                </p:cond>
-              </p:prevCondLst>
-              <p:nextCondLst>
-                <p:cond evt="onNext" delay="0">
-                  <p:tgtEl>
-                    <p:sldTgt/>
-                  </p:tgtEl>
-                </p:cond>
-              </p:nextCondLst>
-            </p:seq>
-          </p:childTnLst>
-        </p:cTn>
-      </p:par>
-    </p:tnLst>
-  </p:timing>
-</p:sld>
-</file>
-
-<file path=ppt/slides/slide40.xml><?xml version="1.0" encoding="utf-8"?>
+<file path=ppt/slides/slide41.xml><?xml version="1.0" encoding="utf-8"?>
 <p:sld xmlns:a="http://schemas.openxmlformats.org/drawingml/2006/main" xmlns:r="http://schemas.openxmlformats.org/officeDocument/2006/relationships" xmlns:p="http://schemas.openxmlformats.org/presentationml/2006/main">
   <p:cSld>
     <p:spTree>
@@ -24846,7 +26585,7 @@
 </p:sld>
 </file>
 
-<file path=ppt/slides/slide41.xml><?xml version="1.0" encoding="utf-8"?>
+<file path=ppt/slides/slide42.xml><?xml version="1.0" encoding="utf-8"?>
 <p:sld xmlns:a="http://schemas.openxmlformats.org/drawingml/2006/main" xmlns:r="http://schemas.openxmlformats.org/officeDocument/2006/relationships" xmlns:p="http://schemas.openxmlformats.org/presentationml/2006/main">
   <p:cSld>
     <p:spTree>
@@ -27774,7 +29513,7 @@
 </p:sld>
 </file>
 
-<file path=ppt/slides/slide42.xml><?xml version="1.0" encoding="utf-8"?>
+<file path=ppt/slides/slide43.xml><?xml version="1.0" encoding="utf-8"?>
 <p:sld xmlns:a="http://schemas.openxmlformats.org/drawingml/2006/main" xmlns:r="http://schemas.openxmlformats.org/officeDocument/2006/relationships" xmlns:p="http://schemas.openxmlformats.org/presentationml/2006/main">
   <p:cSld>
     <p:spTree>
@@ -30649,7 +32388,7 @@
 </p:sld>
 </file>
 
-<file path=ppt/slides/slide43.xml><?xml version="1.0" encoding="utf-8"?>
+<file path=ppt/slides/slide44.xml><?xml version="1.0" encoding="utf-8"?>
 <p:sld xmlns:a="http://schemas.openxmlformats.org/drawingml/2006/main" xmlns:r="http://schemas.openxmlformats.org/officeDocument/2006/relationships" xmlns:p="http://schemas.openxmlformats.org/presentationml/2006/main">
   <p:cSld>
     <p:spTree>
@@ -30715,7 +32454,7 @@
 </p:sld>
 </file>
 
-<file path=ppt/slides/slide44.xml><?xml version="1.0" encoding="utf-8"?>
+<file path=ppt/slides/slide45.xml><?xml version="1.0" encoding="utf-8"?>
 <p:sld xmlns:a="http://schemas.openxmlformats.org/drawingml/2006/main" xmlns:r="http://schemas.openxmlformats.org/officeDocument/2006/relationships" xmlns:p="http://schemas.openxmlformats.org/presentationml/2006/main">
   <p:cSld>
     <p:spTree>
@@ -31119,7 +32858,7 @@
 </p:sld>
 </file>
 
-<file path=ppt/slides/slide45.xml><?xml version="1.0" encoding="utf-8"?>
+<file path=ppt/slides/slide46.xml><?xml version="1.0" encoding="utf-8"?>
 <p:sld xmlns:a="http://schemas.openxmlformats.org/drawingml/2006/main" xmlns:r="http://schemas.openxmlformats.org/officeDocument/2006/relationships" xmlns:p="http://schemas.openxmlformats.org/presentationml/2006/main">
   <p:cSld>
     <p:spTree>
@@ -31641,7 +33380,7 @@
 </p:sld>
 </file>
 
-<file path=ppt/slides/slide46.xml><?xml version="1.0" encoding="utf-8"?>
+<file path=ppt/slides/slide47.xml><?xml version="1.0" encoding="utf-8"?>
 <p:sld xmlns:a="http://schemas.openxmlformats.org/drawingml/2006/main" xmlns:r="http://schemas.openxmlformats.org/officeDocument/2006/relationships" xmlns:p="http://schemas.openxmlformats.org/presentationml/2006/main">
   <p:cSld>
     <p:spTree>
@@ -32780,7 +34519,7 @@
 </p:sld>
 </file>
 
-<file path=ppt/slides/slide47.xml><?xml version="1.0" encoding="utf-8"?>
+<file path=ppt/slides/slide48.xml><?xml version="1.0" encoding="utf-8"?>
 <p:sld xmlns:a="http://schemas.openxmlformats.org/drawingml/2006/main" xmlns:r="http://schemas.openxmlformats.org/officeDocument/2006/relationships" xmlns:p="http://schemas.openxmlformats.org/presentationml/2006/main">
   <p:cSld>
     <p:spTree>
@@ -32853,7 +34592,7 @@
 </p:sld>
 </file>
 
-<file path=ppt/slides/slide48.xml><?xml version="1.0" encoding="utf-8"?>
+<file path=ppt/slides/slide49.xml><?xml version="1.0" encoding="utf-8"?>
 <p:sld xmlns:a="http://schemas.openxmlformats.org/drawingml/2006/main" xmlns:r="http://schemas.openxmlformats.org/officeDocument/2006/relationships" xmlns:p="http://schemas.openxmlformats.org/presentationml/2006/main">
   <p:cSld>
     <p:spTree>
@@ -33670,7 +35409,401 @@
 </p:sld>
 </file>
 
-<file path=ppt/slides/slide49.xml><?xml version="1.0" encoding="utf-8"?>
+<file path=ppt/slides/slide5.xml><?xml version="1.0" encoding="utf-8"?>
+<p:sld xmlns:a="http://schemas.openxmlformats.org/drawingml/2006/main" xmlns:r="http://schemas.openxmlformats.org/officeDocument/2006/relationships" xmlns:p="http://schemas.openxmlformats.org/presentationml/2006/main">
+  <p:cSld>
+    <p:spTree>
+      <p:nvGrpSpPr>
+        <p:cNvPr id="1" name=""/>
+        <p:cNvGrpSpPr/>
+        <p:nvPr/>
+      </p:nvGrpSpPr>
+      <p:grpSpPr>
+        <a:xfrm>
+          <a:off x="0" y="0"/>
+          <a:ext cx="0" cy="0"/>
+          <a:chOff x="0" y="0"/>
+          <a:chExt cx="0" cy="0"/>
+        </a:xfrm>
+      </p:grpSpPr>
+      <p:sp>
+        <p:nvSpPr>
+          <p:cNvPr id="3" name="Content Placeholder 2">
+            <a:extLst>
+              <a:ext uri="{FF2B5EF4-FFF2-40B4-BE49-F238E27FC236}">
+                <a16:creationId xmlns:a16="http://schemas.microsoft.com/office/drawing/2014/main" id="{258E6AF3-7615-4BD1-878E-A94C93E98F90}"/>
+              </a:ext>
+            </a:extLst>
+          </p:cNvPr>
+          <p:cNvSpPr>
+            <a:spLocks noGrp="1"/>
+          </p:cNvSpPr>
+          <p:nvPr>
+            <p:ph idx="1"/>
+          </p:nvPr>
+        </p:nvSpPr>
+        <p:spPr>
+          <a:xfrm>
+            <a:off x="838200" y="1217458"/>
+            <a:ext cx="10515600" cy="5640542"/>
+          </a:xfrm>
+        </p:spPr>
+        <p:txBody>
+          <a:bodyPr>
+            <a:normAutofit fontScale="92500" lnSpcReduction="10000"/>
+          </a:bodyPr>
+          <a:lstStyle/>
+          <a:p>
+            <a:pPr marL="0" indent="0">
+              <a:buNone/>
+            </a:pPr>
+            <a:r>
+              <a:rPr lang="en-US" sz="3200" dirty="0"/>
+              <a:t>What is the KDD process?   </a:t>
+            </a:r>
+          </a:p>
+          <a:p>
+            <a:pPr marL="0" indent="0">
+              <a:buNone/>
+            </a:pPr>
+            <a:endParaRPr lang="en-US" dirty="0"/>
+          </a:p>
+          <a:p>
+            <a:pPr marL="0" indent="0">
+              <a:buNone/>
+            </a:pPr>
+            <a:endParaRPr lang="en-US" dirty="0"/>
+          </a:p>
+          <a:p>
+            <a:pPr marL="0" indent="0">
+              <a:buNone/>
+            </a:pPr>
+            <a:endParaRPr lang="en-US" dirty="0"/>
+          </a:p>
+          <a:p>
+            <a:pPr marL="0" indent="0">
+              <a:buNone/>
+            </a:pPr>
+            <a:endParaRPr lang="en-US" dirty="0"/>
+          </a:p>
+          <a:p>
+            <a:pPr marL="0" indent="0">
+              <a:buNone/>
+            </a:pPr>
+            <a:endParaRPr lang="en-US" dirty="0"/>
+          </a:p>
+          <a:p>
+            <a:pPr marL="0" indent="0">
+              <a:buNone/>
+            </a:pPr>
+            <a:endParaRPr lang="en-US" dirty="0"/>
+          </a:p>
+          <a:p>
+            <a:pPr marL="0" indent="0">
+              <a:buNone/>
+            </a:pPr>
+            <a:endParaRPr lang="en-US" dirty="0"/>
+          </a:p>
+          <a:p>
+            <a:pPr marL="0" indent="0">
+              <a:buNone/>
+            </a:pPr>
+            <a:endParaRPr lang="en-US" dirty="0">
+              <a:solidFill>
+                <a:schemeClr val="accent1"/>
+              </a:solidFill>
+            </a:endParaRPr>
+          </a:p>
+          <a:p>
+            <a:pPr marL="0" indent="0">
+              <a:buNone/>
+            </a:pPr>
+            <a:endParaRPr lang="en-US" dirty="0">
+              <a:solidFill>
+                <a:schemeClr val="accent1"/>
+              </a:solidFill>
+            </a:endParaRPr>
+          </a:p>
+          <a:p>
+            <a:pPr marL="0" indent="0">
+              <a:buNone/>
+            </a:pPr>
+            <a:endParaRPr lang="en-US" dirty="0">
+              <a:solidFill>
+                <a:schemeClr val="accent1"/>
+              </a:solidFill>
+            </a:endParaRPr>
+          </a:p>
+          <a:p>
+            <a:pPr marL="0" indent="0">
+              <a:buNone/>
+            </a:pPr>
+            <a:r>
+              <a:rPr lang="en-US" dirty="0">
+                <a:solidFill>
+                  <a:schemeClr val="accent1"/>
+                </a:solidFill>
+              </a:rPr>
+              <a:t>Is this old diagram representative?  - e.g. Fayyad et.al. 1996 </a:t>
+            </a:r>
+          </a:p>
+        </p:txBody>
+      </p:sp>
+      <p:sp>
+        <p:nvSpPr>
+          <p:cNvPr id="6" name="Title 1">
+            <a:extLst>
+              <a:ext uri="{FF2B5EF4-FFF2-40B4-BE49-F238E27FC236}">
+                <a16:creationId xmlns:a16="http://schemas.microsoft.com/office/drawing/2014/main" id="{CD29F70F-B868-451B-A65D-8721F4C7A2D9}"/>
+              </a:ext>
+            </a:extLst>
+          </p:cNvPr>
+          <p:cNvSpPr txBox="1">
+            <a:spLocks/>
+          </p:cNvSpPr>
+          <p:nvPr/>
+        </p:nvSpPr>
+        <p:spPr>
+          <a:xfrm>
+            <a:off x="838200" y="-635"/>
+            <a:ext cx="10515600" cy="1325563"/>
+          </a:xfrm>
+          <a:prstGeom prst="rect">
+            <a:avLst/>
+          </a:prstGeom>
+        </p:spPr>
+        <p:txBody>
+          <a:bodyPr vert="horz" lIns="91440" tIns="45720" rIns="91440" bIns="45720" rtlCol="0" anchor="ctr">
+            <a:normAutofit/>
+          </a:bodyPr>
+          <a:lstStyle>
+            <a:lvl1pPr algn="l" defTabSz="914400" rtl="0" eaLnBrk="1" latinLnBrk="0" hangingPunct="1">
+              <a:lnSpc>
+                <a:spcPct val="90000"/>
+              </a:lnSpc>
+              <a:spcBef>
+                <a:spcPct val="0"/>
+              </a:spcBef>
+              <a:buNone/>
+              <a:defRPr sz="4400" kern="1200">
+                <a:solidFill>
+                  <a:schemeClr val="tx1"/>
+                </a:solidFill>
+                <a:latin typeface="+mj-lt"/>
+                <a:ea typeface="+mj-ea"/>
+                <a:cs typeface="+mj-cs"/>
+              </a:defRPr>
+            </a:lvl1pPr>
+          </a:lstStyle>
+          <a:p>
+            <a:r>
+              <a:rPr lang="en-US" dirty="0">
+                <a:latin typeface="+mn-lt"/>
+              </a:rPr>
+              <a:t>KDD process</a:t>
+            </a:r>
+          </a:p>
+        </p:txBody>
+      </p:sp>
+      <p:pic>
+        <p:nvPicPr>
+          <p:cNvPr id="4" name="Picture 3">
+            <a:extLst>
+              <a:ext uri="{FF2B5EF4-FFF2-40B4-BE49-F238E27FC236}">
+                <a16:creationId xmlns:a16="http://schemas.microsoft.com/office/drawing/2014/main" id="{41A10601-345E-4A04-878A-28FFF71506B5}"/>
+              </a:ext>
+            </a:extLst>
+          </p:cNvPr>
+          <p:cNvPicPr>
+            <a:picLocks noChangeAspect="1"/>
+          </p:cNvPicPr>
+          <p:nvPr/>
+        </p:nvPicPr>
+        <p:blipFill>
+          <a:blip r:embed="rId2"/>
+          <a:stretch>
+            <a:fillRect/>
+          </a:stretch>
+        </p:blipFill>
+        <p:spPr>
+          <a:xfrm>
+            <a:off x="951375" y="1651145"/>
+            <a:ext cx="8488232" cy="4404795"/>
+          </a:xfrm>
+          <a:prstGeom prst="rect">
+            <a:avLst/>
+          </a:prstGeom>
+        </p:spPr>
+      </p:pic>
+    </p:spTree>
+    <p:extLst>
+      <p:ext uri="{BB962C8B-B14F-4D97-AF65-F5344CB8AC3E}">
+        <p14:creationId xmlns:p14="http://schemas.microsoft.com/office/powerpoint/2010/main" val="2011350768"/>
+      </p:ext>
+    </p:extLst>
+  </p:cSld>
+  <p:clrMapOvr>
+    <a:masterClrMapping/>
+  </p:clrMapOvr>
+  <p:timing>
+    <p:tnLst>
+      <p:par>
+        <p:cTn id="1" dur="indefinite" restart="never" nodeType="tmRoot">
+          <p:childTnLst>
+            <p:seq concurrent="1" nextAc="seek">
+              <p:cTn id="2" dur="indefinite" nodeType="mainSeq">
+                <p:childTnLst>
+                  <p:par>
+                    <p:cTn id="3" fill="hold">
+                      <p:stCondLst>
+                        <p:cond delay="indefinite"/>
+                      </p:stCondLst>
+                      <p:childTnLst>
+                        <p:par>
+                          <p:cTn id="4" fill="hold">
+                            <p:stCondLst>
+                              <p:cond delay="0"/>
+                            </p:stCondLst>
+                            <p:childTnLst>
+                              <p:par>
+                                <p:cTn id="5" presetID="1" presetClass="entr" presetSubtype="0" fill="hold" nodeType="clickEffect">
+                                  <p:stCondLst>
+                                    <p:cond delay="0"/>
+                                  </p:stCondLst>
+                                  <p:childTnLst>
+                                    <p:set>
+                                      <p:cBhvr>
+                                        <p:cTn id="6" dur="1" fill="hold">
+                                          <p:stCondLst>
+                                            <p:cond delay="0"/>
+                                          </p:stCondLst>
+                                        </p:cTn>
+                                        <p:tgtEl>
+                                          <p:spTgt spid="3">
+                                            <p:txEl>
+                                              <p:pRg st="0" end="0"/>
+                                            </p:txEl>
+                                          </p:spTgt>
+                                        </p:tgtEl>
+                                        <p:attrNameLst>
+                                          <p:attrName>style.visibility</p:attrName>
+                                        </p:attrNameLst>
+                                      </p:cBhvr>
+                                      <p:to>
+                                        <p:strVal val="visible"/>
+                                      </p:to>
+                                    </p:set>
+                                  </p:childTnLst>
+                                </p:cTn>
+                              </p:par>
+                            </p:childTnLst>
+                          </p:cTn>
+                        </p:par>
+                      </p:childTnLst>
+                    </p:cTn>
+                  </p:par>
+                  <p:par>
+                    <p:cTn id="7" fill="hold">
+                      <p:stCondLst>
+                        <p:cond delay="indefinite"/>
+                      </p:stCondLst>
+                      <p:childTnLst>
+                        <p:par>
+                          <p:cTn id="8" fill="hold">
+                            <p:stCondLst>
+                              <p:cond delay="0"/>
+                            </p:stCondLst>
+                            <p:childTnLst>
+                              <p:par>
+                                <p:cTn id="9" presetID="1" presetClass="entr" presetSubtype="0" fill="hold" nodeType="clickEffect">
+                                  <p:stCondLst>
+                                    <p:cond delay="0"/>
+                                  </p:stCondLst>
+                                  <p:childTnLst>
+                                    <p:set>
+                                      <p:cBhvr>
+                                        <p:cTn id="10" dur="1" fill="hold">
+                                          <p:stCondLst>
+                                            <p:cond delay="0"/>
+                                          </p:stCondLst>
+                                        </p:cTn>
+                                        <p:tgtEl>
+                                          <p:spTgt spid="3">
+                                            <p:txEl>
+                                              <p:pRg st="11" end="11"/>
+                                            </p:txEl>
+                                          </p:spTgt>
+                                        </p:tgtEl>
+                                        <p:attrNameLst>
+                                          <p:attrName>style.visibility</p:attrName>
+                                        </p:attrNameLst>
+                                      </p:cBhvr>
+                                      <p:to>
+                                        <p:strVal val="visible"/>
+                                      </p:to>
+                                    </p:set>
+                                  </p:childTnLst>
+                                </p:cTn>
+                              </p:par>
+                              <p:par>
+                                <p:cTn id="11" presetID="1" presetClass="entr" presetSubtype="0" fill="hold" nodeType="withEffect">
+                                  <p:stCondLst>
+                                    <p:cond delay="0"/>
+                                  </p:stCondLst>
+                                  <p:childTnLst>
+                                    <p:set>
+                                      <p:cBhvr>
+                                        <p:cTn id="12" dur="1" fill="hold">
+                                          <p:stCondLst>
+                                            <p:cond delay="0"/>
+                                          </p:stCondLst>
+                                        </p:cTn>
+                                        <p:tgtEl>
+                                          <p:spTgt spid="4"/>
+                                        </p:tgtEl>
+                                        <p:attrNameLst>
+                                          <p:attrName>style.visibility</p:attrName>
+                                        </p:attrNameLst>
+                                      </p:cBhvr>
+                                      <p:to>
+                                        <p:strVal val="visible"/>
+                                      </p:to>
+                                    </p:set>
+                                  </p:childTnLst>
+                                </p:cTn>
+                              </p:par>
+                            </p:childTnLst>
+                          </p:cTn>
+                        </p:par>
+                      </p:childTnLst>
+                    </p:cTn>
+                  </p:par>
+                </p:childTnLst>
+              </p:cTn>
+              <p:prevCondLst>
+                <p:cond evt="onPrev" delay="0">
+                  <p:tgtEl>
+                    <p:sldTgt/>
+                  </p:tgtEl>
+                </p:cond>
+              </p:prevCondLst>
+              <p:nextCondLst>
+                <p:cond evt="onNext" delay="0">
+                  <p:tgtEl>
+                    <p:sldTgt/>
+                  </p:tgtEl>
+                </p:cond>
+              </p:nextCondLst>
+            </p:seq>
+          </p:childTnLst>
+        </p:cTn>
+      </p:par>
+    </p:tnLst>
+  </p:timing>
+</p:sld>
+</file>
+
+<file path=ppt/slides/slide50.xml><?xml version="1.0" encoding="utf-8"?>
 <p:sld xmlns:a="http://schemas.openxmlformats.org/drawingml/2006/main" xmlns:r="http://schemas.openxmlformats.org/officeDocument/2006/relationships" xmlns:p="http://schemas.openxmlformats.org/presentationml/2006/main">
   <p:cSld>
     <p:spTree>
@@ -34217,401 +36350,7 @@
 </p:sld>
 </file>
 
-<file path=ppt/slides/slide5.xml><?xml version="1.0" encoding="utf-8"?>
-<p:sld xmlns:a="http://schemas.openxmlformats.org/drawingml/2006/main" xmlns:r="http://schemas.openxmlformats.org/officeDocument/2006/relationships" xmlns:p="http://schemas.openxmlformats.org/presentationml/2006/main">
-  <p:cSld>
-    <p:spTree>
-      <p:nvGrpSpPr>
-        <p:cNvPr id="1" name=""/>
-        <p:cNvGrpSpPr/>
-        <p:nvPr/>
-      </p:nvGrpSpPr>
-      <p:grpSpPr>
-        <a:xfrm>
-          <a:off x="0" y="0"/>
-          <a:ext cx="0" cy="0"/>
-          <a:chOff x="0" y="0"/>
-          <a:chExt cx="0" cy="0"/>
-        </a:xfrm>
-      </p:grpSpPr>
-      <p:sp>
-        <p:nvSpPr>
-          <p:cNvPr id="3" name="Content Placeholder 2">
-            <a:extLst>
-              <a:ext uri="{FF2B5EF4-FFF2-40B4-BE49-F238E27FC236}">
-                <a16:creationId xmlns:a16="http://schemas.microsoft.com/office/drawing/2014/main" id="{258E6AF3-7615-4BD1-878E-A94C93E98F90}"/>
-              </a:ext>
-            </a:extLst>
-          </p:cNvPr>
-          <p:cNvSpPr>
-            <a:spLocks noGrp="1"/>
-          </p:cNvSpPr>
-          <p:nvPr>
-            <p:ph idx="1"/>
-          </p:nvPr>
-        </p:nvSpPr>
-        <p:spPr>
-          <a:xfrm>
-            <a:off x="838200" y="1217458"/>
-            <a:ext cx="10515600" cy="5640542"/>
-          </a:xfrm>
-        </p:spPr>
-        <p:txBody>
-          <a:bodyPr>
-            <a:normAutofit fontScale="92500" lnSpcReduction="10000"/>
-          </a:bodyPr>
-          <a:lstStyle/>
-          <a:p>
-            <a:pPr marL="0" indent="0">
-              <a:buNone/>
-            </a:pPr>
-            <a:r>
-              <a:rPr lang="en-US" sz="3200" dirty="0"/>
-              <a:t>What is the KDD process?   </a:t>
-            </a:r>
-          </a:p>
-          <a:p>
-            <a:pPr marL="0" indent="0">
-              <a:buNone/>
-            </a:pPr>
-            <a:endParaRPr lang="en-US" dirty="0"/>
-          </a:p>
-          <a:p>
-            <a:pPr marL="0" indent="0">
-              <a:buNone/>
-            </a:pPr>
-            <a:endParaRPr lang="en-US" dirty="0"/>
-          </a:p>
-          <a:p>
-            <a:pPr marL="0" indent="0">
-              <a:buNone/>
-            </a:pPr>
-            <a:endParaRPr lang="en-US" dirty="0"/>
-          </a:p>
-          <a:p>
-            <a:pPr marL="0" indent="0">
-              <a:buNone/>
-            </a:pPr>
-            <a:endParaRPr lang="en-US" dirty="0"/>
-          </a:p>
-          <a:p>
-            <a:pPr marL="0" indent="0">
-              <a:buNone/>
-            </a:pPr>
-            <a:endParaRPr lang="en-US" dirty="0"/>
-          </a:p>
-          <a:p>
-            <a:pPr marL="0" indent="0">
-              <a:buNone/>
-            </a:pPr>
-            <a:endParaRPr lang="en-US" dirty="0"/>
-          </a:p>
-          <a:p>
-            <a:pPr marL="0" indent="0">
-              <a:buNone/>
-            </a:pPr>
-            <a:endParaRPr lang="en-US" dirty="0"/>
-          </a:p>
-          <a:p>
-            <a:pPr marL="0" indent="0">
-              <a:buNone/>
-            </a:pPr>
-            <a:endParaRPr lang="en-US" dirty="0">
-              <a:solidFill>
-                <a:schemeClr val="accent1"/>
-              </a:solidFill>
-            </a:endParaRPr>
-          </a:p>
-          <a:p>
-            <a:pPr marL="0" indent="0">
-              <a:buNone/>
-            </a:pPr>
-            <a:endParaRPr lang="en-US" dirty="0">
-              <a:solidFill>
-                <a:schemeClr val="accent1"/>
-              </a:solidFill>
-            </a:endParaRPr>
-          </a:p>
-          <a:p>
-            <a:pPr marL="0" indent="0">
-              <a:buNone/>
-            </a:pPr>
-            <a:endParaRPr lang="en-US" dirty="0">
-              <a:solidFill>
-                <a:schemeClr val="accent1"/>
-              </a:solidFill>
-            </a:endParaRPr>
-          </a:p>
-          <a:p>
-            <a:pPr marL="0" indent="0">
-              <a:buNone/>
-            </a:pPr>
-            <a:r>
-              <a:rPr lang="en-US" dirty="0">
-                <a:solidFill>
-                  <a:schemeClr val="accent1"/>
-                </a:solidFill>
-              </a:rPr>
-              <a:t>Is this old diagram representative?  - e.g. Fayyad et.al. 1996 </a:t>
-            </a:r>
-          </a:p>
-        </p:txBody>
-      </p:sp>
-      <p:sp>
-        <p:nvSpPr>
-          <p:cNvPr id="6" name="Title 1">
-            <a:extLst>
-              <a:ext uri="{FF2B5EF4-FFF2-40B4-BE49-F238E27FC236}">
-                <a16:creationId xmlns:a16="http://schemas.microsoft.com/office/drawing/2014/main" id="{CD29F70F-B868-451B-A65D-8721F4C7A2D9}"/>
-              </a:ext>
-            </a:extLst>
-          </p:cNvPr>
-          <p:cNvSpPr txBox="1">
-            <a:spLocks/>
-          </p:cNvSpPr>
-          <p:nvPr/>
-        </p:nvSpPr>
-        <p:spPr>
-          <a:xfrm>
-            <a:off x="838200" y="-635"/>
-            <a:ext cx="10515600" cy="1325563"/>
-          </a:xfrm>
-          <a:prstGeom prst="rect">
-            <a:avLst/>
-          </a:prstGeom>
-        </p:spPr>
-        <p:txBody>
-          <a:bodyPr vert="horz" lIns="91440" tIns="45720" rIns="91440" bIns="45720" rtlCol="0" anchor="ctr">
-            <a:normAutofit/>
-          </a:bodyPr>
-          <a:lstStyle>
-            <a:lvl1pPr algn="l" defTabSz="914400" rtl="0" eaLnBrk="1" latinLnBrk="0" hangingPunct="1">
-              <a:lnSpc>
-                <a:spcPct val="90000"/>
-              </a:lnSpc>
-              <a:spcBef>
-                <a:spcPct val="0"/>
-              </a:spcBef>
-              <a:buNone/>
-              <a:defRPr sz="4400" kern="1200">
-                <a:solidFill>
-                  <a:schemeClr val="tx1"/>
-                </a:solidFill>
-                <a:latin typeface="+mj-lt"/>
-                <a:ea typeface="+mj-ea"/>
-                <a:cs typeface="+mj-cs"/>
-              </a:defRPr>
-            </a:lvl1pPr>
-          </a:lstStyle>
-          <a:p>
-            <a:r>
-              <a:rPr lang="en-US" dirty="0">
-                <a:latin typeface="+mn-lt"/>
-              </a:rPr>
-              <a:t>KDD process</a:t>
-            </a:r>
-          </a:p>
-        </p:txBody>
-      </p:sp>
-      <p:pic>
-        <p:nvPicPr>
-          <p:cNvPr id="4" name="Picture 3">
-            <a:extLst>
-              <a:ext uri="{FF2B5EF4-FFF2-40B4-BE49-F238E27FC236}">
-                <a16:creationId xmlns:a16="http://schemas.microsoft.com/office/drawing/2014/main" id="{41A10601-345E-4A04-878A-28FFF71506B5}"/>
-              </a:ext>
-            </a:extLst>
-          </p:cNvPr>
-          <p:cNvPicPr>
-            <a:picLocks noChangeAspect="1"/>
-          </p:cNvPicPr>
-          <p:nvPr/>
-        </p:nvPicPr>
-        <p:blipFill>
-          <a:blip r:embed="rId2"/>
-          <a:stretch>
-            <a:fillRect/>
-          </a:stretch>
-        </p:blipFill>
-        <p:spPr>
-          <a:xfrm>
-            <a:off x="951375" y="1651145"/>
-            <a:ext cx="8488232" cy="4404795"/>
-          </a:xfrm>
-          <a:prstGeom prst="rect">
-            <a:avLst/>
-          </a:prstGeom>
-        </p:spPr>
-      </p:pic>
-    </p:spTree>
-    <p:extLst>
-      <p:ext uri="{BB962C8B-B14F-4D97-AF65-F5344CB8AC3E}">
-        <p14:creationId xmlns:p14="http://schemas.microsoft.com/office/powerpoint/2010/main" val="2011350768"/>
-      </p:ext>
-    </p:extLst>
-  </p:cSld>
-  <p:clrMapOvr>
-    <a:masterClrMapping/>
-  </p:clrMapOvr>
-  <p:timing>
-    <p:tnLst>
-      <p:par>
-        <p:cTn id="1" dur="indefinite" restart="never" nodeType="tmRoot">
-          <p:childTnLst>
-            <p:seq concurrent="1" nextAc="seek">
-              <p:cTn id="2" dur="indefinite" nodeType="mainSeq">
-                <p:childTnLst>
-                  <p:par>
-                    <p:cTn id="3" fill="hold">
-                      <p:stCondLst>
-                        <p:cond delay="indefinite"/>
-                      </p:stCondLst>
-                      <p:childTnLst>
-                        <p:par>
-                          <p:cTn id="4" fill="hold">
-                            <p:stCondLst>
-                              <p:cond delay="0"/>
-                            </p:stCondLst>
-                            <p:childTnLst>
-                              <p:par>
-                                <p:cTn id="5" presetID="1" presetClass="entr" presetSubtype="0" fill="hold" nodeType="clickEffect">
-                                  <p:stCondLst>
-                                    <p:cond delay="0"/>
-                                  </p:stCondLst>
-                                  <p:childTnLst>
-                                    <p:set>
-                                      <p:cBhvr>
-                                        <p:cTn id="6" dur="1" fill="hold">
-                                          <p:stCondLst>
-                                            <p:cond delay="0"/>
-                                          </p:stCondLst>
-                                        </p:cTn>
-                                        <p:tgtEl>
-                                          <p:spTgt spid="3">
-                                            <p:txEl>
-                                              <p:pRg st="0" end="0"/>
-                                            </p:txEl>
-                                          </p:spTgt>
-                                        </p:tgtEl>
-                                        <p:attrNameLst>
-                                          <p:attrName>style.visibility</p:attrName>
-                                        </p:attrNameLst>
-                                      </p:cBhvr>
-                                      <p:to>
-                                        <p:strVal val="visible"/>
-                                      </p:to>
-                                    </p:set>
-                                  </p:childTnLst>
-                                </p:cTn>
-                              </p:par>
-                            </p:childTnLst>
-                          </p:cTn>
-                        </p:par>
-                      </p:childTnLst>
-                    </p:cTn>
-                  </p:par>
-                  <p:par>
-                    <p:cTn id="7" fill="hold">
-                      <p:stCondLst>
-                        <p:cond delay="indefinite"/>
-                      </p:stCondLst>
-                      <p:childTnLst>
-                        <p:par>
-                          <p:cTn id="8" fill="hold">
-                            <p:stCondLst>
-                              <p:cond delay="0"/>
-                            </p:stCondLst>
-                            <p:childTnLst>
-                              <p:par>
-                                <p:cTn id="9" presetID="1" presetClass="entr" presetSubtype="0" fill="hold" nodeType="clickEffect">
-                                  <p:stCondLst>
-                                    <p:cond delay="0"/>
-                                  </p:stCondLst>
-                                  <p:childTnLst>
-                                    <p:set>
-                                      <p:cBhvr>
-                                        <p:cTn id="10" dur="1" fill="hold">
-                                          <p:stCondLst>
-                                            <p:cond delay="0"/>
-                                          </p:stCondLst>
-                                        </p:cTn>
-                                        <p:tgtEl>
-                                          <p:spTgt spid="3">
-                                            <p:txEl>
-                                              <p:pRg st="11" end="11"/>
-                                            </p:txEl>
-                                          </p:spTgt>
-                                        </p:tgtEl>
-                                        <p:attrNameLst>
-                                          <p:attrName>style.visibility</p:attrName>
-                                        </p:attrNameLst>
-                                      </p:cBhvr>
-                                      <p:to>
-                                        <p:strVal val="visible"/>
-                                      </p:to>
-                                    </p:set>
-                                  </p:childTnLst>
-                                </p:cTn>
-                              </p:par>
-                              <p:par>
-                                <p:cTn id="11" presetID="1" presetClass="entr" presetSubtype="0" fill="hold" nodeType="withEffect">
-                                  <p:stCondLst>
-                                    <p:cond delay="0"/>
-                                  </p:stCondLst>
-                                  <p:childTnLst>
-                                    <p:set>
-                                      <p:cBhvr>
-                                        <p:cTn id="12" dur="1" fill="hold">
-                                          <p:stCondLst>
-                                            <p:cond delay="0"/>
-                                          </p:stCondLst>
-                                        </p:cTn>
-                                        <p:tgtEl>
-                                          <p:spTgt spid="4"/>
-                                        </p:tgtEl>
-                                        <p:attrNameLst>
-                                          <p:attrName>style.visibility</p:attrName>
-                                        </p:attrNameLst>
-                                      </p:cBhvr>
-                                      <p:to>
-                                        <p:strVal val="visible"/>
-                                      </p:to>
-                                    </p:set>
-                                  </p:childTnLst>
-                                </p:cTn>
-                              </p:par>
-                            </p:childTnLst>
-                          </p:cTn>
-                        </p:par>
-                      </p:childTnLst>
-                    </p:cTn>
-                  </p:par>
-                </p:childTnLst>
-              </p:cTn>
-              <p:prevCondLst>
-                <p:cond evt="onPrev" delay="0">
-                  <p:tgtEl>
-                    <p:sldTgt/>
-                  </p:tgtEl>
-                </p:cond>
-              </p:prevCondLst>
-              <p:nextCondLst>
-                <p:cond evt="onNext" delay="0">
-                  <p:tgtEl>
-                    <p:sldTgt/>
-                  </p:tgtEl>
-                </p:cond>
-              </p:nextCondLst>
-            </p:seq>
-          </p:childTnLst>
-        </p:cTn>
-      </p:par>
-    </p:tnLst>
-  </p:timing>
-</p:sld>
-</file>
-
-<file path=ppt/slides/slide50.xml><?xml version="1.0" encoding="utf-8"?>
+<file path=ppt/slides/slide51.xml><?xml version="1.0" encoding="utf-8"?>
 <p:sld xmlns:a="http://schemas.openxmlformats.org/drawingml/2006/main" xmlns:r="http://schemas.openxmlformats.org/officeDocument/2006/relationships" xmlns:p="http://schemas.openxmlformats.org/presentationml/2006/main">
   <p:cSld>
     <p:spTree>
@@ -35210,7 +36949,7 @@
 </p:sld>
 </file>
 
-<file path=ppt/slides/slide51.xml><?xml version="1.0" encoding="utf-8"?>
+<file path=ppt/slides/slide52.xml><?xml version="1.0" encoding="utf-8"?>
 <p:sld xmlns:a="http://schemas.openxmlformats.org/drawingml/2006/main" xmlns:r="http://schemas.openxmlformats.org/officeDocument/2006/relationships" xmlns:p="http://schemas.openxmlformats.org/presentationml/2006/main">
   <p:cSld>
     <p:spTree>
@@ -35799,7 +37538,7 @@
 </p:sld>
 </file>
 
-<file path=ppt/slides/slide52.xml><?xml version="1.0" encoding="utf-8"?>
+<file path=ppt/slides/slide53.xml><?xml version="1.0" encoding="utf-8"?>
 <p:sld xmlns:a="http://schemas.openxmlformats.org/drawingml/2006/main" xmlns:r="http://schemas.openxmlformats.org/officeDocument/2006/relationships" xmlns:p="http://schemas.openxmlformats.org/presentationml/2006/main">
   <p:cSld>
     <p:spTree>
@@ -36732,7 +38471,7 @@
 </p:sld>
 </file>
 
-<file path=ppt/slides/slide53.xml><?xml version="1.0" encoding="utf-8"?>
+<file path=ppt/slides/slide54.xml><?xml version="1.0" encoding="utf-8"?>
 <p:sld xmlns:a="http://schemas.openxmlformats.org/drawingml/2006/main" xmlns:r="http://schemas.openxmlformats.org/officeDocument/2006/relationships" xmlns:p="http://schemas.openxmlformats.org/presentationml/2006/main">
   <p:cSld>
     <p:spTree>
@@ -37331,7 +39070,7 @@
 </p:sld>
 </file>
 
-<file path=ppt/slides/slide54.xml><?xml version="1.0" encoding="utf-8"?>
+<file path=ppt/slides/slide55.xml><?xml version="1.0" encoding="utf-8"?>
 <p:sld xmlns:a="http://schemas.openxmlformats.org/drawingml/2006/main" xmlns:r="http://schemas.openxmlformats.org/officeDocument/2006/relationships" xmlns:p="http://schemas.openxmlformats.org/presentationml/2006/main">
   <p:cSld>
     <p:spTree>
@@ -37849,7 +39588,7 @@
 </p:sld>
 </file>
 
-<file path=ppt/slides/slide55.xml><?xml version="1.0" encoding="utf-8"?>
+<file path=ppt/slides/slide56.xml><?xml version="1.0" encoding="utf-8"?>
 <p:sld xmlns:a="http://schemas.openxmlformats.org/drawingml/2006/main" xmlns:r="http://schemas.openxmlformats.org/officeDocument/2006/relationships" xmlns:p="http://schemas.openxmlformats.org/presentationml/2006/main">
   <p:cSld>
     <p:spTree>
@@ -37872,8 +39611,8 @@
           <a:chExt cx="0" cy="0"/>
         </a:xfrm>
       </p:grpSpPr>
-      <mc:AlternateContent xmlns:mc="http://schemas.openxmlformats.org/markup-compatibility/2006">
-        <mc:Choice xmlns:a14="http://schemas.microsoft.com/office/drawing/2010/main" Requires="a14">
+      <mc:AlternateContent xmlns:mc="http://schemas.openxmlformats.org/markup-compatibility/2006" xmlns:a14="http://schemas.microsoft.com/office/drawing/2010/main">
+        <mc:Choice Requires="a14">
           <p:sp>
             <p:nvSpPr>
               <p:cNvPr id="3" name="Content Placeholder 2">
@@ -38064,13 +39803,27 @@
                 </a14:m>
                 <a:r>
                   <a:rPr lang="en-US" dirty="0"/>
-                  <a:t> hashes </a:t>
+                  <a:t> independent hashes </a:t>
                 </a:r>
               </a:p>
               <a:p>
                 <a:r>
                   <a:rPr lang="en-US" dirty="0"/>
-                  <a:t>The probability of a hash collisions with n elements filled becomes   </a:t>
+                  <a:t>The probability of a hash collisions for </a:t>
+                </a:r>
+                <a14:m>
+                  <m:oMath xmlns:m="http://schemas.openxmlformats.org/officeDocument/2006/math">
+                    <m:r>
+                      <a:rPr lang="en-US" i="1">
+                        <a:latin typeface="Cambria Math" panose="02040503050406030204" pitchFamily="18" charset="0"/>
+                      </a:rPr>
+                      <m:t>𝑘</m:t>
+                    </m:r>
+                  </m:oMath>
+                </a14:m>
+                <a:r>
+                  <a:rPr lang="en-US" dirty="0"/>
+                  <a:t> independent hashes with n elements filled becomes   </a:t>
                 </a:r>
               </a:p>
               <a:p>
@@ -38191,13 +39944,8 @@
                 </a:pPr>
                 <a:r>
                   <a:rPr lang="en-US" dirty="0"/>
-                  <a:t>More on this approach later in </a:t>
+                  <a:t>More on this approach later in the course</a:t>
                 </a:r>
-                <a:r>
-                  <a:rPr lang="en-US"/>
-                  <a:t>the course</a:t>
-                </a:r>
-                <a:endParaRPr lang="en-US" dirty="0"/>
               </a:p>
               <a:p>
                 <a:pPr marL="0" indent="0">
@@ -38214,7 +39962,7 @@
             </p:txBody>
           </p:sp>
         </mc:Choice>
-        <mc:Fallback>
+        <mc:Fallback xmlns="">
           <p:sp>
             <p:nvSpPr>
               <p:cNvPr id="3" name="Content Placeholder 2">
@@ -38324,10 +40072,249 @@
   <p:clrMapOvr>
     <a:masterClrMapping/>
   </p:clrMapOvr>
+  <p:timing>
+    <p:tnLst>
+      <p:par>
+        <p:cTn id="1" dur="indefinite" restart="never" nodeType="tmRoot">
+          <p:childTnLst>
+            <p:seq concurrent="1" nextAc="seek">
+              <p:cTn id="2" dur="indefinite" nodeType="mainSeq">
+                <p:childTnLst>
+                  <p:par>
+                    <p:cTn id="3" fill="hold">
+                      <p:stCondLst>
+                        <p:cond delay="indefinite"/>
+                      </p:stCondLst>
+                      <p:childTnLst>
+                        <p:par>
+                          <p:cTn id="4" fill="hold">
+                            <p:stCondLst>
+                              <p:cond delay="0"/>
+                            </p:stCondLst>
+                            <p:childTnLst>
+                              <p:par>
+                                <p:cTn id="5" presetID="1" presetClass="entr" presetSubtype="0" fill="hold" nodeType="clickEffect">
+                                  <p:stCondLst>
+                                    <p:cond delay="0"/>
+                                  </p:stCondLst>
+                                  <p:childTnLst>
+                                    <p:set>
+                                      <p:cBhvr>
+                                        <p:cTn id="6" dur="1" fill="hold">
+                                          <p:stCondLst>
+                                            <p:cond delay="0"/>
+                                          </p:stCondLst>
+                                        </p:cTn>
+                                        <p:tgtEl>
+                                          <p:spTgt spid="3">
+                                            <p:txEl>
+                                              <p:pRg st="3" end="3"/>
+                                            </p:txEl>
+                                          </p:spTgt>
+                                        </p:tgtEl>
+                                        <p:attrNameLst>
+                                          <p:attrName>style.visibility</p:attrName>
+                                        </p:attrNameLst>
+                                      </p:cBhvr>
+                                      <p:to>
+                                        <p:strVal val="visible"/>
+                                      </p:to>
+                                    </p:set>
+                                  </p:childTnLst>
+                                </p:cTn>
+                              </p:par>
+                            </p:childTnLst>
+                          </p:cTn>
+                        </p:par>
+                      </p:childTnLst>
+                    </p:cTn>
+                  </p:par>
+                  <p:par>
+                    <p:cTn id="7" fill="hold">
+                      <p:stCondLst>
+                        <p:cond delay="indefinite"/>
+                      </p:stCondLst>
+                      <p:childTnLst>
+                        <p:par>
+                          <p:cTn id="8" fill="hold">
+                            <p:stCondLst>
+                              <p:cond delay="0"/>
+                            </p:stCondLst>
+                            <p:childTnLst>
+                              <p:par>
+                                <p:cTn id="9" presetID="1" presetClass="entr" presetSubtype="0" fill="hold" nodeType="clickEffect">
+                                  <p:stCondLst>
+                                    <p:cond delay="0"/>
+                                  </p:stCondLst>
+                                  <p:childTnLst>
+                                    <p:set>
+                                      <p:cBhvr>
+                                        <p:cTn id="10" dur="1" fill="hold">
+                                          <p:stCondLst>
+                                            <p:cond delay="0"/>
+                                          </p:stCondLst>
+                                        </p:cTn>
+                                        <p:tgtEl>
+                                          <p:spTgt spid="3">
+                                            <p:txEl>
+                                              <p:pRg st="4" end="4"/>
+                                            </p:txEl>
+                                          </p:spTgt>
+                                        </p:tgtEl>
+                                        <p:attrNameLst>
+                                          <p:attrName>style.visibility</p:attrName>
+                                        </p:attrNameLst>
+                                      </p:cBhvr>
+                                      <p:to>
+                                        <p:strVal val="visible"/>
+                                      </p:to>
+                                    </p:set>
+                                  </p:childTnLst>
+                                </p:cTn>
+                              </p:par>
+                            </p:childTnLst>
+                          </p:cTn>
+                        </p:par>
+                      </p:childTnLst>
+                    </p:cTn>
+                  </p:par>
+                  <p:par>
+                    <p:cTn id="11" fill="hold">
+                      <p:stCondLst>
+                        <p:cond delay="indefinite"/>
+                      </p:stCondLst>
+                      <p:childTnLst>
+                        <p:par>
+                          <p:cTn id="12" fill="hold">
+                            <p:stCondLst>
+                              <p:cond delay="0"/>
+                            </p:stCondLst>
+                            <p:childTnLst>
+                              <p:par>
+                                <p:cTn id="13" presetID="1" presetClass="entr" presetSubtype="0" fill="hold" nodeType="clickEffect">
+                                  <p:stCondLst>
+                                    <p:cond delay="0"/>
+                                  </p:stCondLst>
+                                  <p:childTnLst>
+                                    <p:set>
+                                      <p:cBhvr>
+                                        <p:cTn id="14" dur="1" fill="hold">
+                                          <p:stCondLst>
+                                            <p:cond delay="0"/>
+                                          </p:stCondLst>
+                                        </p:cTn>
+                                        <p:tgtEl>
+                                          <p:spTgt spid="3">
+                                            <p:txEl>
+                                              <p:pRg st="5" end="5"/>
+                                            </p:txEl>
+                                          </p:spTgt>
+                                        </p:tgtEl>
+                                        <p:attrNameLst>
+                                          <p:attrName>style.visibility</p:attrName>
+                                        </p:attrNameLst>
+                                      </p:cBhvr>
+                                      <p:to>
+                                        <p:strVal val="visible"/>
+                                      </p:to>
+                                    </p:set>
+                                  </p:childTnLst>
+                                </p:cTn>
+                              </p:par>
+                              <p:par>
+                                <p:cTn id="15" presetID="1" presetClass="entr" presetSubtype="0" fill="hold" nodeType="withEffect">
+                                  <p:stCondLst>
+                                    <p:cond delay="0"/>
+                                  </p:stCondLst>
+                                  <p:childTnLst>
+                                    <p:set>
+                                      <p:cBhvr>
+                                        <p:cTn id="16" dur="1" fill="hold">
+                                          <p:stCondLst>
+                                            <p:cond delay="0"/>
+                                          </p:stCondLst>
+                                        </p:cTn>
+                                        <p:tgtEl>
+                                          <p:spTgt spid="3">
+                                            <p:txEl>
+                                              <p:pRg st="6" end="6"/>
+                                            </p:txEl>
+                                          </p:spTgt>
+                                        </p:tgtEl>
+                                        <p:attrNameLst>
+                                          <p:attrName>style.visibility</p:attrName>
+                                        </p:attrNameLst>
+                                      </p:cBhvr>
+                                      <p:to>
+                                        <p:strVal val="visible"/>
+                                      </p:to>
+                                    </p:set>
+                                  </p:childTnLst>
+                                </p:cTn>
+                              </p:par>
+                              <p:par>
+                                <p:cTn id="17" presetID="1" presetClass="entr" presetSubtype="0" fill="hold" nodeType="withEffect">
+                                  <p:stCondLst>
+                                    <p:cond delay="0"/>
+                                  </p:stCondLst>
+                                  <p:childTnLst>
+                                    <p:set>
+                                      <p:cBhvr>
+                                        <p:cTn id="18" dur="1" fill="hold">
+                                          <p:stCondLst>
+                                            <p:cond delay="0"/>
+                                          </p:stCondLst>
+                                        </p:cTn>
+                                        <p:tgtEl>
+                                          <p:spTgt spid="3">
+                                            <p:txEl>
+                                              <p:pRg st="7" end="7"/>
+                                            </p:txEl>
+                                          </p:spTgt>
+                                        </p:tgtEl>
+                                        <p:attrNameLst>
+                                          <p:attrName>style.visibility</p:attrName>
+                                        </p:attrNameLst>
+                                      </p:cBhvr>
+                                      <p:to>
+                                        <p:strVal val="visible"/>
+                                      </p:to>
+                                    </p:set>
+                                  </p:childTnLst>
+                                </p:cTn>
+                              </p:par>
+                            </p:childTnLst>
+                          </p:cTn>
+                        </p:par>
+                      </p:childTnLst>
+                    </p:cTn>
+                  </p:par>
+                </p:childTnLst>
+              </p:cTn>
+              <p:prevCondLst>
+                <p:cond evt="onPrev" delay="0">
+                  <p:tgtEl>
+                    <p:sldTgt/>
+                  </p:tgtEl>
+                </p:cond>
+              </p:prevCondLst>
+              <p:nextCondLst>
+                <p:cond evt="onNext" delay="0">
+                  <p:tgtEl>
+                    <p:sldTgt/>
+                  </p:tgtEl>
+                </p:cond>
+              </p:nextCondLst>
+            </p:seq>
+          </p:childTnLst>
+        </p:cTn>
+      </p:par>
+    </p:tnLst>
+  </p:timing>
 </p:sld>
 </file>
 
-<file path=ppt/slides/slide56.xml><?xml version="1.0" encoding="utf-8"?>
+<file path=ppt/slides/slide57.xml><?xml version="1.0" encoding="utf-8"?>
 <p:sld xmlns:a="http://schemas.openxmlformats.org/drawingml/2006/main" xmlns:r="http://schemas.openxmlformats.org/officeDocument/2006/relationships" xmlns:p="http://schemas.openxmlformats.org/presentationml/2006/main">
   <p:cSld>
     <p:spTree>
@@ -38393,7 +40380,7 @@
 </p:sld>
 </file>
 
-<file path=ppt/slides/slide57.xml><?xml version="1.0" encoding="utf-8"?>
+<file path=ppt/slides/slide58.xml><?xml version="1.0" encoding="utf-8"?>
 <p:sld xmlns:a="http://schemas.openxmlformats.org/drawingml/2006/main" xmlns:r="http://schemas.openxmlformats.org/officeDocument/2006/relationships" xmlns:p="http://schemas.openxmlformats.org/presentationml/2006/main">
   <p:cSld>
     <p:spTree>

--- a/slides/1_Introduction.pptx
+++ b/slides/1_Introduction.pptx
@@ -5,7 +5,7 @@
     <p:sldMasterId id="2147483648" r:id="rId1"/>
   </p:sldMasterIdLst>
   <p:notesMasterIdLst>
-    <p:notesMasterId r:id="rId60"/>
+    <p:notesMasterId r:id="rId61"/>
   </p:notesMasterIdLst>
   <p:sldIdLst>
     <p:sldId id="256" r:id="rId2"/>
@@ -37,35 +37,36 @@
     <p:sldId id="725" r:id="rId28"/>
     <p:sldId id="401" r:id="rId29"/>
     <p:sldId id="713" r:id="rId30"/>
-    <p:sldId id="387" r:id="rId31"/>
-    <p:sldId id="720" r:id="rId32"/>
-    <p:sldId id="784" r:id="rId33"/>
+    <p:sldId id="784" r:id="rId31"/>
+    <p:sldId id="387" r:id="rId32"/>
+    <p:sldId id="720" r:id="rId33"/>
     <p:sldId id="382" r:id="rId34"/>
-    <p:sldId id="357" r:id="rId35"/>
-    <p:sldId id="385" r:id="rId36"/>
-    <p:sldId id="359" r:id="rId37"/>
-    <p:sldId id="727" r:id="rId38"/>
-    <p:sldId id="386" r:id="rId39"/>
-    <p:sldId id="714" r:id="rId40"/>
-    <p:sldId id="360" r:id="rId41"/>
-    <p:sldId id="731" r:id="rId42"/>
-    <p:sldId id="374" r:id="rId43"/>
-    <p:sldId id="375" r:id="rId44"/>
-    <p:sldId id="738" r:id="rId45"/>
-    <p:sldId id="377" r:id="rId46"/>
-    <p:sldId id="729" r:id="rId47"/>
-    <p:sldId id="730" r:id="rId48"/>
-    <p:sldId id="739" r:id="rId49"/>
-    <p:sldId id="376" r:id="rId50"/>
-    <p:sldId id="728" r:id="rId51"/>
-    <p:sldId id="379" r:id="rId52"/>
-    <p:sldId id="380" r:id="rId53"/>
-    <p:sldId id="742" r:id="rId54"/>
-    <p:sldId id="743" r:id="rId55"/>
-    <p:sldId id="744" r:id="rId56"/>
-    <p:sldId id="785" r:id="rId57"/>
-    <p:sldId id="740" r:id="rId58"/>
-    <p:sldId id="384" r:id="rId59"/>
+    <p:sldId id="787" r:id="rId35"/>
+    <p:sldId id="357" r:id="rId36"/>
+    <p:sldId id="385" r:id="rId37"/>
+    <p:sldId id="359" r:id="rId38"/>
+    <p:sldId id="727" r:id="rId39"/>
+    <p:sldId id="386" r:id="rId40"/>
+    <p:sldId id="714" r:id="rId41"/>
+    <p:sldId id="360" r:id="rId42"/>
+    <p:sldId id="731" r:id="rId43"/>
+    <p:sldId id="374" r:id="rId44"/>
+    <p:sldId id="375" r:id="rId45"/>
+    <p:sldId id="738" r:id="rId46"/>
+    <p:sldId id="377" r:id="rId47"/>
+    <p:sldId id="729" r:id="rId48"/>
+    <p:sldId id="730" r:id="rId49"/>
+    <p:sldId id="739" r:id="rId50"/>
+    <p:sldId id="376" r:id="rId51"/>
+    <p:sldId id="728" r:id="rId52"/>
+    <p:sldId id="379" r:id="rId53"/>
+    <p:sldId id="380" r:id="rId54"/>
+    <p:sldId id="742" r:id="rId55"/>
+    <p:sldId id="743" r:id="rId56"/>
+    <p:sldId id="744" r:id="rId57"/>
+    <p:sldId id="785" r:id="rId58"/>
+    <p:sldId id="740" r:id="rId59"/>
+    <p:sldId id="384" r:id="rId60"/>
   </p:sldIdLst>
   <p:sldSz cx="12192000" cy="6858000"/>
   <p:notesSz cx="6858000" cy="9144000"/>
@@ -16181,62 +16182,42 @@
             </a:r>
             <a:r>
               <a:rPr lang="en-US" dirty="0"/>
-              <a:t>, Tatyana Boland: </a:t>
-            </a:r>
-            <a:r>
-              <a:rPr lang="en-US" dirty="0">
-                <a:latin typeface="Google Sans"/>
-              </a:rPr>
-              <a:t>tab840 at </a:t>
-            </a:r>
-            <a:r>
-              <a:rPr lang="en-US" b="0" i="0" dirty="0">
-                <a:effectLst/>
-                <a:latin typeface="Google Sans"/>
-              </a:rPr>
-              <a:t>g dot Harvard dot </a:t>
-            </a:r>
-            <a:r>
-              <a:rPr lang="en-US" b="0" i="0" dirty="0" err="1">
-                <a:effectLst/>
-                <a:latin typeface="Google Sans"/>
-              </a:rPr>
+              <a:t>, Jacqeline Hardy: </a:t>
+            </a:r>
+            <a:r>
+              <a:rPr lang="en-US" dirty="0" err="1"/>
+              <a:t>jacquelinehardy</a:t>
+            </a:r>
+            <a:r>
+              <a:rPr lang="en-US" dirty="0"/>
+              <a:t> at g dot </a:t>
+            </a:r>
+            <a:r>
+              <a:rPr lang="en-US" dirty="0" err="1"/>
+              <a:t>harvard</a:t>
+            </a:r>
+            <a:r>
+              <a:rPr lang="en-US" dirty="0"/>
+              <a:t> dot </a:t>
+            </a:r>
+            <a:r>
+              <a:rPr lang="en-US" dirty="0" err="1"/>
               <a:t>edu</a:t>
             </a:r>
             <a:r>
-              <a:rPr lang="en-US" dirty="0">
-                <a:latin typeface="Google Sans"/>
-              </a:rPr>
-              <a:t>, or </a:t>
-            </a:r>
-            <a:r>
-              <a:rPr lang="en-US" dirty="0" err="1">
-                <a:latin typeface="Google Sans"/>
-              </a:rPr>
-              <a:t>Waree</a:t>
-            </a:r>
-            <a:r>
-              <a:rPr lang="en-US" dirty="0">
-                <a:latin typeface="Google Sans"/>
-              </a:rPr>
-              <a:t> </a:t>
-            </a:r>
-            <a:r>
-              <a:rPr lang="en-US" dirty="0" err="1">
-                <a:latin typeface="Google Sans"/>
-              </a:rPr>
-              <a:t>Porprommart</a:t>
-            </a:r>
-            <a:r>
-              <a:rPr lang="en-US" dirty="0">
-                <a:latin typeface="Google Sans"/>
-              </a:rPr>
-              <a:t>: wap185 at g dot Harvard dot </a:t>
-            </a:r>
-            <a:r>
-              <a:rPr lang="en-US" dirty="0" err="1">
-                <a:latin typeface="Google Sans"/>
-              </a:rPr>
+              <a:rPr lang="en-US" dirty="0"/>
+              <a:t>, Eric Trucksess: ert713 at g dot </a:t>
+            </a:r>
+            <a:r>
+              <a:rPr lang="en-US" dirty="0" err="1"/>
+              <a:t>harvard</a:t>
+            </a:r>
+            <a:r>
+              <a:rPr lang="en-US" dirty="0"/>
+              <a:t> dot </a:t>
+            </a:r>
+            <a:r>
+              <a:rPr lang="en-US" dirty="0" err="1"/>
               <a:t>edu</a:t>
             </a:r>
             <a:endParaRPr lang="en-US" b="0" i="0" dirty="0">
@@ -18025,6 +18006,1143 @@
   <p:cSld>
     <p:spTree>
       <p:nvGrpSpPr>
+        <p:cNvPr id="1" name="">
+          <a:extLst>
+            <a:ext uri="{FF2B5EF4-FFF2-40B4-BE49-F238E27FC236}">
+              <a16:creationId xmlns:a16="http://schemas.microsoft.com/office/drawing/2014/main" id="{ED7A9242-6F04-0255-B6E4-003EE805CF99}"/>
+            </a:ext>
+          </a:extLst>
+        </p:cNvPr>
+        <p:cNvGrpSpPr/>
+        <p:nvPr/>
+      </p:nvGrpSpPr>
+      <p:grpSpPr>
+        <a:xfrm>
+          <a:off x="0" y="0"/>
+          <a:ext cx="0" cy="0"/>
+          <a:chOff x="0" y="0"/>
+          <a:chExt cx="0" cy="0"/>
+        </a:xfrm>
+      </p:grpSpPr>
+      <p:sp>
+        <p:nvSpPr>
+          <p:cNvPr id="2" name="Title 1">
+            <a:extLst>
+              <a:ext uri="{FF2B5EF4-FFF2-40B4-BE49-F238E27FC236}">
+                <a16:creationId xmlns:a16="http://schemas.microsoft.com/office/drawing/2014/main" id="{97C0B4EF-F7E3-7E82-AE6D-66E8ED303FDB}"/>
+              </a:ext>
+            </a:extLst>
+          </p:cNvPr>
+          <p:cNvSpPr>
+            <a:spLocks noGrp="1"/>
+          </p:cNvSpPr>
+          <p:nvPr>
+            <p:ph type="title"/>
+          </p:nvPr>
+        </p:nvSpPr>
+        <p:spPr>
+          <a:xfrm>
+            <a:off x="916187" y="249623"/>
+            <a:ext cx="10515600" cy="662230"/>
+          </a:xfrm>
+        </p:spPr>
+        <p:txBody>
+          <a:bodyPr>
+            <a:normAutofit fontScale="90000"/>
+          </a:bodyPr>
+          <a:lstStyle/>
+          <a:p>
+            <a:r>
+              <a:rPr lang="en-US" sz="4900" dirty="0">
+                <a:latin typeface="+mn-lt"/>
+              </a:rPr>
+              <a:t>Main topics in this course</a:t>
+            </a:r>
+            <a:br>
+              <a:rPr lang="en-US" sz="4000" dirty="0">
+                <a:latin typeface="+mn-lt"/>
+              </a:rPr>
+            </a:br>
+            <a:endParaRPr lang="en-US" sz="4000" dirty="0">
+              <a:latin typeface="+mn-lt"/>
+            </a:endParaRPr>
+          </a:p>
+        </p:txBody>
+      </p:sp>
+      <p:sp>
+        <p:nvSpPr>
+          <p:cNvPr id="3" name="Left Brace 2">
+            <a:extLst>
+              <a:ext uri="{FF2B5EF4-FFF2-40B4-BE49-F238E27FC236}">
+                <a16:creationId xmlns:a16="http://schemas.microsoft.com/office/drawing/2014/main" id="{B43E0B5E-B811-4BBC-CEDF-97FC2AAC1766}"/>
+              </a:ext>
+            </a:extLst>
+          </p:cNvPr>
+          <p:cNvSpPr/>
+          <p:nvPr/>
+        </p:nvSpPr>
+        <p:spPr>
+          <a:xfrm>
+            <a:off x="756889" y="1964356"/>
+            <a:ext cx="225209" cy="1273261"/>
+          </a:xfrm>
+          <a:prstGeom prst="leftBrace">
+            <a:avLst/>
+          </a:prstGeom>
+          <a:ln w="19050">
+            <a:solidFill>
+              <a:schemeClr val="tx1"/>
+            </a:solidFill>
+          </a:ln>
+        </p:spPr>
+        <p:style>
+          <a:lnRef idx="1">
+            <a:schemeClr val="accent1"/>
+          </a:lnRef>
+          <a:fillRef idx="0">
+            <a:schemeClr val="accent1"/>
+          </a:fillRef>
+          <a:effectRef idx="0">
+            <a:schemeClr val="accent1"/>
+          </a:effectRef>
+          <a:fontRef idx="minor">
+            <a:schemeClr val="tx1"/>
+          </a:fontRef>
+        </p:style>
+        <p:txBody>
+          <a:bodyPr rtlCol="0" anchor="ctr"/>
+          <a:lstStyle/>
+          <a:p>
+            <a:pPr algn="ctr"/>
+            <a:endParaRPr lang="en-US"/>
+          </a:p>
+        </p:txBody>
+      </p:sp>
+      <p:sp>
+        <p:nvSpPr>
+          <p:cNvPr id="4" name="TextBox 3">
+            <a:extLst>
+              <a:ext uri="{FF2B5EF4-FFF2-40B4-BE49-F238E27FC236}">
+                <a16:creationId xmlns:a16="http://schemas.microsoft.com/office/drawing/2014/main" id="{77BB0425-4708-2E61-70FB-876C788A79E2}"/>
+              </a:ext>
+            </a:extLst>
+          </p:cNvPr>
+          <p:cNvSpPr txBox="1"/>
+          <p:nvPr/>
+        </p:nvSpPr>
+        <p:spPr>
+          <a:xfrm rot="16200000">
+            <a:off x="-238228" y="2251765"/>
+            <a:ext cx="1571596" cy="400110"/>
+          </a:xfrm>
+          <a:prstGeom prst="rect">
+            <a:avLst/>
+          </a:prstGeom>
+          <a:noFill/>
+        </p:spPr>
+        <p:txBody>
+          <a:bodyPr wrap="square" rtlCol="0">
+            <a:spAutoFit/>
+          </a:bodyPr>
+          <a:lstStyle/>
+          <a:p>
+            <a:pPr algn="ctr"/>
+            <a:r>
+              <a:rPr lang="en-US" sz="2000" dirty="0"/>
+              <a:t>Foundations </a:t>
+            </a:r>
+          </a:p>
+        </p:txBody>
+      </p:sp>
+      <p:sp>
+        <p:nvSpPr>
+          <p:cNvPr id="5" name="Rectangle 4">
+            <a:extLst>
+              <a:ext uri="{FF2B5EF4-FFF2-40B4-BE49-F238E27FC236}">
+                <a16:creationId xmlns:a16="http://schemas.microsoft.com/office/drawing/2014/main" id="{DAA42CDB-2EBC-28B2-6456-04829EC7EF48}"/>
+              </a:ext>
+            </a:extLst>
+          </p:cNvPr>
+          <p:cNvSpPr/>
+          <p:nvPr/>
+        </p:nvSpPr>
+        <p:spPr>
+          <a:xfrm>
+            <a:off x="1259812" y="1983695"/>
+            <a:ext cx="1951346" cy="1253922"/>
+          </a:xfrm>
+          <a:prstGeom prst="rect">
+            <a:avLst/>
+          </a:prstGeom>
+          <a:noFill/>
+          <a:ln w="38100">
+            <a:solidFill>
+              <a:srgbClr val="C00000"/>
+            </a:solidFill>
+          </a:ln>
+        </p:spPr>
+        <p:style>
+          <a:lnRef idx="2">
+            <a:schemeClr val="accent1">
+              <a:shade val="15000"/>
+            </a:schemeClr>
+          </a:lnRef>
+          <a:fillRef idx="1">
+            <a:schemeClr val="accent1"/>
+          </a:fillRef>
+          <a:effectRef idx="0">
+            <a:schemeClr val="accent1"/>
+          </a:effectRef>
+          <a:fontRef idx="minor">
+            <a:schemeClr val="lt1"/>
+          </a:fontRef>
+        </p:style>
+        <p:txBody>
+          <a:bodyPr rtlCol="0" anchor="ctr"/>
+          <a:lstStyle/>
+          <a:p>
+            <a:pPr algn="ctr"/>
+            <a:r>
+              <a:rPr lang="en-US" sz="2000" dirty="0">
+                <a:solidFill>
+                  <a:schemeClr val="tx1"/>
+                </a:solidFill>
+              </a:rPr>
+              <a:t>1. Hashing and K-V pair management </a:t>
+            </a:r>
+          </a:p>
+        </p:txBody>
+      </p:sp>
+      <p:sp>
+        <p:nvSpPr>
+          <p:cNvPr id="6" name="Rectangle 5">
+            <a:extLst>
+              <a:ext uri="{FF2B5EF4-FFF2-40B4-BE49-F238E27FC236}">
+                <a16:creationId xmlns:a16="http://schemas.microsoft.com/office/drawing/2014/main" id="{F5C7F060-78DB-AC42-6BFD-05BD50198440}"/>
+              </a:ext>
+            </a:extLst>
+          </p:cNvPr>
+          <p:cNvSpPr/>
+          <p:nvPr/>
+        </p:nvSpPr>
+        <p:spPr>
+          <a:xfrm>
+            <a:off x="3740233" y="2021536"/>
+            <a:ext cx="2157426" cy="1178239"/>
+          </a:xfrm>
+          <a:prstGeom prst="rect">
+            <a:avLst/>
+          </a:prstGeom>
+          <a:noFill/>
+          <a:ln w="19050">
+            <a:solidFill>
+              <a:schemeClr val="tx1"/>
+            </a:solidFill>
+          </a:ln>
+        </p:spPr>
+        <p:style>
+          <a:lnRef idx="2">
+            <a:schemeClr val="accent1">
+              <a:shade val="15000"/>
+            </a:schemeClr>
+          </a:lnRef>
+          <a:fillRef idx="1">
+            <a:schemeClr val="accent1"/>
+          </a:fillRef>
+          <a:effectRef idx="0">
+            <a:schemeClr val="accent1"/>
+          </a:effectRef>
+          <a:fontRef idx="minor">
+            <a:schemeClr val="lt1"/>
+          </a:fontRef>
+        </p:style>
+        <p:txBody>
+          <a:bodyPr rtlCol="0" anchor="ctr"/>
+          <a:lstStyle/>
+          <a:p>
+            <a:pPr algn="ctr"/>
+            <a:r>
+              <a:rPr lang="en-US" sz="2000" dirty="0">
+                <a:solidFill>
+                  <a:schemeClr val="tx1"/>
+                </a:solidFill>
+              </a:rPr>
+              <a:t>2. Distance and Similarity Metrics</a:t>
+            </a:r>
+          </a:p>
+        </p:txBody>
+      </p:sp>
+      <p:sp>
+        <p:nvSpPr>
+          <p:cNvPr id="7" name="Rectangle 6">
+            <a:extLst>
+              <a:ext uri="{FF2B5EF4-FFF2-40B4-BE49-F238E27FC236}">
+                <a16:creationId xmlns:a16="http://schemas.microsoft.com/office/drawing/2014/main" id="{F20B3888-4A09-E889-C7DE-5ECE32C17693}"/>
+              </a:ext>
+            </a:extLst>
+          </p:cNvPr>
+          <p:cNvSpPr/>
+          <p:nvPr/>
+        </p:nvSpPr>
+        <p:spPr>
+          <a:xfrm>
+            <a:off x="6408020" y="2037908"/>
+            <a:ext cx="2058805" cy="1213337"/>
+          </a:xfrm>
+          <a:prstGeom prst="rect">
+            <a:avLst/>
+          </a:prstGeom>
+          <a:noFill/>
+          <a:ln w="19050">
+            <a:solidFill>
+              <a:schemeClr val="tx1"/>
+            </a:solidFill>
+          </a:ln>
+        </p:spPr>
+        <p:style>
+          <a:lnRef idx="2">
+            <a:schemeClr val="accent1">
+              <a:shade val="15000"/>
+            </a:schemeClr>
+          </a:lnRef>
+          <a:fillRef idx="1">
+            <a:schemeClr val="accent1"/>
+          </a:fillRef>
+          <a:effectRef idx="0">
+            <a:schemeClr val="accent1"/>
+          </a:effectRef>
+          <a:fontRef idx="minor">
+            <a:schemeClr val="lt1"/>
+          </a:fontRef>
+        </p:style>
+        <p:txBody>
+          <a:bodyPr rtlCol="0" anchor="ctr"/>
+          <a:lstStyle/>
+          <a:p>
+            <a:pPr algn="ctr"/>
+            <a:r>
+              <a:rPr lang="en-US" sz="2000" dirty="0">
+                <a:solidFill>
+                  <a:schemeClr val="tx1"/>
+                </a:solidFill>
+              </a:rPr>
+              <a:t>3. Graph Algorithms</a:t>
+            </a:r>
+          </a:p>
+        </p:txBody>
+      </p:sp>
+      <p:sp>
+        <p:nvSpPr>
+          <p:cNvPr id="8" name="Rectangle 7">
+            <a:extLst>
+              <a:ext uri="{FF2B5EF4-FFF2-40B4-BE49-F238E27FC236}">
+                <a16:creationId xmlns:a16="http://schemas.microsoft.com/office/drawing/2014/main" id="{A234FC6E-068F-82BA-D948-0872902BF117}"/>
+              </a:ext>
+            </a:extLst>
+          </p:cNvPr>
+          <p:cNvSpPr/>
+          <p:nvPr/>
+        </p:nvSpPr>
+        <p:spPr>
+          <a:xfrm>
+            <a:off x="1215334" y="3591320"/>
+            <a:ext cx="2085982" cy="1074244"/>
+          </a:xfrm>
+          <a:prstGeom prst="rect">
+            <a:avLst/>
+          </a:prstGeom>
+          <a:noFill/>
+          <a:ln w="19050">
+            <a:solidFill>
+              <a:schemeClr val="tx1"/>
+            </a:solidFill>
+          </a:ln>
+        </p:spPr>
+        <p:style>
+          <a:lnRef idx="2">
+            <a:schemeClr val="accent1">
+              <a:shade val="15000"/>
+            </a:schemeClr>
+          </a:lnRef>
+          <a:fillRef idx="1">
+            <a:schemeClr val="accent1"/>
+          </a:fillRef>
+          <a:effectRef idx="0">
+            <a:schemeClr val="accent1"/>
+          </a:effectRef>
+          <a:fontRef idx="minor">
+            <a:schemeClr val="lt1"/>
+          </a:fontRef>
+        </p:style>
+        <p:txBody>
+          <a:bodyPr rtlCol="0" anchor="ctr"/>
+          <a:lstStyle/>
+          <a:p>
+            <a:pPr algn="ctr"/>
+            <a:r>
+              <a:rPr lang="en-US" sz="2000" dirty="0">
+                <a:solidFill>
+                  <a:schemeClr val="tx1"/>
+                </a:solidFill>
+              </a:rPr>
+              <a:t>2. Dimensionality Reduction</a:t>
+            </a:r>
+          </a:p>
+        </p:txBody>
+      </p:sp>
+      <p:sp>
+        <p:nvSpPr>
+          <p:cNvPr id="10" name="Left Brace 9">
+            <a:extLst>
+              <a:ext uri="{FF2B5EF4-FFF2-40B4-BE49-F238E27FC236}">
+                <a16:creationId xmlns:a16="http://schemas.microsoft.com/office/drawing/2014/main" id="{6B807C0C-B6B7-55FC-4A73-937C1A517C09}"/>
+              </a:ext>
+            </a:extLst>
+          </p:cNvPr>
+          <p:cNvSpPr/>
+          <p:nvPr/>
+        </p:nvSpPr>
+        <p:spPr>
+          <a:xfrm>
+            <a:off x="865089" y="3571535"/>
+            <a:ext cx="172578" cy="1094029"/>
+          </a:xfrm>
+          <a:prstGeom prst="leftBrace">
+            <a:avLst/>
+          </a:prstGeom>
+          <a:ln w="19050">
+            <a:solidFill>
+              <a:schemeClr val="tx1"/>
+            </a:solidFill>
+          </a:ln>
+        </p:spPr>
+        <p:style>
+          <a:lnRef idx="1">
+            <a:schemeClr val="accent1"/>
+          </a:lnRef>
+          <a:fillRef idx="0">
+            <a:schemeClr val="accent1"/>
+          </a:fillRef>
+          <a:effectRef idx="0">
+            <a:schemeClr val="accent1"/>
+          </a:effectRef>
+          <a:fontRef idx="minor">
+            <a:schemeClr val="tx1"/>
+          </a:fontRef>
+        </p:style>
+        <p:txBody>
+          <a:bodyPr rtlCol="0" anchor="ctr"/>
+          <a:lstStyle/>
+          <a:p>
+            <a:pPr algn="ctr"/>
+            <a:endParaRPr lang="en-US"/>
+          </a:p>
+        </p:txBody>
+      </p:sp>
+      <p:sp>
+        <p:nvSpPr>
+          <p:cNvPr id="11" name="TextBox 10">
+            <a:extLst>
+              <a:ext uri="{FF2B5EF4-FFF2-40B4-BE49-F238E27FC236}">
+                <a16:creationId xmlns:a16="http://schemas.microsoft.com/office/drawing/2014/main" id="{CD0513D5-3561-EC84-E71B-4706879A90A1}"/>
+              </a:ext>
+            </a:extLst>
+          </p:cNvPr>
+          <p:cNvSpPr txBox="1"/>
+          <p:nvPr/>
+        </p:nvSpPr>
+        <p:spPr>
+          <a:xfrm rot="16200000">
+            <a:off x="-286998" y="3724841"/>
+            <a:ext cx="1571596" cy="707886"/>
+          </a:xfrm>
+          <a:prstGeom prst="rect">
+            <a:avLst/>
+          </a:prstGeom>
+          <a:noFill/>
+        </p:spPr>
+        <p:txBody>
+          <a:bodyPr wrap="square" rtlCol="0">
+            <a:spAutoFit/>
+          </a:bodyPr>
+          <a:lstStyle/>
+          <a:p>
+            <a:pPr algn="ctr"/>
+            <a:r>
+              <a:rPr lang="en-US" sz="2000" dirty="0"/>
+              <a:t>Core Algorithms</a:t>
+            </a:r>
+          </a:p>
+        </p:txBody>
+      </p:sp>
+      <p:sp>
+        <p:nvSpPr>
+          <p:cNvPr id="12" name="Rectangle 11">
+            <a:extLst>
+              <a:ext uri="{FF2B5EF4-FFF2-40B4-BE49-F238E27FC236}">
+                <a16:creationId xmlns:a16="http://schemas.microsoft.com/office/drawing/2014/main" id="{B042D63B-E913-3364-5865-54C574ED22CD}"/>
+              </a:ext>
+            </a:extLst>
+          </p:cNvPr>
+          <p:cNvSpPr/>
+          <p:nvPr/>
+        </p:nvSpPr>
+        <p:spPr>
+          <a:xfrm>
+            <a:off x="1280175" y="5154275"/>
+            <a:ext cx="1961804" cy="1264023"/>
+          </a:xfrm>
+          <a:prstGeom prst="rect">
+            <a:avLst/>
+          </a:prstGeom>
+          <a:noFill/>
+          <a:ln w="19050">
+            <a:solidFill>
+              <a:schemeClr val="tx1"/>
+            </a:solidFill>
+          </a:ln>
+        </p:spPr>
+        <p:style>
+          <a:lnRef idx="2">
+            <a:schemeClr val="accent1">
+              <a:shade val="15000"/>
+            </a:schemeClr>
+          </a:lnRef>
+          <a:fillRef idx="1">
+            <a:schemeClr val="accent1"/>
+          </a:fillRef>
+          <a:effectRef idx="0">
+            <a:schemeClr val="accent1"/>
+          </a:effectRef>
+          <a:fontRef idx="minor">
+            <a:schemeClr val="lt1"/>
+          </a:fontRef>
+        </p:style>
+        <p:txBody>
+          <a:bodyPr rtlCol="0" anchor="ctr"/>
+          <a:lstStyle/>
+          <a:p>
+            <a:pPr algn="ctr"/>
+            <a:r>
+              <a:rPr lang="en-US" sz="2000" dirty="0">
+                <a:solidFill>
+                  <a:schemeClr val="tx1"/>
+                </a:solidFill>
+              </a:rPr>
+              <a:t>3. Social Network Analysis</a:t>
+            </a:r>
+          </a:p>
+        </p:txBody>
+      </p:sp>
+      <p:sp>
+        <p:nvSpPr>
+          <p:cNvPr id="14" name="Left Brace 13">
+            <a:extLst>
+              <a:ext uri="{FF2B5EF4-FFF2-40B4-BE49-F238E27FC236}">
+                <a16:creationId xmlns:a16="http://schemas.microsoft.com/office/drawing/2014/main" id="{35E5DEDA-5FFD-FC06-5888-EB758D78C155}"/>
+              </a:ext>
+            </a:extLst>
+          </p:cNvPr>
+          <p:cNvSpPr/>
+          <p:nvPr/>
+        </p:nvSpPr>
+        <p:spPr>
+          <a:xfrm>
+            <a:off x="858563" y="5154275"/>
+            <a:ext cx="164275" cy="1264024"/>
+          </a:xfrm>
+          <a:prstGeom prst="leftBrace">
+            <a:avLst/>
+          </a:prstGeom>
+          <a:ln w="19050">
+            <a:solidFill>
+              <a:schemeClr val="tx1"/>
+            </a:solidFill>
+          </a:ln>
+        </p:spPr>
+        <p:style>
+          <a:lnRef idx="1">
+            <a:schemeClr val="accent1"/>
+          </a:lnRef>
+          <a:fillRef idx="0">
+            <a:schemeClr val="accent1"/>
+          </a:fillRef>
+          <a:effectRef idx="0">
+            <a:schemeClr val="accent1"/>
+          </a:effectRef>
+          <a:fontRef idx="minor">
+            <a:schemeClr val="tx1"/>
+          </a:fontRef>
+        </p:style>
+        <p:txBody>
+          <a:bodyPr rtlCol="0" anchor="ctr"/>
+          <a:lstStyle/>
+          <a:p>
+            <a:pPr algn="ctr"/>
+            <a:endParaRPr lang="en-US"/>
+          </a:p>
+        </p:txBody>
+      </p:sp>
+      <p:sp>
+        <p:nvSpPr>
+          <p:cNvPr id="15" name="TextBox 14">
+            <a:extLst>
+              <a:ext uri="{FF2B5EF4-FFF2-40B4-BE49-F238E27FC236}">
+                <a16:creationId xmlns:a16="http://schemas.microsoft.com/office/drawing/2014/main" id="{3061D0C7-FA6D-00D7-CF2A-B875D7CF029B}"/>
+              </a:ext>
+            </a:extLst>
+          </p:cNvPr>
+          <p:cNvSpPr txBox="1"/>
+          <p:nvPr/>
+        </p:nvSpPr>
+        <p:spPr>
+          <a:xfrm rot="16200000">
+            <a:off x="-322189" y="5405146"/>
+            <a:ext cx="1571596" cy="707886"/>
+          </a:xfrm>
+          <a:prstGeom prst="rect">
+            <a:avLst/>
+          </a:prstGeom>
+          <a:noFill/>
+        </p:spPr>
+        <p:txBody>
+          <a:bodyPr wrap="square" rtlCol="0">
+            <a:spAutoFit/>
+          </a:bodyPr>
+          <a:lstStyle/>
+          <a:p>
+            <a:pPr algn="ctr"/>
+            <a:r>
+              <a:rPr lang="en-US" sz="2000" dirty="0"/>
+              <a:t>Taks </a:t>
+            </a:r>
+            <a:r>
+              <a:rPr lang="en-US" sz="2000"/>
+              <a:t>Speific </a:t>
+            </a:r>
+            <a:r>
+              <a:rPr lang="en-US" sz="2000" dirty="0"/>
+              <a:t>Algorithms</a:t>
+            </a:r>
+          </a:p>
+        </p:txBody>
+      </p:sp>
+      <p:sp>
+        <p:nvSpPr>
+          <p:cNvPr id="16" name="Rectangle 15">
+            <a:extLst>
+              <a:ext uri="{FF2B5EF4-FFF2-40B4-BE49-F238E27FC236}">
+                <a16:creationId xmlns:a16="http://schemas.microsoft.com/office/drawing/2014/main" id="{8BCB2792-FBF9-D76F-A378-7E6596D54E0F}"/>
+              </a:ext>
+            </a:extLst>
+          </p:cNvPr>
+          <p:cNvSpPr/>
+          <p:nvPr/>
+        </p:nvSpPr>
+        <p:spPr>
+          <a:xfrm>
+            <a:off x="3811677" y="3631085"/>
+            <a:ext cx="2085982" cy="1094029"/>
+          </a:xfrm>
+          <a:prstGeom prst="rect">
+            <a:avLst/>
+          </a:prstGeom>
+          <a:noFill/>
+          <a:ln w="19050">
+            <a:solidFill>
+              <a:schemeClr val="tx1"/>
+            </a:solidFill>
+          </a:ln>
+        </p:spPr>
+        <p:style>
+          <a:lnRef idx="2">
+            <a:schemeClr val="accent1">
+              <a:shade val="15000"/>
+            </a:schemeClr>
+          </a:lnRef>
+          <a:fillRef idx="1">
+            <a:schemeClr val="accent1"/>
+          </a:fillRef>
+          <a:effectRef idx="0">
+            <a:schemeClr val="accent1"/>
+          </a:effectRef>
+          <a:fontRef idx="minor">
+            <a:schemeClr val="lt1"/>
+          </a:fontRef>
+        </p:style>
+        <p:txBody>
+          <a:bodyPr rtlCol="0" anchor="ctr"/>
+          <a:lstStyle/>
+          <a:p>
+            <a:pPr algn="ctr"/>
+            <a:r>
+              <a:rPr lang="en-US" sz="2000" dirty="0">
+                <a:solidFill>
+                  <a:schemeClr val="tx1"/>
+                </a:solidFill>
+              </a:rPr>
+              <a:t>5. Similarity Search and NN Algorithms</a:t>
+            </a:r>
+          </a:p>
+        </p:txBody>
+      </p:sp>
+      <p:sp>
+        <p:nvSpPr>
+          <p:cNvPr id="17" name="Rectangle 16">
+            <a:extLst>
+              <a:ext uri="{FF2B5EF4-FFF2-40B4-BE49-F238E27FC236}">
+                <a16:creationId xmlns:a16="http://schemas.microsoft.com/office/drawing/2014/main" id="{9A8CAD2D-EC71-A5F3-683F-41BF65DE958F}"/>
+              </a:ext>
+            </a:extLst>
+          </p:cNvPr>
+          <p:cNvSpPr/>
+          <p:nvPr/>
+        </p:nvSpPr>
+        <p:spPr>
+          <a:xfrm>
+            <a:off x="6408020" y="3640978"/>
+            <a:ext cx="2038966" cy="1123564"/>
+          </a:xfrm>
+          <a:prstGeom prst="rect">
+            <a:avLst/>
+          </a:prstGeom>
+          <a:noFill/>
+          <a:ln w="19050">
+            <a:solidFill>
+              <a:schemeClr val="tx1"/>
+            </a:solidFill>
+          </a:ln>
+        </p:spPr>
+        <p:style>
+          <a:lnRef idx="2">
+            <a:schemeClr val="accent1">
+              <a:shade val="15000"/>
+            </a:schemeClr>
+          </a:lnRef>
+          <a:fillRef idx="1">
+            <a:schemeClr val="accent1"/>
+          </a:fillRef>
+          <a:effectRef idx="0">
+            <a:schemeClr val="accent1"/>
+          </a:effectRef>
+          <a:fontRef idx="minor">
+            <a:schemeClr val="lt1"/>
+          </a:fontRef>
+        </p:style>
+        <p:txBody>
+          <a:bodyPr rtlCol="0" anchor="ctr"/>
+          <a:lstStyle/>
+          <a:p>
+            <a:pPr algn="ctr"/>
+            <a:r>
+              <a:rPr lang="en-US" sz="2000" dirty="0">
+                <a:solidFill>
+                  <a:schemeClr val="tx1"/>
+                </a:solidFill>
+              </a:rPr>
+              <a:t>4. Online Algorithms</a:t>
+            </a:r>
+          </a:p>
+        </p:txBody>
+      </p:sp>
+      <p:sp>
+        <p:nvSpPr>
+          <p:cNvPr id="18" name="Rectangle 17">
+            <a:extLst>
+              <a:ext uri="{FF2B5EF4-FFF2-40B4-BE49-F238E27FC236}">
+                <a16:creationId xmlns:a16="http://schemas.microsoft.com/office/drawing/2014/main" id="{67EB3589-9BBE-D38D-C09A-C7A36757F4E1}"/>
+              </a:ext>
+            </a:extLst>
+          </p:cNvPr>
+          <p:cNvSpPr/>
+          <p:nvPr/>
+        </p:nvSpPr>
+        <p:spPr>
+          <a:xfrm>
+            <a:off x="8985680" y="5155489"/>
+            <a:ext cx="1894527" cy="1262809"/>
+          </a:xfrm>
+          <a:prstGeom prst="rect">
+            <a:avLst/>
+          </a:prstGeom>
+          <a:noFill/>
+          <a:ln w="19050">
+            <a:solidFill>
+              <a:schemeClr val="tx1"/>
+            </a:solidFill>
+          </a:ln>
+        </p:spPr>
+        <p:style>
+          <a:lnRef idx="2">
+            <a:schemeClr val="accent1">
+              <a:shade val="15000"/>
+            </a:schemeClr>
+          </a:lnRef>
+          <a:fillRef idx="1">
+            <a:schemeClr val="accent1"/>
+          </a:fillRef>
+          <a:effectRef idx="0">
+            <a:schemeClr val="accent1"/>
+          </a:effectRef>
+          <a:fontRef idx="minor">
+            <a:schemeClr val="lt1"/>
+          </a:fontRef>
+        </p:style>
+        <p:txBody>
+          <a:bodyPr rtlCol="0" anchor="ctr"/>
+          <a:lstStyle/>
+          <a:p>
+            <a:pPr algn="ctr"/>
+            <a:r>
+              <a:rPr lang="en-US" sz="2000" dirty="0">
+                <a:solidFill>
+                  <a:schemeClr val="tx1"/>
+                </a:solidFill>
+              </a:rPr>
+              <a:t>8. Clustering Algorithms</a:t>
+            </a:r>
+          </a:p>
+        </p:txBody>
+      </p:sp>
+      <p:sp>
+        <p:nvSpPr>
+          <p:cNvPr id="20" name="Rectangle 19">
+            <a:extLst>
+              <a:ext uri="{FF2B5EF4-FFF2-40B4-BE49-F238E27FC236}">
+                <a16:creationId xmlns:a16="http://schemas.microsoft.com/office/drawing/2014/main" id="{5C5EBFDB-140B-9B88-CE63-77419A11C6E4}"/>
+              </a:ext>
+            </a:extLst>
+          </p:cNvPr>
+          <p:cNvSpPr/>
+          <p:nvPr/>
+        </p:nvSpPr>
+        <p:spPr>
+          <a:xfrm>
+            <a:off x="6470354" y="5154275"/>
+            <a:ext cx="2016833" cy="1245689"/>
+          </a:xfrm>
+          <a:prstGeom prst="rect">
+            <a:avLst/>
+          </a:prstGeom>
+          <a:noFill/>
+          <a:ln w="19050">
+            <a:solidFill>
+              <a:schemeClr val="tx1"/>
+            </a:solidFill>
+          </a:ln>
+        </p:spPr>
+        <p:style>
+          <a:lnRef idx="2">
+            <a:schemeClr val="accent1">
+              <a:shade val="15000"/>
+            </a:schemeClr>
+          </a:lnRef>
+          <a:fillRef idx="1">
+            <a:schemeClr val="accent1"/>
+          </a:fillRef>
+          <a:effectRef idx="0">
+            <a:schemeClr val="accent1"/>
+          </a:effectRef>
+          <a:fontRef idx="minor">
+            <a:schemeClr val="lt1"/>
+          </a:fontRef>
+        </p:style>
+        <p:txBody>
+          <a:bodyPr rtlCol="0" anchor="ctr"/>
+          <a:lstStyle/>
+          <a:p>
+            <a:pPr algn="ctr"/>
+            <a:r>
+              <a:rPr lang="en-US" sz="2000" dirty="0">
+                <a:solidFill>
+                  <a:schemeClr val="tx1"/>
+                </a:solidFill>
+              </a:rPr>
+              <a:t>7. Recommender  Algorithms</a:t>
+            </a:r>
+          </a:p>
+        </p:txBody>
+      </p:sp>
+      <p:sp>
+        <p:nvSpPr>
+          <p:cNvPr id="21" name="Rectangle 20">
+            <a:extLst>
+              <a:ext uri="{FF2B5EF4-FFF2-40B4-BE49-F238E27FC236}">
+                <a16:creationId xmlns:a16="http://schemas.microsoft.com/office/drawing/2014/main" id="{69AB1FD0-27FA-3784-41E8-6432B45E080D}"/>
+              </a:ext>
+            </a:extLst>
+          </p:cNvPr>
+          <p:cNvSpPr/>
+          <p:nvPr/>
+        </p:nvSpPr>
+        <p:spPr>
+          <a:xfrm>
+            <a:off x="3760595" y="5172609"/>
+            <a:ext cx="2085981" cy="1245689"/>
+          </a:xfrm>
+          <a:prstGeom prst="rect">
+            <a:avLst/>
+          </a:prstGeom>
+          <a:noFill/>
+          <a:ln w="19050">
+            <a:solidFill>
+              <a:schemeClr val="tx1"/>
+            </a:solidFill>
+          </a:ln>
+        </p:spPr>
+        <p:style>
+          <a:lnRef idx="2">
+            <a:schemeClr val="accent1">
+              <a:shade val="15000"/>
+            </a:schemeClr>
+          </a:lnRef>
+          <a:fillRef idx="1">
+            <a:schemeClr val="accent1"/>
+          </a:fillRef>
+          <a:effectRef idx="0">
+            <a:schemeClr val="accent1"/>
+          </a:effectRef>
+          <a:fontRef idx="minor">
+            <a:schemeClr val="lt1"/>
+          </a:fontRef>
+        </p:style>
+        <p:txBody>
+          <a:bodyPr rtlCol="0" anchor="ctr"/>
+          <a:lstStyle/>
+          <a:p>
+            <a:pPr algn="ctr"/>
+            <a:r>
+              <a:rPr lang="en-US" sz="2000" dirty="0">
+                <a:solidFill>
+                  <a:schemeClr val="tx1"/>
+                </a:solidFill>
+              </a:rPr>
+              <a:t>6. Web/Document ranking and search</a:t>
+            </a:r>
+          </a:p>
+        </p:txBody>
+      </p:sp>
+      <p:sp>
+        <p:nvSpPr>
+          <p:cNvPr id="22" name="Content Placeholder 2">
+            <a:extLst>
+              <a:ext uri="{FF2B5EF4-FFF2-40B4-BE49-F238E27FC236}">
+                <a16:creationId xmlns:a16="http://schemas.microsoft.com/office/drawing/2014/main" id="{302608D4-DE73-B603-CD44-1D4BB221F2DE}"/>
+              </a:ext>
+            </a:extLst>
+          </p:cNvPr>
+          <p:cNvSpPr txBox="1">
+            <a:spLocks/>
+          </p:cNvSpPr>
+          <p:nvPr/>
+        </p:nvSpPr>
+        <p:spPr>
+          <a:xfrm>
+            <a:off x="865089" y="797597"/>
+            <a:ext cx="10515600" cy="850578"/>
+          </a:xfrm>
+          <a:prstGeom prst="rect">
+            <a:avLst/>
+          </a:prstGeom>
+        </p:spPr>
+        <p:txBody>
+          <a:bodyPr>
+            <a:noAutofit/>
+          </a:bodyPr>
+          <a:lstStyle>
+            <a:lvl1pPr marL="228600" indent="-228600" algn="l" defTabSz="914400" rtl="0" eaLnBrk="1" latinLnBrk="0" hangingPunct="1">
+              <a:lnSpc>
+                <a:spcPct val="90000"/>
+              </a:lnSpc>
+              <a:spcBef>
+                <a:spcPts val="1000"/>
+              </a:spcBef>
+              <a:buFont typeface="Arial" panose="020B0604020202020204" pitchFamily="34" charset="0"/>
+              <a:buChar char="•"/>
+              <a:defRPr sz="2800" kern="1200">
+                <a:solidFill>
+                  <a:schemeClr val="tx1"/>
+                </a:solidFill>
+                <a:latin typeface="+mn-lt"/>
+                <a:ea typeface="+mn-ea"/>
+                <a:cs typeface="+mn-cs"/>
+              </a:defRPr>
+            </a:lvl1pPr>
+            <a:lvl2pPr marL="685800" indent="-228600" algn="l" defTabSz="914400" rtl="0" eaLnBrk="1" latinLnBrk="0" hangingPunct="1">
+              <a:lnSpc>
+                <a:spcPct val="90000"/>
+              </a:lnSpc>
+              <a:spcBef>
+                <a:spcPts val="500"/>
+              </a:spcBef>
+              <a:buFont typeface="Arial" panose="020B0604020202020204" pitchFamily="34" charset="0"/>
+              <a:buChar char="•"/>
+              <a:defRPr sz="2400" kern="1200">
+                <a:solidFill>
+                  <a:schemeClr val="tx1"/>
+                </a:solidFill>
+                <a:latin typeface="+mn-lt"/>
+                <a:ea typeface="+mn-ea"/>
+                <a:cs typeface="+mn-cs"/>
+              </a:defRPr>
+            </a:lvl2pPr>
+            <a:lvl3pPr marL="1143000" indent="-228600" algn="l" defTabSz="914400" rtl="0" eaLnBrk="1" latinLnBrk="0" hangingPunct="1">
+              <a:lnSpc>
+                <a:spcPct val="90000"/>
+              </a:lnSpc>
+              <a:spcBef>
+                <a:spcPts val="500"/>
+              </a:spcBef>
+              <a:buFont typeface="Arial" panose="020B0604020202020204" pitchFamily="34" charset="0"/>
+              <a:buChar char="•"/>
+              <a:defRPr sz="2000" kern="1200">
+                <a:solidFill>
+                  <a:schemeClr val="tx1"/>
+                </a:solidFill>
+                <a:latin typeface="+mn-lt"/>
+                <a:ea typeface="+mn-ea"/>
+                <a:cs typeface="+mn-cs"/>
+              </a:defRPr>
+            </a:lvl3pPr>
+            <a:lvl4pPr marL="1600200" indent="-228600" algn="l" defTabSz="914400" rtl="0" eaLnBrk="1" latinLnBrk="0" hangingPunct="1">
+              <a:lnSpc>
+                <a:spcPct val="90000"/>
+              </a:lnSpc>
+              <a:spcBef>
+                <a:spcPts val="500"/>
+              </a:spcBef>
+              <a:buFont typeface="Arial" panose="020B0604020202020204" pitchFamily="34" charset="0"/>
+              <a:buChar char="•"/>
+              <a:defRPr sz="1800" kern="1200">
+                <a:solidFill>
+                  <a:schemeClr val="tx1"/>
+                </a:solidFill>
+                <a:latin typeface="+mn-lt"/>
+                <a:ea typeface="+mn-ea"/>
+                <a:cs typeface="+mn-cs"/>
+              </a:defRPr>
+            </a:lvl4pPr>
+            <a:lvl5pPr marL="2057400" indent="-228600" algn="l" defTabSz="914400" rtl="0" eaLnBrk="1" latinLnBrk="0" hangingPunct="1">
+              <a:lnSpc>
+                <a:spcPct val="90000"/>
+              </a:lnSpc>
+              <a:spcBef>
+                <a:spcPts val="500"/>
+              </a:spcBef>
+              <a:buFont typeface="Arial" panose="020B0604020202020204" pitchFamily="34" charset="0"/>
+              <a:buChar char="•"/>
+              <a:defRPr sz="1800" kern="1200">
+                <a:solidFill>
+                  <a:schemeClr val="tx1"/>
+                </a:solidFill>
+                <a:latin typeface="+mn-lt"/>
+                <a:ea typeface="+mn-ea"/>
+                <a:cs typeface="+mn-cs"/>
+              </a:defRPr>
+            </a:lvl5pPr>
+            <a:lvl6pPr marL="2514600" indent="-228600" algn="l" defTabSz="914400" rtl="0" eaLnBrk="1" latinLnBrk="0" hangingPunct="1">
+              <a:lnSpc>
+                <a:spcPct val="90000"/>
+              </a:lnSpc>
+              <a:spcBef>
+                <a:spcPts val="500"/>
+              </a:spcBef>
+              <a:buFont typeface="Arial" panose="020B0604020202020204" pitchFamily="34" charset="0"/>
+              <a:buChar char="•"/>
+              <a:defRPr sz="1800" kern="1200">
+                <a:solidFill>
+                  <a:schemeClr val="tx1"/>
+                </a:solidFill>
+                <a:latin typeface="+mn-lt"/>
+                <a:ea typeface="+mn-ea"/>
+                <a:cs typeface="+mn-cs"/>
+              </a:defRPr>
+            </a:lvl6pPr>
+            <a:lvl7pPr marL="2971800" indent="-228600" algn="l" defTabSz="914400" rtl="0" eaLnBrk="1" latinLnBrk="0" hangingPunct="1">
+              <a:lnSpc>
+                <a:spcPct val="90000"/>
+              </a:lnSpc>
+              <a:spcBef>
+                <a:spcPts val="500"/>
+              </a:spcBef>
+              <a:buFont typeface="Arial" panose="020B0604020202020204" pitchFamily="34" charset="0"/>
+              <a:buChar char="•"/>
+              <a:defRPr sz="1800" kern="1200">
+                <a:solidFill>
+                  <a:schemeClr val="tx1"/>
+                </a:solidFill>
+                <a:latin typeface="+mn-lt"/>
+                <a:ea typeface="+mn-ea"/>
+                <a:cs typeface="+mn-cs"/>
+              </a:defRPr>
+            </a:lvl7pPr>
+            <a:lvl8pPr marL="3429000" indent="-228600" algn="l" defTabSz="914400" rtl="0" eaLnBrk="1" latinLnBrk="0" hangingPunct="1">
+              <a:lnSpc>
+                <a:spcPct val="90000"/>
+              </a:lnSpc>
+              <a:spcBef>
+                <a:spcPts val="500"/>
+              </a:spcBef>
+              <a:buFont typeface="Arial" panose="020B0604020202020204" pitchFamily="34" charset="0"/>
+              <a:buChar char="•"/>
+              <a:defRPr sz="1800" kern="1200">
+                <a:solidFill>
+                  <a:schemeClr val="tx1"/>
+                </a:solidFill>
+                <a:latin typeface="+mn-lt"/>
+                <a:ea typeface="+mn-ea"/>
+                <a:cs typeface="+mn-cs"/>
+              </a:defRPr>
+            </a:lvl8pPr>
+            <a:lvl9pPr marL="3886200" indent="-228600" algn="l" defTabSz="914400" rtl="0" eaLnBrk="1" latinLnBrk="0" hangingPunct="1">
+              <a:lnSpc>
+                <a:spcPct val="90000"/>
+              </a:lnSpc>
+              <a:spcBef>
+                <a:spcPts val="500"/>
+              </a:spcBef>
+              <a:buFont typeface="Arial" panose="020B0604020202020204" pitchFamily="34" charset="0"/>
+              <a:buChar char="•"/>
+              <a:defRPr sz="1800" kern="1200">
+                <a:solidFill>
+                  <a:schemeClr val="tx1"/>
+                </a:solidFill>
+                <a:latin typeface="+mn-lt"/>
+                <a:ea typeface="+mn-ea"/>
+                <a:cs typeface="+mn-cs"/>
+              </a:defRPr>
+            </a:lvl9pPr>
+          </a:lstStyle>
+          <a:p>
+            <a:pPr marL="0" indent="0">
+              <a:buFont typeface="Arial" panose="020B0604020202020204" pitchFamily="34" charset="0"/>
+              <a:buNone/>
+            </a:pPr>
+            <a:r>
+              <a:rPr lang="en-US" dirty="0"/>
+              <a:t>The main topics in this course are interconnected and build on each other</a:t>
+            </a:r>
+          </a:p>
+        </p:txBody>
+      </p:sp>
+    </p:spTree>
+    <p:extLst>
+      <p:ext uri="{BB962C8B-B14F-4D97-AF65-F5344CB8AC3E}">
+        <p14:creationId xmlns:p14="http://schemas.microsoft.com/office/powerpoint/2010/main" val="581234857"/>
+      </p:ext>
+    </p:extLst>
+  </p:cSld>
+  <p:clrMapOvr>
+    <a:masterClrMapping/>
+  </p:clrMapOvr>
+</p:sld>
+</file>
+
+<file path=ppt/slides/slide31.xml><?xml version="1.0" encoding="utf-8"?>
+<p:sld xmlns:a="http://schemas.openxmlformats.org/drawingml/2006/main" xmlns:r="http://schemas.openxmlformats.org/officeDocument/2006/relationships" xmlns:p="http://schemas.openxmlformats.org/presentationml/2006/main">
+  <p:cSld>
+    <p:spTree>
+      <p:nvGrpSpPr>
         <p:cNvPr id="1" name=""/>
         <p:cNvGrpSpPr/>
         <p:nvPr/>
@@ -18406,7 +19524,7 @@
 </p:sld>
 </file>
 
-<file path=ppt/slides/slide31.xml><?xml version="1.0" encoding="utf-8"?>
+<file path=ppt/slides/slide32.xml><?xml version="1.0" encoding="utf-8"?>
 <p:sld xmlns:a="http://schemas.openxmlformats.org/drawingml/2006/main" xmlns:r="http://schemas.openxmlformats.org/officeDocument/2006/relationships" xmlns:p="http://schemas.openxmlformats.org/presentationml/2006/main">
   <p:cSld>
     <p:spTree>
@@ -18466,18 +19584,12 @@
 </p:sld>
 </file>
 
-<file path=ppt/slides/slide32.xml><?xml version="1.0" encoding="utf-8"?>
+<file path=ppt/slides/slide33.xml><?xml version="1.0" encoding="utf-8"?>
 <p:sld xmlns:a="http://schemas.openxmlformats.org/drawingml/2006/main" xmlns:r="http://schemas.openxmlformats.org/officeDocument/2006/relationships" xmlns:p="http://schemas.openxmlformats.org/presentationml/2006/main">
   <p:cSld>
     <p:spTree>
       <p:nvGrpSpPr>
-        <p:cNvPr id="1" name="">
-          <a:extLst>
-            <a:ext uri="{FF2B5EF4-FFF2-40B4-BE49-F238E27FC236}">
-              <a16:creationId xmlns:a16="http://schemas.microsoft.com/office/drawing/2014/main" id="{ED7A9242-6F04-0255-B6E4-003EE805CF99}"/>
-            </a:ext>
-          </a:extLst>
-        </p:cNvPr>
+        <p:cNvPr id="1" name=""/>
         <p:cNvGrpSpPr/>
         <p:nvPr/>
       </p:nvGrpSpPr>
@@ -18489,910 +19601,212 @@
           <a:chExt cx="0" cy="0"/>
         </a:xfrm>
       </p:grpSpPr>
+      <mc:AlternateContent xmlns:mc="http://schemas.openxmlformats.org/markup-compatibility/2006">
+        <mc:Choice xmlns:a14="http://schemas.microsoft.com/office/drawing/2010/main" Requires="a14">
+          <p:sp>
+            <p:nvSpPr>
+              <p:cNvPr id="3" name="Content Placeholder 2">
+                <a:extLst>
+                  <a:ext uri="{FF2B5EF4-FFF2-40B4-BE49-F238E27FC236}">
+                    <a16:creationId xmlns:a16="http://schemas.microsoft.com/office/drawing/2014/main" id="{258E6AF3-7615-4BD1-878E-A94C93E98F90}"/>
+                  </a:ext>
+                </a:extLst>
+              </p:cNvPr>
+              <p:cNvSpPr>
+                <a:spLocks noGrp="1"/>
+              </p:cNvSpPr>
+              <p:nvPr>
+                <p:ph idx="1"/>
+              </p:nvPr>
+            </p:nvSpPr>
+            <p:spPr>
+              <a:xfrm>
+                <a:off x="838200" y="1324927"/>
+                <a:ext cx="10515600" cy="4898217"/>
+              </a:xfrm>
+            </p:spPr>
+            <p:txBody>
+              <a:bodyPr>
+                <a:normAutofit/>
+              </a:bodyPr>
+              <a:lstStyle/>
+              <a:p>
+                <a:pPr marL="0" indent="0">
+                  <a:buNone/>
+                </a:pPr>
+                <a:r>
+                  <a:rPr lang="en-US" dirty="0"/>
+                  <a:t>Need to store and retrieve massive quantities of data  </a:t>
+                </a:r>
+              </a:p>
+              <a:p>
+                <a:r>
+                  <a:rPr lang="en-US" dirty="0"/>
+                  <a:t>Manage with key-value pairs as a tuple, </a:t>
+                </a:r>
+                <a14:m>
+                  <m:oMath xmlns:m="http://schemas.openxmlformats.org/officeDocument/2006/math">
+                    <m:r>
+                      <a:rPr lang="en-US" b="0" i="1" smtClean="0">
+                        <a:latin typeface="Cambria Math" panose="02040503050406030204" pitchFamily="18" charset="0"/>
+                      </a:rPr>
+                      <m:t>(</m:t>
+                    </m:r>
+                    <m:r>
+                      <a:rPr lang="en-US" b="0" i="1" smtClean="0">
+                        <a:latin typeface="Cambria Math" panose="02040503050406030204" pitchFamily="18" charset="0"/>
+                      </a:rPr>
+                      <m:t>𝐾</m:t>
+                    </m:r>
+                    <m:r>
+                      <a:rPr lang="en-US" b="0" i="1" smtClean="0">
+                        <a:latin typeface="Cambria Math" panose="02040503050406030204" pitchFamily="18" charset="0"/>
+                      </a:rPr>
+                      <m:t>,</m:t>
+                    </m:r>
+                    <m:r>
+                      <a:rPr lang="en-US" b="0" i="1" smtClean="0">
+                        <a:latin typeface="Cambria Math" panose="02040503050406030204" pitchFamily="18" charset="0"/>
+                      </a:rPr>
+                      <m:t>𝑉</m:t>
+                    </m:r>
+                    <m:r>
+                      <a:rPr lang="en-US" b="0" i="1" smtClean="0">
+                        <a:latin typeface="Cambria Math" panose="02040503050406030204" pitchFamily="18" charset="0"/>
+                      </a:rPr>
+                      <m:t>)</m:t>
+                    </m:r>
+                  </m:oMath>
+                </a14:m>
+                <a:r>
+                  <a:rPr lang="en-US" dirty="0"/>
+                  <a:t>  </a:t>
+                </a:r>
+              </a:p>
+              <a:p>
+                <a:r>
+                  <a:rPr lang="en-US" dirty="0"/>
+                  <a:t>The key, </a:t>
+                </a:r>
+                <a14:m>
+                  <m:oMath xmlns:m="http://schemas.openxmlformats.org/officeDocument/2006/math">
+                    <m:r>
+                      <a:rPr lang="en-US" b="0" i="1" smtClean="0">
+                        <a:latin typeface="Cambria Math" panose="02040503050406030204" pitchFamily="18" charset="0"/>
+                      </a:rPr>
+                      <m:t>𝐾</m:t>
+                    </m:r>
+                  </m:oMath>
+                </a14:m>
+                <a:r>
+                  <a:rPr lang="en-US" dirty="0"/>
+                  <a:t>, is index or identifier for the value, </a:t>
+                </a:r>
+                <a14:m>
+                  <m:oMath xmlns:m="http://schemas.openxmlformats.org/officeDocument/2006/math">
+                    <m:r>
+                      <a:rPr lang="en-US" b="0" i="1" smtClean="0">
+                        <a:latin typeface="Cambria Math" panose="02040503050406030204" pitchFamily="18" charset="0"/>
+                      </a:rPr>
+                      <m:t>𝑉</m:t>
+                    </m:r>
+                  </m:oMath>
+                </a14:m>
+                <a:r>
+                  <a:rPr lang="en-US" dirty="0"/>
+                  <a:t> </a:t>
+                </a:r>
+              </a:p>
+              <a:p>
+                <a:r>
+                  <a:rPr lang="en-US" dirty="0"/>
+                  <a:t>Key is a scalar, typically one of </a:t>
+                </a:r>
+              </a:p>
+              <a:p>
+                <a:pPr lvl="1"/>
+                <a:r>
+                  <a:rPr lang="en-US" sz="2800" dirty="0"/>
+                  <a:t>Binary string</a:t>
+                </a:r>
+              </a:p>
+              <a:p>
+                <a:pPr lvl="1"/>
+                <a:r>
+                  <a:rPr lang="en-US" sz="2800" dirty="0"/>
+                  <a:t>Integer </a:t>
+                </a:r>
+              </a:p>
+              <a:p>
+                <a:pPr lvl="1"/>
+                <a:r>
+                  <a:rPr lang="en-US" sz="2800" dirty="0"/>
+                  <a:t>Hexadecimal number</a:t>
+                </a:r>
+              </a:p>
+              <a:p>
+                <a:pPr lvl="1"/>
+                <a:r>
+                  <a:rPr lang="en-US" sz="2800" dirty="0"/>
+                  <a:t>Character string, often UTF encoded</a:t>
+                </a:r>
+              </a:p>
+              <a:p>
+                <a:endParaRPr lang="en-US" b="1" dirty="0"/>
+              </a:p>
+            </p:txBody>
+          </p:sp>
+        </mc:Choice>
+        <mc:Fallback>
+          <p:sp>
+            <p:nvSpPr>
+              <p:cNvPr id="3" name="Content Placeholder 2">
+                <a:extLst>
+                  <a:ext uri="{FF2B5EF4-FFF2-40B4-BE49-F238E27FC236}">
+                    <a16:creationId xmlns:a16="http://schemas.microsoft.com/office/drawing/2014/main" id="{258E6AF3-7615-4BD1-878E-A94C93E98F90}"/>
+                  </a:ext>
+                </a:extLst>
+              </p:cNvPr>
+              <p:cNvSpPr>
+                <a:spLocks noGrp="1" noRot="1" noChangeAspect="1" noMove="1" noResize="1" noEditPoints="1" noAdjustHandles="1" noChangeArrowheads="1" noChangeShapeType="1" noTextEdit="1"/>
+              </p:cNvSpPr>
+              <p:nvPr>
+                <p:ph idx="1"/>
+              </p:nvPr>
+            </p:nvSpPr>
+            <p:spPr>
+              <a:xfrm>
+                <a:off x="838200" y="1324927"/>
+                <a:ext cx="10515600" cy="4898217"/>
+              </a:xfrm>
+              <a:blipFill>
+                <a:blip r:embed="rId2"/>
+                <a:stretch>
+                  <a:fillRect l="-1217" t="-1990"/>
+                </a:stretch>
+              </a:blipFill>
+            </p:spPr>
+            <p:txBody>
+              <a:bodyPr/>
+              <a:lstStyle/>
+              <a:p>
+                <a:r>
+                  <a:rPr lang="en-US">
+                    <a:noFill/>
+                  </a:rPr>
+                  <a:t> </a:t>
+                </a:r>
+              </a:p>
+            </p:txBody>
+          </p:sp>
+        </mc:Fallback>
+      </mc:AlternateContent>
       <p:sp>
         <p:nvSpPr>
-          <p:cNvPr id="2" name="Title 1">
+          <p:cNvPr id="6" name="Title 1">
             <a:extLst>
               <a:ext uri="{FF2B5EF4-FFF2-40B4-BE49-F238E27FC236}">
-                <a16:creationId xmlns:a16="http://schemas.microsoft.com/office/drawing/2014/main" id="{97C0B4EF-F7E3-7E82-AE6D-66E8ED303FDB}"/>
-              </a:ext>
-            </a:extLst>
-          </p:cNvPr>
-          <p:cNvSpPr>
-            <a:spLocks noGrp="1"/>
-          </p:cNvSpPr>
-          <p:nvPr>
-            <p:ph type="title"/>
-          </p:nvPr>
-        </p:nvSpPr>
-        <p:spPr>
-          <a:xfrm>
-            <a:off x="916187" y="249623"/>
-            <a:ext cx="10515600" cy="662230"/>
-          </a:xfrm>
-        </p:spPr>
-        <p:txBody>
-          <a:bodyPr>
-            <a:normAutofit fontScale="90000"/>
-          </a:bodyPr>
-          <a:lstStyle/>
-          <a:p>
-            <a:r>
-              <a:rPr lang="en-US" sz="4900" dirty="0">
-                <a:latin typeface="+mn-lt"/>
-              </a:rPr>
-              <a:t>Main topics in this course</a:t>
-            </a:r>
-            <a:br>
-              <a:rPr lang="en-US" sz="4000" dirty="0">
-                <a:latin typeface="+mn-lt"/>
-              </a:rPr>
-            </a:br>
-            <a:endParaRPr lang="en-US" sz="4000" dirty="0">
-              <a:latin typeface="+mn-lt"/>
-            </a:endParaRPr>
-          </a:p>
-        </p:txBody>
-      </p:sp>
-      <p:sp>
-        <p:nvSpPr>
-          <p:cNvPr id="3" name="Left Brace 2">
-            <a:extLst>
-              <a:ext uri="{FF2B5EF4-FFF2-40B4-BE49-F238E27FC236}">
-                <a16:creationId xmlns:a16="http://schemas.microsoft.com/office/drawing/2014/main" id="{B43E0B5E-B811-4BBC-CEDF-97FC2AAC1766}"/>
-              </a:ext>
-            </a:extLst>
-          </p:cNvPr>
-          <p:cNvSpPr/>
-          <p:nvPr/>
-        </p:nvSpPr>
-        <p:spPr>
-          <a:xfrm>
-            <a:off x="756889" y="1964356"/>
-            <a:ext cx="225209" cy="1273261"/>
-          </a:xfrm>
-          <a:prstGeom prst="leftBrace">
-            <a:avLst/>
-          </a:prstGeom>
-          <a:ln w="19050">
-            <a:solidFill>
-              <a:schemeClr val="tx1"/>
-            </a:solidFill>
-          </a:ln>
-        </p:spPr>
-        <p:style>
-          <a:lnRef idx="1">
-            <a:schemeClr val="accent1"/>
-          </a:lnRef>
-          <a:fillRef idx="0">
-            <a:schemeClr val="accent1"/>
-          </a:fillRef>
-          <a:effectRef idx="0">
-            <a:schemeClr val="accent1"/>
-          </a:effectRef>
-          <a:fontRef idx="minor">
-            <a:schemeClr val="tx1"/>
-          </a:fontRef>
-        </p:style>
-        <p:txBody>
-          <a:bodyPr rtlCol="0" anchor="ctr"/>
-          <a:lstStyle/>
-          <a:p>
-            <a:pPr algn="ctr"/>
-            <a:endParaRPr lang="en-US"/>
-          </a:p>
-        </p:txBody>
-      </p:sp>
-      <p:sp>
-        <p:nvSpPr>
-          <p:cNvPr id="4" name="TextBox 3">
-            <a:extLst>
-              <a:ext uri="{FF2B5EF4-FFF2-40B4-BE49-F238E27FC236}">
-                <a16:creationId xmlns:a16="http://schemas.microsoft.com/office/drawing/2014/main" id="{77BB0425-4708-2E61-70FB-876C788A79E2}"/>
-              </a:ext>
-            </a:extLst>
-          </p:cNvPr>
-          <p:cNvSpPr txBox="1"/>
-          <p:nvPr/>
-        </p:nvSpPr>
-        <p:spPr>
-          <a:xfrm rot="16200000">
-            <a:off x="-238228" y="2251765"/>
-            <a:ext cx="1571596" cy="400110"/>
-          </a:xfrm>
-          <a:prstGeom prst="rect">
-            <a:avLst/>
-          </a:prstGeom>
-          <a:noFill/>
-        </p:spPr>
-        <p:txBody>
-          <a:bodyPr wrap="square" rtlCol="0">
-            <a:spAutoFit/>
-          </a:bodyPr>
-          <a:lstStyle/>
-          <a:p>
-            <a:pPr algn="ctr"/>
-            <a:r>
-              <a:rPr lang="en-US" sz="2000" dirty="0"/>
-              <a:t>Foundations </a:t>
-            </a:r>
-          </a:p>
-        </p:txBody>
-      </p:sp>
-      <p:sp>
-        <p:nvSpPr>
-          <p:cNvPr id="5" name="Rectangle 4">
-            <a:extLst>
-              <a:ext uri="{FF2B5EF4-FFF2-40B4-BE49-F238E27FC236}">
-                <a16:creationId xmlns:a16="http://schemas.microsoft.com/office/drawing/2014/main" id="{DAA42CDB-2EBC-28B2-6456-04829EC7EF48}"/>
-              </a:ext>
-            </a:extLst>
-          </p:cNvPr>
-          <p:cNvSpPr/>
-          <p:nvPr/>
-        </p:nvSpPr>
-        <p:spPr>
-          <a:xfrm>
-            <a:off x="1259812" y="1983695"/>
-            <a:ext cx="1951346" cy="1253922"/>
-          </a:xfrm>
-          <a:prstGeom prst="rect">
-            <a:avLst/>
-          </a:prstGeom>
-          <a:noFill/>
-          <a:ln w="38100">
-            <a:solidFill>
-              <a:srgbClr val="C00000"/>
-            </a:solidFill>
-          </a:ln>
-        </p:spPr>
-        <p:style>
-          <a:lnRef idx="2">
-            <a:schemeClr val="accent1">
-              <a:shade val="15000"/>
-            </a:schemeClr>
-          </a:lnRef>
-          <a:fillRef idx="1">
-            <a:schemeClr val="accent1"/>
-          </a:fillRef>
-          <a:effectRef idx="0">
-            <a:schemeClr val="accent1"/>
-          </a:effectRef>
-          <a:fontRef idx="minor">
-            <a:schemeClr val="lt1"/>
-          </a:fontRef>
-        </p:style>
-        <p:txBody>
-          <a:bodyPr rtlCol="0" anchor="ctr"/>
-          <a:lstStyle/>
-          <a:p>
-            <a:pPr algn="ctr"/>
-            <a:r>
-              <a:rPr lang="en-US" sz="2000" dirty="0">
-                <a:solidFill>
-                  <a:schemeClr val="tx1"/>
-                </a:solidFill>
-              </a:rPr>
-              <a:t>1. Hashing and K-V pair management </a:t>
-            </a:r>
-          </a:p>
-        </p:txBody>
-      </p:sp>
-      <p:sp>
-        <p:nvSpPr>
-          <p:cNvPr id="6" name="Rectangle 5">
-            <a:extLst>
-              <a:ext uri="{FF2B5EF4-FFF2-40B4-BE49-F238E27FC236}">
-                <a16:creationId xmlns:a16="http://schemas.microsoft.com/office/drawing/2014/main" id="{F5C7F060-78DB-AC42-6BFD-05BD50198440}"/>
-              </a:ext>
-            </a:extLst>
-          </p:cNvPr>
-          <p:cNvSpPr/>
-          <p:nvPr/>
-        </p:nvSpPr>
-        <p:spPr>
-          <a:xfrm>
-            <a:off x="3740233" y="2021536"/>
-            <a:ext cx="2157426" cy="1178239"/>
-          </a:xfrm>
-          <a:prstGeom prst="rect">
-            <a:avLst/>
-          </a:prstGeom>
-          <a:noFill/>
-          <a:ln w="19050">
-            <a:solidFill>
-              <a:schemeClr val="tx1"/>
-            </a:solidFill>
-          </a:ln>
-        </p:spPr>
-        <p:style>
-          <a:lnRef idx="2">
-            <a:schemeClr val="accent1">
-              <a:shade val="15000"/>
-            </a:schemeClr>
-          </a:lnRef>
-          <a:fillRef idx="1">
-            <a:schemeClr val="accent1"/>
-          </a:fillRef>
-          <a:effectRef idx="0">
-            <a:schemeClr val="accent1"/>
-          </a:effectRef>
-          <a:fontRef idx="minor">
-            <a:schemeClr val="lt1"/>
-          </a:fontRef>
-        </p:style>
-        <p:txBody>
-          <a:bodyPr rtlCol="0" anchor="ctr"/>
-          <a:lstStyle/>
-          <a:p>
-            <a:pPr algn="ctr"/>
-            <a:r>
-              <a:rPr lang="en-US" sz="2000" dirty="0">
-                <a:solidFill>
-                  <a:schemeClr val="tx1"/>
-                </a:solidFill>
-              </a:rPr>
-              <a:t>2. Distance and Similarity Metrics</a:t>
-            </a:r>
-          </a:p>
-        </p:txBody>
-      </p:sp>
-      <p:sp>
-        <p:nvSpPr>
-          <p:cNvPr id="7" name="Rectangle 6">
-            <a:extLst>
-              <a:ext uri="{FF2B5EF4-FFF2-40B4-BE49-F238E27FC236}">
-                <a16:creationId xmlns:a16="http://schemas.microsoft.com/office/drawing/2014/main" id="{F20B3888-4A09-E889-C7DE-5ECE32C17693}"/>
-              </a:ext>
-            </a:extLst>
-          </p:cNvPr>
-          <p:cNvSpPr/>
-          <p:nvPr/>
-        </p:nvSpPr>
-        <p:spPr>
-          <a:xfrm>
-            <a:off x="6408020" y="2037908"/>
-            <a:ext cx="2058805" cy="1213337"/>
-          </a:xfrm>
-          <a:prstGeom prst="rect">
-            <a:avLst/>
-          </a:prstGeom>
-          <a:noFill/>
-          <a:ln w="19050">
-            <a:solidFill>
-              <a:schemeClr val="tx1"/>
-            </a:solidFill>
-          </a:ln>
-        </p:spPr>
-        <p:style>
-          <a:lnRef idx="2">
-            <a:schemeClr val="accent1">
-              <a:shade val="15000"/>
-            </a:schemeClr>
-          </a:lnRef>
-          <a:fillRef idx="1">
-            <a:schemeClr val="accent1"/>
-          </a:fillRef>
-          <a:effectRef idx="0">
-            <a:schemeClr val="accent1"/>
-          </a:effectRef>
-          <a:fontRef idx="minor">
-            <a:schemeClr val="lt1"/>
-          </a:fontRef>
-        </p:style>
-        <p:txBody>
-          <a:bodyPr rtlCol="0" anchor="ctr"/>
-          <a:lstStyle/>
-          <a:p>
-            <a:pPr algn="ctr"/>
-            <a:r>
-              <a:rPr lang="en-US" sz="2000" dirty="0">
-                <a:solidFill>
-                  <a:schemeClr val="tx1"/>
-                </a:solidFill>
-              </a:rPr>
-              <a:t>3. Graph Algorithms</a:t>
-            </a:r>
-          </a:p>
-        </p:txBody>
-      </p:sp>
-      <p:sp>
-        <p:nvSpPr>
-          <p:cNvPr id="8" name="Rectangle 7">
-            <a:extLst>
-              <a:ext uri="{FF2B5EF4-FFF2-40B4-BE49-F238E27FC236}">
-                <a16:creationId xmlns:a16="http://schemas.microsoft.com/office/drawing/2014/main" id="{A234FC6E-068F-82BA-D948-0872902BF117}"/>
-              </a:ext>
-            </a:extLst>
-          </p:cNvPr>
-          <p:cNvSpPr/>
-          <p:nvPr/>
-        </p:nvSpPr>
-        <p:spPr>
-          <a:xfrm>
-            <a:off x="1215334" y="3591320"/>
-            <a:ext cx="2085982" cy="1074244"/>
-          </a:xfrm>
-          <a:prstGeom prst="rect">
-            <a:avLst/>
-          </a:prstGeom>
-          <a:noFill/>
-          <a:ln w="19050">
-            <a:solidFill>
-              <a:schemeClr val="tx1"/>
-            </a:solidFill>
-          </a:ln>
-        </p:spPr>
-        <p:style>
-          <a:lnRef idx="2">
-            <a:schemeClr val="accent1">
-              <a:shade val="15000"/>
-            </a:schemeClr>
-          </a:lnRef>
-          <a:fillRef idx="1">
-            <a:schemeClr val="accent1"/>
-          </a:fillRef>
-          <a:effectRef idx="0">
-            <a:schemeClr val="accent1"/>
-          </a:effectRef>
-          <a:fontRef idx="minor">
-            <a:schemeClr val="lt1"/>
-          </a:fontRef>
-        </p:style>
-        <p:txBody>
-          <a:bodyPr rtlCol="0" anchor="ctr"/>
-          <a:lstStyle/>
-          <a:p>
-            <a:pPr algn="ctr"/>
-            <a:r>
-              <a:rPr lang="en-US" sz="2000" dirty="0">
-                <a:solidFill>
-                  <a:schemeClr val="tx1"/>
-                </a:solidFill>
-              </a:rPr>
-              <a:t>2. Dimensionality Reduction</a:t>
-            </a:r>
-          </a:p>
-        </p:txBody>
-      </p:sp>
-      <p:sp>
-        <p:nvSpPr>
-          <p:cNvPr id="10" name="Left Brace 9">
-            <a:extLst>
-              <a:ext uri="{FF2B5EF4-FFF2-40B4-BE49-F238E27FC236}">
-                <a16:creationId xmlns:a16="http://schemas.microsoft.com/office/drawing/2014/main" id="{6B807C0C-B6B7-55FC-4A73-937C1A517C09}"/>
-              </a:ext>
-            </a:extLst>
-          </p:cNvPr>
-          <p:cNvSpPr/>
-          <p:nvPr/>
-        </p:nvSpPr>
-        <p:spPr>
-          <a:xfrm>
-            <a:off x="865089" y="3571535"/>
-            <a:ext cx="172578" cy="1094029"/>
-          </a:xfrm>
-          <a:prstGeom prst="leftBrace">
-            <a:avLst/>
-          </a:prstGeom>
-          <a:ln w="19050">
-            <a:solidFill>
-              <a:schemeClr val="tx1"/>
-            </a:solidFill>
-          </a:ln>
-        </p:spPr>
-        <p:style>
-          <a:lnRef idx="1">
-            <a:schemeClr val="accent1"/>
-          </a:lnRef>
-          <a:fillRef idx="0">
-            <a:schemeClr val="accent1"/>
-          </a:fillRef>
-          <a:effectRef idx="0">
-            <a:schemeClr val="accent1"/>
-          </a:effectRef>
-          <a:fontRef idx="minor">
-            <a:schemeClr val="tx1"/>
-          </a:fontRef>
-        </p:style>
-        <p:txBody>
-          <a:bodyPr rtlCol="0" anchor="ctr"/>
-          <a:lstStyle/>
-          <a:p>
-            <a:pPr algn="ctr"/>
-            <a:endParaRPr lang="en-US"/>
-          </a:p>
-        </p:txBody>
-      </p:sp>
-      <p:sp>
-        <p:nvSpPr>
-          <p:cNvPr id="11" name="TextBox 10">
-            <a:extLst>
-              <a:ext uri="{FF2B5EF4-FFF2-40B4-BE49-F238E27FC236}">
-                <a16:creationId xmlns:a16="http://schemas.microsoft.com/office/drawing/2014/main" id="{CD0513D5-3561-EC84-E71B-4706879A90A1}"/>
-              </a:ext>
-            </a:extLst>
-          </p:cNvPr>
-          <p:cNvSpPr txBox="1"/>
-          <p:nvPr/>
-        </p:nvSpPr>
-        <p:spPr>
-          <a:xfrm rot="16200000">
-            <a:off x="-286998" y="3724841"/>
-            <a:ext cx="1571596" cy="707886"/>
-          </a:xfrm>
-          <a:prstGeom prst="rect">
-            <a:avLst/>
-          </a:prstGeom>
-          <a:noFill/>
-        </p:spPr>
-        <p:txBody>
-          <a:bodyPr wrap="square" rtlCol="0">
-            <a:spAutoFit/>
-          </a:bodyPr>
-          <a:lstStyle/>
-          <a:p>
-            <a:pPr algn="ctr"/>
-            <a:r>
-              <a:rPr lang="en-US" sz="2000" dirty="0"/>
-              <a:t>Core Algorithms</a:t>
-            </a:r>
-          </a:p>
-        </p:txBody>
-      </p:sp>
-      <p:sp>
-        <p:nvSpPr>
-          <p:cNvPr id="12" name="Rectangle 11">
-            <a:extLst>
-              <a:ext uri="{FF2B5EF4-FFF2-40B4-BE49-F238E27FC236}">
-                <a16:creationId xmlns:a16="http://schemas.microsoft.com/office/drawing/2014/main" id="{B042D63B-E913-3364-5865-54C574ED22CD}"/>
-              </a:ext>
-            </a:extLst>
-          </p:cNvPr>
-          <p:cNvSpPr/>
-          <p:nvPr/>
-        </p:nvSpPr>
-        <p:spPr>
-          <a:xfrm>
-            <a:off x="1280175" y="5154275"/>
-            <a:ext cx="1961804" cy="1264023"/>
-          </a:xfrm>
-          <a:prstGeom prst="rect">
-            <a:avLst/>
-          </a:prstGeom>
-          <a:noFill/>
-          <a:ln w="19050">
-            <a:solidFill>
-              <a:schemeClr val="tx1"/>
-            </a:solidFill>
-          </a:ln>
-        </p:spPr>
-        <p:style>
-          <a:lnRef idx="2">
-            <a:schemeClr val="accent1">
-              <a:shade val="15000"/>
-            </a:schemeClr>
-          </a:lnRef>
-          <a:fillRef idx="1">
-            <a:schemeClr val="accent1"/>
-          </a:fillRef>
-          <a:effectRef idx="0">
-            <a:schemeClr val="accent1"/>
-          </a:effectRef>
-          <a:fontRef idx="minor">
-            <a:schemeClr val="lt1"/>
-          </a:fontRef>
-        </p:style>
-        <p:txBody>
-          <a:bodyPr rtlCol="0" anchor="ctr"/>
-          <a:lstStyle/>
-          <a:p>
-            <a:pPr algn="ctr"/>
-            <a:r>
-              <a:rPr lang="en-US" sz="2000" dirty="0">
-                <a:solidFill>
-                  <a:schemeClr val="tx1"/>
-                </a:solidFill>
-              </a:rPr>
-              <a:t>3. Social Network Analysis</a:t>
-            </a:r>
-          </a:p>
-        </p:txBody>
-      </p:sp>
-      <p:sp>
-        <p:nvSpPr>
-          <p:cNvPr id="14" name="Left Brace 13">
-            <a:extLst>
-              <a:ext uri="{FF2B5EF4-FFF2-40B4-BE49-F238E27FC236}">
-                <a16:creationId xmlns:a16="http://schemas.microsoft.com/office/drawing/2014/main" id="{35E5DEDA-5FFD-FC06-5888-EB758D78C155}"/>
-              </a:ext>
-            </a:extLst>
-          </p:cNvPr>
-          <p:cNvSpPr/>
-          <p:nvPr/>
-        </p:nvSpPr>
-        <p:spPr>
-          <a:xfrm>
-            <a:off x="858563" y="5154275"/>
-            <a:ext cx="164275" cy="1264024"/>
-          </a:xfrm>
-          <a:prstGeom prst="leftBrace">
-            <a:avLst/>
-          </a:prstGeom>
-          <a:ln w="19050">
-            <a:solidFill>
-              <a:schemeClr val="tx1"/>
-            </a:solidFill>
-          </a:ln>
-        </p:spPr>
-        <p:style>
-          <a:lnRef idx="1">
-            <a:schemeClr val="accent1"/>
-          </a:lnRef>
-          <a:fillRef idx="0">
-            <a:schemeClr val="accent1"/>
-          </a:fillRef>
-          <a:effectRef idx="0">
-            <a:schemeClr val="accent1"/>
-          </a:effectRef>
-          <a:fontRef idx="minor">
-            <a:schemeClr val="tx1"/>
-          </a:fontRef>
-        </p:style>
-        <p:txBody>
-          <a:bodyPr rtlCol="0" anchor="ctr"/>
-          <a:lstStyle/>
-          <a:p>
-            <a:pPr algn="ctr"/>
-            <a:endParaRPr lang="en-US"/>
-          </a:p>
-        </p:txBody>
-      </p:sp>
-      <p:sp>
-        <p:nvSpPr>
-          <p:cNvPr id="15" name="TextBox 14">
-            <a:extLst>
-              <a:ext uri="{FF2B5EF4-FFF2-40B4-BE49-F238E27FC236}">
-                <a16:creationId xmlns:a16="http://schemas.microsoft.com/office/drawing/2014/main" id="{3061D0C7-FA6D-00D7-CF2A-B875D7CF029B}"/>
-              </a:ext>
-            </a:extLst>
-          </p:cNvPr>
-          <p:cNvSpPr txBox="1"/>
-          <p:nvPr/>
-        </p:nvSpPr>
-        <p:spPr>
-          <a:xfrm rot="16200000">
-            <a:off x="-322189" y="5405146"/>
-            <a:ext cx="1571596" cy="707886"/>
-          </a:xfrm>
-          <a:prstGeom prst="rect">
-            <a:avLst/>
-          </a:prstGeom>
-          <a:noFill/>
-        </p:spPr>
-        <p:txBody>
-          <a:bodyPr wrap="square" rtlCol="0">
-            <a:spAutoFit/>
-          </a:bodyPr>
-          <a:lstStyle/>
-          <a:p>
-            <a:pPr algn="ctr"/>
-            <a:r>
-              <a:rPr lang="en-US" sz="2000" dirty="0"/>
-              <a:t>Taks </a:t>
-            </a:r>
-            <a:r>
-              <a:rPr lang="en-US" sz="2000"/>
-              <a:t>Speific </a:t>
-            </a:r>
-            <a:r>
-              <a:rPr lang="en-US" sz="2000" dirty="0"/>
-              <a:t>Algorithms</a:t>
-            </a:r>
-          </a:p>
-        </p:txBody>
-      </p:sp>
-      <p:sp>
-        <p:nvSpPr>
-          <p:cNvPr id="16" name="Rectangle 15">
-            <a:extLst>
-              <a:ext uri="{FF2B5EF4-FFF2-40B4-BE49-F238E27FC236}">
-                <a16:creationId xmlns:a16="http://schemas.microsoft.com/office/drawing/2014/main" id="{8BCB2792-FBF9-D76F-A378-7E6596D54E0F}"/>
-              </a:ext>
-            </a:extLst>
-          </p:cNvPr>
-          <p:cNvSpPr/>
-          <p:nvPr/>
-        </p:nvSpPr>
-        <p:spPr>
-          <a:xfrm>
-            <a:off x="3811677" y="3631085"/>
-            <a:ext cx="2085982" cy="1094029"/>
-          </a:xfrm>
-          <a:prstGeom prst="rect">
-            <a:avLst/>
-          </a:prstGeom>
-          <a:noFill/>
-          <a:ln w="19050">
-            <a:solidFill>
-              <a:schemeClr val="tx1"/>
-            </a:solidFill>
-          </a:ln>
-        </p:spPr>
-        <p:style>
-          <a:lnRef idx="2">
-            <a:schemeClr val="accent1">
-              <a:shade val="15000"/>
-            </a:schemeClr>
-          </a:lnRef>
-          <a:fillRef idx="1">
-            <a:schemeClr val="accent1"/>
-          </a:fillRef>
-          <a:effectRef idx="0">
-            <a:schemeClr val="accent1"/>
-          </a:effectRef>
-          <a:fontRef idx="minor">
-            <a:schemeClr val="lt1"/>
-          </a:fontRef>
-        </p:style>
-        <p:txBody>
-          <a:bodyPr rtlCol="0" anchor="ctr"/>
-          <a:lstStyle/>
-          <a:p>
-            <a:pPr algn="ctr"/>
-            <a:r>
-              <a:rPr lang="en-US" sz="2000" dirty="0">
-                <a:solidFill>
-                  <a:schemeClr val="tx1"/>
-                </a:solidFill>
-              </a:rPr>
-              <a:t>5. Similarity Search and NN Algorithms</a:t>
-            </a:r>
-          </a:p>
-        </p:txBody>
-      </p:sp>
-      <p:sp>
-        <p:nvSpPr>
-          <p:cNvPr id="17" name="Rectangle 16">
-            <a:extLst>
-              <a:ext uri="{FF2B5EF4-FFF2-40B4-BE49-F238E27FC236}">
-                <a16:creationId xmlns:a16="http://schemas.microsoft.com/office/drawing/2014/main" id="{9A8CAD2D-EC71-A5F3-683F-41BF65DE958F}"/>
-              </a:ext>
-            </a:extLst>
-          </p:cNvPr>
-          <p:cNvSpPr/>
-          <p:nvPr/>
-        </p:nvSpPr>
-        <p:spPr>
-          <a:xfrm>
-            <a:off x="6408020" y="3640978"/>
-            <a:ext cx="2038966" cy="1123564"/>
-          </a:xfrm>
-          <a:prstGeom prst="rect">
-            <a:avLst/>
-          </a:prstGeom>
-          <a:noFill/>
-          <a:ln w="19050">
-            <a:solidFill>
-              <a:schemeClr val="tx1"/>
-            </a:solidFill>
-          </a:ln>
-        </p:spPr>
-        <p:style>
-          <a:lnRef idx="2">
-            <a:schemeClr val="accent1">
-              <a:shade val="15000"/>
-            </a:schemeClr>
-          </a:lnRef>
-          <a:fillRef idx="1">
-            <a:schemeClr val="accent1"/>
-          </a:fillRef>
-          <a:effectRef idx="0">
-            <a:schemeClr val="accent1"/>
-          </a:effectRef>
-          <a:fontRef idx="minor">
-            <a:schemeClr val="lt1"/>
-          </a:fontRef>
-        </p:style>
-        <p:txBody>
-          <a:bodyPr rtlCol="0" anchor="ctr"/>
-          <a:lstStyle/>
-          <a:p>
-            <a:pPr algn="ctr"/>
-            <a:r>
-              <a:rPr lang="en-US" sz="2000" dirty="0">
-                <a:solidFill>
-                  <a:schemeClr val="tx1"/>
-                </a:solidFill>
-              </a:rPr>
-              <a:t>4. Online Algorithms</a:t>
-            </a:r>
-          </a:p>
-        </p:txBody>
-      </p:sp>
-      <p:sp>
-        <p:nvSpPr>
-          <p:cNvPr id="18" name="Rectangle 17">
-            <a:extLst>
-              <a:ext uri="{FF2B5EF4-FFF2-40B4-BE49-F238E27FC236}">
-                <a16:creationId xmlns:a16="http://schemas.microsoft.com/office/drawing/2014/main" id="{67EB3589-9BBE-D38D-C09A-C7A36757F4E1}"/>
-              </a:ext>
-            </a:extLst>
-          </p:cNvPr>
-          <p:cNvSpPr/>
-          <p:nvPr/>
-        </p:nvSpPr>
-        <p:spPr>
-          <a:xfrm>
-            <a:off x="8985680" y="5155489"/>
-            <a:ext cx="1894527" cy="1262809"/>
-          </a:xfrm>
-          <a:prstGeom prst="rect">
-            <a:avLst/>
-          </a:prstGeom>
-          <a:noFill/>
-          <a:ln w="19050">
-            <a:solidFill>
-              <a:schemeClr val="tx1"/>
-            </a:solidFill>
-          </a:ln>
-        </p:spPr>
-        <p:style>
-          <a:lnRef idx="2">
-            <a:schemeClr val="accent1">
-              <a:shade val="15000"/>
-            </a:schemeClr>
-          </a:lnRef>
-          <a:fillRef idx="1">
-            <a:schemeClr val="accent1"/>
-          </a:fillRef>
-          <a:effectRef idx="0">
-            <a:schemeClr val="accent1"/>
-          </a:effectRef>
-          <a:fontRef idx="minor">
-            <a:schemeClr val="lt1"/>
-          </a:fontRef>
-        </p:style>
-        <p:txBody>
-          <a:bodyPr rtlCol="0" anchor="ctr"/>
-          <a:lstStyle/>
-          <a:p>
-            <a:pPr algn="ctr"/>
-            <a:r>
-              <a:rPr lang="en-US" sz="2000" dirty="0">
-                <a:solidFill>
-                  <a:schemeClr val="tx1"/>
-                </a:solidFill>
-              </a:rPr>
-              <a:t>8. Clustering Algorithms</a:t>
-            </a:r>
-          </a:p>
-        </p:txBody>
-      </p:sp>
-      <p:sp>
-        <p:nvSpPr>
-          <p:cNvPr id="20" name="Rectangle 19">
-            <a:extLst>
-              <a:ext uri="{FF2B5EF4-FFF2-40B4-BE49-F238E27FC236}">
-                <a16:creationId xmlns:a16="http://schemas.microsoft.com/office/drawing/2014/main" id="{5C5EBFDB-140B-9B88-CE63-77419A11C6E4}"/>
-              </a:ext>
-            </a:extLst>
-          </p:cNvPr>
-          <p:cNvSpPr/>
-          <p:nvPr/>
-        </p:nvSpPr>
-        <p:spPr>
-          <a:xfrm>
-            <a:off x="6470354" y="5154275"/>
-            <a:ext cx="2016833" cy="1245689"/>
-          </a:xfrm>
-          <a:prstGeom prst="rect">
-            <a:avLst/>
-          </a:prstGeom>
-          <a:noFill/>
-          <a:ln w="19050">
-            <a:solidFill>
-              <a:schemeClr val="tx1"/>
-            </a:solidFill>
-          </a:ln>
-        </p:spPr>
-        <p:style>
-          <a:lnRef idx="2">
-            <a:schemeClr val="accent1">
-              <a:shade val="15000"/>
-            </a:schemeClr>
-          </a:lnRef>
-          <a:fillRef idx="1">
-            <a:schemeClr val="accent1"/>
-          </a:fillRef>
-          <a:effectRef idx="0">
-            <a:schemeClr val="accent1"/>
-          </a:effectRef>
-          <a:fontRef idx="minor">
-            <a:schemeClr val="lt1"/>
-          </a:fontRef>
-        </p:style>
-        <p:txBody>
-          <a:bodyPr rtlCol="0" anchor="ctr"/>
-          <a:lstStyle/>
-          <a:p>
-            <a:pPr algn="ctr"/>
-            <a:r>
-              <a:rPr lang="en-US" sz="2000" dirty="0">
-                <a:solidFill>
-                  <a:schemeClr val="tx1"/>
-                </a:solidFill>
-              </a:rPr>
-              <a:t>7. Recommender  Algorithms</a:t>
-            </a:r>
-          </a:p>
-        </p:txBody>
-      </p:sp>
-      <p:sp>
-        <p:nvSpPr>
-          <p:cNvPr id="21" name="Rectangle 20">
-            <a:extLst>
-              <a:ext uri="{FF2B5EF4-FFF2-40B4-BE49-F238E27FC236}">
-                <a16:creationId xmlns:a16="http://schemas.microsoft.com/office/drawing/2014/main" id="{69AB1FD0-27FA-3784-41E8-6432B45E080D}"/>
-              </a:ext>
-            </a:extLst>
-          </p:cNvPr>
-          <p:cNvSpPr/>
-          <p:nvPr/>
-        </p:nvSpPr>
-        <p:spPr>
-          <a:xfrm>
-            <a:off x="3760595" y="5172609"/>
-            <a:ext cx="2085981" cy="1245689"/>
-          </a:xfrm>
-          <a:prstGeom prst="rect">
-            <a:avLst/>
-          </a:prstGeom>
-          <a:noFill/>
-          <a:ln w="19050">
-            <a:solidFill>
-              <a:schemeClr val="tx1"/>
-            </a:solidFill>
-          </a:ln>
-        </p:spPr>
-        <p:style>
-          <a:lnRef idx="2">
-            <a:schemeClr val="accent1">
-              <a:shade val="15000"/>
-            </a:schemeClr>
-          </a:lnRef>
-          <a:fillRef idx="1">
-            <a:schemeClr val="accent1"/>
-          </a:fillRef>
-          <a:effectRef idx="0">
-            <a:schemeClr val="accent1"/>
-          </a:effectRef>
-          <a:fontRef idx="minor">
-            <a:schemeClr val="lt1"/>
-          </a:fontRef>
-        </p:style>
-        <p:txBody>
-          <a:bodyPr rtlCol="0" anchor="ctr"/>
-          <a:lstStyle/>
-          <a:p>
-            <a:pPr algn="ctr"/>
-            <a:r>
-              <a:rPr lang="en-US" sz="2000" dirty="0">
-                <a:solidFill>
-                  <a:schemeClr val="tx1"/>
-                </a:solidFill>
-              </a:rPr>
-              <a:t>6. Web/Document ranking and search</a:t>
-            </a:r>
-          </a:p>
-        </p:txBody>
-      </p:sp>
-      <p:sp>
-        <p:nvSpPr>
-          <p:cNvPr id="22" name="Content Placeholder 2">
-            <a:extLst>
-              <a:ext uri="{FF2B5EF4-FFF2-40B4-BE49-F238E27FC236}">
-                <a16:creationId xmlns:a16="http://schemas.microsoft.com/office/drawing/2014/main" id="{302608D4-DE73-B603-CD44-1D4BB221F2DE}"/>
+                <a16:creationId xmlns:a16="http://schemas.microsoft.com/office/drawing/2014/main" id="{CD29F70F-B868-451B-A65D-8721F4C7A2D9}"/>
               </a:ext>
             </a:extLst>
           </p:cNvPr>
@@ -19403,189 +19817,42 @@
         </p:nvSpPr>
         <p:spPr>
           <a:xfrm>
-            <a:off x="865089" y="797597"/>
-            <a:ext cx="10515600" cy="850578"/>
+            <a:off x="838200" y="-635"/>
+            <a:ext cx="10515600" cy="1325563"/>
           </a:xfrm>
           <a:prstGeom prst="rect">
             <a:avLst/>
           </a:prstGeom>
         </p:spPr>
         <p:txBody>
-          <a:bodyPr>
-            <a:noAutofit/>
+          <a:bodyPr vert="horz" lIns="91440" tIns="45720" rIns="91440" bIns="45720" rtlCol="0" anchor="ctr">
+            <a:normAutofit/>
           </a:bodyPr>
           <a:lstStyle>
-            <a:lvl1pPr marL="228600" indent="-228600" algn="l" defTabSz="914400" rtl="0" eaLnBrk="1" latinLnBrk="0" hangingPunct="1">
+            <a:lvl1pPr algn="l" defTabSz="914400" rtl="0" eaLnBrk="1" latinLnBrk="0" hangingPunct="1">
               <a:lnSpc>
                 <a:spcPct val="90000"/>
               </a:lnSpc>
               <a:spcBef>
-                <a:spcPts val="1000"/>
+                <a:spcPct val="0"/>
               </a:spcBef>
-              <a:buFont typeface="Arial" panose="020B0604020202020204" pitchFamily="34" charset="0"/>
-              <a:buChar char="•"/>
-              <a:defRPr sz="2800" kern="1200">
+              <a:buNone/>
+              <a:defRPr sz="4400" kern="1200">
                 <a:solidFill>
                   <a:schemeClr val="tx1"/>
                 </a:solidFill>
-                <a:latin typeface="+mn-lt"/>
-                <a:ea typeface="+mn-ea"/>
-                <a:cs typeface="+mn-cs"/>
+                <a:latin typeface="+mj-lt"/>
+                <a:ea typeface="+mj-ea"/>
+                <a:cs typeface="+mj-cs"/>
               </a:defRPr>
             </a:lvl1pPr>
-            <a:lvl2pPr marL="685800" indent="-228600" algn="l" defTabSz="914400" rtl="0" eaLnBrk="1" latinLnBrk="0" hangingPunct="1">
-              <a:lnSpc>
-                <a:spcPct val="90000"/>
-              </a:lnSpc>
-              <a:spcBef>
-                <a:spcPts val="500"/>
-              </a:spcBef>
-              <a:buFont typeface="Arial" panose="020B0604020202020204" pitchFamily="34" charset="0"/>
-              <a:buChar char="•"/>
-              <a:defRPr sz="2400" kern="1200">
-                <a:solidFill>
-                  <a:schemeClr val="tx1"/>
-                </a:solidFill>
+          </a:lstStyle>
+          <a:p>
+            <a:r>
+              <a:rPr lang="en-US" dirty="0">
                 <a:latin typeface="+mn-lt"/>
-                <a:ea typeface="+mn-ea"/>
-                <a:cs typeface="+mn-cs"/>
-              </a:defRPr>
-            </a:lvl2pPr>
-            <a:lvl3pPr marL="1143000" indent="-228600" algn="l" defTabSz="914400" rtl="0" eaLnBrk="1" latinLnBrk="0" hangingPunct="1">
-              <a:lnSpc>
-                <a:spcPct val="90000"/>
-              </a:lnSpc>
-              <a:spcBef>
-                <a:spcPts val="500"/>
-              </a:spcBef>
-              <a:buFont typeface="Arial" panose="020B0604020202020204" pitchFamily="34" charset="0"/>
-              <a:buChar char="•"/>
-              <a:defRPr sz="2000" kern="1200">
-                <a:solidFill>
-                  <a:schemeClr val="tx1"/>
-                </a:solidFill>
-                <a:latin typeface="+mn-lt"/>
-                <a:ea typeface="+mn-ea"/>
-                <a:cs typeface="+mn-cs"/>
-              </a:defRPr>
-            </a:lvl3pPr>
-            <a:lvl4pPr marL="1600200" indent="-228600" algn="l" defTabSz="914400" rtl="0" eaLnBrk="1" latinLnBrk="0" hangingPunct="1">
-              <a:lnSpc>
-                <a:spcPct val="90000"/>
-              </a:lnSpc>
-              <a:spcBef>
-                <a:spcPts val="500"/>
-              </a:spcBef>
-              <a:buFont typeface="Arial" panose="020B0604020202020204" pitchFamily="34" charset="0"/>
-              <a:buChar char="•"/>
-              <a:defRPr sz="1800" kern="1200">
-                <a:solidFill>
-                  <a:schemeClr val="tx1"/>
-                </a:solidFill>
-                <a:latin typeface="+mn-lt"/>
-                <a:ea typeface="+mn-ea"/>
-                <a:cs typeface="+mn-cs"/>
-              </a:defRPr>
-            </a:lvl4pPr>
-            <a:lvl5pPr marL="2057400" indent="-228600" algn="l" defTabSz="914400" rtl="0" eaLnBrk="1" latinLnBrk="0" hangingPunct="1">
-              <a:lnSpc>
-                <a:spcPct val="90000"/>
-              </a:lnSpc>
-              <a:spcBef>
-                <a:spcPts val="500"/>
-              </a:spcBef>
-              <a:buFont typeface="Arial" panose="020B0604020202020204" pitchFamily="34" charset="0"/>
-              <a:buChar char="•"/>
-              <a:defRPr sz="1800" kern="1200">
-                <a:solidFill>
-                  <a:schemeClr val="tx1"/>
-                </a:solidFill>
-                <a:latin typeface="+mn-lt"/>
-                <a:ea typeface="+mn-ea"/>
-                <a:cs typeface="+mn-cs"/>
-              </a:defRPr>
-            </a:lvl5pPr>
-            <a:lvl6pPr marL="2514600" indent="-228600" algn="l" defTabSz="914400" rtl="0" eaLnBrk="1" latinLnBrk="0" hangingPunct="1">
-              <a:lnSpc>
-                <a:spcPct val="90000"/>
-              </a:lnSpc>
-              <a:spcBef>
-                <a:spcPts val="500"/>
-              </a:spcBef>
-              <a:buFont typeface="Arial" panose="020B0604020202020204" pitchFamily="34" charset="0"/>
-              <a:buChar char="•"/>
-              <a:defRPr sz="1800" kern="1200">
-                <a:solidFill>
-                  <a:schemeClr val="tx1"/>
-                </a:solidFill>
-                <a:latin typeface="+mn-lt"/>
-                <a:ea typeface="+mn-ea"/>
-                <a:cs typeface="+mn-cs"/>
-              </a:defRPr>
-            </a:lvl6pPr>
-            <a:lvl7pPr marL="2971800" indent="-228600" algn="l" defTabSz="914400" rtl="0" eaLnBrk="1" latinLnBrk="0" hangingPunct="1">
-              <a:lnSpc>
-                <a:spcPct val="90000"/>
-              </a:lnSpc>
-              <a:spcBef>
-                <a:spcPts val="500"/>
-              </a:spcBef>
-              <a:buFont typeface="Arial" panose="020B0604020202020204" pitchFamily="34" charset="0"/>
-              <a:buChar char="•"/>
-              <a:defRPr sz="1800" kern="1200">
-                <a:solidFill>
-                  <a:schemeClr val="tx1"/>
-                </a:solidFill>
-                <a:latin typeface="+mn-lt"/>
-                <a:ea typeface="+mn-ea"/>
-                <a:cs typeface="+mn-cs"/>
-              </a:defRPr>
-            </a:lvl7pPr>
-            <a:lvl8pPr marL="3429000" indent="-228600" algn="l" defTabSz="914400" rtl="0" eaLnBrk="1" latinLnBrk="0" hangingPunct="1">
-              <a:lnSpc>
-                <a:spcPct val="90000"/>
-              </a:lnSpc>
-              <a:spcBef>
-                <a:spcPts val="500"/>
-              </a:spcBef>
-              <a:buFont typeface="Arial" panose="020B0604020202020204" pitchFamily="34" charset="0"/>
-              <a:buChar char="•"/>
-              <a:defRPr sz="1800" kern="1200">
-                <a:solidFill>
-                  <a:schemeClr val="tx1"/>
-                </a:solidFill>
-                <a:latin typeface="+mn-lt"/>
-                <a:ea typeface="+mn-ea"/>
-                <a:cs typeface="+mn-cs"/>
-              </a:defRPr>
-            </a:lvl8pPr>
-            <a:lvl9pPr marL="3886200" indent="-228600" algn="l" defTabSz="914400" rtl="0" eaLnBrk="1" latinLnBrk="0" hangingPunct="1">
-              <a:lnSpc>
-                <a:spcPct val="90000"/>
-              </a:lnSpc>
-              <a:spcBef>
-                <a:spcPts val="500"/>
-              </a:spcBef>
-              <a:buFont typeface="Arial" panose="020B0604020202020204" pitchFamily="34" charset="0"/>
-              <a:buChar char="•"/>
-              <a:defRPr sz="1800" kern="1200">
-                <a:solidFill>
-                  <a:schemeClr val="tx1"/>
-                </a:solidFill>
-                <a:latin typeface="+mn-lt"/>
-                <a:ea typeface="+mn-ea"/>
-                <a:cs typeface="+mn-cs"/>
-              </a:defRPr>
-            </a:lvl9pPr>
-          </a:lstStyle>
-          <a:p>
-            <a:pPr marL="0" indent="0">
-              <a:buFont typeface="Arial" panose="020B0604020202020204" pitchFamily="34" charset="0"/>
-              <a:buNone/>
-            </a:pPr>
-            <a:r>
-              <a:rPr lang="en-US" dirty="0"/>
-              <a:t>The main topics in this course are interconnected and build on each other</a:t>
+              </a:rPr>
+              <a:t>Introduction to key-value indexing</a:t>
             </a:r>
           </a:p>
         </p:txBody>
@@ -19593,22 +19860,329 @@
     </p:spTree>
     <p:extLst>
       <p:ext uri="{BB962C8B-B14F-4D97-AF65-F5344CB8AC3E}">
-        <p14:creationId xmlns:p14="http://schemas.microsoft.com/office/powerpoint/2010/main" val="581234857"/>
+        <p14:creationId xmlns:p14="http://schemas.microsoft.com/office/powerpoint/2010/main" val="2786196533"/>
       </p:ext>
     </p:extLst>
   </p:cSld>
   <p:clrMapOvr>
     <a:masterClrMapping/>
   </p:clrMapOvr>
+  <p:timing>
+    <p:tnLst>
+      <p:par>
+        <p:cTn id="1" dur="indefinite" restart="never" nodeType="tmRoot">
+          <p:childTnLst>
+            <p:seq concurrent="1" nextAc="seek">
+              <p:cTn id="2" dur="indefinite" nodeType="mainSeq">
+                <p:childTnLst>
+                  <p:par>
+                    <p:cTn id="3" fill="hold">
+                      <p:stCondLst>
+                        <p:cond delay="indefinite"/>
+                      </p:stCondLst>
+                      <p:childTnLst>
+                        <p:par>
+                          <p:cTn id="4" fill="hold">
+                            <p:stCondLst>
+                              <p:cond delay="0"/>
+                            </p:stCondLst>
+                            <p:childTnLst>
+                              <p:par>
+                                <p:cTn id="5" presetID="1" presetClass="entr" presetSubtype="0" fill="hold" nodeType="clickEffect">
+                                  <p:stCondLst>
+                                    <p:cond delay="0"/>
+                                  </p:stCondLst>
+                                  <p:childTnLst>
+                                    <p:set>
+                                      <p:cBhvr>
+                                        <p:cTn id="6" dur="1" fill="hold">
+                                          <p:stCondLst>
+                                            <p:cond delay="0"/>
+                                          </p:stCondLst>
+                                        </p:cTn>
+                                        <p:tgtEl>
+                                          <p:spTgt spid="3">
+                                            <p:txEl>
+                                              <p:pRg st="1" end="1"/>
+                                            </p:txEl>
+                                          </p:spTgt>
+                                        </p:tgtEl>
+                                        <p:attrNameLst>
+                                          <p:attrName>style.visibility</p:attrName>
+                                        </p:attrNameLst>
+                                      </p:cBhvr>
+                                      <p:to>
+                                        <p:strVal val="visible"/>
+                                      </p:to>
+                                    </p:set>
+                                  </p:childTnLst>
+                                </p:cTn>
+                              </p:par>
+                            </p:childTnLst>
+                          </p:cTn>
+                        </p:par>
+                      </p:childTnLst>
+                    </p:cTn>
+                  </p:par>
+                  <p:par>
+                    <p:cTn id="7" fill="hold">
+                      <p:stCondLst>
+                        <p:cond delay="indefinite"/>
+                      </p:stCondLst>
+                      <p:childTnLst>
+                        <p:par>
+                          <p:cTn id="8" fill="hold">
+                            <p:stCondLst>
+                              <p:cond delay="0"/>
+                            </p:stCondLst>
+                            <p:childTnLst>
+                              <p:par>
+                                <p:cTn id="9" presetID="1" presetClass="entr" presetSubtype="0" fill="hold" nodeType="clickEffect">
+                                  <p:stCondLst>
+                                    <p:cond delay="0"/>
+                                  </p:stCondLst>
+                                  <p:childTnLst>
+                                    <p:set>
+                                      <p:cBhvr>
+                                        <p:cTn id="10" dur="1" fill="hold">
+                                          <p:stCondLst>
+                                            <p:cond delay="0"/>
+                                          </p:stCondLst>
+                                        </p:cTn>
+                                        <p:tgtEl>
+                                          <p:spTgt spid="3">
+                                            <p:txEl>
+                                              <p:pRg st="2" end="2"/>
+                                            </p:txEl>
+                                          </p:spTgt>
+                                        </p:tgtEl>
+                                        <p:attrNameLst>
+                                          <p:attrName>style.visibility</p:attrName>
+                                        </p:attrNameLst>
+                                      </p:cBhvr>
+                                      <p:to>
+                                        <p:strVal val="visible"/>
+                                      </p:to>
+                                    </p:set>
+                                  </p:childTnLst>
+                                </p:cTn>
+                              </p:par>
+                            </p:childTnLst>
+                          </p:cTn>
+                        </p:par>
+                      </p:childTnLst>
+                    </p:cTn>
+                  </p:par>
+                  <p:par>
+                    <p:cTn id="11" fill="hold">
+                      <p:stCondLst>
+                        <p:cond delay="indefinite"/>
+                      </p:stCondLst>
+                      <p:childTnLst>
+                        <p:par>
+                          <p:cTn id="12" fill="hold">
+                            <p:stCondLst>
+                              <p:cond delay="0"/>
+                            </p:stCondLst>
+                            <p:childTnLst>
+                              <p:par>
+                                <p:cTn id="13" presetID="1" presetClass="entr" presetSubtype="0" fill="hold" nodeType="clickEffect">
+                                  <p:stCondLst>
+                                    <p:cond delay="0"/>
+                                  </p:stCondLst>
+                                  <p:childTnLst>
+                                    <p:set>
+                                      <p:cBhvr>
+                                        <p:cTn id="14" dur="1" fill="hold">
+                                          <p:stCondLst>
+                                            <p:cond delay="0"/>
+                                          </p:stCondLst>
+                                        </p:cTn>
+                                        <p:tgtEl>
+                                          <p:spTgt spid="3">
+                                            <p:txEl>
+                                              <p:pRg st="3" end="3"/>
+                                            </p:txEl>
+                                          </p:spTgt>
+                                        </p:tgtEl>
+                                        <p:attrNameLst>
+                                          <p:attrName>style.visibility</p:attrName>
+                                        </p:attrNameLst>
+                                      </p:cBhvr>
+                                      <p:to>
+                                        <p:strVal val="visible"/>
+                                      </p:to>
+                                    </p:set>
+                                  </p:childTnLst>
+                                </p:cTn>
+                              </p:par>
+                              <p:par>
+                                <p:cTn id="15" presetID="1" presetClass="entr" presetSubtype="0" fill="hold" nodeType="withEffect">
+                                  <p:stCondLst>
+                                    <p:cond delay="0"/>
+                                  </p:stCondLst>
+                                  <p:childTnLst>
+                                    <p:set>
+                                      <p:cBhvr>
+                                        <p:cTn id="16" dur="1" fill="hold">
+                                          <p:stCondLst>
+                                            <p:cond delay="0"/>
+                                          </p:stCondLst>
+                                        </p:cTn>
+                                        <p:tgtEl>
+                                          <p:spTgt spid="3">
+                                            <p:txEl>
+                                              <p:pRg st="4" end="4"/>
+                                            </p:txEl>
+                                          </p:spTgt>
+                                        </p:tgtEl>
+                                        <p:attrNameLst>
+                                          <p:attrName>style.visibility</p:attrName>
+                                        </p:attrNameLst>
+                                      </p:cBhvr>
+                                      <p:to>
+                                        <p:strVal val="visible"/>
+                                      </p:to>
+                                    </p:set>
+                                  </p:childTnLst>
+                                </p:cTn>
+                              </p:par>
+                              <p:par>
+                                <p:cTn id="17" presetID="1" presetClass="entr" presetSubtype="0" fill="hold" nodeType="withEffect">
+                                  <p:stCondLst>
+                                    <p:cond delay="0"/>
+                                  </p:stCondLst>
+                                  <p:childTnLst>
+                                    <p:set>
+                                      <p:cBhvr>
+                                        <p:cTn id="18" dur="1" fill="hold">
+                                          <p:stCondLst>
+                                            <p:cond delay="0"/>
+                                          </p:stCondLst>
+                                        </p:cTn>
+                                        <p:tgtEl>
+                                          <p:spTgt spid="3">
+                                            <p:txEl>
+                                              <p:pRg st="5" end="5"/>
+                                            </p:txEl>
+                                          </p:spTgt>
+                                        </p:tgtEl>
+                                        <p:attrNameLst>
+                                          <p:attrName>style.visibility</p:attrName>
+                                        </p:attrNameLst>
+                                      </p:cBhvr>
+                                      <p:to>
+                                        <p:strVal val="visible"/>
+                                      </p:to>
+                                    </p:set>
+                                  </p:childTnLst>
+                                </p:cTn>
+                              </p:par>
+                              <p:par>
+                                <p:cTn id="19" presetID="1" presetClass="entr" presetSubtype="0" fill="hold" nodeType="withEffect">
+                                  <p:stCondLst>
+                                    <p:cond delay="0"/>
+                                  </p:stCondLst>
+                                  <p:childTnLst>
+                                    <p:set>
+                                      <p:cBhvr>
+                                        <p:cTn id="20" dur="1" fill="hold">
+                                          <p:stCondLst>
+                                            <p:cond delay="0"/>
+                                          </p:stCondLst>
+                                        </p:cTn>
+                                        <p:tgtEl>
+                                          <p:spTgt spid="3">
+                                            <p:txEl>
+                                              <p:pRg st="6" end="6"/>
+                                            </p:txEl>
+                                          </p:spTgt>
+                                        </p:tgtEl>
+                                        <p:attrNameLst>
+                                          <p:attrName>style.visibility</p:attrName>
+                                        </p:attrNameLst>
+                                      </p:cBhvr>
+                                      <p:to>
+                                        <p:strVal val="visible"/>
+                                      </p:to>
+                                    </p:set>
+                                  </p:childTnLst>
+                                </p:cTn>
+                              </p:par>
+                              <p:par>
+                                <p:cTn id="21" presetID="1" presetClass="entr" presetSubtype="0" fill="hold" nodeType="withEffect">
+                                  <p:stCondLst>
+                                    <p:cond delay="0"/>
+                                  </p:stCondLst>
+                                  <p:childTnLst>
+                                    <p:set>
+                                      <p:cBhvr>
+                                        <p:cTn id="22" dur="1" fill="hold">
+                                          <p:stCondLst>
+                                            <p:cond delay="0"/>
+                                          </p:stCondLst>
+                                        </p:cTn>
+                                        <p:tgtEl>
+                                          <p:spTgt spid="3">
+                                            <p:txEl>
+                                              <p:pRg st="7" end="7"/>
+                                            </p:txEl>
+                                          </p:spTgt>
+                                        </p:tgtEl>
+                                        <p:attrNameLst>
+                                          <p:attrName>style.visibility</p:attrName>
+                                        </p:attrNameLst>
+                                      </p:cBhvr>
+                                      <p:to>
+                                        <p:strVal val="visible"/>
+                                      </p:to>
+                                    </p:set>
+                                  </p:childTnLst>
+                                </p:cTn>
+                              </p:par>
+                            </p:childTnLst>
+                          </p:cTn>
+                        </p:par>
+                      </p:childTnLst>
+                    </p:cTn>
+                  </p:par>
+                </p:childTnLst>
+              </p:cTn>
+              <p:prevCondLst>
+                <p:cond evt="onPrev" delay="0">
+                  <p:tgtEl>
+                    <p:sldTgt/>
+                  </p:tgtEl>
+                </p:cond>
+              </p:prevCondLst>
+              <p:nextCondLst>
+                <p:cond evt="onNext" delay="0">
+                  <p:tgtEl>
+                    <p:sldTgt/>
+                  </p:tgtEl>
+                </p:cond>
+              </p:nextCondLst>
+            </p:seq>
+          </p:childTnLst>
+        </p:cTn>
+      </p:par>
+    </p:tnLst>
+  </p:timing>
 </p:sld>
 </file>
 
-<file path=ppt/slides/slide33.xml><?xml version="1.0" encoding="utf-8"?>
+<file path=ppt/slides/slide34.xml><?xml version="1.0" encoding="utf-8"?>
 <p:sld xmlns:a="http://schemas.openxmlformats.org/drawingml/2006/main" xmlns:r="http://schemas.openxmlformats.org/officeDocument/2006/relationships" xmlns:p="http://schemas.openxmlformats.org/presentationml/2006/main">
   <p:cSld>
     <p:spTree>
       <p:nvGrpSpPr>
-        <p:cNvPr id="1" name=""/>
+        <p:cNvPr id="1" name="">
+          <a:extLst>
+            <a:ext uri="{FF2B5EF4-FFF2-40B4-BE49-F238E27FC236}">
+              <a16:creationId xmlns:a16="http://schemas.microsoft.com/office/drawing/2014/main" id="{F06338BD-3218-FB67-58C9-525CC2AA542F}"/>
+            </a:ext>
+          </a:extLst>
+        </p:cNvPr>
         <p:cNvGrpSpPr/>
         <p:nvPr/>
       </p:nvGrpSpPr>
@@ -19627,7 +20201,7 @@
               <p:cNvPr id="3" name="Content Placeholder 2">
                 <a:extLst>
                   <a:ext uri="{FF2B5EF4-FFF2-40B4-BE49-F238E27FC236}">
-                    <a16:creationId xmlns:a16="http://schemas.microsoft.com/office/drawing/2014/main" id="{258E6AF3-7615-4BD1-878E-A94C93E98F90}"/>
+                    <a16:creationId xmlns:a16="http://schemas.microsoft.com/office/drawing/2014/main" id="{0E9DA594-FA8E-AFF0-BC71-4343BB479A15}"/>
                   </a:ext>
                 </a:extLst>
               </p:cNvPr>
@@ -19803,7 +20377,7 @@
               <p:cNvPr id="3" name="Content Placeholder 2">
                 <a:extLst>
                   <a:ext uri="{FF2B5EF4-FFF2-40B4-BE49-F238E27FC236}">
-                    <a16:creationId xmlns:a16="http://schemas.microsoft.com/office/drawing/2014/main" id="{258E6AF3-7615-4BD1-878E-A94C93E98F90}"/>
+                    <a16:creationId xmlns:a16="http://schemas.microsoft.com/office/drawing/2014/main" id="{0E9DA594-FA8E-AFF0-BC71-4343BB479A15}"/>
                   </a:ext>
                 </a:extLst>
               </p:cNvPr>
@@ -19846,7 +20420,7 @@
           <p:cNvPr id="6" name="Title 1">
             <a:extLst>
               <a:ext uri="{FF2B5EF4-FFF2-40B4-BE49-F238E27FC236}">
-                <a16:creationId xmlns:a16="http://schemas.microsoft.com/office/drawing/2014/main" id="{CD29F70F-B868-451B-A65D-8721F4C7A2D9}"/>
+                <a16:creationId xmlns:a16="http://schemas.microsoft.com/office/drawing/2014/main" id="{5B3478C9-9FBE-BB6A-F1F0-2413227DA6E1}"/>
               </a:ext>
             </a:extLst>
           </p:cNvPr>
@@ -19900,7 +20474,7 @@
     </p:spTree>
     <p:extLst>
       <p:ext uri="{BB962C8B-B14F-4D97-AF65-F5344CB8AC3E}">
-        <p14:creationId xmlns:p14="http://schemas.microsoft.com/office/powerpoint/2010/main" val="2786196533"/>
+        <p14:creationId xmlns:p14="http://schemas.microsoft.com/office/powerpoint/2010/main" val="2096130958"/>
       </p:ext>
     </p:extLst>
   </p:cSld>
@@ -20304,7 +20878,7 @@
 </p:sld>
 </file>
 
-<file path=ppt/slides/slide34.xml><?xml version="1.0" encoding="utf-8"?>
+<file path=ppt/slides/slide35.xml><?xml version="1.0" encoding="utf-8"?>
 <p:sld xmlns:a="http://schemas.openxmlformats.org/drawingml/2006/main" xmlns:r="http://schemas.openxmlformats.org/officeDocument/2006/relationships" xmlns:p="http://schemas.openxmlformats.org/presentationml/2006/main">
   <p:cSld>
     <p:spTree>
@@ -20919,7 +21493,7 @@
 </p:sld>
 </file>
 
-<file path=ppt/slides/slide35.xml><?xml version="1.0" encoding="utf-8"?>
+<file path=ppt/slides/slide36.xml><?xml version="1.0" encoding="utf-8"?>
 <p:sld xmlns:a="http://schemas.openxmlformats.org/drawingml/2006/main" xmlns:r="http://schemas.openxmlformats.org/officeDocument/2006/relationships" xmlns:p="http://schemas.openxmlformats.org/presentationml/2006/main">
   <p:cSld>
     <p:spTree>
@@ -21406,7 +21980,7 @@
 </p:sld>
 </file>
 
-<file path=ppt/slides/slide36.xml><?xml version="1.0" encoding="utf-8"?>
+<file path=ppt/slides/slide37.xml><?xml version="1.0" encoding="utf-8"?>
 <p:sld xmlns:a="http://schemas.openxmlformats.org/drawingml/2006/main" xmlns:r="http://schemas.openxmlformats.org/officeDocument/2006/relationships" xmlns:p="http://schemas.openxmlformats.org/presentationml/2006/main">
   <p:cSld>
     <p:spTree>
@@ -21931,7 +22505,7 @@
 </p:sld>
 </file>
 
-<file path=ppt/slides/slide37.xml><?xml version="1.0" encoding="utf-8"?>
+<file path=ppt/slides/slide38.xml><?xml version="1.0" encoding="utf-8"?>
 <p:sld xmlns:a="http://schemas.openxmlformats.org/drawingml/2006/main" xmlns:r="http://schemas.openxmlformats.org/officeDocument/2006/relationships" xmlns:p="http://schemas.openxmlformats.org/presentationml/2006/main">
   <p:cSld>
     <p:spTree>
@@ -22515,7 +23089,7 @@
 </p:sld>
 </file>
 
-<file path=ppt/slides/slide38.xml><?xml version="1.0" encoding="utf-8"?>
+<file path=ppt/slides/slide39.xml><?xml version="1.0" encoding="utf-8"?>
 <p:sld xmlns:a="http://schemas.openxmlformats.org/drawingml/2006/main" xmlns:r="http://schemas.openxmlformats.org/officeDocument/2006/relationships" xmlns:p="http://schemas.openxmlformats.org/presentationml/2006/main">
   <p:cSld>
     <p:spTree>
@@ -24926,66 +25500,6 @@
 </p:sld>
 </file>
 
-<file path=ppt/slides/slide39.xml><?xml version="1.0" encoding="utf-8"?>
-<p:sld xmlns:a="http://schemas.openxmlformats.org/drawingml/2006/main" xmlns:r="http://schemas.openxmlformats.org/officeDocument/2006/relationships" xmlns:p="http://schemas.openxmlformats.org/presentationml/2006/main">
-  <p:cSld>
-    <p:spTree>
-      <p:nvGrpSpPr>
-        <p:cNvPr id="1" name=""/>
-        <p:cNvGrpSpPr/>
-        <p:nvPr/>
-      </p:nvGrpSpPr>
-      <p:grpSpPr>
-        <a:xfrm>
-          <a:off x="0" y="0"/>
-          <a:ext cx="0" cy="0"/>
-          <a:chOff x="0" y="0"/>
-          <a:chExt cx="0" cy="0"/>
-        </a:xfrm>
-      </p:grpSpPr>
-      <p:sp>
-        <p:nvSpPr>
-          <p:cNvPr id="2" name="Title 1">
-            <a:extLst>
-              <a:ext uri="{FF2B5EF4-FFF2-40B4-BE49-F238E27FC236}">
-                <a16:creationId xmlns:a16="http://schemas.microsoft.com/office/drawing/2014/main" id="{F8A33362-6456-0F5B-5570-FA2A30C5C24B}"/>
-              </a:ext>
-            </a:extLst>
-          </p:cNvPr>
-          <p:cNvSpPr>
-            <a:spLocks noGrp="1"/>
-          </p:cNvSpPr>
-          <p:nvPr>
-            <p:ph type="ctrTitle"/>
-          </p:nvPr>
-        </p:nvSpPr>
-        <p:spPr/>
-        <p:txBody>
-          <a:bodyPr>
-            <a:normAutofit/>
-          </a:bodyPr>
-          <a:lstStyle/>
-          <a:p>
-            <a:r>
-              <a:rPr lang="en-US" sz="4400" dirty="0"/>
-              <a:t>Introduction to Hashing</a:t>
-            </a:r>
-          </a:p>
-        </p:txBody>
-      </p:sp>
-    </p:spTree>
-    <p:extLst>
-      <p:ext uri="{BB962C8B-B14F-4D97-AF65-F5344CB8AC3E}">
-        <p14:creationId xmlns:p14="http://schemas.microsoft.com/office/powerpoint/2010/main" val="3957708175"/>
-      </p:ext>
-    </p:extLst>
-  </p:cSld>
-  <p:clrMapOvr>
-    <a:masterClrMapping/>
-  </p:clrMapOvr>
-</p:sld>
-</file>
-
 <file path=ppt/slides/slide4.xml><?xml version="1.0" encoding="utf-8"?>
 <p:sld xmlns:a="http://schemas.openxmlformats.org/drawingml/2006/main" xmlns:r="http://schemas.openxmlformats.org/officeDocument/2006/relationships" xmlns:p="http://schemas.openxmlformats.org/presentationml/2006/main">
   <p:cSld>
@@ -25492,6 +26006,66 @@
           <a:chExt cx="0" cy="0"/>
         </a:xfrm>
       </p:grpSpPr>
+      <p:sp>
+        <p:nvSpPr>
+          <p:cNvPr id="2" name="Title 1">
+            <a:extLst>
+              <a:ext uri="{FF2B5EF4-FFF2-40B4-BE49-F238E27FC236}">
+                <a16:creationId xmlns:a16="http://schemas.microsoft.com/office/drawing/2014/main" id="{F8A33362-6456-0F5B-5570-FA2A30C5C24B}"/>
+              </a:ext>
+            </a:extLst>
+          </p:cNvPr>
+          <p:cNvSpPr>
+            <a:spLocks noGrp="1"/>
+          </p:cNvSpPr>
+          <p:nvPr>
+            <p:ph type="ctrTitle"/>
+          </p:nvPr>
+        </p:nvSpPr>
+        <p:spPr/>
+        <p:txBody>
+          <a:bodyPr>
+            <a:normAutofit/>
+          </a:bodyPr>
+          <a:lstStyle/>
+          <a:p>
+            <a:r>
+              <a:rPr lang="en-US" sz="4400" dirty="0"/>
+              <a:t>Introduction to Hashing</a:t>
+            </a:r>
+          </a:p>
+        </p:txBody>
+      </p:sp>
+    </p:spTree>
+    <p:extLst>
+      <p:ext uri="{BB962C8B-B14F-4D97-AF65-F5344CB8AC3E}">
+        <p14:creationId xmlns:p14="http://schemas.microsoft.com/office/powerpoint/2010/main" val="3957708175"/>
+      </p:ext>
+    </p:extLst>
+  </p:cSld>
+  <p:clrMapOvr>
+    <a:masterClrMapping/>
+  </p:clrMapOvr>
+</p:sld>
+</file>
+
+<file path=ppt/slides/slide41.xml><?xml version="1.0" encoding="utf-8"?>
+<p:sld xmlns:a="http://schemas.openxmlformats.org/drawingml/2006/main" xmlns:r="http://schemas.openxmlformats.org/officeDocument/2006/relationships" xmlns:p="http://schemas.openxmlformats.org/presentationml/2006/main">
+  <p:cSld>
+    <p:spTree>
+      <p:nvGrpSpPr>
+        <p:cNvPr id="1" name=""/>
+        <p:cNvGrpSpPr/>
+        <p:nvPr/>
+      </p:nvGrpSpPr>
+      <p:grpSpPr>
+        <a:xfrm>
+          <a:off x="0" y="0"/>
+          <a:ext cx="0" cy="0"/>
+          <a:chOff x="0" y="0"/>
+          <a:chExt cx="0" cy="0"/>
+        </a:xfrm>
+      </p:grpSpPr>
       <mc:AlternateContent xmlns:mc="http://schemas.openxmlformats.org/markup-compatibility/2006" xmlns:a14="http://schemas.microsoft.com/office/drawing/2010/main">
         <mc:Choice Requires="a14">
           <p:sp>
@@ -26112,7 +26686,7 @@
 </p:sld>
 </file>
 
-<file path=ppt/slides/slide41.xml><?xml version="1.0" encoding="utf-8"?>
+<file path=ppt/slides/slide42.xml><?xml version="1.0" encoding="utf-8"?>
 <p:sld xmlns:a="http://schemas.openxmlformats.org/drawingml/2006/main" xmlns:r="http://schemas.openxmlformats.org/officeDocument/2006/relationships" xmlns:p="http://schemas.openxmlformats.org/presentationml/2006/main">
   <p:cSld>
     <p:spTree>
@@ -26585,7 +27159,7 @@
 </p:sld>
 </file>
 
-<file path=ppt/slides/slide42.xml><?xml version="1.0" encoding="utf-8"?>
+<file path=ppt/slides/slide43.xml><?xml version="1.0" encoding="utf-8"?>
 <p:sld xmlns:a="http://schemas.openxmlformats.org/drawingml/2006/main" xmlns:r="http://schemas.openxmlformats.org/officeDocument/2006/relationships" xmlns:p="http://schemas.openxmlformats.org/presentationml/2006/main">
   <p:cSld>
     <p:spTree>
@@ -29513,7 +30087,7 @@
 </p:sld>
 </file>
 
-<file path=ppt/slides/slide43.xml><?xml version="1.0" encoding="utf-8"?>
+<file path=ppt/slides/slide44.xml><?xml version="1.0" encoding="utf-8"?>
 <p:sld xmlns:a="http://schemas.openxmlformats.org/drawingml/2006/main" xmlns:r="http://schemas.openxmlformats.org/officeDocument/2006/relationships" xmlns:p="http://schemas.openxmlformats.org/presentationml/2006/main">
   <p:cSld>
     <p:spTree>
@@ -32388,7 +32962,7 @@
 </p:sld>
 </file>
 
-<file path=ppt/slides/slide44.xml><?xml version="1.0" encoding="utf-8"?>
+<file path=ppt/slides/slide45.xml><?xml version="1.0" encoding="utf-8"?>
 <p:sld xmlns:a="http://schemas.openxmlformats.org/drawingml/2006/main" xmlns:r="http://schemas.openxmlformats.org/officeDocument/2006/relationships" xmlns:p="http://schemas.openxmlformats.org/presentationml/2006/main">
   <p:cSld>
     <p:spTree>
@@ -32454,7 +33028,7 @@
 </p:sld>
 </file>
 
-<file path=ppt/slides/slide45.xml><?xml version="1.0" encoding="utf-8"?>
+<file path=ppt/slides/slide46.xml><?xml version="1.0" encoding="utf-8"?>
 <p:sld xmlns:a="http://schemas.openxmlformats.org/drawingml/2006/main" xmlns:r="http://schemas.openxmlformats.org/officeDocument/2006/relationships" xmlns:p="http://schemas.openxmlformats.org/presentationml/2006/main">
   <p:cSld>
     <p:spTree>
@@ -32858,7 +33432,7 @@
 </p:sld>
 </file>
 
-<file path=ppt/slides/slide46.xml><?xml version="1.0" encoding="utf-8"?>
+<file path=ppt/slides/slide47.xml><?xml version="1.0" encoding="utf-8"?>
 <p:sld xmlns:a="http://schemas.openxmlformats.org/drawingml/2006/main" xmlns:r="http://schemas.openxmlformats.org/officeDocument/2006/relationships" xmlns:p="http://schemas.openxmlformats.org/presentationml/2006/main">
   <p:cSld>
     <p:spTree>
@@ -33380,7 +33954,7 @@
 </p:sld>
 </file>
 
-<file path=ppt/slides/slide47.xml><?xml version="1.0" encoding="utf-8"?>
+<file path=ppt/slides/slide48.xml><?xml version="1.0" encoding="utf-8"?>
 <p:sld xmlns:a="http://schemas.openxmlformats.org/drawingml/2006/main" xmlns:r="http://schemas.openxmlformats.org/officeDocument/2006/relationships" xmlns:p="http://schemas.openxmlformats.org/presentationml/2006/main">
   <p:cSld>
     <p:spTree>
@@ -34519,7 +35093,7 @@
 </p:sld>
 </file>
 
-<file path=ppt/slides/slide48.xml><?xml version="1.0" encoding="utf-8"?>
+<file path=ppt/slides/slide49.xml><?xml version="1.0" encoding="utf-8"?>
 <p:sld xmlns:a="http://schemas.openxmlformats.org/drawingml/2006/main" xmlns:r="http://schemas.openxmlformats.org/officeDocument/2006/relationships" xmlns:p="http://schemas.openxmlformats.org/presentationml/2006/main">
   <p:cSld>
     <p:spTree>
@@ -34592,7 +35166,401 @@
 </p:sld>
 </file>
 
-<file path=ppt/slides/slide49.xml><?xml version="1.0" encoding="utf-8"?>
+<file path=ppt/slides/slide5.xml><?xml version="1.0" encoding="utf-8"?>
+<p:sld xmlns:a="http://schemas.openxmlformats.org/drawingml/2006/main" xmlns:r="http://schemas.openxmlformats.org/officeDocument/2006/relationships" xmlns:p="http://schemas.openxmlformats.org/presentationml/2006/main">
+  <p:cSld>
+    <p:spTree>
+      <p:nvGrpSpPr>
+        <p:cNvPr id="1" name=""/>
+        <p:cNvGrpSpPr/>
+        <p:nvPr/>
+      </p:nvGrpSpPr>
+      <p:grpSpPr>
+        <a:xfrm>
+          <a:off x="0" y="0"/>
+          <a:ext cx="0" cy="0"/>
+          <a:chOff x="0" y="0"/>
+          <a:chExt cx="0" cy="0"/>
+        </a:xfrm>
+      </p:grpSpPr>
+      <p:sp>
+        <p:nvSpPr>
+          <p:cNvPr id="3" name="Content Placeholder 2">
+            <a:extLst>
+              <a:ext uri="{FF2B5EF4-FFF2-40B4-BE49-F238E27FC236}">
+                <a16:creationId xmlns:a16="http://schemas.microsoft.com/office/drawing/2014/main" id="{258E6AF3-7615-4BD1-878E-A94C93E98F90}"/>
+              </a:ext>
+            </a:extLst>
+          </p:cNvPr>
+          <p:cNvSpPr>
+            <a:spLocks noGrp="1"/>
+          </p:cNvSpPr>
+          <p:nvPr>
+            <p:ph idx="1"/>
+          </p:nvPr>
+        </p:nvSpPr>
+        <p:spPr>
+          <a:xfrm>
+            <a:off x="838200" y="1217458"/>
+            <a:ext cx="10515600" cy="5640542"/>
+          </a:xfrm>
+        </p:spPr>
+        <p:txBody>
+          <a:bodyPr>
+            <a:normAutofit fontScale="92500" lnSpcReduction="10000"/>
+          </a:bodyPr>
+          <a:lstStyle/>
+          <a:p>
+            <a:pPr marL="0" indent="0">
+              <a:buNone/>
+            </a:pPr>
+            <a:r>
+              <a:rPr lang="en-US" sz="3200" dirty="0"/>
+              <a:t>What is the KDD process?   </a:t>
+            </a:r>
+          </a:p>
+          <a:p>
+            <a:pPr marL="0" indent="0">
+              <a:buNone/>
+            </a:pPr>
+            <a:endParaRPr lang="en-US" dirty="0"/>
+          </a:p>
+          <a:p>
+            <a:pPr marL="0" indent="0">
+              <a:buNone/>
+            </a:pPr>
+            <a:endParaRPr lang="en-US" dirty="0"/>
+          </a:p>
+          <a:p>
+            <a:pPr marL="0" indent="0">
+              <a:buNone/>
+            </a:pPr>
+            <a:endParaRPr lang="en-US" dirty="0"/>
+          </a:p>
+          <a:p>
+            <a:pPr marL="0" indent="0">
+              <a:buNone/>
+            </a:pPr>
+            <a:endParaRPr lang="en-US" dirty="0"/>
+          </a:p>
+          <a:p>
+            <a:pPr marL="0" indent="0">
+              <a:buNone/>
+            </a:pPr>
+            <a:endParaRPr lang="en-US" dirty="0"/>
+          </a:p>
+          <a:p>
+            <a:pPr marL="0" indent="0">
+              <a:buNone/>
+            </a:pPr>
+            <a:endParaRPr lang="en-US" dirty="0"/>
+          </a:p>
+          <a:p>
+            <a:pPr marL="0" indent="0">
+              <a:buNone/>
+            </a:pPr>
+            <a:endParaRPr lang="en-US" dirty="0"/>
+          </a:p>
+          <a:p>
+            <a:pPr marL="0" indent="0">
+              <a:buNone/>
+            </a:pPr>
+            <a:endParaRPr lang="en-US" dirty="0">
+              <a:solidFill>
+                <a:schemeClr val="accent1"/>
+              </a:solidFill>
+            </a:endParaRPr>
+          </a:p>
+          <a:p>
+            <a:pPr marL="0" indent="0">
+              <a:buNone/>
+            </a:pPr>
+            <a:endParaRPr lang="en-US" dirty="0">
+              <a:solidFill>
+                <a:schemeClr val="accent1"/>
+              </a:solidFill>
+            </a:endParaRPr>
+          </a:p>
+          <a:p>
+            <a:pPr marL="0" indent="0">
+              <a:buNone/>
+            </a:pPr>
+            <a:endParaRPr lang="en-US" dirty="0">
+              <a:solidFill>
+                <a:schemeClr val="accent1"/>
+              </a:solidFill>
+            </a:endParaRPr>
+          </a:p>
+          <a:p>
+            <a:pPr marL="0" indent="0">
+              <a:buNone/>
+            </a:pPr>
+            <a:r>
+              <a:rPr lang="en-US" dirty="0">
+                <a:solidFill>
+                  <a:schemeClr val="accent1"/>
+                </a:solidFill>
+              </a:rPr>
+              <a:t>Is this old diagram representative?  - e.g. Fayyad et.al. 1996 </a:t>
+            </a:r>
+          </a:p>
+        </p:txBody>
+      </p:sp>
+      <p:sp>
+        <p:nvSpPr>
+          <p:cNvPr id="6" name="Title 1">
+            <a:extLst>
+              <a:ext uri="{FF2B5EF4-FFF2-40B4-BE49-F238E27FC236}">
+                <a16:creationId xmlns:a16="http://schemas.microsoft.com/office/drawing/2014/main" id="{CD29F70F-B868-451B-A65D-8721F4C7A2D9}"/>
+              </a:ext>
+            </a:extLst>
+          </p:cNvPr>
+          <p:cNvSpPr txBox="1">
+            <a:spLocks/>
+          </p:cNvSpPr>
+          <p:nvPr/>
+        </p:nvSpPr>
+        <p:spPr>
+          <a:xfrm>
+            <a:off x="838200" y="-635"/>
+            <a:ext cx="10515600" cy="1325563"/>
+          </a:xfrm>
+          <a:prstGeom prst="rect">
+            <a:avLst/>
+          </a:prstGeom>
+        </p:spPr>
+        <p:txBody>
+          <a:bodyPr vert="horz" lIns="91440" tIns="45720" rIns="91440" bIns="45720" rtlCol="0" anchor="ctr">
+            <a:normAutofit/>
+          </a:bodyPr>
+          <a:lstStyle>
+            <a:lvl1pPr algn="l" defTabSz="914400" rtl="0" eaLnBrk="1" latinLnBrk="0" hangingPunct="1">
+              <a:lnSpc>
+                <a:spcPct val="90000"/>
+              </a:lnSpc>
+              <a:spcBef>
+                <a:spcPct val="0"/>
+              </a:spcBef>
+              <a:buNone/>
+              <a:defRPr sz="4400" kern="1200">
+                <a:solidFill>
+                  <a:schemeClr val="tx1"/>
+                </a:solidFill>
+                <a:latin typeface="+mj-lt"/>
+                <a:ea typeface="+mj-ea"/>
+                <a:cs typeface="+mj-cs"/>
+              </a:defRPr>
+            </a:lvl1pPr>
+          </a:lstStyle>
+          <a:p>
+            <a:r>
+              <a:rPr lang="en-US" dirty="0">
+                <a:latin typeface="+mn-lt"/>
+              </a:rPr>
+              <a:t>KDD process</a:t>
+            </a:r>
+          </a:p>
+        </p:txBody>
+      </p:sp>
+      <p:pic>
+        <p:nvPicPr>
+          <p:cNvPr id="4" name="Picture 3">
+            <a:extLst>
+              <a:ext uri="{FF2B5EF4-FFF2-40B4-BE49-F238E27FC236}">
+                <a16:creationId xmlns:a16="http://schemas.microsoft.com/office/drawing/2014/main" id="{41A10601-345E-4A04-878A-28FFF71506B5}"/>
+              </a:ext>
+            </a:extLst>
+          </p:cNvPr>
+          <p:cNvPicPr>
+            <a:picLocks noChangeAspect="1"/>
+          </p:cNvPicPr>
+          <p:nvPr/>
+        </p:nvPicPr>
+        <p:blipFill>
+          <a:blip r:embed="rId2"/>
+          <a:stretch>
+            <a:fillRect/>
+          </a:stretch>
+        </p:blipFill>
+        <p:spPr>
+          <a:xfrm>
+            <a:off x="951375" y="1651145"/>
+            <a:ext cx="8488232" cy="4404795"/>
+          </a:xfrm>
+          <a:prstGeom prst="rect">
+            <a:avLst/>
+          </a:prstGeom>
+        </p:spPr>
+      </p:pic>
+    </p:spTree>
+    <p:extLst>
+      <p:ext uri="{BB962C8B-B14F-4D97-AF65-F5344CB8AC3E}">
+        <p14:creationId xmlns:p14="http://schemas.microsoft.com/office/powerpoint/2010/main" val="2011350768"/>
+      </p:ext>
+    </p:extLst>
+  </p:cSld>
+  <p:clrMapOvr>
+    <a:masterClrMapping/>
+  </p:clrMapOvr>
+  <p:timing>
+    <p:tnLst>
+      <p:par>
+        <p:cTn id="1" dur="indefinite" restart="never" nodeType="tmRoot">
+          <p:childTnLst>
+            <p:seq concurrent="1" nextAc="seek">
+              <p:cTn id="2" dur="indefinite" nodeType="mainSeq">
+                <p:childTnLst>
+                  <p:par>
+                    <p:cTn id="3" fill="hold">
+                      <p:stCondLst>
+                        <p:cond delay="indefinite"/>
+                      </p:stCondLst>
+                      <p:childTnLst>
+                        <p:par>
+                          <p:cTn id="4" fill="hold">
+                            <p:stCondLst>
+                              <p:cond delay="0"/>
+                            </p:stCondLst>
+                            <p:childTnLst>
+                              <p:par>
+                                <p:cTn id="5" presetID="1" presetClass="entr" presetSubtype="0" fill="hold" nodeType="clickEffect">
+                                  <p:stCondLst>
+                                    <p:cond delay="0"/>
+                                  </p:stCondLst>
+                                  <p:childTnLst>
+                                    <p:set>
+                                      <p:cBhvr>
+                                        <p:cTn id="6" dur="1" fill="hold">
+                                          <p:stCondLst>
+                                            <p:cond delay="0"/>
+                                          </p:stCondLst>
+                                        </p:cTn>
+                                        <p:tgtEl>
+                                          <p:spTgt spid="3">
+                                            <p:txEl>
+                                              <p:pRg st="0" end="0"/>
+                                            </p:txEl>
+                                          </p:spTgt>
+                                        </p:tgtEl>
+                                        <p:attrNameLst>
+                                          <p:attrName>style.visibility</p:attrName>
+                                        </p:attrNameLst>
+                                      </p:cBhvr>
+                                      <p:to>
+                                        <p:strVal val="visible"/>
+                                      </p:to>
+                                    </p:set>
+                                  </p:childTnLst>
+                                </p:cTn>
+                              </p:par>
+                            </p:childTnLst>
+                          </p:cTn>
+                        </p:par>
+                      </p:childTnLst>
+                    </p:cTn>
+                  </p:par>
+                  <p:par>
+                    <p:cTn id="7" fill="hold">
+                      <p:stCondLst>
+                        <p:cond delay="indefinite"/>
+                      </p:stCondLst>
+                      <p:childTnLst>
+                        <p:par>
+                          <p:cTn id="8" fill="hold">
+                            <p:stCondLst>
+                              <p:cond delay="0"/>
+                            </p:stCondLst>
+                            <p:childTnLst>
+                              <p:par>
+                                <p:cTn id="9" presetID="1" presetClass="entr" presetSubtype="0" fill="hold" nodeType="clickEffect">
+                                  <p:stCondLst>
+                                    <p:cond delay="0"/>
+                                  </p:stCondLst>
+                                  <p:childTnLst>
+                                    <p:set>
+                                      <p:cBhvr>
+                                        <p:cTn id="10" dur="1" fill="hold">
+                                          <p:stCondLst>
+                                            <p:cond delay="0"/>
+                                          </p:stCondLst>
+                                        </p:cTn>
+                                        <p:tgtEl>
+                                          <p:spTgt spid="3">
+                                            <p:txEl>
+                                              <p:pRg st="11" end="11"/>
+                                            </p:txEl>
+                                          </p:spTgt>
+                                        </p:tgtEl>
+                                        <p:attrNameLst>
+                                          <p:attrName>style.visibility</p:attrName>
+                                        </p:attrNameLst>
+                                      </p:cBhvr>
+                                      <p:to>
+                                        <p:strVal val="visible"/>
+                                      </p:to>
+                                    </p:set>
+                                  </p:childTnLst>
+                                </p:cTn>
+                              </p:par>
+                              <p:par>
+                                <p:cTn id="11" presetID="1" presetClass="entr" presetSubtype="0" fill="hold" nodeType="withEffect">
+                                  <p:stCondLst>
+                                    <p:cond delay="0"/>
+                                  </p:stCondLst>
+                                  <p:childTnLst>
+                                    <p:set>
+                                      <p:cBhvr>
+                                        <p:cTn id="12" dur="1" fill="hold">
+                                          <p:stCondLst>
+                                            <p:cond delay="0"/>
+                                          </p:stCondLst>
+                                        </p:cTn>
+                                        <p:tgtEl>
+                                          <p:spTgt spid="4"/>
+                                        </p:tgtEl>
+                                        <p:attrNameLst>
+                                          <p:attrName>style.visibility</p:attrName>
+                                        </p:attrNameLst>
+                                      </p:cBhvr>
+                                      <p:to>
+                                        <p:strVal val="visible"/>
+                                      </p:to>
+                                    </p:set>
+                                  </p:childTnLst>
+                                </p:cTn>
+                              </p:par>
+                            </p:childTnLst>
+                          </p:cTn>
+                        </p:par>
+                      </p:childTnLst>
+                    </p:cTn>
+                  </p:par>
+                </p:childTnLst>
+              </p:cTn>
+              <p:prevCondLst>
+                <p:cond evt="onPrev" delay="0">
+                  <p:tgtEl>
+                    <p:sldTgt/>
+                  </p:tgtEl>
+                </p:cond>
+              </p:prevCondLst>
+              <p:nextCondLst>
+                <p:cond evt="onNext" delay="0">
+                  <p:tgtEl>
+                    <p:sldTgt/>
+                  </p:tgtEl>
+                </p:cond>
+              </p:nextCondLst>
+            </p:seq>
+          </p:childTnLst>
+        </p:cTn>
+      </p:par>
+    </p:tnLst>
+  </p:timing>
+</p:sld>
+</file>
+
+<file path=ppt/slides/slide50.xml><?xml version="1.0" encoding="utf-8"?>
 <p:sld xmlns:a="http://schemas.openxmlformats.org/drawingml/2006/main" xmlns:r="http://schemas.openxmlformats.org/officeDocument/2006/relationships" xmlns:p="http://schemas.openxmlformats.org/presentationml/2006/main">
   <p:cSld>
     <p:spTree>
@@ -35409,401 +36377,7 @@
 </p:sld>
 </file>
 
-<file path=ppt/slides/slide5.xml><?xml version="1.0" encoding="utf-8"?>
-<p:sld xmlns:a="http://schemas.openxmlformats.org/drawingml/2006/main" xmlns:r="http://schemas.openxmlformats.org/officeDocument/2006/relationships" xmlns:p="http://schemas.openxmlformats.org/presentationml/2006/main">
-  <p:cSld>
-    <p:spTree>
-      <p:nvGrpSpPr>
-        <p:cNvPr id="1" name=""/>
-        <p:cNvGrpSpPr/>
-        <p:nvPr/>
-      </p:nvGrpSpPr>
-      <p:grpSpPr>
-        <a:xfrm>
-          <a:off x="0" y="0"/>
-          <a:ext cx="0" cy="0"/>
-          <a:chOff x="0" y="0"/>
-          <a:chExt cx="0" cy="0"/>
-        </a:xfrm>
-      </p:grpSpPr>
-      <p:sp>
-        <p:nvSpPr>
-          <p:cNvPr id="3" name="Content Placeholder 2">
-            <a:extLst>
-              <a:ext uri="{FF2B5EF4-FFF2-40B4-BE49-F238E27FC236}">
-                <a16:creationId xmlns:a16="http://schemas.microsoft.com/office/drawing/2014/main" id="{258E6AF3-7615-4BD1-878E-A94C93E98F90}"/>
-              </a:ext>
-            </a:extLst>
-          </p:cNvPr>
-          <p:cNvSpPr>
-            <a:spLocks noGrp="1"/>
-          </p:cNvSpPr>
-          <p:nvPr>
-            <p:ph idx="1"/>
-          </p:nvPr>
-        </p:nvSpPr>
-        <p:spPr>
-          <a:xfrm>
-            <a:off x="838200" y="1217458"/>
-            <a:ext cx="10515600" cy="5640542"/>
-          </a:xfrm>
-        </p:spPr>
-        <p:txBody>
-          <a:bodyPr>
-            <a:normAutofit fontScale="92500" lnSpcReduction="10000"/>
-          </a:bodyPr>
-          <a:lstStyle/>
-          <a:p>
-            <a:pPr marL="0" indent="0">
-              <a:buNone/>
-            </a:pPr>
-            <a:r>
-              <a:rPr lang="en-US" sz="3200" dirty="0"/>
-              <a:t>What is the KDD process?   </a:t>
-            </a:r>
-          </a:p>
-          <a:p>
-            <a:pPr marL="0" indent="0">
-              <a:buNone/>
-            </a:pPr>
-            <a:endParaRPr lang="en-US" dirty="0"/>
-          </a:p>
-          <a:p>
-            <a:pPr marL="0" indent="0">
-              <a:buNone/>
-            </a:pPr>
-            <a:endParaRPr lang="en-US" dirty="0"/>
-          </a:p>
-          <a:p>
-            <a:pPr marL="0" indent="0">
-              <a:buNone/>
-            </a:pPr>
-            <a:endParaRPr lang="en-US" dirty="0"/>
-          </a:p>
-          <a:p>
-            <a:pPr marL="0" indent="0">
-              <a:buNone/>
-            </a:pPr>
-            <a:endParaRPr lang="en-US" dirty="0"/>
-          </a:p>
-          <a:p>
-            <a:pPr marL="0" indent="0">
-              <a:buNone/>
-            </a:pPr>
-            <a:endParaRPr lang="en-US" dirty="0"/>
-          </a:p>
-          <a:p>
-            <a:pPr marL="0" indent="0">
-              <a:buNone/>
-            </a:pPr>
-            <a:endParaRPr lang="en-US" dirty="0"/>
-          </a:p>
-          <a:p>
-            <a:pPr marL="0" indent="0">
-              <a:buNone/>
-            </a:pPr>
-            <a:endParaRPr lang="en-US" dirty="0"/>
-          </a:p>
-          <a:p>
-            <a:pPr marL="0" indent="0">
-              <a:buNone/>
-            </a:pPr>
-            <a:endParaRPr lang="en-US" dirty="0">
-              <a:solidFill>
-                <a:schemeClr val="accent1"/>
-              </a:solidFill>
-            </a:endParaRPr>
-          </a:p>
-          <a:p>
-            <a:pPr marL="0" indent="0">
-              <a:buNone/>
-            </a:pPr>
-            <a:endParaRPr lang="en-US" dirty="0">
-              <a:solidFill>
-                <a:schemeClr val="accent1"/>
-              </a:solidFill>
-            </a:endParaRPr>
-          </a:p>
-          <a:p>
-            <a:pPr marL="0" indent="0">
-              <a:buNone/>
-            </a:pPr>
-            <a:endParaRPr lang="en-US" dirty="0">
-              <a:solidFill>
-                <a:schemeClr val="accent1"/>
-              </a:solidFill>
-            </a:endParaRPr>
-          </a:p>
-          <a:p>
-            <a:pPr marL="0" indent="0">
-              <a:buNone/>
-            </a:pPr>
-            <a:r>
-              <a:rPr lang="en-US" dirty="0">
-                <a:solidFill>
-                  <a:schemeClr val="accent1"/>
-                </a:solidFill>
-              </a:rPr>
-              <a:t>Is this old diagram representative?  - e.g. Fayyad et.al. 1996 </a:t>
-            </a:r>
-          </a:p>
-        </p:txBody>
-      </p:sp>
-      <p:sp>
-        <p:nvSpPr>
-          <p:cNvPr id="6" name="Title 1">
-            <a:extLst>
-              <a:ext uri="{FF2B5EF4-FFF2-40B4-BE49-F238E27FC236}">
-                <a16:creationId xmlns:a16="http://schemas.microsoft.com/office/drawing/2014/main" id="{CD29F70F-B868-451B-A65D-8721F4C7A2D9}"/>
-              </a:ext>
-            </a:extLst>
-          </p:cNvPr>
-          <p:cNvSpPr txBox="1">
-            <a:spLocks/>
-          </p:cNvSpPr>
-          <p:nvPr/>
-        </p:nvSpPr>
-        <p:spPr>
-          <a:xfrm>
-            <a:off x="838200" y="-635"/>
-            <a:ext cx="10515600" cy="1325563"/>
-          </a:xfrm>
-          <a:prstGeom prst="rect">
-            <a:avLst/>
-          </a:prstGeom>
-        </p:spPr>
-        <p:txBody>
-          <a:bodyPr vert="horz" lIns="91440" tIns="45720" rIns="91440" bIns="45720" rtlCol="0" anchor="ctr">
-            <a:normAutofit/>
-          </a:bodyPr>
-          <a:lstStyle>
-            <a:lvl1pPr algn="l" defTabSz="914400" rtl="0" eaLnBrk="1" latinLnBrk="0" hangingPunct="1">
-              <a:lnSpc>
-                <a:spcPct val="90000"/>
-              </a:lnSpc>
-              <a:spcBef>
-                <a:spcPct val="0"/>
-              </a:spcBef>
-              <a:buNone/>
-              <a:defRPr sz="4400" kern="1200">
-                <a:solidFill>
-                  <a:schemeClr val="tx1"/>
-                </a:solidFill>
-                <a:latin typeface="+mj-lt"/>
-                <a:ea typeface="+mj-ea"/>
-                <a:cs typeface="+mj-cs"/>
-              </a:defRPr>
-            </a:lvl1pPr>
-          </a:lstStyle>
-          <a:p>
-            <a:r>
-              <a:rPr lang="en-US" dirty="0">
-                <a:latin typeface="+mn-lt"/>
-              </a:rPr>
-              <a:t>KDD process</a:t>
-            </a:r>
-          </a:p>
-        </p:txBody>
-      </p:sp>
-      <p:pic>
-        <p:nvPicPr>
-          <p:cNvPr id="4" name="Picture 3">
-            <a:extLst>
-              <a:ext uri="{FF2B5EF4-FFF2-40B4-BE49-F238E27FC236}">
-                <a16:creationId xmlns:a16="http://schemas.microsoft.com/office/drawing/2014/main" id="{41A10601-345E-4A04-878A-28FFF71506B5}"/>
-              </a:ext>
-            </a:extLst>
-          </p:cNvPr>
-          <p:cNvPicPr>
-            <a:picLocks noChangeAspect="1"/>
-          </p:cNvPicPr>
-          <p:nvPr/>
-        </p:nvPicPr>
-        <p:blipFill>
-          <a:blip r:embed="rId2"/>
-          <a:stretch>
-            <a:fillRect/>
-          </a:stretch>
-        </p:blipFill>
-        <p:spPr>
-          <a:xfrm>
-            <a:off x="951375" y="1651145"/>
-            <a:ext cx="8488232" cy="4404795"/>
-          </a:xfrm>
-          <a:prstGeom prst="rect">
-            <a:avLst/>
-          </a:prstGeom>
-        </p:spPr>
-      </p:pic>
-    </p:spTree>
-    <p:extLst>
-      <p:ext uri="{BB962C8B-B14F-4D97-AF65-F5344CB8AC3E}">
-        <p14:creationId xmlns:p14="http://schemas.microsoft.com/office/powerpoint/2010/main" val="2011350768"/>
-      </p:ext>
-    </p:extLst>
-  </p:cSld>
-  <p:clrMapOvr>
-    <a:masterClrMapping/>
-  </p:clrMapOvr>
-  <p:timing>
-    <p:tnLst>
-      <p:par>
-        <p:cTn id="1" dur="indefinite" restart="never" nodeType="tmRoot">
-          <p:childTnLst>
-            <p:seq concurrent="1" nextAc="seek">
-              <p:cTn id="2" dur="indefinite" nodeType="mainSeq">
-                <p:childTnLst>
-                  <p:par>
-                    <p:cTn id="3" fill="hold">
-                      <p:stCondLst>
-                        <p:cond delay="indefinite"/>
-                      </p:stCondLst>
-                      <p:childTnLst>
-                        <p:par>
-                          <p:cTn id="4" fill="hold">
-                            <p:stCondLst>
-                              <p:cond delay="0"/>
-                            </p:stCondLst>
-                            <p:childTnLst>
-                              <p:par>
-                                <p:cTn id="5" presetID="1" presetClass="entr" presetSubtype="0" fill="hold" nodeType="clickEffect">
-                                  <p:stCondLst>
-                                    <p:cond delay="0"/>
-                                  </p:stCondLst>
-                                  <p:childTnLst>
-                                    <p:set>
-                                      <p:cBhvr>
-                                        <p:cTn id="6" dur="1" fill="hold">
-                                          <p:stCondLst>
-                                            <p:cond delay="0"/>
-                                          </p:stCondLst>
-                                        </p:cTn>
-                                        <p:tgtEl>
-                                          <p:spTgt spid="3">
-                                            <p:txEl>
-                                              <p:pRg st="0" end="0"/>
-                                            </p:txEl>
-                                          </p:spTgt>
-                                        </p:tgtEl>
-                                        <p:attrNameLst>
-                                          <p:attrName>style.visibility</p:attrName>
-                                        </p:attrNameLst>
-                                      </p:cBhvr>
-                                      <p:to>
-                                        <p:strVal val="visible"/>
-                                      </p:to>
-                                    </p:set>
-                                  </p:childTnLst>
-                                </p:cTn>
-                              </p:par>
-                            </p:childTnLst>
-                          </p:cTn>
-                        </p:par>
-                      </p:childTnLst>
-                    </p:cTn>
-                  </p:par>
-                  <p:par>
-                    <p:cTn id="7" fill="hold">
-                      <p:stCondLst>
-                        <p:cond delay="indefinite"/>
-                      </p:stCondLst>
-                      <p:childTnLst>
-                        <p:par>
-                          <p:cTn id="8" fill="hold">
-                            <p:stCondLst>
-                              <p:cond delay="0"/>
-                            </p:stCondLst>
-                            <p:childTnLst>
-                              <p:par>
-                                <p:cTn id="9" presetID="1" presetClass="entr" presetSubtype="0" fill="hold" nodeType="clickEffect">
-                                  <p:stCondLst>
-                                    <p:cond delay="0"/>
-                                  </p:stCondLst>
-                                  <p:childTnLst>
-                                    <p:set>
-                                      <p:cBhvr>
-                                        <p:cTn id="10" dur="1" fill="hold">
-                                          <p:stCondLst>
-                                            <p:cond delay="0"/>
-                                          </p:stCondLst>
-                                        </p:cTn>
-                                        <p:tgtEl>
-                                          <p:spTgt spid="3">
-                                            <p:txEl>
-                                              <p:pRg st="11" end="11"/>
-                                            </p:txEl>
-                                          </p:spTgt>
-                                        </p:tgtEl>
-                                        <p:attrNameLst>
-                                          <p:attrName>style.visibility</p:attrName>
-                                        </p:attrNameLst>
-                                      </p:cBhvr>
-                                      <p:to>
-                                        <p:strVal val="visible"/>
-                                      </p:to>
-                                    </p:set>
-                                  </p:childTnLst>
-                                </p:cTn>
-                              </p:par>
-                              <p:par>
-                                <p:cTn id="11" presetID="1" presetClass="entr" presetSubtype="0" fill="hold" nodeType="withEffect">
-                                  <p:stCondLst>
-                                    <p:cond delay="0"/>
-                                  </p:stCondLst>
-                                  <p:childTnLst>
-                                    <p:set>
-                                      <p:cBhvr>
-                                        <p:cTn id="12" dur="1" fill="hold">
-                                          <p:stCondLst>
-                                            <p:cond delay="0"/>
-                                          </p:stCondLst>
-                                        </p:cTn>
-                                        <p:tgtEl>
-                                          <p:spTgt spid="4"/>
-                                        </p:tgtEl>
-                                        <p:attrNameLst>
-                                          <p:attrName>style.visibility</p:attrName>
-                                        </p:attrNameLst>
-                                      </p:cBhvr>
-                                      <p:to>
-                                        <p:strVal val="visible"/>
-                                      </p:to>
-                                    </p:set>
-                                  </p:childTnLst>
-                                </p:cTn>
-                              </p:par>
-                            </p:childTnLst>
-                          </p:cTn>
-                        </p:par>
-                      </p:childTnLst>
-                    </p:cTn>
-                  </p:par>
-                </p:childTnLst>
-              </p:cTn>
-              <p:prevCondLst>
-                <p:cond evt="onPrev" delay="0">
-                  <p:tgtEl>
-                    <p:sldTgt/>
-                  </p:tgtEl>
-                </p:cond>
-              </p:prevCondLst>
-              <p:nextCondLst>
-                <p:cond evt="onNext" delay="0">
-                  <p:tgtEl>
-                    <p:sldTgt/>
-                  </p:tgtEl>
-                </p:cond>
-              </p:nextCondLst>
-            </p:seq>
-          </p:childTnLst>
-        </p:cTn>
-      </p:par>
-    </p:tnLst>
-  </p:timing>
-</p:sld>
-</file>
-
-<file path=ppt/slides/slide50.xml><?xml version="1.0" encoding="utf-8"?>
+<file path=ppt/slides/slide51.xml><?xml version="1.0" encoding="utf-8"?>
 <p:sld xmlns:a="http://schemas.openxmlformats.org/drawingml/2006/main" xmlns:r="http://schemas.openxmlformats.org/officeDocument/2006/relationships" xmlns:p="http://schemas.openxmlformats.org/presentationml/2006/main">
   <p:cSld>
     <p:spTree>
@@ -36350,7 +36924,7 @@
 </p:sld>
 </file>
 
-<file path=ppt/slides/slide51.xml><?xml version="1.0" encoding="utf-8"?>
+<file path=ppt/slides/slide52.xml><?xml version="1.0" encoding="utf-8"?>
 <p:sld xmlns:a="http://schemas.openxmlformats.org/drawingml/2006/main" xmlns:r="http://schemas.openxmlformats.org/officeDocument/2006/relationships" xmlns:p="http://schemas.openxmlformats.org/presentationml/2006/main">
   <p:cSld>
     <p:spTree>
@@ -36949,7 +37523,7 @@
 </p:sld>
 </file>
 
-<file path=ppt/slides/slide52.xml><?xml version="1.0" encoding="utf-8"?>
+<file path=ppt/slides/slide53.xml><?xml version="1.0" encoding="utf-8"?>
 <p:sld xmlns:a="http://schemas.openxmlformats.org/drawingml/2006/main" xmlns:r="http://schemas.openxmlformats.org/officeDocument/2006/relationships" xmlns:p="http://schemas.openxmlformats.org/presentationml/2006/main">
   <p:cSld>
     <p:spTree>
@@ -37538,7 +38112,7 @@
 </p:sld>
 </file>
 
-<file path=ppt/slides/slide53.xml><?xml version="1.0" encoding="utf-8"?>
+<file path=ppt/slides/slide54.xml><?xml version="1.0" encoding="utf-8"?>
 <p:sld xmlns:a="http://schemas.openxmlformats.org/drawingml/2006/main" xmlns:r="http://schemas.openxmlformats.org/officeDocument/2006/relationships" xmlns:p="http://schemas.openxmlformats.org/presentationml/2006/main">
   <p:cSld>
     <p:spTree>
@@ -38471,7 +39045,7 @@
 </p:sld>
 </file>
 
-<file path=ppt/slides/slide54.xml><?xml version="1.0" encoding="utf-8"?>
+<file path=ppt/slides/slide55.xml><?xml version="1.0" encoding="utf-8"?>
 <p:sld xmlns:a="http://schemas.openxmlformats.org/drawingml/2006/main" xmlns:r="http://schemas.openxmlformats.org/officeDocument/2006/relationships" xmlns:p="http://schemas.openxmlformats.org/presentationml/2006/main">
   <p:cSld>
     <p:spTree>
@@ -39070,7 +39644,7 @@
 </p:sld>
 </file>
 
-<file path=ppt/slides/slide55.xml><?xml version="1.0" encoding="utf-8"?>
+<file path=ppt/slides/slide56.xml><?xml version="1.0" encoding="utf-8"?>
 <p:sld xmlns:a="http://schemas.openxmlformats.org/drawingml/2006/main" xmlns:r="http://schemas.openxmlformats.org/officeDocument/2006/relationships" xmlns:p="http://schemas.openxmlformats.org/presentationml/2006/main">
   <p:cSld>
     <p:spTree>
@@ -39588,7 +40162,7 @@
 </p:sld>
 </file>
 
-<file path=ppt/slides/slide56.xml><?xml version="1.0" encoding="utf-8"?>
+<file path=ppt/slides/slide57.xml><?xml version="1.0" encoding="utf-8"?>
 <p:sld xmlns:a="http://schemas.openxmlformats.org/drawingml/2006/main" xmlns:r="http://schemas.openxmlformats.org/officeDocument/2006/relationships" xmlns:p="http://schemas.openxmlformats.org/presentationml/2006/main">
   <p:cSld>
     <p:spTree>
@@ -40314,7 +40888,7 @@
 </p:sld>
 </file>
 
-<file path=ppt/slides/slide57.xml><?xml version="1.0" encoding="utf-8"?>
+<file path=ppt/slides/slide58.xml><?xml version="1.0" encoding="utf-8"?>
 <p:sld xmlns:a="http://schemas.openxmlformats.org/drawingml/2006/main" xmlns:r="http://schemas.openxmlformats.org/officeDocument/2006/relationships" xmlns:p="http://schemas.openxmlformats.org/presentationml/2006/main">
   <p:cSld>
     <p:spTree>
@@ -40380,7 +40954,7 @@
 </p:sld>
 </file>
 
-<file path=ppt/slides/slide58.xml><?xml version="1.0" encoding="utf-8"?>
+<file path=ppt/slides/slide59.xml><?xml version="1.0" encoding="utf-8"?>
 <p:sld xmlns:a="http://schemas.openxmlformats.org/drawingml/2006/main" xmlns:r="http://schemas.openxmlformats.org/officeDocument/2006/relationships" xmlns:p="http://schemas.openxmlformats.org/presentationml/2006/main">
   <p:cSld>
     <p:spTree>

--- a/slides/1_Introduction.pptx
+++ b/slides/1_Introduction.pptx
@@ -5,7 +5,7 @@
     <p:sldMasterId id="2147483648" r:id="rId1"/>
   </p:sldMasterIdLst>
   <p:notesMasterIdLst>
-    <p:notesMasterId r:id="rId61"/>
+    <p:notesMasterId r:id="rId63"/>
   </p:notesMasterIdLst>
   <p:sldIdLst>
     <p:sldId id="256" r:id="rId2"/>
@@ -18,55 +18,57 @@
     <p:sldId id="712" r:id="rId9"/>
     <p:sldId id="288" r:id="rId10"/>
     <p:sldId id="733" r:id="rId11"/>
-    <p:sldId id="732" r:id="rId12"/>
+    <p:sldId id="788" r:id="rId12"/>
     <p:sldId id="724" r:id="rId13"/>
     <p:sldId id="397" r:id="rId14"/>
     <p:sldId id="718" r:id="rId15"/>
-    <p:sldId id="783" r:id="rId16"/>
-    <p:sldId id="786" r:id="rId17"/>
-    <p:sldId id="723" r:id="rId18"/>
-    <p:sldId id="396" r:id="rId19"/>
-    <p:sldId id="400" r:id="rId20"/>
-    <p:sldId id="352" r:id="rId21"/>
-    <p:sldId id="388" r:id="rId22"/>
-    <p:sldId id="721" r:id="rId23"/>
-    <p:sldId id="402" r:id="rId24"/>
+    <p:sldId id="790" r:id="rId16"/>
+    <p:sldId id="783" r:id="rId17"/>
+    <p:sldId id="786" r:id="rId18"/>
+    <p:sldId id="723" r:id="rId19"/>
+    <p:sldId id="396" r:id="rId20"/>
+    <p:sldId id="400" r:id="rId21"/>
+    <p:sldId id="352" r:id="rId22"/>
+    <p:sldId id="388" r:id="rId23"/>
+    <p:sldId id="721" r:id="rId24"/>
     <p:sldId id="381" r:id="rId25"/>
     <p:sldId id="722" r:id="rId26"/>
-    <p:sldId id="395" r:id="rId27"/>
-    <p:sldId id="725" r:id="rId28"/>
-    <p:sldId id="401" r:id="rId29"/>
-    <p:sldId id="713" r:id="rId30"/>
-    <p:sldId id="784" r:id="rId31"/>
-    <p:sldId id="387" r:id="rId32"/>
-    <p:sldId id="720" r:id="rId33"/>
-    <p:sldId id="382" r:id="rId34"/>
-    <p:sldId id="787" r:id="rId35"/>
-    <p:sldId id="357" r:id="rId36"/>
-    <p:sldId id="385" r:id="rId37"/>
-    <p:sldId id="359" r:id="rId38"/>
-    <p:sldId id="727" r:id="rId39"/>
-    <p:sldId id="386" r:id="rId40"/>
-    <p:sldId id="714" r:id="rId41"/>
-    <p:sldId id="360" r:id="rId42"/>
-    <p:sldId id="731" r:id="rId43"/>
-    <p:sldId id="374" r:id="rId44"/>
-    <p:sldId id="375" r:id="rId45"/>
-    <p:sldId id="738" r:id="rId46"/>
-    <p:sldId id="377" r:id="rId47"/>
-    <p:sldId id="729" r:id="rId48"/>
-    <p:sldId id="730" r:id="rId49"/>
-    <p:sldId id="739" r:id="rId50"/>
-    <p:sldId id="376" r:id="rId51"/>
-    <p:sldId id="728" r:id="rId52"/>
-    <p:sldId id="379" r:id="rId53"/>
-    <p:sldId id="380" r:id="rId54"/>
-    <p:sldId id="742" r:id="rId55"/>
-    <p:sldId id="743" r:id="rId56"/>
-    <p:sldId id="744" r:id="rId57"/>
-    <p:sldId id="785" r:id="rId58"/>
-    <p:sldId id="740" r:id="rId59"/>
-    <p:sldId id="384" r:id="rId60"/>
+    <p:sldId id="402" r:id="rId27"/>
+    <p:sldId id="789" r:id="rId28"/>
+    <p:sldId id="395" r:id="rId29"/>
+    <p:sldId id="725" r:id="rId30"/>
+    <p:sldId id="401" r:id="rId31"/>
+    <p:sldId id="713" r:id="rId32"/>
+    <p:sldId id="784" r:id="rId33"/>
+    <p:sldId id="387" r:id="rId34"/>
+    <p:sldId id="720" r:id="rId35"/>
+    <p:sldId id="382" r:id="rId36"/>
+    <p:sldId id="787" r:id="rId37"/>
+    <p:sldId id="357" r:id="rId38"/>
+    <p:sldId id="385" r:id="rId39"/>
+    <p:sldId id="359" r:id="rId40"/>
+    <p:sldId id="727" r:id="rId41"/>
+    <p:sldId id="386" r:id="rId42"/>
+    <p:sldId id="714" r:id="rId43"/>
+    <p:sldId id="360" r:id="rId44"/>
+    <p:sldId id="731" r:id="rId45"/>
+    <p:sldId id="374" r:id="rId46"/>
+    <p:sldId id="375" r:id="rId47"/>
+    <p:sldId id="738" r:id="rId48"/>
+    <p:sldId id="377" r:id="rId49"/>
+    <p:sldId id="729" r:id="rId50"/>
+    <p:sldId id="730" r:id="rId51"/>
+    <p:sldId id="739" r:id="rId52"/>
+    <p:sldId id="376" r:id="rId53"/>
+    <p:sldId id="728" r:id="rId54"/>
+    <p:sldId id="379" r:id="rId55"/>
+    <p:sldId id="380" r:id="rId56"/>
+    <p:sldId id="742" r:id="rId57"/>
+    <p:sldId id="743" r:id="rId58"/>
+    <p:sldId id="744" r:id="rId59"/>
+    <p:sldId id="785" r:id="rId60"/>
+    <p:sldId id="740" r:id="rId61"/>
+    <p:sldId id="384" r:id="rId62"/>
   </p:sldIdLst>
   <p:sldSz cx="12192000" cy="6858000"/>
   <p:notesSz cx="6858000" cy="9144000"/>
@@ -255,7 +257,7 @@
           <a:p>
             <a:fld id="{2F3ABF1A-8818-4472-8518-E71DC7B5D2F7}" type="datetimeFigureOut">
               <a:rPr lang="en-US" smtClean="0"/>
-              <a:t>6/18/2026</a:t>
+              <a:t>6/20/2026</a:t>
             </a:fld>
             <a:endParaRPr lang="en-US"/>
           </a:p>
@@ -778,7 +780,7 @@
           <a:p>
             <a:fld id="{6E4A31BF-7266-4BEB-918B-ADC21C630A6F}" type="datetimeFigureOut">
               <a:rPr lang="en-US" smtClean="0"/>
-              <a:t>6/18/2026</a:t>
+              <a:t>6/20/2026</a:t>
             </a:fld>
             <a:endParaRPr lang="en-US"/>
           </a:p>
@@ -976,7 +978,7 @@
           <a:p>
             <a:fld id="{6E4A31BF-7266-4BEB-918B-ADC21C630A6F}" type="datetimeFigureOut">
               <a:rPr lang="en-US" smtClean="0"/>
-              <a:t>6/18/2026</a:t>
+              <a:t>6/20/2026</a:t>
             </a:fld>
             <a:endParaRPr lang="en-US"/>
           </a:p>
@@ -1184,7 +1186,7 @@
           <a:p>
             <a:fld id="{6E4A31BF-7266-4BEB-918B-ADC21C630A6F}" type="datetimeFigureOut">
               <a:rPr lang="en-US" smtClean="0"/>
-              <a:t>6/18/2026</a:t>
+              <a:t>6/20/2026</a:t>
             </a:fld>
             <a:endParaRPr lang="en-US"/>
           </a:p>
@@ -1429,6 +1431,180 @@
 </p:sldLayout>
 </file>
 
+<file path=ppt/slideLayouts/slideLayout13.xml><?xml version="1.0" encoding="utf-8"?>
+<p:sldLayout xmlns:a="http://schemas.openxmlformats.org/drawingml/2006/main" xmlns:r="http://schemas.openxmlformats.org/officeDocument/2006/relationships" xmlns:p="http://schemas.openxmlformats.org/presentationml/2006/main" type="title">
+  <p:cSld name="1_Title Slide">
+    <p:spTree>
+      <p:nvGrpSpPr>
+        <p:cNvPr id="1" name=""/>
+        <p:cNvGrpSpPr/>
+        <p:nvPr/>
+      </p:nvGrpSpPr>
+      <p:grpSpPr>
+        <a:xfrm>
+          <a:off x="0" y="0"/>
+          <a:ext cx="0" cy="0"/>
+          <a:chOff x="0" y="0"/>
+          <a:chExt cx="0" cy="0"/>
+        </a:xfrm>
+      </p:grpSpPr>
+      <p:sp>
+        <p:nvSpPr>
+          <p:cNvPr id="5" name="PlaceHolder 1"/>
+          <p:cNvSpPr>
+            <a:spLocks noGrp="1"/>
+          </p:cNvSpPr>
+          <p:nvPr>
+            <p:ph type="title"/>
+          </p:nvPr>
+        </p:nvSpPr>
+        <p:spPr>
+          <a:xfrm>
+            <a:off x="1523880" y="1122480"/>
+            <a:ext cx="9143640" cy="2387160"/>
+          </a:xfrm>
+          <a:prstGeom prst="rect">
+            <a:avLst/>
+          </a:prstGeom>
+          <a:noFill/>
+          <a:ln w="0">
+            <a:noFill/>
+          </a:ln>
+        </p:spPr>
+        <p:txBody>
+          <a:bodyPr lIns="0" tIns="0" rIns="0" bIns="0" anchor="ctr">
+            <a:noAutofit/>
+          </a:bodyPr>
+          <a:lstStyle/>
+          <a:p>
+            <a:pPr indent="0">
+              <a:buNone/>
+            </a:pPr>
+            <a:endParaRPr lang="en-US" sz="1800" b="0" strike="noStrike" spc="-1">
+              <a:solidFill>
+                <a:schemeClr val="dk1"/>
+              </a:solidFill>
+              <a:latin typeface="Calibri"/>
+            </a:endParaRPr>
+          </a:p>
+        </p:txBody>
+      </p:sp>
+      <p:sp>
+        <p:nvSpPr>
+          <p:cNvPr id="6" name="PlaceHolder 2"/>
+          <p:cNvSpPr>
+            <a:spLocks noGrp="1"/>
+          </p:cNvSpPr>
+          <p:nvPr>
+            <p:ph type="subTitle"/>
+          </p:nvPr>
+        </p:nvSpPr>
+        <p:spPr>
+          <a:xfrm>
+            <a:off x="609480" y="1604520"/>
+            <a:ext cx="10972440" cy="3977280"/>
+          </a:xfrm>
+          <a:prstGeom prst="rect">
+            <a:avLst/>
+          </a:prstGeom>
+          <a:noFill/>
+          <a:ln w="0">
+            <a:noFill/>
+          </a:ln>
+        </p:spPr>
+        <p:txBody>
+          <a:bodyPr lIns="0" tIns="0" rIns="0" bIns="0" anchor="ctr">
+            <a:noAutofit/>
+          </a:bodyPr>
+          <a:lstStyle/>
+          <a:p>
+            <a:pPr indent="0" algn="ctr">
+              <a:buNone/>
+            </a:pPr>
+            <a:endParaRPr lang="en-US" sz="3200" b="0" strike="noStrike" spc="-1">
+              <a:solidFill>
+                <a:srgbClr val="000000"/>
+              </a:solidFill>
+              <a:latin typeface="Arial"/>
+            </a:endParaRPr>
+          </a:p>
+        </p:txBody>
+      </p:sp>
+      <p:sp>
+        <p:nvSpPr>
+          <p:cNvPr id="4" name="PlaceHolder 3"/>
+          <p:cNvSpPr>
+            <a:spLocks noGrp="1"/>
+          </p:cNvSpPr>
+          <p:nvPr>
+            <p:ph type="ftr" idx="2"/>
+          </p:nvPr>
+        </p:nvSpPr>
+        <p:spPr/>
+        <p:txBody>
+          <a:bodyPr/>
+          <a:lstStyle/>
+          <a:p>
+            <a:r>
+              <a:t>Footer</a:t>
+            </a:r>
+          </a:p>
+        </p:txBody>
+      </p:sp>
+      <p:sp>
+        <p:nvSpPr>
+          <p:cNvPr id="2" name="PlaceHolder 4"/>
+          <p:cNvSpPr>
+            <a:spLocks noGrp="1"/>
+          </p:cNvSpPr>
+          <p:nvPr>
+            <p:ph type="sldNum" idx="3"/>
+          </p:nvPr>
+        </p:nvSpPr>
+        <p:spPr/>
+        <p:txBody>
+          <a:bodyPr/>
+          <a:lstStyle/>
+          <a:p>
+            <a:fld id="{D939B7C2-6A65-43EF-9DD1-61635A9B6CE6}" type="slidenum">
+              <a:t>‹#›</a:t>
+            </a:fld>
+            <a:endParaRPr/>
+          </a:p>
+        </p:txBody>
+      </p:sp>
+      <p:sp>
+        <p:nvSpPr>
+          <p:cNvPr id="3" name="PlaceHolder 5"/>
+          <p:cNvSpPr>
+            <a:spLocks noGrp="1"/>
+          </p:cNvSpPr>
+          <p:nvPr>
+            <p:ph type="dt" idx="1"/>
+          </p:nvPr>
+        </p:nvSpPr>
+        <p:spPr/>
+        <p:txBody>
+          <a:bodyPr/>
+          <a:lstStyle/>
+          <a:p>
+            <a:endParaRPr/>
+          </a:p>
+        </p:txBody>
+      </p:sp>
+    </p:spTree>
+    <p:extLst>
+      <p:ext uri="{BB962C8B-B14F-4D97-AF65-F5344CB8AC3E}">
+        <p14:creationId xmlns:p14="http://schemas.microsoft.com/office/powerpoint/2010/main" val="4093503822"/>
+      </p:ext>
+    </p:extLst>
+  </p:cSld>
+  <p:clrMapOvr>
+    <a:masterClrMapping/>
+  </p:clrMapOvr>
+</p:sldLayout>
+</file>
+
 <file path=ppt/slideLayouts/slideLayout2.xml><?xml version="1.0" encoding="utf-8"?>
 <p:sldLayout xmlns:a="http://schemas.openxmlformats.org/drawingml/2006/main" xmlns:r="http://schemas.openxmlformats.org/officeDocument/2006/relationships" xmlns:p="http://schemas.openxmlformats.org/presentationml/2006/main" type="obj" preserve="1">
   <p:cSld name="Title and Content">
@@ -1554,7 +1730,7 @@
           <a:p>
             <a:fld id="{6E4A31BF-7266-4BEB-918B-ADC21C630A6F}" type="datetimeFigureOut">
               <a:rPr lang="en-US" smtClean="0"/>
-              <a:t>6/18/2026</a:t>
+              <a:t>6/20/2026</a:t>
             </a:fld>
             <a:endParaRPr lang="en-US"/>
           </a:p>
@@ -1829,7 +2005,7 @@
           <a:p>
             <a:fld id="{6E4A31BF-7266-4BEB-918B-ADC21C630A6F}" type="datetimeFigureOut">
               <a:rPr lang="en-US" smtClean="0"/>
-              <a:t>6/18/2026</a:t>
+              <a:t>6/20/2026</a:t>
             </a:fld>
             <a:endParaRPr lang="en-US"/>
           </a:p>
@@ -2094,7 +2270,7 @@
           <a:p>
             <a:fld id="{6E4A31BF-7266-4BEB-918B-ADC21C630A6F}" type="datetimeFigureOut">
               <a:rPr lang="en-US" smtClean="0"/>
-              <a:t>6/18/2026</a:t>
+              <a:t>6/20/2026</a:t>
             </a:fld>
             <a:endParaRPr lang="en-US"/>
           </a:p>
@@ -2506,7 +2682,7 @@
           <a:p>
             <a:fld id="{6E4A31BF-7266-4BEB-918B-ADC21C630A6F}" type="datetimeFigureOut">
               <a:rPr lang="en-US" smtClean="0"/>
-              <a:t>6/18/2026</a:t>
+              <a:t>6/20/2026</a:t>
             </a:fld>
             <a:endParaRPr lang="en-US"/>
           </a:p>
@@ -2647,7 +2823,7 @@
           <a:p>
             <a:fld id="{6E4A31BF-7266-4BEB-918B-ADC21C630A6F}" type="datetimeFigureOut">
               <a:rPr lang="en-US" smtClean="0"/>
-              <a:t>6/18/2026</a:t>
+              <a:t>6/20/2026</a:t>
             </a:fld>
             <a:endParaRPr lang="en-US"/>
           </a:p>
@@ -2760,7 +2936,7 @@
           <a:p>
             <a:fld id="{6E4A31BF-7266-4BEB-918B-ADC21C630A6F}" type="datetimeFigureOut">
               <a:rPr lang="en-US" smtClean="0"/>
-              <a:t>6/18/2026</a:t>
+              <a:t>6/20/2026</a:t>
             </a:fld>
             <a:endParaRPr lang="en-US"/>
           </a:p>
@@ -3071,7 +3247,7 @@
           <a:p>
             <a:fld id="{6E4A31BF-7266-4BEB-918B-ADC21C630A6F}" type="datetimeFigureOut">
               <a:rPr lang="en-US" smtClean="0"/>
-              <a:t>6/18/2026</a:t>
+              <a:t>6/20/2026</a:t>
             </a:fld>
             <a:endParaRPr lang="en-US"/>
           </a:p>
@@ -3359,7 +3535,7 @@
           <a:p>
             <a:fld id="{6E4A31BF-7266-4BEB-918B-ADC21C630A6F}" type="datetimeFigureOut">
               <a:rPr lang="en-US" smtClean="0"/>
-              <a:t>6/18/2026</a:t>
+              <a:t>6/20/2026</a:t>
             </a:fld>
             <a:endParaRPr lang="en-US"/>
           </a:p>
@@ -3600,7 +3776,7 @@
           <a:p>
             <a:fld id="{6E4A31BF-7266-4BEB-918B-ADC21C630A6F}" type="datetimeFigureOut">
               <a:rPr lang="en-US" smtClean="0"/>
-              <a:t>6/18/2026</a:t>
+              <a:t>6/20/2026</a:t>
             </a:fld>
             <a:endParaRPr lang="en-US"/>
           </a:p>
@@ -3717,6 +3893,7 @@
     <p:sldLayoutId id="2147483658" r:id="rId10"/>
     <p:sldLayoutId id="2147483659" r:id="rId11"/>
     <p:sldLayoutId id="2147483660" r:id="rId12"/>
+    <p:sldLayoutId id="2147483661" r:id="rId13"/>
   </p:sldLayoutIdLst>
   <p:txStyles>
     <p:titleStyle>
@@ -4248,11 +4425,15 @@
         </p:nvSpPr>
         <p:spPr/>
         <p:txBody>
-          <a:bodyPr/>
+          <a:bodyPr>
+            <a:normAutofit/>
+          </a:bodyPr>
           <a:lstStyle/>
           <a:p>
             <a:r>
-              <a:rPr lang="en-DE" dirty="0"/>
+              <a:rPr lang="en-DE" sz="3600" dirty="0">
+                <a:latin typeface="+mn-lt"/>
+              </a:rPr>
               <a:t>About your TA: Jacqueline Hardy</a:t>
             </a:r>
           </a:p>
@@ -4393,13 +4574,7 @@
       </p:grpSpPr>
       <p:sp>
         <p:nvSpPr>
-          <p:cNvPr id="2" name="Title 1">
-            <a:extLst>
-              <a:ext uri="{FF2B5EF4-FFF2-40B4-BE49-F238E27FC236}">
-                <a16:creationId xmlns:a16="http://schemas.microsoft.com/office/drawing/2014/main" id="{3B3EA3CE-8DB0-40A5-B4A6-AFCE2156CC1F}"/>
-              </a:ext>
-            </a:extLst>
-          </p:cNvPr>
+          <p:cNvPr id="66" name="PlaceHolder 1"/>
           <p:cNvSpPr>
             <a:spLocks noGrp="1"/>
           </p:cNvSpPr>
@@ -4409,145 +4584,248 @@
         </p:nvSpPr>
         <p:spPr>
           <a:xfrm>
-            <a:off x="838200" y="365126"/>
-            <a:ext cx="10515600" cy="486573"/>
+            <a:off x="1487304" y="621226"/>
+            <a:ext cx="9143640" cy="668880"/>
           </a:xfrm>
+          <a:prstGeom prst="rect">
+            <a:avLst/>
+          </a:prstGeom>
+          <a:noFill/>
+          <a:ln w="0">
+            <a:noFill/>
+          </a:ln>
         </p:spPr>
         <p:txBody>
-          <a:bodyPr>
-            <a:normAutofit fontScale="90000"/>
+          <a:bodyPr lIns="91440" tIns="45720" rIns="91440" bIns="45720" anchor="b">
+            <a:normAutofit/>
           </a:bodyPr>
           <a:lstStyle/>
           <a:p>
-            <a:r>
-              <a:rPr lang="en-US" dirty="0">
+            <a:pPr indent="0" defTabSz="914400">
+              <a:lnSpc>
+                <a:spcPct val="90000"/>
+              </a:lnSpc>
+              <a:buNone/>
+            </a:pPr>
+            <a:r>
+              <a:rPr lang="en-US" sz="3600" b="0" strike="noStrike" spc="-1" dirty="0">
+                <a:solidFill>
+                  <a:schemeClr val="dk1"/>
+                </a:solidFill>
                 <a:latin typeface="+mn-lt"/>
               </a:rPr>
-              <a:t>About your TA: Eric </a:t>
-            </a:r>
-            <a:r>
-              <a:rPr lang="en-US" dirty="0" err="1">
-                <a:latin typeface="+mn-lt"/>
-              </a:rPr>
-              <a:t>Trucksess</a:t>
-            </a:r>
-            <a:endParaRPr lang="en-US" dirty="0">
-              <a:latin typeface="+mn-lt"/>
-            </a:endParaRPr>
+              <a:t>About your T.A.: Eric Trucksess </a:t>
+            </a:r>
           </a:p>
         </p:txBody>
       </p:sp>
       <p:sp>
         <p:nvSpPr>
-          <p:cNvPr id="3" name="Content Placeholder 2">
-            <a:extLst>
-              <a:ext uri="{FF2B5EF4-FFF2-40B4-BE49-F238E27FC236}">
-                <a16:creationId xmlns:a16="http://schemas.microsoft.com/office/drawing/2014/main" id="{CA03134D-F068-4BC9-B038-F3D5CBDDE3F9}"/>
-              </a:ext>
-            </a:extLst>
-          </p:cNvPr>
+          <p:cNvPr id="67" name="PlaceHolder 2"/>
           <p:cNvSpPr>
             <a:spLocks noGrp="1"/>
           </p:cNvSpPr>
           <p:nvPr>
-            <p:ph idx="1"/>
+            <p:ph type="subTitle"/>
           </p:nvPr>
         </p:nvSpPr>
         <p:spPr>
           <a:xfrm>
-            <a:off x="672105" y="1095916"/>
-            <a:ext cx="10515600" cy="4538867"/>
+            <a:off x="846473" y="1369132"/>
+            <a:ext cx="9927772" cy="4582306"/>
           </a:xfrm>
+          <a:prstGeom prst="rect">
+            <a:avLst/>
+          </a:prstGeom>
+          <a:noFill/>
+          <a:ln w="0">
+            <a:noFill/>
+          </a:ln>
         </p:spPr>
         <p:txBody>
-          <a:bodyPr>
+          <a:bodyPr lIns="91440" tIns="45720" rIns="91440" bIns="45720" anchor="t">
             <a:noAutofit/>
           </a:bodyPr>
           <a:lstStyle/>
           <a:p>
-            <a:pPr>
+            <a:pPr marL="457200" indent="0" defTabSz="914400">
+              <a:lnSpc>
+                <a:spcPct val="90000"/>
+              </a:lnSpc>
               <a:spcBef>
-                <a:spcPts val="600"/>
+                <a:spcPts val="499"/>
               </a:spcBef>
+              <a:buNone/>
+              <a:tabLst>
+                <a:tab pos="0" algn="l"/>
+              </a:tabLst>
             </a:pPr>
-            <a:r>
-              <a:rPr lang="en-US" sz="2933" dirty="0">
-                <a:cs typeface="Arial" panose="020B0604020202020204" pitchFamily="34" charset="0"/>
+            <a:endParaRPr lang="en-US" sz="2000" b="0" strike="noStrike" spc="-1" dirty="0">
+              <a:solidFill>
+                <a:srgbClr val="000000"/>
+              </a:solidFill>
+              <a:latin typeface="Arial"/>
+            </a:endParaRPr>
+          </a:p>
+          <a:p>
+            <a:pPr marL="800280" indent="-343080">
+              <a:spcBef>
+                <a:spcPts val="499"/>
+              </a:spcBef>
+              <a:buClr>
+                <a:srgbClr val="000000"/>
+              </a:buClr>
+              <a:buFont typeface="Arial"/>
+              <a:buChar char="•"/>
+              <a:tabLst>
+                <a:tab pos="0" algn="l"/>
+              </a:tabLst>
+            </a:pPr>
+            <a:r>
+              <a:rPr lang="en-US" sz="2600" b="0" strike="noStrike" spc="-1" dirty="0">
+                <a:solidFill>
+                  <a:schemeClr val="dk1"/>
+                </a:solidFill>
+                <a:latin typeface="+mn-lt"/>
               </a:rPr>
-              <a:t>Patent attorney focused on the chemical arts, particularly pharmaceuticals, solid state devices and polymeric coatings</a:t>
-            </a:r>
-          </a:p>
-          <a:p>
-            <a:pPr>
+              <a:t>Registered Patent Attorney focused on the chemical arts, particularly pharmaceuticals, solid state devices and polymeric coatings</a:t>
+            </a:r>
+            <a:endParaRPr lang="en-US" sz="2600" b="0" strike="noStrike" spc="-1" dirty="0">
+              <a:solidFill>
+                <a:srgbClr val="000000"/>
+              </a:solidFill>
+              <a:latin typeface="+mn-lt"/>
+            </a:endParaRPr>
+          </a:p>
+          <a:p>
+            <a:pPr marL="800280" indent="-343080">
               <a:spcBef>
-                <a:spcPts val="600"/>
+                <a:spcPts val="499"/>
               </a:spcBef>
+              <a:buClr>
+                <a:srgbClr val="000000"/>
+              </a:buClr>
+              <a:buFont typeface="Arial"/>
+              <a:buChar char="•"/>
+              <a:tabLst>
+                <a:tab pos="0" algn="l"/>
+              </a:tabLst>
             </a:pPr>
             <a:r>
-              <a:rPr lang="en-US" sz="2933" dirty="0">
-                <a:cs typeface="Arial" panose="020B0604020202020204" pitchFamily="34" charset="0"/>
+              <a:rPr lang="en-US" sz="2600" b="0" strike="noStrike" spc="-1" dirty="0">
+                <a:solidFill>
+                  <a:schemeClr val="dk1"/>
+                </a:solidFill>
+                <a:latin typeface="+mn-lt"/>
               </a:rPr>
               <a:t>Founder/architect of </a:t>
             </a:r>
             <a:r>
-              <a:rPr lang="en-US" sz="2933" dirty="0" err="1">
-                <a:cs typeface="Arial" panose="020B0604020202020204" pitchFamily="34" charset="0"/>
+              <a:rPr lang="en-US" sz="2600" b="0" strike="noStrike" spc="-1" dirty="0" err="1">
+                <a:solidFill>
+                  <a:schemeClr val="dk1"/>
+                </a:solidFill>
+                <a:latin typeface="+mn-lt"/>
               </a:rPr>
               <a:t>HasHave</a:t>
             </a:r>
             <a:r>
-              <a:rPr lang="en-US" sz="2933" dirty="0">
-                <a:cs typeface="Arial" panose="020B0604020202020204" pitchFamily="34" charset="0"/>
+              <a:rPr lang="en-US" sz="2600" b="0" strike="noStrike" spc="-1" dirty="0">
+                <a:solidFill>
+                  <a:schemeClr val="dk1"/>
+                </a:solidFill>
+                <a:latin typeface="+mn-lt"/>
               </a:rPr>
-              <a:t>, formerly an online bartering site which facilitated the exchange of goods and services amongst member</a:t>
-            </a:r>
-          </a:p>
-          <a:p>
-            <a:pPr>
+              <a:t>, formerly an online bartering site which facilitated the exchange of goods and services amongst members</a:t>
+            </a:r>
+            <a:endParaRPr lang="en-US" sz="2600" b="0" strike="noStrike" spc="-1" dirty="0">
+              <a:solidFill>
+                <a:srgbClr val="000000"/>
+              </a:solidFill>
+              <a:latin typeface="+mn-lt"/>
+            </a:endParaRPr>
+          </a:p>
+          <a:p>
+            <a:pPr marL="800280" indent="-343080">
               <a:spcBef>
-                <a:spcPts val="600"/>
+                <a:spcPts val="499"/>
               </a:spcBef>
+              <a:buClr>
+                <a:srgbClr val="000000"/>
+              </a:buClr>
+              <a:buFont typeface="Arial"/>
+              <a:buChar char="•"/>
+              <a:tabLst>
+                <a:tab pos="0" algn="l"/>
+              </a:tabLst>
             </a:pPr>
             <a:r>
-              <a:rPr lang="en-US" sz="2933" dirty="0">
-                <a:cs typeface="Arial" panose="020B0604020202020204" pitchFamily="34" charset="0"/>
+              <a:rPr lang="en-US" sz="2600" b="0" strike="noStrike" spc="-1" dirty="0">
+                <a:solidFill>
+                  <a:schemeClr val="dk1"/>
+                </a:solidFill>
+                <a:latin typeface="+mn-lt"/>
               </a:rPr>
               <a:t>Counsel to </a:t>
             </a:r>
             <a:r>
-              <a:rPr lang="en-US" sz="2933" dirty="0" err="1">
-                <a:cs typeface="Arial" panose="020B0604020202020204" pitchFamily="34" charset="0"/>
+              <a:rPr lang="en-US" sz="2600" b="0" strike="noStrike" spc="-1" dirty="0" err="1">
+                <a:solidFill>
+                  <a:schemeClr val="dk1"/>
+                </a:solidFill>
+                <a:latin typeface="+mn-lt"/>
               </a:rPr>
               <a:t>RocketFuel</a:t>
             </a:r>
             <a:r>
-              <a:rPr lang="en-US" sz="2933" dirty="0">
-                <a:cs typeface="Arial" panose="020B0604020202020204" pitchFamily="34" charset="0"/>
+              <a:rPr lang="en-US" sz="2600" b="0" strike="noStrike" spc="-1" dirty="0">
+                <a:solidFill>
+                  <a:schemeClr val="dk1"/>
+                </a:solidFill>
+                <a:latin typeface="+mn-lt"/>
               </a:rPr>
-              <a:t>, an early-generation targeted marketing firm that applied ML principles in online marketing campaigns</a:t>
-            </a:r>
-          </a:p>
-          <a:p>
-            <a:pPr>
+              <a:t> an early-generation targeted marketing firm that applied ML principles in online marketing campaigns</a:t>
+            </a:r>
+            <a:endParaRPr lang="en-US" sz="2600" b="0" strike="noStrike" spc="-1" dirty="0">
+              <a:solidFill>
+                <a:srgbClr val="000000"/>
+              </a:solidFill>
+              <a:latin typeface="+mn-lt"/>
+            </a:endParaRPr>
+          </a:p>
+          <a:p>
+            <a:pPr marL="800280" indent="-343080">
               <a:spcBef>
-                <a:spcPts val="600"/>
+                <a:spcPts val="499"/>
               </a:spcBef>
+              <a:buClr>
+                <a:srgbClr val="000000"/>
+              </a:buClr>
+              <a:buFont typeface="Arial"/>
+              <a:buChar char="•"/>
+              <a:tabLst>
+                <a:tab pos="0" algn="l"/>
+              </a:tabLst>
             </a:pPr>
             <a:r>
-              <a:rPr lang="en-US" sz="2933" dirty="0">
-                <a:cs typeface="Arial" panose="020B0604020202020204" pitchFamily="34" charset="0"/>
+              <a:rPr lang="en-US" sz="2600" b="0" strike="noStrike" spc="-1" dirty="0">
+                <a:solidFill>
+                  <a:schemeClr val="dk1"/>
+                </a:solidFill>
+                <a:latin typeface="+mn-lt"/>
               </a:rPr>
-              <a:t>Currently, consultant to a Dubai-based horse racing betting platform assisting in the collection, analysis and digestion of racing data</a:t>
-            </a:r>
+              <a:t>Currently a consultant to several Defense Contractors and a Director in a Dubai-based betting syndicate with a focus on horse racing</a:t>
+            </a:r>
+            <a:endParaRPr lang="en-US" sz="2600" b="0" strike="noStrike" spc="-1" dirty="0">
+              <a:solidFill>
+                <a:srgbClr val="000000"/>
+              </a:solidFill>
+              <a:latin typeface="+mn-lt"/>
+            </a:endParaRPr>
           </a:p>
         </p:txBody>
       </p:sp>
     </p:spTree>
-    <p:extLst>
-      <p:ext uri="{BB962C8B-B14F-4D97-AF65-F5344CB8AC3E}">
-        <p14:creationId xmlns:p14="http://schemas.microsoft.com/office/powerpoint/2010/main" val="2028118686"/>
-      </p:ext>
-    </p:extLst>
   </p:cSld>
   <p:clrMapOvr>
     <a:masterClrMapping/>
@@ -6359,6 +6637,661 @@
 </file>
 
 <file path=ppt/slides/slide15.xml><?xml version="1.0" encoding="utf-8"?>
+<p:sld xmlns:a="http://schemas.openxmlformats.org/drawingml/2006/main" xmlns:r="http://schemas.openxmlformats.org/officeDocument/2006/relationships" xmlns:p="http://schemas.openxmlformats.org/presentationml/2006/main">
+  <p:cSld>
+    <p:spTree>
+      <p:nvGrpSpPr>
+        <p:cNvPr id="1" name="">
+          <a:extLst>
+            <a:ext uri="{FF2B5EF4-FFF2-40B4-BE49-F238E27FC236}">
+              <a16:creationId xmlns:a16="http://schemas.microsoft.com/office/drawing/2014/main" id="{7A0CB480-AA3E-213A-60C4-4D4D0A43C2AD}"/>
+            </a:ext>
+          </a:extLst>
+        </p:cNvPr>
+        <p:cNvGrpSpPr/>
+        <p:nvPr/>
+      </p:nvGrpSpPr>
+      <p:grpSpPr>
+        <a:xfrm>
+          <a:off x="0" y="0"/>
+          <a:ext cx="0" cy="0"/>
+          <a:chOff x="0" y="0"/>
+          <a:chExt cx="0" cy="0"/>
+        </a:xfrm>
+      </p:grpSpPr>
+      <mc:AlternateContent xmlns:mc="http://schemas.openxmlformats.org/markup-compatibility/2006">
+        <mc:Choice xmlns:a14="http://schemas.microsoft.com/office/drawing/2010/main" Requires="a14">
+          <p:sp>
+            <p:nvSpPr>
+              <p:cNvPr id="3" name="Content Placeholder 2">
+                <a:extLst>
+                  <a:ext uri="{FF2B5EF4-FFF2-40B4-BE49-F238E27FC236}">
+                    <a16:creationId xmlns:a16="http://schemas.microsoft.com/office/drawing/2014/main" id="{94A0E240-C9A8-7FD6-55AE-06B661AC463E}"/>
+                  </a:ext>
+                </a:extLst>
+              </p:cNvPr>
+              <p:cNvSpPr>
+                <a:spLocks noGrp="1"/>
+              </p:cNvSpPr>
+              <p:nvPr>
+                <p:ph idx="1"/>
+              </p:nvPr>
+            </p:nvSpPr>
+            <p:spPr>
+              <a:xfrm>
+                <a:off x="838200" y="1154002"/>
+                <a:ext cx="10515600" cy="5581207"/>
+              </a:xfrm>
+            </p:spPr>
+            <p:txBody>
+              <a:bodyPr>
+                <a:normAutofit/>
+              </a:bodyPr>
+              <a:lstStyle/>
+              <a:p>
+                <a:pPr marL="0" indent="0">
+                  <a:buNone/>
+                </a:pPr>
+                <a:r>
+                  <a:rPr lang="en-US" sz="3200" dirty="0"/>
+                  <a:t>LLMs in data mining is not a major focus for this course</a:t>
+                </a:r>
+                <a:endParaRPr lang="en-US" sz="3200" b="1" dirty="0"/>
+              </a:p>
+              <a:p>
+                <a:r>
+                  <a:rPr lang="en-US" dirty="0"/>
+                  <a:t>LLM algorithms use retrieval augmented generation (RAG) to guide generation  </a:t>
+                </a:r>
+              </a:p>
+              <a:p>
+                <a:pPr lvl="1"/>
+                <a:r>
+                  <a:rPr lang="en-US" dirty="0"/>
+                  <a:t>RAG algorithms require massive scale similarity search, a core data mining topic </a:t>
+                </a:r>
+              </a:p>
+              <a:p>
+                <a:r>
+                  <a:rPr lang="en-US" dirty="0"/>
+                  <a:t>LLMs have a growing impact on data mining     </a:t>
+                </a:r>
+              </a:p>
+              <a:p>
+                <a:pPr lvl="1"/>
+                <a:r>
+                  <a:rPr lang="en-US" dirty="0"/>
+                  <a:t>LLMs can achieve high accuracy for some tasks   </a:t>
+                </a:r>
+              </a:p>
+              <a:p>
+                <a:pPr lvl="1"/>
+                <a:r>
+                  <a:rPr lang="en-US" dirty="0"/>
+                  <a:t>Application is </a:t>
+                </a:r>
+                <a:r>
+                  <a:rPr lang="en-US" b="1" dirty="0"/>
+                  <a:t>limited by scalability    </a:t>
+                </a:r>
+              </a:p>
+              <a:p>
+                <a:pPr lvl="1"/>
+                <a:r>
+                  <a:rPr lang="en-US" b="1" dirty="0"/>
+                  <a:t>Costs can be high</a:t>
+                </a:r>
+                <a:r>
+                  <a:rPr lang="en-US" dirty="0"/>
+                  <a:t>, even for ‘low-cost’ models     </a:t>
+                </a:r>
+              </a:p>
+              <a:p>
+                <a:pPr lvl="1"/>
+                <a:r>
+                  <a:rPr lang="en-US" dirty="0"/>
+                  <a:t>Example, a large scale document search could require </a:t>
+                </a:r>
+                <a14:m>
+                  <m:oMath xmlns:m="http://schemas.openxmlformats.org/officeDocument/2006/math">
+                    <m:sSup>
+                      <m:sSupPr>
+                        <m:ctrlPr>
+                          <a:rPr lang="en-US" i="1" smtClean="0">
+                            <a:latin typeface="Cambria Math" panose="02040503050406030204" pitchFamily="18" charset="0"/>
+                          </a:rPr>
+                        </m:ctrlPr>
+                      </m:sSupPr>
+                      <m:e>
+                        <m:r>
+                          <a:rPr lang="en-US" b="0" i="1" smtClean="0">
+                            <a:latin typeface="Cambria Math" panose="02040503050406030204" pitchFamily="18" charset="0"/>
+                          </a:rPr>
+                          <m:t>10</m:t>
+                        </m:r>
+                      </m:e>
+                      <m:sup>
+                        <m:r>
+                          <a:rPr lang="en-US" b="0" i="1" smtClean="0">
+                            <a:latin typeface="Cambria Math" panose="02040503050406030204" pitchFamily="18" charset="0"/>
+                          </a:rPr>
+                          <m:t>12</m:t>
+                        </m:r>
+                      </m:sup>
+                    </m:sSup>
+                  </m:oMath>
+                </a14:m>
+                <a:r>
+                  <a:rPr lang="en-US" dirty="0"/>
+                  <a:t> tokens!</a:t>
+                </a:r>
+              </a:p>
+              <a:p>
+                <a:r>
+                  <a:rPr lang="en-US" dirty="0"/>
+                  <a:t>Often use highly scalable algorithms as filter then apply LLM</a:t>
+                </a:r>
+              </a:p>
+              <a:p>
+                <a:pPr lvl="1"/>
+                <a:r>
+                  <a:rPr lang="en-US" dirty="0"/>
+                  <a:t>Example: in document search use massively scalable algorithm as filter, with LLM used as </a:t>
+                </a:r>
+                <a:r>
+                  <a:rPr lang="en-US" b="1" dirty="0" err="1"/>
+                  <a:t>reranker</a:t>
+                </a:r>
+                <a:r>
+                  <a:rPr lang="en-US" dirty="0"/>
+                  <a:t> for refinement – More efficient </a:t>
+                </a:r>
+                <a:r>
+                  <a:rPr lang="en-US"/>
+                  <a:t>methods available </a:t>
+                </a:r>
+                <a:endParaRPr lang="en-US" dirty="0"/>
+              </a:p>
+            </p:txBody>
+          </p:sp>
+        </mc:Choice>
+        <mc:Fallback>
+          <p:sp>
+            <p:nvSpPr>
+              <p:cNvPr id="3" name="Content Placeholder 2">
+                <a:extLst>
+                  <a:ext uri="{FF2B5EF4-FFF2-40B4-BE49-F238E27FC236}">
+                    <a16:creationId xmlns:a16="http://schemas.microsoft.com/office/drawing/2014/main" id="{94A0E240-C9A8-7FD6-55AE-06B661AC463E}"/>
+                  </a:ext>
+                </a:extLst>
+              </p:cNvPr>
+              <p:cNvSpPr>
+                <a:spLocks noGrp="1" noRot="1" noChangeAspect="1" noMove="1" noResize="1" noEditPoints="1" noAdjustHandles="1" noChangeArrowheads="1" noChangeShapeType="1" noTextEdit="1"/>
+              </p:cNvSpPr>
+              <p:nvPr>
+                <p:ph idx="1"/>
+              </p:nvPr>
+            </p:nvSpPr>
+            <p:spPr>
+              <a:xfrm>
+                <a:off x="838200" y="1154002"/>
+                <a:ext cx="10515600" cy="5581207"/>
+              </a:xfrm>
+              <a:blipFill>
+                <a:blip r:embed="rId2"/>
+                <a:stretch>
+                  <a:fillRect l="-1507" t="-2293" b="-328"/>
+                </a:stretch>
+              </a:blipFill>
+            </p:spPr>
+            <p:txBody>
+              <a:bodyPr/>
+              <a:lstStyle/>
+              <a:p>
+                <a:r>
+                  <a:rPr lang="en-US">
+                    <a:noFill/>
+                  </a:rPr>
+                  <a:t> </a:t>
+                </a:r>
+              </a:p>
+            </p:txBody>
+          </p:sp>
+        </mc:Fallback>
+      </mc:AlternateContent>
+      <p:sp>
+        <p:nvSpPr>
+          <p:cNvPr id="6" name="Title 1">
+            <a:extLst>
+              <a:ext uri="{FF2B5EF4-FFF2-40B4-BE49-F238E27FC236}">
+                <a16:creationId xmlns:a16="http://schemas.microsoft.com/office/drawing/2014/main" id="{B7467E74-681C-BF89-AF4C-D551410A993A}"/>
+              </a:ext>
+            </a:extLst>
+          </p:cNvPr>
+          <p:cNvSpPr txBox="1">
+            <a:spLocks/>
+          </p:cNvSpPr>
+          <p:nvPr/>
+        </p:nvSpPr>
+        <p:spPr>
+          <a:xfrm>
+            <a:off x="838200" y="-635"/>
+            <a:ext cx="10515600" cy="1325563"/>
+          </a:xfrm>
+          <a:prstGeom prst="rect">
+            <a:avLst/>
+          </a:prstGeom>
+        </p:spPr>
+        <p:txBody>
+          <a:bodyPr vert="horz" lIns="91440" tIns="45720" rIns="91440" bIns="45720" rtlCol="0" anchor="ctr">
+            <a:normAutofit/>
+          </a:bodyPr>
+          <a:lstStyle>
+            <a:lvl1pPr algn="l" defTabSz="914400" rtl="0" eaLnBrk="1" latinLnBrk="0" hangingPunct="1">
+              <a:lnSpc>
+                <a:spcPct val="90000"/>
+              </a:lnSpc>
+              <a:spcBef>
+                <a:spcPct val="0"/>
+              </a:spcBef>
+              <a:buNone/>
+              <a:defRPr sz="4400" kern="1200">
+                <a:solidFill>
+                  <a:schemeClr val="tx1"/>
+                </a:solidFill>
+                <a:latin typeface="+mj-lt"/>
+                <a:ea typeface="+mj-ea"/>
+                <a:cs typeface="+mj-cs"/>
+              </a:defRPr>
+            </a:lvl1pPr>
+          </a:lstStyle>
+          <a:p>
+            <a:r>
+              <a:rPr lang="en-US" dirty="0">
+                <a:latin typeface="+mn-lt"/>
+              </a:rPr>
+              <a:t>What is the focus of this course?</a:t>
+            </a:r>
+          </a:p>
+        </p:txBody>
+      </p:sp>
+    </p:spTree>
+    <p:extLst>
+      <p:ext uri="{BB962C8B-B14F-4D97-AF65-F5344CB8AC3E}">
+        <p14:creationId xmlns:p14="http://schemas.microsoft.com/office/powerpoint/2010/main" val="244241970"/>
+      </p:ext>
+    </p:extLst>
+  </p:cSld>
+  <p:clrMapOvr>
+    <a:masterClrMapping/>
+  </p:clrMapOvr>
+  <p:timing>
+    <p:tnLst>
+      <p:par>
+        <p:cTn id="1" dur="indefinite" restart="never" nodeType="tmRoot">
+          <p:childTnLst>
+            <p:seq concurrent="1" nextAc="seek">
+              <p:cTn id="2" dur="indefinite" nodeType="mainSeq">
+                <p:childTnLst>
+                  <p:par>
+                    <p:cTn id="3" fill="hold">
+                      <p:stCondLst>
+                        <p:cond delay="indefinite"/>
+                      </p:stCondLst>
+                      <p:childTnLst>
+                        <p:par>
+                          <p:cTn id="4" fill="hold">
+                            <p:stCondLst>
+                              <p:cond delay="0"/>
+                            </p:stCondLst>
+                            <p:childTnLst>
+                              <p:par>
+                                <p:cTn id="5" presetID="1" presetClass="entr" presetSubtype="0" fill="hold" nodeType="clickEffect">
+                                  <p:stCondLst>
+                                    <p:cond delay="0"/>
+                                  </p:stCondLst>
+                                  <p:childTnLst>
+                                    <p:set>
+                                      <p:cBhvr>
+                                        <p:cTn id="6" dur="1" fill="hold">
+                                          <p:stCondLst>
+                                            <p:cond delay="0"/>
+                                          </p:stCondLst>
+                                        </p:cTn>
+                                        <p:tgtEl>
+                                          <p:spTgt spid="3">
+                                            <p:txEl>
+                                              <p:pRg st="1" end="1"/>
+                                            </p:txEl>
+                                          </p:spTgt>
+                                        </p:tgtEl>
+                                        <p:attrNameLst>
+                                          <p:attrName>style.visibility</p:attrName>
+                                        </p:attrNameLst>
+                                      </p:cBhvr>
+                                      <p:to>
+                                        <p:strVal val="visible"/>
+                                      </p:to>
+                                    </p:set>
+                                  </p:childTnLst>
+                                </p:cTn>
+                              </p:par>
+                              <p:par>
+                                <p:cTn id="7" presetID="1" presetClass="entr" presetSubtype="0" fill="hold" nodeType="withEffect">
+                                  <p:stCondLst>
+                                    <p:cond delay="0"/>
+                                  </p:stCondLst>
+                                  <p:childTnLst>
+                                    <p:set>
+                                      <p:cBhvr>
+                                        <p:cTn id="8" dur="1" fill="hold">
+                                          <p:stCondLst>
+                                            <p:cond delay="0"/>
+                                          </p:stCondLst>
+                                        </p:cTn>
+                                        <p:tgtEl>
+                                          <p:spTgt spid="3">
+                                            <p:txEl>
+                                              <p:pRg st="2" end="2"/>
+                                            </p:txEl>
+                                          </p:spTgt>
+                                        </p:tgtEl>
+                                        <p:attrNameLst>
+                                          <p:attrName>style.visibility</p:attrName>
+                                        </p:attrNameLst>
+                                      </p:cBhvr>
+                                      <p:to>
+                                        <p:strVal val="visible"/>
+                                      </p:to>
+                                    </p:set>
+                                  </p:childTnLst>
+                                </p:cTn>
+                              </p:par>
+                            </p:childTnLst>
+                          </p:cTn>
+                        </p:par>
+                      </p:childTnLst>
+                    </p:cTn>
+                  </p:par>
+                  <p:par>
+                    <p:cTn id="9" fill="hold">
+                      <p:stCondLst>
+                        <p:cond delay="indefinite"/>
+                      </p:stCondLst>
+                      <p:childTnLst>
+                        <p:par>
+                          <p:cTn id="10" fill="hold">
+                            <p:stCondLst>
+                              <p:cond delay="0"/>
+                            </p:stCondLst>
+                            <p:childTnLst>
+                              <p:par>
+                                <p:cTn id="11" presetID="1" presetClass="entr" presetSubtype="0" fill="hold" nodeType="clickEffect">
+                                  <p:stCondLst>
+                                    <p:cond delay="0"/>
+                                  </p:stCondLst>
+                                  <p:childTnLst>
+                                    <p:set>
+                                      <p:cBhvr>
+                                        <p:cTn id="12" dur="1" fill="hold">
+                                          <p:stCondLst>
+                                            <p:cond delay="0"/>
+                                          </p:stCondLst>
+                                        </p:cTn>
+                                        <p:tgtEl>
+                                          <p:spTgt spid="3">
+                                            <p:txEl>
+                                              <p:pRg st="3" end="3"/>
+                                            </p:txEl>
+                                          </p:spTgt>
+                                        </p:tgtEl>
+                                        <p:attrNameLst>
+                                          <p:attrName>style.visibility</p:attrName>
+                                        </p:attrNameLst>
+                                      </p:cBhvr>
+                                      <p:to>
+                                        <p:strVal val="visible"/>
+                                      </p:to>
+                                    </p:set>
+                                  </p:childTnLst>
+                                </p:cTn>
+                              </p:par>
+                              <p:par>
+                                <p:cTn id="13" presetID="1" presetClass="entr" presetSubtype="0" fill="hold" nodeType="withEffect">
+                                  <p:stCondLst>
+                                    <p:cond delay="0"/>
+                                  </p:stCondLst>
+                                  <p:childTnLst>
+                                    <p:set>
+                                      <p:cBhvr>
+                                        <p:cTn id="14" dur="1" fill="hold">
+                                          <p:stCondLst>
+                                            <p:cond delay="0"/>
+                                          </p:stCondLst>
+                                        </p:cTn>
+                                        <p:tgtEl>
+                                          <p:spTgt spid="3">
+                                            <p:txEl>
+                                              <p:pRg st="4" end="4"/>
+                                            </p:txEl>
+                                          </p:spTgt>
+                                        </p:tgtEl>
+                                        <p:attrNameLst>
+                                          <p:attrName>style.visibility</p:attrName>
+                                        </p:attrNameLst>
+                                      </p:cBhvr>
+                                      <p:to>
+                                        <p:strVal val="visible"/>
+                                      </p:to>
+                                    </p:set>
+                                  </p:childTnLst>
+                                </p:cTn>
+                              </p:par>
+                              <p:par>
+                                <p:cTn id="15" presetID="1" presetClass="entr" presetSubtype="0" fill="hold" nodeType="withEffect">
+                                  <p:stCondLst>
+                                    <p:cond delay="0"/>
+                                  </p:stCondLst>
+                                  <p:childTnLst>
+                                    <p:set>
+                                      <p:cBhvr>
+                                        <p:cTn id="16" dur="1" fill="hold">
+                                          <p:stCondLst>
+                                            <p:cond delay="0"/>
+                                          </p:stCondLst>
+                                        </p:cTn>
+                                        <p:tgtEl>
+                                          <p:spTgt spid="3">
+                                            <p:txEl>
+                                              <p:pRg st="5" end="5"/>
+                                            </p:txEl>
+                                          </p:spTgt>
+                                        </p:tgtEl>
+                                        <p:attrNameLst>
+                                          <p:attrName>style.visibility</p:attrName>
+                                        </p:attrNameLst>
+                                      </p:cBhvr>
+                                      <p:to>
+                                        <p:strVal val="visible"/>
+                                      </p:to>
+                                    </p:set>
+                                  </p:childTnLst>
+                                </p:cTn>
+                              </p:par>
+                              <p:par>
+                                <p:cTn id="17" presetID="1" presetClass="entr" presetSubtype="0" fill="hold" nodeType="withEffect">
+                                  <p:stCondLst>
+                                    <p:cond delay="0"/>
+                                  </p:stCondLst>
+                                  <p:childTnLst>
+                                    <p:set>
+                                      <p:cBhvr>
+                                        <p:cTn id="18" dur="1" fill="hold">
+                                          <p:stCondLst>
+                                            <p:cond delay="0"/>
+                                          </p:stCondLst>
+                                        </p:cTn>
+                                        <p:tgtEl>
+                                          <p:spTgt spid="3">
+                                            <p:txEl>
+                                              <p:pRg st="6" end="6"/>
+                                            </p:txEl>
+                                          </p:spTgt>
+                                        </p:tgtEl>
+                                        <p:attrNameLst>
+                                          <p:attrName>style.visibility</p:attrName>
+                                        </p:attrNameLst>
+                                      </p:cBhvr>
+                                      <p:to>
+                                        <p:strVal val="visible"/>
+                                      </p:to>
+                                    </p:set>
+                                  </p:childTnLst>
+                                </p:cTn>
+                              </p:par>
+                              <p:par>
+                                <p:cTn id="19" presetID="1" presetClass="entr" presetSubtype="0" fill="hold" nodeType="withEffect">
+                                  <p:stCondLst>
+                                    <p:cond delay="0"/>
+                                  </p:stCondLst>
+                                  <p:childTnLst>
+                                    <p:set>
+                                      <p:cBhvr>
+                                        <p:cTn id="20" dur="1" fill="hold">
+                                          <p:stCondLst>
+                                            <p:cond delay="0"/>
+                                          </p:stCondLst>
+                                        </p:cTn>
+                                        <p:tgtEl>
+                                          <p:spTgt spid="3">
+                                            <p:txEl>
+                                              <p:pRg st="7" end="7"/>
+                                            </p:txEl>
+                                          </p:spTgt>
+                                        </p:tgtEl>
+                                        <p:attrNameLst>
+                                          <p:attrName>style.visibility</p:attrName>
+                                        </p:attrNameLst>
+                                      </p:cBhvr>
+                                      <p:to>
+                                        <p:strVal val="visible"/>
+                                      </p:to>
+                                    </p:set>
+                                  </p:childTnLst>
+                                </p:cTn>
+                              </p:par>
+                            </p:childTnLst>
+                          </p:cTn>
+                        </p:par>
+                      </p:childTnLst>
+                    </p:cTn>
+                  </p:par>
+                  <p:par>
+                    <p:cTn id="21" fill="hold">
+                      <p:stCondLst>
+                        <p:cond delay="indefinite"/>
+                      </p:stCondLst>
+                      <p:childTnLst>
+                        <p:par>
+                          <p:cTn id="22" fill="hold">
+                            <p:stCondLst>
+                              <p:cond delay="0"/>
+                            </p:stCondLst>
+                            <p:childTnLst>
+                              <p:par>
+                                <p:cTn id="23" presetID="1" presetClass="entr" presetSubtype="0" fill="hold" nodeType="clickEffect">
+                                  <p:stCondLst>
+                                    <p:cond delay="0"/>
+                                  </p:stCondLst>
+                                  <p:childTnLst>
+                                    <p:set>
+                                      <p:cBhvr>
+                                        <p:cTn id="24" dur="1" fill="hold">
+                                          <p:stCondLst>
+                                            <p:cond delay="0"/>
+                                          </p:stCondLst>
+                                        </p:cTn>
+                                        <p:tgtEl>
+                                          <p:spTgt spid="3">
+                                            <p:txEl>
+                                              <p:pRg st="8" end="8"/>
+                                            </p:txEl>
+                                          </p:spTgt>
+                                        </p:tgtEl>
+                                        <p:attrNameLst>
+                                          <p:attrName>style.visibility</p:attrName>
+                                        </p:attrNameLst>
+                                      </p:cBhvr>
+                                      <p:to>
+                                        <p:strVal val="visible"/>
+                                      </p:to>
+                                    </p:set>
+                                  </p:childTnLst>
+                                </p:cTn>
+                              </p:par>
+                              <p:par>
+                                <p:cTn id="25" presetID="1" presetClass="entr" presetSubtype="0" fill="hold" nodeType="withEffect">
+                                  <p:stCondLst>
+                                    <p:cond delay="0"/>
+                                  </p:stCondLst>
+                                  <p:childTnLst>
+                                    <p:set>
+                                      <p:cBhvr>
+                                        <p:cTn id="26" dur="1" fill="hold">
+                                          <p:stCondLst>
+                                            <p:cond delay="0"/>
+                                          </p:stCondLst>
+                                        </p:cTn>
+                                        <p:tgtEl>
+                                          <p:spTgt spid="3">
+                                            <p:txEl>
+                                              <p:pRg st="9" end="9"/>
+                                            </p:txEl>
+                                          </p:spTgt>
+                                        </p:tgtEl>
+                                        <p:attrNameLst>
+                                          <p:attrName>style.visibility</p:attrName>
+                                        </p:attrNameLst>
+                                      </p:cBhvr>
+                                      <p:to>
+                                        <p:strVal val="visible"/>
+                                      </p:to>
+                                    </p:set>
+                                  </p:childTnLst>
+                                </p:cTn>
+                              </p:par>
+                            </p:childTnLst>
+                          </p:cTn>
+                        </p:par>
+                      </p:childTnLst>
+                    </p:cTn>
+                  </p:par>
+                </p:childTnLst>
+              </p:cTn>
+              <p:prevCondLst>
+                <p:cond evt="onPrev" delay="0">
+                  <p:tgtEl>
+                    <p:sldTgt/>
+                  </p:tgtEl>
+                </p:cond>
+              </p:prevCondLst>
+              <p:nextCondLst>
+                <p:cond evt="onNext" delay="0">
+                  <p:tgtEl>
+                    <p:sldTgt/>
+                  </p:tgtEl>
+                </p:cond>
+              </p:nextCondLst>
+            </p:seq>
+          </p:childTnLst>
+        </p:cTn>
+      </p:par>
+    </p:tnLst>
+  </p:timing>
+</p:sld>
+</file>
+
+<file path=ppt/slides/slide16.xml><?xml version="1.0" encoding="utf-8"?>
 <p:sld xmlns:a="http://schemas.openxmlformats.org/drawingml/2006/main" xmlns:r="http://schemas.openxmlformats.org/officeDocument/2006/relationships" xmlns:p="http://schemas.openxmlformats.org/presentationml/2006/main">
   <p:cSld>
     <p:spTree>
@@ -8023,7 +8956,7 @@
 </p:sld>
 </file>
 
-<file path=ppt/slides/slide16.xml><?xml version="1.0" encoding="utf-8"?>
+<file path=ppt/slides/slide17.xml><?xml version="1.0" encoding="utf-8"?>
 <p:sld xmlns:a="http://schemas.openxmlformats.org/drawingml/2006/main" xmlns:r="http://schemas.openxmlformats.org/officeDocument/2006/relationships" xmlns:p="http://schemas.openxmlformats.org/presentationml/2006/main">
   <p:cSld>
     <p:spTree>
@@ -9658,7 +10591,7 @@
 </p:sld>
 </file>
 
-<file path=ppt/slides/slide17.xml><?xml version="1.0" encoding="utf-8"?>
+<file path=ppt/slides/slide18.xml><?xml version="1.0" encoding="utf-8"?>
 <p:sld xmlns:a="http://schemas.openxmlformats.org/drawingml/2006/main" xmlns:r="http://schemas.openxmlformats.org/officeDocument/2006/relationships" xmlns:p="http://schemas.openxmlformats.org/presentationml/2006/main" show="0">
   <p:cSld>
     <p:spTree>
@@ -12424,7 +13357,7 @@
 </p:sld>
 </file>
 
-<file path=ppt/slides/slide18.xml><?xml version="1.0" encoding="utf-8"?>
+<file path=ppt/slides/slide19.xml><?xml version="1.0" encoding="utf-8"?>
 <p:sld xmlns:a="http://schemas.openxmlformats.org/drawingml/2006/main" xmlns:r="http://schemas.openxmlformats.org/officeDocument/2006/relationships" xmlns:p="http://schemas.openxmlformats.org/presentationml/2006/main" show="0">
   <p:cSld>
     <p:spTree>
@@ -12755,438 +13688,6 @@
                                           <p:spTgt spid="3">
                                             <p:txEl>
                                               <p:pRg st="3" end="3"/>
-                                            </p:txEl>
-                                          </p:spTgt>
-                                        </p:tgtEl>
-                                        <p:attrNameLst>
-                                          <p:attrName>style.visibility</p:attrName>
-                                        </p:attrNameLst>
-                                      </p:cBhvr>
-                                      <p:to>
-                                        <p:strVal val="visible"/>
-                                      </p:to>
-                                    </p:set>
-                                  </p:childTnLst>
-                                </p:cTn>
-                              </p:par>
-                            </p:childTnLst>
-                          </p:cTn>
-                        </p:par>
-                      </p:childTnLst>
-                    </p:cTn>
-                  </p:par>
-                </p:childTnLst>
-              </p:cTn>
-              <p:prevCondLst>
-                <p:cond evt="onPrev" delay="0">
-                  <p:tgtEl>
-                    <p:sldTgt/>
-                  </p:tgtEl>
-                </p:cond>
-              </p:prevCondLst>
-              <p:nextCondLst>
-                <p:cond evt="onNext" delay="0">
-                  <p:tgtEl>
-                    <p:sldTgt/>
-                  </p:tgtEl>
-                </p:cond>
-              </p:nextCondLst>
-            </p:seq>
-          </p:childTnLst>
-        </p:cTn>
-      </p:par>
-    </p:tnLst>
-  </p:timing>
-</p:sld>
-</file>
-
-<file path=ppt/slides/slide19.xml><?xml version="1.0" encoding="utf-8"?>
-<p:sld xmlns:a="http://schemas.openxmlformats.org/drawingml/2006/main" xmlns:r="http://schemas.openxmlformats.org/officeDocument/2006/relationships" xmlns:p="http://schemas.openxmlformats.org/presentationml/2006/main">
-  <p:cSld>
-    <p:spTree>
-      <p:nvGrpSpPr>
-        <p:cNvPr id="1" name=""/>
-        <p:cNvGrpSpPr/>
-        <p:nvPr/>
-      </p:nvGrpSpPr>
-      <p:grpSpPr>
-        <a:xfrm>
-          <a:off x="0" y="0"/>
-          <a:ext cx="0" cy="0"/>
-          <a:chOff x="0" y="0"/>
-          <a:chExt cx="0" cy="0"/>
-        </a:xfrm>
-      </p:grpSpPr>
-      <p:sp>
-        <p:nvSpPr>
-          <p:cNvPr id="3" name="Content Placeholder 2">
-            <a:extLst>
-              <a:ext uri="{FF2B5EF4-FFF2-40B4-BE49-F238E27FC236}">
-                <a16:creationId xmlns:a16="http://schemas.microsoft.com/office/drawing/2014/main" id="{258E6AF3-7615-4BD1-878E-A94C93E98F90}"/>
-              </a:ext>
-            </a:extLst>
-          </p:cNvPr>
-          <p:cNvSpPr>
-            <a:spLocks noGrp="1"/>
-          </p:cNvSpPr>
-          <p:nvPr>
-            <p:ph idx="1"/>
-          </p:nvPr>
-        </p:nvSpPr>
-        <p:spPr>
-          <a:xfrm>
-            <a:off x="838200" y="1541417"/>
-            <a:ext cx="10515600" cy="4635546"/>
-          </a:xfrm>
-        </p:spPr>
-        <p:txBody>
-          <a:bodyPr>
-            <a:normAutofit lnSpcReduction="10000"/>
-          </a:bodyPr>
-          <a:lstStyle/>
-          <a:p>
-            <a:pPr marL="0" indent="0">
-              <a:buNone/>
-            </a:pPr>
-            <a:r>
-              <a:rPr lang="en-US" dirty="0"/>
-              <a:t>Schedule for live class meetings </a:t>
-            </a:r>
-          </a:p>
-          <a:p>
-            <a:r>
-              <a:rPr lang="en-US" dirty="0"/>
-              <a:t>Tuesdays and Thursdays – Lectures focused on theoretical foundations - 6:30-9:30 pm US Eastern Time</a:t>
-            </a:r>
-          </a:p>
-          <a:p>
-            <a:pPr lvl="1"/>
-            <a:r>
-              <a:rPr lang="en-US" dirty="0"/>
-              <a:t>Most lessons less than 3 hours</a:t>
-            </a:r>
-          </a:p>
-          <a:p>
-            <a:r>
-              <a:rPr lang="en-US" dirty="0"/>
-              <a:t>Mondays and Wednesdays – Section meeting to address questions, discuss code, background review – starting at 6:30 pm US Eastern Time  </a:t>
-            </a:r>
-          </a:p>
-          <a:p>
-            <a:r>
-              <a:rPr lang="en-US" dirty="0"/>
-              <a:t>One-on-one meetings can be held by arrangement</a:t>
-            </a:r>
-          </a:p>
-          <a:p>
-            <a:pPr marL="0" indent="0">
-              <a:buNone/>
-            </a:pPr>
-            <a:endParaRPr lang="en-US" dirty="0">
-              <a:solidFill>
-                <a:srgbClr val="C00000"/>
-              </a:solidFill>
-            </a:endParaRPr>
-          </a:p>
-          <a:p>
-            <a:pPr marL="0" indent="0">
-              <a:buNone/>
-            </a:pPr>
-            <a:r>
-              <a:rPr lang="en-US" dirty="0">
-                <a:solidFill>
-                  <a:srgbClr val="C00000"/>
-                </a:solidFill>
-              </a:rPr>
-              <a:t>All class meetings are recorded and available on-demand – See Class Recordings tab in Canvas</a:t>
-            </a:r>
-          </a:p>
-          <a:p>
-            <a:endParaRPr lang="en-US" b="1" dirty="0"/>
-          </a:p>
-        </p:txBody>
-      </p:sp>
-      <p:sp>
-        <p:nvSpPr>
-          <p:cNvPr id="6" name="Title 1">
-            <a:extLst>
-              <a:ext uri="{FF2B5EF4-FFF2-40B4-BE49-F238E27FC236}">
-                <a16:creationId xmlns:a16="http://schemas.microsoft.com/office/drawing/2014/main" id="{CD29F70F-B868-451B-A65D-8721F4C7A2D9}"/>
-              </a:ext>
-            </a:extLst>
-          </p:cNvPr>
-          <p:cNvSpPr txBox="1">
-            <a:spLocks/>
-          </p:cNvSpPr>
-          <p:nvPr/>
-        </p:nvSpPr>
-        <p:spPr>
-          <a:xfrm>
-            <a:off x="838200" y="-635"/>
-            <a:ext cx="10515600" cy="1325563"/>
-          </a:xfrm>
-          <a:prstGeom prst="rect">
-            <a:avLst/>
-          </a:prstGeom>
-        </p:spPr>
-        <p:txBody>
-          <a:bodyPr vert="horz" lIns="91440" tIns="45720" rIns="91440" bIns="45720" rtlCol="0" anchor="ctr">
-            <a:normAutofit/>
-          </a:bodyPr>
-          <a:lstStyle>
-            <a:lvl1pPr algn="l" defTabSz="914400" rtl="0" eaLnBrk="1" latinLnBrk="0" hangingPunct="1">
-              <a:lnSpc>
-                <a:spcPct val="90000"/>
-              </a:lnSpc>
-              <a:spcBef>
-                <a:spcPct val="0"/>
-              </a:spcBef>
-              <a:buNone/>
-              <a:defRPr sz="4400" kern="1200">
-                <a:solidFill>
-                  <a:schemeClr val="tx1"/>
-                </a:solidFill>
-                <a:latin typeface="+mj-lt"/>
-                <a:ea typeface="+mj-ea"/>
-                <a:cs typeface="+mj-cs"/>
-              </a:defRPr>
-            </a:lvl1pPr>
-          </a:lstStyle>
-          <a:p>
-            <a:r>
-              <a:rPr lang="en-US" dirty="0">
-                <a:latin typeface="+mn-lt"/>
-              </a:rPr>
-              <a:t>Schedule </a:t>
-            </a:r>
-          </a:p>
-        </p:txBody>
-      </p:sp>
-    </p:spTree>
-    <p:extLst>
-      <p:ext uri="{BB962C8B-B14F-4D97-AF65-F5344CB8AC3E}">
-        <p14:creationId xmlns:p14="http://schemas.microsoft.com/office/powerpoint/2010/main" val="177077999"/>
-      </p:ext>
-    </p:extLst>
-  </p:cSld>
-  <p:clrMapOvr>
-    <a:masterClrMapping/>
-  </p:clrMapOvr>
-  <p:timing>
-    <p:tnLst>
-      <p:par>
-        <p:cTn id="1" dur="indefinite" restart="never" nodeType="tmRoot">
-          <p:childTnLst>
-            <p:seq concurrent="1" nextAc="seek">
-              <p:cTn id="2" dur="indefinite" nodeType="mainSeq">
-                <p:childTnLst>
-                  <p:par>
-                    <p:cTn id="3" fill="hold">
-                      <p:stCondLst>
-                        <p:cond delay="indefinite"/>
-                      </p:stCondLst>
-                      <p:childTnLst>
-                        <p:par>
-                          <p:cTn id="4" fill="hold">
-                            <p:stCondLst>
-                              <p:cond delay="0"/>
-                            </p:stCondLst>
-                            <p:childTnLst>
-                              <p:par>
-                                <p:cTn id="5" presetID="1" presetClass="entr" presetSubtype="0" fill="hold" nodeType="clickEffect">
-                                  <p:stCondLst>
-                                    <p:cond delay="0"/>
-                                  </p:stCondLst>
-                                  <p:childTnLst>
-                                    <p:set>
-                                      <p:cBhvr>
-                                        <p:cTn id="6" dur="1" fill="hold">
-                                          <p:stCondLst>
-                                            <p:cond delay="0"/>
-                                          </p:stCondLst>
-                                        </p:cTn>
-                                        <p:tgtEl>
-                                          <p:spTgt spid="3">
-                                            <p:txEl>
-                                              <p:pRg st="1" end="1"/>
-                                            </p:txEl>
-                                          </p:spTgt>
-                                        </p:tgtEl>
-                                        <p:attrNameLst>
-                                          <p:attrName>style.visibility</p:attrName>
-                                        </p:attrNameLst>
-                                      </p:cBhvr>
-                                      <p:to>
-                                        <p:strVal val="visible"/>
-                                      </p:to>
-                                    </p:set>
-                                  </p:childTnLst>
-                                </p:cTn>
-                              </p:par>
-                              <p:par>
-                                <p:cTn id="7" presetID="1" presetClass="entr" presetSubtype="0" fill="hold" nodeType="withEffect">
-                                  <p:stCondLst>
-                                    <p:cond delay="0"/>
-                                  </p:stCondLst>
-                                  <p:childTnLst>
-                                    <p:set>
-                                      <p:cBhvr>
-                                        <p:cTn id="8" dur="1" fill="hold">
-                                          <p:stCondLst>
-                                            <p:cond delay="0"/>
-                                          </p:stCondLst>
-                                        </p:cTn>
-                                        <p:tgtEl>
-                                          <p:spTgt spid="3">
-                                            <p:txEl>
-                                              <p:pRg st="2" end="2"/>
-                                            </p:txEl>
-                                          </p:spTgt>
-                                        </p:tgtEl>
-                                        <p:attrNameLst>
-                                          <p:attrName>style.visibility</p:attrName>
-                                        </p:attrNameLst>
-                                      </p:cBhvr>
-                                      <p:to>
-                                        <p:strVal val="visible"/>
-                                      </p:to>
-                                    </p:set>
-                                  </p:childTnLst>
-                                </p:cTn>
-                              </p:par>
-                            </p:childTnLst>
-                          </p:cTn>
-                        </p:par>
-                      </p:childTnLst>
-                    </p:cTn>
-                  </p:par>
-                  <p:par>
-                    <p:cTn id="9" fill="hold">
-                      <p:stCondLst>
-                        <p:cond delay="indefinite"/>
-                      </p:stCondLst>
-                      <p:childTnLst>
-                        <p:par>
-                          <p:cTn id="10" fill="hold">
-                            <p:stCondLst>
-                              <p:cond delay="0"/>
-                            </p:stCondLst>
-                            <p:childTnLst>
-                              <p:par>
-                                <p:cTn id="11" presetID="1" presetClass="entr" presetSubtype="0" fill="hold" nodeType="clickEffect">
-                                  <p:stCondLst>
-                                    <p:cond delay="0"/>
-                                  </p:stCondLst>
-                                  <p:childTnLst>
-                                    <p:set>
-                                      <p:cBhvr>
-                                        <p:cTn id="12" dur="1" fill="hold">
-                                          <p:stCondLst>
-                                            <p:cond delay="0"/>
-                                          </p:stCondLst>
-                                        </p:cTn>
-                                        <p:tgtEl>
-                                          <p:spTgt spid="3">
-                                            <p:txEl>
-                                              <p:pRg st="3" end="3"/>
-                                            </p:txEl>
-                                          </p:spTgt>
-                                        </p:tgtEl>
-                                        <p:attrNameLst>
-                                          <p:attrName>style.visibility</p:attrName>
-                                        </p:attrNameLst>
-                                      </p:cBhvr>
-                                      <p:to>
-                                        <p:strVal val="visible"/>
-                                      </p:to>
-                                    </p:set>
-                                  </p:childTnLst>
-                                </p:cTn>
-                              </p:par>
-                            </p:childTnLst>
-                          </p:cTn>
-                        </p:par>
-                      </p:childTnLst>
-                    </p:cTn>
-                  </p:par>
-                  <p:par>
-                    <p:cTn id="13" fill="hold">
-                      <p:stCondLst>
-                        <p:cond delay="indefinite"/>
-                      </p:stCondLst>
-                      <p:childTnLst>
-                        <p:par>
-                          <p:cTn id="14" fill="hold">
-                            <p:stCondLst>
-                              <p:cond delay="0"/>
-                            </p:stCondLst>
-                            <p:childTnLst>
-                              <p:par>
-                                <p:cTn id="15" presetID="1" presetClass="entr" presetSubtype="0" fill="hold" nodeType="clickEffect">
-                                  <p:stCondLst>
-                                    <p:cond delay="0"/>
-                                  </p:stCondLst>
-                                  <p:childTnLst>
-                                    <p:set>
-                                      <p:cBhvr>
-                                        <p:cTn id="16" dur="1" fill="hold">
-                                          <p:stCondLst>
-                                            <p:cond delay="0"/>
-                                          </p:stCondLst>
-                                        </p:cTn>
-                                        <p:tgtEl>
-                                          <p:spTgt spid="3">
-                                            <p:txEl>
-                                              <p:pRg st="4" end="4"/>
-                                            </p:txEl>
-                                          </p:spTgt>
-                                        </p:tgtEl>
-                                        <p:attrNameLst>
-                                          <p:attrName>style.visibility</p:attrName>
-                                        </p:attrNameLst>
-                                      </p:cBhvr>
-                                      <p:to>
-                                        <p:strVal val="visible"/>
-                                      </p:to>
-                                    </p:set>
-                                  </p:childTnLst>
-                                </p:cTn>
-                              </p:par>
-                            </p:childTnLst>
-                          </p:cTn>
-                        </p:par>
-                      </p:childTnLst>
-                    </p:cTn>
-                  </p:par>
-                  <p:par>
-                    <p:cTn id="17" fill="hold">
-                      <p:stCondLst>
-                        <p:cond delay="indefinite"/>
-                      </p:stCondLst>
-                      <p:childTnLst>
-                        <p:par>
-                          <p:cTn id="18" fill="hold">
-                            <p:stCondLst>
-                              <p:cond delay="0"/>
-                            </p:stCondLst>
-                            <p:childTnLst>
-                              <p:par>
-                                <p:cTn id="19" presetID="1" presetClass="entr" presetSubtype="0" fill="hold" nodeType="clickEffect">
-                                  <p:stCondLst>
-                                    <p:cond delay="0"/>
-                                  </p:stCondLst>
-                                  <p:childTnLst>
-                                    <p:set>
-                                      <p:cBhvr>
-                                        <p:cTn id="20" dur="1" fill="hold">
-                                          <p:stCondLst>
-                                            <p:cond delay="0"/>
-                                          </p:stCondLst>
-                                        </p:cTn>
-                                        <p:tgtEl>
-                                          <p:spTgt spid="3">
-                                            <p:txEl>
-                                              <p:pRg st="6" end="6"/>
                                             </p:txEl>
                                           </p:spTgt>
                                         </p:tgtEl>
@@ -13657,6 +14158,438 @@
 </file>
 
 <file path=ppt/slides/slide20.xml><?xml version="1.0" encoding="utf-8"?>
+<p:sld xmlns:a="http://schemas.openxmlformats.org/drawingml/2006/main" xmlns:r="http://schemas.openxmlformats.org/officeDocument/2006/relationships" xmlns:p="http://schemas.openxmlformats.org/presentationml/2006/main">
+  <p:cSld>
+    <p:spTree>
+      <p:nvGrpSpPr>
+        <p:cNvPr id="1" name=""/>
+        <p:cNvGrpSpPr/>
+        <p:nvPr/>
+      </p:nvGrpSpPr>
+      <p:grpSpPr>
+        <a:xfrm>
+          <a:off x="0" y="0"/>
+          <a:ext cx="0" cy="0"/>
+          <a:chOff x="0" y="0"/>
+          <a:chExt cx="0" cy="0"/>
+        </a:xfrm>
+      </p:grpSpPr>
+      <p:sp>
+        <p:nvSpPr>
+          <p:cNvPr id="3" name="Content Placeholder 2">
+            <a:extLst>
+              <a:ext uri="{FF2B5EF4-FFF2-40B4-BE49-F238E27FC236}">
+                <a16:creationId xmlns:a16="http://schemas.microsoft.com/office/drawing/2014/main" id="{258E6AF3-7615-4BD1-878E-A94C93E98F90}"/>
+              </a:ext>
+            </a:extLst>
+          </p:cNvPr>
+          <p:cNvSpPr>
+            <a:spLocks noGrp="1"/>
+          </p:cNvSpPr>
+          <p:nvPr>
+            <p:ph idx="1"/>
+          </p:nvPr>
+        </p:nvSpPr>
+        <p:spPr>
+          <a:xfrm>
+            <a:off x="838200" y="1541417"/>
+            <a:ext cx="10515600" cy="4635546"/>
+          </a:xfrm>
+        </p:spPr>
+        <p:txBody>
+          <a:bodyPr>
+            <a:normAutofit lnSpcReduction="10000"/>
+          </a:bodyPr>
+          <a:lstStyle/>
+          <a:p>
+            <a:pPr marL="0" indent="0">
+              <a:buNone/>
+            </a:pPr>
+            <a:r>
+              <a:rPr lang="en-US" dirty="0"/>
+              <a:t>Schedule for live class meetings </a:t>
+            </a:r>
+          </a:p>
+          <a:p>
+            <a:r>
+              <a:rPr lang="en-US" dirty="0"/>
+              <a:t>Tuesdays and Thursdays – Lectures focused on theoretical foundations - 6:30-9:30 pm US Eastern Time</a:t>
+            </a:r>
+          </a:p>
+          <a:p>
+            <a:pPr lvl="1"/>
+            <a:r>
+              <a:rPr lang="en-US" dirty="0"/>
+              <a:t>Most lessons less than 3 hours</a:t>
+            </a:r>
+          </a:p>
+          <a:p>
+            <a:r>
+              <a:rPr lang="en-US" dirty="0"/>
+              <a:t>Mondays and Wednesdays – Section meeting to address questions, discuss code, background review – starting at 6:30 pm US Eastern Time  </a:t>
+            </a:r>
+          </a:p>
+          <a:p>
+            <a:r>
+              <a:rPr lang="en-US" dirty="0"/>
+              <a:t>One-on-one meetings can be held by arrangement</a:t>
+            </a:r>
+          </a:p>
+          <a:p>
+            <a:pPr marL="0" indent="0">
+              <a:buNone/>
+            </a:pPr>
+            <a:endParaRPr lang="en-US" dirty="0">
+              <a:solidFill>
+                <a:srgbClr val="C00000"/>
+              </a:solidFill>
+            </a:endParaRPr>
+          </a:p>
+          <a:p>
+            <a:pPr marL="0" indent="0">
+              <a:buNone/>
+            </a:pPr>
+            <a:r>
+              <a:rPr lang="en-US" dirty="0">
+                <a:solidFill>
+                  <a:srgbClr val="C00000"/>
+                </a:solidFill>
+              </a:rPr>
+              <a:t>All class meetings are recorded and available on-demand – See Class Recordings tab in Canvas</a:t>
+            </a:r>
+          </a:p>
+          <a:p>
+            <a:endParaRPr lang="en-US" b="1" dirty="0"/>
+          </a:p>
+        </p:txBody>
+      </p:sp>
+      <p:sp>
+        <p:nvSpPr>
+          <p:cNvPr id="6" name="Title 1">
+            <a:extLst>
+              <a:ext uri="{FF2B5EF4-FFF2-40B4-BE49-F238E27FC236}">
+                <a16:creationId xmlns:a16="http://schemas.microsoft.com/office/drawing/2014/main" id="{CD29F70F-B868-451B-A65D-8721F4C7A2D9}"/>
+              </a:ext>
+            </a:extLst>
+          </p:cNvPr>
+          <p:cNvSpPr txBox="1">
+            <a:spLocks/>
+          </p:cNvSpPr>
+          <p:nvPr/>
+        </p:nvSpPr>
+        <p:spPr>
+          <a:xfrm>
+            <a:off x="838200" y="-635"/>
+            <a:ext cx="10515600" cy="1325563"/>
+          </a:xfrm>
+          <a:prstGeom prst="rect">
+            <a:avLst/>
+          </a:prstGeom>
+        </p:spPr>
+        <p:txBody>
+          <a:bodyPr vert="horz" lIns="91440" tIns="45720" rIns="91440" bIns="45720" rtlCol="0" anchor="ctr">
+            <a:normAutofit/>
+          </a:bodyPr>
+          <a:lstStyle>
+            <a:lvl1pPr algn="l" defTabSz="914400" rtl="0" eaLnBrk="1" latinLnBrk="0" hangingPunct="1">
+              <a:lnSpc>
+                <a:spcPct val="90000"/>
+              </a:lnSpc>
+              <a:spcBef>
+                <a:spcPct val="0"/>
+              </a:spcBef>
+              <a:buNone/>
+              <a:defRPr sz="4400" kern="1200">
+                <a:solidFill>
+                  <a:schemeClr val="tx1"/>
+                </a:solidFill>
+                <a:latin typeface="+mj-lt"/>
+                <a:ea typeface="+mj-ea"/>
+                <a:cs typeface="+mj-cs"/>
+              </a:defRPr>
+            </a:lvl1pPr>
+          </a:lstStyle>
+          <a:p>
+            <a:r>
+              <a:rPr lang="en-US" dirty="0">
+                <a:latin typeface="+mn-lt"/>
+              </a:rPr>
+              <a:t>Schedule </a:t>
+            </a:r>
+          </a:p>
+        </p:txBody>
+      </p:sp>
+    </p:spTree>
+    <p:extLst>
+      <p:ext uri="{BB962C8B-B14F-4D97-AF65-F5344CB8AC3E}">
+        <p14:creationId xmlns:p14="http://schemas.microsoft.com/office/powerpoint/2010/main" val="177077999"/>
+      </p:ext>
+    </p:extLst>
+  </p:cSld>
+  <p:clrMapOvr>
+    <a:masterClrMapping/>
+  </p:clrMapOvr>
+  <p:timing>
+    <p:tnLst>
+      <p:par>
+        <p:cTn id="1" dur="indefinite" restart="never" nodeType="tmRoot">
+          <p:childTnLst>
+            <p:seq concurrent="1" nextAc="seek">
+              <p:cTn id="2" dur="indefinite" nodeType="mainSeq">
+                <p:childTnLst>
+                  <p:par>
+                    <p:cTn id="3" fill="hold">
+                      <p:stCondLst>
+                        <p:cond delay="indefinite"/>
+                      </p:stCondLst>
+                      <p:childTnLst>
+                        <p:par>
+                          <p:cTn id="4" fill="hold">
+                            <p:stCondLst>
+                              <p:cond delay="0"/>
+                            </p:stCondLst>
+                            <p:childTnLst>
+                              <p:par>
+                                <p:cTn id="5" presetID="1" presetClass="entr" presetSubtype="0" fill="hold" nodeType="clickEffect">
+                                  <p:stCondLst>
+                                    <p:cond delay="0"/>
+                                  </p:stCondLst>
+                                  <p:childTnLst>
+                                    <p:set>
+                                      <p:cBhvr>
+                                        <p:cTn id="6" dur="1" fill="hold">
+                                          <p:stCondLst>
+                                            <p:cond delay="0"/>
+                                          </p:stCondLst>
+                                        </p:cTn>
+                                        <p:tgtEl>
+                                          <p:spTgt spid="3">
+                                            <p:txEl>
+                                              <p:pRg st="1" end="1"/>
+                                            </p:txEl>
+                                          </p:spTgt>
+                                        </p:tgtEl>
+                                        <p:attrNameLst>
+                                          <p:attrName>style.visibility</p:attrName>
+                                        </p:attrNameLst>
+                                      </p:cBhvr>
+                                      <p:to>
+                                        <p:strVal val="visible"/>
+                                      </p:to>
+                                    </p:set>
+                                  </p:childTnLst>
+                                </p:cTn>
+                              </p:par>
+                              <p:par>
+                                <p:cTn id="7" presetID="1" presetClass="entr" presetSubtype="0" fill="hold" nodeType="withEffect">
+                                  <p:stCondLst>
+                                    <p:cond delay="0"/>
+                                  </p:stCondLst>
+                                  <p:childTnLst>
+                                    <p:set>
+                                      <p:cBhvr>
+                                        <p:cTn id="8" dur="1" fill="hold">
+                                          <p:stCondLst>
+                                            <p:cond delay="0"/>
+                                          </p:stCondLst>
+                                        </p:cTn>
+                                        <p:tgtEl>
+                                          <p:spTgt spid="3">
+                                            <p:txEl>
+                                              <p:pRg st="2" end="2"/>
+                                            </p:txEl>
+                                          </p:spTgt>
+                                        </p:tgtEl>
+                                        <p:attrNameLst>
+                                          <p:attrName>style.visibility</p:attrName>
+                                        </p:attrNameLst>
+                                      </p:cBhvr>
+                                      <p:to>
+                                        <p:strVal val="visible"/>
+                                      </p:to>
+                                    </p:set>
+                                  </p:childTnLst>
+                                </p:cTn>
+                              </p:par>
+                            </p:childTnLst>
+                          </p:cTn>
+                        </p:par>
+                      </p:childTnLst>
+                    </p:cTn>
+                  </p:par>
+                  <p:par>
+                    <p:cTn id="9" fill="hold">
+                      <p:stCondLst>
+                        <p:cond delay="indefinite"/>
+                      </p:stCondLst>
+                      <p:childTnLst>
+                        <p:par>
+                          <p:cTn id="10" fill="hold">
+                            <p:stCondLst>
+                              <p:cond delay="0"/>
+                            </p:stCondLst>
+                            <p:childTnLst>
+                              <p:par>
+                                <p:cTn id="11" presetID="1" presetClass="entr" presetSubtype="0" fill="hold" nodeType="clickEffect">
+                                  <p:stCondLst>
+                                    <p:cond delay="0"/>
+                                  </p:stCondLst>
+                                  <p:childTnLst>
+                                    <p:set>
+                                      <p:cBhvr>
+                                        <p:cTn id="12" dur="1" fill="hold">
+                                          <p:stCondLst>
+                                            <p:cond delay="0"/>
+                                          </p:stCondLst>
+                                        </p:cTn>
+                                        <p:tgtEl>
+                                          <p:spTgt spid="3">
+                                            <p:txEl>
+                                              <p:pRg st="3" end="3"/>
+                                            </p:txEl>
+                                          </p:spTgt>
+                                        </p:tgtEl>
+                                        <p:attrNameLst>
+                                          <p:attrName>style.visibility</p:attrName>
+                                        </p:attrNameLst>
+                                      </p:cBhvr>
+                                      <p:to>
+                                        <p:strVal val="visible"/>
+                                      </p:to>
+                                    </p:set>
+                                  </p:childTnLst>
+                                </p:cTn>
+                              </p:par>
+                            </p:childTnLst>
+                          </p:cTn>
+                        </p:par>
+                      </p:childTnLst>
+                    </p:cTn>
+                  </p:par>
+                  <p:par>
+                    <p:cTn id="13" fill="hold">
+                      <p:stCondLst>
+                        <p:cond delay="indefinite"/>
+                      </p:stCondLst>
+                      <p:childTnLst>
+                        <p:par>
+                          <p:cTn id="14" fill="hold">
+                            <p:stCondLst>
+                              <p:cond delay="0"/>
+                            </p:stCondLst>
+                            <p:childTnLst>
+                              <p:par>
+                                <p:cTn id="15" presetID="1" presetClass="entr" presetSubtype="0" fill="hold" nodeType="clickEffect">
+                                  <p:stCondLst>
+                                    <p:cond delay="0"/>
+                                  </p:stCondLst>
+                                  <p:childTnLst>
+                                    <p:set>
+                                      <p:cBhvr>
+                                        <p:cTn id="16" dur="1" fill="hold">
+                                          <p:stCondLst>
+                                            <p:cond delay="0"/>
+                                          </p:stCondLst>
+                                        </p:cTn>
+                                        <p:tgtEl>
+                                          <p:spTgt spid="3">
+                                            <p:txEl>
+                                              <p:pRg st="4" end="4"/>
+                                            </p:txEl>
+                                          </p:spTgt>
+                                        </p:tgtEl>
+                                        <p:attrNameLst>
+                                          <p:attrName>style.visibility</p:attrName>
+                                        </p:attrNameLst>
+                                      </p:cBhvr>
+                                      <p:to>
+                                        <p:strVal val="visible"/>
+                                      </p:to>
+                                    </p:set>
+                                  </p:childTnLst>
+                                </p:cTn>
+                              </p:par>
+                            </p:childTnLst>
+                          </p:cTn>
+                        </p:par>
+                      </p:childTnLst>
+                    </p:cTn>
+                  </p:par>
+                  <p:par>
+                    <p:cTn id="17" fill="hold">
+                      <p:stCondLst>
+                        <p:cond delay="indefinite"/>
+                      </p:stCondLst>
+                      <p:childTnLst>
+                        <p:par>
+                          <p:cTn id="18" fill="hold">
+                            <p:stCondLst>
+                              <p:cond delay="0"/>
+                            </p:stCondLst>
+                            <p:childTnLst>
+                              <p:par>
+                                <p:cTn id="19" presetID="1" presetClass="entr" presetSubtype="0" fill="hold" nodeType="clickEffect">
+                                  <p:stCondLst>
+                                    <p:cond delay="0"/>
+                                  </p:stCondLst>
+                                  <p:childTnLst>
+                                    <p:set>
+                                      <p:cBhvr>
+                                        <p:cTn id="20" dur="1" fill="hold">
+                                          <p:stCondLst>
+                                            <p:cond delay="0"/>
+                                          </p:stCondLst>
+                                        </p:cTn>
+                                        <p:tgtEl>
+                                          <p:spTgt spid="3">
+                                            <p:txEl>
+                                              <p:pRg st="6" end="6"/>
+                                            </p:txEl>
+                                          </p:spTgt>
+                                        </p:tgtEl>
+                                        <p:attrNameLst>
+                                          <p:attrName>style.visibility</p:attrName>
+                                        </p:attrNameLst>
+                                      </p:cBhvr>
+                                      <p:to>
+                                        <p:strVal val="visible"/>
+                                      </p:to>
+                                    </p:set>
+                                  </p:childTnLst>
+                                </p:cTn>
+                              </p:par>
+                            </p:childTnLst>
+                          </p:cTn>
+                        </p:par>
+                      </p:childTnLst>
+                    </p:cTn>
+                  </p:par>
+                </p:childTnLst>
+              </p:cTn>
+              <p:prevCondLst>
+                <p:cond evt="onPrev" delay="0">
+                  <p:tgtEl>
+                    <p:sldTgt/>
+                  </p:tgtEl>
+                </p:cond>
+              </p:prevCondLst>
+              <p:nextCondLst>
+                <p:cond evt="onNext" delay="0">
+                  <p:tgtEl>
+                    <p:sldTgt/>
+                  </p:tgtEl>
+                </p:cond>
+              </p:nextCondLst>
+            </p:seq>
+          </p:childTnLst>
+        </p:cTn>
+      </p:par>
+    </p:tnLst>
+  </p:timing>
+</p:sld>
+</file>
+
+<file path=ppt/slides/slide21.xml><?xml version="1.0" encoding="utf-8"?>
 <p:sld xmlns:a="http://schemas.openxmlformats.org/drawingml/2006/main" xmlns:r="http://schemas.openxmlformats.org/officeDocument/2006/relationships" xmlns:p="http://schemas.openxmlformats.org/presentationml/2006/main">
   <p:cSld>
     <p:spTree>
@@ -14208,7 +15141,7 @@
 </p:sld>
 </file>
 
-<file path=ppt/slides/slide21.xml><?xml version="1.0" encoding="utf-8"?>
+<file path=ppt/slides/slide22.xml><?xml version="1.0" encoding="utf-8"?>
 <p:sld xmlns:a="http://schemas.openxmlformats.org/drawingml/2006/main" xmlns:r="http://schemas.openxmlformats.org/officeDocument/2006/relationships" xmlns:p="http://schemas.openxmlformats.org/presentationml/2006/main">
   <p:cSld>
     <p:spTree>
@@ -14359,7 +15292,7 @@
 </p:sld>
 </file>
 
-<file path=ppt/slides/slide22.xml><?xml version="1.0" encoding="utf-8"?>
+<file path=ppt/slides/slide23.xml><?xml version="1.0" encoding="utf-8"?>
 <p:sld xmlns:a="http://schemas.openxmlformats.org/drawingml/2006/main" xmlns:r="http://schemas.openxmlformats.org/officeDocument/2006/relationships" xmlns:p="http://schemas.openxmlformats.org/presentationml/2006/main">
   <p:cSld>
     <p:spTree>
@@ -14436,7 +15369,7 @@
             <a:pPr lvl="1"/>
             <a:r>
               <a:rPr lang="en-US" dirty="0"/>
-              <a:t>Expect 9 assignments</a:t>
+              <a:t>Expect 8 assignments</a:t>
             </a:r>
           </a:p>
           <a:p>
@@ -14527,467 +15460,6 @@
   <p:clrMapOvr>
     <a:masterClrMapping/>
   </p:clrMapOvr>
-</p:sld>
-</file>
-
-<file path=ppt/slides/slide23.xml><?xml version="1.0" encoding="utf-8"?>
-<p:sld xmlns:a="http://schemas.openxmlformats.org/drawingml/2006/main" xmlns:r="http://schemas.openxmlformats.org/officeDocument/2006/relationships" xmlns:p="http://schemas.openxmlformats.org/presentationml/2006/main">
-  <p:cSld>
-    <p:spTree>
-      <p:nvGrpSpPr>
-        <p:cNvPr id="1" name=""/>
-        <p:cNvGrpSpPr/>
-        <p:nvPr/>
-      </p:nvGrpSpPr>
-      <p:grpSpPr>
-        <a:xfrm>
-          <a:off x="0" y="0"/>
-          <a:ext cx="0" cy="0"/>
-          <a:chOff x="0" y="0"/>
-          <a:chExt cx="0" cy="0"/>
-        </a:xfrm>
-      </p:grpSpPr>
-      <p:sp>
-        <p:nvSpPr>
-          <p:cNvPr id="3" name="Content Placeholder 2">
-            <a:extLst>
-              <a:ext uri="{FF2B5EF4-FFF2-40B4-BE49-F238E27FC236}">
-                <a16:creationId xmlns:a16="http://schemas.microsoft.com/office/drawing/2014/main" id="{258E6AF3-7615-4BD1-878E-A94C93E98F90}"/>
-              </a:ext>
-            </a:extLst>
-          </p:cNvPr>
-          <p:cNvSpPr>
-            <a:spLocks noGrp="1"/>
-          </p:cNvSpPr>
-          <p:nvPr>
-            <p:ph idx="1"/>
-          </p:nvPr>
-        </p:nvSpPr>
-        <p:spPr>
-          <a:xfrm>
-            <a:off x="838200" y="1324927"/>
-            <a:ext cx="10515600" cy="5311004"/>
-          </a:xfrm>
-        </p:spPr>
-        <p:txBody>
-          <a:bodyPr>
-            <a:normAutofit/>
-          </a:bodyPr>
-          <a:lstStyle/>
-          <a:p>
-            <a:pPr marL="0" indent="0">
-              <a:buNone/>
-            </a:pPr>
-            <a:r>
-              <a:rPr lang="en-US" dirty="0"/>
-              <a:t>Timely release of assignment solutions is an important part of the learning process </a:t>
-            </a:r>
-          </a:p>
-          <a:p>
-            <a:r>
-              <a:rPr lang="en-US" b="1" dirty="0">
-                <a:solidFill>
-                  <a:srgbClr val="C00000"/>
-                </a:solidFill>
-              </a:rPr>
-              <a:t>Harvard Summer School moves at an intense pace!!</a:t>
-            </a:r>
-          </a:p>
-          <a:p>
-            <a:r>
-              <a:rPr lang="en-US" dirty="0"/>
-              <a:t>Late assignment policy:   </a:t>
-            </a:r>
-          </a:p>
-          <a:p>
-            <a:pPr lvl="1"/>
-            <a:r>
-              <a:rPr lang="en-US" dirty="0"/>
-              <a:t>Up to one day late - no penalty  </a:t>
-            </a:r>
-          </a:p>
-          <a:p>
-            <a:pPr lvl="1"/>
-            <a:r>
-              <a:rPr lang="en-US" dirty="0"/>
-              <a:t>Up to 2 days late - less 10% </a:t>
-            </a:r>
-          </a:p>
-          <a:p>
-            <a:pPr lvl="1"/>
-            <a:r>
-              <a:rPr lang="en-US" dirty="0"/>
-              <a:t>Up to 3 days late – less 20%</a:t>
-            </a:r>
-          </a:p>
-          <a:p>
-            <a:pPr lvl="1"/>
-            <a:r>
-              <a:rPr lang="en-US" dirty="0"/>
-              <a:t>More than 3 days late - no credit   </a:t>
-            </a:r>
-          </a:p>
-          <a:p>
-            <a:r>
-              <a:rPr lang="en-US" b="1" dirty="0">
-                <a:solidFill>
-                  <a:srgbClr val="C00000"/>
-                </a:solidFill>
-              </a:rPr>
-              <a:t>Make sure you turn in work on time!</a:t>
-            </a:r>
-          </a:p>
-        </p:txBody>
-      </p:sp>
-      <p:sp>
-        <p:nvSpPr>
-          <p:cNvPr id="6" name="Title 1">
-            <a:extLst>
-              <a:ext uri="{FF2B5EF4-FFF2-40B4-BE49-F238E27FC236}">
-                <a16:creationId xmlns:a16="http://schemas.microsoft.com/office/drawing/2014/main" id="{CD29F70F-B868-451B-A65D-8721F4C7A2D9}"/>
-              </a:ext>
-            </a:extLst>
-          </p:cNvPr>
-          <p:cNvSpPr txBox="1">
-            <a:spLocks/>
-          </p:cNvSpPr>
-          <p:nvPr/>
-        </p:nvSpPr>
-        <p:spPr>
-          <a:xfrm>
-            <a:off x="838200" y="-635"/>
-            <a:ext cx="10515600" cy="1325563"/>
-          </a:xfrm>
-          <a:prstGeom prst="rect">
-            <a:avLst/>
-          </a:prstGeom>
-        </p:spPr>
-        <p:txBody>
-          <a:bodyPr vert="horz" lIns="91440" tIns="45720" rIns="91440" bIns="45720" rtlCol="0" anchor="ctr">
-            <a:normAutofit/>
-          </a:bodyPr>
-          <a:lstStyle>
-            <a:lvl1pPr algn="l" defTabSz="914400" rtl="0" eaLnBrk="1" latinLnBrk="0" hangingPunct="1">
-              <a:lnSpc>
-                <a:spcPct val="90000"/>
-              </a:lnSpc>
-              <a:spcBef>
-                <a:spcPct val="0"/>
-              </a:spcBef>
-              <a:buNone/>
-              <a:defRPr sz="4400" kern="1200">
-                <a:solidFill>
-                  <a:schemeClr val="tx1"/>
-                </a:solidFill>
-                <a:latin typeface="+mj-lt"/>
-                <a:ea typeface="+mj-ea"/>
-                <a:cs typeface="+mj-cs"/>
-              </a:defRPr>
-            </a:lvl1pPr>
-          </a:lstStyle>
-          <a:p>
-            <a:r>
-              <a:rPr lang="en-US" dirty="0">
-                <a:latin typeface="+mn-lt"/>
-              </a:rPr>
-              <a:t>Late Assignment Policy</a:t>
-            </a:r>
-          </a:p>
-        </p:txBody>
-      </p:sp>
-    </p:spTree>
-    <p:extLst>
-      <p:ext uri="{BB962C8B-B14F-4D97-AF65-F5344CB8AC3E}">
-        <p14:creationId xmlns:p14="http://schemas.microsoft.com/office/powerpoint/2010/main" val="2940685853"/>
-      </p:ext>
-    </p:extLst>
-  </p:cSld>
-  <p:clrMapOvr>
-    <a:masterClrMapping/>
-  </p:clrMapOvr>
-  <p:timing>
-    <p:tnLst>
-      <p:par>
-        <p:cTn id="1" dur="indefinite" restart="never" nodeType="tmRoot">
-          <p:childTnLst>
-            <p:seq concurrent="1" nextAc="seek">
-              <p:cTn id="2" dur="indefinite" nodeType="mainSeq">
-                <p:childTnLst>
-                  <p:par>
-                    <p:cTn id="3" fill="hold">
-                      <p:stCondLst>
-                        <p:cond delay="indefinite"/>
-                      </p:stCondLst>
-                      <p:childTnLst>
-                        <p:par>
-                          <p:cTn id="4" fill="hold">
-                            <p:stCondLst>
-                              <p:cond delay="0"/>
-                            </p:stCondLst>
-                            <p:childTnLst>
-                              <p:par>
-                                <p:cTn id="5" presetID="1" presetClass="entr" presetSubtype="0" fill="hold" nodeType="clickEffect">
-                                  <p:stCondLst>
-                                    <p:cond delay="0"/>
-                                  </p:stCondLst>
-                                  <p:childTnLst>
-                                    <p:set>
-                                      <p:cBhvr>
-                                        <p:cTn id="6" dur="1" fill="hold">
-                                          <p:stCondLst>
-                                            <p:cond delay="0"/>
-                                          </p:stCondLst>
-                                        </p:cTn>
-                                        <p:tgtEl>
-                                          <p:spTgt spid="3">
-                                            <p:txEl>
-                                              <p:pRg st="1" end="1"/>
-                                            </p:txEl>
-                                          </p:spTgt>
-                                        </p:tgtEl>
-                                        <p:attrNameLst>
-                                          <p:attrName>style.visibility</p:attrName>
-                                        </p:attrNameLst>
-                                      </p:cBhvr>
-                                      <p:to>
-                                        <p:strVal val="visible"/>
-                                      </p:to>
-                                    </p:set>
-                                  </p:childTnLst>
-                                </p:cTn>
-                              </p:par>
-                            </p:childTnLst>
-                          </p:cTn>
-                        </p:par>
-                      </p:childTnLst>
-                    </p:cTn>
-                  </p:par>
-                  <p:par>
-                    <p:cTn id="7" fill="hold">
-                      <p:stCondLst>
-                        <p:cond delay="indefinite"/>
-                      </p:stCondLst>
-                      <p:childTnLst>
-                        <p:par>
-                          <p:cTn id="8" fill="hold">
-                            <p:stCondLst>
-                              <p:cond delay="0"/>
-                            </p:stCondLst>
-                            <p:childTnLst>
-                              <p:par>
-                                <p:cTn id="9" presetID="1" presetClass="entr" presetSubtype="0" fill="hold" nodeType="clickEffect">
-                                  <p:stCondLst>
-                                    <p:cond delay="0"/>
-                                  </p:stCondLst>
-                                  <p:childTnLst>
-                                    <p:set>
-                                      <p:cBhvr>
-                                        <p:cTn id="10" dur="1" fill="hold">
-                                          <p:stCondLst>
-                                            <p:cond delay="0"/>
-                                          </p:stCondLst>
-                                        </p:cTn>
-                                        <p:tgtEl>
-                                          <p:spTgt spid="3">
-                                            <p:txEl>
-                                              <p:pRg st="2" end="2"/>
-                                            </p:txEl>
-                                          </p:spTgt>
-                                        </p:tgtEl>
-                                        <p:attrNameLst>
-                                          <p:attrName>style.visibility</p:attrName>
-                                        </p:attrNameLst>
-                                      </p:cBhvr>
-                                      <p:to>
-                                        <p:strVal val="visible"/>
-                                      </p:to>
-                                    </p:set>
-                                  </p:childTnLst>
-                                </p:cTn>
-                              </p:par>
-                              <p:par>
-                                <p:cTn id="11" presetID="1" presetClass="entr" presetSubtype="0" fill="hold" nodeType="withEffect">
-                                  <p:stCondLst>
-                                    <p:cond delay="0"/>
-                                  </p:stCondLst>
-                                  <p:childTnLst>
-                                    <p:set>
-                                      <p:cBhvr>
-                                        <p:cTn id="12" dur="1" fill="hold">
-                                          <p:stCondLst>
-                                            <p:cond delay="0"/>
-                                          </p:stCondLst>
-                                        </p:cTn>
-                                        <p:tgtEl>
-                                          <p:spTgt spid="3">
-                                            <p:txEl>
-                                              <p:pRg st="3" end="3"/>
-                                            </p:txEl>
-                                          </p:spTgt>
-                                        </p:tgtEl>
-                                        <p:attrNameLst>
-                                          <p:attrName>style.visibility</p:attrName>
-                                        </p:attrNameLst>
-                                      </p:cBhvr>
-                                      <p:to>
-                                        <p:strVal val="visible"/>
-                                      </p:to>
-                                    </p:set>
-                                  </p:childTnLst>
-                                </p:cTn>
-                              </p:par>
-                              <p:par>
-                                <p:cTn id="13" presetID="1" presetClass="entr" presetSubtype="0" fill="hold" nodeType="withEffect">
-                                  <p:stCondLst>
-                                    <p:cond delay="0"/>
-                                  </p:stCondLst>
-                                  <p:childTnLst>
-                                    <p:set>
-                                      <p:cBhvr>
-                                        <p:cTn id="14" dur="1" fill="hold">
-                                          <p:stCondLst>
-                                            <p:cond delay="0"/>
-                                          </p:stCondLst>
-                                        </p:cTn>
-                                        <p:tgtEl>
-                                          <p:spTgt spid="3">
-                                            <p:txEl>
-                                              <p:pRg st="4" end="4"/>
-                                            </p:txEl>
-                                          </p:spTgt>
-                                        </p:tgtEl>
-                                        <p:attrNameLst>
-                                          <p:attrName>style.visibility</p:attrName>
-                                        </p:attrNameLst>
-                                      </p:cBhvr>
-                                      <p:to>
-                                        <p:strVal val="visible"/>
-                                      </p:to>
-                                    </p:set>
-                                  </p:childTnLst>
-                                </p:cTn>
-                              </p:par>
-                              <p:par>
-                                <p:cTn id="15" presetID="1" presetClass="entr" presetSubtype="0" fill="hold" nodeType="withEffect">
-                                  <p:stCondLst>
-                                    <p:cond delay="0"/>
-                                  </p:stCondLst>
-                                  <p:childTnLst>
-                                    <p:set>
-                                      <p:cBhvr>
-                                        <p:cTn id="16" dur="1" fill="hold">
-                                          <p:stCondLst>
-                                            <p:cond delay="0"/>
-                                          </p:stCondLst>
-                                        </p:cTn>
-                                        <p:tgtEl>
-                                          <p:spTgt spid="3">
-                                            <p:txEl>
-     